--- a/docs/manager-recap/Recap-Koji-Manager.pptx
+++ b/docs/manager-recap/Recap-Koji-Manager.pptx
@@ -31,9 +31,15 @@
     <p:sldId id="279" r:id="rId25"/>
     <p:sldId id="280" r:id="rId26"/>
     <p:sldId id="281" r:id="rId27"/>
+    <p:sldId id="282" r:id="rId28"/>
+    <p:sldId id="283" r:id="rId29"/>
+    <p:sldId id="284" r:id="rId30"/>
+    <p:sldId id="285" r:id="rId31"/>
+    <p:sldId id="286" r:id="rId32"/>
+    <p:sldId id="287" r:id="rId33"/>
   </p:sldIdLst>
   <p:notesMasterIdLst>
-    <p:notesMasterId r:id="rId28"/>
+    <p:notesMasterId r:id="rId34"/>
   </p:notesMasterIdLst>
   <p:sldSz cx="12191695" cy="6858000"/>
   <p:notesSz cx="6858000" cy="12191695"/>
@@ -2153,6 +2159,270 @@
 </p:notes>
 </file>
 
+<file path=ppt/notesSlides/notesSlide27.xml><?xml version="1.0" encoding="utf-8"?>
+<p:notes xmlns:a="http://schemas.openxmlformats.org/drawingml/2006/main" xmlns:r="http://schemas.openxmlformats.org/officeDocument/2006/relationships" xmlns:p="http://schemas.openxmlformats.org/presentationml/2006/main">
+  <p:cSld>
+    <p:spTree>
+      <p:nvGrpSpPr>
+        <p:cNvPr id="1" name=""/>
+        <p:cNvGrpSpPr/>
+        <p:nvPr/>
+      </p:nvGrpSpPr>
+      <p:grpSpPr>
+        <a:xfrm>
+          <a:off x="0" y="0"/>
+          <a:ext cx="0" cy="0"/>
+          <a:chOff x="0" y="0"/>
+          <a:chExt cx="0" cy="0"/>
+        </a:xfrm>
+      </p:grpSpPr>
+      <p:sp>
+        <p:nvSpPr>
+          <p:cNvPr id="2" name="Slide Image Placeholder 1"/>
+          <p:cNvSpPr>
+            <a:spLocks noGrp="1" noRot="1" noChangeAspect="1"/>
+          </p:cNvSpPr>
+          <p:nvPr>
+            <p:ph type="sldImg"/>
+          </p:nvPr>
+        </p:nvSpPr>
+        <p:spPr/>
+      </p:sp>
+      <p:sp>
+        <p:nvSpPr>
+          <p:cNvPr id="3" name="Notes Placeholder 2"/>
+          <p:cNvSpPr>
+            <a:spLocks noGrp="1"/>
+          </p:cNvSpPr>
+          <p:nvPr>
+            <p:ph type="body" idx="1"/>
+          </p:nvPr>
+        </p:nvSpPr>
+        <p:spPr/>
+        <p:txBody>
+          <a:bodyPr/>
+          <a:lstStyle/>
+          <a:p>
+            <a:r>
+              <a:rPr lang="en-US" dirty="0"/>
+              <a:t/>
+            </a:r>
+            <a:endParaRPr lang="en-US" dirty="0"/>
+          </a:p>
+        </p:txBody>
+      </p:sp>
+      <p:sp>
+        <p:nvSpPr>
+          <p:cNvPr id="4" name="Slide Number Placeholder 3"/>
+          <p:cNvSpPr>
+            <a:spLocks noGrp="1"/>
+          </p:cNvSpPr>
+          <p:nvPr>
+            <p:ph type="sldNum" sz="quarter" idx="10"/>
+          </p:nvPr>
+        </p:nvSpPr>
+        <p:spPr/>
+        <p:txBody>
+          <a:bodyPr/>
+          <a:lstStyle/>
+          <a:p>
+            <a:fld id="{F7021451-1387-4CA6-816F-3879F97B5CBC}" type="slidenum">
+              <a:rPr lang="en-US"/>
+              <a:t>27</a:t>
+            </a:fld>
+            <a:endParaRPr lang="en-US"/>
+          </a:p>
+        </p:txBody>
+      </p:sp>
+    </p:spTree>
+    <p:extLst>
+      <p:ext uri="{BB962C8B-B14F-4D97-AF65-F5344CB8AC3E}">
+        <p14:creationId xmlns:p14="http://schemas.microsoft.com/office/powerpoint/2010/main" val="1024086991"/>
+      </p:ext>
+    </p:extLst>
+  </p:cSld>
+  <p:clrMapOvr>
+    <a:masterClrMapping/>
+  </p:clrMapOvr>
+</p:notes>
+</file>
+
+<file path=ppt/notesSlides/notesSlide28.xml><?xml version="1.0" encoding="utf-8"?>
+<p:notes xmlns:a="http://schemas.openxmlformats.org/drawingml/2006/main" xmlns:r="http://schemas.openxmlformats.org/officeDocument/2006/relationships" xmlns:p="http://schemas.openxmlformats.org/presentationml/2006/main">
+  <p:cSld>
+    <p:spTree>
+      <p:nvGrpSpPr>
+        <p:cNvPr id="1" name=""/>
+        <p:cNvGrpSpPr/>
+        <p:nvPr/>
+      </p:nvGrpSpPr>
+      <p:grpSpPr>
+        <a:xfrm>
+          <a:off x="0" y="0"/>
+          <a:ext cx="0" cy="0"/>
+          <a:chOff x="0" y="0"/>
+          <a:chExt cx="0" cy="0"/>
+        </a:xfrm>
+      </p:grpSpPr>
+      <p:sp>
+        <p:nvSpPr>
+          <p:cNvPr id="2" name="Slide Image Placeholder 1"/>
+          <p:cNvSpPr>
+            <a:spLocks noGrp="1" noRot="1" noChangeAspect="1"/>
+          </p:cNvSpPr>
+          <p:nvPr>
+            <p:ph type="sldImg"/>
+          </p:nvPr>
+        </p:nvSpPr>
+        <p:spPr/>
+      </p:sp>
+      <p:sp>
+        <p:nvSpPr>
+          <p:cNvPr id="3" name="Notes Placeholder 2"/>
+          <p:cNvSpPr>
+            <a:spLocks noGrp="1"/>
+          </p:cNvSpPr>
+          <p:nvPr>
+            <p:ph type="body" idx="1"/>
+          </p:nvPr>
+        </p:nvSpPr>
+        <p:spPr/>
+        <p:txBody>
+          <a:bodyPr/>
+          <a:lstStyle/>
+          <a:p>
+            <a:r>
+              <a:rPr lang="en-US" dirty="0"/>
+              <a:t/>
+            </a:r>
+            <a:endParaRPr lang="en-US" dirty="0"/>
+          </a:p>
+        </p:txBody>
+      </p:sp>
+      <p:sp>
+        <p:nvSpPr>
+          <p:cNvPr id="4" name="Slide Number Placeholder 3"/>
+          <p:cNvSpPr>
+            <a:spLocks noGrp="1"/>
+          </p:cNvSpPr>
+          <p:nvPr>
+            <p:ph type="sldNum" sz="quarter" idx="10"/>
+          </p:nvPr>
+        </p:nvSpPr>
+        <p:spPr/>
+        <p:txBody>
+          <a:bodyPr/>
+          <a:lstStyle/>
+          <a:p>
+            <a:fld id="{F7021451-1387-4CA6-816F-3879F97B5CBC}" type="slidenum">
+              <a:rPr lang="en-US"/>
+              <a:t>28</a:t>
+            </a:fld>
+            <a:endParaRPr lang="en-US"/>
+          </a:p>
+        </p:txBody>
+      </p:sp>
+    </p:spTree>
+    <p:extLst>
+      <p:ext uri="{BB962C8B-B14F-4D97-AF65-F5344CB8AC3E}">
+        <p14:creationId xmlns:p14="http://schemas.microsoft.com/office/powerpoint/2010/main" val="1024086991"/>
+      </p:ext>
+    </p:extLst>
+  </p:cSld>
+  <p:clrMapOvr>
+    <a:masterClrMapping/>
+  </p:clrMapOvr>
+</p:notes>
+</file>
+
+<file path=ppt/notesSlides/notesSlide29.xml><?xml version="1.0" encoding="utf-8"?>
+<p:notes xmlns:a="http://schemas.openxmlformats.org/drawingml/2006/main" xmlns:r="http://schemas.openxmlformats.org/officeDocument/2006/relationships" xmlns:p="http://schemas.openxmlformats.org/presentationml/2006/main">
+  <p:cSld>
+    <p:spTree>
+      <p:nvGrpSpPr>
+        <p:cNvPr id="1" name=""/>
+        <p:cNvGrpSpPr/>
+        <p:nvPr/>
+      </p:nvGrpSpPr>
+      <p:grpSpPr>
+        <a:xfrm>
+          <a:off x="0" y="0"/>
+          <a:ext cx="0" cy="0"/>
+          <a:chOff x="0" y="0"/>
+          <a:chExt cx="0" cy="0"/>
+        </a:xfrm>
+      </p:grpSpPr>
+      <p:sp>
+        <p:nvSpPr>
+          <p:cNvPr id="2" name="Slide Image Placeholder 1"/>
+          <p:cNvSpPr>
+            <a:spLocks noGrp="1" noRot="1" noChangeAspect="1"/>
+          </p:cNvSpPr>
+          <p:nvPr>
+            <p:ph type="sldImg"/>
+          </p:nvPr>
+        </p:nvSpPr>
+        <p:spPr/>
+      </p:sp>
+      <p:sp>
+        <p:nvSpPr>
+          <p:cNvPr id="3" name="Notes Placeholder 2"/>
+          <p:cNvSpPr>
+            <a:spLocks noGrp="1"/>
+          </p:cNvSpPr>
+          <p:nvPr>
+            <p:ph type="body" idx="1"/>
+          </p:nvPr>
+        </p:nvSpPr>
+        <p:spPr/>
+        <p:txBody>
+          <a:bodyPr/>
+          <a:lstStyle/>
+          <a:p>
+            <a:r>
+              <a:rPr lang="en-US" dirty="0"/>
+              <a:t/>
+            </a:r>
+            <a:endParaRPr lang="en-US" dirty="0"/>
+          </a:p>
+        </p:txBody>
+      </p:sp>
+      <p:sp>
+        <p:nvSpPr>
+          <p:cNvPr id="4" name="Slide Number Placeholder 3"/>
+          <p:cNvSpPr>
+            <a:spLocks noGrp="1"/>
+          </p:cNvSpPr>
+          <p:nvPr>
+            <p:ph type="sldNum" sz="quarter" idx="10"/>
+          </p:nvPr>
+        </p:nvSpPr>
+        <p:spPr/>
+        <p:txBody>
+          <a:bodyPr/>
+          <a:lstStyle/>
+          <a:p>
+            <a:fld id="{F7021451-1387-4CA6-816F-3879F97B5CBC}" type="slidenum">
+              <a:rPr lang="en-US"/>
+              <a:t>29</a:t>
+            </a:fld>
+            <a:endParaRPr lang="en-US"/>
+          </a:p>
+        </p:txBody>
+      </p:sp>
+    </p:spTree>
+    <p:extLst>
+      <p:ext uri="{BB962C8B-B14F-4D97-AF65-F5344CB8AC3E}">
+        <p14:creationId xmlns:p14="http://schemas.microsoft.com/office/powerpoint/2010/main" val="1024086991"/>
+      </p:ext>
+    </p:extLst>
+  </p:cSld>
+  <p:clrMapOvr>
+    <a:masterClrMapping/>
+  </p:clrMapOvr>
+</p:notes>
+</file>
+
 <file path=ppt/notesSlides/notesSlide3.xml><?xml version="1.0" encoding="utf-8"?>
 <p:notes xmlns:a="http://schemas.openxmlformats.org/drawingml/2006/main" xmlns:r="http://schemas.openxmlformats.org/officeDocument/2006/relationships" xmlns:p="http://schemas.openxmlformats.org/presentationml/2006/main">
   <p:cSld>
@@ -2223,6 +2493,270 @@
             <a:fld id="{F7021451-1387-4CA6-816F-3879F97B5CBC}" type="slidenum">
               <a:rPr lang="en-US"/>
               <a:t>3</a:t>
+            </a:fld>
+            <a:endParaRPr lang="en-US"/>
+          </a:p>
+        </p:txBody>
+      </p:sp>
+    </p:spTree>
+    <p:extLst>
+      <p:ext uri="{BB962C8B-B14F-4D97-AF65-F5344CB8AC3E}">
+        <p14:creationId xmlns:p14="http://schemas.microsoft.com/office/powerpoint/2010/main" val="1024086991"/>
+      </p:ext>
+    </p:extLst>
+  </p:cSld>
+  <p:clrMapOvr>
+    <a:masterClrMapping/>
+  </p:clrMapOvr>
+</p:notes>
+</file>
+
+<file path=ppt/notesSlides/notesSlide30.xml><?xml version="1.0" encoding="utf-8"?>
+<p:notes xmlns:a="http://schemas.openxmlformats.org/drawingml/2006/main" xmlns:r="http://schemas.openxmlformats.org/officeDocument/2006/relationships" xmlns:p="http://schemas.openxmlformats.org/presentationml/2006/main">
+  <p:cSld>
+    <p:spTree>
+      <p:nvGrpSpPr>
+        <p:cNvPr id="1" name=""/>
+        <p:cNvGrpSpPr/>
+        <p:nvPr/>
+      </p:nvGrpSpPr>
+      <p:grpSpPr>
+        <a:xfrm>
+          <a:off x="0" y="0"/>
+          <a:ext cx="0" cy="0"/>
+          <a:chOff x="0" y="0"/>
+          <a:chExt cx="0" cy="0"/>
+        </a:xfrm>
+      </p:grpSpPr>
+      <p:sp>
+        <p:nvSpPr>
+          <p:cNvPr id="2" name="Slide Image Placeholder 1"/>
+          <p:cNvSpPr>
+            <a:spLocks noGrp="1" noRot="1" noChangeAspect="1"/>
+          </p:cNvSpPr>
+          <p:nvPr>
+            <p:ph type="sldImg"/>
+          </p:nvPr>
+        </p:nvSpPr>
+        <p:spPr/>
+      </p:sp>
+      <p:sp>
+        <p:nvSpPr>
+          <p:cNvPr id="3" name="Notes Placeholder 2"/>
+          <p:cNvSpPr>
+            <a:spLocks noGrp="1"/>
+          </p:cNvSpPr>
+          <p:nvPr>
+            <p:ph type="body" idx="1"/>
+          </p:nvPr>
+        </p:nvSpPr>
+        <p:spPr/>
+        <p:txBody>
+          <a:bodyPr/>
+          <a:lstStyle/>
+          <a:p>
+            <a:r>
+              <a:rPr lang="en-US" dirty="0"/>
+              <a:t/>
+            </a:r>
+            <a:endParaRPr lang="en-US" dirty="0"/>
+          </a:p>
+        </p:txBody>
+      </p:sp>
+      <p:sp>
+        <p:nvSpPr>
+          <p:cNvPr id="4" name="Slide Number Placeholder 3"/>
+          <p:cNvSpPr>
+            <a:spLocks noGrp="1"/>
+          </p:cNvSpPr>
+          <p:nvPr>
+            <p:ph type="sldNum" sz="quarter" idx="10"/>
+          </p:nvPr>
+        </p:nvSpPr>
+        <p:spPr/>
+        <p:txBody>
+          <a:bodyPr/>
+          <a:lstStyle/>
+          <a:p>
+            <a:fld id="{F7021451-1387-4CA6-816F-3879F97B5CBC}" type="slidenum">
+              <a:rPr lang="en-US"/>
+              <a:t>30</a:t>
+            </a:fld>
+            <a:endParaRPr lang="en-US"/>
+          </a:p>
+        </p:txBody>
+      </p:sp>
+    </p:spTree>
+    <p:extLst>
+      <p:ext uri="{BB962C8B-B14F-4D97-AF65-F5344CB8AC3E}">
+        <p14:creationId xmlns:p14="http://schemas.microsoft.com/office/powerpoint/2010/main" val="1024086991"/>
+      </p:ext>
+    </p:extLst>
+  </p:cSld>
+  <p:clrMapOvr>
+    <a:masterClrMapping/>
+  </p:clrMapOvr>
+</p:notes>
+</file>
+
+<file path=ppt/notesSlides/notesSlide31.xml><?xml version="1.0" encoding="utf-8"?>
+<p:notes xmlns:a="http://schemas.openxmlformats.org/drawingml/2006/main" xmlns:r="http://schemas.openxmlformats.org/officeDocument/2006/relationships" xmlns:p="http://schemas.openxmlformats.org/presentationml/2006/main">
+  <p:cSld>
+    <p:spTree>
+      <p:nvGrpSpPr>
+        <p:cNvPr id="1" name=""/>
+        <p:cNvGrpSpPr/>
+        <p:nvPr/>
+      </p:nvGrpSpPr>
+      <p:grpSpPr>
+        <a:xfrm>
+          <a:off x="0" y="0"/>
+          <a:ext cx="0" cy="0"/>
+          <a:chOff x="0" y="0"/>
+          <a:chExt cx="0" cy="0"/>
+        </a:xfrm>
+      </p:grpSpPr>
+      <p:sp>
+        <p:nvSpPr>
+          <p:cNvPr id="2" name="Slide Image Placeholder 1"/>
+          <p:cNvSpPr>
+            <a:spLocks noGrp="1" noRot="1" noChangeAspect="1"/>
+          </p:cNvSpPr>
+          <p:nvPr>
+            <p:ph type="sldImg"/>
+          </p:nvPr>
+        </p:nvSpPr>
+        <p:spPr/>
+      </p:sp>
+      <p:sp>
+        <p:nvSpPr>
+          <p:cNvPr id="3" name="Notes Placeholder 2"/>
+          <p:cNvSpPr>
+            <a:spLocks noGrp="1"/>
+          </p:cNvSpPr>
+          <p:nvPr>
+            <p:ph type="body" idx="1"/>
+          </p:nvPr>
+        </p:nvSpPr>
+        <p:spPr/>
+        <p:txBody>
+          <a:bodyPr/>
+          <a:lstStyle/>
+          <a:p>
+            <a:r>
+              <a:rPr lang="en-US" dirty="0"/>
+              <a:t/>
+            </a:r>
+            <a:endParaRPr lang="en-US" dirty="0"/>
+          </a:p>
+        </p:txBody>
+      </p:sp>
+      <p:sp>
+        <p:nvSpPr>
+          <p:cNvPr id="4" name="Slide Number Placeholder 3"/>
+          <p:cNvSpPr>
+            <a:spLocks noGrp="1"/>
+          </p:cNvSpPr>
+          <p:nvPr>
+            <p:ph type="sldNum" sz="quarter" idx="10"/>
+          </p:nvPr>
+        </p:nvSpPr>
+        <p:spPr/>
+        <p:txBody>
+          <a:bodyPr/>
+          <a:lstStyle/>
+          <a:p>
+            <a:fld id="{F7021451-1387-4CA6-816F-3879F97B5CBC}" type="slidenum">
+              <a:rPr lang="en-US"/>
+              <a:t>31</a:t>
+            </a:fld>
+            <a:endParaRPr lang="en-US"/>
+          </a:p>
+        </p:txBody>
+      </p:sp>
+    </p:spTree>
+    <p:extLst>
+      <p:ext uri="{BB962C8B-B14F-4D97-AF65-F5344CB8AC3E}">
+        <p14:creationId xmlns:p14="http://schemas.microsoft.com/office/powerpoint/2010/main" val="1024086991"/>
+      </p:ext>
+    </p:extLst>
+  </p:cSld>
+  <p:clrMapOvr>
+    <a:masterClrMapping/>
+  </p:clrMapOvr>
+</p:notes>
+</file>
+
+<file path=ppt/notesSlides/notesSlide32.xml><?xml version="1.0" encoding="utf-8"?>
+<p:notes xmlns:a="http://schemas.openxmlformats.org/drawingml/2006/main" xmlns:r="http://schemas.openxmlformats.org/officeDocument/2006/relationships" xmlns:p="http://schemas.openxmlformats.org/presentationml/2006/main">
+  <p:cSld>
+    <p:spTree>
+      <p:nvGrpSpPr>
+        <p:cNvPr id="1" name=""/>
+        <p:cNvGrpSpPr/>
+        <p:nvPr/>
+      </p:nvGrpSpPr>
+      <p:grpSpPr>
+        <a:xfrm>
+          <a:off x="0" y="0"/>
+          <a:ext cx="0" cy="0"/>
+          <a:chOff x="0" y="0"/>
+          <a:chExt cx="0" cy="0"/>
+        </a:xfrm>
+      </p:grpSpPr>
+      <p:sp>
+        <p:nvSpPr>
+          <p:cNvPr id="2" name="Slide Image Placeholder 1"/>
+          <p:cNvSpPr>
+            <a:spLocks noGrp="1" noRot="1" noChangeAspect="1"/>
+          </p:cNvSpPr>
+          <p:nvPr>
+            <p:ph type="sldImg"/>
+          </p:nvPr>
+        </p:nvSpPr>
+        <p:spPr/>
+      </p:sp>
+      <p:sp>
+        <p:nvSpPr>
+          <p:cNvPr id="3" name="Notes Placeholder 2"/>
+          <p:cNvSpPr>
+            <a:spLocks noGrp="1"/>
+          </p:cNvSpPr>
+          <p:nvPr>
+            <p:ph type="body" idx="1"/>
+          </p:nvPr>
+        </p:nvSpPr>
+        <p:spPr/>
+        <p:txBody>
+          <a:bodyPr/>
+          <a:lstStyle/>
+          <a:p>
+            <a:r>
+              <a:rPr lang="en-US" dirty="0"/>
+              <a:t/>
+            </a:r>
+            <a:endParaRPr lang="en-US" dirty="0"/>
+          </a:p>
+        </p:txBody>
+      </p:sp>
+      <p:sp>
+        <p:nvSpPr>
+          <p:cNvPr id="4" name="Slide Number Placeholder 3"/>
+          <p:cNvSpPr>
+            <a:spLocks noGrp="1"/>
+          </p:cNvSpPr>
+          <p:nvPr>
+            <p:ph type="sldNum" sz="quarter" idx="10"/>
+          </p:nvPr>
+        </p:nvSpPr>
+        <p:spPr/>
+        <p:txBody>
+          <a:bodyPr/>
+          <a:lstStyle/>
+          <a:p>
+            <a:fld id="{F7021451-1387-4CA6-816F-3879F97B5CBC}" type="slidenum">
+              <a:rPr lang="en-US"/>
+              <a:t>32</a:t>
             </a:fld>
             <a:endParaRPr lang="en-US"/>
           </a:p>
@@ -4428,7 +4962,7 @@
     <p:bg>
       <p:bgPr>
         <a:solidFill>
-          <a:srgbClr val="0B1030"/>
+          <a:srgbClr val="F3EEE3"/>
         </a:solidFill>
       </p:bgPr>
     </p:bg>
@@ -4454,14 +4988,16 @@
         </p:nvSpPr>
         <p:spPr>
           <a:xfrm>
-            <a:off x="0" y="3246120"/>
-            <a:ext cx="12191695" cy="54864"/>
-          </a:xfrm>
-          <a:prstGeom prst="rect">
-            <a:avLst/>
+            <a:off x="640080" y="411480"/>
+            <a:ext cx="2377440" cy="365760"/>
+          </a:xfrm>
+          <a:prstGeom prst="roundRect">
+            <a:avLst>
+              <a:gd name="adj" fmla="val 50000"/>
+            </a:avLst>
           </a:prstGeom>
           <a:solidFill>
-            <a:srgbClr val="9A4C1F"/>
+            <a:srgbClr val="E5EDFB"/>
           </a:solidFill>
           <a:ln/>
         </p:spPr>
@@ -4474,118 +5010,591 @@
         </p:nvSpPr>
         <p:spPr>
           <a:xfrm>
-            <a:off x="640080" y="2468880"/>
-            <a:ext cx="10058400" cy="914400"/>
-          </a:xfrm>
-          <a:prstGeom prst="rect">
-            <a:avLst/>
-          </a:prstGeom>
-          <a:noFill/>
-          <a:ln/>
-        </p:spPr>
-        <p:txBody>
-          <a:bodyPr wrap="square" rtlCol="0" anchor="ctr"/>
-          <a:lstStyle/>
-          <a:p>
-            <a:pPr indent="0" marL="0">
-              <a:buNone/>
-            </a:pPr>
-            <a:r>
-              <a:rPr lang="en-US" sz="3800" b="1" dirty="0">
-                <a:solidFill>
-                  <a:srgbClr val="FFFFFF"/>
+            <a:off x="640080" y="411480"/>
+            <a:ext cx="2377440" cy="365760"/>
+          </a:xfrm>
+          <a:prstGeom prst="rect">
+            <a:avLst/>
+          </a:prstGeom>
+          <a:noFill/>
+          <a:ln/>
+        </p:spPr>
+        <p:txBody>
+          <a:bodyPr wrap="square" rtlCol="0" anchor="ctr"/>
+          <a:lstStyle/>
+          <a:p>
+            <a:pPr algn="ctr" indent="0" marL="0">
+              <a:buNone/>
+            </a:pPr>
+            <a:r>
+              <a:rPr lang="en-US" sz="1000" b="1" spc="100" kern="0" dirty="0">
+                <a:solidFill>
+                  <a:srgbClr val="1D6FE0"/>
+                </a:solidFill>
+                <a:latin typeface="Segoe UI" pitchFamily="34" charset="0"/>
+                <a:ea typeface="Segoe UI" pitchFamily="34" charset="-122"/>
+                <a:cs typeface="Segoe UI" pitchFamily="34" charset="-120"/>
+              </a:rPr>
+              <a:t>FRONTEND</a:t>
+            </a:r>
+            <a:endParaRPr lang="en-US" sz="1000" dirty="0"/>
+          </a:p>
+        </p:txBody>
+      </p:sp>
+      <p:sp>
+        <p:nvSpPr>
+          <p:cNvPr id="4" name="Text 2"/>
+          <p:cNvSpPr/>
+          <p:nvPr/>
+        </p:nvSpPr>
+        <p:spPr>
+          <a:xfrm>
+            <a:off x="640080" y="868680"/>
+            <a:ext cx="10515600" cy="548640"/>
+          </a:xfrm>
+          <a:prstGeom prst="rect">
+            <a:avLst/>
+          </a:prstGeom>
+          <a:noFill/>
+          <a:ln/>
+        </p:spPr>
+        <p:txBody>
+          <a:bodyPr wrap="square" rtlCol="0" anchor="ctr"/>
+          <a:lstStyle/>
+          <a:p>
+            <a:pPr indent="0" marL="0">
+              <a:buNone/>
+            </a:pPr>
+            <a:r>
+              <a:rPr lang="en-US" sz="2400" b="1" dirty="0">
+                <a:solidFill>
+                  <a:srgbClr val="1B1F3B"/>
                 </a:solidFill>
                 <a:latin typeface="Georgia" pitchFamily="34" charset="0"/>
                 <a:ea typeface="Georgia" pitchFamily="34" charset="-122"/>
                 <a:cs typeface="Georgia" pitchFamily="34" charset="-120"/>
               </a:rPr>
-              <a:t>Backend</a:t>
-            </a:r>
-            <a:endParaRPr lang="en-US" sz="3800" dirty="0"/>
-          </a:p>
-        </p:txBody>
-      </p:sp>
-      <p:sp>
-        <p:nvSpPr>
-          <p:cNvPr id="4" name="Text 2"/>
-          <p:cNvSpPr/>
-          <p:nvPr/>
-        </p:nvSpPr>
-        <p:spPr>
-          <a:xfrm>
-            <a:off x="640080" y="3429000"/>
-            <a:ext cx="10058400" cy="457200"/>
-          </a:xfrm>
-          <a:prstGeom prst="rect">
-            <a:avLst/>
-          </a:prstGeom>
-          <a:noFill/>
-          <a:ln/>
-        </p:spPr>
-        <p:txBody>
-          <a:bodyPr wrap="square" rtlCol="0" anchor="ctr"/>
-          <a:lstStyle/>
-          <a:p>
-            <a:pPr indent="0" marL="0">
-              <a:buNone/>
-            </a:pPr>
-            <a:r>
-              <a:rPr lang="en-US" sz="1500" dirty="0">
-                <a:solidFill>
-                  <a:srgbClr val="C7C9E0"/>
-                </a:solidFill>
-                <a:latin typeface="Segoe UI" pitchFamily="34" charset="0"/>
-                <a:ea typeface="Segoe UI" pitchFamily="34" charset="-122"/>
-                <a:cs typeface="Segoe UI" pitchFamily="34" charset="-120"/>
-              </a:rPr>
-              <a:t>API, logique métier et intégrations</a:t>
-            </a:r>
-            <a:endParaRPr lang="en-US" sz="1500" dirty="0"/>
-          </a:p>
-        </p:txBody>
-      </p:sp>
-      <p:sp>
-        <p:nvSpPr>
-          <p:cNvPr id="5" name="Text 3"/>
-          <p:cNvSpPr/>
-          <p:nvPr/>
-        </p:nvSpPr>
-        <p:spPr>
-          <a:xfrm>
-            <a:off x="640080" y="3931920"/>
-            <a:ext cx="5486400" cy="365760"/>
-          </a:xfrm>
-          <a:prstGeom prst="rect">
-            <a:avLst/>
-          </a:prstGeom>
-          <a:noFill/>
-          <a:ln/>
-        </p:spPr>
-        <p:txBody>
-          <a:bodyPr wrap="square" rtlCol="0" anchor="ctr"/>
-          <a:lstStyle/>
-          <a:p>
-            <a:pPr indent="0" marL="0">
-              <a:buNone/>
-            </a:pPr>
-            <a:r>
-              <a:rPr lang="en-US" sz="1200" b="1" dirty="0">
-                <a:solidFill>
-                  <a:srgbClr val="C9A96A"/>
-                </a:solidFill>
-                <a:latin typeface="Segoe UI" pitchFamily="34" charset="0"/>
-                <a:ea typeface="Segoe UI" pitchFamily="34" charset="-122"/>
-                <a:cs typeface="Segoe UI" pitchFamily="34" charset="-120"/>
-              </a:rPr>
-              <a:t>16 mise(s) à jour</a:t>
-            </a:r>
-            <a:endParaRPr lang="en-US" sz="1200" dirty="0"/>
-          </a:p>
-        </p:txBody>
-      </p:sp>
-      <p:sp>
-        <p:nvSpPr>
-          <p:cNvPr id="6" name="Text 4"/>
+              <a:t>Rapports d'intervention</a:t>
+            </a:r>
+            <a:endParaRPr lang="en-US" sz="2400" dirty="0"/>
+          </a:p>
+        </p:txBody>
+      </p:sp>
+      <p:sp>
+        <p:nvSpPr>
+          <p:cNvPr id="5" name="Shape 3"/>
+          <p:cNvSpPr/>
+          <p:nvPr/>
+        </p:nvSpPr>
+        <p:spPr>
+          <a:xfrm>
+            <a:off x="640080" y="1691640"/>
+            <a:ext cx="10881360" cy="1097280"/>
+          </a:xfrm>
+          <a:prstGeom prst="roundRect">
+            <a:avLst>
+              <a:gd name="adj" fmla="val 5000"/>
+            </a:avLst>
+          </a:prstGeom>
+          <a:solidFill>
+            <a:srgbClr val="FFFFFF"/>
+          </a:solidFill>
+          <a:ln w="12700">
+            <a:solidFill>
+              <a:srgbClr val="E4DCCB"/>
+            </a:solidFill>
+            <a:prstDash val="solid"/>
+          </a:ln>
+        </p:spPr>
+      </p:sp>
+      <p:sp>
+        <p:nvSpPr>
+          <p:cNvPr id="6" name="Shape 4"/>
+          <p:cNvSpPr/>
+          <p:nvPr/>
+        </p:nvSpPr>
+        <p:spPr>
+          <a:xfrm>
+            <a:off x="640080" y="1691640"/>
+            <a:ext cx="54864" cy="1097280"/>
+          </a:xfrm>
+          <a:prstGeom prst="rect">
+            <a:avLst/>
+          </a:prstGeom>
+          <a:solidFill>
+            <a:srgbClr val="1D6FE0"/>
+          </a:solidFill>
+          <a:ln/>
+        </p:spPr>
+      </p:sp>
+      <p:sp>
+        <p:nvSpPr>
+          <p:cNvPr id="7" name="Text 5"/>
+          <p:cNvSpPr/>
+          <p:nvPr/>
+        </p:nvSpPr>
+        <p:spPr>
+          <a:xfrm>
+            <a:off x="914400" y="1801368"/>
+            <a:ext cx="10332720" cy="365760"/>
+          </a:xfrm>
+          <a:prstGeom prst="rect">
+            <a:avLst/>
+          </a:prstGeom>
+          <a:noFill/>
+          <a:ln/>
+        </p:spPr>
+        <p:txBody>
+          <a:bodyPr wrap="square" rtlCol="0" anchor="ctr"/>
+          <a:lstStyle/>
+          <a:p>
+            <a:pPr indent="0" marL="0">
+              <a:buNone/>
+            </a:pPr>
+            <a:r>
+              <a:rPr lang="en-US" sz="1400" b="1" dirty="0">
+                <a:solidFill>
+                  <a:srgbClr val="1B1F3B"/>
+                </a:solidFill>
+                <a:latin typeface="Segoe UI" pitchFamily="34" charset="0"/>
+                <a:ea typeface="Segoe UI" pitchFamily="34" charset="-122"/>
+                <a:cs typeface="Segoe UI" pitchFamily="34" charset="-120"/>
+              </a:rPr>
+              <a:t>Nouveau type "Intervention" dans l'ajout rapide</a:t>
+            </a:r>
+            <a:endParaRPr lang="en-US" sz="1400" dirty="0"/>
+          </a:p>
+        </p:txBody>
+      </p:sp>
+      <p:sp>
+        <p:nvSpPr>
+          <p:cNvPr id="8" name="Text 6"/>
+          <p:cNvSpPr/>
+          <p:nvPr/>
+        </p:nvSpPr>
+        <p:spPr>
+          <a:xfrm>
+            <a:off x="914400" y="2148840"/>
+            <a:ext cx="10332720" cy="594360"/>
+          </a:xfrm>
+          <a:prstGeom prst="rect">
+            <a:avLst/>
+          </a:prstGeom>
+          <a:noFill/>
+          <a:ln/>
+        </p:spPr>
+        <p:txBody>
+          <a:bodyPr wrap="square" rtlCol="0" anchor="ctr"/>
+          <a:lstStyle/>
+          <a:p>
+            <a:pPr indent="0" marL="0">
+              <a:lnSpc>
+                <a:spcPts val="1400"/>
+              </a:lnSpc>
+              <a:buNone/>
+            </a:pPr>
+            <a:r>
+              <a:rPr lang="en-US" sz="1100" dirty="0">
+                <a:solidFill>
+                  <a:srgbClr val="8A7C68"/>
+                </a:solidFill>
+                <a:latin typeface="Segoe UI" pitchFamily="34" charset="0"/>
+                <a:ea typeface="Segoe UI" pitchFamily="34" charset="-122"/>
+                <a:cs typeface="Segoe UI" pitchFamily="34" charset="-120"/>
+              </a:rPr>
+              <a:t>Depuis la page d'accueil, un cinquième choix 'Intervention' ouvre un formulaire dédié en plein écran, en plus des types existants Tâche/RDV/Dépense/Note.</a:t>
+            </a:r>
+            <a:endParaRPr lang="en-US" sz="1100" dirty="0"/>
+          </a:p>
+        </p:txBody>
+      </p:sp>
+      <p:sp>
+        <p:nvSpPr>
+          <p:cNvPr id="9" name="Shape 7"/>
+          <p:cNvSpPr/>
+          <p:nvPr/>
+        </p:nvSpPr>
+        <p:spPr>
+          <a:xfrm>
+            <a:off x="640080" y="2926080"/>
+            <a:ext cx="10881360" cy="1097280"/>
+          </a:xfrm>
+          <a:prstGeom prst="roundRect">
+            <a:avLst>
+              <a:gd name="adj" fmla="val 5000"/>
+            </a:avLst>
+          </a:prstGeom>
+          <a:solidFill>
+            <a:srgbClr val="FFFFFF"/>
+          </a:solidFill>
+          <a:ln w="12700">
+            <a:solidFill>
+              <a:srgbClr val="E4DCCB"/>
+            </a:solidFill>
+            <a:prstDash val="solid"/>
+          </a:ln>
+        </p:spPr>
+      </p:sp>
+      <p:sp>
+        <p:nvSpPr>
+          <p:cNvPr id="10" name="Shape 8"/>
+          <p:cNvSpPr/>
+          <p:nvPr/>
+        </p:nvSpPr>
+        <p:spPr>
+          <a:xfrm>
+            <a:off x="640080" y="2926080"/>
+            <a:ext cx="54864" cy="1097280"/>
+          </a:xfrm>
+          <a:prstGeom prst="rect">
+            <a:avLst/>
+          </a:prstGeom>
+          <a:solidFill>
+            <a:srgbClr val="1D6FE0"/>
+          </a:solidFill>
+          <a:ln/>
+        </p:spPr>
+      </p:sp>
+      <p:sp>
+        <p:nvSpPr>
+          <p:cNvPr id="11" name="Text 9"/>
+          <p:cNvSpPr/>
+          <p:nvPr/>
+        </p:nvSpPr>
+        <p:spPr>
+          <a:xfrm>
+            <a:off x="914400" y="3035808"/>
+            <a:ext cx="10332720" cy="365760"/>
+          </a:xfrm>
+          <a:prstGeom prst="rect">
+            <a:avLst/>
+          </a:prstGeom>
+          <a:noFill/>
+          <a:ln/>
+        </p:spPr>
+        <p:txBody>
+          <a:bodyPr wrap="square" rtlCol="0" anchor="ctr"/>
+          <a:lstStyle/>
+          <a:p>
+            <a:pPr indent="0" marL="0">
+              <a:buNone/>
+            </a:pPr>
+            <a:r>
+              <a:rPr lang="en-US" sz="1400" b="1" dirty="0">
+                <a:solidFill>
+                  <a:srgbClr val="1B1F3B"/>
+                </a:solidFill>
+                <a:latin typeface="Segoe UI" pitchFamily="34" charset="0"/>
+                <a:ea typeface="Segoe UI" pitchFamily="34" charset="-122"/>
+                <a:cs typeface="Segoe UI" pitchFamily="34" charset="-120"/>
+              </a:rPr>
+              <a:t>Formulaire de rapport d'intervention</a:t>
+            </a:r>
+            <a:endParaRPr lang="en-US" sz="1400" dirty="0"/>
+          </a:p>
+        </p:txBody>
+      </p:sp>
+      <p:sp>
+        <p:nvSpPr>
+          <p:cNvPr id="12" name="Text 10"/>
+          <p:cNvSpPr/>
+          <p:nvPr/>
+        </p:nvSpPr>
+        <p:spPr>
+          <a:xfrm>
+            <a:off x="914400" y="3383280"/>
+            <a:ext cx="10332720" cy="594360"/>
+          </a:xfrm>
+          <a:prstGeom prst="rect">
+            <a:avLst/>
+          </a:prstGeom>
+          <a:noFill/>
+          <a:ln/>
+        </p:spPr>
+        <p:txBody>
+          <a:bodyPr wrap="square" rtlCol="0" anchor="ctr"/>
+          <a:lstStyle/>
+          <a:p>
+            <a:pPr indent="0" marL="0">
+              <a:lnSpc>
+                <a:spcPts val="1400"/>
+              </a:lnSpc>
+              <a:buNone/>
+            </a:pPr>
+            <a:r>
+              <a:rPr lang="en-US" sz="1100" dirty="0">
+                <a:solidFill>
+                  <a:srgbClr val="8A7C68"/>
+                </a:solidFill>
+                <a:latin typeface="Segoe UI" pitchFamily="34" charset="0"/>
+                <a:ea typeface="Segoe UI" pitchFamily="34" charset="-122"/>
+                <a:cs typeface="Segoe UI" pitchFamily="34" charset="-120"/>
+              </a:rPr>
+              <a:t>En-tête avec le logo et les coordonnées de l'entreprise (repris automatiquement du profil), puis Client, Site, Date, Entreprise, Équipement, Constat, Analyse, Préconisations et Signature, sur le modèle d'un rapport d'intervention technique classique.</a:t>
+            </a:r>
+            <a:endParaRPr lang="en-US" sz="1100" dirty="0"/>
+          </a:p>
+        </p:txBody>
+      </p:sp>
+      <p:sp>
+        <p:nvSpPr>
+          <p:cNvPr id="13" name="Shape 11"/>
+          <p:cNvSpPr/>
+          <p:nvPr/>
+        </p:nvSpPr>
+        <p:spPr>
+          <a:xfrm>
+            <a:off x="640080" y="4160520"/>
+            <a:ext cx="10881360" cy="1097280"/>
+          </a:xfrm>
+          <a:prstGeom prst="roundRect">
+            <a:avLst>
+              <a:gd name="adj" fmla="val 5000"/>
+            </a:avLst>
+          </a:prstGeom>
+          <a:solidFill>
+            <a:srgbClr val="FFFFFF"/>
+          </a:solidFill>
+          <a:ln w="12700">
+            <a:solidFill>
+              <a:srgbClr val="E4DCCB"/>
+            </a:solidFill>
+            <a:prstDash val="solid"/>
+          </a:ln>
+        </p:spPr>
+      </p:sp>
+      <p:sp>
+        <p:nvSpPr>
+          <p:cNvPr id="14" name="Shape 12"/>
+          <p:cNvSpPr/>
+          <p:nvPr/>
+        </p:nvSpPr>
+        <p:spPr>
+          <a:xfrm>
+            <a:off x="640080" y="4160520"/>
+            <a:ext cx="54864" cy="1097280"/>
+          </a:xfrm>
+          <a:prstGeom prst="rect">
+            <a:avLst/>
+          </a:prstGeom>
+          <a:solidFill>
+            <a:srgbClr val="1D6FE0"/>
+          </a:solidFill>
+          <a:ln/>
+        </p:spPr>
+      </p:sp>
+      <p:sp>
+        <p:nvSpPr>
+          <p:cNvPr id="15" name="Text 13"/>
+          <p:cNvSpPr/>
+          <p:nvPr/>
+        </p:nvSpPr>
+        <p:spPr>
+          <a:xfrm>
+            <a:off x="914400" y="4270248"/>
+            <a:ext cx="10332720" cy="365760"/>
+          </a:xfrm>
+          <a:prstGeom prst="rect">
+            <a:avLst/>
+          </a:prstGeom>
+          <a:noFill/>
+          <a:ln/>
+        </p:spPr>
+        <p:txBody>
+          <a:bodyPr wrap="square" rtlCol="0" anchor="ctr"/>
+          <a:lstStyle/>
+          <a:p>
+            <a:pPr indent="0" marL="0">
+              <a:buNone/>
+            </a:pPr>
+            <a:r>
+              <a:rPr lang="en-US" sz="1400" b="1" dirty="0">
+                <a:solidFill>
+                  <a:srgbClr val="1B1F3B"/>
+                </a:solidFill>
+                <a:latin typeface="Segoe UI" pitchFamily="34" charset="0"/>
+                <a:ea typeface="Segoe UI" pitchFamily="34" charset="-122"/>
+                <a:cs typeface="Segoe UI" pitchFamily="34" charset="-120"/>
+              </a:rPr>
+              <a:t>Aperçu avant génération</a:t>
+            </a:r>
+            <a:endParaRPr lang="en-US" sz="1400" dirty="0"/>
+          </a:p>
+        </p:txBody>
+      </p:sp>
+      <p:sp>
+        <p:nvSpPr>
+          <p:cNvPr id="16" name="Text 14"/>
+          <p:cNvSpPr/>
+          <p:nvPr/>
+        </p:nvSpPr>
+        <p:spPr>
+          <a:xfrm>
+            <a:off x="914400" y="4617720"/>
+            <a:ext cx="10332720" cy="594360"/>
+          </a:xfrm>
+          <a:prstGeom prst="rect">
+            <a:avLst/>
+          </a:prstGeom>
+          <a:noFill/>
+          <a:ln/>
+        </p:spPr>
+        <p:txBody>
+          <a:bodyPr wrap="square" rtlCol="0" anchor="ctr"/>
+          <a:lstStyle/>
+          <a:p>
+            <a:pPr indent="0" marL="0">
+              <a:lnSpc>
+                <a:spcPts val="1400"/>
+              </a:lnSpc>
+              <a:buNone/>
+            </a:pPr>
+            <a:r>
+              <a:rPr lang="en-US" sz="1100" dirty="0">
+                <a:solidFill>
+                  <a:srgbClr val="8A7C68"/>
+                </a:solidFill>
+                <a:latin typeface="Segoe UI" pitchFamily="34" charset="0"/>
+                <a:ea typeface="Segoe UI" pitchFamily="34" charset="-122"/>
+                <a:cs typeface="Segoe UI" pitchFamily="34" charset="-120"/>
+              </a:rPr>
+              <a:t>Avant de créer définitivement le rapport, un aperçu fidèle au document final (en-tête, sections, signature) permet de vérifier le contenu et de revenir le modifier.</a:t>
+            </a:r>
+            <a:endParaRPr lang="en-US" sz="1100" dirty="0"/>
+          </a:p>
+        </p:txBody>
+      </p:sp>
+      <p:sp>
+        <p:nvSpPr>
+          <p:cNvPr id="17" name="Shape 15"/>
+          <p:cNvSpPr/>
+          <p:nvPr/>
+        </p:nvSpPr>
+        <p:spPr>
+          <a:xfrm>
+            <a:off x="640080" y="5394960"/>
+            <a:ext cx="10881360" cy="1097280"/>
+          </a:xfrm>
+          <a:prstGeom prst="roundRect">
+            <a:avLst>
+              <a:gd name="adj" fmla="val 5000"/>
+            </a:avLst>
+          </a:prstGeom>
+          <a:solidFill>
+            <a:srgbClr val="FFFFFF"/>
+          </a:solidFill>
+          <a:ln w="12700">
+            <a:solidFill>
+              <a:srgbClr val="E4DCCB"/>
+            </a:solidFill>
+            <a:prstDash val="solid"/>
+          </a:ln>
+        </p:spPr>
+      </p:sp>
+      <p:sp>
+        <p:nvSpPr>
+          <p:cNvPr id="18" name="Shape 16"/>
+          <p:cNvSpPr/>
+          <p:nvPr/>
+        </p:nvSpPr>
+        <p:spPr>
+          <a:xfrm>
+            <a:off x="640080" y="5394960"/>
+            <a:ext cx="54864" cy="1097280"/>
+          </a:xfrm>
+          <a:prstGeom prst="rect">
+            <a:avLst/>
+          </a:prstGeom>
+          <a:solidFill>
+            <a:srgbClr val="1D6FE0"/>
+          </a:solidFill>
+          <a:ln/>
+        </p:spPr>
+      </p:sp>
+      <p:sp>
+        <p:nvSpPr>
+          <p:cNvPr id="19" name="Text 17"/>
+          <p:cNvSpPr/>
+          <p:nvPr/>
+        </p:nvSpPr>
+        <p:spPr>
+          <a:xfrm>
+            <a:off x="914400" y="5504688"/>
+            <a:ext cx="10332720" cy="365760"/>
+          </a:xfrm>
+          <a:prstGeom prst="rect">
+            <a:avLst/>
+          </a:prstGeom>
+          <a:noFill/>
+          <a:ln/>
+        </p:spPr>
+        <p:txBody>
+          <a:bodyPr wrap="square" rtlCol="0" anchor="ctr"/>
+          <a:lstStyle/>
+          <a:p>
+            <a:pPr indent="0" marL="0">
+              <a:buNone/>
+            </a:pPr>
+            <a:r>
+              <a:rPr lang="en-US" sz="1400" b="1" dirty="0">
+                <a:solidFill>
+                  <a:srgbClr val="1B1F3B"/>
+                </a:solidFill>
+                <a:latin typeface="Segoe UI" pitchFamily="34" charset="0"/>
+                <a:ea typeface="Segoe UI" pitchFamily="34" charset="-122"/>
+                <a:cs typeface="Segoe UI" pitchFamily="34" charset="-120"/>
+              </a:rPr>
+              <a:t>Suivi et devenir de chaque intervention</a:t>
+            </a:r>
+            <a:endParaRPr lang="en-US" sz="1400" dirty="0"/>
+          </a:p>
+        </p:txBody>
+      </p:sp>
+      <p:sp>
+        <p:nvSpPr>
+          <p:cNvPr id="20" name="Text 18"/>
+          <p:cNvSpPr/>
+          <p:nvPr/>
+        </p:nvSpPr>
+        <p:spPr>
+          <a:xfrm>
+            <a:off x="914400" y="5852160"/>
+            <a:ext cx="10332720" cy="594360"/>
+          </a:xfrm>
+          <a:prstGeom prst="rect">
+            <a:avLst/>
+          </a:prstGeom>
+          <a:noFill/>
+          <a:ln/>
+        </p:spPr>
+        <p:txBody>
+          <a:bodyPr wrap="square" rtlCol="0" anchor="ctr"/>
+          <a:lstStyle/>
+          <a:p>
+            <a:pPr indent="0" marL="0">
+              <a:lnSpc>
+                <a:spcPts val="1400"/>
+              </a:lnSpc>
+              <a:buNone/>
+            </a:pPr>
+            <a:r>
+              <a:rPr lang="en-US" sz="1100" dirty="0">
+                <a:solidFill>
+                  <a:srgbClr val="8A7C68"/>
+                </a:solidFill>
+                <a:latin typeface="Segoe UI" pitchFamily="34" charset="0"/>
+                <a:ea typeface="Segoe UI" pitchFamily="34" charset="-122"/>
+                <a:cs typeface="Segoe UI" pitchFamily="34" charset="-120"/>
+              </a:rPr>
+              <a:t>Depuis la fiche d'une intervention : la lier à un chantier existant, la garder en attente pour un futur devis, l'archiver, ou créer directement une facture — avec un badge de statut visible dans la liste.</a:t>
+            </a:r>
+            <a:endParaRPr lang="en-US" sz="1100" dirty="0"/>
+          </a:p>
+        </p:txBody>
+      </p:sp>
+      <p:sp>
+        <p:nvSpPr>
+          <p:cNvPr id="21" name="Text 19"/>
           <p:cNvSpPr/>
           <p:nvPr/>
         </p:nvSpPr>
@@ -4624,7 +5633,7 @@
       </p:sp>
       <p:sp>
         <p:nvSpPr>
-          <p:cNvPr id="7" name="Text 5"/>
+          <p:cNvPr id="22" name="Text 20"/>
           <p:cNvSpPr/>
           <p:nvPr/>
         </p:nvSpPr>
@@ -4710,7 +5719,7 @@
             </a:avLst>
           </a:prstGeom>
           <a:solidFill>
-            <a:srgbClr val="F5E6DA"/>
+            <a:srgbClr val="E5EDFB"/>
           </a:solidFill>
           <a:ln/>
         </p:spPr>
@@ -4742,13 +5751,13 @@
             <a:r>
               <a:rPr lang="en-US" sz="1000" b="1" spc="100" kern="0" dirty="0">
                 <a:solidFill>
-                  <a:srgbClr val="9A4C1F"/>
-                </a:solidFill>
-                <a:latin typeface="Segoe UI" pitchFamily="34" charset="0"/>
-                <a:ea typeface="Segoe UI" pitchFamily="34" charset="-122"/>
-                <a:cs typeface="Segoe UI" pitchFamily="34" charset="-120"/>
-              </a:rPr>
-              <a:t>BACKEND</a:t>
+                  <a:srgbClr val="1D6FE0"/>
+                </a:solidFill>
+                <a:latin typeface="Segoe UI" pitchFamily="34" charset="0"/>
+                <a:ea typeface="Segoe UI" pitchFamily="34" charset="-122"/>
+                <a:cs typeface="Segoe UI" pitchFamily="34" charset="-120"/>
+              </a:rPr>
+              <a:t>FRONTEND</a:t>
             </a:r>
             <a:endParaRPr lang="en-US" sz="1000" dirty="0"/>
           </a:p>
@@ -4787,7 +5796,7 @@
                 <a:ea typeface="Georgia" pitchFamily="34" charset="-122"/>
                 <a:cs typeface="Georgia" pitchFamily="34" charset="-120"/>
               </a:rPr>
-              <a:t>Fondations</a:t>
+              <a:t>Rapports d'intervention (suite)</a:t>
             </a:r>
             <a:endParaRPr lang="en-US" sz="2400" dirty="0"/>
           </a:p>
@@ -4835,7 +5844,7 @@
             <a:avLst/>
           </a:prstGeom>
           <a:solidFill>
-            <a:srgbClr val="9A4C1F"/>
+            <a:srgbClr val="1D6FE0"/>
           </a:solidFill>
           <a:ln/>
         </p:spPr>
@@ -4873,7 +5882,7 @@
                 <a:ea typeface="Segoe UI" pitchFamily="34" charset="-122"/>
                 <a:cs typeface="Segoe UI" pitchFamily="34" charset="-120"/>
               </a:rPr>
-              <a:t>Mise en place initiale de l'application</a:t>
+              <a:t>En-tête d'entreprise entièrement modifiable</a:t>
             </a:r>
             <a:endParaRPr lang="en-US" sz="1400" dirty="0"/>
           </a:p>
@@ -4915,7 +5924,7 @@
                 <a:ea typeface="Segoe UI" pitchFamily="34" charset="-122"/>
                 <a:cs typeface="Segoe UI" pitchFamily="34" charset="-120"/>
               </a:rPr>
-              <a:t>Structure Next.js App Router, authentification, base de données JSON locale et première version des modules Devis, Chantiers, Équipe, Planning.</a:t>
+              <a:t>Nom, adresse, code postal, ville, email, téléphone et SIRET sont pré-remplis depuis le profil mais modifiables pour chaque rapport ; le logo peut être celui du profil ou en importer un autre à la volée, sans toucher au profil principal.</a:t>
             </a:r>
             <a:endParaRPr lang="en-US" sz="1100" dirty="0"/>
           </a:p>
@@ -4963,7 +5972,7 @@
             <a:avLst/>
           </a:prstGeom>
           <a:solidFill>
-            <a:srgbClr val="9A4C1F"/>
+            <a:srgbClr val="1D6FE0"/>
           </a:solidFill>
           <a:ln/>
         </p:spPr>
@@ -5001,7 +6010,7 @@
                 <a:ea typeface="Segoe UI" pitchFamily="34" charset="-122"/>
                 <a:cs typeface="Segoe UI" pitchFamily="34" charset="-120"/>
               </a:rPr>
-              <a:t>Fiabilisation de l'envoi d'email (SMTP Gmail)</a:t>
+              <a:t>Section Interventions sur l'accueil</a:t>
             </a:r>
             <a:endParaRPr lang="en-US" sz="1400" dirty="0"/>
           </a:p>
@@ -5043,7 +6052,7 @@
                 <a:ea typeface="Segoe UI" pitchFamily="34" charset="-122"/>
                 <a:cs typeface="Segoe UI" pitchFamily="34" charset="-120"/>
               </a:rPr>
-              <a:t>Import dynamique de nodemailer compatible Vercel (ES modules), configuration complète (TLS, authentification).</a:t>
+              <a:t>Nouvelle section sur la page d'accueil, sous 'Devis en cours', listant les interventions avec leur statut (À faire / En cours / Terminée), et les actions rapides archiver/supprimer.</a:t>
             </a:r>
             <a:endParaRPr lang="en-US" sz="1100" dirty="0"/>
           </a:p>
@@ -5051,7 +6060,263 @@
       </p:sp>
       <p:sp>
         <p:nvSpPr>
-          <p:cNvPr id="13" name="Text 11"/>
+          <p:cNvPr id="13" name="Shape 11"/>
+          <p:cNvSpPr/>
+          <p:nvPr/>
+        </p:nvSpPr>
+        <p:spPr>
+          <a:xfrm>
+            <a:off x="640080" y="4160520"/>
+            <a:ext cx="10881360" cy="1097280"/>
+          </a:xfrm>
+          <a:prstGeom prst="roundRect">
+            <a:avLst>
+              <a:gd name="adj" fmla="val 5000"/>
+            </a:avLst>
+          </a:prstGeom>
+          <a:solidFill>
+            <a:srgbClr val="FFFFFF"/>
+          </a:solidFill>
+          <a:ln w="12700">
+            <a:solidFill>
+              <a:srgbClr val="E4DCCB"/>
+            </a:solidFill>
+            <a:prstDash val="solid"/>
+          </a:ln>
+        </p:spPr>
+      </p:sp>
+      <p:sp>
+        <p:nvSpPr>
+          <p:cNvPr id="14" name="Shape 12"/>
+          <p:cNvSpPr/>
+          <p:nvPr/>
+        </p:nvSpPr>
+        <p:spPr>
+          <a:xfrm>
+            <a:off x="640080" y="4160520"/>
+            <a:ext cx="54864" cy="1097280"/>
+          </a:xfrm>
+          <a:prstGeom prst="rect">
+            <a:avLst/>
+          </a:prstGeom>
+          <a:solidFill>
+            <a:srgbClr val="1D6FE0"/>
+          </a:solidFill>
+          <a:ln/>
+        </p:spPr>
+      </p:sp>
+      <p:sp>
+        <p:nvSpPr>
+          <p:cNvPr id="15" name="Text 13"/>
+          <p:cNvSpPr/>
+          <p:nvPr/>
+        </p:nvSpPr>
+        <p:spPr>
+          <a:xfrm>
+            <a:off x="914400" y="4270248"/>
+            <a:ext cx="10332720" cy="365760"/>
+          </a:xfrm>
+          <a:prstGeom prst="rect">
+            <a:avLst/>
+          </a:prstGeom>
+          <a:noFill/>
+          <a:ln/>
+        </p:spPr>
+        <p:txBody>
+          <a:bodyPr wrap="square" rtlCol="0" anchor="ctr"/>
+          <a:lstStyle/>
+          <a:p>
+            <a:pPr indent="0" marL="0">
+              <a:buNone/>
+            </a:pPr>
+            <a:r>
+              <a:rPr lang="en-US" sz="1400" b="1" dirty="0">
+                <a:solidFill>
+                  <a:srgbClr val="1B1F3B"/>
+                </a:solidFill>
+                <a:latin typeface="Segoe UI" pitchFamily="34" charset="0"/>
+                <a:ea typeface="Segoe UI" pitchFamily="34" charset="-122"/>
+                <a:cs typeface="Segoe UI" pitchFamily="34" charset="-120"/>
+              </a:rPr>
+              <a:t>Passage direct dans 'À faire maintenant'</a:t>
+            </a:r>
+            <a:endParaRPr lang="en-US" sz="1400" dirty="0"/>
+          </a:p>
+        </p:txBody>
+      </p:sp>
+      <p:sp>
+        <p:nvSpPr>
+          <p:cNvPr id="16" name="Text 14"/>
+          <p:cNvSpPr/>
+          <p:nvPr/>
+        </p:nvSpPr>
+        <p:spPr>
+          <a:xfrm>
+            <a:off x="914400" y="4617720"/>
+            <a:ext cx="10332720" cy="594360"/>
+          </a:xfrm>
+          <a:prstGeom prst="rect">
+            <a:avLst/>
+          </a:prstGeom>
+          <a:noFill/>
+          <a:ln/>
+        </p:spPr>
+        <p:txBody>
+          <a:bodyPr wrap="square" rtlCol="0" anchor="ctr"/>
+          <a:lstStyle/>
+          <a:p>
+            <a:pPr indent="0" marL="0">
+              <a:lnSpc>
+                <a:spcPts val="1400"/>
+              </a:lnSpc>
+              <a:buNone/>
+            </a:pPr>
+            <a:r>
+              <a:rPr lang="en-US" sz="1100" dirty="0">
+                <a:solidFill>
+                  <a:srgbClr val="8A7C68"/>
+                </a:solidFill>
+                <a:latin typeface="Segoe UI" pitchFamily="34" charset="0"/>
+                <a:ea typeface="Segoe UI" pitchFamily="34" charset="-122"/>
+                <a:cs typeface="Segoe UI" pitchFamily="34" charset="-120"/>
+              </a:rPr>
+              <a:t>Une intervention du jour peut être déplacée en un clic vers la liste 'À faire maintenant' de l'accueil, sans dupliquer la fiche si elle y est déjà.</a:t>
+            </a:r>
+            <a:endParaRPr lang="en-US" sz="1100" dirty="0"/>
+          </a:p>
+        </p:txBody>
+      </p:sp>
+      <p:sp>
+        <p:nvSpPr>
+          <p:cNvPr id="17" name="Shape 15"/>
+          <p:cNvSpPr/>
+          <p:nvPr/>
+        </p:nvSpPr>
+        <p:spPr>
+          <a:xfrm>
+            <a:off x="640080" y="5394960"/>
+            <a:ext cx="10881360" cy="1097280"/>
+          </a:xfrm>
+          <a:prstGeom prst="roundRect">
+            <a:avLst>
+              <a:gd name="adj" fmla="val 5000"/>
+            </a:avLst>
+          </a:prstGeom>
+          <a:solidFill>
+            <a:srgbClr val="FFFFFF"/>
+          </a:solidFill>
+          <a:ln w="12700">
+            <a:solidFill>
+              <a:srgbClr val="E4DCCB"/>
+            </a:solidFill>
+            <a:prstDash val="solid"/>
+          </a:ln>
+        </p:spPr>
+      </p:sp>
+      <p:sp>
+        <p:nvSpPr>
+          <p:cNvPr id="18" name="Shape 16"/>
+          <p:cNvSpPr/>
+          <p:nvPr/>
+        </p:nvSpPr>
+        <p:spPr>
+          <a:xfrm>
+            <a:off x="640080" y="5394960"/>
+            <a:ext cx="54864" cy="1097280"/>
+          </a:xfrm>
+          <a:prstGeom prst="rect">
+            <a:avLst/>
+          </a:prstGeom>
+          <a:solidFill>
+            <a:srgbClr val="1D6FE0"/>
+          </a:solidFill>
+          <a:ln/>
+        </p:spPr>
+      </p:sp>
+      <p:sp>
+        <p:nvSpPr>
+          <p:cNvPr id="19" name="Text 17"/>
+          <p:cNvSpPr/>
+          <p:nvPr/>
+        </p:nvSpPr>
+        <p:spPr>
+          <a:xfrm>
+            <a:off x="914400" y="5504688"/>
+            <a:ext cx="10332720" cy="365760"/>
+          </a:xfrm>
+          <a:prstGeom prst="rect">
+            <a:avLst/>
+          </a:prstGeom>
+          <a:noFill/>
+          <a:ln/>
+        </p:spPr>
+        <p:txBody>
+          <a:bodyPr wrap="square" rtlCol="0" anchor="ctr"/>
+          <a:lstStyle/>
+          <a:p>
+            <a:pPr indent="0" marL="0">
+              <a:buNone/>
+            </a:pPr>
+            <a:r>
+              <a:rPr lang="en-US" sz="1400" b="1" dirty="0">
+                <a:solidFill>
+                  <a:srgbClr val="1B1F3B"/>
+                </a:solidFill>
+                <a:latin typeface="Segoe UI" pitchFamily="34" charset="0"/>
+                <a:ea typeface="Segoe UI" pitchFamily="34" charset="-122"/>
+                <a:cs typeface="Segoe UI" pitchFamily="34" charset="-120"/>
+              </a:rPr>
+              <a:t>Mise en page de l'en-tête revue</a:t>
+            </a:r>
+            <a:endParaRPr lang="en-US" sz="1400" dirty="0"/>
+          </a:p>
+        </p:txBody>
+      </p:sp>
+      <p:sp>
+        <p:nvSpPr>
+          <p:cNvPr id="20" name="Text 18"/>
+          <p:cNvSpPr/>
+          <p:nvPr/>
+        </p:nvSpPr>
+        <p:spPr>
+          <a:xfrm>
+            <a:off x="914400" y="5852160"/>
+            <a:ext cx="10332720" cy="594360"/>
+          </a:xfrm>
+          <a:prstGeom prst="rect">
+            <a:avLst/>
+          </a:prstGeom>
+          <a:noFill/>
+          <a:ln/>
+        </p:spPr>
+        <p:txBody>
+          <a:bodyPr wrap="square" rtlCol="0" anchor="ctr"/>
+          <a:lstStyle/>
+          <a:p>
+            <a:pPr indent="0" marL="0">
+              <a:lnSpc>
+                <a:spcPts val="1400"/>
+              </a:lnSpc>
+              <a:buNone/>
+            </a:pPr>
+            <a:r>
+              <a:rPr lang="en-US" sz="1100" dirty="0">
+                <a:solidFill>
+                  <a:srgbClr val="8A7C68"/>
+                </a:solidFill>
+                <a:latin typeface="Segoe UI" pitchFamily="34" charset="0"/>
+                <a:ea typeface="Segoe UI" pitchFamily="34" charset="-122"/>
+                <a:cs typeface="Segoe UI" pitchFamily="34" charset="-120"/>
+              </a:rPr>
+              <a:t>'RAPPORT D'INTERVENTION', le numéro et la date de création sont désormais mis en avant en haut à droite, à côté des informations de l'entreprise, comme sur les devis et factures.</a:t>
+            </a:r>
+            <a:endParaRPr lang="en-US" sz="1100" dirty="0"/>
+          </a:p>
+        </p:txBody>
+      </p:sp>
+      <p:sp>
+        <p:nvSpPr>
+          <p:cNvPr id="21" name="Text 19"/>
           <p:cNvSpPr/>
           <p:nvPr/>
         </p:nvSpPr>
@@ -5090,7 +6355,7 @@
       </p:sp>
       <p:sp>
         <p:nvSpPr>
-          <p:cNvPr id="14" name="Text 12"/>
+          <p:cNvPr id="22" name="Text 20"/>
           <p:cNvSpPr/>
           <p:nvPr/>
         </p:nvSpPr>
@@ -5176,7 +6441,7 @@
             </a:avLst>
           </a:prstGeom>
           <a:solidFill>
-            <a:srgbClr val="F5E6DA"/>
+            <a:srgbClr val="E5EDFB"/>
           </a:solidFill>
           <a:ln/>
         </p:spPr>
@@ -5208,13 +6473,13 @@
             <a:r>
               <a:rPr lang="en-US" sz="1000" b="1" spc="100" kern="0" dirty="0">
                 <a:solidFill>
-                  <a:srgbClr val="9A4C1F"/>
-                </a:solidFill>
-                <a:latin typeface="Segoe UI" pitchFamily="34" charset="0"/>
-                <a:ea typeface="Segoe UI" pitchFamily="34" charset="-122"/>
-                <a:cs typeface="Segoe UI" pitchFamily="34" charset="-120"/>
-              </a:rPr>
-              <a:t>BACKEND</a:t>
+                  <a:srgbClr val="1D6FE0"/>
+                </a:solidFill>
+                <a:latin typeface="Segoe UI" pitchFamily="34" charset="0"/>
+                <a:ea typeface="Segoe UI" pitchFamily="34" charset="-122"/>
+                <a:cs typeface="Segoe UI" pitchFamily="34" charset="-120"/>
+              </a:rPr>
+              <a:t>FRONTEND</a:t>
             </a:r>
             <a:endParaRPr lang="en-US" sz="1000" dirty="0"/>
           </a:p>
@@ -5253,7 +6518,7 @@
                 <a:ea typeface="Georgia" pitchFamily="34" charset="-122"/>
                 <a:cs typeface="Georgia" pitchFamily="34" charset="-120"/>
               </a:rPr>
-              <a:t>Devis</a:t>
+              <a:t>Rapports d'intervention (suite)</a:t>
             </a:r>
             <a:endParaRPr lang="en-US" sz="2400" dirty="0"/>
           </a:p>
@@ -5301,7 +6566,7 @@
             <a:avLst/>
           </a:prstGeom>
           <a:solidFill>
-            <a:srgbClr val="9A4C1F"/>
+            <a:srgbClr val="1D6FE0"/>
           </a:solidFill>
           <a:ln/>
         </p:spPr>
@@ -5339,7 +6604,7 @@
                 <a:ea typeface="Segoe UI" pitchFamily="34" charset="-122"/>
                 <a:cs typeface="Segoe UI" pitchFamily="34" charset="-120"/>
               </a:rPr>
-              <a:t>Génération PDF des devis réparée</a:t>
+              <a:t>Signature réutilisable depuis le profil</a:t>
             </a:r>
             <a:endParaRPr lang="en-US" sz="1400" dirty="0"/>
           </a:p>
@@ -5381,7 +6646,7 @@
                 <a:ea typeface="Segoe UI" pitchFamily="34" charset="-122"/>
                 <a:cs typeface="Segoe UI" pitchFamily="34" charset="-120"/>
               </a:rPr>
-              <a:t>La génération/aperçu PDF lisait encore l'ancien fichier JSON local et ne trouvait plus les devis créés depuis la migration Supabase ; corrigée pour lire directement la table partagée.</a:t>
+              <a:t>La signature déjà enregistrée dans 'Ma Signature' (dessinée ou importée) peut être ajoutée en un clic au rapport, affichée en bas à droite du document comme une vraie signature.</a:t>
             </a:r>
             <a:endParaRPr lang="en-US" sz="1100" dirty="0"/>
           </a:p>
@@ -5389,263 +6654,7 @@
       </p:sp>
       <p:sp>
         <p:nvSpPr>
-          <p:cNvPr id="9" name="Shape 7"/>
-          <p:cNvSpPr/>
-          <p:nvPr/>
-        </p:nvSpPr>
-        <p:spPr>
-          <a:xfrm>
-            <a:off x="640080" y="2926080"/>
-            <a:ext cx="10881360" cy="1097280"/>
-          </a:xfrm>
-          <a:prstGeom prst="roundRect">
-            <a:avLst>
-              <a:gd name="adj" fmla="val 5000"/>
-            </a:avLst>
-          </a:prstGeom>
-          <a:solidFill>
-            <a:srgbClr val="FFFFFF"/>
-          </a:solidFill>
-          <a:ln w="12700">
-            <a:solidFill>
-              <a:srgbClr val="E4DCCB"/>
-            </a:solidFill>
-            <a:prstDash val="solid"/>
-          </a:ln>
-        </p:spPr>
-      </p:sp>
-      <p:sp>
-        <p:nvSpPr>
-          <p:cNvPr id="10" name="Shape 8"/>
-          <p:cNvSpPr/>
-          <p:nvPr/>
-        </p:nvSpPr>
-        <p:spPr>
-          <a:xfrm>
-            <a:off x="640080" y="2926080"/>
-            <a:ext cx="54864" cy="1097280"/>
-          </a:xfrm>
-          <a:prstGeom prst="rect">
-            <a:avLst/>
-          </a:prstGeom>
-          <a:solidFill>
-            <a:srgbClr val="9A4C1F"/>
-          </a:solidFill>
-          <a:ln/>
-        </p:spPr>
-      </p:sp>
-      <p:sp>
-        <p:nvSpPr>
-          <p:cNvPr id="11" name="Text 9"/>
-          <p:cNvSpPr/>
-          <p:nvPr/>
-        </p:nvSpPr>
-        <p:spPr>
-          <a:xfrm>
-            <a:off x="914400" y="3035808"/>
-            <a:ext cx="10332720" cy="365760"/>
-          </a:xfrm>
-          <a:prstGeom prst="rect">
-            <a:avLst/>
-          </a:prstGeom>
-          <a:noFill/>
-          <a:ln/>
-        </p:spPr>
-        <p:txBody>
-          <a:bodyPr wrap="square" rtlCol="0" anchor="ctr"/>
-          <a:lstStyle/>
-          <a:p>
-            <a:pPr indent="0" marL="0">
-              <a:buNone/>
-            </a:pPr>
-            <a:r>
-              <a:rPr lang="en-US" sz="1400" b="1" dirty="0">
-                <a:solidFill>
-                  <a:srgbClr val="1B1F3B"/>
-                </a:solidFill>
-                <a:latin typeface="Segoe UI" pitchFamily="34" charset="0"/>
-                <a:ea typeface="Segoe UI" pitchFamily="34" charset="-122"/>
-                <a:cs typeface="Segoe UI" pitchFamily="34" charset="-120"/>
-              </a:rPr>
-              <a:t>Versioning et sauvegarde complète du devis</a:t>
-            </a:r>
-            <a:endParaRPr lang="en-US" sz="1400" dirty="0"/>
-          </a:p>
-        </p:txBody>
-      </p:sp>
-      <p:sp>
-        <p:nvSpPr>
-          <p:cNvPr id="12" name="Text 10"/>
-          <p:cNvSpPr/>
-          <p:nvPr/>
-        </p:nvSpPr>
-        <p:spPr>
-          <a:xfrm>
-            <a:off x="914400" y="3383280"/>
-            <a:ext cx="10332720" cy="594360"/>
-          </a:xfrm>
-          <a:prstGeom prst="rect">
-            <a:avLst/>
-          </a:prstGeom>
-          <a:noFill/>
-          <a:ln/>
-        </p:spPr>
-        <p:txBody>
-          <a:bodyPr wrap="square" rtlCol="0" anchor="ctr"/>
-          <a:lstStyle/>
-          <a:p>
-            <a:pPr indent="0" marL="0">
-              <a:lnSpc>
-                <a:spcPts val="1400"/>
-              </a:lnSpc>
-              <a:buNone/>
-            </a:pPr>
-            <a:r>
-              <a:rPr lang="en-US" sz="1100" dirty="0">
-                <a:solidFill>
-                  <a:srgbClr val="8A7C68"/>
-                </a:solidFill>
-                <a:latin typeface="Segoe UI" pitchFamily="34" charset="0"/>
-                <a:ea typeface="Segoe UI" pitchFamily="34" charset="-122"/>
-                <a:cs typeface="Segoe UI" pitchFamily="34" charset="-120"/>
-              </a:rPr>
-              <a:t>Le numéro de version s'incrémente à chaque enregistrement manuel ; les notes, majorations/minorations et le taux de TVA choisi, qui se perdaient silencieusement, sont désormais bien sauvegardés.</a:t>
-            </a:r>
-            <a:endParaRPr lang="en-US" sz="1100" dirty="0"/>
-          </a:p>
-        </p:txBody>
-      </p:sp>
-      <p:sp>
-        <p:nvSpPr>
-          <p:cNvPr id="13" name="Shape 11"/>
-          <p:cNvSpPr/>
-          <p:nvPr/>
-        </p:nvSpPr>
-        <p:spPr>
-          <a:xfrm>
-            <a:off x="640080" y="4160520"/>
-            <a:ext cx="10881360" cy="1097280"/>
-          </a:xfrm>
-          <a:prstGeom prst="roundRect">
-            <a:avLst>
-              <a:gd name="adj" fmla="val 5000"/>
-            </a:avLst>
-          </a:prstGeom>
-          <a:solidFill>
-            <a:srgbClr val="FFFFFF"/>
-          </a:solidFill>
-          <a:ln w="12700">
-            <a:solidFill>
-              <a:srgbClr val="E4DCCB"/>
-            </a:solidFill>
-            <a:prstDash val="solid"/>
-          </a:ln>
-        </p:spPr>
-      </p:sp>
-      <p:sp>
-        <p:nvSpPr>
-          <p:cNvPr id="14" name="Shape 12"/>
-          <p:cNvSpPr/>
-          <p:nvPr/>
-        </p:nvSpPr>
-        <p:spPr>
-          <a:xfrm>
-            <a:off x="640080" y="4160520"/>
-            <a:ext cx="54864" cy="1097280"/>
-          </a:xfrm>
-          <a:prstGeom prst="rect">
-            <a:avLst/>
-          </a:prstGeom>
-          <a:solidFill>
-            <a:srgbClr val="9A4C1F"/>
-          </a:solidFill>
-          <a:ln/>
-        </p:spPr>
-      </p:sp>
-      <p:sp>
-        <p:nvSpPr>
-          <p:cNvPr id="15" name="Text 13"/>
-          <p:cNvSpPr/>
-          <p:nvPr/>
-        </p:nvSpPr>
-        <p:spPr>
-          <a:xfrm>
-            <a:off x="914400" y="4270248"/>
-            <a:ext cx="10332720" cy="365760"/>
-          </a:xfrm>
-          <a:prstGeom prst="rect">
-            <a:avLst/>
-          </a:prstGeom>
-          <a:noFill/>
-          <a:ln/>
-        </p:spPr>
-        <p:txBody>
-          <a:bodyPr wrap="square" rtlCol="0" anchor="ctr"/>
-          <a:lstStyle/>
-          <a:p>
-            <a:pPr indent="0" marL="0">
-              <a:buNone/>
-            </a:pPr>
-            <a:r>
-              <a:rPr lang="en-US" sz="1400" b="1" dirty="0">
-                <a:solidFill>
-                  <a:srgbClr val="1B1F3B"/>
-                </a:solidFill>
-                <a:latin typeface="Segoe UI" pitchFamily="34" charset="0"/>
-                <a:ea typeface="Segoe UI" pitchFamily="34" charset="-122"/>
-                <a:cs typeface="Segoe UI" pitchFamily="34" charset="-120"/>
-              </a:rPr>
-              <a:t>Taux horaire par défaut sur la bibliothèque</a:t>
-            </a:r>
-            <a:endParaRPr lang="en-US" sz="1400" dirty="0"/>
-          </a:p>
-        </p:txBody>
-      </p:sp>
-      <p:sp>
-        <p:nvSpPr>
-          <p:cNvPr id="16" name="Text 14"/>
-          <p:cNvSpPr/>
-          <p:nvPr/>
-        </p:nvSpPr>
-        <p:spPr>
-          <a:xfrm>
-            <a:off x="914400" y="4617720"/>
-            <a:ext cx="10332720" cy="594360"/>
-          </a:xfrm>
-          <a:prstGeom prst="rect">
-            <a:avLst/>
-          </a:prstGeom>
-          <a:noFill/>
-          <a:ln/>
-        </p:spPr>
-        <p:txBody>
-          <a:bodyPr wrap="square" rtlCol="0" anchor="ctr"/>
-          <a:lstStyle/>
-          <a:p>
-            <a:pPr indent="0" marL="0">
-              <a:lnSpc>
-                <a:spcPts val="1400"/>
-              </a:lnSpc>
-              <a:buNone/>
-            </a:pPr>
-            <a:r>
-              <a:rPr lang="en-US" sz="1100" dirty="0">
-                <a:solidFill>
-                  <a:srgbClr val="8A7C68"/>
-                </a:solidFill>
-                <a:latin typeface="Segoe UI" pitchFamily="34" charset="0"/>
-                <a:ea typeface="Segoe UI" pitchFamily="34" charset="-122"/>
-                <a:cs typeface="Segoe UI" pitchFamily="34" charset="-120"/>
-              </a:rPr>
-              <a:t>Le taux horaire du profil entreprise sert désormais de valeur par défaut pour chaque ouvrage (liste, création, édition, calcul du coût main d'œuvre).</a:t>
-            </a:r>
-            <a:endParaRPr lang="en-US" sz="1100" dirty="0"/>
-          </a:p>
-        </p:txBody>
-      </p:sp>
-      <p:sp>
-        <p:nvSpPr>
-          <p:cNvPr id="17" name="Text 15"/>
+          <p:cNvPr id="9" name="Text 7"/>
           <p:cNvSpPr/>
           <p:nvPr/>
         </p:nvSpPr>
@@ -5684,7 +6693,7 @@
       </p:sp>
       <p:sp>
         <p:nvSpPr>
-          <p:cNvPr id="18" name="Text 16"/>
+          <p:cNvPr id="10" name="Text 8"/>
           <p:cNvSpPr/>
           <p:nvPr/>
         </p:nvSpPr>
@@ -5735,7 +6744,7 @@
     <p:bg>
       <p:bgPr>
         <a:solidFill>
-          <a:srgbClr val="F3EEE3"/>
+          <a:srgbClr val="0B1030"/>
         </a:solidFill>
       </p:bgPr>
     </p:bg>
@@ -5761,16 +6770,14 @@
         </p:nvSpPr>
         <p:spPr>
           <a:xfrm>
-            <a:off x="640080" y="411480"/>
-            <a:ext cx="2377440" cy="365760"/>
-          </a:xfrm>
-          <a:prstGeom prst="roundRect">
-            <a:avLst>
-              <a:gd name="adj" fmla="val 50000"/>
-            </a:avLst>
+            <a:off x="0" y="3246120"/>
+            <a:ext cx="12191695" cy="54864"/>
+          </a:xfrm>
+          <a:prstGeom prst="rect">
+            <a:avLst/>
           </a:prstGeom>
           <a:solidFill>
-            <a:srgbClr val="F5E6DA"/>
+            <a:srgbClr val="9A4C1F"/>
           </a:solidFill>
           <a:ln/>
         </p:spPr>
@@ -5783,335 +6790,118 @@
         </p:nvSpPr>
         <p:spPr>
           <a:xfrm>
-            <a:off x="640080" y="411480"/>
-            <a:ext cx="2377440" cy="365760"/>
-          </a:xfrm>
-          <a:prstGeom prst="rect">
-            <a:avLst/>
-          </a:prstGeom>
-          <a:noFill/>
-          <a:ln/>
-        </p:spPr>
-        <p:txBody>
-          <a:bodyPr wrap="square" rtlCol="0" anchor="ctr"/>
-          <a:lstStyle/>
-          <a:p>
-            <a:pPr algn="ctr" indent="0" marL="0">
-              <a:buNone/>
-            </a:pPr>
-            <a:r>
-              <a:rPr lang="en-US" sz="1000" b="1" spc="100" kern="0" dirty="0">
-                <a:solidFill>
-                  <a:srgbClr val="9A4C1F"/>
-                </a:solidFill>
-                <a:latin typeface="Segoe UI" pitchFamily="34" charset="0"/>
-                <a:ea typeface="Segoe UI" pitchFamily="34" charset="-122"/>
-                <a:cs typeface="Segoe UI" pitchFamily="34" charset="-120"/>
-              </a:rPr>
-              <a:t>BACKEND</a:t>
-            </a:r>
-            <a:endParaRPr lang="en-US" sz="1000" dirty="0"/>
-          </a:p>
-        </p:txBody>
-      </p:sp>
-      <p:sp>
-        <p:nvSpPr>
-          <p:cNvPr id="4" name="Text 2"/>
-          <p:cNvSpPr/>
-          <p:nvPr/>
-        </p:nvSpPr>
-        <p:spPr>
-          <a:xfrm>
-            <a:off x="640080" y="868680"/>
-            <a:ext cx="10515600" cy="548640"/>
-          </a:xfrm>
-          <a:prstGeom prst="rect">
-            <a:avLst/>
-          </a:prstGeom>
-          <a:noFill/>
-          <a:ln/>
-        </p:spPr>
-        <p:txBody>
-          <a:bodyPr wrap="square" rtlCol="0" anchor="ctr"/>
-          <a:lstStyle/>
-          <a:p>
-            <a:pPr indent="0" marL="0">
-              <a:buNone/>
-            </a:pPr>
-            <a:r>
-              <a:rPr lang="en-US" sz="2400" b="1" dirty="0">
-                <a:solidFill>
-                  <a:srgbClr val="1B1F3B"/>
+            <a:off x="640080" y="2468880"/>
+            <a:ext cx="10058400" cy="914400"/>
+          </a:xfrm>
+          <a:prstGeom prst="rect">
+            <a:avLst/>
+          </a:prstGeom>
+          <a:noFill/>
+          <a:ln/>
+        </p:spPr>
+        <p:txBody>
+          <a:bodyPr wrap="square" rtlCol="0" anchor="ctr"/>
+          <a:lstStyle/>
+          <a:p>
+            <a:pPr indent="0" marL="0">
+              <a:buNone/>
+            </a:pPr>
+            <a:r>
+              <a:rPr lang="en-US" sz="3800" b="1" dirty="0">
+                <a:solidFill>
+                  <a:srgbClr val="FFFFFF"/>
                 </a:solidFill>
                 <a:latin typeface="Georgia" pitchFamily="34" charset="0"/>
                 <a:ea typeface="Georgia" pitchFamily="34" charset="-122"/>
                 <a:cs typeface="Georgia" pitchFamily="34" charset="-120"/>
               </a:rPr>
-              <a:t>Chantiers</a:t>
-            </a:r>
-            <a:endParaRPr lang="en-US" sz="2400" dirty="0"/>
-          </a:p>
-        </p:txBody>
-      </p:sp>
-      <p:sp>
-        <p:nvSpPr>
-          <p:cNvPr id="5" name="Shape 3"/>
-          <p:cNvSpPr/>
-          <p:nvPr/>
-        </p:nvSpPr>
-        <p:spPr>
-          <a:xfrm>
-            <a:off x="640080" y="1691640"/>
-            <a:ext cx="10881360" cy="1097280"/>
-          </a:xfrm>
-          <a:prstGeom prst="roundRect">
-            <a:avLst>
-              <a:gd name="adj" fmla="val 5000"/>
-            </a:avLst>
-          </a:prstGeom>
-          <a:solidFill>
-            <a:srgbClr val="FFFFFF"/>
-          </a:solidFill>
-          <a:ln w="12700">
-            <a:solidFill>
-              <a:srgbClr val="E4DCCB"/>
-            </a:solidFill>
-            <a:prstDash val="solid"/>
-          </a:ln>
-        </p:spPr>
-      </p:sp>
-      <p:sp>
-        <p:nvSpPr>
-          <p:cNvPr id="6" name="Shape 4"/>
-          <p:cNvSpPr/>
-          <p:nvPr/>
-        </p:nvSpPr>
-        <p:spPr>
-          <a:xfrm>
-            <a:off x="640080" y="1691640"/>
-            <a:ext cx="54864" cy="1097280"/>
-          </a:xfrm>
-          <a:prstGeom prst="rect">
-            <a:avLst/>
-          </a:prstGeom>
-          <a:solidFill>
-            <a:srgbClr val="9A4C1F"/>
-          </a:solidFill>
-          <a:ln/>
-        </p:spPr>
-      </p:sp>
-      <p:sp>
-        <p:nvSpPr>
-          <p:cNvPr id="7" name="Text 5"/>
-          <p:cNvSpPr/>
-          <p:nvPr/>
-        </p:nvSpPr>
-        <p:spPr>
-          <a:xfrm>
-            <a:off x="914400" y="1801368"/>
-            <a:ext cx="10332720" cy="365760"/>
-          </a:xfrm>
-          <a:prstGeom prst="rect">
-            <a:avLst/>
-          </a:prstGeom>
-          <a:noFill/>
-          <a:ln/>
-        </p:spPr>
-        <p:txBody>
-          <a:bodyPr wrap="square" rtlCol="0" anchor="ctr"/>
-          <a:lstStyle/>
-          <a:p>
-            <a:pPr indent="0" marL="0">
-              <a:buNone/>
-            </a:pPr>
-            <a:r>
-              <a:rPr lang="en-US" sz="1400" b="1" dirty="0">
-                <a:solidFill>
-                  <a:srgbClr val="1B1F3B"/>
-                </a:solidFill>
-                <a:latin typeface="Segoe UI" pitchFamily="34" charset="0"/>
-                <a:ea typeface="Segoe UI" pitchFamily="34" charset="-122"/>
-                <a:cs typeface="Segoe UI" pitchFamily="34" charset="-120"/>
-              </a:rPr>
-              <a:t>Correction d'un bug bloquant majeur</a:t>
-            </a:r>
-            <a:endParaRPr lang="en-US" sz="1400" dirty="0"/>
-          </a:p>
-        </p:txBody>
-      </p:sp>
-      <p:sp>
-        <p:nvSpPr>
-          <p:cNvPr id="8" name="Text 6"/>
-          <p:cNvSpPr/>
-          <p:nvPr/>
-        </p:nvSpPr>
-        <p:spPr>
-          <a:xfrm>
-            <a:off x="914400" y="2148840"/>
-            <a:ext cx="10332720" cy="594360"/>
-          </a:xfrm>
-          <a:prstGeom prst="rect">
-            <a:avLst/>
-          </a:prstGeom>
-          <a:noFill/>
-          <a:ln/>
-        </p:spPr>
-        <p:txBody>
-          <a:bodyPr wrap="square" rtlCol="0" anchor="ctr"/>
-          <a:lstStyle/>
-          <a:p>
-            <a:pPr indent="0" marL="0">
-              <a:lnSpc>
-                <a:spcPts val="1400"/>
-              </a:lnSpc>
-              <a:buNone/>
-            </a:pPr>
-            <a:r>
-              <a:rPr lang="en-US" sz="1100" dirty="0">
-                <a:solidFill>
-                  <a:srgbClr val="8A7C68"/>
-                </a:solidFill>
-                <a:latin typeface="Segoe UI" pitchFamily="34" charset="0"/>
-                <a:ea typeface="Segoe UI" pitchFamily="34" charset="-122"/>
-                <a:cs typeface="Segoe UI" pitchFamily="34" charset="-120"/>
-              </a:rPr>
-              <a:t>Un chantier ne pouvait être consulté que si son devis était déjà signé par le client, empêchant toute préparation en amont. Corrigé : la fiche chantier est désormais accessible dès sa création.</a:t>
-            </a:r>
-            <a:endParaRPr lang="en-US" sz="1100" dirty="0"/>
-          </a:p>
-        </p:txBody>
-      </p:sp>
-      <p:sp>
-        <p:nvSpPr>
-          <p:cNvPr id="9" name="Shape 7"/>
-          <p:cNvSpPr/>
-          <p:nvPr/>
-        </p:nvSpPr>
-        <p:spPr>
-          <a:xfrm>
-            <a:off x="640080" y="2926080"/>
-            <a:ext cx="10881360" cy="1097280"/>
-          </a:xfrm>
-          <a:prstGeom prst="roundRect">
-            <a:avLst>
-              <a:gd name="adj" fmla="val 5000"/>
-            </a:avLst>
-          </a:prstGeom>
-          <a:solidFill>
-            <a:srgbClr val="FFFFFF"/>
-          </a:solidFill>
-          <a:ln w="12700">
-            <a:solidFill>
-              <a:srgbClr val="E4DCCB"/>
-            </a:solidFill>
-            <a:prstDash val="solid"/>
-          </a:ln>
-        </p:spPr>
-      </p:sp>
-      <p:sp>
-        <p:nvSpPr>
-          <p:cNvPr id="10" name="Shape 8"/>
-          <p:cNvSpPr/>
-          <p:nvPr/>
-        </p:nvSpPr>
-        <p:spPr>
-          <a:xfrm>
-            <a:off x="640080" y="2926080"/>
-            <a:ext cx="54864" cy="1097280"/>
-          </a:xfrm>
-          <a:prstGeom prst="rect">
-            <a:avLst/>
-          </a:prstGeom>
-          <a:solidFill>
-            <a:srgbClr val="9A4C1F"/>
-          </a:solidFill>
-          <a:ln/>
-        </p:spPr>
-      </p:sp>
-      <p:sp>
-        <p:nvSpPr>
-          <p:cNvPr id="11" name="Text 9"/>
-          <p:cNvSpPr/>
-          <p:nvPr/>
-        </p:nvSpPr>
-        <p:spPr>
-          <a:xfrm>
-            <a:off x="914400" y="3035808"/>
-            <a:ext cx="10332720" cy="365760"/>
-          </a:xfrm>
-          <a:prstGeom prst="rect">
-            <a:avLst/>
-          </a:prstGeom>
-          <a:noFill/>
-          <a:ln/>
-        </p:spPr>
-        <p:txBody>
-          <a:bodyPr wrap="square" rtlCol="0" anchor="ctr"/>
-          <a:lstStyle/>
-          <a:p>
-            <a:pPr indent="0" marL="0">
-              <a:buNone/>
-            </a:pPr>
-            <a:r>
-              <a:rPr lang="en-US" sz="1400" b="1" dirty="0">
-                <a:solidFill>
-                  <a:srgbClr val="1B1F3B"/>
-                </a:solidFill>
-                <a:latin typeface="Segoe UI" pitchFamily="34" charset="0"/>
-                <a:ea typeface="Segoe UI" pitchFamily="34" charset="-122"/>
-                <a:cs typeface="Segoe UI" pitchFamily="34" charset="-120"/>
-              </a:rPr>
-              <a:t>Dépenses liées à un ouvrage précis</a:t>
-            </a:r>
-            <a:endParaRPr lang="en-US" sz="1400" dirty="0"/>
-          </a:p>
-        </p:txBody>
-      </p:sp>
-      <p:sp>
-        <p:nvSpPr>
-          <p:cNvPr id="12" name="Text 10"/>
-          <p:cNvSpPr/>
-          <p:nvPr/>
-        </p:nvSpPr>
-        <p:spPr>
-          <a:xfrm>
-            <a:off x="914400" y="3383280"/>
-            <a:ext cx="10332720" cy="594360"/>
-          </a:xfrm>
-          <a:prstGeom prst="rect">
-            <a:avLst/>
-          </a:prstGeom>
-          <a:noFill/>
-          <a:ln/>
-        </p:spPr>
-        <p:txBody>
-          <a:bodyPr wrap="square" rtlCol="0" anchor="ctr"/>
-          <a:lstStyle/>
-          <a:p>
-            <a:pPr indent="0" marL="0">
-              <a:lnSpc>
-                <a:spcPts val="1400"/>
-              </a:lnSpc>
-              <a:buNone/>
-            </a:pPr>
-            <a:r>
-              <a:rPr lang="en-US" sz="1100" dirty="0">
-                <a:solidFill>
-                  <a:srgbClr val="8A7C68"/>
-                </a:solidFill>
-                <a:latin typeface="Segoe UI" pitchFamily="34" charset="0"/>
-                <a:ea typeface="Segoe UI" pitchFamily="34" charset="-122"/>
-                <a:cs typeface="Segoe UI" pitchFamily="34" charset="-120"/>
-              </a:rPr>
-              <a:t>L'API des dépenses accepte désormais un identifiant de tâche (ouvrage) en plus du chantier, pour un suivi financier plus fin.</a:t>
-            </a:r>
-            <a:endParaRPr lang="en-US" sz="1100" dirty="0"/>
-          </a:p>
-        </p:txBody>
-      </p:sp>
-      <p:sp>
-        <p:nvSpPr>
-          <p:cNvPr id="13" name="Text 11"/>
+              <a:t>Backend</a:t>
+            </a:r>
+            <a:endParaRPr lang="en-US" sz="3800" dirty="0"/>
+          </a:p>
+        </p:txBody>
+      </p:sp>
+      <p:sp>
+        <p:nvSpPr>
+          <p:cNvPr id="4" name="Text 2"/>
+          <p:cNvSpPr/>
+          <p:nvPr/>
+        </p:nvSpPr>
+        <p:spPr>
+          <a:xfrm>
+            <a:off x="640080" y="3429000"/>
+            <a:ext cx="10058400" cy="457200"/>
+          </a:xfrm>
+          <a:prstGeom prst="rect">
+            <a:avLst/>
+          </a:prstGeom>
+          <a:noFill/>
+          <a:ln/>
+        </p:spPr>
+        <p:txBody>
+          <a:bodyPr wrap="square" rtlCol="0" anchor="ctr"/>
+          <a:lstStyle/>
+          <a:p>
+            <a:pPr indent="0" marL="0">
+              <a:buNone/>
+            </a:pPr>
+            <a:r>
+              <a:rPr lang="en-US" sz="1500" dirty="0">
+                <a:solidFill>
+                  <a:srgbClr val="C7C9E0"/>
+                </a:solidFill>
+                <a:latin typeface="Segoe UI" pitchFamily="34" charset="0"/>
+                <a:ea typeface="Segoe UI" pitchFamily="34" charset="-122"/>
+                <a:cs typeface="Segoe UI" pitchFamily="34" charset="-120"/>
+              </a:rPr>
+              <a:t>API, logique métier et intégrations</a:t>
+            </a:r>
+            <a:endParaRPr lang="en-US" sz="1500" dirty="0"/>
+          </a:p>
+        </p:txBody>
+      </p:sp>
+      <p:sp>
+        <p:nvSpPr>
+          <p:cNvPr id="5" name="Text 3"/>
+          <p:cNvSpPr/>
+          <p:nvPr/>
+        </p:nvSpPr>
+        <p:spPr>
+          <a:xfrm>
+            <a:off x="640080" y="3931920"/>
+            <a:ext cx="5486400" cy="365760"/>
+          </a:xfrm>
+          <a:prstGeom prst="rect">
+            <a:avLst/>
+          </a:prstGeom>
+          <a:noFill/>
+          <a:ln/>
+        </p:spPr>
+        <p:txBody>
+          <a:bodyPr wrap="square" rtlCol="0" anchor="ctr"/>
+          <a:lstStyle/>
+          <a:p>
+            <a:pPr indent="0" marL="0">
+              <a:buNone/>
+            </a:pPr>
+            <a:r>
+              <a:rPr lang="en-US" sz="1200" b="1" dirty="0">
+                <a:solidFill>
+                  <a:srgbClr val="C9A96A"/>
+                </a:solidFill>
+                <a:latin typeface="Segoe UI" pitchFamily="34" charset="0"/>
+                <a:ea typeface="Segoe UI" pitchFamily="34" charset="-122"/>
+                <a:cs typeface="Segoe UI" pitchFamily="34" charset="-120"/>
+              </a:rPr>
+              <a:t>23 mise(s) à jour</a:t>
+            </a:r>
+            <a:endParaRPr lang="en-US" sz="1200" dirty="0"/>
+          </a:p>
+        </p:txBody>
+      </p:sp>
+      <p:sp>
+        <p:nvSpPr>
+          <p:cNvPr id="6" name="Text 4"/>
           <p:cNvSpPr/>
           <p:nvPr/>
         </p:nvSpPr>
@@ -6150,7 +6940,7 @@
       </p:sp>
       <p:sp>
         <p:nvSpPr>
-          <p:cNvPr id="14" name="Text 12"/>
+          <p:cNvPr id="7" name="Text 5"/>
           <p:cNvSpPr/>
           <p:nvPr/>
         </p:nvSpPr>
@@ -6313,7 +7103,7 @@
                 <a:ea typeface="Georgia" pitchFamily="34" charset="-122"/>
                 <a:cs typeface="Georgia" pitchFamily="34" charset="-120"/>
               </a:rPr>
-              <a:t>Équipe</a:t>
+              <a:t>Fondations</a:t>
             </a:r>
             <a:endParaRPr lang="en-US" sz="2400" dirty="0"/>
           </a:p>
@@ -6399,7 +7189,7 @@
                 <a:ea typeface="Segoe UI" pitchFamily="34" charset="-122"/>
                 <a:cs typeface="Segoe UI" pitchFamily="34" charset="-120"/>
               </a:rPr>
-              <a:t>Six types de pointage</a:t>
+              <a:t>Mise en place initiale de l'application</a:t>
             </a:r>
             <a:endParaRPr lang="en-US" sz="1400" dirty="0"/>
           </a:p>
@@ -6441,7 +7231,7 @@
                 <a:ea typeface="Segoe UI" pitchFamily="34" charset="-122"/>
                 <a:cs typeface="Segoe UI" pitchFamily="34" charset="-120"/>
               </a:rPr>
-              <a:t>Heures de travail, jour de travail, forfait, ouvrage, passage, déplacement — chacun avec date et montant ; le montant des heures est calculé automatiquement à partir du taux horaire de l'ouvrier.</a:t>
+              <a:t>Structure Next.js App Router, authentification, base de données JSON locale et première version des modules Devis, Chantiers, Équipe, Planning.</a:t>
             </a:r>
             <a:endParaRPr lang="en-US" sz="1100" dirty="0"/>
           </a:p>
@@ -6527,7 +7317,7 @@
                 <a:ea typeface="Segoe UI" pitchFamily="34" charset="-122"/>
                 <a:cs typeface="Segoe UI" pitchFamily="34" charset="-120"/>
               </a:rPr>
-              <a:t>Alertes automatiques de dépassement / manque d'heures</a:t>
+              <a:t>Fiabilisation de l'envoi d'email (SMTP Gmail)</a:t>
             </a:r>
             <a:endParaRPr lang="en-US" sz="1400" dirty="0"/>
           </a:p>
@@ -6569,7 +7359,7 @@
                 <a:ea typeface="Segoe UI" pitchFamily="34" charset="-122"/>
                 <a:cs typeface="Segoe UI" pitchFamily="34" charset="-120"/>
               </a:rPr>
-              <a:t>À la fin de chaque semaine, si le total travaillé diffère du contrat de plus de 15 minutes, une notification est envoyée automatiquement à l'entreprise (une seule fois par semaine et par ouvrier).</a:t>
+              <a:t>Import dynamique de nodemailer compatible Vercel (ES modules), configuration complète (TLS, authentification).</a:t>
             </a:r>
             <a:endParaRPr lang="en-US" sz="1100" dirty="0"/>
           </a:p>
@@ -6577,135 +7367,7 @@
       </p:sp>
       <p:sp>
         <p:nvSpPr>
-          <p:cNvPr id="13" name="Shape 11"/>
-          <p:cNvSpPr/>
-          <p:nvPr/>
-        </p:nvSpPr>
-        <p:spPr>
-          <a:xfrm>
-            <a:off x="640080" y="4160520"/>
-            <a:ext cx="10881360" cy="1097280"/>
-          </a:xfrm>
-          <a:prstGeom prst="roundRect">
-            <a:avLst>
-              <a:gd name="adj" fmla="val 5000"/>
-            </a:avLst>
-          </a:prstGeom>
-          <a:solidFill>
-            <a:srgbClr val="FFFFFF"/>
-          </a:solidFill>
-          <a:ln w="12700">
-            <a:solidFill>
-              <a:srgbClr val="E4DCCB"/>
-            </a:solidFill>
-            <a:prstDash val="solid"/>
-          </a:ln>
-        </p:spPr>
-      </p:sp>
-      <p:sp>
-        <p:nvSpPr>
-          <p:cNvPr id="14" name="Shape 12"/>
-          <p:cNvSpPr/>
-          <p:nvPr/>
-        </p:nvSpPr>
-        <p:spPr>
-          <a:xfrm>
-            <a:off x="640080" y="4160520"/>
-            <a:ext cx="54864" cy="1097280"/>
-          </a:xfrm>
-          <a:prstGeom prst="rect">
-            <a:avLst/>
-          </a:prstGeom>
-          <a:solidFill>
-            <a:srgbClr val="9A4C1F"/>
-          </a:solidFill>
-          <a:ln/>
-        </p:spPr>
-      </p:sp>
-      <p:sp>
-        <p:nvSpPr>
-          <p:cNvPr id="15" name="Text 13"/>
-          <p:cNvSpPr/>
-          <p:nvPr/>
-        </p:nvSpPr>
-        <p:spPr>
-          <a:xfrm>
-            <a:off x="914400" y="4270248"/>
-            <a:ext cx="10332720" cy="365760"/>
-          </a:xfrm>
-          <a:prstGeom prst="rect">
-            <a:avLst/>
-          </a:prstGeom>
-          <a:noFill/>
-          <a:ln/>
-        </p:spPr>
-        <p:txBody>
-          <a:bodyPr wrap="square" rtlCol="0" anchor="ctr"/>
-          <a:lstStyle/>
-          <a:p>
-            <a:pPr indent="0" marL="0">
-              <a:buNone/>
-            </a:pPr>
-            <a:r>
-              <a:rPr lang="en-US" sz="1400" b="1" dirty="0">
-                <a:solidFill>
-                  <a:srgbClr val="1B1F3B"/>
-                </a:solidFill>
-                <a:latin typeface="Segoe UI" pitchFamily="34" charset="0"/>
-                <a:ea typeface="Segoe UI" pitchFamily="34" charset="-122"/>
-                <a:cs typeface="Segoe UI" pitchFamily="34" charset="-120"/>
-              </a:rPr>
-              <a:t>Export PDF du relevé d'heures</a:t>
-            </a:r>
-            <a:endParaRPr lang="en-US" sz="1400" dirty="0"/>
-          </a:p>
-        </p:txBody>
-      </p:sp>
-      <p:sp>
-        <p:nvSpPr>
-          <p:cNvPr id="16" name="Text 14"/>
-          <p:cNvSpPr/>
-          <p:nvPr/>
-        </p:nvSpPr>
-        <p:spPr>
-          <a:xfrm>
-            <a:off x="914400" y="4617720"/>
-            <a:ext cx="10332720" cy="594360"/>
-          </a:xfrm>
-          <a:prstGeom prst="rect">
-            <a:avLst/>
-          </a:prstGeom>
-          <a:noFill/>
-          <a:ln/>
-        </p:spPr>
-        <p:txBody>
-          <a:bodyPr wrap="square" rtlCol="0" anchor="ctr"/>
-          <a:lstStyle/>
-          <a:p>
-            <a:pPr indent="0" marL="0">
-              <a:lnSpc>
-                <a:spcPts val="1400"/>
-              </a:lnSpc>
-              <a:buNone/>
-            </a:pPr>
-            <a:r>
-              <a:rPr lang="en-US" sz="1100" dirty="0">
-                <a:solidFill>
-                  <a:srgbClr val="8A7C68"/>
-                </a:solidFill>
-                <a:latin typeface="Segoe UI" pitchFamily="34" charset="0"/>
-                <a:ea typeface="Segoe UI" pitchFamily="34" charset="-122"/>
-                <a:cs typeface="Segoe UI" pitchFamily="34" charset="-120"/>
-              </a:rPr>
-              <a:t>Génération d'un PDF mensuel par ouvrier : détail par journée/type de pointage, totaux hebdomadaires, total du mois en heures et en montant — pensé pour la comptabilité et la gestion de la paie.</a:t>
-            </a:r>
-            <a:endParaRPr lang="en-US" sz="1100" dirty="0"/>
-          </a:p>
-        </p:txBody>
-      </p:sp>
-      <p:sp>
-        <p:nvSpPr>
-          <p:cNvPr id="17" name="Text 15"/>
+          <p:cNvPr id="13" name="Text 11"/>
           <p:cNvSpPr/>
           <p:nvPr/>
         </p:nvSpPr>
@@ -6744,7 +7406,7 @@
       </p:sp>
       <p:sp>
         <p:nvSpPr>
-          <p:cNvPr id="18" name="Text 16"/>
+          <p:cNvPr id="14" name="Text 12"/>
           <p:cNvSpPr/>
           <p:nvPr/>
         </p:nvSpPr>
@@ -6907,7 +7569,7 @@
                 <a:ea typeface="Georgia" pitchFamily="34" charset="-122"/>
                 <a:cs typeface="Georgia" pitchFamily="34" charset="-120"/>
               </a:rPr>
-              <a:t>Notifications</a:t>
+              <a:t>Devis</a:t>
             </a:r>
             <a:endParaRPr lang="en-US" sz="2400" dirty="0"/>
           </a:p>
@@ -6993,7 +7655,7 @@
                 <a:ea typeface="Segoe UI" pitchFamily="34" charset="-122"/>
                 <a:cs typeface="Segoe UI" pitchFamily="34" charset="-120"/>
               </a:rPr>
-              <a:t>Envoi d'email réel à la signature du devis</a:t>
+              <a:t>Génération PDF des devis réparée</a:t>
             </a:r>
             <a:endParaRPr lang="en-US" sz="1400" dirty="0"/>
           </a:p>
@@ -7035,7 +7697,7 @@
                 <a:ea typeface="Segoe UI" pitchFamily="34" charset="-122"/>
                 <a:cs typeface="Segoe UI" pitchFamily="34" charset="-120"/>
               </a:rPr>
-              <a:t>Le premier envoi des identifiants client déclenche désormais un vrai email (SMTP), et plus seulement une file d'attente locale.</a:t>
+              <a:t>La génération/aperçu PDF lisait encore l'ancien fichier JSON local et ne trouvait plus les devis créés depuis la migration Supabase ; corrigée pour lire directement la table partagée.</a:t>
             </a:r>
             <a:endParaRPr lang="en-US" sz="1100" dirty="0"/>
           </a:p>
@@ -7043,7 +7705,263 @@
       </p:sp>
       <p:sp>
         <p:nvSpPr>
-          <p:cNvPr id="9" name="Text 7"/>
+          <p:cNvPr id="9" name="Shape 7"/>
+          <p:cNvSpPr/>
+          <p:nvPr/>
+        </p:nvSpPr>
+        <p:spPr>
+          <a:xfrm>
+            <a:off x="640080" y="2926080"/>
+            <a:ext cx="10881360" cy="1097280"/>
+          </a:xfrm>
+          <a:prstGeom prst="roundRect">
+            <a:avLst>
+              <a:gd name="adj" fmla="val 5000"/>
+            </a:avLst>
+          </a:prstGeom>
+          <a:solidFill>
+            <a:srgbClr val="FFFFFF"/>
+          </a:solidFill>
+          <a:ln w="12700">
+            <a:solidFill>
+              <a:srgbClr val="E4DCCB"/>
+            </a:solidFill>
+            <a:prstDash val="solid"/>
+          </a:ln>
+        </p:spPr>
+      </p:sp>
+      <p:sp>
+        <p:nvSpPr>
+          <p:cNvPr id="10" name="Shape 8"/>
+          <p:cNvSpPr/>
+          <p:nvPr/>
+        </p:nvSpPr>
+        <p:spPr>
+          <a:xfrm>
+            <a:off x="640080" y="2926080"/>
+            <a:ext cx="54864" cy="1097280"/>
+          </a:xfrm>
+          <a:prstGeom prst="rect">
+            <a:avLst/>
+          </a:prstGeom>
+          <a:solidFill>
+            <a:srgbClr val="9A4C1F"/>
+          </a:solidFill>
+          <a:ln/>
+        </p:spPr>
+      </p:sp>
+      <p:sp>
+        <p:nvSpPr>
+          <p:cNvPr id="11" name="Text 9"/>
+          <p:cNvSpPr/>
+          <p:nvPr/>
+        </p:nvSpPr>
+        <p:spPr>
+          <a:xfrm>
+            <a:off x="914400" y="3035808"/>
+            <a:ext cx="10332720" cy="365760"/>
+          </a:xfrm>
+          <a:prstGeom prst="rect">
+            <a:avLst/>
+          </a:prstGeom>
+          <a:noFill/>
+          <a:ln/>
+        </p:spPr>
+        <p:txBody>
+          <a:bodyPr wrap="square" rtlCol="0" anchor="ctr"/>
+          <a:lstStyle/>
+          <a:p>
+            <a:pPr indent="0" marL="0">
+              <a:buNone/>
+            </a:pPr>
+            <a:r>
+              <a:rPr lang="en-US" sz="1400" b="1" dirty="0">
+                <a:solidFill>
+                  <a:srgbClr val="1B1F3B"/>
+                </a:solidFill>
+                <a:latin typeface="Segoe UI" pitchFamily="34" charset="0"/>
+                <a:ea typeface="Segoe UI" pitchFamily="34" charset="-122"/>
+                <a:cs typeface="Segoe UI" pitchFamily="34" charset="-120"/>
+              </a:rPr>
+              <a:t>Versioning et sauvegarde complète du devis</a:t>
+            </a:r>
+            <a:endParaRPr lang="en-US" sz="1400" dirty="0"/>
+          </a:p>
+        </p:txBody>
+      </p:sp>
+      <p:sp>
+        <p:nvSpPr>
+          <p:cNvPr id="12" name="Text 10"/>
+          <p:cNvSpPr/>
+          <p:nvPr/>
+        </p:nvSpPr>
+        <p:spPr>
+          <a:xfrm>
+            <a:off x="914400" y="3383280"/>
+            <a:ext cx="10332720" cy="594360"/>
+          </a:xfrm>
+          <a:prstGeom prst="rect">
+            <a:avLst/>
+          </a:prstGeom>
+          <a:noFill/>
+          <a:ln/>
+        </p:spPr>
+        <p:txBody>
+          <a:bodyPr wrap="square" rtlCol="0" anchor="ctr"/>
+          <a:lstStyle/>
+          <a:p>
+            <a:pPr indent="0" marL="0">
+              <a:lnSpc>
+                <a:spcPts val="1400"/>
+              </a:lnSpc>
+              <a:buNone/>
+            </a:pPr>
+            <a:r>
+              <a:rPr lang="en-US" sz="1100" dirty="0">
+                <a:solidFill>
+                  <a:srgbClr val="8A7C68"/>
+                </a:solidFill>
+                <a:latin typeface="Segoe UI" pitchFamily="34" charset="0"/>
+                <a:ea typeface="Segoe UI" pitchFamily="34" charset="-122"/>
+                <a:cs typeface="Segoe UI" pitchFamily="34" charset="-120"/>
+              </a:rPr>
+              <a:t>Le numéro de version s'incrémente à chaque enregistrement manuel ; les notes, majorations/minorations et le taux de TVA choisi, qui se perdaient silencieusement, sont désormais bien sauvegardés.</a:t>
+            </a:r>
+            <a:endParaRPr lang="en-US" sz="1100" dirty="0"/>
+          </a:p>
+        </p:txBody>
+      </p:sp>
+      <p:sp>
+        <p:nvSpPr>
+          <p:cNvPr id="13" name="Shape 11"/>
+          <p:cNvSpPr/>
+          <p:nvPr/>
+        </p:nvSpPr>
+        <p:spPr>
+          <a:xfrm>
+            <a:off x="640080" y="4160520"/>
+            <a:ext cx="10881360" cy="1097280"/>
+          </a:xfrm>
+          <a:prstGeom prst="roundRect">
+            <a:avLst>
+              <a:gd name="adj" fmla="val 5000"/>
+            </a:avLst>
+          </a:prstGeom>
+          <a:solidFill>
+            <a:srgbClr val="FFFFFF"/>
+          </a:solidFill>
+          <a:ln w="12700">
+            <a:solidFill>
+              <a:srgbClr val="E4DCCB"/>
+            </a:solidFill>
+            <a:prstDash val="solid"/>
+          </a:ln>
+        </p:spPr>
+      </p:sp>
+      <p:sp>
+        <p:nvSpPr>
+          <p:cNvPr id="14" name="Shape 12"/>
+          <p:cNvSpPr/>
+          <p:nvPr/>
+        </p:nvSpPr>
+        <p:spPr>
+          <a:xfrm>
+            <a:off x="640080" y="4160520"/>
+            <a:ext cx="54864" cy="1097280"/>
+          </a:xfrm>
+          <a:prstGeom prst="rect">
+            <a:avLst/>
+          </a:prstGeom>
+          <a:solidFill>
+            <a:srgbClr val="9A4C1F"/>
+          </a:solidFill>
+          <a:ln/>
+        </p:spPr>
+      </p:sp>
+      <p:sp>
+        <p:nvSpPr>
+          <p:cNvPr id="15" name="Text 13"/>
+          <p:cNvSpPr/>
+          <p:nvPr/>
+        </p:nvSpPr>
+        <p:spPr>
+          <a:xfrm>
+            <a:off x="914400" y="4270248"/>
+            <a:ext cx="10332720" cy="365760"/>
+          </a:xfrm>
+          <a:prstGeom prst="rect">
+            <a:avLst/>
+          </a:prstGeom>
+          <a:noFill/>
+          <a:ln/>
+        </p:spPr>
+        <p:txBody>
+          <a:bodyPr wrap="square" rtlCol="0" anchor="ctr"/>
+          <a:lstStyle/>
+          <a:p>
+            <a:pPr indent="0" marL="0">
+              <a:buNone/>
+            </a:pPr>
+            <a:r>
+              <a:rPr lang="en-US" sz="1400" b="1" dirty="0">
+                <a:solidFill>
+                  <a:srgbClr val="1B1F3B"/>
+                </a:solidFill>
+                <a:latin typeface="Segoe UI" pitchFamily="34" charset="0"/>
+                <a:ea typeface="Segoe UI" pitchFamily="34" charset="-122"/>
+                <a:cs typeface="Segoe UI" pitchFamily="34" charset="-120"/>
+              </a:rPr>
+              <a:t>Taux horaire par défaut sur la bibliothèque</a:t>
+            </a:r>
+            <a:endParaRPr lang="en-US" sz="1400" dirty="0"/>
+          </a:p>
+        </p:txBody>
+      </p:sp>
+      <p:sp>
+        <p:nvSpPr>
+          <p:cNvPr id="16" name="Text 14"/>
+          <p:cNvSpPr/>
+          <p:nvPr/>
+        </p:nvSpPr>
+        <p:spPr>
+          <a:xfrm>
+            <a:off x="914400" y="4617720"/>
+            <a:ext cx="10332720" cy="594360"/>
+          </a:xfrm>
+          <a:prstGeom prst="rect">
+            <a:avLst/>
+          </a:prstGeom>
+          <a:noFill/>
+          <a:ln/>
+        </p:spPr>
+        <p:txBody>
+          <a:bodyPr wrap="square" rtlCol="0" anchor="ctr"/>
+          <a:lstStyle/>
+          <a:p>
+            <a:pPr indent="0" marL="0">
+              <a:lnSpc>
+                <a:spcPts val="1400"/>
+              </a:lnSpc>
+              <a:buNone/>
+            </a:pPr>
+            <a:r>
+              <a:rPr lang="en-US" sz="1100" dirty="0">
+                <a:solidFill>
+                  <a:srgbClr val="8A7C68"/>
+                </a:solidFill>
+                <a:latin typeface="Segoe UI" pitchFamily="34" charset="0"/>
+                <a:ea typeface="Segoe UI" pitchFamily="34" charset="-122"/>
+                <a:cs typeface="Segoe UI" pitchFamily="34" charset="-120"/>
+              </a:rPr>
+              <a:t>Le taux horaire du profil entreprise sert désormais de valeur par défaut pour chaque ouvrage (liste, création, édition, calcul du coût main d'œuvre).</a:t>
+            </a:r>
+            <a:endParaRPr lang="en-US" sz="1100" dirty="0"/>
+          </a:p>
+        </p:txBody>
+      </p:sp>
+      <p:sp>
+        <p:nvSpPr>
+          <p:cNvPr id="17" name="Text 15"/>
           <p:cNvSpPr/>
           <p:nvPr/>
         </p:nvSpPr>
@@ -7082,7 +8000,7 @@
       </p:sp>
       <p:sp>
         <p:nvSpPr>
-          <p:cNvPr id="10" name="Text 8"/>
+          <p:cNvPr id="18" name="Text 16"/>
           <p:cNvSpPr/>
           <p:nvPr/>
         </p:nvSpPr>
@@ -7245,7 +8163,7 @@
                 <a:ea typeface="Georgia" pitchFamily="34" charset="-122"/>
                 <a:cs typeface="Georgia" pitchFamily="34" charset="-120"/>
               </a:rPr>
-              <a:t>Signature &amp; portails</a:t>
+              <a:t>Chantiers</a:t>
             </a:r>
             <a:endParaRPr lang="en-US" sz="2400" dirty="0"/>
           </a:p>
@@ -7331,7 +8249,7 @@
                 <a:ea typeface="Segoe UI" pitchFamily="34" charset="-122"/>
                 <a:cs typeface="Segoe UI" pitchFamily="34" charset="-120"/>
               </a:rPr>
-              <a:t>Signature client branchée sur Supabase</a:t>
+              <a:t>Correction d'un bug bloquant majeur</a:t>
             </a:r>
             <a:endParaRPr lang="en-US" sz="1400" dirty="0"/>
           </a:p>
@@ -7373,7 +8291,7 @@
                 <a:ea typeface="Segoe UI" pitchFamily="34" charset="-122"/>
                 <a:cs typeface="Segoe UI" pitchFamily="34" charset="-120"/>
               </a:rPr>
-              <a:t>Le client qui signe un devis n'a pas de session Kôji : une clé technique dédiée (service_role) permet de retrouver et mettre à jour son devis directement dans la base partagée.</a:t>
+              <a:t>Un chantier ne pouvait être consulté que si son devis était déjà signé par le client, empêchant toute préparation en amont. Corrigé : la fiche chantier est désormais accessible dès sa création.</a:t>
             </a:r>
             <a:endParaRPr lang="en-US" sz="1100" dirty="0"/>
           </a:p>
@@ -7459,7 +8377,7 @@
                 <a:ea typeface="Segoe UI" pitchFamily="34" charset="-122"/>
                 <a:cs typeface="Segoe UI" pitchFamily="34" charset="-120"/>
               </a:rPr>
-              <a:t>Audit complet du portail client</a:t>
+              <a:t>Dépenses liées à un ouvrage précis</a:t>
             </a:r>
             <a:endParaRPr lang="en-US" sz="1400" dirty="0"/>
           </a:p>
@@ -7501,7 +8419,7 @@
                 <a:ea typeface="Segoe UI" pitchFamily="34" charset="-122"/>
                 <a:cs typeface="Segoe UI" pitchFamily="34" charset="-120"/>
               </a:rPr>
-              <a:t>Plusieurs routes (connexion client, devis/tâches/notes du portail, création de factures) lisaient encore l'ancien fichier JSON local et ne trouvaient plus aucune donnée récente depuis la migration Supabase des devis — toutes corrigées.</a:t>
+              <a:t>L'API des dépenses accepte désormais un identifiant de tâche (ouvrage) en plus du chantier, pour un suivi financier plus fin.</a:t>
             </a:r>
             <a:endParaRPr lang="en-US" sz="1100" dirty="0"/>
           </a:p>
@@ -7509,135 +8427,7 @@
       </p:sp>
       <p:sp>
         <p:nvSpPr>
-          <p:cNvPr id="13" name="Shape 11"/>
-          <p:cNvSpPr/>
-          <p:nvPr/>
-        </p:nvSpPr>
-        <p:spPr>
-          <a:xfrm>
-            <a:off x="640080" y="4160520"/>
-            <a:ext cx="10881360" cy="1097280"/>
-          </a:xfrm>
-          <a:prstGeom prst="roundRect">
-            <a:avLst>
-              <a:gd name="adj" fmla="val 5000"/>
-            </a:avLst>
-          </a:prstGeom>
-          <a:solidFill>
-            <a:srgbClr val="FFFFFF"/>
-          </a:solidFill>
-          <a:ln w="12700">
-            <a:solidFill>
-              <a:srgbClr val="E4DCCB"/>
-            </a:solidFill>
-            <a:prstDash val="solid"/>
-          </a:ln>
-        </p:spPr>
-      </p:sp>
-      <p:sp>
-        <p:nvSpPr>
-          <p:cNvPr id="14" name="Shape 12"/>
-          <p:cNvSpPr/>
-          <p:nvPr/>
-        </p:nvSpPr>
-        <p:spPr>
-          <a:xfrm>
-            <a:off x="640080" y="4160520"/>
-            <a:ext cx="54864" cy="1097280"/>
-          </a:xfrm>
-          <a:prstGeom prst="rect">
-            <a:avLst/>
-          </a:prstGeom>
-          <a:solidFill>
-            <a:srgbClr val="9A4C1F"/>
-          </a:solidFill>
-          <a:ln/>
-        </p:spPr>
-      </p:sp>
-      <p:sp>
-        <p:nvSpPr>
-          <p:cNvPr id="15" name="Text 13"/>
-          <p:cNvSpPr/>
-          <p:nvPr/>
-        </p:nvSpPr>
-        <p:spPr>
-          <a:xfrm>
-            <a:off x="914400" y="4270248"/>
-            <a:ext cx="10332720" cy="365760"/>
-          </a:xfrm>
-          <a:prstGeom prst="rect">
-            <a:avLst/>
-          </a:prstGeom>
-          <a:noFill/>
-          <a:ln/>
-        </p:spPr>
-        <p:txBody>
-          <a:bodyPr wrap="square" rtlCol="0" anchor="ctr"/>
-          <a:lstStyle/>
-          <a:p>
-            <a:pPr indent="0" marL="0">
-              <a:buNone/>
-            </a:pPr>
-            <a:r>
-              <a:rPr lang="en-US" sz="1400" b="1" dirty="0">
-                <a:solidFill>
-                  <a:srgbClr val="1B1F3B"/>
-                </a:solidFill>
-                <a:latin typeface="Segoe UI" pitchFamily="34" charset="0"/>
-                <a:ea typeface="Segoe UI" pitchFamily="34" charset="-122"/>
-                <a:cs typeface="Segoe UI" pitchFamily="34" charset="-120"/>
-              </a:rPr>
-              <a:t>Suivi du temps par ouvrage</a:t>
-            </a:r>
-            <a:endParaRPr lang="en-US" sz="1400" dirty="0"/>
-          </a:p>
-        </p:txBody>
-      </p:sp>
-      <p:sp>
-        <p:nvSpPr>
-          <p:cNvPr id="16" name="Text 14"/>
-          <p:cNvSpPr/>
-          <p:nvPr/>
-        </p:nvSpPr>
-        <p:spPr>
-          <a:xfrm>
-            <a:off x="914400" y="4617720"/>
-            <a:ext cx="10332720" cy="594360"/>
-          </a:xfrm>
-          <a:prstGeom prst="rect">
-            <a:avLst/>
-          </a:prstGeom>
-          <a:noFill/>
-          <a:ln/>
-        </p:spPr>
-        <p:txBody>
-          <a:bodyPr wrap="square" rtlCol="0" anchor="ctr"/>
-          <a:lstStyle/>
-          <a:p>
-            <a:pPr indent="0" marL="0">
-              <a:lnSpc>
-                <a:spcPts val="1400"/>
-              </a:lnSpc>
-              <a:buNone/>
-            </a:pPr>
-            <a:r>
-              <a:rPr lang="en-US" sz="1100" dirty="0">
-                <a:solidFill>
-                  <a:srgbClr val="8A7C68"/>
-                </a:solidFill>
-                <a:latin typeface="Segoe UI" pitchFamily="34" charset="0"/>
-                <a:ea typeface="Segoe UI" pitchFamily="34" charset="-122"/>
-                <a:cs typeface="Segoe UI" pitchFamily="34" charset="-120"/>
-              </a:rPr>
-              <a:t>Boutons Démarrer / Pause / Reprendre / Terminer par tâche, avec calcul automatique du temps consommé et alerte en cas de dépassement du temps prévu.</a:t>
-            </a:r>
-            <a:endParaRPr lang="en-US" sz="1100" dirty="0"/>
-          </a:p>
-        </p:txBody>
-      </p:sp>
-      <p:sp>
-        <p:nvSpPr>
-          <p:cNvPr id="17" name="Text 15"/>
+          <p:cNvPr id="13" name="Text 11"/>
           <p:cNvSpPr/>
           <p:nvPr/>
         </p:nvSpPr>
@@ -7676,7 +8466,7 @@
       </p:sp>
       <p:sp>
         <p:nvSpPr>
-          <p:cNvPr id="18" name="Text 16"/>
+          <p:cNvPr id="14" name="Text 12"/>
           <p:cNvSpPr/>
           <p:nvPr/>
         </p:nvSpPr>
@@ -7839,7 +8629,7 @@
                 <a:ea typeface="Georgia" pitchFamily="34" charset="-122"/>
                 <a:cs typeface="Georgia" pitchFamily="34" charset="-120"/>
               </a:rPr>
-              <a:t>Accueil &amp; stabilité</a:t>
+              <a:t>Équipe</a:t>
             </a:r>
             <a:endParaRPr lang="en-US" sz="2400" dirty="0"/>
           </a:p>
@@ -7925,7 +8715,7 @@
                 <a:ea typeface="Segoe UI" pitchFamily="34" charset="-122"/>
                 <a:cs typeface="Segoe UI" pitchFamily="34" charset="-120"/>
               </a:rPr>
-              <a:t>Reconnexion automatique de session</a:t>
+              <a:t>Six types de pointage</a:t>
             </a:r>
             <a:endParaRPr lang="en-US" sz="1400" dirty="0"/>
           </a:p>
@@ -7967,7 +8757,7 @@
                 <a:ea typeface="Segoe UI" pitchFamily="34" charset="-122"/>
                 <a:cs typeface="Segoe UI" pitchFamily="34" charset="-120"/>
               </a:rPr>
-              <a:t>Une session expirée (~1h) provoquait des échecs silencieux à l'enregistrement (profil, IBAN, devis) sans reconnexion automatique ; la détection couvre désormais tous les cas d'expiration.</a:t>
+              <a:t>Heures de travail, jour de travail, forfait, ouvrage, passage, déplacement — chacun avec date et montant ; le montant des heures est calculé automatiquement à partir du taux horaire de l'ouvrier.</a:t>
             </a:r>
             <a:endParaRPr lang="en-US" sz="1100" dirty="0"/>
           </a:p>
@@ -8053,7 +8843,7 @@
                 <a:ea typeface="Segoe UI" pitchFamily="34" charset="-122"/>
                 <a:cs typeface="Segoe UI" pitchFamily="34" charset="-120"/>
               </a:rPr>
-              <a:t>Corrections de plantages ponctuels</a:t>
+              <a:t>Alertes automatiques de dépassement / manque d'heures</a:t>
             </a:r>
             <a:endParaRPr lang="en-US" sz="1400" dirty="0"/>
           </a:p>
@@ -8095,7 +8885,7 @@
                 <a:ea typeface="Segoe UI" pitchFamily="34" charset="-122"/>
                 <a:cs typeface="Segoe UI" pitchFamily="34" charset="-120"/>
               </a:rPr>
-              <a:t>Plusieurs erreurs bloquantes corrigées au fil des tests (références de code manquantes, composants mal placés).</a:t>
+              <a:t>À la fin de chaque semaine, si le total travaillé diffère du contrat de plus de 15 minutes, une notification est envoyée automatiquement à l'entreprise (une seule fois par semaine et par ouvrier).</a:t>
             </a:r>
             <a:endParaRPr lang="en-US" sz="1100" dirty="0"/>
           </a:p>
@@ -8103,7 +8893,135 @@
       </p:sp>
       <p:sp>
         <p:nvSpPr>
-          <p:cNvPr id="13" name="Text 11"/>
+          <p:cNvPr id="13" name="Shape 11"/>
+          <p:cNvSpPr/>
+          <p:nvPr/>
+        </p:nvSpPr>
+        <p:spPr>
+          <a:xfrm>
+            <a:off x="640080" y="4160520"/>
+            <a:ext cx="10881360" cy="1097280"/>
+          </a:xfrm>
+          <a:prstGeom prst="roundRect">
+            <a:avLst>
+              <a:gd name="adj" fmla="val 5000"/>
+            </a:avLst>
+          </a:prstGeom>
+          <a:solidFill>
+            <a:srgbClr val="FFFFFF"/>
+          </a:solidFill>
+          <a:ln w="12700">
+            <a:solidFill>
+              <a:srgbClr val="E4DCCB"/>
+            </a:solidFill>
+            <a:prstDash val="solid"/>
+          </a:ln>
+        </p:spPr>
+      </p:sp>
+      <p:sp>
+        <p:nvSpPr>
+          <p:cNvPr id="14" name="Shape 12"/>
+          <p:cNvSpPr/>
+          <p:nvPr/>
+        </p:nvSpPr>
+        <p:spPr>
+          <a:xfrm>
+            <a:off x="640080" y="4160520"/>
+            <a:ext cx="54864" cy="1097280"/>
+          </a:xfrm>
+          <a:prstGeom prst="rect">
+            <a:avLst/>
+          </a:prstGeom>
+          <a:solidFill>
+            <a:srgbClr val="9A4C1F"/>
+          </a:solidFill>
+          <a:ln/>
+        </p:spPr>
+      </p:sp>
+      <p:sp>
+        <p:nvSpPr>
+          <p:cNvPr id="15" name="Text 13"/>
+          <p:cNvSpPr/>
+          <p:nvPr/>
+        </p:nvSpPr>
+        <p:spPr>
+          <a:xfrm>
+            <a:off x="914400" y="4270248"/>
+            <a:ext cx="10332720" cy="365760"/>
+          </a:xfrm>
+          <a:prstGeom prst="rect">
+            <a:avLst/>
+          </a:prstGeom>
+          <a:noFill/>
+          <a:ln/>
+        </p:spPr>
+        <p:txBody>
+          <a:bodyPr wrap="square" rtlCol="0" anchor="ctr"/>
+          <a:lstStyle/>
+          <a:p>
+            <a:pPr indent="0" marL="0">
+              <a:buNone/>
+            </a:pPr>
+            <a:r>
+              <a:rPr lang="en-US" sz="1400" b="1" dirty="0">
+                <a:solidFill>
+                  <a:srgbClr val="1B1F3B"/>
+                </a:solidFill>
+                <a:latin typeface="Segoe UI" pitchFamily="34" charset="0"/>
+                <a:ea typeface="Segoe UI" pitchFamily="34" charset="-122"/>
+                <a:cs typeface="Segoe UI" pitchFamily="34" charset="-120"/>
+              </a:rPr>
+              <a:t>Export PDF du relevé d'heures</a:t>
+            </a:r>
+            <a:endParaRPr lang="en-US" sz="1400" dirty="0"/>
+          </a:p>
+        </p:txBody>
+      </p:sp>
+      <p:sp>
+        <p:nvSpPr>
+          <p:cNvPr id="16" name="Text 14"/>
+          <p:cNvSpPr/>
+          <p:nvPr/>
+        </p:nvSpPr>
+        <p:spPr>
+          <a:xfrm>
+            <a:off x="914400" y="4617720"/>
+            <a:ext cx="10332720" cy="594360"/>
+          </a:xfrm>
+          <a:prstGeom prst="rect">
+            <a:avLst/>
+          </a:prstGeom>
+          <a:noFill/>
+          <a:ln/>
+        </p:spPr>
+        <p:txBody>
+          <a:bodyPr wrap="square" rtlCol="0" anchor="ctr"/>
+          <a:lstStyle/>
+          <a:p>
+            <a:pPr indent="0" marL="0">
+              <a:lnSpc>
+                <a:spcPts val="1400"/>
+              </a:lnSpc>
+              <a:buNone/>
+            </a:pPr>
+            <a:r>
+              <a:rPr lang="en-US" sz="1100" dirty="0">
+                <a:solidFill>
+                  <a:srgbClr val="8A7C68"/>
+                </a:solidFill>
+                <a:latin typeface="Segoe UI" pitchFamily="34" charset="0"/>
+                <a:ea typeface="Segoe UI" pitchFamily="34" charset="-122"/>
+                <a:cs typeface="Segoe UI" pitchFamily="34" charset="-120"/>
+              </a:rPr>
+              <a:t>Génération d'un PDF mensuel par ouvrier : détail par journée/type de pointage, totaux hebdomadaires, total du mois en heures et en montant — pensé pour la comptabilité et la gestion de la paie.</a:t>
+            </a:r>
+            <a:endParaRPr lang="en-US" sz="1100" dirty="0"/>
+          </a:p>
+        </p:txBody>
+      </p:sp>
+      <p:sp>
+        <p:nvSpPr>
+          <p:cNvPr id="17" name="Text 15"/>
           <p:cNvSpPr/>
           <p:nvPr/>
         </p:nvSpPr>
@@ -8142,7 +9060,7 @@
       </p:sp>
       <p:sp>
         <p:nvSpPr>
-          <p:cNvPr id="14" name="Text 12"/>
+          <p:cNvPr id="18" name="Text 16"/>
           <p:cNvSpPr/>
           <p:nvPr/>
         </p:nvSpPr>
@@ -8349,7 +9267,7 @@
                 <a:ea typeface="Georgia" pitchFamily="34" charset="-122"/>
                 <a:cs typeface="Georgia" pitchFamily="34" charset="-120"/>
               </a:rPr>
-              <a:t>45</a:t>
+              <a:t>61</a:t>
             </a:r>
             <a:endParaRPr lang="en-US" sz="3200" dirty="0"/>
           </a:p>
@@ -8454,7 +9372,7 @@
                 <a:ea typeface="Georgia" pitchFamily="34" charset="-122"/>
                 <a:cs typeface="Georgia" pitchFamily="34" charset="-120"/>
               </a:rPr>
-              <a:t>24</a:t>
+              <a:t>33</a:t>
             </a:r>
             <a:endParaRPr lang="en-US" sz="3200" dirty="0"/>
           </a:p>
@@ -8559,7 +9477,7 @@
                 <a:ea typeface="Georgia" pitchFamily="34" charset="-122"/>
                 <a:cs typeface="Georgia" pitchFamily="34" charset="-120"/>
               </a:rPr>
-              <a:t>16</a:t>
+              <a:t>23</a:t>
             </a:r>
             <a:endParaRPr lang="en-US" sz="3200" dirty="0"/>
           </a:p>
@@ -8958,7 +9876,7 @@
     <p:bg>
       <p:bgPr>
         <a:solidFill>
-          <a:srgbClr val="0B1030"/>
+          <a:srgbClr val="F3EEE3"/>
         </a:solidFill>
       </p:bgPr>
     </p:bg>
@@ -8984,14 +9902,16 @@
         </p:nvSpPr>
         <p:spPr>
           <a:xfrm>
-            <a:off x="0" y="3246120"/>
-            <a:ext cx="12191695" cy="54864"/>
-          </a:xfrm>
-          <a:prstGeom prst="rect">
-            <a:avLst/>
+            <a:off x="640080" y="411480"/>
+            <a:ext cx="2377440" cy="365760"/>
+          </a:xfrm>
+          <a:prstGeom prst="roundRect">
+            <a:avLst>
+              <a:gd name="adj" fmla="val 50000"/>
+            </a:avLst>
           </a:prstGeom>
           <a:solidFill>
-            <a:srgbClr val="386641"/>
+            <a:srgbClr val="F5E6DA"/>
           </a:solidFill>
           <a:ln/>
         </p:spPr>
@@ -9004,118 +9924,207 @@
         </p:nvSpPr>
         <p:spPr>
           <a:xfrm>
-            <a:off x="640080" y="2468880"/>
-            <a:ext cx="10058400" cy="914400"/>
-          </a:xfrm>
-          <a:prstGeom prst="rect">
-            <a:avLst/>
-          </a:prstGeom>
-          <a:noFill/>
-          <a:ln/>
-        </p:spPr>
-        <p:txBody>
-          <a:bodyPr wrap="square" rtlCol="0" anchor="ctr"/>
-          <a:lstStyle/>
-          <a:p>
-            <a:pPr indent="0" marL="0">
-              <a:buNone/>
-            </a:pPr>
-            <a:r>
-              <a:rPr lang="en-US" sz="3800" b="1" dirty="0">
-                <a:solidFill>
-                  <a:srgbClr val="FFFFFF"/>
+            <a:off x="640080" y="411480"/>
+            <a:ext cx="2377440" cy="365760"/>
+          </a:xfrm>
+          <a:prstGeom prst="rect">
+            <a:avLst/>
+          </a:prstGeom>
+          <a:noFill/>
+          <a:ln/>
+        </p:spPr>
+        <p:txBody>
+          <a:bodyPr wrap="square" rtlCol="0" anchor="ctr"/>
+          <a:lstStyle/>
+          <a:p>
+            <a:pPr algn="ctr" indent="0" marL="0">
+              <a:buNone/>
+            </a:pPr>
+            <a:r>
+              <a:rPr lang="en-US" sz="1000" b="1" spc="100" kern="0" dirty="0">
+                <a:solidFill>
+                  <a:srgbClr val="9A4C1F"/>
+                </a:solidFill>
+                <a:latin typeface="Segoe UI" pitchFamily="34" charset="0"/>
+                <a:ea typeface="Segoe UI" pitchFamily="34" charset="-122"/>
+                <a:cs typeface="Segoe UI" pitchFamily="34" charset="-120"/>
+              </a:rPr>
+              <a:t>BACKEND</a:t>
+            </a:r>
+            <a:endParaRPr lang="en-US" sz="1000" dirty="0"/>
+          </a:p>
+        </p:txBody>
+      </p:sp>
+      <p:sp>
+        <p:nvSpPr>
+          <p:cNvPr id="4" name="Text 2"/>
+          <p:cNvSpPr/>
+          <p:nvPr/>
+        </p:nvSpPr>
+        <p:spPr>
+          <a:xfrm>
+            <a:off x="640080" y="868680"/>
+            <a:ext cx="10515600" cy="548640"/>
+          </a:xfrm>
+          <a:prstGeom prst="rect">
+            <a:avLst/>
+          </a:prstGeom>
+          <a:noFill/>
+          <a:ln/>
+        </p:spPr>
+        <p:txBody>
+          <a:bodyPr wrap="square" rtlCol="0" anchor="ctr"/>
+          <a:lstStyle/>
+          <a:p>
+            <a:pPr indent="0" marL="0">
+              <a:buNone/>
+            </a:pPr>
+            <a:r>
+              <a:rPr lang="en-US" sz="2400" b="1" dirty="0">
+                <a:solidFill>
+                  <a:srgbClr val="1B1F3B"/>
                 </a:solidFill>
                 <a:latin typeface="Georgia" pitchFamily="34" charset="0"/>
                 <a:ea typeface="Georgia" pitchFamily="34" charset="-122"/>
                 <a:cs typeface="Georgia" pitchFamily="34" charset="-120"/>
               </a:rPr>
-              <a:t>Base de données</a:t>
-            </a:r>
-            <a:endParaRPr lang="en-US" sz="3800" dirty="0"/>
-          </a:p>
-        </p:txBody>
-      </p:sp>
-      <p:sp>
-        <p:nvSpPr>
-          <p:cNvPr id="4" name="Text 2"/>
-          <p:cNvSpPr/>
-          <p:nvPr/>
-        </p:nvSpPr>
-        <p:spPr>
-          <a:xfrm>
-            <a:off x="640080" y="3429000"/>
-            <a:ext cx="10058400" cy="457200"/>
-          </a:xfrm>
-          <a:prstGeom prst="rect">
-            <a:avLst/>
-          </a:prstGeom>
-          <a:noFill/>
-          <a:ln/>
-        </p:spPr>
-        <p:txBody>
-          <a:bodyPr wrap="square" rtlCol="0" anchor="ctr"/>
-          <a:lstStyle/>
-          <a:p>
-            <a:pPr indent="0" marL="0">
-              <a:buNone/>
-            </a:pPr>
-            <a:r>
-              <a:rPr lang="en-US" sz="1500" dirty="0">
-                <a:solidFill>
-                  <a:srgbClr val="C7C9E0"/>
-                </a:solidFill>
-                <a:latin typeface="Segoe UI" pitchFamily="34" charset="0"/>
-                <a:ea typeface="Segoe UI" pitchFamily="34" charset="-122"/>
-                <a:cs typeface="Segoe UI" pitchFamily="34" charset="-120"/>
-              </a:rPr>
-              <a:t>Modèle de données et infrastructure</a:t>
-            </a:r>
-            <a:endParaRPr lang="en-US" sz="1500" dirty="0"/>
-          </a:p>
-        </p:txBody>
-      </p:sp>
-      <p:sp>
-        <p:nvSpPr>
-          <p:cNvPr id="5" name="Text 3"/>
-          <p:cNvSpPr/>
-          <p:nvPr/>
-        </p:nvSpPr>
-        <p:spPr>
-          <a:xfrm>
-            <a:off x="640080" y="3931920"/>
-            <a:ext cx="5486400" cy="365760"/>
-          </a:xfrm>
-          <a:prstGeom prst="rect">
-            <a:avLst/>
-          </a:prstGeom>
-          <a:noFill/>
-          <a:ln/>
-        </p:spPr>
-        <p:txBody>
-          <a:bodyPr wrap="square" rtlCol="0" anchor="ctr"/>
-          <a:lstStyle/>
-          <a:p>
-            <a:pPr indent="0" marL="0">
-              <a:buNone/>
-            </a:pPr>
-            <a:r>
-              <a:rPr lang="en-US" sz="1200" b="1" dirty="0">
-                <a:solidFill>
-                  <a:srgbClr val="C9A96A"/>
-                </a:solidFill>
-                <a:latin typeface="Segoe UI" pitchFamily="34" charset="0"/>
-                <a:ea typeface="Segoe UI" pitchFamily="34" charset="-122"/>
-                <a:cs typeface="Segoe UI" pitchFamily="34" charset="-120"/>
-              </a:rPr>
-              <a:t>5 mise(s) à jour</a:t>
-            </a:r>
-            <a:endParaRPr lang="en-US" sz="1200" dirty="0"/>
-          </a:p>
-        </p:txBody>
-      </p:sp>
-      <p:sp>
-        <p:nvSpPr>
-          <p:cNvPr id="6" name="Text 4"/>
+              <a:t>Notifications</a:t>
+            </a:r>
+            <a:endParaRPr lang="en-US" sz="2400" dirty="0"/>
+          </a:p>
+        </p:txBody>
+      </p:sp>
+      <p:sp>
+        <p:nvSpPr>
+          <p:cNvPr id="5" name="Shape 3"/>
+          <p:cNvSpPr/>
+          <p:nvPr/>
+        </p:nvSpPr>
+        <p:spPr>
+          <a:xfrm>
+            <a:off x="640080" y="1691640"/>
+            <a:ext cx="10881360" cy="1097280"/>
+          </a:xfrm>
+          <a:prstGeom prst="roundRect">
+            <a:avLst>
+              <a:gd name="adj" fmla="val 5000"/>
+            </a:avLst>
+          </a:prstGeom>
+          <a:solidFill>
+            <a:srgbClr val="FFFFFF"/>
+          </a:solidFill>
+          <a:ln w="12700">
+            <a:solidFill>
+              <a:srgbClr val="E4DCCB"/>
+            </a:solidFill>
+            <a:prstDash val="solid"/>
+          </a:ln>
+        </p:spPr>
+      </p:sp>
+      <p:sp>
+        <p:nvSpPr>
+          <p:cNvPr id="6" name="Shape 4"/>
+          <p:cNvSpPr/>
+          <p:nvPr/>
+        </p:nvSpPr>
+        <p:spPr>
+          <a:xfrm>
+            <a:off x="640080" y="1691640"/>
+            <a:ext cx="54864" cy="1097280"/>
+          </a:xfrm>
+          <a:prstGeom prst="rect">
+            <a:avLst/>
+          </a:prstGeom>
+          <a:solidFill>
+            <a:srgbClr val="9A4C1F"/>
+          </a:solidFill>
+          <a:ln/>
+        </p:spPr>
+      </p:sp>
+      <p:sp>
+        <p:nvSpPr>
+          <p:cNvPr id="7" name="Text 5"/>
+          <p:cNvSpPr/>
+          <p:nvPr/>
+        </p:nvSpPr>
+        <p:spPr>
+          <a:xfrm>
+            <a:off x="914400" y="1801368"/>
+            <a:ext cx="10332720" cy="365760"/>
+          </a:xfrm>
+          <a:prstGeom prst="rect">
+            <a:avLst/>
+          </a:prstGeom>
+          <a:noFill/>
+          <a:ln/>
+        </p:spPr>
+        <p:txBody>
+          <a:bodyPr wrap="square" rtlCol="0" anchor="ctr"/>
+          <a:lstStyle/>
+          <a:p>
+            <a:pPr indent="0" marL="0">
+              <a:buNone/>
+            </a:pPr>
+            <a:r>
+              <a:rPr lang="en-US" sz="1400" b="1" dirty="0">
+                <a:solidFill>
+                  <a:srgbClr val="1B1F3B"/>
+                </a:solidFill>
+                <a:latin typeface="Segoe UI" pitchFamily="34" charset="0"/>
+                <a:ea typeface="Segoe UI" pitchFamily="34" charset="-122"/>
+                <a:cs typeface="Segoe UI" pitchFamily="34" charset="-120"/>
+              </a:rPr>
+              <a:t>Envoi d'email réel à la signature du devis</a:t>
+            </a:r>
+            <a:endParaRPr lang="en-US" sz="1400" dirty="0"/>
+          </a:p>
+        </p:txBody>
+      </p:sp>
+      <p:sp>
+        <p:nvSpPr>
+          <p:cNvPr id="8" name="Text 6"/>
+          <p:cNvSpPr/>
+          <p:nvPr/>
+        </p:nvSpPr>
+        <p:spPr>
+          <a:xfrm>
+            <a:off x="914400" y="2148840"/>
+            <a:ext cx="10332720" cy="594360"/>
+          </a:xfrm>
+          <a:prstGeom prst="rect">
+            <a:avLst/>
+          </a:prstGeom>
+          <a:noFill/>
+          <a:ln/>
+        </p:spPr>
+        <p:txBody>
+          <a:bodyPr wrap="square" rtlCol="0" anchor="ctr"/>
+          <a:lstStyle/>
+          <a:p>
+            <a:pPr indent="0" marL="0">
+              <a:lnSpc>
+                <a:spcPts val="1400"/>
+              </a:lnSpc>
+              <a:buNone/>
+            </a:pPr>
+            <a:r>
+              <a:rPr lang="en-US" sz="1100" dirty="0">
+                <a:solidFill>
+                  <a:srgbClr val="8A7C68"/>
+                </a:solidFill>
+                <a:latin typeface="Segoe UI" pitchFamily="34" charset="0"/>
+                <a:ea typeface="Segoe UI" pitchFamily="34" charset="-122"/>
+                <a:cs typeface="Segoe UI" pitchFamily="34" charset="-120"/>
+              </a:rPr>
+              <a:t>Le premier envoi des identifiants client déclenche désormais un vrai email (SMTP), et plus seulement une file d'attente locale.</a:t>
+            </a:r>
+            <a:endParaRPr lang="en-US" sz="1100" dirty="0"/>
+          </a:p>
+        </p:txBody>
+      </p:sp>
+      <p:sp>
+        <p:nvSpPr>
+          <p:cNvPr id="9" name="Text 7"/>
           <p:cNvSpPr/>
           <p:nvPr/>
         </p:nvSpPr>
@@ -9154,7 +10163,7 @@
       </p:sp>
       <p:sp>
         <p:nvSpPr>
-          <p:cNvPr id="7" name="Text 5"/>
+          <p:cNvPr id="10" name="Text 8"/>
           <p:cNvSpPr/>
           <p:nvPr/>
         </p:nvSpPr>
@@ -9240,7 +10249,7 @@
             </a:avLst>
           </a:prstGeom>
           <a:solidFill>
-            <a:srgbClr val="E6EFE4"/>
+            <a:srgbClr val="F5E6DA"/>
           </a:solidFill>
           <a:ln/>
         </p:spPr>
@@ -9272,13 +10281,13 @@
             <a:r>
               <a:rPr lang="en-US" sz="1000" b="1" spc="100" kern="0" dirty="0">
                 <a:solidFill>
-                  <a:srgbClr val="386641"/>
-                </a:solidFill>
-                <a:latin typeface="Segoe UI" pitchFamily="34" charset="0"/>
-                <a:ea typeface="Segoe UI" pitchFamily="34" charset="-122"/>
-                <a:cs typeface="Segoe UI" pitchFamily="34" charset="-120"/>
-              </a:rPr>
-              <a:t>BASE DE DONNÉES</a:t>
+                  <a:srgbClr val="9A4C1F"/>
+                </a:solidFill>
+                <a:latin typeface="Segoe UI" pitchFamily="34" charset="0"/>
+                <a:ea typeface="Segoe UI" pitchFamily="34" charset="-122"/>
+                <a:cs typeface="Segoe UI" pitchFamily="34" charset="-120"/>
+              </a:rPr>
+              <a:t>BACKEND</a:t>
             </a:r>
             <a:endParaRPr lang="en-US" sz="1000" dirty="0"/>
           </a:p>
@@ -9317,7 +10326,7 @@
                 <a:ea typeface="Georgia" pitchFamily="34" charset="-122"/>
                 <a:cs typeface="Georgia" pitchFamily="34" charset="-120"/>
               </a:rPr>
-              <a:t>Fondations</a:t>
+              <a:t>Signature &amp; portails</a:t>
             </a:r>
             <a:endParaRPr lang="en-US" sz="2400" dirty="0"/>
           </a:p>
@@ -9365,7 +10374,7 @@
             <a:avLst/>
           </a:prstGeom>
           <a:solidFill>
-            <a:srgbClr val="386641"/>
+            <a:srgbClr val="9A4C1F"/>
           </a:solidFill>
           <a:ln/>
         </p:spPr>
@@ -9403,7 +10412,7 @@
                 <a:ea typeface="Segoe UI" pitchFamily="34" charset="-122"/>
                 <a:cs typeface="Segoe UI" pitchFamily="34" charset="-120"/>
               </a:rPr>
-              <a:t>Connexion Vercel / configuration environnement</a:t>
+              <a:t>Signature client branchée sur Supabase</a:t>
             </a:r>
             <a:endParaRPr lang="en-US" sz="1400" dirty="0"/>
           </a:p>
@@ -9445,7 +10454,7 @@
                 <a:ea typeface="Segoe UI" pitchFamily="34" charset="-122"/>
                 <a:cs typeface="Segoe UI" pitchFamily="34" charset="-120"/>
               </a:rPr>
-              <a:t>Correction de la configuration d'authentification et du SMTP sur l'environnement de production Vercel.</a:t>
+              <a:t>Le client qui signe un devis n'a pas de session Kôji : une clé technique dédiée (service_role) permet de retrouver et mettre à jour son devis directement dans la base partagée.</a:t>
             </a:r>
             <a:endParaRPr lang="en-US" sz="1100" dirty="0"/>
           </a:p>
@@ -9453,7 +10462,263 @@
       </p:sp>
       <p:sp>
         <p:nvSpPr>
-          <p:cNvPr id="9" name="Text 7"/>
+          <p:cNvPr id="9" name="Shape 7"/>
+          <p:cNvSpPr/>
+          <p:nvPr/>
+        </p:nvSpPr>
+        <p:spPr>
+          <a:xfrm>
+            <a:off x="640080" y="2926080"/>
+            <a:ext cx="10881360" cy="1097280"/>
+          </a:xfrm>
+          <a:prstGeom prst="roundRect">
+            <a:avLst>
+              <a:gd name="adj" fmla="val 5000"/>
+            </a:avLst>
+          </a:prstGeom>
+          <a:solidFill>
+            <a:srgbClr val="FFFFFF"/>
+          </a:solidFill>
+          <a:ln w="12700">
+            <a:solidFill>
+              <a:srgbClr val="E4DCCB"/>
+            </a:solidFill>
+            <a:prstDash val="solid"/>
+          </a:ln>
+        </p:spPr>
+      </p:sp>
+      <p:sp>
+        <p:nvSpPr>
+          <p:cNvPr id="10" name="Shape 8"/>
+          <p:cNvSpPr/>
+          <p:nvPr/>
+        </p:nvSpPr>
+        <p:spPr>
+          <a:xfrm>
+            <a:off x="640080" y="2926080"/>
+            <a:ext cx="54864" cy="1097280"/>
+          </a:xfrm>
+          <a:prstGeom prst="rect">
+            <a:avLst/>
+          </a:prstGeom>
+          <a:solidFill>
+            <a:srgbClr val="9A4C1F"/>
+          </a:solidFill>
+          <a:ln/>
+        </p:spPr>
+      </p:sp>
+      <p:sp>
+        <p:nvSpPr>
+          <p:cNvPr id="11" name="Text 9"/>
+          <p:cNvSpPr/>
+          <p:nvPr/>
+        </p:nvSpPr>
+        <p:spPr>
+          <a:xfrm>
+            <a:off x="914400" y="3035808"/>
+            <a:ext cx="10332720" cy="365760"/>
+          </a:xfrm>
+          <a:prstGeom prst="rect">
+            <a:avLst/>
+          </a:prstGeom>
+          <a:noFill/>
+          <a:ln/>
+        </p:spPr>
+        <p:txBody>
+          <a:bodyPr wrap="square" rtlCol="0" anchor="ctr"/>
+          <a:lstStyle/>
+          <a:p>
+            <a:pPr indent="0" marL="0">
+              <a:buNone/>
+            </a:pPr>
+            <a:r>
+              <a:rPr lang="en-US" sz="1400" b="1" dirty="0">
+                <a:solidFill>
+                  <a:srgbClr val="1B1F3B"/>
+                </a:solidFill>
+                <a:latin typeface="Segoe UI" pitchFamily="34" charset="0"/>
+                <a:ea typeface="Segoe UI" pitchFamily="34" charset="-122"/>
+                <a:cs typeface="Segoe UI" pitchFamily="34" charset="-120"/>
+              </a:rPr>
+              <a:t>Audit complet du portail client</a:t>
+            </a:r>
+            <a:endParaRPr lang="en-US" sz="1400" dirty="0"/>
+          </a:p>
+        </p:txBody>
+      </p:sp>
+      <p:sp>
+        <p:nvSpPr>
+          <p:cNvPr id="12" name="Text 10"/>
+          <p:cNvSpPr/>
+          <p:nvPr/>
+        </p:nvSpPr>
+        <p:spPr>
+          <a:xfrm>
+            <a:off x="914400" y="3383280"/>
+            <a:ext cx="10332720" cy="594360"/>
+          </a:xfrm>
+          <a:prstGeom prst="rect">
+            <a:avLst/>
+          </a:prstGeom>
+          <a:noFill/>
+          <a:ln/>
+        </p:spPr>
+        <p:txBody>
+          <a:bodyPr wrap="square" rtlCol="0" anchor="ctr"/>
+          <a:lstStyle/>
+          <a:p>
+            <a:pPr indent="0" marL="0">
+              <a:lnSpc>
+                <a:spcPts val="1400"/>
+              </a:lnSpc>
+              <a:buNone/>
+            </a:pPr>
+            <a:r>
+              <a:rPr lang="en-US" sz="1100" dirty="0">
+                <a:solidFill>
+                  <a:srgbClr val="8A7C68"/>
+                </a:solidFill>
+                <a:latin typeface="Segoe UI" pitchFamily="34" charset="0"/>
+                <a:ea typeface="Segoe UI" pitchFamily="34" charset="-122"/>
+                <a:cs typeface="Segoe UI" pitchFamily="34" charset="-120"/>
+              </a:rPr>
+              <a:t>Plusieurs routes (connexion client, devis/tâches/notes du portail, création de factures) lisaient encore l'ancien fichier JSON local et ne trouvaient plus aucune donnée récente depuis la migration Supabase des devis — toutes corrigées.</a:t>
+            </a:r>
+            <a:endParaRPr lang="en-US" sz="1100" dirty="0"/>
+          </a:p>
+        </p:txBody>
+      </p:sp>
+      <p:sp>
+        <p:nvSpPr>
+          <p:cNvPr id="13" name="Shape 11"/>
+          <p:cNvSpPr/>
+          <p:nvPr/>
+        </p:nvSpPr>
+        <p:spPr>
+          <a:xfrm>
+            <a:off x="640080" y="4160520"/>
+            <a:ext cx="10881360" cy="1097280"/>
+          </a:xfrm>
+          <a:prstGeom prst="roundRect">
+            <a:avLst>
+              <a:gd name="adj" fmla="val 5000"/>
+            </a:avLst>
+          </a:prstGeom>
+          <a:solidFill>
+            <a:srgbClr val="FFFFFF"/>
+          </a:solidFill>
+          <a:ln w="12700">
+            <a:solidFill>
+              <a:srgbClr val="E4DCCB"/>
+            </a:solidFill>
+            <a:prstDash val="solid"/>
+          </a:ln>
+        </p:spPr>
+      </p:sp>
+      <p:sp>
+        <p:nvSpPr>
+          <p:cNvPr id="14" name="Shape 12"/>
+          <p:cNvSpPr/>
+          <p:nvPr/>
+        </p:nvSpPr>
+        <p:spPr>
+          <a:xfrm>
+            <a:off x="640080" y="4160520"/>
+            <a:ext cx="54864" cy="1097280"/>
+          </a:xfrm>
+          <a:prstGeom prst="rect">
+            <a:avLst/>
+          </a:prstGeom>
+          <a:solidFill>
+            <a:srgbClr val="9A4C1F"/>
+          </a:solidFill>
+          <a:ln/>
+        </p:spPr>
+      </p:sp>
+      <p:sp>
+        <p:nvSpPr>
+          <p:cNvPr id="15" name="Text 13"/>
+          <p:cNvSpPr/>
+          <p:nvPr/>
+        </p:nvSpPr>
+        <p:spPr>
+          <a:xfrm>
+            <a:off x="914400" y="4270248"/>
+            <a:ext cx="10332720" cy="365760"/>
+          </a:xfrm>
+          <a:prstGeom prst="rect">
+            <a:avLst/>
+          </a:prstGeom>
+          <a:noFill/>
+          <a:ln/>
+        </p:spPr>
+        <p:txBody>
+          <a:bodyPr wrap="square" rtlCol="0" anchor="ctr"/>
+          <a:lstStyle/>
+          <a:p>
+            <a:pPr indent="0" marL="0">
+              <a:buNone/>
+            </a:pPr>
+            <a:r>
+              <a:rPr lang="en-US" sz="1400" b="1" dirty="0">
+                <a:solidFill>
+                  <a:srgbClr val="1B1F3B"/>
+                </a:solidFill>
+                <a:latin typeface="Segoe UI" pitchFamily="34" charset="0"/>
+                <a:ea typeface="Segoe UI" pitchFamily="34" charset="-122"/>
+                <a:cs typeface="Segoe UI" pitchFamily="34" charset="-120"/>
+              </a:rPr>
+              <a:t>Suivi du temps par ouvrage</a:t>
+            </a:r>
+            <a:endParaRPr lang="en-US" sz="1400" dirty="0"/>
+          </a:p>
+        </p:txBody>
+      </p:sp>
+      <p:sp>
+        <p:nvSpPr>
+          <p:cNvPr id="16" name="Text 14"/>
+          <p:cNvSpPr/>
+          <p:nvPr/>
+        </p:nvSpPr>
+        <p:spPr>
+          <a:xfrm>
+            <a:off x="914400" y="4617720"/>
+            <a:ext cx="10332720" cy="594360"/>
+          </a:xfrm>
+          <a:prstGeom prst="rect">
+            <a:avLst/>
+          </a:prstGeom>
+          <a:noFill/>
+          <a:ln/>
+        </p:spPr>
+        <p:txBody>
+          <a:bodyPr wrap="square" rtlCol="0" anchor="ctr"/>
+          <a:lstStyle/>
+          <a:p>
+            <a:pPr indent="0" marL="0">
+              <a:lnSpc>
+                <a:spcPts val="1400"/>
+              </a:lnSpc>
+              <a:buNone/>
+            </a:pPr>
+            <a:r>
+              <a:rPr lang="en-US" sz="1100" dirty="0">
+                <a:solidFill>
+                  <a:srgbClr val="8A7C68"/>
+                </a:solidFill>
+                <a:latin typeface="Segoe UI" pitchFamily="34" charset="0"/>
+                <a:ea typeface="Segoe UI" pitchFamily="34" charset="-122"/>
+                <a:cs typeface="Segoe UI" pitchFamily="34" charset="-120"/>
+              </a:rPr>
+              <a:t>Boutons Démarrer / Pause / Reprendre / Terminer par tâche, avec calcul automatique du temps consommé et alerte en cas de dépassement du temps prévu.</a:t>
+            </a:r>
+            <a:endParaRPr lang="en-US" sz="1100" dirty="0"/>
+          </a:p>
+        </p:txBody>
+      </p:sp>
+      <p:sp>
+        <p:nvSpPr>
+          <p:cNvPr id="17" name="Text 15"/>
           <p:cNvSpPr/>
           <p:nvPr/>
         </p:nvSpPr>
@@ -9492,7 +10757,7 @@
       </p:sp>
       <p:sp>
         <p:nvSpPr>
-          <p:cNvPr id="10" name="Text 8"/>
+          <p:cNvPr id="18" name="Text 16"/>
           <p:cNvSpPr/>
           <p:nvPr/>
         </p:nvSpPr>
@@ -9578,7 +10843,7 @@
             </a:avLst>
           </a:prstGeom>
           <a:solidFill>
-            <a:srgbClr val="E6EFE4"/>
+            <a:srgbClr val="F5E6DA"/>
           </a:solidFill>
           <a:ln/>
         </p:spPr>
@@ -9610,13 +10875,13 @@
             <a:r>
               <a:rPr lang="en-US" sz="1000" b="1" spc="100" kern="0" dirty="0">
                 <a:solidFill>
-                  <a:srgbClr val="386641"/>
-                </a:solidFill>
-                <a:latin typeface="Segoe UI" pitchFamily="34" charset="0"/>
-                <a:ea typeface="Segoe UI" pitchFamily="34" charset="-122"/>
-                <a:cs typeface="Segoe UI" pitchFamily="34" charset="-120"/>
-              </a:rPr>
-              <a:t>BASE DE DONNÉES</a:t>
+                  <a:srgbClr val="9A4C1F"/>
+                </a:solidFill>
+                <a:latin typeface="Segoe UI" pitchFamily="34" charset="0"/>
+                <a:ea typeface="Segoe UI" pitchFamily="34" charset="-122"/>
+                <a:cs typeface="Segoe UI" pitchFamily="34" charset="-120"/>
+              </a:rPr>
+              <a:t>BACKEND</a:t>
             </a:r>
             <a:endParaRPr lang="en-US" sz="1000" dirty="0"/>
           </a:p>
@@ -9655,7 +10920,7 @@
                 <a:ea typeface="Georgia" pitchFamily="34" charset="-122"/>
                 <a:cs typeface="Georgia" pitchFamily="34" charset="-120"/>
               </a:rPr>
-              <a:t>Devis</a:t>
+              <a:t>Accueil &amp; stabilité</a:t>
             </a:r>
             <a:endParaRPr lang="en-US" sz="2400" dirty="0"/>
           </a:p>
@@ -9703,7 +10968,7 @@
             <a:avLst/>
           </a:prstGeom>
           <a:solidFill>
-            <a:srgbClr val="386641"/>
+            <a:srgbClr val="9A4C1F"/>
           </a:solidFill>
           <a:ln/>
         </p:spPr>
@@ -9741,7 +11006,7 @@
                 <a:ea typeface="Segoe UI" pitchFamily="34" charset="-122"/>
                 <a:cs typeface="Segoe UI" pitchFamily="34" charset="-120"/>
               </a:rPr>
-              <a:t>Migration des devis vers Supabase (table partagée)</a:t>
+              <a:t>Reconnexion automatique de session</a:t>
             </a:r>
             <a:endParaRPr lang="en-US" sz="1400" dirty="0"/>
           </a:p>
@@ -9783,7 +11048,7 @@
                 <a:ea typeface="Segoe UI" pitchFamily="34" charset="-122"/>
                 <a:cs typeface="Segoe UI" pitchFamily="34" charset="-120"/>
               </a:rPr>
-              <a:t>Les devis créés sur le site web et sur l'application mobile (Firas) vivent désormais dans la même table Supabase 'quotes', avec un mapping bidirectionnel dédié (lib/quote-mapping.js).</a:t>
+              <a:t>Une session expirée (~1h) provoquait des échecs silencieux à l'enregistrement (profil, IBAN, devis) sans reconnexion automatique ; la détection couvre désormais tous les cas d'expiration.</a:t>
             </a:r>
             <a:endParaRPr lang="en-US" sz="1100" dirty="0"/>
           </a:p>
@@ -9791,7 +11056,135 @@
       </p:sp>
       <p:sp>
         <p:nvSpPr>
-          <p:cNvPr id="9" name="Text 7"/>
+          <p:cNvPr id="9" name="Shape 7"/>
+          <p:cNvSpPr/>
+          <p:nvPr/>
+        </p:nvSpPr>
+        <p:spPr>
+          <a:xfrm>
+            <a:off x="640080" y="2926080"/>
+            <a:ext cx="10881360" cy="1097280"/>
+          </a:xfrm>
+          <a:prstGeom prst="roundRect">
+            <a:avLst>
+              <a:gd name="adj" fmla="val 5000"/>
+            </a:avLst>
+          </a:prstGeom>
+          <a:solidFill>
+            <a:srgbClr val="FFFFFF"/>
+          </a:solidFill>
+          <a:ln w="12700">
+            <a:solidFill>
+              <a:srgbClr val="E4DCCB"/>
+            </a:solidFill>
+            <a:prstDash val="solid"/>
+          </a:ln>
+        </p:spPr>
+      </p:sp>
+      <p:sp>
+        <p:nvSpPr>
+          <p:cNvPr id="10" name="Shape 8"/>
+          <p:cNvSpPr/>
+          <p:nvPr/>
+        </p:nvSpPr>
+        <p:spPr>
+          <a:xfrm>
+            <a:off x="640080" y="2926080"/>
+            <a:ext cx="54864" cy="1097280"/>
+          </a:xfrm>
+          <a:prstGeom prst="rect">
+            <a:avLst/>
+          </a:prstGeom>
+          <a:solidFill>
+            <a:srgbClr val="9A4C1F"/>
+          </a:solidFill>
+          <a:ln/>
+        </p:spPr>
+      </p:sp>
+      <p:sp>
+        <p:nvSpPr>
+          <p:cNvPr id="11" name="Text 9"/>
+          <p:cNvSpPr/>
+          <p:nvPr/>
+        </p:nvSpPr>
+        <p:spPr>
+          <a:xfrm>
+            <a:off x="914400" y="3035808"/>
+            <a:ext cx="10332720" cy="365760"/>
+          </a:xfrm>
+          <a:prstGeom prst="rect">
+            <a:avLst/>
+          </a:prstGeom>
+          <a:noFill/>
+          <a:ln/>
+        </p:spPr>
+        <p:txBody>
+          <a:bodyPr wrap="square" rtlCol="0" anchor="ctr"/>
+          <a:lstStyle/>
+          <a:p>
+            <a:pPr indent="0" marL="0">
+              <a:buNone/>
+            </a:pPr>
+            <a:r>
+              <a:rPr lang="en-US" sz="1400" b="1" dirty="0">
+                <a:solidFill>
+                  <a:srgbClr val="1B1F3B"/>
+                </a:solidFill>
+                <a:latin typeface="Segoe UI" pitchFamily="34" charset="0"/>
+                <a:ea typeface="Segoe UI" pitchFamily="34" charset="-122"/>
+                <a:cs typeface="Segoe UI" pitchFamily="34" charset="-120"/>
+              </a:rPr>
+              <a:t>Corrections de plantages ponctuels</a:t>
+            </a:r>
+            <a:endParaRPr lang="en-US" sz="1400" dirty="0"/>
+          </a:p>
+        </p:txBody>
+      </p:sp>
+      <p:sp>
+        <p:nvSpPr>
+          <p:cNvPr id="12" name="Text 10"/>
+          <p:cNvSpPr/>
+          <p:nvPr/>
+        </p:nvSpPr>
+        <p:spPr>
+          <a:xfrm>
+            <a:off x="914400" y="3383280"/>
+            <a:ext cx="10332720" cy="594360"/>
+          </a:xfrm>
+          <a:prstGeom prst="rect">
+            <a:avLst/>
+          </a:prstGeom>
+          <a:noFill/>
+          <a:ln/>
+        </p:spPr>
+        <p:txBody>
+          <a:bodyPr wrap="square" rtlCol="0" anchor="ctr"/>
+          <a:lstStyle/>
+          <a:p>
+            <a:pPr indent="0" marL="0">
+              <a:lnSpc>
+                <a:spcPts val="1400"/>
+              </a:lnSpc>
+              <a:buNone/>
+            </a:pPr>
+            <a:r>
+              <a:rPr lang="en-US" sz="1100" dirty="0">
+                <a:solidFill>
+                  <a:srgbClr val="8A7C68"/>
+                </a:solidFill>
+                <a:latin typeface="Segoe UI" pitchFamily="34" charset="0"/>
+                <a:ea typeface="Segoe UI" pitchFamily="34" charset="-122"/>
+                <a:cs typeface="Segoe UI" pitchFamily="34" charset="-120"/>
+              </a:rPr>
+              <a:t>Plusieurs erreurs bloquantes corrigées au fil des tests (références de code manquantes, composants mal placés).</a:t>
+            </a:r>
+            <a:endParaRPr lang="en-US" sz="1100" dirty="0"/>
+          </a:p>
+        </p:txBody>
+      </p:sp>
+      <p:sp>
+        <p:nvSpPr>
+          <p:cNvPr id="13" name="Text 11"/>
           <p:cNvSpPr/>
           <p:nvPr/>
         </p:nvSpPr>
@@ -9830,7 +11223,7 @@
       </p:sp>
       <p:sp>
         <p:nvSpPr>
-          <p:cNvPr id="10" name="Text 8"/>
+          <p:cNvPr id="14" name="Text 12"/>
           <p:cNvSpPr/>
           <p:nvPr/>
         </p:nvSpPr>
@@ -9916,7 +11309,7 @@
             </a:avLst>
           </a:prstGeom>
           <a:solidFill>
-            <a:srgbClr val="E6EFE4"/>
+            <a:srgbClr val="F5E6DA"/>
           </a:solidFill>
           <a:ln/>
         </p:spPr>
@@ -9948,13 +11341,13 @@
             <a:r>
               <a:rPr lang="en-US" sz="1000" b="1" spc="100" kern="0" dirty="0">
                 <a:solidFill>
-                  <a:srgbClr val="386641"/>
-                </a:solidFill>
-                <a:latin typeface="Segoe UI" pitchFamily="34" charset="0"/>
-                <a:ea typeface="Segoe UI" pitchFamily="34" charset="-122"/>
-                <a:cs typeface="Segoe UI" pitchFamily="34" charset="-120"/>
-              </a:rPr>
-              <a:t>BASE DE DONNÉES</a:t>
+                  <a:srgbClr val="9A4C1F"/>
+                </a:solidFill>
+                <a:latin typeface="Segoe UI" pitchFamily="34" charset="0"/>
+                <a:ea typeface="Segoe UI" pitchFamily="34" charset="-122"/>
+                <a:cs typeface="Segoe UI" pitchFamily="34" charset="-120"/>
+              </a:rPr>
+              <a:t>BACKEND</a:t>
             </a:r>
             <a:endParaRPr lang="en-US" sz="1000" dirty="0"/>
           </a:p>
@@ -9993,7 +11386,7 @@
                 <a:ea typeface="Georgia" pitchFamily="34" charset="-122"/>
                 <a:cs typeface="Georgia" pitchFamily="34" charset="-120"/>
               </a:rPr>
-              <a:t>Chantiers</a:t>
+              <a:t>Rapports d'intervention</a:t>
             </a:r>
             <a:endParaRPr lang="en-US" sz="2400" dirty="0"/>
           </a:p>
@@ -10041,7 +11434,7 @@
             <a:avLst/>
           </a:prstGeom>
           <a:solidFill>
-            <a:srgbClr val="386641"/>
+            <a:srgbClr val="9A4C1F"/>
           </a:solidFill>
           <a:ln/>
         </p:spPr>
@@ -10079,7 +11472,7 @@
                 <a:ea typeface="Segoe UI" pitchFamily="34" charset="-122"/>
                 <a:cs typeface="Segoe UI" pitchFamily="34" charset="-120"/>
               </a:rPr>
-              <a:t>Connexion Supabase : chantiers, planning, fournitures</a:t>
+              <a:t>Nouvelle entité 'interventions'</a:t>
             </a:r>
             <a:endParaRPr lang="en-US" sz="1400" dirty="0"/>
           </a:p>
@@ -10121,7 +11514,7 @@
                 <a:ea typeface="Segoe UI" pitchFamily="34" charset="-122"/>
                 <a:cs typeface="Segoe UI" pitchFamily="34" charset="-120"/>
               </a:rPr>
-              <a:t>Ces trois modules sont branchés sur la base partagée avec l'application mobile ; les comptes utilisateurs sont également partagés entre les deux plateformes.</a:t>
+              <a:t>API dédiée (creation, consultation, suppression) pour stocker les rapports d'intervention, avec historique des actions comme pour les autres modules.</a:t>
             </a:r>
             <a:endParaRPr lang="en-US" sz="1100" dirty="0"/>
           </a:p>
@@ -10129,7 +11522,391 @@
       </p:sp>
       <p:sp>
         <p:nvSpPr>
-          <p:cNvPr id="9" name="Text 7"/>
+          <p:cNvPr id="9" name="Shape 7"/>
+          <p:cNvSpPr/>
+          <p:nvPr/>
+        </p:nvSpPr>
+        <p:spPr>
+          <a:xfrm>
+            <a:off x="640080" y="2926080"/>
+            <a:ext cx="10881360" cy="1097280"/>
+          </a:xfrm>
+          <a:prstGeom prst="roundRect">
+            <a:avLst>
+              <a:gd name="adj" fmla="val 5000"/>
+            </a:avLst>
+          </a:prstGeom>
+          <a:solidFill>
+            <a:srgbClr val="FFFFFF"/>
+          </a:solidFill>
+          <a:ln w="12700">
+            <a:solidFill>
+              <a:srgbClr val="E4DCCB"/>
+            </a:solidFill>
+            <a:prstDash val="solid"/>
+          </a:ln>
+        </p:spPr>
+      </p:sp>
+      <p:sp>
+        <p:nvSpPr>
+          <p:cNvPr id="10" name="Shape 8"/>
+          <p:cNvSpPr/>
+          <p:nvPr/>
+        </p:nvSpPr>
+        <p:spPr>
+          <a:xfrm>
+            <a:off x="640080" y="2926080"/>
+            <a:ext cx="54864" cy="1097280"/>
+          </a:xfrm>
+          <a:prstGeom prst="rect">
+            <a:avLst/>
+          </a:prstGeom>
+          <a:solidFill>
+            <a:srgbClr val="9A4C1F"/>
+          </a:solidFill>
+          <a:ln/>
+        </p:spPr>
+      </p:sp>
+      <p:sp>
+        <p:nvSpPr>
+          <p:cNvPr id="11" name="Text 9"/>
+          <p:cNvSpPr/>
+          <p:nvPr/>
+        </p:nvSpPr>
+        <p:spPr>
+          <a:xfrm>
+            <a:off x="914400" y="3035808"/>
+            <a:ext cx="10332720" cy="365760"/>
+          </a:xfrm>
+          <a:prstGeom prst="rect">
+            <a:avLst/>
+          </a:prstGeom>
+          <a:noFill/>
+          <a:ln/>
+        </p:spPr>
+        <p:txBody>
+          <a:bodyPr wrap="square" rtlCol="0" anchor="ctr"/>
+          <a:lstStyle/>
+          <a:p>
+            <a:pPr indent="0" marL="0">
+              <a:buNone/>
+            </a:pPr>
+            <a:r>
+              <a:rPr lang="en-US" sz="1400" b="1" dirty="0">
+                <a:solidFill>
+                  <a:srgbClr val="1B1F3B"/>
+                </a:solidFill>
+                <a:latin typeface="Segoe UI" pitchFamily="34" charset="0"/>
+                <a:ea typeface="Segoe UI" pitchFamily="34" charset="-122"/>
+                <a:cs typeface="Segoe UI" pitchFamily="34" charset="-120"/>
+              </a:rPr>
+              <a:t>Génération PDF du rapport d'intervention</a:t>
+            </a:r>
+            <a:endParaRPr lang="en-US" sz="1400" dirty="0"/>
+          </a:p>
+        </p:txBody>
+      </p:sp>
+      <p:sp>
+        <p:nvSpPr>
+          <p:cNvPr id="12" name="Text 10"/>
+          <p:cNvSpPr/>
+          <p:nvPr/>
+        </p:nvSpPr>
+        <p:spPr>
+          <a:xfrm>
+            <a:off x="914400" y="3383280"/>
+            <a:ext cx="10332720" cy="594360"/>
+          </a:xfrm>
+          <a:prstGeom prst="rect">
+            <a:avLst/>
+          </a:prstGeom>
+          <a:noFill/>
+          <a:ln/>
+        </p:spPr>
+        <p:txBody>
+          <a:bodyPr wrap="square" rtlCol="0" anchor="ctr"/>
+          <a:lstStyle/>
+          <a:p>
+            <a:pPr indent="0" marL="0">
+              <a:lnSpc>
+                <a:spcPts val="1400"/>
+              </a:lnSpc>
+              <a:buNone/>
+            </a:pPr>
+            <a:r>
+              <a:rPr lang="en-US" sz="1100" dirty="0">
+                <a:solidFill>
+                  <a:srgbClr val="8A7C68"/>
+                </a:solidFill>
+                <a:latin typeface="Segoe UI" pitchFamily="34" charset="0"/>
+                <a:ea typeface="Segoe UI" pitchFamily="34" charset="-122"/>
+                <a:cs typeface="Segoe UI" pitchFamily="34" charset="-120"/>
+              </a:rPr>
+              <a:t>Chaque rapport peut être téléchargé en PDF avec le logo de l'entreprise en en-tête, dans une mise en page reprenant celle des rapports d'intervention papier existants.</a:t>
+            </a:r>
+            <a:endParaRPr lang="en-US" sz="1100" dirty="0"/>
+          </a:p>
+        </p:txBody>
+      </p:sp>
+      <p:sp>
+        <p:nvSpPr>
+          <p:cNvPr id="13" name="Shape 11"/>
+          <p:cNvSpPr/>
+          <p:nvPr/>
+        </p:nvSpPr>
+        <p:spPr>
+          <a:xfrm>
+            <a:off x="640080" y="4160520"/>
+            <a:ext cx="10881360" cy="1097280"/>
+          </a:xfrm>
+          <a:prstGeom prst="roundRect">
+            <a:avLst>
+              <a:gd name="adj" fmla="val 5000"/>
+            </a:avLst>
+          </a:prstGeom>
+          <a:solidFill>
+            <a:srgbClr val="FFFFFF"/>
+          </a:solidFill>
+          <a:ln w="12700">
+            <a:solidFill>
+              <a:srgbClr val="E4DCCB"/>
+            </a:solidFill>
+            <a:prstDash val="solid"/>
+          </a:ln>
+        </p:spPr>
+      </p:sp>
+      <p:sp>
+        <p:nvSpPr>
+          <p:cNvPr id="14" name="Shape 12"/>
+          <p:cNvSpPr/>
+          <p:nvPr/>
+        </p:nvSpPr>
+        <p:spPr>
+          <a:xfrm>
+            <a:off x="640080" y="4160520"/>
+            <a:ext cx="54864" cy="1097280"/>
+          </a:xfrm>
+          <a:prstGeom prst="rect">
+            <a:avLst/>
+          </a:prstGeom>
+          <a:solidFill>
+            <a:srgbClr val="9A4C1F"/>
+          </a:solidFill>
+          <a:ln/>
+        </p:spPr>
+      </p:sp>
+      <p:sp>
+        <p:nvSpPr>
+          <p:cNvPr id="15" name="Text 13"/>
+          <p:cNvSpPr/>
+          <p:nvPr/>
+        </p:nvSpPr>
+        <p:spPr>
+          <a:xfrm>
+            <a:off x="914400" y="4270248"/>
+            <a:ext cx="10332720" cy="365760"/>
+          </a:xfrm>
+          <a:prstGeom prst="rect">
+            <a:avLst/>
+          </a:prstGeom>
+          <a:noFill/>
+          <a:ln/>
+        </p:spPr>
+        <p:txBody>
+          <a:bodyPr wrap="square" rtlCol="0" anchor="ctr"/>
+          <a:lstStyle/>
+          <a:p>
+            <a:pPr indent="0" marL="0">
+              <a:buNone/>
+            </a:pPr>
+            <a:r>
+              <a:rPr lang="en-US" sz="1400" b="1" dirty="0">
+                <a:solidFill>
+                  <a:srgbClr val="1B1F3B"/>
+                </a:solidFill>
+                <a:latin typeface="Segoe UI" pitchFamily="34" charset="0"/>
+                <a:ea typeface="Segoe UI" pitchFamily="34" charset="-122"/>
+                <a:cs typeface="Segoe UI" pitchFamily="34" charset="-120"/>
+              </a:rPr>
+              <a:t>Facturation directe d'une intervention</a:t>
+            </a:r>
+            <a:endParaRPr lang="en-US" sz="1400" dirty="0"/>
+          </a:p>
+        </p:txBody>
+      </p:sp>
+      <p:sp>
+        <p:nvSpPr>
+          <p:cNvPr id="16" name="Text 14"/>
+          <p:cNvSpPr/>
+          <p:nvPr/>
+        </p:nvSpPr>
+        <p:spPr>
+          <a:xfrm>
+            <a:off x="914400" y="4617720"/>
+            <a:ext cx="10332720" cy="594360"/>
+          </a:xfrm>
+          <a:prstGeom prst="rect">
+            <a:avLst/>
+          </a:prstGeom>
+          <a:noFill/>
+          <a:ln/>
+        </p:spPr>
+        <p:txBody>
+          <a:bodyPr wrap="square" rtlCol="0" anchor="ctr"/>
+          <a:lstStyle/>
+          <a:p>
+            <a:pPr indent="0" marL="0">
+              <a:lnSpc>
+                <a:spcPts val="1400"/>
+              </a:lnSpc>
+              <a:buNone/>
+            </a:pPr>
+            <a:r>
+              <a:rPr lang="en-US" sz="1100" dirty="0">
+                <a:solidFill>
+                  <a:srgbClr val="8A7C68"/>
+                </a:solidFill>
+                <a:latin typeface="Segoe UI" pitchFamily="34" charset="0"/>
+                <a:ea typeface="Segoe UI" pitchFamily="34" charset="-122"/>
+                <a:cs typeface="Segoe UI" pitchFamily="34" charset="-120"/>
+              </a:rPr>
+              <a:t>Une facture peut être créée directement à partir d'une intervention (sans passer par un devis signé), avec un montant saisi manuellement ; l'intervention passe alors automatiquement au statut 'Facturée'.</a:t>
+            </a:r>
+            <a:endParaRPr lang="en-US" sz="1100" dirty="0"/>
+          </a:p>
+        </p:txBody>
+      </p:sp>
+      <p:sp>
+        <p:nvSpPr>
+          <p:cNvPr id="17" name="Shape 15"/>
+          <p:cNvSpPr/>
+          <p:nvPr/>
+        </p:nvSpPr>
+        <p:spPr>
+          <a:xfrm>
+            <a:off x="640080" y="5394960"/>
+            <a:ext cx="10881360" cy="1097280"/>
+          </a:xfrm>
+          <a:prstGeom prst="roundRect">
+            <a:avLst>
+              <a:gd name="adj" fmla="val 5000"/>
+            </a:avLst>
+          </a:prstGeom>
+          <a:solidFill>
+            <a:srgbClr val="FFFFFF"/>
+          </a:solidFill>
+          <a:ln w="12700">
+            <a:solidFill>
+              <a:srgbClr val="E4DCCB"/>
+            </a:solidFill>
+            <a:prstDash val="solid"/>
+          </a:ln>
+        </p:spPr>
+      </p:sp>
+      <p:sp>
+        <p:nvSpPr>
+          <p:cNvPr id="18" name="Shape 16"/>
+          <p:cNvSpPr/>
+          <p:nvPr/>
+        </p:nvSpPr>
+        <p:spPr>
+          <a:xfrm>
+            <a:off x="640080" y="5394960"/>
+            <a:ext cx="54864" cy="1097280"/>
+          </a:xfrm>
+          <a:prstGeom prst="rect">
+            <a:avLst/>
+          </a:prstGeom>
+          <a:solidFill>
+            <a:srgbClr val="9A4C1F"/>
+          </a:solidFill>
+          <a:ln/>
+        </p:spPr>
+      </p:sp>
+      <p:sp>
+        <p:nvSpPr>
+          <p:cNvPr id="19" name="Text 17"/>
+          <p:cNvSpPr/>
+          <p:nvPr/>
+        </p:nvSpPr>
+        <p:spPr>
+          <a:xfrm>
+            <a:off x="914400" y="5504688"/>
+            <a:ext cx="10332720" cy="365760"/>
+          </a:xfrm>
+          <a:prstGeom prst="rect">
+            <a:avLst/>
+          </a:prstGeom>
+          <a:noFill/>
+          <a:ln/>
+        </p:spPr>
+        <p:txBody>
+          <a:bodyPr wrap="square" rtlCol="0" anchor="ctr"/>
+          <a:lstStyle/>
+          <a:p>
+            <a:pPr indent="0" marL="0">
+              <a:buNone/>
+            </a:pPr>
+            <a:r>
+              <a:rPr lang="en-US" sz="1400" b="1" dirty="0">
+                <a:solidFill>
+                  <a:srgbClr val="1B1F3B"/>
+                </a:solidFill>
+                <a:latin typeface="Segoe UI" pitchFamily="34" charset="0"/>
+                <a:ea typeface="Segoe UI" pitchFamily="34" charset="-122"/>
+                <a:cs typeface="Segoe UI" pitchFamily="34" charset="-120"/>
+              </a:rPr>
+              <a:t>En-tête d'entreprise propre à chaque rapport</a:t>
+            </a:r>
+            <a:endParaRPr lang="en-US" sz="1400" dirty="0"/>
+          </a:p>
+        </p:txBody>
+      </p:sp>
+      <p:sp>
+        <p:nvSpPr>
+          <p:cNvPr id="20" name="Text 18"/>
+          <p:cNvSpPr/>
+          <p:nvPr/>
+        </p:nvSpPr>
+        <p:spPr>
+          <a:xfrm>
+            <a:off x="914400" y="5852160"/>
+            <a:ext cx="10332720" cy="594360"/>
+          </a:xfrm>
+          <a:prstGeom prst="rect">
+            <a:avLst/>
+          </a:prstGeom>
+          <a:noFill/>
+          <a:ln/>
+        </p:spPr>
+        <p:txBody>
+          <a:bodyPr wrap="square" rtlCol="0" anchor="ctr"/>
+          <a:lstStyle/>
+          <a:p>
+            <a:pPr indent="0" marL="0">
+              <a:lnSpc>
+                <a:spcPts val="1400"/>
+              </a:lnSpc>
+              <a:buNone/>
+            </a:pPr>
+            <a:r>
+              <a:rPr lang="en-US" sz="1100" dirty="0">
+                <a:solidFill>
+                  <a:srgbClr val="8A7C68"/>
+                </a:solidFill>
+                <a:latin typeface="Segoe UI" pitchFamily="34" charset="0"/>
+                <a:ea typeface="Segoe UI" pitchFamily="34" charset="-122"/>
+                <a:cs typeface="Segoe UI" pitchFamily="34" charset="-120"/>
+              </a:rPr>
+              <a:t>Chaque intervention conserve son propre instantané des informations d'entreprise (comme les devis), pour que le PDF reste fidèle même si le profil change ensuite.</a:t>
+            </a:r>
+            <a:endParaRPr lang="en-US" sz="1100" dirty="0"/>
+          </a:p>
+        </p:txBody>
+      </p:sp>
+      <p:sp>
+        <p:nvSpPr>
+          <p:cNvPr id="21" name="Text 19"/>
           <p:cNvSpPr/>
           <p:nvPr/>
         </p:nvSpPr>
@@ -10168,7 +11945,7 @@
       </p:sp>
       <p:sp>
         <p:nvSpPr>
-          <p:cNvPr id="10" name="Text 8"/>
+          <p:cNvPr id="22" name="Text 20"/>
           <p:cNvSpPr/>
           <p:nvPr/>
         </p:nvSpPr>
@@ -10254,7 +12031,7 @@
             </a:avLst>
           </a:prstGeom>
           <a:solidFill>
-            <a:srgbClr val="E6EFE4"/>
+            <a:srgbClr val="F5E6DA"/>
           </a:solidFill>
           <a:ln/>
         </p:spPr>
@@ -10286,13 +12063,13 @@
             <a:r>
               <a:rPr lang="en-US" sz="1000" b="1" spc="100" kern="0" dirty="0">
                 <a:solidFill>
-                  <a:srgbClr val="386641"/>
-                </a:solidFill>
-                <a:latin typeface="Segoe UI" pitchFamily="34" charset="0"/>
-                <a:ea typeface="Segoe UI" pitchFamily="34" charset="-122"/>
-                <a:cs typeface="Segoe UI" pitchFamily="34" charset="-120"/>
-              </a:rPr>
-              <a:t>BASE DE DONNÉES</a:t>
+                  <a:srgbClr val="9A4C1F"/>
+                </a:solidFill>
+                <a:latin typeface="Segoe UI" pitchFamily="34" charset="0"/>
+                <a:ea typeface="Segoe UI" pitchFamily="34" charset="-122"/>
+                <a:cs typeface="Segoe UI" pitchFamily="34" charset="-120"/>
+              </a:rPr>
+              <a:t>BACKEND</a:t>
             </a:r>
             <a:endParaRPr lang="en-US" sz="1000" dirty="0"/>
           </a:p>
@@ -10331,7 +12108,7 @@
                 <a:ea typeface="Georgia" pitchFamily="34" charset="-122"/>
                 <a:cs typeface="Georgia" pitchFamily="34" charset="-120"/>
               </a:rPr>
-              <a:t>Équipe</a:t>
+              <a:t>Rapports d'intervention (suite)</a:t>
             </a:r>
             <a:endParaRPr lang="en-US" sz="2400" dirty="0"/>
           </a:p>
@@ -10379,7 +12156,7 @@
             <a:avLst/>
           </a:prstGeom>
           <a:solidFill>
-            <a:srgbClr val="386641"/>
+            <a:srgbClr val="9A4C1F"/>
           </a:solidFill>
           <a:ln/>
         </p:spPr>
@@ -10417,7 +12194,7 @@
                 <a:ea typeface="Segoe UI" pitchFamily="34" charset="-122"/>
                 <a:cs typeface="Segoe UI" pitchFamily="34" charset="-120"/>
               </a:rPr>
-              <a:t>Nouvelle donnée : heures contractuelles par ouvrier</a:t>
+              <a:t>Statut de suivi automatique (À faire / En cours / Terminée)</a:t>
             </a:r>
             <a:endParaRPr lang="en-US" sz="1400" dirty="0"/>
           </a:p>
@@ -10459,7 +12236,7 @@
                 <a:ea typeface="Segoe UI" pitchFamily="34" charset="-122"/>
                 <a:cs typeface="Segoe UI" pitchFamily="34" charset="-120"/>
               </a:rPr>
-              <a:t>Ajout d'un paramètre 'heures contractuelles / semaine' (35h par défaut) sur chaque fiche ouvrier, utilisé pour le calcul des écarts.</a:t>
+              <a:t>Le statut d'une intervention évolue automatiquement selon sa date (À faire tant que la date n'est pas arrivée, En cours le jour J), jusqu'à être marquée Terminée manuellement puis, si besoin, archivée.</a:t>
             </a:r>
             <a:endParaRPr lang="en-US" sz="1100" dirty="0"/>
           </a:p>
@@ -10467,7 +12244,135 @@
       </p:sp>
       <p:sp>
         <p:nvSpPr>
-          <p:cNvPr id="9" name="Text 7"/>
+          <p:cNvPr id="9" name="Shape 7"/>
+          <p:cNvSpPr/>
+          <p:nvPr/>
+        </p:nvSpPr>
+        <p:spPr>
+          <a:xfrm>
+            <a:off x="640080" y="2926080"/>
+            <a:ext cx="10881360" cy="1097280"/>
+          </a:xfrm>
+          <a:prstGeom prst="roundRect">
+            <a:avLst>
+              <a:gd name="adj" fmla="val 5000"/>
+            </a:avLst>
+          </a:prstGeom>
+          <a:solidFill>
+            <a:srgbClr val="FFFFFF"/>
+          </a:solidFill>
+          <a:ln w="12700">
+            <a:solidFill>
+              <a:srgbClr val="E4DCCB"/>
+            </a:solidFill>
+            <a:prstDash val="solid"/>
+          </a:ln>
+        </p:spPr>
+      </p:sp>
+      <p:sp>
+        <p:nvSpPr>
+          <p:cNvPr id="10" name="Shape 8"/>
+          <p:cNvSpPr/>
+          <p:nvPr/>
+        </p:nvSpPr>
+        <p:spPr>
+          <a:xfrm>
+            <a:off x="640080" y="2926080"/>
+            <a:ext cx="54864" cy="1097280"/>
+          </a:xfrm>
+          <a:prstGeom prst="rect">
+            <a:avLst/>
+          </a:prstGeom>
+          <a:solidFill>
+            <a:srgbClr val="9A4C1F"/>
+          </a:solidFill>
+          <a:ln/>
+        </p:spPr>
+      </p:sp>
+      <p:sp>
+        <p:nvSpPr>
+          <p:cNvPr id="11" name="Text 9"/>
+          <p:cNvSpPr/>
+          <p:nvPr/>
+        </p:nvSpPr>
+        <p:spPr>
+          <a:xfrm>
+            <a:off x="914400" y="3035808"/>
+            <a:ext cx="10332720" cy="365760"/>
+          </a:xfrm>
+          <a:prstGeom prst="rect">
+            <a:avLst/>
+          </a:prstGeom>
+          <a:noFill/>
+          <a:ln/>
+        </p:spPr>
+        <p:txBody>
+          <a:bodyPr wrap="square" rtlCol="0" anchor="ctr"/>
+          <a:lstStyle/>
+          <a:p>
+            <a:pPr indent="0" marL="0">
+              <a:buNone/>
+            </a:pPr>
+            <a:r>
+              <a:rPr lang="en-US" sz="1400" b="1" dirty="0">
+                <a:solidFill>
+                  <a:srgbClr val="1B1F3B"/>
+                </a:solidFill>
+                <a:latin typeface="Segoe UI" pitchFamily="34" charset="0"/>
+                <a:ea typeface="Segoe UI" pitchFamily="34" charset="-122"/>
+                <a:cs typeface="Segoe UI" pitchFamily="34" charset="-120"/>
+              </a:rPr>
+              <a:t>Numéro de rapport automatique</a:t>
+            </a:r>
+            <a:endParaRPr lang="en-US" sz="1400" dirty="0"/>
+          </a:p>
+        </p:txBody>
+      </p:sp>
+      <p:sp>
+        <p:nvSpPr>
+          <p:cNvPr id="12" name="Text 10"/>
+          <p:cNvSpPr/>
+          <p:nvPr/>
+        </p:nvSpPr>
+        <p:spPr>
+          <a:xfrm>
+            <a:off x="914400" y="3383280"/>
+            <a:ext cx="10332720" cy="594360"/>
+          </a:xfrm>
+          <a:prstGeom prst="rect">
+            <a:avLst/>
+          </a:prstGeom>
+          <a:noFill/>
+          <a:ln/>
+        </p:spPr>
+        <p:txBody>
+          <a:bodyPr wrap="square" rtlCol="0" anchor="ctr"/>
+          <a:lstStyle/>
+          <a:p>
+            <a:pPr indent="0" marL="0">
+              <a:lnSpc>
+                <a:spcPts val="1400"/>
+              </a:lnSpc>
+              <a:buNone/>
+            </a:pPr>
+            <a:r>
+              <a:rPr lang="en-US" sz="1100" dirty="0">
+                <a:solidFill>
+                  <a:srgbClr val="8A7C68"/>
+                </a:solidFill>
+                <a:latin typeface="Segoe UI" pitchFamily="34" charset="0"/>
+                <a:ea typeface="Segoe UI" pitchFamily="34" charset="-122"/>
+                <a:cs typeface="Segoe UI" pitchFamily="34" charset="-120"/>
+              </a:rPr>
+              <a:t>Chaque rapport reçoit un numéro unique généré automatiquement (ex. INT-2026-0003), affiché en en-tête avec la date de création, sur le même principe que la numérotation des devis et factures.</a:t>
+            </a:r>
+            <a:endParaRPr lang="en-US" sz="1100" dirty="0"/>
+          </a:p>
+        </p:txBody>
+      </p:sp>
+      <p:sp>
+        <p:nvSpPr>
+          <p:cNvPr id="13" name="Text 11"/>
           <p:cNvSpPr/>
           <p:nvPr/>
         </p:nvSpPr>
@@ -10506,7 +12411,7 @@
       </p:sp>
       <p:sp>
         <p:nvSpPr>
-          <p:cNvPr id="10" name="Text 8"/>
+          <p:cNvPr id="14" name="Text 12"/>
           <p:cNvSpPr/>
           <p:nvPr/>
         </p:nvSpPr>
@@ -10592,7 +12497,7 @@
             </a:avLst>
           </a:prstGeom>
           <a:solidFill>
-            <a:srgbClr val="E6EFE4"/>
+            <a:srgbClr val="F5E6DA"/>
           </a:solidFill>
           <a:ln/>
         </p:spPr>
@@ -10624,13 +12529,13 @@
             <a:r>
               <a:rPr lang="en-US" sz="1000" b="1" spc="100" kern="0" dirty="0">
                 <a:solidFill>
-                  <a:srgbClr val="386641"/>
-                </a:solidFill>
-                <a:latin typeface="Segoe UI" pitchFamily="34" charset="0"/>
-                <a:ea typeface="Segoe UI" pitchFamily="34" charset="-122"/>
-                <a:cs typeface="Segoe UI" pitchFamily="34" charset="-120"/>
-              </a:rPr>
-              <a:t>BASE DE DONNÉES</a:t>
+                  <a:srgbClr val="9A4C1F"/>
+                </a:solidFill>
+                <a:latin typeface="Segoe UI" pitchFamily="34" charset="0"/>
+                <a:ea typeface="Segoe UI" pitchFamily="34" charset="-122"/>
+                <a:cs typeface="Segoe UI" pitchFamily="34" charset="-120"/>
+              </a:rPr>
+              <a:t>BACKEND</a:t>
             </a:r>
             <a:endParaRPr lang="en-US" sz="1000" dirty="0"/>
           </a:p>
@@ -10669,7 +12574,7 @@
                 <a:ea typeface="Georgia" pitchFamily="34" charset="-122"/>
                 <a:cs typeface="Georgia" pitchFamily="34" charset="-120"/>
               </a:rPr>
-              <a:t>Accueil &amp; stabilité</a:t>
+              <a:t>Facturation</a:t>
             </a:r>
             <a:endParaRPr lang="en-US" sz="2400" dirty="0"/>
           </a:p>
@@ -10717,7 +12622,7 @@
             <a:avLst/>
           </a:prstGeom>
           <a:solidFill>
-            <a:srgbClr val="386641"/>
+            <a:srgbClr val="9A4C1F"/>
           </a:solidFill>
           <a:ln/>
         </p:spPr>
@@ -10755,7 +12660,7 @@
                 <a:ea typeface="Segoe UI" pitchFamily="34" charset="-122"/>
                 <a:cs typeface="Segoe UI" pitchFamily="34" charset="-120"/>
               </a:rPr>
-              <a:t>Nettoyage du backend</a:t>
+              <a:t>Export PDF des factures</a:t>
             </a:r>
             <a:endParaRPr lang="en-US" sz="1400" dirty="0"/>
           </a:p>
@@ -10797,7 +12702,7 @@
                 <a:ea typeface="Segoe UI" pitchFamily="34" charset="-122"/>
                 <a:cs typeface="Segoe UI" pitchFamily="34" charset="-120"/>
               </a:rPr>
-              <a:t>Audit complet des routes serveur : suppression du code mort (module Marketplace), vérification de la cohérence entre données locales et données Supabase sur l'ensemble de l'application.</a:t>
+              <a:t>Chaque facture (issue d'un devis signé ou d'une intervention) peut désormais être téléchargée en PDF avec les informations de l'entreprise, du client et du montant — bouton ajouté dans la page Facturation et dans la fiche d'une intervention.</a:t>
             </a:r>
             <a:endParaRPr lang="en-US" sz="1100" dirty="0"/>
           </a:p>
@@ -10915,30 +12820,50 @@
       </p:grpSpPr>
       <p:sp>
         <p:nvSpPr>
-          <p:cNvPr id="2" name="Text 0"/>
-          <p:cNvSpPr/>
-          <p:nvPr/>
-        </p:nvSpPr>
-        <p:spPr>
-          <a:xfrm>
-            <a:off x="640080" y="2651760"/>
-            <a:ext cx="7315200" cy="914400"/>
-          </a:xfrm>
-          <a:prstGeom prst="rect">
-            <a:avLst/>
-          </a:prstGeom>
-          <a:noFill/>
-          <a:ln/>
-        </p:spPr>
-        <p:txBody>
-          <a:bodyPr wrap="square" rtlCol="0" anchor="ctr"/>
-          <a:lstStyle/>
-          <a:p>
-            <a:pPr indent="0" marL="0">
-              <a:buNone/>
-            </a:pPr>
-            <a:r>
-              <a:rPr lang="en-US" sz="4000" b="1" dirty="0">
+          <p:cNvPr id="2" name="Shape 0"/>
+          <p:cNvSpPr/>
+          <p:nvPr/>
+        </p:nvSpPr>
+        <p:spPr>
+          <a:xfrm>
+            <a:off x="0" y="3246120"/>
+            <a:ext cx="12191695" cy="54864"/>
+          </a:xfrm>
+          <a:prstGeom prst="rect">
+            <a:avLst/>
+          </a:prstGeom>
+          <a:solidFill>
+            <a:srgbClr val="386641"/>
+          </a:solidFill>
+          <a:ln/>
+        </p:spPr>
+      </p:sp>
+      <p:sp>
+        <p:nvSpPr>
+          <p:cNvPr id="3" name="Text 1"/>
+          <p:cNvSpPr/>
+          <p:nvPr/>
+        </p:nvSpPr>
+        <p:spPr>
+          <a:xfrm>
+            <a:off x="640080" y="2468880"/>
+            <a:ext cx="10058400" cy="914400"/>
+          </a:xfrm>
+          <a:prstGeom prst="rect">
+            <a:avLst/>
+          </a:prstGeom>
+          <a:noFill/>
+          <a:ln/>
+        </p:spPr>
+        <p:txBody>
+          <a:bodyPr wrap="square" rtlCol="0" anchor="ctr"/>
+          <a:lstStyle/>
+          <a:p>
+            <a:pPr indent="0" marL="0">
+              <a:buNone/>
+            </a:pPr>
+            <a:r>
+              <a:rPr lang="en-US" sz="3800" b="1" dirty="0">
                 <a:solidFill>
                   <a:srgbClr val="FFFFFF"/>
                 </a:solidFill>
@@ -10946,11 +12871,221 @@
                 <a:ea typeface="Georgia" pitchFamily="34" charset="-122"/>
                 <a:cs typeface="Georgia" pitchFamily="34" charset="-120"/>
               </a:rPr>
-              <a:t>Merci</a:t>
-            </a:r>
-            <a:endParaRPr lang="en-US" sz="4000" dirty="0"/>
-          </a:p>
-        </p:txBody>
+              <a:t>Base de données</a:t>
+            </a:r>
+            <a:endParaRPr lang="en-US" sz="3800" dirty="0"/>
+          </a:p>
+        </p:txBody>
+      </p:sp>
+      <p:sp>
+        <p:nvSpPr>
+          <p:cNvPr id="4" name="Text 2"/>
+          <p:cNvSpPr/>
+          <p:nvPr/>
+        </p:nvSpPr>
+        <p:spPr>
+          <a:xfrm>
+            <a:off x="640080" y="3429000"/>
+            <a:ext cx="10058400" cy="457200"/>
+          </a:xfrm>
+          <a:prstGeom prst="rect">
+            <a:avLst/>
+          </a:prstGeom>
+          <a:noFill/>
+          <a:ln/>
+        </p:spPr>
+        <p:txBody>
+          <a:bodyPr wrap="square" rtlCol="0" anchor="ctr"/>
+          <a:lstStyle/>
+          <a:p>
+            <a:pPr indent="0" marL="0">
+              <a:buNone/>
+            </a:pPr>
+            <a:r>
+              <a:rPr lang="en-US" sz="1500" dirty="0">
+                <a:solidFill>
+                  <a:srgbClr val="C7C9E0"/>
+                </a:solidFill>
+                <a:latin typeface="Segoe UI" pitchFamily="34" charset="0"/>
+                <a:ea typeface="Segoe UI" pitchFamily="34" charset="-122"/>
+                <a:cs typeface="Segoe UI" pitchFamily="34" charset="-120"/>
+              </a:rPr>
+              <a:t>Modèle de données et infrastructure</a:t>
+            </a:r>
+            <a:endParaRPr lang="en-US" sz="1500" dirty="0"/>
+          </a:p>
+        </p:txBody>
+      </p:sp>
+      <p:sp>
+        <p:nvSpPr>
+          <p:cNvPr id="5" name="Text 3"/>
+          <p:cNvSpPr/>
+          <p:nvPr/>
+        </p:nvSpPr>
+        <p:spPr>
+          <a:xfrm>
+            <a:off x="640080" y="3931920"/>
+            <a:ext cx="5486400" cy="365760"/>
+          </a:xfrm>
+          <a:prstGeom prst="rect">
+            <a:avLst/>
+          </a:prstGeom>
+          <a:noFill/>
+          <a:ln/>
+        </p:spPr>
+        <p:txBody>
+          <a:bodyPr wrap="square" rtlCol="0" anchor="ctr"/>
+          <a:lstStyle/>
+          <a:p>
+            <a:pPr indent="0" marL="0">
+              <a:buNone/>
+            </a:pPr>
+            <a:r>
+              <a:rPr lang="en-US" sz="1200" b="1" dirty="0">
+                <a:solidFill>
+                  <a:srgbClr val="C9A96A"/>
+                </a:solidFill>
+                <a:latin typeface="Segoe UI" pitchFamily="34" charset="0"/>
+                <a:ea typeface="Segoe UI" pitchFamily="34" charset="-122"/>
+                <a:cs typeface="Segoe UI" pitchFamily="34" charset="-120"/>
+              </a:rPr>
+              <a:t>5 mise(s) à jour</a:t>
+            </a:r>
+            <a:endParaRPr lang="en-US" sz="1200" dirty="0"/>
+          </a:p>
+        </p:txBody>
+      </p:sp>
+      <p:sp>
+        <p:nvSpPr>
+          <p:cNvPr id="6" name="Text 4"/>
+          <p:cNvSpPr/>
+          <p:nvPr/>
+        </p:nvSpPr>
+        <p:spPr>
+          <a:xfrm>
+            <a:off x="365760" y="6510528"/>
+            <a:ext cx="5486400" cy="274320"/>
+          </a:xfrm>
+          <a:prstGeom prst="rect">
+            <a:avLst/>
+          </a:prstGeom>
+          <a:noFill/>
+          <a:ln/>
+        </p:spPr>
+        <p:txBody>
+          <a:bodyPr wrap="square" rtlCol="0" anchor="ctr"/>
+          <a:lstStyle/>
+          <a:p>
+            <a:pPr indent="0" marL="0">
+              <a:buNone/>
+            </a:pPr>
+            <a:r>
+              <a:rPr lang="en-US" sz="900" dirty="0">
+                <a:solidFill>
+                  <a:srgbClr val="8A7C68"/>
+                </a:solidFill>
+                <a:latin typeface="Segoe UI" pitchFamily="34" charset="0"/>
+                <a:ea typeface="Segoe UI" pitchFamily="34" charset="-122"/>
+                <a:cs typeface="Segoe UI" pitchFamily="34" charset="-120"/>
+              </a:rPr>
+              <a:t>Kôji Web — Récapitulatif technique</a:t>
+            </a:r>
+            <a:endParaRPr lang="en-US" sz="900" dirty="0"/>
+          </a:p>
+        </p:txBody>
+      </p:sp>
+      <p:sp>
+        <p:nvSpPr>
+          <p:cNvPr id="7" name="Text 5"/>
+          <p:cNvSpPr/>
+          <p:nvPr/>
+        </p:nvSpPr>
+        <p:spPr>
+          <a:xfrm>
+            <a:off x="9601200" y="6510528"/>
+            <a:ext cx="2194560" cy="274320"/>
+          </a:xfrm>
+          <a:prstGeom prst="rect">
+            <a:avLst/>
+          </a:prstGeom>
+          <a:noFill/>
+          <a:ln/>
+        </p:spPr>
+        <p:txBody>
+          <a:bodyPr wrap="square" rtlCol="0" anchor="ctr"/>
+          <a:lstStyle/>
+          <a:p>
+            <a:pPr algn="r" indent="0" marL="0">
+              <a:buNone/>
+            </a:pPr>
+            <a:r>
+              <a:rPr lang="en-US" sz="900" dirty="0">
+                <a:solidFill>
+                  <a:srgbClr val="8A7C68"/>
+                </a:solidFill>
+                <a:latin typeface="Segoe UI" pitchFamily="34" charset="0"/>
+                <a:ea typeface="Segoe UI" pitchFamily="34" charset="-122"/>
+                <a:cs typeface="Segoe UI" pitchFamily="34" charset="-120"/>
+              </a:rPr>
+              <a:t>26</a:t>
+            </a:r>
+            <a:endParaRPr lang="en-US" sz="900" dirty="0"/>
+          </a:p>
+        </p:txBody>
+      </p:sp>
+    </p:spTree>
+  </p:cSld>
+  <p:clrMapOvr>
+    <a:masterClrMapping/>
+  </p:clrMapOvr>
+</p:sld>
+</file>
+
+<file path=ppt/slides/slide27.xml><?xml version="1.0" encoding="utf-8"?>
+<p:sld xmlns:a="http://schemas.openxmlformats.org/drawingml/2006/main" xmlns:r="http://schemas.openxmlformats.org/officeDocument/2006/relationships" xmlns:p="http://schemas.openxmlformats.org/presentationml/2006/main">
+  <p:cSld name="Slide 27">
+    <p:bg>
+      <p:bgPr>
+        <a:solidFill>
+          <a:srgbClr val="F3EEE3"/>
+        </a:solidFill>
+      </p:bgPr>
+    </p:bg>
+    <p:spTree>
+      <p:nvGrpSpPr>
+        <p:cNvPr id="1" name=""/>
+        <p:cNvGrpSpPr/>
+        <p:nvPr/>
+      </p:nvGrpSpPr>
+      <p:grpSpPr>
+        <a:xfrm>
+          <a:off x="0" y="0"/>
+          <a:ext cx="0" cy="0"/>
+          <a:chOff x="0" y="0"/>
+          <a:chExt cx="0" cy="0"/>
+        </a:xfrm>
+      </p:grpSpPr>
+      <p:sp>
+        <p:nvSpPr>
+          <p:cNvPr id="2" name="Shape 0"/>
+          <p:cNvSpPr/>
+          <p:nvPr/>
+        </p:nvSpPr>
+        <p:spPr>
+          <a:xfrm>
+            <a:off x="640080" y="411480"/>
+            <a:ext cx="2377440" cy="365760"/>
+          </a:xfrm>
+          <a:prstGeom prst="roundRect">
+            <a:avLst>
+              <a:gd name="adj" fmla="val 50000"/>
+            </a:avLst>
+          </a:prstGeom>
+          <a:solidFill>
+            <a:srgbClr val="E6EFE4"/>
+          </a:solidFill>
+          <a:ln/>
+        </p:spPr>
       </p:sp>
       <p:sp>
         <p:nvSpPr>
@@ -10960,34 +13095,955 @@
         </p:nvSpPr>
         <p:spPr>
           <a:xfrm>
-            <a:off x="640080" y="3566160"/>
-            <a:ext cx="9144000" cy="548640"/>
-          </a:xfrm>
-          <a:prstGeom prst="rect">
-            <a:avLst/>
-          </a:prstGeom>
-          <a:noFill/>
-          <a:ln/>
-        </p:spPr>
-        <p:txBody>
-          <a:bodyPr wrap="square" rtlCol="0" anchor="ctr"/>
-          <a:lstStyle/>
-          <a:p>
-            <a:pPr indent="0" marL="0">
-              <a:buNone/>
-            </a:pPr>
-            <a:r>
-              <a:rPr lang="en-US" sz="1300" dirty="0">
-                <a:solidFill>
-                  <a:srgbClr val="C7C9E0"/>
-                </a:solidFill>
-                <a:latin typeface="Segoe UI" pitchFamily="34" charset="0"/>
-                <a:ea typeface="Segoe UI" pitchFamily="34" charset="-122"/>
-                <a:cs typeface="Segoe UI" pitchFamily="34" charset="-120"/>
-              </a:rPr>
-              <a:t>Document généré automatiquement à partir de l'historique de développement du projet.</a:t>
-            </a:r>
-            <a:endParaRPr lang="en-US" sz="1300" dirty="0"/>
+            <a:off x="640080" y="411480"/>
+            <a:ext cx="2377440" cy="365760"/>
+          </a:xfrm>
+          <a:prstGeom prst="rect">
+            <a:avLst/>
+          </a:prstGeom>
+          <a:noFill/>
+          <a:ln/>
+        </p:spPr>
+        <p:txBody>
+          <a:bodyPr wrap="square" rtlCol="0" anchor="ctr"/>
+          <a:lstStyle/>
+          <a:p>
+            <a:pPr algn="ctr" indent="0" marL="0">
+              <a:buNone/>
+            </a:pPr>
+            <a:r>
+              <a:rPr lang="en-US" sz="1000" b="1" spc="100" kern="0" dirty="0">
+                <a:solidFill>
+                  <a:srgbClr val="386641"/>
+                </a:solidFill>
+                <a:latin typeface="Segoe UI" pitchFamily="34" charset="0"/>
+                <a:ea typeface="Segoe UI" pitchFamily="34" charset="-122"/>
+                <a:cs typeface="Segoe UI" pitchFamily="34" charset="-120"/>
+              </a:rPr>
+              <a:t>BASE DE DONNÉES</a:t>
+            </a:r>
+            <a:endParaRPr lang="en-US" sz="1000" dirty="0"/>
+          </a:p>
+        </p:txBody>
+      </p:sp>
+      <p:sp>
+        <p:nvSpPr>
+          <p:cNvPr id="4" name="Text 2"/>
+          <p:cNvSpPr/>
+          <p:nvPr/>
+        </p:nvSpPr>
+        <p:spPr>
+          <a:xfrm>
+            <a:off x="640080" y="868680"/>
+            <a:ext cx="10515600" cy="548640"/>
+          </a:xfrm>
+          <a:prstGeom prst="rect">
+            <a:avLst/>
+          </a:prstGeom>
+          <a:noFill/>
+          <a:ln/>
+        </p:spPr>
+        <p:txBody>
+          <a:bodyPr wrap="square" rtlCol="0" anchor="ctr"/>
+          <a:lstStyle/>
+          <a:p>
+            <a:pPr indent="0" marL="0">
+              <a:buNone/>
+            </a:pPr>
+            <a:r>
+              <a:rPr lang="en-US" sz="2400" b="1" dirty="0">
+                <a:solidFill>
+                  <a:srgbClr val="1B1F3B"/>
+                </a:solidFill>
+                <a:latin typeface="Georgia" pitchFamily="34" charset="0"/>
+                <a:ea typeface="Georgia" pitchFamily="34" charset="-122"/>
+                <a:cs typeface="Georgia" pitchFamily="34" charset="-120"/>
+              </a:rPr>
+              <a:t>Fondations</a:t>
+            </a:r>
+            <a:endParaRPr lang="en-US" sz="2400" dirty="0"/>
+          </a:p>
+        </p:txBody>
+      </p:sp>
+      <p:sp>
+        <p:nvSpPr>
+          <p:cNvPr id="5" name="Shape 3"/>
+          <p:cNvSpPr/>
+          <p:nvPr/>
+        </p:nvSpPr>
+        <p:spPr>
+          <a:xfrm>
+            <a:off x="640080" y="1691640"/>
+            <a:ext cx="10881360" cy="1097280"/>
+          </a:xfrm>
+          <a:prstGeom prst="roundRect">
+            <a:avLst>
+              <a:gd name="adj" fmla="val 5000"/>
+            </a:avLst>
+          </a:prstGeom>
+          <a:solidFill>
+            <a:srgbClr val="FFFFFF"/>
+          </a:solidFill>
+          <a:ln w="12700">
+            <a:solidFill>
+              <a:srgbClr val="E4DCCB"/>
+            </a:solidFill>
+            <a:prstDash val="solid"/>
+          </a:ln>
+        </p:spPr>
+      </p:sp>
+      <p:sp>
+        <p:nvSpPr>
+          <p:cNvPr id="6" name="Shape 4"/>
+          <p:cNvSpPr/>
+          <p:nvPr/>
+        </p:nvSpPr>
+        <p:spPr>
+          <a:xfrm>
+            <a:off x="640080" y="1691640"/>
+            <a:ext cx="54864" cy="1097280"/>
+          </a:xfrm>
+          <a:prstGeom prst="rect">
+            <a:avLst/>
+          </a:prstGeom>
+          <a:solidFill>
+            <a:srgbClr val="386641"/>
+          </a:solidFill>
+          <a:ln/>
+        </p:spPr>
+      </p:sp>
+      <p:sp>
+        <p:nvSpPr>
+          <p:cNvPr id="7" name="Text 5"/>
+          <p:cNvSpPr/>
+          <p:nvPr/>
+        </p:nvSpPr>
+        <p:spPr>
+          <a:xfrm>
+            <a:off x="914400" y="1801368"/>
+            <a:ext cx="10332720" cy="365760"/>
+          </a:xfrm>
+          <a:prstGeom prst="rect">
+            <a:avLst/>
+          </a:prstGeom>
+          <a:noFill/>
+          <a:ln/>
+        </p:spPr>
+        <p:txBody>
+          <a:bodyPr wrap="square" rtlCol="0" anchor="ctr"/>
+          <a:lstStyle/>
+          <a:p>
+            <a:pPr indent="0" marL="0">
+              <a:buNone/>
+            </a:pPr>
+            <a:r>
+              <a:rPr lang="en-US" sz="1400" b="1" dirty="0">
+                <a:solidFill>
+                  <a:srgbClr val="1B1F3B"/>
+                </a:solidFill>
+                <a:latin typeface="Segoe UI" pitchFamily="34" charset="0"/>
+                <a:ea typeface="Segoe UI" pitchFamily="34" charset="-122"/>
+                <a:cs typeface="Segoe UI" pitchFamily="34" charset="-120"/>
+              </a:rPr>
+              <a:t>Connexion Vercel / configuration environnement</a:t>
+            </a:r>
+            <a:endParaRPr lang="en-US" sz="1400" dirty="0"/>
+          </a:p>
+        </p:txBody>
+      </p:sp>
+      <p:sp>
+        <p:nvSpPr>
+          <p:cNvPr id="8" name="Text 6"/>
+          <p:cNvSpPr/>
+          <p:nvPr/>
+        </p:nvSpPr>
+        <p:spPr>
+          <a:xfrm>
+            <a:off x="914400" y="2148840"/>
+            <a:ext cx="10332720" cy="594360"/>
+          </a:xfrm>
+          <a:prstGeom prst="rect">
+            <a:avLst/>
+          </a:prstGeom>
+          <a:noFill/>
+          <a:ln/>
+        </p:spPr>
+        <p:txBody>
+          <a:bodyPr wrap="square" rtlCol="0" anchor="ctr"/>
+          <a:lstStyle/>
+          <a:p>
+            <a:pPr indent="0" marL="0">
+              <a:lnSpc>
+                <a:spcPts val="1400"/>
+              </a:lnSpc>
+              <a:buNone/>
+            </a:pPr>
+            <a:r>
+              <a:rPr lang="en-US" sz="1100" dirty="0">
+                <a:solidFill>
+                  <a:srgbClr val="8A7C68"/>
+                </a:solidFill>
+                <a:latin typeface="Segoe UI" pitchFamily="34" charset="0"/>
+                <a:ea typeface="Segoe UI" pitchFamily="34" charset="-122"/>
+                <a:cs typeface="Segoe UI" pitchFamily="34" charset="-120"/>
+              </a:rPr>
+              <a:t>Correction de la configuration d'authentification et du SMTP sur l'environnement de production Vercel.</a:t>
+            </a:r>
+            <a:endParaRPr lang="en-US" sz="1100" dirty="0"/>
+          </a:p>
+        </p:txBody>
+      </p:sp>
+      <p:sp>
+        <p:nvSpPr>
+          <p:cNvPr id="9" name="Text 7"/>
+          <p:cNvSpPr/>
+          <p:nvPr/>
+        </p:nvSpPr>
+        <p:spPr>
+          <a:xfrm>
+            <a:off x="365760" y="6510528"/>
+            <a:ext cx="5486400" cy="274320"/>
+          </a:xfrm>
+          <a:prstGeom prst="rect">
+            <a:avLst/>
+          </a:prstGeom>
+          <a:noFill/>
+          <a:ln/>
+        </p:spPr>
+        <p:txBody>
+          <a:bodyPr wrap="square" rtlCol="0" anchor="ctr"/>
+          <a:lstStyle/>
+          <a:p>
+            <a:pPr indent="0" marL="0">
+              <a:buNone/>
+            </a:pPr>
+            <a:r>
+              <a:rPr lang="en-US" sz="900" dirty="0">
+                <a:solidFill>
+                  <a:srgbClr val="8A7C68"/>
+                </a:solidFill>
+                <a:latin typeface="Segoe UI" pitchFamily="34" charset="0"/>
+                <a:ea typeface="Segoe UI" pitchFamily="34" charset="-122"/>
+                <a:cs typeface="Segoe UI" pitchFamily="34" charset="-120"/>
+              </a:rPr>
+              <a:t>Kôji Web — Récapitulatif technique</a:t>
+            </a:r>
+            <a:endParaRPr lang="en-US" sz="900" dirty="0"/>
+          </a:p>
+        </p:txBody>
+      </p:sp>
+      <p:sp>
+        <p:nvSpPr>
+          <p:cNvPr id="10" name="Text 8"/>
+          <p:cNvSpPr/>
+          <p:nvPr/>
+        </p:nvSpPr>
+        <p:spPr>
+          <a:xfrm>
+            <a:off x="9601200" y="6510528"/>
+            <a:ext cx="2194560" cy="274320"/>
+          </a:xfrm>
+          <a:prstGeom prst="rect">
+            <a:avLst/>
+          </a:prstGeom>
+          <a:noFill/>
+          <a:ln/>
+        </p:spPr>
+        <p:txBody>
+          <a:bodyPr wrap="square" rtlCol="0" anchor="ctr"/>
+          <a:lstStyle/>
+          <a:p>
+            <a:pPr algn="r" indent="0" marL="0">
+              <a:buNone/>
+            </a:pPr>
+            <a:r>
+              <a:rPr lang="en-US" sz="900" dirty="0">
+                <a:solidFill>
+                  <a:srgbClr val="8A7C68"/>
+                </a:solidFill>
+                <a:latin typeface="Segoe UI" pitchFamily="34" charset="0"/>
+                <a:ea typeface="Segoe UI" pitchFamily="34" charset="-122"/>
+                <a:cs typeface="Segoe UI" pitchFamily="34" charset="-120"/>
+              </a:rPr>
+              <a:t>27</a:t>
+            </a:r>
+            <a:endParaRPr lang="en-US" sz="900" dirty="0"/>
+          </a:p>
+        </p:txBody>
+      </p:sp>
+    </p:spTree>
+  </p:cSld>
+  <p:clrMapOvr>
+    <a:masterClrMapping/>
+  </p:clrMapOvr>
+</p:sld>
+</file>
+
+<file path=ppt/slides/slide28.xml><?xml version="1.0" encoding="utf-8"?>
+<p:sld xmlns:a="http://schemas.openxmlformats.org/drawingml/2006/main" xmlns:r="http://schemas.openxmlformats.org/officeDocument/2006/relationships" xmlns:p="http://schemas.openxmlformats.org/presentationml/2006/main">
+  <p:cSld name="Slide 28">
+    <p:bg>
+      <p:bgPr>
+        <a:solidFill>
+          <a:srgbClr val="F3EEE3"/>
+        </a:solidFill>
+      </p:bgPr>
+    </p:bg>
+    <p:spTree>
+      <p:nvGrpSpPr>
+        <p:cNvPr id="1" name=""/>
+        <p:cNvGrpSpPr/>
+        <p:nvPr/>
+      </p:nvGrpSpPr>
+      <p:grpSpPr>
+        <a:xfrm>
+          <a:off x="0" y="0"/>
+          <a:ext cx="0" cy="0"/>
+          <a:chOff x="0" y="0"/>
+          <a:chExt cx="0" cy="0"/>
+        </a:xfrm>
+      </p:grpSpPr>
+      <p:sp>
+        <p:nvSpPr>
+          <p:cNvPr id="2" name="Shape 0"/>
+          <p:cNvSpPr/>
+          <p:nvPr/>
+        </p:nvSpPr>
+        <p:spPr>
+          <a:xfrm>
+            <a:off x="640080" y="411480"/>
+            <a:ext cx="2377440" cy="365760"/>
+          </a:xfrm>
+          <a:prstGeom prst="roundRect">
+            <a:avLst>
+              <a:gd name="adj" fmla="val 50000"/>
+            </a:avLst>
+          </a:prstGeom>
+          <a:solidFill>
+            <a:srgbClr val="E6EFE4"/>
+          </a:solidFill>
+          <a:ln/>
+        </p:spPr>
+      </p:sp>
+      <p:sp>
+        <p:nvSpPr>
+          <p:cNvPr id="3" name="Text 1"/>
+          <p:cNvSpPr/>
+          <p:nvPr/>
+        </p:nvSpPr>
+        <p:spPr>
+          <a:xfrm>
+            <a:off x="640080" y="411480"/>
+            <a:ext cx="2377440" cy="365760"/>
+          </a:xfrm>
+          <a:prstGeom prst="rect">
+            <a:avLst/>
+          </a:prstGeom>
+          <a:noFill/>
+          <a:ln/>
+        </p:spPr>
+        <p:txBody>
+          <a:bodyPr wrap="square" rtlCol="0" anchor="ctr"/>
+          <a:lstStyle/>
+          <a:p>
+            <a:pPr algn="ctr" indent="0" marL="0">
+              <a:buNone/>
+            </a:pPr>
+            <a:r>
+              <a:rPr lang="en-US" sz="1000" b="1" spc="100" kern="0" dirty="0">
+                <a:solidFill>
+                  <a:srgbClr val="386641"/>
+                </a:solidFill>
+                <a:latin typeface="Segoe UI" pitchFamily="34" charset="0"/>
+                <a:ea typeface="Segoe UI" pitchFamily="34" charset="-122"/>
+                <a:cs typeface="Segoe UI" pitchFamily="34" charset="-120"/>
+              </a:rPr>
+              <a:t>BASE DE DONNÉES</a:t>
+            </a:r>
+            <a:endParaRPr lang="en-US" sz="1000" dirty="0"/>
+          </a:p>
+        </p:txBody>
+      </p:sp>
+      <p:sp>
+        <p:nvSpPr>
+          <p:cNvPr id="4" name="Text 2"/>
+          <p:cNvSpPr/>
+          <p:nvPr/>
+        </p:nvSpPr>
+        <p:spPr>
+          <a:xfrm>
+            <a:off x="640080" y="868680"/>
+            <a:ext cx="10515600" cy="548640"/>
+          </a:xfrm>
+          <a:prstGeom prst="rect">
+            <a:avLst/>
+          </a:prstGeom>
+          <a:noFill/>
+          <a:ln/>
+        </p:spPr>
+        <p:txBody>
+          <a:bodyPr wrap="square" rtlCol="0" anchor="ctr"/>
+          <a:lstStyle/>
+          <a:p>
+            <a:pPr indent="0" marL="0">
+              <a:buNone/>
+            </a:pPr>
+            <a:r>
+              <a:rPr lang="en-US" sz="2400" b="1" dirty="0">
+                <a:solidFill>
+                  <a:srgbClr val="1B1F3B"/>
+                </a:solidFill>
+                <a:latin typeface="Georgia" pitchFamily="34" charset="0"/>
+                <a:ea typeface="Georgia" pitchFamily="34" charset="-122"/>
+                <a:cs typeface="Georgia" pitchFamily="34" charset="-120"/>
+              </a:rPr>
+              <a:t>Devis</a:t>
+            </a:r>
+            <a:endParaRPr lang="en-US" sz="2400" dirty="0"/>
+          </a:p>
+        </p:txBody>
+      </p:sp>
+      <p:sp>
+        <p:nvSpPr>
+          <p:cNvPr id="5" name="Shape 3"/>
+          <p:cNvSpPr/>
+          <p:nvPr/>
+        </p:nvSpPr>
+        <p:spPr>
+          <a:xfrm>
+            <a:off x="640080" y="1691640"/>
+            <a:ext cx="10881360" cy="1097280"/>
+          </a:xfrm>
+          <a:prstGeom prst="roundRect">
+            <a:avLst>
+              <a:gd name="adj" fmla="val 5000"/>
+            </a:avLst>
+          </a:prstGeom>
+          <a:solidFill>
+            <a:srgbClr val="FFFFFF"/>
+          </a:solidFill>
+          <a:ln w="12700">
+            <a:solidFill>
+              <a:srgbClr val="E4DCCB"/>
+            </a:solidFill>
+            <a:prstDash val="solid"/>
+          </a:ln>
+        </p:spPr>
+      </p:sp>
+      <p:sp>
+        <p:nvSpPr>
+          <p:cNvPr id="6" name="Shape 4"/>
+          <p:cNvSpPr/>
+          <p:nvPr/>
+        </p:nvSpPr>
+        <p:spPr>
+          <a:xfrm>
+            <a:off x="640080" y="1691640"/>
+            <a:ext cx="54864" cy="1097280"/>
+          </a:xfrm>
+          <a:prstGeom prst="rect">
+            <a:avLst/>
+          </a:prstGeom>
+          <a:solidFill>
+            <a:srgbClr val="386641"/>
+          </a:solidFill>
+          <a:ln/>
+        </p:spPr>
+      </p:sp>
+      <p:sp>
+        <p:nvSpPr>
+          <p:cNvPr id="7" name="Text 5"/>
+          <p:cNvSpPr/>
+          <p:nvPr/>
+        </p:nvSpPr>
+        <p:spPr>
+          <a:xfrm>
+            <a:off x="914400" y="1801368"/>
+            <a:ext cx="10332720" cy="365760"/>
+          </a:xfrm>
+          <a:prstGeom prst="rect">
+            <a:avLst/>
+          </a:prstGeom>
+          <a:noFill/>
+          <a:ln/>
+        </p:spPr>
+        <p:txBody>
+          <a:bodyPr wrap="square" rtlCol="0" anchor="ctr"/>
+          <a:lstStyle/>
+          <a:p>
+            <a:pPr indent="0" marL="0">
+              <a:buNone/>
+            </a:pPr>
+            <a:r>
+              <a:rPr lang="en-US" sz="1400" b="1" dirty="0">
+                <a:solidFill>
+                  <a:srgbClr val="1B1F3B"/>
+                </a:solidFill>
+                <a:latin typeface="Segoe UI" pitchFamily="34" charset="0"/>
+                <a:ea typeface="Segoe UI" pitchFamily="34" charset="-122"/>
+                <a:cs typeface="Segoe UI" pitchFamily="34" charset="-120"/>
+              </a:rPr>
+              <a:t>Migration des devis vers Supabase (table partagée)</a:t>
+            </a:r>
+            <a:endParaRPr lang="en-US" sz="1400" dirty="0"/>
+          </a:p>
+        </p:txBody>
+      </p:sp>
+      <p:sp>
+        <p:nvSpPr>
+          <p:cNvPr id="8" name="Text 6"/>
+          <p:cNvSpPr/>
+          <p:nvPr/>
+        </p:nvSpPr>
+        <p:spPr>
+          <a:xfrm>
+            <a:off x="914400" y="2148840"/>
+            <a:ext cx="10332720" cy="594360"/>
+          </a:xfrm>
+          <a:prstGeom prst="rect">
+            <a:avLst/>
+          </a:prstGeom>
+          <a:noFill/>
+          <a:ln/>
+        </p:spPr>
+        <p:txBody>
+          <a:bodyPr wrap="square" rtlCol="0" anchor="ctr"/>
+          <a:lstStyle/>
+          <a:p>
+            <a:pPr indent="0" marL="0">
+              <a:lnSpc>
+                <a:spcPts val="1400"/>
+              </a:lnSpc>
+              <a:buNone/>
+            </a:pPr>
+            <a:r>
+              <a:rPr lang="en-US" sz="1100" dirty="0">
+                <a:solidFill>
+                  <a:srgbClr val="8A7C68"/>
+                </a:solidFill>
+                <a:latin typeface="Segoe UI" pitchFamily="34" charset="0"/>
+                <a:ea typeface="Segoe UI" pitchFamily="34" charset="-122"/>
+                <a:cs typeface="Segoe UI" pitchFamily="34" charset="-120"/>
+              </a:rPr>
+              <a:t>Les devis créés sur le site web et sur l'application mobile (Firas) vivent désormais dans la même table Supabase 'quotes', avec un mapping bidirectionnel dédié (lib/quote-mapping.js).</a:t>
+            </a:r>
+            <a:endParaRPr lang="en-US" sz="1100" dirty="0"/>
+          </a:p>
+        </p:txBody>
+      </p:sp>
+      <p:sp>
+        <p:nvSpPr>
+          <p:cNvPr id="9" name="Text 7"/>
+          <p:cNvSpPr/>
+          <p:nvPr/>
+        </p:nvSpPr>
+        <p:spPr>
+          <a:xfrm>
+            <a:off x="365760" y="6510528"/>
+            <a:ext cx="5486400" cy="274320"/>
+          </a:xfrm>
+          <a:prstGeom prst="rect">
+            <a:avLst/>
+          </a:prstGeom>
+          <a:noFill/>
+          <a:ln/>
+        </p:spPr>
+        <p:txBody>
+          <a:bodyPr wrap="square" rtlCol="0" anchor="ctr"/>
+          <a:lstStyle/>
+          <a:p>
+            <a:pPr indent="0" marL="0">
+              <a:buNone/>
+            </a:pPr>
+            <a:r>
+              <a:rPr lang="en-US" sz="900" dirty="0">
+                <a:solidFill>
+                  <a:srgbClr val="8A7C68"/>
+                </a:solidFill>
+                <a:latin typeface="Segoe UI" pitchFamily="34" charset="0"/>
+                <a:ea typeface="Segoe UI" pitchFamily="34" charset="-122"/>
+                <a:cs typeface="Segoe UI" pitchFamily="34" charset="-120"/>
+              </a:rPr>
+              <a:t>Kôji Web — Récapitulatif technique</a:t>
+            </a:r>
+            <a:endParaRPr lang="en-US" sz="900" dirty="0"/>
+          </a:p>
+        </p:txBody>
+      </p:sp>
+      <p:sp>
+        <p:nvSpPr>
+          <p:cNvPr id="10" name="Text 8"/>
+          <p:cNvSpPr/>
+          <p:nvPr/>
+        </p:nvSpPr>
+        <p:spPr>
+          <a:xfrm>
+            <a:off x="9601200" y="6510528"/>
+            <a:ext cx="2194560" cy="274320"/>
+          </a:xfrm>
+          <a:prstGeom prst="rect">
+            <a:avLst/>
+          </a:prstGeom>
+          <a:noFill/>
+          <a:ln/>
+        </p:spPr>
+        <p:txBody>
+          <a:bodyPr wrap="square" rtlCol="0" anchor="ctr"/>
+          <a:lstStyle/>
+          <a:p>
+            <a:pPr algn="r" indent="0" marL="0">
+              <a:buNone/>
+            </a:pPr>
+            <a:r>
+              <a:rPr lang="en-US" sz="900" dirty="0">
+                <a:solidFill>
+                  <a:srgbClr val="8A7C68"/>
+                </a:solidFill>
+                <a:latin typeface="Segoe UI" pitchFamily="34" charset="0"/>
+                <a:ea typeface="Segoe UI" pitchFamily="34" charset="-122"/>
+                <a:cs typeface="Segoe UI" pitchFamily="34" charset="-120"/>
+              </a:rPr>
+              <a:t>28</a:t>
+            </a:r>
+            <a:endParaRPr lang="en-US" sz="900" dirty="0"/>
+          </a:p>
+        </p:txBody>
+      </p:sp>
+    </p:spTree>
+  </p:cSld>
+  <p:clrMapOvr>
+    <a:masterClrMapping/>
+  </p:clrMapOvr>
+</p:sld>
+</file>
+
+<file path=ppt/slides/slide29.xml><?xml version="1.0" encoding="utf-8"?>
+<p:sld xmlns:a="http://schemas.openxmlformats.org/drawingml/2006/main" xmlns:r="http://schemas.openxmlformats.org/officeDocument/2006/relationships" xmlns:p="http://schemas.openxmlformats.org/presentationml/2006/main">
+  <p:cSld name="Slide 29">
+    <p:bg>
+      <p:bgPr>
+        <a:solidFill>
+          <a:srgbClr val="F3EEE3"/>
+        </a:solidFill>
+      </p:bgPr>
+    </p:bg>
+    <p:spTree>
+      <p:nvGrpSpPr>
+        <p:cNvPr id="1" name=""/>
+        <p:cNvGrpSpPr/>
+        <p:nvPr/>
+      </p:nvGrpSpPr>
+      <p:grpSpPr>
+        <a:xfrm>
+          <a:off x="0" y="0"/>
+          <a:ext cx="0" cy="0"/>
+          <a:chOff x="0" y="0"/>
+          <a:chExt cx="0" cy="0"/>
+        </a:xfrm>
+      </p:grpSpPr>
+      <p:sp>
+        <p:nvSpPr>
+          <p:cNvPr id="2" name="Shape 0"/>
+          <p:cNvSpPr/>
+          <p:nvPr/>
+        </p:nvSpPr>
+        <p:spPr>
+          <a:xfrm>
+            <a:off x="640080" y="411480"/>
+            <a:ext cx="2377440" cy="365760"/>
+          </a:xfrm>
+          <a:prstGeom prst="roundRect">
+            <a:avLst>
+              <a:gd name="adj" fmla="val 50000"/>
+            </a:avLst>
+          </a:prstGeom>
+          <a:solidFill>
+            <a:srgbClr val="E6EFE4"/>
+          </a:solidFill>
+          <a:ln/>
+        </p:spPr>
+      </p:sp>
+      <p:sp>
+        <p:nvSpPr>
+          <p:cNvPr id="3" name="Text 1"/>
+          <p:cNvSpPr/>
+          <p:nvPr/>
+        </p:nvSpPr>
+        <p:spPr>
+          <a:xfrm>
+            <a:off x="640080" y="411480"/>
+            <a:ext cx="2377440" cy="365760"/>
+          </a:xfrm>
+          <a:prstGeom prst="rect">
+            <a:avLst/>
+          </a:prstGeom>
+          <a:noFill/>
+          <a:ln/>
+        </p:spPr>
+        <p:txBody>
+          <a:bodyPr wrap="square" rtlCol="0" anchor="ctr"/>
+          <a:lstStyle/>
+          <a:p>
+            <a:pPr algn="ctr" indent="0" marL="0">
+              <a:buNone/>
+            </a:pPr>
+            <a:r>
+              <a:rPr lang="en-US" sz="1000" b="1" spc="100" kern="0" dirty="0">
+                <a:solidFill>
+                  <a:srgbClr val="386641"/>
+                </a:solidFill>
+                <a:latin typeface="Segoe UI" pitchFamily="34" charset="0"/>
+                <a:ea typeface="Segoe UI" pitchFamily="34" charset="-122"/>
+                <a:cs typeface="Segoe UI" pitchFamily="34" charset="-120"/>
+              </a:rPr>
+              <a:t>BASE DE DONNÉES</a:t>
+            </a:r>
+            <a:endParaRPr lang="en-US" sz="1000" dirty="0"/>
+          </a:p>
+        </p:txBody>
+      </p:sp>
+      <p:sp>
+        <p:nvSpPr>
+          <p:cNvPr id="4" name="Text 2"/>
+          <p:cNvSpPr/>
+          <p:nvPr/>
+        </p:nvSpPr>
+        <p:spPr>
+          <a:xfrm>
+            <a:off x="640080" y="868680"/>
+            <a:ext cx="10515600" cy="548640"/>
+          </a:xfrm>
+          <a:prstGeom prst="rect">
+            <a:avLst/>
+          </a:prstGeom>
+          <a:noFill/>
+          <a:ln/>
+        </p:spPr>
+        <p:txBody>
+          <a:bodyPr wrap="square" rtlCol="0" anchor="ctr"/>
+          <a:lstStyle/>
+          <a:p>
+            <a:pPr indent="0" marL="0">
+              <a:buNone/>
+            </a:pPr>
+            <a:r>
+              <a:rPr lang="en-US" sz="2400" b="1" dirty="0">
+                <a:solidFill>
+                  <a:srgbClr val="1B1F3B"/>
+                </a:solidFill>
+                <a:latin typeface="Georgia" pitchFamily="34" charset="0"/>
+                <a:ea typeface="Georgia" pitchFamily="34" charset="-122"/>
+                <a:cs typeface="Georgia" pitchFamily="34" charset="-120"/>
+              </a:rPr>
+              <a:t>Chantiers</a:t>
+            </a:r>
+            <a:endParaRPr lang="en-US" sz="2400" dirty="0"/>
+          </a:p>
+        </p:txBody>
+      </p:sp>
+      <p:sp>
+        <p:nvSpPr>
+          <p:cNvPr id="5" name="Shape 3"/>
+          <p:cNvSpPr/>
+          <p:nvPr/>
+        </p:nvSpPr>
+        <p:spPr>
+          <a:xfrm>
+            <a:off x="640080" y="1691640"/>
+            <a:ext cx="10881360" cy="1097280"/>
+          </a:xfrm>
+          <a:prstGeom prst="roundRect">
+            <a:avLst>
+              <a:gd name="adj" fmla="val 5000"/>
+            </a:avLst>
+          </a:prstGeom>
+          <a:solidFill>
+            <a:srgbClr val="FFFFFF"/>
+          </a:solidFill>
+          <a:ln w="12700">
+            <a:solidFill>
+              <a:srgbClr val="E4DCCB"/>
+            </a:solidFill>
+            <a:prstDash val="solid"/>
+          </a:ln>
+        </p:spPr>
+      </p:sp>
+      <p:sp>
+        <p:nvSpPr>
+          <p:cNvPr id="6" name="Shape 4"/>
+          <p:cNvSpPr/>
+          <p:nvPr/>
+        </p:nvSpPr>
+        <p:spPr>
+          <a:xfrm>
+            <a:off x="640080" y="1691640"/>
+            <a:ext cx="54864" cy="1097280"/>
+          </a:xfrm>
+          <a:prstGeom prst="rect">
+            <a:avLst/>
+          </a:prstGeom>
+          <a:solidFill>
+            <a:srgbClr val="386641"/>
+          </a:solidFill>
+          <a:ln/>
+        </p:spPr>
+      </p:sp>
+      <p:sp>
+        <p:nvSpPr>
+          <p:cNvPr id="7" name="Text 5"/>
+          <p:cNvSpPr/>
+          <p:nvPr/>
+        </p:nvSpPr>
+        <p:spPr>
+          <a:xfrm>
+            <a:off x="914400" y="1801368"/>
+            <a:ext cx="10332720" cy="365760"/>
+          </a:xfrm>
+          <a:prstGeom prst="rect">
+            <a:avLst/>
+          </a:prstGeom>
+          <a:noFill/>
+          <a:ln/>
+        </p:spPr>
+        <p:txBody>
+          <a:bodyPr wrap="square" rtlCol="0" anchor="ctr"/>
+          <a:lstStyle/>
+          <a:p>
+            <a:pPr indent="0" marL="0">
+              <a:buNone/>
+            </a:pPr>
+            <a:r>
+              <a:rPr lang="en-US" sz="1400" b="1" dirty="0">
+                <a:solidFill>
+                  <a:srgbClr val="1B1F3B"/>
+                </a:solidFill>
+                <a:latin typeface="Segoe UI" pitchFamily="34" charset="0"/>
+                <a:ea typeface="Segoe UI" pitchFamily="34" charset="-122"/>
+                <a:cs typeface="Segoe UI" pitchFamily="34" charset="-120"/>
+              </a:rPr>
+              <a:t>Connexion Supabase : chantiers, planning, fournitures</a:t>
+            </a:r>
+            <a:endParaRPr lang="en-US" sz="1400" dirty="0"/>
+          </a:p>
+        </p:txBody>
+      </p:sp>
+      <p:sp>
+        <p:nvSpPr>
+          <p:cNvPr id="8" name="Text 6"/>
+          <p:cNvSpPr/>
+          <p:nvPr/>
+        </p:nvSpPr>
+        <p:spPr>
+          <a:xfrm>
+            <a:off x="914400" y="2148840"/>
+            <a:ext cx="10332720" cy="594360"/>
+          </a:xfrm>
+          <a:prstGeom prst="rect">
+            <a:avLst/>
+          </a:prstGeom>
+          <a:noFill/>
+          <a:ln/>
+        </p:spPr>
+        <p:txBody>
+          <a:bodyPr wrap="square" rtlCol="0" anchor="ctr"/>
+          <a:lstStyle/>
+          <a:p>
+            <a:pPr indent="0" marL="0">
+              <a:lnSpc>
+                <a:spcPts val="1400"/>
+              </a:lnSpc>
+              <a:buNone/>
+            </a:pPr>
+            <a:r>
+              <a:rPr lang="en-US" sz="1100" dirty="0">
+                <a:solidFill>
+                  <a:srgbClr val="8A7C68"/>
+                </a:solidFill>
+                <a:latin typeface="Segoe UI" pitchFamily="34" charset="0"/>
+                <a:ea typeface="Segoe UI" pitchFamily="34" charset="-122"/>
+                <a:cs typeface="Segoe UI" pitchFamily="34" charset="-120"/>
+              </a:rPr>
+              <a:t>Ces trois modules sont branchés sur la base partagée avec l'application mobile ; les comptes utilisateurs sont également partagés entre les deux plateformes.</a:t>
+            </a:r>
+            <a:endParaRPr lang="en-US" sz="1100" dirty="0"/>
+          </a:p>
+        </p:txBody>
+      </p:sp>
+      <p:sp>
+        <p:nvSpPr>
+          <p:cNvPr id="9" name="Text 7"/>
+          <p:cNvSpPr/>
+          <p:nvPr/>
+        </p:nvSpPr>
+        <p:spPr>
+          <a:xfrm>
+            <a:off x="365760" y="6510528"/>
+            <a:ext cx="5486400" cy="274320"/>
+          </a:xfrm>
+          <a:prstGeom prst="rect">
+            <a:avLst/>
+          </a:prstGeom>
+          <a:noFill/>
+          <a:ln/>
+        </p:spPr>
+        <p:txBody>
+          <a:bodyPr wrap="square" rtlCol="0" anchor="ctr"/>
+          <a:lstStyle/>
+          <a:p>
+            <a:pPr indent="0" marL="0">
+              <a:buNone/>
+            </a:pPr>
+            <a:r>
+              <a:rPr lang="en-US" sz="900" dirty="0">
+                <a:solidFill>
+                  <a:srgbClr val="8A7C68"/>
+                </a:solidFill>
+                <a:latin typeface="Segoe UI" pitchFamily="34" charset="0"/>
+                <a:ea typeface="Segoe UI" pitchFamily="34" charset="-122"/>
+                <a:cs typeface="Segoe UI" pitchFamily="34" charset="-120"/>
+              </a:rPr>
+              <a:t>Kôji Web — Récapitulatif technique</a:t>
+            </a:r>
+            <a:endParaRPr lang="en-US" sz="900" dirty="0"/>
+          </a:p>
+        </p:txBody>
+      </p:sp>
+      <p:sp>
+        <p:nvSpPr>
+          <p:cNvPr id="10" name="Text 8"/>
+          <p:cNvSpPr/>
+          <p:nvPr/>
+        </p:nvSpPr>
+        <p:spPr>
+          <a:xfrm>
+            <a:off x="9601200" y="6510528"/>
+            <a:ext cx="2194560" cy="274320"/>
+          </a:xfrm>
+          <a:prstGeom prst="rect">
+            <a:avLst/>
+          </a:prstGeom>
+          <a:noFill/>
+          <a:ln/>
+        </p:spPr>
+        <p:txBody>
+          <a:bodyPr wrap="square" rtlCol="0" anchor="ctr"/>
+          <a:lstStyle/>
+          <a:p>
+            <a:pPr algn="r" indent="0" marL="0">
+              <a:buNone/>
+            </a:pPr>
+            <a:r>
+              <a:rPr lang="en-US" sz="900" dirty="0">
+                <a:solidFill>
+                  <a:srgbClr val="8A7C68"/>
+                </a:solidFill>
+                <a:latin typeface="Segoe UI" pitchFamily="34" charset="0"/>
+                <a:ea typeface="Segoe UI" pitchFamily="34" charset="-122"/>
+                <a:cs typeface="Segoe UI" pitchFamily="34" charset="-120"/>
+              </a:rPr>
+              <a:t>29</a:t>
+            </a:r>
+            <a:endParaRPr lang="en-US" sz="900" dirty="0"/>
           </a:p>
         </p:txBody>
       </p:sp>
@@ -11154,7 +14210,7 @@
                 <a:ea typeface="Segoe UI" pitchFamily="34" charset="-122"/>
                 <a:cs typeface="Segoe UI" pitchFamily="34" charset="-120"/>
               </a:rPr>
-              <a:t>24 mise(s) à jour</a:t>
+              <a:t>33 mise(s) à jour</a:t>
             </a:r>
             <a:endParaRPr lang="en-US" sz="1200" dirty="0"/>
           </a:p>
@@ -11235,6 +14291,792 @@
               <a:t>3</a:t>
             </a:r>
             <a:endParaRPr lang="en-US" sz="900" dirty="0"/>
+          </a:p>
+        </p:txBody>
+      </p:sp>
+    </p:spTree>
+  </p:cSld>
+  <p:clrMapOvr>
+    <a:masterClrMapping/>
+  </p:clrMapOvr>
+</p:sld>
+</file>
+
+<file path=ppt/slides/slide30.xml><?xml version="1.0" encoding="utf-8"?>
+<p:sld xmlns:a="http://schemas.openxmlformats.org/drawingml/2006/main" xmlns:r="http://schemas.openxmlformats.org/officeDocument/2006/relationships" xmlns:p="http://schemas.openxmlformats.org/presentationml/2006/main">
+  <p:cSld name="Slide 30">
+    <p:bg>
+      <p:bgPr>
+        <a:solidFill>
+          <a:srgbClr val="F3EEE3"/>
+        </a:solidFill>
+      </p:bgPr>
+    </p:bg>
+    <p:spTree>
+      <p:nvGrpSpPr>
+        <p:cNvPr id="1" name=""/>
+        <p:cNvGrpSpPr/>
+        <p:nvPr/>
+      </p:nvGrpSpPr>
+      <p:grpSpPr>
+        <a:xfrm>
+          <a:off x="0" y="0"/>
+          <a:ext cx="0" cy="0"/>
+          <a:chOff x="0" y="0"/>
+          <a:chExt cx="0" cy="0"/>
+        </a:xfrm>
+      </p:grpSpPr>
+      <p:sp>
+        <p:nvSpPr>
+          <p:cNvPr id="2" name="Shape 0"/>
+          <p:cNvSpPr/>
+          <p:nvPr/>
+        </p:nvSpPr>
+        <p:spPr>
+          <a:xfrm>
+            <a:off x="640080" y="411480"/>
+            <a:ext cx="2377440" cy="365760"/>
+          </a:xfrm>
+          <a:prstGeom prst="roundRect">
+            <a:avLst>
+              <a:gd name="adj" fmla="val 50000"/>
+            </a:avLst>
+          </a:prstGeom>
+          <a:solidFill>
+            <a:srgbClr val="E6EFE4"/>
+          </a:solidFill>
+          <a:ln/>
+        </p:spPr>
+      </p:sp>
+      <p:sp>
+        <p:nvSpPr>
+          <p:cNvPr id="3" name="Text 1"/>
+          <p:cNvSpPr/>
+          <p:nvPr/>
+        </p:nvSpPr>
+        <p:spPr>
+          <a:xfrm>
+            <a:off x="640080" y="411480"/>
+            <a:ext cx="2377440" cy="365760"/>
+          </a:xfrm>
+          <a:prstGeom prst="rect">
+            <a:avLst/>
+          </a:prstGeom>
+          <a:noFill/>
+          <a:ln/>
+        </p:spPr>
+        <p:txBody>
+          <a:bodyPr wrap="square" rtlCol="0" anchor="ctr"/>
+          <a:lstStyle/>
+          <a:p>
+            <a:pPr algn="ctr" indent="0" marL="0">
+              <a:buNone/>
+            </a:pPr>
+            <a:r>
+              <a:rPr lang="en-US" sz="1000" b="1" spc="100" kern="0" dirty="0">
+                <a:solidFill>
+                  <a:srgbClr val="386641"/>
+                </a:solidFill>
+                <a:latin typeface="Segoe UI" pitchFamily="34" charset="0"/>
+                <a:ea typeface="Segoe UI" pitchFamily="34" charset="-122"/>
+                <a:cs typeface="Segoe UI" pitchFamily="34" charset="-120"/>
+              </a:rPr>
+              <a:t>BASE DE DONNÉES</a:t>
+            </a:r>
+            <a:endParaRPr lang="en-US" sz="1000" dirty="0"/>
+          </a:p>
+        </p:txBody>
+      </p:sp>
+      <p:sp>
+        <p:nvSpPr>
+          <p:cNvPr id="4" name="Text 2"/>
+          <p:cNvSpPr/>
+          <p:nvPr/>
+        </p:nvSpPr>
+        <p:spPr>
+          <a:xfrm>
+            <a:off x="640080" y="868680"/>
+            <a:ext cx="10515600" cy="548640"/>
+          </a:xfrm>
+          <a:prstGeom prst="rect">
+            <a:avLst/>
+          </a:prstGeom>
+          <a:noFill/>
+          <a:ln/>
+        </p:spPr>
+        <p:txBody>
+          <a:bodyPr wrap="square" rtlCol="0" anchor="ctr"/>
+          <a:lstStyle/>
+          <a:p>
+            <a:pPr indent="0" marL="0">
+              <a:buNone/>
+            </a:pPr>
+            <a:r>
+              <a:rPr lang="en-US" sz="2400" b="1" dirty="0">
+                <a:solidFill>
+                  <a:srgbClr val="1B1F3B"/>
+                </a:solidFill>
+                <a:latin typeface="Georgia" pitchFamily="34" charset="0"/>
+                <a:ea typeface="Georgia" pitchFamily="34" charset="-122"/>
+                <a:cs typeface="Georgia" pitchFamily="34" charset="-120"/>
+              </a:rPr>
+              <a:t>Équipe</a:t>
+            </a:r>
+            <a:endParaRPr lang="en-US" sz="2400" dirty="0"/>
+          </a:p>
+        </p:txBody>
+      </p:sp>
+      <p:sp>
+        <p:nvSpPr>
+          <p:cNvPr id="5" name="Shape 3"/>
+          <p:cNvSpPr/>
+          <p:nvPr/>
+        </p:nvSpPr>
+        <p:spPr>
+          <a:xfrm>
+            <a:off x="640080" y="1691640"/>
+            <a:ext cx="10881360" cy="1097280"/>
+          </a:xfrm>
+          <a:prstGeom prst="roundRect">
+            <a:avLst>
+              <a:gd name="adj" fmla="val 5000"/>
+            </a:avLst>
+          </a:prstGeom>
+          <a:solidFill>
+            <a:srgbClr val="FFFFFF"/>
+          </a:solidFill>
+          <a:ln w="12700">
+            <a:solidFill>
+              <a:srgbClr val="E4DCCB"/>
+            </a:solidFill>
+            <a:prstDash val="solid"/>
+          </a:ln>
+        </p:spPr>
+      </p:sp>
+      <p:sp>
+        <p:nvSpPr>
+          <p:cNvPr id="6" name="Shape 4"/>
+          <p:cNvSpPr/>
+          <p:nvPr/>
+        </p:nvSpPr>
+        <p:spPr>
+          <a:xfrm>
+            <a:off x="640080" y="1691640"/>
+            <a:ext cx="54864" cy="1097280"/>
+          </a:xfrm>
+          <a:prstGeom prst="rect">
+            <a:avLst/>
+          </a:prstGeom>
+          <a:solidFill>
+            <a:srgbClr val="386641"/>
+          </a:solidFill>
+          <a:ln/>
+        </p:spPr>
+      </p:sp>
+      <p:sp>
+        <p:nvSpPr>
+          <p:cNvPr id="7" name="Text 5"/>
+          <p:cNvSpPr/>
+          <p:nvPr/>
+        </p:nvSpPr>
+        <p:spPr>
+          <a:xfrm>
+            <a:off x="914400" y="1801368"/>
+            <a:ext cx="10332720" cy="365760"/>
+          </a:xfrm>
+          <a:prstGeom prst="rect">
+            <a:avLst/>
+          </a:prstGeom>
+          <a:noFill/>
+          <a:ln/>
+        </p:spPr>
+        <p:txBody>
+          <a:bodyPr wrap="square" rtlCol="0" anchor="ctr"/>
+          <a:lstStyle/>
+          <a:p>
+            <a:pPr indent="0" marL="0">
+              <a:buNone/>
+            </a:pPr>
+            <a:r>
+              <a:rPr lang="en-US" sz="1400" b="1" dirty="0">
+                <a:solidFill>
+                  <a:srgbClr val="1B1F3B"/>
+                </a:solidFill>
+                <a:latin typeface="Segoe UI" pitchFamily="34" charset="0"/>
+                <a:ea typeface="Segoe UI" pitchFamily="34" charset="-122"/>
+                <a:cs typeface="Segoe UI" pitchFamily="34" charset="-120"/>
+              </a:rPr>
+              <a:t>Nouvelle donnée : heures contractuelles par ouvrier</a:t>
+            </a:r>
+            <a:endParaRPr lang="en-US" sz="1400" dirty="0"/>
+          </a:p>
+        </p:txBody>
+      </p:sp>
+      <p:sp>
+        <p:nvSpPr>
+          <p:cNvPr id="8" name="Text 6"/>
+          <p:cNvSpPr/>
+          <p:nvPr/>
+        </p:nvSpPr>
+        <p:spPr>
+          <a:xfrm>
+            <a:off x="914400" y="2148840"/>
+            <a:ext cx="10332720" cy="594360"/>
+          </a:xfrm>
+          <a:prstGeom prst="rect">
+            <a:avLst/>
+          </a:prstGeom>
+          <a:noFill/>
+          <a:ln/>
+        </p:spPr>
+        <p:txBody>
+          <a:bodyPr wrap="square" rtlCol="0" anchor="ctr"/>
+          <a:lstStyle/>
+          <a:p>
+            <a:pPr indent="0" marL="0">
+              <a:lnSpc>
+                <a:spcPts val="1400"/>
+              </a:lnSpc>
+              <a:buNone/>
+            </a:pPr>
+            <a:r>
+              <a:rPr lang="en-US" sz="1100" dirty="0">
+                <a:solidFill>
+                  <a:srgbClr val="8A7C68"/>
+                </a:solidFill>
+                <a:latin typeface="Segoe UI" pitchFamily="34" charset="0"/>
+                <a:ea typeface="Segoe UI" pitchFamily="34" charset="-122"/>
+                <a:cs typeface="Segoe UI" pitchFamily="34" charset="-120"/>
+              </a:rPr>
+              <a:t>Ajout d'un paramètre 'heures contractuelles / semaine' (35h par défaut) sur chaque fiche ouvrier, utilisé pour le calcul des écarts.</a:t>
+            </a:r>
+            <a:endParaRPr lang="en-US" sz="1100" dirty="0"/>
+          </a:p>
+        </p:txBody>
+      </p:sp>
+      <p:sp>
+        <p:nvSpPr>
+          <p:cNvPr id="9" name="Text 7"/>
+          <p:cNvSpPr/>
+          <p:nvPr/>
+        </p:nvSpPr>
+        <p:spPr>
+          <a:xfrm>
+            <a:off x="365760" y="6510528"/>
+            <a:ext cx="5486400" cy="274320"/>
+          </a:xfrm>
+          <a:prstGeom prst="rect">
+            <a:avLst/>
+          </a:prstGeom>
+          <a:noFill/>
+          <a:ln/>
+        </p:spPr>
+        <p:txBody>
+          <a:bodyPr wrap="square" rtlCol="0" anchor="ctr"/>
+          <a:lstStyle/>
+          <a:p>
+            <a:pPr indent="0" marL="0">
+              <a:buNone/>
+            </a:pPr>
+            <a:r>
+              <a:rPr lang="en-US" sz="900" dirty="0">
+                <a:solidFill>
+                  <a:srgbClr val="8A7C68"/>
+                </a:solidFill>
+                <a:latin typeface="Segoe UI" pitchFamily="34" charset="0"/>
+                <a:ea typeface="Segoe UI" pitchFamily="34" charset="-122"/>
+                <a:cs typeface="Segoe UI" pitchFamily="34" charset="-120"/>
+              </a:rPr>
+              <a:t>Kôji Web — Récapitulatif technique</a:t>
+            </a:r>
+            <a:endParaRPr lang="en-US" sz="900" dirty="0"/>
+          </a:p>
+        </p:txBody>
+      </p:sp>
+      <p:sp>
+        <p:nvSpPr>
+          <p:cNvPr id="10" name="Text 8"/>
+          <p:cNvSpPr/>
+          <p:nvPr/>
+        </p:nvSpPr>
+        <p:spPr>
+          <a:xfrm>
+            <a:off x="9601200" y="6510528"/>
+            <a:ext cx="2194560" cy="274320"/>
+          </a:xfrm>
+          <a:prstGeom prst="rect">
+            <a:avLst/>
+          </a:prstGeom>
+          <a:noFill/>
+          <a:ln/>
+        </p:spPr>
+        <p:txBody>
+          <a:bodyPr wrap="square" rtlCol="0" anchor="ctr"/>
+          <a:lstStyle/>
+          <a:p>
+            <a:pPr algn="r" indent="0" marL="0">
+              <a:buNone/>
+            </a:pPr>
+            <a:r>
+              <a:rPr lang="en-US" sz="900" dirty="0">
+                <a:solidFill>
+                  <a:srgbClr val="8A7C68"/>
+                </a:solidFill>
+                <a:latin typeface="Segoe UI" pitchFamily="34" charset="0"/>
+                <a:ea typeface="Segoe UI" pitchFamily="34" charset="-122"/>
+                <a:cs typeface="Segoe UI" pitchFamily="34" charset="-120"/>
+              </a:rPr>
+              <a:t>30</a:t>
+            </a:r>
+            <a:endParaRPr lang="en-US" sz="900" dirty="0"/>
+          </a:p>
+        </p:txBody>
+      </p:sp>
+    </p:spTree>
+  </p:cSld>
+  <p:clrMapOvr>
+    <a:masterClrMapping/>
+  </p:clrMapOvr>
+</p:sld>
+</file>
+
+<file path=ppt/slides/slide31.xml><?xml version="1.0" encoding="utf-8"?>
+<p:sld xmlns:a="http://schemas.openxmlformats.org/drawingml/2006/main" xmlns:r="http://schemas.openxmlformats.org/officeDocument/2006/relationships" xmlns:p="http://schemas.openxmlformats.org/presentationml/2006/main">
+  <p:cSld name="Slide 31">
+    <p:bg>
+      <p:bgPr>
+        <a:solidFill>
+          <a:srgbClr val="F3EEE3"/>
+        </a:solidFill>
+      </p:bgPr>
+    </p:bg>
+    <p:spTree>
+      <p:nvGrpSpPr>
+        <p:cNvPr id="1" name=""/>
+        <p:cNvGrpSpPr/>
+        <p:nvPr/>
+      </p:nvGrpSpPr>
+      <p:grpSpPr>
+        <a:xfrm>
+          <a:off x="0" y="0"/>
+          <a:ext cx="0" cy="0"/>
+          <a:chOff x="0" y="0"/>
+          <a:chExt cx="0" cy="0"/>
+        </a:xfrm>
+      </p:grpSpPr>
+      <p:sp>
+        <p:nvSpPr>
+          <p:cNvPr id="2" name="Shape 0"/>
+          <p:cNvSpPr/>
+          <p:nvPr/>
+        </p:nvSpPr>
+        <p:spPr>
+          <a:xfrm>
+            <a:off x="640080" y="411480"/>
+            <a:ext cx="2377440" cy="365760"/>
+          </a:xfrm>
+          <a:prstGeom prst="roundRect">
+            <a:avLst>
+              <a:gd name="adj" fmla="val 50000"/>
+            </a:avLst>
+          </a:prstGeom>
+          <a:solidFill>
+            <a:srgbClr val="E6EFE4"/>
+          </a:solidFill>
+          <a:ln/>
+        </p:spPr>
+      </p:sp>
+      <p:sp>
+        <p:nvSpPr>
+          <p:cNvPr id="3" name="Text 1"/>
+          <p:cNvSpPr/>
+          <p:nvPr/>
+        </p:nvSpPr>
+        <p:spPr>
+          <a:xfrm>
+            <a:off x="640080" y="411480"/>
+            <a:ext cx="2377440" cy="365760"/>
+          </a:xfrm>
+          <a:prstGeom prst="rect">
+            <a:avLst/>
+          </a:prstGeom>
+          <a:noFill/>
+          <a:ln/>
+        </p:spPr>
+        <p:txBody>
+          <a:bodyPr wrap="square" rtlCol="0" anchor="ctr"/>
+          <a:lstStyle/>
+          <a:p>
+            <a:pPr algn="ctr" indent="0" marL="0">
+              <a:buNone/>
+            </a:pPr>
+            <a:r>
+              <a:rPr lang="en-US" sz="1000" b="1" spc="100" kern="0" dirty="0">
+                <a:solidFill>
+                  <a:srgbClr val="386641"/>
+                </a:solidFill>
+                <a:latin typeface="Segoe UI" pitchFamily="34" charset="0"/>
+                <a:ea typeface="Segoe UI" pitchFamily="34" charset="-122"/>
+                <a:cs typeface="Segoe UI" pitchFamily="34" charset="-120"/>
+              </a:rPr>
+              <a:t>BASE DE DONNÉES</a:t>
+            </a:r>
+            <a:endParaRPr lang="en-US" sz="1000" dirty="0"/>
+          </a:p>
+        </p:txBody>
+      </p:sp>
+      <p:sp>
+        <p:nvSpPr>
+          <p:cNvPr id="4" name="Text 2"/>
+          <p:cNvSpPr/>
+          <p:nvPr/>
+        </p:nvSpPr>
+        <p:spPr>
+          <a:xfrm>
+            <a:off x="640080" y="868680"/>
+            <a:ext cx="10515600" cy="548640"/>
+          </a:xfrm>
+          <a:prstGeom prst="rect">
+            <a:avLst/>
+          </a:prstGeom>
+          <a:noFill/>
+          <a:ln/>
+        </p:spPr>
+        <p:txBody>
+          <a:bodyPr wrap="square" rtlCol="0" anchor="ctr"/>
+          <a:lstStyle/>
+          <a:p>
+            <a:pPr indent="0" marL="0">
+              <a:buNone/>
+            </a:pPr>
+            <a:r>
+              <a:rPr lang="en-US" sz="2400" b="1" dirty="0">
+                <a:solidFill>
+                  <a:srgbClr val="1B1F3B"/>
+                </a:solidFill>
+                <a:latin typeface="Georgia" pitchFamily="34" charset="0"/>
+                <a:ea typeface="Georgia" pitchFamily="34" charset="-122"/>
+                <a:cs typeface="Georgia" pitchFamily="34" charset="-120"/>
+              </a:rPr>
+              <a:t>Accueil &amp; stabilité</a:t>
+            </a:r>
+            <a:endParaRPr lang="en-US" sz="2400" dirty="0"/>
+          </a:p>
+        </p:txBody>
+      </p:sp>
+      <p:sp>
+        <p:nvSpPr>
+          <p:cNvPr id="5" name="Shape 3"/>
+          <p:cNvSpPr/>
+          <p:nvPr/>
+        </p:nvSpPr>
+        <p:spPr>
+          <a:xfrm>
+            <a:off x="640080" y="1691640"/>
+            <a:ext cx="10881360" cy="1097280"/>
+          </a:xfrm>
+          <a:prstGeom prst="roundRect">
+            <a:avLst>
+              <a:gd name="adj" fmla="val 5000"/>
+            </a:avLst>
+          </a:prstGeom>
+          <a:solidFill>
+            <a:srgbClr val="FFFFFF"/>
+          </a:solidFill>
+          <a:ln w="12700">
+            <a:solidFill>
+              <a:srgbClr val="E4DCCB"/>
+            </a:solidFill>
+            <a:prstDash val="solid"/>
+          </a:ln>
+        </p:spPr>
+      </p:sp>
+      <p:sp>
+        <p:nvSpPr>
+          <p:cNvPr id="6" name="Shape 4"/>
+          <p:cNvSpPr/>
+          <p:nvPr/>
+        </p:nvSpPr>
+        <p:spPr>
+          <a:xfrm>
+            <a:off x="640080" y="1691640"/>
+            <a:ext cx="54864" cy="1097280"/>
+          </a:xfrm>
+          <a:prstGeom prst="rect">
+            <a:avLst/>
+          </a:prstGeom>
+          <a:solidFill>
+            <a:srgbClr val="386641"/>
+          </a:solidFill>
+          <a:ln/>
+        </p:spPr>
+      </p:sp>
+      <p:sp>
+        <p:nvSpPr>
+          <p:cNvPr id="7" name="Text 5"/>
+          <p:cNvSpPr/>
+          <p:nvPr/>
+        </p:nvSpPr>
+        <p:spPr>
+          <a:xfrm>
+            <a:off x="914400" y="1801368"/>
+            <a:ext cx="10332720" cy="365760"/>
+          </a:xfrm>
+          <a:prstGeom prst="rect">
+            <a:avLst/>
+          </a:prstGeom>
+          <a:noFill/>
+          <a:ln/>
+        </p:spPr>
+        <p:txBody>
+          <a:bodyPr wrap="square" rtlCol="0" anchor="ctr"/>
+          <a:lstStyle/>
+          <a:p>
+            <a:pPr indent="0" marL="0">
+              <a:buNone/>
+            </a:pPr>
+            <a:r>
+              <a:rPr lang="en-US" sz="1400" b="1" dirty="0">
+                <a:solidFill>
+                  <a:srgbClr val="1B1F3B"/>
+                </a:solidFill>
+                <a:latin typeface="Segoe UI" pitchFamily="34" charset="0"/>
+                <a:ea typeface="Segoe UI" pitchFamily="34" charset="-122"/>
+                <a:cs typeface="Segoe UI" pitchFamily="34" charset="-120"/>
+              </a:rPr>
+              <a:t>Nettoyage du backend</a:t>
+            </a:r>
+            <a:endParaRPr lang="en-US" sz="1400" dirty="0"/>
+          </a:p>
+        </p:txBody>
+      </p:sp>
+      <p:sp>
+        <p:nvSpPr>
+          <p:cNvPr id="8" name="Text 6"/>
+          <p:cNvSpPr/>
+          <p:nvPr/>
+        </p:nvSpPr>
+        <p:spPr>
+          <a:xfrm>
+            <a:off x="914400" y="2148840"/>
+            <a:ext cx="10332720" cy="594360"/>
+          </a:xfrm>
+          <a:prstGeom prst="rect">
+            <a:avLst/>
+          </a:prstGeom>
+          <a:noFill/>
+          <a:ln/>
+        </p:spPr>
+        <p:txBody>
+          <a:bodyPr wrap="square" rtlCol="0" anchor="ctr"/>
+          <a:lstStyle/>
+          <a:p>
+            <a:pPr indent="0" marL="0">
+              <a:lnSpc>
+                <a:spcPts val="1400"/>
+              </a:lnSpc>
+              <a:buNone/>
+            </a:pPr>
+            <a:r>
+              <a:rPr lang="en-US" sz="1100" dirty="0">
+                <a:solidFill>
+                  <a:srgbClr val="8A7C68"/>
+                </a:solidFill>
+                <a:latin typeface="Segoe UI" pitchFamily="34" charset="0"/>
+                <a:ea typeface="Segoe UI" pitchFamily="34" charset="-122"/>
+                <a:cs typeface="Segoe UI" pitchFamily="34" charset="-120"/>
+              </a:rPr>
+              <a:t>Audit complet des routes serveur : suppression du code mort (module Marketplace), vérification de la cohérence entre données locales et données Supabase sur l'ensemble de l'application.</a:t>
+            </a:r>
+            <a:endParaRPr lang="en-US" sz="1100" dirty="0"/>
+          </a:p>
+        </p:txBody>
+      </p:sp>
+      <p:sp>
+        <p:nvSpPr>
+          <p:cNvPr id="9" name="Text 7"/>
+          <p:cNvSpPr/>
+          <p:nvPr/>
+        </p:nvSpPr>
+        <p:spPr>
+          <a:xfrm>
+            <a:off x="365760" y="6510528"/>
+            <a:ext cx="5486400" cy="274320"/>
+          </a:xfrm>
+          <a:prstGeom prst="rect">
+            <a:avLst/>
+          </a:prstGeom>
+          <a:noFill/>
+          <a:ln/>
+        </p:spPr>
+        <p:txBody>
+          <a:bodyPr wrap="square" rtlCol="0" anchor="ctr"/>
+          <a:lstStyle/>
+          <a:p>
+            <a:pPr indent="0" marL="0">
+              <a:buNone/>
+            </a:pPr>
+            <a:r>
+              <a:rPr lang="en-US" sz="900" dirty="0">
+                <a:solidFill>
+                  <a:srgbClr val="8A7C68"/>
+                </a:solidFill>
+                <a:latin typeface="Segoe UI" pitchFamily="34" charset="0"/>
+                <a:ea typeface="Segoe UI" pitchFamily="34" charset="-122"/>
+                <a:cs typeface="Segoe UI" pitchFamily="34" charset="-120"/>
+              </a:rPr>
+              <a:t>Kôji Web — Récapitulatif technique</a:t>
+            </a:r>
+            <a:endParaRPr lang="en-US" sz="900" dirty="0"/>
+          </a:p>
+        </p:txBody>
+      </p:sp>
+      <p:sp>
+        <p:nvSpPr>
+          <p:cNvPr id="10" name="Text 8"/>
+          <p:cNvSpPr/>
+          <p:nvPr/>
+        </p:nvSpPr>
+        <p:spPr>
+          <a:xfrm>
+            <a:off x="9601200" y="6510528"/>
+            <a:ext cx="2194560" cy="274320"/>
+          </a:xfrm>
+          <a:prstGeom prst="rect">
+            <a:avLst/>
+          </a:prstGeom>
+          <a:noFill/>
+          <a:ln/>
+        </p:spPr>
+        <p:txBody>
+          <a:bodyPr wrap="square" rtlCol="0" anchor="ctr"/>
+          <a:lstStyle/>
+          <a:p>
+            <a:pPr algn="r" indent="0" marL="0">
+              <a:buNone/>
+            </a:pPr>
+            <a:r>
+              <a:rPr lang="en-US" sz="900" dirty="0">
+                <a:solidFill>
+                  <a:srgbClr val="8A7C68"/>
+                </a:solidFill>
+                <a:latin typeface="Segoe UI" pitchFamily="34" charset="0"/>
+                <a:ea typeface="Segoe UI" pitchFamily="34" charset="-122"/>
+                <a:cs typeface="Segoe UI" pitchFamily="34" charset="-120"/>
+              </a:rPr>
+              <a:t>31</a:t>
+            </a:r>
+            <a:endParaRPr lang="en-US" sz="900" dirty="0"/>
+          </a:p>
+        </p:txBody>
+      </p:sp>
+    </p:spTree>
+  </p:cSld>
+  <p:clrMapOvr>
+    <a:masterClrMapping/>
+  </p:clrMapOvr>
+</p:sld>
+</file>
+
+<file path=ppt/slides/slide32.xml><?xml version="1.0" encoding="utf-8"?>
+<p:sld xmlns:a="http://schemas.openxmlformats.org/drawingml/2006/main" xmlns:r="http://schemas.openxmlformats.org/officeDocument/2006/relationships" xmlns:p="http://schemas.openxmlformats.org/presentationml/2006/main">
+  <p:cSld name="Slide 32">
+    <p:bg>
+      <p:bgPr>
+        <a:solidFill>
+          <a:srgbClr val="0B1030"/>
+        </a:solidFill>
+      </p:bgPr>
+    </p:bg>
+    <p:spTree>
+      <p:nvGrpSpPr>
+        <p:cNvPr id="1" name=""/>
+        <p:cNvGrpSpPr/>
+        <p:nvPr/>
+      </p:nvGrpSpPr>
+      <p:grpSpPr>
+        <a:xfrm>
+          <a:off x="0" y="0"/>
+          <a:ext cx="0" cy="0"/>
+          <a:chOff x="0" y="0"/>
+          <a:chExt cx="0" cy="0"/>
+        </a:xfrm>
+      </p:grpSpPr>
+      <p:sp>
+        <p:nvSpPr>
+          <p:cNvPr id="2" name="Text 0"/>
+          <p:cNvSpPr/>
+          <p:nvPr/>
+        </p:nvSpPr>
+        <p:spPr>
+          <a:xfrm>
+            <a:off x="640080" y="2651760"/>
+            <a:ext cx="7315200" cy="914400"/>
+          </a:xfrm>
+          <a:prstGeom prst="rect">
+            <a:avLst/>
+          </a:prstGeom>
+          <a:noFill/>
+          <a:ln/>
+        </p:spPr>
+        <p:txBody>
+          <a:bodyPr wrap="square" rtlCol="0" anchor="ctr"/>
+          <a:lstStyle/>
+          <a:p>
+            <a:pPr indent="0" marL="0">
+              <a:buNone/>
+            </a:pPr>
+            <a:r>
+              <a:rPr lang="en-US" sz="4000" b="1" dirty="0">
+                <a:solidFill>
+                  <a:srgbClr val="FFFFFF"/>
+                </a:solidFill>
+                <a:latin typeface="Georgia" pitchFamily="34" charset="0"/>
+                <a:ea typeface="Georgia" pitchFamily="34" charset="-122"/>
+                <a:cs typeface="Georgia" pitchFamily="34" charset="-120"/>
+              </a:rPr>
+              <a:t>Merci</a:t>
+            </a:r>
+            <a:endParaRPr lang="en-US" sz="4000" dirty="0"/>
+          </a:p>
+        </p:txBody>
+      </p:sp>
+      <p:sp>
+        <p:nvSpPr>
+          <p:cNvPr id="3" name="Text 1"/>
+          <p:cNvSpPr/>
+          <p:nvPr/>
+        </p:nvSpPr>
+        <p:spPr>
+          <a:xfrm>
+            <a:off x="640080" y="3566160"/>
+            <a:ext cx="9144000" cy="548640"/>
+          </a:xfrm>
+          <a:prstGeom prst="rect">
+            <a:avLst/>
+          </a:prstGeom>
+          <a:noFill/>
+          <a:ln/>
+        </p:spPr>
+        <p:txBody>
+          <a:bodyPr wrap="square" rtlCol="0" anchor="ctr"/>
+          <a:lstStyle/>
+          <a:p>
+            <a:pPr indent="0" marL="0">
+              <a:buNone/>
+            </a:pPr>
+            <a:r>
+              <a:rPr lang="en-US" sz="1300" dirty="0">
+                <a:solidFill>
+                  <a:srgbClr val="C7C9E0"/>
+                </a:solidFill>
+                <a:latin typeface="Segoe UI" pitchFamily="34" charset="0"/>
+                <a:ea typeface="Segoe UI" pitchFamily="34" charset="-122"/>
+                <a:cs typeface="Segoe UI" pitchFamily="34" charset="-120"/>
+              </a:rPr>
+              <a:t>Document généré automatiquement à partir de l'historique de développement du projet.</a:t>
+            </a:r>
+            <a:endParaRPr lang="en-US" sz="1300" dirty="0"/>
           </a:p>
         </p:txBody>
       </p:sp>

--- a/docs/manager-recap/Recap-Koji-Manager.pptx
+++ b/docs/manager-recap/Recap-Koji-Manager.pptx
@@ -37,9 +37,11 @@
     <p:sldId id="285" r:id="rId31"/>
     <p:sldId id="286" r:id="rId32"/>
     <p:sldId id="287" r:id="rId33"/>
+    <p:sldId id="288" r:id="rId34"/>
+    <p:sldId id="289" r:id="rId35"/>
   </p:sldIdLst>
   <p:notesMasterIdLst>
-    <p:notesMasterId r:id="rId34"/>
+    <p:notesMasterId r:id="rId36"/>
   </p:notesMasterIdLst>
   <p:sldSz cx="12191695" cy="6858000"/>
   <p:notesSz cx="6858000" cy="12191695"/>
@@ -2757,6 +2759,182 @@
             <a:fld id="{F7021451-1387-4CA6-816F-3879F97B5CBC}" type="slidenum">
               <a:rPr lang="en-US"/>
               <a:t>32</a:t>
+            </a:fld>
+            <a:endParaRPr lang="en-US"/>
+          </a:p>
+        </p:txBody>
+      </p:sp>
+    </p:spTree>
+    <p:extLst>
+      <p:ext uri="{BB962C8B-B14F-4D97-AF65-F5344CB8AC3E}">
+        <p14:creationId xmlns:p14="http://schemas.microsoft.com/office/powerpoint/2010/main" val="1024086991"/>
+      </p:ext>
+    </p:extLst>
+  </p:cSld>
+  <p:clrMapOvr>
+    <a:masterClrMapping/>
+  </p:clrMapOvr>
+</p:notes>
+</file>
+
+<file path=ppt/notesSlides/notesSlide33.xml><?xml version="1.0" encoding="utf-8"?>
+<p:notes xmlns:a="http://schemas.openxmlformats.org/drawingml/2006/main" xmlns:r="http://schemas.openxmlformats.org/officeDocument/2006/relationships" xmlns:p="http://schemas.openxmlformats.org/presentationml/2006/main">
+  <p:cSld>
+    <p:spTree>
+      <p:nvGrpSpPr>
+        <p:cNvPr id="1" name=""/>
+        <p:cNvGrpSpPr/>
+        <p:nvPr/>
+      </p:nvGrpSpPr>
+      <p:grpSpPr>
+        <a:xfrm>
+          <a:off x="0" y="0"/>
+          <a:ext cx="0" cy="0"/>
+          <a:chOff x="0" y="0"/>
+          <a:chExt cx="0" cy="0"/>
+        </a:xfrm>
+      </p:grpSpPr>
+      <p:sp>
+        <p:nvSpPr>
+          <p:cNvPr id="2" name="Slide Image Placeholder 1"/>
+          <p:cNvSpPr>
+            <a:spLocks noGrp="1" noRot="1" noChangeAspect="1"/>
+          </p:cNvSpPr>
+          <p:nvPr>
+            <p:ph type="sldImg"/>
+          </p:nvPr>
+        </p:nvSpPr>
+        <p:spPr/>
+      </p:sp>
+      <p:sp>
+        <p:nvSpPr>
+          <p:cNvPr id="3" name="Notes Placeholder 2"/>
+          <p:cNvSpPr>
+            <a:spLocks noGrp="1"/>
+          </p:cNvSpPr>
+          <p:nvPr>
+            <p:ph type="body" idx="1"/>
+          </p:nvPr>
+        </p:nvSpPr>
+        <p:spPr/>
+        <p:txBody>
+          <a:bodyPr/>
+          <a:lstStyle/>
+          <a:p>
+            <a:r>
+              <a:rPr lang="en-US" dirty="0"/>
+              <a:t/>
+            </a:r>
+            <a:endParaRPr lang="en-US" dirty="0"/>
+          </a:p>
+        </p:txBody>
+      </p:sp>
+      <p:sp>
+        <p:nvSpPr>
+          <p:cNvPr id="4" name="Slide Number Placeholder 3"/>
+          <p:cNvSpPr>
+            <a:spLocks noGrp="1"/>
+          </p:cNvSpPr>
+          <p:nvPr>
+            <p:ph type="sldNum" sz="quarter" idx="10"/>
+          </p:nvPr>
+        </p:nvSpPr>
+        <p:spPr/>
+        <p:txBody>
+          <a:bodyPr/>
+          <a:lstStyle/>
+          <a:p>
+            <a:fld id="{F7021451-1387-4CA6-816F-3879F97B5CBC}" type="slidenum">
+              <a:rPr lang="en-US"/>
+              <a:t>33</a:t>
+            </a:fld>
+            <a:endParaRPr lang="en-US"/>
+          </a:p>
+        </p:txBody>
+      </p:sp>
+    </p:spTree>
+    <p:extLst>
+      <p:ext uri="{BB962C8B-B14F-4D97-AF65-F5344CB8AC3E}">
+        <p14:creationId xmlns:p14="http://schemas.microsoft.com/office/powerpoint/2010/main" val="1024086991"/>
+      </p:ext>
+    </p:extLst>
+  </p:cSld>
+  <p:clrMapOvr>
+    <a:masterClrMapping/>
+  </p:clrMapOvr>
+</p:notes>
+</file>
+
+<file path=ppt/notesSlides/notesSlide34.xml><?xml version="1.0" encoding="utf-8"?>
+<p:notes xmlns:a="http://schemas.openxmlformats.org/drawingml/2006/main" xmlns:r="http://schemas.openxmlformats.org/officeDocument/2006/relationships" xmlns:p="http://schemas.openxmlformats.org/presentationml/2006/main">
+  <p:cSld>
+    <p:spTree>
+      <p:nvGrpSpPr>
+        <p:cNvPr id="1" name=""/>
+        <p:cNvGrpSpPr/>
+        <p:nvPr/>
+      </p:nvGrpSpPr>
+      <p:grpSpPr>
+        <a:xfrm>
+          <a:off x="0" y="0"/>
+          <a:ext cx="0" cy="0"/>
+          <a:chOff x="0" y="0"/>
+          <a:chExt cx="0" cy="0"/>
+        </a:xfrm>
+      </p:grpSpPr>
+      <p:sp>
+        <p:nvSpPr>
+          <p:cNvPr id="2" name="Slide Image Placeholder 1"/>
+          <p:cNvSpPr>
+            <a:spLocks noGrp="1" noRot="1" noChangeAspect="1"/>
+          </p:cNvSpPr>
+          <p:nvPr>
+            <p:ph type="sldImg"/>
+          </p:nvPr>
+        </p:nvSpPr>
+        <p:spPr/>
+      </p:sp>
+      <p:sp>
+        <p:nvSpPr>
+          <p:cNvPr id="3" name="Notes Placeholder 2"/>
+          <p:cNvSpPr>
+            <a:spLocks noGrp="1"/>
+          </p:cNvSpPr>
+          <p:nvPr>
+            <p:ph type="body" idx="1"/>
+          </p:nvPr>
+        </p:nvSpPr>
+        <p:spPr/>
+        <p:txBody>
+          <a:bodyPr/>
+          <a:lstStyle/>
+          <a:p>
+            <a:r>
+              <a:rPr lang="en-US" dirty="0"/>
+              <a:t/>
+            </a:r>
+            <a:endParaRPr lang="en-US" dirty="0"/>
+          </a:p>
+        </p:txBody>
+      </p:sp>
+      <p:sp>
+        <p:nvSpPr>
+          <p:cNvPr id="4" name="Slide Number Placeholder 3"/>
+          <p:cNvSpPr>
+            <a:spLocks noGrp="1"/>
+          </p:cNvSpPr>
+          <p:nvPr>
+            <p:ph type="sldNum" sz="quarter" idx="10"/>
+          </p:nvPr>
+        </p:nvSpPr>
+        <p:spPr/>
+        <p:txBody>
+          <a:bodyPr/>
+          <a:lstStyle/>
+          <a:p>
+            <a:fld id="{F7021451-1387-4CA6-816F-3879F97B5CBC}" type="slidenum">
+              <a:rPr lang="en-US"/>
+              <a:t>34</a:t>
             </a:fld>
             <a:endParaRPr lang="en-US"/>
           </a:p>
@@ -6893,7 +7071,7 @@
                 <a:ea typeface="Segoe UI" pitchFamily="34" charset="-122"/>
                 <a:cs typeface="Segoe UI" pitchFamily="34" charset="-120"/>
               </a:rPr>
-              <a:t>23 mise(s) à jour</a:t>
+              <a:t>25 mise(s) à jour</a:t>
             </a:r>
             <a:endParaRPr lang="en-US" sz="1200" dirty="0"/>
           </a:p>
@@ -7961,7 +8139,135 @@
       </p:sp>
       <p:sp>
         <p:nvSpPr>
-          <p:cNvPr id="17" name="Text 15"/>
+          <p:cNvPr id="17" name="Shape 15"/>
+          <p:cNvSpPr/>
+          <p:nvPr/>
+        </p:nvSpPr>
+        <p:spPr>
+          <a:xfrm>
+            <a:off x="640080" y="5394960"/>
+            <a:ext cx="10881360" cy="1097280"/>
+          </a:xfrm>
+          <a:prstGeom prst="roundRect">
+            <a:avLst>
+              <a:gd name="adj" fmla="val 5000"/>
+            </a:avLst>
+          </a:prstGeom>
+          <a:solidFill>
+            <a:srgbClr val="FFFFFF"/>
+          </a:solidFill>
+          <a:ln w="12700">
+            <a:solidFill>
+              <a:srgbClr val="E4DCCB"/>
+            </a:solidFill>
+            <a:prstDash val="solid"/>
+          </a:ln>
+        </p:spPr>
+      </p:sp>
+      <p:sp>
+        <p:nvSpPr>
+          <p:cNvPr id="18" name="Shape 16"/>
+          <p:cNvSpPr/>
+          <p:nvPr/>
+        </p:nvSpPr>
+        <p:spPr>
+          <a:xfrm>
+            <a:off x="640080" y="5394960"/>
+            <a:ext cx="54864" cy="1097280"/>
+          </a:xfrm>
+          <a:prstGeom prst="rect">
+            <a:avLst/>
+          </a:prstGeom>
+          <a:solidFill>
+            <a:srgbClr val="9A4C1F"/>
+          </a:solidFill>
+          <a:ln/>
+        </p:spPr>
+      </p:sp>
+      <p:sp>
+        <p:nvSpPr>
+          <p:cNvPr id="19" name="Text 17"/>
+          <p:cNvSpPr/>
+          <p:nvPr/>
+        </p:nvSpPr>
+        <p:spPr>
+          <a:xfrm>
+            <a:off x="914400" y="5504688"/>
+            <a:ext cx="10332720" cy="365760"/>
+          </a:xfrm>
+          <a:prstGeom prst="rect">
+            <a:avLst/>
+          </a:prstGeom>
+          <a:noFill/>
+          <a:ln/>
+        </p:spPr>
+        <p:txBody>
+          <a:bodyPr wrap="square" rtlCol="0" anchor="ctr"/>
+          <a:lstStyle/>
+          <a:p>
+            <a:pPr indent="0" marL="0">
+              <a:buNone/>
+            </a:pPr>
+            <a:r>
+              <a:rPr lang="en-US" sz="1400" b="1" dirty="0">
+                <a:solidFill>
+                  <a:srgbClr val="1B1F3B"/>
+                </a:solidFill>
+                <a:latin typeface="Segoe UI" pitchFamily="34" charset="0"/>
+                <a:ea typeface="Segoe UI" pitchFamily="34" charset="-122"/>
+                <a:cs typeface="Segoe UI" pitchFamily="34" charset="-120"/>
+              </a:rPr>
+              <a:t>Restauration de la description des ouvrages de bibliothèque</a:t>
+            </a:r>
+            <a:endParaRPr lang="en-US" sz="1400" dirty="0"/>
+          </a:p>
+        </p:txBody>
+      </p:sp>
+      <p:sp>
+        <p:nvSpPr>
+          <p:cNvPr id="20" name="Text 18"/>
+          <p:cNvSpPr/>
+          <p:nvPr/>
+        </p:nvSpPr>
+        <p:spPr>
+          <a:xfrm>
+            <a:off x="914400" y="5852160"/>
+            <a:ext cx="10332720" cy="594360"/>
+          </a:xfrm>
+          <a:prstGeom prst="rect">
+            <a:avLst/>
+          </a:prstGeom>
+          <a:noFill/>
+          <a:ln/>
+        </p:spPr>
+        <p:txBody>
+          <a:bodyPr wrap="square" rtlCol="0" anchor="ctr"/>
+          <a:lstStyle/>
+          <a:p>
+            <a:pPr indent="0" marL="0">
+              <a:lnSpc>
+                <a:spcPts val="1400"/>
+              </a:lnSpc>
+              <a:buNone/>
+            </a:pPr>
+            <a:r>
+              <a:rPr lang="en-US" sz="1100" dirty="0">
+                <a:solidFill>
+                  <a:srgbClr val="8A7C68"/>
+                </a:solidFill>
+                <a:latin typeface="Segoe UI" pitchFamily="34" charset="0"/>
+                <a:ea typeface="Segoe UI" pitchFamily="34" charset="-122"/>
+                <a:cs typeface="Segoe UI" pitchFamily="34" charset="-120"/>
+              </a:rPr>
+              <a:t>La description déjà saisie dans la Bibliothèque d'ouvrages est désormais reprise automatiquement quand l'ouvrage est ajouté à un devis, au lieu d'être perdue comme auparavant.</a:t>
+            </a:r>
+            <a:endParaRPr lang="en-US" sz="1100" dirty="0"/>
+          </a:p>
+        </p:txBody>
+      </p:sp>
+      <p:sp>
+        <p:nvSpPr>
+          <p:cNvPr id="21" name="Text 19"/>
           <p:cNvSpPr/>
           <p:nvPr/>
         </p:nvSpPr>
@@ -8000,7 +8306,7 @@
       </p:sp>
       <p:sp>
         <p:nvSpPr>
-          <p:cNvPr id="18" name="Text 16"/>
+          <p:cNvPr id="22" name="Text 20"/>
           <p:cNvSpPr/>
           <p:nvPr/>
         </p:nvSpPr>
@@ -8163,7 +8469,7 @@
                 <a:ea typeface="Georgia" pitchFamily="34" charset="-122"/>
                 <a:cs typeface="Georgia" pitchFamily="34" charset="-120"/>
               </a:rPr>
-              <a:t>Chantiers</a:t>
+              <a:t>Devis (suite)</a:t>
             </a:r>
             <a:endParaRPr lang="en-US" sz="2400" dirty="0"/>
           </a:p>
@@ -8249,7 +8555,7 @@
                 <a:ea typeface="Segoe UI" pitchFamily="34" charset="-122"/>
                 <a:cs typeface="Segoe UI" pitchFamily="34" charset="-120"/>
               </a:rPr>
-              <a:t>Correction d'un bug bloquant majeur</a:t>
+              <a:t>Référence client en texte libre</a:t>
             </a:r>
             <a:endParaRPr lang="en-US" sz="1400" dirty="0"/>
           </a:p>
@@ -8291,7 +8597,7 @@
                 <a:ea typeface="Segoe UI" pitchFamily="34" charset="-122"/>
                 <a:cs typeface="Segoe UI" pitchFamily="34" charset="-120"/>
               </a:rPr>
-              <a:t>Un chantier ne pouvait être consulté que si son devis était déjà signé par le client, empêchant toute préparation en amont. Corrigé : la fiche chantier est désormais accessible dès sa création.</a:t>
+              <a:t>La 'Référence client' n'est plus une liste déroulante à choisir (qui pouvait donner l'impression que l'information saisie disparaissait) : c'est maintenant un champ texte simple qui garde exactement ce qui a été écrit.</a:t>
             </a:r>
             <a:endParaRPr lang="en-US" sz="1100" dirty="0"/>
           </a:p>
@@ -8299,135 +8605,7 @@
       </p:sp>
       <p:sp>
         <p:nvSpPr>
-          <p:cNvPr id="9" name="Shape 7"/>
-          <p:cNvSpPr/>
-          <p:nvPr/>
-        </p:nvSpPr>
-        <p:spPr>
-          <a:xfrm>
-            <a:off x="640080" y="2926080"/>
-            <a:ext cx="10881360" cy="1097280"/>
-          </a:xfrm>
-          <a:prstGeom prst="roundRect">
-            <a:avLst>
-              <a:gd name="adj" fmla="val 5000"/>
-            </a:avLst>
-          </a:prstGeom>
-          <a:solidFill>
-            <a:srgbClr val="FFFFFF"/>
-          </a:solidFill>
-          <a:ln w="12700">
-            <a:solidFill>
-              <a:srgbClr val="E4DCCB"/>
-            </a:solidFill>
-            <a:prstDash val="solid"/>
-          </a:ln>
-        </p:spPr>
-      </p:sp>
-      <p:sp>
-        <p:nvSpPr>
-          <p:cNvPr id="10" name="Shape 8"/>
-          <p:cNvSpPr/>
-          <p:nvPr/>
-        </p:nvSpPr>
-        <p:spPr>
-          <a:xfrm>
-            <a:off x="640080" y="2926080"/>
-            <a:ext cx="54864" cy="1097280"/>
-          </a:xfrm>
-          <a:prstGeom prst="rect">
-            <a:avLst/>
-          </a:prstGeom>
-          <a:solidFill>
-            <a:srgbClr val="9A4C1F"/>
-          </a:solidFill>
-          <a:ln/>
-        </p:spPr>
-      </p:sp>
-      <p:sp>
-        <p:nvSpPr>
-          <p:cNvPr id="11" name="Text 9"/>
-          <p:cNvSpPr/>
-          <p:nvPr/>
-        </p:nvSpPr>
-        <p:spPr>
-          <a:xfrm>
-            <a:off x="914400" y="3035808"/>
-            <a:ext cx="10332720" cy="365760"/>
-          </a:xfrm>
-          <a:prstGeom prst="rect">
-            <a:avLst/>
-          </a:prstGeom>
-          <a:noFill/>
-          <a:ln/>
-        </p:spPr>
-        <p:txBody>
-          <a:bodyPr wrap="square" rtlCol="0" anchor="ctr"/>
-          <a:lstStyle/>
-          <a:p>
-            <a:pPr indent="0" marL="0">
-              <a:buNone/>
-            </a:pPr>
-            <a:r>
-              <a:rPr lang="en-US" sz="1400" b="1" dirty="0">
-                <a:solidFill>
-                  <a:srgbClr val="1B1F3B"/>
-                </a:solidFill>
-                <a:latin typeface="Segoe UI" pitchFamily="34" charset="0"/>
-                <a:ea typeface="Segoe UI" pitchFamily="34" charset="-122"/>
-                <a:cs typeface="Segoe UI" pitchFamily="34" charset="-120"/>
-              </a:rPr>
-              <a:t>Dépenses liées à un ouvrage précis</a:t>
-            </a:r>
-            <a:endParaRPr lang="en-US" sz="1400" dirty="0"/>
-          </a:p>
-        </p:txBody>
-      </p:sp>
-      <p:sp>
-        <p:nvSpPr>
-          <p:cNvPr id="12" name="Text 10"/>
-          <p:cNvSpPr/>
-          <p:nvPr/>
-        </p:nvSpPr>
-        <p:spPr>
-          <a:xfrm>
-            <a:off x="914400" y="3383280"/>
-            <a:ext cx="10332720" cy="594360"/>
-          </a:xfrm>
-          <a:prstGeom prst="rect">
-            <a:avLst/>
-          </a:prstGeom>
-          <a:noFill/>
-          <a:ln/>
-        </p:spPr>
-        <p:txBody>
-          <a:bodyPr wrap="square" rtlCol="0" anchor="ctr"/>
-          <a:lstStyle/>
-          <a:p>
-            <a:pPr indent="0" marL="0">
-              <a:lnSpc>
-                <a:spcPts val="1400"/>
-              </a:lnSpc>
-              <a:buNone/>
-            </a:pPr>
-            <a:r>
-              <a:rPr lang="en-US" sz="1100" dirty="0">
-                <a:solidFill>
-                  <a:srgbClr val="8A7C68"/>
-                </a:solidFill>
-                <a:latin typeface="Segoe UI" pitchFamily="34" charset="0"/>
-                <a:ea typeface="Segoe UI" pitchFamily="34" charset="-122"/>
-                <a:cs typeface="Segoe UI" pitchFamily="34" charset="-120"/>
-              </a:rPr>
-              <a:t>L'API des dépenses accepte désormais un identifiant de tâche (ouvrage) en plus du chantier, pour un suivi financier plus fin.</a:t>
-            </a:r>
-            <a:endParaRPr lang="en-US" sz="1100" dirty="0"/>
-          </a:p>
-        </p:txBody>
-      </p:sp>
-      <p:sp>
-        <p:nvSpPr>
-          <p:cNvPr id="13" name="Text 11"/>
+          <p:cNvPr id="9" name="Text 7"/>
           <p:cNvSpPr/>
           <p:nvPr/>
         </p:nvSpPr>
@@ -8466,7 +8644,7 @@
       </p:sp>
       <p:sp>
         <p:nvSpPr>
-          <p:cNvPr id="14" name="Text 12"/>
+          <p:cNvPr id="10" name="Text 8"/>
           <p:cNvSpPr/>
           <p:nvPr/>
         </p:nvSpPr>
@@ -8629,7 +8807,7 @@
                 <a:ea typeface="Georgia" pitchFamily="34" charset="-122"/>
                 <a:cs typeface="Georgia" pitchFamily="34" charset="-120"/>
               </a:rPr>
-              <a:t>Équipe</a:t>
+              <a:t>Chantiers</a:t>
             </a:r>
             <a:endParaRPr lang="en-US" sz="2400" dirty="0"/>
           </a:p>
@@ -8715,7 +8893,7 @@
                 <a:ea typeface="Segoe UI" pitchFamily="34" charset="-122"/>
                 <a:cs typeface="Segoe UI" pitchFamily="34" charset="-120"/>
               </a:rPr>
-              <a:t>Six types de pointage</a:t>
+              <a:t>Correction d'un bug bloquant majeur</a:t>
             </a:r>
             <a:endParaRPr lang="en-US" sz="1400" dirty="0"/>
           </a:p>
@@ -8757,7 +8935,7 @@
                 <a:ea typeface="Segoe UI" pitchFamily="34" charset="-122"/>
                 <a:cs typeface="Segoe UI" pitchFamily="34" charset="-120"/>
               </a:rPr>
-              <a:t>Heures de travail, jour de travail, forfait, ouvrage, passage, déplacement — chacun avec date et montant ; le montant des heures est calculé automatiquement à partir du taux horaire de l'ouvrier.</a:t>
+              <a:t>Un chantier ne pouvait être consulté que si son devis était déjà signé par le client, empêchant toute préparation en amont. Corrigé : la fiche chantier est désormais accessible dès sa création.</a:t>
             </a:r>
             <a:endParaRPr lang="en-US" sz="1100" dirty="0"/>
           </a:p>
@@ -8843,7 +9021,7 @@
                 <a:ea typeface="Segoe UI" pitchFamily="34" charset="-122"/>
                 <a:cs typeface="Segoe UI" pitchFamily="34" charset="-120"/>
               </a:rPr>
-              <a:t>Alertes automatiques de dépassement / manque d'heures</a:t>
+              <a:t>Dépenses liées à un ouvrage précis</a:t>
             </a:r>
             <a:endParaRPr lang="en-US" sz="1400" dirty="0"/>
           </a:p>
@@ -8885,7 +9063,7 @@
                 <a:ea typeface="Segoe UI" pitchFamily="34" charset="-122"/>
                 <a:cs typeface="Segoe UI" pitchFamily="34" charset="-120"/>
               </a:rPr>
-              <a:t>À la fin de chaque semaine, si le total travaillé diffère du contrat de plus de 15 minutes, une notification est envoyée automatiquement à l'entreprise (une seule fois par semaine et par ouvrier).</a:t>
+              <a:t>L'API des dépenses accepte désormais un identifiant de tâche (ouvrage) en plus du chantier, pour un suivi financier plus fin.</a:t>
             </a:r>
             <a:endParaRPr lang="en-US" sz="1100" dirty="0"/>
           </a:p>
@@ -8893,135 +9071,7 @@
       </p:sp>
       <p:sp>
         <p:nvSpPr>
-          <p:cNvPr id="13" name="Shape 11"/>
-          <p:cNvSpPr/>
-          <p:nvPr/>
-        </p:nvSpPr>
-        <p:spPr>
-          <a:xfrm>
-            <a:off x="640080" y="4160520"/>
-            <a:ext cx="10881360" cy="1097280"/>
-          </a:xfrm>
-          <a:prstGeom prst="roundRect">
-            <a:avLst>
-              <a:gd name="adj" fmla="val 5000"/>
-            </a:avLst>
-          </a:prstGeom>
-          <a:solidFill>
-            <a:srgbClr val="FFFFFF"/>
-          </a:solidFill>
-          <a:ln w="12700">
-            <a:solidFill>
-              <a:srgbClr val="E4DCCB"/>
-            </a:solidFill>
-            <a:prstDash val="solid"/>
-          </a:ln>
-        </p:spPr>
-      </p:sp>
-      <p:sp>
-        <p:nvSpPr>
-          <p:cNvPr id="14" name="Shape 12"/>
-          <p:cNvSpPr/>
-          <p:nvPr/>
-        </p:nvSpPr>
-        <p:spPr>
-          <a:xfrm>
-            <a:off x="640080" y="4160520"/>
-            <a:ext cx="54864" cy="1097280"/>
-          </a:xfrm>
-          <a:prstGeom prst="rect">
-            <a:avLst/>
-          </a:prstGeom>
-          <a:solidFill>
-            <a:srgbClr val="9A4C1F"/>
-          </a:solidFill>
-          <a:ln/>
-        </p:spPr>
-      </p:sp>
-      <p:sp>
-        <p:nvSpPr>
-          <p:cNvPr id="15" name="Text 13"/>
-          <p:cNvSpPr/>
-          <p:nvPr/>
-        </p:nvSpPr>
-        <p:spPr>
-          <a:xfrm>
-            <a:off x="914400" y="4270248"/>
-            <a:ext cx="10332720" cy="365760"/>
-          </a:xfrm>
-          <a:prstGeom prst="rect">
-            <a:avLst/>
-          </a:prstGeom>
-          <a:noFill/>
-          <a:ln/>
-        </p:spPr>
-        <p:txBody>
-          <a:bodyPr wrap="square" rtlCol="0" anchor="ctr"/>
-          <a:lstStyle/>
-          <a:p>
-            <a:pPr indent="0" marL="0">
-              <a:buNone/>
-            </a:pPr>
-            <a:r>
-              <a:rPr lang="en-US" sz="1400" b="1" dirty="0">
-                <a:solidFill>
-                  <a:srgbClr val="1B1F3B"/>
-                </a:solidFill>
-                <a:latin typeface="Segoe UI" pitchFamily="34" charset="0"/>
-                <a:ea typeface="Segoe UI" pitchFamily="34" charset="-122"/>
-                <a:cs typeface="Segoe UI" pitchFamily="34" charset="-120"/>
-              </a:rPr>
-              <a:t>Export PDF du relevé d'heures</a:t>
-            </a:r>
-            <a:endParaRPr lang="en-US" sz="1400" dirty="0"/>
-          </a:p>
-        </p:txBody>
-      </p:sp>
-      <p:sp>
-        <p:nvSpPr>
-          <p:cNvPr id="16" name="Text 14"/>
-          <p:cNvSpPr/>
-          <p:nvPr/>
-        </p:nvSpPr>
-        <p:spPr>
-          <a:xfrm>
-            <a:off x="914400" y="4617720"/>
-            <a:ext cx="10332720" cy="594360"/>
-          </a:xfrm>
-          <a:prstGeom prst="rect">
-            <a:avLst/>
-          </a:prstGeom>
-          <a:noFill/>
-          <a:ln/>
-        </p:spPr>
-        <p:txBody>
-          <a:bodyPr wrap="square" rtlCol="0" anchor="ctr"/>
-          <a:lstStyle/>
-          <a:p>
-            <a:pPr indent="0" marL="0">
-              <a:lnSpc>
-                <a:spcPts val="1400"/>
-              </a:lnSpc>
-              <a:buNone/>
-            </a:pPr>
-            <a:r>
-              <a:rPr lang="en-US" sz="1100" dirty="0">
-                <a:solidFill>
-                  <a:srgbClr val="8A7C68"/>
-                </a:solidFill>
-                <a:latin typeface="Segoe UI" pitchFamily="34" charset="0"/>
-                <a:ea typeface="Segoe UI" pitchFamily="34" charset="-122"/>
-                <a:cs typeface="Segoe UI" pitchFamily="34" charset="-120"/>
-              </a:rPr>
-              <a:t>Génération d'un PDF mensuel par ouvrier : détail par journée/type de pointage, totaux hebdomadaires, total du mois en heures et en montant — pensé pour la comptabilité et la gestion de la paie.</a:t>
-            </a:r>
-            <a:endParaRPr lang="en-US" sz="1100" dirty="0"/>
-          </a:p>
-        </p:txBody>
-      </p:sp>
-      <p:sp>
-        <p:nvSpPr>
-          <p:cNvPr id="17" name="Text 15"/>
+          <p:cNvPr id="13" name="Text 11"/>
           <p:cNvSpPr/>
           <p:nvPr/>
         </p:nvSpPr>
@@ -9060,7 +9110,7 @@
       </p:sp>
       <p:sp>
         <p:nvSpPr>
-          <p:cNvPr id="18" name="Text 16"/>
+          <p:cNvPr id="14" name="Text 12"/>
           <p:cNvSpPr/>
           <p:nvPr/>
         </p:nvSpPr>
@@ -9267,7 +9317,7 @@
                 <a:ea typeface="Georgia" pitchFamily="34" charset="-122"/>
                 <a:cs typeface="Georgia" pitchFamily="34" charset="-120"/>
               </a:rPr>
-              <a:t>61</a:t>
+              <a:t>67</a:t>
             </a:r>
             <a:endParaRPr lang="en-US" sz="3200" dirty="0"/>
           </a:p>
@@ -9372,7 +9422,7 @@
                 <a:ea typeface="Georgia" pitchFamily="34" charset="-122"/>
                 <a:cs typeface="Georgia" pitchFamily="34" charset="-120"/>
               </a:rPr>
-              <a:t>33</a:t>
+              <a:t>35</a:t>
             </a:r>
             <a:endParaRPr lang="en-US" sz="3200" dirty="0"/>
           </a:p>
@@ -9477,7 +9527,7 @@
                 <a:ea typeface="Georgia" pitchFamily="34" charset="-122"/>
                 <a:cs typeface="Georgia" pitchFamily="34" charset="-120"/>
               </a:rPr>
-              <a:t>23</a:t>
+              <a:t>25</a:t>
             </a:r>
             <a:endParaRPr lang="en-US" sz="3200" dirty="0"/>
           </a:p>
@@ -9582,7 +9632,7 @@
                 <a:ea typeface="Georgia" pitchFamily="34" charset="-122"/>
                 <a:cs typeface="Georgia" pitchFamily="34" charset="-120"/>
               </a:rPr>
-              <a:t>5</a:t>
+              <a:t>7</a:t>
             </a:r>
             <a:endParaRPr lang="en-US" sz="3200" dirty="0"/>
           </a:p>
@@ -9988,7 +10038,7 @@
                 <a:ea typeface="Georgia" pitchFamily="34" charset="-122"/>
                 <a:cs typeface="Georgia" pitchFamily="34" charset="-120"/>
               </a:rPr>
-              <a:t>Notifications</a:t>
+              <a:t>Équipe</a:t>
             </a:r>
             <a:endParaRPr lang="en-US" sz="2400" dirty="0"/>
           </a:p>
@@ -10074,7 +10124,7 @@
                 <a:ea typeface="Segoe UI" pitchFamily="34" charset="-122"/>
                 <a:cs typeface="Segoe UI" pitchFamily="34" charset="-120"/>
               </a:rPr>
-              <a:t>Envoi d'email réel à la signature du devis</a:t>
+              <a:t>Six types de pointage</a:t>
             </a:r>
             <a:endParaRPr lang="en-US" sz="1400" dirty="0"/>
           </a:p>
@@ -10116,7 +10166,7 @@
                 <a:ea typeface="Segoe UI" pitchFamily="34" charset="-122"/>
                 <a:cs typeface="Segoe UI" pitchFamily="34" charset="-120"/>
               </a:rPr>
-              <a:t>Le premier envoi des identifiants client déclenche désormais un vrai email (SMTP), et plus seulement une file d'attente locale.</a:t>
+              <a:t>Heures de travail, jour de travail, forfait, ouvrage, passage, déplacement — chacun avec date et montant ; le montant des heures est calculé automatiquement à partir du taux horaire de l'ouvrier.</a:t>
             </a:r>
             <a:endParaRPr lang="en-US" sz="1100" dirty="0"/>
           </a:p>
@@ -10124,7 +10174,263 @@
       </p:sp>
       <p:sp>
         <p:nvSpPr>
-          <p:cNvPr id="9" name="Text 7"/>
+          <p:cNvPr id="9" name="Shape 7"/>
+          <p:cNvSpPr/>
+          <p:nvPr/>
+        </p:nvSpPr>
+        <p:spPr>
+          <a:xfrm>
+            <a:off x="640080" y="2926080"/>
+            <a:ext cx="10881360" cy="1097280"/>
+          </a:xfrm>
+          <a:prstGeom prst="roundRect">
+            <a:avLst>
+              <a:gd name="adj" fmla="val 5000"/>
+            </a:avLst>
+          </a:prstGeom>
+          <a:solidFill>
+            <a:srgbClr val="FFFFFF"/>
+          </a:solidFill>
+          <a:ln w="12700">
+            <a:solidFill>
+              <a:srgbClr val="E4DCCB"/>
+            </a:solidFill>
+            <a:prstDash val="solid"/>
+          </a:ln>
+        </p:spPr>
+      </p:sp>
+      <p:sp>
+        <p:nvSpPr>
+          <p:cNvPr id="10" name="Shape 8"/>
+          <p:cNvSpPr/>
+          <p:nvPr/>
+        </p:nvSpPr>
+        <p:spPr>
+          <a:xfrm>
+            <a:off x="640080" y="2926080"/>
+            <a:ext cx="54864" cy="1097280"/>
+          </a:xfrm>
+          <a:prstGeom prst="rect">
+            <a:avLst/>
+          </a:prstGeom>
+          <a:solidFill>
+            <a:srgbClr val="9A4C1F"/>
+          </a:solidFill>
+          <a:ln/>
+        </p:spPr>
+      </p:sp>
+      <p:sp>
+        <p:nvSpPr>
+          <p:cNvPr id="11" name="Text 9"/>
+          <p:cNvSpPr/>
+          <p:nvPr/>
+        </p:nvSpPr>
+        <p:spPr>
+          <a:xfrm>
+            <a:off x="914400" y="3035808"/>
+            <a:ext cx="10332720" cy="365760"/>
+          </a:xfrm>
+          <a:prstGeom prst="rect">
+            <a:avLst/>
+          </a:prstGeom>
+          <a:noFill/>
+          <a:ln/>
+        </p:spPr>
+        <p:txBody>
+          <a:bodyPr wrap="square" rtlCol="0" anchor="ctr"/>
+          <a:lstStyle/>
+          <a:p>
+            <a:pPr indent="0" marL="0">
+              <a:buNone/>
+            </a:pPr>
+            <a:r>
+              <a:rPr lang="en-US" sz="1400" b="1" dirty="0">
+                <a:solidFill>
+                  <a:srgbClr val="1B1F3B"/>
+                </a:solidFill>
+                <a:latin typeface="Segoe UI" pitchFamily="34" charset="0"/>
+                <a:ea typeface="Segoe UI" pitchFamily="34" charset="-122"/>
+                <a:cs typeface="Segoe UI" pitchFamily="34" charset="-120"/>
+              </a:rPr>
+              <a:t>Alertes automatiques de dépassement / manque d'heures</a:t>
+            </a:r>
+            <a:endParaRPr lang="en-US" sz="1400" dirty="0"/>
+          </a:p>
+        </p:txBody>
+      </p:sp>
+      <p:sp>
+        <p:nvSpPr>
+          <p:cNvPr id="12" name="Text 10"/>
+          <p:cNvSpPr/>
+          <p:nvPr/>
+        </p:nvSpPr>
+        <p:spPr>
+          <a:xfrm>
+            <a:off x="914400" y="3383280"/>
+            <a:ext cx="10332720" cy="594360"/>
+          </a:xfrm>
+          <a:prstGeom prst="rect">
+            <a:avLst/>
+          </a:prstGeom>
+          <a:noFill/>
+          <a:ln/>
+        </p:spPr>
+        <p:txBody>
+          <a:bodyPr wrap="square" rtlCol="0" anchor="ctr"/>
+          <a:lstStyle/>
+          <a:p>
+            <a:pPr indent="0" marL="0">
+              <a:lnSpc>
+                <a:spcPts val="1400"/>
+              </a:lnSpc>
+              <a:buNone/>
+            </a:pPr>
+            <a:r>
+              <a:rPr lang="en-US" sz="1100" dirty="0">
+                <a:solidFill>
+                  <a:srgbClr val="8A7C68"/>
+                </a:solidFill>
+                <a:latin typeface="Segoe UI" pitchFamily="34" charset="0"/>
+                <a:ea typeface="Segoe UI" pitchFamily="34" charset="-122"/>
+                <a:cs typeface="Segoe UI" pitchFamily="34" charset="-120"/>
+              </a:rPr>
+              <a:t>À la fin de chaque semaine, si le total travaillé diffère du contrat de plus de 15 minutes, une notification est envoyée automatiquement à l'entreprise (une seule fois par semaine et par ouvrier).</a:t>
+            </a:r>
+            <a:endParaRPr lang="en-US" sz="1100" dirty="0"/>
+          </a:p>
+        </p:txBody>
+      </p:sp>
+      <p:sp>
+        <p:nvSpPr>
+          <p:cNvPr id="13" name="Shape 11"/>
+          <p:cNvSpPr/>
+          <p:nvPr/>
+        </p:nvSpPr>
+        <p:spPr>
+          <a:xfrm>
+            <a:off x="640080" y="4160520"/>
+            <a:ext cx="10881360" cy="1097280"/>
+          </a:xfrm>
+          <a:prstGeom prst="roundRect">
+            <a:avLst>
+              <a:gd name="adj" fmla="val 5000"/>
+            </a:avLst>
+          </a:prstGeom>
+          <a:solidFill>
+            <a:srgbClr val="FFFFFF"/>
+          </a:solidFill>
+          <a:ln w="12700">
+            <a:solidFill>
+              <a:srgbClr val="E4DCCB"/>
+            </a:solidFill>
+            <a:prstDash val="solid"/>
+          </a:ln>
+        </p:spPr>
+      </p:sp>
+      <p:sp>
+        <p:nvSpPr>
+          <p:cNvPr id="14" name="Shape 12"/>
+          <p:cNvSpPr/>
+          <p:nvPr/>
+        </p:nvSpPr>
+        <p:spPr>
+          <a:xfrm>
+            <a:off x="640080" y="4160520"/>
+            <a:ext cx="54864" cy="1097280"/>
+          </a:xfrm>
+          <a:prstGeom prst="rect">
+            <a:avLst/>
+          </a:prstGeom>
+          <a:solidFill>
+            <a:srgbClr val="9A4C1F"/>
+          </a:solidFill>
+          <a:ln/>
+        </p:spPr>
+      </p:sp>
+      <p:sp>
+        <p:nvSpPr>
+          <p:cNvPr id="15" name="Text 13"/>
+          <p:cNvSpPr/>
+          <p:nvPr/>
+        </p:nvSpPr>
+        <p:spPr>
+          <a:xfrm>
+            <a:off x="914400" y="4270248"/>
+            <a:ext cx="10332720" cy="365760"/>
+          </a:xfrm>
+          <a:prstGeom prst="rect">
+            <a:avLst/>
+          </a:prstGeom>
+          <a:noFill/>
+          <a:ln/>
+        </p:spPr>
+        <p:txBody>
+          <a:bodyPr wrap="square" rtlCol="0" anchor="ctr"/>
+          <a:lstStyle/>
+          <a:p>
+            <a:pPr indent="0" marL="0">
+              <a:buNone/>
+            </a:pPr>
+            <a:r>
+              <a:rPr lang="en-US" sz="1400" b="1" dirty="0">
+                <a:solidFill>
+                  <a:srgbClr val="1B1F3B"/>
+                </a:solidFill>
+                <a:latin typeface="Segoe UI" pitchFamily="34" charset="0"/>
+                <a:ea typeface="Segoe UI" pitchFamily="34" charset="-122"/>
+                <a:cs typeface="Segoe UI" pitchFamily="34" charset="-120"/>
+              </a:rPr>
+              <a:t>Export PDF du relevé d'heures</a:t>
+            </a:r>
+            <a:endParaRPr lang="en-US" sz="1400" dirty="0"/>
+          </a:p>
+        </p:txBody>
+      </p:sp>
+      <p:sp>
+        <p:nvSpPr>
+          <p:cNvPr id="16" name="Text 14"/>
+          <p:cNvSpPr/>
+          <p:nvPr/>
+        </p:nvSpPr>
+        <p:spPr>
+          <a:xfrm>
+            <a:off x="914400" y="4617720"/>
+            <a:ext cx="10332720" cy="594360"/>
+          </a:xfrm>
+          <a:prstGeom prst="rect">
+            <a:avLst/>
+          </a:prstGeom>
+          <a:noFill/>
+          <a:ln/>
+        </p:spPr>
+        <p:txBody>
+          <a:bodyPr wrap="square" rtlCol="0" anchor="ctr"/>
+          <a:lstStyle/>
+          <a:p>
+            <a:pPr indent="0" marL="0">
+              <a:lnSpc>
+                <a:spcPts val="1400"/>
+              </a:lnSpc>
+              <a:buNone/>
+            </a:pPr>
+            <a:r>
+              <a:rPr lang="en-US" sz="1100" dirty="0">
+                <a:solidFill>
+                  <a:srgbClr val="8A7C68"/>
+                </a:solidFill>
+                <a:latin typeface="Segoe UI" pitchFamily="34" charset="0"/>
+                <a:ea typeface="Segoe UI" pitchFamily="34" charset="-122"/>
+                <a:cs typeface="Segoe UI" pitchFamily="34" charset="-120"/>
+              </a:rPr>
+              <a:t>Génération d'un PDF mensuel par ouvrier : détail par journée/type de pointage, totaux hebdomadaires, total du mois en heures et en montant — pensé pour la comptabilité et la gestion de la paie.</a:t>
+            </a:r>
+            <a:endParaRPr lang="en-US" sz="1100" dirty="0"/>
+          </a:p>
+        </p:txBody>
+      </p:sp>
+      <p:sp>
+        <p:nvSpPr>
+          <p:cNvPr id="17" name="Text 15"/>
           <p:cNvSpPr/>
           <p:nvPr/>
         </p:nvSpPr>
@@ -10163,7 +10469,7 @@
       </p:sp>
       <p:sp>
         <p:nvSpPr>
-          <p:cNvPr id="10" name="Text 8"/>
+          <p:cNvPr id="18" name="Text 16"/>
           <p:cNvSpPr/>
           <p:nvPr/>
         </p:nvSpPr>
@@ -10326,7 +10632,7 @@
                 <a:ea typeface="Georgia" pitchFamily="34" charset="-122"/>
                 <a:cs typeface="Georgia" pitchFamily="34" charset="-120"/>
               </a:rPr>
-              <a:t>Signature &amp; portails</a:t>
+              <a:t>Notifications</a:t>
             </a:r>
             <a:endParaRPr lang="en-US" sz="2400" dirty="0"/>
           </a:p>
@@ -10412,7 +10718,7 @@
                 <a:ea typeface="Segoe UI" pitchFamily="34" charset="-122"/>
                 <a:cs typeface="Segoe UI" pitchFamily="34" charset="-120"/>
               </a:rPr>
-              <a:t>Signature client branchée sur Supabase</a:t>
+              <a:t>Envoi d'email réel à la signature du devis</a:t>
             </a:r>
             <a:endParaRPr lang="en-US" sz="1400" dirty="0"/>
           </a:p>
@@ -10454,7 +10760,7 @@
                 <a:ea typeface="Segoe UI" pitchFamily="34" charset="-122"/>
                 <a:cs typeface="Segoe UI" pitchFamily="34" charset="-120"/>
               </a:rPr>
-              <a:t>Le client qui signe un devis n'a pas de session Kôji : une clé technique dédiée (service_role) permet de retrouver et mettre à jour son devis directement dans la base partagée.</a:t>
+              <a:t>Le premier envoi des identifiants client déclenche désormais un vrai email (SMTP), et plus seulement une file d'attente locale.</a:t>
             </a:r>
             <a:endParaRPr lang="en-US" sz="1100" dirty="0"/>
           </a:p>
@@ -10462,263 +10768,7 @@
       </p:sp>
       <p:sp>
         <p:nvSpPr>
-          <p:cNvPr id="9" name="Shape 7"/>
-          <p:cNvSpPr/>
-          <p:nvPr/>
-        </p:nvSpPr>
-        <p:spPr>
-          <a:xfrm>
-            <a:off x="640080" y="2926080"/>
-            <a:ext cx="10881360" cy="1097280"/>
-          </a:xfrm>
-          <a:prstGeom prst="roundRect">
-            <a:avLst>
-              <a:gd name="adj" fmla="val 5000"/>
-            </a:avLst>
-          </a:prstGeom>
-          <a:solidFill>
-            <a:srgbClr val="FFFFFF"/>
-          </a:solidFill>
-          <a:ln w="12700">
-            <a:solidFill>
-              <a:srgbClr val="E4DCCB"/>
-            </a:solidFill>
-            <a:prstDash val="solid"/>
-          </a:ln>
-        </p:spPr>
-      </p:sp>
-      <p:sp>
-        <p:nvSpPr>
-          <p:cNvPr id="10" name="Shape 8"/>
-          <p:cNvSpPr/>
-          <p:nvPr/>
-        </p:nvSpPr>
-        <p:spPr>
-          <a:xfrm>
-            <a:off x="640080" y="2926080"/>
-            <a:ext cx="54864" cy="1097280"/>
-          </a:xfrm>
-          <a:prstGeom prst="rect">
-            <a:avLst/>
-          </a:prstGeom>
-          <a:solidFill>
-            <a:srgbClr val="9A4C1F"/>
-          </a:solidFill>
-          <a:ln/>
-        </p:spPr>
-      </p:sp>
-      <p:sp>
-        <p:nvSpPr>
-          <p:cNvPr id="11" name="Text 9"/>
-          <p:cNvSpPr/>
-          <p:nvPr/>
-        </p:nvSpPr>
-        <p:spPr>
-          <a:xfrm>
-            <a:off x="914400" y="3035808"/>
-            <a:ext cx="10332720" cy="365760"/>
-          </a:xfrm>
-          <a:prstGeom prst="rect">
-            <a:avLst/>
-          </a:prstGeom>
-          <a:noFill/>
-          <a:ln/>
-        </p:spPr>
-        <p:txBody>
-          <a:bodyPr wrap="square" rtlCol="0" anchor="ctr"/>
-          <a:lstStyle/>
-          <a:p>
-            <a:pPr indent="0" marL="0">
-              <a:buNone/>
-            </a:pPr>
-            <a:r>
-              <a:rPr lang="en-US" sz="1400" b="1" dirty="0">
-                <a:solidFill>
-                  <a:srgbClr val="1B1F3B"/>
-                </a:solidFill>
-                <a:latin typeface="Segoe UI" pitchFamily="34" charset="0"/>
-                <a:ea typeface="Segoe UI" pitchFamily="34" charset="-122"/>
-                <a:cs typeface="Segoe UI" pitchFamily="34" charset="-120"/>
-              </a:rPr>
-              <a:t>Audit complet du portail client</a:t>
-            </a:r>
-            <a:endParaRPr lang="en-US" sz="1400" dirty="0"/>
-          </a:p>
-        </p:txBody>
-      </p:sp>
-      <p:sp>
-        <p:nvSpPr>
-          <p:cNvPr id="12" name="Text 10"/>
-          <p:cNvSpPr/>
-          <p:nvPr/>
-        </p:nvSpPr>
-        <p:spPr>
-          <a:xfrm>
-            <a:off x="914400" y="3383280"/>
-            <a:ext cx="10332720" cy="594360"/>
-          </a:xfrm>
-          <a:prstGeom prst="rect">
-            <a:avLst/>
-          </a:prstGeom>
-          <a:noFill/>
-          <a:ln/>
-        </p:spPr>
-        <p:txBody>
-          <a:bodyPr wrap="square" rtlCol="0" anchor="ctr"/>
-          <a:lstStyle/>
-          <a:p>
-            <a:pPr indent="0" marL="0">
-              <a:lnSpc>
-                <a:spcPts val="1400"/>
-              </a:lnSpc>
-              <a:buNone/>
-            </a:pPr>
-            <a:r>
-              <a:rPr lang="en-US" sz="1100" dirty="0">
-                <a:solidFill>
-                  <a:srgbClr val="8A7C68"/>
-                </a:solidFill>
-                <a:latin typeface="Segoe UI" pitchFamily="34" charset="0"/>
-                <a:ea typeface="Segoe UI" pitchFamily="34" charset="-122"/>
-                <a:cs typeface="Segoe UI" pitchFamily="34" charset="-120"/>
-              </a:rPr>
-              <a:t>Plusieurs routes (connexion client, devis/tâches/notes du portail, création de factures) lisaient encore l'ancien fichier JSON local et ne trouvaient plus aucune donnée récente depuis la migration Supabase des devis — toutes corrigées.</a:t>
-            </a:r>
-            <a:endParaRPr lang="en-US" sz="1100" dirty="0"/>
-          </a:p>
-        </p:txBody>
-      </p:sp>
-      <p:sp>
-        <p:nvSpPr>
-          <p:cNvPr id="13" name="Shape 11"/>
-          <p:cNvSpPr/>
-          <p:nvPr/>
-        </p:nvSpPr>
-        <p:spPr>
-          <a:xfrm>
-            <a:off x="640080" y="4160520"/>
-            <a:ext cx="10881360" cy="1097280"/>
-          </a:xfrm>
-          <a:prstGeom prst="roundRect">
-            <a:avLst>
-              <a:gd name="adj" fmla="val 5000"/>
-            </a:avLst>
-          </a:prstGeom>
-          <a:solidFill>
-            <a:srgbClr val="FFFFFF"/>
-          </a:solidFill>
-          <a:ln w="12700">
-            <a:solidFill>
-              <a:srgbClr val="E4DCCB"/>
-            </a:solidFill>
-            <a:prstDash val="solid"/>
-          </a:ln>
-        </p:spPr>
-      </p:sp>
-      <p:sp>
-        <p:nvSpPr>
-          <p:cNvPr id="14" name="Shape 12"/>
-          <p:cNvSpPr/>
-          <p:nvPr/>
-        </p:nvSpPr>
-        <p:spPr>
-          <a:xfrm>
-            <a:off x="640080" y="4160520"/>
-            <a:ext cx="54864" cy="1097280"/>
-          </a:xfrm>
-          <a:prstGeom prst="rect">
-            <a:avLst/>
-          </a:prstGeom>
-          <a:solidFill>
-            <a:srgbClr val="9A4C1F"/>
-          </a:solidFill>
-          <a:ln/>
-        </p:spPr>
-      </p:sp>
-      <p:sp>
-        <p:nvSpPr>
-          <p:cNvPr id="15" name="Text 13"/>
-          <p:cNvSpPr/>
-          <p:nvPr/>
-        </p:nvSpPr>
-        <p:spPr>
-          <a:xfrm>
-            <a:off x="914400" y="4270248"/>
-            <a:ext cx="10332720" cy="365760"/>
-          </a:xfrm>
-          <a:prstGeom prst="rect">
-            <a:avLst/>
-          </a:prstGeom>
-          <a:noFill/>
-          <a:ln/>
-        </p:spPr>
-        <p:txBody>
-          <a:bodyPr wrap="square" rtlCol="0" anchor="ctr"/>
-          <a:lstStyle/>
-          <a:p>
-            <a:pPr indent="0" marL="0">
-              <a:buNone/>
-            </a:pPr>
-            <a:r>
-              <a:rPr lang="en-US" sz="1400" b="1" dirty="0">
-                <a:solidFill>
-                  <a:srgbClr val="1B1F3B"/>
-                </a:solidFill>
-                <a:latin typeface="Segoe UI" pitchFamily="34" charset="0"/>
-                <a:ea typeface="Segoe UI" pitchFamily="34" charset="-122"/>
-                <a:cs typeface="Segoe UI" pitchFamily="34" charset="-120"/>
-              </a:rPr>
-              <a:t>Suivi du temps par ouvrage</a:t>
-            </a:r>
-            <a:endParaRPr lang="en-US" sz="1400" dirty="0"/>
-          </a:p>
-        </p:txBody>
-      </p:sp>
-      <p:sp>
-        <p:nvSpPr>
-          <p:cNvPr id="16" name="Text 14"/>
-          <p:cNvSpPr/>
-          <p:nvPr/>
-        </p:nvSpPr>
-        <p:spPr>
-          <a:xfrm>
-            <a:off x="914400" y="4617720"/>
-            <a:ext cx="10332720" cy="594360"/>
-          </a:xfrm>
-          <a:prstGeom prst="rect">
-            <a:avLst/>
-          </a:prstGeom>
-          <a:noFill/>
-          <a:ln/>
-        </p:spPr>
-        <p:txBody>
-          <a:bodyPr wrap="square" rtlCol="0" anchor="ctr"/>
-          <a:lstStyle/>
-          <a:p>
-            <a:pPr indent="0" marL="0">
-              <a:lnSpc>
-                <a:spcPts val="1400"/>
-              </a:lnSpc>
-              <a:buNone/>
-            </a:pPr>
-            <a:r>
-              <a:rPr lang="en-US" sz="1100" dirty="0">
-                <a:solidFill>
-                  <a:srgbClr val="8A7C68"/>
-                </a:solidFill>
-                <a:latin typeface="Segoe UI" pitchFamily="34" charset="0"/>
-                <a:ea typeface="Segoe UI" pitchFamily="34" charset="-122"/>
-                <a:cs typeface="Segoe UI" pitchFamily="34" charset="-120"/>
-              </a:rPr>
-              <a:t>Boutons Démarrer / Pause / Reprendre / Terminer par tâche, avec calcul automatique du temps consommé et alerte en cas de dépassement du temps prévu.</a:t>
-            </a:r>
-            <a:endParaRPr lang="en-US" sz="1100" dirty="0"/>
-          </a:p>
-        </p:txBody>
-      </p:sp>
-      <p:sp>
-        <p:nvSpPr>
-          <p:cNvPr id="17" name="Text 15"/>
+          <p:cNvPr id="9" name="Text 7"/>
           <p:cNvSpPr/>
           <p:nvPr/>
         </p:nvSpPr>
@@ -10757,7 +10807,7 @@
       </p:sp>
       <p:sp>
         <p:nvSpPr>
-          <p:cNvPr id="18" name="Text 16"/>
+          <p:cNvPr id="10" name="Text 8"/>
           <p:cNvSpPr/>
           <p:nvPr/>
         </p:nvSpPr>
@@ -10920,7 +10970,7 @@
                 <a:ea typeface="Georgia" pitchFamily="34" charset="-122"/>
                 <a:cs typeface="Georgia" pitchFamily="34" charset="-120"/>
               </a:rPr>
-              <a:t>Accueil &amp; stabilité</a:t>
+              <a:t>Signature &amp; portails</a:t>
             </a:r>
             <a:endParaRPr lang="en-US" sz="2400" dirty="0"/>
           </a:p>
@@ -11006,7 +11056,7 @@
                 <a:ea typeface="Segoe UI" pitchFamily="34" charset="-122"/>
                 <a:cs typeface="Segoe UI" pitchFamily="34" charset="-120"/>
               </a:rPr>
-              <a:t>Reconnexion automatique de session</a:t>
+              <a:t>Signature client branchée sur Supabase</a:t>
             </a:r>
             <a:endParaRPr lang="en-US" sz="1400" dirty="0"/>
           </a:p>
@@ -11048,7 +11098,7 @@
                 <a:ea typeface="Segoe UI" pitchFamily="34" charset="-122"/>
                 <a:cs typeface="Segoe UI" pitchFamily="34" charset="-120"/>
               </a:rPr>
-              <a:t>Une session expirée (~1h) provoquait des échecs silencieux à l'enregistrement (profil, IBAN, devis) sans reconnexion automatique ; la détection couvre désormais tous les cas d'expiration.</a:t>
+              <a:t>Le client qui signe un devis n'a pas de session Kôji : une clé technique dédiée (service_role) permet de retrouver et mettre à jour son devis directement dans la base partagée.</a:t>
             </a:r>
             <a:endParaRPr lang="en-US" sz="1100" dirty="0"/>
           </a:p>
@@ -11134,7 +11184,7 @@
                 <a:ea typeface="Segoe UI" pitchFamily="34" charset="-122"/>
                 <a:cs typeface="Segoe UI" pitchFamily="34" charset="-120"/>
               </a:rPr>
-              <a:t>Corrections de plantages ponctuels</a:t>
+              <a:t>Audit complet du portail client</a:t>
             </a:r>
             <a:endParaRPr lang="en-US" sz="1400" dirty="0"/>
           </a:p>
@@ -11176,7 +11226,7 @@
                 <a:ea typeface="Segoe UI" pitchFamily="34" charset="-122"/>
                 <a:cs typeface="Segoe UI" pitchFamily="34" charset="-120"/>
               </a:rPr>
-              <a:t>Plusieurs erreurs bloquantes corrigées au fil des tests (références de code manquantes, composants mal placés).</a:t>
+              <a:t>Plusieurs routes (connexion client, devis/tâches/notes du portail, création de factures) lisaient encore l'ancien fichier JSON local et ne trouvaient plus aucune donnée récente depuis la migration Supabase des devis — toutes corrigées.</a:t>
             </a:r>
             <a:endParaRPr lang="en-US" sz="1100" dirty="0"/>
           </a:p>
@@ -11184,7 +11234,135 @@
       </p:sp>
       <p:sp>
         <p:nvSpPr>
-          <p:cNvPr id="13" name="Text 11"/>
+          <p:cNvPr id="13" name="Shape 11"/>
+          <p:cNvSpPr/>
+          <p:nvPr/>
+        </p:nvSpPr>
+        <p:spPr>
+          <a:xfrm>
+            <a:off x="640080" y="4160520"/>
+            <a:ext cx="10881360" cy="1097280"/>
+          </a:xfrm>
+          <a:prstGeom prst="roundRect">
+            <a:avLst>
+              <a:gd name="adj" fmla="val 5000"/>
+            </a:avLst>
+          </a:prstGeom>
+          <a:solidFill>
+            <a:srgbClr val="FFFFFF"/>
+          </a:solidFill>
+          <a:ln w="12700">
+            <a:solidFill>
+              <a:srgbClr val="E4DCCB"/>
+            </a:solidFill>
+            <a:prstDash val="solid"/>
+          </a:ln>
+        </p:spPr>
+      </p:sp>
+      <p:sp>
+        <p:nvSpPr>
+          <p:cNvPr id="14" name="Shape 12"/>
+          <p:cNvSpPr/>
+          <p:nvPr/>
+        </p:nvSpPr>
+        <p:spPr>
+          <a:xfrm>
+            <a:off x="640080" y="4160520"/>
+            <a:ext cx="54864" cy="1097280"/>
+          </a:xfrm>
+          <a:prstGeom prst="rect">
+            <a:avLst/>
+          </a:prstGeom>
+          <a:solidFill>
+            <a:srgbClr val="9A4C1F"/>
+          </a:solidFill>
+          <a:ln/>
+        </p:spPr>
+      </p:sp>
+      <p:sp>
+        <p:nvSpPr>
+          <p:cNvPr id="15" name="Text 13"/>
+          <p:cNvSpPr/>
+          <p:nvPr/>
+        </p:nvSpPr>
+        <p:spPr>
+          <a:xfrm>
+            <a:off x="914400" y="4270248"/>
+            <a:ext cx="10332720" cy="365760"/>
+          </a:xfrm>
+          <a:prstGeom prst="rect">
+            <a:avLst/>
+          </a:prstGeom>
+          <a:noFill/>
+          <a:ln/>
+        </p:spPr>
+        <p:txBody>
+          <a:bodyPr wrap="square" rtlCol="0" anchor="ctr"/>
+          <a:lstStyle/>
+          <a:p>
+            <a:pPr indent="0" marL="0">
+              <a:buNone/>
+            </a:pPr>
+            <a:r>
+              <a:rPr lang="en-US" sz="1400" b="1" dirty="0">
+                <a:solidFill>
+                  <a:srgbClr val="1B1F3B"/>
+                </a:solidFill>
+                <a:latin typeface="Segoe UI" pitchFamily="34" charset="0"/>
+                <a:ea typeface="Segoe UI" pitchFamily="34" charset="-122"/>
+                <a:cs typeface="Segoe UI" pitchFamily="34" charset="-120"/>
+              </a:rPr>
+              <a:t>Suivi du temps par ouvrage</a:t>
+            </a:r>
+            <a:endParaRPr lang="en-US" sz="1400" dirty="0"/>
+          </a:p>
+        </p:txBody>
+      </p:sp>
+      <p:sp>
+        <p:nvSpPr>
+          <p:cNvPr id="16" name="Text 14"/>
+          <p:cNvSpPr/>
+          <p:nvPr/>
+        </p:nvSpPr>
+        <p:spPr>
+          <a:xfrm>
+            <a:off x="914400" y="4617720"/>
+            <a:ext cx="10332720" cy="594360"/>
+          </a:xfrm>
+          <a:prstGeom prst="rect">
+            <a:avLst/>
+          </a:prstGeom>
+          <a:noFill/>
+          <a:ln/>
+        </p:spPr>
+        <p:txBody>
+          <a:bodyPr wrap="square" rtlCol="0" anchor="ctr"/>
+          <a:lstStyle/>
+          <a:p>
+            <a:pPr indent="0" marL="0">
+              <a:lnSpc>
+                <a:spcPts val="1400"/>
+              </a:lnSpc>
+              <a:buNone/>
+            </a:pPr>
+            <a:r>
+              <a:rPr lang="en-US" sz="1100" dirty="0">
+                <a:solidFill>
+                  <a:srgbClr val="8A7C68"/>
+                </a:solidFill>
+                <a:latin typeface="Segoe UI" pitchFamily="34" charset="0"/>
+                <a:ea typeface="Segoe UI" pitchFamily="34" charset="-122"/>
+                <a:cs typeface="Segoe UI" pitchFamily="34" charset="-120"/>
+              </a:rPr>
+              <a:t>Boutons Démarrer / Pause / Reprendre / Terminer par tâche, avec calcul automatique du temps consommé et alerte en cas de dépassement du temps prévu.</a:t>
+            </a:r>
+            <a:endParaRPr lang="en-US" sz="1100" dirty="0"/>
+          </a:p>
+        </p:txBody>
+      </p:sp>
+      <p:sp>
+        <p:nvSpPr>
+          <p:cNvPr id="17" name="Text 15"/>
           <p:cNvSpPr/>
           <p:nvPr/>
         </p:nvSpPr>
@@ -11223,7 +11401,7 @@
       </p:sp>
       <p:sp>
         <p:nvSpPr>
-          <p:cNvPr id="14" name="Text 12"/>
+          <p:cNvPr id="18" name="Text 16"/>
           <p:cNvSpPr/>
           <p:nvPr/>
         </p:nvSpPr>
@@ -11386,7 +11564,7 @@
                 <a:ea typeface="Georgia" pitchFamily="34" charset="-122"/>
                 <a:cs typeface="Georgia" pitchFamily="34" charset="-120"/>
               </a:rPr>
-              <a:t>Rapports d'intervention</a:t>
+              <a:t>Accueil &amp; stabilité</a:t>
             </a:r>
             <a:endParaRPr lang="en-US" sz="2400" dirty="0"/>
           </a:p>
@@ -11472,7 +11650,7 @@
                 <a:ea typeface="Segoe UI" pitchFamily="34" charset="-122"/>
                 <a:cs typeface="Segoe UI" pitchFamily="34" charset="-120"/>
               </a:rPr>
-              <a:t>Nouvelle entité 'interventions'</a:t>
+              <a:t>Reconnexion automatique de session</a:t>
             </a:r>
             <a:endParaRPr lang="en-US" sz="1400" dirty="0"/>
           </a:p>
@@ -11514,7 +11692,7 @@
                 <a:ea typeface="Segoe UI" pitchFamily="34" charset="-122"/>
                 <a:cs typeface="Segoe UI" pitchFamily="34" charset="-120"/>
               </a:rPr>
-              <a:t>API dédiée (creation, consultation, suppression) pour stocker les rapports d'intervention, avec historique des actions comme pour les autres modules.</a:t>
+              <a:t>Une session expirée (~1h) provoquait des échecs silencieux à l'enregistrement (profil, IBAN, devis) sans reconnexion automatique ; la détection couvre désormais tous les cas d'expiration.</a:t>
             </a:r>
             <a:endParaRPr lang="en-US" sz="1100" dirty="0"/>
           </a:p>
@@ -11600,7 +11778,7 @@
                 <a:ea typeface="Segoe UI" pitchFamily="34" charset="-122"/>
                 <a:cs typeface="Segoe UI" pitchFamily="34" charset="-120"/>
               </a:rPr>
-              <a:t>Génération PDF du rapport d'intervention</a:t>
+              <a:t>Corrections de plantages ponctuels</a:t>
             </a:r>
             <a:endParaRPr lang="en-US" sz="1400" dirty="0"/>
           </a:p>
@@ -11642,7 +11820,7 @@
                 <a:ea typeface="Segoe UI" pitchFamily="34" charset="-122"/>
                 <a:cs typeface="Segoe UI" pitchFamily="34" charset="-120"/>
               </a:rPr>
-              <a:t>Chaque rapport peut être téléchargé en PDF avec le logo de l'entreprise en en-tête, dans une mise en page reprenant celle des rapports d'intervention papier existants.</a:t>
+              <a:t>Plusieurs erreurs bloquantes corrigées au fil des tests (références de code manquantes, composants mal placés).</a:t>
             </a:r>
             <a:endParaRPr lang="en-US" sz="1100" dirty="0"/>
           </a:p>
@@ -11650,263 +11828,7 @@
       </p:sp>
       <p:sp>
         <p:nvSpPr>
-          <p:cNvPr id="13" name="Shape 11"/>
-          <p:cNvSpPr/>
-          <p:nvPr/>
-        </p:nvSpPr>
-        <p:spPr>
-          <a:xfrm>
-            <a:off x="640080" y="4160520"/>
-            <a:ext cx="10881360" cy="1097280"/>
-          </a:xfrm>
-          <a:prstGeom prst="roundRect">
-            <a:avLst>
-              <a:gd name="adj" fmla="val 5000"/>
-            </a:avLst>
-          </a:prstGeom>
-          <a:solidFill>
-            <a:srgbClr val="FFFFFF"/>
-          </a:solidFill>
-          <a:ln w="12700">
-            <a:solidFill>
-              <a:srgbClr val="E4DCCB"/>
-            </a:solidFill>
-            <a:prstDash val="solid"/>
-          </a:ln>
-        </p:spPr>
-      </p:sp>
-      <p:sp>
-        <p:nvSpPr>
-          <p:cNvPr id="14" name="Shape 12"/>
-          <p:cNvSpPr/>
-          <p:nvPr/>
-        </p:nvSpPr>
-        <p:spPr>
-          <a:xfrm>
-            <a:off x="640080" y="4160520"/>
-            <a:ext cx="54864" cy="1097280"/>
-          </a:xfrm>
-          <a:prstGeom prst="rect">
-            <a:avLst/>
-          </a:prstGeom>
-          <a:solidFill>
-            <a:srgbClr val="9A4C1F"/>
-          </a:solidFill>
-          <a:ln/>
-        </p:spPr>
-      </p:sp>
-      <p:sp>
-        <p:nvSpPr>
-          <p:cNvPr id="15" name="Text 13"/>
-          <p:cNvSpPr/>
-          <p:nvPr/>
-        </p:nvSpPr>
-        <p:spPr>
-          <a:xfrm>
-            <a:off x="914400" y="4270248"/>
-            <a:ext cx="10332720" cy="365760"/>
-          </a:xfrm>
-          <a:prstGeom prst="rect">
-            <a:avLst/>
-          </a:prstGeom>
-          <a:noFill/>
-          <a:ln/>
-        </p:spPr>
-        <p:txBody>
-          <a:bodyPr wrap="square" rtlCol="0" anchor="ctr"/>
-          <a:lstStyle/>
-          <a:p>
-            <a:pPr indent="0" marL="0">
-              <a:buNone/>
-            </a:pPr>
-            <a:r>
-              <a:rPr lang="en-US" sz="1400" b="1" dirty="0">
-                <a:solidFill>
-                  <a:srgbClr val="1B1F3B"/>
-                </a:solidFill>
-                <a:latin typeface="Segoe UI" pitchFamily="34" charset="0"/>
-                <a:ea typeface="Segoe UI" pitchFamily="34" charset="-122"/>
-                <a:cs typeface="Segoe UI" pitchFamily="34" charset="-120"/>
-              </a:rPr>
-              <a:t>Facturation directe d'une intervention</a:t>
-            </a:r>
-            <a:endParaRPr lang="en-US" sz="1400" dirty="0"/>
-          </a:p>
-        </p:txBody>
-      </p:sp>
-      <p:sp>
-        <p:nvSpPr>
-          <p:cNvPr id="16" name="Text 14"/>
-          <p:cNvSpPr/>
-          <p:nvPr/>
-        </p:nvSpPr>
-        <p:spPr>
-          <a:xfrm>
-            <a:off x="914400" y="4617720"/>
-            <a:ext cx="10332720" cy="594360"/>
-          </a:xfrm>
-          <a:prstGeom prst="rect">
-            <a:avLst/>
-          </a:prstGeom>
-          <a:noFill/>
-          <a:ln/>
-        </p:spPr>
-        <p:txBody>
-          <a:bodyPr wrap="square" rtlCol="0" anchor="ctr"/>
-          <a:lstStyle/>
-          <a:p>
-            <a:pPr indent="0" marL="0">
-              <a:lnSpc>
-                <a:spcPts val="1400"/>
-              </a:lnSpc>
-              <a:buNone/>
-            </a:pPr>
-            <a:r>
-              <a:rPr lang="en-US" sz="1100" dirty="0">
-                <a:solidFill>
-                  <a:srgbClr val="8A7C68"/>
-                </a:solidFill>
-                <a:latin typeface="Segoe UI" pitchFamily="34" charset="0"/>
-                <a:ea typeface="Segoe UI" pitchFamily="34" charset="-122"/>
-                <a:cs typeface="Segoe UI" pitchFamily="34" charset="-120"/>
-              </a:rPr>
-              <a:t>Une facture peut être créée directement à partir d'une intervention (sans passer par un devis signé), avec un montant saisi manuellement ; l'intervention passe alors automatiquement au statut 'Facturée'.</a:t>
-            </a:r>
-            <a:endParaRPr lang="en-US" sz="1100" dirty="0"/>
-          </a:p>
-        </p:txBody>
-      </p:sp>
-      <p:sp>
-        <p:nvSpPr>
-          <p:cNvPr id="17" name="Shape 15"/>
-          <p:cNvSpPr/>
-          <p:nvPr/>
-        </p:nvSpPr>
-        <p:spPr>
-          <a:xfrm>
-            <a:off x="640080" y="5394960"/>
-            <a:ext cx="10881360" cy="1097280"/>
-          </a:xfrm>
-          <a:prstGeom prst="roundRect">
-            <a:avLst>
-              <a:gd name="adj" fmla="val 5000"/>
-            </a:avLst>
-          </a:prstGeom>
-          <a:solidFill>
-            <a:srgbClr val="FFFFFF"/>
-          </a:solidFill>
-          <a:ln w="12700">
-            <a:solidFill>
-              <a:srgbClr val="E4DCCB"/>
-            </a:solidFill>
-            <a:prstDash val="solid"/>
-          </a:ln>
-        </p:spPr>
-      </p:sp>
-      <p:sp>
-        <p:nvSpPr>
-          <p:cNvPr id="18" name="Shape 16"/>
-          <p:cNvSpPr/>
-          <p:nvPr/>
-        </p:nvSpPr>
-        <p:spPr>
-          <a:xfrm>
-            <a:off x="640080" y="5394960"/>
-            <a:ext cx="54864" cy="1097280"/>
-          </a:xfrm>
-          <a:prstGeom prst="rect">
-            <a:avLst/>
-          </a:prstGeom>
-          <a:solidFill>
-            <a:srgbClr val="9A4C1F"/>
-          </a:solidFill>
-          <a:ln/>
-        </p:spPr>
-      </p:sp>
-      <p:sp>
-        <p:nvSpPr>
-          <p:cNvPr id="19" name="Text 17"/>
-          <p:cNvSpPr/>
-          <p:nvPr/>
-        </p:nvSpPr>
-        <p:spPr>
-          <a:xfrm>
-            <a:off x="914400" y="5504688"/>
-            <a:ext cx="10332720" cy="365760"/>
-          </a:xfrm>
-          <a:prstGeom prst="rect">
-            <a:avLst/>
-          </a:prstGeom>
-          <a:noFill/>
-          <a:ln/>
-        </p:spPr>
-        <p:txBody>
-          <a:bodyPr wrap="square" rtlCol="0" anchor="ctr"/>
-          <a:lstStyle/>
-          <a:p>
-            <a:pPr indent="0" marL="0">
-              <a:buNone/>
-            </a:pPr>
-            <a:r>
-              <a:rPr lang="en-US" sz="1400" b="1" dirty="0">
-                <a:solidFill>
-                  <a:srgbClr val="1B1F3B"/>
-                </a:solidFill>
-                <a:latin typeface="Segoe UI" pitchFamily="34" charset="0"/>
-                <a:ea typeface="Segoe UI" pitchFamily="34" charset="-122"/>
-                <a:cs typeface="Segoe UI" pitchFamily="34" charset="-120"/>
-              </a:rPr>
-              <a:t>En-tête d'entreprise propre à chaque rapport</a:t>
-            </a:r>
-            <a:endParaRPr lang="en-US" sz="1400" dirty="0"/>
-          </a:p>
-        </p:txBody>
-      </p:sp>
-      <p:sp>
-        <p:nvSpPr>
-          <p:cNvPr id="20" name="Text 18"/>
-          <p:cNvSpPr/>
-          <p:nvPr/>
-        </p:nvSpPr>
-        <p:spPr>
-          <a:xfrm>
-            <a:off x="914400" y="5852160"/>
-            <a:ext cx="10332720" cy="594360"/>
-          </a:xfrm>
-          <a:prstGeom prst="rect">
-            <a:avLst/>
-          </a:prstGeom>
-          <a:noFill/>
-          <a:ln/>
-        </p:spPr>
-        <p:txBody>
-          <a:bodyPr wrap="square" rtlCol="0" anchor="ctr"/>
-          <a:lstStyle/>
-          <a:p>
-            <a:pPr indent="0" marL="0">
-              <a:lnSpc>
-                <a:spcPts val="1400"/>
-              </a:lnSpc>
-              <a:buNone/>
-            </a:pPr>
-            <a:r>
-              <a:rPr lang="en-US" sz="1100" dirty="0">
-                <a:solidFill>
-                  <a:srgbClr val="8A7C68"/>
-                </a:solidFill>
-                <a:latin typeface="Segoe UI" pitchFamily="34" charset="0"/>
-                <a:ea typeface="Segoe UI" pitchFamily="34" charset="-122"/>
-                <a:cs typeface="Segoe UI" pitchFamily="34" charset="-120"/>
-              </a:rPr>
-              <a:t>Chaque intervention conserve son propre instantané des informations d'entreprise (comme les devis), pour que le PDF reste fidèle même si le profil change ensuite.</a:t>
-            </a:r>
-            <a:endParaRPr lang="en-US" sz="1100" dirty="0"/>
-          </a:p>
-        </p:txBody>
-      </p:sp>
-      <p:sp>
-        <p:nvSpPr>
-          <p:cNvPr id="21" name="Text 19"/>
+          <p:cNvPr id="13" name="Text 11"/>
           <p:cNvSpPr/>
           <p:nvPr/>
         </p:nvSpPr>
@@ -11945,7 +11867,7 @@
       </p:sp>
       <p:sp>
         <p:nvSpPr>
-          <p:cNvPr id="22" name="Text 20"/>
+          <p:cNvPr id="14" name="Text 12"/>
           <p:cNvSpPr/>
           <p:nvPr/>
         </p:nvSpPr>
@@ -12108,7 +12030,7 @@
                 <a:ea typeface="Georgia" pitchFamily="34" charset="-122"/>
                 <a:cs typeface="Georgia" pitchFamily="34" charset="-120"/>
               </a:rPr>
-              <a:t>Rapports d'intervention (suite)</a:t>
+              <a:t>Rapports d'intervention</a:t>
             </a:r>
             <a:endParaRPr lang="en-US" sz="2400" dirty="0"/>
           </a:p>
@@ -12194,7 +12116,7 @@
                 <a:ea typeface="Segoe UI" pitchFamily="34" charset="-122"/>
                 <a:cs typeface="Segoe UI" pitchFamily="34" charset="-120"/>
               </a:rPr>
-              <a:t>Statut de suivi automatique (À faire / En cours / Terminée)</a:t>
+              <a:t>Nouvelle entité 'interventions'</a:t>
             </a:r>
             <a:endParaRPr lang="en-US" sz="1400" dirty="0"/>
           </a:p>
@@ -12236,7 +12158,7 @@
                 <a:ea typeface="Segoe UI" pitchFamily="34" charset="-122"/>
                 <a:cs typeface="Segoe UI" pitchFamily="34" charset="-120"/>
               </a:rPr>
-              <a:t>Le statut d'une intervention évolue automatiquement selon sa date (À faire tant que la date n'est pas arrivée, En cours le jour J), jusqu'à être marquée Terminée manuellement puis, si besoin, archivée.</a:t>
+              <a:t>API dédiée (creation, consultation, suppression) pour stocker les rapports d'intervention, avec historique des actions comme pour les autres modules.</a:t>
             </a:r>
             <a:endParaRPr lang="en-US" sz="1100" dirty="0"/>
           </a:p>
@@ -12322,7 +12244,7 @@
                 <a:ea typeface="Segoe UI" pitchFamily="34" charset="-122"/>
                 <a:cs typeface="Segoe UI" pitchFamily="34" charset="-120"/>
               </a:rPr>
-              <a:t>Numéro de rapport automatique</a:t>
+              <a:t>Génération PDF du rapport d'intervention</a:t>
             </a:r>
             <a:endParaRPr lang="en-US" sz="1400" dirty="0"/>
           </a:p>
@@ -12364,7 +12286,7 @@
                 <a:ea typeface="Segoe UI" pitchFamily="34" charset="-122"/>
                 <a:cs typeface="Segoe UI" pitchFamily="34" charset="-120"/>
               </a:rPr>
-              <a:t>Chaque rapport reçoit un numéro unique généré automatiquement (ex. INT-2026-0003), affiché en en-tête avec la date de création, sur le même principe que la numérotation des devis et factures.</a:t>
+              <a:t>Chaque rapport peut être téléchargé en PDF avec le logo de l'entreprise en en-tête, dans une mise en page reprenant celle des rapports d'intervention papier existants.</a:t>
             </a:r>
             <a:endParaRPr lang="en-US" sz="1100" dirty="0"/>
           </a:p>
@@ -12372,7 +12294,263 @@
       </p:sp>
       <p:sp>
         <p:nvSpPr>
-          <p:cNvPr id="13" name="Text 11"/>
+          <p:cNvPr id="13" name="Shape 11"/>
+          <p:cNvSpPr/>
+          <p:nvPr/>
+        </p:nvSpPr>
+        <p:spPr>
+          <a:xfrm>
+            <a:off x="640080" y="4160520"/>
+            <a:ext cx="10881360" cy="1097280"/>
+          </a:xfrm>
+          <a:prstGeom prst="roundRect">
+            <a:avLst>
+              <a:gd name="adj" fmla="val 5000"/>
+            </a:avLst>
+          </a:prstGeom>
+          <a:solidFill>
+            <a:srgbClr val="FFFFFF"/>
+          </a:solidFill>
+          <a:ln w="12700">
+            <a:solidFill>
+              <a:srgbClr val="E4DCCB"/>
+            </a:solidFill>
+            <a:prstDash val="solid"/>
+          </a:ln>
+        </p:spPr>
+      </p:sp>
+      <p:sp>
+        <p:nvSpPr>
+          <p:cNvPr id="14" name="Shape 12"/>
+          <p:cNvSpPr/>
+          <p:nvPr/>
+        </p:nvSpPr>
+        <p:spPr>
+          <a:xfrm>
+            <a:off x="640080" y="4160520"/>
+            <a:ext cx="54864" cy="1097280"/>
+          </a:xfrm>
+          <a:prstGeom prst="rect">
+            <a:avLst/>
+          </a:prstGeom>
+          <a:solidFill>
+            <a:srgbClr val="9A4C1F"/>
+          </a:solidFill>
+          <a:ln/>
+        </p:spPr>
+      </p:sp>
+      <p:sp>
+        <p:nvSpPr>
+          <p:cNvPr id="15" name="Text 13"/>
+          <p:cNvSpPr/>
+          <p:nvPr/>
+        </p:nvSpPr>
+        <p:spPr>
+          <a:xfrm>
+            <a:off x="914400" y="4270248"/>
+            <a:ext cx="10332720" cy="365760"/>
+          </a:xfrm>
+          <a:prstGeom prst="rect">
+            <a:avLst/>
+          </a:prstGeom>
+          <a:noFill/>
+          <a:ln/>
+        </p:spPr>
+        <p:txBody>
+          <a:bodyPr wrap="square" rtlCol="0" anchor="ctr"/>
+          <a:lstStyle/>
+          <a:p>
+            <a:pPr indent="0" marL="0">
+              <a:buNone/>
+            </a:pPr>
+            <a:r>
+              <a:rPr lang="en-US" sz="1400" b="1" dirty="0">
+                <a:solidFill>
+                  <a:srgbClr val="1B1F3B"/>
+                </a:solidFill>
+                <a:latin typeface="Segoe UI" pitchFamily="34" charset="0"/>
+                <a:ea typeface="Segoe UI" pitchFamily="34" charset="-122"/>
+                <a:cs typeface="Segoe UI" pitchFamily="34" charset="-120"/>
+              </a:rPr>
+              <a:t>Facturation directe d'une intervention</a:t>
+            </a:r>
+            <a:endParaRPr lang="en-US" sz="1400" dirty="0"/>
+          </a:p>
+        </p:txBody>
+      </p:sp>
+      <p:sp>
+        <p:nvSpPr>
+          <p:cNvPr id="16" name="Text 14"/>
+          <p:cNvSpPr/>
+          <p:nvPr/>
+        </p:nvSpPr>
+        <p:spPr>
+          <a:xfrm>
+            <a:off x="914400" y="4617720"/>
+            <a:ext cx="10332720" cy="594360"/>
+          </a:xfrm>
+          <a:prstGeom prst="rect">
+            <a:avLst/>
+          </a:prstGeom>
+          <a:noFill/>
+          <a:ln/>
+        </p:spPr>
+        <p:txBody>
+          <a:bodyPr wrap="square" rtlCol="0" anchor="ctr"/>
+          <a:lstStyle/>
+          <a:p>
+            <a:pPr indent="0" marL="0">
+              <a:lnSpc>
+                <a:spcPts val="1400"/>
+              </a:lnSpc>
+              <a:buNone/>
+            </a:pPr>
+            <a:r>
+              <a:rPr lang="en-US" sz="1100" dirty="0">
+                <a:solidFill>
+                  <a:srgbClr val="8A7C68"/>
+                </a:solidFill>
+                <a:latin typeface="Segoe UI" pitchFamily="34" charset="0"/>
+                <a:ea typeface="Segoe UI" pitchFamily="34" charset="-122"/>
+                <a:cs typeface="Segoe UI" pitchFamily="34" charset="-120"/>
+              </a:rPr>
+              <a:t>Une facture peut être créée directement à partir d'une intervention (sans passer par un devis signé), avec un montant saisi manuellement ; l'intervention passe alors automatiquement au statut 'Facturée'.</a:t>
+            </a:r>
+            <a:endParaRPr lang="en-US" sz="1100" dirty="0"/>
+          </a:p>
+        </p:txBody>
+      </p:sp>
+      <p:sp>
+        <p:nvSpPr>
+          <p:cNvPr id="17" name="Shape 15"/>
+          <p:cNvSpPr/>
+          <p:nvPr/>
+        </p:nvSpPr>
+        <p:spPr>
+          <a:xfrm>
+            <a:off x="640080" y="5394960"/>
+            <a:ext cx="10881360" cy="1097280"/>
+          </a:xfrm>
+          <a:prstGeom prst="roundRect">
+            <a:avLst>
+              <a:gd name="adj" fmla="val 5000"/>
+            </a:avLst>
+          </a:prstGeom>
+          <a:solidFill>
+            <a:srgbClr val="FFFFFF"/>
+          </a:solidFill>
+          <a:ln w="12700">
+            <a:solidFill>
+              <a:srgbClr val="E4DCCB"/>
+            </a:solidFill>
+            <a:prstDash val="solid"/>
+          </a:ln>
+        </p:spPr>
+      </p:sp>
+      <p:sp>
+        <p:nvSpPr>
+          <p:cNvPr id="18" name="Shape 16"/>
+          <p:cNvSpPr/>
+          <p:nvPr/>
+        </p:nvSpPr>
+        <p:spPr>
+          <a:xfrm>
+            <a:off x="640080" y="5394960"/>
+            <a:ext cx="54864" cy="1097280"/>
+          </a:xfrm>
+          <a:prstGeom prst="rect">
+            <a:avLst/>
+          </a:prstGeom>
+          <a:solidFill>
+            <a:srgbClr val="9A4C1F"/>
+          </a:solidFill>
+          <a:ln/>
+        </p:spPr>
+      </p:sp>
+      <p:sp>
+        <p:nvSpPr>
+          <p:cNvPr id="19" name="Text 17"/>
+          <p:cNvSpPr/>
+          <p:nvPr/>
+        </p:nvSpPr>
+        <p:spPr>
+          <a:xfrm>
+            <a:off x="914400" y="5504688"/>
+            <a:ext cx="10332720" cy="365760"/>
+          </a:xfrm>
+          <a:prstGeom prst="rect">
+            <a:avLst/>
+          </a:prstGeom>
+          <a:noFill/>
+          <a:ln/>
+        </p:spPr>
+        <p:txBody>
+          <a:bodyPr wrap="square" rtlCol="0" anchor="ctr"/>
+          <a:lstStyle/>
+          <a:p>
+            <a:pPr indent="0" marL="0">
+              <a:buNone/>
+            </a:pPr>
+            <a:r>
+              <a:rPr lang="en-US" sz="1400" b="1" dirty="0">
+                <a:solidFill>
+                  <a:srgbClr val="1B1F3B"/>
+                </a:solidFill>
+                <a:latin typeface="Segoe UI" pitchFamily="34" charset="0"/>
+                <a:ea typeface="Segoe UI" pitchFamily="34" charset="-122"/>
+                <a:cs typeface="Segoe UI" pitchFamily="34" charset="-120"/>
+              </a:rPr>
+              <a:t>En-tête d'entreprise propre à chaque rapport</a:t>
+            </a:r>
+            <a:endParaRPr lang="en-US" sz="1400" dirty="0"/>
+          </a:p>
+        </p:txBody>
+      </p:sp>
+      <p:sp>
+        <p:nvSpPr>
+          <p:cNvPr id="20" name="Text 18"/>
+          <p:cNvSpPr/>
+          <p:nvPr/>
+        </p:nvSpPr>
+        <p:spPr>
+          <a:xfrm>
+            <a:off x="914400" y="5852160"/>
+            <a:ext cx="10332720" cy="594360"/>
+          </a:xfrm>
+          <a:prstGeom prst="rect">
+            <a:avLst/>
+          </a:prstGeom>
+          <a:noFill/>
+          <a:ln/>
+        </p:spPr>
+        <p:txBody>
+          <a:bodyPr wrap="square" rtlCol="0" anchor="ctr"/>
+          <a:lstStyle/>
+          <a:p>
+            <a:pPr indent="0" marL="0">
+              <a:lnSpc>
+                <a:spcPts val="1400"/>
+              </a:lnSpc>
+              <a:buNone/>
+            </a:pPr>
+            <a:r>
+              <a:rPr lang="en-US" sz="1100" dirty="0">
+                <a:solidFill>
+                  <a:srgbClr val="8A7C68"/>
+                </a:solidFill>
+                <a:latin typeface="Segoe UI" pitchFamily="34" charset="0"/>
+                <a:ea typeface="Segoe UI" pitchFamily="34" charset="-122"/>
+                <a:cs typeface="Segoe UI" pitchFamily="34" charset="-120"/>
+              </a:rPr>
+              <a:t>Chaque intervention conserve son propre instantané des informations d'entreprise (comme les devis), pour que le PDF reste fidèle même si le profil change ensuite.</a:t>
+            </a:r>
+            <a:endParaRPr lang="en-US" sz="1100" dirty="0"/>
+          </a:p>
+        </p:txBody>
+      </p:sp>
+      <p:sp>
+        <p:nvSpPr>
+          <p:cNvPr id="21" name="Text 19"/>
           <p:cNvSpPr/>
           <p:nvPr/>
         </p:nvSpPr>
@@ -12411,7 +12589,7 @@
       </p:sp>
       <p:sp>
         <p:nvSpPr>
-          <p:cNvPr id="14" name="Text 12"/>
+          <p:cNvPr id="22" name="Text 20"/>
           <p:cNvSpPr/>
           <p:nvPr/>
         </p:nvSpPr>
@@ -12574,7 +12752,7 @@
                 <a:ea typeface="Georgia" pitchFamily="34" charset="-122"/>
                 <a:cs typeface="Georgia" pitchFamily="34" charset="-120"/>
               </a:rPr>
-              <a:t>Facturation</a:t>
+              <a:t>Rapports d'intervention (suite)</a:t>
             </a:r>
             <a:endParaRPr lang="en-US" sz="2400" dirty="0"/>
           </a:p>
@@ -12660,7 +12838,7 @@
                 <a:ea typeface="Segoe UI" pitchFamily="34" charset="-122"/>
                 <a:cs typeface="Segoe UI" pitchFamily="34" charset="-120"/>
               </a:rPr>
-              <a:t>Export PDF des factures</a:t>
+              <a:t>Statut de suivi automatique (À faire / En cours / Terminée)</a:t>
             </a:r>
             <a:endParaRPr lang="en-US" sz="1400" dirty="0"/>
           </a:p>
@@ -12702,7 +12880,7 @@
                 <a:ea typeface="Segoe UI" pitchFamily="34" charset="-122"/>
                 <a:cs typeface="Segoe UI" pitchFamily="34" charset="-120"/>
               </a:rPr>
-              <a:t>Chaque facture (issue d'un devis signé ou d'une intervention) peut désormais être téléchargée en PDF avec les informations de l'entreprise, du client et du montant — bouton ajouté dans la page Facturation et dans la fiche d'une intervention.</a:t>
+              <a:t>Le statut d'une intervention évolue automatiquement selon sa date (À faire tant que la date n'est pas arrivée, En cours le jour J), jusqu'à être marquée Terminée manuellement puis, si besoin, archivée.</a:t>
             </a:r>
             <a:endParaRPr lang="en-US" sz="1100" dirty="0"/>
           </a:p>
@@ -12710,7 +12888,135 @@
       </p:sp>
       <p:sp>
         <p:nvSpPr>
-          <p:cNvPr id="9" name="Text 7"/>
+          <p:cNvPr id="9" name="Shape 7"/>
+          <p:cNvSpPr/>
+          <p:nvPr/>
+        </p:nvSpPr>
+        <p:spPr>
+          <a:xfrm>
+            <a:off x="640080" y="2926080"/>
+            <a:ext cx="10881360" cy="1097280"/>
+          </a:xfrm>
+          <a:prstGeom prst="roundRect">
+            <a:avLst>
+              <a:gd name="adj" fmla="val 5000"/>
+            </a:avLst>
+          </a:prstGeom>
+          <a:solidFill>
+            <a:srgbClr val="FFFFFF"/>
+          </a:solidFill>
+          <a:ln w="12700">
+            <a:solidFill>
+              <a:srgbClr val="E4DCCB"/>
+            </a:solidFill>
+            <a:prstDash val="solid"/>
+          </a:ln>
+        </p:spPr>
+      </p:sp>
+      <p:sp>
+        <p:nvSpPr>
+          <p:cNvPr id="10" name="Shape 8"/>
+          <p:cNvSpPr/>
+          <p:nvPr/>
+        </p:nvSpPr>
+        <p:spPr>
+          <a:xfrm>
+            <a:off x="640080" y="2926080"/>
+            <a:ext cx="54864" cy="1097280"/>
+          </a:xfrm>
+          <a:prstGeom prst="rect">
+            <a:avLst/>
+          </a:prstGeom>
+          <a:solidFill>
+            <a:srgbClr val="9A4C1F"/>
+          </a:solidFill>
+          <a:ln/>
+        </p:spPr>
+      </p:sp>
+      <p:sp>
+        <p:nvSpPr>
+          <p:cNvPr id="11" name="Text 9"/>
+          <p:cNvSpPr/>
+          <p:nvPr/>
+        </p:nvSpPr>
+        <p:spPr>
+          <a:xfrm>
+            <a:off x="914400" y="3035808"/>
+            <a:ext cx="10332720" cy="365760"/>
+          </a:xfrm>
+          <a:prstGeom prst="rect">
+            <a:avLst/>
+          </a:prstGeom>
+          <a:noFill/>
+          <a:ln/>
+        </p:spPr>
+        <p:txBody>
+          <a:bodyPr wrap="square" rtlCol="0" anchor="ctr"/>
+          <a:lstStyle/>
+          <a:p>
+            <a:pPr indent="0" marL="0">
+              <a:buNone/>
+            </a:pPr>
+            <a:r>
+              <a:rPr lang="en-US" sz="1400" b="1" dirty="0">
+                <a:solidFill>
+                  <a:srgbClr val="1B1F3B"/>
+                </a:solidFill>
+                <a:latin typeface="Segoe UI" pitchFamily="34" charset="0"/>
+                <a:ea typeface="Segoe UI" pitchFamily="34" charset="-122"/>
+                <a:cs typeface="Segoe UI" pitchFamily="34" charset="-120"/>
+              </a:rPr>
+              <a:t>Numéro de rapport automatique</a:t>
+            </a:r>
+            <a:endParaRPr lang="en-US" sz="1400" dirty="0"/>
+          </a:p>
+        </p:txBody>
+      </p:sp>
+      <p:sp>
+        <p:nvSpPr>
+          <p:cNvPr id="12" name="Text 10"/>
+          <p:cNvSpPr/>
+          <p:nvPr/>
+        </p:nvSpPr>
+        <p:spPr>
+          <a:xfrm>
+            <a:off x="914400" y="3383280"/>
+            <a:ext cx="10332720" cy="594360"/>
+          </a:xfrm>
+          <a:prstGeom prst="rect">
+            <a:avLst/>
+          </a:prstGeom>
+          <a:noFill/>
+          <a:ln/>
+        </p:spPr>
+        <p:txBody>
+          <a:bodyPr wrap="square" rtlCol="0" anchor="ctr"/>
+          <a:lstStyle/>
+          <a:p>
+            <a:pPr indent="0" marL="0">
+              <a:lnSpc>
+                <a:spcPts val="1400"/>
+              </a:lnSpc>
+              <a:buNone/>
+            </a:pPr>
+            <a:r>
+              <a:rPr lang="en-US" sz="1100" dirty="0">
+                <a:solidFill>
+                  <a:srgbClr val="8A7C68"/>
+                </a:solidFill>
+                <a:latin typeface="Segoe UI" pitchFamily="34" charset="0"/>
+                <a:ea typeface="Segoe UI" pitchFamily="34" charset="-122"/>
+                <a:cs typeface="Segoe UI" pitchFamily="34" charset="-120"/>
+              </a:rPr>
+              <a:t>Chaque rapport reçoit un numéro unique généré automatiquement (ex. INT-2026-0003), affiché en en-tête avec la date de création, sur le même principe que la numérotation des devis et factures.</a:t>
+            </a:r>
+            <a:endParaRPr lang="en-US" sz="1100" dirty="0"/>
+          </a:p>
+        </p:txBody>
+      </p:sp>
+      <p:sp>
+        <p:nvSpPr>
+          <p:cNvPr id="13" name="Text 11"/>
           <p:cNvSpPr/>
           <p:nvPr/>
         </p:nvSpPr>
@@ -12749,7 +13055,7 @@
       </p:sp>
       <p:sp>
         <p:nvSpPr>
-          <p:cNvPr id="10" name="Text 8"/>
+          <p:cNvPr id="14" name="Text 12"/>
           <p:cNvSpPr/>
           <p:nvPr/>
         </p:nvSpPr>
@@ -12797,6 +13103,344 @@
 <file path=ppt/slides/slide26.xml><?xml version="1.0" encoding="utf-8"?>
 <p:sld xmlns:a="http://schemas.openxmlformats.org/drawingml/2006/main" xmlns:r="http://schemas.openxmlformats.org/officeDocument/2006/relationships" xmlns:p="http://schemas.openxmlformats.org/presentationml/2006/main">
   <p:cSld name="Slide 26">
+    <p:bg>
+      <p:bgPr>
+        <a:solidFill>
+          <a:srgbClr val="F3EEE3"/>
+        </a:solidFill>
+      </p:bgPr>
+    </p:bg>
+    <p:spTree>
+      <p:nvGrpSpPr>
+        <p:cNvPr id="1" name=""/>
+        <p:cNvGrpSpPr/>
+        <p:nvPr/>
+      </p:nvGrpSpPr>
+      <p:grpSpPr>
+        <a:xfrm>
+          <a:off x="0" y="0"/>
+          <a:ext cx="0" cy="0"/>
+          <a:chOff x="0" y="0"/>
+          <a:chExt cx="0" cy="0"/>
+        </a:xfrm>
+      </p:grpSpPr>
+      <p:sp>
+        <p:nvSpPr>
+          <p:cNvPr id="2" name="Shape 0"/>
+          <p:cNvSpPr/>
+          <p:nvPr/>
+        </p:nvSpPr>
+        <p:spPr>
+          <a:xfrm>
+            <a:off x="640080" y="411480"/>
+            <a:ext cx="2377440" cy="365760"/>
+          </a:xfrm>
+          <a:prstGeom prst="roundRect">
+            <a:avLst>
+              <a:gd name="adj" fmla="val 50000"/>
+            </a:avLst>
+          </a:prstGeom>
+          <a:solidFill>
+            <a:srgbClr val="F5E6DA"/>
+          </a:solidFill>
+          <a:ln/>
+        </p:spPr>
+      </p:sp>
+      <p:sp>
+        <p:nvSpPr>
+          <p:cNvPr id="3" name="Text 1"/>
+          <p:cNvSpPr/>
+          <p:nvPr/>
+        </p:nvSpPr>
+        <p:spPr>
+          <a:xfrm>
+            <a:off x="640080" y="411480"/>
+            <a:ext cx="2377440" cy="365760"/>
+          </a:xfrm>
+          <a:prstGeom prst="rect">
+            <a:avLst/>
+          </a:prstGeom>
+          <a:noFill/>
+          <a:ln/>
+        </p:spPr>
+        <p:txBody>
+          <a:bodyPr wrap="square" rtlCol="0" anchor="ctr"/>
+          <a:lstStyle/>
+          <a:p>
+            <a:pPr algn="ctr" indent="0" marL="0">
+              <a:buNone/>
+            </a:pPr>
+            <a:r>
+              <a:rPr lang="en-US" sz="1000" b="1" spc="100" kern="0" dirty="0">
+                <a:solidFill>
+                  <a:srgbClr val="9A4C1F"/>
+                </a:solidFill>
+                <a:latin typeface="Segoe UI" pitchFamily="34" charset="0"/>
+                <a:ea typeface="Segoe UI" pitchFamily="34" charset="-122"/>
+                <a:cs typeface="Segoe UI" pitchFamily="34" charset="-120"/>
+              </a:rPr>
+              <a:t>BACKEND</a:t>
+            </a:r>
+            <a:endParaRPr lang="en-US" sz="1000" dirty="0"/>
+          </a:p>
+        </p:txBody>
+      </p:sp>
+      <p:sp>
+        <p:nvSpPr>
+          <p:cNvPr id="4" name="Text 2"/>
+          <p:cNvSpPr/>
+          <p:nvPr/>
+        </p:nvSpPr>
+        <p:spPr>
+          <a:xfrm>
+            <a:off x="640080" y="868680"/>
+            <a:ext cx="10515600" cy="548640"/>
+          </a:xfrm>
+          <a:prstGeom prst="rect">
+            <a:avLst/>
+          </a:prstGeom>
+          <a:noFill/>
+          <a:ln/>
+        </p:spPr>
+        <p:txBody>
+          <a:bodyPr wrap="square" rtlCol="0" anchor="ctr"/>
+          <a:lstStyle/>
+          <a:p>
+            <a:pPr indent="0" marL="0">
+              <a:buNone/>
+            </a:pPr>
+            <a:r>
+              <a:rPr lang="en-US" sz="2400" b="1" dirty="0">
+                <a:solidFill>
+                  <a:srgbClr val="1B1F3B"/>
+                </a:solidFill>
+                <a:latin typeface="Georgia" pitchFamily="34" charset="0"/>
+                <a:ea typeface="Georgia" pitchFamily="34" charset="-122"/>
+                <a:cs typeface="Georgia" pitchFamily="34" charset="-120"/>
+              </a:rPr>
+              <a:t>Facturation</a:t>
+            </a:r>
+            <a:endParaRPr lang="en-US" sz="2400" dirty="0"/>
+          </a:p>
+        </p:txBody>
+      </p:sp>
+      <p:sp>
+        <p:nvSpPr>
+          <p:cNvPr id="5" name="Shape 3"/>
+          <p:cNvSpPr/>
+          <p:nvPr/>
+        </p:nvSpPr>
+        <p:spPr>
+          <a:xfrm>
+            <a:off x="640080" y="1691640"/>
+            <a:ext cx="10881360" cy="1097280"/>
+          </a:xfrm>
+          <a:prstGeom prst="roundRect">
+            <a:avLst>
+              <a:gd name="adj" fmla="val 5000"/>
+            </a:avLst>
+          </a:prstGeom>
+          <a:solidFill>
+            <a:srgbClr val="FFFFFF"/>
+          </a:solidFill>
+          <a:ln w="12700">
+            <a:solidFill>
+              <a:srgbClr val="E4DCCB"/>
+            </a:solidFill>
+            <a:prstDash val="solid"/>
+          </a:ln>
+        </p:spPr>
+      </p:sp>
+      <p:sp>
+        <p:nvSpPr>
+          <p:cNvPr id="6" name="Shape 4"/>
+          <p:cNvSpPr/>
+          <p:nvPr/>
+        </p:nvSpPr>
+        <p:spPr>
+          <a:xfrm>
+            <a:off x="640080" y="1691640"/>
+            <a:ext cx="54864" cy="1097280"/>
+          </a:xfrm>
+          <a:prstGeom prst="rect">
+            <a:avLst/>
+          </a:prstGeom>
+          <a:solidFill>
+            <a:srgbClr val="9A4C1F"/>
+          </a:solidFill>
+          <a:ln/>
+        </p:spPr>
+      </p:sp>
+      <p:sp>
+        <p:nvSpPr>
+          <p:cNvPr id="7" name="Text 5"/>
+          <p:cNvSpPr/>
+          <p:nvPr/>
+        </p:nvSpPr>
+        <p:spPr>
+          <a:xfrm>
+            <a:off x="914400" y="1801368"/>
+            <a:ext cx="10332720" cy="365760"/>
+          </a:xfrm>
+          <a:prstGeom prst="rect">
+            <a:avLst/>
+          </a:prstGeom>
+          <a:noFill/>
+          <a:ln/>
+        </p:spPr>
+        <p:txBody>
+          <a:bodyPr wrap="square" rtlCol="0" anchor="ctr"/>
+          <a:lstStyle/>
+          <a:p>
+            <a:pPr indent="0" marL="0">
+              <a:buNone/>
+            </a:pPr>
+            <a:r>
+              <a:rPr lang="en-US" sz="1400" b="1" dirty="0">
+                <a:solidFill>
+                  <a:srgbClr val="1B1F3B"/>
+                </a:solidFill>
+                <a:latin typeface="Segoe UI" pitchFamily="34" charset="0"/>
+                <a:ea typeface="Segoe UI" pitchFamily="34" charset="-122"/>
+                <a:cs typeface="Segoe UI" pitchFamily="34" charset="-120"/>
+              </a:rPr>
+              <a:t>Export PDF des factures</a:t>
+            </a:r>
+            <a:endParaRPr lang="en-US" sz="1400" dirty="0"/>
+          </a:p>
+        </p:txBody>
+      </p:sp>
+      <p:sp>
+        <p:nvSpPr>
+          <p:cNvPr id="8" name="Text 6"/>
+          <p:cNvSpPr/>
+          <p:nvPr/>
+        </p:nvSpPr>
+        <p:spPr>
+          <a:xfrm>
+            <a:off x="914400" y="2148840"/>
+            <a:ext cx="10332720" cy="594360"/>
+          </a:xfrm>
+          <a:prstGeom prst="rect">
+            <a:avLst/>
+          </a:prstGeom>
+          <a:noFill/>
+          <a:ln/>
+        </p:spPr>
+        <p:txBody>
+          <a:bodyPr wrap="square" rtlCol="0" anchor="ctr"/>
+          <a:lstStyle/>
+          <a:p>
+            <a:pPr indent="0" marL="0">
+              <a:lnSpc>
+                <a:spcPts val="1400"/>
+              </a:lnSpc>
+              <a:buNone/>
+            </a:pPr>
+            <a:r>
+              <a:rPr lang="en-US" sz="1100" dirty="0">
+                <a:solidFill>
+                  <a:srgbClr val="8A7C68"/>
+                </a:solidFill>
+                <a:latin typeface="Segoe UI" pitchFamily="34" charset="0"/>
+                <a:ea typeface="Segoe UI" pitchFamily="34" charset="-122"/>
+                <a:cs typeface="Segoe UI" pitchFamily="34" charset="-120"/>
+              </a:rPr>
+              <a:t>Chaque facture (issue d'un devis signé ou d'une intervention) peut désormais être téléchargée en PDF avec les informations de l'entreprise, du client et du montant — bouton ajouté dans la page Facturation et dans la fiche d'une intervention.</a:t>
+            </a:r>
+            <a:endParaRPr lang="en-US" sz="1100" dirty="0"/>
+          </a:p>
+        </p:txBody>
+      </p:sp>
+      <p:sp>
+        <p:nvSpPr>
+          <p:cNvPr id="9" name="Text 7"/>
+          <p:cNvSpPr/>
+          <p:nvPr/>
+        </p:nvSpPr>
+        <p:spPr>
+          <a:xfrm>
+            <a:off x="365760" y="6510528"/>
+            <a:ext cx="5486400" cy="274320"/>
+          </a:xfrm>
+          <a:prstGeom prst="rect">
+            <a:avLst/>
+          </a:prstGeom>
+          <a:noFill/>
+          <a:ln/>
+        </p:spPr>
+        <p:txBody>
+          <a:bodyPr wrap="square" rtlCol="0" anchor="ctr"/>
+          <a:lstStyle/>
+          <a:p>
+            <a:pPr indent="0" marL="0">
+              <a:buNone/>
+            </a:pPr>
+            <a:r>
+              <a:rPr lang="en-US" sz="900" dirty="0">
+                <a:solidFill>
+                  <a:srgbClr val="8A7C68"/>
+                </a:solidFill>
+                <a:latin typeface="Segoe UI" pitchFamily="34" charset="0"/>
+                <a:ea typeface="Segoe UI" pitchFamily="34" charset="-122"/>
+                <a:cs typeface="Segoe UI" pitchFamily="34" charset="-120"/>
+              </a:rPr>
+              <a:t>Kôji Web — Récapitulatif technique</a:t>
+            </a:r>
+            <a:endParaRPr lang="en-US" sz="900" dirty="0"/>
+          </a:p>
+        </p:txBody>
+      </p:sp>
+      <p:sp>
+        <p:nvSpPr>
+          <p:cNvPr id="10" name="Text 8"/>
+          <p:cNvSpPr/>
+          <p:nvPr/>
+        </p:nvSpPr>
+        <p:spPr>
+          <a:xfrm>
+            <a:off x="9601200" y="6510528"/>
+            <a:ext cx="2194560" cy="274320"/>
+          </a:xfrm>
+          <a:prstGeom prst="rect">
+            <a:avLst/>
+          </a:prstGeom>
+          <a:noFill/>
+          <a:ln/>
+        </p:spPr>
+        <p:txBody>
+          <a:bodyPr wrap="square" rtlCol="0" anchor="ctr"/>
+          <a:lstStyle/>
+          <a:p>
+            <a:pPr algn="r" indent="0" marL="0">
+              <a:buNone/>
+            </a:pPr>
+            <a:r>
+              <a:rPr lang="en-US" sz="900" dirty="0">
+                <a:solidFill>
+                  <a:srgbClr val="8A7C68"/>
+                </a:solidFill>
+                <a:latin typeface="Segoe UI" pitchFamily="34" charset="0"/>
+                <a:ea typeface="Segoe UI" pitchFamily="34" charset="-122"/>
+                <a:cs typeface="Segoe UI" pitchFamily="34" charset="-120"/>
+              </a:rPr>
+              <a:t>26</a:t>
+            </a:r>
+            <a:endParaRPr lang="en-US" sz="900" dirty="0"/>
+          </a:p>
+        </p:txBody>
+      </p:sp>
+    </p:spTree>
+  </p:cSld>
+  <p:clrMapOvr>
+    <a:masterClrMapping/>
+  </p:clrMapOvr>
+</p:sld>
+</file>
+
+<file path=ppt/slides/slide27.xml><?xml version="1.0" encoding="utf-8"?>
+<p:sld xmlns:a="http://schemas.openxmlformats.org/drawingml/2006/main" xmlns:r="http://schemas.openxmlformats.org/officeDocument/2006/relationships" xmlns:p="http://schemas.openxmlformats.org/presentationml/2006/main">
+  <p:cSld name="Slide 27">
     <p:bg>
       <p:bgPr>
         <a:solidFill>
@@ -12949,7 +13593,7 @@
                 <a:ea typeface="Segoe UI" pitchFamily="34" charset="-122"/>
                 <a:cs typeface="Segoe UI" pitchFamily="34" charset="-120"/>
               </a:rPr>
-              <a:t>5 mise(s) à jour</a:t>
+              <a:t>7 mise(s) à jour</a:t>
             </a:r>
             <a:endParaRPr lang="en-US" sz="1200" dirty="0"/>
           </a:p>
@@ -12997,344 +13641,6 @@
       <p:sp>
         <p:nvSpPr>
           <p:cNvPr id="7" name="Text 5"/>
-          <p:cNvSpPr/>
-          <p:nvPr/>
-        </p:nvSpPr>
-        <p:spPr>
-          <a:xfrm>
-            <a:off x="9601200" y="6510528"/>
-            <a:ext cx="2194560" cy="274320"/>
-          </a:xfrm>
-          <a:prstGeom prst="rect">
-            <a:avLst/>
-          </a:prstGeom>
-          <a:noFill/>
-          <a:ln/>
-        </p:spPr>
-        <p:txBody>
-          <a:bodyPr wrap="square" rtlCol="0" anchor="ctr"/>
-          <a:lstStyle/>
-          <a:p>
-            <a:pPr algn="r" indent="0" marL="0">
-              <a:buNone/>
-            </a:pPr>
-            <a:r>
-              <a:rPr lang="en-US" sz="900" dirty="0">
-                <a:solidFill>
-                  <a:srgbClr val="8A7C68"/>
-                </a:solidFill>
-                <a:latin typeface="Segoe UI" pitchFamily="34" charset="0"/>
-                <a:ea typeface="Segoe UI" pitchFamily="34" charset="-122"/>
-                <a:cs typeface="Segoe UI" pitchFamily="34" charset="-120"/>
-              </a:rPr>
-              <a:t>26</a:t>
-            </a:r>
-            <a:endParaRPr lang="en-US" sz="900" dirty="0"/>
-          </a:p>
-        </p:txBody>
-      </p:sp>
-    </p:spTree>
-  </p:cSld>
-  <p:clrMapOvr>
-    <a:masterClrMapping/>
-  </p:clrMapOvr>
-</p:sld>
-</file>
-
-<file path=ppt/slides/slide27.xml><?xml version="1.0" encoding="utf-8"?>
-<p:sld xmlns:a="http://schemas.openxmlformats.org/drawingml/2006/main" xmlns:r="http://schemas.openxmlformats.org/officeDocument/2006/relationships" xmlns:p="http://schemas.openxmlformats.org/presentationml/2006/main">
-  <p:cSld name="Slide 27">
-    <p:bg>
-      <p:bgPr>
-        <a:solidFill>
-          <a:srgbClr val="F3EEE3"/>
-        </a:solidFill>
-      </p:bgPr>
-    </p:bg>
-    <p:spTree>
-      <p:nvGrpSpPr>
-        <p:cNvPr id="1" name=""/>
-        <p:cNvGrpSpPr/>
-        <p:nvPr/>
-      </p:nvGrpSpPr>
-      <p:grpSpPr>
-        <a:xfrm>
-          <a:off x="0" y="0"/>
-          <a:ext cx="0" cy="0"/>
-          <a:chOff x="0" y="0"/>
-          <a:chExt cx="0" cy="0"/>
-        </a:xfrm>
-      </p:grpSpPr>
-      <p:sp>
-        <p:nvSpPr>
-          <p:cNvPr id="2" name="Shape 0"/>
-          <p:cNvSpPr/>
-          <p:nvPr/>
-        </p:nvSpPr>
-        <p:spPr>
-          <a:xfrm>
-            <a:off x="640080" y="411480"/>
-            <a:ext cx="2377440" cy="365760"/>
-          </a:xfrm>
-          <a:prstGeom prst="roundRect">
-            <a:avLst>
-              <a:gd name="adj" fmla="val 50000"/>
-            </a:avLst>
-          </a:prstGeom>
-          <a:solidFill>
-            <a:srgbClr val="E6EFE4"/>
-          </a:solidFill>
-          <a:ln/>
-        </p:spPr>
-      </p:sp>
-      <p:sp>
-        <p:nvSpPr>
-          <p:cNvPr id="3" name="Text 1"/>
-          <p:cNvSpPr/>
-          <p:nvPr/>
-        </p:nvSpPr>
-        <p:spPr>
-          <a:xfrm>
-            <a:off x="640080" y="411480"/>
-            <a:ext cx="2377440" cy="365760"/>
-          </a:xfrm>
-          <a:prstGeom prst="rect">
-            <a:avLst/>
-          </a:prstGeom>
-          <a:noFill/>
-          <a:ln/>
-        </p:spPr>
-        <p:txBody>
-          <a:bodyPr wrap="square" rtlCol="0" anchor="ctr"/>
-          <a:lstStyle/>
-          <a:p>
-            <a:pPr algn="ctr" indent="0" marL="0">
-              <a:buNone/>
-            </a:pPr>
-            <a:r>
-              <a:rPr lang="en-US" sz="1000" b="1" spc="100" kern="0" dirty="0">
-                <a:solidFill>
-                  <a:srgbClr val="386641"/>
-                </a:solidFill>
-                <a:latin typeface="Segoe UI" pitchFamily="34" charset="0"/>
-                <a:ea typeface="Segoe UI" pitchFamily="34" charset="-122"/>
-                <a:cs typeface="Segoe UI" pitchFamily="34" charset="-120"/>
-              </a:rPr>
-              <a:t>BASE DE DONNÉES</a:t>
-            </a:r>
-            <a:endParaRPr lang="en-US" sz="1000" dirty="0"/>
-          </a:p>
-        </p:txBody>
-      </p:sp>
-      <p:sp>
-        <p:nvSpPr>
-          <p:cNvPr id="4" name="Text 2"/>
-          <p:cNvSpPr/>
-          <p:nvPr/>
-        </p:nvSpPr>
-        <p:spPr>
-          <a:xfrm>
-            <a:off x="640080" y="868680"/>
-            <a:ext cx="10515600" cy="548640"/>
-          </a:xfrm>
-          <a:prstGeom prst="rect">
-            <a:avLst/>
-          </a:prstGeom>
-          <a:noFill/>
-          <a:ln/>
-        </p:spPr>
-        <p:txBody>
-          <a:bodyPr wrap="square" rtlCol="0" anchor="ctr"/>
-          <a:lstStyle/>
-          <a:p>
-            <a:pPr indent="0" marL="0">
-              <a:buNone/>
-            </a:pPr>
-            <a:r>
-              <a:rPr lang="en-US" sz="2400" b="1" dirty="0">
-                <a:solidFill>
-                  <a:srgbClr val="1B1F3B"/>
-                </a:solidFill>
-                <a:latin typeface="Georgia" pitchFamily="34" charset="0"/>
-                <a:ea typeface="Georgia" pitchFamily="34" charset="-122"/>
-                <a:cs typeface="Georgia" pitchFamily="34" charset="-120"/>
-              </a:rPr>
-              <a:t>Fondations</a:t>
-            </a:r>
-            <a:endParaRPr lang="en-US" sz="2400" dirty="0"/>
-          </a:p>
-        </p:txBody>
-      </p:sp>
-      <p:sp>
-        <p:nvSpPr>
-          <p:cNvPr id="5" name="Shape 3"/>
-          <p:cNvSpPr/>
-          <p:nvPr/>
-        </p:nvSpPr>
-        <p:spPr>
-          <a:xfrm>
-            <a:off x="640080" y="1691640"/>
-            <a:ext cx="10881360" cy="1097280"/>
-          </a:xfrm>
-          <a:prstGeom prst="roundRect">
-            <a:avLst>
-              <a:gd name="adj" fmla="val 5000"/>
-            </a:avLst>
-          </a:prstGeom>
-          <a:solidFill>
-            <a:srgbClr val="FFFFFF"/>
-          </a:solidFill>
-          <a:ln w="12700">
-            <a:solidFill>
-              <a:srgbClr val="E4DCCB"/>
-            </a:solidFill>
-            <a:prstDash val="solid"/>
-          </a:ln>
-        </p:spPr>
-      </p:sp>
-      <p:sp>
-        <p:nvSpPr>
-          <p:cNvPr id="6" name="Shape 4"/>
-          <p:cNvSpPr/>
-          <p:nvPr/>
-        </p:nvSpPr>
-        <p:spPr>
-          <a:xfrm>
-            <a:off x="640080" y="1691640"/>
-            <a:ext cx="54864" cy="1097280"/>
-          </a:xfrm>
-          <a:prstGeom prst="rect">
-            <a:avLst/>
-          </a:prstGeom>
-          <a:solidFill>
-            <a:srgbClr val="386641"/>
-          </a:solidFill>
-          <a:ln/>
-        </p:spPr>
-      </p:sp>
-      <p:sp>
-        <p:nvSpPr>
-          <p:cNvPr id="7" name="Text 5"/>
-          <p:cNvSpPr/>
-          <p:nvPr/>
-        </p:nvSpPr>
-        <p:spPr>
-          <a:xfrm>
-            <a:off x="914400" y="1801368"/>
-            <a:ext cx="10332720" cy="365760"/>
-          </a:xfrm>
-          <a:prstGeom prst="rect">
-            <a:avLst/>
-          </a:prstGeom>
-          <a:noFill/>
-          <a:ln/>
-        </p:spPr>
-        <p:txBody>
-          <a:bodyPr wrap="square" rtlCol="0" anchor="ctr"/>
-          <a:lstStyle/>
-          <a:p>
-            <a:pPr indent="0" marL="0">
-              <a:buNone/>
-            </a:pPr>
-            <a:r>
-              <a:rPr lang="en-US" sz="1400" b="1" dirty="0">
-                <a:solidFill>
-                  <a:srgbClr val="1B1F3B"/>
-                </a:solidFill>
-                <a:latin typeface="Segoe UI" pitchFamily="34" charset="0"/>
-                <a:ea typeface="Segoe UI" pitchFamily="34" charset="-122"/>
-                <a:cs typeface="Segoe UI" pitchFamily="34" charset="-120"/>
-              </a:rPr>
-              <a:t>Connexion Vercel / configuration environnement</a:t>
-            </a:r>
-            <a:endParaRPr lang="en-US" sz="1400" dirty="0"/>
-          </a:p>
-        </p:txBody>
-      </p:sp>
-      <p:sp>
-        <p:nvSpPr>
-          <p:cNvPr id="8" name="Text 6"/>
-          <p:cNvSpPr/>
-          <p:nvPr/>
-        </p:nvSpPr>
-        <p:spPr>
-          <a:xfrm>
-            <a:off x="914400" y="2148840"/>
-            <a:ext cx="10332720" cy="594360"/>
-          </a:xfrm>
-          <a:prstGeom prst="rect">
-            <a:avLst/>
-          </a:prstGeom>
-          <a:noFill/>
-          <a:ln/>
-        </p:spPr>
-        <p:txBody>
-          <a:bodyPr wrap="square" rtlCol="0" anchor="ctr"/>
-          <a:lstStyle/>
-          <a:p>
-            <a:pPr indent="0" marL="0">
-              <a:lnSpc>
-                <a:spcPts val="1400"/>
-              </a:lnSpc>
-              <a:buNone/>
-            </a:pPr>
-            <a:r>
-              <a:rPr lang="en-US" sz="1100" dirty="0">
-                <a:solidFill>
-                  <a:srgbClr val="8A7C68"/>
-                </a:solidFill>
-                <a:latin typeface="Segoe UI" pitchFamily="34" charset="0"/>
-                <a:ea typeface="Segoe UI" pitchFamily="34" charset="-122"/>
-                <a:cs typeface="Segoe UI" pitchFamily="34" charset="-120"/>
-              </a:rPr>
-              <a:t>Correction de la configuration d'authentification et du SMTP sur l'environnement de production Vercel.</a:t>
-            </a:r>
-            <a:endParaRPr lang="en-US" sz="1100" dirty="0"/>
-          </a:p>
-        </p:txBody>
-      </p:sp>
-      <p:sp>
-        <p:nvSpPr>
-          <p:cNvPr id="9" name="Text 7"/>
-          <p:cNvSpPr/>
-          <p:nvPr/>
-        </p:nvSpPr>
-        <p:spPr>
-          <a:xfrm>
-            <a:off x="365760" y="6510528"/>
-            <a:ext cx="5486400" cy="274320"/>
-          </a:xfrm>
-          <a:prstGeom prst="rect">
-            <a:avLst/>
-          </a:prstGeom>
-          <a:noFill/>
-          <a:ln/>
-        </p:spPr>
-        <p:txBody>
-          <a:bodyPr wrap="square" rtlCol="0" anchor="ctr"/>
-          <a:lstStyle/>
-          <a:p>
-            <a:pPr indent="0" marL="0">
-              <a:buNone/>
-            </a:pPr>
-            <a:r>
-              <a:rPr lang="en-US" sz="900" dirty="0">
-                <a:solidFill>
-                  <a:srgbClr val="8A7C68"/>
-                </a:solidFill>
-                <a:latin typeface="Segoe UI" pitchFamily="34" charset="0"/>
-                <a:ea typeface="Segoe UI" pitchFamily="34" charset="-122"/>
-                <a:cs typeface="Segoe UI" pitchFamily="34" charset="-120"/>
-              </a:rPr>
-              <a:t>Kôji Web — Récapitulatif technique</a:t>
-            </a:r>
-            <a:endParaRPr lang="en-US" sz="900" dirty="0"/>
-          </a:p>
-        </p:txBody>
-      </p:sp>
-      <p:sp>
-        <p:nvSpPr>
-          <p:cNvPr id="10" name="Text 8"/>
           <p:cNvSpPr/>
           <p:nvPr/>
         </p:nvSpPr>
@@ -13497,7 +13803,7 @@
                 <a:ea typeface="Georgia" pitchFamily="34" charset="-122"/>
                 <a:cs typeface="Georgia" pitchFamily="34" charset="-120"/>
               </a:rPr>
-              <a:t>Devis</a:t>
+              <a:t>Fondations</a:t>
             </a:r>
             <a:endParaRPr lang="en-US" sz="2400" dirty="0"/>
           </a:p>
@@ -13583,7 +13889,7 @@
                 <a:ea typeface="Segoe UI" pitchFamily="34" charset="-122"/>
                 <a:cs typeface="Segoe UI" pitchFamily="34" charset="-120"/>
               </a:rPr>
-              <a:t>Migration des devis vers Supabase (table partagée)</a:t>
+              <a:t>Connexion Vercel / configuration environnement</a:t>
             </a:r>
             <a:endParaRPr lang="en-US" sz="1400" dirty="0"/>
           </a:p>
@@ -13625,7 +13931,7 @@
                 <a:ea typeface="Segoe UI" pitchFamily="34" charset="-122"/>
                 <a:cs typeface="Segoe UI" pitchFamily="34" charset="-120"/>
               </a:rPr>
-              <a:t>Les devis créés sur le site web et sur l'application mobile (Firas) vivent désormais dans la même table Supabase 'quotes', avec un mapping bidirectionnel dédié (lib/quote-mapping.js).</a:t>
+              <a:t>Correction de la configuration d'authentification et du SMTP sur l'environnement de production Vercel.</a:t>
             </a:r>
             <a:endParaRPr lang="en-US" sz="1100" dirty="0"/>
           </a:p>
@@ -13835,7 +14141,7 @@
                 <a:ea typeface="Georgia" pitchFamily="34" charset="-122"/>
                 <a:cs typeface="Georgia" pitchFamily="34" charset="-120"/>
               </a:rPr>
-              <a:t>Chantiers</a:t>
+              <a:t>Devis</a:t>
             </a:r>
             <a:endParaRPr lang="en-US" sz="2400" dirty="0"/>
           </a:p>
@@ -13921,7 +14227,7 @@
                 <a:ea typeface="Segoe UI" pitchFamily="34" charset="-122"/>
                 <a:cs typeface="Segoe UI" pitchFamily="34" charset="-120"/>
               </a:rPr>
-              <a:t>Connexion Supabase : chantiers, planning, fournitures</a:t>
+              <a:t>Migration des devis vers Supabase (table partagée)</a:t>
             </a:r>
             <a:endParaRPr lang="en-US" sz="1400" dirty="0"/>
           </a:p>
@@ -13963,7 +14269,7 @@
                 <a:ea typeface="Segoe UI" pitchFamily="34" charset="-122"/>
                 <a:cs typeface="Segoe UI" pitchFamily="34" charset="-120"/>
               </a:rPr>
-              <a:t>Ces trois modules sont branchés sur la base partagée avec l'application mobile ; les comptes utilisateurs sont également partagés entre les deux plateformes.</a:t>
+              <a:t>Les devis créés sur le site web et sur l'application mobile (Firas) vivent désormais dans la même table Supabase 'quotes', avec un mapping bidirectionnel dédié (lib/quote-mapping.js).</a:t>
             </a:r>
             <a:endParaRPr lang="en-US" sz="1100" dirty="0"/>
           </a:p>
@@ -14210,7 +14516,7 @@
                 <a:ea typeface="Segoe UI" pitchFamily="34" charset="-122"/>
                 <a:cs typeface="Segoe UI" pitchFamily="34" charset="-120"/>
               </a:rPr>
-              <a:t>33 mise(s) à jour</a:t>
+              <a:t>35 mise(s) à jour</a:t>
             </a:r>
             <a:endParaRPr lang="en-US" sz="1200" dirty="0"/>
           </a:p>
@@ -14420,7 +14726,7 @@
                 <a:ea typeface="Georgia" pitchFamily="34" charset="-122"/>
                 <a:cs typeface="Georgia" pitchFamily="34" charset="-120"/>
               </a:rPr>
-              <a:t>Équipe</a:t>
+              <a:t>Chantiers</a:t>
             </a:r>
             <a:endParaRPr lang="en-US" sz="2400" dirty="0"/>
           </a:p>
@@ -14506,7 +14812,7 @@
                 <a:ea typeface="Segoe UI" pitchFamily="34" charset="-122"/>
                 <a:cs typeface="Segoe UI" pitchFamily="34" charset="-120"/>
               </a:rPr>
-              <a:t>Nouvelle donnée : heures contractuelles par ouvrier</a:t>
+              <a:t>Connexion Supabase : chantiers, planning, fournitures</a:t>
             </a:r>
             <a:endParaRPr lang="en-US" sz="1400" dirty="0"/>
           </a:p>
@@ -14548,7 +14854,7 @@
                 <a:ea typeface="Segoe UI" pitchFamily="34" charset="-122"/>
                 <a:cs typeface="Segoe UI" pitchFamily="34" charset="-120"/>
               </a:rPr>
-              <a:t>Ajout d'un paramètre 'heures contractuelles / semaine' (35h par défaut) sur chaque fiche ouvrier, utilisé pour le calcul des écarts.</a:t>
+              <a:t>Ces trois modules sont branchés sur la base partagée avec l'application mobile ; les comptes utilisateurs sont également partagés entre les deux plateformes.</a:t>
             </a:r>
             <a:endParaRPr lang="en-US" sz="1100" dirty="0"/>
           </a:p>
@@ -14758,7 +15064,7 @@
                 <a:ea typeface="Georgia" pitchFamily="34" charset="-122"/>
                 <a:cs typeface="Georgia" pitchFamily="34" charset="-120"/>
               </a:rPr>
-              <a:t>Accueil &amp; stabilité</a:t>
+              <a:t>Équipe</a:t>
             </a:r>
             <a:endParaRPr lang="en-US" sz="2400" dirty="0"/>
           </a:p>
@@ -14844,7 +15150,7 @@
                 <a:ea typeface="Segoe UI" pitchFamily="34" charset="-122"/>
                 <a:cs typeface="Segoe UI" pitchFamily="34" charset="-120"/>
               </a:rPr>
-              <a:t>Nettoyage du backend</a:t>
+              <a:t>Nouvelle donnée : heures contractuelles par ouvrier</a:t>
             </a:r>
             <a:endParaRPr lang="en-US" sz="1400" dirty="0"/>
           </a:p>
@@ -14886,7 +15192,7 @@
                 <a:ea typeface="Segoe UI" pitchFamily="34" charset="-122"/>
                 <a:cs typeface="Segoe UI" pitchFamily="34" charset="-120"/>
               </a:rPr>
-              <a:t>Audit complet des routes serveur : suppression du code mort (module Marketplace), vérification de la cohérence entre données locales et données Supabase sur l'ensemble de l'application.</a:t>
+              <a:t>Ajout d'un paramètre 'heures contractuelles / semaine' (35h par défaut) sur chaque fiche ouvrier, utilisé pour le calcul des écarts.</a:t>
             </a:r>
             <a:endParaRPr lang="en-US" sz="1100" dirty="0"/>
           </a:p>
@@ -14981,6 +15287,810 @@
 <file path=ppt/slides/slide32.xml><?xml version="1.0" encoding="utf-8"?>
 <p:sld xmlns:a="http://schemas.openxmlformats.org/drawingml/2006/main" xmlns:r="http://schemas.openxmlformats.org/officeDocument/2006/relationships" xmlns:p="http://schemas.openxmlformats.org/presentationml/2006/main">
   <p:cSld name="Slide 32">
+    <p:bg>
+      <p:bgPr>
+        <a:solidFill>
+          <a:srgbClr val="F3EEE3"/>
+        </a:solidFill>
+      </p:bgPr>
+    </p:bg>
+    <p:spTree>
+      <p:nvGrpSpPr>
+        <p:cNvPr id="1" name=""/>
+        <p:cNvGrpSpPr/>
+        <p:nvPr/>
+      </p:nvGrpSpPr>
+      <p:grpSpPr>
+        <a:xfrm>
+          <a:off x="0" y="0"/>
+          <a:ext cx="0" cy="0"/>
+          <a:chOff x="0" y="0"/>
+          <a:chExt cx="0" cy="0"/>
+        </a:xfrm>
+      </p:grpSpPr>
+      <p:sp>
+        <p:nvSpPr>
+          <p:cNvPr id="2" name="Shape 0"/>
+          <p:cNvSpPr/>
+          <p:nvPr/>
+        </p:nvSpPr>
+        <p:spPr>
+          <a:xfrm>
+            <a:off x="640080" y="411480"/>
+            <a:ext cx="2377440" cy="365760"/>
+          </a:xfrm>
+          <a:prstGeom prst="roundRect">
+            <a:avLst>
+              <a:gd name="adj" fmla="val 50000"/>
+            </a:avLst>
+          </a:prstGeom>
+          <a:solidFill>
+            <a:srgbClr val="E6EFE4"/>
+          </a:solidFill>
+          <a:ln/>
+        </p:spPr>
+      </p:sp>
+      <p:sp>
+        <p:nvSpPr>
+          <p:cNvPr id="3" name="Text 1"/>
+          <p:cNvSpPr/>
+          <p:nvPr/>
+        </p:nvSpPr>
+        <p:spPr>
+          <a:xfrm>
+            <a:off x="640080" y="411480"/>
+            <a:ext cx="2377440" cy="365760"/>
+          </a:xfrm>
+          <a:prstGeom prst="rect">
+            <a:avLst/>
+          </a:prstGeom>
+          <a:noFill/>
+          <a:ln/>
+        </p:spPr>
+        <p:txBody>
+          <a:bodyPr wrap="square" rtlCol="0" anchor="ctr"/>
+          <a:lstStyle/>
+          <a:p>
+            <a:pPr algn="ctr" indent="0" marL="0">
+              <a:buNone/>
+            </a:pPr>
+            <a:r>
+              <a:rPr lang="en-US" sz="1000" b="1" spc="100" kern="0" dirty="0">
+                <a:solidFill>
+                  <a:srgbClr val="386641"/>
+                </a:solidFill>
+                <a:latin typeface="Segoe UI" pitchFamily="34" charset="0"/>
+                <a:ea typeface="Segoe UI" pitchFamily="34" charset="-122"/>
+                <a:cs typeface="Segoe UI" pitchFamily="34" charset="-120"/>
+              </a:rPr>
+              <a:t>BASE DE DONNÉES</a:t>
+            </a:r>
+            <a:endParaRPr lang="en-US" sz="1000" dirty="0"/>
+          </a:p>
+        </p:txBody>
+      </p:sp>
+      <p:sp>
+        <p:nvSpPr>
+          <p:cNvPr id="4" name="Text 2"/>
+          <p:cNvSpPr/>
+          <p:nvPr/>
+        </p:nvSpPr>
+        <p:spPr>
+          <a:xfrm>
+            <a:off x="640080" y="868680"/>
+            <a:ext cx="10515600" cy="548640"/>
+          </a:xfrm>
+          <a:prstGeom prst="rect">
+            <a:avLst/>
+          </a:prstGeom>
+          <a:noFill/>
+          <a:ln/>
+        </p:spPr>
+        <p:txBody>
+          <a:bodyPr wrap="square" rtlCol="0" anchor="ctr"/>
+          <a:lstStyle/>
+          <a:p>
+            <a:pPr indent="0" marL="0">
+              <a:buNone/>
+            </a:pPr>
+            <a:r>
+              <a:rPr lang="en-US" sz="2400" b="1" dirty="0">
+                <a:solidFill>
+                  <a:srgbClr val="1B1F3B"/>
+                </a:solidFill>
+                <a:latin typeface="Georgia" pitchFamily="34" charset="0"/>
+                <a:ea typeface="Georgia" pitchFamily="34" charset="-122"/>
+                <a:cs typeface="Georgia" pitchFamily="34" charset="-120"/>
+              </a:rPr>
+              <a:t>Accueil &amp; stabilité</a:t>
+            </a:r>
+            <a:endParaRPr lang="en-US" sz="2400" dirty="0"/>
+          </a:p>
+        </p:txBody>
+      </p:sp>
+      <p:sp>
+        <p:nvSpPr>
+          <p:cNvPr id="5" name="Shape 3"/>
+          <p:cNvSpPr/>
+          <p:nvPr/>
+        </p:nvSpPr>
+        <p:spPr>
+          <a:xfrm>
+            <a:off x="640080" y="1691640"/>
+            <a:ext cx="10881360" cy="1097280"/>
+          </a:xfrm>
+          <a:prstGeom prst="roundRect">
+            <a:avLst>
+              <a:gd name="adj" fmla="val 5000"/>
+            </a:avLst>
+          </a:prstGeom>
+          <a:solidFill>
+            <a:srgbClr val="FFFFFF"/>
+          </a:solidFill>
+          <a:ln w="12700">
+            <a:solidFill>
+              <a:srgbClr val="E4DCCB"/>
+            </a:solidFill>
+            <a:prstDash val="solid"/>
+          </a:ln>
+        </p:spPr>
+      </p:sp>
+      <p:sp>
+        <p:nvSpPr>
+          <p:cNvPr id="6" name="Shape 4"/>
+          <p:cNvSpPr/>
+          <p:nvPr/>
+        </p:nvSpPr>
+        <p:spPr>
+          <a:xfrm>
+            <a:off x="640080" y="1691640"/>
+            <a:ext cx="54864" cy="1097280"/>
+          </a:xfrm>
+          <a:prstGeom prst="rect">
+            <a:avLst/>
+          </a:prstGeom>
+          <a:solidFill>
+            <a:srgbClr val="386641"/>
+          </a:solidFill>
+          <a:ln/>
+        </p:spPr>
+      </p:sp>
+      <p:sp>
+        <p:nvSpPr>
+          <p:cNvPr id="7" name="Text 5"/>
+          <p:cNvSpPr/>
+          <p:nvPr/>
+        </p:nvSpPr>
+        <p:spPr>
+          <a:xfrm>
+            <a:off x="914400" y="1801368"/>
+            <a:ext cx="10332720" cy="365760"/>
+          </a:xfrm>
+          <a:prstGeom prst="rect">
+            <a:avLst/>
+          </a:prstGeom>
+          <a:noFill/>
+          <a:ln/>
+        </p:spPr>
+        <p:txBody>
+          <a:bodyPr wrap="square" rtlCol="0" anchor="ctr"/>
+          <a:lstStyle/>
+          <a:p>
+            <a:pPr indent="0" marL="0">
+              <a:buNone/>
+            </a:pPr>
+            <a:r>
+              <a:rPr lang="en-US" sz="1400" b="1" dirty="0">
+                <a:solidFill>
+                  <a:srgbClr val="1B1F3B"/>
+                </a:solidFill>
+                <a:latin typeface="Segoe UI" pitchFamily="34" charset="0"/>
+                <a:ea typeface="Segoe UI" pitchFamily="34" charset="-122"/>
+                <a:cs typeface="Segoe UI" pitchFamily="34" charset="-120"/>
+              </a:rPr>
+              <a:t>Nettoyage du backend</a:t>
+            </a:r>
+            <a:endParaRPr lang="en-US" sz="1400" dirty="0"/>
+          </a:p>
+        </p:txBody>
+      </p:sp>
+      <p:sp>
+        <p:nvSpPr>
+          <p:cNvPr id="8" name="Text 6"/>
+          <p:cNvSpPr/>
+          <p:nvPr/>
+        </p:nvSpPr>
+        <p:spPr>
+          <a:xfrm>
+            <a:off x="914400" y="2148840"/>
+            <a:ext cx="10332720" cy="594360"/>
+          </a:xfrm>
+          <a:prstGeom prst="rect">
+            <a:avLst/>
+          </a:prstGeom>
+          <a:noFill/>
+          <a:ln/>
+        </p:spPr>
+        <p:txBody>
+          <a:bodyPr wrap="square" rtlCol="0" anchor="ctr"/>
+          <a:lstStyle/>
+          <a:p>
+            <a:pPr indent="0" marL="0">
+              <a:lnSpc>
+                <a:spcPts val="1400"/>
+              </a:lnSpc>
+              <a:buNone/>
+            </a:pPr>
+            <a:r>
+              <a:rPr lang="en-US" sz="1100" dirty="0">
+                <a:solidFill>
+                  <a:srgbClr val="8A7C68"/>
+                </a:solidFill>
+                <a:latin typeface="Segoe UI" pitchFamily="34" charset="0"/>
+                <a:ea typeface="Segoe UI" pitchFamily="34" charset="-122"/>
+                <a:cs typeface="Segoe UI" pitchFamily="34" charset="-120"/>
+              </a:rPr>
+              <a:t>Audit complet des routes serveur : suppression du code mort (module Marketplace), vérification de la cohérence entre données locales et données Supabase sur l'ensemble de l'application.</a:t>
+            </a:r>
+            <a:endParaRPr lang="en-US" sz="1100" dirty="0"/>
+          </a:p>
+        </p:txBody>
+      </p:sp>
+      <p:sp>
+        <p:nvSpPr>
+          <p:cNvPr id="9" name="Text 7"/>
+          <p:cNvSpPr/>
+          <p:nvPr/>
+        </p:nvSpPr>
+        <p:spPr>
+          <a:xfrm>
+            <a:off x="365760" y="6510528"/>
+            <a:ext cx="5486400" cy="274320"/>
+          </a:xfrm>
+          <a:prstGeom prst="rect">
+            <a:avLst/>
+          </a:prstGeom>
+          <a:noFill/>
+          <a:ln/>
+        </p:spPr>
+        <p:txBody>
+          <a:bodyPr wrap="square" rtlCol="0" anchor="ctr"/>
+          <a:lstStyle/>
+          <a:p>
+            <a:pPr indent="0" marL="0">
+              <a:buNone/>
+            </a:pPr>
+            <a:r>
+              <a:rPr lang="en-US" sz="900" dirty="0">
+                <a:solidFill>
+                  <a:srgbClr val="8A7C68"/>
+                </a:solidFill>
+                <a:latin typeface="Segoe UI" pitchFamily="34" charset="0"/>
+                <a:ea typeface="Segoe UI" pitchFamily="34" charset="-122"/>
+                <a:cs typeface="Segoe UI" pitchFamily="34" charset="-120"/>
+              </a:rPr>
+              <a:t>Kôji Web — Récapitulatif technique</a:t>
+            </a:r>
+            <a:endParaRPr lang="en-US" sz="900" dirty="0"/>
+          </a:p>
+        </p:txBody>
+      </p:sp>
+      <p:sp>
+        <p:nvSpPr>
+          <p:cNvPr id="10" name="Text 8"/>
+          <p:cNvSpPr/>
+          <p:nvPr/>
+        </p:nvSpPr>
+        <p:spPr>
+          <a:xfrm>
+            <a:off x="9601200" y="6510528"/>
+            <a:ext cx="2194560" cy="274320"/>
+          </a:xfrm>
+          <a:prstGeom prst="rect">
+            <a:avLst/>
+          </a:prstGeom>
+          <a:noFill/>
+          <a:ln/>
+        </p:spPr>
+        <p:txBody>
+          <a:bodyPr wrap="square" rtlCol="0" anchor="ctr"/>
+          <a:lstStyle/>
+          <a:p>
+            <a:pPr algn="r" indent="0" marL="0">
+              <a:buNone/>
+            </a:pPr>
+            <a:r>
+              <a:rPr lang="en-US" sz="900" dirty="0">
+                <a:solidFill>
+                  <a:srgbClr val="8A7C68"/>
+                </a:solidFill>
+                <a:latin typeface="Segoe UI" pitchFamily="34" charset="0"/>
+                <a:ea typeface="Segoe UI" pitchFamily="34" charset="-122"/>
+                <a:cs typeface="Segoe UI" pitchFamily="34" charset="-120"/>
+              </a:rPr>
+              <a:t>32</a:t>
+            </a:r>
+            <a:endParaRPr lang="en-US" sz="900" dirty="0"/>
+          </a:p>
+        </p:txBody>
+      </p:sp>
+    </p:spTree>
+  </p:cSld>
+  <p:clrMapOvr>
+    <a:masterClrMapping/>
+  </p:clrMapOvr>
+</p:sld>
+</file>
+
+<file path=ppt/slides/slide33.xml><?xml version="1.0" encoding="utf-8"?>
+<p:sld xmlns:a="http://schemas.openxmlformats.org/drawingml/2006/main" xmlns:r="http://schemas.openxmlformats.org/officeDocument/2006/relationships" xmlns:p="http://schemas.openxmlformats.org/presentationml/2006/main">
+  <p:cSld name="Slide 33">
+    <p:bg>
+      <p:bgPr>
+        <a:solidFill>
+          <a:srgbClr val="F3EEE3"/>
+        </a:solidFill>
+      </p:bgPr>
+    </p:bg>
+    <p:spTree>
+      <p:nvGrpSpPr>
+        <p:cNvPr id="1" name=""/>
+        <p:cNvGrpSpPr/>
+        <p:nvPr/>
+      </p:nvGrpSpPr>
+      <p:grpSpPr>
+        <a:xfrm>
+          <a:off x="0" y="0"/>
+          <a:ext cx="0" cy="0"/>
+          <a:chOff x="0" y="0"/>
+          <a:chExt cx="0" cy="0"/>
+        </a:xfrm>
+      </p:grpSpPr>
+      <p:sp>
+        <p:nvSpPr>
+          <p:cNvPr id="2" name="Shape 0"/>
+          <p:cNvSpPr/>
+          <p:nvPr/>
+        </p:nvSpPr>
+        <p:spPr>
+          <a:xfrm>
+            <a:off x="640080" y="411480"/>
+            <a:ext cx="2377440" cy="365760"/>
+          </a:xfrm>
+          <a:prstGeom prst="roundRect">
+            <a:avLst>
+              <a:gd name="adj" fmla="val 50000"/>
+            </a:avLst>
+          </a:prstGeom>
+          <a:solidFill>
+            <a:srgbClr val="E6EFE4"/>
+          </a:solidFill>
+          <a:ln/>
+        </p:spPr>
+      </p:sp>
+      <p:sp>
+        <p:nvSpPr>
+          <p:cNvPr id="3" name="Text 1"/>
+          <p:cNvSpPr/>
+          <p:nvPr/>
+        </p:nvSpPr>
+        <p:spPr>
+          <a:xfrm>
+            <a:off x="640080" y="411480"/>
+            <a:ext cx="2377440" cy="365760"/>
+          </a:xfrm>
+          <a:prstGeom prst="rect">
+            <a:avLst/>
+          </a:prstGeom>
+          <a:noFill/>
+          <a:ln/>
+        </p:spPr>
+        <p:txBody>
+          <a:bodyPr wrap="square" rtlCol="0" anchor="ctr"/>
+          <a:lstStyle/>
+          <a:p>
+            <a:pPr algn="ctr" indent="0" marL="0">
+              <a:buNone/>
+            </a:pPr>
+            <a:r>
+              <a:rPr lang="en-US" sz="1000" b="1" spc="100" kern="0" dirty="0">
+                <a:solidFill>
+                  <a:srgbClr val="386641"/>
+                </a:solidFill>
+                <a:latin typeface="Segoe UI" pitchFamily="34" charset="0"/>
+                <a:ea typeface="Segoe UI" pitchFamily="34" charset="-122"/>
+                <a:cs typeface="Segoe UI" pitchFamily="34" charset="-120"/>
+              </a:rPr>
+              <a:t>BASE DE DONNÉES</a:t>
+            </a:r>
+            <a:endParaRPr lang="en-US" sz="1000" dirty="0"/>
+          </a:p>
+        </p:txBody>
+      </p:sp>
+      <p:sp>
+        <p:nvSpPr>
+          <p:cNvPr id="4" name="Text 2"/>
+          <p:cNvSpPr/>
+          <p:nvPr/>
+        </p:nvSpPr>
+        <p:spPr>
+          <a:xfrm>
+            <a:off x="640080" y="868680"/>
+            <a:ext cx="10515600" cy="548640"/>
+          </a:xfrm>
+          <a:prstGeom prst="rect">
+            <a:avLst/>
+          </a:prstGeom>
+          <a:noFill/>
+          <a:ln/>
+        </p:spPr>
+        <p:txBody>
+          <a:bodyPr wrap="square" rtlCol="0" anchor="ctr"/>
+          <a:lstStyle/>
+          <a:p>
+            <a:pPr indent="0" marL="0">
+              <a:buNone/>
+            </a:pPr>
+            <a:r>
+              <a:rPr lang="en-US" sz="2400" b="1" dirty="0">
+                <a:solidFill>
+                  <a:srgbClr val="1B1F3B"/>
+                </a:solidFill>
+                <a:latin typeface="Georgia" pitchFamily="34" charset="0"/>
+                <a:ea typeface="Georgia" pitchFamily="34" charset="-122"/>
+                <a:cs typeface="Georgia" pitchFamily="34" charset="-120"/>
+              </a:rPr>
+              <a:t>Maintenance technique</a:t>
+            </a:r>
+            <a:endParaRPr lang="en-US" sz="2400" dirty="0"/>
+          </a:p>
+        </p:txBody>
+      </p:sp>
+      <p:sp>
+        <p:nvSpPr>
+          <p:cNvPr id="5" name="Shape 3"/>
+          <p:cNvSpPr/>
+          <p:nvPr/>
+        </p:nvSpPr>
+        <p:spPr>
+          <a:xfrm>
+            <a:off x="640080" y="1691640"/>
+            <a:ext cx="10881360" cy="1097280"/>
+          </a:xfrm>
+          <a:prstGeom prst="roundRect">
+            <a:avLst>
+              <a:gd name="adj" fmla="val 5000"/>
+            </a:avLst>
+          </a:prstGeom>
+          <a:solidFill>
+            <a:srgbClr val="FFFFFF"/>
+          </a:solidFill>
+          <a:ln w="12700">
+            <a:solidFill>
+              <a:srgbClr val="E4DCCB"/>
+            </a:solidFill>
+            <a:prstDash val="solid"/>
+          </a:ln>
+        </p:spPr>
+      </p:sp>
+      <p:sp>
+        <p:nvSpPr>
+          <p:cNvPr id="6" name="Shape 4"/>
+          <p:cNvSpPr/>
+          <p:nvPr/>
+        </p:nvSpPr>
+        <p:spPr>
+          <a:xfrm>
+            <a:off x="640080" y="1691640"/>
+            <a:ext cx="54864" cy="1097280"/>
+          </a:xfrm>
+          <a:prstGeom prst="rect">
+            <a:avLst/>
+          </a:prstGeom>
+          <a:solidFill>
+            <a:srgbClr val="386641"/>
+          </a:solidFill>
+          <a:ln/>
+        </p:spPr>
+      </p:sp>
+      <p:sp>
+        <p:nvSpPr>
+          <p:cNvPr id="7" name="Text 5"/>
+          <p:cNvSpPr/>
+          <p:nvPr/>
+        </p:nvSpPr>
+        <p:spPr>
+          <a:xfrm>
+            <a:off x="914400" y="1801368"/>
+            <a:ext cx="10332720" cy="365760"/>
+          </a:xfrm>
+          <a:prstGeom prst="rect">
+            <a:avLst/>
+          </a:prstGeom>
+          <a:noFill/>
+          <a:ln/>
+        </p:spPr>
+        <p:txBody>
+          <a:bodyPr wrap="square" rtlCol="0" anchor="ctr"/>
+          <a:lstStyle/>
+          <a:p>
+            <a:pPr indent="0" marL="0">
+              <a:buNone/>
+            </a:pPr>
+            <a:r>
+              <a:rPr lang="en-US" sz="1400" b="1" dirty="0">
+                <a:solidFill>
+                  <a:srgbClr val="1B1F3B"/>
+                </a:solidFill>
+                <a:latin typeface="Segoe UI" pitchFamily="34" charset="0"/>
+                <a:ea typeface="Segoe UI" pitchFamily="34" charset="-122"/>
+                <a:cs typeface="Segoe UI" pitchFamily="34" charset="-120"/>
+              </a:rPr>
+              <a:t>Nettoyage approfondi du code</a:t>
+            </a:r>
+            <a:endParaRPr lang="en-US" sz="1400" dirty="0"/>
+          </a:p>
+        </p:txBody>
+      </p:sp>
+      <p:sp>
+        <p:nvSpPr>
+          <p:cNvPr id="8" name="Text 6"/>
+          <p:cNvSpPr/>
+          <p:nvPr/>
+        </p:nvSpPr>
+        <p:spPr>
+          <a:xfrm>
+            <a:off x="914400" y="2148840"/>
+            <a:ext cx="10332720" cy="594360"/>
+          </a:xfrm>
+          <a:prstGeom prst="rect">
+            <a:avLst/>
+          </a:prstGeom>
+          <a:noFill/>
+          <a:ln/>
+        </p:spPr>
+        <p:txBody>
+          <a:bodyPr wrap="square" rtlCol="0" anchor="ctr"/>
+          <a:lstStyle/>
+          <a:p>
+            <a:pPr indent="0" marL="0">
+              <a:lnSpc>
+                <a:spcPts val="1400"/>
+              </a:lnSpc>
+              <a:buNone/>
+            </a:pPr>
+            <a:r>
+              <a:rPr lang="en-US" sz="1100" dirty="0">
+                <a:solidFill>
+                  <a:srgbClr val="8A7C68"/>
+                </a:solidFill>
+                <a:latin typeface="Segoe UI" pitchFamily="34" charset="0"/>
+                <a:ea typeface="Segoe UI" pitchFamily="34" charset="-122"/>
+                <a:cs typeface="Segoe UI" pitchFamily="34" charset="-120"/>
+              </a:rPr>
+              <a:t>Audit complet du projet (pages, routes, fonctions, dépendances) pour repérer tout ce qui n'était plus utilisé ; suppression de 6 pages orphelines (onboarding, welcome, compte, anciennes pages devis en 3 étapes), d'une route de connexion de démonstration, d'un dossier de composants dupliqué obsolète, de plusieurs fonctions inutilisées et d'une dépendance logicielle non utilisée — sans toucher aux fonctionnalités actives.</a:t>
+            </a:r>
+            <a:endParaRPr lang="en-US" sz="1100" dirty="0"/>
+          </a:p>
+        </p:txBody>
+      </p:sp>
+      <p:sp>
+        <p:nvSpPr>
+          <p:cNvPr id="9" name="Shape 7"/>
+          <p:cNvSpPr/>
+          <p:nvPr/>
+        </p:nvSpPr>
+        <p:spPr>
+          <a:xfrm>
+            <a:off x="640080" y="2926080"/>
+            <a:ext cx="10881360" cy="1097280"/>
+          </a:xfrm>
+          <a:prstGeom prst="roundRect">
+            <a:avLst>
+              <a:gd name="adj" fmla="val 5000"/>
+            </a:avLst>
+          </a:prstGeom>
+          <a:solidFill>
+            <a:srgbClr val="FFFFFF"/>
+          </a:solidFill>
+          <a:ln w="12700">
+            <a:solidFill>
+              <a:srgbClr val="E4DCCB"/>
+            </a:solidFill>
+            <a:prstDash val="solid"/>
+          </a:ln>
+        </p:spPr>
+      </p:sp>
+      <p:sp>
+        <p:nvSpPr>
+          <p:cNvPr id="10" name="Shape 8"/>
+          <p:cNvSpPr/>
+          <p:nvPr/>
+        </p:nvSpPr>
+        <p:spPr>
+          <a:xfrm>
+            <a:off x="640080" y="2926080"/>
+            <a:ext cx="54864" cy="1097280"/>
+          </a:xfrm>
+          <a:prstGeom prst="rect">
+            <a:avLst/>
+          </a:prstGeom>
+          <a:solidFill>
+            <a:srgbClr val="386641"/>
+          </a:solidFill>
+          <a:ln/>
+        </p:spPr>
+      </p:sp>
+      <p:sp>
+        <p:nvSpPr>
+          <p:cNvPr id="11" name="Text 9"/>
+          <p:cNvSpPr/>
+          <p:nvPr/>
+        </p:nvSpPr>
+        <p:spPr>
+          <a:xfrm>
+            <a:off x="914400" y="3035808"/>
+            <a:ext cx="10332720" cy="365760"/>
+          </a:xfrm>
+          <a:prstGeom prst="rect">
+            <a:avLst/>
+          </a:prstGeom>
+          <a:noFill/>
+          <a:ln/>
+        </p:spPr>
+        <p:txBody>
+          <a:bodyPr wrap="square" rtlCol="0" anchor="ctr"/>
+          <a:lstStyle/>
+          <a:p>
+            <a:pPr indent="0" marL="0">
+              <a:buNone/>
+            </a:pPr>
+            <a:r>
+              <a:rPr lang="en-US" sz="1400" b="1" dirty="0">
+                <a:solidFill>
+                  <a:srgbClr val="1B1F3B"/>
+                </a:solidFill>
+                <a:latin typeface="Segoe UI" pitchFamily="34" charset="0"/>
+                <a:ea typeface="Segoe UI" pitchFamily="34" charset="-122"/>
+                <a:cs typeface="Segoe UI" pitchFamily="34" charset="-120"/>
+              </a:rPr>
+              <a:t>Suppression de code mort dans la génération de devis</a:t>
+            </a:r>
+            <a:endParaRPr lang="en-US" sz="1400" dirty="0"/>
+          </a:p>
+        </p:txBody>
+      </p:sp>
+      <p:sp>
+        <p:nvSpPr>
+          <p:cNvPr id="12" name="Text 10"/>
+          <p:cNvSpPr/>
+          <p:nvPr/>
+        </p:nvSpPr>
+        <p:spPr>
+          <a:xfrm>
+            <a:off x="914400" y="3383280"/>
+            <a:ext cx="10332720" cy="594360"/>
+          </a:xfrm>
+          <a:prstGeom prst="rect">
+            <a:avLst/>
+          </a:prstGeom>
+          <a:noFill/>
+          <a:ln/>
+        </p:spPr>
+        <p:txBody>
+          <a:bodyPr wrap="square" rtlCol="0" anchor="ctr"/>
+          <a:lstStyle/>
+          <a:p>
+            <a:pPr indent="0" marL="0">
+              <a:lnSpc>
+                <a:spcPts val="1400"/>
+              </a:lnSpc>
+              <a:buNone/>
+            </a:pPr>
+            <a:r>
+              <a:rPr lang="en-US" sz="1100" dirty="0">
+                <a:solidFill>
+                  <a:srgbClr val="8A7C68"/>
+                </a:solidFill>
+                <a:latin typeface="Segoe UI" pitchFamily="34" charset="0"/>
+                <a:ea typeface="Segoe UI" pitchFamily="34" charset="-122"/>
+                <a:cs typeface="Segoe UI" pitchFamily="34" charset="-120"/>
+              </a:rPr>
+              <a:t>Un ancien générateur de devis PDF, devenu inaccessible après une précédente refonte (code jamais exécuté), a été retiré du fichier technique de génération de documents.</a:t>
+            </a:r>
+            <a:endParaRPr lang="en-US" sz="1100" dirty="0"/>
+          </a:p>
+        </p:txBody>
+      </p:sp>
+      <p:sp>
+        <p:nvSpPr>
+          <p:cNvPr id="13" name="Text 11"/>
+          <p:cNvSpPr/>
+          <p:nvPr/>
+        </p:nvSpPr>
+        <p:spPr>
+          <a:xfrm>
+            <a:off x="365760" y="6510528"/>
+            <a:ext cx="5486400" cy="274320"/>
+          </a:xfrm>
+          <a:prstGeom prst="rect">
+            <a:avLst/>
+          </a:prstGeom>
+          <a:noFill/>
+          <a:ln/>
+        </p:spPr>
+        <p:txBody>
+          <a:bodyPr wrap="square" rtlCol="0" anchor="ctr"/>
+          <a:lstStyle/>
+          <a:p>
+            <a:pPr indent="0" marL="0">
+              <a:buNone/>
+            </a:pPr>
+            <a:r>
+              <a:rPr lang="en-US" sz="900" dirty="0">
+                <a:solidFill>
+                  <a:srgbClr val="8A7C68"/>
+                </a:solidFill>
+                <a:latin typeface="Segoe UI" pitchFamily="34" charset="0"/>
+                <a:ea typeface="Segoe UI" pitchFamily="34" charset="-122"/>
+                <a:cs typeface="Segoe UI" pitchFamily="34" charset="-120"/>
+              </a:rPr>
+              <a:t>Kôji Web — Récapitulatif technique</a:t>
+            </a:r>
+            <a:endParaRPr lang="en-US" sz="900" dirty="0"/>
+          </a:p>
+        </p:txBody>
+      </p:sp>
+      <p:sp>
+        <p:nvSpPr>
+          <p:cNvPr id="14" name="Text 12"/>
+          <p:cNvSpPr/>
+          <p:nvPr/>
+        </p:nvSpPr>
+        <p:spPr>
+          <a:xfrm>
+            <a:off x="9601200" y="6510528"/>
+            <a:ext cx="2194560" cy="274320"/>
+          </a:xfrm>
+          <a:prstGeom prst="rect">
+            <a:avLst/>
+          </a:prstGeom>
+          <a:noFill/>
+          <a:ln/>
+        </p:spPr>
+        <p:txBody>
+          <a:bodyPr wrap="square" rtlCol="0" anchor="ctr"/>
+          <a:lstStyle/>
+          <a:p>
+            <a:pPr algn="r" indent="0" marL="0">
+              <a:buNone/>
+            </a:pPr>
+            <a:r>
+              <a:rPr lang="en-US" sz="900" dirty="0">
+                <a:solidFill>
+                  <a:srgbClr val="8A7C68"/>
+                </a:solidFill>
+                <a:latin typeface="Segoe UI" pitchFamily="34" charset="0"/>
+                <a:ea typeface="Segoe UI" pitchFamily="34" charset="-122"/>
+                <a:cs typeface="Segoe UI" pitchFamily="34" charset="-120"/>
+              </a:rPr>
+              <a:t>33</a:t>
+            </a:r>
+            <a:endParaRPr lang="en-US" sz="900" dirty="0"/>
+          </a:p>
+        </p:txBody>
+      </p:sp>
+    </p:spTree>
+  </p:cSld>
+  <p:clrMapOvr>
+    <a:masterClrMapping/>
+  </p:clrMapOvr>
+</p:sld>
+</file>
+
+<file path=ppt/slides/slide34.xml><?xml version="1.0" encoding="utf-8"?>
+<p:sld xmlns:a="http://schemas.openxmlformats.org/drawingml/2006/main" xmlns:r="http://schemas.openxmlformats.org/officeDocument/2006/relationships" xmlns:p="http://schemas.openxmlformats.org/presentationml/2006/main">
+  <p:cSld name="Slide 34">
     <p:bg>
       <p:bgPr>
         <a:solidFill>
@@ -16192,7 +17302,263 @@
       </p:sp>
       <p:sp>
         <p:nvSpPr>
-          <p:cNvPr id="13" name="Text 11"/>
+          <p:cNvPr id="13" name="Shape 11"/>
+          <p:cNvSpPr/>
+          <p:nvPr/>
+        </p:nvSpPr>
+        <p:spPr>
+          <a:xfrm>
+            <a:off x="640080" y="4160520"/>
+            <a:ext cx="10881360" cy="1097280"/>
+          </a:xfrm>
+          <a:prstGeom prst="roundRect">
+            <a:avLst>
+              <a:gd name="adj" fmla="val 5000"/>
+            </a:avLst>
+          </a:prstGeom>
+          <a:solidFill>
+            <a:srgbClr val="FFFFFF"/>
+          </a:solidFill>
+          <a:ln w="12700">
+            <a:solidFill>
+              <a:srgbClr val="E4DCCB"/>
+            </a:solidFill>
+            <a:prstDash val="solid"/>
+          </a:ln>
+        </p:spPr>
+      </p:sp>
+      <p:sp>
+        <p:nvSpPr>
+          <p:cNvPr id="14" name="Shape 12"/>
+          <p:cNvSpPr/>
+          <p:nvPr/>
+        </p:nvSpPr>
+        <p:spPr>
+          <a:xfrm>
+            <a:off x="640080" y="4160520"/>
+            <a:ext cx="54864" cy="1097280"/>
+          </a:xfrm>
+          <a:prstGeom prst="rect">
+            <a:avLst/>
+          </a:prstGeom>
+          <a:solidFill>
+            <a:srgbClr val="1D6FE0"/>
+          </a:solidFill>
+          <a:ln/>
+        </p:spPr>
+      </p:sp>
+      <p:sp>
+        <p:nvSpPr>
+          <p:cNvPr id="15" name="Text 13"/>
+          <p:cNvSpPr/>
+          <p:nvPr/>
+        </p:nvSpPr>
+        <p:spPr>
+          <a:xfrm>
+            <a:off x="914400" y="4270248"/>
+            <a:ext cx="10332720" cy="365760"/>
+          </a:xfrm>
+          <a:prstGeom prst="rect">
+            <a:avLst/>
+          </a:prstGeom>
+          <a:noFill/>
+          <a:ln/>
+        </p:spPr>
+        <p:txBody>
+          <a:bodyPr wrap="square" rtlCol="0" anchor="ctr"/>
+          <a:lstStyle/>
+          <a:p>
+            <a:pPr indent="0" marL="0">
+              <a:buNone/>
+            </a:pPr>
+            <a:r>
+              <a:rPr lang="en-US" sz="1400" b="1" dirty="0">
+                <a:solidFill>
+                  <a:srgbClr val="1B1F3B"/>
+                </a:solidFill>
+                <a:latin typeface="Segoe UI" pitchFamily="34" charset="0"/>
+                <a:ea typeface="Segoe UI" pitchFamily="34" charset="-122"/>
+                <a:cs typeface="Segoe UI" pitchFamily="34" charset="-120"/>
+              </a:rPr>
+              <a:t>Description de l'ouvrage (titre + sous-titre)</a:t>
+            </a:r>
+            <a:endParaRPr lang="en-US" sz="1400" dirty="0"/>
+          </a:p>
+        </p:txBody>
+      </p:sp>
+      <p:sp>
+        <p:nvSpPr>
+          <p:cNvPr id="16" name="Text 14"/>
+          <p:cNvSpPr/>
+          <p:nvPr/>
+        </p:nvSpPr>
+        <p:spPr>
+          <a:xfrm>
+            <a:off x="914400" y="4617720"/>
+            <a:ext cx="10332720" cy="594360"/>
+          </a:xfrm>
+          <a:prstGeom prst="rect">
+            <a:avLst/>
+          </a:prstGeom>
+          <a:noFill/>
+          <a:ln/>
+        </p:spPr>
+        <p:txBody>
+          <a:bodyPr wrap="square" rtlCol="0" anchor="ctr"/>
+          <a:lstStyle/>
+          <a:p>
+            <a:pPr indent="0" marL="0">
+              <a:lnSpc>
+                <a:spcPts val="1400"/>
+              </a:lnSpc>
+              <a:buNone/>
+            </a:pPr>
+            <a:r>
+              <a:rPr lang="en-US" sz="1100" dirty="0">
+                <a:solidFill>
+                  <a:srgbClr val="8A7C68"/>
+                </a:solidFill>
+                <a:latin typeface="Segoe UI" pitchFamily="34" charset="0"/>
+                <a:ea typeface="Segoe UI" pitchFamily="34" charset="-122"/>
+                <a:cs typeface="Segoe UI" pitchFamily="34" charset="-120"/>
+              </a:rPr>
+              <a:t>Chaque ligne d'un devis (ouvrage ou fourniture) peut désormais recevoir une description libre, affichée sous forme de sous-titre grisé sous la désignation en gras dans le devis généré (PDF et Word) — le même principe que sur les devis modèles.</a:t>
+            </a:r>
+            <a:endParaRPr lang="en-US" sz="1100" dirty="0"/>
+          </a:p>
+        </p:txBody>
+      </p:sp>
+      <p:sp>
+        <p:nvSpPr>
+          <p:cNvPr id="17" name="Shape 15"/>
+          <p:cNvSpPr/>
+          <p:nvPr/>
+        </p:nvSpPr>
+        <p:spPr>
+          <a:xfrm>
+            <a:off x="640080" y="5394960"/>
+            <a:ext cx="10881360" cy="1097280"/>
+          </a:xfrm>
+          <a:prstGeom prst="roundRect">
+            <a:avLst>
+              <a:gd name="adj" fmla="val 5000"/>
+            </a:avLst>
+          </a:prstGeom>
+          <a:solidFill>
+            <a:srgbClr val="FFFFFF"/>
+          </a:solidFill>
+          <a:ln w="12700">
+            <a:solidFill>
+              <a:srgbClr val="E4DCCB"/>
+            </a:solidFill>
+            <a:prstDash val="solid"/>
+          </a:ln>
+        </p:spPr>
+      </p:sp>
+      <p:sp>
+        <p:nvSpPr>
+          <p:cNvPr id="18" name="Shape 16"/>
+          <p:cNvSpPr/>
+          <p:nvPr/>
+        </p:nvSpPr>
+        <p:spPr>
+          <a:xfrm>
+            <a:off x="640080" y="5394960"/>
+            <a:ext cx="54864" cy="1097280"/>
+          </a:xfrm>
+          <a:prstGeom prst="rect">
+            <a:avLst/>
+          </a:prstGeom>
+          <a:solidFill>
+            <a:srgbClr val="1D6FE0"/>
+          </a:solidFill>
+          <a:ln/>
+        </p:spPr>
+      </p:sp>
+      <p:sp>
+        <p:nvSpPr>
+          <p:cNvPr id="19" name="Text 17"/>
+          <p:cNvSpPr/>
+          <p:nvPr/>
+        </p:nvSpPr>
+        <p:spPr>
+          <a:xfrm>
+            <a:off x="914400" y="5504688"/>
+            <a:ext cx="10332720" cy="365760"/>
+          </a:xfrm>
+          <a:prstGeom prst="rect">
+            <a:avLst/>
+          </a:prstGeom>
+          <a:noFill/>
+          <a:ln/>
+        </p:spPr>
+        <p:txBody>
+          <a:bodyPr wrap="square" rtlCol="0" anchor="ctr"/>
+          <a:lstStyle/>
+          <a:p>
+            <a:pPr indent="0" marL="0">
+              <a:buNone/>
+            </a:pPr>
+            <a:r>
+              <a:rPr lang="en-US" sz="1400" b="1" dirty="0">
+                <a:solidFill>
+                  <a:srgbClr val="1B1F3B"/>
+                </a:solidFill>
+                <a:latin typeface="Segoe UI" pitchFamily="34" charset="0"/>
+                <a:ea typeface="Segoe UI" pitchFamily="34" charset="-122"/>
+                <a:cs typeface="Segoe UI" pitchFamily="34" charset="-120"/>
+              </a:rPr>
+              <a:t>Réorganisation de la fiche Client et chantier</a:t>
+            </a:r>
+            <a:endParaRPr lang="en-US" sz="1400" dirty="0"/>
+          </a:p>
+        </p:txBody>
+      </p:sp>
+      <p:sp>
+        <p:nvSpPr>
+          <p:cNvPr id="20" name="Text 18"/>
+          <p:cNvSpPr/>
+          <p:nvPr/>
+        </p:nvSpPr>
+        <p:spPr>
+          <a:xfrm>
+            <a:off x="914400" y="5852160"/>
+            <a:ext cx="10332720" cy="594360"/>
+          </a:xfrm>
+          <a:prstGeom prst="rect">
+            <a:avLst/>
+          </a:prstGeom>
+          <a:noFill/>
+          <a:ln/>
+        </p:spPr>
+        <p:txBody>
+          <a:bodyPr wrap="square" rtlCol="0" anchor="ctr"/>
+          <a:lstStyle/>
+          <a:p>
+            <a:pPr indent="0" marL="0">
+              <a:lnSpc>
+                <a:spcPts val="1400"/>
+              </a:lnSpc>
+              <a:buNone/>
+            </a:pPr>
+            <a:r>
+              <a:rPr lang="en-US" sz="1100" dirty="0">
+                <a:solidFill>
+                  <a:srgbClr val="8A7C68"/>
+                </a:solidFill>
+                <a:latin typeface="Segoe UI" pitchFamily="34" charset="0"/>
+                <a:ea typeface="Segoe UI" pitchFamily="34" charset="-122"/>
+                <a:cs typeface="Segoe UI" pitchFamily="34" charset="-120"/>
+              </a:rPr>
+              <a:t>Champs réorganisés pour plus de clarté : référence et client sur une même ligne, téléphone et email sur une même ligne, adresse sur sa propre ligne, puis le reste des informations (chantier, dates, durée, type de bien) en dessous.</a:t>
+            </a:r>
+            <a:endParaRPr lang="en-US" sz="1100" dirty="0"/>
+          </a:p>
+        </p:txBody>
+      </p:sp>
+      <p:sp>
+        <p:nvSpPr>
+          <p:cNvPr id="21" name="Text 19"/>
           <p:cNvSpPr/>
           <p:nvPr/>
         </p:nvSpPr>
@@ -16231,7 +17597,7 @@
       </p:sp>
       <p:sp>
         <p:nvSpPr>
-          <p:cNvPr id="14" name="Text 12"/>
+          <p:cNvPr id="22" name="Text 20"/>
           <p:cNvSpPr/>
           <p:nvPr/>
         </p:nvSpPr>

--- a/docs/manager-recap/Recap-Koji-Manager.pptx
+++ b/docs/manager-recap/Recap-Koji-Manager.pptx
@@ -39,9 +39,10 @@
     <p:sldId id="287" r:id="rId33"/>
     <p:sldId id="288" r:id="rId34"/>
     <p:sldId id="289" r:id="rId35"/>
+    <p:sldId id="290" r:id="rId36"/>
   </p:sldIdLst>
   <p:notesMasterIdLst>
-    <p:notesMasterId r:id="rId36"/>
+    <p:notesMasterId r:id="rId37"/>
   </p:notesMasterIdLst>
   <p:sldSz cx="12191695" cy="6858000"/>
   <p:notesSz cx="6858000" cy="12191695"/>
@@ -2935,6 +2936,94 @@
             <a:fld id="{F7021451-1387-4CA6-816F-3879F97B5CBC}" type="slidenum">
               <a:rPr lang="en-US"/>
               <a:t>34</a:t>
+            </a:fld>
+            <a:endParaRPr lang="en-US"/>
+          </a:p>
+        </p:txBody>
+      </p:sp>
+    </p:spTree>
+    <p:extLst>
+      <p:ext uri="{BB962C8B-B14F-4D97-AF65-F5344CB8AC3E}">
+        <p14:creationId xmlns:p14="http://schemas.microsoft.com/office/powerpoint/2010/main" val="1024086991"/>
+      </p:ext>
+    </p:extLst>
+  </p:cSld>
+  <p:clrMapOvr>
+    <a:masterClrMapping/>
+  </p:clrMapOvr>
+</p:notes>
+</file>
+
+<file path=ppt/notesSlides/notesSlide35.xml><?xml version="1.0" encoding="utf-8"?>
+<p:notes xmlns:a="http://schemas.openxmlformats.org/drawingml/2006/main" xmlns:r="http://schemas.openxmlformats.org/officeDocument/2006/relationships" xmlns:p="http://schemas.openxmlformats.org/presentationml/2006/main">
+  <p:cSld>
+    <p:spTree>
+      <p:nvGrpSpPr>
+        <p:cNvPr id="1" name=""/>
+        <p:cNvGrpSpPr/>
+        <p:nvPr/>
+      </p:nvGrpSpPr>
+      <p:grpSpPr>
+        <a:xfrm>
+          <a:off x="0" y="0"/>
+          <a:ext cx="0" cy="0"/>
+          <a:chOff x="0" y="0"/>
+          <a:chExt cx="0" cy="0"/>
+        </a:xfrm>
+      </p:grpSpPr>
+      <p:sp>
+        <p:nvSpPr>
+          <p:cNvPr id="2" name="Slide Image Placeholder 1"/>
+          <p:cNvSpPr>
+            <a:spLocks noGrp="1" noRot="1" noChangeAspect="1"/>
+          </p:cNvSpPr>
+          <p:nvPr>
+            <p:ph type="sldImg"/>
+          </p:nvPr>
+        </p:nvSpPr>
+        <p:spPr/>
+      </p:sp>
+      <p:sp>
+        <p:nvSpPr>
+          <p:cNvPr id="3" name="Notes Placeholder 2"/>
+          <p:cNvSpPr>
+            <a:spLocks noGrp="1"/>
+          </p:cNvSpPr>
+          <p:nvPr>
+            <p:ph type="body" idx="1"/>
+          </p:nvPr>
+        </p:nvSpPr>
+        <p:spPr/>
+        <p:txBody>
+          <a:bodyPr/>
+          <a:lstStyle/>
+          <a:p>
+            <a:r>
+              <a:rPr lang="en-US" dirty="0"/>
+              <a:t/>
+            </a:r>
+            <a:endParaRPr lang="en-US" dirty="0"/>
+          </a:p>
+        </p:txBody>
+      </p:sp>
+      <p:sp>
+        <p:nvSpPr>
+          <p:cNvPr id="4" name="Slide Number Placeholder 3"/>
+          <p:cNvSpPr>
+            <a:spLocks noGrp="1"/>
+          </p:cNvSpPr>
+          <p:nvPr>
+            <p:ph type="sldNum" sz="quarter" idx="10"/>
+          </p:nvPr>
+        </p:nvSpPr>
+        <p:spPr/>
+        <p:txBody>
+          <a:bodyPr/>
+          <a:lstStyle/>
+          <a:p>
+            <a:fld id="{F7021451-1387-4CA6-816F-3879F97B5CBC}" type="slidenum">
+              <a:rPr lang="en-US"/>
+              <a:t>35</a:t>
             </a:fld>
             <a:endParaRPr lang="en-US"/>
           </a:p>
@@ -4192,7 +4281,7 @@
                 <a:ea typeface="Georgia" pitchFamily="34" charset="-122"/>
                 <a:cs typeface="Georgia" pitchFamily="34" charset="-120"/>
               </a:rPr>
-              <a:t>Signature &amp; portails</a:t>
+              <a:t>Notifications</a:t>
             </a:r>
             <a:endParaRPr lang="en-US" sz="2400" dirty="0"/>
           </a:p>
@@ -4278,7 +4367,7 @@
                 <a:ea typeface="Segoe UI" pitchFamily="34" charset="-122"/>
                 <a:cs typeface="Segoe UI" pitchFamily="34" charset="-120"/>
               </a:rPr>
-              <a:t>Espace client particulier</a:t>
+              <a:t>Menu déroulant sur la cloche</a:t>
             </a:r>
             <a:endParaRPr lang="en-US" sz="1400" dirty="0"/>
           </a:p>
@@ -4320,7 +4409,7 @@
                 <a:ea typeface="Segoe UI" pitchFamily="34" charset="-122"/>
                 <a:cs typeface="Segoe UI" pitchFamily="34" charset="-120"/>
               </a:rPr>
-              <a:t>Suivi de chantier, centre de notifications et réponses aux messages de l'entreprise, avec fil de discussion.</a:t>
+              <a:t>Affiche les 5 dernières notifications sans quitter la page en cours, avec un lien vers la liste complète.</a:t>
             </a:r>
             <a:endParaRPr lang="en-US" sz="1100" dirty="0"/>
           </a:p>
@@ -4406,7 +4495,7 @@
                 <a:ea typeface="Segoe UI" pitchFamily="34" charset="-122"/>
                 <a:cs typeface="Segoe UI" pitchFamily="34" charset="-120"/>
               </a:rPr>
-              <a:t>Espace ouvrier complet</a:t>
+              <a:t>Renvoi des identifiants client</a:t>
             </a:r>
             <a:endParaRPr lang="en-US" sz="1400" dirty="0"/>
           </a:p>
@@ -4448,7 +4537,7 @@
                 <a:ea typeface="Segoe UI" pitchFamily="34" charset="-122"/>
                 <a:cs typeface="Segoe UI" pitchFamily="34" charset="-120"/>
               </a:rPr>
-              <a:t>Accueil (chantiers actifs, tâches du jour), archives, notifications, réclamations, signalement de retard et alerte urgente avec choix du type d'incident.</a:t>
+              <a:t>Boutons pour renvoyer l'accès client par email ou WhatsApp, tableau d'informations avec icônes et boutons 'Copier'.</a:t>
             </a:r>
             <a:endParaRPr lang="en-US" sz="1100" dirty="0"/>
           </a:p>
@@ -4456,7 +4545,263 @@
       </p:sp>
       <p:sp>
         <p:nvSpPr>
-          <p:cNvPr id="13" name="Text 11"/>
+          <p:cNvPr id="13" name="Shape 11"/>
+          <p:cNvSpPr/>
+          <p:nvPr/>
+        </p:nvSpPr>
+        <p:spPr>
+          <a:xfrm>
+            <a:off x="640080" y="4160520"/>
+            <a:ext cx="10881360" cy="1097280"/>
+          </a:xfrm>
+          <a:prstGeom prst="roundRect">
+            <a:avLst>
+              <a:gd name="adj" fmla="val 5000"/>
+            </a:avLst>
+          </a:prstGeom>
+          <a:solidFill>
+            <a:srgbClr val="FFFFFF"/>
+          </a:solidFill>
+          <a:ln w="12700">
+            <a:solidFill>
+              <a:srgbClr val="E4DCCB"/>
+            </a:solidFill>
+            <a:prstDash val="solid"/>
+          </a:ln>
+        </p:spPr>
+      </p:sp>
+      <p:sp>
+        <p:nvSpPr>
+          <p:cNvPr id="14" name="Shape 12"/>
+          <p:cNvSpPr/>
+          <p:nvPr/>
+        </p:nvSpPr>
+        <p:spPr>
+          <a:xfrm>
+            <a:off x="640080" y="4160520"/>
+            <a:ext cx="54864" cy="1097280"/>
+          </a:xfrm>
+          <a:prstGeom prst="rect">
+            <a:avLst/>
+          </a:prstGeom>
+          <a:solidFill>
+            <a:srgbClr val="1D6FE0"/>
+          </a:solidFill>
+          <a:ln/>
+        </p:spPr>
+      </p:sp>
+      <p:sp>
+        <p:nvSpPr>
+          <p:cNvPr id="15" name="Text 13"/>
+          <p:cNvSpPr/>
+          <p:nvPr/>
+        </p:nvSpPr>
+        <p:spPr>
+          <a:xfrm>
+            <a:off x="914400" y="4270248"/>
+            <a:ext cx="10332720" cy="365760"/>
+          </a:xfrm>
+          <a:prstGeom prst="rect">
+            <a:avLst/>
+          </a:prstGeom>
+          <a:noFill/>
+          <a:ln/>
+        </p:spPr>
+        <p:txBody>
+          <a:bodyPr wrap="square" rtlCol="0" anchor="ctr"/>
+          <a:lstStyle/>
+          <a:p>
+            <a:pPr indent="0" marL="0">
+              <a:buNone/>
+            </a:pPr>
+            <a:r>
+              <a:rPr lang="en-US" sz="1400" b="1" dirty="0">
+                <a:solidFill>
+                  <a:srgbClr val="1B1F3B"/>
+                </a:solidFill>
+                <a:latin typeface="Segoe UI" pitchFamily="34" charset="0"/>
+                <a:ea typeface="Segoe UI" pitchFamily="34" charset="-122"/>
+                <a:cs typeface="Segoe UI" pitchFamily="34" charset="-120"/>
+              </a:rPr>
+              <a:t>Fiche détail centrée et redessinée</a:t>
+            </a:r>
+            <a:endParaRPr lang="en-US" sz="1400" dirty="0"/>
+          </a:p>
+        </p:txBody>
+      </p:sp>
+      <p:sp>
+        <p:nvSpPr>
+          <p:cNvPr id="16" name="Text 14"/>
+          <p:cNvSpPr/>
+          <p:nvPr/>
+        </p:nvSpPr>
+        <p:spPr>
+          <a:xfrm>
+            <a:off x="914400" y="4617720"/>
+            <a:ext cx="10332720" cy="594360"/>
+          </a:xfrm>
+          <a:prstGeom prst="rect">
+            <a:avLst/>
+          </a:prstGeom>
+          <a:noFill/>
+          <a:ln/>
+        </p:spPr>
+        <p:txBody>
+          <a:bodyPr wrap="square" rtlCol="0" anchor="ctr"/>
+          <a:lstStyle/>
+          <a:p>
+            <a:pPr indent="0" marL="0">
+              <a:lnSpc>
+                <a:spcPts val="1400"/>
+              </a:lnSpc>
+              <a:buNone/>
+            </a:pPr>
+            <a:r>
+              <a:rPr lang="en-US" sz="1100" dirty="0">
+                <a:solidFill>
+                  <a:srgbClr val="8A7C68"/>
+                </a:solidFill>
+                <a:latin typeface="Segoe UI" pitchFamily="34" charset="0"/>
+                <a:ea typeface="Segoe UI" pitchFamily="34" charset="-122"/>
+                <a:cs typeface="Segoe UI" pitchFamily="34" charset="-120"/>
+              </a:rPr>
+              <a:t>La fiche de détail d'une notification est centrée sur la page, avec un tableau d'informations clarifié.</a:t>
+            </a:r>
+            <a:endParaRPr lang="en-US" sz="1100" dirty="0"/>
+          </a:p>
+        </p:txBody>
+      </p:sp>
+      <p:sp>
+        <p:nvSpPr>
+          <p:cNvPr id="17" name="Shape 15"/>
+          <p:cNvSpPr/>
+          <p:nvPr/>
+        </p:nvSpPr>
+        <p:spPr>
+          <a:xfrm>
+            <a:off x="640080" y="5394960"/>
+            <a:ext cx="10881360" cy="1097280"/>
+          </a:xfrm>
+          <a:prstGeom prst="roundRect">
+            <a:avLst>
+              <a:gd name="adj" fmla="val 5000"/>
+            </a:avLst>
+          </a:prstGeom>
+          <a:solidFill>
+            <a:srgbClr val="FFFFFF"/>
+          </a:solidFill>
+          <a:ln w="12700">
+            <a:solidFill>
+              <a:srgbClr val="E4DCCB"/>
+            </a:solidFill>
+            <a:prstDash val="solid"/>
+          </a:ln>
+        </p:spPr>
+      </p:sp>
+      <p:sp>
+        <p:nvSpPr>
+          <p:cNvPr id="18" name="Shape 16"/>
+          <p:cNvSpPr/>
+          <p:nvPr/>
+        </p:nvSpPr>
+        <p:spPr>
+          <a:xfrm>
+            <a:off x="640080" y="5394960"/>
+            <a:ext cx="54864" cy="1097280"/>
+          </a:xfrm>
+          <a:prstGeom prst="rect">
+            <a:avLst/>
+          </a:prstGeom>
+          <a:solidFill>
+            <a:srgbClr val="1D6FE0"/>
+          </a:solidFill>
+          <a:ln/>
+        </p:spPr>
+      </p:sp>
+      <p:sp>
+        <p:nvSpPr>
+          <p:cNvPr id="19" name="Text 17"/>
+          <p:cNvSpPr/>
+          <p:nvPr/>
+        </p:nvSpPr>
+        <p:spPr>
+          <a:xfrm>
+            <a:off x="914400" y="5504688"/>
+            <a:ext cx="10332720" cy="365760"/>
+          </a:xfrm>
+          <a:prstGeom prst="rect">
+            <a:avLst/>
+          </a:prstGeom>
+          <a:noFill/>
+          <a:ln/>
+        </p:spPr>
+        <p:txBody>
+          <a:bodyPr wrap="square" rtlCol="0" anchor="ctr"/>
+          <a:lstStyle/>
+          <a:p>
+            <a:pPr indent="0" marL="0">
+              <a:buNone/>
+            </a:pPr>
+            <a:r>
+              <a:rPr lang="en-US" sz="1400" b="1" dirty="0">
+                <a:solidFill>
+                  <a:srgbClr val="1B1F3B"/>
+                </a:solidFill>
+                <a:latin typeface="Segoe UI" pitchFamily="34" charset="0"/>
+                <a:ea typeface="Segoe UI" pitchFamily="34" charset="-122"/>
+                <a:cs typeface="Segoe UI" pitchFamily="34" charset="-120"/>
+              </a:rPr>
+              <a:t>Correction de la route d'ouverture</a:t>
+            </a:r>
+            <a:endParaRPr lang="en-US" sz="1400" dirty="0"/>
+          </a:p>
+        </p:txBody>
+      </p:sp>
+      <p:sp>
+        <p:nvSpPr>
+          <p:cNvPr id="20" name="Text 18"/>
+          <p:cNvSpPr/>
+          <p:nvPr/>
+        </p:nvSpPr>
+        <p:spPr>
+          <a:xfrm>
+            <a:off x="914400" y="5852160"/>
+            <a:ext cx="10332720" cy="594360"/>
+          </a:xfrm>
+          <a:prstGeom prst="rect">
+            <a:avLst/>
+          </a:prstGeom>
+          <a:noFill/>
+          <a:ln/>
+        </p:spPr>
+        <p:txBody>
+          <a:bodyPr wrap="square" rtlCol="0" anchor="ctr"/>
+          <a:lstStyle/>
+          <a:p>
+            <a:pPr indent="0" marL="0">
+              <a:lnSpc>
+                <a:spcPts val="1400"/>
+              </a:lnSpc>
+              <a:buNone/>
+            </a:pPr>
+            <a:r>
+              <a:rPr lang="en-US" sz="1100" dirty="0">
+                <a:solidFill>
+                  <a:srgbClr val="8A7C68"/>
+                </a:solidFill>
+                <a:latin typeface="Segoe UI" pitchFamily="34" charset="0"/>
+                <a:ea typeface="Segoe UI" pitchFamily="34" charset="-122"/>
+                <a:cs typeface="Segoe UI" pitchFamily="34" charset="-120"/>
+              </a:rPr>
+              <a:t>Cliquer sur une notification depuis le menu déroulant ouvrait le devis lié au lieu de sa fiche de détail — corrigé, avec icône par type, heure relative et point 'non lu'.</a:t>
+            </a:r>
+            <a:endParaRPr lang="en-US" sz="1100" dirty="0"/>
+          </a:p>
+        </p:txBody>
+      </p:sp>
+      <p:sp>
+        <p:nvSpPr>
+          <p:cNvPr id="21" name="Text 19"/>
           <p:cNvSpPr/>
           <p:nvPr/>
         </p:nvSpPr>
@@ -4495,7 +4840,7 @@
       </p:sp>
       <p:sp>
         <p:nvSpPr>
-          <p:cNvPr id="14" name="Text 12"/>
+          <p:cNvPr id="22" name="Text 20"/>
           <p:cNvSpPr/>
           <p:nvPr/>
         </p:nvSpPr>
@@ -4658,7 +5003,7 @@
                 <a:ea typeface="Georgia" pitchFamily="34" charset="-122"/>
                 <a:cs typeface="Georgia" pitchFamily="34" charset="-120"/>
               </a:rPr>
-              <a:t>Accueil &amp; stabilité</a:t>
+              <a:t>Signature &amp; portails</a:t>
             </a:r>
             <a:endParaRPr lang="en-US" sz="2400" dirty="0"/>
           </a:p>
@@ -4744,7 +5089,7 @@
                 <a:ea typeface="Segoe UI" pitchFamily="34" charset="-122"/>
                 <a:cs typeface="Segoe UI" pitchFamily="34" charset="-120"/>
               </a:rPr>
-              <a:t>Refonte de la page d'accueil</a:t>
+              <a:t>Espace client particulier</a:t>
             </a:r>
             <a:endParaRPr lang="en-US" sz="1400" dirty="0"/>
           </a:p>
@@ -4786,7 +5131,7 @@
                 <a:ea typeface="Segoe UI" pitchFamily="34" charset="-122"/>
                 <a:cs typeface="Segoe UI" pitchFamily="34" charset="-120"/>
               </a:rPr>
-              <a:t>Message de bienvenue personnalisé ('Bonjour [Nom]'), ajout rapide (tâche/RDV/dépense/note), alertes urgentes, reprise d'un devis brouillon en un clic.</a:t>
+              <a:t>Suivi de chantier, centre de notifications et réponses aux messages de l'entreprise, avec fil de discussion.</a:t>
             </a:r>
             <a:endParaRPr lang="en-US" sz="1100" dirty="0"/>
           </a:p>
@@ -4872,7 +5217,7 @@
                 <a:ea typeface="Segoe UI" pitchFamily="34" charset="-122"/>
                 <a:cs typeface="Segoe UI" pitchFamily="34" charset="-120"/>
               </a:rPr>
-              <a:t>Compatibilité Safari / iOS</a:t>
+              <a:t>Espace ouvrier complet</a:t>
             </a:r>
             <a:endParaRPr lang="en-US" sz="1400" dirty="0"/>
           </a:p>
@@ -4914,7 +5259,7 @@
                 <a:ea typeface="Segoe UI" pitchFamily="34" charset="-122"/>
                 <a:cs typeface="Segoe UI" pitchFamily="34" charset="-120"/>
               </a:rPr>
-              <a:t>La barre d'adresse de Safari mobile masquait parfois le bas de l'écran (boutons inaccessibles) — corrigé sur l'ensemble de l'application.</a:t>
+              <a:t>Accueil (chantiers actifs, tâches du jour), archives, notifications, réclamations, signalement de retard et alerte urgente avec choix du type d'incident.</a:t>
             </a:r>
             <a:endParaRPr lang="en-US" sz="1100" dirty="0"/>
           </a:p>
@@ -4922,135 +5267,7 @@
       </p:sp>
       <p:sp>
         <p:nvSpPr>
-          <p:cNvPr id="13" name="Shape 11"/>
-          <p:cNvSpPr/>
-          <p:nvPr/>
-        </p:nvSpPr>
-        <p:spPr>
-          <a:xfrm>
-            <a:off x="640080" y="4160520"/>
-            <a:ext cx="10881360" cy="1097280"/>
-          </a:xfrm>
-          <a:prstGeom prst="roundRect">
-            <a:avLst>
-              <a:gd name="adj" fmla="val 5000"/>
-            </a:avLst>
-          </a:prstGeom>
-          <a:solidFill>
-            <a:srgbClr val="FFFFFF"/>
-          </a:solidFill>
-          <a:ln w="12700">
-            <a:solidFill>
-              <a:srgbClr val="E4DCCB"/>
-            </a:solidFill>
-            <a:prstDash val="solid"/>
-          </a:ln>
-        </p:spPr>
-      </p:sp>
-      <p:sp>
-        <p:nvSpPr>
-          <p:cNvPr id="14" name="Shape 12"/>
-          <p:cNvSpPr/>
-          <p:nvPr/>
-        </p:nvSpPr>
-        <p:spPr>
-          <a:xfrm>
-            <a:off x="640080" y="4160520"/>
-            <a:ext cx="54864" cy="1097280"/>
-          </a:xfrm>
-          <a:prstGeom prst="rect">
-            <a:avLst/>
-          </a:prstGeom>
-          <a:solidFill>
-            <a:srgbClr val="1D6FE0"/>
-          </a:solidFill>
-          <a:ln/>
-        </p:spPr>
-      </p:sp>
-      <p:sp>
-        <p:nvSpPr>
-          <p:cNvPr id="15" name="Text 13"/>
-          <p:cNvSpPr/>
-          <p:nvPr/>
-        </p:nvSpPr>
-        <p:spPr>
-          <a:xfrm>
-            <a:off x="914400" y="4270248"/>
-            <a:ext cx="10332720" cy="365760"/>
-          </a:xfrm>
-          <a:prstGeom prst="rect">
-            <a:avLst/>
-          </a:prstGeom>
-          <a:noFill/>
-          <a:ln/>
-        </p:spPr>
-        <p:txBody>
-          <a:bodyPr wrap="square" rtlCol="0" anchor="ctr"/>
-          <a:lstStyle/>
-          <a:p>
-            <a:pPr indent="0" marL="0">
-              <a:buNone/>
-            </a:pPr>
-            <a:r>
-              <a:rPr lang="en-US" sz="1400" b="1" dirty="0">
-                <a:solidFill>
-                  <a:srgbClr val="1B1F3B"/>
-                </a:solidFill>
-                <a:latin typeface="Segoe UI" pitchFamily="34" charset="0"/>
-                <a:ea typeface="Segoe UI" pitchFamily="34" charset="-122"/>
-                <a:cs typeface="Segoe UI" pitchFamily="34" charset="-120"/>
-              </a:rPr>
-              <a:t>Cohérence visuelle</a:t>
-            </a:r>
-            <a:endParaRPr lang="en-US" sz="1400" dirty="0"/>
-          </a:p>
-        </p:txBody>
-      </p:sp>
-      <p:sp>
-        <p:nvSpPr>
-          <p:cNvPr id="16" name="Text 14"/>
-          <p:cNvSpPr/>
-          <p:nvPr/>
-        </p:nvSpPr>
-        <p:spPr>
-          <a:xfrm>
-            <a:off x="914400" y="4617720"/>
-            <a:ext cx="10332720" cy="594360"/>
-          </a:xfrm>
-          <a:prstGeom prst="rect">
-            <a:avLst/>
-          </a:prstGeom>
-          <a:noFill/>
-          <a:ln/>
-        </p:spPr>
-        <p:txBody>
-          <a:bodyPr wrap="square" rtlCol="0" anchor="ctr"/>
-          <a:lstStyle/>
-          <a:p>
-            <a:pPr indent="0" marL="0">
-              <a:lnSpc>
-                <a:spcPts val="1400"/>
-              </a:lnSpc>
-              <a:buNone/>
-            </a:pPr>
-            <a:r>
-              <a:rPr lang="en-US" sz="1100" dirty="0">
-                <a:solidFill>
-                  <a:srgbClr val="8A7C68"/>
-                </a:solidFill>
-                <a:latin typeface="Segoe UI" pitchFamily="34" charset="0"/>
-                <a:ea typeface="Segoe UI" pitchFamily="34" charset="-122"/>
-                <a:cs typeface="Segoe UI" pitchFamily="34" charset="-120"/>
-              </a:rPr>
-              <a:t>Logo recentré sur toutes les pages, sélecteur de langue simplifié (5 langues, sans drapeaux), adresse d'entreprise simplifiée en une ligne.</a:t>
-            </a:r>
-            <a:endParaRPr lang="en-US" sz="1100" dirty="0"/>
-          </a:p>
-        </p:txBody>
-      </p:sp>
-      <p:sp>
-        <p:nvSpPr>
-          <p:cNvPr id="17" name="Text 15"/>
+          <p:cNvPr id="13" name="Text 11"/>
           <p:cNvSpPr/>
           <p:nvPr/>
         </p:nvSpPr>
@@ -5089,7 +5306,7 @@
       </p:sp>
       <p:sp>
         <p:nvSpPr>
-          <p:cNvPr id="18" name="Text 16"/>
+          <p:cNvPr id="14" name="Text 12"/>
           <p:cNvSpPr/>
           <p:nvPr/>
         </p:nvSpPr>
@@ -5252,7 +5469,7 @@
                 <a:ea typeface="Georgia" pitchFamily="34" charset="-122"/>
                 <a:cs typeface="Georgia" pitchFamily="34" charset="-120"/>
               </a:rPr>
-              <a:t>Rapports d'intervention</a:t>
+              <a:t>Accueil &amp; stabilité</a:t>
             </a:r>
             <a:endParaRPr lang="en-US" sz="2400" dirty="0"/>
           </a:p>
@@ -5338,7 +5555,7 @@
                 <a:ea typeface="Segoe UI" pitchFamily="34" charset="-122"/>
                 <a:cs typeface="Segoe UI" pitchFamily="34" charset="-120"/>
               </a:rPr>
-              <a:t>Nouveau type "Intervention" dans l'ajout rapide</a:t>
+              <a:t>Refonte de la page d'accueil</a:t>
             </a:r>
             <a:endParaRPr lang="en-US" sz="1400" dirty="0"/>
           </a:p>
@@ -5380,7 +5597,7 @@
                 <a:ea typeface="Segoe UI" pitchFamily="34" charset="-122"/>
                 <a:cs typeface="Segoe UI" pitchFamily="34" charset="-120"/>
               </a:rPr>
-              <a:t>Depuis la page d'accueil, un cinquième choix 'Intervention' ouvre un formulaire dédié en plein écran, en plus des types existants Tâche/RDV/Dépense/Note.</a:t>
+              <a:t>Message de bienvenue personnalisé ('Bonjour [Nom]'), ajout rapide (tâche/RDV/dépense/note), alertes urgentes, reprise d'un devis brouillon en un clic.</a:t>
             </a:r>
             <a:endParaRPr lang="en-US" sz="1100" dirty="0"/>
           </a:p>
@@ -5466,7 +5683,7 @@
                 <a:ea typeface="Segoe UI" pitchFamily="34" charset="-122"/>
                 <a:cs typeface="Segoe UI" pitchFamily="34" charset="-120"/>
               </a:rPr>
-              <a:t>Formulaire de rapport d'intervention</a:t>
+              <a:t>Compatibilité Safari / iOS</a:t>
             </a:r>
             <a:endParaRPr lang="en-US" sz="1400" dirty="0"/>
           </a:p>
@@ -5508,7 +5725,7 @@
                 <a:ea typeface="Segoe UI" pitchFamily="34" charset="-122"/>
                 <a:cs typeface="Segoe UI" pitchFamily="34" charset="-120"/>
               </a:rPr>
-              <a:t>En-tête avec le logo et les coordonnées de l'entreprise (repris automatiquement du profil), puis Client, Site, Date, Entreprise, Équipement, Constat, Analyse, Préconisations et Signature, sur le modèle d'un rapport d'intervention technique classique.</a:t>
+              <a:t>La barre d'adresse de Safari mobile masquait parfois le bas de l'écran (boutons inaccessibles) — corrigé sur l'ensemble de l'application.</a:t>
             </a:r>
             <a:endParaRPr lang="en-US" sz="1100" dirty="0"/>
           </a:p>
@@ -5594,7 +5811,7 @@
                 <a:ea typeface="Segoe UI" pitchFamily="34" charset="-122"/>
                 <a:cs typeface="Segoe UI" pitchFamily="34" charset="-120"/>
               </a:rPr>
-              <a:t>Aperçu avant génération</a:t>
+              <a:t>Cohérence visuelle</a:t>
             </a:r>
             <a:endParaRPr lang="en-US" sz="1400" dirty="0"/>
           </a:p>
@@ -5636,7 +5853,7 @@
                 <a:ea typeface="Segoe UI" pitchFamily="34" charset="-122"/>
                 <a:cs typeface="Segoe UI" pitchFamily="34" charset="-120"/>
               </a:rPr>
-              <a:t>Avant de créer définitivement le rapport, un aperçu fidèle au document final (en-tête, sections, signature) permet de vérifier le contenu et de revenir le modifier.</a:t>
+              <a:t>Logo recentré sur toutes les pages, sélecteur de langue simplifié (5 langues, sans drapeaux), adresse d'entreprise simplifiée en une ligne.</a:t>
             </a:r>
             <a:endParaRPr lang="en-US" sz="1100" dirty="0"/>
           </a:p>
@@ -5644,135 +5861,7 @@
       </p:sp>
       <p:sp>
         <p:nvSpPr>
-          <p:cNvPr id="17" name="Shape 15"/>
-          <p:cNvSpPr/>
-          <p:nvPr/>
-        </p:nvSpPr>
-        <p:spPr>
-          <a:xfrm>
-            <a:off x="640080" y="5394960"/>
-            <a:ext cx="10881360" cy="1097280"/>
-          </a:xfrm>
-          <a:prstGeom prst="roundRect">
-            <a:avLst>
-              <a:gd name="adj" fmla="val 5000"/>
-            </a:avLst>
-          </a:prstGeom>
-          <a:solidFill>
-            <a:srgbClr val="FFFFFF"/>
-          </a:solidFill>
-          <a:ln w="12700">
-            <a:solidFill>
-              <a:srgbClr val="E4DCCB"/>
-            </a:solidFill>
-            <a:prstDash val="solid"/>
-          </a:ln>
-        </p:spPr>
-      </p:sp>
-      <p:sp>
-        <p:nvSpPr>
-          <p:cNvPr id="18" name="Shape 16"/>
-          <p:cNvSpPr/>
-          <p:nvPr/>
-        </p:nvSpPr>
-        <p:spPr>
-          <a:xfrm>
-            <a:off x="640080" y="5394960"/>
-            <a:ext cx="54864" cy="1097280"/>
-          </a:xfrm>
-          <a:prstGeom prst="rect">
-            <a:avLst/>
-          </a:prstGeom>
-          <a:solidFill>
-            <a:srgbClr val="1D6FE0"/>
-          </a:solidFill>
-          <a:ln/>
-        </p:spPr>
-      </p:sp>
-      <p:sp>
-        <p:nvSpPr>
-          <p:cNvPr id="19" name="Text 17"/>
-          <p:cNvSpPr/>
-          <p:nvPr/>
-        </p:nvSpPr>
-        <p:spPr>
-          <a:xfrm>
-            <a:off x="914400" y="5504688"/>
-            <a:ext cx="10332720" cy="365760"/>
-          </a:xfrm>
-          <a:prstGeom prst="rect">
-            <a:avLst/>
-          </a:prstGeom>
-          <a:noFill/>
-          <a:ln/>
-        </p:spPr>
-        <p:txBody>
-          <a:bodyPr wrap="square" rtlCol="0" anchor="ctr"/>
-          <a:lstStyle/>
-          <a:p>
-            <a:pPr indent="0" marL="0">
-              <a:buNone/>
-            </a:pPr>
-            <a:r>
-              <a:rPr lang="en-US" sz="1400" b="1" dirty="0">
-                <a:solidFill>
-                  <a:srgbClr val="1B1F3B"/>
-                </a:solidFill>
-                <a:latin typeface="Segoe UI" pitchFamily="34" charset="0"/>
-                <a:ea typeface="Segoe UI" pitchFamily="34" charset="-122"/>
-                <a:cs typeface="Segoe UI" pitchFamily="34" charset="-120"/>
-              </a:rPr>
-              <a:t>Suivi et devenir de chaque intervention</a:t>
-            </a:r>
-            <a:endParaRPr lang="en-US" sz="1400" dirty="0"/>
-          </a:p>
-        </p:txBody>
-      </p:sp>
-      <p:sp>
-        <p:nvSpPr>
-          <p:cNvPr id="20" name="Text 18"/>
-          <p:cNvSpPr/>
-          <p:nvPr/>
-        </p:nvSpPr>
-        <p:spPr>
-          <a:xfrm>
-            <a:off x="914400" y="5852160"/>
-            <a:ext cx="10332720" cy="594360"/>
-          </a:xfrm>
-          <a:prstGeom prst="rect">
-            <a:avLst/>
-          </a:prstGeom>
-          <a:noFill/>
-          <a:ln/>
-        </p:spPr>
-        <p:txBody>
-          <a:bodyPr wrap="square" rtlCol="0" anchor="ctr"/>
-          <a:lstStyle/>
-          <a:p>
-            <a:pPr indent="0" marL="0">
-              <a:lnSpc>
-                <a:spcPts val="1400"/>
-              </a:lnSpc>
-              <a:buNone/>
-            </a:pPr>
-            <a:r>
-              <a:rPr lang="en-US" sz="1100" dirty="0">
-                <a:solidFill>
-                  <a:srgbClr val="8A7C68"/>
-                </a:solidFill>
-                <a:latin typeface="Segoe UI" pitchFamily="34" charset="0"/>
-                <a:ea typeface="Segoe UI" pitchFamily="34" charset="-122"/>
-                <a:cs typeface="Segoe UI" pitchFamily="34" charset="-120"/>
-              </a:rPr>
-              <a:t>Depuis la fiche d'une intervention : la lier à un chantier existant, la garder en attente pour un futur devis, l'archiver, ou créer directement une facture — avec un badge de statut visible dans la liste.</a:t>
-            </a:r>
-            <a:endParaRPr lang="en-US" sz="1100" dirty="0"/>
-          </a:p>
-        </p:txBody>
-      </p:sp>
-      <p:sp>
-        <p:nvSpPr>
-          <p:cNvPr id="21" name="Text 19"/>
+          <p:cNvPr id="17" name="Text 15"/>
           <p:cNvSpPr/>
           <p:nvPr/>
         </p:nvSpPr>
@@ -5811,7 +5900,7 @@
       </p:sp>
       <p:sp>
         <p:nvSpPr>
-          <p:cNvPr id="22" name="Text 20"/>
+          <p:cNvPr id="18" name="Text 16"/>
           <p:cNvSpPr/>
           <p:nvPr/>
         </p:nvSpPr>
@@ -5974,7 +6063,7 @@
                 <a:ea typeface="Georgia" pitchFamily="34" charset="-122"/>
                 <a:cs typeface="Georgia" pitchFamily="34" charset="-120"/>
               </a:rPr>
-              <a:t>Rapports d'intervention (suite)</a:t>
+              <a:t>Rapports d'intervention</a:t>
             </a:r>
             <a:endParaRPr lang="en-US" sz="2400" dirty="0"/>
           </a:p>
@@ -6060,7 +6149,7 @@
                 <a:ea typeface="Segoe UI" pitchFamily="34" charset="-122"/>
                 <a:cs typeface="Segoe UI" pitchFamily="34" charset="-120"/>
               </a:rPr>
-              <a:t>En-tête d'entreprise entièrement modifiable</a:t>
+              <a:t>Nouveau type "Intervention" dans l'ajout rapide</a:t>
             </a:r>
             <a:endParaRPr lang="en-US" sz="1400" dirty="0"/>
           </a:p>
@@ -6102,7 +6191,7 @@
                 <a:ea typeface="Segoe UI" pitchFamily="34" charset="-122"/>
                 <a:cs typeface="Segoe UI" pitchFamily="34" charset="-120"/>
               </a:rPr>
-              <a:t>Nom, adresse, code postal, ville, email, téléphone et SIRET sont pré-remplis depuis le profil mais modifiables pour chaque rapport ; le logo peut être celui du profil ou en importer un autre à la volée, sans toucher au profil principal.</a:t>
+              <a:t>Depuis la page d'accueil, un cinquième choix 'Intervention' ouvre un formulaire dédié en plein écran, en plus des types existants Tâche/RDV/Dépense/Note.</a:t>
             </a:r>
             <a:endParaRPr lang="en-US" sz="1100" dirty="0"/>
           </a:p>
@@ -6188,7 +6277,7 @@
                 <a:ea typeface="Segoe UI" pitchFamily="34" charset="-122"/>
                 <a:cs typeface="Segoe UI" pitchFamily="34" charset="-120"/>
               </a:rPr>
-              <a:t>Section Interventions sur l'accueil</a:t>
+              <a:t>Formulaire de rapport d'intervention</a:t>
             </a:r>
             <a:endParaRPr lang="en-US" sz="1400" dirty="0"/>
           </a:p>
@@ -6230,7 +6319,7 @@
                 <a:ea typeface="Segoe UI" pitchFamily="34" charset="-122"/>
                 <a:cs typeface="Segoe UI" pitchFamily="34" charset="-120"/>
               </a:rPr>
-              <a:t>Nouvelle section sur la page d'accueil, sous 'Devis en cours', listant les interventions avec leur statut (À faire / En cours / Terminée), et les actions rapides archiver/supprimer.</a:t>
+              <a:t>En-tête avec le logo et les coordonnées de l'entreprise (repris automatiquement du profil), puis Client, Site, Date, Entreprise, Équipement, Constat, Analyse, Préconisations et Signature, sur le modèle d'un rapport d'intervention technique classique.</a:t>
             </a:r>
             <a:endParaRPr lang="en-US" sz="1100" dirty="0"/>
           </a:p>
@@ -6316,7 +6405,7 @@
                 <a:ea typeface="Segoe UI" pitchFamily="34" charset="-122"/>
                 <a:cs typeface="Segoe UI" pitchFamily="34" charset="-120"/>
               </a:rPr>
-              <a:t>Passage direct dans 'À faire maintenant'</a:t>
+              <a:t>Aperçu avant génération</a:t>
             </a:r>
             <a:endParaRPr lang="en-US" sz="1400" dirty="0"/>
           </a:p>
@@ -6358,7 +6447,7 @@
                 <a:ea typeface="Segoe UI" pitchFamily="34" charset="-122"/>
                 <a:cs typeface="Segoe UI" pitchFamily="34" charset="-120"/>
               </a:rPr>
-              <a:t>Une intervention du jour peut être déplacée en un clic vers la liste 'À faire maintenant' de l'accueil, sans dupliquer la fiche si elle y est déjà.</a:t>
+              <a:t>Avant de créer définitivement le rapport, un aperçu fidèle au document final (en-tête, sections, signature) permet de vérifier le contenu et de revenir le modifier.</a:t>
             </a:r>
             <a:endParaRPr lang="en-US" sz="1100" dirty="0"/>
           </a:p>
@@ -6444,7 +6533,7 @@
                 <a:ea typeface="Segoe UI" pitchFamily="34" charset="-122"/>
                 <a:cs typeface="Segoe UI" pitchFamily="34" charset="-120"/>
               </a:rPr>
-              <a:t>Mise en page de l'en-tête revue</a:t>
+              <a:t>Suivi et devenir de chaque intervention</a:t>
             </a:r>
             <a:endParaRPr lang="en-US" sz="1400" dirty="0"/>
           </a:p>
@@ -6486,7 +6575,7 @@
                 <a:ea typeface="Segoe UI" pitchFamily="34" charset="-122"/>
                 <a:cs typeface="Segoe UI" pitchFamily="34" charset="-120"/>
               </a:rPr>
-              <a:t>'RAPPORT D'INTERVENTION', le numéro et la date de création sont désormais mis en avant en haut à droite, à côté des informations de l'entreprise, comme sur les devis et factures.</a:t>
+              <a:t>Depuis la fiche d'une intervention : la lier à un chantier existant, la garder en attente pour un futur devis, l'archiver, ou créer directement une facture — avec un badge de statut visible dans la liste.</a:t>
             </a:r>
             <a:endParaRPr lang="en-US" sz="1100" dirty="0"/>
           </a:p>
@@ -6782,7 +6871,7 @@
                 <a:ea typeface="Segoe UI" pitchFamily="34" charset="-122"/>
                 <a:cs typeface="Segoe UI" pitchFamily="34" charset="-120"/>
               </a:rPr>
-              <a:t>Signature réutilisable depuis le profil</a:t>
+              <a:t>En-tête d'entreprise entièrement modifiable</a:t>
             </a:r>
             <a:endParaRPr lang="en-US" sz="1400" dirty="0"/>
           </a:p>
@@ -6824,7 +6913,7 @@
                 <a:ea typeface="Segoe UI" pitchFamily="34" charset="-122"/>
                 <a:cs typeface="Segoe UI" pitchFamily="34" charset="-120"/>
               </a:rPr>
-              <a:t>La signature déjà enregistrée dans 'Ma Signature' (dessinée ou importée) peut être ajoutée en un clic au rapport, affichée en bas à droite du document comme une vraie signature.</a:t>
+              <a:t>Nom, adresse, code postal, ville, email, téléphone et SIRET sont pré-remplis depuis le profil mais modifiables pour chaque rapport ; le logo peut être celui du profil ou en importer un autre à la volée, sans toucher au profil principal.</a:t>
             </a:r>
             <a:endParaRPr lang="en-US" sz="1100" dirty="0"/>
           </a:p>
@@ -6832,7 +6921,391 @@
       </p:sp>
       <p:sp>
         <p:nvSpPr>
-          <p:cNvPr id="9" name="Text 7"/>
+          <p:cNvPr id="9" name="Shape 7"/>
+          <p:cNvSpPr/>
+          <p:nvPr/>
+        </p:nvSpPr>
+        <p:spPr>
+          <a:xfrm>
+            <a:off x="640080" y="2926080"/>
+            <a:ext cx="10881360" cy="1097280"/>
+          </a:xfrm>
+          <a:prstGeom prst="roundRect">
+            <a:avLst>
+              <a:gd name="adj" fmla="val 5000"/>
+            </a:avLst>
+          </a:prstGeom>
+          <a:solidFill>
+            <a:srgbClr val="FFFFFF"/>
+          </a:solidFill>
+          <a:ln w="12700">
+            <a:solidFill>
+              <a:srgbClr val="E4DCCB"/>
+            </a:solidFill>
+            <a:prstDash val="solid"/>
+          </a:ln>
+        </p:spPr>
+      </p:sp>
+      <p:sp>
+        <p:nvSpPr>
+          <p:cNvPr id="10" name="Shape 8"/>
+          <p:cNvSpPr/>
+          <p:nvPr/>
+        </p:nvSpPr>
+        <p:spPr>
+          <a:xfrm>
+            <a:off x="640080" y="2926080"/>
+            <a:ext cx="54864" cy="1097280"/>
+          </a:xfrm>
+          <a:prstGeom prst="rect">
+            <a:avLst/>
+          </a:prstGeom>
+          <a:solidFill>
+            <a:srgbClr val="1D6FE0"/>
+          </a:solidFill>
+          <a:ln/>
+        </p:spPr>
+      </p:sp>
+      <p:sp>
+        <p:nvSpPr>
+          <p:cNvPr id="11" name="Text 9"/>
+          <p:cNvSpPr/>
+          <p:nvPr/>
+        </p:nvSpPr>
+        <p:spPr>
+          <a:xfrm>
+            <a:off x="914400" y="3035808"/>
+            <a:ext cx="10332720" cy="365760"/>
+          </a:xfrm>
+          <a:prstGeom prst="rect">
+            <a:avLst/>
+          </a:prstGeom>
+          <a:noFill/>
+          <a:ln/>
+        </p:spPr>
+        <p:txBody>
+          <a:bodyPr wrap="square" rtlCol="0" anchor="ctr"/>
+          <a:lstStyle/>
+          <a:p>
+            <a:pPr indent="0" marL="0">
+              <a:buNone/>
+            </a:pPr>
+            <a:r>
+              <a:rPr lang="en-US" sz="1400" b="1" dirty="0">
+                <a:solidFill>
+                  <a:srgbClr val="1B1F3B"/>
+                </a:solidFill>
+                <a:latin typeface="Segoe UI" pitchFamily="34" charset="0"/>
+                <a:ea typeface="Segoe UI" pitchFamily="34" charset="-122"/>
+                <a:cs typeface="Segoe UI" pitchFamily="34" charset="-120"/>
+              </a:rPr>
+              <a:t>Section Interventions sur l'accueil</a:t>
+            </a:r>
+            <a:endParaRPr lang="en-US" sz="1400" dirty="0"/>
+          </a:p>
+        </p:txBody>
+      </p:sp>
+      <p:sp>
+        <p:nvSpPr>
+          <p:cNvPr id="12" name="Text 10"/>
+          <p:cNvSpPr/>
+          <p:nvPr/>
+        </p:nvSpPr>
+        <p:spPr>
+          <a:xfrm>
+            <a:off x="914400" y="3383280"/>
+            <a:ext cx="10332720" cy="594360"/>
+          </a:xfrm>
+          <a:prstGeom prst="rect">
+            <a:avLst/>
+          </a:prstGeom>
+          <a:noFill/>
+          <a:ln/>
+        </p:spPr>
+        <p:txBody>
+          <a:bodyPr wrap="square" rtlCol="0" anchor="ctr"/>
+          <a:lstStyle/>
+          <a:p>
+            <a:pPr indent="0" marL="0">
+              <a:lnSpc>
+                <a:spcPts val="1400"/>
+              </a:lnSpc>
+              <a:buNone/>
+            </a:pPr>
+            <a:r>
+              <a:rPr lang="en-US" sz="1100" dirty="0">
+                <a:solidFill>
+                  <a:srgbClr val="8A7C68"/>
+                </a:solidFill>
+                <a:latin typeface="Segoe UI" pitchFamily="34" charset="0"/>
+                <a:ea typeface="Segoe UI" pitchFamily="34" charset="-122"/>
+                <a:cs typeface="Segoe UI" pitchFamily="34" charset="-120"/>
+              </a:rPr>
+              <a:t>Nouvelle section sur la page d'accueil, sous 'Devis en cours', listant les interventions avec leur statut (À faire / En cours / Terminée), et les actions rapides archiver/supprimer.</a:t>
+            </a:r>
+            <a:endParaRPr lang="en-US" sz="1100" dirty="0"/>
+          </a:p>
+        </p:txBody>
+      </p:sp>
+      <p:sp>
+        <p:nvSpPr>
+          <p:cNvPr id="13" name="Shape 11"/>
+          <p:cNvSpPr/>
+          <p:nvPr/>
+        </p:nvSpPr>
+        <p:spPr>
+          <a:xfrm>
+            <a:off x="640080" y="4160520"/>
+            <a:ext cx="10881360" cy="1097280"/>
+          </a:xfrm>
+          <a:prstGeom prst="roundRect">
+            <a:avLst>
+              <a:gd name="adj" fmla="val 5000"/>
+            </a:avLst>
+          </a:prstGeom>
+          <a:solidFill>
+            <a:srgbClr val="FFFFFF"/>
+          </a:solidFill>
+          <a:ln w="12700">
+            <a:solidFill>
+              <a:srgbClr val="E4DCCB"/>
+            </a:solidFill>
+            <a:prstDash val="solid"/>
+          </a:ln>
+        </p:spPr>
+      </p:sp>
+      <p:sp>
+        <p:nvSpPr>
+          <p:cNvPr id="14" name="Shape 12"/>
+          <p:cNvSpPr/>
+          <p:nvPr/>
+        </p:nvSpPr>
+        <p:spPr>
+          <a:xfrm>
+            <a:off x="640080" y="4160520"/>
+            <a:ext cx="54864" cy="1097280"/>
+          </a:xfrm>
+          <a:prstGeom prst="rect">
+            <a:avLst/>
+          </a:prstGeom>
+          <a:solidFill>
+            <a:srgbClr val="1D6FE0"/>
+          </a:solidFill>
+          <a:ln/>
+        </p:spPr>
+      </p:sp>
+      <p:sp>
+        <p:nvSpPr>
+          <p:cNvPr id="15" name="Text 13"/>
+          <p:cNvSpPr/>
+          <p:nvPr/>
+        </p:nvSpPr>
+        <p:spPr>
+          <a:xfrm>
+            <a:off x="914400" y="4270248"/>
+            <a:ext cx="10332720" cy="365760"/>
+          </a:xfrm>
+          <a:prstGeom prst="rect">
+            <a:avLst/>
+          </a:prstGeom>
+          <a:noFill/>
+          <a:ln/>
+        </p:spPr>
+        <p:txBody>
+          <a:bodyPr wrap="square" rtlCol="0" anchor="ctr"/>
+          <a:lstStyle/>
+          <a:p>
+            <a:pPr indent="0" marL="0">
+              <a:buNone/>
+            </a:pPr>
+            <a:r>
+              <a:rPr lang="en-US" sz="1400" b="1" dirty="0">
+                <a:solidFill>
+                  <a:srgbClr val="1B1F3B"/>
+                </a:solidFill>
+                <a:latin typeface="Segoe UI" pitchFamily="34" charset="0"/>
+                <a:ea typeface="Segoe UI" pitchFamily="34" charset="-122"/>
+                <a:cs typeface="Segoe UI" pitchFamily="34" charset="-120"/>
+              </a:rPr>
+              <a:t>Passage direct dans 'À faire maintenant'</a:t>
+            </a:r>
+            <a:endParaRPr lang="en-US" sz="1400" dirty="0"/>
+          </a:p>
+        </p:txBody>
+      </p:sp>
+      <p:sp>
+        <p:nvSpPr>
+          <p:cNvPr id="16" name="Text 14"/>
+          <p:cNvSpPr/>
+          <p:nvPr/>
+        </p:nvSpPr>
+        <p:spPr>
+          <a:xfrm>
+            <a:off x="914400" y="4617720"/>
+            <a:ext cx="10332720" cy="594360"/>
+          </a:xfrm>
+          <a:prstGeom prst="rect">
+            <a:avLst/>
+          </a:prstGeom>
+          <a:noFill/>
+          <a:ln/>
+        </p:spPr>
+        <p:txBody>
+          <a:bodyPr wrap="square" rtlCol="0" anchor="ctr"/>
+          <a:lstStyle/>
+          <a:p>
+            <a:pPr indent="0" marL="0">
+              <a:lnSpc>
+                <a:spcPts val="1400"/>
+              </a:lnSpc>
+              <a:buNone/>
+            </a:pPr>
+            <a:r>
+              <a:rPr lang="en-US" sz="1100" dirty="0">
+                <a:solidFill>
+                  <a:srgbClr val="8A7C68"/>
+                </a:solidFill>
+                <a:latin typeface="Segoe UI" pitchFamily="34" charset="0"/>
+                <a:ea typeface="Segoe UI" pitchFamily="34" charset="-122"/>
+                <a:cs typeface="Segoe UI" pitchFamily="34" charset="-120"/>
+              </a:rPr>
+              <a:t>Une intervention du jour peut être déplacée en un clic vers la liste 'À faire maintenant' de l'accueil, sans dupliquer la fiche si elle y est déjà.</a:t>
+            </a:r>
+            <a:endParaRPr lang="en-US" sz="1100" dirty="0"/>
+          </a:p>
+        </p:txBody>
+      </p:sp>
+      <p:sp>
+        <p:nvSpPr>
+          <p:cNvPr id="17" name="Shape 15"/>
+          <p:cNvSpPr/>
+          <p:nvPr/>
+        </p:nvSpPr>
+        <p:spPr>
+          <a:xfrm>
+            <a:off x="640080" y="5394960"/>
+            <a:ext cx="10881360" cy="1097280"/>
+          </a:xfrm>
+          <a:prstGeom prst="roundRect">
+            <a:avLst>
+              <a:gd name="adj" fmla="val 5000"/>
+            </a:avLst>
+          </a:prstGeom>
+          <a:solidFill>
+            <a:srgbClr val="FFFFFF"/>
+          </a:solidFill>
+          <a:ln w="12700">
+            <a:solidFill>
+              <a:srgbClr val="E4DCCB"/>
+            </a:solidFill>
+            <a:prstDash val="solid"/>
+          </a:ln>
+        </p:spPr>
+      </p:sp>
+      <p:sp>
+        <p:nvSpPr>
+          <p:cNvPr id="18" name="Shape 16"/>
+          <p:cNvSpPr/>
+          <p:nvPr/>
+        </p:nvSpPr>
+        <p:spPr>
+          <a:xfrm>
+            <a:off x="640080" y="5394960"/>
+            <a:ext cx="54864" cy="1097280"/>
+          </a:xfrm>
+          <a:prstGeom prst="rect">
+            <a:avLst/>
+          </a:prstGeom>
+          <a:solidFill>
+            <a:srgbClr val="1D6FE0"/>
+          </a:solidFill>
+          <a:ln/>
+        </p:spPr>
+      </p:sp>
+      <p:sp>
+        <p:nvSpPr>
+          <p:cNvPr id="19" name="Text 17"/>
+          <p:cNvSpPr/>
+          <p:nvPr/>
+        </p:nvSpPr>
+        <p:spPr>
+          <a:xfrm>
+            <a:off x="914400" y="5504688"/>
+            <a:ext cx="10332720" cy="365760"/>
+          </a:xfrm>
+          <a:prstGeom prst="rect">
+            <a:avLst/>
+          </a:prstGeom>
+          <a:noFill/>
+          <a:ln/>
+        </p:spPr>
+        <p:txBody>
+          <a:bodyPr wrap="square" rtlCol="0" anchor="ctr"/>
+          <a:lstStyle/>
+          <a:p>
+            <a:pPr indent="0" marL="0">
+              <a:buNone/>
+            </a:pPr>
+            <a:r>
+              <a:rPr lang="en-US" sz="1400" b="1" dirty="0">
+                <a:solidFill>
+                  <a:srgbClr val="1B1F3B"/>
+                </a:solidFill>
+                <a:latin typeface="Segoe UI" pitchFamily="34" charset="0"/>
+                <a:ea typeface="Segoe UI" pitchFamily="34" charset="-122"/>
+                <a:cs typeface="Segoe UI" pitchFamily="34" charset="-120"/>
+              </a:rPr>
+              <a:t>Mise en page de l'en-tête revue</a:t>
+            </a:r>
+            <a:endParaRPr lang="en-US" sz="1400" dirty="0"/>
+          </a:p>
+        </p:txBody>
+      </p:sp>
+      <p:sp>
+        <p:nvSpPr>
+          <p:cNvPr id="20" name="Text 18"/>
+          <p:cNvSpPr/>
+          <p:nvPr/>
+        </p:nvSpPr>
+        <p:spPr>
+          <a:xfrm>
+            <a:off x="914400" y="5852160"/>
+            <a:ext cx="10332720" cy="594360"/>
+          </a:xfrm>
+          <a:prstGeom prst="rect">
+            <a:avLst/>
+          </a:prstGeom>
+          <a:noFill/>
+          <a:ln/>
+        </p:spPr>
+        <p:txBody>
+          <a:bodyPr wrap="square" rtlCol="0" anchor="ctr"/>
+          <a:lstStyle/>
+          <a:p>
+            <a:pPr indent="0" marL="0">
+              <a:lnSpc>
+                <a:spcPts val="1400"/>
+              </a:lnSpc>
+              <a:buNone/>
+            </a:pPr>
+            <a:r>
+              <a:rPr lang="en-US" sz="1100" dirty="0">
+                <a:solidFill>
+                  <a:srgbClr val="8A7C68"/>
+                </a:solidFill>
+                <a:latin typeface="Segoe UI" pitchFamily="34" charset="0"/>
+                <a:ea typeface="Segoe UI" pitchFamily="34" charset="-122"/>
+                <a:cs typeface="Segoe UI" pitchFamily="34" charset="-120"/>
+              </a:rPr>
+              <a:t>'RAPPORT D'INTERVENTION', le numéro et la date de création sont désormais mis en avant en haut à droite, à côté des informations de l'entreprise, comme sur les devis et factures.</a:t>
+            </a:r>
+            <a:endParaRPr lang="en-US" sz="1100" dirty="0"/>
+          </a:p>
+        </p:txBody>
+      </p:sp>
+      <p:sp>
+        <p:nvSpPr>
+          <p:cNvPr id="21" name="Text 19"/>
           <p:cNvSpPr/>
           <p:nvPr/>
         </p:nvSpPr>
@@ -6871,7 +7344,7 @@
       </p:sp>
       <p:sp>
         <p:nvSpPr>
-          <p:cNvPr id="10" name="Text 8"/>
+          <p:cNvPr id="22" name="Text 20"/>
           <p:cNvSpPr/>
           <p:nvPr/>
         </p:nvSpPr>
@@ -6919,6 +7392,344 @@
 <file path=ppt/slides/slide15.xml><?xml version="1.0" encoding="utf-8"?>
 <p:sld xmlns:a="http://schemas.openxmlformats.org/drawingml/2006/main" xmlns:r="http://schemas.openxmlformats.org/officeDocument/2006/relationships" xmlns:p="http://schemas.openxmlformats.org/presentationml/2006/main">
   <p:cSld name="Slide 15">
+    <p:bg>
+      <p:bgPr>
+        <a:solidFill>
+          <a:srgbClr val="F3EEE3"/>
+        </a:solidFill>
+      </p:bgPr>
+    </p:bg>
+    <p:spTree>
+      <p:nvGrpSpPr>
+        <p:cNvPr id="1" name=""/>
+        <p:cNvGrpSpPr/>
+        <p:nvPr/>
+      </p:nvGrpSpPr>
+      <p:grpSpPr>
+        <a:xfrm>
+          <a:off x="0" y="0"/>
+          <a:ext cx="0" cy="0"/>
+          <a:chOff x="0" y="0"/>
+          <a:chExt cx="0" cy="0"/>
+        </a:xfrm>
+      </p:grpSpPr>
+      <p:sp>
+        <p:nvSpPr>
+          <p:cNvPr id="2" name="Shape 0"/>
+          <p:cNvSpPr/>
+          <p:nvPr/>
+        </p:nvSpPr>
+        <p:spPr>
+          <a:xfrm>
+            <a:off x="640080" y="411480"/>
+            <a:ext cx="2377440" cy="365760"/>
+          </a:xfrm>
+          <a:prstGeom prst="roundRect">
+            <a:avLst>
+              <a:gd name="adj" fmla="val 50000"/>
+            </a:avLst>
+          </a:prstGeom>
+          <a:solidFill>
+            <a:srgbClr val="E5EDFB"/>
+          </a:solidFill>
+          <a:ln/>
+        </p:spPr>
+      </p:sp>
+      <p:sp>
+        <p:nvSpPr>
+          <p:cNvPr id="3" name="Text 1"/>
+          <p:cNvSpPr/>
+          <p:nvPr/>
+        </p:nvSpPr>
+        <p:spPr>
+          <a:xfrm>
+            <a:off x="640080" y="411480"/>
+            <a:ext cx="2377440" cy="365760"/>
+          </a:xfrm>
+          <a:prstGeom prst="rect">
+            <a:avLst/>
+          </a:prstGeom>
+          <a:noFill/>
+          <a:ln/>
+        </p:spPr>
+        <p:txBody>
+          <a:bodyPr wrap="square" rtlCol="0" anchor="ctr"/>
+          <a:lstStyle/>
+          <a:p>
+            <a:pPr algn="ctr" indent="0" marL="0">
+              <a:buNone/>
+            </a:pPr>
+            <a:r>
+              <a:rPr lang="en-US" sz="1000" b="1" spc="100" kern="0" dirty="0">
+                <a:solidFill>
+                  <a:srgbClr val="1D6FE0"/>
+                </a:solidFill>
+                <a:latin typeface="Segoe UI" pitchFamily="34" charset="0"/>
+                <a:ea typeface="Segoe UI" pitchFamily="34" charset="-122"/>
+                <a:cs typeface="Segoe UI" pitchFamily="34" charset="-120"/>
+              </a:rPr>
+              <a:t>FRONTEND</a:t>
+            </a:r>
+            <a:endParaRPr lang="en-US" sz="1000" dirty="0"/>
+          </a:p>
+        </p:txBody>
+      </p:sp>
+      <p:sp>
+        <p:nvSpPr>
+          <p:cNvPr id="4" name="Text 2"/>
+          <p:cNvSpPr/>
+          <p:nvPr/>
+        </p:nvSpPr>
+        <p:spPr>
+          <a:xfrm>
+            <a:off x="640080" y="868680"/>
+            <a:ext cx="10515600" cy="548640"/>
+          </a:xfrm>
+          <a:prstGeom prst="rect">
+            <a:avLst/>
+          </a:prstGeom>
+          <a:noFill/>
+          <a:ln/>
+        </p:spPr>
+        <p:txBody>
+          <a:bodyPr wrap="square" rtlCol="0" anchor="ctr"/>
+          <a:lstStyle/>
+          <a:p>
+            <a:pPr indent="0" marL="0">
+              <a:buNone/>
+            </a:pPr>
+            <a:r>
+              <a:rPr lang="en-US" sz="2400" b="1" dirty="0">
+                <a:solidFill>
+                  <a:srgbClr val="1B1F3B"/>
+                </a:solidFill>
+                <a:latin typeface="Georgia" pitchFamily="34" charset="0"/>
+                <a:ea typeface="Georgia" pitchFamily="34" charset="-122"/>
+                <a:cs typeface="Georgia" pitchFamily="34" charset="-120"/>
+              </a:rPr>
+              <a:t>Rapports d'intervention (suite)</a:t>
+            </a:r>
+            <a:endParaRPr lang="en-US" sz="2400" dirty="0"/>
+          </a:p>
+        </p:txBody>
+      </p:sp>
+      <p:sp>
+        <p:nvSpPr>
+          <p:cNvPr id="5" name="Shape 3"/>
+          <p:cNvSpPr/>
+          <p:nvPr/>
+        </p:nvSpPr>
+        <p:spPr>
+          <a:xfrm>
+            <a:off x="640080" y="1691640"/>
+            <a:ext cx="10881360" cy="1097280"/>
+          </a:xfrm>
+          <a:prstGeom prst="roundRect">
+            <a:avLst>
+              <a:gd name="adj" fmla="val 5000"/>
+            </a:avLst>
+          </a:prstGeom>
+          <a:solidFill>
+            <a:srgbClr val="FFFFFF"/>
+          </a:solidFill>
+          <a:ln w="12700">
+            <a:solidFill>
+              <a:srgbClr val="E4DCCB"/>
+            </a:solidFill>
+            <a:prstDash val="solid"/>
+          </a:ln>
+        </p:spPr>
+      </p:sp>
+      <p:sp>
+        <p:nvSpPr>
+          <p:cNvPr id="6" name="Shape 4"/>
+          <p:cNvSpPr/>
+          <p:nvPr/>
+        </p:nvSpPr>
+        <p:spPr>
+          <a:xfrm>
+            <a:off x="640080" y="1691640"/>
+            <a:ext cx="54864" cy="1097280"/>
+          </a:xfrm>
+          <a:prstGeom prst="rect">
+            <a:avLst/>
+          </a:prstGeom>
+          <a:solidFill>
+            <a:srgbClr val="1D6FE0"/>
+          </a:solidFill>
+          <a:ln/>
+        </p:spPr>
+      </p:sp>
+      <p:sp>
+        <p:nvSpPr>
+          <p:cNvPr id="7" name="Text 5"/>
+          <p:cNvSpPr/>
+          <p:nvPr/>
+        </p:nvSpPr>
+        <p:spPr>
+          <a:xfrm>
+            <a:off x="914400" y="1801368"/>
+            <a:ext cx="10332720" cy="365760"/>
+          </a:xfrm>
+          <a:prstGeom prst="rect">
+            <a:avLst/>
+          </a:prstGeom>
+          <a:noFill/>
+          <a:ln/>
+        </p:spPr>
+        <p:txBody>
+          <a:bodyPr wrap="square" rtlCol="0" anchor="ctr"/>
+          <a:lstStyle/>
+          <a:p>
+            <a:pPr indent="0" marL="0">
+              <a:buNone/>
+            </a:pPr>
+            <a:r>
+              <a:rPr lang="en-US" sz="1400" b="1" dirty="0">
+                <a:solidFill>
+                  <a:srgbClr val="1B1F3B"/>
+                </a:solidFill>
+                <a:latin typeface="Segoe UI" pitchFamily="34" charset="0"/>
+                <a:ea typeface="Segoe UI" pitchFamily="34" charset="-122"/>
+                <a:cs typeface="Segoe UI" pitchFamily="34" charset="-120"/>
+              </a:rPr>
+              <a:t>Signature réutilisable depuis le profil</a:t>
+            </a:r>
+            <a:endParaRPr lang="en-US" sz="1400" dirty="0"/>
+          </a:p>
+        </p:txBody>
+      </p:sp>
+      <p:sp>
+        <p:nvSpPr>
+          <p:cNvPr id="8" name="Text 6"/>
+          <p:cNvSpPr/>
+          <p:nvPr/>
+        </p:nvSpPr>
+        <p:spPr>
+          <a:xfrm>
+            <a:off x="914400" y="2148840"/>
+            <a:ext cx="10332720" cy="594360"/>
+          </a:xfrm>
+          <a:prstGeom prst="rect">
+            <a:avLst/>
+          </a:prstGeom>
+          <a:noFill/>
+          <a:ln/>
+        </p:spPr>
+        <p:txBody>
+          <a:bodyPr wrap="square" rtlCol="0" anchor="ctr"/>
+          <a:lstStyle/>
+          <a:p>
+            <a:pPr indent="0" marL="0">
+              <a:lnSpc>
+                <a:spcPts val="1400"/>
+              </a:lnSpc>
+              <a:buNone/>
+            </a:pPr>
+            <a:r>
+              <a:rPr lang="en-US" sz="1100" dirty="0">
+                <a:solidFill>
+                  <a:srgbClr val="8A7C68"/>
+                </a:solidFill>
+                <a:latin typeface="Segoe UI" pitchFamily="34" charset="0"/>
+                <a:ea typeface="Segoe UI" pitchFamily="34" charset="-122"/>
+                <a:cs typeface="Segoe UI" pitchFamily="34" charset="-120"/>
+              </a:rPr>
+              <a:t>La signature déjà enregistrée dans 'Ma Signature' (dessinée ou importée) peut être ajoutée en un clic au rapport, affichée en bas à droite du document comme une vraie signature.</a:t>
+            </a:r>
+            <a:endParaRPr lang="en-US" sz="1100" dirty="0"/>
+          </a:p>
+        </p:txBody>
+      </p:sp>
+      <p:sp>
+        <p:nvSpPr>
+          <p:cNvPr id="9" name="Text 7"/>
+          <p:cNvSpPr/>
+          <p:nvPr/>
+        </p:nvSpPr>
+        <p:spPr>
+          <a:xfrm>
+            <a:off x="365760" y="6510528"/>
+            <a:ext cx="5486400" cy="274320"/>
+          </a:xfrm>
+          <a:prstGeom prst="rect">
+            <a:avLst/>
+          </a:prstGeom>
+          <a:noFill/>
+          <a:ln/>
+        </p:spPr>
+        <p:txBody>
+          <a:bodyPr wrap="square" rtlCol="0" anchor="ctr"/>
+          <a:lstStyle/>
+          <a:p>
+            <a:pPr indent="0" marL="0">
+              <a:buNone/>
+            </a:pPr>
+            <a:r>
+              <a:rPr lang="en-US" sz="900" dirty="0">
+                <a:solidFill>
+                  <a:srgbClr val="8A7C68"/>
+                </a:solidFill>
+                <a:latin typeface="Segoe UI" pitchFamily="34" charset="0"/>
+                <a:ea typeface="Segoe UI" pitchFamily="34" charset="-122"/>
+                <a:cs typeface="Segoe UI" pitchFamily="34" charset="-120"/>
+              </a:rPr>
+              <a:t>Kôji Web — Récapitulatif technique</a:t>
+            </a:r>
+            <a:endParaRPr lang="en-US" sz="900" dirty="0"/>
+          </a:p>
+        </p:txBody>
+      </p:sp>
+      <p:sp>
+        <p:nvSpPr>
+          <p:cNvPr id="10" name="Text 8"/>
+          <p:cNvSpPr/>
+          <p:nvPr/>
+        </p:nvSpPr>
+        <p:spPr>
+          <a:xfrm>
+            <a:off x="9601200" y="6510528"/>
+            <a:ext cx="2194560" cy="274320"/>
+          </a:xfrm>
+          <a:prstGeom prst="rect">
+            <a:avLst/>
+          </a:prstGeom>
+          <a:noFill/>
+          <a:ln/>
+        </p:spPr>
+        <p:txBody>
+          <a:bodyPr wrap="square" rtlCol="0" anchor="ctr"/>
+          <a:lstStyle/>
+          <a:p>
+            <a:pPr algn="r" indent="0" marL="0">
+              <a:buNone/>
+            </a:pPr>
+            <a:r>
+              <a:rPr lang="en-US" sz="900" dirty="0">
+                <a:solidFill>
+                  <a:srgbClr val="8A7C68"/>
+                </a:solidFill>
+                <a:latin typeface="Segoe UI" pitchFamily="34" charset="0"/>
+                <a:ea typeface="Segoe UI" pitchFamily="34" charset="-122"/>
+                <a:cs typeface="Segoe UI" pitchFamily="34" charset="-120"/>
+              </a:rPr>
+              <a:t>15</a:t>
+            </a:r>
+            <a:endParaRPr lang="en-US" sz="900" dirty="0"/>
+          </a:p>
+        </p:txBody>
+      </p:sp>
+    </p:spTree>
+  </p:cSld>
+  <p:clrMapOvr>
+    <a:masterClrMapping/>
+  </p:clrMapOvr>
+</p:sld>
+</file>
+
+<file path=ppt/slides/slide16.xml><?xml version="1.0" encoding="utf-8"?>
+<p:sld xmlns:a="http://schemas.openxmlformats.org/drawingml/2006/main" xmlns:r="http://schemas.openxmlformats.org/officeDocument/2006/relationships" xmlns:p="http://schemas.openxmlformats.org/presentationml/2006/main">
+  <p:cSld name="Slide 16">
     <p:bg>
       <p:bgPr>
         <a:solidFill>
@@ -7071,7 +7882,7 @@
                 <a:ea typeface="Segoe UI" pitchFamily="34" charset="-122"/>
                 <a:cs typeface="Segoe UI" pitchFamily="34" charset="-120"/>
               </a:rPr>
-              <a:t>25 mise(s) à jour</a:t>
+              <a:t>27 mise(s) à jour</a:t>
             </a:r>
             <a:endParaRPr lang="en-US" sz="1200" dirty="0"/>
           </a:p>
@@ -7119,472 +7930,6 @@
       <p:sp>
         <p:nvSpPr>
           <p:cNvPr id="7" name="Text 5"/>
-          <p:cNvSpPr/>
-          <p:nvPr/>
-        </p:nvSpPr>
-        <p:spPr>
-          <a:xfrm>
-            <a:off x="9601200" y="6510528"/>
-            <a:ext cx="2194560" cy="274320"/>
-          </a:xfrm>
-          <a:prstGeom prst="rect">
-            <a:avLst/>
-          </a:prstGeom>
-          <a:noFill/>
-          <a:ln/>
-        </p:spPr>
-        <p:txBody>
-          <a:bodyPr wrap="square" rtlCol="0" anchor="ctr"/>
-          <a:lstStyle/>
-          <a:p>
-            <a:pPr algn="r" indent="0" marL="0">
-              <a:buNone/>
-            </a:pPr>
-            <a:r>
-              <a:rPr lang="en-US" sz="900" dirty="0">
-                <a:solidFill>
-                  <a:srgbClr val="8A7C68"/>
-                </a:solidFill>
-                <a:latin typeface="Segoe UI" pitchFamily="34" charset="0"/>
-                <a:ea typeface="Segoe UI" pitchFamily="34" charset="-122"/>
-                <a:cs typeface="Segoe UI" pitchFamily="34" charset="-120"/>
-              </a:rPr>
-              <a:t>15</a:t>
-            </a:r>
-            <a:endParaRPr lang="en-US" sz="900" dirty="0"/>
-          </a:p>
-        </p:txBody>
-      </p:sp>
-    </p:spTree>
-  </p:cSld>
-  <p:clrMapOvr>
-    <a:masterClrMapping/>
-  </p:clrMapOvr>
-</p:sld>
-</file>
-
-<file path=ppt/slides/slide16.xml><?xml version="1.0" encoding="utf-8"?>
-<p:sld xmlns:a="http://schemas.openxmlformats.org/drawingml/2006/main" xmlns:r="http://schemas.openxmlformats.org/officeDocument/2006/relationships" xmlns:p="http://schemas.openxmlformats.org/presentationml/2006/main">
-  <p:cSld name="Slide 16">
-    <p:bg>
-      <p:bgPr>
-        <a:solidFill>
-          <a:srgbClr val="F3EEE3"/>
-        </a:solidFill>
-      </p:bgPr>
-    </p:bg>
-    <p:spTree>
-      <p:nvGrpSpPr>
-        <p:cNvPr id="1" name=""/>
-        <p:cNvGrpSpPr/>
-        <p:nvPr/>
-      </p:nvGrpSpPr>
-      <p:grpSpPr>
-        <a:xfrm>
-          <a:off x="0" y="0"/>
-          <a:ext cx="0" cy="0"/>
-          <a:chOff x="0" y="0"/>
-          <a:chExt cx="0" cy="0"/>
-        </a:xfrm>
-      </p:grpSpPr>
-      <p:sp>
-        <p:nvSpPr>
-          <p:cNvPr id="2" name="Shape 0"/>
-          <p:cNvSpPr/>
-          <p:nvPr/>
-        </p:nvSpPr>
-        <p:spPr>
-          <a:xfrm>
-            <a:off x="640080" y="411480"/>
-            <a:ext cx="2377440" cy="365760"/>
-          </a:xfrm>
-          <a:prstGeom prst="roundRect">
-            <a:avLst>
-              <a:gd name="adj" fmla="val 50000"/>
-            </a:avLst>
-          </a:prstGeom>
-          <a:solidFill>
-            <a:srgbClr val="F5E6DA"/>
-          </a:solidFill>
-          <a:ln/>
-        </p:spPr>
-      </p:sp>
-      <p:sp>
-        <p:nvSpPr>
-          <p:cNvPr id="3" name="Text 1"/>
-          <p:cNvSpPr/>
-          <p:nvPr/>
-        </p:nvSpPr>
-        <p:spPr>
-          <a:xfrm>
-            <a:off x="640080" y="411480"/>
-            <a:ext cx="2377440" cy="365760"/>
-          </a:xfrm>
-          <a:prstGeom prst="rect">
-            <a:avLst/>
-          </a:prstGeom>
-          <a:noFill/>
-          <a:ln/>
-        </p:spPr>
-        <p:txBody>
-          <a:bodyPr wrap="square" rtlCol="0" anchor="ctr"/>
-          <a:lstStyle/>
-          <a:p>
-            <a:pPr algn="ctr" indent="0" marL="0">
-              <a:buNone/>
-            </a:pPr>
-            <a:r>
-              <a:rPr lang="en-US" sz="1000" b="1" spc="100" kern="0" dirty="0">
-                <a:solidFill>
-                  <a:srgbClr val="9A4C1F"/>
-                </a:solidFill>
-                <a:latin typeface="Segoe UI" pitchFamily="34" charset="0"/>
-                <a:ea typeface="Segoe UI" pitchFamily="34" charset="-122"/>
-                <a:cs typeface="Segoe UI" pitchFamily="34" charset="-120"/>
-              </a:rPr>
-              <a:t>BACKEND</a:t>
-            </a:r>
-            <a:endParaRPr lang="en-US" sz="1000" dirty="0"/>
-          </a:p>
-        </p:txBody>
-      </p:sp>
-      <p:sp>
-        <p:nvSpPr>
-          <p:cNvPr id="4" name="Text 2"/>
-          <p:cNvSpPr/>
-          <p:nvPr/>
-        </p:nvSpPr>
-        <p:spPr>
-          <a:xfrm>
-            <a:off x="640080" y="868680"/>
-            <a:ext cx="10515600" cy="548640"/>
-          </a:xfrm>
-          <a:prstGeom prst="rect">
-            <a:avLst/>
-          </a:prstGeom>
-          <a:noFill/>
-          <a:ln/>
-        </p:spPr>
-        <p:txBody>
-          <a:bodyPr wrap="square" rtlCol="0" anchor="ctr"/>
-          <a:lstStyle/>
-          <a:p>
-            <a:pPr indent="0" marL="0">
-              <a:buNone/>
-            </a:pPr>
-            <a:r>
-              <a:rPr lang="en-US" sz="2400" b="1" dirty="0">
-                <a:solidFill>
-                  <a:srgbClr val="1B1F3B"/>
-                </a:solidFill>
-                <a:latin typeface="Georgia" pitchFamily="34" charset="0"/>
-                <a:ea typeface="Georgia" pitchFamily="34" charset="-122"/>
-                <a:cs typeface="Georgia" pitchFamily="34" charset="-120"/>
-              </a:rPr>
-              <a:t>Fondations</a:t>
-            </a:r>
-            <a:endParaRPr lang="en-US" sz="2400" dirty="0"/>
-          </a:p>
-        </p:txBody>
-      </p:sp>
-      <p:sp>
-        <p:nvSpPr>
-          <p:cNvPr id="5" name="Shape 3"/>
-          <p:cNvSpPr/>
-          <p:nvPr/>
-        </p:nvSpPr>
-        <p:spPr>
-          <a:xfrm>
-            <a:off x="640080" y="1691640"/>
-            <a:ext cx="10881360" cy="1097280"/>
-          </a:xfrm>
-          <a:prstGeom prst="roundRect">
-            <a:avLst>
-              <a:gd name="adj" fmla="val 5000"/>
-            </a:avLst>
-          </a:prstGeom>
-          <a:solidFill>
-            <a:srgbClr val="FFFFFF"/>
-          </a:solidFill>
-          <a:ln w="12700">
-            <a:solidFill>
-              <a:srgbClr val="E4DCCB"/>
-            </a:solidFill>
-            <a:prstDash val="solid"/>
-          </a:ln>
-        </p:spPr>
-      </p:sp>
-      <p:sp>
-        <p:nvSpPr>
-          <p:cNvPr id="6" name="Shape 4"/>
-          <p:cNvSpPr/>
-          <p:nvPr/>
-        </p:nvSpPr>
-        <p:spPr>
-          <a:xfrm>
-            <a:off x="640080" y="1691640"/>
-            <a:ext cx="54864" cy="1097280"/>
-          </a:xfrm>
-          <a:prstGeom prst="rect">
-            <a:avLst/>
-          </a:prstGeom>
-          <a:solidFill>
-            <a:srgbClr val="9A4C1F"/>
-          </a:solidFill>
-          <a:ln/>
-        </p:spPr>
-      </p:sp>
-      <p:sp>
-        <p:nvSpPr>
-          <p:cNvPr id="7" name="Text 5"/>
-          <p:cNvSpPr/>
-          <p:nvPr/>
-        </p:nvSpPr>
-        <p:spPr>
-          <a:xfrm>
-            <a:off x="914400" y="1801368"/>
-            <a:ext cx="10332720" cy="365760"/>
-          </a:xfrm>
-          <a:prstGeom prst="rect">
-            <a:avLst/>
-          </a:prstGeom>
-          <a:noFill/>
-          <a:ln/>
-        </p:spPr>
-        <p:txBody>
-          <a:bodyPr wrap="square" rtlCol="0" anchor="ctr"/>
-          <a:lstStyle/>
-          <a:p>
-            <a:pPr indent="0" marL="0">
-              <a:buNone/>
-            </a:pPr>
-            <a:r>
-              <a:rPr lang="en-US" sz="1400" b="1" dirty="0">
-                <a:solidFill>
-                  <a:srgbClr val="1B1F3B"/>
-                </a:solidFill>
-                <a:latin typeface="Segoe UI" pitchFamily="34" charset="0"/>
-                <a:ea typeface="Segoe UI" pitchFamily="34" charset="-122"/>
-                <a:cs typeface="Segoe UI" pitchFamily="34" charset="-120"/>
-              </a:rPr>
-              <a:t>Mise en place initiale de l'application</a:t>
-            </a:r>
-            <a:endParaRPr lang="en-US" sz="1400" dirty="0"/>
-          </a:p>
-        </p:txBody>
-      </p:sp>
-      <p:sp>
-        <p:nvSpPr>
-          <p:cNvPr id="8" name="Text 6"/>
-          <p:cNvSpPr/>
-          <p:nvPr/>
-        </p:nvSpPr>
-        <p:spPr>
-          <a:xfrm>
-            <a:off x="914400" y="2148840"/>
-            <a:ext cx="10332720" cy="594360"/>
-          </a:xfrm>
-          <a:prstGeom prst="rect">
-            <a:avLst/>
-          </a:prstGeom>
-          <a:noFill/>
-          <a:ln/>
-        </p:spPr>
-        <p:txBody>
-          <a:bodyPr wrap="square" rtlCol="0" anchor="ctr"/>
-          <a:lstStyle/>
-          <a:p>
-            <a:pPr indent="0" marL="0">
-              <a:lnSpc>
-                <a:spcPts val="1400"/>
-              </a:lnSpc>
-              <a:buNone/>
-            </a:pPr>
-            <a:r>
-              <a:rPr lang="en-US" sz="1100" dirty="0">
-                <a:solidFill>
-                  <a:srgbClr val="8A7C68"/>
-                </a:solidFill>
-                <a:latin typeface="Segoe UI" pitchFamily="34" charset="0"/>
-                <a:ea typeface="Segoe UI" pitchFamily="34" charset="-122"/>
-                <a:cs typeface="Segoe UI" pitchFamily="34" charset="-120"/>
-              </a:rPr>
-              <a:t>Structure Next.js App Router, authentification, base de données JSON locale et première version des modules Devis, Chantiers, Équipe, Planning.</a:t>
-            </a:r>
-            <a:endParaRPr lang="en-US" sz="1100" dirty="0"/>
-          </a:p>
-        </p:txBody>
-      </p:sp>
-      <p:sp>
-        <p:nvSpPr>
-          <p:cNvPr id="9" name="Shape 7"/>
-          <p:cNvSpPr/>
-          <p:nvPr/>
-        </p:nvSpPr>
-        <p:spPr>
-          <a:xfrm>
-            <a:off x="640080" y="2926080"/>
-            <a:ext cx="10881360" cy="1097280"/>
-          </a:xfrm>
-          <a:prstGeom prst="roundRect">
-            <a:avLst>
-              <a:gd name="adj" fmla="val 5000"/>
-            </a:avLst>
-          </a:prstGeom>
-          <a:solidFill>
-            <a:srgbClr val="FFFFFF"/>
-          </a:solidFill>
-          <a:ln w="12700">
-            <a:solidFill>
-              <a:srgbClr val="E4DCCB"/>
-            </a:solidFill>
-            <a:prstDash val="solid"/>
-          </a:ln>
-        </p:spPr>
-      </p:sp>
-      <p:sp>
-        <p:nvSpPr>
-          <p:cNvPr id="10" name="Shape 8"/>
-          <p:cNvSpPr/>
-          <p:nvPr/>
-        </p:nvSpPr>
-        <p:spPr>
-          <a:xfrm>
-            <a:off x="640080" y="2926080"/>
-            <a:ext cx="54864" cy="1097280"/>
-          </a:xfrm>
-          <a:prstGeom prst="rect">
-            <a:avLst/>
-          </a:prstGeom>
-          <a:solidFill>
-            <a:srgbClr val="9A4C1F"/>
-          </a:solidFill>
-          <a:ln/>
-        </p:spPr>
-      </p:sp>
-      <p:sp>
-        <p:nvSpPr>
-          <p:cNvPr id="11" name="Text 9"/>
-          <p:cNvSpPr/>
-          <p:nvPr/>
-        </p:nvSpPr>
-        <p:spPr>
-          <a:xfrm>
-            <a:off x="914400" y="3035808"/>
-            <a:ext cx="10332720" cy="365760"/>
-          </a:xfrm>
-          <a:prstGeom prst="rect">
-            <a:avLst/>
-          </a:prstGeom>
-          <a:noFill/>
-          <a:ln/>
-        </p:spPr>
-        <p:txBody>
-          <a:bodyPr wrap="square" rtlCol="0" anchor="ctr"/>
-          <a:lstStyle/>
-          <a:p>
-            <a:pPr indent="0" marL="0">
-              <a:buNone/>
-            </a:pPr>
-            <a:r>
-              <a:rPr lang="en-US" sz="1400" b="1" dirty="0">
-                <a:solidFill>
-                  <a:srgbClr val="1B1F3B"/>
-                </a:solidFill>
-                <a:latin typeface="Segoe UI" pitchFamily="34" charset="0"/>
-                <a:ea typeface="Segoe UI" pitchFamily="34" charset="-122"/>
-                <a:cs typeface="Segoe UI" pitchFamily="34" charset="-120"/>
-              </a:rPr>
-              <a:t>Fiabilisation de l'envoi d'email (SMTP Gmail)</a:t>
-            </a:r>
-            <a:endParaRPr lang="en-US" sz="1400" dirty="0"/>
-          </a:p>
-        </p:txBody>
-      </p:sp>
-      <p:sp>
-        <p:nvSpPr>
-          <p:cNvPr id="12" name="Text 10"/>
-          <p:cNvSpPr/>
-          <p:nvPr/>
-        </p:nvSpPr>
-        <p:spPr>
-          <a:xfrm>
-            <a:off x="914400" y="3383280"/>
-            <a:ext cx="10332720" cy="594360"/>
-          </a:xfrm>
-          <a:prstGeom prst="rect">
-            <a:avLst/>
-          </a:prstGeom>
-          <a:noFill/>
-          <a:ln/>
-        </p:spPr>
-        <p:txBody>
-          <a:bodyPr wrap="square" rtlCol="0" anchor="ctr"/>
-          <a:lstStyle/>
-          <a:p>
-            <a:pPr indent="0" marL="0">
-              <a:lnSpc>
-                <a:spcPts val="1400"/>
-              </a:lnSpc>
-              <a:buNone/>
-            </a:pPr>
-            <a:r>
-              <a:rPr lang="en-US" sz="1100" dirty="0">
-                <a:solidFill>
-                  <a:srgbClr val="8A7C68"/>
-                </a:solidFill>
-                <a:latin typeface="Segoe UI" pitchFamily="34" charset="0"/>
-                <a:ea typeface="Segoe UI" pitchFamily="34" charset="-122"/>
-                <a:cs typeface="Segoe UI" pitchFamily="34" charset="-120"/>
-              </a:rPr>
-              <a:t>Import dynamique de nodemailer compatible Vercel (ES modules), configuration complète (TLS, authentification).</a:t>
-            </a:r>
-            <a:endParaRPr lang="en-US" sz="1100" dirty="0"/>
-          </a:p>
-        </p:txBody>
-      </p:sp>
-      <p:sp>
-        <p:nvSpPr>
-          <p:cNvPr id="13" name="Text 11"/>
-          <p:cNvSpPr/>
-          <p:nvPr/>
-        </p:nvSpPr>
-        <p:spPr>
-          <a:xfrm>
-            <a:off x="365760" y="6510528"/>
-            <a:ext cx="5486400" cy="274320"/>
-          </a:xfrm>
-          <a:prstGeom prst="rect">
-            <a:avLst/>
-          </a:prstGeom>
-          <a:noFill/>
-          <a:ln/>
-        </p:spPr>
-        <p:txBody>
-          <a:bodyPr wrap="square" rtlCol="0" anchor="ctr"/>
-          <a:lstStyle/>
-          <a:p>
-            <a:pPr indent="0" marL="0">
-              <a:buNone/>
-            </a:pPr>
-            <a:r>
-              <a:rPr lang="en-US" sz="900" dirty="0">
-                <a:solidFill>
-                  <a:srgbClr val="8A7C68"/>
-                </a:solidFill>
-                <a:latin typeface="Segoe UI" pitchFamily="34" charset="0"/>
-                <a:ea typeface="Segoe UI" pitchFamily="34" charset="-122"/>
-                <a:cs typeface="Segoe UI" pitchFamily="34" charset="-120"/>
-              </a:rPr>
-              <a:t>Kôji Web — Récapitulatif technique</a:t>
-            </a:r>
-            <a:endParaRPr lang="en-US" sz="900" dirty="0"/>
-          </a:p>
-        </p:txBody>
-      </p:sp>
-      <p:sp>
-        <p:nvSpPr>
-          <p:cNvPr id="14" name="Text 12"/>
           <p:cNvSpPr/>
           <p:nvPr/>
         </p:nvSpPr>
@@ -7747,7 +8092,7 @@
                 <a:ea typeface="Georgia" pitchFamily="34" charset="-122"/>
                 <a:cs typeface="Georgia" pitchFamily="34" charset="-120"/>
               </a:rPr>
-              <a:t>Devis</a:t>
+              <a:t>Fondations</a:t>
             </a:r>
             <a:endParaRPr lang="en-US" sz="2400" dirty="0"/>
           </a:p>
@@ -7833,7 +8178,7 @@
                 <a:ea typeface="Segoe UI" pitchFamily="34" charset="-122"/>
                 <a:cs typeface="Segoe UI" pitchFamily="34" charset="-120"/>
               </a:rPr>
-              <a:t>Génération PDF des devis réparée</a:t>
+              <a:t>Mise en place initiale de l'application</a:t>
             </a:r>
             <a:endParaRPr lang="en-US" sz="1400" dirty="0"/>
           </a:p>
@@ -7875,7 +8220,7 @@
                 <a:ea typeface="Segoe UI" pitchFamily="34" charset="-122"/>
                 <a:cs typeface="Segoe UI" pitchFamily="34" charset="-120"/>
               </a:rPr>
-              <a:t>La génération/aperçu PDF lisait encore l'ancien fichier JSON local et ne trouvait plus les devis créés depuis la migration Supabase ; corrigée pour lire directement la table partagée.</a:t>
+              <a:t>Structure Next.js App Router, authentification, base de données JSON locale et première version des modules Devis, Chantiers, Équipe, Planning.</a:t>
             </a:r>
             <a:endParaRPr lang="en-US" sz="1100" dirty="0"/>
           </a:p>
@@ -7961,7 +8306,7 @@
                 <a:ea typeface="Segoe UI" pitchFamily="34" charset="-122"/>
                 <a:cs typeface="Segoe UI" pitchFamily="34" charset="-120"/>
               </a:rPr>
-              <a:t>Versioning et sauvegarde complète du devis</a:t>
+              <a:t>Fiabilisation de l'envoi d'email (SMTP Gmail)</a:t>
             </a:r>
             <a:endParaRPr lang="en-US" sz="1400" dirty="0"/>
           </a:p>
@@ -8003,7 +8348,7 @@
                 <a:ea typeface="Segoe UI" pitchFamily="34" charset="-122"/>
                 <a:cs typeface="Segoe UI" pitchFamily="34" charset="-120"/>
               </a:rPr>
-              <a:t>Le numéro de version s'incrémente à chaque enregistrement manuel ; les notes, majorations/minorations et le taux de TVA choisi, qui se perdaient silencieusement, sont désormais bien sauvegardés.</a:t>
+              <a:t>Import dynamique de nodemailer compatible Vercel (ES modules), configuration complète (TLS, authentification).</a:t>
             </a:r>
             <a:endParaRPr lang="en-US" sz="1100" dirty="0"/>
           </a:p>
@@ -8011,263 +8356,7 @@
       </p:sp>
       <p:sp>
         <p:nvSpPr>
-          <p:cNvPr id="13" name="Shape 11"/>
-          <p:cNvSpPr/>
-          <p:nvPr/>
-        </p:nvSpPr>
-        <p:spPr>
-          <a:xfrm>
-            <a:off x="640080" y="4160520"/>
-            <a:ext cx="10881360" cy="1097280"/>
-          </a:xfrm>
-          <a:prstGeom prst="roundRect">
-            <a:avLst>
-              <a:gd name="adj" fmla="val 5000"/>
-            </a:avLst>
-          </a:prstGeom>
-          <a:solidFill>
-            <a:srgbClr val="FFFFFF"/>
-          </a:solidFill>
-          <a:ln w="12700">
-            <a:solidFill>
-              <a:srgbClr val="E4DCCB"/>
-            </a:solidFill>
-            <a:prstDash val="solid"/>
-          </a:ln>
-        </p:spPr>
-      </p:sp>
-      <p:sp>
-        <p:nvSpPr>
-          <p:cNvPr id="14" name="Shape 12"/>
-          <p:cNvSpPr/>
-          <p:nvPr/>
-        </p:nvSpPr>
-        <p:spPr>
-          <a:xfrm>
-            <a:off x="640080" y="4160520"/>
-            <a:ext cx="54864" cy="1097280"/>
-          </a:xfrm>
-          <a:prstGeom prst="rect">
-            <a:avLst/>
-          </a:prstGeom>
-          <a:solidFill>
-            <a:srgbClr val="9A4C1F"/>
-          </a:solidFill>
-          <a:ln/>
-        </p:spPr>
-      </p:sp>
-      <p:sp>
-        <p:nvSpPr>
-          <p:cNvPr id="15" name="Text 13"/>
-          <p:cNvSpPr/>
-          <p:nvPr/>
-        </p:nvSpPr>
-        <p:spPr>
-          <a:xfrm>
-            <a:off x="914400" y="4270248"/>
-            <a:ext cx="10332720" cy="365760"/>
-          </a:xfrm>
-          <a:prstGeom prst="rect">
-            <a:avLst/>
-          </a:prstGeom>
-          <a:noFill/>
-          <a:ln/>
-        </p:spPr>
-        <p:txBody>
-          <a:bodyPr wrap="square" rtlCol="0" anchor="ctr"/>
-          <a:lstStyle/>
-          <a:p>
-            <a:pPr indent="0" marL="0">
-              <a:buNone/>
-            </a:pPr>
-            <a:r>
-              <a:rPr lang="en-US" sz="1400" b="1" dirty="0">
-                <a:solidFill>
-                  <a:srgbClr val="1B1F3B"/>
-                </a:solidFill>
-                <a:latin typeface="Segoe UI" pitchFamily="34" charset="0"/>
-                <a:ea typeface="Segoe UI" pitchFamily="34" charset="-122"/>
-                <a:cs typeface="Segoe UI" pitchFamily="34" charset="-120"/>
-              </a:rPr>
-              <a:t>Taux horaire par défaut sur la bibliothèque</a:t>
-            </a:r>
-            <a:endParaRPr lang="en-US" sz="1400" dirty="0"/>
-          </a:p>
-        </p:txBody>
-      </p:sp>
-      <p:sp>
-        <p:nvSpPr>
-          <p:cNvPr id="16" name="Text 14"/>
-          <p:cNvSpPr/>
-          <p:nvPr/>
-        </p:nvSpPr>
-        <p:spPr>
-          <a:xfrm>
-            <a:off x="914400" y="4617720"/>
-            <a:ext cx="10332720" cy="594360"/>
-          </a:xfrm>
-          <a:prstGeom prst="rect">
-            <a:avLst/>
-          </a:prstGeom>
-          <a:noFill/>
-          <a:ln/>
-        </p:spPr>
-        <p:txBody>
-          <a:bodyPr wrap="square" rtlCol="0" anchor="ctr"/>
-          <a:lstStyle/>
-          <a:p>
-            <a:pPr indent="0" marL="0">
-              <a:lnSpc>
-                <a:spcPts val="1400"/>
-              </a:lnSpc>
-              <a:buNone/>
-            </a:pPr>
-            <a:r>
-              <a:rPr lang="en-US" sz="1100" dirty="0">
-                <a:solidFill>
-                  <a:srgbClr val="8A7C68"/>
-                </a:solidFill>
-                <a:latin typeface="Segoe UI" pitchFamily="34" charset="0"/>
-                <a:ea typeface="Segoe UI" pitchFamily="34" charset="-122"/>
-                <a:cs typeface="Segoe UI" pitchFamily="34" charset="-120"/>
-              </a:rPr>
-              <a:t>Le taux horaire du profil entreprise sert désormais de valeur par défaut pour chaque ouvrage (liste, création, édition, calcul du coût main d'œuvre).</a:t>
-            </a:r>
-            <a:endParaRPr lang="en-US" sz="1100" dirty="0"/>
-          </a:p>
-        </p:txBody>
-      </p:sp>
-      <p:sp>
-        <p:nvSpPr>
-          <p:cNvPr id="17" name="Shape 15"/>
-          <p:cNvSpPr/>
-          <p:nvPr/>
-        </p:nvSpPr>
-        <p:spPr>
-          <a:xfrm>
-            <a:off x="640080" y="5394960"/>
-            <a:ext cx="10881360" cy="1097280"/>
-          </a:xfrm>
-          <a:prstGeom prst="roundRect">
-            <a:avLst>
-              <a:gd name="adj" fmla="val 5000"/>
-            </a:avLst>
-          </a:prstGeom>
-          <a:solidFill>
-            <a:srgbClr val="FFFFFF"/>
-          </a:solidFill>
-          <a:ln w="12700">
-            <a:solidFill>
-              <a:srgbClr val="E4DCCB"/>
-            </a:solidFill>
-            <a:prstDash val="solid"/>
-          </a:ln>
-        </p:spPr>
-      </p:sp>
-      <p:sp>
-        <p:nvSpPr>
-          <p:cNvPr id="18" name="Shape 16"/>
-          <p:cNvSpPr/>
-          <p:nvPr/>
-        </p:nvSpPr>
-        <p:spPr>
-          <a:xfrm>
-            <a:off x="640080" y="5394960"/>
-            <a:ext cx="54864" cy="1097280"/>
-          </a:xfrm>
-          <a:prstGeom prst="rect">
-            <a:avLst/>
-          </a:prstGeom>
-          <a:solidFill>
-            <a:srgbClr val="9A4C1F"/>
-          </a:solidFill>
-          <a:ln/>
-        </p:spPr>
-      </p:sp>
-      <p:sp>
-        <p:nvSpPr>
-          <p:cNvPr id="19" name="Text 17"/>
-          <p:cNvSpPr/>
-          <p:nvPr/>
-        </p:nvSpPr>
-        <p:spPr>
-          <a:xfrm>
-            <a:off x="914400" y="5504688"/>
-            <a:ext cx="10332720" cy="365760"/>
-          </a:xfrm>
-          <a:prstGeom prst="rect">
-            <a:avLst/>
-          </a:prstGeom>
-          <a:noFill/>
-          <a:ln/>
-        </p:spPr>
-        <p:txBody>
-          <a:bodyPr wrap="square" rtlCol="0" anchor="ctr"/>
-          <a:lstStyle/>
-          <a:p>
-            <a:pPr indent="0" marL="0">
-              <a:buNone/>
-            </a:pPr>
-            <a:r>
-              <a:rPr lang="en-US" sz="1400" b="1" dirty="0">
-                <a:solidFill>
-                  <a:srgbClr val="1B1F3B"/>
-                </a:solidFill>
-                <a:latin typeface="Segoe UI" pitchFamily="34" charset="0"/>
-                <a:ea typeface="Segoe UI" pitchFamily="34" charset="-122"/>
-                <a:cs typeface="Segoe UI" pitchFamily="34" charset="-120"/>
-              </a:rPr>
-              <a:t>Restauration de la description des ouvrages de bibliothèque</a:t>
-            </a:r>
-            <a:endParaRPr lang="en-US" sz="1400" dirty="0"/>
-          </a:p>
-        </p:txBody>
-      </p:sp>
-      <p:sp>
-        <p:nvSpPr>
-          <p:cNvPr id="20" name="Text 18"/>
-          <p:cNvSpPr/>
-          <p:nvPr/>
-        </p:nvSpPr>
-        <p:spPr>
-          <a:xfrm>
-            <a:off x="914400" y="5852160"/>
-            <a:ext cx="10332720" cy="594360"/>
-          </a:xfrm>
-          <a:prstGeom prst="rect">
-            <a:avLst/>
-          </a:prstGeom>
-          <a:noFill/>
-          <a:ln/>
-        </p:spPr>
-        <p:txBody>
-          <a:bodyPr wrap="square" rtlCol="0" anchor="ctr"/>
-          <a:lstStyle/>
-          <a:p>
-            <a:pPr indent="0" marL="0">
-              <a:lnSpc>
-                <a:spcPts val="1400"/>
-              </a:lnSpc>
-              <a:buNone/>
-            </a:pPr>
-            <a:r>
-              <a:rPr lang="en-US" sz="1100" dirty="0">
-                <a:solidFill>
-                  <a:srgbClr val="8A7C68"/>
-                </a:solidFill>
-                <a:latin typeface="Segoe UI" pitchFamily="34" charset="0"/>
-                <a:ea typeface="Segoe UI" pitchFamily="34" charset="-122"/>
-                <a:cs typeface="Segoe UI" pitchFamily="34" charset="-120"/>
-              </a:rPr>
-              <a:t>La description déjà saisie dans la Bibliothèque d'ouvrages est désormais reprise automatiquement quand l'ouvrage est ajouté à un devis, au lieu d'être perdue comme auparavant.</a:t>
-            </a:r>
-            <a:endParaRPr lang="en-US" sz="1100" dirty="0"/>
-          </a:p>
-        </p:txBody>
-      </p:sp>
-      <p:sp>
-        <p:nvSpPr>
-          <p:cNvPr id="21" name="Text 19"/>
+          <p:cNvPr id="13" name="Text 11"/>
           <p:cNvSpPr/>
           <p:nvPr/>
         </p:nvSpPr>
@@ -8306,7 +8395,7 @@
       </p:sp>
       <p:sp>
         <p:nvSpPr>
-          <p:cNvPr id="22" name="Text 20"/>
+          <p:cNvPr id="14" name="Text 12"/>
           <p:cNvSpPr/>
           <p:nvPr/>
         </p:nvSpPr>
@@ -8469,7 +8558,7 @@
                 <a:ea typeface="Georgia" pitchFamily="34" charset="-122"/>
                 <a:cs typeface="Georgia" pitchFamily="34" charset="-120"/>
               </a:rPr>
-              <a:t>Devis (suite)</a:t>
+              <a:t>Devis</a:t>
             </a:r>
             <a:endParaRPr lang="en-US" sz="2400" dirty="0"/>
           </a:p>
@@ -8555,7 +8644,7 @@
                 <a:ea typeface="Segoe UI" pitchFamily="34" charset="-122"/>
                 <a:cs typeface="Segoe UI" pitchFamily="34" charset="-120"/>
               </a:rPr>
-              <a:t>Référence client en texte libre</a:t>
+              <a:t>Génération PDF des devis réparée</a:t>
             </a:r>
             <a:endParaRPr lang="en-US" sz="1400" dirty="0"/>
           </a:p>
@@ -8597,7 +8686,7 @@
                 <a:ea typeface="Segoe UI" pitchFamily="34" charset="-122"/>
                 <a:cs typeface="Segoe UI" pitchFamily="34" charset="-120"/>
               </a:rPr>
-              <a:t>La 'Référence client' n'est plus une liste déroulante à choisir (qui pouvait donner l'impression que l'information saisie disparaissait) : c'est maintenant un champ texte simple qui garde exactement ce qui a été écrit.</a:t>
+              <a:t>La génération/aperçu PDF lisait encore l'ancien fichier JSON local et ne trouvait plus les devis créés depuis la migration Supabase ; corrigée pour lire directement la table partagée.</a:t>
             </a:r>
             <a:endParaRPr lang="en-US" sz="1100" dirty="0"/>
           </a:p>
@@ -8605,7 +8694,391 @@
       </p:sp>
       <p:sp>
         <p:nvSpPr>
-          <p:cNvPr id="9" name="Text 7"/>
+          <p:cNvPr id="9" name="Shape 7"/>
+          <p:cNvSpPr/>
+          <p:nvPr/>
+        </p:nvSpPr>
+        <p:spPr>
+          <a:xfrm>
+            <a:off x="640080" y="2926080"/>
+            <a:ext cx="10881360" cy="1097280"/>
+          </a:xfrm>
+          <a:prstGeom prst="roundRect">
+            <a:avLst>
+              <a:gd name="adj" fmla="val 5000"/>
+            </a:avLst>
+          </a:prstGeom>
+          <a:solidFill>
+            <a:srgbClr val="FFFFFF"/>
+          </a:solidFill>
+          <a:ln w="12700">
+            <a:solidFill>
+              <a:srgbClr val="E4DCCB"/>
+            </a:solidFill>
+            <a:prstDash val="solid"/>
+          </a:ln>
+        </p:spPr>
+      </p:sp>
+      <p:sp>
+        <p:nvSpPr>
+          <p:cNvPr id="10" name="Shape 8"/>
+          <p:cNvSpPr/>
+          <p:nvPr/>
+        </p:nvSpPr>
+        <p:spPr>
+          <a:xfrm>
+            <a:off x="640080" y="2926080"/>
+            <a:ext cx="54864" cy="1097280"/>
+          </a:xfrm>
+          <a:prstGeom prst="rect">
+            <a:avLst/>
+          </a:prstGeom>
+          <a:solidFill>
+            <a:srgbClr val="9A4C1F"/>
+          </a:solidFill>
+          <a:ln/>
+        </p:spPr>
+      </p:sp>
+      <p:sp>
+        <p:nvSpPr>
+          <p:cNvPr id="11" name="Text 9"/>
+          <p:cNvSpPr/>
+          <p:nvPr/>
+        </p:nvSpPr>
+        <p:spPr>
+          <a:xfrm>
+            <a:off x="914400" y="3035808"/>
+            <a:ext cx="10332720" cy="365760"/>
+          </a:xfrm>
+          <a:prstGeom prst="rect">
+            <a:avLst/>
+          </a:prstGeom>
+          <a:noFill/>
+          <a:ln/>
+        </p:spPr>
+        <p:txBody>
+          <a:bodyPr wrap="square" rtlCol="0" anchor="ctr"/>
+          <a:lstStyle/>
+          <a:p>
+            <a:pPr indent="0" marL="0">
+              <a:buNone/>
+            </a:pPr>
+            <a:r>
+              <a:rPr lang="en-US" sz="1400" b="1" dirty="0">
+                <a:solidFill>
+                  <a:srgbClr val="1B1F3B"/>
+                </a:solidFill>
+                <a:latin typeface="Segoe UI" pitchFamily="34" charset="0"/>
+                <a:ea typeface="Segoe UI" pitchFamily="34" charset="-122"/>
+                <a:cs typeface="Segoe UI" pitchFamily="34" charset="-120"/>
+              </a:rPr>
+              <a:t>Versioning et sauvegarde complète du devis</a:t>
+            </a:r>
+            <a:endParaRPr lang="en-US" sz="1400" dirty="0"/>
+          </a:p>
+        </p:txBody>
+      </p:sp>
+      <p:sp>
+        <p:nvSpPr>
+          <p:cNvPr id="12" name="Text 10"/>
+          <p:cNvSpPr/>
+          <p:nvPr/>
+        </p:nvSpPr>
+        <p:spPr>
+          <a:xfrm>
+            <a:off x="914400" y="3383280"/>
+            <a:ext cx="10332720" cy="594360"/>
+          </a:xfrm>
+          <a:prstGeom prst="rect">
+            <a:avLst/>
+          </a:prstGeom>
+          <a:noFill/>
+          <a:ln/>
+        </p:spPr>
+        <p:txBody>
+          <a:bodyPr wrap="square" rtlCol="0" anchor="ctr"/>
+          <a:lstStyle/>
+          <a:p>
+            <a:pPr indent="0" marL="0">
+              <a:lnSpc>
+                <a:spcPts val="1400"/>
+              </a:lnSpc>
+              <a:buNone/>
+            </a:pPr>
+            <a:r>
+              <a:rPr lang="en-US" sz="1100" dirty="0">
+                <a:solidFill>
+                  <a:srgbClr val="8A7C68"/>
+                </a:solidFill>
+                <a:latin typeface="Segoe UI" pitchFamily="34" charset="0"/>
+                <a:ea typeface="Segoe UI" pitchFamily="34" charset="-122"/>
+                <a:cs typeface="Segoe UI" pitchFamily="34" charset="-120"/>
+              </a:rPr>
+              <a:t>Le numéro de version s'incrémente à chaque enregistrement manuel ; les notes, majorations/minorations et le taux de TVA choisi, qui se perdaient silencieusement, sont désormais bien sauvegardés.</a:t>
+            </a:r>
+            <a:endParaRPr lang="en-US" sz="1100" dirty="0"/>
+          </a:p>
+        </p:txBody>
+      </p:sp>
+      <p:sp>
+        <p:nvSpPr>
+          <p:cNvPr id="13" name="Shape 11"/>
+          <p:cNvSpPr/>
+          <p:nvPr/>
+        </p:nvSpPr>
+        <p:spPr>
+          <a:xfrm>
+            <a:off x="640080" y="4160520"/>
+            <a:ext cx="10881360" cy="1097280"/>
+          </a:xfrm>
+          <a:prstGeom prst="roundRect">
+            <a:avLst>
+              <a:gd name="adj" fmla="val 5000"/>
+            </a:avLst>
+          </a:prstGeom>
+          <a:solidFill>
+            <a:srgbClr val="FFFFFF"/>
+          </a:solidFill>
+          <a:ln w="12700">
+            <a:solidFill>
+              <a:srgbClr val="E4DCCB"/>
+            </a:solidFill>
+            <a:prstDash val="solid"/>
+          </a:ln>
+        </p:spPr>
+      </p:sp>
+      <p:sp>
+        <p:nvSpPr>
+          <p:cNvPr id="14" name="Shape 12"/>
+          <p:cNvSpPr/>
+          <p:nvPr/>
+        </p:nvSpPr>
+        <p:spPr>
+          <a:xfrm>
+            <a:off x="640080" y="4160520"/>
+            <a:ext cx="54864" cy="1097280"/>
+          </a:xfrm>
+          <a:prstGeom prst="rect">
+            <a:avLst/>
+          </a:prstGeom>
+          <a:solidFill>
+            <a:srgbClr val="9A4C1F"/>
+          </a:solidFill>
+          <a:ln/>
+        </p:spPr>
+      </p:sp>
+      <p:sp>
+        <p:nvSpPr>
+          <p:cNvPr id="15" name="Text 13"/>
+          <p:cNvSpPr/>
+          <p:nvPr/>
+        </p:nvSpPr>
+        <p:spPr>
+          <a:xfrm>
+            <a:off x="914400" y="4270248"/>
+            <a:ext cx="10332720" cy="365760"/>
+          </a:xfrm>
+          <a:prstGeom prst="rect">
+            <a:avLst/>
+          </a:prstGeom>
+          <a:noFill/>
+          <a:ln/>
+        </p:spPr>
+        <p:txBody>
+          <a:bodyPr wrap="square" rtlCol="0" anchor="ctr"/>
+          <a:lstStyle/>
+          <a:p>
+            <a:pPr indent="0" marL="0">
+              <a:buNone/>
+            </a:pPr>
+            <a:r>
+              <a:rPr lang="en-US" sz="1400" b="1" dirty="0">
+                <a:solidFill>
+                  <a:srgbClr val="1B1F3B"/>
+                </a:solidFill>
+                <a:latin typeface="Segoe UI" pitchFamily="34" charset="0"/>
+                <a:ea typeface="Segoe UI" pitchFamily="34" charset="-122"/>
+                <a:cs typeface="Segoe UI" pitchFamily="34" charset="-120"/>
+              </a:rPr>
+              <a:t>Taux horaire par défaut sur la bibliothèque</a:t>
+            </a:r>
+            <a:endParaRPr lang="en-US" sz="1400" dirty="0"/>
+          </a:p>
+        </p:txBody>
+      </p:sp>
+      <p:sp>
+        <p:nvSpPr>
+          <p:cNvPr id="16" name="Text 14"/>
+          <p:cNvSpPr/>
+          <p:nvPr/>
+        </p:nvSpPr>
+        <p:spPr>
+          <a:xfrm>
+            <a:off x="914400" y="4617720"/>
+            <a:ext cx="10332720" cy="594360"/>
+          </a:xfrm>
+          <a:prstGeom prst="rect">
+            <a:avLst/>
+          </a:prstGeom>
+          <a:noFill/>
+          <a:ln/>
+        </p:spPr>
+        <p:txBody>
+          <a:bodyPr wrap="square" rtlCol="0" anchor="ctr"/>
+          <a:lstStyle/>
+          <a:p>
+            <a:pPr indent="0" marL="0">
+              <a:lnSpc>
+                <a:spcPts val="1400"/>
+              </a:lnSpc>
+              <a:buNone/>
+            </a:pPr>
+            <a:r>
+              <a:rPr lang="en-US" sz="1100" dirty="0">
+                <a:solidFill>
+                  <a:srgbClr val="8A7C68"/>
+                </a:solidFill>
+                <a:latin typeface="Segoe UI" pitchFamily="34" charset="0"/>
+                <a:ea typeface="Segoe UI" pitchFamily="34" charset="-122"/>
+                <a:cs typeface="Segoe UI" pitchFamily="34" charset="-120"/>
+              </a:rPr>
+              <a:t>Le taux horaire du profil entreprise sert désormais de valeur par défaut pour chaque ouvrage (liste, création, édition, calcul du coût main d'œuvre).</a:t>
+            </a:r>
+            <a:endParaRPr lang="en-US" sz="1100" dirty="0"/>
+          </a:p>
+        </p:txBody>
+      </p:sp>
+      <p:sp>
+        <p:nvSpPr>
+          <p:cNvPr id="17" name="Shape 15"/>
+          <p:cNvSpPr/>
+          <p:nvPr/>
+        </p:nvSpPr>
+        <p:spPr>
+          <a:xfrm>
+            <a:off x="640080" y="5394960"/>
+            <a:ext cx="10881360" cy="1097280"/>
+          </a:xfrm>
+          <a:prstGeom prst="roundRect">
+            <a:avLst>
+              <a:gd name="adj" fmla="val 5000"/>
+            </a:avLst>
+          </a:prstGeom>
+          <a:solidFill>
+            <a:srgbClr val="FFFFFF"/>
+          </a:solidFill>
+          <a:ln w="12700">
+            <a:solidFill>
+              <a:srgbClr val="E4DCCB"/>
+            </a:solidFill>
+            <a:prstDash val="solid"/>
+          </a:ln>
+        </p:spPr>
+      </p:sp>
+      <p:sp>
+        <p:nvSpPr>
+          <p:cNvPr id="18" name="Shape 16"/>
+          <p:cNvSpPr/>
+          <p:nvPr/>
+        </p:nvSpPr>
+        <p:spPr>
+          <a:xfrm>
+            <a:off x="640080" y="5394960"/>
+            <a:ext cx="54864" cy="1097280"/>
+          </a:xfrm>
+          <a:prstGeom prst="rect">
+            <a:avLst/>
+          </a:prstGeom>
+          <a:solidFill>
+            <a:srgbClr val="9A4C1F"/>
+          </a:solidFill>
+          <a:ln/>
+        </p:spPr>
+      </p:sp>
+      <p:sp>
+        <p:nvSpPr>
+          <p:cNvPr id="19" name="Text 17"/>
+          <p:cNvSpPr/>
+          <p:nvPr/>
+        </p:nvSpPr>
+        <p:spPr>
+          <a:xfrm>
+            <a:off x="914400" y="5504688"/>
+            <a:ext cx="10332720" cy="365760"/>
+          </a:xfrm>
+          <a:prstGeom prst="rect">
+            <a:avLst/>
+          </a:prstGeom>
+          <a:noFill/>
+          <a:ln/>
+        </p:spPr>
+        <p:txBody>
+          <a:bodyPr wrap="square" rtlCol="0" anchor="ctr"/>
+          <a:lstStyle/>
+          <a:p>
+            <a:pPr indent="0" marL="0">
+              <a:buNone/>
+            </a:pPr>
+            <a:r>
+              <a:rPr lang="en-US" sz="1400" b="1" dirty="0">
+                <a:solidFill>
+                  <a:srgbClr val="1B1F3B"/>
+                </a:solidFill>
+                <a:latin typeface="Segoe UI" pitchFamily="34" charset="0"/>
+                <a:ea typeface="Segoe UI" pitchFamily="34" charset="-122"/>
+                <a:cs typeface="Segoe UI" pitchFamily="34" charset="-120"/>
+              </a:rPr>
+              <a:t>Restauration de la description des ouvrages de bibliothèque</a:t>
+            </a:r>
+            <a:endParaRPr lang="en-US" sz="1400" dirty="0"/>
+          </a:p>
+        </p:txBody>
+      </p:sp>
+      <p:sp>
+        <p:nvSpPr>
+          <p:cNvPr id="20" name="Text 18"/>
+          <p:cNvSpPr/>
+          <p:nvPr/>
+        </p:nvSpPr>
+        <p:spPr>
+          <a:xfrm>
+            <a:off x="914400" y="5852160"/>
+            <a:ext cx="10332720" cy="594360"/>
+          </a:xfrm>
+          <a:prstGeom prst="rect">
+            <a:avLst/>
+          </a:prstGeom>
+          <a:noFill/>
+          <a:ln/>
+        </p:spPr>
+        <p:txBody>
+          <a:bodyPr wrap="square" rtlCol="0" anchor="ctr"/>
+          <a:lstStyle/>
+          <a:p>
+            <a:pPr indent="0" marL="0">
+              <a:lnSpc>
+                <a:spcPts val="1400"/>
+              </a:lnSpc>
+              <a:buNone/>
+            </a:pPr>
+            <a:r>
+              <a:rPr lang="en-US" sz="1100" dirty="0">
+                <a:solidFill>
+                  <a:srgbClr val="8A7C68"/>
+                </a:solidFill>
+                <a:latin typeface="Segoe UI" pitchFamily="34" charset="0"/>
+                <a:ea typeface="Segoe UI" pitchFamily="34" charset="-122"/>
+                <a:cs typeface="Segoe UI" pitchFamily="34" charset="-120"/>
+              </a:rPr>
+              <a:t>La description déjà saisie dans la Bibliothèque d'ouvrages est désormais reprise automatiquement quand l'ouvrage est ajouté à un devis, au lieu d'être perdue comme auparavant.</a:t>
+            </a:r>
+            <a:endParaRPr lang="en-US" sz="1100" dirty="0"/>
+          </a:p>
+        </p:txBody>
+      </p:sp>
+      <p:sp>
+        <p:nvSpPr>
+          <p:cNvPr id="21" name="Text 19"/>
           <p:cNvSpPr/>
           <p:nvPr/>
         </p:nvSpPr>
@@ -8644,7 +9117,7 @@
       </p:sp>
       <p:sp>
         <p:nvSpPr>
-          <p:cNvPr id="10" name="Text 8"/>
+          <p:cNvPr id="22" name="Text 20"/>
           <p:cNvSpPr/>
           <p:nvPr/>
         </p:nvSpPr>
@@ -8807,7 +9280,7 @@
                 <a:ea typeface="Georgia" pitchFamily="34" charset="-122"/>
                 <a:cs typeface="Georgia" pitchFamily="34" charset="-120"/>
               </a:rPr>
-              <a:t>Chantiers</a:t>
+              <a:t>Devis (suite)</a:t>
             </a:r>
             <a:endParaRPr lang="en-US" sz="2400" dirty="0"/>
           </a:p>
@@ -8893,7 +9366,7 @@
                 <a:ea typeface="Segoe UI" pitchFamily="34" charset="-122"/>
                 <a:cs typeface="Segoe UI" pitchFamily="34" charset="-120"/>
               </a:rPr>
-              <a:t>Correction d'un bug bloquant majeur</a:t>
+              <a:t>Référence client en texte libre</a:t>
             </a:r>
             <a:endParaRPr lang="en-US" sz="1400" dirty="0"/>
           </a:p>
@@ -8935,7 +9408,7 @@
                 <a:ea typeface="Segoe UI" pitchFamily="34" charset="-122"/>
                 <a:cs typeface="Segoe UI" pitchFamily="34" charset="-120"/>
               </a:rPr>
-              <a:t>Un chantier ne pouvait être consulté que si son devis était déjà signé par le client, empêchant toute préparation en amont. Corrigé : la fiche chantier est désormais accessible dès sa création.</a:t>
+              <a:t>La 'Référence client' n'est plus une liste déroulante à choisir (qui pouvait donner l'impression que l'information saisie disparaissait) : c'est maintenant un champ texte simple qui garde exactement ce qui a été écrit.</a:t>
             </a:r>
             <a:endParaRPr lang="en-US" sz="1100" dirty="0"/>
           </a:p>
@@ -9021,7 +9494,7 @@
                 <a:ea typeface="Segoe UI" pitchFamily="34" charset="-122"/>
                 <a:cs typeface="Segoe UI" pitchFamily="34" charset="-120"/>
               </a:rPr>
-              <a:t>Dépenses liées à un ouvrage précis</a:t>
+              <a:t>Correction du calcul du total d'un devis (majorations non comptées)</a:t>
             </a:r>
             <a:endParaRPr lang="en-US" sz="1400" dirty="0"/>
           </a:p>
@@ -9063,7 +9536,7 @@
                 <a:ea typeface="Segoe UI" pitchFamily="34" charset="-122"/>
                 <a:cs typeface="Segoe UI" pitchFamily="34" charset="-120"/>
               </a:rPr>
-              <a:t>L'API des dépenses accepte désormais un identifiant de tâche (ouvrage) en plus du chantier, pour un suivi financier plus fin.</a:t>
+              <a:t>Le montant Total HT / TVA / Total TTC enregistré pour chaque devis ne prenait pas en compte les majorations (coordination de chantier, provision aléas, assurance décennale), même si elles étaient listées sur le document. Corrigé à la source (calcul serveur) : le total inclut désormais bien les majorations, partout où il est utilisé (tableau de bord, facturation, signature client, archives).</a:t>
             </a:r>
             <a:endParaRPr lang="en-US" sz="1100" dirty="0"/>
           </a:p>
@@ -9071,7 +9544,135 @@
       </p:sp>
       <p:sp>
         <p:nvSpPr>
-          <p:cNvPr id="13" name="Text 11"/>
+          <p:cNvPr id="13" name="Shape 11"/>
+          <p:cNvSpPr/>
+          <p:nvPr/>
+        </p:nvSpPr>
+        <p:spPr>
+          <a:xfrm>
+            <a:off x="640080" y="4160520"/>
+            <a:ext cx="10881360" cy="1097280"/>
+          </a:xfrm>
+          <a:prstGeom prst="roundRect">
+            <a:avLst>
+              <a:gd name="adj" fmla="val 5000"/>
+            </a:avLst>
+          </a:prstGeom>
+          <a:solidFill>
+            <a:srgbClr val="FFFFFF"/>
+          </a:solidFill>
+          <a:ln w="12700">
+            <a:solidFill>
+              <a:srgbClr val="E4DCCB"/>
+            </a:solidFill>
+            <a:prstDash val="solid"/>
+          </a:ln>
+        </p:spPr>
+      </p:sp>
+      <p:sp>
+        <p:nvSpPr>
+          <p:cNvPr id="14" name="Shape 12"/>
+          <p:cNvSpPr/>
+          <p:nvPr/>
+        </p:nvSpPr>
+        <p:spPr>
+          <a:xfrm>
+            <a:off x="640080" y="4160520"/>
+            <a:ext cx="54864" cy="1097280"/>
+          </a:xfrm>
+          <a:prstGeom prst="rect">
+            <a:avLst/>
+          </a:prstGeom>
+          <a:solidFill>
+            <a:srgbClr val="9A4C1F"/>
+          </a:solidFill>
+          <a:ln/>
+        </p:spPr>
+      </p:sp>
+      <p:sp>
+        <p:nvSpPr>
+          <p:cNvPr id="15" name="Text 13"/>
+          <p:cNvSpPr/>
+          <p:nvPr/>
+        </p:nvSpPr>
+        <p:spPr>
+          <a:xfrm>
+            <a:off x="914400" y="4270248"/>
+            <a:ext cx="10332720" cy="365760"/>
+          </a:xfrm>
+          <a:prstGeom prst="rect">
+            <a:avLst/>
+          </a:prstGeom>
+          <a:noFill/>
+          <a:ln/>
+        </p:spPr>
+        <p:txBody>
+          <a:bodyPr wrap="square" rtlCol="0" anchor="ctr"/>
+          <a:lstStyle/>
+          <a:p>
+            <a:pPr indent="0" marL="0">
+              <a:buNone/>
+            </a:pPr>
+            <a:r>
+              <a:rPr lang="en-US" sz="1400" b="1" dirty="0">
+                <a:solidFill>
+                  <a:srgbClr val="1B1F3B"/>
+                </a:solidFill>
+                <a:latin typeface="Segoe UI" pitchFamily="34" charset="0"/>
+                <a:ea typeface="Segoe UI" pitchFamily="34" charset="-122"/>
+                <a:cs typeface="Segoe UI" pitchFamily="34" charset="-120"/>
+              </a:rPr>
+              <a:t>Taux de TVA de chaque ligne aligné sur le devis</a:t>
+            </a:r>
+            <a:endParaRPr lang="en-US" sz="1400" dirty="0"/>
+          </a:p>
+        </p:txBody>
+      </p:sp>
+      <p:sp>
+        <p:nvSpPr>
+          <p:cNvPr id="16" name="Text 14"/>
+          <p:cNvSpPr/>
+          <p:nvPr/>
+        </p:nvSpPr>
+        <p:spPr>
+          <a:xfrm>
+            <a:off x="914400" y="4617720"/>
+            <a:ext cx="10332720" cy="594360"/>
+          </a:xfrm>
+          <a:prstGeom prst="rect">
+            <a:avLst/>
+          </a:prstGeom>
+          <a:noFill/>
+          <a:ln/>
+        </p:spPr>
+        <p:txBody>
+          <a:bodyPr wrap="square" rtlCol="0" anchor="ctr"/>
+          <a:lstStyle/>
+          <a:p>
+            <a:pPr indent="0" marL="0">
+              <a:lnSpc>
+                <a:spcPts val="1400"/>
+              </a:lnSpc>
+              <a:buNone/>
+            </a:pPr>
+            <a:r>
+              <a:rPr lang="en-US" sz="1100" dirty="0">
+                <a:solidFill>
+                  <a:srgbClr val="8A7C68"/>
+                </a:solidFill>
+                <a:latin typeface="Segoe UI" pitchFamily="34" charset="0"/>
+                <a:ea typeface="Segoe UI" pitchFamily="34" charset="-122"/>
+                <a:cs typeface="Segoe UI" pitchFamily="34" charset="-120"/>
+              </a:rPr>
+              <a:t>Chaque ligne de devis calculait sa propre TVA à 20% par défaut, sans tenir compte du taux choisi pour le devis (ex. 10%) — corrigé pour utiliser le taux réellement sélectionné.</a:t>
+            </a:r>
+            <a:endParaRPr lang="en-US" sz="1100" dirty="0"/>
+          </a:p>
+        </p:txBody>
+      </p:sp>
+      <p:sp>
+        <p:nvSpPr>
+          <p:cNvPr id="17" name="Text 15"/>
           <p:cNvSpPr/>
           <p:nvPr/>
         </p:nvSpPr>
@@ -9110,7 +9711,7 @@
       </p:sp>
       <p:sp>
         <p:nvSpPr>
-          <p:cNvPr id="14" name="Text 12"/>
+          <p:cNvPr id="18" name="Text 16"/>
           <p:cNvSpPr/>
           <p:nvPr/>
         </p:nvSpPr>
@@ -9317,7 +9918,7 @@
                 <a:ea typeface="Georgia" pitchFamily="34" charset="-122"/>
                 <a:cs typeface="Georgia" pitchFamily="34" charset="-120"/>
               </a:rPr>
-              <a:t>67</a:t>
+              <a:t>71</a:t>
             </a:r>
             <a:endParaRPr lang="en-US" sz="3200" dirty="0"/>
           </a:p>
@@ -9422,7 +10023,7 @@
                 <a:ea typeface="Georgia" pitchFamily="34" charset="-122"/>
                 <a:cs typeface="Georgia" pitchFamily="34" charset="-120"/>
               </a:rPr>
-              <a:t>35</a:t>
+              <a:t>36</a:t>
             </a:r>
             <a:endParaRPr lang="en-US" sz="3200" dirty="0"/>
           </a:p>
@@ -9527,7 +10128,7 @@
                 <a:ea typeface="Georgia" pitchFamily="34" charset="-122"/>
                 <a:cs typeface="Georgia" pitchFamily="34" charset="-120"/>
               </a:rPr>
-              <a:t>25</a:t>
+              <a:t>27</a:t>
             </a:r>
             <a:endParaRPr lang="en-US" sz="3200" dirty="0"/>
           </a:p>
@@ -9632,7 +10233,7 @@
                 <a:ea typeface="Georgia" pitchFamily="34" charset="-122"/>
                 <a:cs typeface="Georgia" pitchFamily="34" charset="-120"/>
               </a:rPr>
-              <a:t>7</a:t>
+              <a:t>8</a:t>
             </a:r>
             <a:endParaRPr lang="en-US" sz="3200" dirty="0"/>
           </a:p>
@@ -10038,7 +10639,7 @@
                 <a:ea typeface="Georgia" pitchFamily="34" charset="-122"/>
                 <a:cs typeface="Georgia" pitchFamily="34" charset="-120"/>
               </a:rPr>
-              <a:t>Équipe</a:t>
+              <a:t>Chantiers</a:t>
             </a:r>
             <a:endParaRPr lang="en-US" sz="2400" dirty="0"/>
           </a:p>
@@ -10124,7 +10725,7 @@
                 <a:ea typeface="Segoe UI" pitchFamily="34" charset="-122"/>
                 <a:cs typeface="Segoe UI" pitchFamily="34" charset="-120"/>
               </a:rPr>
-              <a:t>Six types de pointage</a:t>
+              <a:t>Correction d'un bug bloquant majeur</a:t>
             </a:r>
             <a:endParaRPr lang="en-US" sz="1400" dirty="0"/>
           </a:p>
@@ -10166,7 +10767,7 @@
                 <a:ea typeface="Segoe UI" pitchFamily="34" charset="-122"/>
                 <a:cs typeface="Segoe UI" pitchFamily="34" charset="-120"/>
               </a:rPr>
-              <a:t>Heures de travail, jour de travail, forfait, ouvrage, passage, déplacement — chacun avec date et montant ; le montant des heures est calculé automatiquement à partir du taux horaire de l'ouvrier.</a:t>
+              <a:t>Un chantier ne pouvait être consulté que si son devis était déjà signé par le client, empêchant toute préparation en amont. Corrigé : la fiche chantier est désormais accessible dès sa création.</a:t>
             </a:r>
             <a:endParaRPr lang="en-US" sz="1100" dirty="0"/>
           </a:p>
@@ -10252,7 +10853,7 @@
                 <a:ea typeface="Segoe UI" pitchFamily="34" charset="-122"/>
                 <a:cs typeface="Segoe UI" pitchFamily="34" charset="-120"/>
               </a:rPr>
-              <a:t>Alertes automatiques de dépassement / manque d'heures</a:t>
+              <a:t>Dépenses liées à un ouvrage précis</a:t>
             </a:r>
             <a:endParaRPr lang="en-US" sz="1400" dirty="0"/>
           </a:p>
@@ -10294,7 +10895,7 @@
                 <a:ea typeface="Segoe UI" pitchFamily="34" charset="-122"/>
                 <a:cs typeface="Segoe UI" pitchFamily="34" charset="-120"/>
               </a:rPr>
-              <a:t>À la fin de chaque semaine, si le total travaillé diffère du contrat de plus de 15 minutes, une notification est envoyée automatiquement à l'entreprise (une seule fois par semaine et par ouvrier).</a:t>
+              <a:t>L'API des dépenses accepte désormais un identifiant de tâche (ouvrage) en plus du chantier, pour un suivi financier plus fin.</a:t>
             </a:r>
             <a:endParaRPr lang="en-US" sz="1100" dirty="0"/>
           </a:p>
@@ -10302,135 +10903,7 @@
       </p:sp>
       <p:sp>
         <p:nvSpPr>
-          <p:cNvPr id="13" name="Shape 11"/>
-          <p:cNvSpPr/>
-          <p:nvPr/>
-        </p:nvSpPr>
-        <p:spPr>
-          <a:xfrm>
-            <a:off x="640080" y="4160520"/>
-            <a:ext cx="10881360" cy="1097280"/>
-          </a:xfrm>
-          <a:prstGeom prst="roundRect">
-            <a:avLst>
-              <a:gd name="adj" fmla="val 5000"/>
-            </a:avLst>
-          </a:prstGeom>
-          <a:solidFill>
-            <a:srgbClr val="FFFFFF"/>
-          </a:solidFill>
-          <a:ln w="12700">
-            <a:solidFill>
-              <a:srgbClr val="E4DCCB"/>
-            </a:solidFill>
-            <a:prstDash val="solid"/>
-          </a:ln>
-        </p:spPr>
-      </p:sp>
-      <p:sp>
-        <p:nvSpPr>
-          <p:cNvPr id="14" name="Shape 12"/>
-          <p:cNvSpPr/>
-          <p:nvPr/>
-        </p:nvSpPr>
-        <p:spPr>
-          <a:xfrm>
-            <a:off x="640080" y="4160520"/>
-            <a:ext cx="54864" cy="1097280"/>
-          </a:xfrm>
-          <a:prstGeom prst="rect">
-            <a:avLst/>
-          </a:prstGeom>
-          <a:solidFill>
-            <a:srgbClr val="9A4C1F"/>
-          </a:solidFill>
-          <a:ln/>
-        </p:spPr>
-      </p:sp>
-      <p:sp>
-        <p:nvSpPr>
-          <p:cNvPr id="15" name="Text 13"/>
-          <p:cNvSpPr/>
-          <p:nvPr/>
-        </p:nvSpPr>
-        <p:spPr>
-          <a:xfrm>
-            <a:off x="914400" y="4270248"/>
-            <a:ext cx="10332720" cy="365760"/>
-          </a:xfrm>
-          <a:prstGeom prst="rect">
-            <a:avLst/>
-          </a:prstGeom>
-          <a:noFill/>
-          <a:ln/>
-        </p:spPr>
-        <p:txBody>
-          <a:bodyPr wrap="square" rtlCol="0" anchor="ctr"/>
-          <a:lstStyle/>
-          <a:p>
-            <a:pPr indent="0" marL="0">
-              <a:buNone/>
-            </a:pPr>
-            <a:r>
-              <a:rPr lang="en-US" sz="1400" b="1" dirty="0">
-                <a:solidFill>
-                  <a:srgbClr val="1B1F3B"/>
-                </a:solidFill>
-                <a:latin typeface="Segoe UI" pitchFamily="34" charset="0"/>
-                <a:ea typeface="Segoe UI" pitchFamily="34" charset="-122"/>
-                <a:cs typeface="Segoe UI" pitchFamily="34" charset="-120"/>
-              </a:rPr>
-              <a:t>Export PDF du relevé d'heures</a:t>
-            </a:r>
-            <a:endParaRPr lang="en-US" sz="1400" dirty="0"/>
-          </a:p>
-        </p:txBody>
-      </p:sp>
-      <p:sp>
-        <p:nvSpPr>
-          <p:cNvPr id="16" name="Text 14"/>
-          <p:cNvSpPr/>
-          <p:nvPr/>
-        </p:nvSpPr>
-        <p:spPr>
-          <a:xfrm>
-            <a:off x="914400" y="4617720"/>
-            <a:ext cx="10332720" cy="594360"/>
-          </a:xfrm>
-          <a:prstGeom prst="rect">
-            <a:avLst/>
-          </a:prstGeom>
-          <a:noFill/>
-          <a:ln/>
-        </p:spPr>
-        <p:txBody>
-          <a:bodyPr wrap="square" rtlCol="0" anchor="ctr"/>
-          <a:lstStyle/>
-          <a:p>
-            <a:pPr indent="0" marL="0">
-              <a:lnSpc>
-                <a:spcPts val="1400"/>
-              </a:lnSpc>
-              <a:buNone/>
-            </a:pPr>
-            <a:r>
-              <a:rPr lang="en-US" sz="1100" dirty="0">
-                <a:solidFill>
-                  <a:srgbClr val="8A7C68"/>
-                </a:solidFill>
-                <a:latin typeface="Segoe UI" pitchFamily="34" charset="0"/>
-                <a:ea typeface="Segoe UI" pitchFamily="34" charset="-122"/>
-                <a:cs typeface="Segoe UI" pitchFamily="34" charset="-120"/>
-              </a:rPr>
-              <a:t>Génération d'un PDF mensuel par ouvrier : détail par journée/type de pointage, totaux hebdomadaires, total du mois en heures et en montant — pensé pour la comptabilité et la gestion de la paie.</a:t>
-            </a:r>
-            <a:endParaRPr lang="en-US" sz="1100" dirty="0"/>
-          </a:p>
-        </p:txBody>
-      </p:sp>
-      <p:sp>
-        <p:nvSpPr>
-          <p:cNvPr id="17" name="Text 15"/>
+          <p:cNvPr id="13" name="Text 11"/>
           <p:cNvSpPr/>
           <p:nvPr/>
         </p:nvSpPr>
@@ -10469,7 +10942,7 @@
       </p:sp>
       <p:sp>
         <p:nvSpPr>
-          <p:cNvPr id="18" name="Text 16"/>
+          <p:cNvPr id="14" name="Text 12"/>
           <p:cNvSpPr/>
           <p:nvPr/>
         </p:nvSpPr>
@@ -10632,7 +11105,7 @@
                 <a:ea typeface="Georgia" pitchFamily="34" charset="-122"/>
                 <a:cs typeface="Georgia" pitchFamily="34" charset="-120"/>
               </a:rPr>
-              <a:t>Notifications</a:t>
+              <a:t>Équipe</a:t>
             </a:r>
             <a:endParaRPr lang="en-US" sz="2400" dirty="0"/>
           </a:p>
@@ -10718,7 +11191,7 @@
                 <a:ea typeface="Segoe UI" pitchFamily="34" charset="-122"/>
                 <a:cs typeface="Segoe UI" pitchFamily="34" charset="-120"/>
               </a:rPr>
-              <a:t>Envoi d'email réel à la signature du devis</a:t>
+              <a:t>Six types de pointage</a:t>
             </a:r>
             <a:endParaRPr lang="en-US" sz="1400" dirty="0"/>
           </a:p>
@@ -10760,7 +11233,7 @@
                 <a:ea typeface="Segoe UI" pitchFamily="34" charset="-122"/>
                 <a:cs typeface="Segoe UI" pitchFamily="34" charset="-120"/>
               </a:rPr>
-              <a:t>Le premier envoi des identifiants client déclenche désormais un vrai email (SMTP), et plus seulement une file d'attente locale.</a:t>
+              <a:t>Heures de travail, jour de travail, forfait, ouvrage, passage, déplacement — chacun avec date et montant ; le montant des heures est calculé automatiquement à partir du taux horaire de l'ouvrier.</a:t>
             </a:r>
             <a:endParaRPr lang="en-US" sz="1100" dirty="0"/>
           </a:p>
@@ -10768,7 +11241,263 @@
       </p:sp>
       <p:sp>
         <p:nvSpPr>
-          <p:cNvPr id="9" name="Text 7"/>
+          <p:cNvPr id="9" name="Shape 7"/>
+          <p:cNvSpPr/>
+          <p:nvPr/>
+        </p:nvSpPr>
+        <p:spPr>
+          <a:xfrm>
+            <a:off x="640080" y="2926080"/>
+            <a:ext cx="10881360" cy="1097280"/>
+          </a:xfrm>
+          <a:prstGeom prst="roundRect">
+            <a:avLst>
+              <a:gd name="adj" fmla="val 5000"/>
+            </a:avLst>
+          </a:prstGeom>
+          <a:solidFill>
+            <a:srgbClr val="FFFFFF"/>
+          </a:solidFill>
+          <a:ln w="12700">
+            <a:solidFill>
+              <a:srgbClr val="E4DCCB"/>
+            </a:solidFill>
+            <a:prstDash val="solid"/>
+          </a:ln>
+        </p:spPr>
+      </p:sp>
+      <p:sp>
+        <p:nvSpPr>
+          <p:cNvPr id="10" name="Shape 8"/>
+          <p:cNvSpPr/>
+          <p:nvPr/>
+        </p:nvSpPr>
+        <p:spPr>
+          <a:xfrm>
+            <a:off x="640080" y="2926080"/>
+            <a:ext cx="54864" cy="1097280"/>
+          </a:xfrm>
+          <a:prstGeom prst="rect">
+            <a:avLst/>
+          </a:prstGeom>
+          <a:solidFill>
+            <a:srgbClr val="9A4C1F"/>
+          </a:solidFill>
+          <a:ln/>
+        </p:spPr>
+      </p:sp>
+      <p:sp>
+        <p:nvSpPr>
+          <p:cNvPr id="11" name="Text 9"/>
+          <p:cNvSpPr/>
+          <p:nvPr/>
+        </p:nvSpPr>
+        <p:spPr>
+          <a:xfrm>
+            <a:off x="914400" y="3035808"/>
+            <a:ext cx="10332720" cy="365760"/>
+          </a:xfrm>
+          <a:prstGeom prst="rect">
+            <a:avLst/>
+          </a:prstGeom>
+          <a:noFill/>
+          <a:ln/>
+        </p:spPr>
+        <p:txBody>
+          <a:bodyPr wrap="square" rtlCol="0" anchor="ctr"/>
+          <a:lstStyle/>
+          <a:p>
+            <a:pPr indent="0" marL="0">
+              <a:buNone/>
+            </a:pPr>
+            <a:r>
+              <a:rPr lang="en-US" sz="1400" b="1" dirty="0">
+                <a:solidFill>
+                  <a:srgbClr val="1B1F3B"/>
+                </a:solidFill>
+                <a:latin typeface="Segoe UI" pitchFamily="34" charset="0"/>
+                <a:ea typeface="Segoe UI" pitchFamily="34" charset="-122"/>
+                <a:cs typeface="Segoe UI" pitchFamily="34" charset="-120"/>
+              </a:rPr>
+              <a:t>Alertes automatiques de dépassement / manque d'heures</a:t>
+            </a:r>
+            <a:endParaRPr lang="en-US" sz="1400" dirty="0"/>
+          </a:p>
+        </p:txBody>
+      </p:sp>
+      <p:sp>
+        <p:nvSpPr>
+          <p:cNvPr id="12" name="Text 10"/>
+          <p:cNvSpPr/>
+          <p:nvPr/>
+        </p:nvSpPr>
+        <p:spPr>
+          <a:xfrm>
+            <a:off x="914400" y="3383280"/>
+            <a:ext cx="10332720" cy="594360"/>
+          </a:xfrm>
+          <a:prstGeom prst="rect">
+            <a:avLst/>
+          </a:prstGeom>
+          <a:noFill/>
+          <a:ln/>
+        </p:spPr>
+        <p:txBody>
+          <a:bodyPr wrap="square" rtlCol="0" anchor="ctr"/>
+          <a:lstStyle/>
+          <a:p>
+            <a:pPr indent="0" marL="0">
+              <a:lnSpc>
+                <a:spcPts val="1400"/>
+              </a:lnSpc>
+              <a:buNone/>
+            </a:pPr>
+            <a:r>
+              <a:rPr lang="en-US" sz="1100" dirty="0">
+                <a:solidFill>
+                  <a:srgbClr val="8A7C68"/>
+                </a:solidFill>
+                <a:latin typeface="Segoe UI" pitchFamily="34" charset="0"/>
+                <a:ea typeface="Segoe UI" pitchFamily="34" charset="-122"/>
+                <a:cs typeface="Segoe UI" pitchFamily="34" charset="-120"/>
+              </a:rPr>
+              <a:t>À la fin de chaque semaine, si le total travaillé diffère du contrat de plus de 15 minutes, une notification est envoyée automatiquement à l'entreprise (une seule fois par semaine et par ouvrier).</a:t>
+            </a:r>
+            <a:endParaRPr lang="en-US" sz="1100" dirty="0"/>
+          </a:p>
+        </p:txBody>
+      </p:sp>
+      <p:sp>
+        <p:nvSpPr>
+          <p:cNvPr id="13" name="Shape 11"/>
+          <p:cNvSpPr/>
+          <p:nvPr/>
+        </p:nvSpPr>
+        <p:spPr>
+          <a:xfrm>
+            <a:off x="640080" y="4160520"/>
+            <a:ext cx="10881360" cy="1097280"/>
+          </a:xfrm>
+          <a:prstGeom prst="roundRect">
+            <a:avLst>
+              <a:gd name="adj" fmla="val 5000"/>
+            </a:avLst>
+          </a:prstGeom>
+          <a:solidFill>
+            <a:srgbClr val="FFFFFF"/>
+          </a:solidFill>
+          <a:ln w="12700">
+            <a:solidFill>
+              <a:srgbClr val="E4DCCB"/>
+            </a:solidFill>
+            <a:prstDash val="solid"/>
+          </a:ln>
+        </p:spPr>
+      </p:sp>
+      <p:sp>
+        <p:nvSpPr>
+          <p:cNvPr id="14" name="Shape 12"/>
+          <p:cNvSpPr/>
+          <p:nvPr/>
+        </p:nvSpPr>
+        <p:spPr>
+          <a:xfrm>
+            <a:off x="640080" y="4160520"/>
+            <a:ext cx="54864" cy="1097280"/>
+          </a:xfrm>
+          <a:prstGeom prst="rect">
+            <a:avLst/>
+          </a:prstGeom>
+          <a:solidFill>
+            <a:srgbClr val="9A4C1F"/>
+          </a:solidFill>
+          <a:ln/>
+        </p:spPr>
+      </p:sp>
+      <p:sp>
+        <p:nvSpPr>
+          <p:cNvPr id="15" name="Text 13"/>
+          <p:cNvSpPr/>
+          <p:nvPr/>
+        </p:nvSpPr>
+        <p:spPr>
+          <a:xfrm>
+            <a:off x="914400" y="4270248"/>
+            <a:ext cx="10332720" cy="365760"/>
+          </a:xfrm>
+          <a:prstGeom prst="rect">
+            <a:avLst/>
+          </a:prstGeom>
+          <a:noFill/>
+          <a:ln/>
+        </p:spPr>
+        <p:txBody>
+          <a:bodyPr wrap="square" rtlCol="0" anchor="ctr"/>
+          <a:lstStyle/>
+          <a:p>
+            <a:pPr indent="0" marL="0">
+              <a:buNone/>
+            </a:pPr>
+            <a:r>
+              <a:rPr lang="en-US" sz="1400" b="1" dirty="0">
+                <a:solidFill>
+                  <a:srgbClr val="1B1F3B"/>
+                </a:solidFill>
+                <a:latin typeface="Segoe UI" pitchFamily="34" charset="0"/>
+                <a:ea typeface="Segoe UI" pitchFamily="34" charset="-122"/>
+                <a:cs typeface="Segoe UI" pitchFamily="34" charset="-120"/>
+              </a:rPr>
+              <a:t>Export PDF du relevé d'heures</a:t>
+            </a:r>
+            <a:endParaRPr lang="en-US" sz="1400" dirty="0"/>
+          </a:p>
+        </p:txBody>
+      </p:sp>
+      <p:sp>
+        <p:nvSpPr>
+          <p:cNvPr id="16" name="Text 14"/>
+          <p:cNvSpPr/>
+          <p:nvPr/>
+        </p:nvSpPr>
+        <p:spPr>
+          <a:xfrm>
+            <a:off x="914400" y="4617720"/>
+            <a:ext cx="10332720" cy="594360"/>
+          </a:xfrm>
+          <a:prstGeom prst="rect">
+            <a:avLst/>
+          </a:prstGeom>
+          <a:noFill/>
+          <a:ln/>
+        </p:spPr>
+        <p:txBody>
+          <a:bodyPr wrap="square" rtlCol="0" anchor="ctr"/>
+          <a:lstStyle/>
+          <a:p>
+            <a:pPr indent="0" marL="0">
+              <a:lnSpc>
+                <a:spcPts val="1400"/>
+              </a:lnSpc>
+              <a:buNone/>
+            </a:pPr>
+            <a:r>
+              <a:rPr lang="en-US" sz="1100" dirty="0">
+                <a:solidFill>
+                  <a:srgbClr val="8A7C68"/>
+                </a:solidFill>
+                <a:latin typeface="Segoe UI" pitchFamily="34" charset="0"/>
+                <a:ea typeface="Segoe UI" pitchFamily="34" charset="-122"/>
+                <a:cs typeface="Segoe UI" pitchFamily="34" charset="-120"/>
+              </a:rPr>
+              <a:t>Génération d'un PDF mensuel par ouvrier : détail par journée/type de pointage, totaux hebdomadaires, total du mois en heures et en montant — pensé pour la comptabilité et la gestion de la paie.</a:t>
+            </a:r>
+            <a:endParaRPr lang="en-US" sz="1100" dirty="0"/>
+          </a:p>
+        </p:txBody>
+      </p:sp>
+      <p:sp>
+        <p:nvSpPr>
+          <p:cNvPr id="17" name="Text 15"/>
           <p:cNvSpPr/>
           <p:nvPr/>
         </p:nvSpPr>
@@ -10807,7 +11536,7 @@
       </p:sp>
       <p:sp>
         <p:nvSpPr>
-          <p:cNvPr id="10" name="Text 8"/>
+          <p:cNvPr id="18" name="Text 16"/>
           <p:cNvSpPr/>
           <p:nvPr/>
         </p:nvSpPr>
@@ -10970,7 +11699,7 @@
                 <a:ea typeface="Georgia" pitchFamily="34" charset="-122"/>
                 <a:cs typeface="Georgia" pitchFamily="34" charset="-120"/>
               </a:rPr>
-              <a:t>Signature &amp; portails</a:t>
+              <a:t>Notifications</a:t>
             </a:r>
             <a:endParaRPr lang="en-US" sz="2400" dirty="0"/>
           </a:p>
@@ -11056,7 +11785,7 @@
                 <a:ea typeface="Segoe UI" pitchFamily="34" charset="-122"/>
                 <a:cs typeface="Segoe UI" pitchFamily="34" charset="-120"/>
               </a:rPr>
-              <a:t>Signature client branchée sur Supabase</a:t>
+              <a:t>Envoi d'email réel à la signature du devis</a:t>
             </a:r>
             <a:endParaRPr lang="en-US" sz="1400" dirty="0"/>
           </a:p>
@@ -11098,7 +11827,7 @@
                 <a:ea typeface="Segoe UI" pitchFamily="34" charset="-122"/>
                 <a:cs typeface="Segoe UI" pitchFamily="34" charset="-120"/>
               </a:rPr>
-              <a:t>Le client qui signe un devis n'a pas de session Kôji : une clé technique dédiée (service_role) permet de retrouver et mettre à jour son devis directement dans la base partagée.</a:t>
+              <a:t>Le premier envoi des identifiants client déclenche désormais un vrai email (SMTP), et plus seulement une file d'attente locale.</a:t>
             </a:r>
             <a:endParaRPr lang="en-US" sz="1100" dirty="0"/>
           </a:p>
@@ -11106,263 +11835,7 @@
       </p:sp>
       <p:sp>
         <p:nvSpPr>
-          <p:cNvPr id="9" name="Shape 7"/>
-          <p:cNvSpPr/>
-          <p:nvPr/>
-        </p:nvSpPr>
-        <p:spPr>
-          <a:xfrm>
-            <a:off x="640080" y="2926080"/>
-            <a:ext cx="10881360" cy="1097280"/>
-          </a:xfrm>
-          <a:prstGeom prst="roundRect">
-            <a:avLst>
-              <a:gd name="adj" fmla="val 5000"/>
-            </a:avLst>
-          </a:prstGeom>
-          <a:solidFill>
-            <a:srgbClr val="FFFFFF"/>
-          </a:solidFill>
-          <a:ln w="12700">
-            <a:solidFill>
-              <a:srgbClr val="E4DCCB"/>
-            </a:solidFill>
-            <a:prstDash val="solid"/>
-          </a:ln>
-        </p:spPr>
-      </p:sp>
-      <p:sp>
-        <p:nvSpPr>
-          <p:cNvPr id="10" name="Shape 8"/>
-          <p:cNvSpPr/>
-          <p:nvPr/>
-        </p:nvSpPr>
-        <p:spPr>
-          <a:xfrm>
-            <a:off x="640080" y="2926080"/>
-            <a:ext cx="54864" cy="1097280"/>
-          </a:xfrm>
-          <a:prstGeom prst="rect">
-            <a:avLst/>
-          </a:prstGeom>
-          <a:solidFill>
-            <a:srgbClr val="9A4C1F"/>
-          </a:solidFill>
-          <a:ln/>
-        </p:spPr>
-      </p:sp>
-      <p:sp>
-        <p:nvSpPr>
-          <p:cNvPr id="11" name="Text 9"/>
-          <p:cNvSpPr/>
-          <p:nvPr/>
-        </p:nvSpPr>
-        <p:spPr>
-          <a:xfrm>
-            <a:off x="914400" y="3035808"/>
-            <a:ext cx="10332720" cy="365760"/>
-          </a:xfrm>
-          <a:prstGeom prst="rect">
-            <a:avLst/>
-          </a:prstGeom>
-          <a:noFill/>
-          <a:ln/>
-        </p:spPr>
-        <p:txBody>
-          <a:bodyPr wrap="square" rtlCol="0" anchor="ctr"/>
-          <a:lstStyle/>
-          <a:p>
-            <a:pPr indent="0" marL="0">
-              <a:buNone/>
-            </a:pPr>
-            <a:r>
-              <a:rPr lang="en-US" sz="1400" b="1" dirty="0">
-                <a:solidFill>
-                  <a:srgbClr val="1B1F3B"/>
-                </a:solidFill>
-                <a:latin typeface="Segoe UI" pitchFamily="34" charset="0"/>
-                <a:ea typeface="Segoe UI" pitchFamily="34" charset="-122"/>
-                <a:cs typeface="Segoe UI" pitchFamily="34" charset="-120"/>
-              </a:rPr>
-              <a:t>Audit complet du portail client</a:t>
-            </a:r>
-            <a:endParaRPr lang="en-US" sz="1400" dirty="0"/>
-          </a:p>
-        </p:txBody>
-      </p:sp>
-      <p:sp>
-        <p:nvSpPr>
-          <p:cNvPr id="12" name="Text 10"/>
-          <p:cNvSpPr/>
-          <p:nvPr/>
-        </p:nvSpPr>
-        <p:spPr>
-          <a:xfrm>
-            <a:off x="914400" y="3383280"/>
-            <a:ext cx="10332720" cy="594360"/>
-          </a:xfrm>
-          <a:prstGeom prst="rect">
-            <a:avLst/>
-          </a:prstGeom>
-          <a:noFill/>
-          <a:ln/>
-        </p:spPr>
-        <p:txBody>
-          <a:bodyPr wrap="square" rtlCol="0" anchor="ctr"/>
-          <a:lstStyle/>
-          <a:p>
-            <a:pPr indent="0" marL="0">
-              <a:lnSpc>
-                <a:spcPts val="1400"/>
-              </a:lnSpc>
-              <a:buNone/>
-            </a:pPr>
-            <a:r>
-              <a:rPr lang="en-US" sz="1100" dirty="0">
-                <a:solidFill>
-                  <a:srgbClr val="8A7C68"/>
-                </a:solidFill>
-                <a:latin typeface="Segoe UI" pitchFamily="34" charset="0"/>
-                <a:ea typeface="Segoe UI" pitchFamily="34" charset="-122"/>
-                <a:cs typeface="Segoe UI" pitchFamily="34" charset="-120"/>
-              </a:rPr>
-              <a:t>Plusieurs routes (connexion client, devis/tâches/notes du portail, création de factures) lisaient encore l'ancien fichier JSON local et ne trouvaient plus aucune donnée récente depuis la migration Supabase des devis — toutes corrigées.</a:t>
-            </a:r>
-            <a:endParaRPr lang="en-US" sz="1100" dirty="0"/>
-          </a:p>
-        </p:txBody>
-      </p:sp>
-      <p:sp>
-        <p:nvSpPr>
-          <p:cNvPr id="13" name="Shape 11"/>
-          <p:cNvSpPr/>
-          <p:nvPr/>
-        </p:nvSpPr>
-        <p:spPr>
-          <a:xfrm>
-            <a:off x="640080" y="4160520"/>
-            <a:ext cx="10881360" cy="1097280"/>
-          </a:xfrm>
-          <a:prstGeom prst="roundRect">
-            <a:avLst>
-              <a:gd name="adj" fmla="val 5000"/>
-            </a:avLst>
-          </a:prstGeom>
-          <a:solidFill>
-            <a:srgbClr val="FFFFFF"/>
-          </a:solidFill>
-          <a:ln w="12700">
-            <a:solidFill>
-              <a:srgbClr val="E4DCCB"/>
-            </a:solidFill>
-            <a:prstDash val="solid"/>
-          </a:ln>
-        </p:spPr>
-      </p:sp>
-      <p:sp>
-        <p:nvSpPr>
-          <p:cNvPr id="14" name="Shape 12"/>
-          <p:cNvSpPr/>
-          <p:nvPr/>
-        </p:nvSpPr>
-        <p:spPr>
-          <a:xfrm>
-            <a:off x="640080" y="4160520"/>
-            <a:ext cx="54864" cy="1097280"/>
-          </a:xfrm>
-          <a:prstGeom prst="rect">
-            <a:avLst/>
-          </a:prstGeom>
-          <a:solidFill>
-            <a:srgbClr val="9A4C1F"/>
-          </a:solidFill>
-          <a:ln/>
-        </p:spPr>
-      </p:sp>
-      <p:sp>
-        <p:nvSpPr>
-          <p:cNvPr id="15" name="Text 13"/>
-          <p:cNvSpPr/>
-          <p:nvPr/>
-        </p:nvSpPr>
-        <p:spPr>
-          <a:xfrm>
-            <a:off x="914400" y="4270248"/>
-            <a:ext cx="10332720" cy="365760"/>
-          </a:xfrm>
-          <a:prstGeom prst="rect">
-            <a:avLst/>
-          </a:prstGeom>
-          <a:noFill/>
-          <a:ln/>
-        </p:spPr>
-        <p:txBody>
-          <a:bodyPr wrap="square" rtlCol="0" anchor="ctr"/>
-          <a:lstStyle/>
-          <a:p>
-            <a:pPr indent="0" marL="0">
-              <a:buNone/>
-            </a:pPr>
-            <a:r>
-              <a:rPr lang="en-US" sz="1400" b="1" dirty="0">
-                <a:solidFill>
-                  <a:srgbClr val="1B1F3B"/>
-                </a:solidFill>
-                <a:latin typeface="Segoe UI" pitchFamily="34" charset="0"/>
-                <a:ea typeface="Segoe UI" pitchFamily="34" charset="-122"/>
-                <a:cs typeface="Segoe UI" pitchFamily="34" charset="-120"/>
-              </a:rPr>
-              <a:t>Suivi du temps par ouvrage</a:t>
-            </a:r>
-            <a:endParaRPr lang="en-US" sz="1400" dirty="0"/>
-          </a:p>
-        </p:txBody>
-      </p:sp>
-      <p:sp>
-        <p:nvSpPr>
-          <p:cNvPr id="16" name="Text 14"/>
-          <p:cNvSpPr/>
-          <p:nvPr/>
-        </p:nvSpPr>
-        <p:spPr>
-          <a:xfrm>
-            <a:off x="914400" y="4617720"/>
-            <a:ext cx="10332720" cy="594360"/>
-          </a:xfrm>
-          <a:prstGeom prst="rect">
-            <a:avLst/>
-          </a:prstGeom>
-          <a:noFill/>
-          <a:ln/>
-        </p:spPr>
-        <p:txBody>
-          <a:bodyPr wrap="square" rtlCol="0" anchor="ctr"/>
-          <a:lstStyle/>
-          <a:p>
-            <a:pPr indent="0" marL="0">
-              <a:lnSpc>
-                <a:spcPts val="1400"/>
-              </a:lnSpc>
-              <a:buNone/>
-            </a:pPr>
-            <a:r>
-              <a:rPr lang="en-US" sz="1100" dirty="0">
-                <a:solidFill>
-                  <a:srgbClr val="8A7C68"/>
-                </a:solidFill>
-                <a:latin typeface="Segoe UI" pitchFamily="34" charset="0"/>
-                <a:ea typeface="Segoe UI" pitchFamily="34" charset="-122"/>
-                <a:cs typeface="Segoe UI" pitchFamily="34" charset="-120"/>
-              </a:rPr>
-              <a:t>Boutons Démarrer / Pause / Reprendre / Terminer par tâche, avec calcul automatique du temps consommé et alerte en cas de dépassement du temps prévu.</a:t>
-            </a:r>
-            <a:endParaRPr lang="en-US" sz="1100" dirty="0"/>
-          </a:p>
-        </p:txBody>
-      </p:sp>
-      <p:sp>
-        <p:nvSpPr>
-          <p:cNvPr id="17" name="Text 15"/>
+          <p:cNvPr id="9" name="Text 7"/>
           <p:cNvSpPr/>
           <p:nvPr/>
         </p:nvSpPr>
@@ -11401,7 +11874,7 @@
       </p:sp>
       <p:sp>
         <p:nvSpPr>
-          <p:cNvPr id="18" name="Text 16"/>
+          <p:cNvPr id="10" name="Text 8"/>
           <p:cNvSpPr/>
           <p:nvPr/>
         </p:nvSpPr>
@@ -11564,7 +12037,7 @@
                 <a:ea typeface="Georgia" pitchFamily="34" charset="-122"/>
                 <a:cs typeface="Georgia" pitchFamily="34" charset="-120"/>
               </a:rPr>
-              <a:t>Accueil &amp; stabilité</a:t>
+              <a:t>Signature &amp; portails</a:t>
             </a:r>
             <a:endParaRPr lang="en-US" sz="2400" dirty="0"/>
           </a:p>
@@ -11650,7 +12123,7 @@
                 <a:ea typeface="Segoe UI" pitchFamily="34" charset="-122"/>
                 <a:cs typeface="Segoe UI" pitchFamily="34" charset="-120"/>
               </a:rPr>
-              <a:t>Reconnexion automatique de session</a:t>
+              <a:t>Signature client branchée sur Supabase</a:t>
             </a:r>
             <a:endParaRPr lang="en-US" sz="1400" dirty="0"/>
           </a:p>
@@ -11692,7 +12165,7 @@
                 <a:ea typeface="Segoe UI" pitchFamily="34" charset="-122"/>
                 <a:cs typeface="Segoe UI" pitchFamily="34" charset="-120"/>
               </a:rPr>
-              <a:t>Une session expirée (~1h) provoquait des échecs silencieux à l'enregistrement (profil, IBAN, devis) sans reconnexion automatique ; la détection couvre désormais tous les cas d'expiration.</a:t>
+              <a:t>Le client qui signe un devis n'a pas de session Kôji : une clé technique dédiée (service_role) permet de retrouver et mettre à jour son devis directement dans la base partagée.</a:t>
             </a:r>
             <a:endParaRPr lang="en-US" sz="1100" dirty="0"/>
           </a:p>
@@ -11778,7 +12251,7 @@
                 <a:ea typeface="Segoe UI" pitchFamily="34" charset="-122"/>
                 <a:cs typeface="Segoe UI" pitchFamily="34" charset="-120"/>
               </a:rPr>
-              <a:t>Corrections de plantages ponctuels</a:t>
+              <a:t>Audit complet du portail client</a:t>
             </a:r>
             <a:endParaRPr lang="en-US" sz="1400" dirty="0"/>
           </a:p>
@@ -11820,7 +12293,7 @@
                 <a:ea typeface="Segoe UI" pitchFamily="34" charset="-122"/>
                 <a:cs typeface="Segoe UI" pitchFamily="34" charset="-120"/>
               </a:rPr>
-              <a:t>Plusieurs erreurs bloquantes corrigées au fil des tests (références de code manquantes, composants mal placés).</a:t>
+              <a:t>Plusieurs routes (connexion client, devis/tâches/notes du portail, création de factures) lisaient encore l'ancien fichier JSON local et ne trouvaient plus aucune donnée récente depuis la migration Supabase des devis — toutes corrigées.</a:t>
             </a:r>
             <a:endParaRPr lang="en-US" sz="1100" dirty="0"/>
           </a:p>
@@ -11828,7 +12301,135 @@
       </p:sp>
       <p:sp>
         <p:nvSpPr>
-          <p:cNvPr id="13" name="Text 11"/>
+          <p:cNvPr id="13" name="Shape 11"/>
+          <p:cNvSpPr/>
+          <p:nvPr/>
+        </p:nvSpPr>
+        <p:spPr>
+          <a:xfrm>
+            <a:off x="640080" y="4160520"/>
+            <a:ext cx="10881360" cy="1097280"/>
+          </a:xfrm>
+          <a:prstGeom prst="roundRect">
+            <a:avLst>
+              <a:gd name="adj" fmla="val 5000"/>
+            </a:avLst>
+          </a:prstGeom>
+          <a:solidFill>
+            <a:srgbClr val="FFFFFF"/>
+          </a:solidFill>
+          <a:ln w="12700">
+            <a:solidFill>
+              <a:srgbClr val="E4DCCB"/>
+            </a:solidFill>
+            <a:prstDash val="solid"/>
+          </a:ln>
+        </p:spPr>
+      </p:sp>
+      <p:sp>
+        <p:nvSpPr>
+          <p:cNvPr id="14" name="Shape 12"/>
+          <p:cNvSpPr/>
+          <p:nvPr/>
+        </p:nvSpPr>
+        <p:spPr>
+          <a:xfrm>
+            <a:off x="640080" y="4160520"/>
+            <a:ext cx="54864" cy="1097280"/>
+          </a:xfrm>
+          <a:prstGeom prst="rect">
+            <a:avLst/>
+          </a:prstGeom>
+          <a:solidFill>
+            <a:srgbClr val="9A4C1F"/>
+          </a:solidFill>
+          <a:ln/>
+        </p:spPr>
+      </p:sp>
+      <p:sp>
+        <p:nvSpPr>
+          <p:cNvPr id="15" name="Text 13"/>
+          <p:cNvSpPr/>
+          <p:nvPr/>
+        </p:nvSpPr>
+        <p:spPr>
+          <a:xfrm>
+            <a:off x="914400" y="4270248"/>
+            <a:ext cx="10332720" cy="365760"/>
+          </a:xfrm>
+          <a:prstGeom prst="rect">
+            <a:avLst/>
+          </a:prstGeom>
+          <a:noFill/>
+          <a:ln/>
+        </p:spPr>
+        <p:txBody>
+          <a:bodyPr wrap="square" rtlCol="0" anchor="ctr"/>
+          <a:lstStyle/>
+          <a:p>
+            <a:pPr indent="0" marL="0">
+              <a:buNone/>
+            </a:pPr>
+            <a:r>
+              <a:rPr lang="en-US" sz="1400" b="1" dirty="0">
+                <a:solidFill>
+                  <a:srgbClr val="1B1F3B"/>
+                </a:solidFill>
+                <a:latin typeface="Segoe UI" pitchFamily="34" charset="0"/>
+                <a:ea typeface="Segoe UI" pitchFamily="34" charset="-122"/>
+                <a:cs typeface="Segoe UI" pitchFamily="34" charset="-120"/>
+              </a:rPr>
+              <a:t>Suivi du temps par ouvrage</a:t>
+            </a:r>
+            <a:endParaRPr lang="en-US" sz="1400" dirty="0"/>
+          </a:p>
+        </p:txBody>
+      </p:sp>
+      <p:sp>
+        <p:nvSpPr>
+          <p:cNvPr id="16" name="Text 14"/>
+          <p:cNvSpPr/>
+          <p:nvPr/>
+        </p:nvSpPr>
+        <p:spPr>
+          <a:xfrm>
+            <a:off x="914400" y="4617720"/>
+            <a:ext cx="10332720" cy="594360"/>
+          </a:xfrm>
+          <a:prstGeom prst="rect">
+            <a:avLst/>
+          </a:prstGeom>
+          <a:noFill/>
+          <a:ln/>
+        </p:spPr>
+        <p:txBody>
+          <a:bodyPr wrap="square" rtlCol="0" anchor="ctr"/>
+          <a:lstStyle/>
+          <a:p>
+            <a:pPr indent="0" marL="0">
+              <a:lnSpc>
+                <a:spcPts val="1400"/>
+              </a:lnSpc>
+              <a:buNone/>
+            </a:pPr>
+            <a:r>
+              <a:rPr lang="en-US" sz="1100" dirty="0">
+                <a:solidFill>
+                  <a:srgbClr val="8A7C68"/>
+                </a:solidFill>
+                <a:latin typeface="Segoe UI" pitchFamily="34" charset="0"/>
+                <a:ea typeface="Segoe UI" pitchFamily="34" charset="-122"/>
+                <a:cs typeface="Segoe UI" pitchFamily="34" charset="-120"/>
+              </a:rPr>
+              <a:t>Boutons Démarrer / Pause / Reprendre / Terminer par tâche, avec calcul automatique du temps consommé et alerte en cas de dépassement du temps prévu.</a:t>
+            </a:r>
+            <a:endParaRPr lang="en-US" sz="1100" dirty="0"/>
+          </a:p>
+        </p:txBody>
+      </p:sp>
+      <p:sp>
+        <p:nvSpPr>
+          <p:cNvPr id="17" name="Text 15"/>
           <p:cNvSpPr/>
           <p:nvPr/>
         </p:nvSpPr>
@@ -11867,7 +12468,7 @@
       </p:sp>
       <p:sp>
         <p:nvSpPr>
-          <p:cNvPr id="14" name="Text 12"/>
+          <p:cNvPr id="18" name="Text 16"/>
           <p:cNvSpPr/>
           <p:nvPr/>
         </p:nvSpPr>
@@ -12030,7 +12631,7 @@
                 <a:ea typeface="Georgia" pitchFamily="34" charset="-122"/>
                 <a:cs typeface="Georgia" pitchFamily="34" charset="-120"/>
               </a:rPr>
-              <a:t>Rapports d'intervention</a:t>
+              <a:t>Accueil &amp; stabilité</a:t>
             </a:r>
             <a:endParaRPr lang="en-US" sz="2400" dirty="0"/>
           </a:p>
@@ -12116,7 +12717,7 @@
                 <a:ea typeface="Segoe UI" pitchFamily="34" charset="-122"/>
                 <a:cs typeface="Segoe UI" pitchFamily="34" charset="-120"/>
               </a:rPr>
-              <a:t>Nouvelle entité 'interventions'</a:t>
+              <a:t>Reconnexion automatique de session</a:t>
             </a:r>
             <a:endParaRPr lang="en-US" sz="1400" dirty="0"/>
           </a:p>
@@ -12158,7 +12759,7 @@
                 <a:ea typeface="Segoe UI" pitchFamily="34" charset="-122"/>
                 <a:cs typeface="Segoe UI" pitchFamily="34" charset="-120"/>
               </a:rPr>
-              <a:t>API dédiée (creation, consultation, suppression) pour stocker les rapports d'intervention, avec historique des actions comme pour les autres modules.</a:t>
+              <a:t>Une session expirée (~1h) provoquait des échecs silencieux à l'enregistrement (profil, IBAN, devis) sans reconnexion automatique ; la détection couvre désormais tous les cas d'expiration.</a:t>
             </a:r>
             <a:endParaRPr lang="en-US" sz="1100" dirty="0"/>
           </a:p>
@@ -12244,7 +12845,7 @@
                 <a:ea typeface="Segoe UI" pitchFamily="34" charset="-122"/>
                 <a:cs typeface="Segoe UI" pitchFamily="34" charset="-120"/>
               </a:rPr>
-              <a:t>Génération PDF du rapport d'intervention</a:t>
+              <a:t>Corrections de plantages ponctuels</a:t>
             </a:r>
             <a:endParaRPr lang="en-US" sz="1400" dirty="0"/>
           </a:p>
@@ -12286,7 +12887,7 @@
                 <a:ea typeface="Segoe UI" pitchFamily="34" charset="-122"/>
                 <a:cs typeface="Segoe UI" pitchFamily="34" charset="-120"/>
               </a:rPr>
-              <a:t>Chaque rapport peut être téléchargé en PDF avec le logo de l'entreprise en en-tête, dans une mise en page reprenant celle des rapports d'intervention papier existants.</a:t>
+              <a:t>Plusieurs erreurs bloquantes corrigées au fil des tests (références de code manquantes, composants mal placés).</a:t>
             </a:r>
             <a:endParaRPr lang="en-US" sz="1100" dirty="0"/>
           </a:p>
@@ -12294,263 +12895,7 @@
       </p:sp>
       <p:sp>
         <p:nvSpPr>
-          <p:cNvPr id="13" name="Shape 11"/>
-          <p:cNvSpPr/>
-          <p:nvPr/>
-        </p:nvSpPr>
-        <p:spPr>
-          <a:xfrm>
-            <a:off x="640080" y="4160520"/>
-            <a:ext cx="10881360" cy="1097280"/>
-          </a:xfrm>
-          <a:prstGeom prst="roundRect">
-            <a:avLst>
-              <a:gd name="adj" fmla="val 5000"/>
-            </a:avLst>
-          </a:prstGeom>
-          <a:solidFill>
-            <a:srgbClr val="FFFFFF"/>
-          </a:solidFill>
-          <a:ln w="12700">
-            <a:solidFill>
-              <a:srgbClr val="E4DCCB"/>
-            </a:solidFill>
-            <a:prstDash val="solid"/>
-          </a:ln>
-        </p:spPr>
-      </p:sp>
-      <p:sp>
-        <p:nvSpPr>
-          <p:cNvPr id="14" name="Shape 12"/>
-          <p:cNvSpPr/>
-          <p:nvPr/>
-        </p:nvSpPr>
-        <p:spPr>
-          <a:xfrm>
-            <a:off x="640080" y="4160520"/>
-            <a:ext cx="54864" cy="1097280"/>
-          </a:xfrm>
-          <a:prstGeom prst="rect">
-            <a:avLst/>
-          </a:prstGeom>
-          <a:solidFill>
-            <a:srgbClr val="9A4C1F"/>
-          </a:solidFill>
-          <a:ln/>
-        </p:spPr>
-      </p:sp>
-      <p:sp>
-        <p:nvSpPr>
-          <p:cNvPr id="15" name="Text 13"/>
-          <p:cNvSpPr/>
-          <p:nvPr/>
-        </p:nvSpPr>
-        <p:spPr>
-          <a:xfrm>
-            <a:off x="914400" y="4270248"/>
-            <a:ext cx="10332720" cy="365760"/>
-          </a:xfrm>
-          <a:prstGeom prst="rect">
-            <a:avLst/>
-          </a:prstGeom>
-          <a:noFill/>
-          <a:ln/>
-        </p:spPr>
-        <p:txBody>
-          <a:bodyPr wrap="square" rtlCol="0" anchor="ctr"/>
-          <a:lstStyle/>
-          <a:p>
-            <a:pPr indent="0" marL="0">
-              <a:buNone/>
-            </a:pPr>
-            <a:r>
-              <a:rPr lang="en-US" sz="1400" b="1" dirty="0">
-                <a:solidFill>
-                  <a:srgbClr val="1B1F3B"/>
-                </a:solidFill>
-                <a:latin typeface="Segoe UI" pitchFamily="34" charset="0"/>
-                <a:ea typeface="Segoe UI" pitchFamily="34" charset="-122"/>
-                <a:cs typeface="Segoe UI" pitchFamily="34" charset="-120"/>
-              </a:rPr>
-              <a:t>Facturation directe d'une intervention</a:t>
-            </a:r>
-            <a:endParaRPr lang="en-US" sz="1400" dirty="0"/>
-          </a:p>
-        </p:txBody>
-      </p:sp>
-      <p:sp>
-        <p:nvSpPr>
-          <p:cNvPr id="16" name="Text 14"/>
-          <p:cNvSpPr/>
-          <p:nvPr/>
-        </p:nvSpPr>
-        <p:spPr>
-          <a:xfrm>
-            <a:off x="914400" y="4617720"/>
-            <a:ext cx="10332720" cy="594360"/>
-          </a:xfrm>
-          <a:prstGeom prst="rect">
-            <a:avLst/>
-          </a:prstGeom>
-          <a:noFill/>
-          <a:ln/>
-        </p:spPr>
-        <p:txBody>
-          <a:bodyPr wrap="square" rtlCol="0" anchor="ctr"/>
-          <a:lstStyle/>
-          <a:p>
-            <a:pPr indent="0" marL="0">
-              <a:lnSpc>
-                <a:spcPts val="1400"/>
-              </a:lnSpc>
-              <a:buNone/>
-            </a:pPr>
-            <a:r>
-              <a:rPr lang="en-US" sz="1100" dirty="0">
-                <a:solidFill>
-                  <a:srgbClr val="8A7C68"/>
-                </a:solidFill>
-                <a:latin typeface="Segoe UI" pitchFamily="34" charset="0"/>
-                <a:ea typeface="Segoe UI" pitchFamily="34" charset="-122"/>
-                <a:cs typeface="Segoe UI" pitchFamily="34" charset="-120"/>
-              </a:rPr>
-              <a:t>Une facture peut être créée directement à partir d'une intervention (sans passer par un devis signé), avec un montant saisi manuellement ; l'intervention passe alors automatiquement au statut 'Facturée'.</a:t>
-            </a:r>
-            <a:endParaRPr lang="en-US" sz="1100" dirty="0"/>
-          </a:p>
-        </p:txBody>
-      </p:sp>
-      <p:sp>
-        <p:nvSpPr>
-          <p:cNvPr id="17" name="Shape 15"/>
-          <p:cNvSpPr/>
-          <p:nvPr/>
-        </p:nvSpPr>
-        <p:spPr>
-          <a:xfrm>
-            <a:off x="640080" y="5394960"/>
-            <a:ext cx="10881360" cy="1097280"/>
-          </a:xfrm>
-          <a:prstGeom prst="roundRect">
-            <a:avLst>
-              <a:gd name="adj" fmla="val 5000"/>
-            </a:avLst>
-          </a:prstGeom>
-          <a:solidFill>
-            <a:srgbClr val="FFFFFF"/>
-          </a:solidFill>
-          <a:ln w="12700">
-            <a:solidFill>
-              <a:srgbClr val="E4DCCB"/>
-            </a:solidFill>
-            <a:prstDash val="solid"/>
-          </a:ln>
-        </p:spPr>
-      </p:sp>
-      <p:sp>
-        <p:nvSpPr>
-          <p:cNvPr id="18" name="Shape 16"/>
-          <p:cNvSpPr/>
-          <p:nvPr/>
-        </p:nvSpPr>
-        <p:spPr>
-          <a:xfrm>
-            <a:off x="640080" y="5394960"/>
-            <a:ext cx="54864" cy="1097280"/>
-          </a:xfrm>
-          <a:prstGeom prst="rect">
-            <a:avLst/>
-          </a:prstGeom>
-          <a:solidFill>
-            <a:srgbClr val="9A4C1F"/>
-          </a:solidFill>
-          <a:ln/>
-        </p:spPr>
-      </p:sp>
-      <p:sp>
-        <p:nvSpPr>
-          <p:cNvPr id="19" name="Text 17"/>
-          <p:cNvSpPr/>
-          <p:nvPr/>
-        </p:nvSpPr>
-        <p:spPr>
-          <a:xfrm>
-            <a:off x="914400" y="5504688"/>
-            <a:ext cx="10332720" cy="365760"/>
-          </a:xfrm>
-          <a:prstGeom prst="rect">
-            <a:avLst/>
-          </a:prstGeom>
-          <a:noFill/>
-          <a:ln/>
-        </p:spPr>
-        <p:txBody>
-          <a:bodyPr wrap="square" rtlCol="0" anchor="ctr"/>
-          <a:lstStyle/>
-          <a:p>
-            <a:pPr indent="0" marL="0">
-              <a:buNone/>
-            </a:pPr>
-            <a:r>
-              <a:rPr lang="en-US" sz="1400" b="1" dirty="0">
-                <a:solidFill>
-                  <a:srgbClr val="1B1F3B"/>
-                </a:solidFill>
-                <a:latin typeface="Segoe UI" pitchFamily="34" charset="0"/>
-                <a:ea typeface="Segoe UI" pitchFamily="34" charset="-122"/>
-                <a:cs typeface="Segoe UI" pitchFamily="34" charset="-120"/>
-              </a:rPr>
-              <a:t>En-tête d'entreprise propre à chaque rapport</a:t>
-            </a:r>
-            <a:endParaRPr lang="en-US" sz="1400" dirty="0"/>
-          </a:p>
-        </p:txBody>
-      </p:sp>
-      <p:sp>
-        <p:nvSpPr>
-          <p:cNvPr id="20" name="Text 18"/>
-          <p:cNvSpPr/>
-          <p:nvPr/>
-        </p:nvSpPr>
-        <p:spPr>
-          <a:xfrm>
-            <a:off x="914400" y="5852160"/>
-            <a:ext cx="10332720" cy="594360"/>
-          </a:xfrm>
-          <a:prstGeom prst="rect">
-            <a:avLst/>
-          </a:prstGeom>
-          <a:noFill/>
-          <a:ln/>
-        </p:spPr>
-        <p:txBody>
-          <a:bodyPr wrap="square" rtlCol="0" anchor="ctr"/>
-          <a:lstStyle/>
-          <a:p>
-            <a:pPr indent="0" marL="0">
-              <a:lnSpc>
-                <a:spcPts val="1400"/>
-              </a:lnSpc>
-              <a:buNone/>
-            </a:pPr>
-            <a:r>
-              <a:rPr lang="en-US" sz="1100" dirty="0">
-                <a:solidFill>
-                  <a:srgbClr val="8A7C68"/>
-                </a:solidFill>
-                <a:latin typeface="Segoe UI" pitchFamily="34" charset="0"/>
-                <a:ea typeface="Segoe UI" pitchFamily="34" charset="-122"/>
-                <a:cs typeface="Segoe UI" pitchFamily="34" charset="-120"/>
-              </a:rPr>
-              <a:t>Chaque intervention conserve son propre instantané des informations d'entreprise (comme les devis), pour que le PDF reste fidèle même si le profil change ensuite.</a:t>
-            </a:r>
-            <a:endParaRPr lang="en-US" sz="1100" dirty="0"/>
-          </a:p>
-        </p:txBody>
-      </p:sp>
-      <p:sp>
-        <p:nvSpPr>
-          <p:cNvPr id="21" name="Text 19"/>
+          <p:cNvPr id="13" name="Text 11"/>
           <p:cNvSpPr/>
           <p:nvPr/>
         </p:nvSpPr>
@@ -12589,7 +12934,7 @@
       </p:sp>
       <p:sp>
         <p:nvSpPr>
-          <p:cNvPr id="22" name="Text 20"/>
+          <p:cNvPr id="14" name="Text 12"/>
           <p:cNvSpPr/>
           <p:nvPr/>
         </p:nvSpPr>
@@ -12752,7 +13097,7 @@
                 <a:ea typeface="Georgia" pitchFamily="34" charset="-122"/>
                 <a:cs typeface="Georgia" pitchFamily="34" charset="-120"/>
               </a:rPr>
-              <a:t>Rapports d'intervention (suite)</a:t>
+              <a:t>Rapports d'intervention</a:t>
             </a:r>
             <a:endParaRPr lang="en-US" sz="2400" dirty="0"/>
           </a:p>
@@ -12838,7 +13183,7 @@
                 <a:ea typeface="Segoe UI" pitchFamily="34" charset="-122"/>
                 <a:cs typeface="Segoe UI" pitchFamily="34" charset="-120"/>
               </a:rPr>
-              <a:t>Statut de suivi automatique (À faire / En cours / Terminée)</a:t>
+              <a:t>Nouvelle entité 'interventions'</a:t>
             </a:r>
             <a:endParaRPr lang="en-US" sz="1400" dirty="0"/>
           </a:p>
@@ -12880,7 +13225,7 @@
                 <a:ea typeface="Segoe UI" pitchFamily="34" charset="-122"/>
                 <a:cs typeface="Segoe UI" pitchFamily="34" charset="-120"/>
               </a:rPr>
-              <a:t>Le statut d'une intervention évolue automatiquement selon sa date (À faire tant que la date n'est pas arrivée, En cours le jour J), jusqu'à être marquée Terminée manuellement puis, si besoin, archivée.</a:t>
+              <a:t>API dédiée (creation, consultation, suppression) pour stocker les rapports d'intervention, avec historique des actions comme pour les autres modules.</a:t>
             </a:r>
             <a:endParaRPr lang="en-US" sz="1100" dirty="0"/>
           </a:p>
@@ -12966,7 +13311,7 @@
                 <a:ea typeface="Segoe UI" pitchFamily="34" charset="-122"/>
                 <a:cs typeface="Segoe UI" pitchFamily="34" charset="-120"/>
               </a:rPr>
-              <a:t>Numéro de rapport automatique</a:t>
+              <a:t>Génération PDF du rapport d'intervention</a:t>
             </a:r>
             <a:endParaRPr lang="en-US" sz="1400" dirty="0"/>
           </a:p>
@@ -13008,7 +13353,7 @@
                 <a:ea typeface="Segoe UI" pitchFamily="34" charset="-122"/>
                 <a:cs typeface="Segoe UI" pitchFamily="34" charset="-120"/>
               </a:rPr>
-              <a:t>Chaque rapport reçoit un numéro unique généré automatiquement (ex. INT-2026-0003), affiché en en-tête avec la date de création, sur le même principe que la numérotation des devis et factures.</a:t>
+              <a:t>Chaque rapport peut être téléchargé en PDF avec le logo de l'entreprise en en-tête, dans une mise en page reprenant celle des rapports d'intervention papier existants.</a:t>
             </a:r>
             <a:endParaRPr lang="en-US" sz="1100" dirty="0"/>
           </a:p>
@@ -13016,7 +13361,263 @@
       </p:sp>
       <p:sp>
         <p:nvSpPr>
-          <p:cNvPr id="13" name="Text 11"/>
+          <p:cNvPr id="13" name="Shape 11"/>
+          <p:cNvSpPr/>
+          <p:nvPr/>
+        </p:nvSpPr>
+        <p:spPr>
+          <a:xfrm>
+            <a:off x="640080" y="4160520"/>
+            <a:ext cx="10881360" cy="1097280"/>
+          </a:xfrm>
+          <a:prstGeom prst="roundRect">
+            <a:avLst>
+              <a:gd name="adj" fmla="val 5000"/>
+            </a:avLst>
+          </a:prstGeom>
+          <a:solidFill>
+            <a:srgbClr val="FFFFFF"/>
+          </a:solidFill>
+          <a:ln w="12700">
+            <a:solidFill>
+              <a:srgbClr val="E4DCCB"/>
+            </a:solidFill>
+            <a:prstDash val="solid"/>
+          </a:ln>
+        </p:spPr>
+      </p:sp>
+      <p:sp>
+        <p:nvSpPr>
+          <p:cNvPr id="14" name="Shape 12"/>
+          <p:cNvSpPr/>
+          <p:nvPr/>
+        </p:nvSpPr>
+        <p:spPr>
+          <a:xfrm>
+            <a:off x="640080" y="4160520"/>
+            <a:ext cx="54864" cy="1097280"/>
+          </a:xfrm>
+          <a:prstGeom prst="rect">
+            <a:avLst/>
+          </a:prstGeom>
+          <a:solidFill>
+            <a:srgbClr val="9A4C1F"/>
+          </a:solidFill>
+          <a:ln/>
+        </p:spPr>
+      </p:sp>
+      <p:sp>
+        <p:nvSpPr>
+          <p:cNvPr id="15" name="Text 13"/>
+          <p:cNvSpPr/>
+          <p:nvPr/>
+        </p:nvSpPr>
+        <p:spPr>
+          <a:xfrm>
+            <a:off x="914400" y="4270248"/>
+            <a:ext cx="10332720" cy="365760"/>
+          </a:xfrm>
+          <a:prstGeom prst="rect">
+            <a:avLst/>
+          </a:prstGeom>
+          <a:noFill/>
+          <a:ln/>
+        </p:spPr>
+        <p:txBody>
+          <a:bodyPr wrap="square" rtlCol="0" anchor="ctr"/>
+          <a:lstStyle/>
+          <a:p>
+            <a:pPr indent="0" marL="0">
+              <a:buNone/>
+            </a:pPr>
+            <a:r>
+              <a:rPr lang="en-US" sz="1400" b="1" dirty="0">
+                <a:solidFill>
+                  <a:srgbClr val="1B1F3B"/>
+                </a:solidFill>
+                <a:latin typeface="Segoe UI" pitchFamily="34" charset="0"/>
+                <a:ea typeface="Segoe UI" pitchFamily="34" charset="-122"/>
+                <a:cs typeface="Segoe UI" pitchFamily="34" charset="-120"/>
+              </a:rPr>
+              <a:t>Facturation directe d'une intervention</a:t>
+            </a:r>
+            <a:endParaRPr lang="en-US" sz="1400" dirty="0"/>
+          </a:p>
+        </p:txBody>
+      </p:sp>
+      <p:sp>
+        <p:nvSpPr>
+          <p:cNvPr id="16" name="Text 14"/>
+          <p:cNvSpPr/>
+          <p:nvPr/>
+        </p:nvSpPr>
+        <p:spPr>
+          <a:xfrm>
+            <a:off x="914400" y="4617720"/>
+            <a:ext cx="10332720" cy="594360"/>
+          </a:xfrm>
+          <a:prstGeom prst="rect">
+            <a:avLst/>
+          </a:prstGeom>
+          <a:noFill/>
+          <a:ln/>
+        </p:spPr>
+        <p:txBody>
+          <a:bodyPr wrap="square" rtlCol="0" anchor="ctr"/>
+          <a:lstStyle/>
+          <a:p>
+            <a:pPr indent="0" marL="0">
+              <a:lnSpc>
+                <a:spcPts val="1400"/>
+              </a:lnSpc>
+              <a:buNone/>
+            </a:pPr>
+            <a:r>
+              <a:rPr lang="en-US" sz="1100" dirty="0">
+                <a:solidFill>
+                  <a:srgbClr val="8A7C68"/>
+                </a:solidFill>
+                <a:latin typeface="Segoe UI" pitchFamily="34" charset="0"/>
+                <a:ea typeface="Segoe UI" pitchFamily="34" charset="-122"/>
+                <a:cs typeface="Segoe UI" pitchFamily="34" charset="-120"/>
+              </a:rPr>
+              <a:t>Une facture peut être créée directement à partir d'une intervention (sans passer par un devis signé), avec un montant saisi manuellement ; l'intervention passe alors automatiquement au statut 'Facturée'.</a:t>
+            </a:r>
+            <a:endParaRPr lang="en-US" sz="1100" dirty="0"/>
+          </a:p>
+        </p:txBody>
+      </p:sp>
+      <p:sp>
+        <p:nvSpPr>
+          <p:cNvPr id="17" name="Shape 15"/>
+          <p:cNvSpPr/>
+          <p:nvPr/>
+        </p:nvSpPr>
+        <p:spPr>
+          <a:xfrm>
+            <a:off x="640080" y="5394960"/>
+            <a:ext cx="10881360" cy="1097280"/>
+          </a:xfrm>
+          <a:prstGeom prst="roundRect">
+            <a:avLst>
+              <a:gd name="adj" fmla="val 5000"/>
+            </a:avLst>
+          </a:prstGeom>
+          <a:solidFill>
+            <a:srgbClr val="FFFFFF"/>
+          </a:solidFill>
+          <a:ln w="12700">
+            <a:solidFill>
+              <a:srgbClr val="E4DCCB"/>
+            </a:solidFill>
+            <a:prstDash val="solid"/>
+          </a:ln>
+        </p:spPr>
+      </p:sp>
+      <p:sp>
+        <p:nvSpPr>
+          <p:cNvPr id="18" name="Shape 16"/>
+          <p:cNvSpPr/>
+          <p:nvPr/>
+        </p:nvSpPr>
+        <p:spPr>
+          <a:xfrm>
+            <a:off x="640080" y="5394960"/>
+            <a:ext cx="54864" cy="1097280"/>
+          </a:xfrm>
+          <a:prstGeom prst="rect">
+            <a:avLst/>
+          </a:prstGeom>
+          <a:solidFill>
+            <a:srgbClr val="9A4C1F"/>
+          </a:solidFill>
+          <a:ln/>
+        </p:spPr>
+      </p:sp>
+      <p:sp>
+        <p:nvSpPr>
+          <p:cNvPr id="19" name="Text 17"/>
+          <p:cNvSpPr/>
+          <p:nvPr/>
+        </p:nvSpPr>
+        <p:spPr>
+          <a:xfrm>
+            <a:off x="914400" y="5504688"/>
+            <a:ext cx="10332720" cy="365760"/>
+          </a:xfrm>
+          <a:prstGeom prst="rect">
+            <a:avLst/>
+          </a:prstGeom>
+          <a:noFill/>
+          <a:ln/>
+        </p:spPr>
+        <p:txBody>
+          <a:bodyPr wrap="square" rtlCol="0" anchor="ctr"/>
+          <a:lstStyle/>
+          <a:p>
+            <a:pPr indent="0" marL="0">
+              <a:buNone/>
+            </a:pPr>
+            <a:r>
+              <a:rPr lang="en-US" sz="1400" b="1" dirty="0">
+                <a:solidFill>
+                  <a:srgbClr val="1B1F3B"/>
+                </a:solidFill>
+                <a:latin typeface="Segoe UI" pitchFamily="34" charset="0"/>
+                <a:ea typeface="Segoe UI" pitchFamily="34" charset="-122"/>
+                <a:cs typeface="Segoe UI" pitchFamily="34" charset="-120"/>
+              </a:rPr>
+              <a:t>En-tête d'entreprise propre à chaque rapport</a:t>
+            </a:r>
+            <a:endParaRPr lang="en-US" sz="1400" dirty="0"/>
+          </a:p>
+        </p:txBody>
+      </p:sp>
+      <p:sp>
+        <p:nvSpPr>
+          <p:cNvPr id="20" name="Text 18"/>
+          <p:cNvSpPr/>
+          <p:nvPr/>
+        </p:nvSpPr>
+        <p:spPr>
+          <a:xfrm>
+            <a:off x="914400" y="5852160"/>
+            <a:ext cx="10332720" cy="594360"/>
+          </a:xfrm>
+          <a:prstGeom prst="rect">
+            <a:avLst/>
+          </a:prstGeom>
+          <a:noFill/>
+          <a:ln/>
+        </p:spPr>
+        <p:txBody>
+          <a:bodyPr wrap="square" rtlCol="0" anchor="ctr"/>
+          <a:lstStyle/>
+          <a:p>
+            <a:pPr indent="0" marL="0">
+              <a:lnSpc>
+                <a:spcPts val="1400"/>
+              </a:lnSpc>
+              <a:buNone/>
+            </a:pPr>
+            <a:r>
+              <a:rPr lang="en-US" sz="1100" dirty="0">
+                <a:solidFill>
+                  <a:srgbClr val="8A7C68"/>
+                </a:solidFill>
+                <a:latin typeface="Segoe UI" pitchFamily="34" charset="0"/>
+                <a:ea typeface="Segoe UI" pitchFamily="34" charset="-122"/>
+                <a:cs typeface="Segoe UI" pitchFamily="34" charset="-120"/>
+              </a:rPr>
+              <a:t>Chaque intervention conserve son propre instantané des informations d'entreprise (comme les devis), pour que le PDF reste fidèle même si le profil change ensuite.</a:t>
+            </a:r>
+            <a:endParaRPr lang="en-US" sz="1100" dirty="0"/>
+          </a:p>
+        </p:txBody>
+      </p:sp>
+      <p:sp>
+        <p:nvSpPr>
+          <p:cNvPr id="21" name="Text 19"/>
           <p:cNvSpPr/>
           <p:nvPr/>
         </p:nvSpPr>
@@ -13055,7 +13656,7 @@
       </p:sp>
       <p:sp>
         <p:nvSpPr>
-          <p:cNvPr id="14" name="Text 12"/>
+          <p:cNvPr id="22" name="Text 20"/>
           <p:cNvSpPr/>
           <p:nvPr/>
         </p:nvSpPr>
@@ -13218,7 +13819,7 @@
                 <a:ea typeface="Georgia" pitchFamily="34" charset="-122"/>
                 <a:cs typeface="Georgia" pitchFamily="34" charset="-120"/>
               </a:rPr>
-              <a:t>Facturation</a:t>
+              <a:t>Rapports d'intervention (suite)</a:t>
             </a:r>
             <a:endParaRPr lang="en-US" sz="2400" dirty="0"/>
           </a:p>
@@ -13304,7 +13905,7 @@
                 <a:ea typeface="Segoe UI" pitchFamily="34" charset="-122"/>
                 <a:cs typeface="Segoe UI" pitchFamily="34" charset="-120"/>
               </a:rPr>
-              <a:t>Export PDF des factures</a:t>
+              <a:t>Statut de suivi automatique (À faire / En cours / Terminée)</a:t>
             </a:r>
             <a:endParaRPr lang="en-US" sz="1400" dirty="0"/>
           </a:p>
@@ -13346,7 +13947,7 @@
                 <a:ea typeface="Segoe UI" pitchFamily="34" charset="-122"/>
                 <a:cs typeface="Segoe UI" pitchFamily="34" charset="-120"/>
               </a:rPr>
-              <a:t>Chaque facture (issue d'un devis signé ou d'une intervention) peut désormais être téléchargée en PDF avec les informations de l'entreprise, du client et du montant — bouton ajouté dans la page Facturation et dans la fiche d'une intervention.</a:t>
+              <a:t>Le statut d'une intervention évolue automatiquement selon sa date (À faire tant que la date n'est pas arrivée, En cours le jour J), jusqu'à être marquée Terminée manuellement puis, si besoin, archivée.</a:t>
             </a:r>
             <a:endParaRPr lang="en-US" sz="1100" dirty="0"/>
           </a:p>
@@ -13354,7 +13955,135 @@
       </p:sp>
       <p:sp>
         <p:nvSpPr>
-          <p:cNvPr id="9" name="Text 7"/>
+          <p:cNvPr id="9" name="Shape 7"/>
+          <p:cNvSpPr/>
+          <p:nvPr/>
+        </p:nvSpPr>
+        <p:spPr>
+          <a:xfrm>
+            <a:off x="640080" y="2926080"/>
+            <a:ext cx="10881360" cy="1097280"/>
+          </a:xfrm>
+          <a:prstGeom prst="roundRect">
+            <a:avLst>
+              <a:gd name="adj" fmla="val 5000"/>
+            </a:avLst>
+          </a:prstGeom>
+          <a:solidFill>
+            <a:srgbClr val="FFFFFF"/>
+          </a:solidFill>
+          <a:ln w="12700">
+            <a:solidFill>
+              <a:srgbClr val="E4DCCB"/>
+            </a:solidFill>
+            <a:prstDash val="solid"/>
+          </a:ln>
+        </p:spPr>
+      </p:sp>
+      <p:sp>
+        <p:nvSpPr>
+          <p:cNvPr id="10" name="Shape 8"/>
+          <p:cNvSpPr/>
+          <p:nvPr/>
+        </p:nvSpPr>
+        <p:spPr>
+          <a:xfrm>
+            <a:off x="640080" y="2926080"/>
+            <a:ext cx="54864" cy="1097280"/>
+          </a:xfrm>
+          <a:prstGeom prst="rect">
+            <a:avLst/>
+          </a:prstGeom>
+          <a:solidFill>
+            <a:srgbClr val="9A4C1F"/>
+          </a:solidFill>
+          <a:ln/>
+        </p:spPr>
+      </p:sp>
+      <p:sp>
+        <p:nvSpPr>
+          <p:cNvPr id="11" name="Text 9"/>
+          <p:cNvSpPr/>
+          <p:nvPr/>
+        </p:nvSpPr>
+        <p:spPr>
+          <a:xfrm>
+            <a:off x="914400" y="3035808"/>
+            <a:ext cx="10332720" cy="365760"/>
+          </a:xfrm>
+          <a:prstGeom prst="rect">
+            <a:avLst/>
+          </a:prstGeom>
+          <a:noFill/>
+          <a:ln/>
+        </p:spPr>
+        <p:txBody>
+          <a:bodyPr wrap="square" rtlCol="0" anchor="ctr"/>
+          <a:lstStyle/>
+          <a:p>
+            <a:pPr indent="0" marL="0">
+              <a:buNone/>
+            </a:pPr>
+            <a:r>
+              <a:rPr lang="en-US" sz="1400" b="1" dirty="0">
+                <a:solidFill>
+                  <a:srgbClr val="1B1F3B"/>
+                </a:solidFill>
+                <a:latin typeface="Segoe UI" pitchFamily="34" charset="0"/>
+                <a:ea typeface="Segoe UI" pitchFamily="34" charset="-122"/>
+                <a:cs typeface="Segoe UI" pitchFamily="34" charset="-120"/>
+              </a:rPr>
+              <a:t>Numéro de rapport automatique</a:t>
+            </a:r>
+            <a:endParaRPr lang="en-US" sz="1400" dirty="0"/>
+          </a:p>
+        </p:txBody>
+      </p:sp>
+      <p:sp>
+        <p:nvSpPr>
+          <p:cNvPr id="12" name="Text 10"/>
+          <p:cNvSpPr/>
+          <p:nvPr/>
+        </p:nvSpPr>
+        <p:spPr>
+          <a:xfrm>
+            <a:off x="914400" y="3383280"/>
+            <a:ext cx="10332720" cy="594360"/>
+          </a:xfrm>
+          <a:prstGeom prst="rect">
+            <a:avLst/>
+          </a:prstGeom>
+          <a:noFill/>
+          <a:ln/>
+        </p:spPr>
+        <p:txBody>
+          <a:bodyPr wrap="square" rtlCol="0" anchor="ctr"/>
+          <a:lstStyle/>
+          <a:p>
+            <a:pPr indent="0" marL="0">
+              <a:lnSpc>
+                <a:spcPts val="1400"/>
+              </a:lnSpc>
+              <a:buNone/>
+            </a:pPr>
+            <a:r>
+              <a:rPr lang="en-US" sz="1100" dirty="0">
+                <a:solidFill>
+                  <a:srgbClr val="8A7C68"/>
+                </a:solidFill>
+                <a:latin typeface="Segoe UI" pitchFamily="34" charset="0"/>
+                <a:ea typeface="Segoe UI" pitchFamily="34" charset="-122"/>
+                <a:cs typeface="Segoe UI" pitchFamily="34" charset="-120"/>
+              </a:rPr>
+              <a:t>Chaque rapport reçoit un numéro unique généré automatiquement (ex. INT-2026-0003), affiché en en-tête avec la date de création, sur le même principe que la numérotation des devis et factures.</a:t>
+            </a:r>
+            <a:endParaRPr lang="en-US" sz="1100" dirty="0"/>
+          </a:p>
+        </p:txBody>
+      </p:sp>
+      <p:sp>
+        <p:nvSpPr>
+          <p:cNvPr id="13" name="Text 11"/>
           <p:cNvSpPr/>
           <p:nvPr/>
         </p:nvSpPr>
@@ -13393,7 +14122,7 @@
       </p:sp>
       <p:sp>
         <p:nvSpPr>
-          <p:cNvPr id="10" name="Text 8"/>
+          <p:cNvPr id="14" name="Text 12"/>
           <p:cNvSpPr/>
           <p:nvPr/>
         </p:nvSpPr>
@@ -13441,6 +14170,344 @@
 <file path=ppt/slides/slide27.xml><?xml version="1.0" encoding="utf-8"?>
 <p:sld xmlns:a="http://schemas.openxmlformats.org/drawingml/2006/main" xmlns:r="http://schemas.openxmlformats.org/officeDocument/2006/relationships" xmlns:p="http://schemas.openxmlformats.org/presentationml/2006/main">
   <p:cSld name="Slide 27">
+    <p:bg>
+      <p:bgPr>
+        <a:solidFill>
+          <a:srgbClr val="F3EEE3"/>
+        </a:solidFill>
+      </p:bgPr>
+    </p:bg>
+    <p:spTree>
+      <p:nvGrpSpPr>
+        <p:cNvPr id="1" name=""/>
+        <p:cNvGrpSpPr/>
+        <p:nvPr/>
+      </p:nvGrpSpPr>
+      <p:grpSpPr>
+        <a:xfrm>
+          <a:off x="0" y="0"/>
+          <a:ext cx="0" cy="0"/>
+          <a:chOff x="0" y="0"/>
+          <a:chExt cx="0" cy="0"/>
+        </a:xfrm>
+      </p:grpSpPr>
+      <p:sp>
+        <p:nvSpPr>
+          <p:cNvPr id="2" name="Shape 0"/>
+          <p:cNvSpPr/>
+          <p:nvPr/>
+        </p:nvSpPr>
+        <p:spPr>
+          <a:xfrm>
+            <a:off x="640080" y="411480"/>
+            <a:ext cx="2377440" cy="365760"/>
+          </a:xfrm>
+          <a:prstGeom prst="roundRect">
+            <a:avLst>
+              <a:gd name="adj" fmla="val 50000"/>
+            </a:avLst>
+          </a:prstGeom>
+          <a:solidFill>
+            <a:srgbClr val="F5E6DA"/>
+          </a:solidFill>
+          <a:ln/>
+        </p:spPr>
+      </p:sp>
+      <p:sp>
+        <p:nvSpPr>
+          <p:cNvPr id="3" name="Text 1"/>
+          <p:cNvSpPr/>
+          <p:nvPr/>
+        </p:nvSpPr>
+        <p:spPr>
+          <a:xfrm>
+            <a:off x="640080" y="411480"/>
+            <a:ext cx="2377440" cy="365760"/>
+          </a:xfrm>
+          <a:prstGeom prst="rect">
+            <a:avLst/>
+          </a:prstGeom>
+          <a:noFill/>
+          <a:ln/>
+        </p:spPr>
+        <p:txBody>
+          <a:bodyPr wrap="square" rtlCol="0" anchor="ctr"/>
+          <a:lstStyle/>
+          <a:p>
+            <a:pPr algn="ctr" indent="0" marL="0">
+              <a:buNone/>
+            </a:pPr>
+            <a:r>
+              <a:rPr lang="en-US" sz="1000" b="1" spc="100" kern="0" dirty="0">
+                <a:solidFill>
+                  <a:srgbClr val="9A4C1F"/>
+                </a:solidFill>
+                <a:latin typeface="Segoe UI" pitchFamily="34" charset="0"/>
+                <a:ea typeface="Segoe UI" pitchFamily="34" charset="-122"/>
+                <a:cs typeface="Segoe UI" pitchFamily="34" charset="-120"/>
+              </a:rPr>
+              <a:t>BACKEND</a:t>
+            </a:r>
+            <a:endParaRPr lang="en-US" sz="1000" dirty="0"/>
+          </a:p>
+        </p:txBody>
+      </p:sp>
+      <p:sp>
+        <p:nvSpPr>
+          <p:cNvPr id="4" name="Text 2"/>
+          <p:cNvSpPr/>
+          <p:nvPr/>
+        </p:nvSpPr>
+        <p:spPr>
+          <a:xfrm>
+            <a:off x="640080" y="868680"/>
+            <a:ext cx="10515600" cy="548640"/>
+          </a:xfrm>
+          <a:prstGeom prst="rect">
+            <a:avLst/>
+          </a:prstGeom>
+          <a:noFill/>
+          <a:ln/>
+        </p:spPr>
+        <p:txBody>
+          <a:bodyPr wrap="square" rtlCol="0" anchor="ctr"/>
+          <a:lstStyle/>
+          <a:p>
+            <a:pPr indent="0" marL="0">
+              <a:buNone/>
+            </a:pPr>
+            <a:r>
+              <a:rPr lang="en-US" sz="2400" b="1" dirty="0">
+                <a:solidFill>
+                  <a:srgbClr val="1B1F3B"/>
+                </a:solidFill>
+                <a:latin typeface="Georgia" pitchFamily="34" charset="0"/>
+                <a:ea typeface="Georgia" pitchFamily="34" charset="-122"/>
+                <a:cs typeface="Georgia" pitchFamily="34" charset="-120"/>
+              </a:rPr>
+              <a:t>Facturation</a:t>
+            </a:r>
+            <a:endParaRPr lang="en-US" sz="2400" dirty="0"/>
+          </a:p>
+        </p:txBody>
+      </p:sp>
+      <p:sp>
+        <p:nvSpPr>
+          <p:cNvPr id="5" name="Shape 3"/>
+          <p:cNvSpPr/>
+          <p:nvPr/>
+        </p:nvSpPr>
+        <p:spPr>
+          <a:xfrm>
+            <a:off x="640080" y="1691640"/>
+            <a:ext cx="10881360" cy="1097280"/>
+          </a:xfrm>
+          <a:prstGeom prst="roundRect">
+            <a:avLst>
+              <a:gd name="adj" fmla="val 5000"/>
+            </a:avLst>
+          </a:prstGeom>
+          <a:solidFill>
+            <a:srgbClr val="FFFFFF"/>
+          </a:solidFill>
+          <a:ln w="12700">
+            <a:solidFill>
+              <a:srgbClr val="E4DCCB"/>
+            </a:solidFill>
+            <a:prstDash val="solid"/>
+          </a:ln>
+        </p:spPr>
+      </p:sp>
+      <p:sp>
+        <p:nvSpPr>
+          <p:cNvPr id="6" name="Shape 4"/>
+          <p:cNvSpPr/>
+          <p:nvPr/>
+        </p:nvSpPr>
+        <p:spPr>
+          <a:xfrm>
+            <a:off x="640080" y="1691640"/>
+            <a:ext cx="54864" cy="1097280"/>
+          </a:xfrm>
+          <a:prstGeom prst="rect">
+            <a:avLst/>
+          </a:prstGeom>
+          <a:solidFill>
+            <a:srgbClr val="9A4C1F"/>
+          </a:solidFill>
+          <a:ln/>
+        </p:spPr>
+      </p:sp>
+      <p:sp>
+        <p:nvSpPr>
+          <p:cNvPr id="7" name="Text 5"/>
+          <p:cNvSpPr/>
+          <p:nvPr/>
+        </p:nvSpPr>
+        <p:spPr>
+          <a:xfrm>
+            <a:off x="914400" y="1801368"/>
+            <a:ext cx="10332720" cy="365760"/>
+          </a:xfrm>
+          <a:prstGeom prst="rect">
+            <a:avLst/>
+          </a:prstGeom>
+          <a:noFill/>
+          <a:ln/>
+        </p:spPr>
+        <p:txBody>
+          <a:bodyPr wrap="square" rtlCol="0" anchor="ctr"/>
+          <a:lstStyle/>
+          <a:p>
+            <a:pPr indent="0" marL="0">
+              <a:buNone/>
+            </a:pPr>
+            <a:r>
+              <a:rPr lang="en-US" sz="1400" b="1" dirty="0">
+                <a:solidFill>
+                  <a:srgbClr val="1B1F3B"/>
+                </a:solidFill>
+                <a:latin typeface="Segoe UI" pitchFamily="34" charset="0"/>
+                <a:ea typeface="Segoe UI" pitchFamily="34" charset="-122"/>
+                <a:cs typeface="Segoe UI" pitchFamily="34" charset="-120"/>
+              </a:rPr>
+              <a:t>Export PDF des factures</a:t>
+            </a:r>
+            <a:endParaRPr lang="en-US" sz="1400" dirty="0"/>
+          </a:p>
+        </p:txBody>
+      </p:sp>
+      <p:sp>
+        <p:nvSpPr>
+          <p:cNvPr id="8" name="Text 6"/>
+          <p:cNvSpPr/>
+          <p:nvPr/>
+        </p:nvSpPr>
+        <p:spPr>
+          <a:xfrm>
+            <a:off x="914400" y="2148840"/>
+            <a:ext cx="10332720" cy="594360"/>
+          </a:xfrm>
+          <a:prstGeom prst="rect">
+            <a:avLst/>
+          </a:prstGeom>
+          <a:noFill/>
+          <a:ln/>
+        </p:spPr>
+        <p:txBody>
+          <a:bodyPr wrap="square" rtlCol="0" anchor="ctr"/>
+          <a:lstStyle/>
+          <a:p>
+            <a:pPr indent="0" marL="0">
+              <a:lnSpc>
+                <a:spcPts val="1400"/>
+              </a:lnSpc>
+              <a:buNone/>
+            </a:pPr>
+            <a:r>
+              <a:rPr lang="en-US" sz="1100" dirty="0">
+                <a:solidFill>
+                  <a:srgbClr val="8A7C68"/>
+                </a:solidFill>
+                <a:latin typeface="Segoe UI" pitchFamily="34" charset="0"/>
+                <a:ea typeface="Segoe UI" pitchFamily="34" charset="-122"/>
+                <a:cs typeface="Segoe UI" pitchFamily="34" charset="-120"/>
+              </a:rPr>
+              <a:t>Chaque facture (issue d'un devis signé ou d'une intervention) peut désormais être téléchargée en PDF avec les informations de l'entreprise, du client et du montant — bouton ajouté dans la page Facturation et dans la fiche d'une intervention.</a:t>
+            </a:r>
+            <a:endParaRPr lang="en-US" sz="1100" dirty="0"/>
+          </a:p>
+        </p:txBody>
+      </p:sp>
+      <p:sp>
+        <p:nvSpPr>
+          <p:cNvPr id="9" name="Text 7"/>
+          <p:cNvSpPr/>
+          <p:nvPr/>
+        </p:nvSpPr>
+        <p:spPr>
+          <a:xfrm>
+            <a:off x="365760" y="6510528"/>
+            <a:ext cx="5486400" cy="274320"/>
+          </a:xfrm>
+          <a:prstGeom prst="rect">
+            <a:avLst/>
+          </a:prstGeom>
+          <a:noFill/>
+          <a:ln/>
+        </p:spPr>
+        <p:txBody>
+          <a:bodyPr wrap="square" rtlCol="0" anchor="ctr"/>
+          <a:lstStyle/>
+          <a:p>
+            <a:pPr indent="0" marL="0">
+              <a:buNone/>
+            </a:pPr>
+            <a:r>
+              <a:rPr lang="en-US" sz="900" dirty="0">
+                <a:solidFill>
+                  <a:srgbClr val="8A7C68"/>
+                </a:solidFill>
+                <a:latin typeface="Segoe UI" pitchFamily="34" charset="0"/>
+                <a:ea typeface="Segoe UI" pitchFamily="34" charset="-122"/>
+                <a:cs typeface="Segoe UI" pitchFamily="34" charset="-120"/>
+              </a:rPr>
+              <a:t>Kôji Web — Récapitulatif technique</a:t>
+            </a:r>
+            <a:endParaRPr lang="en-US" sz="900" dirty="0"/>
+          </a:p>
+        </p:txBody>
+      </p:sp>
+      <p:sp>
+        <p:nvSpPr>
+          <p:cNvPr id="10" name="Text 8"/>
+          <p:cNvSpPr/>
+          <p:nvPr/>
+        </p:nvSpPr>
+        <p:spPr>
+          <a:xfrm>
+            <a:off x="9601200" y="6510528"/>
+            <a:ext cx="2194560" cy="274320"/>
+          </a:xfrm>
+          <a:prstGeom prst="rect">
+            <a:avLst/>
+          </a:prstGeom>
+          <a:noFill/>
+          <a:ln/>
+        </p:spPr>
+        <p:txBody>
+          <a:bodyPr wrap="square" rtlCol="0" anchor="ctr"/>
+          <a:lstStyle/>
+          <a:p>
+            <a:pPr algn="r" indent="0" marL="0">
+              <a:buNone/>
+            </a:pPr>
+            <a:r>
+              <a:rPr lang="en-US" sz="900" dirty="0">
+                <a:solidFill>
+                  <a:srgbClr val="8A7C68"/>
+                </a:solidFill>
+                <a:latin typeface="Segoe UI" pitchFamily="34" charset="0"/>
+                <a:ea typeface="Segoe UI" pitchFamily="34" charset="-122"/>
+                <a:cs typeface="Segoe UI" pitchFamily="34" charset="-120"/>
+              </a:rPr>
+              <a:t>27</a:t>
+            </a:r>
+            <a:endParaRPr lang="en-US" sz="900" dirty="0"/>
+          </a:p>
+        </p:txBody>
+      </p:sp>
+    </p:spTree>
+  </p:cSld>
+  <p:clrMapOvr>
+    <a:masterClrMapping/>
+  </p:clrMapOvr>
+</p:sld>
+</file>
+
+<file path=ppt/slides/slide28.xml><?xml version="1.0" encoding="utf-8"?>
+<p:sld xmlns:a="http://schemas.openxmlformats.org/drawingml/2006/main" xmlns:r="http://schemas.openxmlformats.org/officeDocument/2006/relationships" xmlns:p="http://schemas.openxmlformats.org/presentationml/2006/main">
+  <p:cSld name="Slide 28">
     <p:bg>
       <p:bgPr>
         <a:solidFill>
@@ -13593,7 +14660,7 @@
                 <a:ea typeface="Segoe UI" pitchFamily="34" charset="-122"/>
                 <a:cs typeface="Segoe UI" pitchFamily="34" charset="-120"/>
               </a:rPr>
-              <a:t>7 mise(s) à jour</a:t>
+              <a:t>8 mise(s) à jour</a:t>
             </a:r>
             <a:endParaRPr lang="en-US" sz="1200" dirty="0"/>
           </a:p>
@@ -13641,344 +14708,6 @@
       <p:sp>
         <p:nvSpPr>
           <p:cNvPr id="7" name="Text 5"/>
-          <p:cNvSpPr/>
-          <p:nvPr/>
-        </p:nvSpPr>
-        <p:spPr>
-          <a:xfrm>
-            <a:off x="9601200" y="6510528"/>
-            <a:ext cx="2194560" cy="274320"/>
-          </a:xfrm>
-          <a:prstGeom prst="rect">
-            <a:avLst/>
-          </a:prstGeom>
-          <a:noFill/>
-          <a:ln/>
-        </p:spPr>
-        <p:txBody>
-          <a:bodyPr wrap="square" rtlCol="0" anchor="ctr"/>
-          <a:lstStyle/>
-          <a:p>
-            <a:pPr algn="r" indent="0" marL="0">
-              <a:buNone/>
-            </a:pPr>
-            <a:r>
-              <a:rPr lang="en-US" sz="900" dirty="0">
-                <a:solidFill>
-                  <a:srgbClr val="8A7C68"/>
-                </a:solidFill>
-                <a:latin typeface="Segoe UI" pitchFamily="34" charset="0"/>
-                <a:ea typeface="Segoe UI" pitchFamily="34" charset="-122"/>
-                <a:cs typeface="Segoe UI" pitchFamily="34" charset="-120"/>
-              </a:rPr>
-              <a:t>27</a:t>
-            </a:r>
-            <a:endParaRPr lang="en-US" sz="900" dirty="0"/>
-          </a:p>
-        </p:txBody>
-      </p:sp>
-    </p:spTree>
-  </p:cSld>
-  <p:clrMapOvr>
-    <a:masterClrMapping/>
-  </p:clrMapOvr>
-</p:sld>
-</file>
-
-<file path=ppt/slides/slide28.xml><?xml version="1.0" encoding="utf-8"?>
-<p:sld xmlns:a="http://schemas.openxmlformats.org/drawingml/2006/main" xmlns:r="http://schemas.openxmlformats.org/officeDocument/2006/relationships" xmlns:p="http://schemas.openxmlformats.org/presentationml/2006/main">
-  <p:cSld name="Slide 28">
-    <p:bg>
-      <p:bgPr>
-        <a:solidFill>
-          <a:srgbClr val="F3EEE3"/>
-        </a:solidFill>
-      </p:bgPr>
-    </p:bg>
-    <p:spTree>
-      <p:nvGrpSpPr>
-        <p:cNvPr id="1" name=""/>
-        <p:cNvGrpSpPr/>
-        <p:nvPr/>
-      </p:nvGrpSpPr>
-      <p:grpSpPr>
-        <a:xfrm>
-          <a:off x="0" y="0"/>
-          <a:ext cx="0" cy="0"/>
-          <a:chOff x="0" y="0"/>
-          <a:chExt cx="0" cy="0"/>
-        </a:xfrm>
-      </p:grpSpPr>
-      <p:sp>
-        <p:nvSpPr>
-          <p:cNvPr id="2" name="Shape 0"/>
-          <p:cNvSpPr/>
-          <p:nvPr/>
-        </p:nvSpPr>
-        <p:spPr>
-          <a:xfrm>
-            <a:off x="640080" y="411480"/>
-            <a:ext cx="2377440" cy="365760"/>
-          </a:xfrm>
-          <a:prstGeom prst="roundRect">
-            <a:avLst>
-              <a:gd name="adj" fmla="val 50000"/>
-            </a:avLst>
-          </a:prstGeom>
-          <a:solidFill>
-            <a:srgbClr val="E6EFE4"/>
-          </a:solidFill>
-          <a:ln/>
-        </p:spPr>
-      </p:sp>
-      <p:sp>
-        <p:nvSpPr>
-          <p:cNvPr id="3" name="Text 1"/>
-          <p:cNvSpPr/>
-          <p:nvPr/>
-        </p:nvSpPr>
-        <p:spPr>
-          <a:xfrm>
-            <a:off x="640080" y="411480"/>
-            <a:ext cx="2377440" cy="365760"/>
-          </a:xfrm>
-          <a:prstGeom prst="rect">
-            <a:avLst/>
-          </a:prstGeom>
-          <a:noFill/>
-          <a:ln/>
-        </p:spPr>
-        <p:txBody>
-          <a:bodyPr wrap="square" rtlCol="0" anchor="ctr"/>
-          <a:lstStyle/>
-          <a:p>
-            <a:pPr algn="ctr" indent="0" marL="0">
-              <a:buNone/>
-            </a:pPr>
-            <a:r>
-              <a:rPr lang="en-US" sz="1000" b="1" spc="100" kern="0" dirty="0">
-                <a:solidFill>
-                  <a:srgbClr val="386641"/>
-                </a:solidFill>
-                <a:latin typeface="Segoe UI" pitchFamily="34" charset="0"/>
-                <a:ea typeface="Segoe UI" pitchFamily="34" charset="-122"/>
-                <a:cs typeface="Segoe UI" pitchFamily="34" charset="-120"/>
-              </a:rPr>
-              <a:t>BASE DE DONNÉES</a:t>
-            </a:r>
-            <a:endParaRPr lang="en-US" sz="1000" dirty="0"/>
-          </a:p>
-        </p:txBody>
-      </p:sp>
-      <p:sp>
-        <p:nvSpPr>
-          <p:cNvPr id="4" name="Text 2"/>
-          <p:cNvSpPr/>
-          <p:nvPr/>
-        </p:nvSpPr>
-        <p:spPr>
-          <a:xfrm>
-            <a:off x="640080" y="868680"/>
-            <a:ext cx="10515600" cy="548640"/>
-          </a:xfrm>
-          <a:prstGeom prst="rect">
-            <a:avLst/>
-          </a:prstGeom>
-          <a:noFill/>
-          <a:ln/>
-        </p:spPr>
-        <p:txBody>
-          <a:bodyPr wrap="square" rtlCol="0" anchor="ctr"/>
-          <a:lstStyle/>
-          <a:p>
-            <a:pPr indent="0" marL="0">
-              <a:buNone/>
-            </a:pPr>
-            <a:r>
-              <a:rPr lang="en-US" sz="2400" b="1" dirty="0">
-                <a:solidFill>
-                  <a:srgbClr val="1B1F3B"/>
-                </a:solidFill>
-                <a:latin typeface="Georgia" pitchFamily="34" charset="0"/>
-                <a:ea typeface="Georgia" pitchFamily="34" charset="-122"/>
-                <a:cs typeface="Georgia" pitchFamily="34" charset="-120"/>
-              </a:rPr>
-              <a:t>Fondations</a:t>
-            </a:r>
-            <a:endParaRPr lang="en-US" sz="2400" dirty="0"/>
-          </a:p>
-        </p:txBody>
-      </p:sp>
-      <p:sp>
-        <p:nvSpPr>
-          <p:cNvPr id="5" name="Shape 3"/>
-          <p:cNvSpPr/>
-          <p:nvPr/>
-        </p:nvSpPr>
-        <p:spPr>
-          <a:xfrm>
-            <a:off x="640080" y="1691640"/>
-            <a:ext cx="10881360" cy="1097280"/>
-          </a:xfrm>
-          <a:prstGeom prst="roundRect">
-            <a:avLst>
-              <a:gd name="adj" fmla="val 5000"/>
-            </a:avLst>
-          </a:prstGeom>
-          <a:solidFill>
-            <a:srgbClr val="FFFFFF"/>
-          </a:solidFill>
-          <a:ln w="12700">
-            <a:solidFill>
-              <a:srgbClr val="E4DCCB"/>
-            </a:solidFill>
-            <a:prstDash val="solid"/>
-          </a:ln>
-        </p:spPr>
-      </p:sp>
-      <p:sp>
-        <p:nvSpPr>
-          <p:cNvPr id="6" name="Shape 4"/>
-          <p:cNvSpPr/>
-          <p:nvPr/>
-        </p:nvSpPr>
-        <p:spPr>
-          <a:xfrm>
-            <a:off x="640080" y="1691640"/>
-            <a:ext cx="54864" cy="1097280"/>
-          </a:xfrm>
-          <a:prstGeom prst="rect">
-            <a:avLst/>
-          </a:prstGeom>
-          <a:solidFill>
-            <a:srgbClr val="386641"/>
-          </a:solidFill>
-          <a:ln/>
-        </p:spPr>
-      </p:sp>
-      <p:sp>
-        <p:nvSpPr>
-          <p:cNvPr id="7" name="Text 5"/>
-          <p:cNvSpPr/>
-          <p:nvPr/>
-        </p:nvSpPr>
-        <p:spPr>
-          <a:xfrm>
-            <a:off x="914400" y="1801368"/>
-            <a:ext cx="10332720" cy="365760"/>
-          </a:xfrm>
-          <a:prstGeom prst="rect">
-            <a:avLst/>
-          </a:prstGeom>
-          <a:noFill/>
-          <a:ln/>
-        </p:spPr>
-        <p:txBody>
-          <a:bodyPr wrap="square" rtlCol="0" anchor="ctr"/>
-          <a:lstStyle/>
-          <a:p>
-            <a:pPr indent="0" marL="0">
-              <a:buNone/>
-            </a:pPr>
-            <a:r>
-              <a:rPr lang="en-US" sz="1400" b="1" dirty="0">
-                <a:solidFill>
-                  <a:srgbClr val="1B1F3B"/>
-                </a:solidFill>
-                <a:latin typeface="Segoe UI" pitchFamily="34" charset="0"/>
-                <a:ea typeface="Segoe UI" pitchFamily="34" charset="-122"/>
-                <a:cs typeface="Segoe UI" pitchFamily="34" charset="-120"/>
-              </a:rPr>
-              <a:t>Connexion Vercel / configuration environnement</a:t>
-            </a:r>
-            <a:endParaRPr lang="en-US" sz="1400" dirty="0"/>
-          </a:p>
-        </p:txBody>
-      </p:sp>
-      <p:sp>
-        <p:nvSpPr>
-          <p:cNvPr id="8" name="Text 6"/>
-          <p:cNvSpPr/>
-          <p:nvPr/>
-        </p:nvSpPr>
-        <p:spPr>
-          <a:xfrm>
-            <a:off x="914400" y="2148840"/>
-            <a:ext cx="10332720" cy="594360"/>
-          </a:xfrm>
-          <a:prstGeom prst="rect">
-            <a:avLst/>
-          </a:prstGeom>
-          <a:noFill/>
-          <a:ln/>
-        </p:spPr>
-        <p:txBody>
-          <a:bodyPr wrap="square" rtlCol="0" anchor="ctr"/>
-          <a:lstStyle/>
-          <a:p>
-            <a:pPr indent="0" marL="0">
-              <a:lnSpc>
-                <a:spcPts val="1400"/>
-              </a:lnSpc>
-              <a:buNone/>
-            </a:pPr>
-            <a:r>
-              <a:rPr lang="en-US" sz="1100" dirty="0">
-                <a:solidFill>
-                  <a:srgbClr val="8A7C68"/>
-                </a:solidFill>
-                <a:latin typeface="Segoe UI" pitchFamily="34" charset="0"/>
-                <a:ea typeface="Segoe UI" pitchFamily="34" charset="-122"/>
-                <a:cs typeface="Segoe UI" pitchFamily="34" charset="-120"/>
-              </a:rPr>
-              <a:t>Correction de la configuration d'authentification et du SMTP sur l'environnement de production Vercel.</a:t>
-            </a:r>
-            <a:endParaRPr lang="en-US" sz="1100" dirty="0"/>
-          </a:p>
-        </p:txBody>
-      </p:sp>
-      <p:sp>
-        <p:nvSpPr>
-          <p:cNvPr id="9" name="Text 7"/>
-          <p:cNvSpPr/>
-          <p:nvPr/>
-        </p:nvSpPr>
-        <p:spPr>
-          <a:xfrm>
-            <a:off x="365760" y="6510528"/>
-            <a:ext cx="5486400" cy="274320"/>
-          </a:xfrm>
-          <a:prstGeom prst="rect">
-            <a:avLst/>
-          </a:prstGeom>
-          <a:noFill/>
-          <a:ln/>
-        </p:spPr>
-        <p:txBody>
-          <a:bodyPr wrap="square" rtlCol="0" anchor="ctr"/>
-          <a:lstStyle/>
-          <a:p>
-            <a:pPr indent="0" marL="0">
-              <a:buNone/>
-            </a:pPr>
-            <a:r>
-              <a:rPr lang="en-US" sz="900" dirty="0">
-                <a:solidFill>
-                  <a:srgbClr val="8A7C68"/>
-                </a:solidFill>
-                <a:latin typeface="Segoe UI" pitchFamily="34" charset="0"/>
-                <a:ea typeface="Segoe UI" pitchFamily="34" charset="-122"/>
-                <a:cs typeface="Segoe UI" pitchFamily="34" charset="-120"/>
-              </a:rPr>
-              <a:t>Kôji Web — Récapitulatif technique</a:t>
-            </a:r>
-            <a:endParaRPr lang="en-US" sz="900" dirty="0"/>
-          </a:p>
-        </p:txBody>
-      </p:sp>
-      <p:sp>
-        <p:nvSpPr>
-          <p:cNvPr id="10" name="Text 8"/>
           <p:cNvSpPr/>
           <p:nvPr/>
         </p:nvSpPr>
@@ -14141,7 +14870,7 @@
                 <a:ea typeface="Georgia" pitchFamily="34" charset="-122"/>
                 <a:cs typeface="Georgia" pitchFamily="34" charset="-120"/>
               </a:rPr>
-              <a:t>Devis</a:t>
+              <a:t>Fondations</a:t>
             </a:r>
             <a:endParaRPr lang="en-US" sz="2400" dirty="0"/>
           </a:p>
@@ -14227,7 +14956,7 @@
                 <a:ea typeface="Segoe UI" pitchFamily="34" charset="-122"/>
                 <a:cs typeface="Segoe UI" pitchFamily="34" charset="-120"/>
               </a:rPr>
-              <a:t>Migration des devis vers Supabase (table partagée)</a:t>
+              <a:t>Connexion Vercel / configuration environnement</a:t>
             </a:r>
             <a:endParaRPr lang="en-US" sz="1400" dirty="0"/>
           </a:p>
@@ -14269,7 +14998,7 @@
                 <a:ea typeface="Segoe UI" pitchFamily="34" charset="-122"/>
                 <a:cs typeface="Segoe UI" pitchFamily="34" charset="-120"/>
               </a:rPr>
-              <a:t>Les devis créés sur le site web et sur l'application mobile (Firas) vivent désormais dans la même table Supabase 'quotes', avec un mapping bidirectionnel dédié (lib/quote-mapping.js).</a:t>
+              <a:t>Correction de la configuration d'authentification et du SMTP sur l'environnement de production Vercel.</a:t>
             </a:r>
             <a:endParaRPr lang="en-US" sz="1100" dirty="0"/>
           </a:p>
@@ -14516,7 +15245,7 @@
                 <a:ea typeface="Segoe UI" pitchFamily="34" charset="-122"/>
                 <a:cs typeface="Segoe UI" pitchFamily="34" charset="-120"/>
               </a:rPr>
-              <a:t>35 mise(s) à jour</a:t>
+              <a:t>36 mise(s) à jour</a:t>
             </a:r>
             <a:endParaRPr lang="en-US" sz="1200" dirty="0"/>
           </a:p>
@@ -14726,7 +15455,7 @@
                 <a:ea typeface="Georgia" pitchFamily="34" charset="-122"/>
                 <a:cs typeface="Georgia" pitchFamily="34" charset="-120"/>
               </a:rPr>
-              <a:t>Chantiers</a:t>
+              <a:t>Devis</a:t>
             </a:r>
             <a:endParaRPr lang="en-US" sz="2400" dirty="0"/>
           </a:p>
@@ -14812,7 +15541,7 @@
                 <a:ea typeface="Segoe UI" pitchFamily="34" charset="-122"/>
                 <a:cs typeface="Segoe UI" pitchFamily="34" charset="-120"/>
               </a:rPr>
-              <a:t>Connexion Supabase : chantiers, planning, fournitures</a:t>
+              <a:t>Migration des devis vers Supabase (table partagée)</a:t>
             </a:r>
             <a:endParaRPr lang="en-US" sz="1400" dirty="0"/>
           </a:p>
@@ -14854,7 +15583,7 @@
                 <a:ea typeface="Segoe UI" pitchFamily="34" charset="-122"/>
                 <a:cs typeface="Segoe UI" pitchFamily="34" charset="-120"/>
               </a:rPr>
-              <a:t>Ces trois modules sont branchés sur la base partagée avec l'application mobile ; les comptes utilisateurs sont également partagés entre les deux plateformes.</a:t>
+              <a:t>Les devis créés sur le site web et sur l'application mobile (Firas) vivent désormais dans la même table Supabase 'quotes', avec un mapping bidirectionnel dédié (lib/quote-mapping.js).</a:t>
             </a:r>
             <a:endParaRPr lang="en-US" sz="1100" dirty="0"/>
           </a:p>
@@ -15064,7 +15793,7 @@
                 <a:ea typeface="Georgia" pitchFamily="34" charset="-122"/>
                 <a:cs typeface="Georgia" pitchFamily="34" charset="-120"/>
               </a:rPr>
-              <a:t>Équipe</a:t>
+              <a:t>Chantiers</a:t>
             </a:r>
             <a:endParaRPr lang="en-US" sz="2400" dirty="0"/>
           </a:p>
@@ -15150,7 +15879,7 @@
                 <a:ea typeface="Segoe UI" pitchFamily="34" charset="-122"/>
                 <a:cs typeface="Segoe UI" pitchFamily="34" charset="-120"/>
               </a:rPr>
-              <a:t>Nouvelle donnée : heures contractuelles par ouvrier</a:t>
+              <a:t>Connexion Supabase : chantiers, planning, fournitures</a:t>
             </a:r>
             <a:endParaRPr lang="en-US" sz="1400" dirty="0"/>
           </a:p>
@@ -15192,7 +15921,7 @@
                 <a:ea typeface="Segoe UI" pitchFamily="34" charset="-122"/>
                 <a:cs typeface="Segoe UI" pitchFamily="34" charset="-120"/>
               </a:rPr>
-              <a:t>Ajout d'un paramètre 'heures contractuelles / semaine' (35h par défaut) sur chaque fiche ouvrier, utilisé pour le calcul des écarts.</a:t>
+              <a:t>Ces trois modules sont branchés sur la base partagée avec l'application mobile ; les comptes utilisateurs sont également partagés entre les deux plateformes.</a:t>
             </a:r>
             <a:endParaRPr lang="en-US" sz="1100" dirty="0"/>
           </a:p>
@@ -15402,7 +16131,7 @@
                 <a:ea typeface="Georgia" pitchFamily="34" charset="-122"/>
                 <a:cs typeface="Georgia" pitchFamily="34" charset="-120"/>
               </a:rPr>
-              <a:t>Accueil &amp; stabilité</a:t>
+              <a:t>Équipe</a:t>
             </a:r>
             <a:endParaRPr lang="en-US" sz="2400" dirty="0"/>
           </a:p>
@@ -15488,7 +16217,7 @@
                 <a:ea typeface="Segoe UI" pitchFamily="34" charset="-122"/>
                 <a:cs typeface="Segoe UI" pitchFamily="34" charset="-120"/>
               </a:rPr>
-              <a:t>Nettoyage du backend</a:t>
+              <a:t>Nouvelle donnée : heures contractuelles par ouvrier</a:t>
             </a:r>
             <a:endParaRPr lang="en-US" sz="1400" dirty="0"/>
           </a:p>
@@ -15530,7 +16259,7 @@
                 <a:ea typeface="Segoe UI" pitchFamily="34" charset="-122"/>
                 <a:cs typeface="Segoe UI" pitchFamily="34" charset="-120"/>
               </a:rPr>
-              <a:t>Audit complet des routes serveur : suppression du code mort (module Marketplace), vérification de la cohérence entre données locales et données Supabase sur l'ensemble de l'application.</a:t>
+              <a:t>Ajout d'un paramètre 'heures contractuelles / semaine' (35h par défaut) sur chaque fiche ouvrier, utilisé pour le calcul des écarts.</a:t>
             </a:r>
             <a:endParaRPr lang="en-US" sz="1100" dirty="0"/>
           </a:p>
@@ -15740,7 +16469,7 @@
                 <a:ea typeface="Georgia" pitchFamily="34" charset="-122"/>
                 <a:cs typeface="Georgia" pitchFamily="34" charset="-120"/>
               </a:rPr>
-              <a:t>Maintenance technique</a:t>
+              <a:t>Accueil &amp; stabilité</a:t>
             </a:r>
             <a:endParaRPr lang="en-US" sz="2400" dirty="0"/>
           </a:p>
@@ -15826,7 +16555,7 @@
                 <a:ea typeface="Segoe UI" pitchFamily="34" charset="-122"/>
                 <a:cs typeface="Segoe UI" pitchFamily="34" charset="-120"/>
               </a:rPr>
-              <a:t>Nettoyage approfondi du code</a:t>
+              <a:t>Nettoyage du backend</a:t>
             </a:r>
             <a:endParaRPr lang="en-US" sz="1400" dirty="0"/>
           </a:p>
@@ -15868,7 +16597,7 @@
                 <a:ea typeface="Segoe UI" pitchFamily="34" charset="-122"/>
                 <a:cs typeface="Segoe UI" pitchFamily="34" charset="-120"/>
               </a:rPr>
-              <a:t>Audit complet du projet (pages, routes, fonctions, dépendances) pour repérer tout ce qui n'était plus utilisé ; suppression de 6 pages orphelines (onboarding, welcome, compte, anciennes pages devis en 3 étapes), d'une route de connexion de démonstration, d'un dossier de composants dupliqué obsolète, de plusieurs fonctions inutilisées et d'une dépendance logicielle non utilisée — sans toucher aux fonctionnalités actives.</a:t>
+              <a:t>Audit complet des routes serveur : suppression du code mort (module Marketplace), vérification de la cohérence entre données locales et données Supabase sur l'ensemble de l'application.</a:t>
             </a:r>
             <a:endParaRPr lang="en-US" sz="1100" dirty="0"/>
           </a:p>
@@ -15876,135 +16605,7 @@
       </p:sp>
       <p:sp>
         <p:nvSpPr>
-          <p:cNvPr id="9" name="Shape 7"/>
-          <p:cNvSpPr/>
-          <p:nvPr/>
-        </p:nvSpPr>
-        <p:spPr>
-          <a:xfrm>
-            <a:off x="640080" y="2926080"/>
-            <a:ext cx="10881360" cy="1097280"/>
-          </a:xfrm>
-          <a:prstGeom prst="roundRect">
-            <a:avLst>
-              <a:gd name="adj" fmla="val 5000"/>
-            </a:avLst>
-          </a:prstGeom>
-          <a:solidFill>
-            <a:srgbClr val="FFFFFF"/>
-          </a:solidFill>
-          <a:ln w="12700">
-            <a:solidFill>
-              <a:srgbClr val="E4DCCB"/>
-            </a:solidFill>
-            <a:prstDash val="solid"/>
-          </a:ln>
-        </p:spPr>
-      </p:sp>
-      <p:sp>
-        <p:nvSpPr>
-          <p:cNvPr id="10" name="Shape 8"/>
-          <p:cNvSpPr/>
-          <p:nvPr/>
-        </p:nvSpPr>
-        <p:spPr>
-          <a:xfrm>
-            <a:off x="640080" y="2926080"/>
-            <a:ext cx="54864" cy="1097280"/>
-          </a:xfrm>
-          <a:prstGeom prst="rect">
-            <a:avLst/>
-          </a:prstGeom>
-          <a:solidFill>
-            <a:srgbClr val="386641"/>
-          </a:solidFill>
-          <a:ln/>
-        </p:spPr>
-      </p:sp>
-      <p:sp>
-        <p:nvSpPr>
-          <p:cNvPr id="11" name="Text 9"/>
-          <p:cNvSpPr/>
-          <p:nvPr/>
-        </p:nvSpPr>
-        <p:spPr>
-          <a:xfrm>
-            <a:off x="914400" y="3035808"/>
-            <a:ext cx="10332720" cy="365760"/>
-          </a:xfrm>
-          <a:prstGeom prst="rect">
-            <a:avLst/>
-          </a:prstGeom>
-          <a:noFill/>
-          <a:ln/>
-        </p:spPr>
-        <p:txBody>
-          <a:bodyPr wrap="square" rtlCol="0" anchor="ctr"/>
-          <a:lstStyle/>
-          <a:p>
-            <a:pPr indent="0" marL="0">
-              <a:buNone/>
-            </a:pPr>
-            <a:r>
-              <a:rPr lang="en-US" sz="1400" b="1" dirty="0">
-                <a:solidFill>
-                  <a:srgbClr val="1B1F3B"/>
-                </a:solidFill>
-                <a:latin typeface="Segoe UI" pitchFamily="34" charset="0"/>
-                <a:ea typeface="Segoe UI" pitchFamily="34" charset="-122"/>
-                <a:cs typeface="Segoe UI" pitchFamily="34" charset="-120"/>
-              </a:rPr>
-              <a:t>Suppression de code mort dans la génération de devis</a:t>
-            </a:r>
-            <a:endParaRPr lang="en-US" sz="1400" dirty="0"/>
-          </a:p>
-        </p:txBody>
-      </p:sp>
-      <p:sp>
-        <p:nvSpPr>
-          <p:cNvPr id="12" name="Text 10"/>
-          <p:cNvSpPr/>
-          <p:nvPr/>
-        </p:nvSpPr>
-        <p:spPr>
-          <a:xfrm>
-            <a:off x="914400" y="3383280"/>
-            <a:ext cx="10332720" cy="594360"/>
-          </a:xfrm>
-          <a:prstGeom prst="rect">
-            <a:avLst/>
-          </a:prstGeom>
-          <a:noFill/>
-          <a:ln/>
-        </p:spPr>
-        <p:txBody>
-          <a:bodyPr wrap="square" rtlCol="0" anchor="ctr"/>
-          <a:lstStyle/>
-          <a:p>
-            <a:pPr indent="0" marL="0">
-              <a:lnSpc>
-                <a:spcPts val="1400"/>
-              </a:lnSpc>
-              <a:buNone/>
-            </a:pPr>
-            <a:r>
-              <a:rPr lang="en-US" sz="1100" dirty="0">
-                <a:solidFill>
-                  <a:srgbClr val="8A7C68"/>
-                </a:solidFill>
-                <a:latin typeface="Segoe UI" pitchFamily="34" charset="0"/>
-                <a:ea typeface="Segoe UI" pitchFamily="34" charset="-122"/>
-                <a:cs typeface="Segoe UI" pitchFamily="34" charset="-120"/>
-              </a:rPr>
-              <a:t>Un ancien générateur de devis PDF, devenu inaccessible après une précédente refonte (code jamais exécuté), a été retiré du fichier technique de génération de documents.</a:t>
-            </a:r>
-            <a:endParaRPr lang="en-US" sz="1100" dirty="0"/>
-          </a:p>
-        </p:txBody>
-      </p:sp>
-      <p:sp>
-        <p:nvSpPr>
-          <p:cNvPr id="13" name="Text 11"/>
+          <p:cNvPr id="9" name="Text 7"/>
           <p:cNvSpPr/>
           <p:nvPr/>
         </p:nvSpPr>
@@ -16043,7 +16644,7 @@
       </p:sp>
       <p:sp>
         <p:nvSpPr>
-          <p:cNvPr id="14" name="Text 12"/>
+          <p:cNvPr id="10" name="Text 8"/>
           <p:cNvSpPr/>
           <p:nvPr/>
         </p:nvSpPr>
@@ -16091,6 +16692,600 @@
 <file path=ppt/slides/slide34.xml><?xml version="1.0" encoding="utf-8"?>
 <p:sld xmlns:a="http://schemas.openxmlformats.org/drawingml/2006/main" xmlns:r="http://schemas.openxmlformats.org/officeDocument/2006/relationships" xmlns:p="http://schemas.openxmlformats.org/presentationml/2006/main">
   <p:cSld name="Slide 34">
+    <p:bg>
+      <p:bgPr>
+        <a:solidFill>
+          <a:srgbClr val="F3EEE3"/>
+        </a:solidFill>
+      </p:bgPr>
+    </p:bg>
+    <p:spTree>
+      <p:nvGrpSpPr>
+        <p:cNvPr id="1" name=""/>
+        <p:cNvGrpSpPr/>
+        <p:nvPr/>
+      </p:nvGrpSpPr>
+      <p:grpSpPr>
+        <a:xfrm>
+          <a:off x="0" y="0"/>
+          <a:ext cx="0" cy="0"/>
+          <a:chOff x="0" y="0"/>
+          <a:chExt cx="0" cy="0"/>
+        </a:xfrm>
+      </p:grpSpPr>
+      <p:sp>
+        <p:nvSpPr>
+          <p:cNvPr id="2" name="Shape 0"/>
+          <p:cNvSpPr/>
+          <p:nvPr/>
+        </p:nvSpPr>
+        <p:spPr>
+          <a:xfrm>
+            <a:off x="640080" y="411480"/>
+            <a:ext cx="2377440" cy="365760"/>
+          </a:xfrm>
+          <a:prstGeom prst="roundRect">
+            <a:avLst>
+              <a:gd name="adj" fmla="val 50000"/>
+            </a:avLst>
+          </a:prstGeom>
+          <a:solidFill>
+            <a:srgbClr val="E6EFE4"/>
+          </a:solidFill>
+          <a:ln/>
+        </p:spPr>
+      </p:sp>
+      <p:sp>
+        <p:nvSpPr>
+          <p:cNvPr id="3" name="Text 1"/>
+          <p:cNvSpPr/>
+          <p:nvPr/>
+        </p:nvSpPr>
+        <p:spPr>
+          <a:xfrm>
+            <a:off x="640080" y="411480"/>
+            <a:ext cx="2377440" cy="365760"/>
+          </a:xfrm>
+          <a:prstGeom prst="rect">
+            <a:avLst/>
+          </a:prstGeom>
+          <a:noFill/>
+          <a:ln/>
+        </p:spPr>
+        <p:txBody>
+          <a:bodyPr wrap="square" rtlCol="0" anchor="ctr"/>
+          <a:lstStyle/>
+          <a:p>
+            <a:pPr algn="ctr" indent="0" marL="0">
+              <a:buNone/>
+            </a:pPr>
+            <a:r>
+              <a:rPr lang="en-US" sz="1000" b="1" spc="100" kern="0" dirty="0">
+                <a:solidFill>
+                  <a:srgbClr val="386641"/>
+                </a:solidFill>
+                <a:latin typeface="Segoe UI" pitchFamily="34" charset="0"/>
+                <a:ea typeface="Segoe UI" pitchFamily="34" charset="-122"/>
+                <a:cs typeface="Segoe UI" pitchFamily="34" charset="-120"/>
+              </a:rPr>
+              <a:t>BASE DE DONNÉES</a:t>
+            </a:r>
+            <a:endParaRPr lang="en-US" sz="1000" dirty="0"/>
+          </a:p>
+        </p:txBody>
+      </p:sp>
+      <p:sp>
+        <p:nvSpPr>
+          <p:cNvPr id="4" name="Text 2"/>
+          <p:cNvSpPr/>
+          <p:nvPr/>
+        </p:nvSpPr>
+        <p:spPr>
+          <a:xfrm>
+            <a:off x="640080" y="868680"/>
+            <a:ext cx="10515600" cy="548640"/>
+          </a:xfrm>
+          <a:prstGeom prst="rect">
+            <a:avLst/>
+          </a:prstGeom>
+          <a:noFill/>
+          <a:ln/>
+        </p:spPr>
+        <p:txBody>
+          <a:bodyPr wrap="square" rtlCol="0" anchor="ctr"/>
+          <a:lstStyle/>
+          <a:p>
+            <a:pPr indent="0" marL="0">
+              <a:buNone/>
+            </a:pPr>
+            <a:r>
+              <a:rPr lang="en-US" sz="2400" b="1" dirty="0">
+                <a:solidFill>
+                  <a:srgbClr val="1B1F3B"/>
+                </a:solidFill>
+                <a:latin typeface="Georgia" pitchFamily="34" charset="0"/>
+                <a:ea typeface="Georgia" pitchFamily="34" charset="-122"/>
+                <a:cs typeface="Georgia" pitchFamily="34" charset="-120"/>
+              </a:rPr>
+              <a:t>Maintenance technique</a:t>
+            </a:r>
+            <a:endParaRPr lang="en-US" sz="2400" dirty="0"/>
+          </a:p>
+        </p:txBody>
+      </p:sp>
+      <p:sp>
+        <p:nvSpPr>
+          <p:cNvPr id="5" name="Shape 3"/>
+          <p:cNvSpPr/>
+          <p:nvPr/>
+        </p:nvSpPr>
+        <p:spPr>
+          <a:xfrm>
+            <a:off x="640080" y="1691640"/>
+            <a:ext cx="10881360" cy="1097280"/>
+          </a:xfrm>
+          <a:prstGeom prst="roundRect">
+            <a:avLst>
+              <a:gd name="adj" fmla="val 5000"/>
+            </a:avLst>
+          </a:prstGeom>
+          <a:solidFill>
+            <a:srgbClr val="FFFFFF"/>
+          </a:solidFill>
+          <a:ln w="12700">
+            <a:solidFill>
+              <a:srgbClr val="E4DCCB"/>
+            </a:solidFill>
+            <a:prstDash val="solid"/>
+          </a:ln>
+        </p:spPr>
+      </p:sp>
+      <p:sp>
+        <p:nvSpPr>
+          <p:cNvPr id="6" name="Shape 4"/>
+          <p:cNvSpPr/>
+          <p:nvPr/>
+        </p:nvSpPr>
+        <p:spPr>
+          <a:xfrm>
+            <a:off x="640080" y="1691640"/>
+            <a:ext cx="54864" cy="1097280"/>
+          </a:xfrm>
+          <a:prstGeom prst="rect">
+            <a:avLst/>
+          </a:prstGeom>
+          <a:solidFill>
+            <a:srgbClr val="386641"/>
+          </a:solidFill>
+          <a:ln/>
+        </p:spPr>
+      </p:sp>
+      <p:sp>
+        <p:nvSpPr>
+          <p:cNvPr id="7" name="Text 5"/>
+          <p:cNvSpPr/>
+          <p:nvPr/>
+        </p:nvSpPr>
+        <p:spPr>
+          <a:xfrm>
+            <a:off x="914400" y="1801368"/>
+            <a:ext cx="10332720" cy="365760"/>
+          </a:xfrm>
+          <a:prstGeom prst="rect">
+            <a:avLst/>
+          </a:prstGeom>
+          <a:noFill/>
+          <a:ln/>
+        </p:spPr>
+        <p:txBody>
+          <a:bodyPr wrap="square" rtlCol="0" anchor="ctr"/>
+          <a:lstStyle/>
+          <a:p>
+            <a:pPr indent="0" marL="0">
+              <a:buNone/>
+            </a:pPr>
+            <a:r>
+              <a:rPr lang="en-US" sz="1400" b="1" dirty="0">
+                <a:solidFill>
+                  <a:srgbClr val="1B1F3B"/>
+                </a:solidFill>
+                <a:latin typeface="Segoe UI" pitchFamily="34" charset="0"/>
+                <a:ea typeface="Segoe UI" pitchFamily="34" charset="-122"/>
+                <a:cs typeface="Segoe UI" pitchFamily="34" charset="-120"/>
+              </a:rPr>
+              <a:t>Nettoyage approfondi du code</a:t>
+            </a:r>
+            <a:endParaRPr lang="en-US" sz="1400" dirty="0"/>
+          </a:p>
+        </p:txBody>
+      </p:sp>
+      <p:sp>
+        <p:nvSpPr>
+          <p:cNvPr id="8" name="Text 6"/>
+          <p:cNvSpPr/>
+          <p:nvPr/>
+        </p:nvSpPr>
+        <p:spPr>
+          <a:xfrm>
+            <a:off x="914400" y="2148840"/>
+            <a:ext cx="10332720" cy="594360"/>
+          </a:xfrm>
+          <a:prstGeom prst="rect">
+            <a:avLst/>
+          </a:prstGeom>
+          <a:noFill/>
+          <a:ln/>
+        </p:spPr>
+        <p:txBody>
+          <a:bodyPr wrap="square" rtlCol="0" anchor="ctr"/>
+          <a:lstStyle/>
+          <a:p>
+            <a:pPr indent="0" marL="0">
+              <a:lnSpc>
+                <a:spcPts val="1400"/>
+              </a:lnSpc>
+              <a:buNone/>
+            </a:pPr>
+            <a:r>
+              <a:rPr lang="en-US" sz="1100" dirty="0">
+                <a:solidFill>
+                  <a:srgbClr val="8A7C68"/>
+                </a:solidFill>
+                <a:latin typeface="Segoe UI" pitchFamily="34" charset="0"/>
+                <a:ea typeface="Segoe UI" pitchFamily="34" charset="-122"/>
+                <a:cs typeface="Segoe UI" pitchFamily="34" charset="-120"/>
+              </a:rPr>
+              <a:t>Audit complet du projet (pages, routes, fonctions, dépendances) pour repérer tout ce qui n'était plus utilisé ; suppression de 6 pages orphelines (onboarding, welcome, compte, anciennes pages devis en 3 étapes), d'une route de connexion de démonstration, d'un dossier de composants dupliqué obsolète, de plusieurs fonctions inutilisées et d'une dépendance logicielle non utilisée — sans toucher aux fonctionnalités actives.</a:t>
+            </a:r>
+            <a:endParaRPr lang="en-US" sz="1100" dirty="0"/>
+          </a:p>
+        </p:txBody>
+      </p:sp>
+      <p:sp>
+        <p:nvSpPr>
+          <p:cNvPr id="9" name="Shape 7"/>
+          <p:cNvSpPr/>
+          <p:nvPr/>
+        </p:nvSpPr>
+        <p:spPr>
+          <a:xfrm>
+            <a:off x="640080" y="2926080"/>
+            <a:ext cx="10881360" cy="1097280"/>
+          </a:xfrm>
+          <a:prstGeom prst="roundRect">
+            <a:avLst>
+              <a:gd name="adj" fmla="val 5000"/>
+            </a:avLst>
+          </a:prstGeom>
+          <a:solidFill>
+            <a:srgbClr val="FFFFFF"/>
+          </a:solidFill>
+          <a:ln w="12700">
+            <a:solidFill>
+              <a:srgbClr val="E4DCCB"/>
+            </a:solidFill>
+            <a:prstDash val="solid"/>
+          </a:ln>
+        </p:spPr>
+      </p:sp>
+      <p:sp>
+        <p:nvSpPr>
+          <p:cNvPr id="10" name="Shape 8"/>
+          <p:cNvSpPr/>
+          <p:nvPr/>
+        </p:nvSpPr>
+        <p:spPr>
+          <a:xfrm>
+            <a:off x="640080" y="2926080"/>
+            <a:ext cx="54864" cy="1097280"/>
+          </a:xfrm>
+          <a:prstGeom prst="rect">
+            <a:avLst/>
+          </a:prstGeom>
+          <a:solidFill>
+            <a:srgbClr val="386641"/>
+          </a:solidFill>
+          <a:ln/>
+        </p:spPr>
+      </p:sp>
+      <p:sp>
+        <p:nvSpPr>
+          <p:cNvPr id="11" name="Text 9"/>
+          <p:cNvSpPr/>
+          <p:nvPr/>
+        </p:nvSpPr>
+        <p:spPr>
+          <a:xfrm>
+            <a:off x="914400" y="3035808"/>
+            <a:ext cx="10332720" cy="365760"/>
+          </a:xfrm>
+          <a:prstGeom prst="rect">
+            <a:avLst/>
+          </a:prstGeom>
+          <a:noFill/>
+          <a:ln/>
+        </p:spPr>
+        <p:txBody>
+          <a:bodyPr wrap="square" rtlCol="0" anchor="ctr"/>
+          <a:lstStyle/>
+          <a:p>
+            <a:pPr indent="0" marL="0">
+              <a:buNone/>
+            </a:pPr>
+            <a:r>
+              <a:rPr lang="en-US" sz="1400" b="1" dirty="0">
+                <a:solidFill>
+                  <a:srgbClr val="1B1F3B"/>
+                </a:solidFill>
+                <a:latin typeface="Segoe UI" pitchFamily="34" charset="0"/>
+                <a:ea typeface="Segoe UI" pitchFamily="34" charset="-122"/>
+                <a:cs typeface="Segoe UI" pitchFamily="34" charset="-120"/>
+              </a:rPr>
+              <a:t>Suppression de code mort dans la génération de devis</a:t>
+            </a:r>
+            <a:endParaRPr lang="en-US" sz="1400" dirty="0"/>
+          </a:p>
+        </p:txBody>
+      </p:sp>
+      <p:sp>
+        <p:nvSpPr>
+          <p:cNvPr id="12" name="Text 10"/>
+          <p:cNvSpPr/>
+          <p:nvPr/>
+        </p:nvSpPr>
+        <p:spPr>
+          <a:xfrm>
+            <a:off x="914400" y="3383280"/>
+            <a:ext cx="10332720" cy="594360"/>
+          </a:xfrm>
+          <a:prstGeom prst="rect">
+            <a:avLst/>
+          </a:prstGeom>
+          <a:noFill/>
+          <a:ln/>
+        </p:spPr>
+        <p:txBody>
+          <a:bodyPr wrap="square" rtlCol="0" anchor="ctr"/>
+          <a:lstStyle/>
+          <a:p>
+            <a:pPr indent="0" marL="0">
+              <a:lnSpc>
+                <a:spcPts val="1400"/>
+              </a:lnSpc>
+              <a:buNone/>
+            </a:pPr>
+            <a:r>
+              <a:rPr lang="en-US" sz="1100" dirty="0">
+                <a:solidFill>
+                  <a:srgbClr val="8A7C68"/>
+                </a:solidFill>
+                <a:latin typeface="Segoe UI" pitchFamily="34" charset="0"/>
+                <a:ea typeface="Segoe UI" pitchFamily="34" charset="-122"/>
+                <a:cs typeface="Segoe UI" pitchFamily="34" charset="-120"/>
+              </a:rPr>
+              <a:t>Un ancien générateur de devis PDF, devenu inaccessible après une précédente refonte (code jamais exécuté), a été retiré du fichier technique de génération de documents.</a:t>
+            </a:r>
+            <a:endParaRPr lang="en-US" sz="1100" dirty="0"/>
+          </a:p>
+        </p:txBody>
+      </p:sp>
+      <p:sp>
+        <p:nvSpPr>
+          <p:cNvPr id="13" name="Shape 11"/>
+          <p:cNvSpPr/>
+          <p:nvPr/>
+        </p:nvSpPr>
+        <p:spPr>
+          <a:xfrm>
+            <a:off x="640080" y="4160520"/>
+            <a:ext cx="10881360" cy="1097280"/>
+          </a:xfrm>
+          <a:prstGeom prst="roundRect">
+            <a:avLst>
+              <a:gd name="adj" fmla="val 5000"/>
+            </a:avLst>
+          </a:prstGeom>
+          <a:solidFill>
+            <a:srgbClr val="FFFFFF"/>
+          </a:solidFill>
+          <a:ln w="12700">
+            <a:solidFill>
+              <a:srgbClr val="E4DCCB"/>
+            </a:solidFill>
+            <a:prstDash val="solid"/>
+          </a:ln>
+        </p:spPr>
+      </p:sp>
+      <p:sp>
+        <p:nvSpPr>
+          <p:cNvPr id="14" name="Shape 12"/>
+          <p:cNvSpPr/>
+          <p:nvPr/>
+        </p:nvSpPr>
+        <p:spPr>
+          <a:xfrm>
+            <a:off x="640080" y="4160520"/>
+            <a:ext cx="54864" cy="1097280"/>
+          </a:xfrm>
+          <a:prstGeom prst="rect">
+            <a:avLst/>
+          </a:prstGeom>
+          <a:solidFill>
+            <a:srgbClr val="386641"/>
+          </a:solidFill>
+          <a:ln/>
+        </p:spPr>
+      </p:sp>
+      <p:sp>
+        <p:nvSpPr>
+          <p:cNvPr id="15" name="Text 13"/>
+          <p:cNvSpPr/>
+          <p:nvPr/>
+        </p:nvSpPr>
+        <p:spPr>
+          <a:xfrm>
+            <a:off x="914400" y="4270248"/>
+            <a:ext cx="10332720" cy="365760"/>
+          </a:xfrm>
+          <a:prstGeom prst="rect">
+            <a:avLst/>
+          </a:prstGeom>
+          <a:noFill/>
+          <a:ln/>
+        </p:spPr>
+        <p:txBody>
+          <a:bodyPr wrap="square" rtlCol="0" anchor="ctr"/>
+          <a:lstStyle/>
+          <a:p>
+            <a:pPr indent="0" marL="0">
+              <a:buNone/>
+            </a:pPr>
+            <a:r>
+              <a:rPr lang="en-US" sz="1400" b="1" dirty="0">
+                <a:solidFill>
+                  <a:srgbClr val="1B1F3B"/>
+                </a:solidFill>
+                <a:latin typeface="Segoe UI" pitchFamily="34" charset="0"/>
+                <a:ea typeface="Segoe UI" pitchFamily="34" charset="-122"/>
+                <a:cs typeface="Segoe UI" pitchFamily="34" charset="-120"/>
+              </a:rPr>
+              <a:t>Suppression de code mort dans l'export Word des devis</a:t>
+            </a:r>
+            <a:endParaRPr lang="en-US" sz="1400" dirty="0"/>
+          </a:p>
+        </p:txBody>
+      </p:sp>
+      <p:sp>
+        <p:nvSpPr>
+          <p:cNvPr id="16" name="Text 14"/>
+          <p:cNvSpPr/>
+          <p:nvPr/>
+        </p:nvSpPr>
+        <p:spPr>
+          <a:xfrm>
+            <a:off x="914400" y="4617720"/>
+            <a:ext cx="10332720" cy="594360"/>
+          </a:xfrm>
+          <a:prstGeom prst="rect">
+            <a:avLst/>
+          </a:prstGeom>
+          <a:noFill/>
+          <a:ln/>
+        </p:spPr>
+        <p:txBody>
+          <a:bodyPr wrap="square" rtlCol="0" anchor="ctr"/>
+          <a:lstStyle/>
+          <a:p>
+            <a:pPr indent="0" marL="0">
+              <a:lnSpc>
+                <a:spcPts val="1400"/>
+              </a:lnSpc>
+              <a:buNone/>
+            </a:pPr>
+            <a:r>
+              <a:rPr lang="en-US" sz="1100" dirty="0">
+                <a:solidFill>
+                  <a:srgbClr val="8A7C68"/>
+                </a:solidFill>
+                <a:latin typeface="Segoe UI" pitchFamily="34" charset="0"/>
+                <a:ea typeface="Segoe UI" pitchFamily="34" charset="-122"/>
+                <a:cs typeface="Segoe UI" pitchFamily="34" charset="-120"/>
+              </a:rPr>
+              <a:t>Un second bloc de génération de document, devenu inaccessible après une précédente refonte (jamais exécuté), a été retiré du fichier technique de génération de documents.</a:t>
+            </a:r>
+            <a:endParaRPr lang="en-US" sz="1100" dirty="0"/>
+          </a:p>
+        </p:txBody>
+      </p:sp>
+      <p:sp>
+        <p:nvSpPr>
+          <p:cNvPr id="17" name="Text 15"/>
+          <p:cNvSpPr/>
+          <p:nvPr/>
+        </p:nvSpPr>
+        <p:spPr>
+          <a:xfrm>
+            <a:off x="365760" y="6510528"/>
+            <a:ext cx="5486400" cy="274320"/>
+          </a:xfrm>
+          <a:prstGeom prst="rect">
+            <a:avLst/>
+          </a:prstGeom>
+          <a:noFill/>
+          <a:ln/>
+        </p:spPr>
+        <p:txBody>
+          <a:bodyPr wrap="square" rtlCol="0" anchor="ctr"/>
+          <a:lstStyle/>
+          <a:p>
+            <a:pPr indent="0" marL="0">
+              <a:buNone/>
+            </a:pPr>
+            <a:r>
+              <a:rPr lang="en-US" sz="900" dirty="0">
+                <a:solidFill>
+                  <a:srgbClr val="8A7C68"/>
+                </a:solidFill>
+                <a:latin typeface="Segoe UI" pitchFamily="34" charset="0"/>
+                <a:ea typeface="Segoe UI" pitchFamily="34" charset="-122"/>
+                <a:cs typeface="Segoe UI" pitchFamily="34" charset="-120"/>
+              </a:rPr>
+              <a:t>Kôji Web — Récapitulatif technique</a:t>
+            </a:r>
+            <a:endParaRPr lang="en-US" sz="900" dirty="0"/>
+          </a:p>
+        </p:txBody>
+      </p:sp>
+      <p:sp>
+        <p:nvSpPr>
+          <p:cNvPr id="18" name="Text 16"/>
+          <p:cNvSpPr/>
+          <p:nvPr/>
+        </p:nvSpPr>
+        <p:spPr>
+          <a:xfrm>
+            <a:off x="9601200" y="6510528"/>
+            <a:ext cx="2194560" cy="274320"/>
+          </a:xfrm>
+          <a:prstGeom prst="rect">
+            <a:avLst/>
+          </a:prstGeom>
+          <a:noFill/>
+          <a:ln/>
+        </p:spPr>
+        <p:txBody>
+          <a:bodyPr wrap="square" rtlCol="0" anchor="ctr"/>
+          <a:lstStyle/>
+          <a:p>
+            <a:pPr algn="r" indent="0" marL="0">
+              <a:buNone/>
+            </a:pPr>
+            <a:r>
+              <a:rPr lang="en-US" sz="900" dirty="0">
+                <a:solidFill>
+                  <a:srgbClr val="8A7C68"/>
+                </a:solidFill>
+                <a:latin typeface="Segoe UI" pitchFamily="34" charset="0"/>
+                <a:ea typeface="Segoe UI" pitchFamily="34" charset="-122"/>
+                <a:cs typeface="Segoe UI" pitchFamily="34" charset="-120"/>
+              </a:rPr>
+              <a:t>34</a:t>
+            </a:r>
+            <a:endParaRPr lang="en-US" sz="900" dirty="0"/>
+          </a:p>
+        </p:txBody>
+      </p:sp>
+    </p:spTree>
+  </p:cSld>
+  <p:clrMapOvr>
+    <a:masterClrMapping/>
+  </p:clrMapOvr>
+</p:sld>
+</file>
+
+<file path=ppt/slides/slide35.xml><?xml version="1.0" encoding="utf-8"?>
+<p:sld xmlns:a="http://schemas.openxmlformats.org/drawingml/2006/main" xmlns:r="http://schemas.openxmlformats.org/officeDocument/2006/relationships" xmlns:p="http://schemas.openxmlformats.org/presentationml/2006/main">
+  <p:cSld name="Slide 35">
     <p:bg>
       <p:bgPr>
         <a:solidFill>
@@ -17760,7 +18955,7 @@
                 <a:ea typeface="Georgia" pitchFamily="34" charset="-122"/>
                 <a:cs typeface="Georgia" pitchFamily="34" charset="-120"/>
               </a:rPr>
-              <a:t>Chantiers</a:t>
+              <a:t>Devis (suite)</a:t>
             </a:r>
             <a:endParaRPr lang="en-US" sz="2400" dirty="0"/>
           </a:p>
@@ -17846,7 +19041,7 @@
                 <a:ea typeface="Segoe UI" pitchFamily="34" charset="-122"/>
                 <a:cs typeface="Segoe UI" pitchFamily="34" charset="-120"/>
               </a:rPr>
-              <a:t>Écran de choix avant signature</a:t>
+              <a:t>Tableau du devis : colonne Total HT (au lieu de Total TTC)</a:t>
             </a:r>
             <a:endParaRPr lang="en-US" sz="1400" dirty="0"/>
           </a:p>
@@ -17888,7 +19083,7 @@
                 <a:ea typeface="Segoe UI" pitchFamily="34" charset="-122"/>
                 <a:cs typeface="Segoe UI" pitchFamily="34" charset="-120"/>
               </a:rPr>
-              <a:t>Avant signature du devis, l'entreprise choisit entre 'Modifier le devis' et 'Commencer le chantier' au lieu d'atterrir directement sur le suivi.</a:t>
+              <a:t>La colonne de droite du tableau d'ouvrages, sur le PDF et le Word générés, affiche maintenant le Total HT de chaque ligne plutôt que le Total TTC, comme demandé pour la lecture par les clients/partenaires.</a:t>
             </a:r>
             <a:endParaRPr lang="en-US" sz="1100" dirty="0"/>
           </a:p>
@@ -17896,391 +19091,7 @@
       </p:sp>
       <p:sp>
         <p:nvSpPr>
-          <p:cNvPr id="9" name="Shape 7"/>
-          <p:cNvSpPr/>
-          <p:nvPr/>
-        </p:nvSpPr>
-        <p:spPr>
-          <a:xfrm>
-            <a:off x="640080" y="2926080"/>
-            <a:ext cx="10881360" cy="1097280"/>
-          </a:xfrm>
-          <a:prstGeom prst="roundRect">
-            <a:avLst>
-              <a:gd name="adj" fmla="val 5000"/>
-            </a:avLst>
-          </a:prstGeom>
-          <a:solidFill>
-            <a:srgbClr val="FFFFFF"/>
-          </a:solidFill>
-          <a:ln w="12700">
-            <a:solidFill>
-              <a:srgbClr val="E4DCCB"/>
-            </a:solidFill>
-            <a:prstDash val="solid"/>
-          </a:ln>
-        </p:spPr>
-      </p:sp>
-      <p:sp>
-        <p:nvSpPr>
-          <p:cNvPr id="10" name="Shape 8"/>
-          <p:cNvSpPr/>
-          <p:nvPr/>
-        </p:nvSpPr>
-        <p:spPr>
-          <a:xfrm>
-            <a:off x="640080" y="2926080"/>
-            <a:ext cx="54864" cy="1097280"/>
-          </a:xfrm>
-          <a:prstGeom prst="rect">
-            <a:avLst/>
-          </a:prstGeom>
-          <a:solidFill>
-            <a:srgbClr val="1D6FE0"/>
-          </a:solidFill>
-          <a:ln/>
-        </p:spPr>
-      </p:sp>
-      <p:sp>
-        <p:nvSpPr>
-          <p:cNvPr id="11" name="Text 9"/>
-          <p:cNvSpPr/>
-          <p:nvPr/>
-        </p:nvSpPr>
-        <p:spPr>
-          <a:xfrm>
-            <a:off x="914400" y="3035808"/>
-            <a:ext cx="10332720" cy="365760"/>
-          </a:xfrm>
-          <a:prstGeom prst="rect">
-            <a:avLst/>
-          </a:prstGeom>
-          <a:noFill/>
-          <a:ln/>
-        </p:spPr>
-        <p:txBody>
-          <a:bodyPr wrap="square" rtlCol="0" anchor="ctr"/>
-          <a:lstStyle/>
-          <a:p>
-            <a:pPr indent="0" marL="0">
-              <a:buNone/>
-            </a:pPr>
-            <a:r>
-              <a:rPr lang="en-US" sz="1400" b="1" dirty="0">
-                <a:solidFill>
-                  <a:srgbClr val="1B1F3B"/>
-                </a:solidFill>
-                <a:latin typeface="Segoe UI" pitchFamily="34" charset="0"/>
-                <a:ea typeface="Segoe UI" pitchFamily="34" charset="-122"/>
-                <a:cs typeface="Segoe UI" pitchFamily="34" charset="-120"/>
-              </a:rPr>
-              <a:t>Retour automatique depuis Équipe</a:t>
-            </a:r>
-            <a:endParaRPr lang="en-US" sz="1400" dirty="0"/>
-          </a:p>
-        </p:txBody>
-      </p:sp>
-      <p:sp>
-        <p:nvSpPr>
-          <p:cNvPr id="12" name="Text 10"/>
-          <p:cNvSpPr/>
-          <p:nvPr/>
-        </p:nvSpPr>
-        <p:spPr>
-          <a:xfrm>
-            <a:off x="914400" y="3383280"/>
-            <a:ext cx="10332720" cy="594360"/>
-          </a:xfrm>
-          <a:prstGeom prst="rect">
-            <a:avLst/>
-          </a:prstGeom>
-          <a:noFill/>
-          <a:ln/>
-        </p:spPr>
-        <p:txBody>
-          <a:bodyPr wrap="square" rtlCol="0" anchor="ctr"/>
-          <a:lstStyle/>
-          <a:p>
-            <a:pPr indent="0" marL="0">
-              <a:lnSpc>
-                <a:spcPts val="1400"/>
-              </a:lnSpc>
-              <a:buNone/>
-            </a:pPr>
-            <a:r>
-              <a:rPr lang="en-US" sz="1100" dirty="0">
-                <a:solidFill>
-                  <a:srgbClr val="8A7C68"/>
-                </a:solidFill>
-                <a:latin typeface="Segoe UI" pitchFamily="34" charset="0"/>
-                <a:ea typeface="Segoe UI" pitchFamily="34" charset="-122"/>
-                <a:cs typeface="Segoe UI" pitchFamily="34" charset="-120"/>
-              </a:rPr>
-              <a:t>Le bouton 'Ajouter dans Équipe' depuis la planification d'un ouvrage ramène exactement à la même fenêtre une fois le personnel ajouté.</a:t>
-            </a:r>
-            <a:endParaRPr lang="en-US" sz="1100" dirty="0"/>
-          </a:p>
-        </p:txBody>
-      </p:sp>
-      <p:sp>
-        <p:nvSpPr>
-          <p:cNvPr id="13" name="Shape 11"/>
-          <p:cNvSpPr/>
-          <p:nvPr/>
-        </p:nvSpPr>
-        <p:spPr>
-          <a:xfrm>
-            <a:off x="640080" y="4160520"/>
-            <a:ext cx="10881360" cy="1097280"/>
-          </a:xfrm>
-          <a:prstGeom prst="roundRect">
-            <a:avLst>
-              <a:gd name="adj" fmla="val 5000"/>
-            </a:avLst>
-          </a:prstGeom>
-          <a:solidFill>
-            <a:srgbClr val="FFFFFF"/>
-          </a:solidFill>
-          <a:ln w="12700">
-            <a:solidFill>
-              <a:srgbClr val="E4DCCB"/>
-            </a:solidFill>
-            <a:prstDash val="solid"/>
-          </a:ln>
-        </p:spPr>
-      </p:sp>
-      <p:sp>
-        <p:nvSpPr>
-          <p:cNvPr id="14" name="Shape 12"/>
-          <p:cNvSpPr/>
-          <p:nvPr/>
-        </p:nvSpPr>
-        <p:spPr>
-          <a:xfrm>
-            <a:off x="640080" y="4160520"/>
-            <a:ext cx="54864" cy="1097280"/>
-          </a:xfrm>
-          <a:prstGeom prst="rect">
-            <a:avLst/>
-          </a:prstGeom>
-          <a:solidFill>
-            <a:srgbClr val="1D6FE0"/>
-          </a:solidFill>
-          <a:ln/>
-        </p:spPr>
-      </p:sp>
-      <p:sp>
-        <p:nvSpPr>
-          <p:cNvPr id="15" name="Text 13"/>
-          <p:cNvSpPr/>
-          <p:nvPr/>
-        </p:nvSpPr>
-        <p:spPr>
-          <a:xfrm>
-            <a:off x="914400" y="4270248"/>
-            <a:ext cx="10332720" cy="365760"/>
-          </a:xfrm>
-          <a:prstGeom prst="rect">
-            <a:avLst/>
-          </a:prstGeom>
-          <a:noFill/>
-          <a:ln/>
-        </p:spPr>
-        <p:txBody>
-          <a:bodyPr wrap="square" rtlCol="0" anchor="ctr"/>
-          <a:lstStyle/>
-          <a:p>
-            <a:pPr indent="0" marL="0">
-              <a:buNone/>
-            </a:pPr>
-            <a:r>
-              <a:rPr lang="en-US" sz="1400" b="1" dirty="0">
-                <a:solidFill>
-                  <a:srgbClr val="1B1F3B"/>
-                </a:solidFill>
-                <a:latin typeface="Segoe UI" pitchFamily="34" charset="0"/>
-                <a:ea typeface="Segoe UI" pitchFamily="34" charset="-122"/>
-                <a:cs typeface="Segoe UI" pitchFamily="34" charset="-120"/>
-              </a:rPr>
-              <a:t>Fiche ouvrage enrichie (prix, dépenses, marge)</a:t>
-            </a:r>
-            <a:endParaRPr lang="en-US" sz="1400" dirty="0"/>
-          </a:p>
-        </p:txBody>
-      </p:sp>
-      <p:sp>
-        <p:nvSpPr>
-          <p:cNvPr id="16" name="Text 14"/>
-          <p:cNvSpPr/>
-          <p:nvPr/>
-        </p:nvSpPr>
-        <p:spPr>
-          <a:xfrm>
-            <a:off x="914400" y="4617720"/>
-            <a:ext cx="10332720" cy="594360"/>
-          </a:xfrm>
-          <a:prstGeom prst="rect">
-            <a:avLst/>
-          </a:prstGeom>
-          <a:noFill/>
-          <a:ln/>
-        </p:spPr>
-        <p:txBody>
-          <a:bodyPr wrap="square" rtlCol="0" anchor="ctr"/>
-          <a:lstStyle/>
-          <a:p>
-            <a:pPr indent="0" marL="0">
-              <a:lnSpc>
-                <a:spcPts val="1400"/>
-              </a:lnSpc>
-              <a:buNone/>
-            </a:pPr>
-            <a:r>
-              <a:rPr lang="en-US" sz="1100" dirty="0">
-                <a:solidFill>
-                  <a:srgbClr val="8A7C68"/>
-                </a:solidFill>
-                <a:latin typeface="Segoe UI" pitchFamily="34" charset="0"/>
-                <a:ea typeface="Segoe UI" pitchFamily="34" charset="-122"/>
-                <a:cs typeface="Segoe UI" pitchFamily="34" charset="-120"/>
-              </a:rPr>
-              <a:t>Affichage du prix validé par le client, calcul automatique des dépenses et de la marge par ouvrage, bouton d'ajout rapide (équipe / dépense / note), et récapitulatif automatique des dépenses au niveau du chantier.</a:t>
-            </a:r>
-            <a:endParaRPr lang="en-US" sz="1100" dirty="0"/>
-          </a:p>
-        </p:txBody>
-      </p:sp>
-      <p:sp>
-        <p:nvSpPr>
-          <p:cNvPr id="17" name="Shape 15"/>
-          <p:cNvSpPr/>
-          <p:nvPr/>
-        </p:nvSpPr>
-        <p:spPr>
-          <a:xfrm>
-            <a:off x="640080" y="5394960"/>
-            <a:ext cx="10881360" cy="1097280"/>
-          </a:xfrm>
-          <a:prstGeom prst="roundRect">
-            <a:avLst>
-              <a:gd name="adj" fmla="val 5000"/>
-            </a:avLst>
-          </a:prstGeom>
-          <a:solidFill>
-            <a:srgbClr val="FFFFFF"/>
-          </a:solidFill>
-          <a:ln w="12700">
-            <a:solidFill>
-              <a:srgbClr val="E4DCCB"/>
-            </a:solidFill>
-            <a:prstDash val="solid"/>
-          </a:ln>
-        </p:spPr>
-      </p:sp>
-      <p:sp>
-        <p:nvSpPr>
-          <p:cNvPr id="18" name="Shape 16"/>
-          <p:cNvSpPr/>
-          <p:nvPr/>
-        </p:nvSpPr>
-        <p:spPr>
-          <a:xfrm>
-            <a:off x="640080" y="5394960"/>
-            <a:ext cx="54864" cy="1097280"/>
-          </a:xfrm>
-          <a:prstGeom prst="rect">
-            <a:avLst/>
-          </a:prstGeom>
-          <a:solidFill>
-            <a:srgbClr val="1D6FE0"/>
-          </a:solidFill>
-          <a:ln/>
-        </p:spPr>
-      </p:sp>
-      <p:sp>
-        <p:nvSpPr>
-          <p:cNvPr id="19" name="Text 17"/>
-          <p:cNvSpPr/>
-          <p:nvPr/>
-        </p:nvSpPr>
-        <p:spPr>
-          <a:xfrm>
-            <a:off x="914400" y="5504688"/>
-            <a:ext cx="10332720" cy="365760"/>
-          </a:xfrm>
-          <a:prstGeom prst="rect">
-            <a:avLst/>
-          </a:prstGeom>
-          <a:noFill/>
-          <a:ln/>
-        </p:spPr>
-        <p:txBody>
-          <a:bodyPr wrap="square" rtlCol="0" anchor="ctr"/>
-          <a:lstStyle/>
-          <a:p>
-            <a:pPr indent="0" marL="0">
-              <a:buNone/>
-            </a:pPr>
-            <a:r>
-              <a:rPr lang="en-US" sz="1400" b="1" dirty="0">
-                <a:solidFill>
-                  <a:srgbClr val="1B1F3B"/>
-                </a:solidFill>
-                <a:latin typeface="Segoe UI" pitchFamily="34" charset="0"/>
-                <a:ea typeface="Segoe UI" pitchFamily="34" charset="-122"/>
-                <a:cs typeface="Segoe UI" pitchFamily="34" charset="-120"/>
-              </a:rPr>
-              <a:t>Persistance de la navigation</a:t>
-            </a:r>
-            <a:endParaRPr lang="en-US" sz="1400" dirty="0"/>
-          </a:p>
-        </p:txBody>
-      </p:sp>
-      <p:sp>
-        <p:nvSpPr>
-          <p:cNvPr id="20" name="Text 18"/>
-          <p:cNvSpPr/>
-          <p:nvPr/>
-        </p:nvSpPr>
-        <p:spPr>
-          <a:xfrm>
-            <a:off x="914400" y="5852160"/>
-            <a:ext cx="10332720" cy="594360"/>
-          </a:xfrm>
-          <a:prstGeom prst="rect">
-            <a:avLst/>
-          </a:prstGeom>
-          <a:noFill/>
-          <a:ln/>
-        </p:spPr>
-        <p:txBody>
-          <a:bodyPr wrap="square" rtlCol="0" anchor="ctr"/>
-          <a:lstStyle/>
-          <a:p>
-            <a:pPr indent="0" marL="0">
-              <a:lnSpc>
-                <a:spcPts val="1400"/>
-              </a:lnSpc>
-              <a:buNone/>
-            </a:pPr>
-            <a:r>
-              <a:rPr lang="en-US" sz="1100" dirty="0">
-                <a:solidFill>
-                  <a:srgbClr val="8A7C68"/>
-                </a:solidFill>
-                <a:latin typeface="Segoe UI" pitchFamily="34" charset="0"/>
-                <a:ea typeface="Segoe UI" pitchFamily="34" charset="-122"/>
-                <a:cs typeface="Segoe UI" pitchFamily="34" charset="-120"/>
-              </a:rPr>
-              <a:t>Un rafraîchissement de page (F5) ne ramène plus à l'écran de départ : le chantier et l'ouvrage consultés restent affichés (état conservé dans l'URL).</a:t>
-            </a:r>
-            <a:endParaRPr lang="en-US" sz="1100" dirty="0"/>
-          </a:p>
-        </p:txBody>
-      </p:sp>
-      <p:sp>
-        <p:nvSpPr>
-          <p:cNvPr id="21" name="Text 19"/>
+          <p:cNvPr id="9" name="Text 7"/>
           <p:cNvSpPr/>
           <p:nvPr/>
         </p:nvSpPr>
@@ -18319,7 +19130,7 @@
       </p:sp>
       <p:sp>
         <p:nvSpPr>
-          <p:cNvPr id="22" name="Text 20"/>
+          <p:cNvPr id="10" name="Text 8"/>
           <p:cNvSpPr/>
           <p:nvPr/>
         </p:nvSpPr>
@@ -18482,7 +19293,7 @@
                 <a:ea typeface="Georgia" pitchFamily="34" charset="-122"/>
                 <a:cs typeface="Georgia" pitchFamily="34" charset="-120"/>
               </a:rPr>
-              <a:t>Équipe</a:t>
+              <a:t>Chantiers</a:t>
             </a:r>
             <a:endParaRPr lang="en-US" sz="2400" dirty="0"/>
           </a:p>
@@ -18568,7 +19379,7 @@
                 <a:ea typeface="Segoe UI" pitchFamily="34" charset="-122"/>
                 <a:cs typeface="Segoe UI" pitchFamily="34" charset="-120"/>
               </a:rPr>
-              <a:t>Édition complète de l'équipe</a:t>
+              <a:t>Écran de choix avant signature</a:t>
             </a:r>
             <a:endParaRPr lang="en-US" sz="1400" dirty="0"/>
           </a:p>
@@ -18610,7 +19421,7 @@
                 <a:ea typeface="Segoe UI" pitchFamily="34" charset="-122"/>
                 <a:cs typeface="Segoe UI" pitchFamily="34" charset="-120"/>
               </a:rPr>
-              <a:t>Gestion des entreprises/SIRET pour les sous-traitants, liens multiples vers chantiers/devis/ouvrages, avec notifications automatiques lors de l'affectation.</a:t>
+              <a:t>Avant signature du devis, l'entreprise choisit entre 'Modifier le devis' et 'Commencer le chantier' au lieu d'atterrir directement sur le suivi.</a:t>
             </a:r>
             <a:endParaRPr lang="en-US" sz="1100" dirty="0"/>
           </a:p>
@@ -18696,7 +19507,7 @@
                 <a:ea typeface="Segoe UI" pitchFamily="34" charset="-122"/>
                 <a:cs typeface="Segoe UI" pitchFamily="34" charset="-120"/>
               </a:rPr>
-              <a:t>Nouvelle carte d'ajout (design)</a:t>
+              <a:t>Retour automatique depuis Équipe</a:t>
             </a:r>
             <a:endParaRPr lang="en-US" sz="1400" dirty="0"/>
           </a:p>
@@ -18738,7 +19549,7 @@
                 <a:ea typeface="Segoe UI" pitchFamily="34" charset="-122"/>
                 <a:cs typeface="Segoe UI" pitchFamily="34" charset="-120"/>
               </a:rPr>
-              <a:t>Le bouton 'Ajouter des personnels' devient un bouton flottant qui ouvre une carte animée avec 3 choix : Ouvrier, Sous-traitant, Planning.</a:t>
+              <a:t>Le bouton 'Ajouter dans Équipe' depuis la planification d'un ouvrage ramène exactement à la même fenêtre une fois le personnel ajouté.</a:t>
             </a:r>
             <a:endParaRPr lang="en-US" sz="1100" dirty="0"/>
           </a:p>
@@ -18824,7 +19635,7 @@
                 <a:ea typeface="Segoe UI" pitchFamily="34" charset="-122"/>
                 <a:cs typeface="Segoe UI" pitchFamily="34" charset="-120"/>
               </a:rPr>
-              <a:t>Module Planning / pointage des heures (nouveau)</a:t>
+              <a:t>Fiche ouvrage enrichie (prix, dépenses, marge)</a:t>
             </a:r>
             <a:endParaRPr lang="en-US" sz="1400" dirty="0"/>
           </a:p>
@@ -18866,7 +19677,7 @@
                 <a:ea typeface="Segoe UI" pitchFamily="34" charset="-122"/>
                 <a:cs typeface="Segoe UI" pitchFamily="34" charset="-120"/>
               </a:rPr>
-              <a:t>Nouvel espace complet : liste des ouvriers avec badge d'heures de la semaine (vert/orange/rouge), détail hebdomadaire par ouvrier, ajout manuel de pointages, navigation semaine par semaine.</a:t>
+              <a:t>Affichage du prix validé par le client, calcul automatique des dépenses et de la marge par ouvrage, bouton d'ajout rapide (équipe / dépense / note), et récapitulatif automatique des dépenses au niveau du chantier.</a:t>
             </a:r>
             <a:endParaRPr lang="en-US" sz="1100" dirty="0"/>
           </a:p>
@@ -18952,7 +19763,7 @@
                 <a:ea typeface="Segoe UI" pitchFamily="34" charset="-122"/>
                 <a:cs typeface="Segoe UI" pitchFamily="34" charset="-120"/>
               </a:rPr>
-              <a:t>Espace ouvrier : pointage de la journée</a:t>
+              <a:t>Persistance de la navigation</a:t>
             </a:r>
             <a:endParaRPr lang="en-US" sz="1400" dirty="0"/>
           </a:p>
@@ -18994,7 +19805,7 @@
                 <a:ea typeface="Segoe UI" pitchFamily="34" charset="-122"/>
                 <a:cs typeface="Segoe UI" pitchFamily="34" charset="-120"/>
               </a:rPr>
-              <a:t>Nouvel onglet 'Pointage' dans le portail ouvrier : début/fin de journée en un clic, avec récapitulatif de la semaine en cours.</a:t>
+              <a:t>Un rafraîchissement de page (F5) ne ramène plus à l'écran de départ : le chantier et l'ouvrage consultés restent affichés (état conservé dans l'URL).</a:t>
             </a:r>
             <a:endParaRPr lang="en-US" sz="1100" dirty="0"/>
           </a:p>
@@ -19204,7 +20015,7 @@
                 <a:ea typeface="Georgia" pitchFamily="34" charset="-122"/>
                 <a:cs typeface="Georgia" pitchFamily="34" charset="-120"/>
               </a:rPr>
-              <a:t>Équipe (suite)</a:t>
+              <a:t>Équipe</a:t>
             </a:r>
             <a:endParaRPr lang="en-US" sz="2400" dirty="0"/>
           </a:p>
@@ -19290,7 +20101,7 @@
                 <a:ea typeface="Segoe UI" pitchFamily="34" charset="-122"/>
                 <a:cs typeface="Segoe UI" pitchFamily="34" charset="-120"/>
               </a:rPr>
-              <a:t>Calendrier</a:t>
+              <a:t>Édition complète de l'équipe</a:t>
             </a:r>
             <a:endParaRPr lang="en-US" sz="1400" dirty="0"/>
           </a:p>
@@ -19332,7 +20143,7 @@
                 <a:ea typeface="Segoe UI" pitchFamily="34" charset="-122"/>
                 <a:cs typeface="Segoe UI" pitchFamily="34" charset="-120"/>
               </a:rPr>
-              <a:t>Cartes et tâches cliquables, édition d'un événement directement depuis sa fiche.</a:t>
+              <a:t>Gestion des entreprises/SIRET pour les sous-traitants, liens multiples vers chantiers/devis/ouvrages, avec notifications automatiques lors de l'affectation.</a:t>
             </a:r>
             <a:endParaRPr lang="en-US" sz="1100" dirty="0"/>
           </a:p>
@@ -19340,7 +20151,391 @@
       </p:sp>
       <p:sp>
         <p:nvSpPr>
-          <p:cNvPr id="9" name="Text 7"/>
+          <p:cNvPr id="9" name="Shape 7"/>
+          <p:cNvSpPr/>
+          <p:nvPr/>
+        </p:nvSpPr>
+        <p:spPr>
+          <a:xfrm>
+            <a:off x="640080" y="2926080"/>
+            <a:ext cx="10881360" cy="1097280"/>
+          </a:xfrm>
+          <a:prstGeom prst="roundRect">
+            <a:avLst>
+              <a:gd name="adj" fmla="val 5000"/>
+            </a:avLst>
+          </a:prstGeom>
+          <a:solidFill>
+            <a:srgbClr val="FFFFFF"/>
+          </a:solidFill>
+          <a:ln w="12700">
+            <a:solidFill>
+              <a:srgbClr val="E4DCCB"/>
+            </a:solidFill>
+            <a:prstDash val="solid"/>
+          </a:ln>
+        </p:spPr>
+      </p:sp>
+      <p:sp>
+        <p:nvSpPr>
+          <p:cNvPr id="10" name="Shape 8"/>
+          <p:cNvSpPr/>
+          <p:nvPr/>
+        </p:nvSpPr>
+        <p:spPr>
+          <a:xfrm>
+            <a:off x="640080" y="2926080"/>
+            <a:ext cx="54864" cy="1097280"/>
+          </a:xfrm>
+          <a:prstGeom prst="rect">
+            <a:avLst/>
+          </a:prstGeom>
+          <a:solidFill>
+            <a:srgbClr val="1D6FE0"/>
+          </a:solidFill>
+          <a:ln/>
+        </p:spPr>
+      </p:sp>
+      <p:sp>
+        <p:nvSpPr>
+          <p:cNvPr id="11" name="Text 9"/>
+          <p:cNvSpPr/>
+          <p:nvPr/>
+        </p:nvSpPr>
+        <p:spPr>
+          <a:xfrm>
+            <a:off x="914400" y="3035808"/>
+            <a:ext cx="10332720" cy="365760"/>
+          </a:xfrm>
+          <a:prstGeom prst="rect">
+            <a:avLst/>
+          </a:prstGeom>
+          <a:noFill/>
+          <a:ln/>
+        </p:spPr>
+        <p:txBody>
+          <a:bodyPr wrap="square" rtlCol="0" anchor="ctr"/>
+          <a:lstStyle/>
+          <a:p>
+            <a:pPr indent="0" marL="0">
+              <a:buNone/>
+            </a:pPr>
+            <a:r>
+              <a:rPr lang="en-US" sz="1400" b="1" dirty="0">
+                <a:solidFill>
+                  <a:srgbClr val="1B1F3B"/>
+                </a:solidFill>
+                <a:latin typeface="Segoe UI" pitchFamily="34" charset="0"/>
+                <a:ea typeface="Segoe UI" pitchFamily="34" charset="-122"/>
+                <a:cs typeface="Segoe UI" pitchFamily="34" charset="-120"/>
+              </a:rPr>
+              <a:t>Nouvelle carte d'ajout (design)</a:t>
+            </a:r>
+            <a:endParaRPr lang="en-US" sz="1400" dirty="0"/>
+          </a:p>
+        </p:txBody>
+      </p:sp>
+      <p:sp>
+        <p:nvSpPr>
+          <p:cNvPr id="12" name="Text 10"/>
+          <p:cNvSpPr/>
+          <p:nvPr/>
+        </p:nvSpPr>
+        <p:spPr>
+          <a:xfrm>
+            <a:off x="914400" y="3383280"/>
+            <a:ext cx="10332720" cy="594360"/>
+          </a:xfrm>
+          <a:prstGeom prst="rect">
+            <a:avLst/>
+          </a:prstGeom>
+          <a:noFill/>
+          <a:ln/>
+        </p:spPr>
+        <p:txBody>
+          <a:bodyPr wrap="square" rtlCol="0" anchor="ctr"/>
+          <a:lstStyle/>
+          <a:p>
+            <a:pPr indent="0" marL="0">
+              <a:lnSpc>
+                <a:spcPts val="1400"/>
+              </a:lnSpc>
+              <a:buNone/>
+            </a:pPr>
+            <a:r>
+              <a:rPr lang="en-US" sz="1100" dirty="0">
+                <a:solidFill>
+                  <a:srgbClr val="8A7C68"/>
+                </a:solidFill>
+                <a:latin typeface="Segoe UI" pitchFamily="34" charset="0"/>
+                <a:ea typeface="Segoe UI" pitchFamily="34" charset="-122"/>
+                <a:cs typeface="Segoe UI" pitchFamily="34" charset="-120"/>
+              </a:rPr>
+              <a:t>Le bouton 'Ajouter des personnels' devient un bouton flottant qui ouvre une carte animée avec 3 choix : Ouvrier, Sous-traitant, Planning.</a:t>
+            </a:r>
+            <a:endParaRPr lang="en-US" sz="1100" dirty="0"/>
+          </a:p>
+        </p:txBody>
+      </p:sp>
+      <p:sp>
+        <p:nvSpPr>
+          <p:cNvPr id="13" name="Shape 11"/>
+          <p:cNvSpPr/>
+          <p:nvPr/>
+        </p:nvSpPr>
+        <p:spPr>
+          <a:xfrm>
+            <a:off x="640080" y="4160520"/>
+            <a:ext cx="10881360" cy="1097280"/>
+          </a:xfrm>
+          <a:prstGeom prst="roundRect">
+            <a:avLst>
+              <a:gd name="adj" fmla="val 5000"/>
+            </a:avLst>
+          </a:prstGeom>
+          <a:solidFill>
+            <a:srgbClr val="FFFFFF"/>
+          </a:solidFill>
+          <a:ln w="12700">
+            <a:solidFill>
+              <a:srgbClr val="E4DCCB"/>
+            </a:solidFill>
+            <a:prstDash val="solid"/>
+          </a:ln>
+        </p:spPr>
+      </p:sp>
+      <p:sp>
+        <p:nvSpPr>
+          <p:cNvPr id="14" name="Shape 12"/>
+          <p:cNvSpPr/>
+          <p:nvPr/>
+        </p:nvSpPr>
+        <p:spPr>
+          <a:xfrm>
+            <a:off x="640080" y="4160520"/>
+            <a:ext cx="54864" cy="1097280"/>
+          </a:xfrm>
+          <a:prstGeom prst="rect">
+            <a:avLst/>
+          </a:prstGeom>
+          <a:solidFill>
+            <a:srgbClr val="1D6FE0"/>
+          </a:solidFill>
+          <a:ln/>
+        </p:spPr>
+      </p:sp>
+      <p:sp>
+        <p:nvSpPr>
+          <p:cNvPr id="15" name="Text 13"/>
+          <p:cNvSpPr/>
+          <p:nvPr/>
+        </p:nvSpPr>
+        <p:spPr>
+          <a:xfrm>
+            <a:off x="914400" y="4270248"/>
+            <a:ext cx="10332720" cy="365760"/>
+          </a:xfrm>
+          <a:prstGeom prst="rect">
+            <a:avLst/>
+          </a:prstGeom>
+          <a:noFill/>
+          <a:ln/>
+        </p:spPr>
+        <p:txBody>
+          <a:bodyPr wrap="square" rtlCol="0" anchor="ctr"/>
+          <a:lstStyle/>
+          <a:p>
+            <a:pPr indent="0" marL="0">
+              <a:buNone/>
+            </a:pPr>
+            <a:r>
+              <a:rPr lang="en-US" sz="1400" b="1" dirty="0">
+                <a:solidFill>
+                  <a:srgbClr val="1B1F3B"/>
+                </a:solidFill>
+                <a:latin typeface="Segoe UI" pitchFamily="34" charset="0"/>
+                <a:ea typeface="Segoe UI" pitchFamily="34" charset="-122"/>
+                <a:cs typeface="Segoe UI" pitchFamily="34" charset="-120"/>
+              </a:rPr>
+              <a:t>Module Planning / pointage des heures (nouveau)</a:t>
+            </a:r>
+            <a:endParaRPr lang="en-US" sz="1400" dirty="0"/>
+          </a:p>
+        </p:txBody>
+      </p:sp>
+      <p:sp>
+        <p:nvSpPr>
+          <p:cNvPr id="16" name="Text 14"/>
+          <p:cNvSpPr/>
+          <p:nvPr/>
+        </p:nvSpPr>
+        <p:spPr>
+          <a:xfrm>
+            <a:off x="914400" y="4617720"/>
+            <a:ext cx="10332720" cy="594360"/>
+          </a:xfrm>
+          <a:prstGeom prst="rect">
+            <a:avLst/>
+          </a:prstGeom>
+          <a:noFill/>
+          <a:ln/>
+        </p:spPr>
+        <p:txBody>
+          <a:bodyPr wrap="square" rtlCol="0" anchor="ctr"/>
+          <a:lstStyle/>
+          <a:p>
+            <a:pPr indent="0" marL="0">
+              <a:lnSpc>
+                <a:spcPts val="1400"/>
+              </a:lnSpc>
+              <a:buNone/>
+            </a:pPr>
+            <a:r>
+              <a:rPr lang="en-US" sz="1100" dirty="0">
+                <a:solidFill>
+                  <a:srgbClr val="8A7C68"/>
+                </a:solidFill>
+                <a:latin typeface="Segoe UI" pitchFamily="34" charset="0"/>
+                <a:ea typeface="Segoe UI" pitchFamily="34" charset="-122"/>
+                <a:cs typeface="Segoe UI" pitchFamily="34" charset="-120"/>
+              </a:rPr>
+              <a:t>Nouvel espace complet : liste des ouvriers avec badge d'heures de la semaine (vert/orange/rouge), détail hebdomadaire par ouvrier, ajout manuel de pointages, navigation semaine par semaine.</a:t>
+            </a:r>
+            <a:endParaRPr lang="en-US" sz="1100" dirty="0"/>
+          </a:p>
+        </p:txBody>
+      </p:sp>
+      <p:sp>
+        <p:nvSpPr>
+          <p:cNvPr id="17" name="Shape 15"/>
+          <p:cNvSpPr/>
+          <p:nvPr/>
+        </p:nvSpPr>
+        <p:spPr>
+          <a:xfrm>
+            <a:off x="640080" y="5394960"/>
+            <a:ext cx="10881360" cy="1097280"/>
+          </a:xfrm>
+          <a:prstGeom prst="roundRect">
+            <a:avLst>
+              <a:gd name="adj" fmla="val 5000"/>
+            </a:avLst>
+          </a:prstGeom>
+          <a:solidFill>
+            <a:srgbClr val="FFFFFF"/>
+          </a:solidFill>
+          <a:ln w="12700">
+            <a:solidFill>
+              <a:srgbClr val="E4DCCB"/>
+            </a:solidFill>
+            <a:prstDash val="solid"/>
+          </a:ln>
+        </p:spPr>
+      </p:sp>
+      <p:sp>
+        <p:nvSpPr>
+          <p:cNvPr id="18" name="Shape 16"/>
+          <p:cNvSpPr/>
+          <p:nvPr/>
+        </p:nvSpPr>
+        <p:spPr>
+          <a:xfrm>
+            <a:off x="640080" y="5394960"/>
+            <a:ext cx="54864" cy="1097280"/>
+          </a:xfrm>
+          <a:prstGeom prst="rect">
+            <a:avLst/>
+          </a:prstGeom>
+          <a:solidFill>
+            <a:srgbClr val="1D6FE0"/>
+          </a:solidFill>
+          <a:ln/>
+        </p:spPr>
+      </p:sp>
+      <p:sp>
+        <p:nvSpPr>
+          <p:cNvPr id="19" name="Text 17"/>
+          <p:cNvSpPr/>
+          <p:nvPr/>
+        </p:nvSpPr>
+        <p:spPr>
+          <a:xfrm>
+            <a:off x="914400" y="5504688"/>
+            <a:ext cx="10332720" cy="365760"/>
+          </a:xfrm>
+          <a:prstGeom prst="rect">
+            <a:avLst/>
+          </a:prstGeom>
+          <a:noFill/>
+          <a:ln/>
+        </p:spPr>
+        <p:txBody>
+          <a:bodyPr wrap="square" rtlCol="0" anchor="ctr"/>
+          <a:lstStyle/>
+          <a:p>
+            <a:pPr indent="0" marL="0">
+              <a:buNone/>
+            </a:pPr>
+            <a:r>
+              <a:rPr lang="en-US" sz="1400" b="1" dirty="0">
+                <a:solidFill>
+                  <a:srgbClr val="1B1F3B"/>
+                </a:solidFill>
+                <a:latin typeface="Segoe UI" pitchFamily="34" charset="0"/>
+                <a:ea typeface="Segoe UI" pitchFamily="34" charset="-122"/>
+                <a:cs typeface="Segoe UI" pitchFamily="34" charset="-120"/>
+              </a:rPr>
+              <a:t>Espace ouvrier : pointage de la journée</a:t>
+            </a:r>
+            <a:endParaRPr lang="en-US" sz="1400" dirty="0"/>
+          </a:p>
+        </p:txBody>
+      </p:sp>
+      <p:sp>
+        <p:nvSpPr>
+          <p:cNvPr id="20" name="Text 18"/>
+          <p:cNvSpPr/>
+          <p:nvPr/>
+        </p:nvSpPr>
+        <p:spPr>
+          <a:xfrm>
+            <a:off x="914400" y="5852160"/>
+            <a:ext cx="10332720" cy="594360"/>
+          </a:xfrm>
+          <a:prstGeom prst="rect">
+            <a:avLst/>
+          </a:prstGeom>
+          <a:noFill/>
+          <a:ln/>
+        </p:spPr>
+        <p:txBody>
+          <a:bodyPr wrap="square" rtlCol="0" anchor="ctr"/>
+          <a:lstStyle/>
+          <a:p>
+            <a:pPr indent="0" marL="0">
+              <a:lnSpc>
+                <a:spcPts val="1400"/>
+              </a:lnSpc>
+              <a:buNone/>
+            </a:pPr>
+            <a:r>
+              <a:rPr lang="en-US" sz="1100" dirty="0">
+                <a:solidFill>
+                  <a:srgbClr val="8A7C68"/>
+                </a:solidFill>
+                <a:latin typeface="Segoe UI" pitchFamily="34" charset="0"/>
+                <a:ea typeface="Segoe UI" pitchFamily="34" charset="-122"/>
+                <a:cs typeface="Segoe UI" pitchFamily="34" charset="-120"/>
+              </a:rPr>
+              <a:t>Nouvel onglet 'Pointage' dans le portail ouvrier : début/fin de journée en un clic, avec récapitulatif de la semaine en cours.</a:t>
+            </a:r>
+            <a:endParaRPr lang="en-US" sz="1100" dirty="0"/>
+          </a:p>
+        </p:txBody>
+      </p:sp>
+      <p:sp>
+        <p:nvSpPr>
+          <p:cNvPr id="21" name="Text 19"/>
           <p:cNvSpPr/>
           <p:nvPr/>
         </p:nvSpPr>
@@ -19379,7 +20574,7 @@
       </p:sp>
       <p:sp>
         <p:nvSpPr>
-          <p:cNvPr id="10" name="Text 8"/>
+          <p:cNvPr id="22" name="Text 20"/>
           <p:cNvSpPr/>
           <p:nvPr/>
         </p:nvSpPr>
@@ -19542,7 +20737,7 @@
                 <a:ea typeface="Georgia" pitchFamily="34" charset="-122"/>
                 <a:cs typeface="Georgia" pitchFamily="34" charset="-120"/>
               </a:rPr>
-              <a:t>Notifications</a:t>
+              <a:t>Équipe (suite)</a:t>
             </a:r>
             <a:endParaRPr lang="en-US" sz="2400" dirty="0"/>
           </a:p>
@@ -19628,7 +20823,7 @@
                 <a:ea typeface="Segoe UI" pitchFamily="34" charset="-122"/>
                 <a:cs typeface="Segoe UI" pitchFamily="34" charset="-120"/>
               </a:rPr>
-              <a:t>Menu déroulant sur la cloche</a:t>
+              <a:t>Calendrier</a:t>
             </a:r>
             <a:endParaRPr lang="en-US" sz="1400" dirty="0"/>
           </a:p>
@@ -19670,7 +20865,7 @@
                 <a:ea typeface="Segoe UI" pitchFamily="34" charset="-122"/>
                 <a:cs typeface="Segoe UI" pitchFamily="34" charset="-120"/>
               </a:rPr>
-              <a:t>Affiche les 5 dernières notifications sans quitter la page en cours, avec un lien vers la liste complète.</a:t>
+              <a:t>Cartes et tâches cliquables, édition d'un événement directement depuis sa fiche.</a:t>
             </a:r>
             <a:endParaRPr lang="en-US" sz="1100" dirty="0"/>
           </a:p>
@@ -19678,391 +20873,7 @@
       </p:sp>
       <p:sp>
         <p:nvSpPr>
-          <p:cNvPr id="9" name="Shape 7"/>
-          <p:cNvSpPr/>
-          <p:nvPr/>
-        </p:nvSpPr>
-        <p:spPr>
-          <a:xfrm>
-            <a:off x="640080" y="2926080"/>
-            <a:ext cx="10881360" cy="1097280"/>
-          </a:xfrm>
-          <a:prstGeom prst="roundRect">
-            <a:avLst>
-              <a:gd name="adj" fmla="val 5000"/>
-            </a:avLst>
-          </a:prstGeom>
-          <a:solidFill>
-            <a:srgbClr val="FFFFFF"/>
-          </a:solidFill>
-          <a:ln w="12700">
-            <a:solidFill>
-              <a:srgbClr val="E4DCCB"/>
-            </a:solidFill>
-            <a:prstDash val="solid"/>
-          </a:ln>
-        </p:spPr>
-      </p:sp>
-      <p:sp>
-        <p:nvSpPr>
-          <p:cNvPr id="10" name="Shape 8"/>
-          <p:cNvSpPr/>
-          <p:nvPr/>
-        </p:nvSpPr>
-        <p:spPr>
-          <a:xfrm>
-            <a:off x="640080" y="2926080"/>
-            <a:ext cx="54864" cy="1097280"/>
-          </a:xfrm>
-          <a:prstGeom prst="rect">
-            <a:avLst/>
-          </a:prstGeom>
-          <a:solidFill>
-            <a:srgbClr val="1D6FE0"/>
-          </a:solidFill>
-          <a:ln/>
-        </p:spPr>
-      </p:sp>
-      <p:sp>
-        <p:nvSpPr>
-          <p:cNvPr id="11" name="Text 9"/>
-          <p:cNvSpPr/>
-          <p:nvPr/>
-        </p:nvSpPr>
-        <p:spPr>
-          <a:xfrm>
-            <a:off x="914400" y="3035808"/>
-            <a:ext cx="10332720" cy="365760"/>
-          </a:xfrm>
-          <a:prstGeom prst="rect">
-            <a:avLst/>
-          </a:prstGeom>
-          <a:noFill/>
-          <a:ln/>
-        </p:spPr>
-        <p:txBody>
-          <a:bodyPr wrap="square" rtlCol="0" anchor="ctr"/>
-          <a:lstStyle/>
-          <a:p>
-            <a:pPr indent="0" marL="0">
-              <a:buNone/>
-            </a:pPr>
-            <a:r>
-              <a:rPr lang="en-US" sz="1400" b="1" dirty="0">
-                <a:solidFill>
-                  <a:srgbClr val="1B1F3B"/>
-                </a:solidFill>
-                <a:latin typeface="Segoe UI" pitchFamily="34" charset="0"/>
-                <a:ea typeface="Segoe UI" pitchFamily="34" charset="-122"/>
-                <a:cs typeface="Segoe UI" pitchFamily="34" charset="-120"/>
-              </a:rPr>
-              <a:t>Renvoi des identifiants client</a:t>
-            </a:r>
-            <a:endParaRPr lang="en-US" sz="1400" dirty="0"/>
-          </a:p>
-        </p:txBody>
-      </p:sp>
-      <p:sp>
-        <p:nvSpPr>
-          <p:cNvPr id="12" name="Text 10"/>
-          <p:cNvSpPr/>
-          <p:nvPr/>
-        </p:nvSpPr>
-        <p:spPr>
-          <a:xfrm>
-            <a:off x="914400" y="3383280"/>
-            <a:ext cx="10332720" cy="594360"/>
-          </a:xfrm>
-          <a:prstGeom prst="rect">
-            <a:avLst/>
-          </a:prstGeom>
-          <a:noFill/>
-          <a:ln/>
-        </p:spPr>
-        <p:txBody>
-          <a:bodyPr wrap="square" rtlCol="0" anchor="ctr"/>
-          <a:lstStyle/>
-          <a:p>
-            <a:pPr indent="0" marL="0">
-              <a:lnSpc>
-                <a:spcPts val="1400"/>
-              </a:lnSpc>
-              <a:buNone/>
-            </a:pPr>
-            <a:r>
-              <a:rPr lang="en-US" sz="1100" dirty="0">
-                <a:solidFill>
-                  <a:srgbClr val="8A7C68"/>
-                </a:solidFill>
-                <a:latin typeface="Segoe UI" pitchFamily="34" charset="0"/>
-                <a:ea typeface="Segoe UI" pitchFamily="34" charset="-122"/>
-                <a:cs typeface="Segoe UI" pitchFamily="34" charset="-120"/>
-              </a:rPr>
-              <a:t>Boutons pour renvoyer l'accès client par email ou WhatsApp, tableau d'informations avec icônes et boutons 'Copier'.</a:t>
-            </a:r>
-            <a:endParaRPr lang="en-US" sz="1100" dirty="0"/>
-          </a:p>
-        </p:txBody>
-      </p:sp>
-      <p:sp>
-        <p:nvSpPr>
-          <p:cNvPr id="13" name="Shape 11"/>
-          <p:cNvSpPr/>
-          <p:nvPr/>
-        </p:nvSpPr>
-        <p:spPr>
-          <a:xfrm>
-            <a:off x="640080" y="4160520"/>
-            <a:ext cx="10881360" cy="1097280"/>
-          </a:xfrm>
-          <a:prstGeom prst="roundRect">
-            <a:avLst>
-              <a:gd name="adj" fmla="val 5000"/>
-            </a:avLst>
-          </a:prstGeom>
-          <a:solidFill>
-            <a:srgbClr val="FFFFFF"/>
-          </a:solidFill>
-          <a:ln w="12700">
-            <a:solidFill>
-              <a:srgbClr val="E4DCCB"/>
-            </a:solidFill>
-            <a:prstDash val="solid"/>
-          </a:ln>
-        </p:spPr>
-      </p:sp>
-      <p:sp>
-        <p:nvSpPr>
-          <p:cNvPr id="14" name="Shape 12"/>
-          <p:cNvSpPr/>
-          <p:nvPr/>
-        </p:nvSpPr>
-        <p:spPr>
-          <a:xfrm>
-            <a:off x="640080" y="4160520"/>
-            <a:ext cx="54864" cy="1097280"/>
-          </a:xfrm>
-          <a:prstGeom prst="rect">
-            <a:avLst/>
-          </a:prstGeom>
-          <a:solidFill>
-            <a:srgbClr val="1D6FE0"/>
-          </a:solidFill>
-          <a:ln/>
-        </p:spPr>
-      </p:sp>
-      <p:sp>
-        <p:nvSpPr>
-          <p:cNvPr id="15" name="Text 13"/>
-          <p:cNvSpPr/>
-          <p:nvPr/>
-        </p:nvSpPr>
-        <p:spPr>
-          <a:xfrm>
-            <a:off x="914400" y="4270248"/>
-            <a:ext cx="10332720" cy="365760"/>
-          </a:xfrm>
-          <a:prstGeom prst="rect">
-            <a:avLst/>
-          </a:prstGeom>
-          <a:noFill/>
-          <a:ln/>
-        </p:spPr>
-        <p:txBody>
-          <a:bodyPr wrap="square" rtlCol="0" anchor="ctr"/>
-          <a:lstStyle/>
-          <a:p>
-            <a:pPr indent="0" marL="0">
-              <a:buNone/>
-            </a:pPr>
-            <a:r>
-              <a:rPr lang="en-US" sz="1400" b="1" dirty="0">
-                <a:solidFill>
-                  <a:srgbClr val="1B1F3B"/>
-                </a:solidFill>
-                <a:latin typeface="Segoe UI" pitchFamily="34" charset="0"/>
-                <a:ea typeface="Segoe UI" pitchFamily="34" charset="-122"/>
-                <a:cs typeface="Segoe UI" pitchFamily="34" charset="-120"/>
-              </a:rPr>
-              <a:t>Fiche détail centrée et redessinée</a:t>
-            </a:r>
-            <a:endParaRPr lang="en-US" sz="1400" dirty="0"/>
-          </a:p>
-        </p:txBody>
-      </p:sp>
-      <p:sp>
-        <p:nvSpPr>
-          <p:cNvPr id="16" name="Text 14"/>
-          <p:cNvSpPr/>
-          <p:nvPr/>
-        </p:nvSpPr>
-        <p:spPr>
-          <a:xfrm>
-            <a:off x="914400" y="4617720"/>
-            <a:ext cx="10332720" cy="594360"/>
-          </a:xfrm>
-          <a:prstGeom prst="rect">
-            <a:avLst/>
-          </a:prstGeom>
-          <a:noFill/>
-          <a:ln/>
-        </p:spPr>
-        <p:txBody>
-          <a:bodyPr wrap="square" rtlCol="0" anchor="ctr"/>
-          <a:lstStyle/>
-          <a:p>
-            <a:pPr indent="0" marL="0">
-              <a:lnSpc>
-                <a:spcPts val="1400"/>
-              </a:lnSpc>
-              <a:buNone/>
-            </a:pPr>
-            <a:r>
-              <a:rPr lang="en-US" sz="1100" dirty="0">
-                <a:solidFill>
-                  <a:srgbClr val="8A7C68"/>
-                </a:solidFill>
-                <a:latin typeface="Segoe UI" pitchFamily="34" charset="0"/>
-                <a:ea typeface="Segoe UI" pitchFamily="34" charset="-122"/>
-                <a:cs typeface="Segoe UI" pitchFamily="34" charset="-120"/>
-              </a:rPr>
-              <a:t>La fiche de détail d'une notification est centrée sur la page, avec un tableau d'informations clarifié.</a:t>
-            </a:r>
-            <a:endParaRPr lang="en-US" sz="1100" dirty="0"/>
-          </a:p>
-        </p:txBody>
-      </p:sp>
-      <p:sp>
-        <p:nvSpPr>
-          <p:cNvPr id="17" name="Shape 15"/>
-          <p:cNvSpPr/>
-          <p:nvPr/>
-        </p:nvSpPr>
-        <p:spPr>
-          <a:xfrm>
-            <a:off x="640080" y="5394960"/>
-            <a:ext cx="10881360" cy="1097280"/>
-          </a:xfrm>
-          <a:prstGeom prst="roundRect">
-            <a:avLst>
-              <a:gd name="adj" fmla="val 5000"/>
-            </a:avLst>
-          </a:prstGeom>
-          <a:solidFill>
-            <a:srgbClr val="FFFFFF"/>
-          </a:solidFill>
-          <a:ln w="12700">
-            <a:solidFill>
-              <a:srgbClr val="E4DCCB"/>
-            </a:solidFill>
-            <a:prstDash val="solid"/>
-          </a:ln>
-        </p:spPr>
-      </p:sp>
-      <p:sp>
-        <p:nvSpPr>
-          <p:cNvPr id="18" name="Shape 16"/>
-          <p:cNvSpPr/>
-          <p:nvPr/>
-        </p:nvSpPr>
-        <p:spPr>
-          <a:xfrm>
-            <a:off x="640080" y="5394960"/>
-            <a:ext cx="54864" cy="1097280"/>
-          </a:xfrm>
-          <a:prstGeom prst="rect">
-            <a:avLst/>
-          </a:prstGeom>
-          <a:solidFill>
-            <a:srgbClr val="1D6FE0"/>
-          </a:solidFill>
-          <a:ln/>
-        </p:spPr>
-      </p:sp>
-      <p:sp>
-        <p:nvSpPr>
-          <p:cNvPr id="19" name="Text 17"/>
-          <p:cNvSpPr/>
-          <p:nvPr/>
-        </p:nvSpPr>
-        <p:spPr>
-          <a:xfrm>
-            <a:off x="914400" y="5504688"/>
-            <a:ext cx="10332720" cy="365760"/>
-          </a:xfrm>
-          <a:prstGeom prst="rect">
-            <a:avLst/>
-          </a:prstGeom>
-          <a:noFill/>
-          <a:ln/>
-        </p:spPr>
-        <p:txBody>
-          <a:bodyPr wrap="square" rtlCol="0" anchor="ctr"/>
-          <a:lstStyle/>
-          <a:p>
-            <a:pPr indent="0" marL="0">
-              <a:buNone/>
-            </a:pPr>
-            <a:r>
-              <a:rPr lang="en-US" sz="1400" b="1" dirty="0">
-                <a:solidFill>
-                  <a:srgbClr val="1B1F3B"/>
-                </a:solidFill>
-                <a:latin typeface="Segoe UI" pitchFamily="34" charset="0"/>
-                <a:ea typeface="Segoe UI" pitchFamily="34" charset="-122"/>
-                <a:cs typeface="Segoe UI" pitchFamily="34" charset="-120"/>
-              </a:rPr>
-              <a:t>Correction de la route d'ouverture</a:t>
-            </a:r>
-            <a:endParaRPr lang="en-US" sz="1400" dirty="0"/>
-          </a:p>
-        </p:txBody>
-      </p:sp>
-      <p:sp>
-        <p:nvSpPr>
-          <p:cNvPr id="20" name="Text 18"/>
-          <p:cNvSpPr/>
-          <p:nvPr/>
-        </p:nvSpPr>
-        <p:spPr>
-          <a:xfrm>
-            <a:off x="914400" y="5852160"/>
-            <a:ext cx="10332720" cy="594360"/>
-          </a:xfrm>
-          <a:prstGeom prst="rect">
-            <a:avLst/>
-          </a:prstGeom>
-          <a:noFill/>
-          <a:ln/>
-        </p:spPr>
-        <p:txBody>
-          <a:bodyPr wrap="square" rtlCol="0" anchor="ctr"/>
-          <a:lstStyle/>
-          <a:p>
-            <a:pPr indent="0" marL="0">
-              <a:lnSpc>
-                <a:spcPts val="1400"/>
-              </a:lnSpc>
-              <a:buNone/>
-            </a:pPr>
-            <a:r>
-              <a:rPr lang="en-US" sz="1100" dirty="0">
-                <a:solidFill>
-                  <a:srgbClr val="8A7C68"/>
-                </a:solidFill>
-                <a:latin typeface="Segoe UI" pitchFamily="34" charset="0"/>
-                <a:ea typeface="Segoe UI" pitchFamily="34" charset="-122"/>
-                <a:cs typeface="Segoe UI" pitchFamily="34" charset="-120"/>
-              </a:rPr>
-              <a:t>Cliquer sur une notification depuis le menu déroulant ouvrait le devis lié au lieu de sa fiche de détail — corrigé, avec icône par type, heure relative et point 'non lu'.</a:t>
-            </a:r>
-            <a:endParaRPr lang="en-US" sz="1100" dirty="0"/>
-          </a:p>
-        </p:txBody>
-      </p:sp>
-      <p:sp>
-        <p:nvSpPr>
-          <p:cNvPr id="21" name="Text 19"/>
+          <p:cNvPr id="9" name="Text 7"/>
           <p:cNvSpPr/>
           <p:nvPr/>
         </p:nvSpPr>
@@ -20101,7 +20912,7 @@
       </p:sp>
       <p:sp>
         <p:nvSpPr>
-          <p:cNvPr id="22" name="Text 20"/>
+          <p:cNvPr id="10" name="Text 8"/>
           <p:cNvSpPr/>
           <p:nvPr/>
         </p:nvSpPr>

--- a/docs/manager-recap/Recap-Koji-Manager.pptx
+++ b/docs/manager-recap/Recap-Koji-Manager.pptx
@@ -7882,7 +7882,7 @@
                 <a:ea typeface="Segoe UI" pitchFamily="34" charset="-122"/>
                 <a:cs typeface="Segoe UI" pitchFamily="34" charset="-120"/>
               </a:rPr>
-              <a:t>27 mise(s) à jour</a:t>
+              <a:t>28 mise(s) à jour</a:t>
             </a:r>
             <a:endParaRPr lang="en-US" sz="1200" dirty="0"/>
           </a:p>
@@ -9622,7 +9622,7 @@
                 <a:ea typeface="Segoe UI" pitchFamily="34" charset="-122"/>
                 <a:cs typeface="Segoe UI" pitchFamily="34" charset="-120"/>
               </a:rPr>
-              <a:t>Taux de TVA de chaque ligne aligné sur le devis</a:t>
+              <a:t>Deuxième cause trouvée : le total serveur retombait à 0</a:t>
             </a:r>
             <a:endParaRPr lang="en-US" sz="1400" dirty="0"/>
           </a:p>
@@ -9664,6 +9664,134 @@
                 <a:ea typeface="Segoe UI" pitchFamily="34" charset="-122"/>
                 <a:cs typeface="Segoe UI" pitchFamily="34" charset="-120"/>
               </a:rPr>
+              <a:t>Le calcul serveur recalculait chaque ligne à partir de zéro au lieu de faire confiance au montant déjà calculé correctement par l'éditeur, et se trompait sur deux points (un champ technique à 0 mal interprété comme 'prix fixe', une liste de fournitures non reconnue), ramenant le total à 0€ à chaque enregistrement. Corrigé : le serveur fait maintenant confiance au montant de chaque ligne tel qu'il apparaît dans l'éditeur.</a:t>
+            </a:r>
+            <a:endParaRPr lang="en-US" sz="1100" dirty="0"/>
+          </a:p>
+        </p:txBody>
+      </p:sp>
+      <p:sp>
+        <p:nvSpPr>
+          <p:cNvPr id="17" name="Shape 15"/>
+          <p:cNvSpPr/>
+          <p:nvPr/>
+        </p:nvSpPr>
+        <p:spPr>
+          <a:xfrm>
+            <a:off x="640080" y="5394960"/>
+            <a:ext cx="10881360" cy="1097280"/>
+          </a:xfrm>
+          <a:prstGeom prst="roundRect">
+            <a:avLst>
+              <a:gd name="adj" fmla="val 5000"/>
+            </a:avLst>
+          </a:prstGeom>
+          <a:solidFill>
+            <a:srgbClr val="FFFFFF"/>
+          </a:solidFill>
+          <a:ln w="12700">
+            <a:solidFill>
+              <a:srgbClr val="E4DCCB"/>
+            </a:solidFill>
+            <a:prstDash val="solid"/>
+          </a:ln>
+        </p:spPr>
+      </p:sp>
+      <p:sp>
+        <p:nvSpPr>
+          <p:cNvPr id="18" name="Shape 16"/>
+          <p:cNvSpPr/>
+          <p:nvPr/>
+        </p:nvSpPr>
+        <p:spPr>
+          <a:xfrm>
+            <a:off x="640080" y="5394960"/>
+            <a:ext cx="54864" cy="1097280"/>
+          </a:xfrm>
+          <a:prstGeom prst="rect">
+            <a:avLst/>
+          </a:prstGeom>
+          <a:solidFill>
+            <a:srgbClr val="9A4C1F"/>
+          </a:solidFill>
+          <a:ln/>
+        </p:spPr>
+      </p:sp>
+      <p:sp>
+        <p:nvSpPr>
+          <p:cNvPr id="19" name="Text 17"/>
+          <p:cNvSpPr/>
+          <p:nvPr/>
+        </p:nvSpPr>
+        <p:spPr>
+          <a:xfrm>
+            <a:off x="914400" y="5504688"/>
+            <a:ext cx="10332720" cy="365760"/>
+          </a:xfrm>
+          <a:prstGeom prst="rect">
+            <a:avLst/>
+          </a:prstGeom>
+          <a:noFill/>
+          <a:ln/>
+        </p:spPr>
+        <p:txBody>
+          <a:bodyPr wrap="square" rtlCol="0" anchor="ctr"/>
+          <a:lstStyle/>
+          <a:p>
+            <a:pPr indent="0" marL="0">
+              <a:buNone/>
+            </a:pPr>
+            <a:r>
+              <a:rPr lang="en-US" sz="1400" b="1" dirty="0">
+                <a:solidFill>
+                  <a:srgbClr val="1B1F3B"/>
+                </a:solidFill>
+                <a:latin typeface="Segoe UI" pitchFamily="34" charset="0"/>
+                <a:ea typeface="Segoe UI" pitchFamily="34" charset="-122"/>
+                <a:cs typeface="Segoe UI" pitchFamily="34" charset="-120"/>
+              </a:rPr>
+              <a:t>Taux de TVA de chaque ligne aligné sur le devis</a:t>
+            </a:r>
+            <a:endParaRPr lang="en-US" sz="1400" dirty="0"/>
+          </a:p>
+        </p:txBody>
+      </p:sp>
+      <p:sp>
+        <p:nvSpPr>
+          <p:cNvPr id="20" name="Text 18"/>
+          <p:cNvSpPr/>
+          <p:nvPr/>
+        </p:nvSpPr>
+        <p:spPr>
+          <a:xfrm>
+            <a:off x="914400" y="5852160"/>
+            <a:ext cx="10332720" cy="594360"/>
+          </a:xfrm>
+          <a:prstGeom prst="rect">
+            <a:avLst/>
+          </a:prstGeom>
+          <a:noFill/>
+          <a:ln/>
+        </p:spPr>
+        <p:txBody>
+          <a:bodyPr wrap="square" rtlCol="0" anchor="ctr"/>
+          <a:lstStyle/>
+          <a:p>
+            <a:pPr indent="0" marL="0">
+              <a:lnSpc>
+                <a:spcPts val="1400"/>
+              </a:lnSpc>
+              <a:buNone/>
+            </a:pPr>
+            <a:r>
+              <a:rPr lang="en-US" sz="1100" dirty="0">
+                <a:solidFill>
+                  <a:srgbClr val="8A7C68"/>
+                </a:solidFill>
+                <a:latin typeface="Segoe UI" pitchFamily="34" charset="0"/>
+                <a:ea typeface="Segoe UI" pitchFamily="34" charset="-122"/>
+                <a:cs typeface="Segoe UI" pitchFamily="34" charset="-120"/>
+              </a:rPr>
               <a:t>Chaque ligne de devis calculait sa propre TVA à 20% par défaut, sans tenir compte du taux choisi pour le devis (ex. 10%) — corrigé pour utiliser le taux réellement sélectionné.</a:t>
             </a:r>
             <a:endParaRPr lang="en-US" sz="1100" dirty="0"/>
@@ -9672,7 +9800,7 @@
       </p:sp>
       <p:sp>
         <p:nvSpPr>
-          <p:cNvPr id="17" name="Text 15"/>
+          <p:cNvPr id="21" name="Text 19"/>
           <p:cNvSpPr/>
           <p:nvPr/>
         </p:nvSpPr>
@@ -9711,7 +9839,7 @@
       </p:sp>
       <p:sp>
         <p:nvSpPr>
-          <p:cNvPr id="18" name="Text 16"/>
+          <p:cNvPr id="22" name="Text 20"/>
           <p:cNvSpPr/>
           <p:nvPr/>
         </p:nvSpPr>
@@ -9918,7 +10046,7 @@
                 <a:ea typeface="Georgia" pitchFamily="34" charset="-122"/>
                 <a:cs typeface="Georgia" pitchFamily="34" charset="-120"/>
               </a:rPr>
-              <a:t>71</a:t>
+              <a:t>72</a:t>
             </a:r>
             <a:endParaRPr lang="en-US" sz="3200" dirty="0"/>
           </a:p>
@@ -10128,7 +10256,7 @@
                 <a:ea typeface="Georgia" pitchFamily="34" charset="-122"/>
                 <a:cs typeface="Georgia" pitchFamily="34" charset="-120"/>
               </a:rPr>
-              <a:t>27</a:t>
+              <a:t>28</a:t>
             </a:r>
             <a:endParaRPr lang="en-US" sz="3200" dirty="0"/>
           </a:p>

--- a/docs/manager-recap/Recap-Koji-Manager.pptx
+++ b/docs/manager-recap/Recap-Koji-Manager.pptx
@@ -10046,7 +10046,7 @@
                 <a:ea typeface="Georgia" pitchFamily="34" charset="-122"/>
                 <a:cs typeface="Georgia" pitchFamily="34" charset="-120"/>
               </a:rPr>
-              <a:t>72</a:t>
+              <a:t>73</a:t>
             </a:r>
             <a:endParaRPr lang="en-US" sz="3200" dirty="0"/>
           </a:p>
@@ -10151,7 +10151,7 @@
                 <a:ea typeface="Georgia" pitchFamily="34" charset="-122"/>
                 <a:cs typeface="Georgia" pitchFamily="34" charset="-120"/>
               </a:rPr>
-              <a:t>36</a:t>
+              <a:t>37</a:t>
             </a:r>
             <a:endParaRPr lang="en-US" sz="3200" dirty="0"/>
           </a:p>
@@ -15373,7 +15373,7 @@
                 <a:ea typeface="Segoe UI" pitchFamily="34" charset="-122"/>
                 <a:cs typeface="Segoe UI" pitchFamily="34" charset="-120"/>
               </a:rPr>
-              <a:t>36 mise(s) à jour</a:t>
+              <a:t>37 mise(s) à jour</a:t>
             </a:r>
             <a:endParaRPr lang="en-US" sz="1200" dirty="0"/>
           </a:p>
@@ -19169,7 +19169,7 @@
                 <a:ea typeface="Segoe UI" pitchFamily="34" charset="-122"/>
                 <a:cs typeface="Segoe UI" pitchFamily="34" charset="-120"/>
               </a:rPr>
-              <a:t>Tableau du devis : colonne Total HT (au lieu de Total TTC)</a:t>
+              <a:t>Double-clic sur Enregistrer : un seul devis créé au lieu de deux</a:t>
             </a:r>
             <a:endParaRPr lang="en-US" sz="1400" dirty="0"/>
           </a:p>
@@ -19211,6 +19211,134 @@
                 <a:ea typeface="Segoe UI" pitchFamily="34" charset="-122"/>
                 <a:cs typeface="Segoe UI" pitchFamily="34" charset="-120"/>
               </a:rPr>
+              <a:t>Un double-clic (ou un enregistrement automatique déclenché en même temps qu'un enregistrement manuel) pouvait créer deux devis identiques pour le même chantier au lieu de mettre à jour le même. Corrigé : un enregistrement déjà en cours est désormais partagé au lieu d'en déclencher un second.</a:t>
+            </a:r>
+            <a:endParaRPr lang="en-US" sz="1100" dirty="0"/>
+          </a:p>
+        </p:txBody>
+      </p:sp>
+      <p:sp>
+        <p:nvSpPr>
+          <p:cNvPr id="9" name="Shape 7"/>
+          <p:cNvSpPr/>
+          <p:nvPr/>
+        </p:nvSpPr>
+        <p:spPr>
+          <a:xfrm>
+            <a:off x="640080" y="2926080"/>
+            <a:ext cx="10881360" cy="1097280"/>
+          </a:xfrm>
+          <a:prstGeom prst="roundRect">
+            <a:avLst>
+              <a:gd name="adj" fmla="val 5000"/>
+            </a:avLst>
+          </a:prstGeom>
+          <a:solidFill>
+            <a:srgbClr val="FFFFFF"/>
+          </a:solidFill>
+          <a:ln w="12700">
+            <a:solidFill>
+              <a:srgbClr val="E4DCCB"/>
+            </a:solidFill>
+            <a:prstDash val="solid"/>
+          </a:ln>
+        </p:spPr>
+      </p:sp>
+      <p:sp>
+        <p:nvSpPr>
+          <p:cNvPr id="10" name="Shape 8"/>
+          <p:cNvSpPr/>
+          <p:nvPr/>
+        </p:nvSpPr>
+        <p:spPr>
+          <a:xfrm>
+            <a:off x="640080" y="2926080"/>
+            <a:ext cx="54864" cy="1097280"/>
+          </a:xfrm>
+          <a:prstGeom prst="rect">
+            <a:avLst/>
+          </a:prstGeom>
+          <a:solidFill>
+            <a:srgbClr val="1D6FE0"/>
+          </a:solidFill>
+          <a:ln/>
+        </p:spPr>
+      </p:sp>
+      <p:sp>
+        <p:nvSpPr>
+          <p:cNvPr id="11" name="Text 9"/>
+          <p:cNvSpPr/>
+          <p:nvPr/>
+        </p:nvSpPr>
+        <p:spPr>
+          <a:xfrm>
+            <a:off x="914400" y="3035808"/>
+            <a:ext cx="10332720" cy="365760"/>
+          </a:xfrm>
+          <a:prstGeom prst="rect">
+            <a:avLst/>
+          </a:prstGeom>
+          <a:noFill/>
+          <a:ln/>
+        </p:spPr>
+        <p:txBody>
+          <a:bodyPr wrap="square" rtlCol="0" anchor="ctr"/>
+          <a:lstStyle/>
+          <a:p>
+            <a:pPr indent="0" marL="0">
+              <a:buNone/>
+            </a:pPr>
+            <a:r>
+              <a:rPr lang="en-US" sz="1400" b="1" dirty="0">
+                <a:solidFill>
+                  <a:srgbClr val="1B1F3B"/>
+                </a:solidFill>
+                <a:latin typeface="Segoe UI" pitchFamily="34" charset="0"/>
+                <a:ea typeface="Segoe UI" pitchFamily="34" charset="-122"/>
+                <a:cs typeface="Segoe UI" pitchFamily="34" charset="-120"/>
+              </a:rPr>
+              <a:t>Tableau du devis : colonne Total HT (au lieu de Total TTC)</a:t>
+            </a:r>
+            <a:endParaRPr lang="en-US" sz="1400" dirty="0"/>
+          </a:p>
+        </p:txBody>
+      </p:sp>
+      <p:sp>
+        <p:nvSpPr>
+          <p:cNvPr id="12" name="Text 10"/>
+          <p:cNvSpPr/>
+          <p:nvPr/>
+        </p:nvSpPr>
+        <p:spPr>
+          <a:xfrm>
+            <a:off x="914400" y="3383280"/>
+            <a:ext cx="10332720" cy="594360"/>
+          </a:xfrm>
+          <a:prstGeom prst="rect">
+            <a:avLst/>
+          </a:prstGeom>
+          <a:noFill/>
+          <a:ln/>
+        </p:spPr>
+        <p:txBody>
+          <a:bodyPr wrap="square" rtlCol="0" anchor="ctr"/>
+          <a:lstStyle/>
+          <a:p>
+            <a:pPr indent="0" marL="0">
+              <a:lnSpc>
+                <a:spcPts val="1400"/>
+              </a:lnSpc>
+              <a:buNone/>
+            </a:pPr>
+            <a:r>
+              <a:rPr lang="en-US" sz="1100" dirty="0">
+                <a:solidFill>
+                  <a:srgbClr val="8A7C68"/>
+                </a:solidFill>
+                <a:latin typeface="Segoe UI" pitchFamily="34" charset="0"/>
+                <a:ea typeface="Segoe UI" pitchFamily="34" charset="-122"/>
+                <a:cs typeface="Segoe UI" pitchFamily="34" charset="-120"/>
+              </a:rPr>
               <a:t>La colonne de droite du tableau d'ouvrages, sur le PDF et le Word générés, affiche maintenant le Total HT de chaque ligne plutôt que le Total TTC, comme demandé pour la lecture par les clients/partenaires.</a:t>
             </a:r>
             <a:endParaRPr lang="en-US" sz="1100" dirty="0"/>
@@ -19219,7 +19347,7 @@
       </p:sp>
       <p:sp>
         <p:nvSpPr>
-          <p:cNvPr id="9" name="Text 7"/>
+          <p:cNvPr id="13" name="Text 11"/>
           <p:cNvSpPr/>
           <p:nvPr/>
         </p:nvSpPr>
@@ -19258,7 +19386,7 @@
       </p:sp>
       <p:sp>
         <p:nvSpPr>
-          <p:cNvPr id="10" name="Text 8"/>
+          <p:cNvPr id="14" name="Text 12"/>
           <p:cNvSpPr/>
           <p:nvPr/>
         </p:nvSpPr>

--- a/docs/manager-recap/Recap-Koji-Manager.pptx
+++ b/docs/manager-recap/Recap-Koji-Manager.pptx
@@ -10046,7 +10046,7 @@
                 <a:ea typeface="Georgia" pitchFamily="34" charset="-122"/>
                 <a:cs typeface="Georgia" pitchFamily="34" charset="-120"/>
               </a:rPr>
-              <a:t>73</a:t>
+              <a:t>74</a:t>
             </a:r>
             <a:endParaRPr lang="en-US" sz="3200" dirty="0"/>
           </a:p>
@@ -10151,7 +10151,7 @@
                 <a:ea typeface="Georgia" pitchFamily="34" charset="-122"/>
                 <a:cs typeface="Georgia" pitchFamily="34" charset="-120"/>
               </a:rPr>
-              <a:t>37</a:t>
+              <a:t>38</a:t>
             </a:r>
             <a:endParaRPr lang="en-US" sz="3200" dirty="0"/>
           </a:p>
@@ -15373,7 +15373,7 @@
                 <a:ea typeface="Segoe UI" pitchFamily="34" charset="-122"/>
                 <a:cs typeface="Segoe UI" pitchFamily="34" charset="-120"/>
               </a:rPr>
-              <a:t>37 mise(s) à jour</a:t>
+              <a:t>38 mise(s) à jour</a:t>
             </a:r>
             <a:endParaRPr lang="en-US" sz="1200" dirty="0"/>
           </a:p>
@@ -19347,7 +19347,135 @@
       </p:sp>
       <p:sp>
         <p:nvSpPr>
-          <p:cNvPr id="13" name="Text 11"/>
+          <p:cNvPr id="13" name="Shape 11"/>
+          <p:cNvSpPr/>
+          <p:nvPr/>
+        </p:nvSpPr>
+        <p:spPr>
+          <a:xfrm>
+            <a:off x="640080" y="4160520"/>
+            <a:ext cx="10881360" cy="1097280"/>
+          </a:xfrm>
+          <a:prstGeom prst="roundRect">
+            <a:avLst>
+              <a:gd name="adj" fmla="val 5000"/>
+            </a:avLst>
+          </a:prstGeom>
+          <a:solidFill>
+            <a:srgbClr val="FFFFFF"/>
+          </a:solidFill>
+          <a:ln w="12700">
+            <a:solidFill>
+              <a:srgbClr val="E4DCCB"/>
+            </a:solidFill>
+            <a:prstDash val="solid"/>
+          </a:ln>
+        </p:spPr>
+      </p:sp>
+      <p:sp>
+        <p:nvSpPr>
+          <p:cNvPr id="14" name="Shape 12"/>
+          <p:cNvSpPr/>
+          <p:nvPr/>
+        </p:nvSpPr>
+        <p:spPr>
+          <a:xfrm>
+            <a:off x="640080" y="4160520"/>
+            <a:ext cx="54864" cy="1097280"/>
+          </a:xfrm>
+          <a:prstGeom prst="rect">
+            <a:avLst/>
+          </a:prstGeom>
+          <a:solidFill>
+            <a:srgbClr val="1D6FE0"/>
+          </a:solidFill>
+          <a:ln/>
+        </p:spPr>
+      </p:sp>
+      <p:sp>
+        <p:nvSpPr>
+          <p:cNvPr id="15" name="Text 13"/>
+          <p:cNvSpPr/>
+          <p:nvPr/>
+        </p:nvSpPr>
+        <p:spPr>
+          <a:xfrm>
+            <a:off x="914400" y="4270248"/>
+            <a:ext cx="10332720" cy="365760"/>
+          </a:xfrm>
+          <a:prstGeom prst="rect">
+            <a:avLst/>
+          </a:prstGeom>
+          <a:noFill/>
+          <a:ln/>
+        </p:spPr>
+        <p:txBody>
+          <a:bodyPr wrap="square" rtlCol="0" anchor="ctr"/>
+          <a:lstStyle/>
+          <a:p>
+            <a:pPr indent="0" marL="0">
+              <a:buNone/>
+            </a:pPr>
+            <a:r>
+              <a:rPr lang="en-US" sz="1400" b="1" dirty="0">
+                <a:solidFill>
+                  <a:srgbClr val="1B1F3B"/>
+                </a:solidFill>
+                <a:latin typeface="Segoe UI" pitchFamily="34" charset="0"/>
+                <a:ea typeface="Segoe UI" pitchFamily="34" charset="-122"/>
+                <a:cs typeface="Segoe UI" pitchFamily="34" charset="-120"/>
+              </a:rPr>
+              <a:t>Bouton Ouvrir sur chaque ouvrage lié à la bibliothèque</a:t>
+            </a:r>
+            <a:endParaRPr lang="en-US" sz="1400" dirty="0"/>
+          </a:p>
+        </p:txBody>
+      </p:sp>
+      <p:sp>
+        <p:nvSpPr>
+          <p:cNvPr id="16" name="Text 14"/>
+          <p:cNvSpPr/>
+          <p:nvPr/>
+        </p:nvSpPr>
+        <p:spPr>
+          <a:xfrm>
+            <a:off x="914400" y="4617720"/>
+            <a:ext cx="10332720" cy="594360"/>
+          </a:xfrm>
+          <a:prstGeom prst="rect">
+            <a:avLst/>
+          </a:prstGeom>
+          <a:noFill/>
+          <a:ln/>
+        </p:spPr>
+        <p:txBody>
+          <a:bodyPr wrap="square" rtlCol="0" anchor="ctr"/>
+          <a:lstStyle/>
+          <a:p>
+            <a:pPr indent="0" marL="0">
+              <a:lnSpc>
+                <a:spcPts val="1400"/>
+              </a:lnSpc>
+              <a:buNone/>
+            </a:pPr>
+            <a:r>
+              <a:rPr lang="en-US" sz="1100" dirty="0">
+                <a:solidFill>
+                  <a:srgbClr val="8A7C68"/>
+                </a:solidFill>
+                <a:latin typeface="Segoe UI" pitchFamily="34" charset="0"/>
+                <a:ea typeface="Segoe UI" pitchFamily="34" charset="-122"/>
+                <a:cs typeface="Segoe UI" pitchFamily="34" charset="-120"/>
+              </a:rPr>
+              <a:t>Comme pour les fournitures, chaque ouvrage d'un devis relié à la Bibliothèque d'ouvrages affiche désormais un bouton 'Ouvrir' qui montre sa fiche (code, famille, unité, temps normatif, taux horaire, description) et permet d'aller la modifier dans la Bibliothèque.</a:t>
+            </a:r>
+            <a:endParaRPr lang="en-US" sz="1100" dirty="0"/>
+          </a:p>
+        </p:txBody>
+      </p:sp>
+      <p:sp>
+        <p:nvSpPr>
+          <p:cNvPr id="17" name="Text 15"/>
           <p:cNvSpPr/>
           <p:nvPr/>
         </p:nvSpPr>
@@ -19386,7 +19514,7 @@
       </p:sp>
       <p:sp>
         <p:nvSpPr>
-          <p:cNvPr id="14" name="Text 12"/>
+          <p:cNvPr id="18" name="Text 16"/>
           <p:cNvSpPr/>
           <p:nvPr/>
         </p:nvSpPr>

--- a/docs/manager-recap/Recap-Koji-Manager.pptx
+++ b/docs/manager-recap/Recap-Koji-Manager.pptx
@@ -40,9 +40,13 @@
     <p:sldId id="288" r:id="rId34"/>
     <p:sldId id="289" r:id="rId35"/>
     <p:sldId id="290" r:id="rId36"/>
+    <p:sldId id="291" r:id="rId37"/>
+    <p:sldId id="292" r:id="rId38"/>
+    <p:sldId id="293" r:id="rId39"/>
+    <p:sldId id="294" r:id="rId40"/>
   </p:sldIdLst>
   <p:notesMasterIdLst>
-    <p:notesMasterId r:id="rId37"/>
+    <p:notesMasterId r:id="rId41"/>
   </p:notesMasterIdLst>
   <p:sldSz cx="12191695" cy="6858000"/>
   <p:notesSz cx="6858000" cy="12191695"/>
@@ -3024,6 +3028,358 @@
             <a:fld id="{F7021451-1387-4CA6-816F-3879F97B5CBC}" type="slidenum">
               <a:rPr lang="en-US"/>
               <a:t>35</a:t>
+            </a:fld>
+            <a:endParaRPr lang="en-US"/>
+          </a:p>
+        </p:txBody>
+      </p:sp>
+    </p:spTree>
+    <p:extLst>
+      <p:ext uri="{BB962C8B-B14F-4D97-AF65-F5344CB8AC3E}">
+        <p14:creationId xmlns:p14="http://schemas.microsoft.com/office/powerpoint/2010/main" val="1024086991"/>
+      </p:ext>
+    </p:extLst>
+  </p:cSld>
+  <p:clrMapOvr>
+    <a:masterClrMapping/>
+  </p:clrMapOvr>
+</p:notes>
+</file>
+
+<file path=ppt/notesSlides/notesSlide36.xml><?xml version="1.0" encoding="utf-8"?>
+<p:notes xmlns:a="http://schemas.openxmlformats.org/drawingml/2006/main" xmlns:r="http://schemas.openxmlformats.org/officeDocument/2006/relationships" xmlns:p="http://schemas.openxmlformats.org/presentationml/2006/main">
+  <p:cSld>
+    <p:spTree>
+      <p:nvGrpSpPr>
+        <p:cNvPr id="1" name=""/>
+        <p:cNvGrpSpPr/>
+        <p:nvPr/>
+      </p:nvGrpSpPr>
+      <p:grpSpPr>
+        <a:xfrm>
+          <a:off x="0" y="0"/>
+          <a:ext cx="0" cy="0"/>
+          <a:chOff x="0" y="0"/>
+          <a:chExt cx="0" cy="0"/>
+        </a:xfrm>
+      </p:grpSpPr>
+      <p:sp>
+        <p:nvSpPr>
+          <p:cNvPr id="2" name="Slide Image Placeholder 1"/>
+          <p:cNvSpPr>
+            <a:spLocks noGrp="1" noRot="1" noChangeAspect="1"/>
+          </p:cNvSpPr>
+          <p:nvPr>
+            <p:ph type="sldImg"/>
+          </p:nvPr>
+        </p:nvSpPr>
+        <p:spPr/>
+      </p:sp>
+      <p:sp>
+        <p:nvSpPr>
+          <p:cNvPr id="3" name="Notes Placeholder 2"/>
+          <p:cNvSpPr>
+            <a:spLocks noGrp="1"/>
+          </p:cNvSpPr>
+          <p:nvPr>
+            <p:ph type="body" idx="1"/>
+          </p:nvPr>
+        </p:nvSpPr>
+        <p:spPr/>
+        <p:txBody>
+          <a:bodyPr/>
+          <a:lstStyle/>
+          <a:p>
+            <a:r>
+              <a:rPr lang="en-US" dirty="0"/>
+              <a:t/>
+            </a:r>
+            <a:endParaRPr lang="en-US" dirty="0"/>
+          </a:p>
+        </p:txBody>
+      </p:sp>
+      <p:sp>
+        <p:nvSpPr>
+          <p:cNvPr id="4" name="Slide Number Placeholder 3"/>
+          <p:cNvSpPr>
+            <a:spLocks noGrp="1"/>
+          </p:cNvSpPr>
+          <p:nvPr>
+            <p:ph type="sldNum" sz="quarter" idx="10"/>
+          </p:nvPr>
+        </p:nvSpPr>
+        <p:spPr/>
+        <p:txBody>
+          <a:bodyPr/>
+          <a:lstStyle/>
+          <a:p>
+            <a:fld id="{F7021451-1387-4CA6-816F-3879F97B5CBC}" type="slidenum">
+              <a:rPr lang="en-US"/>
+              <a:t>36</a:t>
+            </a:fld>
+            <a:endParaRPr lang="en-US"/>
+          </a:p>
+        </p:txBody>
+      </p:sp>
+    </p:spTree>
+    <p:extLst>
+      <p:ext uri="{BB962C8B-B14F-4D97-AF65-F5344CB8AC3E}">
+        <p14:creationId xmlns:p14="http://schemas.microsoft.com/office/powerpoint/2010/main" val="1024086991"/>
+      </p:ext>
+    </p:extLst>
+  </p:cSld>
+  <p:clrMapOvr>
+    <a:masterClrMapping/>
+  </p:clrMapOvr>
+</p:notes>
+</file>
+
+<file path=ppt/notesSlides/notesSlide37.xml><?xml version="1.0" encoding="utf-8"?>
+<p:notes xmlns:a="http://schemas.openxmlformats.org/drawingml/2006/main" xmlns:r="http://schemas.openxmlformats.org/officeDocument/2006/relationships" xmlns:p="http://schemas.openxmlformats.org/presentationml/2006/main">
+  <p:cSld>
+    <p:spTree>
+      <p:nvGrpSpPr>
+        <p:cNvPr id="1" name=""/>
+        <p:cNvGrpSpPr/>
+        <p:nvPr/>
+      </p:nvGrpSpPr>
+      <p:grpSpPr>
+        <a:xfrm>
+          <a:off x="0" y="0"/>
+          <a:ext cx="0" cy="0"/>
+          <a:chOff x="0" y="0"/>
+          <a:chExt cx="0" cy="0"/>
+        </a:xfrm>
+      </p:grpSpPr>
+      <p:sp>
+        <p:nvSpPr>
+          <p:cNvPr id="2" name="Slide Image Placeholder 1"/>
+          <p:cNvSpPr>
+            <a:spLocks noGrp="1" noRot="1" noChangeAspect="1"/>
+          </p:cNvSpPr>
+          <p:nvPr>
+            <p:ph type="sldImg"/>
+          </p:nvPr>
+        </p:nvSpPr>
+        <p:spPr/>
+      </p:sp>
+      <p:sp>
+        <p:nvSpPr>
+          <p:cNvPr id="3" name="Notes Placeholder 2"/>
+          <p:cNvSpPr>
+            <a:spLocks noGrp="1"/>
+          </p:cNvSpPr>
+          <p:nvPr>
+            <p:ph type="body" idx="1"/>
+          </p:nvPr>
+        </p:nvSpPr>
+        <p:spPr/>
+        <p:txBody>
+          <a:bodyPr/>
+          <a:lstStyle/>
+          <a:p>
+            <a:r>
+              <a:rPr lang="en-US" dirty="0"/>
+              <a:t/>
+            </a:r>
+            <a:endParaRPr lang="en-US" dirty="0"/>
+          </a:p>
+        </p:txBody>
+      </p:sp>
+      <p:sp>
+        <p:nvSpPr>
+          <p:cNvPr id="4" name="Slide Number Placeholder 3"/>
+          <p:cNvSpPr>
+            <a:spLocks noGrp="1"/>
+          </p:cNvSpPr>
+          <p:nvPr>
+            <p:ph type="sldNum" sz="quarter" idx="10"/>
+          </p:nvPr>
+        </p:nvSpPr>
+        <p:spPr/>
+        <p:txBody>
+          <a:bodyPr/>
+          <a:lstStyle/>
+          <a:p>
+            <a:fld id="{F7021451-1387-4CA6-816F-3879F97B5CBC}" type="slidenum">
+              <a:rPr lang="en-US"/>
+              <a:t>37</a:t>
+            </a:fld>
+            <a:endParaRPr lang="en-US"/>
+          </a:p>
+        </p:txBody>
+      </p:sp>
+    </p:spTree>
+    <p:extLst>
+      <p:ext uri="{BB962C8B-B14F-4D97-AF65-F5344CB8AC3E}">
+        <p14:creationId xmlns:p14="http://schemas.microsoft.com/office/powerpoint/2010/main" val="1024086991"/>
+      </p:ext>
+    </p:extLst>
+  </p:cSld>
+  <p:clrMapOvr>
+    <a:masterClrMapping/>
+  </p:clrMapOvr>
+</p:notes>
+</file>
+
+<file path=ppt/notesSlides/notesSlide38.xml><?xml version="1.0" encoding="utf-8"?>
+<p:notes xmlns:a="http://schemas.openxmlformats.org/drawingml/2006/main" xmlns:r="http://schemas.openxmlformats.org/officeDocument/2006/relationships" xmlns:p="http://schemas.openxmlformats.org/presentationml/2006/main">
+  <p:cSld>
+    <p:spTree>
+      <p:nvGrpSpPr>
+        <p:cNvPr id="1" name=""/>
+        <p:cNvGrpSpPr/>
+        <p:nvPr/>
+      </p:nvGrpSpPr>
+      <p:grpSpPr>
+        <a:xfrm>
+          <a:off x="0" y="0"/>
+          <a:ext cx="0" cy="0"/>
+          <a:chOff x="0" y="0"/>
+          <a:chExt cx="0" cy="0"/>
+        </a:xfrm>
+      </p:grpSpPr>
+      <p:sp>
+        <p:nvSpPr>
+          <p:cNvPr id="2" name="Slide Image Placeholder 1"/>
+          <p:cNvSpPr>
+            <a:spLocks noGrp="1" noRot="1" noChangeAspect="1"/>
+          </p:cNvSpPr>
+          <p:nvPr>
+            <p:ph type="sldImg"/>
+          </p:nvPr>
+        </p:nvSpPr>
+        <p:spPr/>
+      </p:sp>
+      <p:sp>
+        <p:nvSpPr>
+          <p:cNvPr id="3" name="Notes Placeholder 2"/>
+          <p:cNvSpPr>
+            <a:spLocks noGrp="1"/>
+          </p:cNvSpPr>
+          <p:nvPr>
+            <p:ph type="body" idx="1"/>
+          </p:nvPr>
+        </p:nvSpPr>
+        <p:spPr/>
+        <p:txBody>
+          <a:bodyPr/>
+          <a:lstStyle/>
+          <a:p>
+            <a:r>
+              <a:rPr lang="en-US" dirty="0"/>
+              <a:t/>
+            </a:r>
+            <a:endParaRPr lang="en-US" dirty="0"/>
+          </a:p>
+        </p:txBody>
+      </p:sp>
+      <p:sp>
+        <p:nvSpPr>
+          <p:cNvPr id="4" name="Slide Number Placeholder 3"/>
+          <p:cNvSpPr>
+            <a:spLocks noGrp="1"/>
+          </p:cNvSpPr>
+          <p:nvPr>
+            <p:ph type="sldNum" sz="quarter" idx="10"/>
+          </p:nvPr>
+        </p:nvSpPr>
+        <p:spPr/>
+        <p:txBody>
+          <a:bodyPr/>
+          <a:lstStyle/>
+          <a:p>
+            <a:fld id="{F7021451-1387-4CA6-816F-3879F97B5CBC}" type="slidenum">
+              <a:rPr lang="en-US"/>
+              <a:t>38</a:t>
+            </a:fld>
+            <a:endParaRPr lang="en-US"/>
+          </a:p>
+        </p:txBody>
+      </p:sp>
+    </p:spTree>
+    <p:extLst>
+      <p:ext uri="{BB962C8B-B14F-4D97-AF65-F5344CB8AC3E}">
+        <p14:creationId xmlns:p14="http://schemas.microsoft.com/office/powerpoint/2010/main" val="1024086991"/>
+      </p:ext>
+    </p:extLst>
+  </p:cSld>
+  <p:clrMapOvr>
+    <a:masterClrMapping/>
+  </p:clrMapOvr>
+</p:notes>
+</file>
+
+<file path=ppt/notesSlides/notesSlide39.xml><?xml version="1.0" encoding="utf-8"?>
+<p:notes xmlns:a="http://schemas.openxmlformats.org/drawingml/2006/main" xmlns:r="http://schemas.openxmlformats.org/officeDocument/2006/relationships" xmlns:p="http://schemas.openxmlformats.org/presentationml/2006/main">
+  <p:cSld>
+    <p:spTree>
+      <p:nvGrpSpPr>
+        <p:cNvPr id="1" name=""/>
+        <p:cNvGrpSpPr/>
+        <p:nvPr/>
+      </p:nvGrpSpPr>
+      <p:grpSpPr>
+        <a:xfrm>
+          <a:off x="0" y="0"/>
+          <a:ext cx="0" cy="0"/>
+          <a:chOff x="0" y="0"/>
+          <a:chExt cx="0" cy="0"/>
+        </a:xfrm>
+      </p:grpSpPr>
+      <p:sp>
+        <p:nvSpPr>
+          <p:cNvPr id="2" name="Slide Image Placeholder 1"/>
+          <p:cNvSpPr>
+            <a:spLocks noGrp="1" noRot="1" noChangeAspect="1"/>
+          </p:cNvSpPr>
+          <p:nvPr>
+            <p:ph type="sldImg"/>
+          </p:nvPr>
+        </p:nvSpPr>
+        <p:spPr/>
+      </p:sp>
+      <p:sp>
+        <p:nvSpPr>
+          <p:cNvPr id="3" name="Notes Placeholder 2"/>
+          <p:cNvSpPr>
+            <a:spLocks noGrp="1"/>
+          </p:cNvSpPr>
+          <p:nvPr>
+            <p:ph type="body" idx="1"/>
+          </p:nvPr>
+        </p:nvSpPr>
+        <p:spPr/>
+        <p:txBody>
+          <a:bodyPr/>
+          <a:lstStyle/>
+          <a:p>
+            <a:r>
+              <a:rPr lang="en-US" dirty="0"/>
+              <a:t/>
+            </a:r>
+            <a:endParaRPr lang="en-US" dirty="0"/>
+          </a:p>
+        </p:txBody>
+      </p:sp>
+      <p:sp>
+        <p:nvSpPr>
+          <p:cNvPr id="4" name="Slide Number Placeholder 3"/>
+          <p:cNvSpPr>
+            <a:spLocks noGrp="1"/>
+          </p:cNvSpPr>
+          <p:nvPr>
+            <p:ph type="sldNum" sz="quarter" idx="10"/>
+          </p:nvPr>
+        </p:nvSpPr>
+        <p:spPr/>
+        <p:txBody>
+          <a:bodyPr/>
+          <a:lstStyle/>
+          <a:p>
+            <a:fld id="{F7021451-1387-4CA6-816F-3879F97B5CBC}" type="slidenum">
+              <a:rPr lang="en-US"/>
+              <a:t>39</a:t>
             </a:fld>
             <a:endParaRPr lang="en-US"/>
           </a:p>
@@ -4281,7 +4637,7 @@
                 <a:ea typeface="Georgia" pitchFamily="34" charset="-122"/>
                 <a:cs typeface="Georgia" pitchFamily="34" charset="-120"/>
               </a:rPr>
-              <a:t>Notifications</a:t>
+              <a:t>Équipe (suite)</a:t>
             </a:r>
             <a:endParaRPr lang="en-US" sz="2400" dirty="0"/>
           </a:p>
@@ -4367,7 +4723,7 @@
                 <a:ea typeface="Segoe UI" pitchFamily="34" charset="-122"/>
                 <a:cs typeface="Segoe UI" pitchFamily="34" charset="-120"/>
               </a:rPr>
-              <a:t>Menu déroulant sur la cloche</a:t>
+              <a:t>Calendrier</a:t>
             </a:r>
             <a:endParaRPr lang="en-US" sz="1400" dirty="0"/>
           </a:p>
@@ -4409,7 +4765,7 @@
                 <a:ea typeface="Segoe UI" pitchFamily="34" charset="-122"/>
                 <a:cs typeface="Segoe UI" pitchFamily="34" charset="-120"/>
               </a:rPr>
-              <a:t>Affiche les 5 dernières notifications sans quitter la page en cours, avec un lien vers la liste complète.</a:t>
+              <a:t>Cartes et tâches cliquables, édition d'un événement directement depuis sa fiche.</a:t>
             </a:r>
             <a:endParaRPr lang="en-US" sz="1100" dirty="0"/>
           </a:p>
@@ -4417,391 +4773,7 @@
       </p:sp>
       <p:sp>
         <p:nvSpPr>
-          <p:cNvPr id="9" name="Shape 7"/>
-          <p:cNvSpPr/>
-          <p:nvPr/>
-        </p:nvSpPr>
-        <p:spPr>
-          <a:xfrm>
-            <a:off x="640080" y="2926080"/>
-            <a:ext cx="10881360" cy="1097280"/>
-          </a:xfrm>
-          <a:prstGeom prst="roundRect">
-            <a:avLst>
-              <a:gd name="adj" fmla="val 5000"/>
-            </a:avLst>
-          </a:prstGeom>
-          <a:solidFill>
-            <a:srgbClr val="FFFFFF"/>
-          </a:solidFill>
-          <a:ln w="12700">
-            <a:solidFill>
-              <a:srgbClr val="E4DCCB"/>
-            </a:solidFill>
-            <a:prstDash val="solid"/>
-          </a:ln>
-        </p:spPr>
-      </p:sp>
-      <p:sp>
-        <p:nvSpPr>
-          <p:cNvPr id="10" name="Shape 8"/>
-          <p:cNvSpPr/>
-          <p:nvPr/>
-        </p:nvSpPr>
-        <p:spPr>
-          <a:xfrm>
-            <a:off x="640080" y="2926080"/>
-            <a:ext cx="54864" cy="1097280"/>
-          </a:xfrm>
-          <a:prstGeom prst="rect">
-            <a:avLst/>
-          </a:prstGeom>
-          <a:solidFill>
-            <a:srgbClr val="1D6FE0"/>
-          </a:solidFill>
-          <a:ln/>
-        </p:spPr>
-      </p:sp>
-      <p:sp>
-        <p:nvSpPr>
-          <p:cNvPr id="11" name="Text 9"/>
-          <p:cNvSpPr/>
-          <p:nvPr/>
-        </p:nvSpPr>
-        <p:spPr>
-          <a:xfrm>
-            <a:off x="914400" y="3035808"/>
-            <a:ext cx="10332720" cy="365760"/>
-          </a:xfrm>
-          <a:prstGeom prst="rect">
-            <a:avLst/>
-          </a:prstGeom>
-          <a:noFill/>
-          <a:ln/>
-        </p:spPr>
-        <p:txBody>
-          <a:bodyPr wrap="square" rtlCol="0" anchor="ctr"/>
-          <a:lstStyle/>
-          <a:p>
-            <a:pPr indent="0" marL="0">
-              <a:buNone/>
-            </a:pPr>
-            <a:r>
-              <a:rPr lang="en-US" sz="1400" b="1" dirty="0">
-                <a:solidFill>
-                  <a:srgbClr val="1B1F3B"/>
-                </a:solidFill>
-                <a:latin typeface="Segoe UI" pitchFamily="34" charset="0"/>
-                <a:ea typeface="Segoe UI" pitchFamily="34" charset="-122"/>
-                <a:cs typeface="Segoe UI" pitchFamily="34" charset="-120"/>
-              </a:rPr>
-              <a:t>Renvoi des identifiants client</a:t>
-            </a:r>
-            <a:endParaRPr lang="en-US" sz="1400" dirty="0"/>
-          </a:p>
-        </p:txBody>
-      </p:sp>
-      <p:sp>
-        <p:nvSpPr>
-          <p:cNvPr id="12" name="Text 10"/>
-          <p:cNvSpPr/>
-          <p:nvPr/>
-        </p:nvSpPr>
-        <p:spPr>
-          <a:xfrm>
-            <a:off x="914400" y="3383280"/>
-            <a:ext cx="10332720" cy="594360"/>
-          </a:xfrm>
-          <a:prstGeom prst="rect">
-            <a:avLst/>
-          </a:prstGeom>
-          <a:noFill/>
-          <a:ln/>
-        </p:spPr>
-        <p:txBody>
-          <a:bodyPr wrap="square" rtlCol="0" anchor="ctr"/>
-          <a:lstStyle/>
-          <a:p>
-            <a:pPr indent="0" marL="0">
-              <a:lnSpc>
-                <a:spcPts val="1400"/>
-              </a:lnSpc>
-              <a:buNone/>
-            </a:pPr>
-            <a:r>
-              <a:rPr lang="en-US" sz="1100" dirty="0">
-                <a:solidFill>
-                  <a:srgbClr val="8A7C68"/>
-                </a:solidFill>
-                <a:latin typeface="Segoe UI" pitchFamily="34" charset="0"/>
-                <a:ea typeface="Segoe UI" pitchFamily="34" charset="-122"/>
-                <a:cs typeface="Segoe UI" pitchFamily="34" charset="-120"/>
-              </a:rPr>
-              <a:t>Boutons pour renvoyer l'accès client par email ou WhatsApp, tableau d'informations avec icônes et boutons 'Copier'.</a:t>
-            </a:r>
-            <a:endParaRPr lang="en-US" sz="1100" dirty="0"/>
-          </a:p>
-        </p:txBody>
-      </p:sp>
-      <p:sp>
-        <p:nvSpPr>
-          <p:cNvPr id="13" name="Shape 11"/>
-          <p:cNvSpPr/>
-          <p:nvPr/>
-        </p:nvSpPr>
-        <p:spPr>
-          <a:xfrm>
-            <a:off x="640080" y="4160520"/>
-            <a:ext cx="10881360" cy="1097280"/>
-          </a:xfrm>
-          <a:prstGeom prst="roundRect">
-            <a:avLst>
-              <a:gd name="adj" fmla="val 5000"/>
-            </a:avLst>
-          </a:prstGeom>
-          <a:solidFill>
-            <a:srgbClr val="FFFFFF"/>
-          </a:solidFill>
-          <a:ln w="12700">
-            <a:solidFill>
-              <a:srgbClr val="E4DCCB"/>
-            </a:solidFill>
-            <a:prstDash val="solid"/>
-          </a:ln>
-        </p:spPr>
-      </p:sp>
-      <p:sp>
-        <p:nvSpPr>
-          <p:cNvPr id="14" name="Shape 12"/>
-          <p:cNvSpPr/>
-          <p:nvPr/>
-        </p:nvSpPr>
-        <p:spPr>
-          <a:xfrm>
-            <a:off x="640080" y="4160520"/>
-            <a:ext cx="54864" cy="1097280"/>
-          </a:xfrm>
-          <a:prstGeom prst="rect">
-            <a:avLst/>
-          </a:prstGeom>
-          <a:solidFill>
-            <a:srgbClr val="1D6FE0"/>
-          </a:solidFill>
-          <a:ln/>
-        </p:spPr>
-      </p:sp>
-      <p:sp>
-        <p:nvSpPr>
-          <p:cNvPr id="15" name="Text 13"/>
-          <p:cNvSpPr/>
-          <p:nvPr/>
-        </p:nvSpPr>
-        <p:spPr>
-          <a:xfrm>
-            <a:off x="914400" y="4270248"/>
-            <a:ext cx="10332720" cy="365760"/>
-          </a:xfrm>
-          <a:prstGeom prst="rect">
-            <a:avLst/>
-          </a:prstGeom>
-          <a:noFill/>
-          <a:ln/>
-        </p:spPr>
-        <p:txBody>
-          <a:bodyPr wrap="square" rtlCol="0" anchor="ctr"/>
-          <a:lstStyle/>
-          <a:p>
-            <a:pPr indent="0" marL="0">
-              <a:buNone/>
-            </a:pPr>
-            <a:r>
-              <a:rPr lang="en-US" sz="1400" b="1" dirty="0">
-                <a:solidFill>
-                  <a:srgbClr val="1B1F3B"/>
-                </a:solidFill>
-                <a:latin typeface="Segoe UI" pitchFamily="34" charset="0"/>
-                <a:ea typeface="Segoe UI" pitchFamily="34" charset="-122"/>
-                <a:cs typeface="Segoe UI" pitchFamily="34" charset="-120"/>
-              </a:rPr>
-              <a:t>Fiche détail centrée et redessinée</a:t>
-            </a:r>
-            <a:endParaRPr lang="en-US" sz="1400" dirty="0"/>
-          </a:p>
-        </p:txBody>
-      </p:sp>
-      <p:sp>
-        <p:nvSpPr>
-          <p:cNvPr id="16" name="Text 14"/>
-          <p:cNvSpPr/>
-          <p:nvPr/>
-        </p:nvSpPr>
-        <p:spPr>
-          <a:xfrm>
-            <a:off x="914400" y="4617720"/>
-            <a:ext cx="10332720" cy="594360"/>
-          </a:xfrm>
-          <a:prstGeom prst="rect">
-            <a:avLst/>
-          </a:prstGeom>
-          <a:noFill/>
-          <a:ln/>
-        </p:spPr>
-        <p:txBody>
-          <a:bodyPr wrap="square" rtlCol="0" anchor="ctr"/>
-          <a:lstStyle/>
-          <a:p>
-            <a:pPr indent="0" marL="0">
-              <a:lnSpc>
-                <a:spcPts val="1400"/>
-              </a:lnSpc>
-              <a:buNone/>
-            </a:pPr>
-            <a:r>
-              <a:rPr lang="en-US" sz="1100" dirty="0">
-                <a:solidFill>
-                  <a:srgbClr val="8A7C68"/>
-                </a:solidFill>
-                <a:latin typeface="Segoe UI" pitchFamily="34" charset="0"/>
-                <a:ea typeface="Segoe UI" pitchFamily="34" charset="-122"/>
-                <a:cs typeface="Segoe UI" pitchFamily="34" charset="-120"/>
-              </a:rPr>
-              <a:t>La fiche de détail d'une notification est centrée sur la page, avec un tableau d'informations clarifié.</a:t>
-            </a:r>
-            <a:endParaRPr lang="en-US" sz="1100" dirty="0"/>
-          </a:p>
-        </p:txBody>
-      </p:sp>
-      <p:sp>
-        <p:nvSpPr>
-          <p:cNvPr id="17" name="Shape 15"/>
-          <p:cNvSpPr/>
-          <p:nvPr/>
-        </p:nvSpPr>
-        <p:spPr>
-          <a:xfrm>
-            <a:off x="640080" y="5394960"/>
-            <a:ext cx="10881360" cy="1097280"/>
-          </a:xfrm>
-          <a:prstGeom prst="roundRect">
-            <a:avLst>
-              <a:gd name="adj" fmla="val 5000"/>
-            </a:avLst>
-          </a:prstGeom>
-          <a:solidFill>
-            <a:srgbClr val="FFFFFF"/>
-          </a:solidFill>
-          <a:ln w="12700">
-            <a:solidFill>
-              <a:srgbClr val="E4DCCB"/>
-            </a:solidFill>
-            <a:prstDash val="solid"/>
-          </a:ln>
-        </p:spPr>
-      </p:sp>
-      <p:sp>
-        <p:nvSpPr>
-          <p:cNvPr id="18" name="Shape 16"/>
-          <p:cNvSpPr/>
-          <p:nvPr/>
-        </p:nvSpPr>
-        <p:spPr>
-          <a:xfrm>
-            <a:off x="640080" y="5394960"/>
-            <a:ext cx="54864" cy="1097280"/>
-          </a:xfrm>
-          <a:prstGeom prst="rect">
-            <a:avLst/>
-          </a:prstGeom>
-          <a:solidFill>
-            <a:srgbClr val="1D6FE0"/>
-          </a:solidFill>
-          <a:ln/>
-        </p:spPr>
-      </p:sp>
-      <p:sp>
-        <p:nvSpPr>
-          <p:cNvPr id="19" name="Text 17"/>
-          <p:cNvSpPr/>
-          <p:nvPr/>
-        </p:nvSpPr>
-        <p:spPr>
-          <a:xfrm>
-            <a:off x="914400" y="5504688"/>
-            <a:ext cx="10332720" cy="365760"/>
-          </a:xfrm>
-          <a:prstGeom prst="rect">
-            <a:avLst/>
-          </a:prstGeom>
-          <a:noFill/>
-          <a:ln/>
-        </p:spPr>
-        <p:txBody>
-          <a:bodyPr wrap="square" rtlCol="0" anchor="ctr"/>
-          <a:lstStyle/>
-          <a:p>
-            <a:pPr indent="0" marL="0">
-              <a:buNone/>
-            </a:pPr>
-            <a:r>
-              <a:rPr lang="en-US" sz="1400" b="1" dirty="0">
-                <a:solidFill>
-                  <a:srgbClr val="1B1F3B"/>
-                </a:solidFill>
-                <a:latin typeface="Segoe UI" pitchFamily="34" charset="0"/>
-                <a:ea typeface="Segoe UI" pitchFamily="34" charset="-122"/>
-                <a:cs typeface="Segoe UI" pitchFamily="34" charset="-120"/>
-              </a:rPr>
-              <a:t>Correction de la route d'ouverture</a:t>
-            </a:r>
-            <a:endParaRPr lang="en-US" sz="1400" dirty="0"/>
-          </a:p>
-        </p:txBody>
-      </p:sp>
-      <p:sp>
-        <p:nvSpPr>
-          <p:cNvPr id="20" name="Text 18"/>
-          <p:cNvSpPr/>
-          <p:nvPr/>
-        </p:nvSpPr>
-        <p:spPr>
-          <a:xfrm>
-            <a:off x="914400" y="5852160"/>
-            <a:ext cx="10332720" cy="594360"/>
-          </a:xfrm>
-          <a:prstGeom prst="rect">
-            <a:avLst/>
-          </a:prstGeom>
-          <a:noFill/>
-          <a:ln/>
-        </p:spPr>
-        <p:txBody>
-          <a:bodyPr wrap="square" rtlCol="0" anchor="ctr"/>
-          <a:lstStyle/>
-          <a:p>
-            <a:pPr indent="0" marL="0">
-              <a:lnSpc>
-                <a:spcPts val="1400"/>
-              </a:lnSpc>
-              <a:buNone/>
-            </a:pPr>
-            <a:r>
-              <a:rPr lang="en-US" sz="1100" dirty="0">
-                <a:solidFill>
-                  <a:srgbClr val="8A7C68"/>
-                </a:solidFill>
-                <a:latin typeface="Segoe UI" pitchFamily="34" charset="0"/>
-                <a:ea typeface="Segoe UI" pitchFamily="34" charset="-122"/>
-                <a:cs typeface="Segoe UI" pitchFamily="34" charset="-120"/>
-              </a:rPr>
-              <a:t>Cliquer sur une notification depuis le menu déroulant ouvrait le devis lié au lieu de sa fiche de détail — corrigé, avec icône par type, heure relative et point 'non lu'.</a:t>
-            </a:r>
-            <a:endParaRPr lang="en-US" sz="1100" dirty="0"/>
-          </a:p>
-        </p:txBody>
-      </p:sp>
-      <p:sp>
-        <p:nvSpPr>
-          <p:cNvPr id="21" name="Text 19"/>
+          <p:cNvPr id="9" name="Text 7"/>
           <p:cNvSpPr/>
           <p:nvPr/>
         </p:nvSpPr>
@@ -4840,7 +4812,7 @@
       </p:sp>
       <p:sp>
         <p:nvSpPr>
-          <p:cNvPr id="22" name="Text 20"/>
+          <p:cNvPr id="10" name="Text 8"/>
           <p:cNvSpPr/>
           <p:nvPr/>
         </p:nvSpPr>
@@ -5003,7 +4975,7 @@
                 <a:ea typeface="Georgia" pitchFamily="34" charset="-122"/>
                 <a:cs typeface="Georgia" pitchFamily="34" charset="-120"/>
               </a:rPr>
-              <a:t>Signature &amp; portails</a:t>
+              <a:t>Notifications</a:t>
             </a:r>
             <a:endParaRPr lang="en-US" sz="2400" dirty="0"/>
           </a:p>
@@ -5089,7 +5061,7 @@
                 <a:ea typeface="Segoe UI" pitchFamily="34" charset="-122"/>
                 <a:cs typeface="Segoe UI" pitchFamily="34" charset="-120"/>
               </a:rPr>
-              <a:t>Espace client particulier</a:t>
+              <a:t>Menu déroulant sur la cloche</a:t>
             </a:r>
             <a:endParaRPr lang="en-US" sz="1400" dirty="0"/>
           </a:p>
@@ -5131,7 +5103,7 @@
                 <a:ea typeface="Segoe UI" pitchFamily="34" charset="-122"/>
                 <a:cs typeface="Segoe UI" pitchFamily="34" charset="-120"/>
               </a:rPr>
-              <a:t>Suivi de chantier, centre de notifications et réponses aux messages de l'entreprise, avec fil de discussion.</a:t>
+              <a:t>Affiche les 5 dernières notifications sans quitter la page en cours, avec un lien vers la liste complète.</a:t>
             </a:r>
             <a:endParaRPr lang="en-US" sz="1100" dirty="0"/>
           </a:p>
@@ -5217,7 +5189,7 @@
                 <a:ea typeface="Segoe UI" pitchFamily="34" charset="-122"/>
                 <a:cs typeface="Segoe UI" pitchFamily="34" charset="-120"/>
               </a:rPr>
-              <a:t>Espace ouvrier complet</a:t>
+              <a:t>Renvoi des identifiants client</a:t>
             </a:r>
             <a:endParaRPr lang="en-US" sz="1400" dirty="0"/>
           </a:p>
@@ -5259,7 +5231,7 @@
                 <a:ea typeface="Segoe UI" pitchFamily="34" charset="-122"/>
                 <a:cs typeface="Segoe UI" pitchFamily="34" charset="-120"/>
               </a:rPr>
-              <a:t>Accueil (chantiers actifs, tâches du jour), archives, notifications, réclamations, signalement de retard et alerte urgente avec choix du type d'incident.</a:t>
+              <a:t>Boutons pour renvoyer l'accès client par email ou WhatsApp, tableau d'informations avec icônes et boutons 'Copier'.</a:t>
             </a:r>
             <a:endParaRPr lang="en-US" sz="1100" dirty="0"/>
           </a:p>
@@ -5267,7 +5239,263 @@
       </p:sp>
       <p:sp>
         <p:nvSpPr>
-          <p:cNvPr id="13" name="Text 11"/>
+          <p:cNvPr id="13" name="Shape 11"/>
+          <p:cNvSpPr/>
+          <p:nvPr/>
+        </p:nvSpPr>
+        <p:spPr>
+          <a:xfrm>
+            <a:off x="640080" y="4160520"/>
+            <a:ext cx="10881360" cy="1097280"/>
+          </a:xfrm>
+          <a:prstGeom prst="roundRect">
+            <a:avLst>
+              <a:gd name="adj" fmla="val 5000"/>
+            </a:avLst>
+          </a:prstGeom>
+          <a:solidFill>
+            <a:srgbClr val="FFFFFF"/>
+          </a:solidFill>
+          <a:ln w="12700">
+            <a:solidFill>
+              <a:srgbClr val="E4DCCB"/>
+            </a:solidFill>
+            <a:prstDash val="solid"/>
+          </a:ln>
+        </p:spPr>
+      </p:sp>
+      <p:sp>
+        <p:nvSpPr>
+          <p:cNvPr id="14" name="Shape 12"/>
+          <p:cNvSpPr/>
+          <p:nvPr/>
+        </p:nvSpPr>
+        <p:spPr>
+          <a:xfrm>
+            <a:off x="640080" y="4160520"/>
+            <a:ext cx="54864" cy="1097280"/>
+          </a:xfrm>
+          <a:prstGeom prst="rect">
+            <a:avLst/>
+          </a:prstGeom>
+          <a:solidFill>
+            <a:srgbClr val="1D6FE0"/>
+          </a:solidFill>
+          <a:ln/>
+        </p:spPr>
+      </p:sp>
+      <p:sp>
+        <p:nvSpPr>
+          <p:cNvPr id="15" name="Text 13"/>
+          <p:cNvSpPr/>
+          <p:nvPr/>
+        </p:nvSpPr>
+        <p:spPr>
+          <a:xfrm>
+            <a:off x="914400" y="4270248"/>
+            <a:ext cx="10332720" cy="365760"/>
+          </a:xfrm>
+          <a:prstGeom prst="rect">
+            <a:avLst/>
+          </a:prstGeom>
+          <a:noFill/>
+          <a:ln/>
+        </p:spPr>
+        <p:txBody>
+          <a:bodyPr wrap="square" rtlCol="0" anchor="ctr"/>
+          <a:lstStyle/>
+          <a:p>
+            <a:pPr indent="0" marL="0">
+              <a:buNone/>
+            </a:pPr>
+            <a:r>
+              <a:rPr lang="en-US" sz="1400" b="1" dirty="0">
+                <a:solidFill>
+                  <a:srgbClr val="1B1F3B"/>
+                </a:solidFill>
+                <a:latin typeface="Segoe UI" pitchFamily="34" charset="0"/>
+                <a:ea typeface="Segoe UI" pitchFamily="34" charset="-122"/>
+                <a:cs typeface="Segoe UI" pitchFamily="34" charset="-120"/>
+              </a:rPr>
+              <a:t>Fiche détail centrée et redessinée</a:t>
+            </a:r>
+            <a:endParaRPr lang="en-US" sz="1400" dirty="0"/>
+          </a:p>
+        </p:txBody>
+      </p:sp>
+      <p:sp>
+        <p:nvSpPr>
+          <p:cNvPr id="16" name="Text 14"/>
+          <p:cNvSpPr/>
+          <p:nvPr/>
+        </p:nvSpPr>
+        <p:spPr>
+          <a:xfrm>
+            <a:off x="914400" y="4617720"/>
+            <a:ext cx="10332720" cy="594360"/>
+          </a:xfrm>
+          <a:prstGeom prst="rect">
+            <a:avLst/>
+          </a:prstGeom>
+          <a:noFill/>
+          <a:ln/>
+        </p:spPr>
+        <p:txBody>
+          <a:bodyPr wrap="square" rtlCol="0" anchor="ctr"/>
+          <a:lstStyle/>
+          <a:p>
+            <a:pPr indent="0" marL="0">
+              <a:lnSpc>
+                <a:spcPts val="1400"/>
+              </a:lnSpc>
+              <a:buNone/>
+            </a:pPr>
+            <a:r>
+              <a:rPr lang="en-US" sz="1100" dirty="0">
+                <a:solidFill>
+                  <a:srgbClr val="8A7C68"/>
+                </a:solidFill>
+                <a:latin typeface="Segoe UI" pitchFamily="34" charset="0"/>
+                <a:ea typeface="Segoe UI" pitchFamily="34" charset="-122"/>
+                <a:cs typeface="Segoe UI" pitchFamily="34" charset="-120"/>
+              </a:rPr>
+              <a:t>La fiche de détail d'une notification est centrée sur la page, avec un tableau d'informations clarifié.</a:t>
+            </a:r>
+            <a:endParaRPr lang="en-US" sz="1100" dirty="0"/>
+          </a:p>
+        </p:txBody>
+      </p:sp>
+      <p:sp>
+        <p:nvSpPr>
+          <p:cNvPr id="17" name="Shape 15"/>
+          <p:cNvSpPr/>
+          <p:nvPr/>
+        </p:nvSpPr>
+        <p:spPr>
+          <a:xfrm>
+            <a:off x="640080" y="5394960"/>
+            <a:ext cx="10881360" cy="1097280"/>
+          </a:xfrm>
+          <a:prstGeom prst="roundRect">
+            <a:avLst>
+              <a:gd name="adj" fmla="val 5000"/>
+            </a:avLst>
+          </a:prstGeom>
+          <a:solidFill>
+            <a:srgbClr val="FFFFFF"/>
+          </a:solidFill>
+          <a:ln w="12700">
+            <a:solidFill>
+              <a:srgbClr val="E4DCCB"/>
+            </a:solidFill>
+            <a:prstDash val="solid"/>
+          </a:ln>
+        </p:spPr>
+      </p:sp>
+      <p:sp>
+        <p:nvSpPr>
+          <p:cNvPr id="18" name="Shape 16"/>
+          <p:cNvSpPr/>
+          <p:nvPr/>
+        </p:nvSpPr>
+        <p:spPr>
+          <a:xfrm>
+            <a:off x="640080" y="5394960"/>
+            <a:ext cx="54864" cy="1097280"/>
+          </a:xfrm>
+          <a:prstGeom prst="rect">
+            <a:avLst/>
+          </a:prstGeom>
+          <a:solidFill>
+            <a:srgbClr val="1D6FE0"/>
+          </a:solidFill>
+          <a:ln/>
+        </p:spPr>
+      </p:sp>
+      <p:sp>
+        <p:nvSpPr>
+          <p:cNvPr id="19" name="Text 17"/>
+          <p:cNvSpPr/>
+          <p:nvPr/>
+        </p:nvSpPr>
+        <p:spPr>
+          <a:xfrm>
+            <a:off x="914400" y="5504688"/>
+            <a:ext cx="10332720" cy="365760"/>
+          </a:xfrm>
+          <a:prstGeom prst="rect">
+            <a:avLst/>
+          </a:prstGeom>
+          <a:noFill/>
+          <a:ln/>
+        </p:spPr>
+        <p:txBody>
+          <a:bodyPr wrap="square" rtlCol="0" anchor="ctr"/>
+          <a:lstStyle/>
+          <a:p>
+            <a:pPr indent="0" marL="0">
+              <a:buNone/>
+            </a:pPr>
+            <a:r>
+              <a:rPr lang="en-US" sz="1400" b="1" dirty="0">
+                <a:solidFill>
+                  <a:srgbClr val="1B1F3B"/>
+                </a:solidFill>
+                <a:latin typeface="Segoe UI" pitchFamily="34" charset="0"/>
+                <a:ea typeface="Segoe UI" pitchFamily="34" charset="-122"/>
+                <a:cs typeface="Segoe UI" pitchFamily="34" charset="-120"/>
+              </a:rPr>
+              <a:t>Correction de la route d'ouverture</a:t>
+            </a:r>
+            <a:endParaRPr lang="en-US" sz="1400" dirty="0"/>
+          </a:p>
+        </p:txBody>
+      </p:sp>
+      <p:sp>
+        <p:nvSpPr>
+          <p:cNvPr id="20" name="Text 18"/>
+          <p:cNvSpPr/>
+          <p:nvPr/>
+        </p:nvSpPr>
+        <p:spPr>
+          <a:xfrm>
+            <a:off x="914400" y="5852160"/>
+            <a:ext cx="10332720" cy="594360"/>
+          </a:xfrm>
+          <a:prstGeom prst="rect">
+            <a:avLst/>
+          </a:prstGeom>
+          <a:noFill/>
+          <a:ln/>
+        </p:spPr>
+        <p:txBody>
+          <a:bodyPr wrap="square" rtlCol="0" anchor="ctr"/>
+          <a:lstStyle/>
+          <a:p>
+            <a:pPr indent="0" marL="0">
+              <a:lnSpc>
+                <a:spcPts val="1400"/>
+              </a:lnSpc>
+              <a:buNone/>
+            </a:pPr>
+            <a:r>
+              <a:rPr lang="en-US" sz="1100" dirty="0">
+                <a:solidFill>
+                  <a:srgbClr val="8A7C68"/>
+                </a:solidFill>
+                <a:latin typeface="Segoe UI" pitchFamily="34" charset="0"/>
+                <a:ea typeface="Segoe UI" pitchFamily="34" charset="-122"/>
+                <a:cs typeface="Segoe UI" pitchFamily="34" charset="-120"/>
+              </a:rPr>
+              <a:t>Cliquer sur une notification depuis le menu déroulant ouvrait le devis lié au lieu de sa fiche de détail — corrigé, avec icône par type, heure relative et point 'non lu'.</a:t>
+            </a:r>
+            <a:endParaRPr lang="en-US" sz="1100" dirty="0"/>
+          </a:p>
+        </p:txBody>
+      </p:sp>
+      <p:sp>
+        <p:nvSpPr>
+          <p:cNvPr id="21" name="Text 19"/>
           <p:cNvSpPr/>
           <p:nvPr/>
         </p:nvSpPr>
@@ -5306,7 +5534,7 @@
       </p:sp>
       <p:sp>
         <p:nvSpPr>
-          <p:cNvPr id="14" name="Text 12"/>
+          <p:cNvPr id="22" name="Text 20"/>
           <p:cNvSpPr/>
           <p:nvPr/>
         </p:nvSpPr>
@@ -5469,7 +5697,7 @@
                 <a:ea typeface="Georgia" pitchFamily="34" charset="-122"/>
                 <a:cs typeface="Georgia" pitchFamily="34" charset="-120"/>
               </a:rPr>
-              <a:t>Accueil &amp; stabilité</a:t>
+              <a:t>Signature &amp; portails</a:t>
             </a:r>
             <a:endParaRPr lang="en-US" sz="2400" dirty="0"/>
           </a:p>
@@ -5555,7 +5783,7 @@
                 <a:ea typeface="Segoe UI" pitchFamily="34" charset="-122"/>
                 <a:cs typeface="Segoe UI" pitchFamily="34" charset="-120"/>
               </a:rPr>
-              <a:t>Refonte de la page d'accueil</a:t>
+              <a:t>Espace client particulier</a:t>
             </a:r>
             <a:endParaRPr lang="en-US" sz="1400" dirty="0"/>
           </a:p>
@@ -5597,7 +5825,7 @@
                 <a:ea typeface="Segoe UI" pitchFamily="34" charset="-122"/>
                 <a:cs typeface="Segoe UI" pitchFamily="34" charset="-120"/>
               </a:rPr>
-              <a:t>Message de bienvenue personnalisé ('Bonjour [Nom]'), ajout rapide (tâche/RDV/dépense/note), alertes urgentes, reprise d'un devis brouillon en un clic.</a:t>
+              <a:t>Suivi de chantier, centre de notifications et réponses aux messages de l'entreprise, avec fil de discussion.</a:t>
             </a:r>
             <a:endParaRPr lang="en-US" sz="1100" dirty="0"/>
           </a:p>
@@ -5683,7 +5911,7 @@
                 <a:ea typeface="Segoe UI" pitchFamily="34" charset="-122"/>
                 <a:cs typeface="Segoe UI" pitchFamily="34" charset="-120"/>
               </a:rPr>
-              <a:t>Compatibilité Safari / iOS</a:t>
+              <a:t>Espace ouvrier complet</a:t>
             </a:r>
             <a:endParaRPr lang="en-US" sz="1400" dirty="0"/>
           </a:p>
@@ -5725,7 +5953,7 @@
                 <a:ea typeface="Segoe UI" pitchFamily="34" charset="-122"/>
                 <a:cs typeface="Segoe UI" pitchFamily="34" charset="-120"/>
               </a:rPr>
-              <a:t>La barre d'adresse de Safari mobile masquait parfois le bas de l'écran (boutons inaccessibles) — corrigé sur l'ensemble de l'application.</a:t>
+              <a:t>Accueil (chantiers actifs, tâches du jour), archives, notifications, réclamations, signalement de retard et alerte urgente avec choix du type d'incident.</a:t>
             </a:r>
             <a:endParaRPr lang="en-US" sz="1100" dirty="0"/>
           </a:p>
@@ -5733,135 +5961,7 @@
       </p:sp>
       <p:sp>
         <p:nvSpPr>
-          <p:cNvPr id="13" name="Shape 11"/>
-          <p:cNvSpPr/>
-          <p:nvPr/>
-        </p:nvSpPr>
-        <p:spPr>
-          <a:xfrm>
-            <a:off x="640080" y="4160520"/>
-            <a:ext cx="10881360" cy="1097280"/>
-          </a:xfrm>
-          <a:prstGeom prst="roundRect">
-            <a:avLst>
-              <a:gd name="adj" fmla="val 5000"/>
-            </a:avLst>
-          </a:prstGeom>
-          <a:solidFill>
-            <a:srgbClr val="FFFFFF"/>
-          </a:solidFill>
-          <a:ln w="12700">
-            <a:solidFill>
-              <a:srgbClr val="E4DCCB"/>
-            </a:solidFill>
-            <a:prstDash val="solid"/>
-          </a:ln>
-        </p:spPr>
-      </p:sp>
-      <p:sp>
-        <p:nvSpPr>
-          <p:cNvPr id="14" name="Shape 12"/>
-          <p:cNvSpPr/>
-          <p:nvPr/>
-        </p:nvSpPr>
-        <p:spPr>
-          <a:xfrm>
-            <a:off x="640080" y="4160520"/>
-            <a:ext cx="54864" cy="1097280"/>
-          </a:xfrm>
-          <a:prstGeom prst="rect">
-            <a:avLst/>
-          </a:prstGeom>
-          <a:solidFill>
-            <a:srgbClr val="1D6FE0"/>
-          </a:solidFill>
-          <a:ln/>
-        </p:spPr>
-      </p:sp>
-      <p:sp>
-        <p:nvSpPr>
-          <p:cNvPr id="15" name="Text 13"/>
-          <p:cNvSpPr/>
-          <p:nvPr/>
-        </p:nvSpPr>
-        <p:spPr>
-          <a:xfrm>
-            <a:off x="914400" y="4270248"/>
-            <a:ext cx="10332720" cy="365760"/>
-          </a:xfrm>
-          <a:prstGeom prst="rect">
-            <a:avLst/>
-          </a:prstGeom>
-          <a:noFill/>
-          <a:ln/>
-        </p:spPr>
-        <p:txBody>
-          <a:bodyPr wrap="square" rtlCol="0" anchor="ctr"/>
-          <a:lstStyle/>
-          <a:p>
-            <a:pPr indent="0" marL="0">
-              <a:buNone/>
-            </a:pPr>
-            <a:r>
-              <a:rPr lang="en-US" sz="1400" b="1" dirty="0">
-                <a:solidFill>
-                  <a:srgbClr val="1B1F3B"/>
-                </a:solidFill>
-                <a:latin typeface="Segoe UI" pitchFamily="34" charset="0"/>
-                <a:ea typeface="Segoe UI" pitchFamily="34" charset="-122"/>
-                <a:cs typeface="Segoe UI" pitchFamily="34" charset="-120"/>
-              </a:rPr>
-              <a:t>Cohérence visuelle</a:t>
-            </a:r>
-            <a:endParaRPr lang="en-US" sz="1400" dirty="0"/>
-          </a:p>
-        </p:txBody>
-      </p:sp>
-      <p:sp>
-        <p:nvSpPr>
-          <p:cNvPr id="16" name="Text 14"/>
-          <p:cNvSpPr/>
-          <p:nvPr/>
-        </p:nvSpPr>
-        <p:spPr>
-          <a:xfrm>
-            <a:off x="914400" y="4617720"/>
-            <a:ext cx="10332720" cy="594360"/>
-          </a:xfrm>
-          <a:prstGeom prst="rect">
-            <a:avLst/>
-          </a:prstGeom>
-          <a:noFill/>
-          <a:ln/>
-        </p:spPr>
-        <p:txBody>
-          <a:bodyPr wrap="square" rtlCol="0" anchor="ctr"/>
-          <a:lstStyle/>
-          <a:p>
-            <a:pPr indent="0" marL="0">
-              <a:lnSpc>
-                <a:spcPts val="1400"/>
-              </a:lnSpc>
-              <a:buNone/>
-            </a:pPr>
-            <a:r>
-              <a:rPr lang="en-US" sz="1100" dirty="0">
-                <a:solidFill>
-                  <a:srgbClr val="8A7C68"/>
-                </a:solidFill>
-                <a:latin typeface="Segoe UI" pitchFamily="34" charset="0"/>
-                <a:ea typeface="Segoe UI" pitchFamily="34" charset="-122"/>
-                <a:cs typeface="Segoe UI" pitchFamily="34" charset="-120"/>
-              </a:rPr>
-              <a:t>Logo recentré sur toutes les pages, sélecteur de langue simplifié (5 langues, sans drapeaux), adresse d'entreprise simplifiée en une ligne.</a:t>
-            </a:r>
-            <a:endParaRPr lang="en-US" sz="1100" dirty="0"/>
-          </a:p>
-        </p:txBody>
-      </p:sp>
-      <p:sp>
-        <p:nvSpPr>
-          <p:cNvPr id="17" name="Text 15"/>
+          <p:cNvPr id="13" name="Text 11"/>
           <p:cNvSpPr/>
           <p:nvPr/>
         </p:nvSpPr>
@@ -5900,7 +6000,7 @@
       </p:sp>
       <p:sp>
         <p:nvSpPr>
-          <p:cNvPr id="18" name="Text 16"/>
+          <p:cNvPr id="14" name="Text 12"/>
           <p:cNvSpPr/>
           <p:nvPr/>
         </p:nvSpPr>
@@ -6063,7 +6163,7 @@
                 <a:ea typeface="Georgia" pitchFamily="34" charset="-122"/>
                 <a:cs typeface="Georgia" pitchFamily="34" charset="-120"/>
               </a:rPr>
-              <a:t>Rapports d'intervention</a:t>
+              <a:t>Accueil &amp; stabilité</a:t>
             </a:r>
             <a:endParaRPr lang="en-US" sz="2400" dirty="0"/>
           </a:p>
@@ -6149,7 +6249,7 @@
                 <a:ea typeface="Segoe UI" pitchFamily="34" charset="-122"/>
                 <a:cs typeface="Segoe UI" pitchFamily="34" charset="-120"/>
               </a:rPr>
-              <a:t>Nouveau type "Intervention" dans l'ajout rapide</a:t>
+              <a:t>Refonte de la page d'accueil</a:t>
             </a:r>
             <a:endParaRPr lang="en-US" sz="1400" dirty="0"/>
           </a:p>
@@ -6191,7 +6291,7 @@
                 <a:ea typeface="Segoe UI" pitchFamily="34" charset="-122"/>
                 <a:cs typeface="Segoe UI" pitchFamily="34" charset="-120"/>
               </a:rPr>
-              <a:t>Depuis la page d'accueil, un cinquième choix 'Intervention' ouvre un formulaire dédié en plein écran, en plus des types existants Tâche/RDV/Dépense/Note.</a:t>
+              <a:t>Message de bienvenue personnalisé ('Bonjour [Nom]'), ajout rapide (tâche/RDV/dépense/note), alertes urgentes, reprise d'un devis brouillon en un clic.</a:t>
             </a:r>
             <a:endParaRPr lang="en-US" sz="1100" dirty="0"/>
           </a:p>
@@ -6277,7 +6377,7 @@
                 <a:ea typeface="Segoe UI" pitchFamily="34" charset="-122"/>
                 <a:cs typeface="Segoe UI" pitchFamily="34" charset="-120"/>
               </a:rPr>
-              <a:t>Formulaire de rapport d'intervention</a:t>
+              <a:t>Compatibilité Safari / iOS</a:t>
             </a:r>
             <a:endParaRPr lang="en-US" sz="1400" dirty="0"/>
           </a:p>
@@ -6319,7 +6419,7 @@
                 <a:ea typeface="Segoe UI" pitchFamily="34" charset="-122"/>
                 <a:cs typeface="Segoe UI" pitchFamily="34" charset="-120"/>
               </a:rPr>
-              <a:t>En-tête avec le logo et les coordonnées de l'entreprise (repris automatiquement du profil), puis Client, Site, Date, Entreprise, Équipement, Constat, Analyse, Préconisations et Signature, sur le modèle d'un rapport d'intervention technique classique.</a:t>
+              <a:t>La barre d'adresse de Safari mobile masquait parfois le bas de l'écran (boutons inaccessibles) — corrigé sur l'ensemble de l'application.</a:t>
             </a:r>
             <a:endParaRPr lang="en-US" sz="1100" dirty="0"/>
           </a:p>
@@ -6405,7 +6505,7 @@
                 <a:ea typeface="Segoe UI" pitchFamily="34" charset="-122"/>
                 <a:cs typeface="Segoe UI" pitchFamily="34" charset="-120"/>
               </a:rPr>
-              <a:t>Aperçu avant génération</a:t>
+              <a:t>Cohérence visuelle</a:t>
             </a:r>
             <a:endParaRPr lang="en-US" sz="1400" dirty="0"/>
           </a:p>
@@ -6447,7 +6547,7 @@
                 <a:ea typeface="Segoe UI" pitchFamily="34" charset="-122"/>
                 <a:cs typeface="Segoe UI" pitchFamily="34" charset="-120"/>
               </a:rPr>
-              <a:t>Avant de créer définitivement le rapport, un aperçu fidèle au document final (en-tête, sections, signature) permet de vérifier le contenu et de revenir le modifier.</a:t>
+              <a:t>Logo recentré sur toutes les pages, sélecteur de langue simplifié (5 langues, sans drapeaux), adresse d'entreprise simplifiée en une ligne.</a:t>
             </a:r>
             <a:endParaRPr lang="en-US" sz="1100" dirty="0"/>
           </a:p>
@@ -6455,135 +6555,7 @@
       </p:sp>
       <p:sp>
         <p:nvSpPr>
-          <p:cNvPr id="17" name="Shape 15"/>
-          <p:cNvSpPr/>
-          <p:nvPr/>
-        </p:nvSpPr>
-        <p:spPr>
-          <a:xfrm>
-            <a:off x="640080" y="5394960"/>
-            <a:ext cx="10881360" cy="1097280"/>
-          </a:xfrm>
-          <a:prstGeom prst="roundRect">
-            <a:avLst>
-              <a:gd name="adj" fmla="val 5000"/>
-            </a:avLst>
-          </a:prstGeom>
-          <a:solidFill>
-            <a:srgbClr val="FFFFFF"/>
-          </a:solidFill>
-          <a:ln w="12700">
-            <a:solidFill>
-              <a:srgbClr val="E4DCCB"/>
-            </a:solidFill>
-            <a:prstDash val="solid"/>
-          </a:ln>
-        </p:spPr>
-      </p:sp>
-      <p:sp>
-        <p:nvSpPr>
-          <p:cNvPr id="18" name="Shape 16"/>
-          <p:cNvSpPr/>
-          <p:nvPr/>
-        </p:nvSpPr>
-        <p:spPr>
-          <a:xfrm>
-            <a:off x="640080" y="5394960"/>
-            <a:ext cx="54864" cy="1097280"/>
-          </a:xfrm>
-          <a:prstGeom prst="rect">
-            <a:avLst/>
-          </a:prstGeom>
-          <a:solidFill>
-            <a:srgbClr val="1D6FE0"/>
-          </a:solidFill>
-          <a:ln/>
-        </p:spPr>
-      </p:sp>
-      <p:sp>
-        <p:nvSpPr>
-          <p:cNvPr id="19" name="Text 17"/>
-          <p:cNvSpPr/>
-          <p:nvPr/>
-        </p:nvSpPr>
-        <p:spPr>
-          <a:xfrm>
-            <a:off x="914400" y="5504688"/>
-            <a:ext cx="10332720" cy="365760"/>
-          </a:xfrm>
-          <a:prstGeom prst="rect">
-            <a:avLst/>
-          </a:prstGeom>
-          <a:noFill/>
-          <a:ln/>
-        </p:spPr>
-        <p:txBody>
-          <a:bodyPr wrap="square" rtlCol="0" anchor="ctr"/>
-          <a:lstStyle/>
-          <a:p>
-            <a:pPr indent="0" marL="0">
-              <a:buNone/>
-            </a:pPr>
-            <a:r>
-              <a:rPr lang="en-US" sz="1400" b="1" dirty="0">
-                <a:solidFill>
-                  <a:srgbClr val="1B1F3B"/>
-                </a:solidFill>
-                <a:latin typeface="Segoe UI" pitchFamily="34" charset="0"/>
-                <a:ea typeface="Segoe UI" pitchFamily="34" charset="-122"/>
-                <a:cs typeface="Segoe UI" pitchFamily="34" charset="-120"/>
-              </a:rPr>
-              <a:t>Suivi et devenir de chaque intervention</a:t>
-            </a:r>
-            <a:endParaRPr lang="en-US" sz="1400" dirty="0"/>
-          </a:p>
-        </p:txBody>
-      </p:sp>
-      <p:sp>
-        <p:nvSpPr>
-          <p:cNvPr id="20" name="Text 18"/>
-          <p:cNvSpPr/>
-          <p:nvPr/>
-        </p:nvSpPr>
-        <p:spPr>
-          <a:xfrm>
-            <a:off x="914400" y="5852160"/>
-            <a:ext cx="10332720" cy="594360"/>
-          </a:xfrm>
-          <a:prstGeom prst="rect">
-            <a:avLst/>
-          </a:prstGeom>
-          <a:noFill/>
-          <a:ln/>
-        </p:spPr>
-        <p:txBody>
-          <a:bodyPr wrap="square" rtlCol="0" anchor="ctr"/>
-          <a:lstStyle/>
-          <a:p>
-            <a:pPr indent="0" marL="0">
-              <a:lnSpc>
-                <a:spcPts val="1400"/>
-              </a:lnSpc>
-              <a:buNone/>
-            </a:pPr>
-            <a:r>
-              <a:rPr lang="en-US" sz="1100" dirty="0">
-                <a:solidFill>
-                  <a:srgbClr val="8A7C68"/>
-                </a:solidFill>
-                <a:latin typeface="Segoe UI" pitchFamily="34" charset="0"/>
-                <a:ea typeface="Segoe UI" pitchFamily="34" charset="-122"/>
-                <a:cs typeface="Segoe UI" pitchFamily="34" charset="-120"/>
-              </a:rPr>
-              <a:t>Depuis la fiche d'une intervention : la lier à un chantier existant, la garder en attente pour un futur devis, l'archiver, ou créer directement une facture — avec un badge de statut visible dans la liste.</a:t>
-            </a:r>
-            <a:endParaRPr lang="en-US" sz="1100" dirty="0"/>
-          </a:p>
-        </p:txBody>
-      </p:sp>
-      <p:sp>
-        <p:nvSpPr>
-          <p:cNvPr id="21" name="Text 19"/>
+          <p:cNvPr id="17" name="Text 15"/>
           <p:cNvSpPr/>
           <p:nvPr/>
         </p:nvSpPr>
@@ -6622,7 +6594,7 @@
       </p:sp>
       <p:sp>
         <p:nvSpPr>
-          <p:cNvPr id="22" name="Text 20"/>
+          <p:cNvPr id="18" name="Text 16"/>
           <p:cNvSpPr/>
           <p:nvPr/>
         </p:nvSpPr>
@@ -6785,7 +6757,7 @@
                 <a:ea typeface="Georgia" pitchFamily="34" charset="-122"/>
                 <a:cs typeface="Georgia" pitchFamily="34" charset="-120"/>
               </a:rPr>
-              <a:t>Rapports d'intervention (suite)</a:t>
+              <a:t>Rapports d'intervention</a:t>
             </a:r>
             <a:endParaRPr lang="en-US" sz="2400" dirty="0"/>
           </a:p>
@@ -6871,7 +6843,7 @@
                 <a:ea typeface="Segoe UI" pitchFamily="34" charset="-122"/>
                 <a:cs typeface="Segoe UI" pitchFamily="34" charset="-120"/>
               </a:rPr>
-              <a:t>En-tête d'entreprise entièrement modifiable</a:t>
+              <a:t>Nouveau type "Intervention" dans l'ajout rapide</a:t>
             </a:r>
             <a:endParaRPr lang="en-US" sz="1400" dirty="0"/>
           </a:p>
@@ -6913,7 +6885,7 @@
                 <a:ea typeface="Segoe UI" pitchFamily="34" charset="-122"/>
                 <a:cs typeface="Segoe UI" pitchFamily="34" charset="-120"/>
               </a:rPr>
-              <a:t>Nom, adresse, code postal, ville, email, téléphone et SIRET sont pré-remplis depuis le profil mais modifiables pour chaque rapport ; le logo peut être celui du profil ou en importer un autre à la volée, sans toucher au profil principal.</a:t>
+              <a:t>Depuis la page d'accueil, un cinquième choix 'Intervention' ouvre un formulaire dédié en plein écran, en plus des types existants Tâche/RDV/Dépense/Note.</a:t>
             </a:r>
             <a:endParaRPr lang="en-US" sz="1100" dirty="0"/>
           </a:p>
@@ -6999,7 +6971,7 @@
                 <a:ea typeface="Segoe UI" pitchFamily="34" charset="-122"/>
                 <a:cs typeface="Segoe UI" pitchFamily="34" charset="-120"/>
               </a:rPr>
-              <a:t>Section Interventions sur l'accueil</a:t>
+              <a:t>Formulaire de rapport d'intervention</a:t>
             </a:r>
             <a:endParaRPr lang="en-US" sz="1400" dirty="0"/>
           </a:p>
@@ -7041,7 +7013,7 @@
                 <a:ea typeface="Segoe UI" pitchFamily="34" charset="-122"/>
                 <a:cs typeface="Segoe UI" pitchFamily="34" charset="-120"/>
               </a:rPr>
-              <a:t>Nouvelle section sur la page d'accueil, sous 'Devis en cours', listant les interventions avec leur statut (À faire / En cours / Terminée), et les actions rapides archiver/supprimer.</a:t>
+              <a:t>En-tête avec le logo et les coordonnées de l'entreprise (repris automatiquement du profil), puis Client, Site, Date, Entreprise, Équipement, Constat, Analyse, Préconisations et Signature, sur le modèle d'un rapport d'intervention technique classique.</a:t>
             </a:r>
             <a:endParaRPr lang="en-US" sz="1100" dirty="0"/>
           </a:p>
@@ -7127,7 +7099,7 @@
                 <a:ea typeface="Segoe UI" pitchFamily="34" charset="-122"/>
                 <a:cs typeface="Segoe UI" pitchFamily="34" charset="-120"/>
               </a:rPr>
-              <a:t>Passage direct dans 'À faire maintenant'</a:t>
+              <a:t>Aperçu avant génération</a:t>
             </a:r>
             <a:endParaRPr lang="en-US" sz="1400" dirty="0"/>
           </a:p>
@@ -7169,7 +7141,7 @@
                 <a:ea typeface="Segoe UI" pitchFamily="34" charset="-122"/>
                 <a:cs typeface="Segoe UI" pitchFamily="34" charset="-120"/>
               </a:rPr>
-              <a:t>Une intervention du jour peut être déplacée en un clic vers la liste 'À faire maintenant' de l'accueil, sans dupliquer la fiche si elle y est déjà.</a:t>
+              <a:t>Avant de créer définitivement le rapport, un aperçu fidèle au document final (en-tête, sections, signature) permet de vérifier le contenu et de revenir le modifier.</a:t>
             </a:r>
             <a:endParaRPr lang="en-US" sz="1100" dirty="0"/>
           </a:p>
@@ -7255,7 +7227,7 @@
                 <a:ea typeface="Segoe UI" pitchFamily="34" charset="-122"/>
                 <a:cs typeface="Segoe UI" pitchFamily="34" charset="-120"/>
               </a:rPr>
-              <a:t>Mise en page de l'en-tête revue</a:t>
+              <a:t>Suivi et devenir de chaque intervention</a:t>
             </a:r>
             <a:endParaRPr lang="en-US" sz="1400" dirty="0"/>
           </a:p>
@@ -7297,7 +7269,7 @@
                 <a:ea typeface="Segoe UI" pitchFamily="34" charset="-122"/>
                 <a:cs typeface="Segoe UI" pitchFamily="34" charset="-120"/>
               </a:rPr>
-              <a:t>'RAPPORT D'INTERVENTION', le numéro et la date de création sont désormais mis en avant en haut à droite, à côté des informations de l'entreprise, comme sur les devis et factures.</a:t>
+              <a:t>Depuis la fiche d'une intervention : la lier à un chantier existant, la garder en attente pour un futur devis, l'archiver, ou créer directement une facture — avec un badge de statut visible dans la liste.</a:t>
             </a:r>
             <a:endParaRPr lang="en-US" sz="1100" dirty="0"/>
           </a:p>
@@ -7593,7 +7565,7 @@
                 <a:ea typeface="Segoe UI" pitchFamily="34" charset="-122"/>
                 <a:cs typeface="Segoe UI" pitchFamily="34" charset="-120"/>
               </a:rPr>
-              <a:t>Signature réutilisable depuis le profil</a:t>
+              <a:t>En-tête d'entreprise entièrement modifiable</a:t>
             </a:r>
             <a:endParaRPr lang="en-US" sz="1400" dirty="0"/>
           </a:p>
@@ -7635,7 +7607,7 @@
                 <a:ea typeface="Segoe UI" pitchFamily="34" charset="-122"/>
                 <a:cs typeface="Segoe UI" pitchFamily="34" charset="-120"/>
               </a:rPr>
-              <a:t>La signature déjà enregistrée dans 'Ma Signature' (dessinée ou importée) peut être ajoutée en un clic au rapport, affichée en bas à droite du document comme une vraie signature.</a:t>
+              <a:t>Nom, adresse, code postal, ville, email, téléphone et SIRET sont pré-remplis depuis le profil mais modifiables pour chaque rapport ; le logo peut être celui du profil ou en importer un autre à la volée, sans toucher au profil principal.</a:t>
             </a:r>
             <a:endParaRPr lang="en-US" sz="1100" dirty="0"/>
           </a:p>
@@ -7643,7 +7615,391 @@
       </p:sp>
       <p:sp>
         <p:nvSpPr>
-          <p:cNvPr id="9" name="Text 7"/>
+          <p:cNvPr id="9" name="Shape 7"/>
+          <p:cNvSpPr/>
+          <p:nvPr/>
+        </p:nvSpPr>
+        <p:spPr>
+          <a:xfrm>
+            <a:off x="640080" y="2926080"/>
+            <a:ext cx="10881360" cy="1097280"/>
+          </a:xfrm>
+          <a:prstGeom prst="roundRect">
+            <a:avLst>
+              <a:gd name="adj" fmla="val 5000"/>
+            </a:avLst>
+          </a:prstGeom>
+          <a:solidFill>
+            <a:srgbClr val="FFFFFF"/>
+          </a:solidFill>
+          <a:ln w="12700">
+            <a:solidFill>
+              <a:srgbClr val="E4DCCB"/>
+            </a:solidFill>
+            <a:prstDash val="solid"/>
+          </a:ln>
+        </p:spPr>
+      </p:sp>
+      <p:sp>
+        <p:nvSpPr>
+          <p:cNvPr id="10" name="Shape 8"/>
+          <p:cNvSpPr/>
+          <p:nvPr/>
+        </p:nvSpPr>
+        <p:spPr>
+          <a:xfrm>
+            <a:off x="640080" y="2926080"/>
+            <a:ext cx="54864" cy="1097280"/>
+          </a:xfrm>
+          <a:prstGeom prst="rect">
+            <a:avLst/>
+          </a:prstGeom>
+          <a:solidFill>
+            <a:srgbClr val="1D6FE0"/>
+          </a:solidFill>
+          <a:ln/>
+        </p:spPr>
+      </p:sp>
+      <p:sp>
+        <p:nvSpPr>
+          <p:cNvPr id="11" name="Text 9"/>
+          <p:cNvSpPr/>
+          <p:nvPr/>
+        </p:nvSpPr>
+        <p:spPr>
+          <a:xfrm>
+            <a:off x="914400" y="3035808"/>
+            <a:ext cx="10332720" cy="365760"/>
+          </a:xfrm>
+          <a:prstGeom prst="rect">
+            <a:avLst/>
+          </a:prstGeom>
+          <a:noFill/>
+          <a:ln/>
+        </p:spPr>
+        <p:txBody>
+          <a:bodyPr wrap="square" rtlCol="0" anchor="ctr"/>
+          <a:lstStyle/>
+          <a:p>
+            <a:pPr indent="0" marL="0">
+              <a:buNone/>
+            </a:pPr>
+            <a:r>
+              <a:rPr lang="en-US" sz="1400" b="1" dirty="0">
+                <a:solidFill>
+                  <a:srgbClr val="1B1F3B"/>
+                </a:solidFill>
+                <a:latin typeface="Segoe UI" pitchFamily="34" charset="0"/>
+                <a:ea typeface="Segoe UI" pitchFamily="34" charset="-122"/>
+                <a:cs typeface="Segoe UI" pitchFamily="34" charset="-120"/>
+              </a:rPr>
+              <a:t>Section Interventions sur l'accueil</a:t>
+            </a:r>
+            <a:endParaRPr lang="en-US" sz="1400" dirty="0"/>
+          </a:p>
+        </p:txBody>
+      </p:sp>
+      <p:sp>
+        <p:nvSpPr>
+          <p:cNvPr id="12" name="Text 10"/>
+          <p:cNvSpPr/>
+          <p:nvPr/>
+        </p:nvSpPr>
+        <p:spPr>
+          <a:xfrm>
+            <a:off x="914400" y="3383280"/>
+            <a:ext cx="10332720" cy="594360"/>
+          </a:xfrm>
+          <a:prstGeom prst="rect">
+            <a:avLst/>
+          </a:prstGeom>
+          <a:noFill/>
+          <a:ln/>
+        </p:spPr>
+        <p:txBody>
+          <a:bodyPr wrap="square" rtlCol="0" anchor="ctr"/>
+          <a:lstStyle/>
+          <a:p>
+            <a:pPr indent="0" marL="0">
+              <a:lnSpc>
+                <a:spcPts val="1400"/>
+              </a:lnSpc>
+              <a:buNone/>
+            </a:pPr>
+            <a:r>
+              <a:rPr lang="en-US" sz="1100" dirty="0">
+                <a:solidFill>
+                  <a:srgbClr val="8A7C68"/>
+                </a:solidFill>
+                <a:latin typeface="Segoe UI" pitchFamily="34" charset="0"/>
+                <a:ea typeface="Segoe UI" pitchFamily="34" charset="-122"/>
+                <a:cs typeface="Segoe UI" pitchFamily="34" charset="-120"/>
+              </a:rPr>
+              <a:t>Nouvelle section sur la page d'accueil, sous 'Devis en cours', listant les interventions avec leur statut (À faire / En cours / Terminée), et les actions rapides archiver/supprimer.</a:t>
+            </a:r>
+            <a:endParaRPr lang="en-US" sz="1100" dirty="0"/>
+          </a:p>
+        </p:txBody>
+      </p:sp>
+      <p:sp>
+        <p:nvSpPr>
+          <p:cNvPr id="13" name="Shape 11"/>
+          <p:cNvSpPr/>
+          <p:nvPr/>
+        </p:nvSpPr>
+        <p:spPr>
+          <a:xfrm>
+            <a:off x="640080" y="4160520"/>
+            <a:ext cx="10881360" cy="1097280"/>
+          </a:xfrm>
+          <a:prstGeom prst="roundRect">
+            <a:avLst>
+              <a:gd name="adj" fmla="val 5000"/>
+            </a:avLst>
+          </a:prstGeom>
+          <a:solidFill>
+            <a:srgbClr val="FFFFFF"/>
+          </a:solidFill>
+          <a:ln w="12700">
+            <a:solidFill>
+              <a:srgbClr val="E4DCCB"/>
+            </a:solidFill>
+            <a:prstDash val="solid"/>
+          </a:ln>
+        </p:spPr>
+      </p:sp>
+      <p:sp>
+        <p:nvSpPr>
+          <p:cNvPr id="14" name="Shape 12"/>
+          <p:cNvSpPr/>
+          <p:nvPr/>
+        </p:nvSpPr>
+        <p:spPr>
+          <a:xfrm>
+            <a:off x="640080" y="4160520"/>
+            <a:ext cx="54864" cy="1097280"/>
+          </a:xfrm>
+          <a:prstGeom prst="rect">
+            <a:avLst/>
+          </a:prstGeom>
+          <a:solidFill>
+            <a:srgbClr val="1D6FE0"/>
+          </a:solidFill>
+          <a:ln/>
+        </p:spPr>
+      </p:sp>
+      <p:sp>
+        <p:nvSpPr>
+          <p:cNvPr id="15" name="Text 13"/>
+          <p:cNvSpPr/>
+          <p:nvPr/>
+        </p:nvSpPr>
+        <p:spPr>
+          <a:xfrm>
+            <a:off x="914400" y="4270248"/>
+            <a:ext cx="10332720" cy="365760"/>
+          </a:xfrm>
+          <a:prstGeom prst="rect">
+            <a:avLst/>
+          </a:prstGeom>
+          <a:noFill/>
+          <a:ln/>
+        </p:spPr>
+        <p:txBody>
+          <a:bodyPr wrap="square" rtlCol="0" anchor="ctr"/>
+          <a:lstStyle/>
+          <a:p>
+            <a:pPr indent="0" marL="0">
+              <a:buNone/>
+            </a:pPr>
+            <a:r>
+              <a:rPr lang="en-US" sz="1400" b="1" dirty="0">
+                <a:solidFill>
+                  <a:srgbClr val="1B1F3B"/>
+                </a:solidFill>
+                <a:latin typeface="Segoe UI" pitchFamily="34" charset="0"/>
+                <a:ea typeface="Segoe UI" pitchFamily="34" charset="-122"/>
+                <a:cs typeface="Segoe UI" pitchFamily="34" charset="-120"/>
+              </a:rPr>
+              <a:t>Passage direct dans 'À faire maintenant'</a:t>
+            </a:r>
+            <a:endParaRPr lang="en-US" sz="1400" dirty="0"/>
+          </a:p>
+        </p:txBody>
+      </p:sp>
+      <p:sp>
+        <p:nvSpPr>
+          <p:cNvPr id="16" name="Text 14"/>
+          <p:cNvSpPr/>
+          <p:nvPr/>
+        </p:nvSpPr>
+        <p:spPr>
+          <a:xfrm>
+            <a:off x="914400" y="4617720"/>
+            <a:ext cx="10332720" cy="594360"/>
+          </a:xfrm>
+          <a:prstGeom prst="rect">
+            <a:avLst/>
+          </a:prstGeom>
+          <a:noFill/>
+          <a:ln/>
+        </p:spPr>
+        <p:txBody>
+          <a:bodyPr wrap="square" rtlCol="0" anchor="ctr"/>
+          <a:lstStyle/>
+          <a:p>
+            <a:pPr indent="0" marL="0">
+              <a:lnSpc>
+                <a:spcPts val="1400"/>
+              </a:lnSpc>
+              <a:buNone/>
+            </a:pPr>
+            <a:r>
+              <a:rPr lang="en-US" sz="1100" dirty="0">
+                <a:solidFill>
+                  <a:srgbClr val="8A7C68"/>
+                </a:solidFill>
+                <a:latin typeface="Segoe UI" pitchFamily="34" charset="0"/>
+                <a:ea typeface="Segoe UI" pitchFamily="34" charset="-122"/>
+                <a:cs typeface="Segoe UI" pitchFamily="34" charset="-120"/>
+              </a:rPr>
+              <a:t>Une intervention du jour peut être déplacée en un clic vers la liste 'À faire maintenant' de l'accueil, sans dupliquer la fiche si elle y est déjà.</a:t>
+            </a:r>
+            <a:endParaRPr lang="en-US" sz="1100" dirty="0"/>
+          </a:p>
+        </p:txBody>
+      </p:sp>
+      <p:sp>
+        <p:nvSpPr>
+          <p:cNvPr id="17" name="Shape 15"/>
+          <p:cNvSpPr/>
+          <p:nvPr/>
+        </p:nvSpPr>
+        <p:spPr>
+          <a:xfrm>
+            <a:off x="640080" y="5394960"/>
+            <a:ext cx="10881360" cy="1097280"/>
+          </a:xfrm>
+          <a:prstGeom prst="roundRect">
+            <a:avLst>
+              <a:gd name="adj" fmla="val 5000"/>
+            </a:avLst>
+          </a:prstGeom>
+          <a:solidFill>
+            <a:srgbClr val="FFFFFF"/>
+          </a:solidFill>
+          <a:ln w="12700">
+            <a:solidFill>
+              <a:srgbClr val="E4DCCB"/>
+            </a:solidFill>
+            <a:prstDash val="solid"/>
+          </a:ln>
+        </p:spPr>
+      </p:sp>
+      <p:sp>
+        <p:nvSpPr>
+          <p:cNvPr id="18" name="Shape 16"/>
+          <p:cNvSpPr/>
+          <p:nvPr/>
+        </p:nvSpPr>
+        <p:spPr>
+          <a:xfrm>
+            <a:off x="640080" y="5394960"/>
+            <a:ext cx="54864" cy="1097280"/>
+          </a:xfrm>
+          <a:prstGeom prst="rect">
+            <a:avLst/>
+          </a:prstGeom>
+          <a:solidFill>
+            <a:srgbClr val="1D6FE0"/>
+          </a:solidFill>
+          <a:ln/>
+        </p:spPr>
+      </p:sp>
+      <p:sp>
+        <p:nvSpPr>
+          <p:cNvPr id="19" name="Text 17"/>
+          <p:cNvSpPr/>
+          <p:nvPr/>
+        </p:nvSpPr>
+        <p:spPr>
+          <a:xfrm>
+            <a:off x="914400" y="5504688"/>
+            <a:ext cx="10332720" cy="365760"/>
+          </a:xfrm>
+          <a:prstGeom prst="rect">
+            <a:avLst/>
+          </a:prstGeom>
+          <a:noFill/>
+          <a:ln/>
+        </p:spPr>
+        <p:txBody>
+          <a:bodyPr wrap="square" rtlCol="0" anchor="ctr"/>
+          <a:lstStyle/>
+          <a:p>
+            <a:pPr indent="0" marL="0">
+              <a:buNone/>
+            </a:pPr>
+            <a:r>
+              <a:rPr lang="en-US" sz="1400" b="1" dirty="0">
+                <a:solidFill>
+                  <a:srgbClr val="1B1F3B"/>
+                </a:solidFill>
+                <a:latin typeface="Segoe UI" pitchFamily="34" charset="0"/>
+                <a:ea typeface="Segoe UI" pitchFamily="34" charset="-122"/>
+                <a:cs typeface="Segoe UI" pitchFamily="34" charset="-120"/>
+              </a:rPr>
+              <a:t>Mise en page de l'en-tête revue</a:t>
+            </a:r>
+            <a:endParaRPr lang="en-US" sz="1400" dirty="0"/>
+          </a:p>
+        </p:txBody>
+      </p:sp>
+      <p:sp>
+        <p:nvSpPr>
+          <p:cNvPr id="20" name="Text 18"/>
+          <p:cNvSpPr/>
+          <p:nvPr/>
+        </p:nvSpPr>
+        <p:spPr>
+          <a:xfrm>
+            <a:off x="914400" y="5852160"/>
+            <a:ext cx="10332720" cy="594360"/>
+          </a:xfrm>
+          <a:prstGeom prst="rect">
+            <a:avLst/>
+          </a:prstGeom>
+          <a:noFill/>
+          <a:ln/>
+        </p:spPr>
+        <p:txBody>
+          <a:bodyPr wrap="square" rtlCol="0" anchor="ctr"/>
+          <a:lstStyle/>
+          <a:p>
+            <a:pPr indent="0" marL="0">
+              <a:lnSpc>
+                <a:spcPts val="1400"/>
+              </a:lnSpc>
+              <a:buNone/>
+            </a:pPr>
+            <a:r>
+              <a:rPr lang="en-US" sz="1100" dirty="0">
+                <a:solidFill>
+                  <a:srgbClr val="8A7C68"/>
+                </a:solidFill>
+                <a:latin typeface="Segoe UI" pitchFamily="34" charset="0"/>
+                <a:ea typeface="Segoe UI" pitchFamily="34" charset="-122"/>
+                <a:cs typeface="Segoe UI" pitchFamily="34" charset="-120"/>
+              </a:rPr>
+              <a:t>'RAPPORT D'INTERVENTION', le numéro et la date de création sont désormais mis en avant en haut à droite, à côté des informations de l'entreprise, comme sur les devis et factures.</a:t>
+            </a:r>
+            <a:endParaRPr lang="en-US" sz="1100" dirty="0"/>
+          </a:p>
+        </p:txBody>
+      </p:sp>
+      <p:sp>
+        <p:nvSpPr>
+          <p:cNvPr id="21" name="Text 19"/>
           <p:cNvSpPr/>
           <p:nvPr/>
         </p:nvSpPr>
@@ -7682,7 +8038,7 @@
       </p:sp>
       <p:sp>
         <p:nvSpPr>
-          <p:cNvPr id="10" name="Text 8"/>
+          <p:cNvPr id="22" name="Text 20"/>
           <p:cNvSpPr/>
           <p:nvPr/>
         </p:nvSpPr>
@@ -7733,7 +8089,7 @@
     <p:bg>
       <p:bgPr>
         <a:solidFill>
-          <a:srgbClr val="0B1030"/>
+          <a:srgbClr val="F3EEE3"/>
         </a:solidFill>
       </p:bgPr>
     </p:bg>
@@ -7759,14 +8115,16 @@
         </p:nvSpPr>
         <p:spPr>
           <a:xfrm>
-            <a:off x="0" y="3246120"/>
-            <a:ext cx="12191695" cy="54864"/>
-          </a:xfrm>
-          <a:prstGeom prst="rect">
-            <a:avLst/>
+            <a:off x="640080" y="411480"/>
+            <a:ext cx="2377440" cy="365760"/>
+          </a:xfrm>
+          <a:prstGeom prst="roundRect">
+            <a:avLst>
+              <a:gd name="adj" fmla="val 50000"/>
+            </a:avLst>
           </a:prstGeom>
           <a:solidFill>
-            <a:srgbClr val="9A4C1F"/>
+            <a:srgbClr val="E5EDFB"/>
           </a:solidFill>
           <a:ln/>
         </p:spPr>
@@ -7779,118 +8137,207 @@
         </p:nvSpPr>
         <p:spPr>
           <a:xfrm>
-            <a:off x="640080" y="2468880"/>
-            <a:ext cx="10058400" cy="914400"/>
-          </a:xfrm>
-          <a:prstGeom prst="rect">
-            <a:avLst/>
-          </a:prstGeom>
-          <a:noFill/>
-          <a:ln/>
-        </p:spPr>
-        <p:txBody>
-          <a:bodyPr wrap="square" rtlCol="0" anchor="ctr"/>
-          <a:lstStyle/>
-          <a:p>
-            <a:pPr indent="0" marL="0">
-              <a:buNone/>
-            </a:pPr>
-            <a:r>
-              <a:rPr lang="en-US" sz="3800" b="1" dirty="0">
-                <a:solidFill>
-                  <a:srgbClr val="FFFFFF"/>
+            <a:off x="640080" y="411480"/>
+            <a:ext cx="2377440" cy="365760"/>
+          </a:xfrm>
+          <a:prstGeom prst="rect">
+            <a:avLst/>
+          </a:prstGeom>
+          <a:noFill/>
+          <a:ln/>
+        </p:spPr>
+        <p:txBody>
+          <a:bodyPr wrap="square" rtlCol="0" anchor="ctr"/>
+          <a:lstStyle/>
+          <a:p>
+            <a:pPr algn="ctr" indent="0" marL="0">
+              <a:buNone/>
+            </a:pPr>
+            <a:r>
+              <a:rPr lang="en-US" sz="1000" b="1" spc="100" kern="0" dirty="0">
+                <a:solidFill>
+                  <a:srgbClr val="1D6FE0"/>
+                </a:solidFill>
+                <a:latin typeface="Segoe UI" pitchFamily="34" charset="0"/>
+                <a:ea typeface="Segoe UI" pitchFamily="34" charset="-122"/>
+                <a:cs typeface="Segoe UI" pitchFamily="34" charset="-120"/>
+              </a:rPr>
+              <a:t>FRONTEND</a:t>
+            </a:r>
+            <a:endParaRPr lang="en-US" sz="1000" dirty="0"/>
+          </a:p>
+        </p:txBody>
+      </p:sp>
+      <p:sp>
+        <p:nvSpPr>
+          <p:cNvPr id="4" name="Text 2"/>
+          <p:cNvSpPr/>
+          <p:nvPr/>
+        </p:nvSpPr>
+        <p:spPr>
+          <a:xfrm>
+            <a:off x="640080" y="868680"/>
+            <a:ext cx="10515600" cy="548640"/>
+          </a:xfrm>
+          <a:prstGeom prst="rect">
+            <a:avLst/>
+          </a:prstGeom>
+          <a:noFill/>
+          <a:ln/>
+        </p:spPr>
+        <p:txBody>
+          <a:bodyPr wrap="square" rtlCol="0" anchor="ctr"/>
+          <a:lstStyle/>
+          <a:p>
+            <a:pPr indent="0" marL="0">
+              <a:buNone/>
+            </a:pPr>
+            <a:r>
+              <a:rPr lang="en-US" sz="2400" b="1" dirty="0">
+                <a:solidFill>
+                  <a:srgbClr val="1B1F3B"/>
                 </a:solidFill>
                 <a:latin typeface="Georgia" pitchFamily="34" charset="0"/>
                 <a:ea typeface="Georgia" pitchFamily="34" charset="-122"/>
                 <a:cs typeface="Georgia" pitchFamily="34" charset="-120"/>
               </a:rPr>
-              <a:t>Backend</a:t>
-            </a:r>
-            <a:endParaRPr lang="en-US" sz="3800" dirty="0"/>
-          </a:p>
-        </p:txBody>
-      </p:sp>
-      <p:sp>
-        <p:nvSpPr>
-          <p:cNvPr id="4" name="Text 2"/>
-          <p:cNvSpPr/>
-          <p:nvPr/>
-        </p:nvSpPr>
-        <p:spPr>
-          <a:xfrm>
-            <a:off x="640080" y="3429000"/>
-            <a:ext cx="10058400" cy="457200"/>
-          </a:xfrm>
-          <a:prstGeom prst="rect">
-            <a:avLst/>
-          </a:prstGeom>
-          <a:noFill/>
-          <a:ln/>
-        </p:spPr>
-        <p:txBody>
-          <a:bodyPr wrap="square" rtlCol="0" anchor="ctr"/>
-          <a:lstStyle/>
-          <a:p>
-            <a:pPr indent="0" marL="0">
-              <a:buNone/>
-            </a:pPr>
-            <a:r>
-              <a:rPr lang="en-US" sz="1500" dirty="0">
-                <a:solidFill>
-                  <a:srgbClr val="C7C9E0"/>
-                </a:solidFill>
-                <a:latin typeface="Segoe UI" pitchFamily="34" charset="0"/>
-                <a:ea typeface="Segoe UI" pitchFamily="34" charset="-122"/>
-                <a:cs typeface="Segoe UI" pitchFamily="34" charset="-120"/>
-              </a:rPr>
-              <a:t>API, logique métier et intégrations</a:t>
-            </a:r>
-            <a:endParaRPr lang="en-US" sz="1500" dirty="0"/>
-          </a:p>
-        </p:txBody>
-      </p:sp>
-      <p:sp>
-        <p:nvSpPr>
-          <p:cNvPr id="5" name="Text 3"/>
-          <p:cNvSpPr/>
-          <p:nvPr/>
-        </p:nvSpPr>
-        <p:spPr>
-          <a:xfrm>
-            <a:off x="640080" y="3931920"/>
-            <a:ext cx="5486400" cy="365760"/>
-          </a:xfrm>
-          <a:prstGeom prst="rect">
-            <a:avLst/>
-          </a:prstGeom>
-          <a:noFill/>
-          <a:ln/>
-        </p:spPr>
-        <p:txBody>
-          <a:bodyPr wrap="square" rtlCol="0" anchor="ctr"/>
-          <a:lstStyle/>
-          <a:p>
-            <a:pPr indent="0" marL="0">
-              <a:buNone/>
-            </a:pPr>
-            <a:r>
-              <a:rPr lang="en-US" sz="1200" b="1" dirty="0">
-                <a:solidFill>
-                  <a:srgbClr val="C9A96A"/>
-                </a:solidFill>
-                <a:latin typeface="Segoe UI" pitchFamily="34" charset="0"/>
-                <a:ea typeface="Segoe UI" pitchFamily="34" charset="-122"/>
-                <a:cs typeface="Segoe UI" pitchFamily="34" charset="-120"/>
-              </a:rPr>
-              <a:t>28 mise(s) à jour</a:t>
-            </a:r>
-            <a:endParaRPr lang="en-US" sz="1200" dirty="0"/>
-          </a:p>
-        </p:txBody>
-      </p:sp>
-      <p:sp>
-        <p:nvSpPr>
-          <p:cNvPr id="6" name="Text 4"/>
+              <a:t>Rapports d'intervention (suite)</a:t>
+            </a:r>
+            <a:endParaRPr lang="en-US" sz="2400" dirty="0"/>
+          </a:p>
+        </p:txBody>
+      </p:sp>
+      <p:sp>
+        <p:nvSpPr>
+          <p:cNvPr id="5" name="Shape 3"/>
+          <p:cNvSpPr/>
+          <p:nvPr/>
+        </p:nvSpPr>
+        <p:spPr>
+          <a:xfrm>
+            <a:off x="640080" y="1691640"/>
+            <a:ext cx="10881360" cy="1097280"/>
+          </a:xfrm>
+          <a:prstGeom prst="roundRect">
+            <a:avLst>
+              <a:gd name="adj" fmla="val 5000"/>
+            </a:avLst>
+          </a:prstGeom>
+          <a:solidFill>
+            <a:srgbClr val="FFFFFF"/>
+          </a:solidFill>
+          <a:ln w="12700">
+            <a:solidFill>
+              <a:srgbClr val="E4DCCB"/>
+            </a:solidFill>
+            <a:prstDash val="solid"/>
+          </a:ln>
+        </p:spPr>
+      </p:sp>
+      <p:sp>
+        <p:nvSpPr>
+          <p:cNvPr id="6" name="Shape 4"/>
+          <p:cNvSpPr/>
+          <p:nvPr/>
+        </p:nvSpPr>
+        <p:spPr>
+          <a:xfrm>
+            <a:off x="640080" y="1691640"/>
+            <a:ext cx="54864" cy="1097280"/>
+          </a:xfrm>
+          <a:prstGeom prst="rect">
+            <a:avLst/>
+          </a:prstGeom>
+          <a:solidFill>
+            <a:srgbClr val="1D6FE0"/>
+          </a:solidFill>
+          <a:ln/>
+        </p:spPr>
+      </p:sp>
+      <p:sp>
+        <p:nvSpPr>
+          <p:cNvPr id="7" name="Text 5"/>
+          <p:cNvSpPr/>
+          <p:nvPr/>
+        </p:nvSpPr>
+        <p:spPr>
+          <a:xfrm>
+            <a:off x="914400" y="1801368"/>
+            <a:ext cx="10332720" cy="365760"/>
+          </a:xfrm>
+          <a:prstGeom prst="rect">
+            <a:avLst/>
+          </a:prstGeom>
+          <a:noFill/>
+          <a:ln/>
+        </p:spPr>
+        <p:txBody>
+          <a:bodyPr wrap="square" rtlCol="0" anchor="ctr"/>
+          <a:lstStyle/>
+          <a:p>
+            <a:pPr indent="0" marL="0">
+              <a:buNone/>
+            </a:pPr>
+            <a:r>
+              <a:rPr lang="en-US" sz="1400" b="1" dirty="0">
+                <a:solidFill>
+                  <a:srgbClr val="1B1F3B"/>
+                </a:solidFill>
+                <a:latin typeface="Segoe UI" pitchFamily="34" charset="0"/>
+                <a:ea typeface="Segoe UI" pitchFamily="34" charset="-122"/>
+                <a:cs typeface="Segoe UI" pitchFamily="34" charset="-120"/>
+              </a:rPr>
+              <a:t>Signature réutilisable depuis le profil</a:t>
+            </a:r>
+            <a:endParaRPr lang="en-US" sz="1400" dirty="0"/>
+          </a:p>
+        </p:txBody>
+      </p:sp>
+      <p:sp>
+        <p:nvSpPr>
+          <p:cNvPr id="8" name="Text 6"/>
+          <p:cNvSpPr/>
+          <p:nvPr/>
+        </p:nvSpPr>
+        <p:spPr>
+          <a:xfrm>
+            <a:off x="914400" y="2148840"/>
+            <a:ext cx="10332720" cy="594360"/>
+          </a:xfrm>
+          <a:prstGeom prst="rect">
+            <a:avLst/>
+          </a:prstGeom>
+          <a:noFill/>
+          <a:ln/>
+        </p:spPr>
+        <p:txBody>
+          <a:bodyPr wrap="square" rtlCol="0" anchor="ctr"/>
+          <a:lstStyle/>
+          <a:p>
+            <a:pPr indent="0" marL="0">
+              <a:lnSpc>
+                <a:spcPts val="1400"/>
+              </a:lnSpc>
+              <a:buNone/>
+            </a:pPr>
+            <a:r>
+              <a:rPr lang="en-US" sz="1100" dirty="0">
+                <a:solidFill>
+                  <a:srgbClr val="8A7C68"/>
+                </a:solidFill>
+                <a:latin typeface="Segoe UI" pitchFamily="34" charset="0"/>
+                <a:ea typeface="Segoe UI" pitchFamily="34" charset="-122"/>
+                <a:cs typeface="Segoe UI" pitchFamily="34" charset="-120"/>
+              </a:rPr>
+              <a:t>La signature déjà enregistrée dans 'Ma Signature' (dessinée ou importée) peut être ajoutée en un clic au rapport, affichée en bas à droite du document comme une vraie signature.</a:t>
+            </a:r>
+            <a:endParaRPr lang="en-US" sz="1100" dirty="0"/>
+          </a:p>
+        </p:txBody>
+      </p:sp>
+      <p:sp>
+        <p:nvSpPr>
+          <p:cNvPr id="9" name="Text 7"/>
           <p:cNvSpPr/>
           <p:nvPr/>
         </p:nvSpPr>
@@ -7929,7 +8376,7 @@
       </p:sp>
       <p:sp>
         <p:nvSpPr>
-          <p:cNvPr id="7" name="Text 5"/>
+          <p:cNvPr id="10" name="Text 8"/>
           <p:cNvSpPr/>
           <p:nvPr/>
         </p:nvSpPr>
@@ -8015,7 +8462,7 @@
             </a:avLst>
           </a:prstGeom>
           <a:solidFill>
-            <a:srgbClr val="F5E6DA"/>
+            <a:srgbClr val="E5EDFB"/>
           </a:solidFill>
           <a:ln/>
         </p:spPr>
@@ -8047,13 +8494,13 @@
             <a:r>
               <a:rPr lang="en-US" sz="1000" b="1" spc="100" kern="0" dirty="0">
                 <a:solidFill>
-                  <a:srgbClr val="9A4C1F"/>
-                </a:solidFill>
-                <a:latin typeface="Segoe UI" pitchFamily="34" charset="0"/>
-                <a:ea typeface="Segoe UI" pitchFamily="34" charset="-122"/>
-                <a:cs typeface="Segoe UI" pitchFamily="34" charset="-120"/>
-              </a:rPr>
-              <a:t>BACKEND</a:t>
+                  <a:srgbClr val="1D6FE0"/>
+                </a:solidFill>
+                <a:latin typeface="Segoe UI" pitchFamily="34" charset="0"/>
+                <a:ea typeface="Segoe UI" pitchFamily="34" charset="-122"/>
+                <a:cs typeface="Segoe UI" pitchFamily="34" charset="-120"/>
+              </a:rPr>
+              <a:t>FRONTEND</a:t>
             </a:r>
             <a:endParaRPr lang="en-US" sz="1000" dirty="0"/>
           </a:p>
@@ -8092,7 +8539,7 @@
                 <a:ea typeface="Georgia" pitchFamily="34" charset="-122"/>
                 <a:cs typeface="Georgia" pitchFamily="34" charset="-120"/>
               </a:rPr>
-              <a:t>Fondations</a:t>
+              <a:t>Facturation</a:t>
             </a:r>
             <a:endParaRPr lang="en-US" sz="2400" dirty="0"/>
           </a:p>
@@ -8140,7 +8587,7 @@
             <a:avLst/>
           </a:prstGeom>
           <a:solidFill>
-            <a:srgbClr val="9A4C1F"/>
+            <a:srgbClr val="1D6FE0"/>
           </a:solidFill>
           <a:ln/>
         </p:spPr>
@@ -8178,7 +8625,7 @@
                 <a:ea typeface="Segoe UI" pitchFamily="34" charset="-122"/>
                 <a:cs typeface="Segoe UI" pitchFamily="34" charset="-120"/>
               </a:rPr>
-              <a:t>Mise en place initiale de l'application</a:t>
+              <a:t>Outil 'Facturation' renommé en 'Factures'</a:t>
             </a:r>
             <a:endParaRPr lang="en-US" sz="1400" dirty="0"/>
           </a:p>
@@ -8220,7 +8667,7 @@
                 <a:ea typeface="Segoe UI" pitchFamily="34" charset="-122"/>
                 <a:cs typeface="Segoe UI" pitchFamily="34" charset="-120"/>
               </a:rPr>
-              <a:t>Structure Next.js App Router, authentification, base de données JSON locale et première version des modules Devis, Chantiers, Équipe, Planning.</a:t>
+              <a:t>Renommé dans le menu et sur la page, dans les 5 langues de l'application.</a:t>
             </a:r>
             <a:endParaRPr lang="en-US" sz="1100" dirty="0"/>
           </a:p>
@@ -8228,135 +8675,7 @@
       </p:sp>
       <p:sp>
         <p:nvSpPr>
-          <p:cNvPr id="9" name="Shape 7"/>
-          <p:cNvSpPr/>
-          <p:nvPr/>
-        </p:nvSpPr>
-        <p:spPr>
-          <a:xfrm>
-            <a:off x="640080" y="2926080"/>
-            <a:ext cx="10881360" cy="1097280"/>
-          </a:xfrm>
-          <a:prstGeom prst="roundRect">
-            <a:avLst>
-              <a:gd name="adj" fmla="val 5000"/>
-            </a:avLst>
-          </a:prstGeom>
-          <a:solidFill>
-            <a:srgbClr val="FFFFFF"/>
-          </a:solidFill>
-          <a:ln w="12700">
-            <a:solidFill>
-              <a:srgbClr val="E4DCCB"/>
-            </a:solidFill>
-            <a:prstDash val="solid"/>
-          </a:ln>
-        </p:spPr>
-      </p:sp>
-      <p:sp>
-        <p:nvSpPr>
-          <p:cNvPr id="10" name="Shape 8"/>
-          <p:cNvSpPr/>
-          <p:nvPr/>
-        </p:nvSpPr>
-        <p:spPr>
-          <a:xfrm>
-            <a:off x="640080" y="2926080"/>
-            <a:ext cx="54864" cy="1097280"/>
-          </a:xfrm>
-          <a:prstGeom prst="rect">
-            <a:avLst/>
-          </a:prstGeom>
-          <a:solidFill>
-            <a:srgbClr val="9A4C1F"/>
-          </a:solidFill>
-          <a:ln/>
-        </p:spPr>
-      </p:sp>
-      <p:sp>
-        <p:nvSpPr>
-          <p:cNvPr id="11" name="Text 9"/>
-          <p:cNvSpPr/>
-          <p:nvPr/>
-        </p:nvSpPr>
-        <p:spPr>
-          <a:xfrm>
-            <a:off x="914400" y="3035808"/>
-            <a:ext cx="10332720" cy="365760"/>
-          </a:xfrm>
-          <a:prstGeom prst="rect">
-            <a:avLst/>
-          </a:prstGeom>
-          <a:noFill/>
-          <a:ln/>
-        </p:spPr>
-        <p:txBody>
-          <a:bodyPr wrap="square" rtlCol="0" anchor="ctr"/>
-          <a:lstStyle/>
-          <a:p>
-            <a:pPr indent="0" marL="0">
-              <a:buNone/>
-            </a:pPr>
-            <a:r>
-              <a:rPr lang="en-US" sz="1400" b="1" dirty="0">
-                <a:solidFill>
-                  <a:srgbClr val="1B1F3B"/>
-                </a:solidFill>
-                <a:latin typeface="Segoe UI" pitchFamily="34" charset="0"/>
-                <a:ea typeface="Segoe UI" pitchFamily="34" charset="-122"/>
-                <a:cs typeface="Segoe UI" pitchFamily="34" charset="-120"/>
-              </a:rPr>
-              <a:t>Fiabilisation de l'envoi d'email (SMTP Gmail)</a:t>
-            </a:r>
-            <a:endParaRPr lang="en-US" sz="1400" dirty="0"/>
-          </a:p>
-        </p:txBody>
-      </p:sp>
-      <p:sp>
-        <p:nvSpPr>
-          <p:cNvPr id="12" name="Text 10"/>
-          <p:cNvSpPr/>
-          <p:nvPr/>
-        </p:nvSpPr>
-        <p:spPr>
-          <a:xfrm>
-            <a:off x="914400" y="3383280"/>
-            <a:ext cx="10332720" cy="594360"/>
-          </a:xfrm>
-          <a:prstGeom prst="rect">
-            <a:avLst/>
-          </a:prstGeom>
-          <a:noFill/>
-          <a:ln/>
-        </p:spPr>
-        <p:txBody>
-          <a:bodyPr wrap="square" rtlCol="0" anchor="ctr"/>
-          <a:lstStyle/>
-          <a:p>
-            <a:pPr indent="0" marL="0">
-              <a:lnSpc>
-                <a:spcPts val="1400"/>
-              </a:lnSpc>
-              <a:buNone/>
-            </a:pPr>
-            <a:r>
-              <a:rPr lang="en-US" sz="1100" dirty="0">
-                <a:solidFill>
-                  <a:srgbClr val="8A7C68"/>
-                </a:solidFill>
-                <a:latin typeface="Segoe UI" pitchFamily="34" charset="0"/>
-                <a:ea typeface="Segoe UI" pitchFamily="34" charset="-122"/>
-                <a:cs typeface="Segoe UI" pitchFamily="34" charset="-120"/>
-              </a:rPr>
-              <a:t>Import dynamique de nodemailer compatible Vercel (ES modules), configuration complète (TLS, authentification).</a:t>
-            </a:r>
-            <a:endParaRPr lang="en-US" sz="1100" dirty="0"/>
-          </a:p>
-        </p:txBody>
-      </p:sp>
-      <p:sp>
-        <p:nvSpPr>
-          <p:cNvPr id="13" name="Text 11"/>
+          <p:cNvPr id="9" name="Text 7"/>
           <p:cNvSpPr/>
           <p:nvPr/>
         </p:nvSpPr>
@@ -8395,7 +8714,7 @@
       </p:sp>
       <p:sp>
         <p:nvSpPr>
-          <p:cNvPr id="14" name="Text 12"/>
+          <p:cNvPr id="10" name="Text 8"/>
           <p:cNvSpPr/>
           <p:nvPr/>
         </p:nvSpPr>
@@ -8446,7 +8765,7 @@
     <p:bg>
       <p:bgPr>
         <a:solidFill>
-          <a:srgbClr val="F3EEE3"/>
+          <a:srgbClr val="0B1030"/>
         </a:solidFill>
       </p:bgPr>
     </p:bg>
@@ -8472,16 +8791,14 @@
         </p:nvSpPr>
         <p:spPr>
           <a:xfrm>
-            <a:off x="640080" y="411480"/>
-            <a:ext cx="2377440" cy="365760"/>
-          </a:xfrm>
-          <a:prstGeom prst="roundRect">
-            <a:avLst>
-              <a:gd name="adj" fmla="val 50000"/>
-            </a:avLst>
+            <a:off x="0" y="3246120"/>
+            <a:ext cx="12191695" cy="54864"/>
+          </a:xfrm>
+          <a:prstGeom prst="rect">
+            <a:avLst/>
           </a:prstGeom>
           <a:solidFill>
-            <a:srgbClr val="F5E6DA"/>
+            <a:srgbClr val="9A4C1F"/>
           </a:solidFill>
           <a:ln/>
         </p:spPr>
@@ -8494,591 +8811,118 @@
         </p:nvSpPr>
         <p:spPr>
           <a:xfrm>
-            <a:off x="640080" y="411480"/>
-            <a:ext cx="2377440" cy="365760"/>
-          </a:xfrm>
-          <a:prstGeom prst="rect">
-            <a:avLst/>
-          </a:prstGeom>
-          <a:noFill/>
-          <a:ln/>
-        </p:spPr>
-        <p:txBody>
-          <a:bodyPr wrap="square" rtlCol="0" anchor="ctr"/>
-          <a:lstStyle/>
-          <a:p>
-            <a:pPr algn="ctr" indent="0" marL="0">
-              <a:buNone/>
-            </a:pPr>
-            <a:r>
-              <a:rPr lang="en-US" sz="1000" b="1" spc="100" kern="0" dirty="0">
-                <a:solidFill>
-                  <a:srgbClr val="9A4C1F"/>
-                </a:solidFill>
-                <a:latin typeface="Segoe UI" pitchFamily="34" charset="0"/>
-                <a:ea typeface="Segoe UI" pitchFamily="34" charset="-122"/>
-                <a:cs typeface="Segoe UI" pitchFamily="34" charset="-120"/>
-              </a:rPr>
-              <a:t>BACKEND</a:t>
-            </a:r>
-            <a:endParaRPr lang="en-US" sz="1000" dirty="0"/>
-          </a:p>
-        </p:txBody>
-      </p:sp>
-      <p:sp>
-        <p:nvSpPr>
-          <p:cNvPr id="4" name="Text 2"/>
-          <p:cNvSpPr/>
-          <p:nvPr/>
-        </p:nvSpPr>
-        <p:spPr>
-          <a:xfrm>
-            <a:off x="640080" y="868680"/>
-            <a:ext cx="10515600" cy="548640"/>
-          </a:xfrm>
-          <a:prstGeom prst="rect">
-            <a:avLst/>
-          </a:prstGeom>
-          <a:noFill/>
-          <a:ln/>
-        </p:spPr>
-        <p:txBody>
-          <a:bodyPr wrap="square" rtlCol="0" anchor="ctr"/>
-          <a:lstStyle/>
-          <a:p>
-            <a:pPr indent="0" marL="0">
-              <a:buNone/>
-            </a:pPr>
-            <a:r>
-              <a:rPr lang="en-US" sz="2400" b="1" dirty="0">
-                <a:solidFill>
-                  <a:srgbClr val="1B1F3B"/>
+            <a:off x="640080" y="2468880"/>
+            <a:ext cx="10058400" cy="914400"/>
+          </a:xfrm>
+          <a:prstGeom prst="rect">
+            <a:avLst/>
+          </a:prstGeom>
+          <a:noFill/>
+          <a:ln/>
+        </p:spPr>
+        <p:txBody>
+          <a:bodyPr wrap="square" rtlCol="0" anchor="ctr"/>
+          <a:lstStyle/>
+          <a:p>
+            <a:pPr indent="0" marL="0">
+              <a:buNone/>
+            </a:pPr>
+            <a:r>
+              <a:rPr lang="en-US" sz="3800" b="1" dirty="0">
+                <a:solidFill>
+                  <a:srgbClr val="FFFFFF"/>
                 </a:solidFill>
                 <a:latin typeface="Georgia" pitchFamily="34" charset="0"/>
                 <a:ea typeface="Georgia" pitchFamily="34" charset="-122"/>
                 <a:cs typeface="Georgia" pitchFamily="34" charset="-120"/>
               </a:rPr>
-              <a:t>Devis</a:t>
-            </a:r>
-            <a:endParaRPr lang="en-US" sz="2400" dirty="0"/>
-          </a:p>
-        </p:txBody>
-      </p:sp>
-      <p:sp>
-        <p:nvSpPr>
-          <p:cNvPr id="5" name="Shape 3"/>
-          <p:cNvSpPr/>
-          <p:nvPr/>
-        </p:nvSpPr>
-        <p:spPr>
-          <a:xfrm>
-            <a:off x="640080" y="1691640"/>
-            <a:ext cx="10881360" cy="1097280"/>
-          </a:xfrm>
-          <a:prstGeom prst="roundRect">
-            <a:avLst>
-              <a:gd name="adj" fmla="val 5000"/>
-            </a:avLst>
-          </a:prstGeom>
-          <a:solidFill>
-            <a:srgbClr val="FFFFFF"/>
-          </a:solidFill>
-          <a:ln w="12700">
-            <a:solidFill>
-              <a:srgbClr val="E4DCCB"/>
-            </a:solidFill>
-            <a:prstDash val="solid"/>
-          </a:ln>
-        </p:spPr>
-      </p:sp>
-      <p:sp>
-        <p:nvSpPr>
-          <p:cNvPr id="6" name="Shape 4"/>
-          <p:cNvSpPr/>
-          <p:nvPr/>
-        </p:nvSpPr>
-        <p:spPr>
-          <a:xfrm>
-            <a:off x="640080" y="1691640"/>
-            <a:ext cx="54864" cy="1097280"/>
-          </a:xfrm>
-          <a:prstGeom prst="rect">
-            <a:avLst/>
-          </a:prstGeom>
-          <a:solidFill>
-            <a:srgbClr val="9A4C1F"/>
-          </a:solidFill>
-          <a:ln/>
-        </p:spPr>
-      </p:sp>
-      <p:sp>
-        <p:nvSpPr>
-          <p:cNvPr id="7" name="Text 5"/>
-          <p:cNvSpPr/>
-          <p:nvPr/>
-        </p:nvSpPr>
-        <p:spPr>
-          <a:xfrm>
-            <a:off x="914400" y="1801368"/>
-            <a:ext cx="10332720" cy="365760"/>
-          </a:xfrm>
-          <a:prstGeom prst="rect">
-            <a:avLst/>
-          </a:prstGeom>
-          <a:noFill/>
-          <a:ln/>
-        </p:spPr>
-        <p:txBody>
-          <a:bodyPr wrap="square" rtlCol="0" anchor="ctr"/>
-          <a:lstStyle/>
-          <a:p>
-            <a:pPr indent="0" marL="0">
-              <a:buNone/>
-            </a:pPr>
-            <a:r>
-              <a:rPr lang="en-US" sz="1400" b="1" dirty="0">
-                <a:solidFill>
-                  <a:srgbClr val="1B1F3B"/>
-                </a:solidFill>
-                <a:latin typeface="Segoe UI" pitchFamily="34" charset="0"/>
-                <a:ea typeface="Segoe UI" pitchFamily="34" charset="-122"/>
-                <a:cs typeface="Segoe UI" pitchFamily="34" charset="-120"/>
-              </a:rPr>
-              <a:t>Génération PDF des devis réparée</a:t>
-            </a:r>
-            <a:endParaRPr lang="en-US" sz="1400" dirty="0"/>
-          </a:p>
-        </p:txBody>
-      </p:sp>
-      <p:sp>
-        <p:nvSpPr>
-          <p:cNvPr id="8" name="Text 6"/>
-          <p:cNvSpPr/>
-          <p:nvPr/>
-        </p:nvSpPr>
-        <p:spPr>
-          <a:xfrm>
-            <a:off x="914400" y="2148840"/>
-            <a:ext cx="10332720" cy="594360"/>
-          </a:xfrm>
-          <a:prstGeom prst="rect">
-            <a:avLst/>
-          </a:prstGeom>
-          <a:noFill/>
-          <a:ln/>
-        </p:spPr>
-        <p:txBody>
-          <a:bodyPr wrap="square" rtlCol="0" anchor="ctr"/>
-          <a:lstStyle/>
-          <a:p>
-            <a:pPr indent="0" marL="0">
-              <a:lnSpc>
-                <a:spcPts val="1400"/>
-              </a:lnSpc>
-              <a:buNone/>
-            </a:pPr>
-            <a:r>
-              <a:rPr lang="en-US" sz="1100" dirty="0">
-                <a:solidFill>
-                  <a:srgbClr val="8A7C68"/>
-                </a:solidFill>
-                <a:latin typeface="Segoe UI" pitchFamily="34" charset="0"/>
-                <a:ea typeface="Segoe UI" pitchFamily="34" charset="-122"/>
-                <a:cs typeface="Segoe UI" pitchFamily="34" charset="-120"/>
-              </a:rPr>
-              <a:t>La génération/aperçu PDF lisait encore l'ancien fichier JSON local et ne trouvait plus les devis créés depuis la migration Supabase ; corrigée pour lire directement la table partagée.</a:t>
-            </a:r>
-            <a:endParaRPr lang="en-US" sz="1100" dirty="0"/>
-          </a:p>
-        </p:txBody>
-      </p:sp>
-      <p:sp>
-        <p:nvSpPr>
-          <p:cNvPr id="9" name="Shape 7"/>
-          <p:cNvSpPr/>
-          <p:nvPr/>
-        </p:nvSpPr>
-        <p:spPr>
-          <a:xfrm>
-            <a:off x="640080" y="2926080"/>
-            <a:ext cx="10881360" cy="1097280"/>
-          </a:xfrm>
-          <a:prstGeom prst="roundRect">
-            <a:avLst>
-              <a:gd name="adj" fmla="val 5000"/>
-            </a:avLst>
-          </a:prstGeom>
-          <a:solidFill>
-            <a:srgbClr val="FFFFFF"/>
-          </a:solidFill>
-          <a:ln w="12700">
-            <a:solidFill>
-              <a:srgbClr val="E4DCCB"/>
-            </a:solidFill>
-            <a:prstDash val="solid"/>
-          </a:ln>
-        </p:spPr>
-      </p:sp>
-      <p:sp>
-        <p:nvSpPr>
-          <p:cNvPr id="10" name="Shape 8"/>
-          <p:cNvSpPr/>
-          <p:nvPr/>
-        </p:nvSpPr>
-        <p:spPr>
-          <a:xfrm>
-            <a:off x="640080" y="2926080"/>
-            <a:ext cx="54864" cy="1097280"/>
-          </a:xfrm>
-          <a:prstGeom prst="rect">
-            <a:avLst/>
-          </a:prstGeom>
-          <a:solidFill>
-            <a:srgbClr val="9A4C1F"/>
-          </a:solidFill>
-          <a:ln/>
-        </p:spPr>
-      </p:sp>
-      <p:sp>
-        <p:nvSpPr>
-          <p:cNvPr id="11" name="Text 9"/>
-          <p:cNvSpPr/>
-          <p:nvPr/>
-        </p:nvSpPr>
-        <p:spPr>
-          <a:xfrm>
-            <a:off x="914400" y="3035808"/>
-            <a:ext cx="10332720" cy="365760"/>
-          </a:xfrm>
-          <a:prstGeom prst="rect">
-            <a:avLst/>
-          </a:prstGeom>
-          <a:noFill/>
-          <a:ln/>
-        </p:spPr>
-        <p:txBody>
-          <a:bodyPr wrap="square" rtlCol="0" anchor="ctr"/>
-          <a:lstStyle/>
-          <a:p>
-            <a:pPr indent="0" marL="0">
-              <a:buNone/>
-            </a:pPr>
-            <a:r>
-              <a:rPr lang="en-US" sz="1400" b="1" dirty="0">
-                <a:solidFill>
-                  <a:srgbClr val="1B1F3B"/>
-                </a:solidFill>
-                <a:latin typeface="Segoe UI" pitchFamily="34" charset="0"/>
-                <a:ea typeface="Segoe UI" pitchFamily="34" charset="-122"/>
-                <a:cs typeface="Segoe UI" pitchFamily="34" charset="-120"/>
-              </a:rPr>
-              <a:t>Versioning et sauvegarde complète du devis</a:t>
-            </a:r>
-            <a:endParaRPr lang="en-US" sz="1400" dirty="0"/>
-          </a:p>
-        </p:txBody>
-      </p:sp>
-      <p:sp>
-        <p:nvSpPr>
-          <p:cNvPr id="12" name="Text 10"/>
-          <p:cNvSpPr/>
-          <p:nvPr/>
-        </p:nvSpPr>
-        <p:spPr>
-          <a:xfrm>
-            <a:off x="914400" y="3383280"/>
-            <a:ext cx="10332720" cy="594360"/>
-          </a:xfrm>
-          <a:prstGeom prst="rect">
-            <a:avLst/>
-          </a:prstGeom>
-          <a:noFill/>
-          <a:ln/>
-        </p:spPr>
-        <p:txBody>
-          <a:bodyPr wrap="square" rtlCol="0" anchor="ctr"/>
-          <a:lstStyle/>
-          <a:p>
-            <a:pPr indent="0" marL="0">
-              <a:lnSpc>
-                <a:spcPts val="1400"/>
-              </a:lnSpc>
-              <a:buNone/>
-            </a:pPr>
-            <a:r>
-              <a:rPr lang="en-US" sz="1100" dirty="0">
-                <a:solidFill>
-                  <a:srgbClr val="8A7C68"/>
-                </a:solidFill>
-                <a:latin typeface="Segoe UI" pitchFamily="34" charset="0"/>
-                <a:ea typeface="Segoe UI" pitchFamily="34" charset="-122"/>
-                <a:cs typeface="Segoe UI" pitchFamily="34" charset="-120"/>
-              </a:rPr>
-              <a:t>Le numéro de version s'incrémente à chaque enregistrement manuel ; les notes, majorations/minorations et le taux de TVA choisi, qui se perdaient silencieusement, sont désormais bien sauvegardés.</a:t>
-            </a:r>
-            <a:endParaRPr lang="en-US" sz="1100" dirty="0"/>
-          </a:p>
-        </p:txBody>
-      </p:sp>
-      <p:sp>
-        <p:nvSpPr>
-          <p:cNvPr id="13" name="Shape 11"/>
-          <p:cNvSpPr/>
-          <p:nvPr/>
-        </p:nvSpPr>
-        <p:spPr>
-          <a:xfrm>
-            <a:off x="640080" y="4160520"/>
-            <a:ext cx="10881360" cy="1097280"/>
-          </a:xfrm>
-          <a:prstGeom prst="roundRect">
-            <a:avLst>
-              <a:gd name="adj" fmla="val 5000"/>
-            </a:avLst>
-          </a:prstGeom>
-          <a:solidFill>
-            <a:srgbClr val="FFFFFF"/>
-          </a:solidFill>
-          <a:ln w="12700">
-            <a:solidFill>
-              <a:srgbClr val="E4DCCB"/>
-            </a:solidFill>
-            <a:prstDash val="solid"/>
-          </a:ln>
-        </p:spPr>
-      </p:sp>
-      <p:sp>
-        <p:nvSpPr>
-          <p:cNvPr id="14" name="Shape 12"/>
-          <p:cNvSpPr/>
-          <p:nvPr/>
-        </p:nvSpPr>
-        <p:spPr>
-          <a:xfrm>
-            <a:off x="640080" y="4160520"/>
-            <a:ext cx="54864" cy="1097280"/>
-          </a:xfrm>
-          <a:prstGeom prst="rect">
-            <a:avLst/>
-          </a:prstGeom>
-          <a:solidFill>
-            <a:srgbClr val="9A4C1F"/>
-          </a:solidFill>
-          <a:ln/>
-        </p:spPr>
-      </p:sp>
-      <p:sp>
-        <p:nvSpPr>
-          <p:cNvPr id="15" name="Text 13"/>
-          <p:cNvSpPr/>
-          <p:nvPr/>
-        </p:nvSpPr>
-        <p:spPr>
-          <a:xfrm>
-            <a:off x="914400" y="4270248"/>
-            <a:ext cx="10332720" cy="365760"/>
-          </a:xfrm>
-          <a:prstGeom prst="rect">
-            <a:avLst/>
-          </a:prstGeom>
-          <a:noFill/>
-          <a:ln/>
-        </p:spPr>
-        <p:txBody>
-          <a:bodyPr wrap="square" rtlCol="0" anchor="ctr"/>
-          <a:lstStyle/>
-          <a:p>
-            <a:pPr indent="0" marL="0">
-              <a:buNone/>
-            </a:pPr>
-            <a:r>
-              <a:rPr lang="en-US" sz="1400" b="1" dirty="0">
-                <a:solidFill>
-                  <a:srgbClr val="1B1F3B"/>
-                </a:solidFill>
-                <a:latin typeface="Segoe UI" pitchFamily="34" charset="0"/>
-                <a:ea typeface="Segoe UI" pitchFamily="34" charset="-122"/>
-                <a:cs typeface="Segoe UI" pitchFamily="34" charset="-120"/>
-              </a:rPr>
-              <a:t>Taux horaire par défaut sur la bibliothèque</a:t>
-            </a:r>
-            <a:endParaRPr lang="en-US" sz="1400" dirty="0"/>
-          </a:p>
-        </p:txBody>
-      </p:sp>
-      <p:sp>
-        <p:nvSpPr>
-          <p:cNvPr id="16" name="Text 14"/>
-          <p:cNvSpPr/>
-          <p:nvPr/>
-        </p:nvSpPr>
-        <p:spPr>
-          <a:xfrm>
-            <a:off x="914400" y="4617720"/>
-            <a:ext cx="10332720" cy="594360"/>
-          </a:xfrm>
-          <a:prstGeom prst="rect">
-            <a:avLst/>
-          </a:prstGeom>
-          <a:noFill/>
-          <a:ln/>
-        </p:spPr>
-        <p:txBody>
-          <a:bodyPr wrap="square" rtlCol="0" anchor="ctr"/>
-          <a:lstStyle/>
-          <a:p>
-            <a:pPr indent="0" marL="0">
-              <a:lnSpc>
-                <a:spcPts val="1400"/>
-              </a:lnSpc>
-              <a:buNone/>
-            </a:pPr>
-            <a:r>
-              <a:rPr lang="en-US" sz="1100" dirty="0">
-                <a:solidFill>
-                  <a:srgbClr val="8A7C68"/>
-                </a:solidFill>
-                <a:latin typeface="Segoe UI" pitchFamily="34" charset="0"/>
-                <a:ea typeface="Segoe UI" pitchFamily="34" charset="-122"/>
-                <a:cs typeface="Segoe UI" pitchFamily="34" charset="-120"/>
-              </a:rPr>
-              <a:t>Le taux horaire du profil entreprise sert désormais de valeur par défaut pour chaque ouvrage (liste, création, édition, calcul du coût main d'œuvre).</a:t>
-            </a:r>
-            <a:endParaRPr lang="en-US" sz="1100" dirty="0"/>
-          </a:p>
-        </p:txBody>
-      </p:sp>
-      <p:sp>
-        <p:nvSpPr>
-          <p:cNvPr id="17" name="Shape 15"/>
-          <p:cNvSpPr/>
-          <p:nvPr/>
-        </p:nvSpPr>
-        <p:spPr>
-          <a:xfrm>
-            <a:off x="640080" y="5394960"/>
-            <a:ext cx="10881360" cy="1097280"/>
-          </a:xfrm>
-          <a:prstGeom prst="roundRect">
-            <a:avLst>
-              <a:gd name="adj" fmla="val 5000"/>
-            </a:avLst>
-          </a:prstGeom>
-          <a:solidFill>
-            <a:srgbClr val="FFFFFF"/>
-          </a:solidFill>
-          <a:ln w="12700">
-            <a:solidFill>
-              <a:srgbClr val="E4DCCB"/>
-            </a:solidFill>
-            <a:prstDash val="solid"/>
-          </a:ln>
-        </p:spPr>
-      </p:sp>
-      <p:sp>
-        <p:nvSpPr>
-          <p:cNvPr id="18" name="Shape 16"/>
-          <p:cNvSpPr/>
-          <p:nvPr/>
-        </p:nvSpPr>
-        <p:spPr>
-          <a:xfrm>
-            <a:off x="640080" y="5394960"/>
-            <a:ext cx="54864" cy="1097280"/>
-          </a:xfrm>
-          <a:prstGeom prst="rect">
-            <a:avLst/>
-          </a:prstGeom>
-          <a:solidFill>
-            <a:srgbClr val="9A4C1F"/>
-          </a:solidFill>
-          <a:ln/>
-        </p:spPr>
-      </p:sp>
-      <p:sp>
-        <p:nvSpPr>
-          <p:cNvPr id="19" name="Text 17"/>
-          <p:cNvSpPr/>
-          <p:nvPr/>
-        </p:nvSpPr>
-        <p:spPr>
-          <a:xfrm>
-            <a:off x="914400" y="5504688"/>
-            <a:ext cx="10332720" cy="365760"/>
-          </a:xfrm>
-          <a:prstGeom prst="rect">
-            <a:avLst/>
-          </a:prstGeom>
-          <a:noFill/>
-          <a:ln/>
-        </p:spPr>
-        <p:txBody>
-          <a:bodyPr wrap="square" rtlCol="0" anchor="ctr"/>
-          <a:lstStyle/>
-          <a:p>
-            <a:pPr indent="0" marL="0">
-              <a:buNone/>
-            </a:pPr>
-            <a:r>
-              <a:rPr lang="en-US" sz="1400" b="1" dirty="0">
-                <a:solidFill>
-                  <a:srgbClr val="1B1F3B"/>
-                </a:solidFill>
-                <a:latin typeface="Segoe UI" pitchFamily="34" charset="0"/>
-                <a:ea typeface="Segoe UI" pitchFamily="34" charset="-122"/>
-                <a:cs typeface="Segoe UI" pitchFamily="34" charset="-120"/>
-              </a:rPr>
-              <a:t>Restauration de la description des ouvrages de bibliothèque</a:t>
-            </a:r>
-            <a:endParaRPr lang="en-US" sz="1400" dirty="0"/>
-          </a:p>
-        </p:txBody>
-      </p:sp>
-      <p:sp>
-        <p:nvSpPr>
-          <p:cNvPr id="20" name="Text 18"/>
-          <p:cNvSpPr/>
-          <p:nvPr/>
-        </p:nvSpPr>
-        <p:spPr>
-          <a:xfrm>
-            <a:off x="914400" y="5852160"/>
-            <a:ext cx="10332720" cy="594360"/>
-          </a:xfrm>
-          <a:prstGeom prst="rect">
-            <a:avLst/>
-          </a:prstGeom>
-          <a:noFill/>
-          <a:ln/>
-        </p:spPr>
-        <p:txBody>
-          <a:bodyPr wrap="square" rtlCol="0" anchor="ctr"/>
-          <a:lstStyle/>
-          <a:p>
-            <a:pPr indent="0" marL="0">
-              <a:lnSpc>
-                <a:spcPts val="1400"/>
-              </a:lnSpc>
-              <a:buNone/>
-            </a:pPr>
-            <a:r>
-              <a:rPr lang="en-US" sz="1100" dirty="0">
-                <a:solidFill>
-                  <a:srgbClr val="8A7C68"/>
-                </a:solidFill>
-                <a:latin typeface="Segoe UI" pitchFamily="34" charset="0"/>
-                <a:ea typeface="Segoe UI" pitchFamily="34" charset="-122"/>
-                <a:cs typeface="Segoe UI" pitchFamily="34" charset="-120"/>
-              </a:rPr>
-              <a:t>La description déjà saisie dans la Bibliothèque d'ouvrages est désormais reprise automatiquement quand l'ouvrage est ajouté à un devis, au lieu d'être perdue comme auparavant.</a:t>
-            </a:r>
-            <a:endParaRPr lang="en-US" sz="1100" dirty="0"/>
-          </a:p>
-        </p:txBody>
-      </p:sp>
-      <p:sp>
-        <p:nvSpPr>
-          <p:cNvPr id="21" name="Text 19"/>
+              <a:t>Backend</a:t>
+            </a:r>
+            <a:endParaRPr lang="en-US" sz="3800" dirty="0"/>
+          </a:p>
+        </p:txBody>
+      </p:sp>
+      <p:sp>
+        <p:nvSpPr>
+          <p:cNvPr id="4" name="Text 2"/>
+          <p:cNvSpPr/>
+          <p:nvPr/>
+        </p:nvSpPr>
+        <p:spPr>
+          <a:xfrm>
+            <a:off x="640080" y="3429000"/>
+            <a:ext cx="10058400" cy="457200"/>
+          </a:xfrm>
+          <a:prstGeom prst="rect">
+            <a:avLst/>
+          </a:prstGeom>
+          <a:noFill/>
+          <a:ln/>
+        </p:spPr>
+        <p:txBody>
+          <a:bodyPr wrap="square" rtlCol="0" anchor="ctr"/>
+          <a:lstStyle/>
+          <a:p>
+            <a:pPr indent="0" marL="0">
+              <a:buNone/>
+            </a:pPr>
+            <a:r>
+              <a:rPr lang="en-US" sz="1500" dirty="0">
+                <a:solidFill>
+                  <a:srgbClr val="C7C9E0"/>
+                </a:solidFill>
+                <a:latin typeface="Segoe UI" pitchFamily="34" charset="0"/>
+                <a:ea typeface="Segoe UI" pitchFamily="34" charset="-122"/>
+                <a:cs typeface="Segoe UI" pitchFamily="34" charset="-120"/>
+              </a:rPr>
+              <a:t>API, logique métier et intégrations</a:t>
+            </a:r>
+            <a:endParaRPr lang="en-US" sz="1500" dirty="0"/>
+          </a:p>
+        </p:txBody>
+      </p:sp>
+      <p:sp>
+        <p:nvSpPr>
+          <p:cNvPr id="5" name="Text 3"/>
+          <p:cNvSpPr/>
+          <p:nvPr/>
+        </p:nvSpPr>
+        <p:spPr>
+          <a:xfrm>
+            <a:off x="640080" y="3931920"/>
+            <a:ext cx="5486400" cy="365760"/>
+          </a:xfrm>
+          <a:prstGeom prst="rect">
+            <a:avLst/>
+          </a:prstGeom>
+          <a:noFill/>
+          <a:ln/>
+        </p:spPr>
+        <p:txBody>
+          <a:bodyPr wrap="square" rtlCol="0" anchor="ctr"/>
+          <a:lstStyle/>
+          <a:p>
+            <a:pPr indent="0" marL="0">
+              <a:buNone/>
+            </a:pPr>
+            <a:r>
+              <a:rPr lang="en-US" sz="1200" b="1" dirty="0">
+                <a:solidFill>
+                  <a:srgbClr val="C9A96A"/>
+                </a:solidFill>
+                <a:latin typeface="Segoe UI" pitchFamily="34" charset="0"/>
+                <a:ea typeface="Segoe UI" pitchFamily="34" charset="-122"/>
+                <a:cs typeface="Segoe UI" pitchFamily="34" charset="-120"/>
+              </a:rPr>
+              <a:t>32 mise(s) à jour</a:t>
+            </a:r>
+            <a:endParaRPr lang="en-US" sz="1200" dirty="0"/>
+          </a:p>
+        </p:txBody>
+      </p:sp>
+      <p:sp>
+        <p:nvSpPr>
+          <p:cNvPr id="6" name="Text 4"/>
           <p:cNvSpPr/>
           <p:nvPr/>
         </p:nvSpPr>
@@ -9117,7 +8961,7 @@
       </p:sp>
       <p:sp>
         <p:nvSpPr>
-          <p:cNvPr id="22" name="Text 20"/>
+          <p:cNvPr id="7" name="Text 5"/>
           <p:cNvSpPr/>
           <p:nvPr/>
         </p:nvSpPr>
@@ -9280,7 +9124,7 @@
                 <a:ea typeface="Georgia" pitchFamily="34" charset="-122"/>
                 <a:cs typeface="Georgia" pitchFamily="34" charset="-120"/>
               </a:rPr>
-              <a:t>Devis (suite)</a:t>
+              <a:t>Fondations</a:t>
             </a:r>
             <a:endParaRPr lang="en-US" sz="2400" dirty="0"/>
           </a:p>
@@ -9366,7 +9210,7 @@
                 <a:ea typeface="Segoe UI" pitchFamily="34" charset="-122"/>
                 <a:cs typeface="Segoe UI" pitchFamily="34" charset="-120"/>
               </a:rPr>
-              <a:t>Référence client en texte libre</a:t>
+              <a:t>Mise en place initiale de l'application</a:t>
             </a:r>
             <a:endParaRPr lang="en-US" sz="1400" dirty="0"/>
           </a:p>
@@ -9408,7 +9252,7 @@
                 <a:ea typeface="Segoe UI" pitchFamily="34" charset="-122"/>
                 <a:cs typeface="Segoe UI" pitchFamily="34" charset="-120"/>
               </a:rPr>
-              <a:t>La 'Référence client' n'est plus une liste déroulante à choisir (qui pouvait donner l'impression que l'information saisie disparaissait) : c'est maintenant un champ texte simple qui garde exactement ce qui a été écrit.</a:t>
+              <a:t>Structure Next.js App Router, authentification, base de données JSON locale et première version des modules Devis, Chantiers, Équipe, Planning.</a:t>
             </a:r>
             <a:endParaRPr lang="en-US" sz="1100" dirty="0"/>
           </a:p>
@@ -9494,7 +9338,7 @@
                 <a:ea typeface="Segoe UI" pitchFamily="34" charset="-122"/>
                 <a:cs typeface="Segoe UI" pitchFamily="34" charset="-120"/>
               </a:rPr>
-              <a:t>Correction du calcul du total d'un devis (majorations non comptées)</a:t>
+              <a:t>Fiabilisation de l'envoi d'email (SMTP Gmail)</a:t>
             </a:r>
             <a:endParaRPr lang="en-US" sz="1400" dirty="0"/>
           </a:p>
@@ -9536,7 +9380,7 @@
                 <a:ea typeface="Segoe UI" pitchFamily="34" charset="-122"/>
                 <a:cs typeface="Segoe UI" pitchFamily="34" charset="-120"/>
               </a:rPr>
-              <a:t>Le montant Total HT / TVA / Total TTC enregistré pour chaque devis ne prenait pas en compte les majorations (coordination de chantier, provision aléas, assurance décennale), même si elles étaient listées sur le document. Corrigé à la source (calcul serveur) : le total inclut désormais bien les majorations, partout où il est utilisé (tableau de bord, facturation, signature client, archives).</a:t>
+              <a:t>Import dynamique de nodemailer compatible Vercel (ES modules), configuration complète (TLS, authentification).</a:t>
             </a:r>
             <a:endParaRPr lang="en-US" sz="1100" dirty="0"/>
           </a:p>
@@ -9544,263 +9388,7 @@
       </p:sp>
       <p:sp>
         <p:nvSpPr>
-          <p:cNvPr id="13" name="Shape 11"/>
-          <p:cNvSpPr/>
-          <p:nvPr/>
-        </p:nvSpPr>
-        <p:spPr>
-          <a:xfrm>
-            <a:off x="640080" y="4160520"/>
-            <a:ext cx="10881360" cy="1097280"/>
-          </a:xfrm>
-          <a:prstGeom prst="roundRect">
-            <a:avLst>
-              <a:gd name="adj" fmla="val 5000"/>
-            </a:avLst>
-          </a:prstGeom>
-          <a:solidFill>
-            <a:srgbClr val="FFFFFF"/>
-          </a:solidFill>
-          <a:ln w="12700">
-            <a:solidFill>
-              <a:srgbClr val="E4DCCB"/>
-            </a:solidFill>
-            <a:prstDash val="solid"/>
-          </a:ln>
-        </p:spPr>
-      </p:sp>
-      <p:sp>
-        <p:nvSpPr>
-          <p:cNvPr id="14" name="Shape 12"/>
-          <p:cNvSpPr/>
-          <p:nvPr/>
-        </p:nvSpPr>
-        <p:spPr>
-          <a:xfrm>
-            <a:off x="640080" y="4160520"/>
-            <a:ext cx="54864" cy="1097280"/>
-          </a:xfrm>
-          <a:prstGeom prst="rect">
-            <a:avLst/>
-          </a:prstGeom>
-          <a:solidFill>
-            <a:srgbClr val="9A4C1F"/>
-          </a:solidFill>
-          <a:ln/>
-        </p:spPr>
-      </p:sp>
-      <p:sp>
-        <p:nvSpPr>
-          <p:cNvPr id="15" name="Text 13"/>
-          <p:cNvSpPr/>
-          <p:nvPr/>
-        </p:nvSpPr>
-        <p:spPr>
-          <a:xfrm>
-            <a:off x="914400" y="4270248"/>
-            <a:ext cx="10332720" cy="365760"/>
-          </a:xfrm>
-          <a:prstGeom prst="rect">
-            <a:avLst/>
-          </a:prstGeom>
-          <a:noFill/>
-          <a:ln/>
-        </p:spPr>
-        <p:txBody>
-          <a:bodyPr wrap="square" rtlCol="0" anchor="ctr"/>
-          <a:lstStyle/>
-          <a:p>
-            <a:pPr indent="0" marL="0">
-              <a:buNone/>
-            </a:pPr>
-            <a:r>
-              <a:rPr lang="en-US" sz="1400" b="1" dirty="0">
-                <a:solidFill>
-                  <a:srgbClr val="1B1F3B"/>
-                </a:solidFill>
-                <a:latin typeface="Segoe UI" pitchFamily="34" charset="0"/>
-                <a:ea typeface="Segoe UI" pitchFamily="34" charset="-122"/>
-                <a:cs typeface="Segoe UI" pitchFamily="34" charset="-120"/>
-              </a:rPr>
-              <a:t>Deuxième cause trouvée : le total serveur retombait à 0</a:t>
-            </a:r>
-            <a:endParaRPr lang="en-US" sz="1400" dirty="0"/>
-          </a:p>
-        </p:txBody>
-      </p:sp>
-      <p:sp>
-        <p:nvSpPr>
-          <p:cNvPr id="16" name="Text 14"/>
-          <p:cNvSpPr/>
-          <p:nvPr/>
-        </p:nvSpPr>
-        <p:spPr>
-          <a:xfrm>
-            <a:off x="914400" y="4617720"/>
-            <a:ext cx="10332720" cy="594360"/>
-          </a:xfrm>
-          <a:prstGeom prst="rect">
-            <a:avLst/>
-          </a:prstGeom>
-          <a:noFill/>
-          <a:ln/>
-        </p:spPr>
-        <p:txBody>
-          <a:bodyPr wrap="square" rtlCol="0" anchor="ctr"/>
-          <a:lstStyle/>
-          <a:p>
-            <a:pPr indent="0" marL="0">
-              <a:lnSpc>
-                <a:spcPts val="1400"/>
-              </a:lnSpc>
-              <a:buNone/>
-            </a:pPr>
-            <a:r>
-              <a:rPr lang="en-US" sz="1100" dirty="0">
-                <a:solidFill>
-                  <a:srgbClr val="8A7C68"/>
-                </a:solidFill>
-                <a:latin typeface="Segoe UI" pitchFamily="34" charset="0"/>
-                <a:ea typeface="Segoe UI" pitchFamily="34" charset="-122"/>
-                <a:cs typeface="Segoe UI" pitchFamily="34" charset="-120"/>
-              </a:rPr>
-              <a:t>Le calcul serveur recalculait chaque ligne à partir de zéro au lieu de faire confiance au montant déjà calculé correctement par l'éditeur, et se trompait sur deux points (un champ technique à 0 mal interprété comme 'prix fixe', une liste de fournitures non reconnue), ramenant le total à 0€ à chaque enregistrement. Corrigé : le serveur fait maintenant confiance au montant de chaque ligne tel qu'il apparaît dans l'éditeur.</a:t>
-            </a:r>
-            <a:endParaRPr lang="en-US" sz="1100" dirty="0"/>
-          </a:p>
-        </p:txBody>
-      </p:sp>
-      <p:sp>
-        <p:nvSpPr>
-          <p:cNvPr id="17" name="Shape 15"/>
-          <p:cNvSpPr/>
-          <p:nvPr/>
-        </p:nvSpPr>
-        <p:spPr>
-          <a:xfrm>
-            <a:off x="640080" y="5394960"/>
-            <a:ext cx="10881360" cy="1097280"/>
-          </a:xfrm>
-          <a:prstGeom prst="roundRect">
-            <a:avLst>
-              <a:gd name="adj" fmla="val 5000"/>
-            </a:avLst>
-          </a:prstGeom>
-          <a:solidFill>
-            <a:srgbClr val="FFFFFF"/>
-          </a:solidFill>
-          <a:ln w="12700">
-            <a:solidFill>
-              <a:srgbClr val="E4DCCB"/>
-            </a:solidFill>
-            <a:prstDash val="solid"/>
-          </a:ln>
-        </p:spPr>
-      </p:sp>
-      <p:sp>
-        <p:nvSpPr>
-          <p:cNvPr id="18" name="Shape 16"/>
-          <p:cNvSpPr/>
-          <p:nvPr/>
-        </p:nvSpPr>
-        <p:spPr>
-          <a:xfrm>
-            <a:off x="640080" y="5394960"/>
-            <a:ext cx="54864" cy="1097280"/>
-          </a:xfrm>
-          <a:prstGeom prst="rect">
-            <a:avLst/>
-          </a:prstGeom>
-          <a:solidFill>
-            <a:srgbClr val="9A4C1F"/>
-          </a:solidFill>
-          <a:ln/>
-        </p:spPr>
-      </p:sp>
-      <p:sp>
-        <p:nvSpPr>
-          <p:cNvPr id="19" name="Text 17"/>
-          <p:cNvSpPr/>
-          <p:nvPr/>
-        </p:nvSpPr>
-        <p:spPr>
-          <a:xfrm>
-            <a:off x="914400" y="5504688"/>
-            <a:ext cx="10332720" cy="365760"/>
-          </a:xfrm>
-          <a:prstGeom prst="rect">
-            <a:avLst/>
-          </a:prstGeom>
-          <a:noFill/>
-          <a:ln/>
-        </p:spPr>
-        <p:txBody>
-          <a:bodyPr wrap="square" rtlCol="0" anchor="ctr"/>
-          <a:lstStyle/>
-          <a:p>
-            <a:pPr indent="0" marL="0">
-              <a:buNone/>
-            </a:pPr>
-            <a:r>
-              <a:rPr lang="en-US" sz="1400" b="1" dirty="0">
-                <a:solidFill>
-                  <a:srgbClr val="1B1F3B"/>
-                </a:solidFill>
-                <a:latin typeface="Segoe UI" pitchFamily="34" charset="0"/>
-                <a:ea typeface="Segoe UI" pitchFamily="34" charset="-122"/>
-                <a:cs typeface="Segoe UI" pitchFamily="34" charset="-120"/>
-              </a:rPr>
-              <a:t>Taux de TVA de chaque ligne aligné sur le devis</a:t>
-            </a:r>
-            <a:endParaRPr lang="en-US" sz="1400" dirty="0"/>
-          </a:p>
-        </p:txBody>
-      </p:sp>
-      <p:sp>
-        <p:nvSpPr>
-          <p:cNvPr id="20" name="Text 18"/>
-          <p:cNvSpPr/>
-          <p:nvPr/>
-        </p:nvSpPr>
-        <p:spPr>
-          <a:xfrm>
-            <a:off x="914400" y="5852160"/>
-            <a:ext cx="10332720" cy="594360"/>
-          </a:xfrm>
-          <a:prstGeom prst="rect">
-            <a:avLst/>
-          </a:prstGeom>
-          <a:noFill/>
-          <a:ln/>
-        </p:spPr>
-        <p:txBody>
-          <a:bodyPr wrap="square" rtlCol="0" anchor="ctr"/>
-          <a:lstStyle/>
-          <a:p>
-            <a:pPr indent="0" marL="0">
-              <a:lnSpc>
-                <a:spcPts val="1400"/>
-              </a:lnSpc>
-              <a:buNone/>
-            </a:pPr>
-            <a:r>
-              <a:rPr lang="en-US" sz="1100" dirty="0">
-                <a:solidFill>
-                  <a:srgbClr val="8A7C68"/>
-                </a:solidFill>
-                <a:latin typeface="Segoe UI" pitchFamily="34" charset="0"/>
-                <a:ea typeface="Segoe UI" pitchFamily="34" charset="-122"/>
-                <a:cs typeface="Segoe UI" pitchFamily="34" charset="-120"/>
-              </a:rPr>
-              <a:t>Chaque ligne de devis calculait sa propre TVA à 20% par défaut, sans tenir compte du taux choisi pour le devis (ex. 10%) — corrigé pour utiliser le taux réellement sélectionné.</a:t>
-            </a:r>
-            <a:endParaRPr lang="en-US" sz="1100" dirty="0"/>
-          </a:p>
-        </p:txBody>
-      </p:sp>
-      <p:sp>
-        <p:nvSpPr>
-          <p:cNvPr id="21" name="Text 19"/>
+          <p:cNvPr id="13" name="Text 11"/>
           <p:cNvSpPr/>
           <p:nvPr/>
         </p:nvSpPr>
@@ -9839,7 +9427,7 @@
       </p:sp>
       <p:sp>
         <p:nvSpPr>
-          <p:cNvPr id="22" name="Text 20"/>
+          <p:cNvPr id="14" name="Text 12"/>
           <p:cNvSpPr/>
           <p:nvPr/>
         </p:nvSpPr>
@@ -10046,7 +9634,7 @@
                 <a:ea typeface="Georgia" pitchFamily="34" charset="-122"/>
                 <a:cs typeface="Georgia" pitchFamily="34" charset="-120"/>
               </a:rPr>
-              <a:t>74</a:t>
+              <a:t>83</a:t>
             </a:r>
             <a:endParaRPr lang="en-US" sz="3200" dirty="0"/>
           </a:p>
@@ -10151,7 +9739,7 @@
                 <a:ea typeface="Georgia" pitchFamily="34" charset="-122"/>
                 <a:cs typeface="Georgia" pitchFamily="34" charset="-120"/>
               </a:rPr>
-              <a:t>38</a:t>
+              <a:t>41</a:t>
             </a:r>
             <a:endParaRPr lang="en-US" sz="3200" dirty="0"/>
           </a:p>
@@ -10256,7 +9844,7 @@
                 <a:ea typeface="Georgia" pitchFamily="34" charset="-122"/>
                 <a:cs typeface="Georgia" pitchFamily="34" charset="-120"/>
               </a:rPr>
-              <a:t>28</a:t>
+              <a:t>32</a:t>
             </a:r>
             <a:endParaRPr lang="en-US" sz="3200" dirty="0"/>
           </a:p>
@@ -10361,7 +9949,7 @@
                 <a:ea typeface="Georgia" pitchFamily="34" charset="-122"/>
                 <a:cs typeface="Georgia" pitchFamily="34" charset="-120"/>
               </a:rPr>
-              <a:t>8</a:t>
+              <a:t>10</a:t>
             </a:r>
             <a:endParaRPr lang="en-US" sz="3200" dirty="0"/>
           </a:p>
@@ -10767,7 +10355,7 @@
                 <a:ea typeface="Georgia" pitchFamily="34" charset="-122"/>
                 <a:cs typeface="Georgia" pitchFamily="34" charset="-120"/>
               </a:rPr>
-              <a:t>Chantiers</a:t>
+              <a:t>Devis</a:t>
             </a:r>
             <a:endParaRPr lang="en-US" sz="2400" dirty="0"/>
           </a:p>
@@ -10853,7 +10441,7 @@
                 <a:ea typeface="Segoe UI" pitchFamily="34" charset="-122"/>
                 <a:cs typeface="Segoe UI" pitchFamily="34" charset="-120"/>
               </a:rPr>
-              <a:t>Correction d'un bug bloquant majeur</a:t>
+              <a:t>Génération PDF des devis réparée</a:t>
             </a:r>
             <a:endParaRPr lang="en-US" sz="1400" dirty="0"/>
           </a:p>
@@ -10895,7 +10483,7 @@
                 <a:ea typeface="Segoe UI" pitchFamily="34" charset="-122"/>
                 <a:cs typeface="Segoe UI" pitchFamily="34" charset="-120"/>
               </a:rPr>
-              <a:t>Un chantier ne pouvait être consulté que si son devis était déjà signé par le client, empêchant toute préparation en amont. Corrigé : la fiche chantier est désormais accessible dès sa création.</a:t>
+              <a:t>La génération/aperçu PDF lisait encore l'ancien fichier JSON local et ne trouvait plus les devis créés depuis la migration Supabase ; corrigée pour lire directement la table partagée.</a:t>
             </a:r>
             <a:endParaRPr lang="en-US" sz="1100" dirty="0"/>
           </a:p>
@@ -10981,7 +10569,7 @@
                 <a:ea typeface="Segoe UI" pitchFamily="34" charset="-122"/>
                 <a:cs typeface="Segoe UI" pitchFamily="34" charset="-120"/>
               </a:rPr>
-              <a:t>Dépenses liées à un ouvrage précis</a:t>
+              <a:t>Versioning et sauvegarde complète du devis</a:t>
             </a:r>
             <a:endParaRPr lang="en-US" sz="1400" dirty="0"/>
           </a:p>
@@ -11023,7 +10611,7 @@
                 <a:ea typeface="Segoe UI" pitchFamily="34" charset="-122"/>
                 <a:cs typeface="Segoe UI" pitchFamily="34" charset="-120"/>
               </a:rPr>
-              <a:t>L'API des dépenses accepte désormais un identifiant de tâche (ouvrage) en plus du chantier, pour un suivi financier plus fin.</a:t>
+              <a:t>Le numéro de version s'incrémente à chaque enregistrement manuel ; les notes, majorations/minorations et le taux de TVA choisi, qui se perdaient silencieusement, sont désormais bien sauvegardés.</a:t>
             </a:r>
             <a:endParaRPr lang="en-US" sz="1100" dirty="0"/>
           </a:p>
@@ -11031,7 +10619,263 @@
       </p:sp>
       <p:sp>
         <p:nvSpPr>
-          <p:cNvPr id="13" name="Text 11"/>
+          <p:cNvPr id="13" name="Shape 11"/>
+          <p:cNvSpPr/>
+          <p:nvPr/>
+        </p:nvSpPr>
+        <p:spPr>
+          <a:xfrm>
+            <a:off x="640080" y="4160520"/>
+            <a:ext cx="10881360" cy="1097280"/>
+          </a:xfrm>
+          <a:prstGeom prst="roundRect">
+            <a:avLst>
+              <a:gd name="adj" fmla="val 5000"/>
+            </a:avLst>
+          </a:prstGeom>
+          <a:solidFill>
+            <a:srgbClr val="FFFFFF"/>
+          </a:solidFill>
+          <a:ln w="12700">
+            <a:solidFill>
+              <a:srgbClr val="E4DCCB"/>
+            </a:solidFill>
+            <a:prstDash val="solid"/>
+          </a:ln>
+        </p:spPr>
+      </p:sp>
+      <p:sp>
+        <p:nvSpPr>
+          <p:cNvPr id="14" name="Shape 12"/>
+          <p:cNvSpPr/>
+          <p:nvPr/>
+        </p:nvSpPr>
+        <p:spPr>
+          <a:xfrm>
+            <a:off x="640080" y="4160520"/>
+            <a:ext cx="54864" cy="1097280"/>
+          </a:xfrm>
+          <a:prstGeom prst="rect">
+            <a:avLst/>
+          </a:prstGeom>
+          <a:solidFill>
+            <a:srgbClr val="9A4C1F"/>
+          </a:solidFill>
+          <a:ln/>
+        </p:spPr>
+      </p:sp>
+      <p:sp>
+        <p:nvSpPr>
+          <p:cNvPr id="15" name="Text 13"/>
+          <p:cNvSpPr/>
+          <p:nvPr/>
+        </p:nvSpPr>
+        <p:spPr>
+          <a:xfrm>
+            <a:off x="914400" y="4270248"/>
+            <a:ext cx="10332720" cy="365760"/>
+          </a:xfrm>
+          <a:prstGeom prst="rect">
+            <a:avLst/>
+          </a:prstGeom>
+          <a:noFill/>
+          <a:ln/>
+        </p:spPr>
+        <p:txBody>
+          <a:bodyPr wrap="square" rtlCol="0" anchor="ctr"/>
+          <a:lstStyle/>
+          <a:p>
+            <a:pPr indent="0" marL="0">
+              <a:buNone/>
+            </a:pPr>
+            <a:r>
+              <a:rPr lang="en-US" sz="1400" b="1" dirty="0">
+                <a:solidFill>
+                  <a:srgbClr val="1B1F3B"/>
+                </a:solidFill>
+                <a:latin typeface="Segoe UI" pitchFamily="34" charset="0"/>
+                <a:ea typeface="Segoe UI" pitchFamily="34" charset="-122"/>
+                <a:cs typeface="Segoe UI" pitchFamily="34" charset="-120"/>
+              </a:rPr>
+              <a:t>Taux horaire par défaut sur la bibliothèque</a:t>
+            </a:r>
+            <a:endParaRPr lang="en-US" sz="1400" dirty="0"/>
+          </a:p>
+        </p:txBody>
+      </p:sp>
+      <p:sp>
+        <p:nvSpPr>
+          <p:cNvPr id="16" name="Text 14"/>
+          <p:cNvSpPr/>
+          <p:nvPr/>
+        </p:nvSpPr>
+        <p:spPr>
+          <a:xfrm>
+            <a:off x="914400" y="4617720"/>
+            <a:ext cx="10332720" cy="594360"/>
+          </a:xfrm>
+          <a:prstGeom prst="rect">
+            <a:avLst/>
+          </a:prstGeom>
+          <a:noFill/>
+          <a:ln/>
+        </p:spPr>
+        <p:txBody>
+          <a:bodyPr wrap="square" rtlCol="0" anchor="ctr"/>
+          <a:lstStyle/>
+          <a:p>
+            <a:pPr indent="0" marL="0">
+              <a:lnSpc>
+                <a:spcPts val="1400"/>
+              </a:lnSpc>
+              <a:buNone/>
+            </a:pPr>
+            <a:r>
+              <a:rPr lang="en-US" sz="1100" dirty="0">
+                <a:solidFill>
+                  <a:srgbClr val="8A7C68"/>
+                </a:solidFill>
+                <a:latin typeface="Segoe UI" pitchFamily="34" charset="0"/>
+                <a:ea typeface="Segoe UI" pitchFamily="34" charset="-122"/>
+                <a:cs typeface="Segoe UI" pitchFamily="34" charset="-120"/>
+              </a:rPr>
+              <a:t>Le taux horaire du profil entreprise sert désormais de valeur par défaut pour chaque ouvrage (liste, création, édition, calcul du coût main d'œuvre).</a:t>
+            </a:r>
+            <a:endParaRPr lang="en-US" sz="1100" dirty="0"/>
+          </a:p>
+        </p:txBody>
+      </p:sp>
+      <p:sp>
+        <p:nvSpPr>
+          <p:cNvPr id="17" name="Shape 15"/>
+          <p:cNvSpPr/>
+          <p:nvPr/>
+        </p:nvSpPr>
+        <p:spPr>
+          <a:xfrm>
+            <a:off x="640080" y="5394960"/>
+            <a:ext cx="10881360" cy="1097280"/>
+          </a:xfrm>
+          <a:prstGeom prst="roundRect">
+            <a:avLst>
+              <a:gd name="adj" fmla="val 5000"/>
+            </a:avLst>
+          </a:prstGeom>
+          <a:solidFill>
+            <a:srgbClr val="FFFFFF"/>
+          </a:solidFill>
+          <a:ln w="12700">
+            <a:solidFill>
+              <a:srgbClr val="E4DCCB"/>
+            </a:solidFill>
+            <a:prstDash val="solid"/>
+          </a:ln>
+        </p:spPr>
+      </p:sp>
+      <p:sp>
+        <p:nvSpPr>
+          <p:cNvPr id="18" name="Shape 16"/>
+          <p:cNvSpPr/>
+          <p:nvPr/>
+        </p:nvSpPr>
+        <p:spPr>
+          <a:xfrm>
+            <a:off x="640080" y="5394960"/>
+            <a:ext cx="54864" cy="1097280"/>
+          </a:xfrm>
+          <a:prstGeom prst="rect">
+            <a:avLst/>
+          </a:prstGeom>
+          <a:solidFill>
+            <a:srgbClr val="9A4C1F"/>
+          </a:solidFill>
+          <a:ln/>
+        </p:spPr>
+      </p:sp>
+      <p:sp>
+        <p:nvSpPr>
+          <p:cNvPr id="19" name="Text 17"/>
+          <p:cNvSpPr/>
+          <p:nvPr/>
+        </p:nvSpPr>
+        <p:spPr>
+          <a:xfrm>
+            <a:off x="914400" y="5504688"/>
+            <a:ext cx="10332720" cy="365760"/>
+          </a:xfrm>
+          <a:prstGeom prst="rect">
+            <a:avLst/>
+          </a:prstGeom>
+          <a:noFill/>
+          <a:ln/>
+        </p:spPr>
+        <p:txBody>
+          <a:bodyPr wrap="square" rtlCol="0" anchor="ctr"/>
+          <a:lstStyle/>
+          <a:p>
+            <a:pPr indent="0" marL="0">
+              <a:buNone/>
+            </a:pPr>
+            <a:r>
+              <a:rPr lang="en-US" sz="1400" b="1" dirty="0">
+                <a:solidFill>
+                  <a:srgbClr val="1B1F3B"/>
+                </a:solidFill>
+                <a:latin typeface="Segoe UI" pitchFamily="34" charset="0"/>
+                <a:ea typeface="Segoe UI" pitchFamily="34" charset="-122"/>
+                <a:cs typeface="Segoe UI" pitchFamily="34" charset="-120"/>
+              </a:rPr>
+              <a:t>Restauration de la description des ouvrages de bibliothèque</a:t>
+            </a:r>
+            <a:endParaRPr lang="en-US" sz="1400" dirty="0"/>
+          </a:p>
+        </p:txBody>
+      </p:sp>
+      <p:sp>
+        <p:nvSpPr>
+          <p:cNvPr id="20" name="Text 18"/>
+          <p:cNvSpPr/>
+          <p:nvPr/>
+        </p:nvSpPr>
+        <p:spPr>
+          <a:xfrm>
+            <a:off x="914400" y="5852160"/>
+            <a:ext cx="10332720" cy="594360"/>
+          </a:xfrm>
+          <a:prstGeom prst="rect">
+            <a:avLst/>
+          </a:prstGeom>
+          <a:noFill/>
+          <a:ln/>
+        </p:spPr>
+        <p:txBody>
+          <a:bodyPr wrap="square" rtlCol="0" anchor="ctr"/>
+          <a:lstStyle/>
+          <a:p>
+            <a:pPr indent="0" marL="0">
+              <a:lnSpc>
+                <a:spcPts val="1400"/>
+              </a:lnSpc>
+              <a:buNone/>
+            </a:pPr>
+            <a:r>
+              <a:rPr lang="en-US" sz="1100" dirty="0">
+                <a:solidFill>
+                  <a:srgbClr val="8A7C68"/>
+                </a:solidFill>
+                <a:latin typeface="Segoe UI" pitchFamily="34" charset="0"/>
+                <a:ea typeface="Segoe UI" pitchFamily="34" charset="-122"/>
+                <a:cs typeface="Segoe UI" pitchFamily="34" charset="-120"/>
+              </a:rPr>
+              <a:t>La description déjà saisie dans la Bibliothèque d'ouvrages est désormais reprise automatiquement quand l'ouvrage est ajouté à un devis, au lieu d'être perdue comme auparavant.</a:t>
+            </a:r>
+            <a:endParaRPr lang="en-US" sz="1100" dirty="0"/>
+          </a:p>
+        </p:txBody>
+      </p:sp>
+      <p:sp>
+        <p:nvSpPr>
+          <p:cNvPr id="21" name="Text 19"/>
           <p:cNvSpPr/>
           <p:nvPr/>
         </p:nvSpPr>
@@ -11070,7 +10914,7 @@
       </p:sp>
       <p:sp>
         <p:nvSpPr>
-          <p:cNvPr id="14" name="Text 12"/>
+          <p:cNvPr id="22" name="Text 20"/>
           <p:cNvSpPr/>
           <p:nvPr/>
         </p:nvSpPr>
@@ -11233,7 +11077,7 @@
                 <a:ea typeface="Georgia" pitchFamily="34" charset="-122"/>
                 <a:cs typeface="Georgia" pitchFamily="34" charset="-120"/>
               </a:rPr>
-              <a:t>Équipe</a:t>
+              <a:t>Devis (suite)</a:t>
             </a:r>
             <a:endParaRPr lang="en-US" sz="2400" dirty="0"/>
           </a:p>
@@ -11319,7 +11163,7 @@
                 <a:ea typeface="Segoe UI" pitchFamily="34" charset="-122"/>
                 <a:cs typeface="Segoe UI" pitchFamily="34" charset="-120"/>
               </a:rPr>
-              <a:t>Six types de pointage</a:t>
+              <a:t>Référence client en texte libre</a:t>
             </a:r>
             <a:endParaRPr lang="en-US" sz="1400" dirty="0"/>
           </a:p>
@@ -11361,7 +11205,7 @@
                 <a:ea typeface="Segoe UI" pitchFamily="34" charset="-122"/>
                 <a:cs typeface="Segoe UI" pitchFamily="34" charset="-120"/>
               </a:rPr>
-              <a:t>Heures de travail, jour de travail, forfait, ouvrage, passage, déplacement — chacun avec date et montant ; le montant des heures est calculé automatiquement à partir du taux horaire de l'ouvrier.</a:t>
+              <a:t>La 'Référence client' n'est plus une liste déroulante à choisir (qui pouvait donner l'impression que l'information saisie disparaissait) : c'est maintenant un champ texte simple qui garde exactement ce qui a été écrit.</a:t>
             </a:r>
             <a:endParaRPr lang="en-US" sz="1100" dirty="0"/>
           </a:p>
@@ -11447,7 +11291,7 @@
                 <a:ea typeface="Segoe UI" pitchFamily="34" charset="-122"/>
                 <a:cs typeface="Segoe UI" pitchFamily="34" charset="-120"/>
               </a:rPr>
-              <a:t>Alertes automatiques de dépassement / manque d'heures</a:t>
+              <a:t>Correction du calcul du total d'un devis (majorations non comptées)</a:t>
             </a:r>
             <a:endParaRPr lang="en-US" sz="1400" dirty="0"/>
           </a:p>
@@ -11489,7 +11333,7 @@
                 <a:ea typeface="Segoe UI" pitchFamily="34" charset="-122"/>
                 <a:cs typeface="Segoe UI" pitchFamily="34" charset="-120"/>
               </a:rPr>
-              <a:t>À la fin de chaque semaine, si le total travaillé diffère du contrat de plus de 15 minutes, une notification est envoyée automatiquement à l'entreprise (une seule fois par semaine et par ouvrier).</a:t>
+              <a:t>Le montant Total HT / TVA / Total TTC enregistré pour chaque devis ne prenait pas en compte les majorations (coordination de chantier, provision aléas, assurance décennale), même si elles étaient listées sur le document. Corrigé à la source (calcul serveur) : le total inclut désormais bien les majorations, partout où il est utilisé (tableau de bord, facturation, signature client, archives).</a:t>
             </a:r>
             <a:endParaRPr lang="en-US" sz="1100" dirty="0"/>
           </a:p>
@@ -11575,7 +11419,7 @@
                 <a:ea typeface="Segoe UI" pitchFamily="34" charset="-122"/>
                 <a:cs typeface="Segoe UI" pitchFamily="34" charset="-120"/>
               </a:rPr>
-              <a:t>Export PDF du relevé d'heures</a:t>
+              <a:t>Deuxième cause trouvée : le total serveur retombait à 0</a:t>
             </a:r>
             <a:endParaRPr lang="en-US" sz="1400" dirty="0"/>
           </a:p>
@@ -11617,7 +11461,7 @@
                 <a:ea typeface="Segoe UI" pitchFamily="34" charset="-122"/>
                 <a:cs typeface="Segoe UI" pitchFamily="34" charset="-120"/>
               </a:rPr>
-              <a:t>Génération d'un PDF mensuel par ouvrier : détail par journée/type de pointage, totaux hebdomadaires, total du mois en heures et en montant — pensé pour la comptabilité et la gestion de la paie.</a:t>
+              <a:t>Le calcul serveur recalculait chaque ligne à partir de zéro au lieu de faire confiance au montant déjà calculé correctement par l'éditeur, et se trompait sur deux points (un champ technique à 0 mal interprété comme 'prix fixe', une liste de fournitures non reconnue), ramenant le total à 0€ à chaque enregistrement. Corrigé : le serveur fait maintenant confiance au montant de chaque ligne tel qu'il apparaît dans l'éditeur.</a:t>
             </a:r>
             <a:endParaRPr lang="en-US" sz="1100" dirty="0"/>
           </a:p>
@@ -11625,7 +11469,135 @@
       </p:sp>
       <p:sp>
         <p:nvSpPr>
-          <p:cNvPr id="17" name="Text 15"/>
+          <p:cNvPr id="17" name="Shape 15"/>
+          <p:cNvSpPr/>
+          <p:nvPr/>
+        </p:nvSpPr>
+        <p:spPr>
+          <a:xfrm>
+            <a:off x="640080" y="5394960"/>
+            <a:ext cx="10881360" cy="1097280"/>
+          </a:xfrm>
+          <a:prstGeom prst="roundRect">
+            <a:avLst>
+              <a:gd name="adj" fmla="val 5000"/>
+            </a:avLst>
+          </a:prstGeom>
+          <a:solidFill>
+            <a:srgbClr val="FFFFFF"/>
+          </a:solidFill>
+          <a:ln w="12700">
+            <a:solidFill>
+              <a:srgbClr val="E4DCCB"/>
+            </a:solidFill>
+            <a:prstDash val="solid"/>
+          </a:ln>
+        </p:spPr>
+      </p:sp>
+      <p:sp>
+        <p:nvSpPr>
+          <p:cNvPr id="18" name="Shape 16"/>
+          <p:cNvSpPr/>
+          <p:nvPr/>
+        </p:nvSpPr>
+        <p:spPr>
+          <a:xfrm>
+            <a:off x="640080" y="5394960"/>
+            <a:ext cx="54864" cy="1097280"/>
+          </a:xfrm>
+          <a:prstGeom prst="rect">
+            <a:avLst/>
+          </a:prstGeom>
+          <a:solidFill>
+            <a:srgbClr val="9A4C1F"/>
+          </a:solidFill>
+          <a:ln/>
+        </p:spPr>
+      </p:sp>
+      <p:sp>
+        <p:nvSpPr>
+          <p:cNvPr id="19" name="Text 17"/>
+          <p:cNvSpPr/>
+          <p:nvPr/>
+        </p:nvSpPr>
+        <p:spPr>
+          <a:xfrm>
+            <a:off x="914400" y="5504688"/>
+            <a:ext cx="10332720" cy="365760"/>
+          </a:xfrm>
+          <a:prstGeom prst="rect">
+            <a:avLst/>
+          </a:prstGeom>
+          <a:noFill/>
+          <a:ln/>
+        </p:spPr>
+        <p:txBody>
+          <a:bodyPr wrap="square" rtlCol="0" anchor="ctr"/>
+          <a:lstStyle/>
+          <a:p>
+            <a:pPr indent="0" marL="0">
+              <a:buNone/>
+            </a:pPr>
+            <a:r>
+              <a:rPr lang="en-US" sz="1400" b="1" dirty="0">
+                <a:solidFill>
+                  <a:srgbClr val="1B1F3B"/>
+                </a:solidFill>
+                <a:latin typeface="Segoe UI" pitchFamily="34" charset="0"/>
+                <a:ea typeface="Segoe UI" pitchFamily="34" charset="-122"/>
+                <a:cs typeface="Segoe UI" pitchFamily="34" charset="-120"/>
+              </a:rPr>
+              <a:t>Taux de TVA de chaque ligne aligné sur le devis</a:t>
+            </a:r>
+            <a:endParaRPr lang="en-US" sz="1400" dirty="0"/>
+          </a:p>
+        </p:txBody>
+      </p:sp>
+      <p:sp>
+        <p:nvSpPr>
+          <p:cNvPr id="20" name="Text 18"/>
+          <p:cNvSpPr/>
+          <p:nvPr/>
+        </p:nvSpPr>
+        <p:spPr>
+          <a:xfrm>
+            <a:off x="914400" y="5852160"/>
+            <a:ext cx="10332720" cy="594360"/>
+          </a:xfrm>
+          <a:prstGeom prst="rect">
+            <a:avLst/>
+          </a:prstGeom>
+          <a:noFill/>
+          <a:ln/>
+        </p:spPr>
+        <p:txBody>
+          <a:bodyPr wrap="square" rtlCol="0" anchor="ctr"/>
+          <a:lstStyle/>
+          <a:p>
+            <a:pPr indent="0" marL="0">
+              <a:lnSpc>
+                <a:spcPts val="1400"/>
+              </a:lnSpc>
+              <a:buNone/>
+            </a:pPr>
+            <a:r>
+              <a:rPr lang="en-US" sz="1100" dirty="0">
+                <a:solidFill>
+                  <a:srgbClr val="8A7C68"/>
+                </a:solidFill>
+                <a:latin typeface="Segoe UI" pitchFamily="34" charset="0"/>
+                <a:ea typeface="Segoe UI" pitchFamily="34" charset="-122"/>
+                <a:cs typeface="Segoe UI" pitchFamily="34" charset="-120"/>
+              </a:rPr>
+              <a:t>Chaque ligne de devis calculait sa propre TVA à 20% par défaut, sans tenir compte du taux choisi pour le devis (ex. 10%) — corrigé pour utiliser le taux réellement sélectionné.</a:t>
+            </a:r>
+            <a:endParaRPr lang="en-US" sz="1100" dirty="0"/>
+          </a:p>
+        </p:txBody>
+      </p:sp>
+      <p:sp>
+        <p:nvSpPr>
+          <p:cNvPr id="21" name="Text 19"/>
           <p:cNvSpPr/>
           <p:nvPr/>
         </p:nvSpPr>
@@ -11664,7 +11636,7 @@
       </p:sp>
       <p:sp>
         <p:nvSpPr>
-          <p:cNvPr id="18" name="Text 16"/>
+          <p:cNvPr id="22" name="Text 20"/>
           <p:cNvSpPr/>
           <p:nvPr/>
         </p:nvSpPr>
@@ -11827,7 +11799,7 @@
                 <a:ea typeface="Georgia" pitchFamily="34" charset="-122"/>
                 <a:cs typeface="Georgia" pitchFamily="34" charset="-120"/>
               </a:rPr>
-              <a:t>Notifications</a:t>
+              <a:t>Chantiers</a:t>
             </a:r>
             <a:endParaRPr lang="en-US" sz="2400" dirty="0"/>
           </a:p>
@@ -11913,7 +11885,7 @@
                 <a:ea typeface="Segoe UI" pitchFamily="34" charset="-122"/>
                 <a:cs typeface="Segoe UI" pitchFamily="34" charset="-120"/>
               </a:rPr>
-              <a:t>Envoi d'email réel à la signature du devis</a:t>
+              <a:t>Correction d'un bug bloquant majeur</a:t>
             </a:r>
             <a:endParaRPr lang="en-US" sz="1400" dirty="0"/>
           </a:p>
@@ -11955,7 +11927,7 @@
                 <a:ea typeface="Segoe UI" pitchFamily="34" charset="-122"/>
                 <a:cs typeface="Segoe UI" pitchFamily="34" charset="-120"/>
               </a:rPr>
-              <a:t>Le premier envoi des identifiants client déclenche désormais un vrai email (SMTP), et plus seulement une file d'attente locale.</a:t>
+              <a:t>Un chantier ne pouvait être consulté que si son devis était déjà signé par le client, empêchant toute préparation en amont. Corrigé : la fiche chantier est désormais accessible dès sa création.</a:t>
             </a:r>
             <a:endParaRPr lang="en-US" sz="1100" dirty="0"/>
           </a:p>
@@ -11963,7 +11935,135 @@
       </p:sp>
       <p:sp>
         <p:nvSpPr>
-          <p:cNvPr id="9" name="Text 7"/>
+          <p:cNvPr id="9" name="Shape 7"/>
+          <p:cNvSpPr/>
+          <p:nvPr/>
+        </p:nvSpPr>
+        <p:spPr>
+          <a:xfrm>
+            <a:off x="640080" y="2926080"/>
+            <a:ext cx="10881360" cy="1097280"/>
+          </a:xfrm>
+          <a:prstGeom prst="roundRect">
+            <a:avLst>
+              <a:gd name="adj" fmla="val 5000"/>
+            </a:avLst>
+          </a:prstGeom>
+          <a:solidFill>
+            <a:srgbClr val="FFFFFF"/>
+          </a:solidFill>
+          <a:ln w="12700">
+            <a:solidFill>
+              <a:srgbClr val="E4DCCB"/>
+            </a:solidFill>
+            <a:prstDash val="solid"/>
+          </a:ln>
+        </p:spPr>
+      </p:sp>
+      <p:sp>
+        <p:nvSpPr>
+          <p:cNvPr id="10" name="Shape 8"/>
+          <p:cNvSpPr/>
+          <p:nvPr/>
+        </p:nvSpPr>
+        <p:spPr>
+          <a:xfrm>
+            <a:off x="640080" y="2926080"/>
+            <a:ext cx="54864" cy="1097280"/>
+          </a:xfrm>
+          <a:prstGeom prst="rect">
+            <a:avLst/>
+          </a:prstGeom>
+          <a:solidFill>
+            <a:srgbClr val="9A4C1F"/>
+          </a:solidFill>
+          <a:ln/>
+        </p:spPr>
+      </p:sp>
+      <p:sp>
+        <p:nvSpPr>
+          <p:cNvPr id="11" name="Text 9"/>
+          <p:cNvSpPr/>
+          <p:nvPr/>
+        </p:nvSpPr>
+        <p:spPr>
+          <a:xfrm>
+            <a:off x="914400" y="3035808"/>
+            <a:ext cx="10332720" cy="365760"/>
+          </a:xfrm>
+          <a:prstGeom prst="rect">
+            <a:avLst/>
+          </a:prstGeom>
+          <a:noFill/>
+          <a:ln/>
+        </p:spPr>
+        <p:txBody>
+          <a:bodyPr wrap="square" rtlCol="0" anchor="ctr"/>
+          <a:lstStyle/>
+          <a:p>
+            <a:pPr indent="0" marL="0">
+              <a:buNone/>
+            </a:pPr>
+            <a:r>
+              <a:rPr lang="en-US" sz="1400" b="1" dirty="0">
+                <a:solidFill>
+                  <a:srgbClr val="1B1F3B"/>
+                </a:solidFill>
+                <a:latin typeface="Segoe UI" pitchFamily="34" charset="0"/>
+                <a:ea typeface="Segoe UI" pitchFamily="34" charset="-122"/>
+                <a:cs typeface="Segoe UI" pitchFamily="34" charset="-120"/>
+              </a:rPr>
+              <a:t>Dépenses liées à un ouvrage précis</a:t>
+            </a:r>
+            <a:endParaRPr lang="en-US" sz="1400" dirty="0"/>
+          </a:p>
+        </p:txBody>
+      </p:sp>
+      <p:sp>
+        <p:nvSpPr>
+          <p:cNvPr id="12" name="Text 10"/>
+          <p:cNvSpPr/>
+          <p:nvPr/>
+        </p:nvSpPr>
+        <p:spPr>
+          <a:xfrm>
+            <a:off x="914400" y="3383280"/>
+            <a:ext cx="10332720" cy="594360"/>
+          </a:xfrm>
+          <a:prstGeom prst="rect">
+            <a:avLst/>
+          </a:prstGeom>
+          <a:noFill/>
+          <a:ln/>
+        </p:spPr>
+        <p:txBody>
+          <a:bodyPr wrap="square" rtlCol="0" anchor="ctr"/>
+          <a:lstStyle/>
+          <a:p>
+            <a:pPr indent="0" marL="0">
+              <a:lnSpc>
+                <a:spcPts val="1400"/>
+              </a:lnSpc>
+              <a:buNone/>
+            </a:pPr>
+            <a:r>
+              <a:rPr lang="en-US" sz="1100" dirty="0">
+                <a:solidFill>
+                  <a:srgbClr val="8A7C68"/>
+                </a:solidFill>
+                <a:latin typeface="Segoe UI" pitchFamily="34" charset="0"/>
+                <a:ea typeface="Segoe UI" pitchFamily="34" charset="-122"/>
+                <a:cs typeface="Segoe UI" pitchFamily="34" charset="-120"/>
+              </a:rPr>
+              <a:t>L'API des dépenses accepte désormais un identifiant de tâche (ouvrage) en plus du chantier, pour un suivi financier plus fin.</a:t>
+            </a:r>
+            <a:endParaRPr lang="en-US" sz="1100" dirty="0"/>
+          </a:p>
+        </p:txBody>
+      </p:sp>
+      <p:sp>
+        <p:nvSpPr>
+          <p:cNvPr id="13" name="Text 11"/>
           <p:cNvSpPr/>
           <p:nvPr/>
         </p:nvSpPr>
@@ -12002,7 +12102,7 @@
       </p:sp>
       <p:sp>
         <p:nvSpPr>
-          <p:cNvPr id="10" name="Text 8"/>
+          <p:cNvPr id="14" name="Text 12"/>
           <p:cNvSpPr/>
           <p:nvPr/>
         </p:nvSpPr>
@@ -12165,7 +12265,7 @@
                 <a:ea typeface="Georgia" pitchFamily="34" charset="-122"/>
                 <a:cs typeface="Georgia" pitchFamily="34" charset="-120"/>
               </a:rPr>
-              <a:t>Signature &amp; portails</a:t>
+              <a:t>Équipe</a:t>
             </a:r>
             <a:endParaRPr lang="en-US" sz="2400" dirty="0"/>
           </a:p>
@@ -12251,7 +12351,7 @@
                 <a:ea typeface="Segoe UI" pitchFamily="34" charset="-122"/>
                 <a:cs typeface="Segoe UI" pitchFamily="34" charset="-120"/>
               </a:rPr>
-              <a:t>Signature client branchée sur Supabase</a:t>
+              <a:t>Six types de pointage</a:t>
             </a:r>
             <a:endParaRPr lang="en-US" sz="1400" dirty="0"/>
           </a:p>
@@ -12293,7 +12393,7 @@
                 <a:ea typeface="Segoe UI" pitchFamily="34" charset="-122"/>
                 <a:cs typeface="Segoe UI" pitchFamily="34" charset="-120"/>
               </a:rPr>
-              <a:t>Le client qui signe un devis n'a pas de session Kôji : une clé technique dédiée (service_role) permet de retrouver et mettre à jour son devis directement dans la base partagée.</a:t>
+              <a:t>Heures de travail, jour de travail, forfait, ouvrage, passage, déplacement — chacun avec date et montant ; le montant des heures est calculé automatiquement à partir du taux horaire de l'ouvrier.</a:t>
             </a:r>
             <a:endParaRPr lang="en-US" sz="1100" dirty="0"/>
           </a:p>
@@ -12379,7 +12479,7 @@
                 <a:ea typeface="Segoe UI" pitchFamily="34" charset="-122"/>
                 <a:cs typeface="Segoe UI" pitchFamily="34" charset="-120"/>
               </a:rPr>
-              <a:t>Audit complet du portail client</a:t>
+              <a:t>Alertes automatiques de dépassement / manque d'heures</a:t>
             </a:r>
             <a:endParaRPr lang="en-US" sz="1400" dirty="0"/>
           </a:p>
@@ -12421,7 +12521,7 @@
                 <a:ea typeface="Segoe UI" pitchFamily="34" charset="-122"/>
                 <a:cs typeface="Segoe UI" pitchFamily="34" charset="-120"/>
               </a:rPr>
-              <a:t>Plusieurs routes (connexion client, devis/tâches/notes du portail, création de factures) lisaient encore l'ancien fichier JSON local et ne trouvaient plus aucune donnée récente depuis la migration Supabase des devis — toutes corrigées.</a:t>
+              <a:t>À la fin de chaque semaine, si le total travaillé diffère du contrat de plus de 15 minutes, une notification est envoyée automatiquement à l'entreprise (une seule fois par semaine et par ouvrier).</a:t>
             </a:r>
             <a:endParaRPr lang="en-US" sz="1100" dirty="0"/>
           </a:p>
@@ -12507,7 +12607,7 @@
                 <a:ea typeface="Segoe UI" pitchFamily="34" charset="-122"/>
                 <a:cs typeface="Segoe UI" pitchFamily="34" charset="-120"/>
               </a:rPr>
-              <a:t>Suivi du temps par ouvrage</a:t>
+              <a:t>Export PDF du relevé d'heures</a:t>
             </a:r>
             <a:endParaRPr lang="en-US" sz="1400" dirty="0"/>
           </a:p>
@@ -12549,7 +12649,7 @@
                 <a:ea typeface="Segoe UI" pitchFamily="34" charset="-122"/>
                 <a:cs typeface="Segoe UI" pitchFamily="34" charset="-120"/>
               </a:rPr>
-              <a:t>Boutons Démarrer / Pause / Reprendre / Terminer par tâche, avec calcul automatique du temps consommé et alerte en cas de dépassement du temps prévu.</a:t>
+              <a:t>Génération d'un PDF mensuel par ouvrier : détail par journée/type de pointage, totaux hebdomadaires, total du mois en heures et en montant — pensé pour la comptabilité et la gestion de la paie.</a:t>
             </a:r>
             <a:endParaRPr lang="en-US" sz="1100" dirty="0"/>
           </a:p>
@@ -12759,7 +12859,7 @@
                 <a:ea typeface="Georgia" pitchFamily="34" charset="-122"/>
                 <a:cs typeface="Georgia" pitchFamily="34" charset="-120"/>
               </a:rPr>
-              <a:t>Accueil &amp; stabilité</a:t>
+              <a:t>Notifications</a:t>
             </a:r>
             <a:endParaRPr lang="en-US" sz="2400" dirty="0"/>
           </a:p>
@@ -12845,7 +12945,7 @@
                 <a:ea typeface="Segoe UI" pitchFamily="34" charset="-122"/>
                 <a:cs typeface="Segoe UI" pitchFamily="34" charset="-120"/>
               </a:rPr>
-              <a:t>Reconnexion automatique de session</a:t>
+              <a:t>Envoi d'email réel à la signature du devis</a:t>
             </a:r>
             <a:endParaRPr lang="en-US" sz="1400" dirty="0"/>
           </a:p>
@@ -12887,7 +12987,7 @@
                 <a:ea typeface="Segoe UI" pitchFamily="34" charset="-122"/>
                 <a:cs typeface="Segoe UI" pitchFamily="34" charset="-120"/>
               </a:rPr>
-              <a:t>Une session expirée (~1h) provoquait des échecs silencieux à l'enregistrement (profil, IBAN, devis) sans reconnexion automatique ; la détection couvre désormais tous les cas d'expiration.</a:t>
+              <a:t>Le premier envoi des identifiants client déclenche désormais un vrai email (SMTP), et plus seulement une file d'attente locale.</a:t>
             </a:r>
             <a:endParaRPr lang="en-US" sz="1100" dirty="0"/>
           </a:p>
@@ -12895,135 +12995,7 @@
       </p:sp>
       <p:sp>
         <p:nvSpPr>
-          <p:cNvPr id="9" name="Shape 7"/>
-          <p:cNvSpPr/>
-          <p:nvPr/>
-        </p:nvSpPr>
-        <p:spPr>
-          <a:xfrm>
-            <a:off x="640080" y="2926080"/>
-            <a:ext cx="10881360" cy="1097280"/>
-          </a:xfrm>
-          <a:prstGeom prst="roundRect">
-            <a:avLst>
-              <a:gd name="adj" fmla="val 5000"/>
-            </a:avLst>
-          </a:prstGeom>
-          <a:solidFill>
-            <a:srgbClr val="FFFFFF"/>
-          </a:solidFill>
-          <a:ln w="12700">
-            <a:solidFill>
-              <a:srgbClr val="E4DCCB"/>
-            </a:solidFill>
-            <a:prstDash val="solid"/>
-          </a:ln>
-        </p:spPr>
-      </p:sp>
-      <p:sp>
-        <p:nvSpPr>
-          <p:cNvPr id="10" name="Shape 8"/>
-          <p:cNvSpPr/>
-          <p:nvPr/>
-        </p:nvSpPr>
-        <p:spPr>
-          <a:xfrm>
-            <a:off x="640080" y="2926080"/>
-            <a:ext cx="54864" cy="1097280"/>
-          </a:xfrm>
-          <a:prstGeom prst="rect">
-            <a:avLst/>
-          </a:prstGeom>
-          <a:solidFill>
-            <a:srgbClr val="9A4C1F"/>
-          </a:solidFill>
-          <a:ln/>
-        </p:spPr>
-      </p:sp>
-      <p:sp>
-        <p:nvSpPr>
-          <p:cNvPr id="11" name="Text 9"/>
-          <p:cNvSpPr/>
-          <p:nvPr/>
-        </p:nvSpPr>
-        <p:spPr>
-          <a:xfrm>
-            <a:off x="914400" y="3035808"/>
-            <a:ext cx="10332720" cy="365760"/>
-          </a:xfrm>
-          <a:prstGeom prst="rect">
-            <a:avLst/>
-          </a:prstGeom>
-          <a:noFill/>
-          <a:ln/>
-        </p:spPr>
-        <p:txBody>
-          <a:bodyPr wrap="square" rtlCol="0" anchor="ctr"/>
-          <a:lstStyle/>
-          <a:p>
-            <a:pPr indent="0" marL="0">
-              <a:buNone/>
-            </a:pPr>
-            <a:r>
-              <a:rPr lang="en-US" sz="1400" b="1" dirty="0">
-                <a:solidFill>
-                  <a:srgbClr val="1B1F3B"/>
-                </a:solidFill>
-                <a:latin typeface="Segoe UI" pitchFamily="34" charset="0"/>
-                <a:ea typeface="Segoe UI" pitchFamily="34" charset="-122"/>
-                <a:cs typeface="Segoe UI" pitchFamily="34" charset="-120"/>
-              </a:rPr>
-              <a:t>Corrections de plantages ponctuels</a:t>
-            </a:r>
-            <a:endParaRPr lang="en-US" sz="1400" dirty="0"/>
-          </a:p>
-        </p:txBody>
-      </p:sp>
-      <p:sp>
-        <p:nvSpPr>
-          <p:cNvPr id="12" name="Text 10"/>
-          <p:cNvSpPr/>
-          <p:nvPr/>
-        </p:nvSpPr>
-        <p:spPr>
-          <a:xfrm>
-            <a:off x="914400" y="3383280"/>
-            <a:ext cx="10332720" cy="594360"/>
-          </a:xfrm>
-          <a:prstGeom prst="rect">
-            <a:avLst/>
-          </a:prstGeom>
-          <a:noFill/>
-          <a:ln/>
-        </p:spPr>
-        <p:txBody>
-          <a:bodyPr wrap="square" rtlCol="0" anchor="ctr"/>
-          <a:lstStyle/>
-          <a:p>
-            <a:pPr indent="0" marL="0">
-              <a:lnSpc>
-                <a:spcPts val="1400"/>
-              </a:lnSpc>
-              <a:buNone/>
-            </a:pPr>
-            <a:r>
-              <a:rPr lang="en-US" sz="1100" dirty="0">
-                <a:solidFill>
-                  <a:srgbClr val="8A7C68"/>
-                </a:solidFill>
-                <a:latin typeface="Segoe UI" pitchFamily="34" charset="0"/>
-                <a:ea typeface="Segoe UI" pitchFamily="34" charset="-122"/>
-                <a:cs typeface="Segoe UI" pitchFamily="34" charset="-120"/>
-              </a:rPr>
-              <a:t>Plusieurs erreurs bloquantes corrigées au fil des tests (références de code manquantes, composants mal placés).</a:t>
-            </a:r>
-            <a:endParaRPr lang="en-US" sz="1100" dirty="0"/>
-          </a:p>
-        </p:txBody>
-      </p:sp>
-      <p:sp>
-        <p:nvSpPr>
-          <p:cNvPr id="13" name="Text 11"/>
+          <p:cNvPr id="9" name="Text 7"/>
           <p:cNvSpPr/>
           <p:nvPr/>
         </p:nvSpPr>
@@ -13062,7 +13034,7 @@
       </p:sp>
       <p:sp>
         <p:nvSpPr>
-          <p:cNvPr id="14" name="Text 12"/>
+          <p:cNvPr id="10" name="Text 8"/>
           <p:cNvSpPr/>
           <p:nvPr/>
         </p:nvSpPr>
@@ -13225,7 +13197,7 @@
                 <a:ea typeface="Georgia" pitchFamily="34" charset="-122"/>
                 <a:cs typeface="Georgia" pitchFamily="34" charset="-120"/>
               </a:rPr>
-              <a:t>Rapports d'intervention</a:t>
+              <a:t>Signature &amp; portails</a:t>
             </a:r>
             <a:endParaRPr lang="en-US" sz="2400" dirty="0"/>
           </a:p>
@@ -13311,7 +13283,7 @@
                 <a:ea typeface="Segoe UI" pitchFamily="34" charset="-122"/>
                 <a:cs typeface="Segoe UI" pitchFamily="34" charset="-120"/>
               </a:rPr>
-              <a:t>Nouvelle entité 'interventions'</a:t>
+              <a:t>Signature client branchée sur Supabase</a:t>
             </a:r>
             <a:endParaRPr lang="en-US" sz="1400" dirty="0"/>
           </a:p>
@@ -13353,7 +13325,7 @@
                 <a:ea typeface="Segoe UI" pitchFamily="34" charset="-122"/>
                 <a:cs typeface="Segoe UI" pitchFamily="34" charset="-120"/>
               </a:rPr>
-              <a:t>API dédiée (creation, consultation, suppression) pour stocker les rapports d'intervention, avec historique des actions comme pour les autres modules.</a:t>
+              <a:t>Le client qui signe un devis n'a pas de session Kôji : une clé technique dédiée (service_role) permet de retrouver et mettre à jour son devis directement dans la base partagée.</a:t>
             </a:r>
             <a:endParaRPr lang="en-US" sz="1100" dirty="0"/>
           </a:p>
@@ -13439,7 +13411,7 @@
                 <a:ea typeface="Segoe UI" pitchFamily="34" charset="-122"/>
                 <a:cs typeface="Segoe UI" pitchFamily="34" charset="-120"/>
               </a:rPr>
-              <a:t>Génération PDF du rapport d'intervention</a:t>
+              <a:t>Audit complet du portail client</a:t>
             </a:r>
             <a:endParaRPr lang="en-US" sz="1400" dirty="0"/>
           </a:p>
@@ -13481,7 +13453,7 @@
                 <a:ea typeface="Segoe UI" pitchFamily="34" charset="-122"/>
                 <a:cs typeface="Segoe UI" pitchFamily="34" charset="-120"/>
               </a:rPr>
-              <a:t>Chaque rapport peut être téléchargé en PDF avec le logo de l'entreprise en en-tête, dans une mise en page reprenant celle des rapports d'intervention papier existants.</a:t>
+              <a:t>Plusieurs routes (connexion client, devis/tâches/notes du portail, création de factures) lisaient encore l'ancien fichier JSON local et ne trouvaient plus aucune donnée récente depuis la migration Supabase des devis — toutes corrigées.</a:t>
             </a:r>
             <a:endParaRPr lang="en-US" sz="1100" dirty="0"/>
           </a:p>
@@ -13567,7 +13539,7 @@
                 <a:ea typeface="Segoe UI" pitchFamily="34" charset="-122"/>
                 <a:cs typeface="Segoe UI" pitchFamily="34" charset="-120"/>
               </a:rPr>
-              <a:t>Facturation directe d'une intervention</a:t>
+              <a:t>Suivi du temps par ouvrage</a:t>
             </a:r>
             <a:endParaRPr lang="en-US" sz="1400" dirty="0"/>
           </a:p>
@@ -13609,7 +13581,7 @@
                 <a:ea typeface="Segoe UI" pitchFamily="34" charset="-122"/>
                 <a:cs typeface="Segoe UI" pitchFamily="34" charset="-120"/>
               </a:rPr>
-              <a:t>Une facture peut être créée directement à partir d'une intervention (sans passer par un devis signé), avec un montant saisi manuellement ; l'intervention passe alors automatiquement au statut 'Facturée'.</a:t>
+              <a:t>Boutons Démarrer / Pause / Reprendre / Terminer par tâche, avec calcul automatique du temps consommé et alerte en cas de dépassement du temps prévu.</a:t>
             </a:r>
             <a:endParaRPr lang="en-US" sz="1100" dirty="0"/>
           </a:p>
@@ -13617,135 +13589,7 @@
       </p:sp>
       <p:sp>
         <p:nvSpPr>
-          <p:cNvPr id="17" name="Shape 15"/>
-          <p:cNvSpPr/>
-          <p:nvPr/>
-        </p:nvSpPr>
-        <p:spPr>
-          <a:xfrm>
-            <a:off x="640080" y="5394960"/>
-            <a:ext cx="10881360" cy="1097280"/>
-          </a:xfrm>
-          <a:prstGeom prst="roundRect">
-            <a:avLst>
-              <a:gd name="adj" fmla="val 5000"/>
-            </a:avLst>
-          </a:prstGeom>
-          <a:solidFill>
-            <a:srgbClr val="FFFFFF"/>
-          </a:solidFill>
-          <a:ln w="12700">
-            <a:solidFill>
-              <a:srgbClr val="E4DCCB"/>
-            </a:solidFill>
-            <a:prstDash val="solid"/>
-          </a:ln>
-        </p:spPr>
-      </p:sp>
-      <p:sp>
-        <p:nvSpPr>
-          <p:cNvPr id="18" name="Shape 16"/>
-          <p:cNvSpPr/>
-          <p:nvPr/>
-        </p:nvSpPr>
-        <p:spPr>
-          <a:xfrm>
-            <a:off x="640080" y="5394960"/>
-            <a:ext cx="54864" cy="1097280"/>
-          </a:xfrm>
-          <a:prstGeom prst="rect">
-            <a:avLst/>
-          </a:prstGeom>
-          <a:solidFill>
-            <a:srgbClr val="9A4C1F"/>
-          </a:solidFill>
-          <a:ln/>
-        </p:spPr>
-      </p:sp>
-      <p:sp>
-        <p:nvSpPr>
-          <p:cNvPr id="19" name="Text 17"/>
-          <p:cNvSpPr/>
-          <p:nvPr/>
-        </p:nvSpPr>
-        <p:spPr>
-          <a:xfrm>
-            <a:off x="914400" y="5504688"/>
-            <a:ext cx="10332720" cy="365760"/>
-          </a:xfrm>
-          <a:prstGeom prst="rect">
-            <a:avLst/>
-          </a:prstGeom>
-          <a:noFill/>
-          <a:ln/>
-        </p:spPr>
-        <p:txBody>
-          <a:bodyPr wrap="square" rtlCol="0" anchor="ctr"/>
-          <a:lstStyle/>
-          <a:p>
-            <a:pPr indent="0" marL="0">
-              <a:buNone/>
-            </a:pPr>
-            <a:r>
-              <a:rPr lang="en-US" sz="1400" b="1" dirty="0">
-                <a:solidFill>
-                  <a:srgbClr val="1B1F3B"/>
-                </a:solidFill>
-                <a:latin typeface="Segoe UI" pitchFamily="34" charset="0"/>
-                <a:ea typeface="Segoe UI" pitchFamily="34" charset="-122"/>
-                <a:cs typeface="Segoe UI" pitchFamily="34" charset="-120"/>
-              </a:rPr>
-              <a:t>En-tête d'entreprise propre à chaque rapport</a:t>
-            </a:r>
-            <a:endParaRPr lang="en-US" sz="1400" dirty="0"/>
-          </a:p>
-        </p:txBody>
-      </p:sp>
-      <p:sp>
-        <p:nvSpPr>
-          <p:cNvPr id="20" name="Text 18"/>
-          <p:cNvSpPr/>
-          <p:nvPr/>
-        </p:nvSpPr>
-        <p:spPr>
-          <a:xfrm>
-            <a:off x="914400" y="5852160"/>
-            <a:ext cx="10332720" cy="594360"/>
-          </a:xfrm>
-          <a:prstGeom prst="rect">
-            <a:avLst/>
-          </a:prstGeom>
-          <a:noFill/>
-          <a:ln/>
-        </p:spPr>
-        <p:txBody>
-          <a:bodyPr wrap="square" rtlCol="0" anchor="ctr"/>
-          <a:lstStyle/>
-          <a:p>
-            <a:pPr indent="0" marL="0">
-              <a:lnSpc>
-                <a:spcPts val="1400"/>
-              </a:lnSpc>
-              <a:buNone/>
-            </a:pPr>
-            <a:r>
-              <a:rPr lang="en-US" sz="1100" dirty="0">
-                <a:solidFill>
-                  <a:srgbClr val="8A7C68"/>
-                </a:solidFill>
-                <a:latin typeface="Segoe UI" pitchFamily="34" charset="0"/>
-                <a:ea typeface="Segoe UI" pitchFamily="34" charset="-122"/>
-                <a:cs typeface="Segoe UI" pitchFamily="34" charset="-120"/>
-              </a:rPr>
-              <a:t>Chaque intervention conserve son propre instantané des informations d'entreprise (comme les devis), pour que le PDF reste fidèle même si le profil change ensuite.</a:t>
-            </a:r>
-            <a:endParaRPr lang="en-US" sz="1100" dirty="0"/>
-          </a:p>
-        </p:txBody>
-      </p:sp>
-      <p:sp>
-        <p:nvSpPr>
-          <p:cNvPr id="21" name="Text 19"/>
+          <p:cNvPr id="17" name="Text 15"/>
           <p:cNvSpPr/>
           <p:nvPr/>
         </p:nvSpPr>
@@ -13784,7 +13628,7 @@
       </p:sp>
       <p:sp>
         <p:nvSpPr>
-          <p:cNvPr id="22" name="Text 20"/>
+          <p:cNvPr id="18" name="Text 16"/>
           <p:cNvSpPr/>
           <p:nvPr/>
         </p:nvSpPr>
@@ -13947,7 +13791,7 @@
                 <a:ea typeface="Georgia" pitchFamily="34" charset="-122"/>
                 <a:cs typeface="Georgia" pitchFamily="34" charset="-120"/>
               </a:rPr>
-              <a:t>Rapports d'intervention (suite)</a:t>
+              <a:t>Accueil &amp; stabilité</a:t>
             </a:r>
             <a:endParaRPr lang="en-US" sz="2400" dirty="0"/>
           </a:p>
@@ -14033,7 +13877,7 @@
                 <a:ea typeface="Segoe UI" pitchFamily="34" charset="-122"/>
                 <a:cs typeface="Segoe UI" pitchFamily="34" charset="-120"/>
               </a:rPr>
-              <a:t>Statut de suivi automatique (À faire / En cours / Terminée)</a:t>
+              <a:t>Reconnexion automatique de session</a:t>
             </a:r>
             <a:endParaRPr lang="en-US" sz="1400" dirty="0"/>
           </a:p>
@@ -14075,7 +13919,7 @@
                 <a:ea typeface="Segoe UI" pitchFamily="34" charset="-122"/>
                 <a:cs typeface="Segoe UI" pitchFamily="34" charset="-120"/>
               </a:rPr>
-              <a:t>Le statut d'une intervention évolue automatiquement selon sa date (À faire tant que la date n'est pas arrivée, En cours le jour J), jusqu'à être marquée Terminée manuellement puis, si besoin, archivée.</a:t>
+              <a:t>Une session expirée (~1h) provoquait des échecs silencieux à l'enregistrement (profil, IBAN, devis) sans reconnexion automatique ; la détection couvre désormais tous les cas d'expiration.</a:t>
             </a:r>
             <a:endParaRPr lang="en-US" sz="1100" dirty="0"/>
           </a:p>
@@ -14161,7 +14005,7 @@
                 <a:ea typeface="Segoe UI" pitchFamily="34" charset="-122"/>
                 <a:cs typeface="Segoe UI" pitchFamily="34" charset="-120"/>
               </a:rPr>
-              <a:t>Numéro de rapport automatique</a:t>
+              <a:t>Corrections de plantages ponctuels</a:t>
             </a:r>
             <a:endParaRPr lang="en-US" sz="1400" dirty="0"/>
           </a:p>
@@ -14203,7 +14047,7 @@
                 <a:ea typeface="Segoe UI" pitchFamily="34" charset="-122"/>
                 <a:cs typeface="Segoe UI" pitchFamily="34" charset="-120"/>
               </a:rPr>
-              <a:t>Chaque rapport reçoit un numéro unique généré automatiquement (ex. INT-2026-0003), affiché en en-tête avec la date de création, sur le même principe que la numérotation des devis et factures.</a:t>
+              <a:t>Plusieurs erreurs bloquantes corrigées au fil des tests (références de code manquantes, composants mal placés).</a:t>
             </a:r>
             <a:endParaRPr lang="en-US" sz="1100" dirty="0"/>
           </a:p>
@@ -14413,7 +14257,7 @@
                 <a:ea typeface="Georgia" pitchFamily="34" charset="-122"/>
                 <a:cs typeface="Georgia" pitchFamily="34" charset="-120"/>
               </a:rPr>
-              <a:t>Facturation</a:t>
+              <a:t>Rapports d'intervention</a:t>
             </a:r>
             <a:endParaRPr lang="en-US" sz="2400" dirty="0"/>
           </a:p>
@@ -14499,7 +14343,7 @@
                 <a:ea typeface="Segoe UI" pitchFamily="34" charset="-122"/>
                 <a:cs typeface="Segoe UI" pitchFamily="34" charset="-120"/>
               </a:rPr>
-              <a:t>Export PDF des factures</a:t>
+              <a:t>Nouvelle entité 'interventions'</a:t>
             </a:r>
             <a:endParaRPr lang="en-US" sz="1400" dirty="0"/>
           </a:p>
@@ -14541,7 +14385,7 @@
                 <a:ea typeface="Segoe UI" pitchFamily="34" charset="-122"/>
                 <a:cs typeface="Segoe UI" pitchFamily="34" charset="-120"/>
               </a:rPr>
-              <a:t>Chaque facture (issue d'un devis signé ou d'une intervention) peut désormais être téléchargée en PDF avec les informations de l'entreprise, du client et du montant — bouton ajouté dans la page Facturation et dans la fiche d'une intervention.</a:t>
+              <a:t>API dédiée (creation, consultation, suppression) pour stocker les rapports d'intervention, avec historique des actions comme pour les autres modules.</a:t>
             </a:r>
             <a:endParaRPr lang="en-US" sz="1100" dirty="0"/>
           </a:p>
@@ -14549,7 +14393,391 @@
       </p:sp>
       <p:sp>
         <p:nvSpPr>
-          <p:cNvPr id="9" name="Text 7"/>
+          <p:cNvPr id="9" name="Shape 7"/>
+          <p:cNvSpPr/>
+          <p:nvPr/>
+        </p:nvSpPr>
+        <p:spPr>
+          <a:xfrm>
+            <a:off x="640080" y="2926080"/>
+            <a:ext cx="10881360" cy="1097280"/>
+          </a:xfrm>
+          <a:prstGeom prst="roundRect">
+            <a:avLst>
+              <a:gd name="adj" fmla="val 5000"/>
+            </a:avLst>
+          </a:prstGeom>
+          <a:solidFill>
+            <a:srgbClr val="FFFFFF"/>
+          </a:solidFill>
+          <a:ln w="12700">
+            <a:solidFill>
+              <a:srgbClr val="E4DCCB"/>
+            </a:solidFill>
+            <a:prstDash val="solid"/>
+          </a:ln>
+        </p:spPr>
+      </p:sp>
+      <p:sp>
+        <p:nvSpPr>
+          <p:cNvPr id="10" name="Shape 8"/>
+          <p:cNvSpPr/>
+          <p:nvPr/>
+        </p:nvSpPr>
+        <p:spPr>
+          <a:xfrm>
+            <a:off x="640080" y="2926080"/>
+            <a:ext cx="54864" cy="1097280"/>
+          </a:xfrm>
+          <a:prstGeom prst="rect">
+            <a:avLst/>
+          </a:prstGeom>
+          <a:solidFill>
+            <a:srgbClr val="9A4C1F"/>
+          </a:solidFill>
+          <a:ln/>
+        </p:spPr>
+      </p:sp>
+      <p:sp>
+        <p:nvSpPr>
+          <p:cNvPr id="11" name="Text 9"/>
+          <p:cNvSpPr/>
+          <p:nvPr/>
+        </p:nvSpPr>
+        <p:spPr>
+          <a:xfrm>
+            <a:off x="914400" y="3035808"/>
+            <a:ext cx="10332720" cy="365760"/>
+          </a:xfrm>
+          <a:prstGeom prst="rect">
+            <a:avLst/>
+          </a:prstGeom>
+          <a:noFill/>
+          <a:ln/>
+        </p:spPr>
+        <p:txBody>
+          <a:bodyPr wrap="square" rtlCol="0" anchor="ctr"/>
+          <a:lstStyle/>
+          <a:p>
+            <a:pPr indent="0" marL="0">
+              <a:buNone/>
+            </a:pPr>
+            <a:r>
+              <a:rPr lang="en-US" sz="1400" b="1" dirty="0">
+                <a:solidFill>
+                  <a:srgbClr val="1B1F3B"/>
+                </a:solidFill>
+                <a:latin typeface="Segoe UI" pitchFamily="34" charset="0"/>
+                <a:ea typeface="Segoe UI" pitchFamily="34" charset="-122"/>
+                <a:cs typeface="Segoe UI" pitchFamily="34" charset="-120"/>
+              </a:rPr>
+              <a:t>Génération PDF du rapport d'intervention</a:t>
+            </a:r>
+            <a:endParaRPr lang="en-US" sz="1400" dirty="0"/>
+          </a:p>
+        </p:txBody>
+      </p:sp>
+      <p:sp>
+        <p:nvSpPr>
+          <p:cNvPr id="12" name="Text 10"/>
+          <p:cNvSpPr/>
+          <p:nvPr/>
+        </p:nvSpPr>
+        <p:spPr>
+          <a:xfrm>
+            <a:off x="914400" y="3383280"/>
+            <a:ext cx="10332720" cy="594360"/>
+          </a:xfrm>
+          <a:prstGeom prst="rect">
+            <a:avLst/>
+          </a:prstGeom>
+          <a:noFill/>
+          <a:ln/>
+        </p:spPr>
+        <p:txBody>
+          <a:bodyPr wrap="square" rtlCol="0" anchor="ctr"/>
+          <a:lstStyle/>
+          <a:p>
+            <a:pPr indent="0" marL="0">
+              <a:lnSpc>
+                <a:spcPts val="1400"/>
+              </a:lnSpc>
+              <a:buNone/>
+            </a:pPr>
+            <a:r>
+              <a:rPr lang="en-US" sz="1100" dirty="0">
+                <a:solidFill>
+                  <a:srgbClr val="8A7C68"/>
+                </a:solidFill>
+                <a:latin typeface="Segoe UI" pitchFamily="34" charset="0"/>
+                <a:ea typeface="Segoe UI" pitchFamily="34" charset="-122"/>
+                <a:cs typeface="Segoe UI" pitchFamily="34" charset="-120"/>
+              </a:rPr>
+              <a:t>Chaque rapport peut être téléchargé en PDF avec le logo de l'entreprise en en-tête, dans une mise en page reprenant celle des rapports d'intervention papier existants.</a:t>
+            </a:r>
+            <a:endParaRPr lang="en-US" sz="1100" dirty="0"/>
+          </a:p>
+        </p:txBody>
+      </p:sp>
+      <p:sp>
+        <p:nvSpPr>
+          <p:cNvPr id="13" name="Shape 11"/>
+          <p:cNvSpPr/>
+          <p:nvPr/>
+        </p:nvSpPr>
+        <p:spPr>
+          <a:xfrm>
+            <a:off x="640080" y="4160520"/>
+            <a:ext cx="10881360" cy="1097280"/>
+          </a:xfrm>
+          <a:prstGeom prst="roundRect">
+            <a:avLst>
+              <a:gd name="adj" fmla="val 5000"/>
+            </a:avLst>
+          </a:prstGeom>
+          <a:solidFill>
+            <a:srgbClr val="FFFFFF"/>
+          </a:solidFill>
+          <a:ln w="12700">
+            <a:solidFill>
+              <a:srgbClr val="E4DCCB"/>
+            </a:solidFill>
+            <a:prstDash val="solid"/>
+          </a:ln>
+        </p:spPr>
+      </p:sp>
+      <p:sp>
+        <p:nvSpPr>
+          <p:cNvPr id="14" name="Shape 12"/>
+          <p:cNvSpPr/>
+          <p:nvPr/>
+        </p:nvSpPr>
+        <p:spPr>
+          <a:xfrm>
+            <a:off x="640080" y="4160520"/>
+            <a:ext cx="54864" cy="1097280"/>
+          </a:xfrm>
+          <a:prstGeom prst="rect">
+            <a:avLst/>
+          </a:prstGeom>
+          <a:solidFill>
+            <a:srgbClr val="9A4C1F"/>
+          </a:solidFill>
+          <a:ln/>
+        </p:spPr>
+      </p:sp>
+      <p:sp>
+        <p:nvSpPr>
+          <p:cNvPr id="15" name="Text 13"/>
+          <p:cNvSpPr/>
+          <p:nvPr/>
+        </p:nvSpPr>
+        <p:spPr>
+          <a:xfrm>
+            <a:off x="914400" y="4270248"/>
+            <a:ext cx="10332720" cy="365760"/>
+          </a:xfrm>
+          <a:prstGeom prst="rect">
+            <a:avLst/>
+          </a:prstGeom>
+          <a:noFill/>
+          <a:ln/>
+        </p:spPr>
+        <p:txBody>
+          <a:bodyPr wrap="square" rtlCol="0" anchor="ctr"/>
+          <a:lstStyle/>
+          <a:p>
+            <a:pPr indent="0" marL="0">
+              <a:buNone/>
+            </a:pPr>
+            <a:r>
+              <a:rPr lang="en-US" sz="1400" b="1" dirty="0">
+                <a:solidFill>
+                  <a:srgbClr val="1B1F3B"/>
+                </a:solidFill>
+                <a:latin typeface="Segoe UI" pitchFamily="34" charset="0"/>
+                <a:ea typeface="Segoe UI" pitchFamily="34" charset="-122"/>
+                <a:cs typeface="Segoe UI" pitchFamily="34" charset="-120"/>
+              </a:rPr>
+              <a:t>Facturation directe d'une intervention</a:t>
+            </a:r>
+            <a:endParaRPr lang="en-US" sz="1400" dirty="0"/>
+          </a:p>
+        </p:txBody>
+      </p:sp>
+      <p:sp>
+        <p:nvSpPr>
+          <p:cNvPr id="16" name="Text 14"/>
+          <p:cNvSpPr/>
+          <p:nvPr/>
+        </p:nvSpPr>
+        <p:spPr>
+          <a:xfrm>
+            <a:off x="914400" y="4617720"/>
+            <a:ext cx="10332720" cy="594360"/>
+          </a:xfrm>
+          <a:prstGeom prst="rect">
+            <a:avLst/>
+          </a:prstGeom>
+          <a:noFill/>
+          <a:ln/>
+        </p:spPr>
+        <p:txBody>
+          <a:bodyPr wrap="square" rtlCol="0" anchor="ctr"/>
+          <a:lstStyle/>
+          <a:p>
+            <a:pPr indent="0" marL="0">
+              <a:lnSpc>
+                <a:spcPts val="1400"/>
+              </a:lnSpc>
+              <a:buNone/>
+            </a:pPr>
+            <a:r>
+              <a:rPr lang="en-US" sz="1100" dirty="0">
+                <a:solidFill>
+                  <a:srgbClr val="8A7C68"/>
+                </a:solidFill>
+                <a:latin typeface="Segoe UI" pitchFamily="34" charset="0"/>
+                <a:ea typeface="Segoe UI" pitchFamily="34" charset="-122"/>
+                <a:cs typeface="Segoe UI" pitchFamily="34" charset="-120"/>
+              </a:rPr>
+              <a:t>Une facture peut être créée directement à partir d'une intervention (sans passer par un devis signé), avec un montant saisi manuellement ; l'intervention passe alors automatiquement au statut 'Facturée'.</a:t>
+            </a:r>
+            <a:endParaRPr lang="en-US" sz="1100" dirty="0"/>
+          </a:p>
+        </p:txBody>
+      </p:sp>
+      <p:sp>
+        <p:nvSpPr>
+          <p:cNvPr id="17" name="Shape 15"/>
+          <p:cNvSpPr/>
+          <p:nvPr/>
+        </p:nvSpPr>
+        <p:spPr>
+          <a:xfrm>
+            <a:off x="640080" y="5394960"/>
+            <a:ext cx="10881360" cy="1097280"/>
+          </a:xfrm>
+          <a:prstGeom prst="roundRect">
+            <a:avLst>
+              <a:gd name="adj" fmla="val 5000"/>
+            </a:avLst>
+          </a:prstGeom>
+          <a:solidFill>
+            <a:srgbClr val="FFFFFF"/>
+          </a:solidFill>
+          <a:ln w="12700">
+            <a:solidFill>
+              <a:srgbClr val="E4DCCB"/>
+            </a:solidFill>
+            <a:prstDash val="solid"/>
+          </a:ln>
+        </p:spPr>
+      </p:sp>
+      <p:sp>
+        <p:nvSpPr>
+          <p:cNvPr id="18" name="Shape 16"/>
+          <p:cNvSpPr/>
+          <p:nvPr/>
+        </p:nvSpPr>
+        <p:spPr>
+          <a:xfrm>
+            <a:off x="640080" y="5394960"/>
+            <a:ext cx="54864" cy="1097280"/>
+          </a:xfrm>
+          <a:prstGeom prst="rect">
+            <a:avLst/>
+          </a:prstGeom>
+          <a:solidFill>
+            <a:srgbClr val="9A4C1F"/>
+          </a:solidFill>
+          <a:ln/>
+        </p:spPr>
+      </p:sp>
+      <p:sp>
+        <p:nvSpPr>
+          <p:cNvPr id="19" name="Text 17"/>
+          <p:cNvSpPr/>
+          <p:nvPr/>
+        </p:nvSpPr>
+        <p:spPr>
+          <a:xfrm>
+            <a:off x="914400" y="5504688"/>
+            <a:ext cx="10332720" cy="365760"/>
+          </a:xfrm>
+          <a:prstGeom prst="rect">
+            <a:avLst/>
+          </a:prstGeom>
+          <a:noFill/>
+          <a:ln/>
+        </p:spPr>
+        <p:txBody>
+          <a:bodyPr wrap="square" rtlCol="0" anchor="ctr"/>
+          <a:lstStyle/>
+          <a:p>
+            <a:pPr indent="0" marL="0">
+              <a:buNone/>
+            </a:pPr>
+            <a:r>
+              <a:rPr lang="en-US" sz="1400" b="1" dirty="0">
+                <a:solidFill>
+                  <a:srgbClr val="1B1F3B"/>
+                </a:solidFill>
+                <a:latin typeface="Segoe UI" pitchFamily="34" charset="0"/>
+                <a:ea typeface="Segoe UI" pitchFamily="34" charset="-122"/>
+                <a:cs typeface="Segoe UI" pitchFamily="34" charset="-120"/>
+              </a:rPr>
+              <a:t>En-tête d'entreprise propre à chaque rapport</a:t>
+            </a:r>
+            <a:endParaRPr lang="en-US" sz="1400" dirty="0"/>
+          </a:p>
+        </p:txBody>
+      </p:sp>
+      <p:sp>
+        <p:nvSpPr>
+          <p:cNvPr id="20" name="Text 18"/>
+          <p:cNvSpPr/>
+          <p:nvPr/>
+        </p:nvSpPr>
+        <p:spPr>
+          <a:xfrm>
+            <a:off x="914400" y="5852160"/>
+            <a:ext cx="10332720" cy="594360"/>
+          </a:xfrm>
+          <a:prstGeom prst="rect">
+            <a:avLst/>
+          </a:prstGeom>
+          <a:noFill/>
+          <a:ln/>
+        </p:spPr>
+        <p:txBody>
+          <a:bodyPr wrap="square" rtlCol="0" anchor="ctr"/>
+          <a:lstStyle/>
+          <a:p>
+            <a:pPr indent="0" marL="0">
+              <a:lnSpc>
+                <a:spcPts val="1400"/>
+              </a:lnSpc>
+              <a:buNone/>
+            </a:pPr>
+            <a:r>
+              <a:rPr lang="en-US" sz="1100" dirty="0">
+                <a:solidFill>
+                  <a:srgbClr val="8A7C68"/>
+                </a:solidFill>
+                <a:latin typeface="Segoe UI" pitchFamily="34" charset="0"/>
+                <a:ea typeface="Segoe UI" pitchFamily="34" charset="-122"/>
+                <a:cs typeface="Segoe UI" pitchFamily="34" charset="-120"/>
+              </a:rPr>
+              <a:t>Chaque intervention conserve son propre instantané des informations d'entreprise (comme les devis), pour que le PDF reste fidèle même si le profil change ensuite.</a:t>
+            </a:r>
+            <a:endParaRPr lang="en-US" sz="1100" dirty="0"/>
+          </a:p>
+        </p:txBody>
+      </p:sp>
+      <p:sp>
+        <p:nvSpPr>
+          <p:cNvPr id="21" name="Text 19"/>
           <p:cNvSpPr/>
           <p:nvPr/>
         </p:nvSpPr>
@@ -14588,7 +14816,7 @@
       </p:sp>
       <p:sp>
         <p:nvSpPr>
-          <p:cNvPr id="10" name="Text 8"/>
+          <p:cNvPr id="22" name="Text 20"/>
           <p:cNvSpPr/>
           <p:nvPr/>
         </p:nvSpPr>
@@ -14639,7 +14867,7 @@
     <p:bg>
       <p:bgPr>
         <a:solidFill>
-          <a:srgbClr val="0B1030"/>
+          <a:srgbClr val="F3EEE3"/>
         </a:solidFill>
       </p:bgPr>
     </p:bg>
@@ -14665,14 +14893,16 @@
         </p:nvSpPr>
         <p:spPr>
           <a:xfrm>
-            <a:off x="0" y="3246120"/>
-            <a:ext cx="12191695" cy="54864"/>
-          </a:xfrm>
-          <a:prstGeom prst="rect">
-            <a:avLst/>
+            <a:off x="640080" y="411480"/>
+            <a:ext cx="2377440" cy="365760"/>
+          </a:xfrm>
+          <a:prstGeom prst="roundRect">
+            <a:avLst>
+              <a:gd name="adj" fmla="val 50000"/>
+            </a:avLst>
           </a:prstGeom>
           <a:solidFill>
-            <a:srgbClr val="386641"/>
+            <a:srgbClr val="F5E6DA"/>
           </a:solidFill>
           <a:ln/>
         </p:spPr>
@@ -14685,118 +14915,335 @@
         </p:nvSpPr>
         <p:spPr>
           <a:xfrm>
-            <a:off x="640080" y="2468880"/>
-            <a:ext cx="10058400" cy="914400"/>
-          </a:xfrm>
-          <a:prstGeom prst="rect">
-            <a:avLst/>
-          </a:prstGeom>
-          <a:noFill/>
-          <a:ln/>
-        </p:spPr>
-        <p:txBody>
-          <a:bodyPr wrap="square" rtlCol="0" anchor="ctr"/>
-          <a:lstStyle/>
-          <a:p>
-            <a:pPr indent="0" marL="0">
-              <a:buNone/>
-            </a:pPr>
-            <a:r>
-              <a:rPr lang="en-US" sz="3800" b="1" dirty="0">
-                <a:solidFill>
-                  <a:srgbClr val="FFFFFF"/>
+            <a:off x="640080" y="411480"/>
+            <a:ext cx="2377440" cy="365760"/>
+          </a:xfrm>
+          <a:prstGeom prst="rect">
+            <a:avLst/>
+          </a:prstGeom>
+          <a:noFill/>
+          <a:ln/>
+        </p:spPr>
+        <p:txBody>
+          <a:bodyPr wrap="square" rtlCol="0" anchor="ctr"/>
+          <a:lstStyle/>
+          <a:p>
+            <a:pPr algn="ctr" indent="0" marL="0">
+              <a:buNone/>
+            </a:pPr>
+            <a:r>
+              <a:rPr lang="en-US" sz="1000" b="1" spc="100" kern="0" dirty="0">
+                <a:solidFill>
+                  <a:srgbClr val="9A4C1F"/>
+                </a:solidFill>
+                <a:latin typeface="Segoe UI" pitchFamily="34" charset="0"/>
+                <a:ea typeface="Segoe UI" pitchFamily="34" charset="-122"/>
+                <a:cs typeface="Segoe UI" pitchFamily="34" charset="-120"/>
+              </a:rPr>
+              <a:t>BACKEND</a:t>
+            </a:r>
+            <a:endParaRPr lang="en-US" sz="1000" dirty="0"/>
+          </a:p>
+        </p:txBody>
+      </p:sp>
+      <p:sp>
+        <p:nvSpPr>
+          <p:cNvPr id="4" name="Text 2"/>
+          <p:cNvSpPr/>
+          <p:nvPr/>
+        </p:nvSpPr>
+        <p:spPr>
+          <a:xfrm>
+            <a:off x="640080" y="868680"/>
+            <a:ext cx="10515600" cy="548640"/>
+          </a:xfrm>
+          <a:prstGeom prst="rect">
+            <a:avLst/>
+          </a:prstGeom>
+          <a:noFill/>
+          <a:ln/>
+        </p:spPr>
+        <p:txBody>
+          <a:bodyPr wrap="square" rtlCol="0" anchor="ctr"/>
+          <a:lstStyle/>
+          <a:p>
+            <a:pPr indent="0" marL="0">
+              <a:buNone/>
+            </a:pPr>
+            <a:r>
+              <a:rPr lang="en-US" sz="2400" b="1" dirty="0">
+                <a:solidFill>
+                  <a:srgbClr val="1B1F3B"/>
                 </a:solidFill>
                 <a:latin typeface="Georgia" pitchFamily="34" charset="0"/>
                 <a:ea typeface="Georgia" pitchFamily="34" charset="-122"/>
                 <a:cs typeface="Georgia" pitchFamily="34" charset="-120"/>
               </a:rPr>
-              <a:t>Base de données</a:t>
-            </a:r>
-            <a:endParaRPr lang="en-US" sz="3800" dirty="0"/>
-          </a:p>
-        </p:txBody>
-      </p:sp>
-      <p:sp>
-        <p:nvSpPr>
-          <p:cNvPr id="4" name="Text 2"/>
-          <p:cNvSpPr/>
-          <p:nvPr/>
-        </p:nvSpPr>
-        <p:spPr>
-          <a:xfrm>
-            <a:off x="640080" y="3429000"/>
-            <a:ext cx="10058400" cy="457200"/>
-          </a:xfrm>
-          <a:prstGeom prst="rect">
-            <a:avLst/>
-          </a:prstGeom>
-          <a:noFill/>
-          <a:ln/>
-        </p:spPr>
-        <p:txBody>
-          <a:bodyPr wrap="square" rtlCol="0" anchor="ctr"/>
-          <a:lstStyle/>
-          <a:p>
-            <a:pPr indent="0" marL="0">
-              <a:buNone/>
-            </a:pPr>
-            <a:r>
-              <a:rPr lang="en-US" sz="1500" dirty="0">
-                <a:solidFill>
-                  <a:srgbClr val="C7C9E0"/>
-                </a:solidFill>
-                <a:latin typeface="Segoe UI" pitchFamily="34" charset="0"/>
-                <a:ea typeface="Segoe UI" pitchFamily="34" charset="-122"/>
-                <a:cs typeface="Segoe UI" pitchFamily="34" charset="-120"/>
-              </a:rPr>
-              <a:t>Modèle de données et infrastructure</a:t>
-            </a:r>
-            <a:endParaRPr lang="en-US" sz="1500" dirty="0"/>
-          </a:p>
-        </p:txBody>
-      </p:sp>
-      <p:sp>
-        <p:nvSpPr>
-          <p:cNvPr id="5" name="Text 3"/>
-          <p:cNvSpPr/>
-          <p:nvPr/>
-        </p:nvSpPr>
-        <p:spPr>
-          <a:xfrm>
-            <a:off x="640080" y="3931920"/>
-            <a:ext cx="5486400" cy="365760"/>
-          </a:xfrm>
-          <a:prstGeom prst="rect">
-            <a:avLst/>
-          </a:prstGeom>
-          <a:noFill/>
-          <a:ln/>
-        </p:spPr>
-        <p:txBody>
-          <a:bodyPr wrap="square" rtlCol="0" anchor="ctr"/>
-          <a:lstStyle/>
-          <a:p>
-            <a:pPr indent="0" marL="0">
-              <a:buNone/>
-            </a:pPr>
-            <a:r>
-              <a:rPr lang="en-US" sz="1200" b="1" dirty="0">
-                <a:solidFill>
-                  <a:srgbClr val="C9A96A"/>
-                </a:solidFill>
-                <a:latin typeface="Segoe UI" pitchFamily="34" charset="0"/>
-                <a:ea typeface="Segoe UI" pitchFamily="34" charset="-122"/>
-                <a:cs typeface="Segoe UI" pitchFamily="34" charset="-120"/>
-              </a:rPr>
-              <a:t>8 mise(s) à jour</a:t>
-            </a:r>
-            <a:endParaRPr lang="en-US" sz="1200" dirty="0"/>
-          </a:p>
-        </p:txBody>
-      </p:sp>
-      <p:sp>
-        <p:nvSpPr>
-          <p:cNvPr id="6" name="Text 4"/>
+              <a:t>Rapports d'intervention (suite)</a:t>
+            </a:r>
+            <a:endParaRPr lang="en-US" sz="2400" dirty="0"/>
+          </a:p>
+        </p:txBody>
+      </p:sp>
+      <p:sp>
+        <p:nvSpPr>
+          <p:cNvPr id="5" name="Shape 3"/>
+          <p:cNvSpPr/>
+          <p:nvPr/>
+        </p:nvSpPr>
+        <p:spPr>
+          <a:xfrm>
+            <a:off x="640080" y="1691640"/>
+            <a:ext cx="10881360" cy="1097280"/>
+          </a:xfrm>
+          <a:prstGeom prst="roundRect">
+            <a:avLst>
+              <a:gd name="adj" fmla="val 5000"/>
+            </a:avLst>
+          </a:prstGeom>
+          <a:solidFill>
+            <a:srgbClr val="FFFFFF"/>
+          </a:solidFill>
+          <a:ln w="12700">
+            <a:solidFill>
+              <a:srgbClr val="E4DCCB"/>
+            </a:solidFill>
+            <a:prstDash val="solid"/>
+          </a:ln>
+        </p:spPr>
+      </p:sp>
+      <p:sp>
+        <p:nvSpPr>
+          <p:cNvPr id="6" name="Shape 4"/>
+          <p:cNvSpPr/>
+          <p:nvPr/>
+        </p:nvSpPr>
+        <p:spPr>
+          <a:xfrm>
+            <a:off x="640080" y="1691640"/>
+            <a:ext cx="54864" cy="1097280"/>
+          </a:xfrm>
+          <a:prstGeom prst="rect">
+            <a:avLst/>
+          </a:prstGeom>
+          <a:solidFill>
+            <a:srgbClr val="9A4C1F"/>
+          </a:solidFill>
+          <a:ln/>
+        </p:spPr>
+      </p:sp>
+      <p:sp>
+        <p:nvSpPr>
+          <p:cNvPr id="7" name="Text 5"/>
+          <p:cNvSpPr/>
+          <p:nvPr/>
+        </p:nvSpPr>
+        <p:spPr>
+          <a:xfrm>
+            <a:off x="914400" y="1801368"/>
+            <a:ext cx="10332720" cy="365760"/>
+          </a:xfrm>
+          <a:prstGeom prst="rect">
+            <a:avLst/>
+          </a:prstGeom>
+          <a:noFill/>
+          <a:ln/>
+        </p:spPr>
+        <p:txBody>
+          <a:bodyPr wrap="square" rtlCol="0" anchor="ctr"/>
+          <a:lstStyle/>
+          <a:p>
+            <a:pPr indent="0" marL="0">
+              <a:buNone/>
+            </a:pPr>
+            <a:r>
+              <a:rPr lang="en-US" sz="1400" b="1" dirty="0">
+                <a:solidFill>
+                  <a:srgbClr val="1B1F3B"/>
+                </a:solidFill>
+                <a:latin typeface="Segoe UI" pitchFamily="34" charset="0"/>
+                <a:ea typeface="Segoe UI" pitchFamily="34" charset="-122"/>
+                <a:cs typeface="Segoe UI" pitchFamily="34" charset="-120"/>
+              </a:rPr>
+              <a:t>Statut de suivi automatique (À faire / En cours / Terminée)</a:t>
+            </a:r>
+            <a:endParaRPr lang="en-US" sz="1400" dirty="0"/>
+          </a:p>
+        </p:txBody>
+      </p:sp>
+      <p:sp>
+        <p:nvSpPr>
+          <p:cNvPr id="8" name="Text 6"/>
+          <p:cNvSpPr/>
+          <p:nvPr/>
+        </p:nvSpPr>
+        <p:spPr>
+          <a:xfrm>
+            <a:off x="914400" y="2148840"/>
+            <a:ext cx="10332720" cy="594360"/>
+          </a:xfrm>
+          <a:prstGeom prst="rect">
+            <a:avLst/>
+          </a:prstGeom>
+          <a:noFill/>
+          <a:ln/>
+        </p:spPr>
+        <p:txBody>
+          <a:bodyPr wrap="square" rtlCol="0" anchor="ctr"/>
+          <a:lstStyle/>
+          <a:p>
+            <a:pPr indent="0" marL="0">
+              <a:lnSpc>
+                <a:spcPts val="1400"/>
+              </a:lnSpc>
+              <a:buNone/>
+            </a:pPr>
+            <a:r>
+              <a:rPr lang="en-US" sz="1100" dirty="0">
+                <a:solidFill>
+                  <a:srgbClr val="8A7C68"/>
+                </a:solidFill>
+                <a:latin typeface="Segoe UI" pitchFamily="34" charset="0"/>
+                <a:ea typeface="Segoe UI" pitchFamily="34" charset="-122"/>
+                <a:cs typeface="Segoe UI" pitchFamily="34" charset="-120"/>
+              </a:rPr>
+              <a:t>Le statut d'une intervention évolue automatiquement selon sa date (À faire tant que la date n'est pas arrivée, En cours le jour J), jusqu'à être marquée Terminée manuellement puis, si besoin, archivée.</a:t>
+            </a:r>
+            <a:endParaRPr lang="en-US" sz="1100" dirty="0"/>
+          </a:p>
+        </p:txBody>
+      </p:sp>
+      <p:sp>
+        <p:nvSpPr>
+          <p:cNvPr id="9" name="Shape 7"/>
+          <p:cNvSpPr/>
+          <p:nvPr/>
+        </p:nvSpPr>
+        <p:spPr>
+          <a:xfrm>
+            <a:off x="640080" y="2926080"/>
+            <a:ext cx="10881360" cy="1097280"/>
+          </a:xfrm>
+          <a:prstGeom prst="roundRect">
+            <a:avLst>
+              <a:gd name="adj" fmla="val 5000"/>
+            </a:avLst>
+          </a:prstGeom>
+          <a:solidFill>
+            <a:srgbClr val="FFFFFF"/>
+          </a:solidFill>
+          <a:ln w="12700">
+            <a:solidFill>
+              <a:srgbClr val="E4DCCB"/>
+            </a:solidFill>
+            <a:prstDash val="solid"/>
+          </a:ln>
+        </p:spPr>
+      </p:sp>
+      <p:sp>
+        <p:nvSpPr>
+          <p:cNvPr id="10" name="Shape 8"/>
+          <p:cNvSpPr/>
+          <p:nvPr/>
+        </p:nvSpPr>
+        <p:spPr>
+          <a:xfrm>
+            <a:off x="640080" y="2926080"/>
+            <a:ext cx="54864" cy="1097280"/>
+          </a:xfrm>
+          <a:prstGeom prst="rect">
+            <a:avLst/>
+          </a:prstGeom>
+          <a:solidFill>
+            <a:srgbClr val="9A4C1F"/>
+          </a:solidFill>
+          <a:ln/>
+        </p:spPr>
+      </p:sp>
+      <p:sp>
+        <p:nvSpPr>
+          <p:cNvPr id="11" name="Text 9"/>
+          <p:cNvSpPr/>
+          <p:nvPr/>
+        </p:nvSpPr>
+        <p:spPr>
+          <a:xfrm>
+            <a:off x="914400" y="3035808"/>
+            <a:ext cx="10332720" cy="365760"/>
+          </a:xfrm>
+          <a:prstGeom prst="rect">
+            <a:avLst/>
+          </a:prstGeom>
+          <a:noFill/>
+          <a:ln/>
+        </p:spPr>
+        <p:txBody>
+          <a:bodyPr wrap="square" rtlCol="0" anchor="ctr"/>
+          <a:lstStyle/>
+          <a:p>
+            <a:pPr indent="0" marL="0">
+              <a:buNone/>
+            </a:pPr>
+            <a:r>
+              <a:rPr lang="en-US" sz="1400" b="1" dirty="0">
+                <a:solidFill>
+                  <a:srgbClr val="1B1F3B"/>
+                </a:solidFill>
+                <a:latin typeface="Segoe UI" pitchFamily="34" charset="0"/>
+                <a:ea typeface="Segoe UI" pitchFamily="34" charset="-122"/>
+                <a:cs typeface="Segoe UI" pitchFamily="34" charset="-120"/>
+              </a:rPr>
+              <a:t>Numéro de rapport automatique</a:t>
+            </a:r>
+            <a:endParaRPr lang="en-US" sz="1400" dirty="0"/>
+          </a:p>
+        </p:txBody>
+      </p:sp>
+      <p:sp>
+        <p:nvSpPr>
+          <p:cNvPr id="12" name="Text 10"/>
+          <p:cNvSpPr/>
+          <p:nvPr/>
+        </p:nvSpPr>
+        <p:spPr>
+          <a:xfrm>
+            <a:off x="914400" y="3383280"/>
+            <a:ext cx="10332720" cy="594360"/>
+          </a:xfrm>
+          <a:prstGeom prst="rect">
+            <a:avLst/>
+          </a:prstGeom>
+          <a:noFill/>
+          <a:ln/>
+        </p:spPr>
+        <p:txBody>
+          <a:bodyPr wrap="square" rtlCol="0" anchor="ctr"/>
+          <a:lstStyle/>
+          <a:p>
+            <a:pPr indent="0" marL="0">
+              <a:lnSpc>
+                <a:spcPts val="1400"/>
+              </a:lnSpc>
+              <a:buNone/>
+            </a:pPr>
+            <a:r>
+              <a:rPr lang="en-US" sz="1100" dirty="0">
+                <a:solidFill>
+                  <a:srgbClr val="8A7C68"/>
+                </a:solidFill>
+                <a:latin typeface="Segoe UI" pitchFamily="34" charset="0"/>
+                <a:ea typeface="Segoe UI" pitchFamily="34" charset="-122"/>
+                <a:cs typeface="Segoe UI" pitchFamily="34" charset="-120"/>
+              </a:rPr>
+              <a:t>Chaque rapport reçoit un numéro unique généré automatiquement (ex. INT-2026-0003), affiché en en-tête avec la date de création, sur le même principe que la numérotation des devis et factures.</a:t>
+            </a:r>
+            <a:endParaRPr lang="en-US" sz="1100" dirty="0"/>
+          </a:p>
+        </p:txBody>
+      </p:sp>
+      <p:sp>
+        <p:nvSpPr>
+          <p:cNvPr id="13" name="Text 11"/>
           <p:cNvSpPr/>
           <p:nvPr/>
         </p:nvSpPr>
@@ -14835,7 +15282,7 @@
       </p:sp>
       <p:sp>
         <p:nvSpPr>
-          <p:cNvPr id="7" name="Text 5"/>
+          <p:cNvPr id="14" name="Text 12"/>
           <p:cNvSpPr/>
           <p:nvPr/>
         </p:nvSpPr>
@@ -14921,7 +15368,7 @@
             </a:avLst>
           </a:prstGeom>
           <a:solidFill>
-            <a:srgbClr val="E6EFE4"/>
+            <a:srgbClr val="F5E6DA"/>
           </a:solidFill>
           <a:ln/>
         </p:spPr>
@@ -14953,13 +15400,13 @@
             <a:r>
               <a:rPr lang="en-US" sz="1000" b="1" spc="100" kern="0" dirty="0">
                 <a:solidFill>
-                  <a:srgbClr val="386641"/>
-                </a:solidFill>
-                <a:latin typeface="Segoe UI" pitchFamily="34" charset="0"/>
-                <a:ea typeface="Segoe UI" pitchFamily="34" charset="-122"/>
-                <a:cs typeface="Segoe UI" pitchFamily="34" charset="-120"/>
-              </a:rPr>
-              <a:t>BASE DE DONNÉES</a:t>
+                  <a:srgbClr val="9A4C1F"/>
+                </a:solidFill>
+                <a:latin typeface="Segoe UI" pitchFamily="34" charset="0"/>
+                <a:ea typeface="Segoe UI" pitchFamily="34" charset="-122"/>
+                <a:cs typeface="Segoe UI" pitchFamily="34" charset="-120"/>
+              </a:rPr>
+              <a:t>BACKEND</a:t>
             </a:r>
             <a:endParaRPr lang="en-US" sz="1000" dirty="0"/>
           </a:p>
@@ -14998,7 +15445,7 @@
                 <a:ea typeface="Georgia" pitchFamily="34" charset="-122"/>
                 <a:cs typeface="Georgia" pitchFamily="34" charset="-120"/>
               </a:rPr>
-              <a:t>Fondations</a:t>
+              <a:t>Facturation</a:t>
             </a:r>
             <a:endParaRPr lang="en-US" sz="2400" dirty="0"/>
           </a:p>
@@ -15046,7 +15493,7 @@
             <a:avLst/>
           </a:prstGeom>
           <a:solidFill>
-            <a:srgbClr val="386641"/>
+            <a:srgbClr val="9A4C1F"/>
           </a:solidFill>
           <a:ln/>
         </p:spPr>
@@ -15084,7 +15531,7 @@
                 <a:ea typeface="Segoe UI" pitchFamily="34" charset="-122"/>
                 <a:cs typeface="Segoe UI" pitchFamily="34" charset="-120"/>
               </a:rPr>
-              <a:t>Connexion Vercel / configuration environnement</a:t>
+              <a:t>Export PDF des factures</a:t>
             </a:r>
             <a:endParaRPr lang="en-US" sz="1400" dirty="0"/>
           </a:p>
@@ -15126,7 +15573,7 @@
                 <a:ea typeface="Segoe UI" pitchFamily="34" charset="-122"/>
                 <a:cs typeface="Segoe UI" pitchFamily="34" charset="-120"/>
               </a:rPr>
-              <a:t>Correction de la configuration d'authentification et du SMTP sur l'environnement de production Vercel.</a:t>
+              <a:t>Chaque facture (issue d'un devis signé ou d'une intervention) peut désormais être téléchargée en PDF avec les informations de l'entreprise, du client et du montant — bouton ajouté dans la page Facturation et dans la fiche d'une intervention.</a:t>
             </a:r>
             <a:endParaRPr lang="en-US" sz="1100" dirty="0"/>
           </a:p>
@@ -15373,7 +15820,7 @@
                 <a:ea typeface="Segoe UI" pitchFamily="34" charset="-122"/>
                 <a:cs typeface="Segoe UI" pitchFamily="34" charset="-120"/>
               </a:rPr>
-              <a:t>38 mise(s) à jour</a:t>
+              <a:t>41 mise(s) à jour</a:t>
             </a:r>
             <a:endParaRPr lang="en-US" sz="1200" dirty="0"/>
           </a:p>
@@ -15506,7 +15953,7 @@
             </a:avLst>
           </a:prstGeom>
           <a:solidFill>
-            <a:srgbClr val="E6EFE4"/>
+            <a:srgbClr val="F5E6DA"/>
           </a:solidFill>
           <a:ln/>
         </p:spPr>
@@ -15538,13 +15985,13 @@
             <a:r>
               <a:rPr lang="en-US" sz="1000" b="1" spc="100" kern="0" dirty="0">
                 <a:solidFill>
-                  <a:srgbClr val="386641"/>
-                </a:solidFill>
-                <a:latin typeface="Segoe UI" pitchFamily="34" charset="0"/>
-                <a:ea typeface="Segoe UI" pitchFamily="34" charset="-122"/>
-                <a:cs typeface="Segoe UI" pitchFamily="34" charset="-120"/>
-              </a:rPr>
-              <a:t>BASE DE DONNÉES</a:t>
+                  <a:srgbClr val="9A4C1F"/>
+                </a:solidFill>
+                <a:latin typeface="Segoe UI" pitchFamily="34" charset="0"/>
+                <a:ea typeface="Segoe UI" pitchFamily="34" charset="-122"/>
+                <a:cs typeface="Segoe UI" pitchFamily="34" charset="-120"/>
+              </a:rPr>
+              <a:t>BACKEND</a:t>
             </a:r>
             <a:endParaRPr lang="en-US" sz="1000" dirty="0"/>
           </a:p>
@@ -15583,7 +16030,7 @@
                 <a:ea typeface="Georgia" pitchFamily="34" charset="-122"/>
                 <a:cs typeface="Georgia" pitchFamily="34" charset="-120"/>
               </a:rPr>
-              <a:t>Devis</a:t>
+              <a:t>Sécurité</a:t>
             </a:r>
             <a:endParaRPr lang="en-US" sz="2400" dirty="0"/>
           </a:p>
@@ -15631,7 +16078,7 @@
             <a:avLst/>
           </a:prstGeom>
           <a:solidFill>
-            <a:srgbClr val="386641"/>
+            <a:srgbClr val="9A4C1F"/>
           </a:solidFill>
           <a:ln/>
         </p:spPr>
@@ -15669,7 +16116,7 @@
                 <a:ea typeface="Segoe UI" pitchFamily="34" charset="-122"/>
                 <a:cs typeface="Segoe UI" pitchFamily="34" charset="-120"/>
               </a:rPr>
-              <a:t>Migration des devis vers Supabase (table partagée)</a:t>
+              <a:t>Audit de sécurité complet et correction des failles trouvées</a:t>
             </a:r>
             <a:endParaRPr lang="en-US" sz="1400" dirty="0"/>
           </a:p>
@@ -15711,7 +16158,7 @@
                 <a:ea typeface="Segoe UI" pitchFamily="34" charset="-122"/>
                 <a:cs typeface="Segoe UI" pitchFamily="34" charset="-120"/>
               </a:rPr>
-              <a:t>Les devis créés sur le site web et sur l'application mobile (Firas) vivent désormais dans la même table Supabase 'quotes', avec un mapping bidirectionnel dédié (lib/quote-mapping.js).</a:t>
+              <a:t>Audit approfondi ayant confirmé 6 failles actives : fuite de données entre entreprises, base de données lisible sans connexion, portail client sans authentification, mots de passe en clair, base de données versionnée dans Git, absence de vérification centralisée. Corrigées le jour même (détail ci-dessous).</a:t>
             </a:r>
             <a:endParaRPr lang="en-US" sz="1100" dirty="0"/>
           </a:p>
@@ -15719,7 +16166,391 @@
       </p:sp>
       <p:sp>
         <p:nvSpPr>
-          <p:cNvPr id="9" name="Text 7"/>
+          <p:cNvPr id="9" name="Shape 7"/>
+          <p:cNvSpPr/>
+          <p:nvPr/>
+        </p:nvSpPr>
+        <p:spPr>
+          <a:xfrm>
+            <a:off x="640080" y="2926080"/>
+            <a:ext cx="10881360" cy="1097280"/>
+          </a:xfrm>
+          <a:prstGeom prst="roundRect">
+            <a:avLst>
+              <a:gd name="adj" fmla="val 5000"/>
+            </a:avLst>
+          </a:prstGeom>
+          <a:solidFill>
+            <a:srgbClr val="FFFFFF"/>
+          </a:solidFill>
+          <a:ln w="12700">
+            <a:solidFill>
+              <a:srgbClr val="E4DCCB"/>
+            </a:solidFill>
+            <a:prstDash val="solid"/>
+          </a:ln>
+        </p:spPr>
+      </p:sp>
+      <p:sp>
+        <p:nvSpPr>
+          <p:cNvPr id="10" name="Shape 8"/>
+          <p:cNvSpPr/>
+          <p:nvPr/>
+        </p:nvSpPr>
+        <p:spPr>
+          <a:xfrm>
+            <a:off x="640080" y="2926080"/>
+            <a:ext cx="54864" cy="1097280"/>
+          </a:xfrm>
+          <a:prstGeom prst="rect">
+            <a:avLst/>
+          </a:prstGeom>
+          <a:solidFill>
+            <a:srgbClr val="9A4C1F"/>
+          </a:solidFill>
+          <a:ln/>
+        </p:spPr>
+      </p:sp>
+      <p:sp>
+        <p:nvSpPr>
+          <p:cNvPr id="11" name="Text 9"/>
+          <p:cNvSpPr/>
+          <p:nvPr/>
+        </p:nvSpPr>
+        <p:spPr>
+          <a:xfrm>
+            <a:off x="914400" y="3035808"/>
+            <a:ext cx="10332720" cy="365760"/>
+          </a:xfrm>
+          <a:prstGeom prst="rect">
+            <a:avLst/>
+          </a:prstGeom>
+          <a:noFill/>
+          <a:ln/>
+        </p:spPr>
+        <p:txBody>
+          <a:bodyPr wrap="square" rtlCol="0" anchor="ctr"/>
+          <a:lstStyle/>
+          <a:p>
+            <a:pPr indent="0" marL="0">
+              <a:buNone/>
+            </a:pPr>
+            <a:r>
+              <a:rPr lang="en-US" sz="1400" b="1" dirty="0">
+                <a:solidFill>
+                  <a:srgbClr val="1B1F3B"/>
+                </a:solidFill>
+                <a:latin typeface="Segoe UI" pitchFamily="34" charset="0"/>
+                <a:ea typeface="Segoe UI" pitchFamily="34" charset="-122"/>
+                <a:cs typeface="Segoe UI" pitchFamily="34" charset="-120"/>
+              </a:rPr>
+              <a:t>Fuite de données entre entreprises corrigée</a:t>
+            </a:r>
+            <a:endParaRPr lang="en-US" sz="1400" dirty="0"/>
+          </a:p>
+        </p:txBody>
+      </p:sp>
+      <p:sp>
+        <p:nvSpPr>
+          <p:cNvPr id="12" name="Text 10"/>
+          <p:cNvSpPr/>
+          <p:nvPr/>
+        </p:nvSpPr>
+        <p:spPr>
+          <a:xfrm>
+            <a:off x="914400" y="3383280"/>
+            <a:ext cx="10332720" cy="594360"/>
+          </a:xfrm>
+          <a:prstGeom prst="rect">
+            <a:avLst/>
+          </a:prstGeom>
+          <a:noFill/>
+          <a:ln/>
+        </p:spPr>
+        <p:txBody>
+          <a:bodyPr wrap="square" rtlCol="0" anchor="ctr"/>
+          <a:lstStyle/>
+          <a:p>
+            <a:pPr indent="0" marL="0">
+              <a:lnSpc>
+                <a:spcPts val="1400"/>
+              </a:lnSpc>
+              <a:buNone/>
+            </a:pPr>
+            <a:r>
+              <a:rPr lang="en-US" sz="1100" dirty="0">
+                <a:solidFill>
+                  <a:srgbClr val="8A7C68"/>
+                </a:solidFill>
+                <a:latin typeface="Segoe UI" pitchFamily="34" charset="0"/>
+                <a:ea typeface="Segoe UI" pitchFamily="34" charset="-122"/>
+                <a:cs typeface="Segoe UI" pitchFamily="34" charset="-120"/>
+              </a:rPr>
+              <a:t>Une trentaine de routes (clients, devis, factures, tâches, ouvriers...) faisaient confiance à un identifiant envoyé par le navigateur pour savoir quelles données afficher, sans vérifier qu'il correspondait à la session connectée : n'importe qui pouvait lire ou modifier les données d'une autre entreprise en changeant cet identifiant. Ces routes vérifient désormais la vraie session avant de répondre.</a:t>
+            </a:r>
+            <a:endParaRPr lang="en-US" sz="1100" dirty="0"/>
+          </a:p>
+        </p:txBody>
+      </p:sp>
+      <p:sp>
+        <p:nvSpPr>
+          <p:cNvPr id="13" name="Shape 11"/>
+          <p:cNvSpPr/>
+          <p:nvPr/>
+        </p:nvSpPr>
+        <p:spPr>
+          <a:xfrm>
+            <a:off x="640080" y="4160520"/>
+            <a:ext cx="10881360" cy="1097280"/>
+          </a:xfrm>
+          <a:prstGeom prst="roundRect">
+            <a:avLst>
+              <a:gd name="adj" fmla="val 5000"/>
+            </a:avLst>
+          </a:prstGeom>
+          <a:solidFill>
+            <a:srgbClr val="FFFFFF"/>
+          </a:solidFill>
+          <a:ln w="12700">
+            <a:solidFill>
+              <a:srgbClr val="E4DCCB"/>
+            </a:solidFill>
+            <a:prstDash val="solid"/>
+          </a:ln>
+        </p:spPr>
+      </p:sp>
+      <p:sp>
+        <p:nvSpPr>
+          <p:cNvPr id="14" name="Shape 12"/>
+          <p:cNvSpPr/>
+          <p:nvPr/>
+        </p:nvSpPr>
+        <p:spPr>
+          <a:xfrm>
+            <a:off x="640080" y="4160520"/>
+            <a:ext cx="54864" cy="1097280"/>
+          </a:xfrm>
+          <a:prstGeom prst="rect">
+            <a:avLst/>
+          </a:prstGeom>
+          <a:solidFill>
+            <a:srgbClr val="9A4C1F"/>
+          </a:solidFill>
+          <a:ln/>
+        </p:spPr>
+      </p:sp>
+      <p:sp>
+        <p:nvSpPr>
+          <p:cNvPr id="15" name="Text 13"/>
+          <p:cNvSpPr/>
+          <p:nvPr/>
+        </p:nvSpPr>
+        <p:spPr>
+          <a:xfrm>
+            <a:off x="914400" y="4270248"/>
+            <a:ext cx="10332720" cy="365760"/>
+          </a:xfrm>
+          <a:prstGeom prst="rect">
+            <a:avLst/>
+          </a:prstGeom>
+          <a:noFill/>
+          <a:ln/>
+        </p:spPr>
+        <p:txBody>
+          <a:bodyPr wrap="square" rtlCol="0" anchor="ctr"/>
+          <a:lstStyle/>
+          <a:p>
+            <a:pPr indent="0" marL="0">
+              <a:buNone/>
+            </a:pPr>
+            <a:r>
+              <a:rPr lang="en-US" sz="1400" b="1" dirty="0">
+                <a:solidFill>
+                  <a:srgbClr val="1B1F3B"/>
+                </a:solidFill>
+                <a:latin typeface="Segoe UI" pitchFamily="34" charset="0"/>
+                <a:ea typeface="Segoe UI" pitchFamily="34" charset="-122"/>
+                <a:cs typeface="Segoe UI" pitchFamily="34" charset="-120"/>
+              </a:rPr>
+              <a:t>Portail client équipé d'une vraie session</a:t>
+            </a:r>
+            <a:endParaRPr lang="en-US" sz="1400" dirty="0"/>
+          </a:p>
+        </p:txBody>
+      </p:sp>
+      <p:sp>
+        <p:nvSpPr>
+          <p:cNvPr id="16" name="Text 14"/>
+          <p:cNvSpPr/>
+          <p:nvPr/>
+        </p:nvSpPr>
+        <p:spPr>
+          <a:xfrm>
+            <a:off x="914400" y="4617720"/>
+            <a:ext cx="10332720" cy="594360"/>
+          </a:xfrm>
+          <a:prstGeom prst="rect">
+            <a:avLst/>
+          </a:prstGeom>
+          <a:noFill/>
+          <a:ln/>
+        </p:spPr>
+        <p:txBody>
+          <a:bodyPr wrap="square" rtlCol="0" anchor="ctr"/>
+          <a:lstStyle/>
+          <a:p>
+            <a:pPr indent="0" marL="0">
+              <a:lnSpc>
+                <a:spcPts val="1400"/>
+              </a:lnSpc>
+              <a:buNone/>
+            </a:pPr>
+            <a:r>
+              <a:rPr lang="en-US" sz="1100" dirty="0">
+                <a:solidFill>
+                  <a:srgbClr val="8A7C68"/>
+                </a:solidFill>
+                <a:latin typeface="Segoe UI" pitchFamily="34" charset="0"/>
+                <a:ea typeface="Segoe UI" pitchFamily="34" charset="-122"/>
+                <a:cs typeface="Segoe UI" pitchFamily="34" charset="-120"/>
+              </a:rPr>
+              <a:t>L'espace client particulier n'avait aucune session vérifiable : ses informations (dont le mot de passe de signature) pouvaient être lues à partir du simple email d'un client, sans mot de passe. Un jeton de connexion signé a été ajouté, vérifié sur chaque page du portail client.</a:t>
+            </a:r>
+            <a:endParaRPr lang="en-US" sz="1100" dirty="0"/>
+          </a:p>
+        </p:txBody>
+      </p:sp>
+      <p:sp>
+        <p:nvSpPr>
+          <p:cNvPr id="17" name="Shape 15"/>
+          <p:cNvSpPr/>
+          <p:nvPr/>
+        </p:nvSpPr>
+        <p:spPr>
+          <a:xfrm>
+            <a:off x="640080" y="5394960"/>
+            <a:ext cx="10881360" cy="1097280"/>
+          </a:xfrm>
+          <a:prstGeom prst="roundRect">
+            <a:avLst>
+              <a:gd name="adj" fmla="val 5000"/>
+            </a:avLst>
+          </a:prstGeom>
+          <a:solidFill>
+            <a:srgbClr val="FFFFFF"/>
+          </a:solidFill>
+          <a:ln w="12700">
+            <a:solidFill>
+              <a:srgbClr val="E4DCCB"/>
+            </a:solidFill>
+            <a:prstDash val="solid"/>
+          </a:ln>
+        </p:spPr>
+      </p:sp>
+      <p:sp>
+        <p:nvSpPr>
+          <p:cNvPr id="18" name="Shape 16"/>
+          <p:cNvSpPr/>
+          <p:nvPr/>
+        </p:nvSpPr>
+        <p:spPr>
+          <a:xfrm>
+            <a:off x="640080" y="5394960"/>
+            <a:ext cx="54864" cy="1097280"/>
+          </a:xfrm>
+          <a:prstGeom prst="rect">
+            <a:avLst/>
+          </a:prstGeom>
+          <a:solidFill>
+            <a:srgbClr val="9A4C1F"/>
+          </a:solidFill>
+          <a:ln/>
+        </p:spPr>
+      </p:sp>
+      <p:sp>
+        <p:nvSpPr>
+          <p:cNvPr id="19" name="Text 17"/>
+          <p:cNvSpPr/>
+          <p:nvPr/>
+        </p:nvSpPr>
+        <p:spPr>
+          <a:xfrm>
+            <a:off x="914400" y="5504688"/>
+            <a:ext cx="10332720" cy="365760"/>
+          </a:xfrm>
+          <a:prstGeom prst="rect">
+            <a:avLst/>
+          </a:prstGeom>
+          <a:noFill/>
+          <a:ln/>
+        </p:spPr>
+        <p:txBody>
+          <a:bodyPr wrap="square" rtlCol="0" anchor="ctr"/>
+          <a:lstStyle/>
+          <a:p>
+            <a:pPr indent="0" marL="0">
+              <a:buNone/>
+            </a:pPr>
+            <a:r>
+              <a:rPr lang="en-US" sz="1400" b="1" dirty="0">
+                <a:solidFill>
+                  <a:srgbClr val="1B1F3B"/>
+                </a:solidFill>
+                <a:latin typeface="Segoe UI" pitchFamily="34" charset="0"/>
+                <a:ea typeface="Segoe UI" pitchFamily="34" charset="-122"/>
+                <a:cs typeface="Segoe UI" pitchFamily="34" charset="-120"/>
+              </a:rPr>
+              <a:t>Mots de passe du portail client chiffrés</a:t>
+            </a:r>
+            <a:endParaRPr lang="en-US" sz="1400" dirty="0"/>
+          </a:p>
+        </p:txBody>
+      </p:sp>
+      <p:sp>
+        <p:nvSpPr>
+          <p:cNvPr id="20" name="Text 18"/>
+          <p:cNvSpPr/>
+          <p:nvPr/>
+        </p:nvSpPr>
+        <p:spPr>
+          <a:xfrm>
+            <a:off x="914400" y="5852160"/>
+            <a:ext cx="10332720" cy="594360"/>
+          </a:xfrm>
+          <a:prstGeom prst="rect">
+            <a:avLst/>
+          </a:prstGeom>
+          <a:noFill/>
+          <a:ln/>
+        </p:spPr>
+        <p:txBody>
+          <a:bodyPr wrap="square" rtlCol="0" anchor="ctr"/>
+          <a:lstStyle/>
+          <a:p>
+            <a:pPr indent="0" marL="0">
+              <a:lnSpc>
+                <a:spcPts val="1400"/>
+              </a:lnSpc>
+              <a:buNone/>
+            </a:pPr>
+            <a:r>
+              <a:rPr lang="en-US" sz="1100" dirty="0">
+                <a:solidFill>
+                  <a:srgbClr val="8A7C68"/>
+                </a:solidFill>
+                <a:latin typeface="Segoe UI" pitchFamily="34" charset="0"/>
+                <a:ea typeface="Segoe UI" pitchFamily="34" charset="-122"/>
+                <a:cs typeface="Segoe UI" pitchFamily="34" charset="-120"/>
+              </a:rPr>
+              <a:t>Les mots de passe des comptes client particulier étaient stockés et comparés en texte lisible. Ils sont désormais chiffrés (hachage scrypt), avec migration automatique et transparente des comptes existants à la prochaine connexion.</a:t>
+            </a:r>
+            <a:endParaRPr lang="en-US" sz="1100" dirty="0"/>
+          </a:p>
+        </p:txBody>
+      </p:sp>
+      <p:sp>
+        <p:nvSpPr>
+          <p:cNvPr id="21" name="Text 19"/>
           <p:cNvSpPr/>
           <p:nvPr/>
         </p:nvSpPr>
@@ -15758,7 +16589,7 @@
       </p:sp>
       <p:sp>
         <p:nvSpPr>
-          <p:cNvPr id="10" name="Text 8"/>
+          <p:cNvPr id="22" name="Text 20"/>
           <p:cNvSpPr/>
           <p:nvPr/>
         </p:nvSpPr>
@@ -15809,7 +16640,7 @@
     <p:bg>
       <p:bgPr>
         <a:solidFill>
-          <a:srgbClr val="F3EEE3"/>
+          <a:srgbClr val="0B1030"/>
         </a:solidFill>
       </p:bgPr>
     </p:bg>
@@ -15835,16 +16666,14 @@
         </p:nvSpPr>
         <p:spPr>
           <a:xfrm>
-            <a:off x="640080" y="411480"/>
-            <a:ext cx="2377440" cy="365760"/>
-          </a:xfrm>
-          <a:prstGeom prst="roundRect">
-            <a:avLst>
-              <a:gd name="adj" fmla="val 50000"/>
-            </a:avLst>
+            <a:off x="0" y="3246120"/>
+            <a:ext cx="12191695" cy="54864"/>
+          </a:xfrm>
+          <a:prstGeom prst="rect">
+            <a:avLst/>
           </a:prstGeom>
           <a:solidFill>
-            <a:srgbClr val="E6EFE4"/>
+            <a:srgbClr val="386641"/>
           </a:solidFill>
           <a:ln/>
         </p:spPr>
@@ -15857,207 +16686,118 @@
         </p:nvSpPr>
         <p:spPr>
           <a:xfrm>
-            <a:off x="640080" y="411480"/>
-            <a:ext cx="2377440" cy="365760"/>
-          </a:xfrm>
-          <a:prstGeom prst="rect">
-            <a:avLst/>
-          </a:prstGeom>
-          <a:noFill/>
-          <a:ln/>
-        </p:spPr>
-        <p:txBody>
-          <a:bodyPr wrap="square" rtlCol="0" anchor="ctr"/>
-          <a:lstStyle/>
-          <a:p>
-            <a:pPr algn="ctr" indent="0" marL="0">
-              <a:buNone/>
-            </a:pPr>
-            <a:r>
-              <a:rPr lang="en-US" sz="1000" b="1" spc="100" kern="0" dirty="0">
-                <a:solidFill>
-                  <a:srgbClr val="386641"/>
-                </a:solidFill>
-                <a:latin typeface="Segoe UI" pitchFamily="34" charset="0"/>
-                <a:ea typeface="Segoe UI" pitchFamily="34" charset="-122"/>
-                <a:cs typeface="Segoe UI" pitchFamily="34" charset="-120"/>
-              </a:rPr>
-              <a:t>BASE DE DONNÉES</a:t>
-            </a:r>
-            <a:endParaRPr lang="en-US" sz="1000" dirty="0"/>
-          </a:p>
-        </p:txBody>
-      </p:sp>
-      <p:sp>
-        <p:nvSpPr>
-          <p:cNvPr id="4" name="Text 2"/>
-          <p:cNvSpPr/>
-          <p:nvPr/>
-        </p:nvSpPr>
-        <p:spPr>
-          <a:xfrm>
-            <a:off x="640080" y="868680"/>
-            <a:ext cx="10515600" cy="548640"/>
-          </a:xfrm>
-          <a:prstGeom prst="rect">
-            <a:avLst/>
-          </a:prstGeom>
-          <a:noFill/>
-          <a:ln/>
-        </p:spPr>
-        <p:txBody>
-          <a:bodyPr wrap="square" rtlCol="0" anchor="ctr"/>
-          <a:lstStyle/>
-          <a:p>
-            <a:pPr indent="0" marL="0">
-              <a:buNone/>
-            </a:pPr>
-            <a:r>
-              <a:rPr lang="en-US" sz="2400" b="1" dirty="0">
-                <a:solidFill>
-                  <a:srgbClr val="1B1F3B"/>
+            <a:off x="640080" y="2468880"/>
+            <a:ext cx="10058400" cy="914400"/>
+          </a:xfrm>
+          <a:prstGeom prst="rect">
+            <a:avLst/>
+          </a:prstGeom>
+          <a:noFill/>
+          <a:ln/>
+        </p:spPr>
+        <p:txBody>
+          <a:bodyPr wrap="square" rtlCol="0" anchor="ctr"/>
+          <a:lstStyle/>
+          <a:p>
+            <a:pPr indent="0" marL="0">
+              <a:buNone/>
+            </a:pPr>
+            <a:r>
+              <a:rPr lang="en-US" sz="3800" b="1" dirty="0">
+                <a:solidFill>
+                  <a:srgbClr val="FFFFFF"/>
                 </a:solidFill>
                 <a:latin typeface="Georgia" pitchFamily="34" charset="0"/>
                 <a:ea typeface="Georgia" pitchFamily="34" charset="-122"/>
                 <a:cs typeface="Georgia" pitchFamily="34" charset="-120"/>
               </a:rPr>
-              <a:t>Chantiers</a:t>
-            </a:r>
-            <a:endParaRPr lang="en-US" sz="2400" dirty="0"/>
-          </a:p>
-        </p:txBody>
-      </p:sp>
-      <p:sp>
-        <p:nvSpPr>
-          <p:cNvPr id="5" name="Shape 3"/>
-          <p:cNvSpPr/>
-          <p:nvPr/>
-        </p:nvSpPr>
-        <p:spPr>
-          <a:xfrm>
-            <a:off x="640080" y="1691640"/>
-            <a:ext cx="10881360" cy="1097280"/>
-          </a:xfrm>
-          <a:prstGeom prst="roundRect">
-            <a:avLst>
-              <a:gd name="adj" fmla="val 5000"/>
-            </a:avLst>
-          </a:prstGeom>
-          <a:solidFill>
-            <a:srgbClr val="FFFFFF"/>
-          </a:solidFill>
-          <a:ln w="12700">
-            <a:solidFill>
-              <a:srgbClr val="E4DCCB"/>
-            </a:solidFill>
-            <a:prstDash val="solid"/>
-          </a:ln>
-        </p:spPr>
-      </p:sp>
-      <p:sp>
-        <p:nvSpPr>
-          <p:cNvPr id="6" name="Shape 4"/>
-          <p:cNvSpPr/>
-          <p:nvPr/>
-        </p:nvSpPr>
-        <p:spPr>
-          <a:xfrm>
-            <a:off x="640080" y="1691640"/>
-            <a:ext cx="54864" cy="1097280"/>
-          </a:xfrm>
-          <a:prstGeom prst="rect">
-            <a:avLst/>
-          </a:prstGeom>
-          <a:solidFill>
-            <a:srgbClr val="386641"/>
-          </a:solidFill>
-          <a:ln/>
-        </p:spPr>
-      </p:sp>
-      <p:sp>
-        <p:nvSpPr>
-          <p:cNvPr id="7" name="Text 5"/>
-          <p:cNvSpPr/>
-          <p:nvPr/>
-        </p:nvSpPr>
-        <p:spPr>
-          <a:xfrm>
-            <a:off x="914400" y="1801368"/>
-            <a:ext cx="10332720" cy="365760"/>
-          </a:xfrm>
-          <a:prstGeom prst="rect">
-            <a:avLst/>
-          </a:prstGeom>
-          <a:noFill/>
-          <a:ln/>
-        </p:spPr>
-        <p:txBody>
-          <a:bodyPr wrap="square" rtlCol="0" anchor="ctr"/>
-          <a:lstStyle/>
-          <a:p>
-            <a:pPr indent="0" marL="0">
-              <a:buNone/>
-            </a:pPr>
-            <a:r>
-              <a:rPr lang="en-US" sz="1400" b="1" dirty="0">
-                <a:solidFill>
-                  <a:srgbClr val="1B1F3B"/>
-                </a:solidFill>
-                <a:latin typeface="Segoe UI" pitchFamily="34" charset="0"/>
-                <a:ea typeface="Segoe UI" pitchFamily="34" charset="-122"/>
-                <a:cs typeface="Segoe UI" pitchFamily="34" charset="-120"/>
-              </a:rPr>
-              <a:t>Connexion Supabase : chantiers, planning, fournitures</a:t>
-            </a:r>
-            <a:endParaRPr lang="en-US" sz="1400" dirty="0"/>
-          </a:p>
-        </p:txBody>
-      </p:sp>
-      <p:sp>
-        <p:nvSpPr>
-          <p:cNvPr id="8" name="Text 6"/>
-          <p:cNvSpPr/>
-          <p:nvPr/>
-        </p:nvSpPr>
-        <p:spPr>
-          <a:xfrm>
-            <a:off x="914400" y="2148840"/>
-            <a:ext cx="10332720" cy="594360"/>
-          </a:xfrm>
-          <a:prstGeom prst="rect">
-            <a:avLst/>
-          </a:prstGeom>
-          <a:noFill/>
-          <a:ln/>
-        </p:spPr>
-        <p:txBody>
-          <a:bodyPr wrap="square" rtlCol="0" anchor="ctr"/>
-          <a:lstStyle/>
-          <a:p>
-            <a:pPr indent="0" marL="0">
-              <a:lnSpc>
-                <a:spcPts val="1400"/>
-              </a:lnSpc>
-              <a:buNone/>
-            </a:pPr>
-            <a:r>
-              <a:rPr lang="en-US" sz="1100" dirty="0">
-                <a:solidFill>
-                  <a:srgbClr val="8A7C68"/>
-                </a:solidFill>
-                <a:latin typeface="Segoe UI" pitchFamily="34" charset="0"/>
-                <a:ea typeface="Segoe UI" pitchFamily="34" charset="-122"/>
-                <a:cs typeface="Segoe UI" pitchFamily="34" charset="-120"/>
-              </a:rPr>
-              <a:t>Ces trois modules sont branchés sur la base partagée avec l'application mobile ; les comptes utilisateurs sont également partagés entre les deux plateformes.</a:t>
-            </a:r>
-            <a:endParaRPr lang="en-US" sz="1100" dirty="0"/>
-          </a:p>
-        </p:txBody>
-      </p:sp>
-      <p:sp>
-        <p:nvSpPr>
-          <p:cNvPr id="9" name="Text 7"/>
+              <a:t>Base de données</a:t>
+            </a:r>
+            <a:endParaRPr lang="en-US" sz="3800" dirty="0"/>
+          </a:p>
+        </p:txBody>
+      </p:sp>
+      <p:sp>
+        <p:nvSpPr>
+          <p:cNvPr id="4" name="Text 2"/>
+          <p:cNvSpPr/>
+          <p:nvPr/>
+        </p:nvSpPr>
+        <p:spPr>
+          <a:xfrm>
+            <a:off x="640080" y="3429000"/>
+            <a:ext cx="10058400" cy="457200"/>
+          </a:xfrm>
+          <a:prstGeom prst="rect">
+            <a:avLst/>
+          </a:prstGeom>
+          <a:noFill/>
+          <a:ln/>
+        </p:spPr>
+        <p:txBody>
+          <a:bodyPr wrap="square" rtlCol="0" anchor="ctr"/>
+          <a:lstStyle/>
+          <a:p>
+            <a:pPr indent="0" marL="0">
+              <a:buNone/>
+            </a:pPr>
+            <a:r>
+              <a:rPr lang="en-US" sz="1500" dirty="0">
+                <a:solidFill>
+                  <a:srgbClr val="C7C9E0"/>
+                </a:solidFill>
+                <a:latin typeface="Segoe UI" pitchFamily="34" charset="0"/>
+                <a:ea typeface="Segoe UI" pitchFamily="34" charset="-122"/>
+                <a:cs typeface="Segoe UI" pitchFamily="34" charset="-120"/>
+              </a:rPr>
+              <a:t>Modèle de données et infrastructure</a:t>
+            </a:r>
+            <a:endParaRPr lang="en-US" sz="1500" dirty="0"/>
+          </a:p>
+        </p:txBody>
+      </p:sp>
+      <p:sp>
+        <p:nvSpPr>
+          <p:cNvPr id="5" name="Text 3"/>
+          <p:cNvSpPr/>
+          <p:nvPr/>
+        </p:nvSpPr>
+        <p:spPr>
+          <a:xfrm>
+            <a:off x="640080" y="3931920"/>
+            <a:ext cx="5486400" cy="365760"/>
+          </a:xfrm>
+          <a:prstGeom prst="rect">
+            <a:avLst/>
+          </a:prstGeom>
+          <a:noFill/>
+          <a:ln/>
+        </p:spPr>
+        <p:txBody>
+          <a:bodyPr wrap="square" rtlCol="0" anchor="ctr"/>
+          <a:lstStyle/>
+          <a:p>
+            <a:pPr indent="0" marL="0">
+              <a:buNone/>
+            </a:pPr>
+            <a:r>
+              <a:rPr lang="en-US" sz="1200" b="1" dirty="0">
+                <a:solidFill>
+                  <a:srgbClr val="C9A96A"/>
+                </a:solidFill>
+                <a:latin typeface="Segoe UI" pitchFamily="34" charset="0"/>
+                <a:ea typeface="Segoe UI" pitchFamily="34" charset="-122"/>
+                <a:cs typeface="Segoe UI" pitchFamily="34" charset="-120"/>
+              </a:rPr>
+              <a:t>10 mise(s) à jour</a:t>
+            </a:r>
+            <a:endParaRPr lang="en-US" sz="1200" dirty="0"/>
+          </a:p>
+        </p:txBody>
+      </p:sp>
+      <p:sp>
+        <p:nvSpPr>
+          <p:cNvPr id="6" name="Text 4"/>
           <p:cNvSpPr/>
           <p:nvPr/>
         </p:nvSpPr>
@@ -16096,7 +16836,7 @@
       </p:sp>
       <p:sp>
         <p:nvSpPr>
-          <p:cNvPr id="10" name="Text 8"/>
+          <p:cNvPr id="7" name="Text 5"/>
           <p:cNvSpPr/>
           <p:nvPr/>
         </p:nvSpPr>
@@ -16259,7 +16999,7 @@
                 <a:ea typeface="Georgia" pitchFamily="34" charset="-122"/>
                 <a:cs typeface="Georgia" pitchFamily="34" charset="-120"/>
               </a:rPr>
-              <a:t>Équipe</a:t>
+              <a:t>Fondations</a:t>
             </a:r>
             <a:endParaRPr lang="en-US" sz="2400" dirty="0"/>
           </a:p>
@@ -16345,7 +17085,7 @@
                 <a:ea typeface="Segoe UI" pitchFamily="34" charset="-122"/>
                 <a:cs typeface="Segoe UI" pitchFamily="34" charset="-120"/>
               </a:rPr>
-              <a:t>Nouvelle donnée : heures contractuelles par ouvrier</a:t>
+              <a:t>Connexion Vercel / configuration environnement</a:t>
             </a:r>
             <a:endParaRPr lang="en-US" sz="1400" dirty="0"/>
           </a:p>
@@ -16387,7 +17127,7 @@
                 <a:ea typeface="Segoe UI" pitchFamily="34" charset="-122"/>
                 <a:cs typeface="Segoe UI" pitchFamily="34" charset="-120"/>
               </a:rPr>
-              <a:t>Ajout d'un paramètre 'heures contractuelles / semaine' (35h par défaut) sur chaque fiche ouvrier, utilisé pour le calcul des écarts.</a:t>
+              <a:t>Correction de la configuration d'authentification et du SMTP sur l'environnement de production Vercel.</a:t>
             </a:r>
             <a:endParaRPr lang="en-US" sz="1100" dirty="0"/>
           </a:p>
@@ -16597,7 +17337,7 @@
                 <a:ea typeface="Georgia" pitchFamily="34" charset="-122"/>
                 <a:cs typeface="Georgia" pitchFamily="34" charset="-120"/>
               </a:rPr>
-              <a:t>Accueil &amp; stabilité</a:t>
+              <a:t>Devis</a:t>
             </a:r>
             <a:endParaRPr lang="en-US" sz="2400" dirty="0"/>
           </a:p>
@@ -16683,7 +17423,7 @@
                 <a:ea typeface="Segoe UI" pitchFamily="34" charset="-122"/>
                 <a:cs typeface="Segoe UI" pitchFamily="34" charset="-120"/>
               </a:rPr>
-              <a:t>Nettoyage du backend</a:t>
+              <a:t>Migration des devis vers Supabase (table partagée)</a:t>
             </a:r>
             <a:endParaRPr lang="en-US" sz="1400" dirty="0"/>
           </a:p>
@@ -16725,7 +17465,7 @@
                 <a:ea typeface="Segoe UI" pitchFamily="34" charset="-122"/>
                 <a:cs typeface="Segoe UI" pitchFamily="34" charset="-120"/>
               </a:rPr>
-              <a:t>Audit complet des routes serveur : suppression du code mort (module Marketplace), vérification de la cohérence entre données locales et données Supabase sur l'ensemble de l'application.</a:t>
+              <a:t>Les devis créés sur le site web et sur l'application mobile (Firas) vivent désormais dans la même table Supabase 'quotes', avec un mapping bidirectionnel dédié (lib/quote-mapping.js).</a:t>
             </a:r>
             <a:endParaRPr lang="en-US" sz="1100" dirty="0"/>
           </a:p>
@@ -16935,7 +17675,7 @@
                 <a:ea typeface="Georgia" pitchFamily="34" charset="-122"/>
                 <a:cs typeface="Georgia" pitchFamily="34" charset="-120"/>
               </a:rPr>
-              <a:t>Maintenance technique</a:t>
+              <a:t>Chantiers</a:t>
             </a:r>
             <a:endParaRPr lang="en-US" sz="2400" dirty="0"/>
           </a:p>
@@ -17021,7 +17761,7 @@
                 <a:ea typeface="Segoe UI" pitchFamily="34" charset="-122"/>
                 <a:cs typeface="Segoe UI" pitchFamily="34" charset="-120"/>
               </a:rPr>
-              <a:t>Nettoyage approfondi du code</a:t>
+              <a:t>Connexion Supabase : chantiers, planning, fournitures</a:t>
             </a:r>
             <a:endParaRPr lang="en-US" sz="1400" dirty="0"/>
           </a:p>
@@ -17063,7 +17803,7 @@
                 <a:ea typeface="Segoe UI" pitchFamily="34" charset="-122"/>
                 <a:cs typeface="Segoe UI" pitchFamily="34" charset="-120"/>
               </a:rPr>
-              <a:t>Audit complet du projet (pages, routes, fonctions, dépendances) pour repérer tout ce qui n'était plus utilisé ; suppression de 6 pages orphelines (onboarding, welcome, compte, anciennes pages devis en 3 étapes), d'une route de connexion de démonstration, d'un dossier de composants dupliqué obsolète, de plusieurs fonctions inutilisées et d'une dépendance logicielle non utilisée — sans toucher aux fonctionnalités actives.</a:t>
+              <a:t>Ces trois modules sont branchés sur la base partagée avec l'application mobile ; les comptes utilisateurs sont également partagés entre les deux plateformes.</a:t>
             </a:r>
             <a:endParaRPr lang="en-US" sz="1100" dirty="0"/>
           </a:p>
@@ -17071,263 +17811,7 @@
       </p:sp>
       <p:sp>
         <p:nvSpPr>
-          <p:cNvPr id="9" name="Shape 7"/>
-          <p:cNvSpPr/>
-          <p:nvPr/>
-        </p:nvSpPr>
-        <p:spPr>
-          <a:xfrm>
-            <a:off x="640080" y="2926080"/>
-            <a:ext cx="10881360" cy="1097280"/>
-          </a:xfrm>
-          <a:prstGeom prst="roundRect">
-            <a:avLst>
-              <a:gd name="adj" fmla="val 5000"/>
-            </a:avLst>
-          </a:prstGeom>
-          <a:solidFill>
-            <a:srgbClr val="FFFFFF"/>
-          </a:solidFill>
-          <a:ln w="12700">
-            <a:solidFill>
-              <a:srgbClr val="E4DCCB"/>
-            </a:solidFill>
-            <a:prstDash val="solid"/>
-          </a:ln>
-        </p:spPr>
-      </p:sp>
-      <p:sp>
-        <p:nvSpPr>
-          <p:cNvPr id="10" name="Shape 8"/>
-          <p:cNvSpPr/>
-          <p:nvPr/>
-        </p:nvSpPr>
-        <p:spPr>
-          <a:xfrm>
-            <a:off x="640080" y="2926080"/>
-            <a:ext cx="54864" cy="1097280"/>
-          </a:xfrm>
-          <a:prstGeom prst="rect">
-            <a:avLst/>
-          </a:prstGeom>
-          <a:solidFill>
-            <a:srgbClr val="386641"/>
-          </a:solidFill>
-          <a:ln/>
-        </p:spPr>
-      </p:sp>
-      <p:sp>
-        <p:nvSpPr>
-          <p:cNvPr id="11" name="Text 9"/>
-          <p:cNvSpPr/>
-          <p:nvPr/>
-        </p:nvSpPr>
-        <p:spPr>
-          <a:xfrm>
-            <a:off x="914400" y="3035808"/>
-            <a:ext cx="10332720" cy="365760"/>
-          </a:xfrm>
-          <a:prstGeom prst="rect">
-            <a:avLst/>
-          </a:prstGeom>
-          <a:noFill/>
-          <a:ln/>
-        </p:spPr>
-        <p:txBody>
-          <a:bodyPr wrap="square" rtlCol="0" anchor="ctr"/>
-          <a:lstStyle/>
-          <a:p>
-            <a:pPr indent="0" marL="0">
-              <a:buNone/>
-            </a:pPr>
-            <a:r>
-              <a:rPr lang="en-US" sz="1400" b="1" dirty="0">
-                <a:solidFill>
-                  <a:srgbClr val="1B1F3B"/>
-                </a:solidFill>
-                <a:latin typeface="Segoe UI" pitchFamily="34" charset="0"/>
-                <a:ea typeface="Segoe UI" pitchFamily="34" charset="-122"/>
-                <a:cs typeface="Segoe UI" pitchFamily="34" charset="-120"/>
-              </a:rPr>
-              <a:t>Suppression de code mort dans la génération de devis</a:t>
-            </a:r>
-            <a:endParaRPr lang="en-US" sz="1400" dirty="0"/>
-          </a:p>
-        </p:txBody>
-      </p:sp>
-      <p:sp>
-        <p:nvSpPr>
-          <p:cNvPr id="12" name="Text 10"/>
-          <p:cNvSpPr/>
-          <p:nvPr/>
-        </p:nvSpPr>
-        <p:spPr>
-          <a:xfrm>
-            <a:off x="914400" y="3383280"/>
-            <a:ext cx="10332720" cy="594360"/>
-          </a:xfrm>
-          <a:prstGeom prst="rect">
-            <a:avLst/>
-          </a:prstGeom>
-          <a:noFill/>
-          <a:ln/>
-        </p:spPr>
-        <p:txBody>
-          <a:bodyPr wrap="square" rtlCol="0" anchor="ctr"/>
-          <a:lstStyle/>
-          <a:p>
-            <a:pPr indent="0" marL="0">
-              <a:lnSpc>
-                <a:spcPts val="1400"/>
-              </a:lnSpc>
-              <a:buNone/>
-            </a:pPr>
-            <a:r>
-              <a:rPr lang="en-US" sz="1100" dirty="0">
-                <a:solidFill>
-                  <a:srgbClr val="8A7C68"/>
-                </a:solidFill>
-                <a:latin typeface="Segoe UI" pitchFamily="34" charset="0"/>
-                <a:ea typeface="Segoe UI" pitchFamily="34" charset="-122"/>
-                <a:cs typeface="Segoe UI" pitchFamily="34" charset="-120"/>
-              </a:rPr>
-              <a:t>Un ancien générateur de devis PDF, devenu inaccessible après une précédente refonte (code jamais exécuté), a été retiré du fichier technique de génération de documents.</a:t>
-            </a:r>
-            <a:endParaRPr lang="en-US" sz="1100" dirty="0"/>
-          </a:p>
-        </p:txBody>
-      </p:sp>
-      <p:sp>
-        <p:nvSpPr>
-          <p:cNvPr id="13" name="Shape 11"/>
-          <p:cNvSpPr/>
-          <p:nvPr/>
-        </p:nvSpPr>
-        <p:spPr>
-          <a:xfrm>
-            <a:off x="640080" y="4160520"/>
-            <a:ext cx="10881360" cy="1097280"/>
-          </a:xfrm>
-          <a:prstGeom prst="roundRect">
-            <a:avLst>
-              <a:gd name="adj" fmla="val 5000"/>
-            </a:avLst>
-          </a:prstGeom>
-          <a:solidFill>
-            <a:srgbClr val="FFFFFF"/>
-          </a:solidFill>
-          <a:ln w="12700">
-            <a:solidFill>
-              <a:srgbClr val="E4DCCB"/>
-            </a:solidFill>
-            <a:prstDash val="solid"/>
-          </a:ln>
-        </p:spPr>
-      </p:sp>
-      <p:sp>
-        <p:nvSpPr>
-          <p:cNvPr id="14" name="Shape 12"/>
-          <p:cNvSpPr/>
-          <p:nvPr/>
-        </p:nvSpPr>
-        <p:spPr>
-          <a:xfrm>
-            <a:off x="640080" y="4160520"/>
-            <a:ext cx="54864" cy="1097280"/>
-          </a:xfrm>
-          <a:prstGeom prst="rect">
-            <a:avLst/>
-          </a:prstGeom>
-          <a:solidFill>
-            <a:srgbClr val="386641"/>
-          </a:solidFill>
-          <a:ln/>
-        </p:spPr>
-      </p:sp>
-      <p:sp>
-        <p:nvSpPr>
-          <p:cNvPr id="15" name="Text 13"/>
-          <p:cNvSpPr/>
-          <p:nvPr/>
-        </p:nvSpPr>
-        <p:spPr>
-          <a:xfrm>
-            <a:off x="914400" y="4270248"/>
-            <a:ext cx="10332720" cy="365760"/>
-          </a:xfrm>
-          <a:prstGeom prst="rect">
-            <a:avLst/>
-          </a:prstGeom>
-          <a:noFill/>
-          <a:ln/>
-        </p:spPr>
-        <p:txBody>
-          <a:bodyPr wrap="square" rtlCol="0" anchor="ctr"/>
-          <a:lstStyle/>
-          <a:p>
-            <a:pPr indent="0" marL="0">
-              <a:buNone/>
-            </a:pPr>
-            <a:r>
-              <a:rPr lang="en-US" sz="1400" b="1" dirty="0">
-                <a:solidFill>
-                  <a:srgbClr val="1B1F3B"/>
-                </a:solidFill>
-                <a:latin typeface="Segoe UI" pitchFamily="34" charset="0"/>
-                <a:ea typeface="Segoe UI" pitchFamily="34" charset="-122"/>
-                <a:cs typeface="Segoe UI" pitchFamily="34" charset="-120"/>
-              </a:rPr>
-              <a:t>Suppression de code mort dans l'export Word des devis</a:t>
-            </a:r>
-            <a:endParaRPr lang="en-US" sz="1400" dirty="0"/>
-          </a:p>
-        </p:txBody>
-      </p:sp>
-      <p:sp>
-        <p:nvSpPr>
-          <p:cNvPr id="16" name="Text 14"/>
-          <p:cNvSpPr/>
-          <p:nvPr/>
-        </p:nvSpPr>
-        <p:spPr>
-          <a:xfrm>
-            <a:off x="914400" y="4617720"/>
-            <a:ext cx="10332720" cy="594360"/>
-          </a:xfrm>
-          <a:prstGeom prst="rect">
-            <a:avLst/>
-          </a:prstGeom>
-          <a:noFill/>
-          <a:ln/>
-        </p:spPr>
-        <p:txBody>
-          <a:bodyPr wrap="square" rtlCol="0" anchor="ctr"/>
-          <a:lstStyle/>
-          <a:p>
-            <a:pPr indent="0" marL="0">
-              <a:lnSpc>
-                <a:spcPts val="1400"/>
-              </a:lnSpc>
-              <a:buNone/>
-            </a:pPr>
-            <a:r>
-              <a:rPr lang="en-US" sz="1100" dirty="0">
-                <a:solidFill>
-                  <a:srgbClr val="8A7C68"/>
-                </a:solidFill>
-                <a:latin typeface="Segoe UI" pitchFamily="34" charset="0"/>
-                <a:ea typeface="Segoe UI" pitchFamily="34" charset="-122"/>
-                <a:cs typeface="Segoe UI" pitchFamily="34" charset="-120"/>
-              </a:rPr>
-              <a:t>Un second bloc de génération de document, devenu inaccessible après une précédente refonte (jamais exécuté), a été retiré du fichier technique de génération de documents.</a:t>
-            </a:r>
-            <a:endParaRPr lang="en-US" sz="1100" dirty="0"/>
-          </a:p>
-        </p:txBody>
-      </p:sp>
-      <p:sp>
-        <p:nvSpPr>
-          <p:cNvPr id="17" name="Text 15"/>
+          <p:cNvPr id="9" name="Text 7"/>
           <p:cNvSpPr/>
           <p:nvPr/>
         </p:nvSpPr>
@@ -17366,7 +17850,7 @@
       </p:sp>
       <p:sp>
         <p:nvSpPr>
-          <p:cNvPr id="18" name="Text 16"/>
+          <p:cNvPr id="10" name="Text 8"/>
           <p:cNvSpPr/>
           <p:nvPr/>
         </p:nvSpPr>
@@ -17414,6 +17898,1742 @@
 <file path=ppt/slides/slide35.xml><?xml version="1.0" encoding="utf-8"?>
 <p:sld xmlns:a="http://schemas.openxmlformats.org/drawingml/2006/main" xmlns:r="http://schemas.openxmlformats.org/officeDocument/2006/relationships" xmlns:p="http://schemas.openxmlformats.org/presentationml/2006/main">
   <p:cSld name="Slide 35">
+    <p:bg>
+      <p:bgPr>
+        <a:solidFill>
+          <a:srgbClr val="F3EEE3"/>
+        </a:solidFill>
+      </p:bgPr>
+    </p:bg>
+    <p:spTree>
+      <p:nvGrpSpPr>
+        <p:cNvPr id="1" name=""/>
+        <p:cNvGrpSpPr/>
+        <p:nvPr/>
+      </p:nvGrpSpPr>
+      <p:grpSpPr>
+        <a:xfrm>
+          <a:off x="0" y="0"/>
+          <a:ext cx="0" cy="0"/>
+          <a:chOff x="0" y="0"/>
+          <a:chExt cx="0" cy="0"/>
+        </a:xfrm>
+      </p:grpSpPr>
+      <p:sp>
+        <p:nvSpPr>
+          <p:cNvPr id="2" name="Shape 0"/>
+          <p:cNvSpPr/>
+          <p:nvPr/>
+        </p:nvSpPr>
+        <p:spPr>
+          <a:xfrm>
+            <a:off x="640080" y="411480"/>
+            <a:ext cx="2377440" cy="365760"/>
+          </a:xfrm>
+          <a:prstGeom prst="roundRect">
+            <a:avLst>
+              <a:gd name="adj" fmla="val 50000"/>
+            </a:avLst>
+          </a:prstGeom>
+          <a:solidFill>
+            <a:srgbClr val="E6EFE4"/>
+          </a:solidFill>
+          <a:ln/>
+        </p:spPr>
+      </p:sp>
+      <p:sp>
+        <p:nvSpPr>
+          <p:cNvPr id="3" name="Text 1"/>
+          <p:cNvSpPr/>
+          <p:nvPr/>
+        </p:nvSpPr>
+        <p:spPr>
+          <a:xfrm>
+            <a:off x="640080" y="411480"/>
+            <a:ext cx="2377440" cy="365760"/>
+          </a:xfrm>
+          <a:prstGeom prst="rect">
+            <a:avLst/>
+          </a:prstGeom>
+          <a:noFill/>
+          <a:ln/>
+        </p:spPr>
+        <p:txBody>
+          <a:bodyPr wrap="square" rtlCol="0" anchor="ctr"/>
+          <a:lstStyle/>
+          <a:p>
+            <a:pPr algn="ctr" indent="0" marL="0">
+              <a:buNone/>
+            </a:pPr>
+            <a:r>
+              <a:rPr lang="en-US" sz="1000" b="1" spc="100" kern="0" dirty="0">
+                <a:solidFill>
+                  <a:srgbClr val="386641"/>
+                </a:solidFill>
+                <a:latin typeface="Segoe UI" pitchFamily="34" charset="0"/>
+                <a:ea typeface="Segoe UI" pitchFamily="34" charset="-122"/>
+                <a:cs typeface="Segoe UI" pitchFamily="34" charset="-120"/>
+              </a:rPr>
+              <a:t>BASE DE DONNÉES</a:t>
+            </a:r>
+            <a:endParaRPr lang="en-US" sz="1000" dirty="0"/>
+          </a:p>
+        </p:txBody>
+      </p:sp>
+      <p:sp>
+        <p:nvSpPr>
+          <p:cNvPr id="4" name="Text 2"/>
+          <p:cNvSpPr/>
+          <p:nvPr/>
+        </p:nvSpPr>
+        <p:spPr>
+          <a:xfrm>
+            <a:off x="640080" y="868680"/>
+            <a:ext cx="10515600" cy="548640"/>
+          </a:xfrm>
+          <a:prstGeom prst="rect">
+            <a:avLst/>
+          </a:prstGeom>
+          <a:noFill/>
+          <a:ln/>
+        </p:spPr>
+        <p:txBody>
+          <a:bodyPr wrap="square" rtlCol="0" anchor="ctr"/>
+          <a:lstStyle/>
+          <a:p>
+            <a:pPr indent="0" marL="0">
+              <a:buNone/>
+            </a:pPr>
+            <a:r>
+              <a:rPr lang="en-US" sz="2400" b="1" dirty="0">
+                <a:solidFill>
+                  <a:srgbClr val="1B1F3B"/>
+                </a:solidFill>
+                <a:latin typeface="Georgia" pitchFamily="34" charset="0"/>
+                <a:ea typeface="Georgia" pitchFamily="34" charset="-122"/>
+                <a:cs typeface="Georgia" pitchFamily="34" charset="-120"/>
+              </a:rPr>
+              <a:t>Équipe</a:t>
+            </a:r>
+            <a:endParaRPr lang="en-US" sz="2400" dirty="0"/>
+          </a:p>
+        </p:txBody>
+      </p:sp>
+      <p:sp>
+        <p:nvSpPr>
+          <p:cNvPr id="5" name="Shape 3"/>
+          <p:cNvSpPr/>
+          <p:nvPr/>
+        </p:nvSpPr>
+        <p:spPr>
+          <a:xfrm>
+            <a:off x="640080" y="1691640"/>
+            <a:ext cx="10881360" cy="1097280"/>
+          </a:xfrm>
+          <a:prstGeom prst="roundRect">
+            <a:avLst>
+              <a:gd name="adj" fmla="val 5000"/>
+            </a:avLst>
+          </a:prstGeom>
+          <a:solidFill>
+            <a:srgbClr val="FFFFFF"/>
+          </a:solidFill>
+          <a:ln w="12700">
+            <a:solidFill>
+              <a:srgbClr val="E4DCCB"/>
+            </a:solidFill>
+            <a:prstDash val="solid"/>
+          </a:ln>
+        </p:spPr>
+      </p:sp>
+      <p:sp>
+        <p:nvSpPr>
+          <p:cNvPr id="6" name="Shape 4"/>
+          <p:cNvSpPr/>
+          <p:nvPr/>
+        </p:nvSpPr>
+        <p:spPr>
+          <a:xfrm>
+            <a:off x="640080" y="1691640"/>
+            <a:ext cx="54864" cy="1097280"/>
+          </a:xfrm>
+          <a:prstGeom prst="rect">
+            <a:avLst/>
+          </a:prstGeom>
+          <a:solidFill>
+            <a:srgbClr val="386641"/>
+          </a:solidFill>
+          <a:ln/>
+        </p:spPr>
+      </p:sp>
+      <p:sp>
+        <p:nvSpPr>
+          <p:cNvPr id="7" name="Text 5"/>
+          <p:cNvSpPr/>
+          <p:nvPr/>
+        </p:nvSpPr>
+        <p:spPr>
+          <a:xfrm>
+            <a:off x="914400" y="1801368"/>
+            <a:ext cx="10332720" cy="365760"/>
+          </a:xfrm>
+          <a:prstGeom prst="rect">
+            <a:avLst/>
+          </a:prstGeom>
+          <a:noFill/>
+          <a:ln/>
+        </p:spPr>
+        <p:txBody>
+          <a:bodyPr wrap="square" rtlCol="0" anchor="ctr"/>
+          <a:lstStyle/>
+          <a:p>
+            <a:pPr indent="0" marL="0">
+              <a:buNone/>
+            </a:pPr>
+            <a:r>
+              <a:rPr lang="en-US" sz="1400" b="1" dirty="0">
+                <a:solidFill>
+                  <a:srgbClr val="1B1F3B"/>
+                </a:solidFill>
+                <a:latin typeface="Segoe UI" pitchFamily="34" charset="0"/>
+                <a:ea typeface="Segoe UI" pitchFamily="34" charset="-122"/>
+                <a:cs typeface="Segoe UI" pitchFamily="34" charset="-120"/>
+              </a:rPr>
+              <a:t>Nouvelle donnée : heures contractuelles par ouvrier</a:t>
+            </a:r>
+            <a:endParaRPr lang="en-US" sz="1400" dirty="0"/>
+          </a:p>
+        </p:txBody>
+      </p:sp>
+      <p:sp>
+        <p:nvSpPr>
+          <p:cNvPr id="8" name="Text 6"/>
+          <p:cNvSpPr/>
+          <p:nvPr/>
+        </p:nvSpPr>
+        <p:spPr>
+          <a:xfrm>
+            <a:off x="914400" y="2148840"/>
+            <a:ext cx="10332720" cy="594360"/>
+          </a:xfrm>
+          <a:prstGeom prst="rect">
+            <a:avLst/>
+          </a:prstGeom>
+          <a:noFill/>
+          <a:ln/>
+        </p:spPr>
+        <p:txBody>
+          <a:bodyPr wrap="square" rtlCol="0" anchor="ctr"/>
+          <a:lstStyle/>
+          <a:p>
+            <a:pPr indent="0" marL="0">
+              <a:lnSpc>
+                <a:spcPts val="1400"/>
+              </a:lnSpc>
+              <a:buNone/>
+            </a:pPr>
+            <a:r>
+              <a:rPr lang="en-US" sz="1100" dirty="0">
+                <a:solidFill>
+                  <a:srgbClr val="8A7C68"/>
+                </a:solidFill>
+                <a:latin typeface="Segoe UI" pitchFamily="34" charset="0"/>
+                <a:ea typeface="Segoe UI" pitchFamily="34" charset="-122"/>
+                <a:cs typeface="Segoe UI" pitchFamily="34" charset="-120"/>
+              </a:rPr>
+              <a:t>Ajout d'un paramètre 'heures contractuelles / semaine' (35h par défaut) sur chaque fiche ouvrier, utilisé pour le calcul des écarts.</a:t>
+            </a:r>
+            <a:endParaRPr lang="en-US" sz="1100" dirty="0"/>
+          </a:p>
+        </p:txBody>
+      </p:sp>
+      <p:sp>
+        <p:nvSpPr>
+          <p:cNvPr id="9" name="Text 7"/>
+          <p:cNvSpPr/>
+          <p:nvPr/>
+        </p:nvSpPr>
+        <p:spPr>
+          <a:xfrm>
+            <a:off x="365760" y="6510528"/>
+            <a:ext cx="5486400" cy="274320"/>
+          </a:xfrm>
+          <a:prstGeom prst="rect">
+            <a:avLst/>
+          </a:prstGeom>
+          <a:noFill/>
+          <a:ln/>
+        </p:spPr>
+        <p:txBody>
+          <a:bodyPr wrap="square" rtlCol="0" anchor="ctr"/>
+          <a:lstStyle/>
+          <a:p>
+            <a:pPr indent="0" marL="0">
+              <a:buNone/>
+            </a:pPr>
+            <a:r>
+              <a:rPr lang="en-US" sz="900" dirty="0">
+                <a:solidFill>
+                  <a:srgbClr val="8A7C68"/>
+                </a:solidFill>
+                <a:latin typeface="Segoe UI" pitchFamily="34" charset="0"/>
+                <a:ea typeface="Segoe UI" pitchFamily="34" charset="-122"/>
+                <a:cs typeface="Segoe UI" pitchFamily="34" charset="-120"/>
+              </a:rPr>
+              <a:t>Kôji Web — Récapitulatif technique</a:t>
+            </a:r>
+            <a:endParaRPr lang="en-US" sz="900" dirty="0"/>
+          </a:p>
+        </p:txBody>
+      </p:sp>
+      <p:sp>
+        <p:nvSpPr>
+          <p:cNvPr id="10" name="Text 8"/>
+          <p:cNvSpPr/>
+          <p:nvPr/>
+        </p:nvSpPr>
+        <p:spPr>
+          <a:xfrm>
+            <a:off x="9601200" y="6510528"/>
+            <a:ext cx="2194560" cy="274320"/>
+          </a:xfrm>
+          <a:prstGeom prst="rect">
+            <a:avLst/>
+          </a:prstGeom>
+          <a:noFill/>
+          <a:ln/>
+        </p:spPr>
+        <p:txBody>
+          <a:bodyPr wrap="square" rtlCol="0" anchor="ctr"/>
+          <a:lstStyle/>
+          <a:p>
+            <a:pPr algn="r" indent="0" marL="0">
+              <a:buNone/>
+            </a:pPr>
+            <a:r>
+              <a:rPr lang="en-US" sz="900" dirty="0">
+                <a:solidFill>
+                  <a:srgbClr val="8A7C68"/>
+                </a:solidFill>
+                <a:latin typeface="Segoe UI" pitchFamily="34" charset="0"/>
+                <a:ea typeface="Segoe UI" pitchFamily="34" charset="-122"/>
+                <a:cs typeface="Segoe UI" pitchFamily="34" charset="-120"/>
+              </a:rPr>
+              <a:t>35</a:t>
+            </a:r>
+            <a:endParaRPr lang="en-US" sz="900" dirty="0"/>
+          </a:p>
+        </p:txBody>
+      </p:sp>
+    </p:spTree>
+  </p:cSld>
+  <p:clrMapOvr>
+    <a:masterClrMapping/>
+  </p:clrMapOvr>
+</p:sld>
+</file>
+
+<file path=ppt/slides/slide36.xml><?xml version="1.0" encoding="utf-8"?>
+<p:sld xmlns:a="http://schemas.openxmlformats.org/drawingml/2006/main" xmlns:r="http://schemas.openxmlformats.org/officeDocument/2006/relationships" xmlns:p="http://schemas.openxmlformats.org/presentationml/2006/main">
+  <p:cSld name="Slide 36">
+    <p:bg>
+      <p:bgPr>
+        <a:solidFill>
+          <a:srgbClr val="F3EEE3"/>
+        </a:solidFill>
+      </p:bgPr>
+    </p:bg>
+    <p:spTree>
+      <p:nvGrpSpPr>
+        <p:cNvPr id="1" name=""/>
+        <p:cNvGrpSpPr/>
+        <p:nvPr/>
+      </p:nvGrpSpPr>
+      <p:grpSpPr>
+        <a:xfrm>
+          <a:off x="0" y="0"/>
+          <a:ext cx="0" cy="0"/>
+          <a:chOff x="0" y="0"/>
+          <a:chExt cx="0" cy="0"/>
+        </a:xfrm>
+      </p:grpSpPr>
+      <p:sp>
+        <p:nvSpPr>
+          <p:cNvPr id="2" name="Shape 0"/>
+          <p:cNvSpPr/>
+          <p:nvPr/>
+        </p:nvSpPr>
+        <p:spPr>
+          <a:xfrm>
+            <a:off x="640080" y="411480"/>
+            <a:ext cx="2377440" cy="365760"/>
+          </a:xfrm>
+          <a:prstGeom prst="roundRect">
+            <a:avLst>
+              <a:gd name="adj" fmla="val 50000"/>
+            </a:avLst>
+          </a:prstGeom>
+          <a:solidFill>
+            <a:srgbClr val="E6EFE4"/>
+          </a:solidFill>
+          <a:ln/>
+        </p:spPr>
+      </p:sp>
+      <p:sp>
+        <p:nvSpPr>
+          <p:cNvPr id="3" name="Text 1"/>
+          <p:cNvSpPr/>
+          <p:nvPr/>
+        </p:nvSpPr>
+        <p:spPr>
+          <a:xfrm>
+            <a:off x="640080" y="411480"/>
+            <a:ext cx="2377440" cy="365760"/>
+          </a:xfrm>
+          <a:prstGeom prst="rect">
+            <a:avLst/>
+          </a:prstGeom>
+          <a:noFill/>
+          <a:ln/>
+        </p:spPr>
+        <p:txBody>
+          <a:bodyPr wrap="square" rtlCol="0" anchor="ctr"/>
+          <a:lstStyle/>
+          <a:p>
+            <a:pPr algn="ctr" indent="0" marL="0">
+              <a:buNone/>
+            </a:pPr>
+            <a:r>
+              <a:rPr lang="en-US" sz="1000" b="1" spc="100" kern="0" dirty="0">
+                <a:solidFill>
+                  <a:srgbClr val="386641"/>
+                </a:solidFill>
+                <a:latin typeface="Segoe UI" pitchFamily="34" charset="0"/>
+                <a:ea typeface="Segoe UI" pitchFamily="34" charset="-122"/>
+                <a:cs typeface="Segoe UI" pitchFamily="34" charset="-120"/>
+              </a:rPr>
+              <a:t>BASE DE DONNÉES</a:t>
+            </a:r>
+            <a:endParaRPr lang="en-US" sz="1000" dirty="0"/>
+          </a:p>
+        </p:txBody>
+      </p:sp>
+      <p:sp>
+        <p:nvSpPr>
+          <p:cNvPr id="4" name="Text 2"/>
+          <p:cNvSpPr/>
+          <p:nvPr/>
+        </p:nvSpPr>
+        <p:spPr>
+          <a:xfrm>
+            <a:off x="640080" y="868680"/>
+            <a:ext cx="10515600" cy="548640"/>
+          </a:xfrm>
+          <a:prstGeom prst="rect">
+            <a:avLst/>
+          </a:prstGeom>
+          <a:noFill/>
+          <a:ln/>
+        </p:spPr>
+        <p:txBody>
+          <a:bodyPr wrap="square" rtlCol="0" anchor="ctr"/>
+          <a:lstStyle/>
+          <a:p>
+            <a:pPr indent="0" marL="0">
+              <a:buNone/>
+            </a:pPr>
+            <a:r>
+              <a:rPr lang="en-US" sz="2400" b="1" dirty="0">
+                <a:solidFill>
+                  <a:srgbClr val="1B1F3B"/>
+                </a:solidFill>
+                <a:latin typeface="Georgia" pitchFamily="34" charset="0"/>
+                <a:ea typeface="Georgia" pitchFamily="34" charset="-122"/>
+                <a:cs typeface="Georgia" pitchFamily="34" charset="-120"/>
+              </a:rPr>
+              <a:t>Accueil &amp; stabilité</a:t>
+            </a:r>
+            <a:endParaRPr lang="en-US" sz="2400" dirty="0"/>
+          </a:p>
+        </p:txBody>
+      </p:sp>
+      <p:sp>
+        <p:nvSpPr>
+          <p:cNvPr id="5" name="Shape 3"/>
+          <p:cNvSpPr/>
+          <p:nvPr/>
+        </p:nvSpPr>
+        <p:spPr>
+          <a:xfrm>
+            <a:off x="640080" y="1691640"/>
+            <a:ext cx="10881360" cy="1097280"/>
+          </a:xfrm>
+          <a:prstGeom prst="roundRect">
+            <a:avLst>
+              <a:gd name="adj" fmla="val 5000"/>
+            </a:avLst>
+          </a:prstGeom>
+          <a:solidFill>
+            <a:srgbClr val="FFFFFF"/>
+          </a:solidFill>
+          <a:ln w="12700">
+            <a:solidFill>
+              <a:srgbClr val="E4DCCB"/>
+            </a:solidFill>
+            <a:prstDash val="solid"/>
+          </a:ln>
+        </p:spPr>
+      </p:sp>
+      <p:sp>
+        <p:nvSpPr>
+          <p:cNvPr id="6" name="Shape 4"/>
+          <p:cNvSpPr/>
+          <p:nvPr/>
+        </p:nvSpPr>
+        <p:spPr>
+          <a:xfrm>
+            <a:off x="640080" y="1691640"/>
+            <a:ext cx="54864" cy="1097280"/>
+          </a:xfrm>
+          <a:prstGeom prst="rect">
+            <a:avLst/>
+          </a:prstGeom>
+          <a:solidFill>
+            <a:srgbClr val="386641"/>
+          </a:solidFill>
+          <a:ln/>
+        </p:spPr>
+      </p:sp>
+      <p:sp>
+        <p:nvSpPr>
+          <p:cNvPr id="7" name="Text 5"/>
+          <p:cNvSpPr/>
+          <p:nvPr/>
+        </p:nvSpPr>
+        <p:spPr>
+          <a:xfrm>
+            <a:off x="914400" y="1801368"/>
+            <a:ext cx="10332720" cy="365760"/>
+          </a:xfrm>
+          <a:prstGeom prst="rect">
+            <a:avLst/>
+          </a:prstGeom>
+          <a:noFill/>
+          <a:ln/>
+        </p:spPr>
+        <p:txBody>
+          <a:bodyPr wrap="square" rtlCol="0" anchor="ctr"/>
+          <a:lstStyle/>
+          <a:p>
+            <a:pPr indent="0" marL="0">
+              <a:buNone/>
+            </a:pPr>
+            <a:r>
+              <a:rPr lang="en-US" sz="1400" b="1" dirty="0">
+                <a:solidFill>
+                  <a:srgbClr val="1B1F3B"/>
+                </a:solidFill>
+                <a:latin typeface="Segoe UI" pitchFamily="34" charset="0"/>
+                <a:ea typeface="Segoe UI" pitchFamily="34" charset="-122"/>
+                <a:cs typeface="Segoe UI" pitchFamily="34" charset="-120"/>
+              </a:rPr>
+              <a:t>Nettoyage du backend</a:t>
+            </a:r>
+            <a:endParaRPr lang="en-US" sz="1400" dirty="0"/>
+          </a:p>
+        </p:txBody>
+      </p:sp>
+      <p:sp>
+        <p:nvSpPr>
+          <p:cNvPr id="8" name="Text 6"/>
+          <p:cNvSpPr/>
+          <p:nvPr/>
+        </p:nvSpPr>
+        <p:spPr>
+          <a:xfrm>
+            <a:off x="914400" y="2148840"/>
+            <a:ext cx="10332720" cy="594360"/>
+          </a:xfrm>
+          <a:prstGeom prst="rect">
+            <a:avLst/>
+          </a:prstGeom>
+          <a:noFill/>
+          <a:ln/>
+        </p:spPr>
+        <p:txBody>
+          <a:bodyPr wrap="square" rtlCol="0" anchor="ctr"/>
+          <a:lstStyle/>
+          <a:p>
+            <a:pPr indent="0" marL="0">
+              <a:lnSpc>
+                <a:spcPts val="1400"/>
+              </a:lnSpc>
+              <a:buNone/>
+            </a:pPr>
+            <a:r>
+              <a:rPr lang="en-US" sz="1100" dirty="0">
+                <a:solidFill>
+                  <a:srgbClr val="8A7C68"/>
+                </a:solidFill>
+                <a:latin typeface="Segoe UI" pitchFamily="34" charset="0"/>
+                <a:ea typeface="Segoe UI" pitchFamily="34" charset="-122"/>
+                <a:cs typeface="Segoe UI" pitchFamily="34" charset="-120"/>
+              </a:rPr>
+              <a:t>Audit complet des routes serveur : suppression du code mort (module Marketplace), vérification de la cohérence entre données locales et données Supabase sur l'ensemble de l'application.</a:t>
+            </a:r>
+            <a:endParaRPr lang="en-US" sz="1100" dirty="0"/>
+          </a:p>
+        </p:txBody>
+      </p:sp>
+      <p:sp>
+        <p:nvSpPr>
+          <p:cNvPr id="9" name="Text 7"/>
+          <p:cNvSpPr/>
+          <p:nvPr/>
+        </p:nvSpPr>
+        <p:spPr>
+          <a:xfrm>
+            <a:off x="365760" y="6510528"/>
+            <a:ext cx="5486400" cy="274320"/>
+          </a:xfrm>
+          <a:prstGeom prst="rect">
+            <a:avLst/>
+          </a:prstGeom>
+          <a:noFill/>
+          <a:ln/>
+        </p:spPr>
+        <p:txBody>
+          <a:bodyPr wrap="square" rtlCol="0" anchor="ctr"/>
+          <a:lstStyle/>
+          <a:p>
+            <a:pPr indent="0" marL="0">
+              <a:buNone/>
+            </a:pPr>
+            <a:r>
+              <a:rPr lang="en-US" sz="900" dirty="0">
+                <a:solidFill>
+                  <a:srgbClr val="8A7C68"/>
+                </a:solidFill>
+                <a:latin typeface="Segoe UI" pitchFamily="34" charset="0"/>
+                <a:ea typeface="Segoe UI" pitchFamily="34" charset="-122"/>
+                <a:cs typeface="Segoe UI" pitchFamily="34" charset="-120"/>
+              </a:rPr>
+              <a:t>Kôji Web — Récapitulatif technique</a:t>
+            </a:r>
+            <a:endParaRPr lang="en-US" sz="900" dirty="0"/>
+          </a:p>
+        </p:txBody>
+      </p:sp>
+      <p:sp>
+        <p:nvSpPr>
+          <p:cNvPr id="10" name="Text 8"/>
+          <p:cNvSpPr/>
+          <p:nvPr/>
+        </p:nvSpPr>
+        <p:spPr>
+          <a:xfrm>
+            <a:off x="9601200" y="6510528"/>
+            <a:ext cx="2194560" cy="274320"/>
+          </a:xfrm>
+          <a:prstGeom prst="rect">
+            <a:avLst/>
+          </a:prstGeom>
+          <a:noFill/>
+          <a:ln/>
+        </p:spPr>
+        <p:txBody>
+          <a:bodyPr wrap="square" rtlCol="0" anchor="ctr"/>
+          <a:lstStyle/>
+          <a:p>
+            <a:pPr algn="r" indent="0" marL="0">
+              <a:buNone/>
+            </a:pPr>
+            <a:r>
+              <a:rPr lang="en-US" sz="900" dirty="0">
+                <a:solidFill>
+                  <a:srgbClr val="8A7C68"/>
+                </a:solidFill>
+                <a:latin typeface="Segoe UI" pitchFamily="34" charset="0"/>
+                <a:ea typeface="Segoe UI" pitchFamily="34" charset="-122"/>
+                <a:cs typeface="Segoe UI" pitchFamily="34" charset="-120"/>
+              </a:rPr>
+              <a:t>36</a:t>
+            </a:r>
+            <a:endParaRPr lang="en-US" sz="900" dirty="0"/>
+          </a:p>
+        </p:txBody>
+      </p:sp>
+    </p:spTree>
+  </p:cSld>
+  <p:clrMapOvr>
+    <a:masterClrMapping/>
+  </p:clrMapOvr>
+</p:sld>
+</file>
+
+<file path=ppt/slides/slide37.xml><?xml version="1.0" encoding="utf-8"?>
+<p:sld xmlns:a="http://schemas.openxmlformats.org/drawingml/2006/main" xmlns:r="http://schemas.openxmlformats.org/officeDocument/2006/relationships" xmlns:p="http://schemas.openxmlformats.org/presentationml/2006/main">
+  <p:cSld name="Slide 37">
+    <p:bg>
+      <p:bgPr>
+        <a:solidFill>
+          <a:srgbClr val="F3EEE3"/>
+        </a:solidFill>
+      </p:bgPr>
+    </p:bg>
+    <p:spTree>
+      <p:nvGrpSpPr>
+        <p:cNvPr id="1" name=""/>
+        <p:cNvGrpSpPr/>
+        <p:nvPr/>
+      </p:nvGrpSpPr>
+      <p:grpSpPr>
+        <a:xfrm>
+          <a:off x="0" y="0"/>
+          <a:ext cx="0" cy="0"/>
+          <a:chOff x="0" y="0"/>
+          <a:chExt cx="0" cy="0"/>
+        </a:xfrm>
+      </p:grpSpPr>
+      <p:sp>
+        <p:nvSpPr>
+          <p:cNvPr id="2" name="Shape 0"/>
+          <p:cNvSpPr/>
+          <p:nvPr/>
+        </p:nvSpPr>
+        <p:spPr>
+          <a:xfrm>
+            <a:off x="640080" y="411480"/>
+            <a:ext cx="2377440" cy="365760"/>
+          </a:xfrm>
+          <a:prstGeom prst="roundRect">
+            <a:avLst>
+              <a:gd name="adj" fmla="val 50000"/>
+            </a:avLst>
+          </a:prstGeom>
+          <a:solidFill>
+            <a:srgbClr val="E6EFE4"/>
+          </a:solidFill>
+          <a:ln/>
+        </p:spPr>
+      </p:sp>
+      <p:sp>
+        <p:nvSpPr>
+          <p:cNvPr id="3" name="Text 1"/>
+          <p:cNvSpPr/>
+          <p:nvPr/>
+        </p:nvSpPr>
+        <p:spPr>
+          <a:xfrm>
+            <a:off x="640080" y="411480"/>
+            <a:ext cx="2377440" cy="365760"/>
+          </a:xfrm>
+          <a:prstGeom prst="rect">
+            <a:avLst/>
+          </a:prstGeom>
+          <a:noFill/>
+          <a:ln/>
+        </p:spPr>
+        <p:txBody>
+          <a:bodyPr wrap="square" rtlCol="0" anchor="ctr"/>
+          <a:lstStyle/>
+          <a:p>
+            <a:pPr algn="ctr" indent="0" marL="0">
+              <a:buNone/>
+            </a:pPr>
+            <a:r>
+              <a:rPr lang="en-US" sz="1000" b="1" spc="100" kern="0" dirty="0">
+                <a:solidFill>
+                  <a:srgbClr val="386641"/>
+                </a:solidFill>
+                <a:latin typeface="Segoe UI" pitchFamily="34" charset="0"/>
+                <a:ea typeface="Segoe UI" pitchFamily="34" charset="-122"/>
+                <a:cs typeface="Segoe UI" pitchFamily="34" charset="-120"/>
+              </a:rPr>
+              <a:t>BASE DE DONNÉES</a:t>
+            </a:r>
+            <a:endParaRPr lang="en-US" sz="1000" dirty="0"/>
+          </a:p>
+        </p:txBody>
+      </p:sp>
+      <p:sp>
+        <p:nvSpPr>
+          <p:cNvPr id="4" name="Text 2"/>
+          <p:cNvSpPr/>
+          <p:nvPr/>
+        </p:nvSpPr>
+        <p:spPr>
+          <a:xfrm>
+            <a:off x="640080" y="868680"/>
+            <a:ext cx="10515600" cy="548640"/>
+          </a:xfrm>
+          <a:prstGeom prst="rect">
+            <a:avLst/>
+          </a:prstGeom>
+          <a:noFill/>
+          <a:ln/>
+        </p:spPr>
+        <p:txBody>
+          <a:bodyPr wrap="square" rtlCol="0" anchor="ctr"/>
+          <a:lstStyle/>
+          <a:p>
+            <a:pPr indent="0" marL="0">
+              <a:buNone/>
+            </a:pPr>
+            <a:r>
+              <a:rPr lang="en-US" sz="2400" b="1" dirty="0">
+                <a:solidFill>
+                  <a:srgbClr val="1B1F3B"/>
+                </a:solidFill>
+                <a:latin typeface="Georgia" pitchFamily="34" charset="0"/>
+                <a:ea typeface="Georgia" pitchFamily="34" charset="-122"/>
+                <a:cs typeface="Georgia" pitchFamily="34" charset="-120"/>
+              </a:rPr>
+              <a:t>Maintenance technique</a:t>
+            </a:r>
+            <a:endParaRPr lang="en-US" sz="2400" dirty="0"/>
+          </a:p>
+        </p:txBody>
+      </p:sp>
+      <p:sp>
+        <p:nvSpPr>
+          <p:cNvPr id="5" name="Shape 3"/>
+          <p:cNvSpPr/>
+          <p:nvPr/>
+        </p:nvSpPr>
+        <p:spPr>
+          <a:xfrm>
+            <a:off x="640080" y="1691640"/>
+            <a:ext cx="10881360" cy="1097280"/>
+          </a:xfrm>
+          <a:prstGeom prst="roundRect">
+            <a:avLst>
+              <a:gd name="adj" fmla="val 5000"/>
+            </a:avLst>
+          </a:prstGeom>
+          <a:solidFill>
+            <a:srgbClr val="FFFFFF"/>
+          </a:solidFill>
+          <a:ln w="12700">
+            <a:solidFill>
+              <a:srgbClr val="E4DCCB"/>
+            </a:solidFill>
+            <a:prstDash val="solid"/>
+          </a:ln>
+        </p:spPr>
+      </p:sp>
+      <p:sp>
+        <p:nvSpPr>
+          <p:cNvPr id="6" name="Shape 4"/>
+          <p:cNvSpPr/>
+          <p:nvPr/>
+        </p:nvSpPr>
+        <p:spPr>
+          <a:xfrm>
+            <a:off x="640080" y="1691640"/>
+            <a:ext cx="54864" cy="1097280"/>
+          </a:xfrm>
+          <a:prstGeom prst="rect">
+            <a:avLst/>
+          </a:prstGeom>
+          <a:solidFill>
+            <a:srgbClr val="386641"/>
+          </a:solidFill>
+          <a:ln/>
+        </p:spPr>
+      </p:sp>
+      <p:sp>
+        <p:nvSpPr>
+          <p:cNvPr id="7" name="Text 5"/>
+          <p:cNvSpPr/>
+          <p:nvPr/>
+        </p:nvSpPr>
+        <p:spPr>
+          <a:xfrm>
+            <a:off x="914400" y="1801368"/>
+            <a:ext cx="10332720" cy="365760"/>
+          </a:xfrm>
+          <a:prstGeom prst="rect">
+            <a:avLst/>
+          </a:prstGeom>
+          <a:noFill/>
+          <a:ln/>
+        </p:spPr>
+        <p:txBody>
+          <a:bodyPr wrap="square" rtlCol="0" anchor="ctr"/>
+          <a:lstStyle/>
+          <a:p>
+            <a:pPr indent="0" marL="0">
+              <a:buNone/>
+            </a:pPr>
+            <a:r>
+              <a:rPr lang="en-US" sz="1400" b="1" dirty="0">
+                <a:solidFill>
+                  <a:srgbClr val="1B1F3B"/>
+                </a:solidFill>
+                <a:latin typeface="Segoe UI" pitchFamily="34" charset="0"/>
+                <a:ea typeface="Segoe UI" pitchFamily="34" charset="-122"/>
+                <a:cs typeface="Segoe UI" pitchFamily="34" charset="-120"/>
+              </a:rPr>
+              <a:t>Nettoyage approfondi du code</a:t>
+            </a:r>
+            <a:endParaRPr lang="en-US" sz="1400" dirty="0"/>
+          </a:p>
+        </p:txBody>
+      </p:sp>
+      <p:sp>
+        <p:nvSpPr>
+          <p:cNvPr id="8" name="Text 6"/>
+          <p:cNvSpPr/>
+          <p:nvPr/>
+        </p:nvSpPr>
+        <p:spPr>
+          <a:xfrm>
+            <a:off x="914400" y="2148840"/>
+            <a:ext cx="10332720" cy="594360"/>
+          </a:xfrm>
+          <a:prstGeom prst="rect">
+            <a:avLst/>
+          </a:prstGeom>
+          <a:noFill/>
+          <a:ln/>
+        </p:spPr>
+        <p:txBody>
+          <a:bodyPr wrap="square" rtlCol="0" anchor="ctr"/>
+          <a:lstStyle/>
+          <a:p>
+            <a:pPr indent="0" marL="0">
+              <a:lnSpc>
+                <a:spcPts val="1400"/>
+              </a:lnSpc>
+              <a:buNone/>
+            </a:pPr>
+            <a:r>
+              <a:rPr lang="en-US" sz="1100" dirty="0">
+                <a:solidFill>
+                  <a:srgbClr val="8A7C68"/>
+                </a:solidFill>
+                <a:latin typeface="Segoe UI" pitchFamily="34" charset="0"/>
+                <a:ea typeface="Segoe UI" pitchFamily="34" charset="-122"/>
+                <a:cs typeface="Segoe UI" pitchFamily="34" charset="-120"/>
+              </a:rPr>
+              <a:t>Audit complet du projet (pages, routes, fonctions, dépendances) pour repérer tout ce qui n'était plus utilisé ; suppression de 6 pages orphelines (onboarding, welcome, compte, anciennes pages devis en 3 étapes), d'une route de connexion de démonstration, d'un dossier de composants dupliqué obsolète, de plusieurs fonctions inutilisées et d'une dépendance logicielle non utilisée — sans toucher aux fonctionnalités actives.</a:t>
+            </a:r>
+            <a:endParaRPr lang="en-US" sz="1100" dirty="0"/>
+          </a:p>
+        </p:txBody>
+      </p:sp>
+      <p:sp>
+        <p:nvSpPr>
+          <p:cNvPr id="9" name="Shape 7"/>
+          <p:cNvSpPr/>
+          <p:nvPr/>
+        </p:nvSpPr>
+        <p:spPr>
+          <a:xfrm>
+            <a:off x="640080" y="2926080"/>
+            <a:ext cx="10881360" cy="1097280"/>
+          </a:xfrm>
+          <a:prstGeom prst="roundRect">
+            <a:avLst>
+              <a:gd name="adj" fmla="val 5000"/>
+            </a:avLst>
+          </a:prstGeom>
+          <a:solidFill>
+            <a:srgbClr val="FFFFFF"/>
+          </a:solidFill>
+          <a:ln w="12700">
+            <a:solidFill>
+              <a:srgbClr val="E4DCCB"/>
+            </a:solidFill>
+            <a:prstDash val="solid"/>
+          </a:ln>
+        </p:spPr>
+      </p:sp>
+      <p:sp>
+        <p:nvSpPr>
+          <p:cNvPr id="10" name="Shape 8"/>
+          <p:cNvSpPr/>
+          <p:nvPr/>
+        </p:nvSpPr>
+        <p:spPr>
+          <a:xfrm>
+            <a:off x="640080" y="2926080"/>
+            <a:ext cx="54864" cy="1097280"/>
+          </a:xfrm>
+          <a:prstGeom prst="rect">
+            <a:avLst/>
+          </a:prstGeom>
+          <a:solidFill>
+            <a:srgbClr val="386641"/>
+          </a:solidFill>
+          <a:ln/>
+        </p:spPr>
+      </p:sp>
+      <p:sp>
+        <p:nvSpPr>
+          <p:cNvPr id="11" name="Text 9"/>
+          <p:cNvSpPr/>
+          <p:nvPr/>
+        </p:nvSpPr>
+        <p:spPr>
+          <a:xfrm>
+            <a:off x="914400" y="3035808"/>
+            <a:ext cx="10332720" cy="365760"/>
+          </a:xfrm>
+          <a:prstGeom prst="rect">
+            <a:avLst/>
+          </a:prstGeom>
+          <a:noFill/>
+          <a:ln/>
+        </p:spPr>
+        <p:txBody>
+          <a:bodyPr wrap="square" rtlCol="0" anchor="ctr"/>
+          <a:lstStyle/>
+          <a:p>
+            <a:pPr indent="0" marL="0">
+              <a:buNone/>
+            </a:pPr>
+            <a:r>
+              <a:rPr lang="en-US" sz="1400" b="1" dirty="0">
+                <a:solidFill>
+                  <a:srgbClr val="1B1F3B"/>
+                </a:solidFill>
+                <a:latin typeface="Segoe UI" pitchFamily="34" charset="0"/>
+                <a:ea typeface="Segoe UI" pitchFamily="34" charset="-122"/>
+                <a:cs typeface="Segoe UI" pitchFamily="34" charset="-120"/>
+              </a:rPr>
+              <a:t>Suppression de code mort dans la génération de devis</a:t>
+            </a:r>
+            <a:endParaRPr lang="en-US" sz="1400" dirty="0"/>
+          </a:p>
+        </p:txBody>
+      </p:sp>
+      <p:sp>
+        <p:nvSpPr>
+          <p:cNvPr id="12" name="Text 10"/>
+          <p:cNvSpPr/>
+          <p:nvPr/>
+        </p:nvSpPr>
+        <p:spPr>
+          <a:xfrm>
+            <a:off x="914400" y="3383280"/>
+            <a:ext cx="10332720" cy="594360"/>
+          </a:xfrm>
+          <a:prstGeom prst="rect">
+            <a:avLst/>
+          </a:prstGeom>
+          <a:noFill/>
+          <a:ln/>
+        </p:spPr>
+        <p:txBody>
+          <a:bodyPr wrap="square" rtlCol="0" anchor="ctr"/>
+          <a:lstStyle/>
+          <a:p>
+            <a:pPr indent="0" marL="0">
+              <a:lnSpc>
+                <a:spcPts val="1400"/>
+              </a:lnSpc>
+              <a:buNone/>
+            </a:pPr>
+            <a:r>
+              <a:rPr lang="en-US" sz="1100" dirty="0">
+                <a:solidFill>
+                  <a:srgbClr val="8A7C68"/>
+                </a:solidFill>
+                <a:latin typeface="Segoe UI" pitchFamily="34" charset="0"/>
+                <a:ea typeface="Segoe UI" pitchFamily="34" charset="-122"/>
+                <a:cs typeface="Segoe UI" pitchFamily="34" charset="-120"/>
+              </a:rPr>
+              <a:t>Un ancien générateur de devis PDF, devenu inaccessible après une précédente refonte (code jamais exécuté), a été retiré du fichier technique de génération de documents.</a:t>
+            </a:r>
+            <a:endParaRPr lang="en-US" sz="1100" dirty="0"/>
+          </a:p>
+        </p:txBody>
+      </p:sp>
+      <p:sp>
+        <p:nvSpPr>
+          <p:cNvPr id="13" name="Shape 11"/>
+          <p:cNvSpPr/>
+          <p:nvPr/>
+        </p:nvSpPr>
+        <p:spPr>
+          <a:xfrm>
+            <a:off x="640080" y="4160520"/>
+            <a:ext cx="10881360" cy="1097280"/>
+          </a:xfrm>
+          <a:prstGeom prst="roundRect">
+            <a:avLst>
+              <a:gd name="adj" fmla="val 5000"/>
+            </a:avLst>
+          </a:prstGeom>
+          <a:solidFill>
+            <a:srgbClr val="FFFFFF"/>
+          </a:solidFill>
+          <a:ln w="12700">
+            <a:solidFill>
+              <a:srgbClr val="E4DCCB"/>
+            </a:solidFill>
+            <a:prstDash val="solid"/>
+          </a:ln>
+        </p:spPr>
+      </p:sp>
+      <p:sp>
+        <p:nvSpPr>
+          <p:cNvPr id="14" name="Shape 12"/>
+          <p:cNvSpPr/>
+          <p:nvPr/>
+        </p:nvSpPr>
+        <p:spPr>
+          <a:xfrm>
+            <a:off x="640080" y="4160520"/>
+            <a:ext cx="54864" cy="1097280"/>
+          </a:xfrm>
+          <a:prstGeom prst="rect">
+            <a:avLst/>
+          </a:prstGeom>
+          <a:solidFill>
+            <a:srgbClr val="386641"/>
+          </a:solidFill>
+          <a:ln/>
+        </p:spPr>
+      </p:sp>
+      <p:sp>
+        <p:nvSpPr>
+          <p:cNvPr id="15" name="Text 13"/>
+          <p:cNvSpPr/>
+          <p:nvPr/>
+        </p:nvSpPr>
+        <p:spPr>
+          <a:xfrm>
+            <a:off x="914400" y="4270248"/>
+            <a:ext cx="10332720" cy="365760"/>
+          </a:xfrm>
+          <a:prstGeom prst="rect">
+            <a:avLst/>
+          </a:prstGeom>
+          <a:noFill/>
+          <a:ln/>
+        </p:spPr>
+        <p:txBody>
+          <a:bodyPr wrap="square" rtlCol="0" anchor="ctr"/>
+          <a:lstStyle/>
+          <a:p>
+            <a:pPr indent="0" marL="0">
+              <a:buNone/>
+            </a:pPr>
+            <a:r>
+              <a:rPr lang="en-US" sz="1400" b="1" dirty="0">
+                <a:solidFill>
+                  <a:srgbClr val="1B1F3B"/>
+                </a:solidFill>
+                <a:latin typeface="Segoe UI" pitchFamily="34" charset="0"/>
+                <a:ea typeface="Segoe UI" pitchFamily="34" charset="-122"/>
+                <a:cs typeface="Segoe UI" pitchFamily="34" charset="-120"/>
+              </a:rPr>
+              <a:t>Suppression de code mort dans l'export Word des devis</a:t>
+            </a:r>
+            <a:endParaRPr lang="en-US" sz="1400" dirty="0"/>
+          </a:p>
+        </p:txBody>
+      </p:sp>
+      <p:sp>
+        <p:nvSpPr>
+          <p:cNvPr id="16" name="Text 14"/>
+          <p:cNvSpPr/>
+          <p:nvPr/>
+        </p:nvSpPr>
+        <p:spPr>
+          <a:xfrm>
+            <a:off x="914400" y="4617720"/>
+            <a:ext cx="10332720" cy="594360"/>
+          </a:xfrm>
+          <a:prstGeom prst="rect">
+            <a:avLst/>
+          </a:prstGeom>
+          <a:noFill/>
+          <a:ln/>
+        </p:spPr>
+        <p:txBody>
+          <a:bodyPr wrap="square" rtlCol="0" anchor="ctr"/>
+          <a:lstStyle/>
+          <a:p>
+            <a:pPr indent="0" marL="0">
+              <a:lnSpc>
+                <a:spcPts val="1400"/>
+              </a:lnSpc>
+              <a:buNone/>
+            </a:pPr>
+            <a:r>
+              <a:rPr lang="en-US" sz="1100" dirty="0">
+                <a:solidFill>
+                  <a:srgbClr val="8A7C68"/>
+                </a:solidFill>
+                <a:latin typeface="Segoe UI" pitchFamily="34" charset="0"/>
+                <a:ea typeface="Segoe UI" pitchFamily="34" charset="-122"/>
+                <a:cs typeface="Segoe UI" pitchFamily="34" charset="-120"/>
+              </a:rPr>
+              <a:t>Un second bloc de génération de document, devenu inaccessible après une précédente refonte (jamais exécuté), a été retiré du fichier technique de génération de documents.</a:t>
+            </a:r>
+            <a:endParaRPr lang="en-US" sz="1100" dirty="0"/>
+          </a:p>
+        </p:txBody>
+      </p:sp>
+      <p:sp>
+        <p:nvSpPr>
+          <p:cNvPr id="17" name="Text 15"/>
+          <p:cNvSpPr/>
+          <p:nvPr/>
+        </p:nvSpPr>
+        <p:spPr>
+          <a:xfrm>
+            <a:off x="365760" y="6510528"/>
+            <a:ext cx="5486400" cy="274320"/>
+          </a:xfrm>
+          <a:prstGeom prst="rect">
+            <a:avLst/>
+          </a:prstGeom>
+          <a:noFill/>
+          <a:ln/>
+        </p:spPr>
+        <p:txBody>
+          <a:bodyPr wrap="square" rtlCol="0" anchor="ctr"/>
+          <a:lstStyle/>
+          <a:p>
+            <a:pPr indent="0" marL="0">
+              <a:buNone/>
+            </a:pPr>
+            <a:r>
+              <a:rPr lang="en-US" sz="900" dirty="0">
+                <a:solidFill>
+                  <a:srgbClr val="8A7C68"/>
+                </a:solidFill>
+                <a:latin typeface="Segoe UI" pitchFamily="34" charset="0"/>
+                <a:ea typeface="Segoe UI" pitchFamily="34" charset="-122"/>
+                <a:cs typeface="Segoe UI" pitchFamily="34" charset="-120"/>
+              </a:rPr>
+              <a:t>Kôji Web — Récapitulatif technique</a:t>
+            </a:r>
+            <a:endParaRPr lang="en-US" sz="900" dirty="0"/>
+          </a:p>
+        </p:txBody>
+      </p:sp>
+      <p:sp>
+        <p:nvSpPr>
+          <p:cNvPr id="18" name="Text 16"/>
+          <p:cNvSpPr/>
+          <p:nvPr/>
+        </p:nvSpPr>
+        <p:spPr>
+          <a:xfrm>
+            <a:off x="9601200" y="6510528"/>
+            <a:ext cx="2194560" cy="274320"/>
+          </a:xfrm>
+          <a:prstGeom prst="rect">
+            <a:avLst/>
+          </a:prstGeom>
+          <a:noFill/>
+          <a:ln/>
+        </p:spPr>
+        <p:txBody>
+          <a:bodyPr wrap="square" rtlCol="0" anchor="ctr"/>
+          <a:lstStyle/>
+          <a:p>
+            <a:pPr algn="r" indent="0" marL="0">
+              <a:buNone/>
+            </a:pPr>
+            <a:r>
+              <a:rPr lang="en-US" sz="900" dirty="0">
+                <a:solidFill>
+                  <a:srgbClr val="8A7C68"/>
+                </a:solidFill>
+                <a:latin typeface="Segoe UI" pitchFamily="34" charset="0"/>
+                <a:ea typeface="Segoe UI" pitchFamily="34" charset="-122"/>
+                <a:cs typeface="Segoe UI" pitchFamily="34" charset="-120"/>
+              </a:rPr>
+              <a:t>37</a:t>
+            </a:r>
+            <a:endParaRPr lang="en-US" sz="900" dirty="0"/>
+          </a:p>
+        </p:txBody>
+      </p:sp>
+    </p:spTree>
+  </p:cSld>
+  <p:clrMapOvr>
+    <a:masterClrMapping/>
+  </p:clrMapOvr>
+</p:sld>
+</file>
+
+<file path=ppt/slides/slide38.xml><?xml version="1.0" encoding="utf-8"?>
+<p:sld xmlns:a="http://schemas.openxmlformats.org/drawingml/2006/main" xmlns:r="http://schemas.openxmlformats.org/officeDocument/2006/relationships" xmlns:p="http://schemas.openxmlformats.org/presentationml/2006/main">
+  <p:cSld name="Slide 38">
+    <p:bg>
+      <p:bgPr>
+        <a:solidFill>
+          <a:srgbClr val="F3EEE3"/>
+        </a:solidFill>
+      </p:bgPr>
+    </p:bg>
+    <p:spTree>
+      <p:nvGrpSpPr>
+        <p:cNvPr id="1" name=""/>
+        <p:cNvGrpSpPr/>
+        <p:nvPr/>
+      </p:nvGrpSpPr>
+      <p:grpSpPr>
+        <a:xfrm>
+          <a:off x="0" y="0"/>
+          <a:ext cx="0" cy="0"/>
+          <a:chOff x="0" y="0"/>
+          <a:chExt cx="0" cy="0"/>
+        </a:xfrm>
+      </p:grpSpPr>
+      <p:sp>
+        <p:nvSpPr>
+          <p:cNvPr id="2" name="Shape 0"/>
+          <p:cNvSpPr/>
+          <p:nvPr/>
+        </p:nvSpPr>
+        <p:spPr>
+          <a:xfrm>
+            <a:off x="640080" y="411480"/>
+            <a:ext cx="2377440" cy="365760"/>
+          </a:xfrm>
+          <a:prstGeom prst="roundRect">
+            <a:avLst>
+              <a:gd name="adj" fmla="val 50000"/>
+            </a:avLst>
+          </a:prstGeom>
+          <a:solidFill>
+            <a:srgbClr val="E6EFE4"/>
+          </a:solidFill>
+          <a:ln/>
+        </p:spPr>
+      </p:sp>
+      <p:sp>
+        <p:nvSpPr>
+          <p:cNvPr id="3" name="Text 1"/>
+          <p:cNvSpPr/>
+          <p:nvPr/>
+        </p:nvSpPr>
+        <p:spPr>
+          <a:xfrm>
+            <a:off x="640080" y="411480"/>
+            <a:ext cx="2377440" cy="365760"/>
+          </a:xfrm>
+          <a:prstGeom prst="rect">
+            <a:avLst/>
+          </a:prstGeom>
+          <a:noFill/>
+          <a:ln/>
+        </p:spPr>
+        <p:txBody>
+          <a:bodyPr wrap="square" rtlCol="0" anchor="ctr"/>
+          <a:lstStyle/>
+          <a:p>
+            <a:pPr algn="ctr" indent="0" marL="0">
+              <a:buNone/>
+            </a:pPr>
+            <a:r>
+              <a:rPr lang="en-US" sz="1000" b="1" spc="100" kern="0" dirty="0">
+                <a:solidFill>
+                  <a:srgbClr val="386641"/>
+                </a:solidFill>
+                <a:latin typeface="Segoe UI" pitchFamily="34" charset="0"/>
+                <a:ea typeface="Segoe UI" pitchFamily="34" charset="-122"/>
+                <a:cs typeface="Segoe UI" pitchFamily="34" charset="-120"/>
+              </a:rPr>
+              <a:t>BASE DE DONNÉES</a:t>
+            </a:r>
+            <a:endParaRPr lang="en-US" sz="1000" dirty="0"/>
+          </a:p>
+        </p:txBody>
+      </p:sp>
+      <p:sp>
+        <p:nvSpPr>
+          <p:cNvPr id="4" name="Text 2"/>
+          <p:cNvSpPr/>
+          <p:nvPr/>
+        </p:nvSpPr>
+        <p:spPr>
+          <a:xfrm>
+            <a:off x="640080" y="868680"/>
+            <a:ext cx="10515600" cy="548640"/>
+          </a:xfrm>
+          <a:prstGeom prst="rect">
+            <a:avLst/>
+          </a:prstGeom>
+          <a:noFill/>
+          <a:ln/>
+        </p:spPr>
+        <p:txBody>
+          <a:bodyPr wrap="square" rtlCol="0" anchor="ctr"/>
+          <a:lstStyle/>
+          <a:p>
+            <a:pPr indent="0" marL="0">
+              <a:buNone/>
+            </a:pPr>
+            <a:r>
+              <a:rPr lang="en-US" sz="2400" b="1" dirty="0">
+                <a:solidFill>
+                  <a:srgbClr val="1B1F3B"/>
+                </a:solidFill>
+                <a:latin typeface="Georgia" pitchFamily="34" charset="0"/>
+                <a:ea typeface="Georgia" pitchFamily="34" charset="-122"/>
+                <a:cs typeface="Georgia" pitchFamily="34" charset="-120"/>
+              </a:rPr>
+              <a:t>Sécurité</a:t>
+            </a:r>
+            <a:endParaRPr lang="en-US" sz="2400" dirty="0"/>
+          </a:p>
+        </p:txBody>
+      </p:sp>
+      <p:sp>
+        <p:nvSpPr>
+          <p:cNvPr id="5" name="Shape 3"/>
+          <p:cNvSpPr/>
+          <p:nvPr/>
+        </p:nvSpPr>
+        <p:spPr>
+          <a:xfrm>
+            <a:off x="640080" y="1691640"/>
+            <a:ext cx="10881360" cy="1097280"/>
+          </a:xfrm>
+          <a:prstGeom prst="roundRect">
+            <a:avLst>
+              <a:gd name="adj" fmla="val 5000"/>
+            </a:avLst>
+          </a:prstGeom>
+          <a:solidFill>
+            <a:srgbClr val="FFFFFF"/>
+          </a:solidFill>
+          <a:ln w="12700">
+            <a:solidFill>
+              <a:srgbClr val="E4DCCB"/>
+            </a:solidFill>
+            <a:prstDash val="solid"/>
+          </a:ln>
+        </p:spPr>
+      </p:sp>
+      <p:sp>
+        <p:nvSpPr>
+          <p:cNvPr id="6" name="Shape 4"/>
+          <p:cNvSpPr/>
+          <p:nvPr/>
+        </p:nvSpPr>
+        <p:spPr>
+          <a:xfrm>
+            <a:off x="640080" y="1691640"/>
+            <a:ext cx="54864" cy="1097280"/>
+          </a:xfrm>
+          <a:prstGeom prst="rect">
+            <a:avLst/>
+          </a:prstGeom>
+          <a:solidFill>
+            <a:srgbClr val="386641"/>
+          </a:solidFill>
+          <a:ln/>
+        </p:spPr>
+      </p:sp>
+      <p:sp>
+        <p:nvSpPr>
+          <p:cNvPr id="7" name="Text 5"/>
+          <p:cNvSpPr/>
+          <p:nvPr/>
+        </p:nvSpPr>
+        <p:spPr>
+          <a:xfrm>
+            <a:off x="914400" y="1801368"/>
+            <a:ext cx="10332720" cy="365760"/>
+          </a:xfrm>
+          <a:prstGeom prst="rect">
+            <a:avLst/>
+          </a:prstGeom>
+          <a:noFill/>
+          <a:ln/>
+        </p:spPr>
+        <p:txBody>
+          <a:bodyPr wrap="square" rtlCol="0" anchor="ctr"/>
+          <a:lstStyle/>
+          <a:p>
+            <a:pPr indent="0" marL="0">
+              <a:buNone/>
+            </a:pPr>
+            <a:r>
+              <a:rPr lang="en-US" sz="1400" b="1" dirty="0">
+                <a:solidFill>
+                  <a:srgbClr val="1B1F3B"/>
+                </a:solidFill>
+                <a:latin typeface="Segoe UI" pitchFamily="34" charset="0"/>
+                <a:ea typeface="Segoe UI" pitchFamily="34" charset="-122"/>
+                <a:cs typeface="Segoe UI" pitchFamily="34" charset="-120"/>
+              </a:rPr>
+              <a:t>Base de données partagée verrouillée</a:t>
+            </a:r>
+            <a:endParaRPr lang="en-US" sz="1400" dirty="0"/>
+          </a:p>
+        </p:txBody>
+      </p:sp>
+      <p:sp>
+        <p:nvSpPr>
+          <p:cNvPr id="8" name="Text 6"/>
+          <p:cNvSpPr/>
+          <p:nvPr/>
+        </p:nvSpPr>
+        <p:spPr>
+          <a:xfrm>
+            <a:off x="914400" y="2148840"/>
+            <a:ext cx="10332720" cy="594360"/>
+          </a:xfrm>
+          <a:prstGeom prst="rect">
+            <a:avLst/>
+          </a:prstGeom>
+          <a:noFill/>
+          <a:ln/>
+        </p:spPr>
+        <p:txBody>
+          <a:bodyPr wrap="square" rtlCol="0" anchor="ctr"/>
+          <a:lstStyle/>
+          <a:p>
+            <a:pPr indent="0" marL="0">
+              <a:lnSpc>
+                <a:spcPts val="1400"/>
+              </a:lnSpc>
+              <a:buNone/>
+            </a:pPr>
+            <a:r>
+              <a:rPr lang="en-US" sz="1100" dirty="0">
+                <a:solidFill>
+                  <a:srgbClr val="8A7C68"/>
+                </a:solidFill>
+                <a:latin typeface="Segoe UI" pitchFamily="34" charset="0"/>
+                <a:ea typeface="Segoe UI" pitchFamily="34" charset="-122"/>
+                <a:cs typeface="Segoe UI" pitchFamily="34" charset="-120"/>
+              </a:rPr>
+              <a:t>La table contenant l'essentiel des données de l'application était lisible par n'importe qui sur internet avec la simple clé publique du site, sans connexion. L'application y accède désormais avec une clé privée réservée au serveur, ce qui permet de fermer complètement l'accès public sans rien casser.</a:t>
+            </a:r>
+            <a:endParaRPr lang="en-US" sz="1100" dirty="0"/>
+          </a:p>
+        </p:txBody>
+      </p:sp>
+      <p:sp>
+        <p:nvSpPr>
+          <p:cNvPr id="9" name="Shape 7"/>
+          <p:cNvSpPr/>
+          <p:nvPr/>
+        </p:nvSpPr>
+        <p:spPr>
+          <a:xfrm>
+            <a:off x="640080" y="2926080"/>
+            <a:ext cx="10881360" cy="1097280"/>
+          </a:xfrm>
+          <a:prstGeom prst="roundRect">
+            <a:avLst>
+              <a:gd name="adj" fmla="val 5000"/>
+            </a:avLst>
+          </a:prstGeom>
+          <a:solidFill>
+            <a:srgbClr val="FFFFFF"/>
+          </a:solidFill>
+          <a:ln w="12700">
+            <a:solidFill>
+              <a:srgbClr val="E4DCCB"/>
+            </a:solidFill>
+            <a:prstDash val="solid"/>
+          </a:ln>
+        </p:spPr>
+      </p:sp>
+      <p:sp>
+        <p:nvSpPr>
+          <p:cNvPr id="10" name="Shape 8"/>
+          <p:cNvSpPr/>
+          <p:nvPr/>
+        </p:nvSpPr>
+        <p:spPr>
+          <a:xfrm>
+            <a:off x="640080" y="2926080"/>
+            <a:ext cx="54864" cy="1097280"/>
+          </a:xfrm>
+          <a:prstGeom prst="rect">
+            <a:avLst/>
+          </a:prstGeom>
+          <a:solidFill>
+            <a:srgbClr val="386641"/>
+          </a:solidFill>
+          <a:ln/>
+        </p:spPr>
+      </p:sp>
+      <p:sp>
+        <p:nvSpPr>
+          <p:cNvPr id="11" name="Text 9"/>
+          <p:cNvSpPr/>
+          <p:nvPr/>
+        </p:nvSpPr>
+        <p:spPr>
+          <a:xfrm>
+            <a:off x="914400" y="3035808"/>
+            <a:ext cx="10332720" cy="365760"/>
+          </a:xfrm>
+          <a:prstGeom prst="rect">
+            <a:avLst/>
+          </a:prstGeom>
+          <a:noFill/>
+          <a:ln/>
+        </p:spPr>
+        <p:txBody>
+          <a:bodyPr wrap="square" rtlCol="0" anchor="ctr"/>
+          <a:lstStyle/>
+          <a:p>
+            <a:pPr indent="0" marL="0">
+              <a:buNone/>
+            </a:pPr>
+            <a:r>
+              <a:rPr lang="en-US" sz="1400" b="1" dirty="0">
+                <a:solidFill>
+                  <a:srgbClr val="1B1F3B"/>
+                </a:solidFill>
+                <a:latin typeface="Segoe UI" pitchFamily="34" charset="0"/>
+                <a:ea typeface="Segoe UI" pitchFamily="34" charset="-122"/>
+                <a:cs typeface="Segoe UI" pitchFamily="34" charset="-120"/>
+              </a:rPr>
+              <a:t>Fichier de base de données retiré du dépôt Git</a:t>
+            </a:r>
+            <a:endParaRPr lang="en-US" sz="1400" dirty="0"/>
+          </a:p>
+        </p:txBody>
+      </p:sp>
+      <p:sp>
+        <p:nvSpPr>
+          <p:cNvPr id="12" name="Text 10"/>
+          <p:cNvSpPr/>
+          <p:nvPr/>
+        </p:nvSpPr>
+        <p:spPr>
+          <a:xfrm>
+            <a:off x="914400" y="3383280"/>
+            <a:ext cx="10332720" cy="594360"/>
+          </a:xfrm>
+          <a:prstGeom prst="rect">
+            <a:avLst/>
+          </a:prstGeom>
+          <a:noFill/>
+          <a:ln/>
+        </p:spPr>
+        <p:txBody>
+          <a:bodyPr wrap="square" rtlCol="0" anchor="ctr"/>
+          <a:lstStyle/>
+          <a:p>
+            <a:pPr indent="0" marL="0">
+              <a:lnSpc>
+                <a:spcPts val="1400"/>
+              </a:lnSpc>
+              <a:buNone/>
+            </a:pPr>
+            <a:r>
+              <a:rPr lang="en-US" sz="1100" dirty="0">
+                <a:solidFill>
+                  <a:srgbClr val="8A7C68"/>
+                </a:solidFill>
+                <a:latin typeface="Segoe UI" pitchFamily="34" charset="0"/>
+                <a:ea typeface="Segoe UI" pitchFamily="34" charset="-122"/>
+                <a:cs typeface="Segoe UI" pitchFamily="34" charset="-120"/>
+              </a:rPr>
+              <a:t>Un fichier contenant une copie complète de la base de données de développement, avec des mots de passe réels en clair, était suivi par Git depuis plusieurs mois. Retiré du suivi et exclu définitivement.</a:t>
+            </a:r>
+            <a:endParaRPr lang="en-US" sz="1100" dirty="0"/>
+          </a:p>
+        </p:txBody>
+      </p:sp>
+      <p:sp>
+        <p:nvSpPr>
+          <p:cNvPr id="13" name="Text 11"/>
+          <p:cNvSpPr/>
+          <p:nvPr/>
+        </p:nvSpPr>
+        <p:spPr>
+          <a:xfrm>
+            <a:off x="365760" y="6510528"/>
+            <a:ext cx="5486400" cy="274320"/>
+          </a:xfrm>
+          <a:prstGeom prst="rect">
+            <a:avLst/>
+          </a:prstGeom>
+          <a:noFill/>
+          <a:ln/>
+        </p:spPr>
+        <p:txBody>
+          <a:bodyPr wrap="square" rtlCol="0" anchor="ctr"/>
+          <a:lstStyle/>
+          <a:p>
+            <a:pPr indent="0" marL="0">
+              <a:buNone/>
+            </a:pPr>
+            <a:r>
+              <a:rPr lang="en-US" sz="900" dirty="0">
+                <a:solidFill>
+                  <a:srgbClr val="8A7C68"/>
+                </a:solidFill>
+                <a:latin typeface="Segoe UI" pitchFamily="34" charset="0"/>
+                <a:ea typeface="Segoe UI" pitchFamily="34" charset="-122"/>
+                <a:cs typeface="Segoe UI" pitchFamily="34" charset="-120"/>
+              </a:rPr>
+              <a:t>Kôji Web — Récapitulatif technique</a:t>
+            </a:r>
+            <a:endParaRPr lang="en-US" sz="900" dirty="0"/>
+          </a:p>
+        </p:txBody>
+      </p:sp>
+      <p:sp>
+        <p:nvSpPr>
+          <p:cNvPr id="14" name="Text 12"/>
+          <p:cNvSpPr/>
+          <p:nvPr/>
+        </p:nvSpPr>
+        <p:spPr>
+          <a:xfrm>
+            <a:off x="9601200" y="6510528"/>
+            <a:ext cx="2194560" cy="274320"/>
+          </a:xfrm>
+          <a:prstGeom prst="rect">
+            <a:avLst/>
+          </a:prstGeom>
+          <a:noFill/>
+          <a:ln/>
+        </p:spPr>
+        <p:txBody>
+          <a:bodyPr wrap="square" rtlCol="0" anchor="ctr"/>
+          <a:lstStyle/>
+          <a:p>
+            <a:pPr algn="r" indent="0" marL="0">
+              <a:buNone/>
+            </a:pPr>
+            <a:r>
+              <a:rPr lang="en-US" sz="900" dirty="0">
+                <a:solidFill>
+                  <a:srgbClr val="8A7C68"/>
+                </a:solidFill>
+                <a:latin typeface="Segoe UI" pitchFamily="34" charset="0"/>
+                <a:ea typeface="Segoe UI" pitchFamily="34" charset="-122"/>
+                <a:cs typeface="Segoe UI" pitchFamily="34" charset="-120"/>
+              </a:rPr>
+              <a:t>38</a:t>
+            </a:r>
+            <a:endParaRPr lang="en-US" sz="900" dirty="0"/>
+          </a:p>
+        </p:txBody>
+      </p:sp>
+    </p:spTree>
+  </p:cSld>
+  <p:clrMapOvr>
+    <a:masterClrMapping/>
+  </p:clrMapOvr>
+</p:sld>
+</file>
+
+<file path=ppt/slides/slide39.xml><?xml version="1.0" encoding="utf-8"?>
+<p:sld xmlns:a="http://schemas.openxmlformats.org/drawingml/2006/main" xmlns:r="http://schemas.openxmlformats.org/officeDocument/2006/relationships" xmlns:p="http://schemas.openxmlformats.org/presentationml/2006/main">
+  <p:cSld name="Slide 39">
     <p:bg>
       <p:bgPr>
         <a:solidFill>
@@ -19475,7 +21695,135 @@
       </p:sp>
       <p:sp>
         <p:nvSpPr>
-          <p:cNvPr id="17" name="Text 15"/>
+          <p:cNvPr id="17" name="Shape 15"/>
+          <p:cNvSpPr/>
+          <p:nvPr/>
+        </p:nvSpPr>
+        <p:spPr>
+          <a:xfrm>
+            <a:off x="640080" y="5394960"/>
+            <a:ext cx="10881360" cy="1097280"/>
+          </a:xfrm>
+          <a:prstGeom prst="roundRect">
+            <a:avLst>
+              <a:gd name="adj" fmla="val 5000"/>
+            </a:avLst>
+          </a:prstGeom>
+          <a:solidFill>
+            <a:srgbClr val="FFFFFF"/>
+          </a:solidFill>
+          <a:ln w="12700">
+            <a:solidFill>
+              <a:srgbClr val="E4DCCB"/>
+            </a:solidFill>
+            <a:prstDash val="solid"/>
+          </a:ln>
+        </p:spPr>
+      </p:sp>
+      <p:sp>
+        <p:nvSpPr>
+          <p:cNvPr id="18" name="Shape 16"/>
+          <p:cNvSpPr/>
+          <p:nvPr/>
+        </p:nvSpPr>
+        <p:spPr>
+          <a:xfrm>
+            <a:off x="640080" y="5394960"/>
+            <a:ext cx="54864" cy="1097280"/>
+          </a:xfrm>
+          <a:prstGeom prst="rect">
+            <a:avLst/>
+          </a:prstGeom>
+          <a:solidFill>
+            <a:srgbClr val="1D6FE0"/>
+          </a:solidFill>
+          <a:ln/>
+        </p:spPr>
+      </p:sp>
+      <p:sp>
+        <p:nvSpPr>
+          <p:cNvPr id="19" name="Text 17"/>
+          <p:cNvSpPr/>
+          <p:nvPr/>
+        </p:nvSpPr>
+        <p:spPr>
+          <a:xfrm>
+            <a:off x="914400" y="5504688"/>
+            <a:ext cx="10332720" cy="365760"/>
+          </a:xfrm>
+          <a:prstGeom prst="rect">
+            <a:avLst/>
+          </a:prstGeom>
+          <a:noFill/>
+          <a:ln/>
+        </p:spPr>
+        <p:txBody>
+          <a:bodyPr wrap="square" rtlCol="0" anchor="ctr"/>
+          <a:lstStyle/>
+          <a:p>
+            <a:pPr indent="0" marL="0">
+              <a:buNone/>
+            </a:pPr>
+            <a:r>
+              <a:rPr lang="en-US" sz="1400" b="1" dirty="0">
+                <a:solidFill>
+                  <a:srgbClr val="1B1F3B"/>
+                </a:solidFill>
+                <a:latin typeface="Segoe UI" pitchFamily="34" charset="0"/>
+                <a:ea typeface="Segoe UI" pitchFamily="34" charset="-122"/>
+                <a:cs typeface="Segoe UI" pitchFamily="34" charset="-120"/>
+              </a:rPr>
+              <a:t>Cadres Date de début / Durée des travaux masqués si vides</a:t>
+            </a:r>
+            <a:endParaRPr lang="en-US" sz="1400" dirty="0"/>
+          </a:p>
+        </p:txBody>
+      </p:sp>
+      <p:sp>
+        <p:nvSpPr>
+          <p:cNvPr id="20" name="Text 18"/>
+          <p:cNvSpPr/>
+          <p:nvPr/>
+        </p:nvSpPr>
+        <p:spPr>
+          <a:xfrm>
+            <a:off x="914400" y="5852160"/>
+            <a:ext cx="10332720" cy="594360"/>
+          </a:xfrm>
+          <a:prstGeom prst="rect">
+            <a:avLst/>
+          </a:prstGeom>
+          <a:noFill/>
+          <a:ln/>
+        </p:spPr>
+        <p:txBody>
+          <a:bodyPr wrap="square" rtlCol="0" anchor="ctr"/>
+          <a:lstStyle/>
+          <a:p>
+            <a:pPr indent="0" marL="0">
+              <a:lnSpc>
+                <a:spcPts val="1400"/>
+              </a:lnSpc>
+              <a:buNone/>
+            </a:pPr>
+            <a:r>
+              <a:rPr lang="en-US" sz="1100" dirty="0">
+                <a:solidFill>
+                  <a:srgbClr val="8A7C68"/>
+                </a:solidFill>
+                <a:latin typeface="Segoe UI" pitchFamily="34" charset="0"/>
+                <a:ea typeface="Segoe UI" pitchFamily="34" charset="-122"/>
+                <a:cs typeface="Segoe UI" pitchFamily="34" charset="-120"/>
+              </a:rPr>
+              <a:t>Sur le PDF et le Word générés, les deux encadrés ne s'affichent plus quand ni la date de début ni la durée des travaux ne sont renseignées, au lieu d'apparaître vides.</a:t>
+            </a:r>
+            <a:endParaRPr lang="en-US" sz="1100" dirty="0"/>
+          </a:p>
+        </p:txBody>
+      </p:sp>
+      <p:sp>
+        <p:nvSpPr>
+          <p:cNvPr id="21" name="Text 19"/>
           <p:cNvSpPr/>
           <p:nvPr/>
         </p:nvSpPr>
@@ -19514,7 +21862,7 @@
       </p:sp>
       <p:sp>
         <p:nvSpPr>
-          <p:cNvPr id="18" name="Text 16"/>
+          <p:cNvPr id="22" name="Text 20"/>
           <p:cNvSpPr/>
           <p:nvPr/>
         </p:nvSpPr>
@@ -19677,7 +22025,7 @@
                 <a:ea typeface="Georgia" pitchFamily="34" charset="-122"/>
                 <a:cs typeface="Georgia" pitchFamily="34" charset="-120"/>
               </a:rPr>
-              <a:t>Chantiers</a:t>
+              <a:t>Devis (suite)</a:t>
             </a:r>
             <a:endParaRPr lang="en-US" sz="2400" dirty="0"/>
           </a:p>
@@ -19763,7 +22111,7 @@
                 <a:ea typeface="Segoe UI" pitchFamily="34" charset="-122"/>
                 <a:cs typeface="Segoe UI" pitchFamily="34" charset="-120"/>
               </a:rPr>
-              <a:t>Écran de choix avant signature</a:t>
+              <a:t>Bouton 'Transformer ce devis en facture'</a:t>
             </a:r>
             <a:endParaRPr lang="en-US" sz="1400" dirty="0"/>
           </a:p>
@@ -19805,7 +22153,7 @@
                 <a:ea typeface="Segoe UI" pitchFamily="34" charset="-122"/>
                 <a:cs typeface="Segoe UI" pitchFamily="34" charset="-120"/>
               </a:rPr>
-              <a:t>Avant signature du devis, l'entreprise choisit entre 'Modifier le devis' et 'Commencer le chantier' au lieu d'atterrir directement sur le suivi.</a:t>
+              <a:t>Génère le même PDF que le devis (mêmes lignes, mêmes montants), avec le même numéro, mais étiqueté 'Facture' au lieu de 'Devis' et sans le numéro de version. La facture obtenue est enregistrée et retrouvable dans l'outil Factures, téléchargeable en PDF à tout moment.</a:t>
             </a:r>
             <a:endParaRPr lang="en-US" sz="1100" dirty="0"/>
           </a:p>
@@ -19813,391 +22161,7 @@
       </p:sp>
       <p:sp>
         <p:nvSpPr>
-          <p:cNvPr id="9" name="Shape 7"/>
-          <p:cNvSpPr/>
-          <p:nvPr/>
-        </p:nvSpPr>
-        <p:spPr>
-          <a:xfrm>
-            <a:off x="640080" y="2926080"/>
-            <a:ext cx="10881360" cy="1097280"/>
-          </a:xfrm>
-          <a:prstGeom prst="roundRect">
-            <a:avLst>
-              <a:gd name="adj" fmla="val 5000"/>
-            </a:avLst>
-          </a:prstGeom>
-          <a:solidFill>
-            <a:srgbClr val="FFFFFF"/>
-          </a:solidFill>
-          <a:ln w="12700">
-            <a:solidFill>
-              <a:srgbClr val="E4DCCB"/>
-            </a:solidFill>
-            <a:prstDash val="solid"/>
-          </a:ln>
-        </p:spPr>
-      </p:sp>
-      <p:sp>
-        <p:nvSpPr>
-          <p:cNvPr id="10" name="Shape 8"/>
-          <p:cNvSpPr/>
-          <p:nvPr/>
-        </p:nvSpPr>
-        <p:spPr>
-          <a:xfrm>
-            <a:off x="640080" y="2926080"/>
-            <a:ext cx="54864" cy="1097280"/>
-          </a:xfrm>
-          <a:prstGeom prst="rect">
-            <a:avLst/>
-          </a:prstGeom>
-          <a:solidFill>
-            <a:srgbClr val="1D6FE0"/>
-          </a:solidFill>
-          <a:ln/>
-        </p:spPr>
-      </p:sp>
-      <p:sp>
-        <p:nvSpPr>
-          <p:cNvPr id="11" name="Text 9"/>
-          <p:cNvSpPr/>
-          <p:nvPr/>
-        </p:nvSpPr>
-        <p:spPr>
-          <a:xfrm>
-            <a:off x="914400" y="3035808"/>
-            <a:ext cx="10332720" cy="365760"/>
-          </a:xfrm>
-          <a:prstGeom prst="rect">
-            <a:avLst/>
-          </a:prstGeom>
-          <a:noFill/>
-          <a:ln/>
-        </p:spPr>
-        <p:txBody>
-          <a:bodyPr wrap="square" rtlCol="0" anchor="ctr"/>
-          <a:lstStyle/>
-          <a:p>
-            <a:pPr indent="0" marL="0">
-              <a:buNone/>
-            </a:pPr>
-            <a:r>
-              <a:rPr lang="en-US" sz="1400" b="1" dirty="0">
-                <a:solidFill>
-                  <a:srgbClr val="1B1F3B"/>
-                </a:solidFill>
-                <a:latin typeface="Segoe UI" pitchFamily="34" charset="0"/>
-                <a:ea typeface="Segoe UI" pitchFamily="34" charset="-122"/>
-                <a:cs typeface="Segoe UI" pitchFamily="34" charset="-120"/>
-              </a:rPr>
-              <a:t>Retour automatique depuis Équipe</a:t>
-            </a:r>
-            <a:endParaRPr lang="en-US" sz="1400" dirty="0"/>
-          </a:p>
-        </p:txBody>
-      </p:sp>
-      <p:sp>
-        <p:nvSpPr>
-          <p:cNvPr id="12" name="Text 10"/>
-          <p:cNvSpPr/>
-          <p:nvPr/>
-        </p:nvSpPr>
-        <p:spPr>
-          <a:xfrm>
-            <a:off x="914400" y="3383280"/>
-            <a:ext cx="10332720" cy="594360"/>
-          </a:xfrm>
-          <a:prstGeom prst="rect">
-            <a:avLst/>
-          </a:prstGeom>
-          <a:noFill/>
-          <a:ln/>
-        </p:spPr>
-        <p:txBody>
-          <a:bodyPr wrap="square" rtlCol="0" anchor="ctr"/>
-          <a:lstStyle/>
-          <a:p>
-            <a:pPr indent="0" marL="0">
-              <a:lnSpc>
-                <a:spcPts val="1400"/>
-              </a:lnSpc>
-              <a:buNone/>
-            </a:pPr>
-            <a:r>
-              <a:rPr lang="en-US" sz="1100" dirty="0">
-                <a:solidFill>
-                  <a:srgbClr val="8A7C68"/>
-                </a:solidFill>
-                <a:latin typeface="Segoe UI" pitchFamily="34" charset="0"/>
-                <a:ea typeface="Segoe UI" pitchFamily="34" charset="-122"/>
-                <a:cs typeface="Segoe UI" pitchFamily="34" charset="-120"/>
-              </a:rPr>
-              <a:t>Le bouton 'Ajouter dans Équipe' depuis la planification d'un ouvrage ramène exactement à la même fenêtre une fois le personnel ajouté.</a:t>
-            </a:r>
-            <a:endParaRPr lang="en-US" sz="1100" dirty="0"/>
-          </a:p>
-        </p:txBody>
-      </p:sp>
-      <p:sp>
-        <p:nvSpPr>
-          <p:cNvPr id="13" name="Shape 11"/>
-          <p:cNvSpPr/>
-          <p:nvPr/>
-        </p:nvSpPr>
-        <p:spPr>
-          <a:xfrm>
-            <a:off x="640080" y="4160520"/>
-            <a:ext cx="10881360" cy="1097280"/>
-          </a:xfrm>
-          <a:prstGeom prst="roundRect">
-            <a:avLst>
-              <a:gd name="adj" fmla="val 5000"/>
-            </a:avLst>
-          </a:prstGeom>
-          <a:solidFill>
-            <a:srgbClr val="FFFFFF"/>
-          </a:solidFill>
-          <a:ln w="12700">
-            <a:solidFill>
-              <a:srgbClr val="E4DCCB"/>
-            </a:solidFill>
-            <a:prstDash val="solid"/>
-          </a:ln>
-        </p:spPr>
-      </p:sp>
-      <p:sp>
-        <p:nvSpPr>
-          <p:cNvPr id="14" name="Shape 12"/>
-          <p:cNvSpPr/>
-          <p:nvPr/>
-        </p:nvSpPr>
-        <p:spPr>
-          <a:xfrm>
-            <a:off x="640080" y="4160520"/>
-            <a:ext cx="54864" cy="1097280"/>
-          </a:xfrm>
-          <a:prstGeom prst="rect">
-            <a:avLst/>
-          </a:prstGeom>
-          <a:solidFill>
-            <a:srgbClr val="1D6FE0"/>
-          </a:solidFill>
-          <a:ln/>
-        </p:spPr>
-      </p:sp>
-      <p:sp>
-        <p:nvSpPr>
-          <p:cNvPr id="15" name="Text 13"/>
-          <p:cNvSpPr/>
-          <p:nvPr/>
-        </p:nvSpPr>
-        <p:spPr>
-          <a:xfrm>
-            <a:off x="914400" y="4270248"/>
-            <a:ext cx="10332720" cy="365760"/>
-          </a:xfrm>
-          <a:prstGeom prst="rect">
-            <a:avLst/>
-          </a:prstGeom>
-          <a:noFill/>
-          <a:ln/>
-        </p:spPr>
-        <p:txBody>
-          <a:bodyPr wrap="square" rtlCol="0" anchor="ctr"/>
-          <a:lstStyle/>
-          <a:p>
-            <a:pPr indent="0" marL="0">
-              <a:buNone/>
-            </a:pPr>
-            <a:r>
-              <a:rPr lang="en-US" sz="1400" b="1" dirty="0">
-                <a:solidFill>
-                  <a:srgbClr val="1B1F3B"/>
-                </a:solidFill>
-                <a:latin typeface="Segoe UI" pitchFamily="34" charset="0"/>
-                <a:ea typeface="Segoe UI" pitchFamily="34" charset="-122"/>
-                <a:cs typeface="Segoe UI" pitchFamily="34" charset="-120"/>
-              </a:rPr>
-              <a:t>Fiche ouvrage enrichie (prix, dépenses, marge)</a:t>
-            </a:r>
-            <a:endParaRPr lang="en-US" sz="1400" dirty="0"/>
-          </a:p>
-        </p:txBody>
-      </p:sp>
-      <p:sp>
-        <p:nvSpPr>
-          <p:cNvPr id="16" name="Text 14"/>
-          <p:cNvSpPr/>
-          <p:nvPr/>
-        </p:nvSpPr>
-        <p:spPr>
-          <a:xfrm>
-            <a:off x="914400" y="4617720"/>
-            <a:ext cx="10332720" cy="594360"/>
-          </a:xfrm>
-          <a:prstGeom prst="rect">
-            <a:avLst/>
-          </a:prstGeom>
-          <a:noFill/>
-          <a:ln/>
-        </p:spPr>
-        <p:txBody>
-          <a:bodyPr wrap="square" rtlCol="0" anchor="ctr"/>
-          <a:lstStyle/>
-          <a:p>
-            <a:pPr indent="0" marL="0">
-              <a:lnSpc>
-                <a:spcPts val="1400"/>
-              </a:lnSpc>
-              <a:buNone/>
-            </a:pPr>
-            <a:r>
-              <a:rPr lang="en-US" sz="1100" dirty="0">
-                <a:solidFill>
-                  <a:srgbClr val="8A7C68"/>
-                </a:solidFill>
-                <a:latin typeface="Segoe UI" pitchFamily="34" charset="0"/>
-                <a:ea typeface="Segoe UI" pitchFamily="34" charset="-122"/>
-                <a:cs typeface="Segoe UI" pitchFamily="34" charset="-120"/>
-              </a:rPr>
-              <a:t>Affichage du prix validé par le client, calcul automatique des dépenses et de la marge par ouvrage, bouton d'ajout rapide (équipe / dépense / note), et récapitulatif automatique des dépenses au niveau du chantier.</a:t>
-            </a:r>
-            <a:endParaRPr lang="en-US" sz="1100" dirty="0"/>
-          </a:p>
-        </p:txBody>
-      </p:sp>
-      <p:sp>
-        <p:nvSpPr>
-          <p:cNvPr id="17" name="Shape 15"/>
-          <p:cNvSpPr/>
-          <p:nvPr/>
-        </p:nvSpPr>
-        <p:spPr>
-          <a:xfrm>
-            <a:off x="640080" y="5394960"/>
-            <a:ext cx="10881360" cy="1097280"/>
-          </a:xfrm>
-          <a:prstGeom prst="roundRect">
-            <a:avLst>
-              <a:gd name="adj" fmla="val 5000"/>
-            </a:avLst>
-          </a:prstGeom>
-          <a:solidFill>
-            <a:srgbClr val="FFFFFF"/>
-          </a:solidFill>
-          <a:ln w="12700">
-            <a:solidFill>
-              <a:srgbClr val="E4DCCB"/>
-            </a:solidFill>
-            <a:prstDash val="solid"/>
-          </a:ln>
-        </p:spPr>
-      </p:sp>
-      <p:sp>
-        <p:nvSpPr>
-          <p:cNvPr id="18" name="Shape 16"/>
-          <p:cNvSpPr/>
-          <p:nvPr/>
-        </p:nvSpPr>
-        <p:spPr>
-          <a:xfrm>
-            <a:off x="640080" y="5394960"/>
-            <a:ext cx="54864" cy="1097280"/>
-          </a:xfrm>
-          <a:prstGeom prst="rect">
-            <a:avLst/>
-          </a:prstGeom>
-          <a:solidFill>
-            <a:srgbClr val="1D6FE0"/>
-          </a:solidFill>
-          <a:ln/>
-        </p:spPr>
-      </p:sp>
-      <p:sp>
-        <p:nvSpPr>
-          <p:cNvPr id="19" name="Text 17"/>
-          <p:cNvSpPr/>
-          <p:nvPr/>
-        </p:nvSpPr>
-        <p:spPr>
-          <a:xfrm>
-            <a:off x="914400" y="5504688"/>
-            <a:ext cx="10332720" cy="365760"/>
-          </a:xfrm>
-          <a:prstGeom prst="rect">
-            <a:avLst/>
-          </a:prstGeom>
-          <a:noFill/>
-          <a:ln/>
-        </p:spPr>
-        <p:txBody>
-          <a:bodyPr wrap="square" rtlCol="0" anchor="ctr"/>
-          <a:lstStyle/>
-          <a:p>
-            <a:pPr indent="0" marL="0">
-              <a:buNone/>
-            </a:pPr>
-            <a:r>
-              <a:rPr lang="en-US" sz="1400" b="1" dirty="0">
-                <a:solidFill>
-                  <a:srgbClr val="1B1F3B"/>
-                </a:solidFill>
-                <a:latin typeface="Segoe UI" pitchFamily="34" charset="0"/>
-                <a:ea typeface="Segoe UI" pitchFamily="34" charset="-122"/>
-                <a:cs typeface="Segoe UI" pitchFamily="34" charset="-120"/>
-              </a:rPr>
-              <a:t>Persistance de la navigation</a:t>
-            </a:r>
-            <a:endParaRPr lang="en-US" sz="1400" dirty="0"/>
-          </a:p>
-        </p:txBody>
-      </p:sp>
-      <p:sp>
-        <p:nvSpPr>
-          <p:cNvPr id="20" name="Text 18"/>
-          <p:cNvSpPr/>
-          <p:nvPr/>
-        </p:nvSpPr>
-        <p:spPr>
-          <a:xfrm>
-            <a:off x="914400" y="5852160"/>
-            <a:ext cx="10332720" cy="594360"/>
-          </a:xfrm>
-          <a:prstGeom prst="rect">
-            <a:avLst/>
-          </a:prstGeom>
-          <a:noFill/>
-          <a:ln/>
-        </p:spPr>
-        <p:txBody>
-          <a:bodyPr wrap="square" rtlCol="0" anchor="ctr"/>
-          <a:lstStyle/>
-          <a:p>
-            <a:pPr indent="0" marL="0">
-              <a:lnSpc>
-                <a:spcPts val="1400"/>
-              </a:lnSpc>
-              <a:buNone/>
-            </a:pPr>
-            <a:r>
-              <a:rPr lang="en-US" sz="1100" dirty="0">
-                <a:solidFill>
-                  <a:srgbClr val="8A7C68"/>
-                </a:solidFill>
-                <a:latin typeface="Segoe UI" pitchFamily="34" charset="0"/>
-                <a:ea typeface="Segoe UI" pitchFamily="34" charset="-122"/>
-                <a:cs typeface="Segoe UI" pitchFamily="34" charset="-120"/>
-              </a:rPr>
-              <a:t>Un rafraîchissement de page (F5) ne ramène plus à l'écran de départ : le chantier et l'ouvrage consultés restent affichés (état conservé dans l'URL).</a:t>
-            </a:r>
-            <a:endParaRPr lang="en-US" sz="1100" dirty="0"/>
-          </a:p>
-        </p:txBody>
-      </p:sp>
-      <p:sp>
-        <p:nvSpPr>
-          <p:cNvPr id="21" name="Text 19"/>
+          <p:cNvPr id="9" name="Text 7"/>
           <p:cNvSpPr/>
           <p:nvPr/>
         </p:nvSpPr>
@@ -20236,7 +22200,7 @@
       </p:sp>
       <p:sp>
         <p:nvSpPr>
-          <p:cNvPr id="22" name="Text 20"/>
+          <p:cNvPr id="10" name="Text 8"/>
           <p:cNvSpPr/>
           <p:nvPr/>
         </p:nvSpPr>
@@ -20399,7 +22363,7 @@
                 <a:ea typeface="Georgia" pitchFamily="34" charset="-122"/>
                 <a:cs typeface="Georgia" pitchFamily="34" charset="-120"/>
               </a:rPr>
-              <a:t>Équipe</a:t>
+              <a:t>Chantiers</a:t>
             </a:r>
             <a:endParaRPr lang="en-US" sz="2400" dirty="0"/>
           </a:p>
@@ -20485,7 +22449,7 @@
                 <a:ea typeface="Segoe UI" pitchFamily="34" charset="-122"/>
                 <a:cs typeface="Segoe UI" pitchFamily="34" charset="-120"/>
               </a:rPr>
-              <a:t>Édition complète de l'équipe</a:t>
+              <a:t>Écran de choix avant signature</a:t>
             </a:r>
             <a:endParaRPr lang="en-US" sz="1400" dirty="0"/>
           </a:p>
@@ -20527,7 +22491,7 @@
                 <a:ea typeface="Segoe UI" pitchFamily="34" charset="-122"/>
                 <a:cs typeface="Segoe UI" pitchFamily="34" charset="-120"/>
               </a:rPr>
-              <a:t>Gestion des entreprises/SIRET pour les sous-traitants, liens multiples vers chantiers/devis/ouvrages, avec notifications automatiques lors de l'affectation.</a:t>
+              <a:t>Avant signature du devis, l'entreprise choisit entre 'Modifier le devis' et 'Commencer le chantier' au lieu d'atterrir directement sur le suivi.</a:t>
             </a:r>
             <a:endParaRPr lang="en-US" sz="1100" dirty="0"/>
           </a:p>
@@ -20613,7 +22577,7 @@
                 <a:ea typeface="Segoe UI" pitchFamily="34" charset="-122"/>
                 <a:cs typeface="Segoe UI" pitchFamily="34" charset="-120"/>
               </a:rPr>
-              <a:t>Nouvelle carte d'ajout (design)</a:t>
+              <a:t>Retour automatique depuis Équipe</a:t>
             </a:r>
             <a:endParaRPr lang="en-US" sz="1400" dirty="0"/>
           </a:p>
@@ -20655,7 +22619,7 @@
                 <a:ea typeface="Segoe UI" pitchFamily="34" charset="-122"/>
                 <a:cs typeface="Segoe UI" pitchFamily="34" charset="-120"/>
               </a:rPr>
-              <a:t>Le bouton 'Ajouter des personnels' devient un bouton flottant qui ouvre une carte animée avec 3 choix : Ouvrier, Sous-traitant, Planning.</a:t>
+              <a:t>Le bouton 'Ajouter dans Équipe' depuis la planification d'un ouvrage ramène exactement à la même fenêtre une fois le personnel ajouté.</a:t>
             </a:r>
             <a:endParaRPr lang="en-US" sz="1100" dirty="0"/>
           </a:p>
@@ -20741,7 +22705,7 @@
                 <a:ea typeface="Segoe UI" pitchFamily="34" charset="-122"/>
                 <a:cs typeface="Segoe UI" pitchFamily="34" charset="-120"/>
               </a:rPr>
-              <a:t>Module Planning / pointage des heures (nouveau)</a:t>
+              <a:t>Fiche ouvrage enrichie (prix, dépenses, marge)</a:t>
             </a:r>
             <a:endParaRPr lang="en-US" sz="1400" dirty="0"/>
           </a:p>
@@ -20783,7 +22747,7 @@
                 <a:ea typeface="Segoe UI" pitchFamily="34" charset="-122"/>
                 <a:cs typeface="Segoe UI" pitchFamily="34" charset="-120"/>
               </a:rPr>
-              <a:t>Nouvel espace complet : liste des ouvriers avec badge d'heures de la semaine (vert/orange/rouge), détail hebdomadaire par ouvrier, ajout manuel de pointages, navigation semaine par semaine.</a:t>
+              <a:t>Affichage du prix validé par le client, calcul automatique des dépenses et de la marge par ouvrage, bouton d'ajout rapide (équipe / dépense / note), et récapitulatif automatique des dépenses au niveau du chantier.</a:t>
             </a:r>
             <a:endParaRPr lang="en-US" sz="1100" dirty="0"/>
           </a:p>
@@ -20869,7 +22833,7 @@
                 <a:ea typeface="Segoe UI" pitchFamily="34" charset="-122"/>
                 <a:cs typeface="Segoe UI" pitchFamily="34" charset="-120"/>
               </a:rPr>
-              <a:t>Espace ouvrier : pointage de la journée</a:t>
+              <a:t>Persistance de la navigation</a:t>
             </a:r>
             <a:endParaRPr lang="en-US" sz="1400" dirty="0"/>
           </a:p>
@@ -20911,7 +22875,7 @@
                 <a:ea typeface="Segoe UI" pitchFamily="34" charset="-122"/>
                 <a:cs typeface="Segoe UI" pitchFamily="34" charset="-120"/>
               </a:rPr>
-              <a:t>Nouvel onglet 'Pointage' dans le portail ouvrier : début/fin de journée en un clic, avec récapitulatif de la semaine en cours.</a:t>
+              <a:t>Un rafraîchissement de page (F5) ne ramène plus à l'écran de départ : le chantier et l'ouvrage consultés restent affichés (état conservé dans l'URL).</a:t>
             </a:r>
             <a:endParaRPr lang="en-US" sz="1100" dirty="0"/>
           </a:p>
@@ -21121,7 +23085,7 @@
                 <a:ea typeface="Georgia" pitchFamily="34" charset="-122"/>
                 <a:cs typeface="Georgia" pitchFamily="34" charset="-120"/>
               </a:rPr>
-              <a:t>Équipe (suite)</a:t>
+              <a:t>Équipe</a:t>
             </a:r>
             <a:endParaRPr lang="en-US" sz="2400" dirty="0"/>
           </a:p>
@@ -21207,7 +23171,7 @@
                 <a:ea typeface="Segoe UI" pitchFamily="34" charset="-122"/>
                 <a:cs typeface="Segoe UI" pitchFamily="34" charset="-120"/>
               </a:rPr>
-              <a:t>Calendrier</a:t>
+              <a:t>Édition complète de l'équipe</a:t>
             </a:r>
             <a:endParaRPr lang="en-US" sz="1400" dirty="0"/>
           </a:p>
@@ -21249,7 +23213,7 @@
                 <a:ea typeface="Segoe UI" pitchFamily="34" charset="-122"/>
                 <a:cs typeface="Segoe UI" pitchFamily="34" charset="-120"/>
               </a:rPr>
-              <a:t>Cartes et tâches cliquables, édition d'un événement directement depuis sa fiche.</a:t>
+              <a:t>Gestion des entreprises/SIRET pour les sous-traitants, liens multiples vers chantiers/devis/ouvrages, avec notifications automatiques lors de l'affectation.</a:t>
             </a:r>
             <a:endParaRPr lang="en-US" sz="1100" dirty="0"/>
           </a:p>
@@ -21257,7 +23221,391 @@
       </p:sp>
       <p:sp>
         <p:nvSpPr>
-          <p:cNvPr id="9" name="Text 7"/>
+          <p:cNvPr id="9" name="Shape 7"/>
+          <p:cNvSpPr/>
+          <p:nvPr/>
+        </p:nvSpPr>
+        <p:spPr>
+          <a:xfrm>
+            <a:off x="640080" y="2926080"/>
+            <a:ext cx="10881360" cy="1097280"/>
+          </a:xfrm>
+          <a:prstGeom prst="roundRect">
+            <a:avLst>
+              <a:gd name="adj" fmla="val 5000"/>
+            </a:avLst>
+          </a:prstGeom>
+          <a:solidFill>
+            <a:srgbClr val="FFFFFF"/>
+          </a:solidFill>
+          <a:ln w="12700">
+            <a:solidFill>
+              <a:srgbClr val="E4DCCB"/>
+            </a:solidFill>
+            <a:prstDash val="solid"/>
+          </a:ln>
+        </p:spPr>
+      </p:sp>
+      <p:sp>
+        <p:nvSpPr>
+          <p:cNvPr id="10" name="Shape 8"/>
+          <p:cNvSpPr/>
+          <p:nvPr/>
+        </p:nvSpPr>
+        <p:spPr>
+          <a:xfrm>
+            <a:off x="640080" y="2926080"/>
+            <a:ext cx="54864" cy="1097280"/>
+          </a:xfrm>
+          <a:prstGeom prst="rect">
+            <a:avLst/>
+          </a:prstGeom>
+          <a:solidFill>
+            <a:srgbClr val="1D6FE0"/>
+          </a:solidFill>
+          <a:ln/>
+        </p:spPr>
+      </p:sp>
+      <p:sp>
+        <p:nvSpPr>
+          <p:cNvPr id="11" name="Text 9"/>
+          <p:cNvSpPr/>
+          <p:nvPr/>
+        </p:nvSpPr>
+        <p:spPr>
+          <a:xfrm>
+            <a:off x="914400" y="3035808"/>
+            <a:ext cx="10332720" cy="365760"/>
+          </a:xfrm>
+          <a:prstGeom prst="rect">
+            <a:avLst/>
+          </a:prstGeom>
+          <a:noFill/>
+          <a:ln/>
+        </p:spPr>
+        <p:txBody>
+          <a:bodyPr wrap="square" rtlCol="0" anchor="ctr"/>
+          <a:lstStyle/>
+          <a:p>
+            <a:pPr indent="0" marL="0">
+              <a:buNone/>
+            </a:pPr>
+            <a:r>
+              <a:rPr lang="en-US" sz="1400" b="1" dirty="0">
+                <a:solidFill>
+                  <a:srgbClr val="1B1F3B"/>
+                </a:solidFill>
+                <a:latin typeface="Segoe UI" pitchFamily="34" charset="0"/>
+                <a:ea typeface="Segoe UI" pitchFamily="34" charset="-122"/>
+                <a:cs typeface="Segoe UI" pitchFamily="34" charset="-120"/>
+              </a:rPr>
+              <a:t>Nouvelle carte d'ajout (design)</a:t>
+            </a:r>
+            <a:endParaRPr lang="en-US" sz="1400" dirty="0"/>
+          </a:p>
+        </p:txBody>
+      </p:sp>
+      <p:sp>
+        <p:nvSpPr>
+          <p:cNvPr id="12" name="Text 10"/>
+          <p:cNvSpPr/>
+          <p:nvPr/>
+        </p:nvSpPr>
+        <p:spPr>
+          <a:xfrm>
+            <a:off x="914400" y="3383280"/>
+            <a:ext cx="10332720" cy="594360"/>
+          </a:xfrm>
+          <a:prstGeom prst="rect">
+            <a:avLst/>
+          </a:prstGeom>
+          <a:noFill/>
+          <a:ln/>
+        </p:spPr>
+        <p:txBody>
+          <a:bodyPr wrap="square" rtlCol="0" anchor="ctr"/>
+          <a:lstStyle/>
+          <a:p>
+            <a:pPr indent="0" marL="0">
+              <a:lnSpc>
+                <a:spcPts val="1400"/>
+              </a:lnSpc>
+              <a:buNone/>
+            </a:pPr>
+            <a:r>
+              <a:rPr lang="en-US" sz="1100" dirty="0">
+                <a:solidFill>
+                  <a:srgbClr val="8A7C68"/>
+                </a:solidFill>
+                <a:latin typeface="Segoe UI" pitchFamily="34" charset="0"/>
+                <a:ea typeface="Segoe UI" pitchFamily="34" charset="-122"/>
+                <a:cs typeface="Segoe UI" pitchFamily="34" charset="-120"/>
+              </a:rPr>
+              <a:t>Le bouton 'Ajouter des personnels' devient un bouton flottant qui ouvre une carte animée avec 3 choix : Ouvrier, Sous-traitant, Planning.</a:t>
+            </a:r>
+            <a:endParaRPr lang="en-US" sz="1100" dirty="0"/>
+          </a:p>
+        </p:txBody>
+      </p:sp>
+      <p:sp>
+        <p:nvSpPr>
+          <p:cNvPr id="13" name="Shape 11"/>
+          <p:cNvSpPr/>
+          <p:nvPr/>
+        </p:nvSpPr>
+        <p:spPr>
+          <a:xfrm>
+            <a:off x="640080" y="4160520"/>
+            <a:ext cx="10881360" cy="1097280"/>
+          </a:xfrm>
+          <a:prstGeom prst="roundRect">
+            <a:avLst>
+              <a:gd name="adj" fmla="val 5000"/>
+            </a:avLst>
+          </a:prstGeom>
+          <a:solidFill>
+            <a:srgbClr val="FFFFFF"/>
+          </a:solidFill>
+          <a:ln w="12700">
+            <a:solidFill>
+              <a:srgbClr val="E4DCCB"/>
+            </a:solidFill>
+            <a:prstDash val="solid"/>
+          </a:ln>
+        </p:spPr>
+      </p:sp>
+      <p:sp>
+        <p:nvSpPr>
+          <p:cNvPr id="14" name="Shape 12"/>
+          <p:cNvSpPr/>
+          <p:nvPr/>
+        </p:nvSpPr>
+        <p:spPr>
+          <a:xfrm>
+            <a:off x="640080" y="4160520"/>
+            <a:ext cx="54864" cy="1097280"/>
+          </a:xfrm>
+          <a:prstGeom prst="rect">
+            <a:avLst/>
+          </a:prstGeom>
+          <a:solidFill>
+            <a:srgbClr val="1D6FE0"/>
+          </a:solidFill>
+          <a:ln/>
+        </p:spPr>
+      </p:sp>
+      <p:sp>
+        <p:nvSpPr>
+          <p:cNvPr id="15" name="Text 13"/>
+          <p:cNvSpPr/>
+          <p:nvPr/>
+        </p:nvSpPr>
+        <p:spPr>
+          <a:xfrm>
+            <a:off x="914400" y="4270248"/>
+            <a:ext cx="10332720" cy="365760"/>
+          </a:xfrm>
+          <a:prstGeom prst="rect">
+            <a:avLst/>
+          </a:prstGeom>
+          <a:noFill/>
+          <a:ln/>
+        </p:spPr>
+        <p:txBody>
+          <a:bodyPr wrap="square" rtlCol="0" anchor="ctr"/>
+          <a:lstStyle/>
+          <a:p>
+            <a:pPr indent="0" marL="0">
+              <a:buNone/>
+            </a:pPr>
+            <a:r>
+              <a:rPr lang="en-US" sz="1400" b="1" dirty="0">
+                <a:solidFill>
+                  <a:srgbClr val="1B1F3B"/>
+                </a:solidFill>
+                <a:latin typeface="Segoe UI" pitchFamily="34" charset="0"/>
+                <a:ea typeface="Segoe UI" pitchFamily="34" charset="-122"/>
+                <a:cs typeface="Segoe UI" pitchFamily="34" charset="-120"/>
+              </a:rPr>
+              <a:t>Module Planning / pointage des heures (nouveau)</a:t>
+            </a:r>
+            <a:endParaRPr lang="en-US" sz="1400" dirty="0"/>
+          </a:p>
+        </p:txBody>
+      </p:sp>
+      <p:sp>
+        <p:nvSpPr>
+          <p:cNvPr id="16" name="Text 14"/>
+          <p:cNvSpPr/>
+          <p:nvPr/>
+        </p:nvSpPr>
+        <p:spPr>
+          <a:xfrm>
+            <a:off x="914400" y="4617720"/>
+            <a:ext cx="10332720" cy="594360"/>
+          </a:xfrm>
+          <a:prstGeom prst="rect">
+            <a:avLst/>
+          </a:prstGeom>
+          <a:noFill/>
+          <a:ln/>
+        </p:spPr>
+        <p:txBody>
+          <a:bodyPr wrap="square" rtlCol="0" anchor="ctr"/>
+          <a:lstStyle/>
+          <a:p>
+            <a:pPr indent="0" marL="0">
+              <a:lnSpc>
+                <a:spcPts val="1400"/>
+              </a:lnSpc>
+              <a:buNone/>
+            </a:pPr>
+            <a:r>
+              <a:rPr lang="en-US" sz="1100" dirty="0">
+                <a:solidFill>
+                  <a:srgbClr val="8A7C68"/>
+                </a:solidFill>
+                <a:latin typeface="Segoe UI" pitchFamily="34" charset="0"/>
+                <a:ea typeface="Segoe UI" pitchFamily="34" charset="-122"/>
+                <a:cs typeface="Segoe UI" pitchFamily="34" charset="-120"/>
+              </a:rPr>
+              <a:t>Nouvel espace complet : liste des ouvriers avec badge d'heures de la semaine (vert/orange/rouge), détail hebdomadaire par ouvrier, ajout manuel de pointages, navigation semaine par semaine.</a:t>
+            </a:r>
+            <a:endParaRPr lang="en-US" sz="1100" dirty="0"/>
+          </a:p>
+        </p:txBody>
+      </p:sp>
+      <p:sp>
+        <p:nvSpPr>
+          <p:cNvPr id="17" name="Shape 15"/>
+          <p:cNvSpPr/>
+          <p:nvPr/>
+        </p:nvSpPr>
+        <p:spPr>
+          <a:xfrm>
+            <a:off x="640080" y="5394960"/>
+            <a:ext cx="10881360" cy="1097280"/>
+          </a:xfrm>
+          <a:prstGeom prst="roundRect">
+            <a:avLst>
+              <a:gd name="adj" fmla="val 5000"/>
+            </a:avLst>
+          </a:prstGeom>
+          <a:solidFill>
+            <a:srgbClr val="FFFFFF"/>
+          </a:solidFill>
+          <a:ln w="12700">
+            <a:solidFill>
+              <a:srgbClr val="E4DCCB"/>
+            </a:solidFill>
+            <a:prstDash val="solid"/>
+          </a:ln>
+        </p:spPr>
+      </p:sp>
+      <p:sp>
+        <p:nvSpPr>
+          <p:cNvPr id="18" name="Shape 16"/>
+          <p:cNvSpPr/>
+          <p:nvPr/>
+        </p:nvSpPr>
+        <p:spPr>
+          <a:xfrm>
+            <a:off x="640080" y="5394960"/>
+            <a:ext cx="54864" cy="1097280"/>
+          </a:xfrm>
+          <a:prstGeom prst="rect">
+            <a:avLst/>
+          </a:prstGeom>
+          <a:solidFill>
+            <a:srgbClr val="1D6FE0"/>
+          </a:solidFill>
+          <a:ln/>
+        </p:spPr>
+      </p:sp>
+      <p:sp>
+        <p:nvSpPr>
+          <p:cNvPr id="19" name="Text 17"/>
+          <p:cNvSpPr/>
+          <p:nvPr/>
+        </p:nvSpPr>
+        <p:spPr>
+          <a:xfrm>
+            <a:off x="914400" y="5504688"/>
+            <a:ext cx="10332720" cy="365760"/>
+          </a:xfrm>
+          <a:prstGeom prst="rect">
+            <a:avLst/>
+          </a:prstGeom>
+          <a:noFill/>
+          <a:ln/>
+        </p:spPr>
+        <p:txBody>
+          <a:bodyPr wrap="square" rtlCol="0" anchor="ctr"/>
+          <a:lstStyle/>
+          <a:p>
+            <a:pPr indent="0" marL="0">
+              <a:buNone/>
+            </a:pPr>
+            <a:r>
+              <a:rPr lang="en-US" sz="1400" b="1" dirty="0">
+                <a:solidFill>
+                  <a:srgbClr val="1B1F3B"/>
+                </a:solidFill>
+                <a:latin typeface="Segoe UI" pitchFamily="34" charset="0"/>
+                <a:ea typeface="Segoe UI" pitchFamily="34" charset="-122"/>
+                <a:cs typeface="Segoe UI" pitchFamily="34" charset="-120"/>
+              </a:rPr>
+              <a:t>Espace ouvrier : pointage de la journée</a:t>
+            </a:r>
+            <a:endParaRPr lang="en-US" sz="1400" dirty="0"/>
+          </a:p>
+        </p:txBody>
+      </p:sp>
+      <p:sp>
+        <p:nvSpPr>
+          <p:cNvPr id="20" name="Text 18"/>
+          <p:cNvSpPr/>
+          <p:nvPr/>
+        </p:nvSpPr>
+        <p:spPr>
+          <a:xfrm>
+            <a:off x="914400" y="5852160"/>
+            <a:ext cx="10332720" cy="594360"/>
+          </a:xfrm>
+          <a:prstGeom prst="rect">
+            <a:avLst/>
+          </a:prstGeom>
+          <a:noFill/>
+          <a:ln/>
+        </p:spPr>
+        <p:txBody>
+          <a:bodyPr wrap="square" rtlCol="0" anchor="ctr"/>
+          <a:lstStyle/>
+          <a:p>
+            <a:pPr indent="0" marL="0">
+              <a:lnSpc>
+                <a:spcPts val="1400"/>
+              </a:lnSpc>
+              <a:buNone/>
+            </a:pPr>
+            <a:r>
+              <a:rPr lang="en-US" sz="1100" dirty="0">
+                <a:solidFill>
+                  <a:srgbClr val="8A7C68"/>
+                </a:solidFill>
+                <a:latin typeface="Segoe UI" pitchFamily="34" charset="0"/>
+                <a:ea typeface="Segoe UI" pitchFamily="34" charset="-122"/>
+                <a:cs typeface="Segoe UI" pitchFamily="34" charset="-120"/>
+              </a:rPr>
+              <a:t>Nouvel onglet 'Pointage' dans le portail ouvrier : début/fin de journée en un clic, avec récapitulatif de la semaine en cours.</a:t>
+            </a:r>
+            <a:endParaRPr lang="en-US" sz="1100" dirty="0"/>
+          </a:p>
+        </p:txBody>
+      </p:sp>
+      <p:sp>
+        <p:nvSpPr>
+          <p:cNvPr id="21" name="Text 19"/>
           <p:cNvSpPr/>
           <p:nvPr/>
         </p:nvSpPr>
@@ -21296,7 +23644,7 @@
       </p:sp>
       <p:sp>
         <p:nvSpPr>
-          <p:cNvPr id="10" name="Text 8"/>
+          <p:cNvPr id="22" name="Text 20"/>
           <p:cNvSpPr/>
           <p:nvPr/>
         </p:nvSpPr>

--- a/docs/manager-recap/Recap-Koji-Manager.pptx
+++ b/docs/manager-recap/Recap-Koji-Manager.pptx
@@ -44,9 +44,11 @@
     <p:sldId id="292" r:id="rId38"/>
     <p:sldId id="293" r:id="rId39"/>
     <p:sldId id="294" r:id="rId40"/>
+    <p:sldId id="295" r:id="rId41"/>
+    <p:sldId id="296" r:id="rId42"/>
   </p:sldIdLst>
   <p:notesMasterIdLst>
-    <p:notesMasterId r:id="rId41"/>
+    <p:notesMasterId r:id="rId43"/>
   </p:notesMasterIdLst>
   <p:sldSz cx="12191695" cy="6858000"/>
   <p:notesSz cx="6858000" cy="12191695"/>
@@ -3468,6 +3470,182 @@
             <a:fld id="{F7021451-1387-4CA6-816F-3879F97B5CBC}" type="slidenum">
               <a:rPr lang="en-US"/>
               <a:t>4</a:t>
+            </a:fld>
+            <a:endParaRPr lang="en-US"/>
+          </a:p>
+        </p:txBody>
+      </p:sp>
+    </p:spTree>
+    <p:extLst>
+      <p:ext uri="{BB962C8B-B14F-4D97-AF65-F5344CB8AC3E}">
+        <p14:creationId xmlns:p14="http://schemas.microsoft.com/office/powerpoint/2010/main" val="1024086991"/>
+      </p:ext>
+    </p:extLst>
+  </p:cSld>
+  <p:clrMapOvr>
+    <a:masterClrMapping/>
+  </p:clrMapOvr>
+</p:notes>
+</file>
+
+<file path=ppt/notesSlides/notesSlide40.xml><?xml version="1.0" encoding="utf-8"?>
+<p:notes xmlns:a="http://schemas.openxmlformats.org/drawingml/2006/main" xmlns:r="http://schemas.openxmlformats.org/officeDocument/2006/relationships" xmlns:p="http://schemas.openxmlformats.org/presentationml/2006/main">
+  <p:cSld>
+    <p:spTree>
+      <p:nvGrpSpPr>
+        <p:cNvPr id="1" name=""/>
+        <p:cNvGrpSpPr/>
+        <p:nvPr/>
+      </p:nvGrpSpPr>
+      <p:grpSpPr>
+        <a:xfrm>
+          <a:off x="0" y="0"/>
+          <a:ext cx="0" cy="0"/>
+          <a:chOff x="0" y="0"/>
+          <a:chExt cx="0" cy="0"/>
+        </a:xfrm>
+      </p:grpSpPr>
+      <p:sp>
+        <p:nvSpPr>
+          <p:cNvPr id="2" name="Slide Image Placeholder 1"/>
+          <p:cNvSpPr>
+            <a:spLocks noGrp="1" noRot="1" noChangeAspect="1"/>
+          </p:cNvSpPr>
+          <p:nvPr>
+            <p:ph type="sldImg"/>
+          </p:nvPr>
+        </p:nvSpPr>
+        <p:spPr/>
+      </p:sp>
+      <p:sp>
+        <p:nvSpPr>
+          <p:cNvPr id="3" name="Notes Placeholder 2"/>
+          <p:cNvSpPr>
+            <a:spLocks noGrp="1"/>
+          </p:cNvSpPr>
+          <p:nvPr>
+            <p:ph type="body" idx="1"/>
+          </p:nvPr>
+        </p:nvSpPr>
+        <p:spPr/>
+        <p:txBody>
+          <a:bodyPr/>
+          <a:lstStyle/>
+          <a:p>
+            <a:r>
+              <a:rPr lang="en-US" dirty="0"/>
+              <a:t/>
+            </a:r>
+            <a:endParaRPr lang="en-US" dirty="0"/>
+          </a:p>
+        </p:txBody>
+      </p:sp>
+      <p:sp>
+        <p:nvSpPr>
+          <p:cNvPr id="4" name="Slide Number Placeholder 3"/>
+          <p:cNvSpPr>
+            <a:spLocks noGrp="1"/>
+          </p:cNvSpPr>
+          <p:nvPr>
+            <p:ph type="sldNum" sz="quarter" idx="10"/>
+          </p:nvPr>
+        </p:nvSpPr>
+        <p:spPr/>
+        <p:txBody>
+          <a:bodyPr/>
+          <a:lstStyle/>
+          <a:p>
+            <a:fld id="{F7021451-1387-4CA6-816F-3879F97B5CBC}" type="slidenum">
+              <a:rPr lang="en-US"/>
+              <a:t>40</a:t>
+            </a:fld>
+            <a:endParaRPr lang="en-US"/>
+          </a:p>
+        </p:txBody>
+      </p:sp>
+    </p:spTree>
+    <p:extLst>
+      <p:ext uri="{BB962C8B-B14F-4D97-AF65-F5344CB8AC3E}">
+        <p14:creationId xmlns:p14="http://schemas.microsoft.com/office/powerpoint/2010/main" val="1024086991"/>
+      </p:ext>
+    </p:extLst>
+  </p:cSld>
+  <p:clrMapOvr>
+    <a:masterClrMapping/>
+  </p:clrMapOvr>
+</p:notes>
+</file>
+
+<file path=ppt/notesSlides/notesSlide41.xml><?xml version="1.0" encoding="utf-8"?>
+<p:notes xmlns:a="http://schemas.openxmlformats.org/drawingml/2006/main" xmlns:r="http://schemas.openxmlformats.org/officeDocument/2006/relationships" xmlns:p="http://schemas.openxmlformats.org/presentationml/2006/main">
+  <p:cSld>
+    <p:spTree>
+      <p:nvGrpSpPr>
+        <p:cNvPr id="1" name=""/>
+        <p:cNvGrpSpPr/>
+        <p:nvPr/>
+      </p:nvGrpSpPr>
+      <p:grpSpPr>
+        <a:xfrm>
+          <a:off x="0" y="0"/>
+          <a:ext cx="0" cy="0"/>
+          <a:chOff x="0" y="0"/>
+          <a:chExt cx="0" cy="0"/>
+        </a:xfrm>
+      </p:grpSpPr>
+      <p:sp>
+        <p:nvSpPr>
+          <p:cNvPr id="2" name="Slide Image Placeholder 1"/>
+          <p:cNvSpPr>
+            <a:spLocks noGrp="1" noRot="1" noChangeAspect="1"/>
+          </p:cNvSpPr>
+          <p:nvPr>
+            <p:ph type="sldImg"/>
+          </p:nvPr>
+        </p:nvSpPr>
+        <p:spPr/>
+      </p:sp>
+      <p:sp>
+        <p:nvSpPr>
+          <p:cNvPr id="3" name="Notes Placeholder 2"/>
+          <p:cNvSpPr>
+            <a:spLocks noGrp="1"/>
+          </p:cNvSpPr>
+          <p:nvPr>
+            <p:ph type="body" idx="1"/>
+          </p:nvPr>
+        </p:nvSpPr>
+        <p:spPr/>
+        <p:txBody>
+          <a:bodyPr/>
+          <a:lstStyle/>
+          <a:p>
+            <a:r>
+              <a:rPr lang="en-US" dirty="0"/>
+              <a:t/>
+            </a:r>
+            <a:endParaRPr lang="en-US" dirty="0"/>
+          </a:p>
+        </p:txBody>
+      </p:sp>
+      <p:sp>
+        <p:nvSpPr>
+          <p:cNvPr id="4" name="Slide Number Placeholder 3"/>
+          <p:cNvSpPr>
+            <a:spLocks noGrp="1"/>
+          </p:cNvSpPr>
+          <p:nvPr>
+            <p:ph type="sldNum" sz="quarter" idx="10"/>
+          </p:nvPr>
+        </p:nvSpPr>
+        <p:spPr/>
+        <p:txBody>
+          <a:bodyPr/>
+          <a:lstStyle/>
+          <a:p>
+            <a:fld id="{F7021451-1387-4CA6-816F-3879F97B5CBC}" type="slidenum">
+              <a:rPr lang="en-US"/>
+              <a:t>41</a:t>
             </a:fld>
             <a:endParaRPr lang="en-US"/>
           </a:p>
@@ -8914,7 +9092,7 @@
                 <a:ea typeface="Segoe UI" pitchFamily="34" charset="-122"/>
                 <a:cs typeface="Segoe UI" pitchFamily="34" charset="-120"/>
               </a:rPr>
-              <a:t>32 mise(s) à jour</a:t>
+              <a:t>36 mise(s) à jour</a:t>
             </a:r>
             <a:endParaRPr lang="en-US" sz="1200" dirty="0"/>
           </a:p>
@@ -9634,7 +9812,7 @@
                 <a:ea typeface="Georgia" pitchFamily="34" charset="-122"/>
                 <a:cs typeface="Georgia" pitchFamily="34" charset="-120"/>
               </a:rPr>
-              <a:t>83</a:t>
+              <a:t>88</a:t>
             </a:r>
             <a:endParaRPr lang="en-US" sz="3200" dirty="0"/>
           </a:p>
@@ -9844,7 +10022,7 @@
                 <a:ea typeface="Georgia" pitchFamily="34" charset="-122"/>
                 <a:cs typeface="Georgia" pitchFamily="34" charset="-120"/>
               </a:rPr>
-              <a:t>32</a:t>
+              <a:t>36</a:t>
             </a:r>
             <a:endParaRPr lang="en-US" sz="3200" dirty="0"/>
           </a:p>
@@ -9949,7 +10127,7 @@
                 <a:ea typeface="Georgia" pitchFamily="34" charset="-122"/>
                 <a:cs typeface="Georgia" pitchFamily="34" charset="-120"/>
               </a:rPr>
-              <a:t>10</a:t>
+              <a:t>11</a:t>
             </a:r>
             <a:endParaRPr lang="en-US" sz="3200" dirty="0"/>
           </a:p>
@@ -11799,7 +11977,7 @@
                 <a:ea typeface="Georgia" pitchFamily="34" charset="-122"/>
                 <a:cs typeface="Georgia" pitchFamily="34" charset="-120"/>
               </a:rPr>
-              <a:t>Chantiers</a:t>
+              <a:t>Devis (suite)</a:t>
             </a:r>
             <a:endParaRPr lang="en-US" sz="2400" dirty="0"/>
           </a:p>
@@ -11885,7 +12063,7 @@
                 <a:ea typeface="Segoe UI" pitchFamily="34" charset="-122"/>
                 <a:cs typeface="Segoe UI" pitchFamily="34" charset="-120"/>
               </a:rPr>
-              <a:t>Correction d'un bug bloquant majeur</a:t>
+              <a:t>Protection contre l'effacement accidentel d'une signature</a:t>
             </a:r>
             <a:endParaRPr lang="en-US" sz="1400" dirty="0"/>
           </a:p>
@@ -11927,7 +12105,7 @@
                 <a:ea typeface="Segoe UI" pitchFamily="34" charset="-122"/>
                 <a:cs typeface="Segoe UI" pitchFamily="34" charset="-120"/>
               </a:rPr>
-              <a:t>Un chantier ne pouvait être consulté que si son devis était déjà signé par le client, empêchant toute préparation en amont. Corrigé : la fiche chantier est désormais accessible dès sa création.</a:t>
+              <a:t>Renvoyer l'invitation à signer un devis déjà signé effaçait silencieusement la signature existante (nom, date) pour repartir de zéro. Une confirmation explicite est désormais nécessaire pour rouvrir un devis déjà signé.</a:t>
             </a:r>
             <a:endParaRPr lang="en-US" sz="1100" dirty="0"/>
           </a:p>
@@ -11935,135 +12113,7 @@
       </p:sp>
       <p:sp>
         <p:nvSpPr>
-          <p:cNvPr id="9" name="Shape 7"/>
-          <p:cNvSpPr/>
-          <p:nvPr/>
-        </p:nvSpPr>
-        <p:spPr>
-          <a:xfrm>
-            <a:off x="640080" y="2926080"/>
-            <a:ext cx="10881360" cy="1097280"/>
-          </a:xfrm>
-          <a:prstGeom prst="roundRect">
-            <a:avLst>
-              <a:gd name="adj" fmla="val 5000"/>
-            </a:avLst>
-          </a:prstGeom>
-          <a:solidFill>
-            <a:srgbClr val="FFFFFF"/>
-          </a:solidFill>
-          <a:ln w="12700">
-            <a:solidFill>
-              <a:srgbClr val="E4DCCB"/>
-            </a:solidFill>
-            <a:prstDash val="solid"/>
-          </a:ln>
-        </p:spPr>
-      </p:sp>
-      <p:sp>
-        <p:nvSpPr>
-          <p:cNvPr id="10" name="Shape 8"/>
-          <p:cNvSpPr/>
-          <p:nvPr/>
-        </p:nvSpPr>
-        <p:spPr>
-          <a:xfrm>
-            <a:off x="640080" y="2926080"/>
-            <a:ext cx="54864" cy="1097280"/>
-          </a:xfrm>
-          <a:prstGeom prst="rect">
-            <a:avLst/>
-          </a:prstGeom>
-          <a:solidFill>
-            <a:srgbClr val="9A4C1F"/>
-          </a:solidFill>
-          <a:ln/>
-        </p:spPr>
-      </p:sp>
-      <p:sp>
-        <p:nvSpPr>
-          <p:cNvPr id="11" name="Text 9"/>
-          <p:cNvSpPr/>
-          <p:nvPr/>
-        </p:nvSpPr>
-        <p:spPr>
-          <a:xfrm>
-            <a:off x="914400" y="3035808"/>
-            <a:ext cx="10332720" cy="365760"/>
-          </a:xfrm>
-          <a:prstGeom prst="rect">
-            <a:avLst/>
-          </a:prstGeom>
-          <a:noFill/>
-          <a:ln/>
-        </p:spPr>
-        <p:txBody>
-          <a:bodyPr wrap="square" rtlCol="0" anchor="ctr"/>
-          <a:lstStyle/>
-          <a:p>
-            <a:pPr indent="0" marL="0">
-              <a:buNone/>
-            </a:pPr>
-            <a:r>
-              <a:rPr lang="en-US" sz="1400" b="1" dirty="0">
-                <a:solidFill>
-                  <a:srgbClr val="1B1F3B"/>
-                </a:solidFill>
-                <a:latin typeface="Segoe UI" pitchFamily="34" charset="0"/>
-                <a:ea typeface="Segoe UI" pitchFamily="34" charset="-122"/>
-                <a:cs typeface="Segoe UI" pitchFamily="34" charset="-120"/>
-              </a:rPr>
-              <a:t>Dépenses liées à un ouvrage précis</a:t>
-            </a:r>
-            <a:endParaRPr lang="en-US" sz="1400" dirty="0"/>
-          </a:p>
-        </p:txBody>
-      </p:sp>
-      <p:sp>
-        <p:nvSpPr>
-          <p:cNvPr id="12" name="Text 10"/>
-          <p:cNvSpPr/>
-          <p:nvPr/>
-        </p:nvSpPr>
-        <p:spPr>
-          <a:xfrm>
-            <a:off x="914400" y="3383280"/>
-            <a:ext cx="10332720" cy="594360"/>
-          </a:xfrm>
-          <a:prstGeom prst="rect">
-            <a:avLst/>
-          </a:prstGeom>
-          <a:noFill/>
-          <a:ln/>
-        </p:spPr>
-        <p:txBody>
-          <a:bodyPr wrap="square" rtlCol="0" anchor="ctr"/>
-          <a:lstStyle/>
-          <a:p>
-            <a:pPr indent="0" marL="0">
-              <a:lnSpc>
-                <a:spcPts val="1400"/>
-              </a:lnSpc>
-              <a:buNone/>
-            </a:pPr>
-            <a:r>
-              <a:rPr lang="en-US" sz="1100" dirty="0">
-                <a:solidFill>
-                  <a:srgbClr val="8A7C68"/>
-                </a:solidFill>
-                <a:latin typeface="Segoe UI" pitchFamily="34" charset="0"/>
-                <a:ea typeface="Segoe UI" pitchFamily="34" charset="-122"/>
-                <a:cs typeface="Segoe UI" pitchFamily="34" charset="-120"/>
-              </a:rPr>
-              <a:t>L'API des dépenses accepte désormais un identifiant de tâche (ouvrage) en plus du chantier, pour un suivi financier plus fin.</a:t>
-            </a:r>
-            <a:endParaRPr lang="en-US" sz="1100" dirty="0"/>
-          </a:p>
-        </p:txBody>
-      </p:sp>
-      <p:sp>
-        <p:nvSpPr>
-          <p:cNvPr id="13" name="Text 11"/>
+          <p:cNvPr id="9" name="Text 7"/>
           <p:cNvSpPr/>
           <p:nvPr/>
         </p:nvSpPr>
@@ -12102,7 +12152,7 @@
       </p:sp>
       <p:sp>
         <p:nvSpPr>
-          <p:cNvPr id="14" name="Text 12"/>
+          <p:cNvPr id="10" name="Text 8"/>
           <p:cNvSpPr/>
           <p:nvPr/>
         </p:nvSpPr>
@@ -12265,7 +12315,7 @@
                 <a:ea typeface="Georgia" pitchFamily="34" charset="-122"/>
                 <a:cs typeface="Georgia" pitchFamily="34" charset="-120"/>
               </a:rPr>
-              <a:t>Équipe</a:t>
+              <a:t>Chantiers</a:t>
             </a:r>
             <a:endParaRPr lang="en-US" sz="2400" dirty="0"/>
           </a:p>
@@ -12351,7 +12401,7 @@
                 <a:ea typeface="Segoe UI" pitchFamily="34" charset="-122"/>
                 <a:cs typeface="Segoe UI" pitchFamily="34" charset="-120"/>
               </a:rPr>
-              <a:t>Six types de pointage</a:t>
+              <a:t>Correction d'un bug bloquant majeur</a:t>
             </a:r>
             <a:endParaRPr lang="en-US" sz="1400" dirty="0"/>
           </a:p>
@@ -12393,7 +12443,7 @@
                 <a:ea typeface="Segoe UI" pitchFamily="34" charset="-122"/>
                 <a:cs typeface="Segoe UI" pitchFamily="34" charset="-120"/>
               </a:rPr>
-              <a:t>Heures de travail, jour de travail, forfait, ouvrage, passage, déplacement — chacun avec date et montant ; le montant des heures est calculé automatiquement à partir du taux horaire de l'ouvrier.</a:t>
+              <a:t>Un chantier ne pouvait être consulté que si son devis était déjà signé par le client, empêchant toute préparation en amont. Corrigé : la fiche chantier est désormais accessible dès sa création.</a:t>
             </a:r>
             <a:endParaRPr lang="en-US" sz="1100" dirty="0"/>
           </a:p>
@@ -12479,7 +12529,7 @@
                 <a:ea typeface="Segoe UI" pitchFamily="34" charset="-122"/>
                 <a:cs typeface="Segoe UI" pitchFamily="34" charset="-120"/>
               </a:rPr>
-              <a:t>Alertes automatiques de dépassement / manque d'heures</a:t>
+              <a:t>Dépenses liées à un ouvrage précis</a:t>
             </a:r>
             <a:endParaRPr lang="en-US" sz="1400" dirty="0"/>
           </a:p>
@@ -12521,7 +12571,7 @@
                 <a:ea typeface="Segoe UI" pitchFamily="34" charset="-122"/>
                 <a:cs typeface="Segoe UI" pitchFamily="34" charset="-120"/>
               </a:rPr>
-              <a:t>À la fin de chaque semaine, si le total travaillé diffère du contrat de plus de 15 minutes, une notification est envoyée automatiquement à l'entreprise (une seule fois par semaine et par ouvrier).</a:t>
+              <a:t>L'API des dépenses accepte désormais un identifiant de tâche (ouvrage) en plus du chantier, pour un suivi financier plus fin.</a:t>
             </a:r>
             <a:endParaRPr lang="en-US" sz="1100" dirty="0"/>
           </a:p>
@@ -12529,135 +12579,7 @@
       </p:sp>
       <p:sp>
         <p:nvSpPr>
-          <p:cNvPr id="13" name="Shape 11"/>
-          <p:cNvSpPr/>
-          <p:nvPr/>
-        </p:nvSpPr>
-        <p:spPr>
-          <a:xfrm>
-            <a:off x="640080" y="4160520"/>
-            <a:ext cx="10881360" cy="1097280"/>
-          </a:xfrm>
-          <a:prstGeom prst="roundRect">
-            <a:avLst>
-              <a:gd name="adj" fmla="val 5000"/>
-            </a:avLst>
-          </a:prstGeom>
-          <a:solidFill>
-            <a:srgbClr val="FFFFFF"/>
-          </a:solidFill>
-          <a:ln w="12700">
-            <a:solidFill>
-              <a:srgbClr val="E4DCCB"/>
-            </a:solidFill>
-            <a:prstDash val="solid"/>
-          </a:ln>
-        </p:spPr>
-      </p:sp>
-      <p:sp>
-        <p:nvSpPr>
-          <p:cNvPr id="14" name="Shape 12"/>
-          <p:cNvSpPr/>
-          <p:nvPr/>
-        </p:nvSpPr>
-        <p:spPr>
-          <a:xfrm>
-            <a:off x="640080" y="4160520"/>
-            <a:ext cx="54864" cy="1097280"/>
-          </a:xfrm>
-          <a:prstGeom prst="rect">
-            <a:avLst/>
-          </a:prstGeom>
-          <a:solidFill>
-            <a:srgbClr val="9A4C1F"/>
-          </a:solidFill>
-          <a:ln/>
-        </p:spPr>
-      </p:sp>
-      <p:sp>
-        <p:nvSpPr>
-          <p:cNvPr id="15" name="Text 13"/>
-          <p:cNvSpPr/>
-          <p:nvPr/>
-        </p:nvSpPr>
-        <p:spPr>
-          <a:xfrm>
-            <a:off x="914400" y="4270248"/>
-            <a:ext cx="10332720" cy="365760"/>
-          </a:xfrm>
-          <a:prstGeom prst="rect">
-            <a:avLst/>
-          </a:prstGeom>
-          <a:noFill/>
-          <a:ln/>
-        </p:spPr>
-        <p:txBody>
-          <a:bodyPr wrap="square" rtlCol="0" anchor="ctr"/>
-          <a:lstStyle/>
-          <a:p>
-            <a:pPr indent="0" marL="0">
-              <a:buNone/>
-            </a:pPr>
-            <a:r>
-              <a:rPr lang="en-US" sz="1400" b="1" dirty="0">
-                <a:solidFill>
-                  <a:srgbClr val="1B1F3B"/>
-                </a:solidFill>
-                <a:latin typeface="Segoe UI" pitchFamily="34" charset="0"/>
-                <a:ea typeface="Segoe UI" pitchFamily="34" charset="-122"/>
-                <a:cs typeface="Segoe UI" pitchFamily="34" charset="-120"/>
-              </a:rPr>
-              <a:t>Export PDF du relevé d'heures</a:t>
-            </a:r>
-            <a:endParaRPr lang="en-US" sz="1400" dirty="0"/>
-          </a:p>
-        </p:txBody>
-      </p:sp>
-      <p:sp>
-        <p:nvSpPr>
-          <p:cNvPr id="16" name="Text 14"/>
-          <p:cNvSpPr/>
-          <p:nvPr/>
-        </p:nvSpPr>
-        <p:spPr>
-          <a:xfrm>
-            <a:off x="914400" y="4617720"/>
-            <a:ext cx="10332720" cy="594360"/>
-          </a:xfrm>
-          <a:prstGeom prst="rect">
-            <a:avLst/>
-          </a:prstGeom>
-          <a:noFill/>
-          <a:ln/>
-        </p:spPr>
-        <p:txBody>
-          <a:bodyPr wrap="square" rtlCol="0" anchor="ctr"/>
-          <a:lstStyle/>
-          <a:p>
-            <a:pPr indent="0" marL="0">
-              <a:lnSpc>
-                <a:spcPts val="1400"/>
-              </a:lnSpc>
-              <a:buNone/>
-            </a:pPr>
-            <a:r>
-              <a:rPr lang="en-US" sz="1100" dirty="0">
-                <a:solidFill>
-                  <a:srgbClr val="8A7C68"/>
-                </a:solidFill>
-                <a:latin typeface="Segoe UI" pitchFamily="34" charset="0"/>
-                <a:ea typeface="Segoe UI" pitchFamily="34" charset="-122"/>
-                <a:cs typeface="Segoe UI" pitchFamily="34" charset="-120"/>
-              </a:rPr>
-              <a:t>Génération d'un PDF mensuel par ouvrier : détail par journée/type de pointage, totaux hebdomadaires, total du mois en heures et en montant — pensé pour la comptabilité et la gestion de la paie.</a:t>
-            </a:r>
-            <a:endParaRPr lang="en-US" sz="1100" dirty="0"/>
-          </a:p>
-        </p:txBody>
-      </p:sp>
-      <p:sp>
-        <p:nvSpPr>
-          <p:cNvPr id="17" name="Text 15"/>
+          <p:cNvPr id="13" name="Text 11"/>
           <p:cNvSpPr/>
           <p:nvPr/>
         </p:nvSpPr>
@@ -12696,7 +12618,7 @@
       </p:sp>
       <p:sp>
         <p:nvSpPr>
-          <p:cNvPr id="18" name="Text 16"/>
+          <p:cNvPr id="14" name="Text 12"/>
           <p:cNvSpPr/>
           <p:nvPr/>
         </p:nvSpPr>
@@ -12859,7 +12781,7 @@
                 <a:ea typeface="Georgia" pitchFamily="34" charset="-122"/>
                 <a:cs typeface="Georgia" pitchFamily="34" charset="-120"/>
               </a:rPr>
-              <a:t>Notifications</a:t>
+              <a:t>Équipe</a:t>
             </a:r>
             <a:endParaRPr lang="en-US" sz="2400" dirty="0"/>
           </a:p>
@@ -12945,7 +12867,7 @@
                 <a:ea typeface="Segoe UI" pitchFamily="34" charset="-122"/>
                 <a:cs typeface="Segoe UI" pitchFamily="34" charset="-120"/>
               </a:rPr>
-              <a:t>Envoi d'email réel à la signature du devis</a:t>
+              <a:t>Six types de pointage</a:t>
             </a:r>
             <a:endParaRPr lang="en-US" sz="1400" dirty="0"/>
           </a:p>
@@ -12987,7 +12909,7 @@
                 <a:ea typeface="Segoe UI" pitchFamily="34" charset="-122"/>
                 <a:cs typeface="Segoe UI" pitchFamily="34" charset="-120"/>
               </a:rPr>
-              <a:t>Le premier envoi des identifiants client déclenche désormais un vrai email (SMTP), et plus seulement une file d'attente locale.</a:t>
+              <a:t>Heures de travail, jour de travail, forfait, ouvrage, passage, déplacement — chacun avec date et montant ; le montant des heures est calculé automatiquement à partir du taux horaire de l'ouvrier.</a:t>
             </a:r>
             <a:endParaRPr lang="en-US" sz="1100" dirty="0"/>
           </a:p>
@@ -12995,7 +12917,263 @@
       </p:sp>
       <p:sp>
         <p:nvSpPr>
-          <p:cNvPr id="9" name="Text 7"/>
+          <p:cNvPr id="9" name="Shape 7"/>
+          <p:cNvSpPr/>
+          <p:nvPr/>
+        </p:nvSpPr>
+        <p:spPr>
+          <a:xfrm>
+            <a:off x="640080" y="2926080"/>
+            <a:ext cx="10881360" cy="1097280"/>
+          </a:xfrm>
+          <a:prstGeom prst="roundRect">
+            <a:avLst>
+              <a:gd name="adj" fmla="val 5000"/>
+            </a:avLst>
+          </a:prstGeom>
+          <a:solidFill>
+            <a:srgbClr val="FFFFFF"/>
+          </a:solidFill>
+          <a:ln w="12700">
+            <a:solidFill>
+              <a:srgbClr val="E4DCCB"/>
+            </a:solidFill>
+            <a:prstDash val="solid"/>
+          </a:ln>
+        </p:spPr>
+      </p:sp>
+      <p:sp>
+        <p:nvSpPr>
+          <p:cNvPr id="10" name="Shape 8"/>
+          <p:cNvSpPr/>
+          <p:nvPr/>
+        </p:nvSpPr>
+        <p:spPr>
+          <a:xfrm>
+            <a:off x="640080" y="2926080"/>
+            <a:ext cx="54864" cy="1097280"/>
+          </a:xfrm>
+          <a:prstGeom prst="rect">
+            <a:avLst/>
+          </a:prstGeom>
+          <a:solidFill>
+            <a:srgbClr val="9A4C1F"/>
+          </a:solidFill>
+          <a:ln/>
+        </p:spPr>
+      </p:sp>
+      <p:sp>
+        <p:nvSpPr>
+          <p:cNvPr id="11" name="Text 9"/>
+          <p:cNvSpPr/>
+          <p:nvPr/>
+        </p:nvSpPr>
+        <p:spPr>
+          <a:xfrm>
+            <a:off x="914400" y="3035808"/>
+            <a:ext cx="10332720" cy="365760"/>
+          </a:xfrm>
+          <a:prstGeom prst="rect">
+            <a:avLst/>
+          </a:prstGeom>
+          <a:noFill/>
+          <a:ln/>
+        </p:spPr>
+        <p:txBody>
+          <a:bodyPr wrap="square" rtlCol="0" anchor="ctr"/>
+          <a:lstStyle/>
+          <a:p>
+            <a:pPr indent="0" marL="0">
+              <a:buNone/>
+            </a:pPr>
+            <a:r>
+              <a:rPr lang="en-US" sz="1400" b="1" dirty="0">
+                <a:solidFill>
+                  <a:srgbClr val="1B1F3B"/>
+                </a:solidFill>
+                <a:latin typeface="Segoe UI" pitchFamily="34" charset="0"/>
+                <a:ea typeface="Segoe UI" pitchFamily="34" charset="-122"/>
+                <a:cs typeface="Segoe UI" pitchFamily="34" charset="-120"/>
+              </a:rPr>
+              <a:t>Alertes automatiques de dépassement / manque d'heures</a:t>
+            </a:r>
+            <a:endParaRPr lang="en-US" sz="1400" dirty="0"/>
+          </a:p>
+        </p:txBody>
+      </p:sp>
+      <p:sp>
+        <p:nvSpPr>
+          <p:cNvPr id="12" name="Text 10"/>
+          <p:cNvSpPr/>
+          <p:nvPr/>
+        </p:nvSpPr>
+        <p:spPr>
+          <a:xfrm>
+            <a:off x="914400" y="3383280"/>
+            <a:ext cx="10332720" cy="594360"/>
+          </a:xfrm>
+          <a:prstGeom prst="rect">
+            <a:avLst/>
+          </a:prstGeom>
+          <a:noFill/>
+          <a:ln/>
+        </p:spPr>
+        <p:txBody>
+          <a:bodyPr wrap="square" rtlCol="0" anchor="ctr"/>
+          <a:lstStyle/>
+          <a:p>
+            <a:pPr indent="0" marL="0">
+              <a:lnSpc>
+                <a:spcPts val="1400"/>
+              </a:lnSpc>
+              <a:buNone/>
+            </a:pPr>
+            <a:r>
+              <a:rPr lang="en-US" sz="1100" dirty="0">
+                <a:solidFill>
+                  <a:srgbClr val="8A7C68"/>
+                </a:solidFill>
+                <a:latin typeface="Segoe UI" pitchFamily="34" charset="0"/>
+                <a:ea typeface="Segoe UI" pitchFamily="34" charset="-122"/>
+                <a:cs typeface="Segoe UI" pitchFamily="34" charset="-120"/>
+              </a:rPr>
+              <a:t>À la fin de chaque semaine, si le total travaillé diffère du contrat de plus de 15 minutes, une notification est envoyée automatiquement à l'entreprise (une seule fois par semaine et par ouvrier).</a:t>
+            </a:r>
+            <a:endParaRPr lang="en-US" sz="1100" dirty="0"/>
+          </a:p>
+        </p:txBody>
+      </p:sp>
+      <p:sp>
+        <p:nvSpPr>
+          <p:cNvPr id="13" name="Shape 11"/>
+          <p:cNvSpPr/>
+          <p:nvPr/>
+        </p:nvSpPr>
+        <p:spPr>
+          <a:xfrm>
+            <a:off x="640080" y="4160520"/>
+            <a:ext cx="10881360" cy="1097280"/>
+          </a:xfrm>
+          <a:prstGeom prst="roundRect">
+            <a:avLst>
+              <a:gd name="adj" fmla="val 5000"/>
+            </a:avLst>
+          </a:prstGeom>
+          <a:solidFill>
+            <a:srgbClr val="FFFFFF"/>
+          </a:solidFill>
+          <a:ln w="12700">
+            <a:solidFill>
+              <a:srgbClr val="E4DCCB"/>
+            </a:solidFill>
+            <a:prstDash val="solid"/>
+          </a:ln>
+        </p:spPr>
+      </p:sp>
+      <p:sp>
+        <p:nvSpPr>
+          <p:cNvPr id="14" name="Shape 12"/>
+          <p:cNvSpPr/>
+          <p:nvPr/>
+        </p:nvSpPr>
+        <p:spPr>
+          <a:xfrm>
+            <a:off x="640080" y="4160520"/>
+            <a:ext cx="54864" cy="1097280"/>
+          </a:xfrm>
+          <a:prstGeom prst="rect">
+            <a:avLst/>
+          </a:prstGeom>
+          <a:solidFill>
+            <a:srgbClr val="9A4C1F"/>
+          </a:solidFill>
+          <a:ln/>
+        </p:spPr>
+      </p:sp>
+      <p:sp>
+        <p:nvSpPr>
+          <p:cNvPr id="15" name="Text 13"/>
+          <p:cNvSpPr/>
+          <p:nvPr/>
+        </p:nvSpPr>
+        <p:spPr>
+          <a:xfrm>
+            <a:off x="914400" y="4270248"/>
+            <a:ext cx="10332720" cy="365760"/>
+          </a:xfrm>
+          <a:prstGeom prst="rect">
+            <a:avLst/>
+          </a:prstGeom>
+          <a:noFill/>
+          <a:ln/>
+        </p:spPr>
+        <p:txBody>
+          <a:bodyPr wrap="square" rtlCol="0" anchor="ctr"/>
+          <a:lstStyle/>
+          <a:p>
+            <a:pPr indent="0" marL="0">
+              <a:buNone/>
+            </a:pPr>
+            <a:r>
+              <a:rPr lang="en-US" sz="1400" b="1" dirty="0">
+                <a:solidFill>
+                  <a:srgbClr val="1B1F3B"/>
+                </a:solidFill>
+                <a:latin typeface="Segoe UI" pitchFamily="34" charset="0"/>
+                <a:ea typeface="Segoe UI" pitchFamily="34" charset="-122"/>
+                <a:cs typeface="Segoe UI" pitchFamily="34" charset="-120"/>
+              </a:rPr>
+              <a:t>Export PDF du relevé d'heures</a:t>
+            </a:r>
+            <a:endParaRPr lang="en-US" sz="1400" dirty="0"/>
+          </a:p>
+        </p:txBody>
+      </p:sp>
+      <p:sp>
+        <p:nvSpPr>
+          <p:cNvPr id="16" name="Text 14"/>
+          <p:cNvSpPr/>
+          <p:nvPr/>
+        </p:nvSpPr>
+        <p:spPr>
+          <a:xfrm>
+            <a:off x="914400" y="4617720"/>
+            <a:ext cx="10332720" cy="594360"/>
+          </a:xfrm>
+          <a:prstGeom prst="rect">
+            <a:avLst/>
+          </a:prstGeom>
+          <a:noFill/>
+          <a:ln/>
+        </p:spPr>
+        <p:txBody>
+          <a:bodyPr wrap="square" rtlCol="0" anchor="ctr"/>
+          <a:lstStyle/>
+          <a:p>
+            <a:pPr indent="0" marL="0">
+              <a:lnSpc>
+                <a:spcPts val="1400"/>
+              </a:lnSpc>
+              <a:buNone/>
+            </a:pPr>
+            <a:r>
+              <a:rPr lang="en-US" sz="1100" dirty="0">
+                <a:solidFill>
+                  <a:srgbClr val="8A7C68"/>
+                </a:solidFill>
+                <a:latin typeface="Segoe UI" pitchFamily="34" charset="0"/>
+                <a:ea typeface="Segoe UI" pitchFamily="34" charset="-122"/>
+                <a:cs typeface="Segoe UI" pitchFamily="34" charset="-120"/>
+              </a:rPr>
+              <a:t>Génération d'un PDF mensuel par ouvrier : détail par journée/type de pointage, totaux hebdomadaires, total du mois en heures et en montant — pensé pour la comptabilité et la gestion de la paie.</a:t>
+            </a:r>
+            <a:endParaRPr lang="en-US" sz="1100" dirty="0"/>
+          </a:p>
+        </p:txBody>
+      </p:sp>
+      <p:sp>
+        <p:nvSpPr>
+          <p:cNvPr id="17" name="Text 15"/>
           <p:cNvSpPr/>
           <p:nvPr/>
         </p:nvSpPr>
@@ -13034,7 +13212,7 @@
       </p:sp>
       <p:sp>
         <p:nvSpPr>
-          <p:cNvPr id="10" name="Text 8"/>
+          <p:cNvPr id="18" name="Text 16"/>
           <p:cNvSpPr/>
           <p:nvPr/>
         </p:nvSpPr>
@@ -13197,7 +13375,7 @@
                 <a:ea typeface="Georgia" pitchFamily="34" charset="-122"/>
                 <a:cs typeface="Georgia" pitchFamily="34" charset="-120"/>
               </a:rPr>
-              <a:t>Signature &amp; portails</a:t>
+              <a:t>Notifications</a:t>
             </a:r>
             <a:endParaRPr lang="en-US" sz="2400" dirty="0"/>
           </a:p>
@@ -13283,7 +13461,7 @@
                 <a:ea typeface="Segoe UI" pitchFamily="34" charset="-122"/>
                 <a:cs typeface="Segoe UI" pitchFamily="34" charset="-120"/>
               </a:rPr>
-              <a:t>Signature client branchée sur Supabase</a:t>
+              <a:t>Envoi d'email réel à la signature du devis</a:t>
             </a:r>
             <a:endParaRPr lang="en-US" sz="1400" dirty="0"/>
           </a:p>
@@ -13325,7 +13503,7 @@
                 <a:ea typeface="Segoe UI" pitchFamily="34" charset="-122"/>
                 <a:cs typeface="Segoe UI" pitchFamily="34" charset="-120"/>
               </a:rPr>
-              <a:t>Le client qui signe un devis n'a pas de session Kôji : une clé technique dédiée (service_role) permet de retrouver et mettre à jour son devis directement dans la base partagée.</a:t>
+              <a:t>Le premier envoi des identifiants client déclenche désormais un vrai email (SMTP), et plus seulement une file d'attente locale.</a:t>
             </a:r>
             <a:endParaRPr lang="en-US" sz="1100" dirty="0"/>
           </a:p>
@@ -13333,263 +13511,7 @@
       </p:sp>
       <p:sp>
         <p:nvSpPr>
-          <p:cNvPr id="9" name="Shape 7"/>
-          <p:cNvSpPr/>
-          <p:nvPr/>
-        </p:nvSpPr>
-        <p:spPr>
-          <a:xfrm>
-            <a:off x="640080" y="2926080"/>
-            <a:ext cx="10881360" cy="1097280"/>
-          </a:xfrm>
-          <a:prstGeom prst="roundRect">
-            <a:avLst>
-              <a:gd name="adj" fmla="val 5000"/>
-            </a:avLst>
-          </a:prstGeom>
-          <a:solidFill>
-            <a:srgbClr val="FFFFFF"/>
-          </a:solidFill>
-          <a:ln w="12700">
-            <a:solidFill>
-              <a:srgbClr val="E4DCCB"/>
-            </a:solidFill>
-            <a:prstDash val="solid"/>
-          </a:ln>
-        </p:spPr>
-      </p:sp>
-      <p:sp>
-        <p:nvSpPr>
-          <p:cNvPr id="10" name="Shape 8"/>
-          <p:cNvSpPr/>
-          <p:nvPr/>
-        </p:nvSpPr>
-        <p:spPr>
-          <a:xfrm>
-            <a:off x="640080" y="2926080"/>
-            <a:ext cx="54864" cy="1097280"/>
-          </a:xfrm>
-          <a:prstGeom prst="rect">
-            <a:avLst/>
-          </a:prstGeom>
-          <a:solidFill>
-            <a:srgbClr val="9A4C1F"/>
-          </a:solidFill>
-          <a:ln/>
-        </p:spPr>
-      </p:sp>
-      <p:sp>
-        <p:nvSpPr>
-          <p:cNvPr id="11" name="Text 9"/>
-          <p:cNvSpPr/>
-          <p:nvPr/>
-        </p:nvSpPr>
-        <p:spPr>
-          <a:xfrm>
-            <a:off x="914400" y="3035808"/>
-            <a:ext cx="10332720" cy="365760"/>
-          </a:xfrm>
-          <a:prstGeom prst="rect">
-            <a:avLst/>
-          </a:prstGeom>
-          <a:noFill/>
-          <a:ln/>
-        </p:spPr>
-        <p:txBody>
-          <a:bodyPr wrap="square" rtlCol="0" anchor="ctr"/>
-          <a:lstStyle/>
-          <a:p>
-            <a:pPr indent="0" marL="0">
-              <a:buNone/>
-            </a:pPr>
-            <a:r>
-              <a:rPr lang="en-US" sz="1400" b="1" dirty="0">
-                <a:solidFill>
-                  <a:srgbClr val="1B1F3B"/>
-                </a:solidFill>
-                <a:latin typeface="Segoe UI" pitchFamily="34" charset="0"/>
-                <a:ea typeface="Segoe UI" pitchFamily="34" charset="-122"/>
-                <a:cs typeface="Segoe UI" pitchFamily="34" charset="-120"/>
-              </a:rPr>
-              <a:t>Audit complet du portail client</a:t>
-            </a:r>
-            <a:endParaRPr lang="en-US" sz="1400" dirty="0"/>
-          </a:p>
-        </p:txBody>
-      </p:sp>
-      <p:sp>
-        <p:nvSpPr>
-          <p:cNvPr id="12" name="Text 10"/>
-          <p:cNvSpPr/>
-          <p:nvPr/>
-        </p:nvSpPr>
-        <p:spPr>
-          <a:xfrm>
-            <a:off x="914400" y="3383280"/>
-            <a:ext cx="10332720" cy="594360"/>
-          </a:xfrm>
-          <a:prstGeom prst="rect">
-            <a:avLst/>
-          </a:prstGeom>
-          <a:noFill/>
-          <a:ln/>
-        </p:spPr>
-        <p:txBody>
-          <a:bodyPr wrap="square" rtlCol="0" anchor="ctr"/>
-          <a:lstStyle/>
-          <a:p>
-            <a:pPr indent="0" marL="0">
-              <a:lnSpc>
-                <a:spcPts val="1400"/>
-              </a:lnSpc>
-              <a:buNone/>
-            </a:pPr>
-            <a:r>
-              <a:rPr lang="en-US" sz="1100" dirty="0">
-                <a:solidFill>
-                  <a:srgbClr val="8A7C68"/>
-                </a:solidFill>
-                <a:latin typeface="Segoe UI" pitchFamily="34" charset="0"/>
-                <a:ea typeface="Segoe UI" pitchFamily="34" charset="-122"/>
-                <a:cs typeface="Segoe UI" pitchFamily="34" charset="-120"/>
-              </a:rPr>
-              <a:t>Plusieurs routes (connexion client, devis/tâches/notes du portail, création de factures) lisaient encore l'ancien fichier JSON local et ne trouvaient plus aucune donnée récente depuis la migration Supabase des devis — toutes corrigées.</a:t>
-            </a:r>
-            <a:endParaRPr lang="en-US" sz="1100" dirty="0"/>
-          </a:p>
-        </p:txBody>
-      </p:sp>
-      <p:sp>
-        <p:nvSpPr>
-          <p:cNvPr id="13" name="Shape 11"/>
-          <p:cNvSpPr/>
-          <p:nvPr/>
-        </p:nvSpPr>
-        <p:spPr>
-          <a:xfrm>
-            <a:off x="640080" y="4160520"/>
-            <a:ext cx="10881360" cy="1097280"/>
-          </a:xfrm>
-          <a:prstGeom prst="roundRect">
-            <a:avLst>
-              <a:gd name="adj" fmla="val 5000"/>
-            </a:avLst>
-          </a:prstGeom>
-          <a:solidFill>
-            <a:srgbClr val="FFFFFF"/>
-          </a:solidFill>
-          <a:ln w="12700">
-            <a:solidFill>
-              <a:srgbClr val="E4DCCB"/>
-            </a:solidFill>
-            <a:prstDash val="solid"/>
-          </a:ln>
-        </p:spPr>
-      </p:sp>
-      <p:sp>
-        <p:nvSpPr>
-          <p:cNvPr id="14" name="Shape 12"/>
-          <p:cNvSpPr/>
-          <p:nvPr/>
-        </p:nvSpPr>
-        <p:spPr>
-          <a:xfrm>
-            <a:off x="640080" y="4160520"/>
-            <a:ext cx="54864" cy="1097280"/>
-          </a:xfrm>
-          <a:prstGeom prst="rect">
-            <a:avLst/>
-          </a:prstGeom>
-          <a:solidFill>
-            <a:srgbClr val="9A4C1F"/>
-          </a:solidFill>
-          <a:ln/>
-        </p:spPr>
-      </p:sp>
-      <p:sp>
-        <p:nvSpPr>
-          <p:cNvPr id="15" name="Text 13"/>
-          <p:cNvSpPr/>
-          <p:nvPr/>
-        </p:nvSpPr>
-        <p:spPr>
-          <a:xfrm>
-            <a:off x="914400" y="4270248"/>
-            <a:ext cx="10332720" cy="365760"/>
-          </a:xfrm>
-          <a:prstGeom prst="rect">
-            <a:avLst/>
-          </a:prstGeom>
-          <a:noFill/>
-          <a:ln/>
-        </p:spPr>
-        <p:txBody>
-          <a:bodyPr wrap="square" rtlCol="0" anchor="ctr"/>
-          <a:lstStyle/>
-          <a:p>
-            <a:pPr indent="0" marL="0">
-              <a:buNone/>
-            </a:pPr>
-            <a:r>
-              <a:rPr lang="en-US" sz="1400" b="1" dirty="0">
-                <a:solidFill>
-                  <a:srgbClr val="1B1F3B"/>
-                </a:solidFill>
-                <a:latin typeface="Segoe UI" pitchFamily="34" charset="0"/>
-                <a:ea typeface="Segoe UI" pitchFamily="34" charset="-122"/>
-                <a:cs typeface="Segoe UI" pitchFamily="34" charset="-120"/>
-              </a:rPr>
-              <a:t>Suivi du temps par ouvrage</a:t>
-            </a:r>
-            <a:endParaRPr lang="en-US" sz="1400" dirty="0"/>
-          </a:p>
-        </p:txBody>
-      </p:sp>
-      <p:sp>
-        <p:nvSpPr>
-          <p:cNvPr id="16" name="Text 14"/>
-          <p:cNvSpPr/>
-          <p:nvPr/>
-        </p:nvSpPr>
-        <p:spPr>
-          <a:xfrm>
-            <a:off x="914400" y="4617720"/>
-            <a:ext cx="10332720" cy="594360"/>
-          </a:xfrm>
-          <a:prstGeom prst="rect">
-            <a:avLst/>
-          </a:prstGeom>
-          <a:noFill/>
-          <a:ln/>
-        </p:spPr>
-        <p:txBody>
-          <a:bodyPr wrap="square" rtlCol="0" anchor="ctr"/>
-          <a:lstStyle/>
-          <a:p>
-            <a:pPr indent="0" marL="0">
-              <a:lnSpc>
-                <a:spcPts val="1400"/>
-              </a:lnSpc>
-              <a:buNone/>
-            </a:pPr>
-            <a:r>
-              <a:rPr lang="en-US" sz="1100" dirty="0">
-                <a:solidFill>
-                  <a:srgbClr val="8A7C68"/>
-                </a:solidFill>
-                <a:latin typeface="Segoe UI" pitchFamily="34" charset="0"/>
-                <a:ea typeface="Segoe UI" pitchFamily="34" charset="-122"/>
-                <a:cs typeface="Segoe UI" pitchFamily="34" charset="-120"/>
-              </a:rPr>
-              <a:t>Boutons Démarrer / Pause / Reprendre / Terminer par tâche, avec calcul automatique du temps consommé et alerte en cas de dépassement du temps prévu.</a:t>
-            </a:r>
-            <a:endParaRPr lang="en-US" sz="1100" dirty="0"/>
-          </a:p>
-        </p:txBody>
-      </p:sp>
-      <p:sp>
-        <p:nvSpPr>
-          <p:cNvPr id="17" name="Text 15"/>
+          <p:cNvPr id="9" name="Text 7"/>
           <p:cNvSpPr/>
           <p:nvPr/>
         </p:nvSpPr>
@@ -13628,7 +13550,7 @@
       </p:sp>
       <p:sp>
         <p:nvSpPr>
-          <p:cNvPr id="18" name="Text 16"/>
+          <p:cNvPr id="10" name="Text 8"/>
           <p:cNvSpPr/>
           <p:nvPr/>
         </p:nvSpPr>
@@ -13791,7 +13713,7 @@
                 <a:ea typeface="Georgia" pitchFamily="34" charset="-122"/>
                 <a:cs typeface="Georgia" pitchFamily="34" charset="-120"/>
               </a:rPr>
-              <a:t>Accueil &amp; stabilité</a:t>
+              <a:t>Signature &amp; portails</a:t>
             </a:r>
             <a:endParaRPr lang="en-US" sz="2400" dirty="0"/>
           </a:p>
@@ -13877,7 +13799,7 @@
                 <a:ea typeface="Segoe UI" pitchFamily="34" charset="-122"/>
                 <a:cs typeface="Segoe UI" pitchFamily="34" charset="-120"/>
               </a:rPr>
-              <a:t>Reconnexion automatique de session</a:t>
+              <a:t>Signature client branchée sur Supabase</a:t>
             </a:r>
             <a:endParaRPr lang="en-US" sz="1400" dirty="0"/>
           </a:p>
@@ -13919,7 +13841,7 @@
                 <a:ea typeface="Segoe UI" pitchFamily="34" charset="-122"/>
                 <a:cs typeface="Segoe UI" pitchFamily="34" charset="-120"/>
               </a:rPr>
-              <a:t>Une session expirée (~1h) provoquait des échecs silencieux à l'enregistrement (profil, IBAN, devis) sans reconnexion automatique ; la détection couvre désormais tous les cas d'expiration.</a:t>
+              <a:t>Le client qui signe un devis n'a pas de session Kôji : une clé technique dédiée (service_role) permet de retrouver et mettre à jour son devis directement dans la base partagée.</a:t>
             </a:r>
             <a:endParaRPr lang="en-US" sz="1100" dirty="0"/>
           </a:p>
@@ -14005,7 +13927,7 @@
                 <a:ea typeface="Segoe UI" pitchFamily="34" charset="-122"/>
                 <a:cs typeface="Segoe UI" pitchFamily="34" charset="-120"/>
               </a:rPr>
-              <a:t>Corrections de plantages ponctuels</a:t>
+              <a:t>Audit complet du portail client</a:t>
             </a:r>
             <a:endParaRPr lang="en-US" sz="1400" dirty="0"/>
           </a:p>
@@ -14047,7 +13969,7 @@
                 <a:ea typeface="Segoe UI" pitchFamily="34" charset="-122"/>
                 <a:cs typeface="Segoe UI" pitchFamily="34" charset="-120"/>
               </a:rPr>
-              <a:t>Plusieurs erreurs bloquantes corrigées au fil des tests (références de code manquantes, composants mal placés).</a:t>
+              <a:t>Plusieurs routes (connexion client, devis/tâches/notes du portail, création de factures) lisaient encore l'ancien fichier JSON local et ne trouvaient plus aucune donnée récente depuis la migration Supabase des devis — toutes corrigées.</a:t>
             </a:r>
             <a:endParaRPr lang="en-US" sz="1100" dirty="0"/>
           </a:p>
@@ -14055,7 +13977,135 @@
       </p:sp>
       <p:sp>
         <p:nvSpPr>
-          <p:cNvPr id="13" name="Text 11"/>
+          <p:cNvPr id="13" name="Shape 11"/>
+          <p:cNvSpPr/>
+          <p:nvPr/>
+        </p:nvSpPr>
+        <p:spPr>
+          <a:xfrm>
+            <a:off x="640080" y="4160520"/>
+            <a:ext cx="10881360" cy="1097280"/>
+          </a:xfrm>
+          <a:prstGeom prst="roundRect">
+            <a:avLst>
+              <a:gd name="adj" fmla="val 5000"/>
+            </a:avLst>
+          </a:prstGeom>
+          <a:solidFill>
+            <a:srgbClr val="FFFFFF"/>
+          </a:solidFill>
+          <a:ln w="12700">
+            <a:solidFill>
+              <a:srgbClr val="E4DCCB"/>
+            </a:solidFill>
+            <a:prstDash val="solid"/>
+          </a:ln>
+        </p:spPr>
+      </p:sp>
+      <p:sp>
+        <p:nvSpPr>
+          <p:cNvPr id="14" name="Shape 12"/>
+          <p:cNvSpPr/>
+          <p:nvPr/>
+        </p:nvSpPr>
+        <p:spPr>
+          <a:xfrm>
+            <a:off x="640080" y="4160520"/>
+            <a:ext cx="54864" cy="1097280"/>
+          </a:xfrm>
+          <a:prstGeom prst="rect">
+            <a:avLst/>
+          </a:prstGeom>
+          <a:solidFill>
+            <a:srgbClr val="9A4C1F"/>
+          </a:solidFill>
+          <a:ln/>
+        </p:spPr>
+      </p:sp>
+      <p:sp>
+        <p:nvSpPr>
+          <p:cNvPr id="15" name="Text 13"/>
+          <p:cNvSpPr/>
+          <p:nvPr/>
+        </p:nvSpPr>
+        <p:spPr>
+          <a:xfrm>
+            <a:off x="914400" y="4270248"/>
+            <a:ext cx="10332720" cy="365760"/>
+          </a:xfrm>
+          <a:prstGeom prst="rect">
+            <a:avLst/>
+          </a:prstGeom>
+          <a:noFill/>
+          <a:ln/>
+        </p:spPr>
+        <p:txBody>
+          <a:bodyPr wrap="square" rtlCol="0" anchor="ctr"/>
+          <a:lstStyle/>
+          <a:p>
+            <a:pPr indent="0" marL="0">
+              <a:buNone/>
+            </a:pPr>
+            <a:r>
+              <a:rPr lang="en-US" sz="1400" b="1" dirty="0">
+                <a:solidFill>
+                  <a:srgbClr val="1B1F3B"/>
+                </a:solidFill>
+                <a:latin typeface="Segoe UI" pitchFamily="34" charset="0"/>
+                <a:ea typeface="Segoe UI" pitchFamily="34" charset="-122"/>
+                <a:cs typeface="Segoe UI" pitchFamily="34" charset="-120"/>
+              </a:rPr>
+              <a:t>Suivi du temps par ouvrage</a:t>
+            </a:r>
+            <a:endParaRPr lang="en-US" sz="1400" dirty="0"/>
+          </a:p>
+        </p:txBody>
+      </p:sp>
+      <p:sp>
+        <p:nvSpPr>
+          <p:cNvPr id="16" name="Text 14"/>
+          <p:cNvSpPr/>
+          <p:nvPr/>
+        </p:nvSpPr>
+        <p:spPr>
+          <a:xfrm>
+            <a:off x="914400" y="4617720"/>
+            <a:ext cx="10332720" cy="594360"/>
+          </a:xfrm>
+          <a:prstGeom prst="rect">
+            <a:avLst/>
+          </a:prstGeom>
+          <a:noFill/>
+          <a:ln/>
+        </p:spPr>
+        <p:txBody>
+          <a:bodyPr wrap="square" rtlCol="0" anchor="ctr"/>
+          <a:lstStyle/>
+          <a:p>
+            <a:pPr indent="0" marL="0">
+              <a:lnSpc>
+                <a:spcPts val="1400"/>
+              </a:lnSpc>
+              <a:buNone/>
+            </a:pPr>
+            <a:r>
+              <a:rPr lang="en-US" sz="1100" dirty="0">
+                <a:solidFill>
+                  <a:srgbClr val="8A7C68"/>
+                </a:solidFill>
+                <a:latin typeface="Segoe UI" pitchFamily="34" charset="0"/>
+                <a:ea typeface="Segoe UI" pitchFamily="34" charset="-122"/>
+                <a:cs typeface="Segoe UI" pitchFamily="34" charset="-120"/>
+              </a:rPr>
+              <a:t>Boutons Démarrer / Pause / Reprendre / Terminer par tâche, avec calcul automatique du temps consommé et alerte en cas de dépassement du temps prévu.</a:t>
+            </a:r>
+            <a:endParaRPr lang="en-US" sz="1100" dirty="0"/>
+          </a:p>
+        </p:txBody>
+      </p:sp>
+      <p:sp>
+        <p:nvSpPr>
+          <p:cNvPr id="17" name="Text 15"/>
           <p:cNvSpPr/>
           <p:nvPr/>
         </p:nvSpPr>
@@ -14094,7 +14144,7 @@
       </p:sp>
       <p:sp>
         <p:nvSpPr>
-          <p:cNvPr id="14" name="Text 12"/>
+          <p:cNvPr id="18" name="Text 16"/>
           <p:cNvSpPr/>
           <p:nvPr/>
         </p:nvSpPr>
@@ -14257,7 +14307,7 @@
                 <a:ea typeface="Georgia" pitchFamily="34" charset="-122"/>
                 <a:cs typeface="Georgia" pitchFamily="34" charset="-120"/>
               </a:rPr>
-              <a:t>Rapports d'intervention</a:t>
+              <a:t>Accueil &amp; stabilité</a:t>
             </a:r>
             <a:endParaRPr lang="en-US" sz="2400" dirty="0"/>
           </a:p>
@@ -14343,7 +14393,7 @@
                 <a:ea typeface="Segoe UI" pitchFamily="34" charset="-122"/>
                 <a:cs typeface="Segoe UI" pitchFamily="34" charset="-120"/>
               </a:rPr>
-              <a:t>Nouvelle entité 'interventions'</a:t>
+              <a:t>Reconnexion automatique de session</a:t>
             </a:r>
             <a:endParaRPr lang="en-US" sz="1400" dirty="0"/>
           </a:p>
@@ -14385,7 +14435,7 @@
                 <a:ea typeface="Segoe UI" pitchFamily="34" charset="-122"/>
                 <a:cs typeface="Segoe UI" pitchFamily="34" charset="-120"/>
               </a:rPr>
-              <a:t>API dédiée (creation, consultation, suppression) pour stocker les rapports d'intervention, avec historique des actions comme pour les autres modules.</a:t>
+              <a:t>Une session expirée (~1h) provoquait des échecs silencieux à l'enregistrement (profil, IBAN, devis) sans reconnexion automatique ; la détection couvre désormais tous les cas d'expiration.</a:t>
             </a:r>
             <a:endParaRPr lang="en-US" sz="1100" dirty="0"/>
           </a:p>
@@ -14471,7 +14521,7 @@
                 <a:ea typeface="Segoe UI" pitchFamily="34" charset="-122"/>
                 <a:cs typeface="Segoe UI" pitchFamily="34" charset="-120"/>
               </a:rPr>
-              <a:t>Génération PDF du rapport d'intervention</a:t>
+              <a:t>Corrections de plantages ponctuels</a:t>
             </a:r>
             <a:endParaRPr lang="en-US" sz="1400" dirty="0"/>
           </a:p>
@@ -14513,7 +14563,7 @@
                 <a:ea typeface="Segoe UI" pitchFamily="34" charset="-122"/>
                 <a:cs typeface="Segoe UI" pitchFamily="34" charset="-120"/>
               </a:rPr>
-              <a:t>Chaque rapport peut être téléchargé en PDF avec le logo de l'entreprise en en-tête, dans une mise en page reprenant celle des rapports d'intervention papier existants.</a:t>
+              <a:t>Plusieurs erreurs bloquantes corrigées au fil des tests (références de code manquantes, composants mal placés).</a:t>
             </a:r>
             <a:endParaRPr lang="en-US" sz="1100" dirty="0"/>
           </a:p>
@@ -14521,263 +14571,7 @@
       </p:sp>
       <p:sp>
         <p:nvSpPr>
-          <p:cNvPr id="13" name="Shape 11"/>
-          <p:cNvSpPr/>
-          <p:nvPr/>
-        </p:nvSpPr>
-        <p:spPr>
-          <a:xfrm>
-            <a:off x="640080" y="4160520"/>
-            <a:ext cx="10881360" cy="1097280"/>
-          </a:xfrm>
-          <a:prstGeom prst="roundRect">
-            <a:avLst>
-              <a:gd name="adj" fmla="val 5000"/>
-            </a:avLst>
-          </a:prstGeom>
-          <a:solidFill>
-            <a:srgbClr val="FFFFFF"/>
-          </a:solidFill>
-          <a:ln w="12700">
-            <a:solidFill>
-              <a:srgbClr val="E4DCCB"/>
-            </a:solidFill>
-            <a:prstDash val="solid"/>
-          </a:ln>
-        </p:spPr>
-      </p:sp>
-      <p:sp>
-        <p:nvSpPr>
-          <p:cNvPr id="14" name="Shape 12"/>
-          <p:cNvSpPr/>
-          <p:nvPr/>
-        </p:nvSpPr>
-        <p:spPr>
-          <a:xfrm>
-            <a:off x="640080" y="4160520"/>
-            <a:ext cx="54864" cy="1097280"/>
-          </a:xfrm>
-          <a:prstGeom prst="rect">
-            <a:avLst/>
-          </a:prstGeom>
-          <a:solidFill>
-            <a:srgbClr val="9A4C1F"/>
-          </a:solidFill>
-          <a:ln/>
-        </p:spPr>
-      </p:sp>
-      <p:sp>
-        <p:nvSpPr>
-          <p:cNvPr id="15" name="Text 13"/>
-          <p:cNvSpPr/>
-          <p:nvPr/>
-        </p:nvSpPr>
-        <p:spPr>
-          <a:xfrm>
-            <a:off x="914400" y="4270248"/>
-            <a:ext cx="10332720" cy="365760"/>
-          </a:xfrm>
-          <a:prstGeom prst="rect">
-            <a:avLst/>
-          </a:prstGeom>
-          <a:noFill/>
-          <a:ln/>
-        </p:spPr>
-        <p:txBody>
-          <a:bodyPr wrap="square" rtlCol="0" anchor="ctr"/>
-          <a:lstStyle/>
-          <a:p>
-            <a:pPr indent="0" marL="0">
-              <a:buNone/>
-            </a:pPr>
-            <a:r>
-              <a:rPr lang="en-US" sz="1400" b="1" dirty="0">
-                <a:solidFill>
-                  <a:srgbClr val="1B1F3B"/>
-                </a:solidFill>
-                <a:latin typeface="Segoe UI" pitchFamily="34" charset="0"/>
-                <a:ea typeface="Segoe UI" pitchFamily="34" charset="-122"/>
-                <a:cs typeface="Segoe UI" pitchFamily="34" charset="-120"/>
-              </a:rPr>
-              <a:t>Facturation directe d'une intervention</a:t>
-            </a:r>
-            <a:endParaRPr lang="en-US" sz="1400" dirty="0"/>
-          </a:p>
-        </p:txBody>
-      </p:sp>
-      <p:sp>
-        <p:nvSpPr>
-          <p:cNvPr id="16" name="Text 14"/>
-          <p:cNvSpPr/>
-          <p:nvPr/>
-        </p:nvSpPr>
-        <p:spPr>
-          <a:xfrm>
-            <a:off x="914400" y="4617720"/>
-            <a:ext cx="10332720" cy="594360"/>
-          </a:xfrm>
-          <a:prstGeom prst="rect">
-            <a:avLst/>
-          </a:prstGeom>
-          <a:noFill/>
-          <a:ln/>
-        </p:spPr>
-        <p:txBody>
-          <a:bodyPr wrap="square" rtlCol="0" anchor="ctr"/>
-          <a:lstStyle/>
-          <a:p>
-            <a:pPr indent="0" marL="0">
-              <a:lnSpc>
-                <a:spcPts val="1400"/>
-              </a:lnSpc>
-              <a:buNone/>
-            </a:pPr>
-            <a:r>
-              <a:rPr lang="en-US" sz="1100" dirty="0">
-                <a:solidFill>
-                  <a:srgbClr val="8A7C68"/>
-                </a:solidFill>
-                <a:latin typeface="Segoe UI" pitchFamily="34" charset="0"/>
-                <a:ea typeface="Segoe UI" pitchFamily="34" charset="-122"/>
-                <a:cs typeface="Segoe UI" pitchFamily="34" charset="-120"/>
-              </a:rPr>
-              <a:t>Une facture peut être créée directement à partir d'une intervention (sans passer par un devis signé), avec un montant saisi manuellement ; l'intervention passe alors automatiquement au statut 'Facturée'.</a:t>
-            </a:r>
-            <a:endParaRPr lang="en-US" sz="1100" dirty="0"/>
-          </a:p>
-        </p:txBody>
-      </p:sp>
-      <p:sp>
-        <p:nvSpPr>
-          <p:cNvPr id="17" name="Shape 15"/>
-          <p:cNvSpPr/>
-          <p:nvPr/>
-        </p:nvSpPr>
-        <p:spPr>
-          <a:xfrm>
-            <a:off x="640080" y="5394960"/>
-            <a:ext cx="10881360" cy="1097280"/>
-          </a:xfrm>
-          <a:prstGeom prst="roundRect">
-            <a:avLst>
-              <a:gd name="adj" fmla="val 5000"/>
-            </a:avLst>
-          </a:prstGeom>
-          <a:solidFill>
-            <a:srgbClr val="FFFFFF"/>
-          </a:solidFill>
-          <a:ln w="12700">
-            <a:solidFill>
-              <a:srgbClr val="E4DCCB"/>
-            </a:solidFill>
-            <a:prstDash val="solid"/>
-          </a:ln>
-        </p:spPr>
-      </p:sp>
-      <p:sp>
-        <p:nvSpPr>
-          <p:cNvPr id="18" name="Shape 16"/>
-          <p:cNvSpPr/>
-          <p:nvPr/>
-        </p:nvSpPr>
-        <p:spPr>
-          <a:xfrm>
-            <a:off x="640080" y="5394960"/>
-            <a:ext cx="54864" cy="1097280"/>
-          </a:xfrm>
-          <a:prstGeom prst="rect">
-            <a:avLst/>
-          </a:prstGeom>
-          <a:solidFill>
-            <a:srgbClr val="9A4C1F"/>
-          </a:solidFill>
-          <a:ln/>
-        </p:spPr>
-      </p:sp>
-      <p:sp>
-        <p:nvSpPr>
-          <p:cNvPr id="19" name="Text 17"/>
-          <p:cNvSpPr/>
-          <p:nvPr/>
-        </p:nvSpPr>
-        <p:spPr>
-          <a:xfrm>
-            <a:off x="914400" y="5504688"/>
-            <a:ext cx="10332720" cy="365760"/>
-          </a:xfrm>
-          <a:prstGeom prst="rect">
-            <a:avLst/>
-          </a:prstGeom>
-          <a:noFill/>
-          <a:ln/>
-        </p:spPr>
-        <p:txBody>
-          <a:bodyPr wrap="square" rtlCol="0" anchor="ctr"/>
-          <a:lstStyle/>
-          <a:p>
-            <a:pPr indent="0" marL="0">
-              <a:buNone/>
-            </a:pPr>
-            <a:r>
-              <a:rPr lang="en-US" sz="1400" b="1" dirty="0">
-                <a:solidFill>
-                  <a:srgbClr val="1B1F3B"/>
-                </a:solidFill>
-                <a:latin typeface="Segoe UI" pitchFamily="34" charset="0"/>
-                <a:ea typeface="Segoe UI" pitchFamily="34" charset="-122"/>
-                <a:cs typeface="Segoe UI" pitchFamily="34" charset="-120"/>
-              </a:rPr>
-              <a:t>En-tête d'entreprise propre à chaque rapport</a:t>
-            </a:r>
-            <a:endParaRPr lang="en-US" sz="1400" dirty="0"/>
-          </a:p>
-        </p:txBody>
-      </p:sp>
-      <p:sp>
-        <p:nvSpPr>
-          <p:cNvPr id="20" name="Text 18"/>
-          <p:cNvSpPr/>
-          <p:nvPr/>
-        </p:nvSpPr>
-        <p:spPr>
-          <a:xfrm>
-            <a:off x="914400" y="5852160"/>
-            <a:ext cx="10332720" cy="594360"/>
-          </a:xfrm>
-          <a:prstGeom prst="rect">
-            <a:avLst/>
-          </a:prstGeom>
-          <a:noFill/>
-          <a:ln/>
-        </p:spPr>
-        <p:txBody>
-          <a:bodyPr wrap="square" rtlCol="0" anchor="ctr"/>
-          <a:lstStyle/>
-          <a:p>
-            <a:pPr indent="0" marL="0">
-              <a:lnSpc>
-                <a:spcPts val="1400"/>
-              </a:lnSpc>
-              <a:buNone/>
-            </a:pPr>
-            <a:r>
-              <a:rPr lang="en-US" sz="1100" dirty="0">
-                <a:solidFill>
-                  <a:srgbClr val="8A7C68"/>
-                </a:solidFill>
-                <a:latin typeface="Segoe UI" pitchFamily="34" charset="0"/>
-                <a:ea typeface="Segoe UI" pitchFamily="34" charset="-122"/>
-                <a:cs typeface="Segoe UI" pitchFamily="34" charset="-120"/>
-              </a:rPr>
-              <a:t>Chaque intervention conserve son propre instantané des informations d'entreprise (comme les devis), pour que le PDF reste fidèle même si le profil change ensuite.</a:t>
-            </a:r>
-            <a:endParaRPr lang="en-US" sz="1100" dirty="0"/>
-          </a:p>
-        </p:txBody>
-      </p:sp>
-      <p:sp>
-        <p:nvSpPr>
-          <p:cNvPr id="21" name="Text 19"/>
+          <p:cNvPr id="13" name="Text 11"/>
           <p:cNvSpPr/>
           <p:nvPr/>
         </p:nvSpPr>
@@ -14816,7 +14610,7 @@
       </p:sp>
       <p:sp>
         <p:nvSpPr>
-          <p:cNvPr id="22" name="Text 20"/>
+          <p:cNvPr id="14" name="Text 12"/>
           <p:cNvSpPr/>
           <p:nvPr/>
         </p:nvSpPr>
@@ -14979,7 +14773,7 @@
                 <a:ea typeface="Georgia" pitchFamily="34" charset="-122"/>
                 <a:cs typeface="Georgia" pitchFamily="34" charset="-120"/>
               </a:rPr>
-              <a:t>Rapports d'intervention (suite)</a:t>
+              <a:t>Rapports d'intervention</a:t>
             </a:r>
             <a:endParaRPr lang="en-US" sz="2400" dirty="0"/>
           </a:p>
@@ -15065,7 +14859,7 @@
                 <a:ea typeface="Segoe UI" pitchFamily="34" charset="-122"/>
                 <a:cs typeface="Segoe UI" pitchFamily="34" charset="-120"/>
               </a:rPr>
-              <a:t>Statut de suivi automatique (À faire / En cours / Terminée)</a:t>
+              <a:t>Nouvelle entité 'interventions'</a:t>
             </a:r>
             <a:endParaRPr lang="en-US" sz="1400" dirty="0"/>
           </a:p>
@@ -15107,7 +14901,7 @@
                 <a:ea typeface="Segoe UI" pitchFamily="34" charset="-122"/>
                 <a:cs typeface="Segoe UI" pitchFamily="34" charset="-120"/>
               </a:rPr>
-              <a:t>Le statut d'une intervention évolue automatiquement selon sa date (À faire tant que la date n'est pas arrivée, En cours le jour J), jusqu'à être marquée Terminée manuellement puis, si besoin, archivée.</a:t>
+              <a:t>API dédiée (creation, consultation, suppression) pour stocker les rapports d'intervention, avec historique des actions comme pour les autres modules.</a:t>
             </a:r>
             <a:endParaRPr lang="en-US" sz="1100" dirty="0"/>
           </a:p>
@@ -15193,7 +14987,7 @@
                 <a:ea typeface="Segoe UI" pitchFamily="34" charset="-122"/>
                 <a:cs typeface="Segoe UI" pitchFamily="34" charset="-120"/>
               </a:rPr>
-              <a:t>Numéro de rapport automatique</a:t>
+              <a:t>Génération PDF du rapport d'intervention</a:t>
             </a:r>
             <a:endParaRPr lang="en-US" sz="1400" dirty="0"/>
           </a:p>
@@ -15235,7 +15029,7 @@
                 <a:ea typeface="Segoe UI" pitchFamily="34" charset="-122"/>
                 <a:cs typeface="Segoe UI" pitchFamily="34" charset="-120"/>
               </a:rPr>
-              <a:t>Chaque rapport reçoit un numéro unique généré automatiquement (ex. INT-2026-0003), affiché en en-tête avec la date de création, sur le même principe que la numérotation des devis et factures.</a:t>
+              <a:t>Chaque rapport peut être téléchargé en PDF avec le logo de l'entreprise en en-tête, dans une mise en page reprenant celle des rapports d'intervention papier existants.</a:t>
             </a:r>
             <a:endParaRPr lang="en-US" sz="1100" dirty="0"/>
           </a:p>
@@ -15243,7 +15037,263 @@
       </p:sp>
       <p:sp>
         <p:nvSpPr>
-          <p:cNvPr id="13" name="Text 11"/>
+          <p:cNvPr id="13" name="Shape 11"/>
+          <p:cNvSpPr/>
+          <p:nvPr/>
+        </p:nvSpPr>
+        <p:spPr>
+          <a:xfrm>
+            <a:off x="640080" y="4160520"/>
+            <a:ext cx="10881360" cy="1097280"/>
+          </a:xfrm>
+          <a:prstGeom prst="roundRect">
+            <a:avLst>
+              <a:gd name="adj" fmla="val 5000"/>
+            </a:avLst>
+          </a:prstGeom>
+          <a:solidFill>
+            <a:srgbClr val="FFFFFF"/>
+          </a:solidFill>
+          <a:ln w="12700">
+            <a:solidFill>
+              <a:srgbClr val="E4DCCB"/>
+            </a:solidFill>
+            <a:prstDash val="solid"/>
+          </a:ln>
+        </p:spPr>
+      </p:sp>
+      <p:sp>
+        <p:nvSpPr>
+          <p:cNvPr id="14" name="Shape 12"/>
+          <p:cNvSpPr/>
+          <p:nvPr/>
+        </p:nvSpPr>
+        <p:spPr>
+          <a:xfrm>
+            <a:off x="640080" y="4160520"/>
+            <a:ext cx="54864" cy="1097280"/>
+          </a:xfrm>
+          <a:prstGeom prst="rect">
+            <a:avLst/>
+          </a:prstGeom>
+          <a:solidFill>
+            <a:srgbClr val="9A4C1F"/>
+          </a:solidFill>
+          <a:ln/>
+        </p:spPr>
+      </p:sp>
+      <p:sp>
+        <p:nvSpPr>
+          <p:cNvPr id="15" name="Text 13"/>
+          <p:cNvSpPr/>
+          <p:nvPr/>
+        </p:nvSpPr>
+        <p:spPr>
+          <a:xfrm>
+            <a:off x="914400" y="4270248"/>
+            <a:ext cx="10332720" cy="365760"/>
+          </a:xfrm>
+          <a:prstGeom prst="rect">
+            <a:avLst/>
+          </a:prstGeom>
+          <a:noFill/>
+          <a:ln/>
+        </p:spPr>
+        <p:txBody>
+          <a:bodyPr wrap="square" rtlCol="0" anchor="ctr"/>
+          <a:lstStyle/>
+          <a:p>
+            <a:pPr indent="0" marL="0">
+              <a:buNone/>
+            </a:pPr>
+            <a:r>
+              <a:rPr lang="en-US" sz="1400" b="1" dirty="0">
+                <a:solidFill>
+                  <a:srgbClr val="1B1F3B"/>
+                </a:solidFill>
+                <a:latin typeface="Segoe UI" pitchFamily="34" charset="0"/>
+                <a:ea typeface="Segoe UI" pitchFamily="34" charset="-122"/>
+                <a:cs typeface="Segoe UI" pitchFamily="34" charset="-120"/>
+              </a:rPr>
+              <a:t>Facturation directe d'une intervention</a:t>
+            </a:r>
+            <a:endParaRPr lang="en-US" sz="1400" dirty="0"/>
+          </a:p>
+        </p:txBody>
+      </p:sp>
+      <p:sp>
+        <p:nvSpPr>
+          <p:cNvPr id="16" name="Text 14"/>
+          <p:cNvSpPr/>
+          <p:nvPr/>
+        </p:nvSpPr>
+        <p:spPr>
+          <a:xfrm>
+            <a:off x="914400" y="4617720"/>
+            <a:ext cx="10332720" cy="594360"/>
+          </a:xfrm>
+          <a:prstGeom prst="rect">
+            <a:avLst/>
+          </a:prstGeom>
+          <a:noFill/>
+          <a:ln/>
+        </p:spPr>
+        <p:txBody>
+          <a:bodyPr wrap="square" rtlCol="0" anchor="ctr"/>
+          <a:lstStyle/>
+          <a:p>
+            <a:pPr indent="0" marL="0">
+              <a:lnSpc>
+                <a:spcPts val="1400"/>
+              </a:lnSpc>
+              <a:buNone/>
+            </a:pPr>
+            <a:r>
+              <a:rPr lang="en-US" sz="1100" dirty="0">
+                <a:solidFill>
+                  <a:srgbClr val="8A7C68"/>
+                </a:solidFill>
+                <a:latin typeface="Segoe UI" pitchFamily="34" charset="0"/>
+                <a:ea typeface="Segoe UI" pitchFamily="34" charset="-122"/>
+                <a:cs typeface="Segoe UI" pitchFamily="34" charset="-120"/>
+              </a:rPr>
+              <a:t>Une facture peut être créée directement à partir d'une intervention (sans passer par un devis signé), avec un montant saisi manuellement ; l'intervention passe alors automatiquement au statut 'Facturée'.</a:t>
+            </a:r>
+            <a:endParaRPr lang="en-US" sz="1100" dirty="0"/>
+          </a:p>
+        </p:txBody>
+      </p:sp>
+      <p:sp>
+        <p:nvSpPr>
+          <p:cNvPr id="17" name="Shape 15"/>
+          <p:cNvSpPr/>
+          <p:nvPr/>
+        </p:nvSpPr>
+        <p:spPr>
+          <a:xfrm>
+            <a:off x="640080" y="5394960"/>
+            <a:ext cx="10881360" cy="1097280"/>
+          </a:xfrm>
+          <a:prstGeom prst="roundRect">
+            <a:avLst>
+              <a:gd name="adj" fmla="val 5000"/>
+            </a:avLst>
+          </a:prstGeom>
+          <a:solidFill>
+            <a:srgbClr val="FFFFFF"/>
+          </a:solidFill>
+          <a:ln w="12700">
+            <a:solidFill>
+              <a:srgbClr val="E4DCCB"/>
+            </a:solidFill>
+            <a:prstDash val="solid"/>
+          </a:ln>
+        </p:spPr>
+      </p:sp>
+      <p:sp>
+        <p:nvSpPr>
+          <p:cNvPr id="18" name="Shape 16"/>
+          <p:cNvSpPr/>
+          <p:nvPr/>
+        </p:nvSpPr>
+        <p:spPr>
+          <a:xfrm>
+            <a:off x="640080" y="5394960"/>
+            <a:ext cx="54864" cy="1097280"/>
+          </a:xfrm>
+          <a:prstGeom prst="rect">
+            <a:avLst/>
+          </a:prstGeom>
+          <a:solidFill>
+            <a:srgbClr val="9A4C1F"/>
+          </a:solidFill>
+          <a:ln/>
+        </p:spPr>
+      </p:sp>
+      <p:sp>
+        <p:nvSpPr>
+          <p:cNvPr id="19" name="Text 17"/>
+          <p:cNvSpPr/>
+          <p:nvPr/>
+        </p:nvSpPr>
+        <p:spPr>
+          <a:xfrm>
+            <a:off x="914400" y="5504688"/>
+            <a:ext cx="10332720" cy="365760"/>
+          </a:xfrm>
+          <a:prstGeom prst="rect">
+            <a:avLst/>
+          </a:prstGeom>
+          <a:noFill/>
+          <a:ln/>
+        </p:spPr>
+        <p:txBody>
+          <a:bodyPr wrap="square" rtlCol="0" anchor="ctr"/>
+          <a:lstStyle/>
+          <a:p>
+            <a:pPr indent="0" marL="0">
+              <a:buNone/>
+            </a:pPr>
+            <a:r>
+              <a:rPr lang="en-US" sz="1400" b="1" dirty="0">
+                <a:solidFill>
+                  <a:srgbClr val="1B1F3B"/>
+                </a:solidFill>
+                <a:latin typeface="Segoe UI" pitchFamily="34" charset="0"/>
+                <a:ea typeface="Segoe UI" pitchFamily="34" charset="-122"/>
+                <a:cs typeface="Segoe UI" pitchFamily="34" charset="-120"/>
+              </a:rPr>
+              <a:t>En-tête d'entreprise propre à chaque rapport</a:t>
+            </a:r>
+            <a:endParaRPr lang="en-US" sz="1400" dirty="0"/>
+          </a:p>
+        </p:txBody>
+      </p:sp>
+      <p:sp>
+        <p:nvSpPr>
+          <p:cNvPr id="20" name="Text 18"/>
+          <p:cNvSpPr/>
+          <p:nvPr/>
+        </p:nvSpPr>
+        <p:spPr>
+          <a:xfrm>
+            <a:off x="914400" y="5852160"/>
+            <a:ext cx="10332720" cy="594360"/>
+          </a:xfrm>
+          <a:prstGeom prst="rect">
+            <a:avLst/>
+          </a:prstGeom>
+          <a:noFill/>
+          <a:ln/>
+        </p:spPr>
+        <p:txBody>
+          <a:bodyPr wrap="square" rtlCol="0" anchor="ctr"/>
+          <a:lstStyle/>
+          <a:p>
+            <a:pPr indent="0" marL="0">
+              <a:lnSpc>
+                <a:spcPts val="1400"/>
+              </a:lnSpc>
+              <a:buNone/>
+            </a:pPr>
+            <a:r>
+              <a:rPr lang="en-US" sz="1100" dirty="0">
+                <a:solidFill>
+                  <a:srgbClr val="8A7C68"/>
+                </a:solidFill>
+                <a:latin typeface="Segoe UI" pitchFamily="34" charset="0"/>
+                <a:ea typeface="Segoe UI" pitchFamily="34" charset="-122"/>
+                <a:cs typeface="Segoe UI" pitchFamily="34" charset="-120"/>
+              </a:rPr>
+              <a:t>Chaque intervention conserve son propre instantané des informations d'entreprise (comme les devis), pour que le PDF reste fidèle même si le profil change ensuite.</a:t>
+            </a:r>
+            <a:endParaRPr lang="en-US" sz="1100" dirty="0"/>
+          </a:p>
+        </p:txBody>
+      </p:sp>
+      <p:sp>
+        <p:nvSpPr>
+          <p:cNvPr id="21" name="Text 19"/>
           <p:cNvSpPr/>
           <p:nvPr/>
         </p:nvSpPr>
@@ -15282,7 +15332,7 @@
       </p:sp>
       <p:sp>
         <p:nvSpPr>
-          <p:cNvPr id="14" name="Text 12"/>
+          <p:cNvPr id="22" name="Text 20"/>
           <p:cNvSpPr/>
           <p:nvPr/>
         </p:nvSpPr>
@@ -15445,7 +15495,7 @@
                 <a:ea typeface="Georgia" pitchFamily="34" charset="-122"/>
                 <a:cs typeface="Georgia" pitchFamily="34" charset="-120"/>
               </a:rPr>
-              <a:t>Facturation</a:t>
+              <a:t>Rapports d'intervention (suite)</a:t>
             </a:r>
             <a:endParaRPr lang="en-US" sz="2400" dirty="0"/>
           </a:p>
@@ -15531,7 +15581,7 @@
                 <a:ea typeface="Segoe UI" pitchFamily="34" charset="-122"/>
                 <a:cs typeface="Segoe UI" pitchFamily="34" charset="-120"/>
               </a:rPr>
-              <a:t>Export PDF des factures</a:t>
+              <a:t>Statut de suivi automatique (À faire / En cours / Terminée)</a:t>
             </a:r>
             <a:endParaRPr lang="en-US" sz="1400" dirty="0"/>
           </a:p>
@@ -15573,7 +15623,7 @@
                 <a:ea typeface="Segoe UI" pitchFamily="34" charset="-122"/>
                 <a:cs typeface="Segoe UI" pitchFamily="34" charset="-120"/>
               </a:rPr>
-              <a:t>Chaque facture (issue d'un devis signé ou d'une intervention) peut désormais être téléchargée en PDF avec les informations de l'entreprise, du client et du montant — bouton ajouté dans la page Facturation et dans la fiche d'une intervention.</a:t>
+              <a:t>Le statut d'une intervention évolue automatiquement selon sa date (À faire tant que la date n'est pas arrivée, En cours le jour J), jusqu'à être marquée Terminée manuellement puis, si besoin, archivée.</a:t>
             </a:r>
             <a:endParaRPr lang="en-US" sz="1100" dirty="0"/>
           </a:p>
@@ -15581,7 +15631,135 @@
       </p:sp>
       <p:sp>
         <p:nvSpPr>
-          <p:cNvPr id="9" name="Text 7"/>
+          <p:cNvPr id="9" name="Shape 7"/>
+          <p:cNvSpPr/>
+          <p:nvPr/>
+        </p:nvSpPr>
+        <p:spPr>
+          <a:xfrm>
+            <a:off x="640080" y="2926080"/>
+            <a:ext cx="10881360" cy="1097280"/>
+          </a:xfrm>
+          <a:prstGeom prst="roundRect">
+            <a:avLst>
+              <a:gd name="adj" fmla="val 5000"/>
+            </a:avLst>
+          </a:prstGeom>
+          <a:solidFill>
+            <a:srgbClr val="FFFFFF"/>
+          </a:solidFill>
+          <a:ln w="12700">
+            <a:solidFill>
+              <a:srgbClr val="E4DCCB"/>
+            </a:solidFill>
+            <a:prstDash val="solid"/>
+          </a:ln>
+        </p:spPr>
+      </p:sp>
+      <p:sp>
+        <p:nvSpPr>
+          <p:cNvPr id="10" name="Shape 8"/>
+          <p:cNvSpPr/>
+          <p:nvPr/>
+        </p:nvSpPr>
+        <p:spPr>
+          <a:xfrm>
+            <a:off x="640080" y="2926080"/>
+            <a:ext cx="54864" cy="1097280"/>
+          </a:xfrm>
+          <a:prstGeom prst="rect">
+            <a:avLst/>
+          </a:prstGeom>
+          <a:solidFill>
+            <a:srgbClr val="9A4C1F"/>
+          </a:solidFill>
+          <a:ln/>
+        </p:spPr>
+      </p:sp>
+      <p:sp>
+        <p:nvSpPr>
+          <p:cNvPr id="11" name="Text 9"/>
+          <p:cNvSpPr/>
+          <p:nvPr/>
+        </p:nvSpPr>
+        <p:spPr>
+          <a:xfrm>
+            <a:off x="914400" y="3035808"/>
+            <a:ext cx="10332720" cy="365760"/>
+          </a:xfrm>
+          <a:prstGeom prst="rect">
+            <a:avLst/>
+          </a:prstGeom>
+          <a:noFill/>
+          <a:ln/>
+        </p:spPr>
+        <p:txBody>
+          <a:bodyPr wrap="square" rtlCol="0" anchor="ctr"/>
+          <a:lstStyle/>
+          <a:p>
+            <a:pPr indent="0" marL="0">
+              <a:buNone/>
+            </a:pPr>
+            <a:r>
+              <a:rPr lang="en-US" sz="1400" b="1" dirty="0">
+                <a:solidFill>
+                  <a:srgbClr val="1B1F3B"/>
+                </a:solidFill>
+                <a:latin typeface="Segoe UI" pitchFamily="34" charset="0"/>
+                <a:ea typeface="Segoe UI" pitchFamily="34" charset="-122"/>
+                <a:cs typeface="Segoe UI" pitchFamily="34" charset="-120"/>
+              </a:rPr>
+              <a:t>Numéro de rapport automatique</a:t>
+            </a:r>
+            <a:endParaRPr lang="en-US" sz="1400" dirty="0"/>
+          </a:p>
+        </p:txBody>
+      </p:sp>
+      <p:sp>
+        <p:nvSpPr>
+          <p:cNvPr id="12" name="Text 10"/>
+          <p:cNvSpPr/>
+          <p:nvPr/>
+        </p:nvSpPr>
+        <p:spPr>
+          <a:xfrm>
+            <a:off x="914400" y="3383280"/>
+            <a:ext cx="10332720" cy="594360"/>
+          </a:xfrm>
+          <a:prstGeom prst="rect">
+            <a:avLst/>
+          </a:prstGeom>
+          <a:noFill/>
+          <a:ln/>
+        </p:spPr>
+        <p:txBody>
+          <a:bodyPr wrap="square" rtlCol="0" anchor="ctr"/>
+          <a:lstStyle/>
+          <a:p>
+            <a:pPr indent="0" marL="0">
+              <a:lnSpc>
+                <a:spcPts val="1400"/>
+              </a:lnSpc>
+              <a:buNone/>
+            </a:pPr>
+            <a:r>
+              <a:rPr lang="en-US" sz="1100" dirty="0">
+                <a:solidFill>
+                  <a:srgbClr val="8A7C68"/>
+                </a:solidFill>
+                <a:latin typeface="Segoe UI" pitchFamily="34" charset="0"/>
+                <a:ea typeface="Segoe UI" pitchFamily="34" charset="-122"/>
+                <a:cs typeface="Segoe UI" pitchFamily="34" charset="-120"/>
+              </a:rPr>
+              <a:t>Chaque rapport reçoit un numéro unique généré automatiquement (ex. INT-2026-0003), affiché en en-tête avec la date de création, sur le même principe que la numérotation des devis et factures.</a:t>
+            </a:r>
+            <a:endParaRPr lang="en-US" sz="1100" dirty="0"/>
+          </a:p>
+        </p:txBody>
+      </p:sp>
+      <p:sp>
+        <p:nvSpPr>
+          <p:cNvPr id="13" name="Text 11"/>
           <p:cNvSpPr/>
           <p:nvPr/>
         </p:nvSpPr>
@@ -15620,7 +15798,7 @@
       </p:sp>
       <p:sp>
         <p:nvSpPr>
-          <p:cNvPr id="10" name="Text 8"/>
+          <p:cNvPr id="14" name="Text 12"/>
           <p:cNvSpPr/>
           <p:nvPr/>
         </p:nvSpPr>
@@ -16030,7 +16208,7 @@
                 <a:ea typeface="Georgia" pitchFamily="34" charset="-122"/>
                 <a:cs typeface="Georgia" pitchFamily="34" charset="-120"/>
               </a:rPr>
-              <a:t>Sécurité</a:t>
+              <a:t>Facturation</a:t>
             </a:r>
             <a:endParaRPr lang="en-US" sz="2400" dirty="0"/>
           </a:p>
@@ -16116,7 +16294,7 @@
                 <a:ea typeface="Segoe UI" pitchFamily="34" charset="-122"/>
                 <a:cs typeface="Segoe UI" pitchFamily="34" charset="-120"/>
               </a:rPr>
-              <a:t>Audit de sécurité complet et correction des failles trouvées</a:t>
+              <a:t>Export PDF des factures</a:t>
             </a:r>
             <a:endParaRPr lang="en-US" sz="1400" dirty="0"/>
           </a:p>
@@ -16158,7 +16336,7 @@
                 <a:ea typeface="Segoe UI" pitchFamily="34" charset="-122"/>
                 <a:cs typeface="Segoe UI" pitchFamily="34" charset="-120"/>
               </a:rPr>
-              <a:t>Audit approfondi ayant confirmé 6 failles actives : fuite de données entre entreprises, base de données lisible sans connexion, portail client sans authentification, mots de passe en clair, base de données versionnée dans Git, absence de vérification centralisée. Corrigées le jour même (détail ci-dessous).</a:t>
+              <a:t>Chaque facture (issue d'un devis signé ou d'une intervention) peut désormais être téléchargée en PDF avec les informations de l'entreprise, du client et du montant — bouton ajouté dans la page Facturation et dans la fiche d'une intervention.</a:t>
             </a:r>
             <a:endParaRPr lang="en-US" sz="1100" dirty="0"/>
           </a:p>
@@ -16166,391 +16344,7 @@
       </p:sp>
       <p:sp>
         <p:nvSpPr>
-          <p:cNvPr id="9" name="Shape 7"/>
-          <p:cNvSpPr/>
-          <p:nvPr/>
-        </p:nvSpPr>
-        <p:spPr>
-          <a:xfrm>
-            <a:off x="640080" y="2926080"/>
-            <a:ext cx="10881360" cy="1097280"/>
-          </a:xfrm>
-          <a:prstGeom prst="roundRect">
-            <a:avLst>
-              <a:gd name="adj" fmla="val 5000"/>
-            </a:avLst>
-          </a:prstGeom>
-          <a:solidFill>
-            <a:srgbClr val="FFFFFF"/>
-          </a:solidFill>
-          <a:ln w="12700">
-            <a:solidFill>
-              <a:srgbClr val="E4DCCB"/>
-            </a:solidFill>
-            <a:prstDash val="solid"/>
-          </a:ln>
-        </p:spPr>
-      </p:sp>
-      <p:sp>
-        <p:nvSpPr>
-          <p:cNvPr id="10" name="Shape 8"/>
-          <p:cNvSpPr/>
-          <p:nvPr/>
-        </p:nvSpPr>
-        <p:spPr>
-          <a:xfrm>
-            <a:off x="640080" y="2926080"/>
-            <a:ext cx="54864" cy="1097280"/>
-          </a:xfrm>
-          <a:prstGeom prst="rect">
-            <a:avLst/>
-          </a:prstGeom>
-          <a:solidFill>
-            <a:srgbClr val="9A4C1F"/>
-          </a:solidFill>
-          <a:ln/>
-        </p:spPr>
-      </p:sp>
-      <p:sp>
-        <p:nvSpPr>
-          <p:cNvPr id="11" name="Text 9"/>
-          <p:cNvSpPr/>
-          <p:nvPr/>
-        </p:nvSpPr>
-        <p:spPr>
-          <a:xfrm>
-            <a:off x="914400" y="3035808"/>
-            <a:ext cx="10332720" cy="365760"/>
-          </a:xfrm>
-          <a:prstGeom prst="rect">
-            <a:avLst/>
-          </a:prstGeom>
-          <a:noFill/>
-          <a:ln/>
-        </p:spPr>
-        <p:txBody>
-          <a:bodyPr wrap="square" rtlCol="0" anchor="ctr"/>
-          <a:lstStyle/>
-          <a:p>
-            <a:pPr indent="0" marL="0">
-              <a:buNone/>
-            </a:pPr>
-            <a:r>
-              <a:rPr lang="en-US" sz="1400" b="1" dirty="0">
-                <a:solidFill>
-                  <a:srgbClr val="1B1F3B"/>
-                </a:solidFill>
-                <a:latin typeface="Segoe UI" pitchFamily="34" charset="0"/>
-                <a:ea typeface="Segoe UI" pitchFamily="34" charset="-122"/>
-                <a:cs typeface="Segoe UI" pitchFamily="34" charset="-120"/>
-              </a:rPr>
-              <a:t>Fuite de données entre entreprises corrigée</a:t>
-            </a:r>
-            <a:endParaRPr lang="en-US" sz="1400" dirty="0"/>
-          </a:p>
-        </p:txBody>
-      </p:sp>
-      <p:sp>
-        <p:nvSpPr>
-          <p:cNvPr id="12" name="Text 10"/>
-          <p:cNvSpPr/>
-          <p:nvPr/>
-        </p:nvSpPr>
-        <p:spPr>
-          <a:xfrm>
-            <a:off x="914400" y="3383280"/>
-            <a:ext cx="10332720" cy="594360"/>
-          </a:xfrm>
-          <a:prstGeom prst="rect">
-            <a:avLst/>
-          </a:prstGeom>
-          <a:noFill/>
-          <a:ln/>
-        </p:spPr>
-        <p:txBody>
-          <a:bodyPr wrap="square" rtlCol="0" anchor="ctr"/>
-          <a:lstStyle/>
-          <a:p>
-            <a:pPr indent="0" marL="0">
-              <a:lnSpc>
-                <a:spcPts val="1400"/>
-              </a:lnSpc>
-              <a:buNone/>
-            </a:pPr>
-            <a:r>
-              <a:rPr lang="en-US" sz="1100" dirty="0">
-                <a:solidFill>
-                  <a:srgbClr val="8A7C68"/>
-                </a:solidFill>
-                <a:latin typeface="Segoe UI" pitchFamily="34" charset="0"/>
-                <a:ea typeface="Segoe UI" pitchFamily="34" charset="-122"/>
-                <a:cs typeface="Segoe UI" pitchFamily="34" charset="-120"/>
-              </a:rPr>
-              <a:t>Une trentaine de routes (clients, devis, factures, tâches, ouvriers...) faisaient confiance à un identifiant envoyé par le navigateur pour savoir quelles données afficher, sans vérifier qu'il correspondait à la session connectée : n'importe qui pouvait lire ou modifier les données d'une autre entreprise en changeant cet identifiant. Ces routes vérifient désormais la vraie session avant de répondre.</a:t>
-            </a:r>
-            <a:endParaRPr lang="en-US" sz="1100" dirty="0"/>
-          </a:p>
-        </p:txBody>
-      </p:sp>
-      <p:sp>
-        <p:nvSpPr>
-          <p:cNvPr id="13" name="Shape 11"/>
-          <p:cNvSpPr/>
-          <p:nvPr/>
-        </p:nvSpPr>
-        <p:spPr>
-          <a:xfrm>
-            <a:off x="640080" y="4160520"/>
-            <a:ext cx="10881360" cy="1097280"/>
-          </a:xfrm>
-          <a:prstGeom prst="roundRect">
-            <a:avLst>
-              <a:gd name="adj" fmla="val 5000"/>
-            </a:avLst>
-          </a:prstGeom>
-          <a:solidFill>
-            <a:srgbClr val="FFFFFF"/>
-          </a:solidFill>
-          <a:ln w="12700">
-            <a:solidFill>
-              <a:srgbClr val="E4DCCB"/>
-            </a:solidFill>
-            <a:prstDash val="solid"/>
-          </a:ln>
-        </p:spPr>
-      </p:sp>
-      <p:sp>
-        <p:nvSpPr>
-          <p:cNvPr id="14" name="Shape 12"/>
-          <p:cNvSpPr/>
-          <p:nvPr/>
-        </p:nvSpPr>
-        <p:spPr>
-          <a:xfrm>
-            <a:off x="640080" y="4160520"/>
-            <a:ext cx="54864" cy="1097280"/>
-          </a:xfrm>
-          <a:prstGeom prst="rect">
-            <a:avLst/>
-          </a:prstGeom>
-          <a:solidFill>
-            <a:srgbClr val="9A4C1F"/>
-          </a:solidFill>
-          <a:ln/>
-        </p:spPr>
-      </p:sp>
-      <p:sp>
-        <p:nvSpPr>
-          <p:cNvPr id="15" name="Text 13"/>
-          <p:cNvSpPr/>
-          <p:nvPr/>
-        </p:nvSpPr>
-        <p:spPr>
-          <a:xfrm>
-            <a:off x="914400" y="4270248"/>
-            <a:ext cx="10332720" cy="365760"/>
-          </a:xfrm>
-          <a:prstGeom prst="rect">
-            <a:avLst/>
-          </a:prstGeom>
-          <a:noFill/>
-          <a:ln/>
-        </p:spPr>
-        <p:txBody>
-          <a:bodyPr wrap="square" rtlCol="0" anchor="ctr"/>
-          <a:lstStyle/>
-          <a:p>
-            <a:pPr indent="0" marL="0">
-              <a:buNone/>
-            </a:pPr>
-            <a:r>
-              <a:rPr lang="en-US" sz="1400" b="1" dirty="0">
-                <a:solidFill>
-                  <a:srgbClr val="1B1F3B"/>
-                </a:solidFill>
-                <a:latin typeface="Segoe UI" pitchFamily="34" charset="0"/>
-                <a:ea typeface="Segoe UI" pitchFamily="34" charset="-122"/>
-                <a:cs typeface="Segoe UI" pitchFamily="34" charset="-120"/>
-              </a:rPr>
-              <a:t>Portail client équipé d'une vraie session</a:t>
-            </a:r>
-            <a:endParaRPr lang="en-US" sz="1400" dirty="0"/>
-          </a:p>
-        </p:txBody>
-      </p:sp>
-      <p:sp>
-        <p:nvSpPr>
-          <p:cNvPr id="16" name="Text 14"/>
-          <p:cNvSpPr/>
-          <p:nvPr/>
-        </p:nvSpPr>
-        <p:spPr>
-          <a:xfrm>
-            <a:off x="914400" y="4617720"/>
-            <a:ext cx="10332720" cy="594360"/>
-          </a:xfrm>
-          <a:prstGeom prst="rect">
-            <a:avLst/>
-          </a:prstGeom>
-          <a:noFill/>
-          <a:ln/>
-        </p:spPr>
-        <p:txBody>
-          <a:bodyPr wrap="square" rtlCol="0" anchor="ctr"/>
-          <a:lstStyle/>
-          <a:p>
-            <a:pPr indent="0" marL="0">
-              <a:lnSpc>
-                <a:spcPts val="1400"/>
-              </a:lnSpc>
-              <a:buNone/>
-            </a:pPr>
-            <a:r>
-              <a:rPr lang="en-US" sz="1100" dirty="0">
-                <a:solidFill>
-                  <a:srgbClr val="8A7C68"/>
-                </a:solidFill>
-                <a:latin typeface="Segoe UI" pitchFamily="34" charset="0"/>
-                <a:ea typeface="Segoe UI" pitchFamily="34" charset="-122"/>
-                <a:cs typeface="Segoe UI" pitchFamily="34" charset="-120"/>
-              </a:rPr>
-              <a:t>L'espace client particulier n'avait aucune session vérifiable : ses informations (dont le mot de passe de signature) pouvaient être lues à partir du simple email d'un client, sans mot de passe. Un jeton de connexion signé a été ajouté, vérifié sur chaque page du portail client.</a:t>
-            </a:r>
-            <a:endParaRPr lang="en-US" sz="1100" dirty="0"/>
-          </a:p>
-        </p:txBody>
-      </p:sp>
-      <p:sp>
-        <p:nvSpPr>
-          <p:cNvPr id="17" name="Shape 15"/>
-          <p:cNvSpPr/>
-          <p:nvPr/>
-        </p:nvSpPr>
-        <p:spPr>
-          <a:xfrm>
-            <a:off x="640080" y="5394960"/>
-            <a:ext cx="10881360" cy="1097280"/>
-          </a:xfrm>
-          <a:prstGeom prst="roundRect">
-            <a:avLst>
-              <a:gd name="adj" fmla="val 5000"/>
-            </a:avLst>
-          </a:prstGeom>
-          <a:solidFill>
-            <a:srgbClr val="FFFFFF"/>
-          </a:solidFill>
-          <a:ln w="12700">
-            <a:solidFill>
-              <a:srgbClr val="E4DCCB"/>
-            </a:solidFill>
-            <a:prstDash val="solid"/>
-          </a:ln>
-        </p:spPr>
-      </p:sp>
-      <p:sp>
-        <p:nvSpPr>
-          <p:cNvPr id="18" name="Shape 16"/>
-          <p:cNvSpPr/>
-          <p:nvPr/>
-        </p:nvSpPr>
-        <p:spPr>
-          <a:xfrm>
-            <a:off x="640080" y="5394960"/>
-            <a:ext cx="54864" cy="1097280"/>
-          </a:xfrm>
-          <a:prstGeom prst="rect">
-            <a:avLst/>
-          </a:prstGeom>
-          <a:solidFill>
-            <a:srgbClr val="9A4C1F"/>
-          </a:solidFill>
-          <a:ln/>
-        </p:spPr>
-      </p:sp>
-      <p:sp>
-        <p:nvSpPr>
-          <p:cNvPr id="19" name="Text 17"/>
-          <p:cNvSpPr/>
-          <p:nvPr/>
-        </p:nvSpPr>
-        <p:spPr>
-          <a:xfrm>
-            <a:off x="914400" y="5504688"/>
-            <a:ext cx="10332720" cy="365760"/>
-          </a:xfrm>
-          <a:prstGeom prst="rect">
-            <a:avLst/>
-          </a:prstGeom>
-          <a:noFill/>
-          <a:ln/>
-        </p:spPr>
-        <p:txBody>
-          <a:bodyPr wrap="square" rtlCol="0" anchor="ctr"/>
-          <a:lstStyle/>
-          <a:p>
-            <a:pPr indent="0" marL="0">
-              <a:buNone/>
-            </a:pPr>
-            <a:r>
-              <a:rPr lang="en-US" sz="1400" b="1" dirty="0">
-                <a:solidFill>
-                  <a:srgbClr val="1B1F3B"/>
-                </a:solidFill>
-                <a:latin typeface="Segoe UI" pitchFamily="34" charset="0"/>
-                <a:ea typeface="Segoe UI" pitchFamily="34" charset="-122"/>
-                <a:cs typeface="Segoe UI" pitchFamily="34" charset="-120"/>
-              </a:rPr>
-              <a:t>Mots de passe du portail client chiffrés</a:t>
-            </a:r>
-            <a:endParaRPr lang="en-US" sz="1400" dirty="0"/>
-          </a:p>
-        </p:txBody>
-      </p:sp>
-      <p:sp>
-        <p:nvSpPr>
-          <p:cNvPr id="20" name="Text 18"/>
-          <p:cNvSpPr/>
-          <p:nvPr/>
-        </p:nvSpPr>
-        <p:spPr>
-          <a:xfrm>
-            <a:off x="914400" y="5852160"/>
-            <a:ext cx="10332720" cy="594360"/>
-          </a:xfrm>
-          <a:prstGeom prst="rect">
-            <a:avLst/>
-          </a:prstGeom>
-          <a:noFill/>
-          <a:ln/>
-        </p:spPr>
-        <p:txBody>
-          <a:bodyPr wrap="square" rtlCol="0" anchor="ctr"/>
-          <a:lstStyle/>
-          <a:p>
-            <a:pPr indent="0" marL="0">
-              <a:lnSpc>
-                <a:spcPts val="1400"/>
-              </a:lnSpc>
-              <a:buNone/>
-            </a:pPr>
-            <a:r>
-              <a:rPr lang="en-US" sz="1100" dirty="0">
-                <a:solidFill>
-                  <a:srgbClr val="8A7C68"/>
-                </a:solidFill>
-                <a:latin typeface="Segoe UI" pitchFamily="34" charset="0"/>
-                <a:ea typeface="Segoe UI" pitchFamily="34" charset="-122"/>
-                <a:cs typeface="Segoe UI" pitchFamily="34" charset="-120"/>
-              </a:rPr>
-              <a:t>Les mots de passe des comptes client particulier étaient stockés et comparés en texte lisible. Ils sont désormais chiffrés (hachage scrypt), avec migration automatique et transparente des comptes existants à la prochaine connexion.</a:t>
-            </a:r>
-            <a:endParaRPr lang="en-US" sz="1100" dirty="0"/>
-          </a:p>
-        </p:txBody>
-      </p:sp>
-      <p:sp>
-        <p:nvSpPr>
-          <p:cNvPr id="21" name="Text 19"/>
+          <p:cNvPr id="9" name="Text 7"/>
           <p:cNvSpPr/>
           <p:nvPr/>
         </p:nvSpPr>
@@ -16589,7 +16383,7 @@
       </p:sp>
       <p:sp>
         <p:nvSpPr>
-          <p:cNvPr id="22" name="Text 20"/>
+          <p:cNvPr id="10" name="Text 8"/>
           <p:cNvSpPr/>
           <p:nvPr/>
         </p:nvSpPr>
@@ -16640,7 +16434,7 @@
     <p:bg>
       <p:bgPr>
         <a:solidFill>
-          <a:srgbClr val="0B1030"/>
+          <a:srgbClr val="F3EEE3"/>
         </a:solidFill>
       </p:bgPr>
     </p:bg>
@@ -16666,14 +16460,16 @@
         </p:nvSpPr>
         <p:spPr>
           <a:xfrm>
-            <a:off x="0" y="3246120"/>
-            <a:ext cx="12191695" cy="54864"/>
-          </a:xfrm>
-          <a:prstGeom prst="rect">
-            <a:avLst/>
+            <a:off x="640080" y="411480"/>
+            <a:ext cx="2377440" cy="365760"/>
+          </a:xfrm>
+          <a:prstGeom prst="roundRect">
+            <a:avLst>
+              <a:gd name="adj" fmla="val 50000"/>
+            </a:avLst>
           </a:prstGeom>
           <a:solidFill>
-            <a:srgbClr val="386641"/>
+            <a:srgbClr val="F5E6DA"/>
           </a:solidFill>
           <a:ln/>
         </p:spPr>
@@ -16686,118 +16482,591 @@
         </p:nvSpPr>
         <p:spPr>
           <a:xfrm>
-            <a:off x="640080" y="2468880"/>
-            <a:ext cx="10058400" cy="914400"/>
-          </a:xfrm>
-          <a:prstGeom prst="rect">
-            <a:avLst/>
-          </a:prstGeom>
-          <a:noFill/>
-          <a:ln/>
-        </p:spPr>
-        <p:txBody>
-          <a:bodyPr wrap="square" rtlCol="0" anchor="ctr"/>
-          <a:lstStyle/>
-          <a:p>
-            <a:pPr indent="0" marL="0">
-              <a:buNone/>
-            </a:pPr>
-            <a:r>
-              <a:rPr lang="en-US" sz="3800" b="1" dirty="0">
-                <a:solidFill>
-                  <a:srgbClr val="FFFFFF"/>
+            <a:off x="640080" y="411480"/>
+            <a:ext cx="2377440" cy="365760"/>
+          </a:xfrm>
+          <a:prstGeom prst="rect">
+            <a:avLst/>
+          </a:prstGeom>
+          <a:noFill/>
+          <a:ln/>
+        </p:spPr>
+        <p:txBody>
+          <a:bodyPr wrap="square" rtlCol="0" anchor="ctr"/>
+          <a:lstStyle/>
+          <a:p>
+            <a:pPr algn="ctr" indent="0" marL="0">
+              <a:buNone/>
+            </a:pPr>
+            <a:r>
+              <a:rPr lang="en-US" sz="1000" b="1" spc="100" kern="0" dirty="0">
+                <a:solidFill>
+                  <a:srgbClr val="9A4C1F"/>
+                </a:solidFill>
+                <a:latin typeface="Segoe UI" pitchFamily="34" charset="0"/>
+                <a:ea typeface="Segoe UI" pitchFamily="34" charset="-122"/>
+                <a:cs typeface="Segoe UI" pitchFamily="34" charset="-120"/>
+              </a:rPr>
+              <a:t>BACKEND</a:t>
+            </a:r>
+            <a:endParaRPr lang="en-US" sz="1000" dirty="0"/>
+          </a:p>
+        </p:txBody>
+      </p:sp>
+      <p:sp>
+        <p:nvSpPr>
+          <p:cNvPr id="4" name="Text 2"/>
+          <p:cNvSpPr/>
+          <p:nvPr/>
+        </p:nvSpPr>
+        <p:spPr>
+          <a:xfrm>
+            <a:off x="640080" y="868680"/>
+            <a:ext cx="10515600" cy="548640"/>
+          </a:xfrm>
+          <a:prstGeom prst="rect">
+            <a:avLst/>
+          </a:prstGeom>
+          <a:noFill/>
+          <a:ln/>
+        </p:spPr>
+        <p:txBody>
+          <a:bodyPr wrap="square" rtlCol="0" anchor="ctr"/>
+          <a:lstStyle/>
+          <a:p>
+            <a:pPr indent="0" marL="0">
+              <a:buNone/>
+            </a:pPr>
+            <a:r>
+              <a:rPr lang="en-US" sz="2400" b="1" dirty="0">
+                <a:solidFill>
+                  <a:srgbClr val="1B1F3B"/>
                 </a:solidFill>
                 <a:latin typeface="Georgia" pitchFamily="34" charset="0"/>
                 <a:ea typeface="Georgia" pitchFamily="34" charset="-122"/>
                 <a:cs typeface="Georgia" pitchFamily="34" charset="-120"/>
               </a:rPr>
-              <a:t>Base de données</a:t>
-            </a:r>
-            <a:endParaRPr lang="en-US" sz="3800" dirty="0"/>
-          </a:p>
-        </p:txBody>
-      </p:sp>
-      <p:sp>
-        <p:nvSpPr>
-          <p:cNvPr id="4" name="Text 2"/>
-          <p:cNvSpPr/>
-          <p:nvPr/>
-        </p:nvSpPr>
-        <p:spPr>
-          <a:xfrm>
-            <a:off x="640080" y="3429000"/>
-            <a:ext cx="10058400" cy="457200"/>
-          </a:xfrm>
-          <a:prstGeom prst="rect">
-            <a:avLst/>
-          </a:prstGeom>
-          <a:noFill/>
-          <a:ln/>
-        </p:spPr>
-        <p:txBody>
-          <a:bodyPr wrap="square" rtlCol="0" anchor="ctr"/>
-          <a:lstStyle/>
-          <a:p>
-            <a:pPr indent="0" marL="0">
-              <a:buNone/>
-            </a:pPr>
-            <a:r>
-              <a:rPr lang="en-US" sz="1500" dirty="0">
-                <a:solidFill>
-                  <a:srgbClr val="C7C9E0"/>
-                </a:solidFill>
-                <a:latin typeface="Segoe UI" pitchFamily="34" charset="0"/>
-                <a:ea typeface="Segoe UI" pitchFamily="34" charset="-122"/>
-                <a:cs typeface="Segoe UI" pitchFamily="34" charset="-120"/>
-              </a:rPr>
-              <a:t>Modèle de données et infrastructure</a:t>
-            </a:r>
-            <a:endParaRPr lang="en-US" sz="1500" dirty="0"/>
-          </a:p>
-        </p:txBody>
-      </p:sp>
-      <p:sp>
-        <p:nvSpPr>
-          <p:cNvPr id="5" name="Text 3"/>
-          <p:cNvSpPr/>
-          <p:nvPr/>
-        </p:nvSpPr>
-        <p:spPr>
-          <a:xfrm>
-            <a:off x="640080" y="3931920"/>
-            <a:ext cx="5486400" cy="365760"/>
-          </a:xfrm>
-          <a:prstGeom prst="rect">
-            <a:avLst/>
-          </a:prstGeom>
-          <a:noFill/>
-          <a:ln/>
-        </p:spPr>
-        <p:txBody>
-          <a:bodyPr wrap="square" rtlCol="0" anchor="ctr"/>
-          <a:lstStyle/>
-          <a:p>
-            <a:pPr indent="0" marL="0">
-              <a:buNone/>
-            </a:pPr>
-            <a:r>
-              <a:rPr lang="en-US" sz="1200" b="1" dirty="0">
-                <a:solidFill>
-                  <a:srgbClr val="C9A96A"/>
-                </a:solidFill>
-                <a:latin typeface="Segoe UI" pitchFamily="34" charset="0"/>
-                <a:ea typeface="Segoe UI" pitchFamily="34" charset="-122"/>
-                <a:cs typeface="Segoe UI" pitchFamily="34" charset="-120"/>
-              </a:rPr>
-              <a:t>10 mise(s) à jour</a:t>
-            </a:r>
-            <a:endParaRPr lang="en-US" sz="1200" dirty="0"/>
-          </a:p>
-        </p:txBody>
-      </p:sp>
-      <p:sp>
-        <p:nvSpPr>
-          <p:cNvPr id="6" name="Text 4"/>
+              <a:t>Sécurité</a:t>
+            </a:r>
+            <a:endParaRPr lang="en-US" sz="2400" dirty="0"/>
+          </a:p>
+        </p:txBody>
+      </p:sp>
+      <p:sp>
+        <p:nvSpPr>
+          <p:cNvPr id="5" name="Shape 3"/>
+          <p:cNvSpPr/>
+          <p:nvPr/>
+        </p:nvSpPr>
+        <p:spPr>
+          <a:xfrm>
+            <a:off x="640080" y="1691640"/>
+            <a:ext cx="10881360" cy="1097280"/>
+          </a:xfrm>
+          <a:prstGeom prst="roundRect">
+            <a:avLst>
+              <a:gd name="adj" fmla="val 5000"/>
+            </a:avLst>
+          </a:prstGeom>
+          <a:solidFill>
+            <a:srgbClr val="FFFFFF"/>
+          </a:solidFill>
+          <a:ln w="12700">
+            <a:solidFill>
+              <a:srgbClr val="E4DCCB"/>
+            </a:solidFill>
+            <a:prstDash val="solid"/>
+          </a:ln>
+        </p:spPr>
+      </p:sp>
+      <p:sp>
+        <p:nvSpPr>
+          <p:cNvPr id="6" name="Shape 4"/>
+          <p:cNvSpPr/>
+          <p:nvPr/>
+        </p:nvSpPr>
+        <p:spPr>
+          <a:xfrm>
+            <a:off x="640080" y="1691640"/>
+            <a:ext cx="54864" cy="1097280"/>
+          </a:xfrm>
+          <a:prstGeom prst="rect">
+            <a:avLst/>
+          </a:prstGeom>
+          <a:solidFill>
+            <a:srgbClr val="9A4C1F"/>
+          </a:solidFill>
+          <a:ln/>
+        </p:spPr>
+      </p:sp>
+      <p:sp>
+        <p:nvSpPr>
+          <p:cNvPr id="7" name="Text 5"/>
+          <p:cNvSpPr/>
+          <p:nvPr/>
+        </p:nvSpPr>
+        <p:spPr>
+          <a:xfrm>
+            <a:off x="914400" y="1801368"/>
+            <a:ext cx="10332720" cy="365760"/>
+          </a:xfrm>
+          <a:prstGeom prst="rect">
+            <a:avLst/>
+          </a:prstGeom>
+          <a:noFill/>
+          <a:ln/>
+        </p:spPr>
+        <p:txBody>
+          <a:bodyPr wrap="square" rtlCol="0" anchor="ctr"/>
+          <a:lstStyle/>
+          <a:p>
+            <a:pPr indent="0" marL="0">
+              <a:buNone/>
+            </a:pPr>
+            <a:r>
+              <a:rPr lang="en-US" sz="1400" b="1" dirty="0">
+                <a:solidFill>
+                  <a:srgbClr val="1B1F3B"/>
+                </a:solidFill>
+                <a:latin typeface="Segoe UI" pitchFamily="34" charset="0"/>
+                <a:ea typeface="Segoe UI" pitchFamily="34" charset="-122"/>
+                <a:cs typeface="Segoe UI" pitchFamily="34" charset="-120"/>
+              </a:rPr>
+              <a:t>Audit de sécurité complet et correction des failles trouvées</a:t>
+            </a:r>
+            <a:endParaRPr lang="en-US" sz="1400" dirty="0"/>
+          </a:p>
+        </p:txBody>
+      </p:sp>
+      <p:sp>
+        <p:nvSpPr>
+          <p:cNvPr id="8" name="Text 6"/>
+          <p:cNvSpPr/>
+          <p:nvPr/>
+        </p:nvSpPr>
+        <p:spPr>
+          <a:xfrm>
+            <a:off x="914400" y="2148840"/>
+            <a:ext cx="10332720" cy="594360"/>
+          </a:xfrm>
+          <a:prstGeom prst="rect">
+            <a:avLst/>
+          </a:prstGeom>
+          <a:noFill/>
+          <a:ln/>
+        </p:spPr>
+        <p:txBody>
+          <a:bodyPr wrap="square" rtlCol="0" anchor="ctr"/>
+          <a:lstStyle/>
+          <a:p>
+            <a:pPr indent="0" marL="0">
+              <a:lnSpc>
+                <a:spcPts val="1400"/>
+              </a:lnSpc>
+              <a:buNone/>
+            </a:pPr>
+            <a:r>
+              <a:rPr lang="en-US" sz="1100" dirty="0">
+                <a:solidFill>
+                  <a:srgbClr val="8A7C68"/>
+                </a:solidFill>
+                <a:latin typeface="Segoe UI" pitchFamily="34" charset="0"/>
+                <a:ea typeface="Segoe UI" pitchFamily="34" charset="-122"/>
+                <a:cs typeface="Segoe UI" pitchFamily="34" charset="-120"/>
+              </a:rPr>
+              <a:t>Audit approfondi ayant confirmé 6 failles actives : fuite de données entre entreprises, base de données lisible sans connexion, portail client sans authentification, mots de passe en clair, base de données versionnée dans Git, absence de vérification centralisée. Corrigées le jour même (détail ci-dessous).</a:t>
+            </a:r>
+            <a:endParaRPr lang="en-US" sz="1100" dirty="0"/>
+          </a:p>
+        </p:txBody>
+      </p:sp>
+      <p:sp>
+        <p:nvSpPr>
+          <p:cNvPr id="9" name="Shape 7"/>
+          <p:cNvSpPr/>
+          <p:nvPr/>
+        </p:nvSpPr>
+        <p:spPr>
+          <a:xfrm>
+            <a:off x="640080" y="2926080"/>
+            <a:ext cx="10881360" cy="1097280"/>
+          </a:xfrm>
+          <a:prstGeom prst="roundRect">
+            <a:avLst>
+              <a:gd name="adj" fmla="val 5000"/>
+            </a:avLst>
+          </a:prstGeom>
+          <a:solidFill>
+            <a:srgbClr val="FFFFFF"/>
+          </a:solidFill>
+          <a:ln w="12700">
+            <a:solidFill>
+              <a:srgbClr val="E4DCCB"/>
+            </a:solidFill>
+            <a:prstDash val="solid"/>
+          </a:ln>
+        </p:spPr>
+      </p:sp>
+      <p:sp>
+        <p:nvSpPr>
+          <p:cNvPr id="10" name="Shape 8"/>
+          <p:cNvSpPr/>
+          <p:nvPr/>
+        </p:nvSpPr>
+        <p:spPr>
+          <a:xfrm>
+            <a:off x="640080" y="2926080"/>
+            <a:ext cx="54864" cy="1097280"/>
+          </a:xfrm>
+          <a:prstGeom prst="rect">
+            <a:avLst/>
+          </a:prstGeom>
+          <a:solidFill>
+            <a:srgbClr val="9A4C1F"/>
+          </a:solidFill>
+          <a:ln/>
+        </p:spPr>
+      </p:sp>
+      <p:sp>
+        <p:nvSpPr>
+          <p:cNvPr id="11" name="Text 9"/>
+          <p:cNvSpPr/>
+          <p:nvPr/>
+        </p:nvSpPr>
+        <p:spPr>
+          <a:xfrm>
+            <a:off x="914400" y="3035808"/>
+            <a:ext cx="10332720" cy="365760"/>
+          </a:xfrm>
+          <a:prstGeom prst="rect">
+            <a:avLst/>
+          </a:prstGeom>
+          <a:noFill/>
+          <a:ln/>
+        </p:spPr>
+        <p:txBody>
+          <a:bodyPr wrap="square" rtlCol="0" anchor="ctr"/>
+          <a:lstStyle/>
+          <a:p>
+            <a:pPr indent="0" marL="0">
+              <a:buNone/>
+            </a:pPr>
+            <a:r>
+              <a:rPr lang="en-US" sz="1400" b="1" dirty="0">
+                <a:solidFill>
+                  <a:srgbClr val="1B1F3B"/>
+                </a:solidFill>
+                <a:latin typeface="Segoe UI" pitchFamily="34" charset="0"/>
+                <a:ea typeface="Segoe UI" pitchFamily="34" charset="-122"/>
+                <a:cs typeface="Segoe UI" pitchFamily="34" charset="-120"/>
+              </a:rPr>
+              <a:t>Fuite de données entre entreprises corrigée</a:t>
+            </a:r>
+            <a:endParaRPr lang="en-US" sz="1400" dirty="0"/>
+          </a:p>
+        </p:txBody>
+      </p:sp>
+      <p:sp>
+        <p:nvSpPr>
+          <p:cNvPr id="12" name="Text 10"/>
+          <p:cNvSpPr/>
+          <p:nvPr/>
+        </p:nvSpPr>
+        <p:spPr>
+          <a:xfrm>
+            <a:off x="914400" y="3383280"/>
+            <a:ext cx="10332720" cy="594360"/>
+          </a:xfrm>
+          <a:prstGeom prst="rect">
+            <a:avLst/>
+          </a:prstGeom>
+          <a:noFill/>
+          <a:ln/>
+        </p:spPr>
+        <p:txBody>
+          <a:bodyPr wrap="square" rtlCol="0" anchor="ctr"/>
+          <a:lstStyle/>
+          <a:p>
+            <a:pPr indent="0" marL="0">
+              <a:lnSpc>
+                <a:spcPts val="1400"/>
+              </a:lnSpc>
+              <a:buNone/>
+            </a:pPr>
+            <a:r>
+              <a:rPr lang="en-US" sz="1100" dirty="0">
+                <a:solidFill>
+                  <a:srgbClr val="8A7C68"/>
+                </a:solidFill>
+                <a:latin typeface="Segoe UI" pitchFamily="34" charset="0"/>
+                <a:ea typeface="Segoe UI" pitchFamily="34" charset="-122"/>
+                <a:cs typeface="Segoe UI" pitchFamily="34" charset="-120"/>
+              </a:rPr>
+              <a:t>Une trentaine de routes (clients, devis, factures, tâches, ouvriers...) faisaient confiance à un identifiant envoyé par le navigateur pour savoir quelles données afficher, sans vérifier qu'il correspondait à la session connectée : n'importe qui pouvait lire ou modifier les données d'une autre entreprise en changeant cet identifiant. Ces routes vérifient désormais la vraie session avant de répondre.</a:t>
+            </a:r>
+            <a:endParaRPr lang="en-US" sz="1100" dirty="0"/>
+          </a:p>
+        </p:txBody>
+      </p:sp>
+      <p:sp>
+        <p:nvSpPr>
+          <p:cNvPr id="13" name="Shape 11"/>
+          <p:cNvSpPr/>
+          <p:nvPr/>
+        </p:nvSpPr>
+        <p:spPr>
+          <a:xfrm>
+            <a:off x="640080" y="4160520"/>
+            <a:ext cx="10881360" cy="1097280"/>
+          </a:xfrm>
+          <a:prstGeom prst="roundRect">
+            <a:avLst>
+              <a:gd name="adj" fmla="val 5000"/>
+            </a:avLst>
+          </a:prstGeom>
+          <a:solidFill>
+            <a:srgbClr val="FFFFFF"/>
+          </a:solidFill>
+          <a:ln w="12700">
+            <a:solidFill>
+              <a:srgbClr val="E4DCCB"/>
+            </a:solidFill>
+            <a:prstDash val="solid"/>
+          </a:ln>
+        </p:spPr>
+      </p:sp>
+      <p:sp>
+        <p:nvSpPr>
+          <p:cNvPr id="14" name="Shape 12"/>
+          <p:cNvSpPr/>
+          <p:nvPr/>
+        </p:nvSpPr>
+        <p:spPr>
+          <a:xfrm>
+            <a:off x="640080" y="4160520"/>
+            <a:ext cx="54864" cy="1097280"/>
+          </a:xfrm>
+          <a:prstGeom prst="rect">
+            <a:avLst/>
+          </a:prstGeom>
+          <a:solidFill>
+            <a:srgbClr val="9A4C1F"/>
+          </a:solidFill>
+          <a:ln/>
+        </p:spPr>
+      </p:sp>
+      <p:sp>
+        <p:nvSpPr>
+          <p:cNvPr id="15" name="Text 13"/>
+          <p:cNvSpPr/>
+          <p:nvPr/>
+        </p:nvSpPr>
+        <p:spPr>
+          <a:xfrm>
+            <a:off x="914400" y="4270248"/>
+            <a:ext cx="10332720" cy="365760"/>
+          </a:xfrm>
+          <a:prstGeom prst="rect">
+            <a:avLst/>
+          </a:prstGeom>
+          <a:noFill/>
+          <a:ln/>
+        </p:spPr>
+        <p:txBody>
+          <a:bodyPr wrap="square" rtlCol="0" anchor="ctr"/>
+          <a:lstStyle/>
+          <a:p>
+            <a:pPr indent="0" marL="0">
+              <a:buNone/>
+            </a:pPr>
+            <a:r>
+              <a:rPr lang="en-US" sz="1400" b="1" dirty="0">
+                <a:solidFill>
+                  <a:srgbClr val="1B1F3B"/>
+                </a:solidFill>
+                <a:latin typeface="Segoe UI" pitchFamily="34" charset="0"/>
+                <a:ea typeface="Segoe UI" pitchFamily="34" charset="-122"/>
+                <a:cs typeface="Segoe UI" pitchFamily="34" charset="-120"/>
+              </a:rPr>
+              <a:t>Portail client équipé d'une vraie session</a:t>
+            </a:r>
+            <a:endParaRPr lang="en-US" sz="1400" dirty="0"/>
+          </a:p>
+        </p:txBody>
+      </p:sp>
+      <p:sp>
+        <p:nvSpPr>
+          <p:cNvPr id="16" name="Text 14"/>
+          <p:cNvSpPr/>
+          <p:nvPr/>
+        </p:nvSpPr>
+        <p:spPr>
+          <a:xfrm>
+            <a:off x="914400" y="4617720"/>
+            <a:ext cx="10332720" cy="594360"/>
+          </a:xfrm>
+          <a:prstGeom prst="rect">
+            <a:avLst/>
+          </a:prstGeom>
+          <a:noFill/>
+          <a:ln/>
+        </p:spPr>
+        <p:txBody>
+          <a:bodyPr wrap="square" rtlCol="0" anchor="ctr"/>
+          <a:lstStyle/>
+          <a:p>
+            <a:pPr indent="0" marL="0">
+              <a:lnSpc>
+                <a:spcPts val="1400"/>
+              </a:lnSpc>
+              <a:buNone/>
+            </a:pPr>
+            <a:r>
+              <a:rPr lang="en-US" sz="1100" dirty="0">
+                <a:solidFill>
+                  <a:srgbClr val="8A7C68"/>
+                </a:solidFill>
+                <a:latin typeface="Segoe UI" pitchFamily="34" charset="0"/>
+                <a:ea typeface="Segoe UI" pitchFamily="34" charset="-122"/>
+                <a:cs typeface="Segoe UI" pitchFamily="34" charset="-120"/>
+              </a:rPr>
+              <a:t>L'espace client particulier n'avait aucune session vérifiable : ses informations (dont le mot de passe de signature) pouvaient être lues à partir du simple email d'un client, sans mot de passe. Un jeton de connexion signé a été ajouté, vérifié sur chaque page du portail client.</a:t>
+            </a:r>
+            <a:endParaRPr lang="en-US" sz="1100" dirty="0"/>
+          </a:p>
+        </p:txBody>
+      </p:sp>
+      <p:sp>
+        <p:nvSpPr>
+          <p:cNvPr id="17" name="Shape 15"/>
+          <p:cNvSpPr/>
+          <p:nvPr/>
+        </p:nvSpPr>
+        <p:spPr>
+          <a:xfrm>
+            <a:off x="640080" y="5394960"/>
+            <a:ext cx="10881360" cy="1097280"/>
+          </a:xfrm>
+          <a:prstGeom prst="roundRect">
+            <a:avLst>
+              <a:gd name="adj" fmla="val 5000"/>
+            </a:avLst>
+          </a:prstGeom>
+          <a:solidFill>
+            <a:srgbClr val="FFFFFF"/>
+          </a:solidFill>
+          <a:ln w="12700">
+            <a:solidFill>
+              <a:srgbClr val="E4DCCB"/>
+            </a:solidFill>
+            <a:prstDash val="solid"/>
+          </a:ln>
+        </p:spPr>
+      </p:sp>
+      <p:sp>
+        <p:nvSpPr>
+          <p:cNvPr id="18" name="Shape 16"/>
+          <p:cNvSpPr/>
+          <p:nvPr/>
+        </p:nvSpPr>
+        <p:spPr>
+          <a:xfrm>
+            <a:off x="640080" y="5394960"/>
+            <a:ext cx="54864" cy="1097280"/>
+          </a:xfrm>
+          <a:prstGeom prst="rect">
+            <a:avLst/>
+          </a:prstGeom>
+          <a:solidFill>
+            <a:srgbClr val="9A4C1F"/>
+          </a:solidFill>
+          <a:ln/>
+        </p:spPr>
+      </p:sp>
+      <p:sp>
+        <p:nvSpPr>
+          <p:cNvPr id="19" name="Text 17"/>
+          <p:cNvSpPr/>
+          <p:nvPr/>
+        </p:nvSpPr>
+        <p:spPr>
+          <a:xfrm>
+            <a:off x="914400" y="5504688"/>
+            <a:ext cx="10332720" cy="365760"/>
+          </a:xfrm>
+          <a:prstGeom prst="rect">
+            <a:avLst/>
+          </a:prstGeom>
+          <a:noFill/>
+          <a:ln/>
+        </p:spPr>
+        <p:txBody>
+          <a:bodyPr wrap="square" rtlCol="0" anchor="ctr"/>
+          <a:lstStyle/>
+          <a:p>
+            <a:pPr indent="0" marL="0">
+              <a:buNone/>
+            </a:pPr>
+            <a:r>
+              <a:rPr lang="en-US" sz="1400" b="1" dirty="0">
+                <a:solidFill>
+                  <a:srgbClr val="1B1F3B"/>
+                </a:solidFill>
+                <a:latin typeface="Segoe UI" pitchFamily="34" charset="0"/>
+                <a:ea typeface="Segoe UI" pitchFamily="34" charset="-122"/>
+                <a:cs typeface="Segoe UI" pitchFamily="34" charset="-120"/>
+              </a:rPr>
+              <a:t>Mots de passe du portail client chiffrés</a:t>
+            </a:r>
+            <a:endParaRPr lang="en-US" sz="1400" dirty="0"/>
+          </a:p>
+        </p:txBody>
+      </p:sp>
+      <p:sp>
+        <p:nvSpPr>
+          <p:cNvPr id="20" name="Text 18"/>
+          <p:cNvSpPr/>
+          <p:nvPr/>
+        </p:nvSpPr>
+        <p:spPr>
+          <a:xfrm>
+            <a:off x="914400" y="5852160"/>
+            <a:ext cx="10332720" cy="594360"/>
+          </a:xfrm>
+          <a:prstGeom prst="rect">
+            <a:avLst/>
+          </a:prstGeom>
+          <a:noFill/>
+          <a:ln/>
+        </p:spPr>
+        <p:txBody>
+          <a:bodyPr wrap="square" rtlCol="0" anchor="ctr"/>
+          <a:lstStyle/>
+          <a:p>
+            <a:pPr indent="0" marL="0">
+              <a:lnSpc>
+                <a:spcPts val="1400"/>
+              </a:lnSpc>
+              <a:buNone/>
+            </a:pPr>
+            <a:r>
+              <a:rPr lang="en-US" sz="1100" dirty="0">
+                <a:solidFill>
+                  <a:srgbClr val="8A7C68"/>
+                </a:solidFill>
+                <a:latin typeface="Segoe UI" pitchFamily="34" charset="0"/>
+                <a:ea typeface="Segoe UI" pitchFamily="34" charset="-122"/>
+                <a:cs typeface="Segoe UI" pitchFamily="34" charset="-120"/>
+              </a:rPr>
+              <a:t>Les mots de passe des comptes client particulier étaient stockés et comparés en texte lisible. Ils sont désormais chiffrés (hachage scrypt), avec migration automatique et transparente des comptes existants à la prochaine connexion.</a:t>
+            </a:r>
+            <a:endParaRPr lang="en-US" sz="1100" dirty="0"/>
+          </a:p>
+        </p:txBody>
+      </p:sp>
+      <p:sp>
+        <p:nvSpPr>
+          <p:cNvPr id="21" name="Text 19"/>
           <p:cNvSpPr/>
           <p:nvPr/>
         </p:nvSpPr>
@@ -16836,7 +17105,7 @@
       </p:sp>
       <p:sp>
         <p:nvSpPr>
-          <p:cNvPr id="7" name="Text 5"/>
+          <p:cNvPr id="22" name="Text 20"/>
           <p:cNvSpPr/>
           <p:nvPr/>
         </p:nvSpPr>
@@ -16922,7 +17191,7 @@
             </a:avLst>
           </a:prstGeom>
           <a:solidFill>
-            <a:srgbClr val="E6EFE4"/>
+            <a:srgbClr val="F5E6DA"/>
           </a:solidFill>
           <a:ln/>
         </p:spPr>
@@ -16954,13 +17223,13 @@
             <a:r>
               <a:rPr lang="en-US" sz="1000" b="1" spc="100" kern="0" dirty="0">
                 <a:solidFill>
-                  <a:srgbClr val="386641"/>
-                </a:solidFill>
-                <a:latin typeface="Segoe UI" pitchFamily="34" charset="0"/>
-                <a:ea typeface="Segoe UI" pitchFamily="34" charset="-122"/>
-                <a:cs typeface="Segoe UI" pitchFamily="34" charset="-120"/>
-              </a:rPr>
-              <a:t>BASE DE DONNÉES</a:t>
+                  <a:srgbClr val="9A4C1F"/>
+                </a:solidFill>
+                <a:latin typeface="Segoe UI" pitchFamily="34" charset="0"/>
+                <a:ea typeface="Segoe UI" pitchFamily="34" charset="-122"/>
+                <a:cs typeface="Segoe UI" pitchFamily="34" charset="-120"/>
+              </a:rPr>
+              <a:t>BACKEND</a:t>
             </a:r>
             <a:endParaRPr lang="en-US" sz="1000" dirty="0"/>
           </a:p>
@@ -16999,7 +17268,7 @@
                 <a:ea typeface="Georgia" pitchFamily="34" charset="-122"/>
                 <a:cs typeface="Georgia" pitchFamily="34" charset="-120"/>
               </a:rPr>
-              <a:t>Fondations</a:t>
+              <a:t>Sécurité (suite)</a:t>
             </a:r>
             <a:endParaRPr lang="en-US" sz="2400" dirty="0"/>
           </a:p>
@@ -17047,7 +17316,7 @@
             <a:avLst/>
           </a:prstGeom>
           <a:solidFill>
-            <a:srgbClr val="386641"/>
+            <a:srgbClr val="9A4C1F"/>
           </a:solidFill>
           <a:ln/>
         </p:spPr>
@@ -17085,7 +17354,7 @@
                 <a:ea typeface="Segoe UI" pitchFamily="34" charset="-122"/>
                 <a:cs typeface="Segoe UI" pitchFamily="34" charset="-120"/>
               </a:rPr>
-              <a:t>Connexion Vercel / configuration environnement</a:t>
+              <a:t>Portail ouvrier équipé d'une vraie session</a:t>
             </a:r>
             <a:endParaRPr lang="en-US" sz="1400" dirty="0"/>
           </a:p>
@@ -17127,7 +17396,7 @@
                 <a:ea typeface="Segoe UI" pitchFamily="34" charset="-122"/>
                 <a:cs typeface="Segoe UI" pitchFamily="34" charset="-120"/>
               </a:rPr>
-              <a:t>Correction de la configuration d'authentification et du SMTP sur l'environnement de production Vercel.</a:t>
+              <a:t>Comme pour le portail client, l'espace ouvrier n'avait aucune session vérifiable après la connexion : ses tâches, heures et taux horaire étaient accessibles à quiconque connaissait son identifiant. Un jeton de connexion signé a été ajouté.</a:t>
             </a:r>
             <a:endParaRPr lang="en-US" sz="1100" dirty="0"/>
           </a:p>
@@ -17135,7 +17404,263 @@
       </p:sp>
       <p:sp>
         <p:nvSpPr>
-          <p:cNvPr id="9" name="Text 7"/>
+          <p:cNvPr id="9" name="Shape 7"/>
+          <p:cNvSpPr/>
+          <p:nvPr/>
+        </p:nvSpPr>
+        <p:spPr>
+          <a:xfrm>
+            <a:off x="640080" y="2926080"/>
+            <a:ext cx="10881360" cy="1097280"/>
+          </a:xfrm>
+          <a:prstGeom prst="roundRect">
+            <a:avLst>
+              <a:gd name="adj" fmla="val 5000"/>
+            </a:avLst>
+          </a:prstGeom>
+          <a:solidFill>
+            <a:srgbClr val="FFFFFF"/>
+          </a:solidFill>
+          <a:ln w="12700">
+            <a:solidFill>
+              <a:srgbClr val="E4DCCB"/>
+            </a:solidFill>
+            <a:prstDash val="solid"/>
+          </a:ln>
+        </p:spPr>
+      </p:sp>
+      <p:sp>
+        <p:nvSpPr>
+          <p:cNvPr id="10" name="Shape 8"/>
+          <p:cNvSpPr/>
+          <p:nvPr/>
+        </p:nvSpPr>
+        <p:spPr>
+          <a:xfrm>
+            <a:off x="640080" y="2926080"/>
+            <a:ext cx="54864" cy="1097280"/>
+          </a:xfrm>
+          <a:prstGeom prst="rect">
+            <a:avLst/>
+          </a:prstGeom>
+          <a:solidFill>
+            <a:srgbClr val="9A4C1F"/>
+          </a:solidFill>
+          <a:ln/>
+        </p:spPr>
+      </p:sp>
+      <p:sp>
+        <p:nvSpPr>
+          <p:cNvPr id="11" name="Text 9"/>
+          <p:cNvSpPr/>
+          <p:nvPr/>
+        </p:nvSpPr>
+        <p:spPr>
+          <a:xfrm>
+            <a:off x="914400" y="3035808"/>
+            <a:ext cx="10332720" cy="365760"/>
+          </a:xfrm>
+          <a:prstGeom prst="rect">
+            <a:avLst/>
+          </a:prstGeom>
+          <a:noFill/>
+          <a:ln/>
+        </p:spPr>
+        <p:txBody>
+          <a:bodyPr wrap="square" rtlCol="0" anchor="ctr"/>
+          <a:lstStyle/>
+          <a:p>
+            <a:pPr indent="0" marL="0">
+              <a:buNone/>
+            </a:pPr>
+            <a:r>
+              <a:rPr lang="en-US" sz="1400" b="1" dirty="0">
+                <a:solidFill>
+                  <a:srgbClr val="1B1F3B"/>
+                </a:solidFill>
+                <a:latin typeface="Segoe UI" pitchFamily="34" charset="0"/>
+                <a:ea typeface="Segoe UI" pitchFamily="34" charset="-122"/>
+                <a:cs typeface="Segoe UI" pitchFamily="34" charset="-120"/>
+              </a:rPr>
+              <a:t>Fuite de messages et mots de passe provisoires par email/SMS</a:t>
+            </a:r>
+            <a:endParaRPr lang="en-US" sz="1400" dirty="0"/>
+          </a:p>
+        </p:txBody>
+      </p:sp>
+      <p:sp>
+        <p:nvSpPr>
+          <p:cNvPr id="12" name="Text 10"/>
+          <p:cNvSpPr/>
+          <p:nvPr/>
+        </p:nvSpPr>
+        <p:spPr>
+          <a:xfrm>
+            <a:off x="914400" y="3383280"/>
+            <a:ext cx="10332720" cy="594360"/>
+          </a:xfrm>
+          <a:prstGeom prst="rect">
+            <a:avLst/>
+          </a:prstGeom>
+          <a:noFill/>
+          <a:ln/>
+        </p:spPr>
+        <p:txBody>
+          <a:bodyPr wrap="square" rtlCol="0" anchor="ctr"/>
+          <a:lstStyle/>
+          <a:p>
+            <a:pPr indent="0" marL="0">
+              <a:lnSpc>
+                <a:spcPts val="1400"/>
+              </a:lnSpc>
+              <a:buNone/>
+            </a:pPr>
+            <a:r>
+              <a:rPr lang="en-US" sz="1100" dirty="0">
+                <a:solidFill>
+                  <a:srgbClr val="8A7C68"/>
+                </a:solidFill>
+                <a:latin typeface="Segoe UI" pitchFamily="34" charset="0"/>
+                <a:ea typeface="Segoe UI" pitchFamily="34" charset="-122"/>
+                <a:cs typeface="Segoe UI" pitchFamily="34" charset="-120"/>
+              </a:rPr>
+              <a:t>Une route technique renvoyait tous les emails et SMS envoyés par l'application, tous chantiers et toutes entreprises confondus (dont des mots de passe provisoires en clair), dès qu'elle était appelée sans préciser de chantier. Corrigée : un chantier précis est désormais obligatoire, et seuls l'entreprise concernée ou son client peuvent consulter ses messages.</a:t>
+            </a:r>
+            <a:endParaRPr lang="en-US" sz="1100" dirty="0"/>
+          </a:p>
+        </p:txBody>
+      </p:sp>
+      <p:sp>
+        <p:nvSpPr>
+          <p:cNvPr id="13" name="Shape 11"/>
+          <p:cNvSpPr/>
+          <p:nvPr/>
+        </p:nvSpPr>
+        <p:spPr>
+          <a:xfrm>
+            <a:off x="640080" y="4160520"/>
+            <a:ext cx="10881360" cy="1097280"/>
+          </a:xfrm>
+          <a:prstGeom prst="roundRect">
+            <a:avLst>
+              <a:gd name="adj" fmla="val 5000"/>
+            </a:avLst>
+          </a:prstGeom>
+          <a:solidFill>
+            <a:srgbClr val="FFFFFF"/>
+          </a:solidFill>
+          <a:ln w="12700">
+            <a:solidFill>
+              <a:srgbClr val="E4DCCB"/>
+            </a:solidFill>
+            <a:prstDash val="solid"/>
+          </a:ln>
+        </p:spPr>
+      </p:sp>
+      <p:sp>
+        <p:nvSpPr>
+          <p:cNvPr id="14" name="Shape 12"/>
+          <p:cNvSpPr/>
+          <p:nvPr/>
+        </p:nvSpPr>
+        <p:spPr>
+          <a:xfrm>
+            <a:off x="640080" y="4160520"/>
+            <a:ext cx="54864" cy="1097280"/>
+          </a:xfrm>
+          <a:prstGeom prst="rect">
+            <a:avLst/>
+          </a:prstGeom>
+          <a:solidFill>
+            <a:srgbClr val="9A4C1F"/>
+          </a:solidFill>
+          <a:ln/>
+        </p:spPr>
+      </p:sp>
+      <p:sp>
+        <p:nvSpPr>
+          <p:cNvPr id="15" name="Text 13"/>
+          <p:cNvSpPr/>
+          <p:nvPr/>
+        </p:nvSpPr>
+        <p:spPr>
+          <a:xfrm>
+            <a:off x="914400" y="4270248"/>
+            <a:ext cx="10332720" cy="365760"/>
+          </a:xfrm>
+          <a:prstGeom prst="rect">
+            <a:avLst/>
+          </a:prstGeom>
+          <a:noFill/>
+          <a:ln/>
+        </p:spPr>
+        <p:txBody>
+          <a:bodyPr wrap="square" rtlCol="0" anchor="ctr"/>
+          <a:lstStyle/>
+          <a:p>
+            <a:pPr indent="0" marL="0">
+              <a:buNone/>
+            </a:pPr>
+            <a:r>
+              <a:rPr lang="en-US" sz="1400" b="1" dirty="0">
+                <a:solidFill>
+                  <a:srgbClr val="1B1F3B"/>
+                </a:solidFill>
+                <a:latin typeface="Segoe UI" pitchFamily="34" charset="0"/>
+                <a:ea typeface="Segoe UI" pitchFamily="34" charset="-122"/>
+                <a:cs typeface="Segoe UI" pitchFamily="34" charset="-120"/>
+              </a:rPr>
+              <a:t>Import de fourniture par lien sécurisé</a:t>
+            </a:r>
+            <a:endParaRPr lang="en-US" sz="1400" dirty="0"/>
+          </a:p>
+        </p:txBody>
+      </p:sp>
+      <p:sp>
+        <p:nvSpPr>
+          <p:cNvPr id="16" name="Text 14"/>
+          <p:cNvSpPr/>
+          <p:nvPr/>
+        </p:nvSpPr>
+        <p:spPr>
+          <a:xfrm>
+            <a:off x="914400" y="4617720"/>
+            <a:ext cx="10332720" cy="594360"/>
+          </a:xfrm>
+          <a:prstGeom prst="rect">
+            <a:avLst/>
+          </a:prstGeom>
+          <a:noFill/>
+          <a:ln/>
+        </p:spPr>
+        <p:txBody>
+          <a:bodyPr wrap="square" rtlCol="0" anchor="ctr"/>
+          <a:lstStyle/>
+          <a:p>
+            <a:pPr indent="0" marL="0">
+              <a:lnSpc>
+                <a:spcPts val="1400"/>
+              </a:lnSpc>
+              <a:buNone/>
+            </a:pPr>
+            <a:r>
+              <a:rPr lang="en-US" sz="1100" dirty="0">
+                <a:solidFill>
+                  <a:srgbClr val="8A7C68"/>
+                </a:solidFill>
+                <a:latin typeface="Segoe UI" pitchFamily="34" charset="0"/>
+                <a:ea typeface="Segoe UI" pitchFamily="34" charset="-122"/>
+                <a:cs typeface="Segoe UI" pitchFamily="34" charset="-120"/>
+              </a:rPr>
+              <a:t>L'outil qui récupère automatiquement les informations d'un produit à partir d'un lien pouvait être utilisé par n'importe qui, sans connexion, pour faire aller le serveur chercher n'importe quelle adresse — un risque d'abus classique. Restreint aux utilisateurs connectés et aux liens web valides uniquement.</a:t>
+            </a:r>
+            <a:endParaRPr lang="en-US" sz="1100" dirty="0"/>
+          </a:p>
+        </p:txBody>
+      </p:sp>
+      <p:sp>
+        <p:nvSpPr>
+          <p:cNvPr id="17" name="Text 15"/>
           <p:cNvSpPr/>
           <p:nvPr/>
         </p:nvSpPr>
@@ -17174,7 +17699,7 @@
       </p:sp>
       <p:sp>
         <p:nvSpPr>
-          <p:cNvPr id="10" name="Text 8"/>
+          <p:cNvPr id="18" name="Text 16"/>
           <p:cNvSpPr/>
           <p:nvPr/>
         </p:nvSpPr>
@@ -17225,7 +17750,7 @@
     <p:bg>
       <p:bgPr>
         <a:solidFill>
-          <a:srgbClr val="F3EEE3"/>
+          <a:srgbClr val="0B1030"/>
         </a:solidFill>
       </p:bgPr>
     </p:bg>
@@ -17251,16 +17776,14 @@
         </p:nvSpPr>
         <p:spPr>
           <a:xfrm>
-            <a:off x="640080" y="411480"/>
-            <a:ext cx="2377440" cy="365760"/>
-          </a:xfrm>
-          <a:prstGeom prst="roundRect">
-            <a:avLst>
-              <a:gd name="adj" fmla="val 50000"/>
-            </a:avLst>
+            <a:off x="0" y="3246120"/>
+            <a:ext cx="12191695" cy="54864"/>
+          </a:xfrm>
+          <a:prstGeom prst="rect">
+            <a:avLst/>
           </a:prstGeom>
           <a:solidFill>
-            <a:srgbClr val="E6EFE4"/>
+            <a:srgbClr val="386641"/>
           </a:solidFill>
           <a:ln/>
         </p:spPr>
@@ -17273,207 +17796,118 @@
         </p:nvSpPr>
         <p:spPr>
           <a:xfrm>
-            <a:off x="640080" y="411480"/>
-            <a:ext cx="2377440" cy="365760"/>
-          </a:xfrm>
-          <a:prstGeom prst="rect">
-            <a:avLst/>
-          </a:prstGeom>
-          <a:noFill/>
-          <a:ln/>
-        </p:spPr>
-        <p:txBody>
-          <a:bodyPr wrap="square" rtlCol="0" anchor="ctr"/>
-          <a:lstStyle/>
-          <a:p>
-            <a:pPr algn="ctr" indent="0" marL="0">
-              <a:buNone/>
-            </a:pPr>
-            <a:r>
-              <a:rPr lang="en-US" sz="1000" b="1" spc="100" kern="0" dirty="0">
-                <a:solidFill>
-                  <a:srgbClr val="386641"/>
-                </a:solidFill>
-                <a:latin typeface="Segoe UI" pitchFamily="34" charset="0"/>
-                <a:ea typeface="Segoe UI" pitchFamily="34" charset="-122"/>
-                <a:cs typeface="Segoe UI" pitchFamily="34" charset="-120"/>
-              </a:rPr>
-              <a:t>BASE DE DONNÉES</a:t>
-            </a:r>
-            <a:endParaRPr lang="en-US" sz="1000" dirty="0"/>
-          </a:p>
-        </p:txBody>
-      </p:sp>
-      <p:sp>
-        <p:nvSpPr>
-          <p:cNvPr id="4" name="Text 2"/>
-          <p:cNvSpPr/>
-          <p:nvPr/>
-        </p:nvSpPr>
-        <p:spPr>
-          <a:xfrm>
-            <a:off x="640080" y="868680"/>
-            <a:ext cx="10515600" cy="548640"/>
-          </a:xfrm>
-          <a:prstGeom prst="rect">
-            <a:avLst/>
-          </a:prstGeom>
-          <a:noFill/>
-          <a:ln/>
-        </p:spPr>
-        <p:txBody>
-          <a:bodyPr wrap="square" rtlCol="0" anchor="ctr"/>
-          <a:lstStyle/>
-          <a:p>
-            <a:pPr indent="0" marL="0">
-              <a:buNone/>
-            </a:pPr>
-            <a:r>
-              <a:rPr lang="en-US" sz="2400" b="1" dirty="0">
-                <a:solidFill>
-                  <a:srgbClr val="1B1F3B"/>
+            <a:off x="640080" y="2468880"/>
+            <a:ext cx="10058400" cy="914400"/>
+          </a:xfrm>
+          <a:prstGeom prst="rect">
+            <a:avLst/>
+          </a:prstGeom>
+          <a:noFill/>
+          <a:ln/>
+        </p:spPr>
+        <p:txBody>
+          <a:bodyPr wrap="square" rtlCol="0" anchor="ctr"/>
+          <a:lstStyle/>
+          <a:p>
+            <a:pPr indent="0" marL="0">
+              <a:buNone/>
+            </a:pPr>
+            <a:r>
+              <a:rPr lang="en-US" sz="3800" b="1" dirty="0">
+                <a:solidFill>
+                  <a:srgbClr val="FFFFFF"/>
                 </a:solidFill>
                 <a:latin typeface="Georgia" pitchFamily="34" charset="0"/>
                 <a:ea typeface="Georgia" pitchFamily="34" charset="-122"/>
                 <a:cs typeface="Georgia" pitchFamily="34" charset="-120"/>
               </a:rPr>
-              <a:t>Devis</a:t>
-            </a:r>
-            <a:endParaRPr lang="en-US" sz="2400" dirty="0"/>
-          </a:p>
-        </p:txBody>
-      </p:sp>
-      <p:sp>
-        <p:nvSpPr>
-          <p:cNvPr id="5" name="Shape 3"/>
-          <p:cNvSpPr/>
-          <p:nvPr/>
-        </p:nvSpPr>
-        <p:spPr>
-          <a:xfrm>
-            <a:off x="640080" y="1691640"/>
-            <a:ext cx="10881360" cy="1097280"/>
-          </a:xfrm>
-          <a:prstGeom prst="roundRect">
-            <a:avLst>
-              <a:gd name="adj" fmla="val 5000"/>
-            </a:avLst>
-          </a:prstGeom>
-          <a:solidFill>
-            <a:srgbClr val="FFFFFF"/>
-          </a:solidFill>
-          <a:ln w="12700">
-            <a:solidFill>
-              <a:srgbClr val="E4DCCB"/>
-            </a:solidFill>
-            <a:prstDash val="solid"/>
-          </a:ln>
-        </p:spPr>
-      </p:sp>
-      <p:sp>
-        <p:nvSpPr>
-          <p:cNvPr id="6" name="Shape 4"/>
-          <p:cNvSpPr/>
-          <p:nvPr/>
-        </p:nvSpPr>
-        <p:spPr>
-          <a:xfrm>
-            <a:off x="640080" y="1691640"/>
-            <a:ext cx="54864" cy="1097280"/>
-          </a:xfrm>
-          <a:prstGeom prst="rect">
-            <a:avLst/>
-          </a:prstGeom>
-          <a:solidFill>
-            <a:srgbClr val="386641"/>
-          </a:solidFill>
-          <a:ln/>
-        </p:spPr>
-      </p:sp>
-      <p:sp>
-        <p:nvSpPr>
-          <p:cNvPr id="7" name="Text 5"/>
-          <p:cNvSpPr/>
-          <p:nvPr/>
-        </p:nvSpPr>
-        <p:spPr>
-          <a:xfrm>
-            <a:off x="914400" y="1801368"/>
-            <a:ext cx="10332720" cy="365760"/>
-          </a:xfrm>
-          <a:prstGeom prst="rect">
-            <a:avLst/>
-          </a:prstGeom>
-          <a:noFill/>
-          <a:ln/>
-        </p:spPr>
-        <p:txBody>
-          <a:bodyPr wrap="square" rtlCol="0" anchor="ctr"/>
-          <a:lstStyle/>
-          <a:p>
-            <a:pPr indent="0" marL="0">
-              <a:buNone/>
-            </a:pPr>
-            <a:r>
-              <a:rPr lang="en-US" sz="1400" b="1" dirty="0">
-                <a:solidFill>
-                  <a:srgbClr val="1B1F3B"/>
-                </a:solidFill>
-                <a:latin typeface="Segoe UI" pitchFamily="34" charset="0"/>
-                <a:ea typeface="Segoe UI" pitchFamily="34" charset="-122"/>
-                <a:cs typeface="Segoe UI" pitchFamily="34" charset="-120"/>
-              </a:rPr>
-              <a:t>Migration des devis vers Supabase (table partagée)</a:t>
-            </a:r>
-            <a:endParaRPr lang="en-US" sz="1400" dirty="0"/>
-          </a:p>
-        </p:txBody>
-      </p:sp>
-      <p:sp>
-        <p:nvSpPr>
-          <p:cNvPr id="8" name="Text 6"/>
-          <p:cNvSpPr/>
-          <p:nvPr/>
-        </p:nvSpPr>
-        <p:spPr>
-          <a:xfrm>
-            <a:off x="914400" y="2148840"/>
-            <a:ext cx="10332720" cy="594360"/>
-          </a:xfrm>
-          <a:prstGeom prst="rect">
-            <a:avLst/>
-          </a:prstGeom>
-          <a:noFill/>
-          <a:ln/>
-        </p:spPr>
-        <p:txBody>
-          <a:bodyPr wrap="square" rtlCol="0" anchor="ctr"/>
-          <a:lstStyle/>
-          <a:p>
-            <a:pPr indent="0" marL="0">
-              <a:lnSpc>
-                <a:spcPts val="1400"/>
-              </a:lnSpc>
-              <a:buNone/>
-            </a:pPr>
-            <a:r>
-              <a:rPr lang="en-US" sz="1100" dirty="0">
-                <a:solidFill>
-                  <a:srgbClr val="8A7C68"/>
-                </a:solidFill>
-                <a:latin typeface="Segoe UI" pitchFamily="34" charset="0"/>
-                <a:ea typeface="Segoe UI" pitchFamily="34" charset="-122"/>
-                <a:cs typeface="Segoe UI" pitchFamily="34" charset="-120"/>
-              </a:rPr>
-              <a:t>Les devis créés sur le site web et sur l'application mobile (Firas) vivent désormais dans la même table Supabase 'quotes', avec un mapping bidirectionnel dédié (lib/quote-mapping.js).</a:t>
-            </a:r>
-            <a:endParaRPr lang="en-US" sz="1100" dirty="0"/>
-          </a:p>
-        </p:txBody>
-      </p:sp>
-      <p:sp>
-        <p:nvSpPr>
-          <p:cNvPr id="9" name="Text 7"/>
+              <a:t>Base de données</a:t>
+            </a:r>
+            <a:endParaRPr lang="en-US" sz="3800" dirty="0"/>
+          </a:p>
+        </p:txBody>
+      </p:sp>
+      <p:sp>
+        <p:nvSpPr>
+          <p:cNvPr id="4" name="Text 2"/>
+          <p:cNvSpPr/>
+          <p:nvPr/>
+        </p:nvSpPr>
+        <p:spPr>
+          <a:xfrm>
+            <a:off x="640080" y="3429000"/>
+            <a:ext cx="10058400" cy="457200"/>
+          </a:xfrm>
+          <a:prstGeom prst="rect">
+            <a:avLst/>
+          </a:prstGeom>
+          <a:noFill/>
+          <a:ln/>
+        </p:spPr>
+        <p:txBody>
+          <a:bodyPr wrap="square" rtlCol="0" anchor="ctr"/>
+          <a:lstStyle/>
+          <a:p>
+            <a:pPr indent="0" marL="0">
+              <a:buNone/>
+            </a:pPr>
+            <a:r>
+              <a:rPr lang="en-US" sz="1500" dirty="0">
+                <a:solidFill>
+                  <a:srgbClr val="C7C9E0"/>
+                </a:solidFill>
+                <a:latin typeface="Segoe UI" pitchFamily="34" charset="0"/>
+                <a:ea typeface="Segoe UI" pitchFamily="34" charset="-122"/>
+                <a:cs typeface="Segoe UI" pitchFamily="34" charset="-120"/>
+              </a:rPr>
+              <a:t>Modèle de données et infrastructure</a:t>
+            </a:r>
+            <a:endParaRPr lang="en-US" sz="1500" dirty="0"/>
+          </a:p>
+        </p:txBody>
+      </p:sp>
+      <p:sp>
+        <p:nvSpPr>
+          <p:cNvPr id="5" name="Text 3"/>
+          <p:cNvSpPr/>
+          <p:nvPr/>
+        </p:nvSpPr>
+        <p:spPr>
+          <a:xfrm>
+            <a:off x="640080" y="3931920"/>
+            <a:ext cx="5486400" cy="365760"/>
+          </a:xfrm>
+          <a:prstGeom prst="rect">
+            <a:avLst/>
+          </a:prstGeom>
+          <a:noFill/>
+          <a:ln/>
+        </p:spPr>
+        <p:txBody>
+          <a:bodyPr wrap="square" rtlCol="0" anchor="ctr"/>
+          <a:lstStyle/>
+          <a:p>
+            <a:pPr indent="0" marL="0">
+              <a:buNone/>
+            </a:pPr>
+            <a:r>
+              <a:rPr lang="en-US" sz="1200" b="1" dirty="0">
+                <a:solidFill>
+                  <a:srgbClr val="C9A96A"/>
+                </a:solidFill>
+                <a:latin typeface="Segoe UI" pitchFamily="34" charset="0"/>
+                <a:ea typeface="Segoe UI" pitchFamily="34" charset="-122"/>
+                <a:cs typeface="Segoe UI" pitchFamily="34" charset="-120"/>
+              </a:rPr>
+              <a:t>11 mise(s) à jour</a:t>
+            </a:r>
+            <a:endParaRPr lang="en-US" sz="1200" dirty="0"/>
+          </a:p>
+        </p:txBody>
+      </p:sp>
+      <p:sp>
+        <p:nvSpPr>
+          <p:cNvPr id="6" name="Text 4"/>
           <p:cNvSpPr/>
           <p:nvPr/>
         </p:nvSpPr>
@@ -17512,7 +17946,7 @@
       </p:sp>
       <p:sp>
         <p:nvSpPr>
-          <p:cNvPr id="10" name="Text 8"/>
+          <p:cNvPr id="7" name="Text 5"/>
           <p:cNvSpPr/>
           <p:nvPr/>
         </p:nvSpPr>
@@ -17675,7 +18109,7 @@
                 <a:ea typeface="Georgia" pitchFamily="34" charset="-122"/>
                 <a:cs typeface="Georgia" pitchFamily="34" charset="-120"/>
               </a:rPr>
-              <a:t>Chantiers</a:t>
+              <a:t>Fondations</a:t>
             </a:r>
             <a:endParaRPr lang="en-US" sz="2400" dirty="0"/>
           </a:p>
@@ -17761,7 +18195,7 @@
                 <a:ea typeface="Segoe UI" pitchFamily="34" charset="-122"/>
                 <a:cs typeface="Segoe UI" pitchFamily="34" charset="-120"/>
               </a:rPr>
-              <a:t>Connexion Supabase : chantiers, planning, fournitures</a:t>
+              <a:t>Connexion Vercel / configuration environnement</a:t>
             </a:r>
             <a:endParaRPr lang="en-US" sz="1400" dirty="0"/>
           </a:p>
@@ -17803,7 +18237,7 @@
                 <a:ea typeface="Segoe UI" pitchFamily="34" charset="-122"/>
                 <a:cs typeface="Segoe UI" pitchFamily="34" charset="-120"/>
               </a:rPr>
-              <a:t>Ces trois modules sont branchés sur la base partagée avec l'application mobile ; les comptes utilisateurs sont également partagés entre les deux plateformes.</a:t>
+              <a:t>Correction de la configuration d'authentification et du SMTP sur l'environnement de production Vercel.</a:t>
             </a:r>
             <a:endParaRPr lang="en-US" sz="1100" dirty="0"/>
           </a:p>
@@ -18013,7 +18447,7 @@
                 <a:ea typeface="Georgia" pitchFamily="34" charset="-122"/>
                 <a:cs typeface="Georgia" pitchFamily="34" charset="-120"/>
               </a:rPr>
-              <a:t>Équipe</a:t>
+              <a:t>Devis</a:t>
             </a:r>
             <a:endParaRPr lang="en-US" sz="2400" dirty="0"/>
           </a:p>
@@ -18099,7 +18533,7 @@
                 <a:ea typeface="Segoe UI" pitchFamily="34" charset="-122"/>
                 <a:cs typeface="Segoe UI" pitchFamily="34" charset="-120"/>
               </a:rPr>
-              <a:t>Nouvelle donnée : heures contractuelles par ouvrier</a:t>
+              <a:t>Migration des devis vers Supabase (table partagée)</a:t>
             </a:r>
             <a:endParaRPr lang="en-US" sz="1400" dirty="0"/>
           </a:p>
@@ -18141,7 +18575,7 @@
                 <a:ea typeface="Segoe UI" pitchFamily="34" charset="-122"/>
                 <a:cs typeface="Segoe UI" pitchFamily="34" charset="-120"/>
               </a:rPr>
-              <a:t>Ajout d'un paramètre 'heures contractuelles / semaine' (35h par défaut) sur chaque fiche ouvrier, utilisé pour le calcul des écarts.</a:t>
+              <a:t>Les devis créés sur le site web et sur l'application mobile (Firas) vivent désormais dans la même table Supabase 'quotes', avec un mapping bidirectionnel dédié (lib/quote-mapping.js).</a:t>
             </a:r>
             <a:endParaRPr lang="en-US" sz="1100" dirty="0"/>
           </a:p>
@@ -18351,7 +18785,7 @@
                 <a:ea typeface="Georgia" pitchFamily="34" charset="-122"/>
                 <a:cs typeface="Georgia" pitchFamily="34" charset="-120"/>
               </a:rPr>
-              <a:t>Accueil &amp; stabilité</a:t>
+              <a:t>Chantiers</a:t>
             </a:r>
             <a:endParaRPr lang="en-US" sz="2400" dirty="0"/>
           </a:p>
@@ -18437,7 +18871,7 @@
                 <a:ea typeface="Segoe UI" pitchFamily="34" charset="-122"/>
                 <a:cs typeface="Segoe UI" pitchFamily="34" charset="-120"/>
               </a:rPr>
-              <a:t>Nettoyage du backend</a:t>
+              <a:t>Connexion Supabase : chantiers, planning, fournitures</a:t>
             </a:r>
             <a:endParaRPr lang="en-US" sz="1400" dirty="0"/>
           </a:p>
@@ -18479,7 +18913,7 @@
                 <a:ea typeface="Segoe UI" pitchFamily="34" charset="-122"/>
                 <a:cs typeface="Segoe UI" pitchFamily="34" charset="-120"/>
               </a:rPr>
-              <a:t>Audit complet des routes serveur : suppression du code mort (module Marketplace), vérification de la cohérence entre données locales et données Supabase sur l'ensemble de l'application.</a:t>
+              <a:t>Ces trois modules sont branchés sur la base partagée avec l'application mobile ; les comptes utilisateurs sont également partagés entre les deux plateformes.</a:t>
             </a:r>
             <a:endParaRPr lang="en-US" sz="1100" dirty="0"/>
           </a:p>
@@ -18689,7 +19123,7 @@
                 <a:ea typeface="Georgia" pitchFamily="34" charset="-122"/>
                 <a:cs typeface="Georgia" pitchFamily="34" charset="-120"/>
               </a:rPr>
-              <a:t>Maintenance technique</a:t>
+              <a:t>Équipe</a:t>
             </a:r>
             <a:endParaRPr lang="en-US" sz="2400" dirty="0"/>
           </a:p>
@@ -18775,7 +19209,7 @@
                 <a:ea typeface="Segoe UI" pitchFamily="34" charset="-122"/>
                 <a:cs typeface="Segoe UI" pitchFamily="34" charset="-120"/>
               </a:rPr>
-              <a:t>Nettoyage approfondi du code</a:t>
+              <a:t>Nouvelle donnée : heures contractuelles par ouvrier</a:t>
             </a:r>
             <a:endParaRPr lang="en-US" sz="1400" dirty="0"/>
           </a:p>
@@ -18817,7 +19251,7 @@
                 <a:ea typeface="Segoe UI" pitchFamily="34" charset="-122"/>
                 <a:cs typeface="Segoe UI" pitchFamily="34" charset="-120"/>
               </a:rPr>
-              <a:t>Audit complet du projet (pages, routes, fonctions, dépendances) pour repérer tout ce qui n'était plus utilisé ; suppression de 6 pages orphelines (onboarding, welcome, compte, anciennes pages devis en 3 étapes), d'une route de connexion de démonstration, d'un dossier de composants dupliqué obsolète, de plusieurs fonctions inutilisées et d'une dépendance logicielle non utilisée — sans toucher aux fonctionnalités actives.</a:t>
+              <a:t>Ajout d'un paramètre 'heures contractuelles / semaine' (35h par défaut) sur chaque fiche ouvrier, utilisé pour le calcul des écarts.</a:t>
             </a:r>
             <a:endParaRPr lang="en-US" sz="1100" dirty="0"/>
           </a:p>
@@ -18825,263 +19259,7 @@
       </p:sp>
       <p:sp>
         <p:nvSpPr>
-          <p:cNvPr id="9" name="Shape 7"/>
-          <p:cNvSpPr/>
-          <p:nvPr/>
-        </p:nvSpPr>
-        <p:spPr>
-          <a:xfrm>
-            <a:off x="640080" y="2926080"/>
-            <a:ext cx="10881360" cy="1097280"/>
-          </a:xfrm>
-          <a:prstGeom prst="roundRect">
-            <a:avLst>
-              <a:gd name="adj" fmla="val 5000"/>
-            </a:avLst>
-          </a:prstGeom>
-          <a:solidFill>
-            <a:srgbClr val="FFFFFF"/>
-          </a:solidFill>
-          <a:ln w="12700">
-            <a:solidFill>
-              <a:srgbClr val="E4DCCB"/>
-            </a:solidFill>
-            <a:prstDash val="solid"/>
-          </a:ln>
-        </p:spPr>
-      </p:sp>
-      <p:sp>
-        <p:nvSpPr>
-          <p:cNvPr id="10" name="Shape 8"/>
-          <p:cNvSpPr/>
-          <p:nvPr/>
-        </p:nvSpPr>
-        <p:spPr>
-          <a:xfrm>
-            <a:off x="640080" y="2926080"/>
-            <a:ext cx="54864" cy="1097280"/>
-          </a:xfrm>
-          <a:prstGeom prst="rect">
-            <a:avLst/>
-          </a:prstGeom>
-          <a:solidFill>
-            <a:srgbClr val="386641"/>
-          </a:solidFill>
-          <a:ln/>
-        </p:spPr>
-      </p:sp>
-      <p:sp>
-        <p:nvSpPr>
-          <p:cNvPr id="11" name="Text 9"/>
-          <p:cNvSpPr/>
-          <p:nvPr/>
-        </p:nvSpPr>
-        <p:spPr>
-          <a:xfrm>
-            <a:off x="914400" y="3035808"/>
-            <a:ext cx="10332720" cy="365760"/>
-          </a:xfrm>
-          <a:prstGeom prst="rect">
-            <a:avLst/>
-          </a:prstGeom>
-          <a:noFill/>
-          <a:ln/>
-        </p:spPr>
-        <p:txBody>
-          <a:bodyPr wrap="square" rtlCol="0" anchor="ctr"/>
-          <a:lstStyle/>
-          <a:p>
-            <a:pPr indent="0" marL="0">
-              <a:buNone/>
-            </a:pPr>
-            <a:r>
-              <a:rPr lang="en-US" sz="1400" b="1" dirty="0">
-                <a:solidFill>
-                  <a:srgbClr val="1B1F3B"/>
-                </a:solidFill>
-                <a:latin typeface="Segoe UI" pitchFamily="34" charset="0"/>
-                <a:ea typeface="Segoe UI" pitchFamily="34" charset="-122"/>
-                <a:cs typeface="Segoe UI" pitchFamily="34" charset="-120"/>
-              </a:rPr>
-              <a:t>Suppression de code mort dans la génération de devis</a:t>
-            </a:r>
-            <a:endParaRPr lang="en-US" sz="1400" dirty="0"/>
-          </a:p>
-        </p:txBody>
-      </p:sp>
-      <p:sp>
-        <p:nvSpPr>
-          <p:cNvPr id="12" name="Text 10"/>
-          <p:cNvSpPr/>
-          <p:nvPr/>
-        </p:nvSpPr>
-        <p:spPr>
-          <a:xfrm>
-            <a:off x="914400" y="3383280"/>
-            <a:ext cx="10332720" cy="594360"/>
-          </a:xfrm>
-          <a:prstGeom prst="rect">
-            <a:avLst/>
-          </a:prstGeom>
-          <a:noFill/>
-          <a:ln/>
-        </p:spPr>
-        <p:txBody>
-          <a:bodyPr wrap="square" rtlCol="0" anchor="ctr"/>
-          <a:lstStyle/>
-          <a:p>
-            <a:pPr indent="0" marL="0">
-              <a:lnSpc>
-                <a:spcPts val="1400"/>
-              </a:lnSpc>
-              <a:buNone/>
-            </a:pPr>
-            <a:r>
-              <a:rPr lang="en-US" sz="1100" dirty="0">
-                <a:solidFill>
-                  <a:srgbClr val="8A7C68"/>
-                </a:solidFill>
-                <a:latin typeface="Segoe UI" pitchFamily="34" charset="0"/>
-                <a:ea typeface="Segoe UI" pitchFamily="34" charset="-122"/>
-                <a:cs typeface="Segoe UI" pitchFamily="34" charset="-120"/>
-              </a:rPr>
-              <a:t>Un ancien générateur de devis PDF, devenu inaccessible après une précédente refonte (code jamais exécuté), a été retiré du fichier technique de génération de documents.</a:t>
-            </a:r>
-            <a:endParaRPr lang="en-US" sz="1100" dirty="0"/>
-          </a:p>
-        </p:txBody>
-      </p:sp>
-      <p:sp>
-        <p:nvSpPr>
-          <p:cNvPr id="13" name="Shape 11"/>
-          <p:cNvSpPr/>
-          <p:nvPr/>
-        </p:nvSpPr>
-        <p:spPr>
-          <a:xfrm>
-            <a:off x="640080" y="4160520"/>
-            <a:ext cx="10881360" cy="1097280"/>
-          </a:xfrm>
-          <a:prstGeom prst="roundRect">
-            <a:avLst>
-              <a:gd name="adj" fmla="val 5000"/>
-            </a:avLst>
-          </a:prstGeom>
-          <a:solidFill>
-            <a:srgbClr val="FFFFFF"/>
-          </a:solidFill>
-          <a:ln w="12700">
-            <a:solidFill>
-              <a:srgbClr val="E4DCCB"/>
-            </a:solidFill>
-            <a:prstDash val="solid"/>
-          </a:ln>
-        </p:spPr>
-      </p:sp>
-      <p:sp>
-        <p:nvSpPr>
-          <p:cNvPr id="14" name="Shape 12"/>
-          <p:cNvSpPr/>
-          <p:nvPr/>
-        </p:nvSpPr>
-        <p:spPr>
-          <a:xfrm>
-            <a:off x="640080" y="4160520"/>
-            <a:ext cx="54864" cy="1097280"/>
-          </a:xfrm>
-          <a:prstGeom prst="rect">
-            <a:avLst/>
-          </a:prstGeom>
-          <a:solidFill>
-            <a:srgbClr val="386641"/>
-          </a:solidFill>
-          <a:ln/>
-        </p:spPr>
-      </p:sp>
-      <p:sp>
-        <p:nvSpPr>
-          <p:cNvPr id="15" name="Text 13"/>
-          <p:cNvSpPr/>
-          <p:nvPr/>
-        </p:nvSpPr>
-        <p:spPr>
-          <a:xfrm>
-            <a:off x="914400" y="4270248"/>
-            <a:ext cx="10332720" cy="365760"/>
-          </a:xfrm>
-          <a:prstGeom prst="rect">
-            <a:avLst/>
-          </a:prstGeom>
-          <a:noFill/>
-          <a:ln/>
-        </p:spPr>
-        <p:txBody>
-          <a:bodyPr wrap="square" rtlCol="0" anchor="ctr"/>
-          <a:lstStyle/>
-          <a:p>
-            <a:pPr indent="0" marL="0">
-              <a:buNone/>
-            </a:pPr>
-            <a:r>
-              <a:rPr lang="en-US" sz="1400" b="1" dirty="0">
-                <a:solidFill>
-                  <a:srgbClr val="1B1F3B"/>
-                </a:solidFill>
-                <a:latin typeface="Segoe UI" pitchFamily="34" charset="0"/>
-                <a:ea typeface="Segoe UI" pitchFamily="34" charset="-122"/>
-                <a:cs typeface="Segoe UI" pitchFamily="34" charset="-120"/>
-              </a:rPr>
-              <a:t>Suppression de code mort dans l'export Word des devis</a:t>
-            </a:r>
-            <a:endParaRPr lang="en-US" sz="1400" dirty="0"/>
-          </a:p>
-        </p:txBody>
-      </p:sp>
-      <p:sp>
-        <p:nvSpPr>
-          <p:cNvPr id="16" name="Text 14"/>
-          <p:cNvSpPr/>
-          <p:nvPr/>
-        </p:nvSpPr>
-        <p:spPr>
-          <a:xfrm>
-            <a:off x="914400" y="4617720"/>
-            <a:ext cx="10332720" cy="594360"/>
-          </a:xfrm>
-          <a:prstGeom prst="rect">
-            <a:avLst/>
-          </a:prstGeom>
-          <a:noFill/>
-          <a:ln/>
-        </p:spPr>
-        <p:txBody>
-          <a:bodyPr wrap="square" rtlCol="0" anchor="ctr"/>
-          <a:lstStyle/>
-          <a:p>
-            <a:pPr indent="0" marL="0">
-              <a:lnSpc>
-                <a:spcPts val="1400"/>
-              </a:lnSpc>
-              <a:buNone/>
-            </a:pPr>
-            <a:r>
-              <a:rPr lang="en-US" sz="1100" dirty="0">
-                <a:solidFill>
-                  <a:srgbClr val="8A7C68"/>
-                </a:solidFill>
-                <a:latin typeface="Segoe UI" pitchFamily="34" charset="0"/>
-                <a:ea typeface="Segoe UI" pitchFamily="34" charset="-122"/>
-                <a:cs typeface="Segoe UI" pitchFamily="34" charset="-120"/>
-              </a:rPr>
-              <a:t>Un second bloc de génération de document, devenu inaccessible après une précédente refonte (jamais exécuté), a été retiré du fichier technique de génération de documents.</a:t>
-            </a:r>
-            <a:endParaRPr lang="en-US" sz="1100" dirty="0"/>
-          </a:p>
-        </p:txBody>
-      </p:sp>
-      <p:sp>
-        <p:nvSpPr>
-          <p:cNvPr id="17" name="Text 15"/>
+          <p:cNvPr id="9" name="Text 7"/>
           <p:cNvSpPr/>
           <p:nvPr/>
         </p:nvSpPr>
@@ -19120,7 +19298,7 @@
       </p:sp>
       <p:sp>
         <p:nvSpPr>
-          <p:cNvPr id="18" name="Text 16"/>
+          <p:cNvPr id="10" name="Text 8"/>
           <p:cNvSpPr/>
           <p:nvPr/>
         </p:nvSpPr>
@@ -19283,7 +19461,7 @@
                 <a:ea typeface="Georgia" pitchFamily="34" charset="-122"/>
                 <a:cs typeface="Georgia" pitchFamily="34" charset="-120"/>
               </a:rPr>
-              <a:t>Sécurité</a:t>
+              <a:t>Accueil &amp; stabilité</a:t>
             </a:r>
             <a:endParaRPr lang="en-US" sz="2400" dirty="0"/>
           </a:p>
@@ -19369,7 +19547,7 @@
                 <a:ea typeface="Segoe UI" pitchFamily="34" charset="-122"/>
                 <a:cs typeface="Segoe UI" pitchFamily="34" charset="-120"/>
               </a:rPr>
-              <a:t>Base de données partagée verrouillée</a:t>
+              <a:t>Nettoyage du backend</a:t>
             </a:r>
             <a:endParaRPr lang="en-US" sz="1400" dirty="0"/>
           </a:p>
@@ -19411,7 +19589,7 @@
                 <a:ea typeface="Segoe UI" pitchFamily="34" charset="-122"/>
                 <a:cs typeface="Segoe UI" pitchFamily="34" charset="-120"/>
               </a:rPr>
-              <a:t>La table contenant l'essentiel des données de l'application était lisible par n'importe qui sur internet avec la simple clé publique du site, sans connexion. L'application y accède désormais avec une clé privée réservée au serveur, ce qui permet de fermer complètement l'accès public sans rien casser.</a:t>
+              <a:t>Audit complet des routes serveur : suppression du code mort (module Marketplace), vérification de la cohérence entre données locales et données Supabase sur l'ensemble de l'application.</a:t>
             </a:r>
             <a:endParaRPr lang="en-US" sz="1100" dirty="0"/>
           </a:p>
@@ -19419,135 +19597,7 @@
       </p:sp>
       <p:sp>
         <p:nvSpPr>
-          <p:cNvPr id="9" name="Shape 7"/>
-          <p:cNvSpPr/>
-          <p:nvPr/>
-        </p:nvSpPr>
-        <p:spPr>
-          <a:xfrm>
-            <a:off x="640080" y="2926080"/>
-            <a:ext cx="10881360" cy="1097280"/>
-          </a:xfrm>
-          <a:prstGeom prst="roundRect">
-            <a:avLst>
-              <a:gd name="adj" fmla="val 5000"/>
-            </a:avLst>
-          </a:prstGeom>
-          <a:solidFill>
-            <a:srgbClr val="FFFFFF"/>
-          </a:solidFill>
-          <a:ln w="12700">
-            <a:solidFill>
-              <a:srgbClr val="E4DCCB"/>
-            </a:solidFill>
-            <a:prstDash val="solid"/>
-          </a:ln>
-        </p:spPr>
-      </p:sp>
-      <p:sp>
-        <p:nvSpPr>
-          <p:cNvPr id="10" name="Shape 8"/>
-          <p:cNvSpPr/>
-          <p:nvPr/>
-        </p:nvSpPr>
-        <p:spPr>
-          <a:xfrm>
-            <a:off x="640080" y="2926080"/>
-            <a:ext cx="54864" cy="1097280"/>
-          </a:xfrm>
-          <a:prstGeom prst="rect">
-            <a:avLst/>
-          </a:prstGeom>
-          <a:solidFill>
-            <a:srgbClr val="386641"/>
-          </a:solidFill>
-          <a:ln/>
-        </p:spPr>
-      </p:sp>
-      <p:sp>
-        <p:nvSpPr>
-          <p:cNvPr id="11" name="Text 9"/>
-          <p:cNvSpPr/>
-          <p:nvPr/>
-        </p:nvSpPr>
-        <p:spPr>
-          <a:xfrm>
-            <a:off x="914400" y="3035808"/>
-            <a:ext cx="10332720" cy="365760"/>
-          </a:xfrm>
-          <a:prstGeom prst="rect">
-            <a:avLst/>
-          </a:prstGeom>
-          <a:noFill/>
-          <a:ln/>
-        </p:spPr>
-        <p:txBody>
-          <a:bodyPr wrap="square" rtlCol="0" anchor="ctr"/>
-          <a:lstStyle/>
-          <a:p>
-            <a:pPr indent="0" marL="0">
-              <a:buNone/>
-            </a:pPr>
-            <a:r>
-              <a:rPr lang="en-US" sz="1400" b="1" dirty="0">
-                <a:solidFill>
-                  <a:srgbClr val="1B1F3B"/>
-                </a:solidFill>
-                <a:latin typeface="Segoe UI" pitchFamily="34" charset="0"/>
-                <a:ea typeface="Segoe UI" pitchFamily="34" charset="-122"/>
-                <a:cs typeface="Segoe UI" pitchFamily="34" charset="-120"/>
-              </a:rPr>
-              <a:t>Fichier de base de données retiré du dépôt Git</a:t>
-            </a:r>
-            <a:endParaRPr lang="en-US" sz="1400" dirty="0"/>
-          </a:p>
-        </p:txBody>
-      </p:sp>
-      <p:sp>
-        <p:nvSpPr>
-          <p:cNvPr id="12" name="Text 10"/>
-          <p:cNvSpPr/>
-          <p:nvPr/>
-        </p:nvSpPr>
-        <p:spPr>
-          <a:xfrm>
-            <a:off x="914400" y="3383280"/>
-            <a:ext cx="10332720" cy="594360"/>
-          </a:xfrm>
-          <a:prstGeom prst="rect">
-            <a:avLst/>
-          </a:prstGeom>
-          <a:noFill/>
-          <a:ln/>
-        </p:spPr>
-        <p:txBody>
-          <a:bodyPr wrap="square" rtlCol="0" anchor="ctr"/>
-          <a:lstStyle/>
-          <a:p>
-            <a:pPr indent="0" marL="0">
-              <a:lnSpc>
-                <a:spcPts val="1400"/>
-              </a:lnSpc>
-              <a:buNone/>
-            </a:pPr>
-            <a:r>
-              <a:rPr lang="en-US" sz="1100" dirty="0">
-                <a:solidFill>
-                  <a:srgbClr val="8A7C68"/>
-                </a:solidFill>
-                <a:latin typeface="Segoe UI" pitchFamily="34" charset="0"/>
-                <a:ea typeface="Segoe UI" pitchFamily="34" charset="-122"/>
-                <a:cs typeface="Segoe UI" pitchFamily="34" charset="-120"/>
-              </a:rPr>
-              <a:t>Un fichier contenant une copie complète de la base de données de développement, avec des mots de passe réels en clair, était suivi par Git depuis plusieurs mois. Retiré du suivi et exclu définitivement.</a:t>
-            </a:r>
-            <a:endParaRPr lang="en-US" sz="1100" dirty="0"/>
-          </a:p>
-        </p:txBody>
-      </p:sp>
-      <p:sp>
-        <p:nvSpPr>
-          <p:cNvPr id="13" name="Text 11"/>
+          <p:cNvPr id="9" name="Text 7"/>
           <p:cNvSpPr/>
           <p:nvPr/>
         </p:nvSpPr>
@@ -19586,7 +19636,7 @@
       </p:sp>
       <p:sp>
         <p:nvSpPr>
-          <p:cNvPr id="14" name="Text 12"/>
+          <p:cNvPr id="10" name="Text 8"/>
           <p:cNvSpPr/>
           <p:nvPr/>
         </p:nvSpPr>
@@ -19637,7 +19687,7 @@
     <p:bg>
       <p:bgPr>
         <a:solidFill>
-          <a:srgbClr val="0B1030"/>
+          <a:srgbClr val="F3EEE3"/>
         </a:solidFill>
       </p:bgPr>
     </p:bg>
@@ -19657,79 +19707,563 @@
       </p:grpSpPr>
       <p:sp>
         <p:nvSpPr>
-          <p:cNvPr id="2" name="Text 0"/>
-          <p:cNvSpPr/>
-          <p:nvPr/>
-        </p:nvSpPr>
-        <p:spPr>
-          <a:xfrm>
-            <a:off x="640080" y="2651760"/>
-            <a:ext cx="7315200" cy="914400"/>
-          </a:xfrm>
-          <a:prstGeom prst="rect">
-            <a:avLst/>
-          </a:prstGeom>
-          <a:noFill/>
-          <a:ln/>
-        </p:spPr>
-        <p:txBody>
-          <a:bodyPr wrap="square" rtlCol="0" anchor="ctr"/>
-          <a:lstStyle/>
-          <a:p>
-            <a:pPr indent="0" marL="0">
-              <a:buNone/>
-            </a:pPr>
-            <a:r>
-              <a:rPr lang="en-US" sz="4000" b="1" dirty="0">
-                <a:solidFill>
-                  <a:srgbClr val="FFFFFF"/>
+          <p:cNvPr id="2" name="Shape 0"/>
+          <p:cNvSpPr/>
+          <p:nvPr/>
+        </p:nvSpPr>
+        <p:spPr>
+          <a:xfrm>
+            <a:off x="640080" y="411480"/>
+            <a:ext cx="2377440" cy="365760"/>
+          </a:xfrm>
+          <a:prstGeom prst="roundRect">
+            <a:avLst>
+              <a:gd name="adj" fmla="val 50000"/>
+            </a:avLst>
+          </a:prstGeom>
+          <a:solidFill>
+            <a:srgbClr val="E6EFE4"/>
+          </a:solidFill>
+          <a:ln/>
+        </p:spPr>
+      </p:sp>
+      <p:sp>
+        <p:nvSpPr>
+          <p:cNvPr id="3" name="Text 1"/>
+          <p:cNvSpPr/>
+          <p:nvPr/>
+        </p:nvSpPr>
+        <p:spPr>
+          <a:xfrm>
+            <a:off x="640080" y="411480"/>
+            <a:ext cx="2377440" cy="365760"/>
+          </a:xfrm>
+          <a:prstGeom prst="rect">
+            <a:avLst/>
+          </a:prstGeom>
+          <a:noFill/>
+          <a:ln/>
+        </p:spPr>
+        <p:txBody>
+          <a:bodyPr wrap="square" rtlCol="0" anchor="ctr"/>
+          <a:lstStyle/>
+          <a:p>
+            <a:pPr algn="ctr" indent="0" marL="0">
+              <a:buNone/>
+            </a:pPr>
+            <a:r>
+              <a:rPr lang="en-US" sz="1000" b="1" spc="100" kern="0" dirty="0">
+                <a:solidFill>
+                  <a:srgbClr val="386641"/>
+                </a:solidFill>
+                <a:latin typeface="Segoe UI" pitchFamily="34" charset="0"/>
+                <a:ea typeface="Segoe UI" pitchFamily="34" charset="-122"/>
+                <a:cs typeface="Segoe UI" pitchFamily="34" charset="-120"/>
+              </a:rPr>
+              <a:t>BASE DE DONNÉES</a:t>
+            </a:r>
+            <a:endParaRPr lang="en-US" sz="1000" dirty="0"/>
+          </a:p>
+        </p:txBody>
+      </p:sp>
+      <p:sp>
+        <p:nvSpPr>
+          <p:cNvPr id="4" name="Text 2"/>
+          <p:cNvSpPr/>
+          <p:nvPr/>
+        </p:nvSpPr>
+        <p:spPr>
+          <a:xfrm>
+            <a:off x="640080" y="868680"/>
+            <a:ext cx="10515600" cy="548640"/>
+          </a:xfrm>
+          <a:prstGeom prst="rect">
+            <a:avLst/>
+          </a:prstGeom>
+          <a:noFill/>
+          <a:ln/>
+        </p:spPr>
+        <p:txBody>
+          <a:bodyPr wrap="square" rtlCol="0" anchor="ctr"/>
+          <a:lstStyle/>
+          <a:p>
+            <a:pPr indent="0" marL="0">
+              <a:buNone/>
+            </a:pPr>
+            <a:r>
+              <a:rPr lang="en-US" sz="2400" b="1" dirty="0">
+                <a:solidFill>
+                  <a:srgbClr val="1B1F3B"/>
                 </a:solidFill>
                 <a:latin typeface="Georgia" pitchFamily="34" charset="0"/>
                 <a:ea typeface="Georgia" pitchFamily="34" charset="-122"/>
                 <a:cs typeface="Georgia" pitchFamily="34" charset="-120"/>
               </a:rPr>
-              <a:t>Merci</a:t>
-            </a:r>
-            <a:endParaRPr lang="en-US" sz="4000" dirty="0"/>
-          </a:p>
-        </p:txBody>
-      </p:sp>
-      <p:sp>
-        <p:nvSpPr>
-          <p:cNvPr id="3" name="Text 1"/>
-          <p:cNvSpPr/>
-          <p:nvPr/>
-        </p:nvSpPr>
-        <p:spPr>
-          <a:xfrm>
-            <a:off x="640080" y="3566160"/>
-            <a:ext cx="9144000" cy="548640"/>
-          </a:xfrm>
-          <a:prstGeom prst="rect">
-            <a:avLst/>
-          </a:prstGeom>
-          <a:noFill/>
-          <a:ln/>
-        </p:spPr>
-        <p:txBody>
-          <a:bodyPr wrap="square" rtlCol="0" anchor="ctr"/>
-          <a:lstStyle/>
-          <a:p>
-            <a:pPr indent="0" marL="0">
-              <a:buNone/>
-            </a:pPr>
-            <a:r>
-              <a:rPr lang="en-US" sz="1300" dirty="0">
-                <a:solidFill>
-                  <a:srgbClr val="C7C9E0"/>
-                </a:solidFill>
-                <a:latin typeface="Segoe UI" pitchFamily="34" charset="0"/>
-                <a:ea typeface="Segoe UI" pitchFamily="34" charset="-122"/>
-                <a:cs typeface="Segoe UI" pitchFamily="34" charset="-120"/>
-              </a:rPr>
-              <a:t>Document généré automatiquement à partir de l'historique de développement du projet.</a:t>
-            </a:r>
-            <a:endParaRPr lang="en-US" sz="1300" dirty="0"/>
+              <a:t>Maintenance technique</a:t>
+            </a:r>
+            <a:endParaRPr lang="en-US" sz="2400" dirty="0"/>
+          </a:p>
+        </p:txBody>
+      </p:sp>
+      <p:sp>
+        <p:nvSpPr>
+          <p:cNvPr id="5" name="Shape 3"/>
+          <p:cNvSpPr/>
+          <p:nvPr/>
+        </p:nvSpPr>
+        <p:spPr>
+          <a:xfrm>
+            <a:off x="640080" y="1691640"/>
+            <a:ext cx="10881360" cy="1097280"/>
+          </a:xfrm>
+          <a:prstGeom prst="roundRect">
+            <a:avLst>
+              <a:gd name="adj" fmla="val 5000"/>
+            </a:avLst>
+          </a:prstGeom>
+          <a:solidFill>
+            <a:srgbClr val="FFFFFF"/>
+          </a:solidFill>
+          <a:ln w="12700">
+            <a:solidFill>
+              <a:srgbClr val="E4DCCB"/>
+            </a:solidFill>
+            <a:prstDash val="solid"/>
+          </a:ln>
+        </p:spPr>
+      </p:sp>
+      <p:sp>
+        <p:nvSpPr>
+          <p:cNvPr id="6" name="Shape 4"/>
+          <p:cNvSpPr/>
+          <p:nvPr/>
+        </p:nvSpPr>
+        <p:spPr>
+          <a:xfrm>
+            <a:off x="640080" y="1691640"/>
+            <a:ext cx="54864" cy="1097280"/>
+          </a:xfrm>
+          <a:prstGeom prst="rect">
+            <a:avLst/>
+          </a:prstGeom>
+          <a:solidFill>
+            <a:srgbClr val="386641"/>
+          </a:solidFill>
+          <a:ln/>
+        </p:spPr>
+      </p:sp>
+      <p:sp>
+        <p:nvSpPr>
+          <p:cNvPr id="7" name="Text 5"/>
+          <p:cNvSpPr/>
+          <p:nvPr/>
+        </p:nvSpPr>
+        <p:spPr>
+          <a:xfrm>
+            <a:off x="914400" y="1801368"/>
+            <a:ext cx="10332720" cy="365760"/>
+          </a:xfrm>
+          <a:prstGeom prst="rect">
+            <a:avLst/>
+          </a:prstGeom>
+          <a:noFill/>
+          <a:ln/>
+        </p:spPr>
+        <p:txBody>
+          <a:bodyPr wrap="square" rtlCol="0" anchor="ctr"/>
+          <a:lstStyle/>
+          <a:p>
+            <a:pPr indent="0" marL="0">
+              <a:buNone/>
+            </a:pPr>
+            <a:r>
+              <a:rPr lang="en-US" sz="1400" b="1" dirty="0">
+                <a:solidFill>
+                  <a:srgbClr val="1B1F3B"/>
+                </a:solidFill>
+                <a:latin typeface="Segoe UI" pitchFamily="34" charset="0"/>
+                <a:ea typeface="Segoe UI" pitchFamily="34" charset="-122"/>
+                <a:cs typeface="Segoe UI" pitchFamily="34" charset="-120"/>
+              </a:rPr>
+              <a:t>Nettoyage approfondi du code</a:t>
+            </a:r>
+            <a:endParaRPr lang="en-US" sz="1400" dirty="0"/>
+          </a:p>
+        </p:txBody>
+      </p:sp>
+      <p:sp>
+        <p:nvSpPr>
+          <p:cNvPr id="8" name="Text 6"/>
+          <p:cNvSpPr/>
+          <p:nvPr/>
+        </p:nvSpPr>
+        <p:spPr>
+          <a:xfrm>
+            <a:off x="914400" y="2148840"/>
+            <a:ext cx="10332720" cy="594360"/>
+          </a:xfrm>
+          <a:prstGeom prst="rect">
+            <a:avLst/>
+          </a:prstGeom>
+          <a:noFill/>
+          <a:ln/>
+        </p:spPr>
+        <p:txBody>
+          <a:bodyPr wrap="square" rtlCol="0" anchor="ctr"/>
+          <a:lstStyle/>
+          <a:p>
+            <a:pPr indent="0" marL="0">
+              <a:lnSpc>
+                <a:spcPts val="1400"/>
+              </a:lnSpc>
+              <a:buNone/>
+            </a:pPr>
+            <a:r>
+              <a:rPr lang="en-US" sz="1100" dirty="0">
+                <a:solidFill>
+                  <a:srgbClr val="8A7C68"/>
+                </a:solidFill>
+                <a:latin typeface="Segoe UI" pitchFamily="34" charset="0"/>
+                <a:ea typeface="Segoe UI" pitchFamily="34" charset="-122"/>
+                <a:cs typeface="Segoe UI" pitchFamily="34" charset="-120"/>
+              </a:rPr>
+              <a:t>Audit complet du projet (pages, routes, fonctions, dépendances) pour repérer tout ce qui n'était plus utilisé ; suppression de 6 pages orphelines (onboarding, welcome, compte, anciennes pages devis en 3 étapes), d'une route de connexion de démonstration, d'un dossier de composants dupliqué obsolète, de plusieurs fonctions inutilisées et d'une dépendance logicielle non utilisée — sans toucher aux fonctionnalités actives.</a:t>
+            </a:r>
+            <a:endParaRPr lang="en-US" sz="1100" dirty="0"/>
+          </a:p>
+        </p:txBody>
+      </p:sp>
+      <p:sp>
+        <p:nvSpPr>
+          <p:cNvPr id="9" name="Shape 7"/>
+          <p:cNvSpPr/>
+          <p:nvPr/>
+        </p:nvSpPr>
+        <p:spPr>
+          <a:xfrm>
+            <a:off x="640080" y="2926080"/>
+            <a:ext cx="10881360" cy="1097280"/>
+          </a:xfrm>
+          <a:prstGeom prst="roundRect">
+            <a:avLst>
+              <a:gd name="adj" fmla="val 5000"/>
+            </a:avLst>
+          </a:prstGeom>
+          <a:solidFill>
+            <a:srgbClr val="FFFFFF"/>
+          </a:solidFill>
+          <a:ln w="12700">
+            <a:solidFill>
+              <a:srgbClr val="E4DCCB"/>
+            </a:solidFill>
+            <a:prstDash val="solid"/>
+          </a:ln>
+        </p:spPr>
+      </p:sp>
+      <p:sp>
+        <p:nvSpPr>
+          <p:cNvPr id="10" name="Shape 8"/>
+          <p:cNvSpPr/>
+          <p:nvPr/>
+        </p:nvSpPr>
+        <p:spPr>
+          <a:xfrm>
+            <a:off x="640080" y="2926080"/>
+            <a:ext cx="54864" cy="1097280"/>
+          </a:xfrm>
+          <a:prstGeom prst="rect">
+            <a:avLst/>
+          </a:prstGeom>
+          <a:solidFill>
+            <a:srgbClr val="386641"/>
+          </a:solidFill>
+          <a:ln/>
+        </p:spPr>
+      </p:sp>
+      <p:sp>
+        <p:nvSpPr>
+          <p:cNvPr id="11" name="Text 9"/>
+          <p:cNvSpPr/>
+          <p:nvPr/>
+        </p:nvSpPr>
+        <p:spPr>
+          <a:xfrm>
+            <a:off x="914400" y="3035808"/>
+            <a:ext cx="10332720" cy="365760"/>
+          </a:xfrm>
+          <a:prstGeom prst="rect">
+            <a:avLst/>
+          </a:prstGeom>
+          <a:noFill/>
+          <a:ln/>
+        </p:spPr>
+        <p:txBody>
+          <a:bodyPr wrap="square" rtlCol="0" anchor="ctr"/>
+          <a:lstStyle/>
+          <a:p>
+            <a:pPr indent="0" marL="0">
+              <a:buNone/>
+            </a:pPr>
+            <a:r>
+              <a:rPr lang="en-US" sz="1400" b="1" dirty="0">
+                <a:solidFill>
+                  <a:srgbClr val="1B1F3B"/>
+                </a:solidFill>
+                <a:latin typeface="Segoe UI" pitchFamily="34" charset="0"/>
+                <a:ea typeface="Segoe UI" pitchFamily="34" charset="-122"/>
+                <a:cs typeface="Segoe UI" pitchFamily="34" charset="-120"/>
+              </a:rPr>
+              <a:t>Suppression de code mort dans la génération de devis</a:t>
+            </a:r>
+            <a:endParaRPr lang="en-US" sz="1400" dirty="0"/>
+          </a:p>
+        </p:txBody>
+      </p:sp>
+      <p:sp>
+        <p:nvSpPr>
+          <p:cNvPr id="12" name="Text 10"/>
+          <p:cNvSpPr/>
+          <p:nvPr/>
+        </p:nvSpPr>
+        <p:spPr>
+          <a:xfrm>
+            <a:off x="914400" y="3383280"/>
+            <a:ext cx="10332720" cy="594360"/>
+          </a:xfrm>
+          <a:prstGeom prst="rect">
+            <a:avLst/>
+          </a:prstGeom>
+          <a:noFill/>
+          <a:ln/>
+        </p:spPr>
+        <p:txBody>
+          <a:bodyPr wrap="square" rtlCol="0" anchor="ctr"/>
+          <a:lstStyle/>
+          <a:p>
+            <a:pPr indent="0" marL="0">
+              <a:lnSpc>
+                <a:spcPts val="1400"/>
+              </a:lnSpc>
+              <a:buNone/>
+            </a:pPr>
+            <a:r>
+              <a:rPr lang="en-US" sz="1100" dirty="0">
+                <a:solidFill>
+                  <a:srgbClr val="8A7C68"/>
+                </a:solidFill>
+                <a:latin typeface="Segoe UI" pitchFamily="34" charset="0"/>
+                <a:ea typeface="Segoe UI" pitchFamily="34" charset="-122"/>
+                <a:cs typeface="Segoe UI" pitchFamily="34" charset="-120"/>
+              </a:rPr>
+              <a:t>Un ancien générateur de devis PDF, devenu inaccessible après une précédente refonte (code jamais exécuté), a été retiré du fichier technique de génération de documents.</a:t>
+            </a:r>
+            <a:endParaRPr lang="en-US" sz="1100" dirty="0"/>
+          </a:p>
+        </p:txBody>
+      </p:sp>
+      <p:sp>
+        <p:nvSpPr>
+          <p:cNvPr id="13" name="Shape 11"/>
+          <p:cNvSpPr/>
+          <p:nvPr/>
+        </p:nvSpPr>
+        <p:spPr>
+          <a:xfrm>
+            <a:off x="640080" y="4160520"/>
+            <a:ext cx="10881360" cy="1097280"/>
+          </a:xfrm>
+          <a:prstGeom prst="roundRect">
+            <a:avLst>
+              <a:gd name="adj" fmla="val 5000"/>
+            </a:avLst>
+          </a:prstGeom>
+          <a:solidFill>
+            <a:srgbClr val="FFFFFF"/>
+          </a:solidFill>
+          <a:ln w="12700">
+            <a:solidFill>
+              <a:srgbClr val="E4DCCB"/>
+            </a:solidFill>
+            <a:prstDash val="solid"/>
+          </a:ln>
+        </p:spPr>
+      </p:sp>
+      <p:sp>
+        <p:nvSpPr>
+          <p:cNvPr id="14" name="Shape 12"/>
+          <p:cNvSpPr/>
+          <p:nvPr/>
+        </p:nvSpPr>
+        <p:spPr>
+          <a:xfrm>
+            <a:off x="640080" y="4160520"/>
+            <a:ext cx="54864" cy="1097280"/>
+          </a:xfrm>
+          <a:prstGeom prst="rect">
+            <a:avLst/>
+          </a:prstGeom>
+          <a:solidFill>
+            <a:srgbClr val="386641"/>
+          </a:solidFill>
+          <a:ln/>
+        </p:spPr>
+      </p:sp>
+      <p:sp>
+        <p:nvSpPr>
+          <p:cNvPr id="15" name="Text 13"/>
+          <p:cNvSpPr/>
+          <p:nvPr/>
+        </p:nvSpPr>
+        <p:spPr>
+          <a:xfrm>
+            <a:off x="914400" y="4270248"/>
+            <a:ext cx="10332720" cy="365760"/>
+          </a:xfrm>
+          <a:prstGeom prst="rect">
+            <a:avLst/>
+          </a:prstGeom>
+          <a:noFill/>
+          <a:ln/>
+        </p:spPr>
+        <p:txBody>
+          <a:bodyPr wrap="square" rtlCol="0" anchor="ctr"/>
+          <a:lstStyle/>
+          <a:p>
+            <a:pPr indent="0" marL="0">
+              <a:buNone/>
+            </a:pPr>
+            <a:r>
+              <a:rPr lang="en-US" sz="1400" b="1" dirty="0">
+                <a:solidFill>
+                  <a:srgbClr val="1B1F3B"/>
+                </a:solidFill>
+                <a:latin typeface="Segoe UI" pitchFamily="34" charset="0"/>
+                <a:ea typeface="Segoe UI" pitchFamily="34" charset="-122"/>
+                <a:cs typeface="Segoe UI" pitchFamily="34" charset="-120"/>
+              </a:rPr>
+              <a:t>Suppression de code mort dans l'export Word des devis</a:t>
+            </a:r>
+            <a:endParaRPr lang="en-US" sz="1400" dirty="0"/>
+          </a:p>
+        </p:txBody>
+      </p:sp>
+      <p:sp>
+        <p:nvSpPr>
+          <p:cNvPr id="16" name="Text 14"/>
+          <p:cNvSpPr/>
+          <p:nvPr/>
+        </p:nvSpPr>
+        <p:spPr>
+          <a:xfrm>
+            <a:off x="914400" y="4617720"/>
+            <a:ext cx="10332720" cy="594360"/>
+          </a:xfrm>
+          <a:prstGeom prst="rect">
+            <a:avLst/>
+          </a:prstGeom>
+          <a:noFill/>
+          <a:ln/>
+        </p:spPr>
+        <p:txBody>
+          <a:bodyPr wrap="square" rtlCol="0" anchor="ctr"/>
+          <a:lstStyle/>
+          <a:p>
+            <a:pPr indent="0" marL="0">
+              <a:lnSpc>
+                <a:spcPts val="1400"/>
+              </a:lnSpc>
+              <a:buNone/>
+            </a:pPr>
+            <a:r>
+              <a:rPr lang="en-US" sz="1100" dirty="0">
+                <a:solidFill>
+                  <a:srgbClr val="8A7C68"/>
+                </a:solidFill>
+                <a:latin typeface="Segoe UI" pitchFamily="34" charset="0"/>
+                <a:ea typeface="Segoe UI" pitchFamily="34" charset="-122"/>
+                <a:cs typeface="Segoe UI" pitchFamily="34" charset="-120"/>
+              </a:rPr>
+              <a:t>Un second bloc de génération de document, devenu inaccessible après une précédente refonte (jamais exécuté), a été retiré du fichier technique de génération de documents.</a:t>
+            </a:r>
+            <a:endParaRPr lang="en-US" sz="1100" dirty="0"/>
+          </a:p>
+        </p:txBody>
+      </p:sp>
+      <p:sp>
+        <p:nvSpPr>
+          <p:cNvPr id="17" name="Text 15"/>
+          <p:cNvSpPr/>
+          <p:nvPr/>
+        </p:nvSpPr>
+        <p:spPr>
+          <a:xfrm>
+            <a:off x="365760" y="6510528"/>
+            <a:ext cx="5486400" cy="274320"/>
+          </a:xfrm>
+          <a:prstGeom prst="rect">
+            <a:avLst/>
+          </a:prstGeom>
+          <a:noFill/>
+          <a:ln/>
+        </p:spPr>
+        <p:txBody>
+          <a:bodyPr wrap="square" rtlCol="0" anchor="ctr"/>
+          <a:lstStyle/>
+          <a:p>
+            <a:pPr indent="0" marL="0">
+              <a:buNone/>
+            </a:pPr>
+            <a:r>
+              <a:rPr lang="en-US" sz="900" dirty="0">
+                <a:solidFill>
+                  <a:srgbClr val="8A7C68"/>
+                </a:solidFill>
+                <a:latin typeface="Segoe UI" pitchFamily="34" charset="0"/>
+                <a:ea typeface="Segoe UI" pitchFamily="34" charset="-122"/>
+                <a:cs typeface="Segoe UI" pitchFamily="34" charset="-120"/>
+              </a:rPr>
+              <a:t>Kôji Web — Récapitulatif technique</a:t>
+            </a:r>
+            <a:endParaRPr lang="en-US" sz="900" dirty="0"/>
+          </a:p>
+        </p:txBody>
+      </p:sp>
+      <p:sp>
+        <p:nvSpPr>
+          <p:cNvPr id="18" name="Text 16"/>
+          <p:cNvSpPr/>
+          <p:nvPr/>
+        </p:nvSpPr>
+        <p:spPr>
+          <a:xfrm>
+            <a:off x="9601200" y="6510528"/>
+            <a:ext cx="2194560" cy="274320"/>
+          </a:xfrm>
+          <a:prstGeom prst="rect">
+            <a:avLst/>
+          </a:prstGeom>
+          <a:noFill/>
+          <a:ln/>
+        </p:spPr>
+        <p:txBody>
+          <a:bodyPr wrap="square" rtlCol="0" anchor="ctr"/>
+          <a:lstStyle/>
+          <a:p>
+            <a:pPr algn="r" indent="0" marL="0">
+              <a:buNone/>
+            </a:pPr>
+            <a:r>
+              <a:rPr lang="en-US" sz="900" dirty="0">
+                <a:solidFill>
+                  <a:srgbClr val="8A7C68"/>
+                </a:solidFill>
+                <a:latin typeface="Segoe UI" pitchFamily="34" charset="0"/>
+                <a:ea typeface="Segoe UI" pitchFamily="34" charset="-122"/>
+                <a:cs typeface="Segoe UI" pitchFamily="34" charset="-120"/>
+              </a:rPr>
+              <a:t>39</a:t>
+            </a:r>
+            <a:endParaRPr lang="en-US" sz="900" dirty="0"/>
           </a:p>
         </p:txBody>
       </p:sp>
@@ -20452,6 +20986,710 @@
               <a:t>4</a:t>
             </a:r>
             <a:endParaRPr lang="en-US" sz="900" dirty="0"/>
+          </a:p>
+        </p:txBody>
+      </p:sp>
+    </p:spTree>
+  </p:cSld>
+  <p:clrMapOvr>
+    <a:masterClrMapping/>
+  </p:clrMapOvr>
+</p:sld>
+</file>
+
+<file path=ppt/slides/slide40.xml><?xml version="1.0" encoding="utf-8"?>
+<p:sld xmlns:a="http://schemas.openxmlformats.org/drawingml/2006/main" xmlns:r="http://schemas.openxmlformats.org/officeDocument/2006/relationships" xmlns:p="http://schemas.openxmlformats.org/presentationml/2006/main">
+  <p:cSld name="Slide 40">
+    <p:bg>
+      <p:bgPr>
+        <a:solidFill>
+          <a:srgbClr val="F3EEE3"/>
+        </a:solidFill>
+      </p:bgPr>
+    </p:bg>
+    <p:spTree>
+      <p:nvGrpSpPr>
+        <p:cNvPr id="1" name=""/>
+        <p:cNvGrpSpPr/>
+        <p:nvPr/>
+      </p:nvGrpSpPr>
+      <p:grpSpPr>
+        <a:xfrm>
+          <a:off x="0" y="0"/>
+          <a:ext cx="0" cy="0"/>
+          <a:chOff x="0" y="0"/>
+          <a:chExt cx="0" cy="0"/>
+        </a:xfrm>
+      </p:grpSpPr>
+      <p:sp>
+        <p:nvSpPr>
+          <p:cNvPr id="2" name="Shape 0"/>
+          <p:cNvSpPr/>
+          <p:nvPr/>
+        </p:nvSpPr>
+        <p:spPr>
+          <a:xfrm>
+            <a:off x="640080" y="411480"/>
+            <a:ext cx="2377440" cy="365760"/>
+          </a:xfrm>
+          <a:prstGeom prst="roundRect">
+            <a:avLst>
+              <a:gd name="adj" fmla="val 50000"/>
+            </a:avLst>
+          </a:prstGeom>
+          <a:solidFill>
+            <a:srgbClr val="E6EFE4"/>
+          </a:solidFill>
+          <a:ln/>
+        </p:spPr>
+      </p:sp>
+      <p:sp>
+        <p:nvSpPr>
+          <p:cNvPr id="3" name="Text 1"/>
+          <p:cNvSpPr/>
+          <p:nvPr/>
+        </p:nvSpPr>
+        <p:spPr>
+          <a:xfrm>
+            <a:off x="640080" y="411480"/>
+            <a:ext cx="2377440" cy="365760"/>
+          </a:xfrm>
+          <a:prstGeom prst="rect">
+            <a:avLst/>
+          </a:prstGeom>
+          <a:noFill/>
+          <a:ln/>
+        </p:spPr>
+        <p:txBody>
+          <a:bodyPr wrap="square" rtlCol="0" anchor="ctr"/>
+          <a:lstStyle/>
+          <a:p>
+            <a:pPr algn="ctr" indent="0" marL="0">
+              <a:buNone/>
+            </a:pPr>
+            <a:r>
+              <a:rPr lang="en-US" sz="1000" b="1" spc="100" kern="0" dirty="0">
+                <a:solidFill>
+                  <a:srgbClr val="386641"/>
+                </a:solidFill>
+                <a:latin typeface="Segoe UI" pitchFamily="34" charset="0"/>
+                <a:ea typeface="Segoe UI" pitchFamily="34" charset="-122"/>
+                <a:cs typeface="Segoe UI" pitchFamily="34" charset="-120"/>
+              </a:rPr>
+              <a:t>BASE DE DONNÉES</a:t>
+            </a:r>
+            <a:endParaRPr lang="en-US" sz="1000" dirty="0"/>
+          </a:p>
+        </p:txBody>
+      </p:sp>
+      <p:sp>
+        <p:nvSpPr>
+          <p:cNvPr id="4" name="Text 2"/>
+          <p:cNvSpPr/>
+          <p:nvPr/>
+        </p:nvSpPr>
+        <p:spPr>
+          <a:xfrm>
+            <a:off x="640080" y="868680"/>
+            <a:ext cx="10515600" cy="548640"/>
+          </a:xfrm>
+          <a:prstGeom prst="rect">
+            <a:avLst/>
+          </a:prstGeom>
+          <a:noFill/>
+          <a:ln/>
+        </p:spPr>
+        <p:txBody>
+          <a:bodyPr wrap="square" rtlCol="0" anchor="ctr"/>
+          <a:lstStyle/>
+          <a:p>
+            <a:pPr indent="0" marL="0">
+              <a:buNone/>
+            </a:pPr>
+            <a:r>
+              <a:rPr lang="en-US" sz="2400" b="1" dirty="0">
+                <a:solidFill>
+                  <a:srgbClr val="1B1F3B"/>
+                </a:solidFill>
+                <a:latin typeface="Georgia" pitchFamily="34" charset="0"/>
+                <a:ea typeface="Georgia" pitchFamily="34" charset="-122"/>
+                <a:cs typeface="Georgia" pitchFamily="34" charset="-120"/>
+              </a:rPr>
+              <a:t>Sécurité</a:t>
+            </a:r>
+            <a:endParaRPr lang="en-US" sz="2400" dirty="0"/>
+          </a:p>
+        </p:txBody>
+      </p:sp>
+      <p:sp>
+        <p:nvSpPr>
+          <p:cNvPr id="5" name="Shape 3"/>
+          <p:cNvSpPr/>
+          <p:nvPr/>
+        </p:nvSpPr>
+        <p:spPr>
+          <a:xfrm>
+            <a:off x="640080" y="1691640"/>
+            <a:ext cx="10881360" cy="1097280"/>
+          </a:xfrm>
+          <a:prstGeom prst="roundRect">
+            <a:avLst>
+              <a:gd name="adj" fmla="val 5000"/>
+            </a:avLst>
+          </a:prstGeom>
+          <a:solidFill>
+            <a:srgbClr val="FFFFFF"/>
+          </a:solidFill>
+          <a:ln w="12700">
+            <a:solidFill>
+              <a:srgbClr val="E4DCCB"/>
+            </a:solidFill>
+            <a:prstDash val="solid"/>
+          </a:ln>
+        </p:spPr>
+      </p:sp>
+      <p:sp>
+        <p:nvSpPr>
+          <p:cNvPr id="6" name="Shape 4"/>
+          <p:cNvSpPr/>
+          <p:nvPr/>
+        </p:nvSpPr>
+        <p:spPr>
+          <a:xfrm>
+            <a:off x="640080" y="1691640"/>
+            <a:ext cx="54864" cy="1097280"/>
+          </a:xfrm>
+          <a:prstGeom prst="rect">
+            <a:avLst/>
+          </a:prstGeom>
+          <a:solidFill>
+            <a:srgbClr val="386641"/>
+          </a:solidFill>
+          <a:ln/>
+        </p:spPr>
+      </p:sp>
+      <p:sp>
+        <p:nvSpPr>
+          <p:cNvPr id="7" name="Text 5"/>
+          <p:cNvSpPr/>
+          <p:nvPr/>
+        </p:nvSpPr>
+        <p:spPr>
+          <a:xfrm>
+            <a:off x="914400" y="1801368"/>
+            <a:ext cx="10332720" cy="365760"/>
+          </a:xfrm>
+          <a:prstGeom prst="rect">
+            <a:avLst/>
+          </a:prstGeom>
+          <a:noFill/>
+          <a:ln/>
+        </p:spPr>
+        <p:txBody>
+          <a:bodyPr wrap="square" rtlCol="0" anchor="ctr"/>
+          <a:lstStyle/>
+          <a:p>
+            <a:pPr indent="0" marL="0">
+              <a:buNone/>
+            </a:pPr>
+            <a:r>
+              <a:rPr lang="en-US" sz="1400" b="1" dirty="0">
+                <a:solidFill>
+                  <a:srgbClr val="1B1F3B"/>
+                </a:solidFill>
+                <a:latin typeface="Segoe UI" pitchFamily="34" charset="0"/>
+                <a:ea typeface="Segoe UI" pitchFamily="34" charset="-122"/>
+                <a:cs typeface="Segoe UI" pitchFamily="34" charset="-120"/>
+              </a:rPr>
+              <a:t>Base de données partagée verrouillée</a:t>
+            </a:r>
+            <a:endParaRPr lang="en-US" sz="1400" dirty="0"/>
+          </a:p>
+        </p:txBody>
+      </p:sp>
+      <p:sp>
+        <p:nvSpPr>
+          <p:cNvPr id="8" name="Text 6"/>
+          <p:cNvSpPr/>
+          <p:nvPr/>
+        </p:nvSpPr>
+        <p:spPr>
+          <a:xfrm>
+            <a:off x="914400" y="2148840"/>
+            <a:ext cx="10332720" cy="594360"/>
+          </a:xfrm>
+          <a:prstGeom prst="rect">
+            <a:avLst/>
+          </a:prstGeom>
+          <a:noFill/>
+          <a:ln/>
+        </p:spPr>
+        <p:txBody>
+          <a:bodyPr wrap="square" rtlCol="0" anchor="ctr"/>
+          <a:lstStyle/>
+          <a:p>
+            <a:pPr indent="0" marL="0">
+              <a:lnSpc>
+                <a:spcPts val="1400"/>
+              </a:lnSpc>
+              <a:buNone/>
+            </a:pPr>
+            <a:r>
+              <a:rPr lang="en-US" sz="1100" dirty="0">
+                <a:solidFill>
+                  <a:srgbClr val="8A7C68"/>
+                </a:solidFill>
+                <a:latin typeface="Segoe UI" pitchFamily="34" charset="0"/>
+                <a:ea typeface="Segoe UI" pitchFamily="34" charset="-122"/>
+                <a:cs typeface="Segoe UI" pitchFamily="34" charset="-120"/>
+              </a:rPr>
+              <a:t>La table contenant l'essentiel des données de l'application était lisible par n'importe qui sur internet avec la simple clé publique du site, sans connexion. L'application y accède désormais avec une clé privée réservée au serveur, ce qui permet de fermer complètement l'accès public sans rien casser.</a:t>
+            </a:r>
+            <a:endParaRPr lang="en-US" sz="1100" dirty="0"/>
+          </a:p>
+        </p:txBody>
+      </p:sp>
+      <p:sp>
+        <p:nvSpPr>
+          <p:cNvPr id="9" name="Shape 7"/>
+          <p:cNvSpPr/>
+          <p:nvPr/>
+        </p:nvSpPr>
+        <p:spPr>
+          <a:xfrm>
+            <a:off x="640080" y="2926080"/>
+            <a:ext cx="10881360" cy="1097280"/>
+          </a:xfrm>
+          <a:prstGeom prst="roundRect">
+            <a:avLst>
+              <a:gd name="adj" fmla="val 5000"/>
+            </a:avLst>
+          </a:prstGeom>
+          <a:solidFill>
+            <a:srgbClr val="FFFFFF"/>
+          </a:solidFill>
+          <a:ln w="12700">
+            <a:solidFill>
+              <a:srgbClr val="E4DCCB"/>
+            </a:solidFill>
+            <a:prstDash val="solid"/>
+          </a:ln>
+        </p:spPr>
+      </p:sp>
+      <p:sp>
+        <p:nvSpPr>
+          <p:cNvPr id="10" name="Shape 8"/>
+          <p:cNvSpPr/>
+          <p:nvPr/>
+        </p:nvSpPr>
+        <p:spPr>
+          <a:xfrm>
+            <a:off x="640080" y="2926080"/>
+            <a:ext cx="54864" cy="1097280"/>
+          </a:xfrm>
+          <a:prstGeom prst="rect">
+            <a:avLst/>
+          </a:prstGeom>
+          <a:solidFill>
+            <a:srgbClr val="386641"/>
+          </a:solidFill>
+          <a:ln/>
+        </p:spPr>
+      </p:sp>
+      <p:sp>
+        <p:nvSpPr>
+          <p:cNvPr id="11" name="Text 9"/>
+          <p:cNvSpPr/>
+          <p:nvPr/>
+        </p:nvSpPr>
+        <p:spPr>
+          <a:xfrm>
+            <a:off x="914400" y="3035808"/>
+            <a:ext cx="10332720" cy="365760"/>
+          </a:xfrm>
+          <a:prstGeom prst="rect">
+            <a:avLst/>
+          </a:prstGeom>
+          <a:noFill/>
+          <a:ln/>
+        </p:spPr>
+        <p:txBody>
+          <a:bodyPr wrap="square" rtlCol="0" anchor="ctr"/>
+          <a:lstStyle/>
+          <a:p>
+            <a:pPr indent="0" marL="0">
+              <a:buNone/>
+            </a:pPr>
+            <a:r>
+              <a:rPr lang="en-US" sz="1400" b="1" dirty="0">
+                <a:solidFill>
+                  <a:srgbClr val="1B1F3B"/>
+                </a:solidFill>
+                <a:latin typeface="Segoe UI" pitchFamily="34" charset="0"/>
+                <a:ea typeface="Segoe UI" pitchFamily="34" charset="-122"/>
+                <a:cs typeface="Segoe UI" pitchFamily="34" charset="-120"/>
+              </a:rPr>
+              <a:t>Fichier de base de données retiré du dépôt Git</a:t>
+            </a:r>
+            <a:endParaRPr lang="en-US" sz="1400" dirty="0"/>
+          </a:p>
+        </p:txBody>
+      </p:sp>
+      <p:sp>
+        <p:nvSpPr>
+          <p:cNvPr id="12" name="Text 10"/>
+          <p:cNvSpPr/>
+          <p:nvPr/>
+        </p:nvSpPr>
+        <p:spPr>
+          <a:xfrm>
+            <a:off x="914400" y="3383280"/>
+            <a:ext cx="10332720" cy="594360"/>
+          </a:xfrm>
+          <a:prstGeom prst="rect">
+            <a:avLst/>
+          </a:prstGeom>
+          <a:noFill/>
+          <a:ln/>
+        </p:spPr>
+        <p:txBody>
+          <a:bodyPr wrap="square" rtlCol="0" anchor="ctr"/>
+          <a:lstStyle/>
+          <a:p>
+            <a:pPr indent="0" marL="0">
+              <a:lnSpc>
+                <a:spcPts val="1400"/>
+              </a:lnSpc>
+              <a:buNone/>
+            </a:pPr>
+            <a:r>
+              <a:rPr lang="en-US" sz="1100" dirty="0">
+                <a:solidFill>
+                  <a:srgbClr val="8A7C68"/>
+                </a:solidFill>
+                <a:latin typeface="Segoe UI" pitchFamily="34" charset="0"/>
+                <a:ea typeface="Segoe UI" pitchFamily="34" charset="-122"/>
+                <a:cs typeface="Segoe UI" pitchFamily="34" charset="-120"/>
+              </a:rPr>
+              <a:t>Un fichier contenant une copie complète de la base de données de développement, avec des mots de passe réels en clair, était suivi par Git depuis plusieurs mois. Retiré du suivi et exclu définitivement.</a:t>
+            </a:r>
+            <a:endParaRPr lang="en-US" sz="1100" dirty="0"/>
+          </a:p>
+        </p:txBody>
+      </p:sp>
+      <p:sp>
+        <p:nvSpPr>
+          <p:cNvPr id="13" name="Shape 11"/>
+          <p:cNvSpPr/>
+          <p:nvPr/>
+        </p:nvSpPr>
+        <p:spPr>
+          <a:xfrm>
+            <a:off x="640080" y="4160520"/>
+            <a:ext cx="10881360" cy="1097280"/>
+          </a:xfrm>
+          <a:prstGeom prst="roundRect">
+            <a:avLst>
+              <a:gd name="adj" fmla="val 5000"/>
+            </a:avLst>
+          </a:prstGeom>
+          <a:solidFill>
+            <a:srgbClr val="FFFFFF"/>
+          </a:solidFill>
+          <a:ln w="12700">
+            <a:solidFill>
+              <a:srgbClr val="E4DCCB"/>
+            </a:solidFill>
+            <a:prstDash val="solid"/>
+          </a:ln>
+        </p:spPr>
+      </p:sp>
+      <p:sp>
+        <p:nvSpPr>
+          <p:cNvPr id="14" name="Shape 12"/>
+          <p:cNvSpPr/>
+          <p:nvPr/>
+        </p:nvSpPr>
+        <p:spPr>
+          <a:xfrm>
+            <a:off x="640080" y="4160520"/>
+            <a:ext cx="54864" cy="1097280"/>
+          </a:xfrm>
+          <a:prstGeom prst="rect">
+            <a:avLst/>
+          </a:prstGeom>
+          <a:solidFill>
+            <a:srgbClr val="386641"/>
+          </a:solidFill>
+          <a:ln/>
+        </p:spPr>
+      </p:sp>
+      <p:sp>
+        <p:nvSpPr>
+          <p:cNvPr id="15" name="Text 13"/>
+          <p:cNvSpPr/>
+          <p:nvPr/>
+        </p:nvSpPr>
+        <p:spPr>
+          <a:xfrm>
+            <a:off x="914400" y="4270248"/>
+            <a:ext cx="10332720" cy="365760"/>
+          </a:xfrm>
+          <a:prstGeom prst="rect">
+            <a:avLst/>
+          </a:prstGeom>
+          <a:noFill/>
+          <a:ln/>
+        </p:spPr>
+        <p:txBody>
+          <a:bodyPr wrap="square" rtlCol="0" anchor="ctr"/>
+          <a:lstStyle/>
+          <a:p>
+            <a:pPr indent="0" marL="0">
+              <a:buNone/>
+            </a:pPr>
+            <a:r>
+              <a:rPr lang="en-US" sz="1400" b="1" dirty="0">
+                <a:solidFill>
+                  <a:srgbClr val="1B1F3B"/>
+                </a:solidFill>
+                <a:latin typeface="Segoe UI" pitchFamily="34" charset="0"/>
+                <a:ea typeface="Segoe UI" pitchFamily="34" charset="-122"/>
+                <a:cs typeface="Segoe UI" pitchFamily="34" charset="-120"/>
+              </a:rPr>
+              <a:t>Verrouillage de la base partagée écrit dans le script d'installation</a:t>
+            </a:r>
+            <a:endParaRPr lang="en-US" sz="1400" dirty="0"/>
+          </a:p>
+        </p:txBody>
+      </p:sp>
+      <p:sp>
+        <p:nvSpPr>
+          <p:cNvPr id="16" name="Text 14"/>
+          <p:cNvSpPr/>
+          <p:nvPr/>
+        </p:nvSpPr>
+        <p:spPr>
+          <a:xfrm>
+            <a:off x="914400" y="4617720"/>
+            <a:ext cx="10332720" cy="594360"/>
+          </a:xfrm>
+          <a:prstGeom prst="rect">
+            <a:avLst/>
+          </a:prstGeom>
+          <a:noFill/>
+          <a:ln/>
+        </p:spPr>
+        <p:txBody>
+          <a:bodyPr wrap="square" rtlCol="0" anchor="ctr"/>
+          <a:lstStyle/>
+          <a:p>
+            <a:pPr indent="0" marL="0">
+              <a:lnSpc>
+                <a:spcPts val="1400"/>
+              </a:lnSpc>
+              <a:buNone/>
+            </a:pPr>
+            <a:r>
+              <a:rPr lang="en-US" sz="1100" dirty="0">
+                <a:solidFill>
+                  <a:srgbClr val="8A7C68"/>
+                </a:solidFill>
+                <a:latin typeface="Segoe UI" pitchFamily="34" charset="0"/>
+                <a:ea typeface="Segoe UI" pitchFamily="34" charset="-122"/>
+                <a:cs typeface="Segoe UI" pitchFamily="34" charset="-120"/>
+              </a:rPr>
+              <a:t>La commande qui ferme complètement l'accès public à la table de données partagée a été ajoutée au script SQL du projet, prête à être exécutée dans le tableau de bord Supabase.</a:t>
+            </a:r>
+            <a:endParaRPr lang="en-US" sz="1100" dirty="0"/>
+          </a:p>
+        </p:txBody>
+      </p:sp>
+      <p:sp>
+        <p:nvSpPr>
+          <p:cNvPr id="17" name="Text 15"/>
+          <p:cNvSpPr/>
+          <p:nvPr/>
+        </p:nvSpPr>
+        <p:spPr>
+          <a:xfrm>
+            <a:off x="365760" y="6510528"/>
+            <a:ext cx="5486400" cy="274320"/>
+          </a:xfrm>
+          <a:prstGeom prst="rect">
+            <a:avLst/>
+          </a:prstGeom>
+          <a:noFill/>
+          <a:ln/>
+        </p:spPr>
+        <p:txBody>
+          <a:bodyPr wrap="square" rtlCol="0" anchor="ctr"/>
+          <a:lstStyle/>
+          <a:p>
+            <a:pPr indent="0" marL="0">
+              <a:buNone/>
+            </a:pPr>
+            <a:r>
+              <a:rPr lang="en-US" sz="900" dirty="0">
+                <a:solidFill>
+                  <a:srgbClr val="8A7C68"/>
+                </a:solidFill>
+                <a:latin typeface="Segoe UI" pitchFamily="34" charset="0"/>
+                <a:ea typeface="Segoe UI" pitchFamily="34" charset="-122"/>
+                <a:cs typeface="Segoe UI" pitchFamily="34" charset="-120"/>
+              </a:rPr>
+              <a:t>Kôji Web — Récapitulatif technique</a:t>
+            </a:r>
+            <a:endParaRPr lang="en-US" sz="900" dirty="0"/>
+          </a:p>
+        </p:txBody>
+      </p:sp>
+      <p:sp>
+        <p:nvSpPr>
+          <p:cNvPr id="18" name="Text 16"/>
+          <p:cNvSpPr/>
+          <p:nvPr/>
+        </p:nvSpPr>
+        <p:spPr>
+          <a:xfrm>
+            <a:off x="9601200" y="6510528"/>
+            <a:ext cx="2194560" cy="274320"/>
+          </a:xfrm>
+          <a:prstGeom prst="rect">
+            <a:avLst/>
+          </a:prstGeom>
+          <a:noFill/>
+          <a:ln/>
+        </p:spPr>
+        <p:txBody>
+          <a:bodyPr wrap="square" rtlCol="0" anchor="ctr"/>
+          <a:lstStyle/>
+          <a:p>
+            <a:pPr algn="r" indent="0" marL="0">
+              <a:buNone/>
+            </a:pPr>
+            <a:r>
+              <a:rPr lang="en-US" sz="900" dirty="0">
+                <a:solidFill>
+                  <a:srgbClr val="8A7C68"/>
+                </a:solidFill>
+                <a:latin typeface="Segoe UI" pitchFamily="34" charset="0"/>
+                <a:ea typeface="Segoe UI" pitchFamily="34" charset="-122"/>
+                <a:cs typeface="Segoe UI" pitchFamily="34" charset="-120"/>
+              </a:rPr>
+              <a:t>40</a:t>
+            </a:r>
+            <a:endParaRPr lang="en-US" sz="900" dirty="0"/>
+          </a:p>
+        </p:txBody>
+      </p:sp>
+    </p:spTree>
+  </p:cSld>
+  <p:clrMapOvr>
+    <a:masterClrMapping/>
+  </p:clrMapOvr>
+</p:sld>
+</file>
+
+<file path=ppt/slides/slide41.xml><?xml version="1.0" encoding="utf-8"?>
+<p:sld xmlns:a="http://schemas.openxmlformats.org/drawingml/2006/main" xmlns:r="http://schemas.openxmlformats.org/officeDocument/2006/relationships" xmlns:p="http://schemas.openxmlformats.org/presentationml/2006/main">
+  <p:cSld name="Slide 41">
+    <p:bg>
+      <p:bgPr>
+        <a:solidFill>
+          <a:srgbClr val="0B1030"/>
+        </a:solidFill>
+      </p:bgPr>
+    </p:bg>
+    <p:spTree>
+      <p:nvGrpSpPr>
+        <p:cNvPr id="1" name=""/>
+        <p:cNvGrpSpPr/>
+        <p:nvPr/>
+      </p:nvGrpSpPr>
+      <p:grpSpPr>
+        <a:xfrm>
+          <a:off x="0" y="0"/>
+          <a:ext cx="0" cy="0"/>
+          <a:chOff x="0" y="0"/>
+          <a:chExt cx="0" cy="0"/>
+        </a:xfrm>
+      </p:grpSpPr>
+      <p:sp>
+        <p:nvSpPr>
+          <p:cNvPr id="2" name="Text 0"/>
+          <p:cNvSpPr/>
+          <p:nvPr/>
+        </p:nvSpPr>
+        <p:spPr>
+          <a:xfrm>
+            <a:off x="640080" y="2651760"/>
+            <a:ext cx="7315200" cy="914400"/>
+          </a:xfrm>
+          <a:prstGeom prst="rect">
+            <a:avLst/>
+          </a:prstGeom>
+          <a:noFill/>
+          <a:ln/>
+        </p:spPr>
+        <p:txBody>
+          <a:bodyPr wrap="square" rtlCol="0" anchor="ctr"/>
+          <a:lstStyle/>
+          <a:p>
+            <a:pPr indent="0" marL="0">
+              <a:buNone/>
+            </a:pPr>
+            <a:r>
+              <a:rPr lang="en-US" sz="4000" b="1" dirty="0">
+                <a:solidFill>
+                  <a:srgbClr val="FFFFFF"/>
+                </a:solidFill>
+                <a:latin typeface="Georgia" pitchFamily="34" charset="0"/>
+                <a:ea typeface="Georgia" pitchFamily="34" charset="-122"/>
+                <a:cs typeface="Georgia" pitchFamily="34" charset="-120"/>
+              </a:rPr>
+              <a:t>Merci</a:t>
+            </a:r>
+            <a:endParaRPr lang="en-US" sz="4000" dirty="0"/>
+          </a:p>
+        </p:txBody>
+      </p:sp>
+      <p:sp>
+        <p:nvSpPr>
+          <p:cNvPr id="3" name="Text 1"/>
+          <p:cNvSpPr/>
+          <p:nvPr/>
+        </p:nvSpPr>
+        <p:spPr>
+          <a:xfrm>
+            <a:off x="640080" y="3566160"/>
+            <a:ext cx="9144000" cy="548640"/>
+          </a:xfrm>
+          <a:prstGeom prst="rect">
+            <a:avLst/>
+          </a:prstGeom>
+          <a:noFill/>
+          <a:ln/>
+        </p:spPr>
+        <p:txBody>
+          <a:bodyPr wrap="square" rtlCol="0" anchor="ctr"/>
+          <a:lstStyle/>
+          <a:p>
+            <a:pPr indent="0" marL="0">
+              <a:buNone/>
+            </a:pPr>
+            <a:r>
+              <a:rPr lang="en-US" sz="1300" dirty="0">
+                <a:solidFill>
+                  <a:srgbClr val="C7C9E0"/>
+                </a:solidFill>
+                <a:latin typeface="Segoe UI" pitchFamily="34" charset="0"/>
+                <a:ea typeface="Segoe UI" pitchFamily="34" charset="-122"/>
+                <a:cs typeface="Segoe UI" pitchFamily="34" charset="-120"/>
+              </a:rPr>
+              <a:t>Document généré automatiquement à partir de l'historique de développement du projet.</a:t>
+            </a:r>
+            <a:endParaRPr lang="en-US" sz="1300" dirty="0"/>
           </a:p>
         </p:txBody>
       </p:sp>

--- a/docs/manager-recap/Recap-Koji-Manager.pptx
+++ b/docs/manager-recap/Recap-Koji-Manager.pptx
@@ -46,9 +46,10 @@
     <p:sldId id="294" r:id="rId40"/>
     <p:sldId id="295" r:id="rId41"/>
     <p:sldId id="296" r:id="rId42"/>
+    <p:sldId id="297" r:id="rId43"/>
   </p:sldIdLst>
   <p:notesMasterIdLst>
-    <p:notesMasterId r:id="rId43"/>
+    <p:notesMasterId r:id="rId44"/>
   </p:notesMasterIdLst>
   <p:sldSz cx="12191695" cy="6858000"/>
   <p:notesSz cx="6858000" cy="12191695"/>
@@ -3646,6 +3647,94 @@
             <a:fld id="{F7021451-1387-4CA6-816F-3879F97B5CBC}" type="slidenum">
               <a:rPr lang="en-US"/>
               <a:t>41</a:t>
+            </a:fld>
+            <a:endParaRPr lang="en-US"/>
+          </a:p>
+        </p:txBody>
+      </p:sp>
+    </p:spTree>
+    <p:extLst>
+      <p:ext uri="{BB962C8B-B14F-4D97-AF65-F5344CB8AC3E}">
+        <p14:creationId xmlns:p14="http://schemas.microsoft.com/office/powerpoint/2010/main" val="1024086991"/>
+      </p:ext>
+    </p:extLst>
+  </p:cSld>
+  <p:clrMapOvr>
+    <a:masterClrMapping/>
+  </p:clrMapOvr>
+</p:notes>
+</file>
+
+<file path=ppt/notesSlides/notesSlide42.xml><?xml version="1.0" encoding="utf-8"?>
+<p:notes xmlns:a="http://schemas.openxmlformats.org/drawingml/2006/main" xmlns:r="http://schemas.openxmlformats.org/officeDocument/2006/relationships" xmlns:p="http://schemas.openxmlformats.org/presentationml/2006/main">
+  <p:cSld>
+    <p:spTree>
+      <p:nvGrpSpPr>
+        <p:cNvPr id="1" name=""/>
+        <p:cNvGrpSpPr/>
+        <p:nvPr/>
+      </p:nvGrpSpPr>
+      <p:grpSpPr>
+        <a:xfrm>
+          <a:off x="0" y="0"/>
+          <a:ext cx="0" cy="0"/>
+          <a:chOff x="0" y="0"/>
+          <a:chExt cx="0" cy="0"/>
+        </a:xfrm>
+      </p:grpSpPr>
+      <p:sp>
+        <p:nvSpPr>
+          <p:cNvPr id="2" name="Slide Image Placeholder 1"/>
+          <p:cNvSpPr>
+            <a:spLocks noGrp="1" noRot="1" noChangeAspect="1"/>
+          </p:cNvSpPr>
+          <p:nvPr>
+            <p:ph type="sldImg"/>
+          </p:nvPr>
+        </p:nvSpPr>
+        <p:spPr/>
+      </p:sp>
+      <p:sp>
+        <p:nvSpPr>
+          <p:cNvPr id="3" name="Notes Placeholder 2"/>
+          <p:cNvSpPr>
+            <a:spLocks noGrp="1"/>
+          </p:cNvSpPr>
+          <p:nvPr>
+            <p:ph type="body" idx="1"/>
+          </p:nvPr>
+        </p:nvSpPr>
+        <p:spPr/>
+        <p:txBody>
+          <a:bodyPr/>
+          <a:lstStyle/>
+          <a:p>
+            <a:r>
+              <a:rPr lang="en-US" dirty="0"/>
+              <a:t/>
+            </a:r>
+            <a:endParaRPr lang="en-US" dirty="0"/>
+          </a:p>
+        </p:txBody>
+      </p:sp>
+      <p:sp>
+        <p:nvSpPr>
+          <p:cNvPr id="4" name="Slide Number Placeholder 3"/>
+          <p:cNvSpPr>
+            <a:spLocks noGrp="1"/>
+          </p:cNvSpPr>
+          <p:nvPr>
+            <p:ph type="sldNum" sz="quarter" idx="10"/>
+          </p:nvPr>
+        </p:nvSpPr>
+        <p:spPr/>
+        <p:txBody>
+          <a:bodyPr/>
+          <a:lstStyle/>
+          <a:p>
+            <a:fld id="{F7021451-1387-4CA6-816F-3879F97B5CBC}" type="slidenum">
+              <a:rPr lang="en-US"/>
+              <a:t>42</a:t>
             </a:fld>
             <a:endParaRPr lang="en-US"/>
           </a:p>
@@ -9092,7 +9181,7 @@
                 <a:ea typeface="Segoe UI" pitchFamily="34" charset="-122"/>
                 <a:cs typeface="Segoe UI" pitchFamily="34" charset="-120"/>
               </a:rPr>
-              <a:t>36 mise(s) à jour</a:t>
+              <a:t>38 mise(s) à jour</a:t>
             </a:r>
             <a:endParaRPr lang="en-US" sz="1200" dirty="0"/>
           </a:p>
@@ -9812,7 +9901,7 @@
                 <a:ea typeface="Georgia" pitchFamily="34" charset="-122"/>
                 <a:cs typeface="Georgia" pitchFamily="34" charset="-120"/>
               </a:rPr>
-              <a:t>88</a:t>
+              <a:t>90</a:t>
             </a:r>
             <a:endParaRPr lang="en-US" sz="3200" dirty="0"/>
           </a:p>
@@ -10022,7 +10111,7 @@
                 <a:ea typeface="Georgia" pitchFamily="34" charset="-122"/>
                 <a:cs typeface="Georgia" pitchFamily="34" charset="-120"/>
               </a:rPr>
-              <a:t>36</a:t>
+              <a:t>38</a:t>
             </a:r>
             <a:endParaRPr lang="en-US" sz="3200" dirty="0"/>
           </a:p>
@@ -17660,7 +17749,135 @@
       </p:sp>
       <p:sp>
         <p:nvSpPr>
-          <p:cNvPr id="17" name="Text 15"/>
+          <p:cNvPr id="17" name="Shape 15"/>
+          <p:cNvSpPr/>
+          <p:nvPr/>
+        </p:nvSpPr>
+        <p:spPr>
+          <a:xfrm>
+            <a:off x="640080" y="5394960"/>
+            <a:ext cx="10881360" cy="1097280"/>
+          </a:xfrm>
+          <a:prstGeom prst="roundRect">
+            <a:avLst>
+              <a:gd name="adj" fmla="val 5000"/>
+            </a:avLst>
+          </a:prstGeom>
+          <a:solidFill>
+            <a:srgbClr val="FFFFFF"/>
+          </a:solidFill>
+          <a:ln w="12700">
+            <a:solidFill>
+              <a:srgbClr val="E4DCCB"/>
+            </a:solidFill>
+            <a:prstDash val="solid"/>
+          </a:ln>
+        </p:spPr>
+      </p:sp>
+      <p:sp>
+        <p:nvSpPr>
+          <p:cNvPr id="18" name="Shape 16"/>
+          <p:cNvSpPr/>
+          <p:nvPr/>
+        </p:nvSpPr>
+        <p:spPr>
+          <a:xfrm>
+            <a:off x="640080" y="5394960"/>
+            <a:ext cx="54864" cy="1097280"/>
+          </a:xfrm>
+          <a:prstGeom prst="rect">
+            <a:avLst/>
+          </a:prstGeom>
+          <a:solidFill>
+            <a:srgbClr val="9A4C1F"/>
+          </a:solidFill>
+          <a:ln/>
+        </p:spPr>
+      </p:sp>
+      <p:sp>
+        <p:nvSpPr>
+          <p:cNvPr id="19" name="Text 17"/>
+          <p:cNvSpPr/>
+          <p:nvPr/>
+        </p:nvSpPr>
+        <p:spPr>
+          <a:xfrm>
+            <a:off x="914400" y="5504688"/>
+            <a:ext cx="10332720" cy="365760"/>
+          </a:xfrm>
+          <a:prstGeom prst="rect">
+            <a:avLst/>
+          </a:prstGeom>
+          <a:noFill/>
+          <a:ln/>
+        </p:spPr>
+        <p:txBody>
+          <a:bodyPr wrap="square" rtlCol="0" anchor="ctr"/>
+          <a:lstStyle/>
+          <a:p>
+            <a:pPr indent="0" marL="0">
+              <a:buNone/>
+            </a:pPr>
+            <a:r>
+              <a:rPr lang="en-US" sz="1400" b="1" dirty="0">
+                <a:solidFill>
+                  <a:srgbClr val="1B1F3B"/>
+                </a:solidFill>
+                <a:latin typeface="Segoe UI" pitchFamily="34" charset="0"/>
+                <a:ea typeface="Segoe UI" pitchFamily="34" charset="-122"/>
+                <a:cs typeface="Segoe UI" pitchFamily="34" charset="-120"/>
+              </a:rPr>
+              <a:t>Les 3 sessions (entreprise, client, ouvrier) déplacées hors de portée du navigateur</a:t>
+            </a:r>
+            <a:endParaRPr lang="en-US" sz="1400" dirty="0"/>
+          </a:p>
+        </p:txBody>
+      </p:sp>
+      <p:sp>
+        <p:nvSpPr>
+          <p:cNvPr id="20" name="Text 18"/>
+          <p:cNvSpPr/>
+          <p:nvPr/>
+        </p:nvSpPr>
+        <p:spPr>
+          <a:xfrm>
+            <a:off x="914400" y="5852160"/>
+            <a:ext cx="10332720" cy="594360"/>
+          </a:xfrm>
+          <a:prstGeom prst="rect">
+            <a:avLst/>
+          </a:prstGeom>
+          <a:noFill/>
+          <a:ln/>
+        </p:spPr>
+        <p:txBody>
+          <a:bodyPr wrap="square" rtlCol="0" anchor="ctr"/>
+          <a:lstStyle/>
+          <a:p>
+            <a:pPr indent="0" marL="0">
+              <a:lnSpc>
+                <a:spcPts val="1400"/>
+              </a:lnSpc>
+              <a:buNone/>
+            </a:pPr>
+            <a:r>
+              <a:rPr lang="en-US" sz="1100" dirty="0">
+                <a:solidFill>
+                  <a:srgbClr val="8A7C68"/>
+                </a:solidFill>
+                <a:latin typeface="Segoe UI" pitchFamily="34" charset="0"/>
+                <a:ea typeface="Segoe UI" pitchFamily="34" charset="-122"/>
+                <a:cs typeface="Segoe UI" pitchFamily="34" charset="-120"/>
+              </a:rPr>
+              <a:t>Les jetons de connexion vivaient dans le stockage local du navigateur, lisible par le moindre script exécuté sur la page (faille XSS, extension malveillante) — une seule faille de ce type ailleurs dans l'appli aurait suffi à voler une session active. Déplacés vers des cookies HttpOnly, invisibles et inaccessibles au code JavaScript de la page, pour les trois types de compte.</a:t>
+            </a:r>
+            <a:endParaRPr lang="en-US" sz="1100" dirty="0"/>
+          </a:p>
+        </p:txBody>
+      </p:sp>
+      <p:sp>
+        <p:nvSpPr>
+          <p:cNvPr id="21" name="Text 19"/>
           <p:cNvSpPr/>
           <p:nvPr/>
         </p:nvSpPr>
@@ -17699,7 +17916,7 @@
       </p:sp>
       <p:sp>
         <p:nvSpPr>
-          <p:cNvPr id="18" name="Text 16"/>
+          <p:cNvPr id="22" name="Text 20"/>
           <p:cNvSpPr/>
           <p:nvPr/>
         </p:nvSpPr>
@@ -17747,6 +17964,344 @@
 <file path=ppt/slides/slide33.xml><?xml version="1.0" encoding="utf-8"?>
 <p:sld xmlns:a="http://schemas.openxmlformats.org/drawingml/2006/main" xmlns:r="http://schemas.openxmlformats.org/officeDocument/2006/relationships" xmlns:p="http://schemas.openxmlformats.org/presentationml/2006/main">
   <p:cSld name="Slide 33">
+    <p:bg>
+      <p:bgPr>
+        <a:solidFill>
+          <a:srgbClr val="F3EEE3"/>
+        </a:solidFill>
+      </p:bgPr>
+    </p:bg>
+    <p:spTree>
+      <p:nvGrpSpPr>
+        <p:cNvPr id="1" name=""/>
+        <p:cNvGrpSpPr/>
+        <p:nvPr/>
+      </p:nvGrpSpPr>
+      <p:grpSpPr>
+        <a:xfrm>
+          <a:off x="0" y="0"/>
+          <a:ext cx="0" cy="0"/>
+          <a:chOff x="0" y="0"/>
+          <a:chExt cx="0" cy="0"/>
+        </a:xfrm>
+      </p:grpSpPr>
+      <p:sp>
+        <p:nvSpPr>
+          <p:cNvPr id="2" name="Shape 0"/>
+          <p:cNvSpPr/>
+          <p:nvPr/>
+        </p:nvSpPr>
+        <p:spPr>
+          <a:xfrm>
+            <a:off x="640080" y="411480"/>
+            <a:ext cx="2377440" cy="365760"/>
+          </a:xfrm>
+          <a:prstGeom prst="roundRect">
+            <a:avLst>
+              <a:gd name="adj" fmla="val 50000"/>
+            </a:avLst>
+          </a:prstGeom>
+          <a:solidFill>
+            <a:srgbClr val="F5E6DA"/>
+          </a:solidFill>
+          <a:ln/>
+        </p:spPr>
+      </p:sp>
+      <p:sp>
+        <p:nvSpPr>
+          <p:cNvPr id="3" name="Text 1"/>
+          <p:cNvSpPr/>
+          <p:nvPr/>
+        </p:nvSpPr>
+        <p:spPr>
+          <a:xfrm>
+            <a:off x="640080" y="411480"/>
+            <a:ext cx="2377440" cy="365760"/>
+          </a:xfrm>
+          <a:prstGeom prst="rect">
+            <a:avLst/>
+          </a:prstGeom>
+          <a:noFill/>
+          <a:ln/>
+        </p:spPr>
+        <p:txBody>
+          <a:bodyPr wrap="square" rtlCol="0" anchor="ctr"/>
+          <a:lstStyle/>
+          <a:p>
+            <a:pPr algn="ctr" indent="0" marL="0">
+              <a:buNone/>
+            </a:pPr>
+            <a:r>
+              <a:rPr lang="en-US" sz="1000" b="1" spc="100" kern="0" dirty="0">
+                <a:solidFill>
+                  <a:srgbClr val="9A4C1F"/>
+                </a:solidFill>
+                <a:latin typeface="Segoe UI" pitchFamily="34" charset="0"/>
+                <a:ea typeface="Segoe UI" pitchFamily="34" charset="-122"/>
+                <a:cs typeface="Segoe UI" pitchFamily="34" charset="-120"/>
+              </a:rPr>
+              <a:t>BACKEND</a:t>
+            </a:r>
+            <a:endParaRPr lang="en-US" sz="1000" dirty="0"/>
+          </a:p>
+        </p:txBody>
+      </p:sp>
+      <p:sp>
+        <p:nvSpPr>
+          <p:cNvPr id="4" name="Text 2"/>
+          <p:cNvSpPr/>
+          <p:nvPr/>
+        </p:nvSpPr>
+        <p:spPr>
+          <a:xfrm>
+            <a:off x="640080" y="868680"/>
+            <a:ext cx="10515600" cy="548640"/>
+          </a:xfrm>
+          <a:prstGeom prst="rect">
+            <a:avLst/>
+          </a:prstGeom>
+          <a:noFill/>
+          <a:ln/>
+        </p:spPr>
+        <p:txBody>
+          <a:bodyPr wrap="square" rtlCol="0" anchor="ctr"/>
+          <a:lstStyle/>
+          <a:p>
+            <a:pPr indent="0" marL="0">
+              <a:buNone/>
+            </a:pPr>
+            <a:r>
+              <a:rPr lang="en-US" sz="2400" b="1" dirty="0">
+                <a:solidFill>
+                  <a:srgbClr val="1B1F3B"/>
+                </a:solidFill>
+                <a:latin typeface="Georgia" pitchFamily="34" charset="0"/>
+                <a:ea typeface="Georgia" pitchFamily="34" charset="-122"/>
+                <a:cs typeface="Georgia" pitchFamily="34" charset="-120"/>
+              </a:rPr>
+              <a:t>Sécurité (suite)</a:t>
+            </a:r>
+            <a:endParaRPr lang="en-US" sz="2400" dirty="0"/>
+          </a:p>
+        </p:txBody>
+      </p:sp>
+      <p:sp>
+        <p:nvSpPr>
+          <p:cNvPr id="5" name="Shape 3"/>
+          <p:cNvSpPr/>
+          <p:nvPr/>
+        </p:nvSpPr>
+        <p:spPr>
+          <a:xfrm>
+            <a:off x="640080" y="1691640"/>
+            <a:ext cx="10881360" cy="1097280"/>
+          </a:xfrm>
+          <a:prstGeom prst="roundRect">
+            <a:avLst>
+              <a:gd name="adj" fmla="val 5000"/>
+            </a:avLst>
+          </a:prstGeom>
+          <a:solidFill>
+            <a:srgbClr val="FFFFFF"/>
+          </a:solidFill>
+          <a:ln w="12700">
+            <a:solidFill>
+              <a:srgbClr val="E4DCCB"/>
+            </a:solidFill>
+            <a:prstDash val="solid"/>
+          </a:ln>
+        </p:spPr>
+      </p:sp>
+      <p:sp>
+        <p:nvSpPr>
+          <p:cNvPr id="6" name="Shape 4"/>
+          <p:cNvSpPr/>
+          <p:nvPr/>
+        </p:nvSpPr>
+        <p:spPr>
+          <a:xfrm>
+            <a:off x="640080" y="1691640"/>
+            <a:ext cx="54864" cy="1097280"/>
+          </a:xfrm>
+          <a:prstGeom prst="rect">
+            <a:avLst/>
+          </a:prstGeom>
+          <a:solidFill>
+            <a:srgbClr val="9A4C1F"/>
+          </a:solidFill>
+          <a:ln/>
+        </p:spPr>
+      </p:sp>
+      <p:sp>
+        <p:nvSpPr>
+          <p:cNvPr id="7" name="Text 5"/>
+          <p:cNvSpPr/>
+          <p:nvPr/>
+        </p:nvSpPr>
+        <p:spPr>
+          <a:xfrm>
+            <a:off x="914400" y="1801368"/>
+            <a:ext cx="10332720" cy="365760"/>
+          </a:xfrm>
+          <a:prstGeom prst="rect">
+            <a:avLst/>
+          </a:prstGeom>
+          <a:noFill/>
+          <a:ln/>
+        </p:spPr>
+        <p:txBody>
+          <a:bodyPr wrap="square" rtlCol="0" anchor="ctr"/>
+          <a:lstStyle/>
+          <a:p>
+            <a:pPr indent="0" marL="0">
+              <a:buNone/>
+            </a:pPr>
+            <a:r>
+              <a:rPr lang="en-US" sz="1400" b="1" dirty="0">
+                <a:solidFill>
+                  <a:srgbClr val="1B1F3B"/>
+                </a:solidFill>
+                <a:latin typeface="Segoe UI" pitchFamily="34" charset="0"/>
+                <a:ea typeface="Segoe UI" pitchFamily="34" charset="-122"/>
+                <a:cs typeface="Segoe UI" pitchFamily="34" charset="-120"/>
+              </a:rPr>
+              <a:t>Mot de passe de connexion signature chiffré</a:t>
+            </a:r>
+            <a:endParaRPr lang="en-US" sz="1400" dirty="0"/>
+          </a:p>
+        </p:txBody>
+      </p:sp>
+      <p:sp>
+        <p:nvSpPr>
+          <p:cNvPr id="8" name="Text 6"/>
+          <p:cNvSpPr/>
+          <p:nvPr/>
+        </p:nvSpPr>
+        <p:spPr>
+          <a:xfrm>
+            <a:off x="914400" y="2148840"/>
+            <a:ext cx="10332720" cy="594360"/>
+          </a:xfrm>
+          <a:prstGeom prst="rect">
+            <a:avLst/>
+          </a:prstGeom>
+          <a:noFill/>
+          <a:ln/>
+        </p:spPr>
+        <p:txBody>
+          <a:bodyPr wrap="square" rtlCol="0" anchor="ctr"/>
+          <a:lstStyle/>
+          <a:p>
+            <a:pPr indent="0" marL="0">
+              <a:lnSpc>
+                <a:spcPts val="1400"/>
+              </a:lnSpc>
+              <a:buNone/>
+            </a:pPr>
+            <a:r>
+              <a:rPr lang="en-US" sz="1100" dirty="0">
+                <a:solidFill>
+                  <a:srgbClr val="8A7C68"/>
+                </a:solidFill>
+                <a:latin typeface="Segoe UI" pitchFamily="34" charset="0"/>
+                <a:ea typeface="Segoe UI" pitchFamily="34" charset="-122"/>
+                <a:cs typeface="Segoe UI" pitchFamily="34" charset="-120"/>
+              </a:rPr>
+              <a:t>Le mot de passe provisoire envoyé au client pour signer son devis était comparé et stocké en texte lisible. Chiffré (hachage scrypt) comme le reste ; le mot de passe en clair n'est plus jamais écrit en base, seulement affiché une fois au moment de l'envoi.</a:t>
+            </a:r>
+            <a:endParaRPr lang="en-US" sz="1100" dirty="0"/>
+          </a:p>
+        </p:txBody>
+      </p:sp>
+      <p:sp>
+        <p:nvSpPr>
+          <p:cNvPr id="9" name="Text 7"/>
+          <p:cNvSpPr/>
+          <p:nvPr/>
+        </p:nvSpPr>
+        <p:spPr>
+          <a:xfrm>
+            <a:off x="365760" y="6510528"/>
+            <a:ext cx="5486400" cy="274320"/>
+          </a:xfrm>
+          <a:prstGeom prst="rect">
+            <a:avLst/>
+          </a:prstGeom>
+          <a:noFill/>
+          <a:ln/>
+        </p:spPr>
+        <p:txBody>
+          <a:bodyPr wrap="square" rtlCol="0" anchor="ctr"/>
+          <a:lstStyle/>
+          <a:p>
+            <a:pPr indent="0" marL="0">
+              <a:buNone/>
+            </a:pPr>
+            <a:r>
+              <a:rPr lang="en-US" sz="900" dirty="0">
+                <a:solidFill>
+                  <a:srgbClr val="8A7C68"/>
+                </a:solidFill>
+                <a:latin typeface="Segoe UI" pitchFamily="34" charset="0"/>
+                <a:ea typeface="Segoe UI" pitchFamily="34" charset="-122"/>
+                <a:cs typeface="Segoe UI" pitchFamily="34" charset="-120"/>
+              </a:rPr>
+              <a:t>Kôji Web — Récapitulatif technique</a:t>
+            </a:r>
+            <a:endParaRPr lang="en-US" sz="900" dirty="0"/>
+          </a:p>
+        </p:txBody>
+      </p:sp>
+      <p:sp>
+        <p:nvSpPr>
+          <p:cNvPr id="10" name="Text 8"/>
+          <p:cNvSpPr/>
+          <p:nvPr/>
+        </p:nvSpPr>
+        <p:spPr>
+          <a:xfrm>
+            <a:off x="9601200" y="6510528"/>
+            <a:ext cx="2194560" cy="274320"/>
+          </a:xfrm>
+          <a:prstGeom prst="rect">
+            <a:avLst/>
+          </a:prstGeom>
+          <a:noFill/>
+          <a:ln/>
+        </p:spPr>
+        <p:txBody>
+          <a:bodyPr wrap="square" rtlCol="0" anchor="ctr"/>
+          <a:lstStyle/>
+          <a:p>
+            <a:pPr algn="r" indent="0" marL="0">
+              <a:buNone/>
+            </a:pPr>
+            <a:r>
+              <a:rPr lang="en-US" sz="900" dirty="0">
+                <a:solidFill>
+                  <a:srgbClr val="8A7C68"/>
+                </a:solidFill>
+                <a:latin typeface="Segoe UI" pitchFamily="34" charset="0"/>
+                <a:ea typeface="Segoe UI" pitchFamily="34" charset="-122"/>
+                <a:cs typeface="Segoe UI" pitchFamily="34" charset="-120"/>
+              </a:rPr>
+              <a:t>33</a:t>
+            </a:r>
+            <a:endParaRPr lang="en-US" sz="900" dirty="0"/>
+          </a:p>
+        </p:txBody>
+      </p:sp>
+    </p:spTree>
+  </p:cSld>
+  <p:clrMapOvr>
+    <a:masterClrMapping/>
+  </p:clrMapOvr>
+</p:sld>
+</file>
+
+<file path=ppt/slides/slide34.xml><?xml version="1.0" encoding="utf-8"?>
+<p:sld xmlns:a="http://schemas.openxmlformats.org/drawingml/2006/main" xmlns:r="http://schemas.openxmlformats.org/officeDocument/2006/relationships" xmlns:p="http://schemas.openxmlformats.org/presentationml/2006/main">
+  <p:cSld name="Slide 34">
     <p:bg>
       <p:bgPr>
         <a:solidFill>
@@ -17947,344 +18502,6 @@
       <p:sp>
         <p:nvSpPr>
           <p:cNvPr id="7" name="Text 5"/>
-          <p:cNvSpPr/>
-          <p:nvPr/>
-        </p:nvSpPr>
-        <p:spPr>
-          <a:xfrm>
-            <a:off x="9601200" y="6510528"/>
-            <a:ext cx="2194560" cy="274320"/>
-          </a:xfrm>
-          <a:prstGeom prst="rect">
-            <a:avLst/>
-          </a:prstGeom>
-          <a:noFill/>
-          <a:ln/>
-        </p:spPr>
-        <p:txBody>
-          <a:bodyPr wrap="square" rtlCol="0" anchor="ctr"/>
-          <a:lstStyle/>
-          <a:p>
-            <a:pPr algn="r" indent="0" marL="0">
-              <a:buNone/>
-            </a:pPr>
-            <a:r>
-              <a:rPr lang="en-US" sz="900" dirty="0">
-                <a:solidFill>
-                  <a:srgbClr val="8A7C68"/>
-                </a:solidFill>
-                <a:latin typeface="Segoe UI" pitchFamily="34" charset="0"/>
-                <a:ea typeface="Segoe UI" pitchFamily="34" charset="-122"/>
-                <a:cs typeface="Segoe UI" pitchFamily="34" charset="-120"/>
-              </a:rPr>
-              <a:t>33</a:t>
-            </a:r>
-            <a:endParaRPr lang="en-US" sz="900" dirty="0"/>
-          </a:p>
-        </p:txBody>
-      </p:sp>
-    </p:spTree>
-  </p:cSld>
-  <p:clrMapOvr>
-    <a:masterClrMapping/>
-  </p:clrMapOvr>
-</p:sld>
-</file>
-
-<file path=ppt/slides/slide34.xml><?xml version="1.0" encoding="utf-8"?>
-<p:sld xmlns:a="http://schemas.openxmlformats.org/drawingml/2006/main" xmlns:r="http://schemas.openxmlformats.org/officeDocument/2006/relationships" xmlns:p="http://schemas.openxmlformats.org/presentationml/2006/main">
-  <p:cSld name="Slide 34">
-    <p:bg>
-      <p:bgPr>
-        <a:solidFill>
-          <a:srgbClr val="F3EEE3"/>
-        </a:solidFill>
-      </p:bgPr>
-    </p:bg>
-    <p:spTree>
-      <p:nvGrpSpPr>
-        <p:cNvPr id="1" name=""/>
-        <p:cNvGrpSpPr/>
-        <p:nvPr/>
-      </p:nvGrpSpPr>
-      <p:grpSpPr>
-        <a:xfrm>
-          <a:off x="0" y="0"/>
-          <a:ext cx="0" cy="0"/>
-          <a:chOff x="0" y="0"/>
-          <a:chExt cx="0" cy="0"/>
-        </a:xfrm>
-      </p:grpSpPr>
-      <p:sp>
-        <p:nvSpPr>
-          <p:cNvPr id="2" name="Shape 0"/>
-          <p:cNvSpPr/>
-          <p:nvPr/>
-        </p:nvSpPr>
-        <p:spPr>
-          <a:xfrm>
-            <a:off x="640080" y="411480"/>
-            <a:ext cx="2377440" cy="365760"/>
-          </a:xfrm>
-          <a:prstGeom prst="roundRect">
-            <a:avLst>
-              <a:gd name="adj" fmla="val 50000"/>
-            </a:avLst>
-          </a:prstGeom>
-          <a:solidFill>
-            <a:srgbClr val="E6EFE4"/>
-          </a:solidFill>
-          <a:ln/>
-        </p:spPr>
-      </p:sp>
-      <p:sp>
-        <p:nvSpPr>
-          <p:cNvPr id="3" name="Text 1"/>
-          <p:cNvSpPr/>
-          <p:nvPr/>
-        </p:nvSpPr>
-        <p:spPr>
-          <a:xfrm>
-            <a:off x="640080" y="411480"/>
-            <a:ext cx="2377440" cy="365760"/>
-          </a:xfrm>
-          <a:prstGeom prst="rect">
-            <a:avLst/>
-          </a:prstGeom>
-          <a:noFill/>
-          <a:ln/>
-        </p:spPr>
-        <p:txBody>
-          <a:bodyPr wrap="square" rtlCol="0" anchor="ctr"/>
-          <a:lstStyle/>
-          <a:p>
-            <a:pPr algn="ctr" indent="0" marL="0">
-              <a:buNone/>
-            </a:pPr>
-            <a:r>
-              <a:rPr lang="en-US" sz="1000" b="1" spc="100" kern="0" dirty="0">
-                <a:solidFill>
-                  <a:srgbClr val="386641"/>
-                </a:solidFill>
-                <a:latin typeface="Segoe UI" pitchFamily="34" charset="0"/>
-                <a:ea typeface="Segoe UI" pitchFamily="34" charset="-122"/>
-                <a:cs typeface="Segoe UI" pitchFamily="34" charset="-120"/>
-              </a:rPr>
-              <a:t>BASE DE DONNÉES</a:t>
-            </a:r>
-            <a:endParaRPr lang="en-US" sz="1000" dirty="0"/>
-          </a:p>
-        </p:txBody>
-      </p:sp>
-      <p:sp>
-        <p:nvSpPr>
-          <p:cNvPr id="4" name="Text 2"/>
-          <p:cNvSpPr/>
-          <p:nvPr/>
-        </p:nvSpPr>
-        <p:spPr>
-          <a:xfrm>
-            <a:off x="640080" y="868680"/>
-            <a:ext cx="10515600" cy="548640"/>
-          </a:xfrm>
-          <a:prstGeom prst="rect">
-            <a:avLst/>
-          </a:prstGeom>
-          <a:noFill/>
-          <a:ln/>
-        </p:spPr>
-        <p:txBody>
-          <a:bodyPr wrap="square" rtlCol="0" anchor="ctr"/>
-          <a:lstStyle/>
-          <a:p>
-            <a:pPr indent="0" marL="0">
-              <a:buNone/>
-            </a:pPr>
-            <a:r>
-              <a:rPr lang="en-US" sz="2400" b="1" dirty="0">
-                <a:solidFill>
-                  <a:srgbClr val="1B1F3B"/>
-                </a:solidFill>
-                <a:latin typeface="Georgia" pitchFamily="34" charset="0"/>
-                <a:ea typeface="Georgia" pitchFamily="34" charset="-122"/>
-                <a:cs typeface="Georgia" pitchFamily="34" charset="-120"/>
-              </a:rPr>
-              <a:t>Fondations</a:t>
-            </a:r>
-            <a:endParaRPr lang="en-US" sz="2400" dirty="0"/>
-          </a:p>
-        </p:txBody>
-      </p:sp>
-      <p:sp>
-        <p:nvSpPr>
-          <p:cNvPr id="5" name="Shape 3"/>
-          <p:cNvSpPr/>
-          <p:nvPr/>
-        </p:nvSpPr>
-        <p:spPr>
-          <a:xfrm>
-            <a:off x="640080" y="1691640"/>
-            <a:ext cx="10881360" cy="1097280"/>
-          </a:xfrm>
-          <a:prstGeom prst="roundRect">
-            <a:avLst>
-              <a:gd name="adj" fmla="val 5000"/>
-            </a:avLst>
-          </a:prstGeom>
-          <a:solidFill>
-            <a:srgbClr val="FFFFFF"/>
-          </a:solidFill>
-          <a:ln w="12700">
-            <a:solidFill>
-              <a:srgbClr val="E4DCCB"/>
-            </a:solidFill>
-            <a:prstDash val="solid"/>
-          </a:ln>
-        </p:spPr>
-      </p:sp>
-      <p:sp>
-        <p:nvSpPr>
-          <p:cNvPr id="6" name="Shape 4"/>
-          <p:cNvSpPr/>
-          <p:nvPr/>
-        </p:nvSpPr>
-        <p:spPr>
-          <a:xfrm>
-            <a:off x="640080" y="1691640"/>
-            <a:ext cx="54864" cy="1097280"/>
-          </a:xfrm>
-          <a:prstGeom prst="rect">
-            <a:avLst/>
-          </a:prstGeom>
-          <a:solidFill>
-            <a:srgbClr val="386641"/>
-          </a:solidFill>
-          <a:ln/>
-        </p:spPr>
-      </p:sp>
-      <p:sp>
-        <p:nvSpPr>
-          <p:cNvPr id="7" name="Text 5"/>
-          <p:cNvSpPr/>
-          <p:nvPr/>
-        </p:nvSpPr>
-        <p:spPr>
-          <a:xfrm>
-            <a:off x="914400" y="1801368"/>
-            <a:ext cx="10332720" cy="365760"/>
-          </a:xfrm>
-          <a:prstGeom prst="rect">
-            <a:avLst/>
-          </a:prstGeom>
-          <a:noFill/>
-          <a:ln/>
-        </p:spPr>
-        <p:txBody>
-          <a:bodyPr wrap="square" rtlCol="0" anchor="ctr"/>
-          <a:lstStyle/>
-          <a:p>
-            <a:pPr indent="0" marL="0">
-              <a:buNone/>
-            </a:pPr>
-            <a:r>
-              <a:rPr lang="en-US" sz="1400" b="1" dirty="0">
-                <a:solidFill>
-                  <a:srgbClr val="1B1F3B"/>
-                </a:solidFill>
-                <a:latin typeface="Segoe UI" pitchFamily="34" charset="0"/>
-                <a:ea typeface="Segoe UI" pitchFamily="34" charset="-122"/>
-                <a:cs typeface="Segoe UI" pitchFamily="34" charset="-120"/>
-              </a:rPr>
-              <a:t>Connexion Vercel / configuration environnement</a:t>
-            </a:r>
-            <a:endParaRPr lang="en-US" sz="1400" dirty="0"/>
-          </a:p>
-        </p:txBody>
-      </p:sp>
-      <p:sp>
-        <p:nvSpPr>
-          <p:cNvPr id="8" name="Text 6"/>
-          <p:cNvSpPr/>
-          <p:nvPr/>
-        </p:nvSpPr>
-        <p:spPr>
-          <a:xfrm>
-            <a:off x="914400" y="2148840"/>
-            <a:ext cx="10332720" cy="594360"/>
-          </a:xfrm>
-          <a:prstGeom prst="rect">
-            <a:avLst/>
-          </a:prstGeom>
-          <a:noFill/>
-          <a:ln/>
-        </p:spPr>
-        <p:txBody>
-          <a:bodyPr wrap="square" rtlCol="0" anchor="ctr"/>
-          <a:lstStyle/>
-          <a:p>
-            <a:pPr indent="0" marL="0">
-              <a:lnSpc>
-                <a:spcPts val="1400"/>
-              </a:lnSpc>
-              <a:buNone/>
-            </a:pPr>
-            <a:r>
-              <a:rPr lang="en-US" sz="1100" dirty="0">
-                <a:solidFill>
-                  <a:srgbClr val="8A7C68"/>
-                </a:solidFill>
-                <a:latin typeface="Segoe UI" pitchFamily="34" charset="0"/>
-                <a:ea typeface="Segoe UI" pitchFamily="34" charset="-122"/>
-                <a:cs typeface="Segoe UI" pitchFamily="34" charset="-120"/>
-              </a:rPr>
-              <a:t>Correction de la configuration d'authentification et du SMTP sur l'environnement de production Vercel.</a:t>
-            </a:r>
-            <a:endParaRPr lang="en-US" sz="1100" dirty="0"/>
-          </a:p>
-        </p:txBody>
-      </p:sp>
-      <p:sp>
-        <p:nvSpPr>
-          <p:cNvPr id="9" name="Text 7"/>
-          <p:cNvSpPr/>
-          <p:nvPr/>
-        </p:nvSpPr>
-        <p:spPr>
-          <a:xfrm>
-            <a:off x="365760" y="6510528"/>
-            <a:ext cx="5486400" cy="274320"/>
-          </a:xfrm>
-          <a:prstGeom prst="rect">
-            <a:avLst/>
-          </a:prstGeom>
-          <a:noFill/>
-          <a:ln/>
-        </p:spPr>
-        <p:txBody>
-          <a:bodyPr wrap="square" rtlCol="0" anchor="ctr"/>
-          <a:lstStyle/>
-          <a:p>
-            <a:pPr indent="0" marL="0">
-              <a:buNone/>
-            </a:pPr>
-            <a:r>
-              <a:rPr lang="en-US" sz="900" dirty="0">
-                <a:solidFill>
-                  <a:srgbClr val="8A7C68"/>
-                </a:solidFill>
-                <a:latin typeface="Segoe UI" pitchFamily="34" charset="0"/>
-                <a:ea typeface="Segoe UI" pitchFamily="34" charset="-122"/>
-                <a:cs typeface="Segoe UI" pitchFamily="34" charset="-120"/>
-              </a:rPr>
-              <a:t>Kôji Web — Récapitulatif technique</a:t>
-            </a:r>
-            <a:endParaRPr lang="en-US" sz="900" dirty="0"/>
-          </a:p>
-        </p:txBody>
-      </p:sp>
-      <p:sp>
-        <p:nvSpPr>
-          <p:cNvPr id="10" name="Text 8"/>
           <p:cNvSpPr/>
           <p:nvPr/>
         </p:nvSpPr>
@@ -18447,7 +18664,7 @@
                 <a:ea typeface="Georgia" pitchFamily="34" charset="-122"/>
                 <a:cs typeface="Georgia" pitchFamily="34" charset="-120"/>
               </a:rPr>
-              <a:t>Devis</a:t>
+              <a:t>Fondations</a:t>
             </a:r>
             <a:endParaRPr lang="en-US" sz="2400" dirty="0"/>
           </a:p>
@@ -18533,7 +18750,7 @@
                 <a:ea typeface="Segoe UI" pitchFamily="34" charset="-122"/>
                 <a:cs typeface="Segoe UI" pitchFamily="34" charset="-120"/>
               </a:rPr>
-              <a:t>Migration des devis vers Supabase (table partagée)</a:t>
+              <a:t>Connexion Vercel / configuration environnement</a:t>
             </a:r>
             <a:endParaRPr lang="en-US" sz="1400" dirty="0"/>
           </a:p>
@@ -18575,7 +18792,7 @@
                 <a:ea typeface="Segoe UI" pitchFamily="34" charset="-122"/>
                 <a:cs typeface="Segoe UI" pitchFamily="34" charset="-120"/>
               </a:rPr>
-              <a:t>Les devis créés sur le site web et sur l'application mobile (Firas) vivent désormais dans la même table Supabase 'quotes', avec un mapping bidirectionnel dédié (lib/quote-mapping.js).</a:t>
+              <a:t>Correction de la configuration d'authentification et du SMTP sur l'environnement de production Vercel.</a:t>
             </a:r>
             <a:endParaRPr lang="en-US" sz="1100" dirty="0"/>
           </a:p>
@@ -18785,7 +19002,7 @@
                 <a:ea typeface="Georgia" pitchFamily="34" charset="-122"/>
                 <a:cs typeface="Georgia" pitchFamily="34" charset="-120"/>
               </a:rPr>
-              <a:t>Chantiers</a:t>
+              <a:t>Devis</a:t>
             </a:r>
             <a:endParaRPr lang="en-US" sz="2400" dirty="0"/>
           </a:p>
@@ -18871,7 +19088,7 @@
                 <a:ea typeface="Segoe UI" pitchFamily="34" charset="-122"/>
                 <a:cs typeface="Segoe UI" pitchFamily="34" charset="-120"/>
               </a:rPr>
-              <a:t>Connexion Supabase : chantiers, planning, fournitures</a:t>
+              <a:t>Migration des devis vers Supabase (table partagée)</a:t>
             </a:r>
             <a:endParaRPr lang="en-US" sz="1400" dirty="0"/>
           </a:p>
@@ -18913,7 +19130,7 @@
                 <a:ea typeface="Segoe UI" pitchFamily="34" charset="-122"/>
                 <a:cs typeface="Segoe UI" pitchFamily="34" charset="-120"/>
               </a:rPr>
-              <a:t>Ces trois modules sont branchés sur la base partagée avec l'application mobile ; les comptes utilisateurs sont également partagés entre les deux plateformes.</a:t>
+              <a:t>Les devis créés sur le site web et sur l'application mobile (Firas) vivent désormais dans la même table Supabase 'quotes', avec un mapping bidirectionnel dédié (lib/quote-mapping.js).</a:t>
             </a:r>
             <a:endParaRPr lang="en-US" sz="1100" dirty="0"/>
           </a:p>
@@ -19123,7 +19340,7 @@
                 <a:ea typeface="Georgia" pitchFamily="34" charset="-122"/>
                 <a:cs typeface="Georgia" pitchFamily="34" charset="-120"/>
               </a:rPr>
-              <a:t>Équipe</a:t>
+              <a:t>Chantiers</a:t>
             </a:r>
             <a:endParaRPr lang="en-US" sz="2400" dirty="0"/>
           </a:p>
@@ -19209,7 +19426,7 @@
                 <a:ea typeface="Segoe UI" pitchFamily="34" charset="-122"/>
                 <a:cs typeface="Segoe UI" pitchFamily="34" charset="-120"/>
               </a:rPr>
-              <a:t>Nouvelle donnée : heures contractuelles par ouvrier</a:t>
+              <a:t>Connexion Supabase : chantiers, planning, fournitures</a:t>
             </a:r>
             <a:endParaRPr lang="en-US" sz="1400" dirty="0"/>
           </a:p>
@@ -19251,7 +19468,7 @@
                 <a:ea typeface="Segoe UI" pitchFamily="34" charset="-122"/>
                 <a:cs typeface="Segoe UI" pitchFamily="34" charset="-120"/>
               </a:rPr>
-              <a:t>Ajout d'un paramètre 'heures contractuelles / semaine' (35h par défaut) sur chaque fiche ouvrier, utilisé pour le calcul des écarts.</a:t>
+              <a:t>Ces trois modules sont branchés sur la base partagée avec l'application mobile ; les comptes utilisateurs sont également partagés entre les deux plateformes.</a:t>
             </a:r>
             <a:endParaRPr lang="en-US" sz="1100" dirty="0"/>
           </a:p>
@@ -19461,7 +19678,7 @@
                 <a:ea typeface="Georgia" pitchFamily="34" charset="-122"/>
                 <a:cs typeface="Georgia" pitchFamily="34" charset="-120"/>
               </a:rPr>
-              <a:t>Accueil &amp; stabilité</a:t>
+              <a:t>Équipe</a:t>
             </a:r>
             <a:endParaRPr lang="en-US" sz="2400" dirty="0"/>
           </a:p>
@@ -19547,7 +19764,7 @@
                 <a:ea typeface="Segoe UI" pitchFamily="34" charset="-122"/>
                 <a:cs typeface="Segoe UI" pitchFamily="34" charset="-120"/>
               </a:rPr>
-              <a:t>Nettoyage du backend</a:t>
+              <a:t>Nouvelle donnée : heures contractuelles par ouvrier</a:t>
             </a:r>
             <a:endParaRPr lang="en-US" sz="1400" dirty="0"/>
           </a:p>
@@ -19589,7 +19806,7 @@
                 <a:ea typeface="Segoe UI" pitchFamily="34" charset="-122"/>
                 <a:cs typeface="Segoe UI" pitchFamily="34" charset="-120"/>
               </a:rPr>
-              <a:t>Audit complet des routes serveur : suppression du code mort (module Marketplace), vérification de la cohérence entre données locales et données Supabase sur l'ensemble de l'application.</a:t>
+              <a:t>Ajout d'un paramètre 'heures contractuelles / semaine' (35h par défaut) sur chaque fiche ouvrier, utilisé pour le calcul des écarts.</a:t>
             </a:r>
             <a:endParaRPr lang="en-US" sz="1100" dirty="0"/>
           </a:p>
@@ -19799,7 +20016,7 @@
                 <a:ea typeface="Georgia" pitchFamily="34" charset="-122"/>
                 <a:cs typeface="Georgia" pitchFamily="34" charset="-120"/>
               </a:rPr>
-              <a:t>Maintenance technique</a:t>
+              <a:t>Accueil &amp; stabilité</a:t>
             </a:r>
             <a:endParaRPr lang="en-US" sz="2400" dirty="0"/>
           </a:p>
@@ -19885,7 +20102,7 @@
                 <a:ea typeface="Segoe UI" pitchFamily="34" charset="-122"/>
                 <a:cs typeface="Segoe UI" pitchFamily="34" charset="-120"/>
               </a:rPr>
-              <a:t>Nettoyage approfondi du code</a:t>
+              <a:t>Nettoyage du backend</a:t>
             </a:r>
             <a:endParaRPr lang="en-US" sz="1400" dirty="0"/>
           </a:p>
@@ -19927,7 +20144,7 @@
                 <a:ea typeface="Segoe UI" pitchFamily="34" charset="-122"/>
                 <a:cs typeface="Segoe UI" pitchFamily="34" charset="-120"/>
               </a:rPr>
-              <a:t>Audit complet du projet (pages, routes, fonctions, dépendances) pour repérer tout ce qui n'était plus utilisé ; suppression de 6 pages orphelines (onboarding, welcome, compte, anciennes pages devis en 3 étapes), d'une route de connexion de démonstration, d'un dossier de composants dupliqué obsolète, de plusieurs fonctions inutilisées et d'une dépendance logicielle non utilisée — sans toucher aux fonctionnalités actives.</a:t>
+              <a:t>Audit complet des routes serveur : suppression du code mort (module Marketplace), vérification de la cohérence entre données locales et données Supabase sur l'ensemble de l'application.</a:t>
             </a:r>
             <a:endParaRPr lang="en-US" sz="1100" dirty="0"/>
           </a:p>
@@ -19935,263 +20152,7 @@
       </p:sp>
       <p:sp>
         <p:nvSpPr>
-          <p:cNvPr id="9" name="Shape 7"/>
-          <p:cNvSpPr/>
-          <p:nvPr/>
-        </p:nvSpPr>
-        <p:spPr>
-          <a:xfrm>
-            <a:off x="640080" y="2926080"/>
-            <a:ext cx="10881360" cy="1097280"/>
-          </a:xfrm>
-          <a:prstGeom prst="roundRect">
-            <a:avLst>
-              <a:gd name="adj" fmla="val 5000"/>
-            </a:avLst>
-          </a:prstGeom>
-          <a:solidFill>
-            <a:srgbClr val="FFFFFF"/>
-          </a:solidFill>
-          <a:ln w="12700">
-            <a:solidFill>
-              <a:srgbClr val="E4DCCB"/>
-            </a:solidFill>
-            <a:prstDash val="solid"/>
-          </a:ln>
-        </p:spPr>
-      </p:sp>
-      <p:sp>
-        <p:nvSpPr>
-          <p:cNvPr id="10" name="Shape 8"/>
-          <p:cNvSpPr/>
-          <p:nvPr/>
-        </p:nvSpPr>
-        <p:spPr>
-          <a:xfrm>
-            <a:off x="640080" y="2926080"/>
-            <a:ext cx="54864" cy="1097280"/>
-          </a:xfrm>
-          <a:prstGeom prst="rect">
-            <a:avLst/>
-          </a:prstGeom>
-          <a:solidFill>
-            <a:srgbClr val="386641"/>
-          </a:solidFill>
-          <a:ln/>
-        </p:spPr>
-      </p:sp>
-      <p:sp>
-        <p:nvSpPr>
-          <p:cNvPr id="11" name="Text 9"/>
-          <p:cNvSpPr/>
-          <p:nvPr/>
-        </p:nvSpPr>
-        <p:spPr>
-          <a:xfrm>
-            <a:off x="914400" y="3035808"/>
-            <a:ext cx="10332720" cy="365760"/>
-          </a:xfrm>
-          <a:prstGeom prst="rect">
-            <a:avLst/>
-          </a:prstGeom>
-          <a:noFill/>
-          <a:ln/>
-        </p:spPr>
-        <p:txBody>
-          <a:bodyPr wrap="square" rtlCol="0" anchor="ctr"/>
-          <a:lstStyle/>
-          <a:p>
-            <a:pPr indent="0" marL="0">
-              <a:buNone/>
-            </a:pPr>
-            <a:r>
-              <a:rPr lang="en-US" sz="1400" b="1" dirty="0">
-                <a:solidFill>
-                  <a:srgbClr val="1B1F3B"/>
-                </a:solidFill>
-                <a:latin typeface="Segoe UI" pitchFamily="34" charset="0"/>
-                <a:ea typeface="Segoe UI" pitchFamily="34" charset="-122"/>
-                <a:cs typeface="Segoe UI" pitchFamily="34" charset="-120"/>
-              </a:rPr>
-              <a:t>Suppression de code mort dans la génération de devis</a:t>
-            </a:r>
-            <a:endParaRPr lang="en-US" sz="1400" dirty="0"/>
-          </a:p>
-        </p:txBody>
-      </p:sp>
-      <p:sp>
-        <p:nvSpPr>
-          <p:cNvPr id="12" name="Text 10"/>
-          <p:cNvSpPr/>
-          <p:nvPr/>
-        </p:nvSpPr>
-        <p:spPr>
-          <a:xfrm>
-            <a:off x="914400" y="3383280"/>
-            <a:ext cx="10332720" cy="594360"/>
-          </a:xfrm>
-          <a:prstGeom prst="rect">
-            <a:avLst/>
-          </a:prstGeom>
-          <a:noFill/>
-          <a:ln/>
-        </p:spPr>
-        <p:txBody>
-          <a:bodyPr wrap="square" rtlCol="0" anchor="ctr"/>
-          <a:lstStyle/>
-          <a:p>
-            <a:pPr indent="0" marL="0">
-              <a:lnSpc>
-                <a:spcPts val="1400"/>
-              </a:lnSpc>
-              <a:buNone/>
-            </a:pPr>
-            <a:r>
-              <a:rPr lang="en-US" sz="1100" dirty="0">
-                <a:solidFill>
-                  <a:srgbClr val="8A7C68"/>
-                </a:solidFill>
-                <a:latin typeface="Segoe UI" pitchFamily="34" charset="0"/>
-                <a:ea typeface="Segoe UI" pitchFamily="34" charset="-122"/>
-                <a:cs typeface="Segoe UI" pitchFamily="34" charset="-120"/>
-              </a:rPr>
-              <a:t>Un ancien générateur de devis PDF, devenu inaccessible après une précédente refonte (code jamais exécuté), a été retiré du fichier technique de génération de documents.</a:t>
-            </a:r>
-            <a:endParaRPr lang="en-US" sz="1100" dirty="0"/>
-          </a:p>
-        </p:txBody>
-      </p:sp>
-      <p:sp>
-        <p:nvSpPr>
-          <p:cNvPr id="13" name="Shape 11"/>
-          <p:cNvSpPr/>
-          <p:nvPr/>
-        </p:nvSpPr>
-        <p:spPr>
-          <a:xfrm>
-            <a:off x="640080" y="4160520"/>
-            <a:ext cx="10881360" cy="1097280"/>
-          </a:xfrm>
-          <a:prstGeom prst="roundRect">
-            <a:avLst>
-              <a:gd name="adj" fmla="val 5000"/>
-            </a:avLst>
-          </a:prstGeom>
-          <a:solidFill>
-            <a:srgbClr val="FFFFFF"/>
-          </a:solidFill>
-          <a:ln w="12700">
-            <a:solidFill>
-              <a:srgbClr val="E4DCCB"/>
-            </a:solidFill>
-            <a:prstDash val="solid"/>
-          </a:ln>
-        </p:spPr>
-      </p:sp>
-      <p:sp>
-        <p:nvSpPr>
-          <p:cNvPr id="14" name="Shape 12"/>
-          <p:cNvSpPr/>
-          <p:nvPr/>
-        </p:nvSpPr>
-        <p:spPr>
-          <a:xfrm>
-            <a:off x="640080" y="4160520"/>
-            <a:ext cx="54864" cy="1097280"/>
-          </a:xfrm>
-          <a:prstGeom prst="rect">
-            <a:avLst/>
-          </a:prstGeom>
-          <a:solidFill>
-            <a:srgbClr val="386641"/>
-          </a:solidFill>
-          <a:ln/>
-        </p:spPr>
-      </p:sp>
-      <p:sp>
-        <p:nvSpPr>
-          <p:cNvPr id="15" name="Text 13"/>
-          <p:cNvSpPr/>
-          <p:nvPr/>
-        </p:nvSpPr>
-        <p:spPr>
-          <a:xfrm>
-            <a:off x="914400" y="4270248"/>
-            <a:ext cx="10332720" cy="365760"/>
-          </a:xfrm>
-          <a:prstGeom prst="rect">
-            <a:avLst/>
-          </a:prstGeom>
-          <a:noFill/>
-          <a:ln/>
-        </p:spPr>
-        <p:txBody>
-          <a:bodyPr wrap="square" rtlCol="0" anchor="ctr"/>
-          <a:lstStyle/>
-          <a:p>
-            <a:pPr indent="0" marL="0">
-              <a:buNone/>
-            </a:pPr>
-            <a:r>
-              <a:rPr lang="en-US" sz="1400" b="1" dirty="0">
-                <a:solidFill>
-                  <a:srgbClr val="1B1F3B"/>
-                </a:solidFill>
-                <a:latin typeface="Segoe UI" pitchFamily="34" charset="0"/>
-                <a:ea typeface="Segoe UI" pitchFamily="34" charset="-122"/>
-                <a:cs typeface="Segoe UI" pitchFamily="34" charset="-120"/>
-              </a:rPr>
-              <a:t>Suppression de code mort dans l'export Word des devis</a:t>
-            </a:r>
-            <a:endParaRPr lang="en-US" sz="1400" dirty="0"/>
-          </a:p>
-        </p:txBody>
-      </p:sp>
-      <p:sp>
-        <p:nvSpPr>
-          <p:cNvPr id="16" name="Text 14"/>
-          <p:cNvSpPr/>
-          <p:nvPr/>
-        </p:nvSpPr>
-        <p:spPr>
-          <a:xfrm>
-            <a:off x="914400" y="4617720"/>
-            <a:ext cx="10332720" cy="594360"/>
-          </a:xfrm>
-          <a:prstGeom prst="rect">
-            <a:avLst/>
-          </a:prstGeom>
-          <a:noFill/>
-          <a:ln/>
-        </p:spPr>
-        <p:txBody>
-          <a:bodyPr wrap="square" rtlCol="0" anchor="ctr"/>
-          <a:lstStyle/>
-          <a:p>
-            <a:pPr indent="0" marL="0">
-              <a:lnSpc>
-                <a:spcPts val="1400"/>
-              </a:lnSpc>
-              <a:buNone/>
-            </a:pPr>
-            <a:r>
-              <a:rPr lang="en-US" sz="1100" dirty="0">
-                <a:solidFill>
-                  <a:srgbClr val="8A7C68"/>
-                </a:solidFill>
-                <a:latin typeface="Segoe UI" pitchFamily="34" charset="0"/>
-                <a:ea typeface="Segoe UI" pitchFamily="34" charset="-122"/>
-                <a:cs typeface="Segoe UI" pitchFamily="34" charset="-120"/>
-              </a:rPr>
-              <a:t>Un second bloc de génération de document, devenu inaccessible après une précédente refonte (jamais exécuté), a été retiré du fichier technique de génération de documents.</a:t>
-            </a:r>
-            <a:endParaRPr lang="en-US" sz="1100" dirty="0"/>
-          </a:p>
-        </p:txBody>
-      </p:sp>
-      <p:sp>
-        <p:nvSpPr>
-          <p:cNvPr id="17" name="Text 15"/>
+          <p:cNvPr id="9" name="Text 7"/>
           <p:cNvSpPr/>
           <p:nvPr/>
         </p:nvSpPr>
@@ -20230,7 +20191,7 @@
       </p:sp>
       <p:sp>
         <p:nvSpPr>
-          <p:cNvPr id="18" name="Text 16"/>
+          <p:cNvPr id="10" name="Text 8"/>
           <p:cNvSpPr/>
           <p:nvPr/>
         </p:nvSpPr>
@@ -21115,7 +21076,7 @@
                 <a:ea typeface="Georgia" pitchFamily="34" charset="-122"/>
                 <a:cs typeface="Georgia" pitchFamily="34" charset="-120"/>
               </a:rPr>
-              <a:t>Sécurité</a:t>
+              <a:t>Maintenance technique</a:t>
             </a:r>
             <a:endParaRPr lang="en-US" sz="2400" dirty="0"/>
           </a:p>
@@ -21201,7 +21162,7 @@
                 <a:ea typeface="Segoe UI" pitchFamily="34" charset="-122"/>
                 <a:cs typeface="Segoe UI" pitchFamily="34" charset="-120"/>
               </a:rPr>
-              <a:t>Base de données partagée verrouillée</a:t>
+              <a:t>Nettoyage approfondi du code</a:t>
             </a:r>
             <a:endParaRPr lang="en-US" sz="1400" dirty="0"/>
           </a:p>
@@ -21243,7 +21204,7 @@
                 <a:ea typeface="Segoe UI" pitchFamily="34" charset="-122"/>
                 <a:cs typeface="Segoe UI" pitchFamily="34" charset="-120"/>
               </a:rPr>
-              <a:t>La table contenant l'essentiel des données de l'application était lisible par n'importe qui sur internet avec la simple clé publique du site, sans connexion. L'application y accède désormais avec une clé privée réservée au serveur, ce qui permet de fermer complètement l'accès public sans rien casser.</a:t>
+              <a:t>Audit complet du projet (pages, routes, fonctions, dépendances) pour repérer tout ce qui n'était plus utilisé ; suppression de 6 pages orphelines (onboarding, welcome, compte, anciennes pages devis en 3 étapes), d'une route de connexion de démonstration, d'un dossier de composants dupliqué obsolète, de plusieurs fonctions inutilisées et d'une dépendance logicielle non utilisée — sans toucher aux fonctionnalités actives.</a:t>
             </a:r>
             <a:endParaRPr lang="en-US" sz="1100" dirty="0"/>
           </a:p>
@@ -21329,7 +21290,7 @@
                 <a:ea typeface="Segoe UI" pitchFamily="34" charset="-122"/>
                 <a:cs typeface="Segoe UI" pitchFamily="34" charset="-120"/>
               </a:rPr>
-              <a:t>Fichier de base de données retiré du dépôt Git</a:t>
+              <a:t>Suppression de code mort dans la génération de devis</a:t>
             </a:r>
             <a:endParaRPr lang="en-US" sz="1400" dirty="0"/>
           </a:p>
@@ -21371,7 +21332,7 @@
                 <a:ea typeface="Segoe UI" pitchFamily="34" charset="-122"/>
                 <a:cs typeface="Segoe UI" pitchFamily="34" charset="-120"/>
               </a:rPr>
-              <a:t>Un fichier contenant une copie complète de la base de données de développement, avec des mots de passe réels en clair, était suivi par Git depuis plusieurs mois. Retiré du suivi et exclu définitivement.</a:t>
+              <a:t>Un ancien générateur de devis PDF, devenu inaccessible après une précédente refonte (code jamais exécuté), a été retiré du fichier technique de génération de documents.</a:t>
             </a:r>
             <a:endParaRPr lang="en-US" sz="1100" dirty="0"/>
           </a:p>
@@ -21457,7 +21418,7 @@
                 <a:ea typeface="Segoe UI" pitchFamily="34" charset="-122"/>
                 <a:cs typeface="Segoe UI" pitchFamily="34" charset="-120"/>
               </a:rPr>
-              <a:t>Verrouillage de la base partagée écrit dans le script d'installation</a:t>
+              <a:t>Suppression de code mort dans l'export Word des devis</a:t>
             </a:r>
             <a:endParaRPr lang="en-US" sz="1400" dirty="0"/>
           </a:p>
@@ -21499,7 +21460,7 @@
                 <a:ea typeface="Segoe UI" pitchFamily="34" charset="-122"/>
                 <a:cs typeface="Segoe UI" pitchFamily="34" charset="-120"/>
               </a:rPr>
-              <a:t>La commande qui ferme complètement l'accès public à la table de données partagée a été ajoutée au script SQL du projet, prête à être exécutée dans le tableau de bord Supabase.</a:t>
+              <a:t>Un second bloc de génération de document, devenu inaccessible après une précédente refonte (jamais exécuté), a été retiré du fichier technique de génération de documents.</a:t>
             </a:r>
             <a:endParaRPr lang="en-US" sz="1100" dirty="0"/>
           </a:p>
@@ -21594,6 +21555,600 @@
 <file path=ppt/slides/slide41.xml><?xml version="1.0" encoding="utf-8"?>
 <p:sld xmlns:a="http://schemas.openxmlformats.org/drawingml/2006/main" xmlns:r="http://schemas.openxmlformats.org/officeDocument/2006/relationships" xmlns:p="http://schemas.openxmlformats.org/presentationml/2006/main">
   <p:cSld name="Slide 41">
+    <p:bg>
+      <p:bgPr>
+        <a:solidFill>
+          <a:srgbClr val="F3EEE3"/>
+        </a:solidFill>
+      </p:bgPr>
+    </p:bg>
+    <p:spTree>
+      <p:nvGrpSpPr>
+        <p:cNvPr id="1" name=""/>
+        <p:cNvGrpSpPr/>
+        <p:nvPr/>
+      </p:nvGrpSpPr>
+      <p:grpSpPr>
+        <a:xfrm>
+          <a:off x="0" y="0"/>
+          <a:ext cx="0" cy="0"/>
+          <a:chOff x="0" y="0"/>
+          <a:chExt cx="0" cy="0"/>
+        </a:xfrm>
+      </p:grpSpPr>
+      <p:sp>
+        <p:nvSpPr>
+          <p:cNvPr id="2" name="Shape 0"/>
+          <p:cNvSpPr/>
+          <p:nvPr/>
+        </p:nvSpPr>
+        <p:spPr>
+          <a:xfrm>
+            <a:off x="640080" y="411480"/>
+            <a:ext cx="2377440" cy="365760"/>
+          </a:xfrm>
+          <a:prstGeom prst="roundRect">
+            <a:avLst>
+              <a:gd name="adj" fmla="val 50000"/>
+            </a:avLst>
+          </a:prstGeom>
+          <a:solidFill>
+            <a:srgbClr val="E6EFE4"/>
+          </a:solidFill>
+          <a:ln/>
+        </p:spPr>
+      </p:sp>
+      <p:sp>
+        <p:nvSpPr>
+          <p:cNvPr id="3" name="Text 1"/>
+          <p:cNvSpPr/>
+          <p:nvPr/>
+        </p:nvSpPr>
+        <p:spPr>
+          <a:xfrm>
+            <a:off x="640080" y="411480"/>
+            <a:ext cx="2377440" cy="365760"/>
+          </a:xfrm>
+          <a:prstGeom prst="rect">
+            <a:avLst/>
+          </a:prstGeom>
+          <a:noFill/>
+          <a:ln/>
+        </p:spPr>
+        <p:txBody>
+          <a:bodyPr wrap="square" rtlCol="0" anchor="ctr"/>
+          <a:lstStyle/>
+          <a:p>
+            <a:pPr algn="ctr" indent="0" marL="0">
+              <a:buNone/>
+            </a:pPr>
+            <a:r>
+              <a:rPr lang="en-US" sz="1000" b="1" spc="100" kern="0" dirty="0">
+                <a:solidFill>
+                  <a:srgbClr val="386641"/>
+                </a:solidFill>
+                <a:latin typeface="Segoe UI" pitchFamily="34" charset="0"/>
+                <a:ea typeface="Segoe UI" pitchFamily="34" charset="-122"/>
+                <a:cs typeface="Segoe UI" pitchFamily="34" charset="-120"/>
+              </a:rPr>
+              <a:t>BASE DE DONNÉES</a:t>
+            </a:r>
+            <a:endParaRPr lang="en-US" sz="1000" dirty="0"/>
+          </a:p>
+        </p:txBody>
+      </p:sp>
+      <p:sp>
+        <p:nvSpPr>
+          <p:cNvPr id="4" name="Text 2"/>
+          <p:cNvSpPr/>
+          <p:nvPr/>
+        </p:nvSpPr>
+        <p:spPr>
+          <a:xfrm>
+            <a:off x="640080" y="868680"/>
+            <a:ext cx="10515600" cy="548640"/>
+          </a:xfrm>
+          <a:prstGeom prst="rect">
+            <a:avLst/>
+          </a:prstGeom>
+          <a:noFill/>
+          <a:ln/>
+        </p:spPr>
+        <p:txBody>
+          <a:bodyPr wrap="square" rtlCol="0" anchor="ctr"/>
+          <a:lstStyle/>
+          <a:p>
+            <a:pPr indent="0" marL="0">
+              <a:buNone/>
+            </a:pPr>
+            <a:r>
+              <a:rPr lang="en-US" sz="2400" b="1" dirty="0">
+                <a:solidFill>
+                  <a:srgbClr val="1B1F3B"/>
+                </a:solidFill>
+                <a:latin typeface="Georgia" pitchFamily="34" charset="0"/>
+                <a:ea typeface="Georgia" pitchFamily="34" charset="-122"/>
+                <a:cs typeface="Georgia" pitchFamily="34" charset="-120"/>
+              </a:rPr>
+              <a:t>Sécurité</a:t>
+            </a:r>
+            <a:endParaRPr lang="en-US" sz="2400" dirty="0"/>
+          </a:p>
+        </p:txBody>
+      </p:sp>
+      <p:sp>
+        <p:nvSpPr>
+          <p:cNvPr id="5" name="Shape 3"/>
+          <p:cNvSpPr/>
+          <p:nvPr/>
+        </p:nvSpPr>
+        <p:spPr>
+          <a:xfrm>
+            <a:off x="640080" y="1691640"/>
+            <a:ext cx="10881360" cy="1097280"/>
+          </a:xfrm>
+          <a:prstGeom prst="roundRect">
+            <a:avLst>
+              <a:gd name="adj" fmla="val 5000"/>
+            </a:avLst>
+          </a:prstGeom>
+          <a:solidFill>
+            <a:srgbClr val="FFFFFF"/>
+          </a:solidFill>
+          <a:ln w="12700">
+            <a:solidFill>
+              <a:srgbClr val="E4DCCB"/>
+            </a:solidFill>
+            <a:prstDash val="solid"/>
+          </a:ln>
+        </p:spPr>
+      </p:sp>
+      <p:sp>
+        <p:nvSpPr>
+          <p:cNvPr id="6" name="Shape 4"/>
+          <p:cNvSpPr/>
+          <p:nvPr/>
+        </p:nvSpPr>
+        <p:spPr>
+          <a:xfrm>
+            <a:off x="640080" y="1691640"/>
+            <a:ext cx="54864" cy="1097280"/>
+          </a:xfrm>
+          <a:prstGeom prst="rect">
+            <a:avLst/>
+          </a:prstGeom>
+          <a:solidFill>
+            <a:srgbClr val="386641"/>
+          </a:solidFill>
+          <a:ln/>
+        </p:spPr>
+      </p:sp>
+      <p:sp>
+        <p:nvSpPr>
+          <p:cNvPr id="7" name="Text 5"/>
+          <p:cNvSpPr/>
+          <p:nvPr/>
+        </p:nvSpPr>
+        <p:spPr>
+          <a:xfrm>
+            <a:off x="914400" y="1801368"/>
+            <a:ext cx="10332720" cy="365760"/>
+          </a:xfrm>
+          <a:prstGeom prst="rect">
+            <a:avLst/>
+          </a:prstGeom>
+          <a:noFill/>
+          <a:ln/>
+        </p:spPr>
+        <p:txBody>
+          <a:bodyPr wrap="square" rtlCol="0" anchor="ctr"/>
+          <a:lstStyle/>
+          <a:p>
+            <a:pPr indent="0" marL="0">
+              <a:buNone/>
+            </a:pPr>
+            <a:r>
+              <a:rPr lang="en-US" sz="1400" b="1" dirty="0">
+                <a:solidFill>
+                  <a:srgbClr val="1B1F3B"/>
+                </a:solidFill>
+                <a:latin typeface="Segoe UI" pitchFamily="34" charset="0"/>
+                <a:ea typeface="Segoe UI" pitchFamily="34" charset="-122"/>
+                <a:cs typeface="Segoe UI" pitchFamily="34" charset="-120"/>
+              </a:rPr>
+              <a:t>Base de données partagée verrouillée</a:t>
+            </a:r>
+            <a:endParaRPr lang="en-US" sz="1400" dirty="0"/>
+          </a:p>
+        </p:txBody>
+      </p:sp>
+      <p:sp>
+        <p:nvSpPr>
+          <p:cNvPr id="8" name="Text 6"/>
+          <p:cNvSpPr/>
+          <p:nvPr/>
+        </p:nvSpPr>
+        <p:spPr>
+          <a:xfrm>
+            <a:off x="914400" y="2148840"/>
+            <a:ext cx="10332720" cy="594360"/>
+          </a:xfrm>
+          <a:prstGeom prst="rect">
+            <a:avLst/>
+          </a:prstGeom>
+          <a:noFill/>
+          <a:ln/>
+        </p:spPr>
+        <p:txBody>
+          <a:bodyPr wrap="square" rtlCol="0" anchor="ctr"/>
+          <a:lstStyle/>
+          <a:p>
+            <a:pPr indent="0" marL="0">
+              <a:lnSpc>
+                <a:spcPts val="1400"/>
+              </a:lnSpc>
+              <a:buNone/>
+            </a:pPr>
+            <a:r>
+              <a:rPr lang="en-US" sz="1100" dirty="0">
+                <a:solidFill>
+                  <a:srgbClr val="8A7C68"/>
+                </a:solidFill>
+                <a:latin typeface="Segoe UI" pitchFamily="34" charset="0"/>
+                <a:ea typeface="Segoe UI" pitchFamily="34" charset="-122"/>
+                <a:cs typeface="Segoe UI" pitchFamily="34" charset="-120"/>
+              </a:rPr>
+              <a:t>La table contenant l'essentiel des données de l'application était lisible par n'importe qui sur internet avec la simple clé publique du site, sans connexion. L'application y accède désormais avec une clé privée réservée au serveur, ce qui permet de fermer complètement l'accès public sans rien casser.</a:t>
+            </a:r>
+            <a:endParaRPr lang="en-US" sz="1100" dirty="0"/>
+          </a:p>
+        </p:txBody>
+      </p:sp>
+      <p:sp>
+        <p:nvSpPr>
+          <p:cNvPr id="9" name="Shape 7"/>
+          <p:cNvSpPr/>
+          <p:nvPr/>
+        </p:nvSpPr>
+        <p:spPr>
+          <a:xfrm>
+            <a:off x="640080" y="2926080"/>
+            <a:ext cx="10881360" cy="1097280"/>
+          </a:xfrm>
+          <a:prstGeom prst="roundRect">
+            <a:avLst>
+              <a:gd name="adj" fmla="val 5000"/>
+            </a:avLst>
+          </a:prstGeom>
+          <a:solidFill>
+            <a:srgbClr val="FFFFFF"/>
+          </a:solidFill>
+          <a:ln w="12700">
+            <a:solidFill>
+              <a:srgbClr val="E4DCCB"/>
+            </a:solidFill>
+            <a:prstDash val="solid"/>
+          </a:ln>
+        </p:spPr>
+      </p:sp>
+      <p:sp>
+        <p:nvSpPr>
+          <p:cNvPr id="10" name="Shape 8"/>
+          <p:cNvSpPr/>
+          <p:nvPr/>
+        </p:nvSpPr>
+        <p:spPr>
+          <a:xfrm>
+            <a:off x="640080" y="2926080"/>
+            <a:ext cx="54864" cy="1097280"/>
+          </a:xfrm>
+          <a:prstGeom prst="rect">
+            <a:avLst/>
+          </a:prstGeom>
+          <a:solidFill>
+            <a:srgbClr val="386641"/>
+          </a:solidFill>
+          <a:ln/>
+        </p:spPr>
+      </p:sp>
+      <p:sp>
+        <p:nvSpPr>
+          <p:cNvPr id="11" name="Text 9"/>
+          <p:cNvSpPr/>
+          <p:nvPr/>
+        </p:nvSpPr>
+        <p:spPr>
+          <a:xfrm>
+            <a:off x="914400" y="3035808"/>
+            <a:ext cx="10332720" cy="365760"/>
+          </a:xfrm>
+          <a:prstGeom prst="rect">
+            <a:avLst/>
+          </a:prstGeom>
+          <a:noFill/>
+          <a:ln/>
+        </p:spPr>
+        <p:txBody>
+          <a:bodyPr wrap="square" rtlCol="0" anchor="ctr"/>
+          <a:lstStyle/>
+          <a:p>
+            <a:pPr indent="0" marL="0">
+              <a:buNone/>
+            </a:pPr>
+            <a:r>
+              <a:rPr lang="en-US" sz="1400" b="1" dirty="0">
+                <a:solidFill>
+                  <a:srgbClr val="1B1F3B"/>
+                </a:solidFill>
+                <a:latin typeface="Segoe UI" pitchFamily="34" charset="0"/>
+                <a:ea typeface="Segoe UI" pitchFamily="34" charset="-122"/>
+                <a:cs typeface="Segoe UI" pitchFamily="34" charset="-120"/>
+              </a:rPr>
+              <a:t>Fichier de base de données retiré du dépôt Git</a:t>
+            </a:r>
+            <a:endParaRPr lang="en-US" sz="1400" dirty="0"/>
+          </a:p>
+        </p:txBody>
+      </p:sp>
+      <p:sp>
+        <p:nvSpPr>
+          <p:cNvPr id="12" name="Text 10"/>
+          <p:cNvSpPr/>
+          <p:nvPr/>
+        </p:nvSpPr>
+        <p:spPr>
+          <a:xfrm>
+            <a:off x="914400" y="3383280"/>
+            <a:ext cx="10332720" cy="594360"/>
+          </a:xfrm>
+          <a:prstGeom prst="rect">
+            <a:avLst/>
+          </a:prstGeom>
+          <a:noFill/>
+          <a:ln/>
+        </p:spPr>
+        <p:txBody>
+          <a:bodyPr wrap="square" rtlCol="0" anchor="ctr"/>
+          <a:lstStyle/>
+          <a:p>
+            <a:pPr indent="0" marL="0">
+              <a:lnSpc>
+                <a:spcPts val="1400"/>
+              </a:lnSpc>
+              <a:buNone/>
+            </a:pPr>
+            <a:r>
+              <a:rPr lang="en-US" sz="1100" dirty="0">
+                <a:solidFill>
+                  <a:srgbClr val="8A7C68"/>
+                </a:solidFill>
+                <a:latin typeface="Segoe UI" pitchFamily="34" charset="0"/>
+                <a:ea typeface="Segoe UI" pitchFamily="34" charset="-122"/>
+                <a:cs typeface="Segoe UI" pitchFamily="34" charset="-120"/>
+              </a:rPr>
+              <a:t>Un fichier contenant une copie complète de la base de données de développement, avec des mots de passe réels en clair, était suivi par Git depuis plusieurs mois. Retiré du suivi et exclu définitivement.</a:t>
+            </a:r>
+            <a:endParaRPr lang="en-US" sz="1100" dirty="0"/>
+          </a:p>
+        </p:txBody>
+      </p:sp>
+      <p:sp>
+        <p:nvSpPr>
+          <p:cNvPr id="13" name="Shape 11"/>
+          <p:cNvSpPr/>
+          <p:nvPr/>
+        </p:nvSpPr>
+        <p:spPr>
+          <a:xfrm>
+            <a:off x="640080" y="4160520"/>
+            <a:ext cx="10881360" cy="1097280"/>
+          </a:xfrm>
+          <a:prstGeom prst="roundRect">
+            <a:avLst>
+              <a:gd name="adj" fmla="val 5000"/>
+            </a:avLst>
+          </a:prstGeom>
+          <a:solidFill>
+            <a:srgbClr val="FFFFFF"/>
+          </a:solidFill>
+          <a:ln w="12700">
+            <a:solidFill>
+              <a:srgbClr val="E4DCCB"/>
+            </a:solidFill>
+            <a:prstDash val="solid"/>
+          </a:ln>
+        </p:spPr>
+      </p:sp>
+      <p:sp>
+        <p:nvSpPr>
+          <p:cNvPr id="14" name="Shape 12"/>
+          <p:cNvSpPr/>
+          <p:nvPr/>
+        </p:nvSpPr>
+        <p:spPr>
+          <a:xfrm>
+            <a:off x="640080" y="4160520"/>
+            <a:ext cx="54864" cy="1097280"/>
+          </a:xfrm>
+          <a:prstGeom prst="rect">
+            <a:avLst/>
+          </a:prstGeom>
+          <a:solidFill>
+            <a:srgbClr val="386641"/>
+          </a:solidFill>
+          <a:ln/>
+        </p:spPr>
+      </p:sp>
+      <p:sp>
+        <p:nvSpPr>
+          <p:cNvPr id="15" name="Text 13"/>
+          <p:cNvSpPr/>
+          <p:nvPr/>
+        </p:nvSpPr>
+        <p:spPr>
+          <a:xfrm>
+            <a:off x="914400" y="4270248"/>
+            <a:ext cx="10332720" cy="365760"/>
+          </a:xfrm>
+          <a:prstGeom prst="rect">
+            <a:avLst/>
+          </a:prstGeom>
+          <a:noFill/>
+          <a:ln/>
+        </p:spPr>
+        <p:txBody>
+          <a:bodyPr wrap="square" rtlCol="0" anchor="ctr"/>
+          <a:lstStyle/>
+          <a:p>
+            <a:pPr indent="0" marL="0">
+              <a:buNone/>
+            </a:pPr>
+            <a:r>
+              <a:rPr lang="en-US" sz="1400" b="1" dirty="0">
+                <a:solidFill>
+                  <a:srgbClr val="1B1F3B"/>
+                </a:solidFill>
+                <a:latin typeface="Segoe UI" pitchFamily="34" charset="0"/>
+                <a:ea typeface="Segoe UI" pitchFamily="34" charset="-122"/>
+                <a:cs typeface="Segoe UI" pitchFamily="34" charset="-120"/>
+              </a:rPr>
+              <a:t>Verrouillage de la base partagée écrit dans le script d'installation</a:t>
+            </a:r>
+            <a:endParaRPr lang="en-US" sz="1400" dirty="0"/>
+          </a:p>
+        </p:txBody>
+      </p:sp>
+      <p:sp>
+        <p:nvSpPr>
+          <p:cNvPr id="16" name="Text 14"/>
+          <p:cNvSpPr/>
+          <p:nvPr/>
+        </p:nvSpPr>
+        <p:spPr>
+          <a:xfrm>
+            <a:off x="914400" y="4617720"/>
+            <a:ext cx="10332720" cy="594360"/>
+          </a:xfrm>
+          <a:prstGeom prst="rect">
+            <a:avLst/>
+          </a:prstGeom>
+          <a:noFill/>
+          <a:ln/>
+        </p:spPr>
+        <p:txBody>
+          <a:bodyPr wrap="square" rtlCol="0" anchor="ctr"/>
+          <a:lstStyle/>
+          <a:p>
+            <a:pPr indent="0" marL="0">
+              <a:lnSpc>
+                <a:spcPts val="1400"/>
+              </a:lnSpc>
+              <a:buNone/>
+            </a:pPr>
+            <a:r>
+              <a:rPr lang="en-US" sz="1100" dirty="0">
+                <a:solidFill>
+                  <a:srgbClr val="8A7C68"/>
+                </a:solidFill>
+                <a:latin typeface="Segoe UI" pitchFamily="34" charset="0"/>
+                <a:ea typeface="Segoe UI" pitchFamily="34" charset="-122"/>
+                <a:cs typeface="Segoe UI" pitchFamily="34" charset="-120"/>
+              </a:rPr>
+              <a:t>La commande qui ferme complètement l'accès public à la table de données partagée a été ajoutée au script SQL du projet, prête à être exécutée dans le tableau de bord Supabase.</a:t>
+            </a:r>
+            <a:endParaRPr lang="en-US" sz="1100" dirty="0"/>
+          </a:p>
+        </p:txBody>
+      </p:sp>
+      <p:sp>
+        <p:nvSpPr>
+          <p:cNvPr id="17" name="Text 15"/>
+          <p:cNvSpPr/>
+          <p:nvPr/>
+        </p:nvSpPr>
+        <p:spPr>
+          <a:xfrm>
+            <a:off x="365760" y="6510528"/>
+            <a:ext cx="5486400" cy="274320"/>
+          </a:xfrm>
+          <a:prstGeom prst="rect">
+            <a:avLst/>
+          </a:prstGeom>
+          <a:noFill/>
+          <a:ln/>
+        </p:spPr>
+        <p:txBody>
+          <a:bodyPr wrap="square" rtlCol="0" anchor="ctr"/>
+          <a:lstStyle/>
+          <a:p>
+            <a:pPr indent="0" marL="0">
+              <a:buNone/>
+            </a:pPr>
+            <a:r>
+              <a:rPr lang="en-US" sz="900" dirty="0">
+                <a:solidFill>
+                  <a:srgbClr val="8A7C68"/>
+                </a:solidFill>
+                <a:latin typeface="Segoe UI" pitchFamily="34" charset="0"/>
+                <a:ea typeface="Segoe UI" pitchFamily="34" charset="-122"/>
+                <a:cs typeface="Segoe UI" pitchFamily="34" charset="-120"/>
+              </a:rPr>
+              <a:t>Kôji Web — Récapitulatif technique</a:t>
+            </a:r>
+            <a:endParaRPr lang="en-US" sz="900" dirty="0"/>
+          </a:p>
+        </p:txBody>
+      </p:sp>
+      <p:sp>
+        <p:nvSpPr>
+          <p:cNvPr id="18" name="Text 16"/>
+          <p:cNvSpPr/>
+          <p:nvPr/>
+        </p:nvSpPr>
+        <p:spPr>
+          <a:xfrm>
+            <a:off x="9601200" y="6510528"/>
+            <a:ext cx="2194560" cy="274320"/>
+          </a:xfrm>
+          <a:prstGeom prst="rect">
+            <a:avLst/>
+          </a:prstGeom>
+          <a:noFill/>
+          <a:ln/>
+        </p:spPr>
+        <p:txBody>
+          <a:bodyPr wrap="square" rtlCol="0" anchor="ctr"/>
+          <a:lstStyle/>
+          <a:p>
+            <a:pPr algn="r" indent="0" marL="0">
+              <a:buNone/>
+            </a:pPr>
+            <a:r>
+              <a:rPr lang="en-US" sz="900" dirty="0">
+                <a:solidFill>
+                  <a:srgbClr val="8A7C68"/>
+                </a:solidFill>
+                <a:latin typeface="Segoe UI" pitchFamily="34" charset="0"/>
+                <a:ea typeface="Segoe UI" pitchFamily="34" charset="-122"/>
+                <a:cs typeface="Segoe UI" pitchFamily="34" charset="-120"/>
+              </a:rPr>
+              <a:t>41</a:t>
+            </a:r>
+            <a:endParaRPr lang="en-US" sz="900" dirty="0"/>
+          </a:p>
+        </p:txBody>
+      </p:sp>
+    </p:spTree>
+  </p:cSld>
+  <p:clrMapOvr>
+    <a:masterClrMapping/>
+  </p:clrMapOvr>
+</p:sld>
+</file>
+
+<file path=ppt/slides/slide42.xml><?xml version="1.0" encoding="utf-8"?>
+<p:sld xmlns:a="http://schemas.openxmlformats.org/drawingml/2006/main" xmlns:r="http://schemas.openxmlformats.org/officeDocument/2006/relationships" xmlns:p="http://schemas.openxmlformats.org/presentationml/2006/main">
+  <p:cSld name="Slide 42">
     <p:bg>
       <p:bgPr>
         <a:solidFill>

--- a/docs/manager-recap/Recap-Koji-Manager.pptx
+++ b/docs/manager-recap/Recap-Koji-Manager.pptx
@@ -9901,7 +9901,7 @@
                 <a:ea typeface="Georgia" pitchFamily="34" charset="-122"/>
                 <a:cs typeface="Georgia" pitchFamily="34" charset="-120"/>
               </a:rPr>
-              <a:t>90</a:t>
+              <a:t>91</a:t>
             </a:r>
             <a:endParaRPr lang="en-US" sz="3200" dirty="0"/>
           </a:p>
@@ -10006,7 +10006,7 @@
                 <a:ea typeface="Georgia" pitchFamily="34" charset="-122"/>
                 <a:cs typeface="Georgia" pitchFamily="34" charset="-120"/>
               </a:rPr>
-              <a:t>41</a:t>
+              <a:t>42</a:t>
             </a:r>
             <a:endParaRPr lang="en-US" sz="3200" dirty="0"/>
           </a:p>
@@ -16087,7 +16087,7 @@
                 <a:ea typeface="Segoe UI" pitchFamily="34" charset="-122"/>
                 <a:cs typeface="Segoe UI" pitchFamily="34" charset="-120"/>
               </a:rPr>
-              <a:t>41 mise(s) à jour</a:t>
+              <a:t>42 mise(s) à jour</a:t>
             </a:r>
             <a:endParaRPr lang="en-US" sz="1200" dirty="0"/>
           </a:p>
@@ -23954,7 +23954,135 @@
       </p:sp>
       <p:sp>
         <p:nvSpPr>
-          <p:cNvPr id="9" name="Text 7"/>
+          <p:cNvPr id="9" name="Shape 7"/>
+          <p:cNvSpPr/>
+          <p:nvPr/>
+        </p:nvSpPr>
+        <p:spPr>
+          <a:xfrm>
+            <a:off x="640080" y="2926080"/>
+            <a:ext cx="10881360" cy="1097280"/>
+          </a:xfrm>
+          <a:prstGeom prst="roundRect">
+            <a:avLst>
+              <a:gd name="adj" fmla="val 5000"/>
+            </a:avLst>
+          </a:prstGeom>
+          <a:solidFill>
+            <a:srgbClr val="FFFFFF"/>
+          </a:solidFill>
+          <a:ln w="12700">
+            <a:solidFill>
+              <a:srgbClr val="E4DCCB"/>
+            </a:solidFill>
+            <a:prstDash val="solid"/>
+          </a:ln>
+        </p:spPr>
+      </p:sp>
+      <p:sp>
+        <p:nvSpPr>
+          <p:cNvPr id="10" name="Shape 8"/>
+          <p:cNvSpPr/>
+          <p:nvPr/>
+        </p:nvSpPr>
+        <p:spPr>
+          <a:xfrm>
+            <a:off x="640080" y="2926080"/>
+            <a:ext cx="54864" cy="1097280"/>
+          </a:xfrm>
+          <a:prstGeom prst="rect">
+            <a:avLst/>
+          </a:prstGeom>
+          <a:solidFill>
+            <a:srgbClr val="1D6FE0"/>
+          </a:solidFill>
+          <a:ln/>
+        </p:spPr>
+      </p:sp>
+      <p:sp>
+        <p:nvSpPr>
+          <p:cNvPr id="11" name="Text 9"/>
+          <p:cNvSpPr/>
+          <p:nvPr/>
+        </p:nvSpPr>
+        <p:spPr>
+          <a:xfrm>
+            <a:off x="914400" y="3035808"/>
+            <a:ext cx="10332720" cy="365760"/>
+          </a:xfrm>
+          <a:prstGeom prst="rect">
+            <a:avLst/>
+          </a:prstGeom>
+          <a:noFill/>
+          <a:ln/>
+        </p:spPr>
+        <p:txBody>
+          <a:bodyPr wrap="square" rtlCol="0" anchor="ctr"/>
+          <a:lstStyle/>
+          <a:p>
+            <a:pPr indent="0" marL="0">
+              <a:buNone/>
+            </a:pPr>
+            <a:r>
+              <a:rPr lang="en-US" sz="1400" b="1" dirty="0">
+                <a:solidFill>
+                  <a:srgbClr val="1B1F3B"/>
+                </a:solidFill>
+                <a:latin typeface="Segoe UI" pitchFamily="34" charset="0"/>
+                <a:ea typeface="Segoe UI" pitchFamily="34" charset="-122"/>
+                <a:cs typeface="Segoe UI" pitchFamily="34" charset="-120"/>
+              </a:rPr>
+              <a:t>Pas de bloc signature sur une facture</a:t>
+            </a:r>
+            <a:endParaRPr lang="en-US" sz="1400" dirty="0"/>
+          </a:p>
+        </p:txBody>
+      </p:sp>
+      <p:sp>
+        <p:nvSpPr>
+          <p:cNvPr id="12" name="Text 10"/>
+          <p:cNvSpPr/>
+          <p:nvPr/>
+        </p:nvSpPr>
+        <p:spPr>
+          <a:xfrm>
+            <a:off x="914400" y="3383280"/>
+            <a:ext cx="10332720" cy="594360"/>
+          </a:xfrm>
+          <a:prstGeom prst="rect">
+            <a:avLst/>
+          </a:prstGeom>
+          <a:noFill/>
+          <a:ln/>
+        </p:spPr>
+        <p:txBody>
+          <a:bodyPr wrap="square" rtlCol="0" anchor="ctr"/>
+          <a:lstStyle/>
+          <a:p>
+            <a:pPr indent="0" marL="0">
+              <a:lnSpc>
+                <a:spcPts val="1400"/>
+              </a:lnSpc>
+              <a:buNone/>
+            </a:pPr>
+            <a:r>
+              <a:rPr lang="en-US" sz="1100" dirty="0">
+                <a:solidFill>
+                  <a:srgbClr val="8A7C68"/>
+                </a:solidFill>
+                <a:latin typeface="Segoe UI" pitchFamily="34" charset="0"/>
+                <a:ea typeface="Segoe UI" pitchFamily="34" charset="-122"/>
+                <a:cs typeface="Segoe UI" pitchFamily="34" charset="-120"/>
+              </a:rPr>
+              <a:t>Le PDF généré via 'Transformer ce devis en facture' affichait encore le cadre 'Bon pour accord / Date et signature du client', qui n'a pas lieu d'être sur une facture. Retiré uniquement pour ce cas ; le devis original le garde.</a:t>
+            </a:r>
+            <a:endParaRPr lang="en-US" sz="1100" dirty="0"/>
+          </a:p>
+        </p:txBody>
+      </p:sp>
+      <p:sp>
+        <p:nvSpPr>
+          <p:cNvPr id="13" name="Text 11"/>
           <p:cNvSpPr/>
           <p:nvPr/>
         </p:nvSpPr>
@@ -23993,7 +24121,7 @@
       </p:sp>
       <p:sp>
         <p:nvSpPr>
-          <p:cNvPr id="10" name="Text 8"/>
+          <p:cNvPr id="14" name="Text 12"/>
           <p:cNvSpPr/>
           <p:nvPr/>
         </p:nvSpPr>

--- a/docs/manager-recap/Recap-Koji-Manager.pptx
+++ b/docs/manager-recap/Recap-Koji-Manager.pptx
@@ -47,9 +47,11 @@
     <p:sldId id="295" r:id="rId41"/>
     <p:sldId id="296" r:id="rId42"/>
     <p:sldId id="297" r:id="rId43"/>
+    <p:sldId id="298" r:id="rId44"/>
+    <p:sldId id="299" r:id="rId45"/>
   </p:sldIdLst>
   <p:notesMasterIdLst>
-    <p:notesMasterId r:id="rId44"/>
+    <p:notesMasterId r:id="rId46"/>
   </p:notesMasterIdLst>
   <p:sldSz cx="12191695" cy="6858000"/>
   <p:notesSz cx="6858000" cy="12191695"/>
@@ -3735,6 +3737,182 @@
             <a:fld id="{F7021451-1387-4CA6-816F-3879F97B5CBC}" type="slidenum">
               <a:rPr lang="en-US"/>
               <a:t>42</a:t>
+            </a:fld>
+            <a:endParaRPr lang="en-US"/>
+          </a:p>
+        </p:txBody>
+      </p:sp>
+    </p:spTree>
+    <p:extLst>
+      <p:ext uri="{BB962C8B-B14F-4D97-AF65-F5344CB8AC3E}">
+        <p14:creationId xmlns:p14="http://schemas.microsoft.com/office/powerpoint/2010/main" val="1024086991"/>
+      </p:ext>
+    </p:extLst>
+  </p:cSld>
+  <p:clrMapOvr>
+    <a:masterClrMapping/>
+  </p:clrMapOvr>
+</p:notes>
+</file>
+
+<file path=ppt/notesSlides/notesSlide43.xml><?xml version="1.0" encoding="utf-8"?>
+<p:notes xmlns:a="http://schemas.openxmlformats.org/drawingml/2006/main" xmlns:r="http://schemas.openxmlformats.org/officeDocument/2006/relationships" xmlns:p="http://schemas.openxmlformats.org/presentationml/2006/main">
+  <p:cSld>
+    <p:spTree>
+      <p:nvGrpSpPr>
+        <p:cNvPr id="1" name=""/>
+        <p:cNvGrpSpPr/>
+        <p:nvPr/>
+      </p:nvGrpSpPr>
+      <p:grpSpPr>
+        <a:xfrm>
+          <a:off x="0" y="0"/>
+          <a:ext cx="0" cy="0"/>
+          <a:chOff x="0" y="0"/>
+          <a:chExt cx="0" cy="0"/>
+        </a:xfrm>
+      </p:grpSpPr>
+      <p:sp>
+        <p:nvSpPr>
+          <p:cNvPr id="2" name="Slide Image Placeholder 1"/>
+          <p:cNvSpPr>
+            <a:spLocks noGrp="1" noRot="1" noChangeAspect="1"/>
+          </p:cNvSpPr>
+          <p:nvPr>
+            <p:ph type="sldImg"/>
+          </p:nvPr>
+        </p:nvSpPr>
+        <p:spPr/>
+      </p:sp>
+      <p:sp>
+        <p:nvSpPr>
+          <p:cNvPr id="3" name="Notes Placeholder 2"/>
+          <p:cNvSpPr>
+            <a:spLocks noGrp="1"/>
+          </p:cNvSpPr>
+          <p:nvPr>
+            <p:ph type="body" idx="1"/>
+          </p:nvPr>
+        </p:nvSpPr>
+        <p:spPr/>
+        <p:txBody>
+          <a:bodyPr/>
+          <a:lstStyle/>
+          <a:p>
+            <a:r>
+              <a:rPr lang="en-US" dirty="0"/>
+              <a:t/>
+            </a:r>
+            <a:endParaRPr lang="en-US" dirty="0"/>
+          </a:p>
+        </p:txBody>
+      </p:sp>
+      <p:sp>
+        <p:nvSpPr>
+          <p:cNvPr id="4" name="Slide Number Placeholder 3"/>
+          <p:cNvSpPr>
+            <a:spLocks noGrp="1"/>
+          </p:cNvSpPr>
+          <p:nvPr>
+            <p:ph type="sldNum" sz="quarter" idx="10"/>
+          </p:nvPr>
+        </p:nvSpPr>
+        <p:spPr/>
+        <p:txBody>
+          <a:bodyPr/>
+          <a:lstStyle/>
+          <a:p>
+            <a:fld id="{F7021451-1387-4CA6-816F-3879F97B5CBC}" type="slidenum">
+              <a:rPr lang="en-US"/>
+              <a:t>43</a:t>
+            </a:fld>
+            <a:endParaRPr lang="en-US"/>
+          </a:p>
+        </p:txBody>
+      </p:sp>
+    </p:spTree>
+    <p:extLst>
+      <p:ext uri="{BB962C8B-B14F-4D97-AF65-F5344CB8AC3E}">
+        <p14:creationId xmlns:p14="http://schemas.microsoft.com/office/powerpoint/2010/main" val="1024086991"/>
+      </p:ext>
+    </p:extLst>
+  </p:cSld>
+  <p:clrMapOvr>
+    <a:masterClrMapping/>
+  </p:clrMapOvr>
+</p:notes>
+</file>
+
+<file path=ppt/notesSlides/notesSlide44.xml><?xml version="1.0" encoding="utf-8"?>
+<p:notes xmlns:a="http://schemas.openxmlformats.org/drawingml/2006/main" xmlns:r="http://schemas.openxmlformats.org/officeDocument/2006/relationships" xmlns:p="http://schemas.openxmlformats.org/presentationml/2006/main">
+  <p:cSld>
+    <p:spTree>
+      <p:nvGrpSpPr>
+        <p:cNvPr id="1" name=""/>
+        <p:cNvGrpSpPr/>
+        <p:nvPr/>
+      </p:nvGrpSpPr>
+      <p:grpSpPr>
+        <a:xfrm>
+          <a:off x="0" y="0"/>
+          <a:ext cx="0" cy="0"/>
+          <a:chOff x="0" y="0"/>
+          <a:chExt cx="0" cy="0"/>
+        </a:xfrm>
+      </p:grpSpPr>
+      <p:sp>
+        <p:nvSpPr>
+          <p:cNvPr id="2" name="Slide Image Placeholder 1"/>
+          <p:cNvSpPr>
+            <a:spLocks noGrp="1" noRot="1" noChangeAspect="1"/>
+          </p:cNvSpPr>
+          <p:nvPr>
+            <p:ph type="sldImg"/>
+          </p:nvPr>
+        </p:nvSpPr>
+        <p:spPr/>
+      </p:sp>
+      <p:sp>
+        <p:nvSpPr>
+          <p:cNvPr id="3" name="Notes Placeholder 2"/>
+          <p:cNvSpPr>
+            <a:spLocks noGrp="1"/>
+          </p:cNvSpPr>
+          <p:nvPr>
+            <p:ph type="body" idx="1"/>
+          </p:nvPr>
+        </p:nvSpPr>
+        <p:spPr/>
+        <p:txBody>
+          <a:bodyPr/>
+          <a:lstStyle/>
+          <a:p>
+            <a:r>
+              <a:rPr lang="en-US" dirty="0"/>
+              <a:t/>
+            </a:r>
+            <a:endParaRPr lang="en-US" dirty="0"/>
+          </a:p>
+        </p:txBody>
+      </p:sp>
+      <p:sp>
+        <p:nvSpPr>
+          <p:cNvPr id="4" name="Slide Number Placeholder 3"/>
+          <p:cNvSpPr>
+            <a:spLocks noGrp="1"/>
+          </p:cNvSpPr>
+          <p:nvPr>
+            <p:ph type="sldNum" sz="quarter" idx="10"/>
+          </p:nvPr>
+        </p:nvSpPr>
+        <p:spPr/>
+        <p:txBody>
+          <a:bodyPr/>
+          <a:lstStyle/>
+          <a:p>
+            <a:fld id="{F7021451-1387-4CA6-816F-3879F97B5CBC}" type="slidenum">
+              <a:rPr lang="en-US"/>
+              <a:t>44</a:t>
             </a:fld>
             <a:endParaRPr lang="en-US"/>
           </a:p>
@@ -9032,6 +9210,728 @@
     <p:bg>
       <p:bgPr>
         <a:solidFill>
+          <a:srgbClr val="F3EEE3"/>
+        </a:solidFill>
+      </p:bgPr>
+    </p:bg>
+    <p:spTree>
+      <p:nvGrpSpPr>
+        <p:cNvPr id="1" name=""/>
+        <p:cNvGrpSpPr/>
+        <p:nvPr/>
+      </p:nvGrpSpPr>
+      <p:grpSpPr>
+        <a:xfrm>
+          <a:off x="0" y="0"/>
+          <a:ext cx="0" cy="0"/>
+          <a:chOff x="0" y="0"/>
+          <a:chExt cx="0" cy="0"/>
+        </a:xfrm>
+      </p:grpSpPr>
+      <p:sp>
+        <p:nvSpPr>
+          <p:cNvPr id="2" name="Shape 0"/>
+          <p:cNvSpPr/>
+          <p:nvPr/>
+        </p:nvSpPr>
+        <p:spPr>
+          <a:xfrm>
+            <a:off x="640080" y="411480"/>
+            <a:ext cx="2377440" cy="365760"/>
+          </a:xfrm>
+          <a:prstGeom prst="roundRect">
+            <a:avLst>
+              <a:gd name="adj" fmla="val 50000"/>
+            </a:avLst>
+          </a:prstGeom>
+          <a:solidFill>
+            <a:srgbClr val="E5EDFB"/>
+          </a:solidFill>
+          <a:ln/>
+        </p:spPr>
+      </p:sp>
+      <p:sp>
+        <p:nvSpPr>
+          <p:cNvPr id="3" name="Text 1"/>
+          <p:cNvSpPr/>
+          <p:nvPr/>
+        </p:nvSpPr>
+        <p:spPr>
+          <a:xfrm>
+            <a:off x="640080" y="411480"/>
+            <a:ext cx="2377440" cy="365760"/>
+          </a:xfrm>
+          <a:prstGeom prst="rect">
+            <a:avLst/>
+          </a:prstGeom>
+          <a:noFill/>
+          <a:ln/>
+        </p:spPr>
+        <p:txBody>
+          <a:bodyPr wrap="square" rtlCol="0" anchor="ctr"/>
+          <a:lstStyle/>
+          <a:p>
+            <a:pPr algn="ctr" indent="0" marL="0">
+              <a:buNone/>
+            </a:pPr>
+            <a:r>
+              <a:rPr lang="en-US" sz="1000" b="1" spc="100" kern="0" dirty="0">
+                <a:solidFill>
+                  <a:srgbClr val="1D6FE0"/>
+                </a:solidFill>
+                <a:latin typeface="Segoe UI" pitchFamily="34" charset="0"/>
+                <a:ea typeface="Segoe UI" pitchFamily="34" charset="-122"/>
+                <a:cs typeface="Segoe UI" pitchFamily="34" charset="-120"/>
+              </a:rPr>
+              <a:t>FRONTEND</a:t>
+            </a:r>
+            <a:endParaRPr lang="en-US" sz="1000" dirty="0"/>
+          </a:p>
+        </p:txBody>
+      </p:sp>
+      <p:sp>
+        <p:nvSpPr>
+          <p:cNvPr id="4" name="Text 2"/>
+          <p:cNvSpPr/>
+          <p:nvPr/>
+        </p:nvSpPr>
+        <p:spPr>
+          <a:xfrm>
+            <a:off x="640080" y="868680"/>
+            <a:ext cx="10515600" cy="548640"/>
+          </a:xfrm>
+          <a:prstGeom prst="rect">
+            <a:avLst/>
+          </a:prstGeom>
+          <a:noFill/>
+          <a:ln/>
+        </p:spPr>
+        <p:txBody>
+          <a:bodyPr wrap="square" rtlCol="0" anchor="ctr"/>
+          <a:lstStyle/>
+          <a:p>
+            <a:pPr indent="0" marL="0">
+              <a:buNone/>
+            </a:pPr>
+            <a:r>
+              <a:rPr lang="en-US" sz="2400" b="1" dirty="0">
+                <a:solidFill>
+                  <a:srgbClr val="1B1F3B"/>
+                </a:solidFill>
+                <a:latin typeface="Georgia" pitchFamily="34" charset="0"/>
+                <a:ea typeface="Georgia" pitchFamily="34" charset="-122"/>
+                <a:cs typeface="Georgia" pitchFamily="34" charset="-120"/>
+              </a:rPr>
+              <a:t>Profil</a:t>
+            </a:r>
+            <a:endParaRPr lang="en-US" sz="2400" dirty="0"/>
+          </a:p>
+        </p:txBody>
+      </p:sp>
+      <p:sp>
+        <p:nvSpPr>
+          <p:cNvPr id="5" name="Shape 3"/>
+          <p:cNvSpPr/>
+          <p:nvPr/>
+        </p:nvSpPr>
+        <p:spPr>
+          <a:xfrm>
+            <a:off x="640080" y="1691640"/>
+            <a:ext cx="10881360" cy="1097280"/>
+          </a:xfrm>
+          <a:prstGeom prst="roundRect">
+            <a:avLst>
+              <a:gd name="adj" fmla="val 5000"/>
+            </a:avLst>
+          </a:prstGeom>
+          <a:solidFill>
+            <a:srgbClr val="FFFFFF"/>
+          </a:solidFill>
+          <a:ln w="12700">
+            <a:solidFill>
+              <a:srgbClr val="E4DCCB"/>
+            </a:solidFill>
+            <a:prstDash val="solid"/>
+          </a:ln>
+        </p:spPr>
+      </p:sp>
+      <p:sp>
+        <p:nvSpPr>
+          <p:cNvPr id="6" name="Shape 4"/>
+          <p:cNvSpPr/>
+          <p:nvPr/>
+        </p:nvSpPr>
+        <p:spPr>
+          <a:xfrm>
+            <a:off x="640080" y="1691640"/>
+            <a:ext cx="54864" cy="1097280"/>
+          </a:xfrm>
+          <a:prstGeom prst="rect">
+            <a:avLst/>
+          </a:prstGeom>
+          <a:solidFill>
+            <a:srgbClr val="1D6FE0"/>
+          </a:solidFill>
+          <a:ln/>
+        </p:spPr>
+      </p:sp>
+      <p:sp>
+        <p:nvSpPr>
+          <p:cNvPr id="7" name="Text 5"/>
+          <p:cNvSpPr/>
+          <p:nvPr/>
+        </p:nvSpPr>
+        <p:spPr>
+          <a:xfrm>
+            <a:off x="914400" y="1801368"/>
+            <a:ext cx="10332720" cy="365760"/>
+          </a:xfrm>
+          <a:prstGeom prst="rect">
+            <a:avLst/>
+          </a:prstGeom>
+          <a:noFill/>
+          <a:ln/>
+        </p:spPr>
+        <p:txBody>
+          <a:bodyPr wrap="square" rtlCol="0" anchor="ctr"/>
+          <a:lstStyle/>
+          <a:p>
+            <a:pPr indent="0" marL="0">
+              <a:buNone/>
+            </a:pPr>
+            <a:r>
+              <a:rPr lang="en-US" sz="1400" b="1" dirty="0">
+                <a:solidFill>
+                  <a:srgbClr val="1B1F3B"/>
+                </a:solidFill>
+                <a:latin typeface="Segoe UI" pitchFamily="34" charset="0"/>
+                <a:ea typeface="Segoe UI" pitchFamily="34" charset="-122"/>
+                <a:cs typeface="Segoe UI" pitchFamily="34" charset="-120"/>
+              </a:rPr>
+              <a:t>Carte de visite professionnelle (en test interne)</a:t>
+            </a:r>
+            <a:endParaRPr lang="en-US" sz="1400" dirty="0"/>
+          </a:p>
+        </p:txBody>
+      </p:sp>
+      <p:sp>
+        <p:nvSpPr>
+          <p:cNvPr id="8" name="Text 6"/>
+          <p:cNvSpPr/>
+          <p:nvPr/>
+        </p:nvSpPr>
+        <p:spPr>
+          <a:xfrm>
+            <a:off x="914400" y="2148840"/>
+            <a:ext cx="10332720" cy="594360"/>
+          </a:xfrm>
+          <a:prstGeom prst="rect">
+            <a:avLst/>
+          </a:prstGeom>
+          <a:noFill/>
+          <a:ln/>
+        </p:spPr>
+        <p:txBody>
+          <a:bodyPr wrap="square" rtlCol="0" anchor="ctr"/>
+          <a:lstStyle/>
+          <a:p>
+            <a:pPr indent="0" marL="0">
+              <a:lnSpc>
+                <a:spcPts val="1400"/>
+              </a:lnSpc>
+              <a:buNone/>
+            </a:pPr>
+            <a:r>
+              <a:rPr lang="en-US" sz="1100" dirty="0">
+                <a:solidFill>
+                  <a:srgbClr val="8A7C68"/>
+                </a:solidFill>
+                <a:latin typeface="Segoe UI" pitchFamily="34" charset="0"/>
+                <a:ea typeface="Segoe UI" pitchFamily="34" charset="-122"/>
+                <a:cs typeface="Segoe UI" pitchFamily="34" charset="-120"/>
+              </a:rPr>
+              <a:t>Carte au format réel (85 x 55 mm, prêt à imprimer, recto-verso). Recto sur fond blanc : logo de l'entreprise, raison sociale, spécialité, adresse, téléphone (+33) et email, QR code vers le site web de l'entreprise en bas à droite. Verso sur fond bleu Koji : vrai logo Koji (reproduit vectoriellement), QR codes vers le site Koji et vers les stores (App Store / Google Play, à activer dès que les liens réels seront fournis). Bouton Aperçu avant téléchargement. Réservée aux comptes administrateurs pour le moment (jusqu'à nouvel ordre).</a:t>
+            </a:r>
+            <a:endParaRPr lang="en-US" sz="1100" dirty="0"/>
+          </a:p>
+        </p:txBody>
+      </p:sp>
+      <p:sp>
+        <p:nvSpPr>
+          <p:cNvPr id="9" name="Shape 7"/>
+          <p:cNvSpPr/>
+          <p:nvPr/>
+        </p:nvSpPr>
+        <p:spPr>
+          <a:xfrm>
+            <a:off x="640080" y="2926080"/>
+            <a:ext cx="10881360" cy="1097280"/>
+          </a:xfrm>
+          <a:prstGeom prst="roundRect">
+            <a:avLst>
+              <a:gd name="adj" fmla="val 5000"/>
+            </a:avLst>
+          </a:prstGeom>
+          <a:solidFill>
+            <a:srgbClr val="FFFFFF"/>
+          </a:solidFill>
+          <a:ln w="12700">
+            <a:solidFill>
+              <a:srgbClr val="E4DCCB"/>
+            </a:solidFill>
+            <a:prstDash val="solid"/>
+          </a:ln>
+        </p:spPr>
+      </p:sp>
+      <p:sp>
+        <p:nvSpPr>
+          <p:cNvPr id="10" name="Shape 8"/>
+          <p:cNvSpPr/>
+          <p:nvPr/>
+        </p:nvSpPr>
+        <p:spPr>
+          <a:xfrm>
+            <a:off x="640080" y="2926080"/>
+            <a:ext cx="54864" cy="1097280"/>
+          </a:xfrm>
+          <a:prstGeom prst="rect">
+            <a:avLst/>
+          </a:prstGeom>
+          <a:solidFill>
+            <a:srgbClr val="1D6FE0"/>
+          </a:solidFill>
+          <a:ln/>
+        </p:spPr>
+      </p:sp>
+      <p:sp>
+        <p:nvSpPr>
+          <p:cNvPr id="11" name="Text 9"/>
+          <p:cNvSpPr/>
+          <p:nvPr/>
+        </p:nvSpPr>
+        <p:spPr>
+          <a:xfrm>
+            <a:off x="914400" y="3035808"/>
+            <a:ext cx="10332720" cy="365760"/>
+          </a:xfrm>
+          <a:prstGeom prst="rect">
+            <a:avLst/>
+          </a:prstGeom>
+          <a:noFill/>
+          <a:ln/>
+        </p:spPr>
+        <p:txBody>
+          <a:bodyPr wrap="square" rtlCol="0" anchor="ctr"/>
+          <a:lstStyle/>
+          <a:p>
+            <a:pPr indent="0" marL="0">
+              <a:buNone/>
+            </a:pPr>
+            <a:r>
+              <a:rPr lang="en-US" sz="1400" b="1" dirty="0">
+                <a:solidFill>
+                  <a:srgbClr val="1B1F3B"/>
+                </a:solidFill>
+                <a:latin typeface="Segoe UI" pitchFamily="34" charset="0"/>
+                <a:ea typeface="Segoe UI" pitchFamily="34" charset="-122"/>
+                <a:cs typeface="Segoe UI" pitchFamily="34" charset="-120"/>
+              </a:rPr>
+              <a:t>QR code personnalisé pour la carte de visite</a:t>
+            </a:r>
+            <a:endParaRPr lang="en-US" sz="1400" dirty="0"/>
+          </a:p>
+        </p:txBody>
+      </p:sp>
+      <p:sp>
+        <p:nvSpPr>
+          <p:cNvPr id="12" name="Text 10"/>
+          <p:cNvSpPr/>
+          <p:nvPr/>
+        </p:nvSpPr>
+        <p:spPr>
+          <a:xfrm>
+            <a:off x="914400" y="3383280"/>
+            <a:ext cx="10332720" cy="594360"/>
+          </a:xfrm>
+          <a:prstGeom prst="rect">
+            <a:avLst/>
+          </a:prstGeom>
+          <a:noFill/>
+          <a:ln/>
+        </p:spPr>
+        <p:txBody>
+          <a:bodyPr wrap="square" rtlCol="0" anchor="ctr"/>
+          <a:lstStyle/>
+          <a:p>
+            <a:pPr indent="0" marL="0">
+              <a:lnSpc>
+                <a:spcPts val="1400"/>
+              </a:lnSpc>
+              <a:buNone/>
+            </a:pPr>
+            <a:r>
+              <a:rPr lang="en-US" sz="1100" dirty="0">
+                <a:solidFill>
+                  <a:srgbClr val="8A7C68"/>
+                </a:solidFill>
+                <a:latin typeface="Segoe UI" pitchFamily="34" charset="0"/>
+                <a:ea typeface="Segoe UI" pitchFamily="34" charset="-122"/>
+                <a:cs typeface="Segoe UI" pitchFamily="34" charset="-120"/>
+              </a:rPr>
+              <a:t>Sous le champ 'Site web' de la fiche entreprise, possibilité d'importer son propre QR code (image), qui remplace alors celui généré automatiquement depuis le site web sur la carte de visite — utile pour pointer vers autre chose (page d'avis, WhatsApp...).</a:t>
+            </a:r>
+            <a:endParaRPr lang="en-US" sz="1100" dirty="0"/>
+          </a:p>
+        </p:txBody>
+      </p:sp>
+      <p:sp>
+        <p:nvSpPr>
+          <p:cNvPr id="13" name="Shape 11"/>
+          <p:cNvSpPr/>
+          <p:nvPr/>
+        </p:nvSpPr>
+        <p:spPr>
+          <a:xfrm>
+            <a:off x="640080" y="4160520"/>
+            <a:ext cx="10881360" cy="1097280"/>
+          </a:xfrm>
+          <a:prstGeom prst="roundRect">
+            <a:avLst>
+              <a:gd name="adj" fmla="val 5000"/>
+            </a:avLst>
+          </a:prstGeom>
+          <a:solidFill>
+            <a:srgbClr val="FFFFFF"/>
+          </a:solidFill>
+          <a:ln w="12700">
+            <a:solidFill>
+              <a:srgbClr val="E4DCCB"/>
+            </a:solidFill>
+            <a:prstDash val="solid"/>
+          </a:ln>
+        </p:spPr>
+      </p:sp>
+      <p:sp>
+        <p:nvSpPr>
+          <p:cNvPr id="14" name="Shape 12"/>
+          <p:cNvSpPr/>
+          <p:nvPr/>
+        </p:nvSpPr>
+        <p:spPr>
+          <a:xfrm>
+            <a:off x="640080" y="4160520"/>
+            <a:ext cx="54864" cy="1097280"/>
+          </a:xfrm>
+          <a:prstGeom prst="rect">
+            <a:avLst/>
+          </a:prstGeom>
+          <a:solidFill>
+            <a:srgbClr val="1D6FE0"/>
+          </a:solidFill>
+          <a:ln/>
+        </p:spPr>
+      </p:sp>
+      <p:sp>
+        <p:nvSpPr>
+          <p:cNvPr id="15" name="Text 13"/>
+          <p:cNvSpPr/>
+          <p:nvPr/>
+        </p:nvSpPr>
+        <p:spPr>
+          <a:xfrm>
+            <a:off x="914400" y="4270248"/>
+            <a:ext cx="10332720" cy="365760"/>
+          </a:xfrm>
+          <a:prstGeom prst="rect">
+            <a:avLst/>
+          </a:prstGeom>
+          <a:noFill/>
+          <a:ln/>
+        </p:spPr>
+        <p:txBody>
+          <a:bodyPr wrap="square" rtlCol="0" anchor="ctr"/>
+          <a:lstStyle/>
+          <a:p>
+            <a:pPr indent="0" marL="0">
+              <a:buNone/>
+            </a:pPr>
+            <a:r>
+              <a:rPr lang="en-US" sz="1400" b="1" dirty="0">
+                <a:solidFill>
+                  <a:srgbClr val="1B1F3B"/>
+                </a:solidFill>
+                <a:latin typeface="Segoe UI" pitchFamily="34" charset="0"/>
+                <a:ea typeface="Segoe UI" pitchFamily="34" charset="-122"/>
+                <a:cs typeface="Segoe UI" pitchFamily="34" charset="-120"/>
+              </a:rPr>
+              <a:t>Verso de la carte : mention App Store / Play Store</a:t>
+            </a:r>
+            <a:endParaRPr lang="en-US" sz="1400" dirty="0"/>
+          </a:p>
+        </p:txBody>
+      </p:sp>
+      <p:sp>
+        <p:nvSpPr>
+          <p:cNvPr id="16" name="Text 14"/>
+          <p:cNvSpPr/>
+          <p:nvPr/>
+        </p:nvSpPr>
+        <p:spPr>
+          <a:xfrm>
+            <a:off x="914400" y="4617720"/>
+            <a:ext cx="10332720" cy="594360"/>
+          </a:xfrm>
+          <a:prstGeom prst="rect">
+            <a:avLst/>
+          </a:prstGeom>
+          <a:noFill/>
+          <a:ln/>
+        </p:spPr>
+        <p:txBody>
+          <a:bodyPr wrap="square" rtlCol="0" anchor="ctr"/>
+          <a:lstStyle/>
+          <a:p>
+            <a:pPr indent="0" marL="0">
+              <a:lnSpc>
+                <a:spcPts val="1400"/>
+              </a:lnSpc>
+              <a:buNone/>
+            </a:pPr>
+            <a:r>
+              <a:rPr lang="en-US" sz="1100" dirty="0">
+                <a:solidFill>
+                  <a:srgbClr val="8A7C68"/>
+                </a:solidFill>
+                <a:latin typeface="Segoe UI" pitchFamily="34" charset="0"/>
+                <a:ea typeface="Segoe UI" pitchFamily="34" charset="-122"/>
+                <a:cs typeface="Segoe UI" pitchFamily="34" charset="-120"/>
+              </a:rPr>
+              <a:t>Ajout de la mention 'Disponible sur App Store et Play Store' avec un symbole pour chaque store.</a:t>
+            </a:r>
+            <a:endParaRPr lang="en-US" sz="1100" dirty="0"/>
+          </a:p>
+        </p:txBody>
+      </p:sp>
+      <p:sp>
+        <p:nvSpPr>
+          <p:cNvPr id="17" name="Shape 15"/>
+          <p:cNvSpPr/>
+          <p:nvPr/>
+        </p:nvSpPr>
+        <p:spPr>
+          <a:xfrm>
+            <a:off x="640080" y="5394960"/>
+            <a:ext cx="10881360" cy="1097280"/>
+          </a:xfrm>
+          <a:prstGeom prst="roundRect">
+            <a:avLst>
+              <a:gd name="adj" fmla="val 5000"/>
+            </a:avLst>
+          </a:prstGeom>
+          <a:solidFill>
+            <a:srgbClr val="FFFFFF"/>
+          </a:solidFill>
+          <a:ln w="12700">
+            <a:solidFill>
+              <a:srgbClr val="E4DCCB"/>
+            </a:solidFill>
+            <a:prstDash val="solid"/>
+          </a:ln>
+        </p:spPr>
+      </p:sp>
+      <p:sp>
+        <p:nvSpPr>
+          <p:cNvPr id="18" name="Shape 16"/>
+          <p:cNvSpPr/>
+          <p:nvPr/>
+        </p:nvSpPr>
+        <p:spPr>
+          <a:xfrm>
+            <a:off x="640080" y="5394960"/>
+            <a:ext cx="54864" cy="1097280"/>
+          </a:xfrm>
+          <a:prstGeom prst="rect">
+            <a:avLst/>
+          </a:prstGeom>
+          <a:solidFill>
+            <a:srgbClr val="1D6FE0"/>
+          </a:solidFill>
+          <a:ln/>
+        </p:spPr>
+      </p:sp>
+      <p:sp>
+        <p:nvSpPr>
+          <p:cNvPr id="19" name="Text 17"/>
+          <p:cNvSpPr/>
+          <p:nvPr/>
+        </p:nvSpPr>
+        <p:spPr>
+          <a:xfrm>
+            <a:off x="914400" y="5504688"/>
+            <a:ext cx="10332720" cy="365760"/>
+          </a:xfrm>
+          <a:prstGeom prst="rect">
+            <a:avLst/>
+          </a:prstGeom>
+          <a:noFill/>
+          <a:ln/>
+        </p:spPr>
+        <p:txBody>
+          <a:bodyPr wrap="square" rtlCol="0" anchor="ctr"/>
+          <a:lstStyle/>
+          <a:p>
+            <a:pPr indent="0" marL="0">
+              <a:buNone/>
+            </a:pPr>
+            <a:r>
+              <a:rPr lang="en-US" sz="1400" b="1" dirty="0">
+                <a:solidFill>
+                  <a:srgbClr val="1B1F3B"/>
+                </a:solidFill>
+                <a:latin typeface="Segoe UI" pitchFamily="34" charset="0"/>
+                <a:ea typeface="Segoe UI" pitchFamily="34" charset="-122"/>
+                <a:cs typeface="Segoe UI" pitchFamily="34" charset="-120"/>
+              </a:rPr>
+              <a:t>Verso de la carte aligné sur le style de la page de connexion</a:t>
+            </a:r>
+            <a:endParaRPr lang="en-US" sz="1400" dirty="0"/>
+          </a:p>
+        </p:txBody>
+      </p:sp>
+      <p:sp>
+        <p:nvSpPr>
+          <p:cNvPr id="20" name="Text 18"/>
+          <p:cNvSpPr/>
+          <p:nvPr/>
+        </p:nvSpPr>
+        <p:spPr>
+          <a:xfrm>
+            <a:off x="914400" y="5852160"/>
+            <a:ext cx="10332720" cy="594360"/>
+          </a:xfrm>
+          <a:prstGeom prst="rect">
+            <a:avLst/>
+          </a:prstGeom>
+          <a:noFill/>
+          <a:ln/>
+        </p:spPr>
+        <p:txBody>
+          <a:bodyPr wrap="square" rtlCol="0" anchor="ctr"/>
+          <a:lstStyle/>
+          <a:p>
+            <a:pPr indent="0" marL="0">
+              <a:lnSpc>
+                <a:spcPts val="1400"/>
+              </a:lnSpc>
+              <a:buNone/>
+            </a:pPr>
+            <a:r>
+              <a:rPr lang="en-US" sz="1100" dirty="0">
+                <a:solidFill>
+                  <a:srgbClr val="8A7C68"/>
+                </a:solidFill>
+                <a:latin typeface="Segoe UI" pitchFamily="34" charset="0"/>
+                <a:ea typeface="Segoe UI" pitchFamily="34" charset="-122"/>
+                <a:cs typeface="Segoe UI" pitchFamily="34" charset="-120"/>
+              </a:rPr>
+              <a:t>Les badges 'Google Play' / 'App Store' du verso reprennent maintenant les mêmes icônes et le même style encadré que sur la page de connexion (composant AuthBrandPanel), avec le texte 'Disponible sur' au lieu de 'Bientôt disponible sur'.</a:t>
+            </a:r>
+            <a:endParaRPr lang="en-US" sz="1100" dirty="0"/>
+          </a:p>
+        </p:txBody>
+      </p:sp>
+      <p:sp>
+        <p:nvSpPr>
+          <p:cNvPr id="21" name="Text 19"/>
+          <p:cNvSpPr/>
+          <p:nvPr/>
+        </p:nvSpPr>
+        <p:spPr>
+          <a:xfrm>
+            <a:off x="365760" y="6510528"/>
+            <a:ext cx="5486400" cy="274320"/>
+          </a:xfrm>
+          <a:prstGeom prst="rect">
+            <a:avLst/>
+          </a:prstGeom>
+          <a:noFill/>
+          <a:ln/>
+        </p:spPr>
+        <p:txBody>
+          <a:bodyPr wrap="square" rtlCol="0" anchor="ctr"/>
+          <a:lstStyle/>
+          <a:p>
+            <a:pPr indent="0" marL="0">
+              <a:buNone/>
+            </a:pPr>
+            <a:r>
+              <a:rPr lang="en-US" sz="900" dirty="0">
+                <a:solidFill>
+                  <a:srgbClr val="8A7C68"/>
+                </a:solidFill>
+                <a:latin typeface="Segoe UI" pitchFamily="34" charset="0"/>
+                <a:ea typeface="Segoe UI" pitchFamily="34" charset="-122"/>
+                <a:cs typeface="Segoe UI" pitchFamily="34" charset="-120"/>
+              </a:rPr>
+              <a:t>Kôji Web — Récapitulatif technique</a:t>
+            </a:r>
+            <a:endParaRPr lang="en-US" sz="900" dirty="0"/>
+          </a:p>
+        </p:txBody>
+      </p:sp>
+      <p:sp>
+        <p:nvSpPr>
+          <p:cNvPr id="22" name="Text 20"/>
+          <p:cNvSpPr/>
+          <p:nvPr/>
+        </p:nvSpPr>
+        <p:spPr>
+          <a:xfrm>
+            <a:off x="9601200" y="6510528"/>
+            <a:ext cx="2194560" cy="274320"/>
+          </a:xfrm>
+          <a:prstGeom prst="rect">
+            <a:avLst/>
+          </a:prstGeom>
+          <a:noFill/>
+          <a:ln/>
+        </p:spPr>
+        <p:txBody>
+          <a:bodyPr wrap="square" rtlCol="0" anchor="ctr"/>
+          <a:lstStyle/>
+          <a:p>
+            <a:pPr algn="r" indent="0" marL="0">
+              <a:buNone/>
+            </a:pPr>
+            <a:r>
+              <a:rPr lang="en-US" sz="900" dirty="0">
+                <a:solidFill>
+                  <a:srgbClr val="8A7C68"/>
+                </a:solidFill>
+                <a:latin typeface="Segoe UI" pitchFamily="34" charset="0"/>
+                <a:ea typeface="Segoe UI" pitchFamily="34" charset="-122"/>
+                <a:cs typeface="Segoe UI" pitchFamily="34" charset="-120"/>
+              </a:rPr>
+              <a:t>18</a:t>
+            </a:r>
+            <a:endParaRPr lang="en-US" sz="900" dirty="0"/>
+          </a:p>
+        </p:txBody>
+      </p:sp>
+    </p:spTree>
+  </p:cSld>
+  <p:clrMapOvr>
+    <a:masterClrMapping/>
+  </p:clrMapOvr>
+</p:sld>
+</file>
+
+<file path=ppt/slides/slide19.xml><?xml version="1.0" encoding="utf-8"?>
+<p:sld xmlns:a="http://schemas.openxmlformats.org/drawingml/2006/main" xmlns:r="http://schemas.openxmlformats.org/officeDocument/2006/relationships" xmlns:p="http://schemas.openxmlformats.org/presentationml/2006/main">
+  <p:cSld name="Slide 19">
+    <p:bg>
+      <p:bgPr>
+        <a:solidFill>
           <a:srgbClr val="0B1030"/>
         </a:solidFill>
       </p:bgPr>
@@ -9181,7 +10081,7 @@
                 <a:ea typeface="Segoe UI" pitchFamily="34" charset="-122"/>
                 <a:cs typeface="Segoe UI" pitchFamily="34" charset="-120"/>
               </a:rPr>
-              <a:t>38 mise(s) à jour</a:t>
+              <a:t>39 mise(s) à jour</a:t>
             </a:r>
             <a:endParaRPr lang="en-US" sz="1200" dirty="0"/>
           </a:p>
@@ -9229,472 +10129,6 @@
       <p:sp>
         <p:nvSpPr>
           <p:cNvPr id="7" name="Text 5"/>
-          <p:cNvSpPr/>
-          <p:nvPr/>
-        </p:nvSpPr>
-        <p:spPr>
-          <a:xfrm>
-            <a:off x="9601200" y="6510528"/>
-            <a:ext cx="2194560" cy="274320"/>
-          </a:xfrm>
-          <a:prstGeom prst="rect">
-            <a:avLst/>
-          </a:prstGeom>
-          <a:noFill/>
-          <a:ln/>
-        </p:spPr>
-        <p:txBody>
-          <a:bodyPr wrap="square" rtlCol="0" anchor="ctr"/>
-          <a:lstStyle/>
-          <a:p>
-            <a:pPr algn="r" indent="0" marL="0">
-              <a:buNone/>
-            </a:pPr>
-            <a:r>
-              <a:rPr lang="en-US" sz="900" dirty="0">
-                <a:solidFill>
-                  <a:srgbClr val="8A7C68"/>
-                </a:solidFill>
-                <a:latin typeface="Segoe UI" pitchFamily="34" charset="0"/>
-                <a:ea typeface="Segoe UI" pitchFamily="34" charset="-122"/>
-                <a:cs typeface="Segoe UI" pitchFamily="34" charset="-120"/>
-              </a:rPr>
-              <a:t>18</a:t>
-            </a:r>
-            <a:endParaRPr lang="en-US" sz="900" dirty="0"/>
-          </a:p>
-        </p:txBody>
-      </p:sp>
-    </p:spTree>
-  </p:cSld>
-  <p:clrMapOvr>
-    <a:masterClrMapping/>
-  </p:clrMapOvr>
-</p:sld>
-</file>
-
-<file path=ppt/slides/slide19.xml><?xml version="1.0" encoding="utf-8"?>
-<p:sld xmlns:a="http://schemas.openxmlformats.org/drawingml/2006/main" xmlns:r="http://schemas.openxmlformats.org/officeDocument/2006/relationships" xmlns:p="http://schemas.openxmlformats.org/presentationml/2006/main">
-  <p:cSld name="Slide 19">
-    <p:bg>
-      <p:bgPr>
-        <a:solidFill>
-          <a:srgbClr val="F3EEE3"/>
-        </a:solidFill>
-      </p:bgPr>
-    </p:bg>
-    <p:spTree>
-      <p:nvGrpSpPr>
-        <p:cNvPr id="1" name=""/>
-        <p:cNvGrpSpPr/>
-        <p:nvPr/>
-      </p:nvGrpSpPr>
-      <p:grpSpPr>
-        <a:xfrm>
-          <a:off x="0" y="0"/>
-          <a:ext cx="0" cy="0"/>
-          <a:chOff x="0" y="0"/>
-          <a:chExt cx="0" cy="0"/>
-        </a:xfrm>
-      </p:grpSpPr>
-      <p:sp>
-        <p:nvSpPr>
-          <p:cNvPr id="2" name="Shape 0"/>
-          <p:cNvSpPr/>
-          <p:nvPr/>
-        </p:nvSpPr>
-        <p:spPr>
-          <a:xfrm>
-            <a:off x="640080" y="411480"/>
-            <a:ext cx="2377440" cy="365760"/>
-          </a:xfrm>
-          <a:prstGeom prst="roundRect">
-            <a:avLst>
-              <a:gd name="adj" fmla="val 50000"/>
-            </a:avLst>
-          </a:prstGeom>
-          <a:solidFill>
-            <a:srgbClr val="F5E6DA"/>
-          </a:solidFill>
-          <a:ln/>
-        </p:spPr>
-      </p:sp>
-      <p:sp>
-        <p:nvSpPr>
-          <p:cNvPr id="3" name="Text 1"/>
-          <p:cNvSpPr/>
-          <p:nvPr/>
-        </p:nvSpPr>
-        <p:spPr>
-          <a:xfrm>
-            <a:off x="640080" y="411480"/>
-            <a:ext cx="2377440" cy="365760"/>
-          </a:xfrm>
-          <a:prstGeom prst="rect">
-            <a:avLst/>
-          </a:prstGeom>
-          <a:noFill/>
-          <a:ln/>
-        </p:spPr>
-        <p:txBody>
-          <a:bodyPr wrap="square" rtlCol="0" anchor="ctr"/>
-          <a:lstStyle/>
-          <a:p>
-            <a:pPr algn="ctr" indent="0" marL="0">
-              <a:buNone/>
-            </a:pPr>
-            <a:r>
-              <a:rPr lang="en-US" sz="1000" b="1" spc="100" kern="0" dirty="0">
-                <a:solidFill>
-                  <a:srgbClr val="9A4C1F"/>
-                </a:solidFill>
-                <a:latin typeface="Segoe UI" pitchFamily="34" charset="0"/>
-                <a:ea typeface="Segoe UI" pitchFamily="34" charset="-122"/>
-                <a:cs typeface="Segoe UI" pitchFamily="34" charset="-120"/>
-              </a:rPr>
-              <a:t>BACKEND</a:t>
-            </a:r>
-            <a:endParaRPr lang="en-US" sz="1000" dirty="0"/>
-          </a:p>
-        </p:txBody>
-      </p:sp>
-      <p:sp>
-        <p:nvSpPr>
-          <p:cNvPr id="4" name="Text 2"/>
-          <p:cNvSpPr/>
-          <p:nvPr/>
-        </p:nvSpPr>
-        <p:spPr>
-          <a:xfrm>
-            <a:off x="640080" y="868680"/>
-            <a:ext cx="10515600" cy="548640"/>
-          </a:xfrm>
-          <a:prstGeom prst="rect">
-            <a:avLst/>
-          </a:prstGeom>
-          <a:noFill/>
-          <a:ln/>
-        </p:spPr>
-        <p:txBody>
-          <a:bodyPr wrap="square" rtlCol="0" anchor="ctr"/>
-          <a:lstStyle/>
-          <a:p>
-            <a:pPr indent="0" marL="0">
-              <a:buNone/>
-            </a:pPr>
-            <a:r>
-              <a:rPr lang="en-US" sz="2400" b="1" dirty="0">
-                <a:solidFill>
-                  <a:srgbClr val="1B1F3B"/>
-                </a:solidFill>
-                <a:latin typeface="Georgia" pitchFamily="34" charset="0"/>
-                <a:ea typeface="Georgia" pitchFamily="34" charset="-122"/>
-                <a:cs typeface="Georgia" pitchFamily="34" charset="-120"/>
-              </a:rPr>
-              <a:t>Fondations</a:t>
-            </a:r>
-            <a:endParaRPr lang="en-US" sz="2400" dirty="0"/>
-          </a:p>
-        </p:txBody>
-      </p:sp>
-      <p:sp>
-        <p:nvSpPr>
-          <p:cNvPr id="5" name="Shape 3"/>
-          <p:cNvSpPr/>
-          <p:nvPr/>
-        </p:nvSpPr>
-        <p:spPr>
-          <a:xfrm>
-            <a:off x="640080" y="1691640"/>
-            <a:ext cx="10881360" cy="1097280"/>
-          </a:xfrm>
-          <a:prstGeom prst="roundRect">
-            <a:avLst>
-              <a:gd name="adj" fmla="val 5000"/>
-            </a:avLst>
-          </a:prstGeom>
-          <a:solidFill>
-            <a:srgbClr val="FFFFFF"/>
-          </a:solidFill>
-          <a:ln w="12700">
-            <a:solidFill>
-              <a:srgbClr val="E4DCCB"/>
-            </a:solidFill>
-            <a:prstDash val="solid"/>
-          </a:ln>
-        </p:spPr>
-      </p:sp>
-      <p:sp>
-        <p:nvSpPr>
-          <p:cNvPr id="6" name="Shape 4"/>
-          <p:cNvSpPr/>
-          <p:nvPr/>
-        </p:nvSpPr>
-        <p:spPr>
-          <a:xfrm>
-            <a:off x="640080" y="1691640"/>
-            <a:ext cx="54864" cy="1097280"/>
-          </a:xfrm>
-          <a:prstGeom prst="rect">
-            <a:avLst/>
-          </a:prstGeom>
-          <a:solidFill>
-            <a:srgbClr val="9A4C1F"/>
-          </a:solidFill>
-          <a:ln/>
-        </p:spPr>
-      </p:sp>
-      <p:sp>
-        <p:nvSpPr>
-          <p:cNvPr id="7" name="Text 5"/>
-          <p:cNvSpPr/>
-          <p:nvPr/>
-        </p:nvSpPr>
-        <p:spPr>
-          <a:xfrm>
-            <a:off x="914400" y="1801368"/>
-            <a:ext cx="10332720" cy="365760"/>
-          </a:xfrm>
-          <a:prstGeom prst="rect">
-            <a:avLst/>
-          </a:prstGeom>
-          <a:noFill/>
-          <a:ln/>
-        </p:spPr>
-        <p:txBody>
-          <a:bodyPr wrap="square" rtlCol="0" anchor="ctr"/>
-          <a:lstStyle/>
-          <a:p>
-            <a:pPr indent="0" marL="0">
-              <a:buNone/>
-            </a:pPr>
-            <a:r>
-              <a:rPr lang="en-US" sz="1400" b="1" dirty="0">
-                <a:solidFill>
-                  <a:srgbClr val="1B1F3B"/>
-                </a:solidFill>
-                <a:latin typeface="Segoe UI" pitchFamily="34" charset="0"/>
-                <a:ea typeface="Segoe UI" pitchFamily="34" charset="-122"/>
-                <a:cs typeface="Segoe UI" pitchFamily="34" charset="-120"/>
-              </a:rPr>
-              <a:t>Mise en place initiale de l'application</a:t>
-            </a:r>
-            <a:endParaRPr lang="en-US" sz="1400" dirty="0"/>
-          </a:p>
-        </p:txBody>
-      </p:sp>
-      <p:sp>
-        <p:nvSpPr>
-          <p:cNvPr id="8" name="Text 6"/>
-          <p:cNvSpPr/>
-          <p:nvPr/>
-        </p:nvSpPr>
-        <p:spPr>
-          <a:xfrm>
-            <a:off x="914400" y="2148840"/>
-            <a:ext cx="10332720" cy="594360"/>
-          </a:xfrm>
-          <a:prstGeom prst="rect">
-            <a:avLst/>
-          </a:prstGeom>
-          <a:noFill/>
-          <a:ln/>
-        </p:spPr>
-        <p:txBody>
-          <a:bodyPr wrap="square" rtlCol="0" anchor="ctr"/>
-          <a:lstStyle/>
-          <a:p>
-            <a:pPr indent="0" marL="0">
-              <a:lnSpc>
-                <a:spcPts val="1400"/>
-              </a:lnSpc>
-              <a:buNone/>
-            </a:pPr>
-            <a:r>
-              <a:rPr lang="en-US" sz="1100" dirty="0">
-                <a:solidFill>
-                  <a:srgbClr val="8A7C68"/>
-                </a:solidFill>
-                <a:latin typeface="Segoe UI" pitchFamily="34" charset="0"/>
-                <a:ea typeface="Segoe UI" pitchFamily="34" charset="-122"/>
-                <a:cs typeface="Segoe UI" pitchFamily="34" charset="-120"/>
-              </a:rPr>
-              <a:t>Structure Next.js App Router, authentification, base de données JSON locale et première version des modules Devis, Chantiers, Équipe, Planning.</a:t>
-            </a:r>
-            <a:endParaRPr lang="en-US" sz="1100" dirty="0"/>
-          </a:p>
-        </p:txBody>
-      </p:sp>
-      <p:sp>
-        <p:nvSpPr>
-          <p:cNvPr id="9" name="Shape 7"/>
-          <p:cNvSpPr/>
-          <p:nvPr/>
-        </p:nvSpPr>
-        <p:spPr>
-          <a:xfrm>
-            <a:off x="640080" y="2926080"/>
-            <a:ext cx="10881360" cy="1097280"/>
-          </a:xfrm>
-          <a:prstGeom prst="roundRect">
-            <a:avLst>
-              <a:gd name="adj" fmla="val 5000"/>
-            </a:avLst>
-          </a:prstGeom>
-          <a:solidFill>
-            <a:srgbClr val="FFFFFF"/>
-          </a:solidFill>
-          <a:ln w="12700">
-            <a:solidFill>
-              <a:srgbClr val="E4DCCB"/>
-            </a:solidFill>
-            <a:prstDash val="solid"/>
-          </a:ln>
-        </p:spPr>
-      </p:sp>
-      <p:sp>
-        <p:nvSpPr>
-          <p:cNvPr id="10" name="Shape 8"/>
-          <p:cNvSpPr/>
-          <p:nvPr/>
-        </p:nvSpPr>
-        <p:spPr>
-          <a:xfrm>
-            <a:off x="640080" y="2926080"/>
-            <a:ext cx="54864" cy="1097280"/>
-          </a:xfrm>
-          <a:prstGeom prst="rect">
-            <a:avLst/>
-          </a:prstGeom>
-          <a:solidFill>
-            <a:srgbClr val="9A4C1F"/>
-          </a:solidFill>
-          <a:ln/>
-        </p:spPr>
-      </p:sp>
-      <p:sp>
-        <p:nvSpPr>
-          <p:cNvPr id="11" name="Text 9"/>
-          <p:cNvSpPr/>
-          <p:nvPr/>
-        </p:nvSpPr>
-        <p:spPr>
-          <a:xfrm>
-            <a:off x="914400" y="3035808"/>
-            <a:ext cx="10332720" cy="365760"/>
-          </a:xfrm>
-          <a:prstGeom prst="rect">
-            <a:avLst/>
-          </a:prstGeom>
-          <a:noFill/>
-          <a:ln/>
-        </p:spPr>
-        <p:txBody>
-          <a:bodyPr wrap="square" rtlCol="0" anchor="ctr"/>
-          <a:lstStyle/>
-          <a:p>
-            <a:pPr indent="0" marL="0">
-              <a:buNone/>
-            </a:pPr>
-            <a:r>
-              <a:rPr lang="en-US" sz="1400" b="1" dirty="0">
-                <a:solidFill>
-                  <a:srgbClr val="1B1F3B"/>
-                </a:solidFill>
-                <a:latin typeface="Segoe UI" pitchFamily="34" charset="0"/>
-                <a:ea typeface="Segoe UI" pitchFamily="34" charset="-122"/>
-                <a:cs typeface="Segoe UI" pitchFamily="34" charset="-120"/>
-              </a:rPr>
-              <a:t>Fiabilisation de l'envoi d'email (SMTP Gmail)</a:t>
-            </a:r>
-            <a:endParaRPr lang="en-US" sz="1400" dirty="0"/>
-          </a:p>
-        </p:txBody>
-      </p:sp>
-      <p:sp>
-        <p:nvSpPr>
-          <p:cNvPr id="12" name="Text 10"/>
-          <p:cNvSpPr/>
-          <p:nvPr/>
-        </p:nvSpPr>
-        <p:spPr>
-          <a:xfrm>
-            <a:off x="914400" y="3383280"/>
-            <a:ext cx="10332720" cy="594360"/>
-          </a:xfrm>
-          <a:prstGeom prst="rect">
-            <a:avLst/>
-          </a:prstGeom>
-          <a:noFill/>
-          <a:ln/>
-        </p:spPr>
-        <p:txBody>
-          <a:bodyPr wrap="square" rtlCol="0" anchor="ctr"/>
-          <a:lstStyle/>
-          <a:p>
-            <a:pPr indent="0" marL="0">
-              <a:lnSpc>
-                <a:spcPts val="1400"/>
-              </a:lnSpc>
-              <a:buNone/>
-            </a:pPr>
-            <a:r>
-              <a:rPr lang="en-US" sz="1100" dirty="0">
-                <a:solidFill>
-                  <a:srgbClr val="8A7C68"/>
-                </a:solidFill>
-                <a:latin typeface="Segoe UI" pitchFamily="34" charset="0"/>
-                <a:ea typeface="Segoe UI" pitchFamily="34" charset="-122"/>
-                <a:cs typeface="Segoe UI" pitchFamily="34" charset="-120"/>
-              </a:rPr>
-              <a:t>Import dynamique de nodemailer compatible Vercel (ES modules), configuration complète (TLS, authentification).</a:t>
-            </a:r>
-            <a:endParaRPr lang="en-US" sz="1100" dirty="0"/>
-          </a:p>
-        </p:txBody>
-      </p:sp>
-      <p:sp>
-        <p:nvSpPr>
-          <p:cNvPr id="13" name="Text 11"/>
-          <p:cNvSpPr/>
-          <p:nvPr/>
-        </p:nvSpPr>
-        <p:spPr>
-          <a:xfrm>
-            <a:off x="365760" y="6510528"/>
-            <a:ext cx="5486400" cy="274320"/>
-          </a:xfrm>
-          <a:prstGeom prst="rect">
-            <a:avLst/>
-          </a:prstGeom>
-          <a:noFill/>
-          <a:ln/>
-        </p:spPr>
-        <p:txBody>
-          <a:bodyPr wrap="square" rtlCol="0" anchor="ctr"/>
-          <a:lstStyle/>
-          <a:p>
-            <a:pPr indent="0" marL="0">
-              <a:buNone/>
-            </a:pPr>
-            <a:r>
-              <a:rPr lang="en-US" sz="900" dirty="0">
-                <a:solidFill>
-                  <a:srgbClr val="8A7C68"/>
-                </a:solidFill>
-                <a:latin typeface="Segoe UI" pitchFamily="34" charset="0"/>
-                <a:ea typeface="Segoe UI" pitchFamily="34" charset="-122"/>
-                <a:cs typeface="Segoe UI" pitchFamily="34" charset="-120"/>
-              </a:rPr>
-              <a:t>Kôji Web — Récapitulatif technique</a:t>
-            </a:r>
-            <a:endParaRPr lang="en-US" sz="900" dirty="0"/>
-          </a:p>
-        </p:txBody>
-      </p:sp>
-      <p:sp>
-        <p:nvSpPr>
-          <p:cNvPr id="14" name="Text 12"/>
           <p:cNvSpPr/>
           <p:nvPr/>
         </p:nvSpPr>
@@ -9901,7 +10335,7 @@
                 <a:ea typeface="Georgia" pitchFamily="34" charset="-122"/>
                 <a:cs typeface="Georgia" pitchFamily="34" charset="-120"/>
               </a:rPr>
-              <a:t>91</a:t>
+              <a:t>96</a:t>
             </a:r>
             <a:endParaRPr lang="en-US" sz="3200" dirty="0"/>
           </a:p>
@@ -10006,7 +10440,7 @@
                 <a:ea typeface="Georgia" pitchFamily="34" charset="-122"/>
                 <a:cs typeface="Georgia" pitchFamily="34" charset="-120"/>
               </a:rPr>
-              <a:t>42</a:t>
+              <a:t>46</a:t>
             </a:r>
             <a:endParaRPr lang="en-US" sz="3200" dirty="0"/>
           </a:p>
@@ -10111,7 +10545,7 @@
                 <a:ea typeface="Georgia" pitchFamily="34" charset="-122"/>
                 <a:cs typeface="Georgia" pitchFamily="34" charset="-120"/>
               </a:rPr>
-              <a:t>38</a:t>
+              <a:t>39</a:t>
             </a:r>
             <a:endParaRPr lang="en-US" sz="3200" dirty="0"/>
           </a:p>
@@ -10622,7 +11056,7 @@
                 <a:ea typeface="Georgia" pitchFamily="34" charset="-122"/>
                 <a:cs typeface="Georgia" pitchFamily="34" charset="-120"/>
               </a:rPr>
-              <a:t>Devis</a:t>
+              <a:t>Fondations</a:t>
             </a:r>
             <a:endParaRPr lang="en-US" sz="2400" dirty="0"/>
           </a:p>
@@ -10708,7 +11142,7 @@
                 <a:ea typeface="Segoe UI" pitchFamily="34" charset="-122"/>
                 <a:cs typeface="Segoe UI" pitchFamily="34" charset="-120"/>
               </a:rPr>
-              <a:t>Génération PDF des devis réparée</a:t>
+              <a:t>Mise en place initiale de l'application</a:t>
             </a:r>
             <a:endParaRPr lang="en-US" sz="1400" dirty="0"/>
           </a:p>
@@ -10750,7 +11184,7 @@
                 <a:ea typeface="Segoe UI" pitchFamily="34" charset="-122"/>
                 <a:cs typeface="Segoe UI" pitchFamily="34" charset="-120"/>
               </a:rPr>
-              <a:t>La génération/aperçu PDF lisait encore l'ancien fichier JSON local et ne trouvait plus les devis créés depuis la migration Supabase ; corrigée pour lire directement la table partagée.</a:t>
+              <a:t>Structure Next.js App Router, authentification, base de données JSON locale et première version des modules Devis, Chantiers, Équipe, Planning.</a:t>
             </a:r>
             <a:endParaRPr lang="en-US" sz="1100" dirty="0"/>
           </a:p>
@@ -10836,7 +11270,7 @@
                 <a:ea typeface="Segoe UI" pitchFamily="34" charset="-122"/>
                 <a:cs typeface="Segoe UI" pitchFamily="34" charset="-120"/>
               </a:rPr>
-              <a:t>Versioning et sauvegarde complète du devis</a:t>
+              <a:t>Fiabilisation de l'envoi d'email (SMTP Gmail)</a:t>
             </a:r>
             <a:endParaRPr lang="en-US" sz="1400" dirty="0"/>
           </a:p>
@@ -10878,7 +11312,7 @@
                 <a:ea typeface="Segoe UI" pitchFamily="34" charset="-122"/>
                 <a:cs typeface="Segoe UI" pitchFamily="34" charset="-120"/>
               </a:rPr>
-              <a:t>Le numéro de version s'incrémente à chaque enregistrement manuel ; les notes, majorations/minorations et le taux de TVA choisi, qui se perdaient silencieusement, sont désormais bien sauvegardés.</a:t>
+              <a:t>Import dynamique de nodemailer compatible Vercel (ES modules), configuration complète (TLS, authentification).</a:t>
             </a:r>
             <a:endParaRPr lang="en-US" sz="1100" dirty="0"/>
           </a:p>
@@ -10886,263 +11320,7 @@
       </p:sp>
       <p:sp>
         <p:nvSpPr>
-          <p:cNvPr id="13" name="Shape 11"/>
-          <p:cNvSpPr/>
-          <p:nvPr/>
-        </p:nvSpPr>
-        <p:spPr>
-          <a:xfrm>
-            <a:off x="640080" y="4160520"/>
-            <a:ext cx="10881360" cy="1097280"/>
-          </a:xfrm>
-          <a:prstGeom prst="roundRect">
-            <a:avLst>
-              <a:gd name="adj" fmla="val 5000"/>
-            </a:avLst>
-          </a:prstGeom>
-          <a:solidFill>
-            <a:srgbClr val="FFFFFF"/>
-          </a:solidFill>
-          <a:ln w="12700">
-            <a:solidFill>
-              <a:srgbClr val="E4DCCB"/>
-            </a:solidFill>
-            <a:prstDash val="solid"/>
-          </a:ln>
-        </p:spPr>
-      </p:sp>
-      <p:sp>
-        <p:nvSpPr>
-          <p:cNvPr id="14" name="Shape 12"/>
-          <p:cNvSpPr/>
-          <p:nvPr/>
-        </p:nvSpPr>
-        <p:spPr>
-          <a:xfrm>
-            <a:off x="640080" y="4160520"/>
-            <a:ext cx="54864" cy="1097280"/>
-          </a:xfrm>
-          <a:prstGeom prst="rect">
-            <a:avLst/>
-          </a:prstGeom>
-          <a:solidFill>
-            <a:srgbClr val="9A4C1F"/>
-          </a:solidFill>
-          <a:ln/>
-        </p:spPr>
-      </p:sp>
-      <p:sp>
-        <p:nvSpPr>
-          <p:cNvPr id="15" name="Text 13"/>
-          <p:cNvSpPr/>
-          <p:nvPr/>
-        </p:nvSpPr>
-        <p:spPr>
-          <a:xfrm>
-            <a:off x="914400" y="4270248"/>
-            <a:ext cx="10332720" cy="365760"/>
-          </a:xfrm>
-          <a:prstGeom prst="rect">
-            <a:avLst/>
-          </a:prstGeom>
-          <a:noFill/>
-          <a:ln/>
-        </p:spPr>
-        <p:txBody>
-          <a:bodyPr wrap="square" rtlCol="0" anchor="ctr"/>
-          <a:lstStyle/>
-          <a:p>
-            <a:pPr indent="0" marL="0">
-              <a:buNone/>
-            </a:pPr>
-            <a:r>
-              <a:rPr lang="en-US" sz="1400" b="1" dirty="0">
-                <a:solidFill>
-                  <a:srgbClr val="1B1F3B"/>
-                </a:solidFill>
-                <a:latin typeface="Segoe UI" pitchFamily="34" charset="0"/>
-                <a:ea typeface="Segoe UI" pitchFamily="34" charset="-122"/>
-                <a:cs typeface="Segoe UI" pitchFamily="34" charset="-120"/>
-              </a:rPr>
-              <a:t>Taux horaire par défaut sur la bibliothèque</a:t>
-            </a:r>
-            <a:endParaRPr lang="en-US" sz="1400" dirty="0"/>
-          </a:p>
-        </p:txBody>
-      </p:sp>
-      <p:sp>
-        <p:nvSpPr>
-          <p:cNvPr id="16" name="Text 14"/>
-          <p:cNvSpPr/>
-          <p:nvPr/>
-        </p:nvSpPr>
-        <p:spPr>
-          <a:xfrm>
-            <a:off x="914400" y="4617720"/>
-            <a:ext cx="10332720" cy="594360"/>
-          </a:xfrm>
-          <a:prstGeom prst="rect">
-            <a:avLst/>
-          </a:prstGeom>
-          <a:noFill/>
-          <a:ln/>
-        </p:spPr>
-        <p:txBody>
-          <a:bodyPr wrap="square" rtlCol="0" anchor="ctr"/>
-          <a:lstStyle/>
-          <a:p>
-            <a:pPr indent="0" marL="0">
-              <a:lnSpc>
-                <a:spcPts val="1400"/>
-              </a:lnSpc>
-              <a:buNone/>
-            </a:pPr>
-            <a:r>
-              <a:rPr lang="en-US" sz="1100" dirty="0">
-                <a:solidFill>
-                  <a:srgbClr val="8A7C68"/>
-                </a:solidFill>
-                <a:latin typeface="Segoe UI" pitchFamily="34" charset="0"/>
-                <a:ea typeface="Segoe UI" pitchFamily="34" charset="-122"/>
-                <a:cs typeface="Segoe UI" pitchFamily="34" charset="-120"/>
-              </a:rPr>
-              <a:t>Le taux horaire du profil entreprise sert désormais de valeur par défaut pour chaque ouvrage (liste, création, édition, calcul du coût main d'œuvre).</a:t>
-            </a:r>
-            <a:endParaRPr lang="en-US" sz="1100" dirty="0"/>
-          </a:p>
-        </p:txBody>
-      </p:sp>
-      <p:sp>
-        <p:nvSpPr>
-          <p:cNvPr id="17" name="Shape 15"/>
-          <p:cNvSpPr/>
-          <p:nvPr/>
-        </p:nvSpPr>
-        <p:spPr>
-          <a:xfrm>
-            <a:off x="640080" y="5394960"/>
-            <a:ext cx="10881360" cy="1097280"/>
-          </a:xfrm>
-          <a:prstGeom prst="roundRect">
-            <a:avLst>
-              <a:gd name="adj" fmla="val 5000"/>
-            </a:avLst>
-          </a:prstGeom>
-          <a:solidFill>
-            <a:srgbClr val="FFFFFF"/>
-          </a:solidFill>
-          <a:ln w="12700">
-            <a:solidFill>
-              <a:srgbClr val="E4DCCB"/>
-            </a:solidFill>
-            <a:prstDash val="solid"/>
-          </a:ln>
-        </p:spPr>
-      </p:sp>
-      <p:sp>
-        <p:nvSpPr>
-          <p:cNvPr id="18" name="Shape 16"/>
-          <p:cNvSpPr/>
-          <p:nvPr/>
-        </p:nvSpPr>
-        <p:spPr>
-          <a:xfrm>
-            <a:off x="640080" y="5394960"/>
-            <a:ext cx="54864" cy="1097280"/>
-          </a:xfrm>
-          <a:prstGeom prst="rect">
-            <a:avLst/>
-          </a:prstGeom>
-          <a:solidFill>
-            <a:srgbClr val="9A4C1F"/>
-          </a:solidFill>
-          <a:ln/>
-        </p:spPr>
-      </p:sp>
-      <p:sp>
-        <p:nvSpPr>
-          <p:cNvPr id="19" name="Text 17"/>
-          <p:cNvSpPr/>
-          <p:nvPr/>
-        </p:nvSpPr>
-        <p:spPr>
-          <a:xfrm>
-            <a:off x="914400" y="5504688"/>
-            <a:ext cx="10332720" cy="365760"/>
-          </a:xfrm>
-          <a:prstGeom prst="rect">
-            <a:avLst/>
-          </a:prstGeom>
-          <a:noFill/>
-          <a:ln/>
-        </p:spPr>
-        <p:txBody>
-          <a:bodyPr wrap="square" rtlCol="0" anchor="ctr"/>
-          <a:lstStyle/>
-          <a:p>
-            <a:pPr indent="0" marL="0">
-              <a:buNone/>
-            </a:pPr>
-            <a:r>
-              <a:rPr lang="en-US" sz="1400" b="1" dirty="0">
-                <a:solidFill>
-                  <a:srgbClr val="1B1F3B"/>
-                </a:solidFill>
-                <a:latin typeface="Segoe UI" pitchFamily="34" charset="0"/>
-                <a:ea typeface="Segoe UI" pitchFamily="34" charset="-122"/>
-                <a:cs typeface="Segoe UI" pitchFamily="34" charset="-120"/>
-              </a:rPr>
-              <a:t>Restauration de la description des ouvrages de bibliothèque</a:t>
-            </a:r>
-            <a:endParaRPr lang="en-US" sz="1400" dirty="0"/>
-          </a:p>
-        </p:txBody>
-      </p:sp>
-      <p:sp>
-        <p:nvSpPr>
-          <p:cNvPr id="20" name="Text 18"/>
-          <p:cNvSpPr/>
-          <p:nvPr/>
-        </p:nvSpPr>
-        <p:spPr>
-          <a:xfrm>
-            <a:off x="914400" y="5852160"/>
-            <a:ext cx="10332720" cy="594360"/>
-          </a:xfrm>
-          <a:prstGeom prst="rect">
-            <a:avLst/>
-          </a:prstGeom>
-          <a:noFill/>
-          <a:ln/>
-        </p:spPr>
-        <p:txBody>
-          <a:bodyPr wrap="square" rtlCol="0" anchor="ctr"/>
-          <a:lstStyle/>
-          <a:p>
-            <a:pPr indent="0" marL="0">
-              <a:lnSpc>
-                <a:spcPts val="1400"/>
-              </a:lnSpc>
-              <a:buNone/>
-            </a:pPr>
-            <a:r>
-              <a:rPr lang="en-US" sz="1100" dirty="0">
-                <a:solidFill>
-                  <a:srgbClr val="8A7C68"/>
-                </a:solidFill>
-                <a:latin typeface="Segoe UI" pitchFamily="34" charset="0"/>
-                <a:ea typeface="Segoe UI" pitchFamily="34" charset="-122"/>
-                <a:cs typeface="Segoe UI" pitchFamily="34" charset="-120"/>
-              </a:rPr>
-              <a:t>La description déjà saisie dans la Bibliothèque d'ouvrages est désormais reprise automatiquement quand l'ouvrage est ajouté à un devis, au lieu d'être perdue comme auparavant.</a:t>
-            </a:r>
-            <a:endParaRPr lang="en-US" sz="1100" dirty="0"/>
-          </a:p>
-        </p:txBody>
-      </p:sp>
-      <p:sp>
-        <p:nvSpPr>
-          <p:cNvPr id="21" name="Text 19"/>
+          <p:cNvPr id="13" name="Text 11"/>
           <p:cNvSpPr/>
           <p:nvPr/>
         </p:nvSpPr>
@@ -11181,7 +11359,7 @@
       </p:sp>
       <p:sp>
         <p:nvSpPr>
-          <p:cNvPr id="22" name="Text 20"/>
+          <p:cNvPr id="14" name="Text 12"/>
           <p:cNvSpPr/>
           <p:nvPr/>
         </p:nvSpPr>
@@ -11344,7 +11522,7 @@
                 <a:ea typeface="Georgia" pitchFamily="34" charset="-122"/>
                 <a:cs typeface="Georgia" pitchFamily="34" charset="-120"/>
               </a:rPr>
-              <a:t>Devis (suite)</a:t>
+              <a:t>Devis</a:t>
             </a:r>
             <a:endParaRPr lang="en-US" sz="2400" dirty="0"/>
           </a:p>
@@ -11430,7 +11608,7 @@
                 <a:ea typeface="Segoe UI" pitchFamily="34" charset="-122"/>
                 <a:cs typeface="Segoe UI" pitchFamily="34" charset="-120"/>
               </a:rPr>
-              <a:t>Référence client en texte libre</a:t>
+              <a:t>Génération PDF des devis réparée</a:t>
             </a:r>
             <a:endParaRPr lang="en-US" sz="1400" dirty="0"/>
           </a:p>
@@ -11472,7 +11650,7 @@
                 <a:ea typeface="Segoe UI" pitchFamily="34" charset="-122"/>
                 <a:cs typeface="Segoe UI" pitchFamily="34" charset="-120"/>
               </a:rPr>
-              <a:t>La 'Référence client' n'est plus une liste déroulante à choisir (qui pouvait donner l'impression que l'information saisie disparaissait) : c'est maintenant un champ texte simple qui garde exactement ce qui a été écrit.</a:t>
+              <a:t>La génération/aperçu PDF lisait encore l'ancien fichier JSON local et ne trouvait plus les devis créés depuis la migration Supabase ; corrigée pour lire directement la table partagée.</a:t>
             </a:r>
             <a:endParaRPr lang="en-US" sz="1100" dirty="0"/>
           </a:p>
@@ -11558,7 +11736,7 @@
                 <a:ea typeface="Segoe UI" pitchFamily="34" charset="-122"/>
                 <a:cs typeface="Segoe UI" pitchFamily="34" charset="-120"/>
               </a:rPr>
-              <a:t>Correction du calcul du total d'un devis (majorations non comptées)</a:t>
+              <a:t>Versioning et sauvegarde complète du devis</a:t>
             </a:r>
             <a:endParaRPr lang="en-US" sz="1400" dirty="0"/>
           </a:p>
@@ -11600,7 +11778,7 @@
                 <a:ea typeface="Segoe UI" pitchFamily="34" charset="-122"/>
                 <a:cs typeface="Segoe UI" pitchFamily="34" charset="-120"/>
               </a:rPr>
-              <a:t>Le montant Total HT / TVA / Total TTC enregistré pour chaque devis ne prenait pas en compte les majorations (coordination de chantier, provision aléas, assurance décennale), même si elles étaient listées sur le document. Corrigé à la source (calcul serveur) : le total inclut désormais bien les majorations, partout où il est utilisé (tableau de bord, facturation, signature client, archives).</a:t>
+              <a:t>Le numéro de version s'incrémente à chaque enregistrement manuel ; les notes, majorations/minorations et le taux de TVA choisi, qui se perdaient silencieusement, sont désormais bien sauvegardés.</a:t>
             </a:r>
             <a:endParaRPr lang="en-US" sz="1100" dirty="0"/>
           </a:p>
@@ -11686,7 +11864,7 @@
                 <a:ea typeface="Segoe UI" pitchFamily="34" charset="-122"/>
                 <a:cs typeface="Segoe UI" pitchFamily="34" charset="-120"/>
               </a:rPr>
-              <a:t>Deuxième cause trouvée : le total serveur retombait à 0</a:t>
+              <a:t>Taux horaire par défaut sur la bibliothèque</a:t>
             </a:r>
             <a:endParaRPr lang="en-US" sz="1400" dirty="0"/>
           </a:p>
@@ -11728,7 +11906,7 @@
                 <a:ea typeface="Segoe UI" pitchFamily="34" charset="-122"/>
                 <a:cs typeface="Segoe UI" pitchFamily="34" charset="-120"/>
               </a:rPr>
-              <a:t>Le calcul serveur recalculait chaque ligne à partir de zéro au lieu de faire confiance au montant déjà calculé correctement par l'éditeur, et se trompait sur deux points (un champ technique à 0 mal interprété comme 'prix fixe', une liste de fournitures non reconnue), ramenant le total à 0€ à chaque enregistrement. Corrigé : le serveur fait maintenant confiance au montant de chaque ligne tel qu'il apparaît dans l'éditeur.</a:t>
+              <a:t>Le taux horaire du profil entreprise sert désormais de valeur par défaut pour chaque ouvrage (liste, création, édition, calcul du coût main d'œuvre).</a:t>
             </a:r>
             <a:endParaRPr lang="en-US" sz="1100" dirty="0"/>
           </a:p>
@@ -11814,7 +11992,7 @@
                 <a:ea typeface="Segoe UI" pitchFamily="34" charset="-122"/>
                 <a:cs typeface="Segoe UI" pitchFamily="34" charset="-120"/>
               </a:rPr>
-              <a:t>Taux de TVA de chaque ligne aligné sur le devis</a:t>
+              <a:t>Restauration de la description des ouvrages de bibliothèque</a:t>
             </a:r>
             <a:endParaRPr lang="en-US" sz="1400" dirty="0"/>
           </a:p>
@@ -11856,7 +12034,7 @@
                 <a:ea typeface="Segoe UI" pitchFamily="34" charset="-122"/>
                 <a:cs typeface="Segoe UI" pitchFamily="34" charset="-120"/>
               </a:rPr>
-              <a:t>Chaque ligne de devis calculait sa propre TVA à 20% par défaut, sans tenir compte du taux choisi pour le devis (ex. 10%) — corrigé pour utiliser le taux réellement sélectionné.</a:t>
+              <a:t>La description déjà saisie dans la Bibliothèque d'ouvrages est désormais reprise automatiquement quand l'ouvrage est ajouté à un devis, au lieu d'être perdue comme auparavant.</a:t>
             </a:r>
             <a:endParaRPr lang="en-US" sz="1100" dirty="0"/>
           </a:p>
@@ -12152,7 +12330,7 @@
                 <a:ea typeface="Segoe UI" pitchFamily="34" charset="-122"/>
                 <a:cs typeface="Segoe UI" pitchFamily="34" charset="-120"/>
               </a:rPr>
-              <a:t>Protection contre l'effacement accidentel d'une signature</a:t>
+              <a:t>Référence client en texte libre</a:t>
             </a:r>
             <a:endParaRPr lang="en-US" sz="1400" dirty="0"/>
           </a:p>
@@ -12194,7 +12372,7 @@
                 <a:ea typeface="Segoe UI" pitchFamily="34" charset="-122"/>
                 <a:cs typeface="Segoe UI" pitchFamily="34" charset="-120"/>
               </a:rPr>
-              <a:t>Renvoyer l'invitation à signer un devis déjà signé effaçait silencieusement la signature existante (nom, date) pour repartir de zéro. Une confirmation explicite est désormais nécessaire pour rouvrir un devis déjà signé.</a:t>
+              <a:t>La 'Référence client' n'est plus une liste déroulante à choisir (qui pouvait donner l'impression que l'information saisie disparaissait) : c'est maintenant un champ texte simple qui garde exactement ce qui a été écrit.</a:t>
             </a:r>
             <a:endParaRPr lang="en-US" sz="1100" dirty="0"/>
           </a:p>
@@ -12202,7 +12380,391 @@
       </p:sp>
       <p:sp>
         <p:nvSpPr>
-          <p:cNvPr id="9" name="Text 7"/>
+          <p:cNvPr id="9" name="Shape 7"/>
+          <p:cNvSpPr/>
+          <p:nvPr/>
+        </p:nvSpPr>
+        <p:spPr>
+          <a:xfrm>
+            <a:off x="640080" y="2926080"/>
+            <a:ext cx="10881360" cy="1097280"/>
+          </a:xfrm>
+          <a:prstGeom prst="roundRect">
+            <a:avLst>
+              <a:gd name="adj" fmla="val 5000"/>
+            </a:avLst>
+          </a:prstGeom>
+          <a:solidFill>
+            <a:srgbClr val="FFFFFF"/>
+          </a:solidFill>
+          <a:ln w="12700">
+            <a:solidFill>
+              <a:srgbClr val="E4DCCB"/>
+            </a:solidFill>
+            <a:prstDash val="solid"/>
+          </a:ln>
+        </p:spPr>
+      </p:sp>
+      <p:sp>
+        <p:nvSpPr>
+          <p:cNvPr id="10" name="Shape 8"/>
+          <p:cNvSpPr/>
+          <p:nvPr/>
+        </p:nvSpPr>
+        <p:spPr>
+          <a:xfrm>
+            <a:off x="640080" y="2926080"/>
+            <a:ext cx="54864" cy="1097280"/>
+          </a:xfrm>
+          <a:prstGeom prst="rect">
+            <a:avLst/>
+          </a:prstGeom>
+          <a:solidFill>
+            <a:srgbClr val="9A4C1F"/>
+          </a:solidFill>
+          <a:ln/>
+        </p:spPr>
+      </p:sp>
+      <p:sp>
+        <p:nvSpPr>
+          <p:cNvPr id="11" name="Text 9"/>
+          <p:cNvSpPr/>
+          <p:nvPr/>
+        </p:nvSpPr>
+        <p:spPr>
+          <a:xfrm>
+            <a:off x="914400" y="3035808"/>
+            <a:ext cx="10332720" cy="365760"/>
+          </a:xfrm>
+          <a:prstGeom prst="rect">
+            <a:avLst/>
+          </a:prstGeom>
+          <a:noFill/>
+          <a:ln/>
+        </p:spPr>
+        <p:txBody>
+          <a:bodyPr wrap="square" rtlCol="0" anchor="ctr"/>
+          <a:lstStyle/>
+          <a:p>
+            <a:pPr indent="0" marL="0">
+              <a:buNone/>
+            </a:pPr>
+            <a:r>
+              <a:rPr lang="en-US" sz="1400" b="1" dirty="0">
+                <a:solidFill>
+                  <a:srgbClr val="1B1F3B"/>
+                </a:solidFill>
+                <a:latin typeface="Segoe UI" pitchFamily="34" charset="0"/>
+                <a:ea typeface="Segoe UI" pitchFamily="34" charset="-122"/>
+                <a:cs typeface="Segoe UI" pitchFamily="34" charset="-120"/>
+              </a:rPr>
+              <a:t>Correction du calcul du total d'un devis (majorations non comptées)</a:t>
+            </a:r>
+            <a:endParaRPr lang="en-US" sz="1400" dirty="0"/>
+          </a:p>
+        </p:txBody>
+      </p:sp>
+      <p:sp>
+        <p:nvSpPr>
+          <p:cNvPr id="12" name="Text 10"/>
+          <p:cNvSpPr/>
+          <p:nvPr/>
+        </p:nvSpPr>
+        <p:spPr>
+          <a:xfrm>
+            <a:off x="914400" y="3383280"/>
+            <a:ext cx="10332720" cy="594360"/>
+          </a:xfrm>
+          <a:prstGeom prst="rect">
+            <a:avLst/>
+          </a:prstGeom>
+          <a:noFill/>
+          <a:ln/>
+        </p:spPr>
+        <p:txBody>
+          <a:bodyPr wrap="square" rtlCol="0" anchor="ctr"/>
+          <a:lstStyle/>
+          <a:p>
+            <a:pPr indent="0" marL="0">
+              <a:lnSpc>
+                <a:spcPts val="1400"/>
+              </a:lnSpc>
+              <a:buNone/>
+            </a:pPr>
+            <a:r>
+              <a:rPr lang="en-US" sz="1100" dirty="0">
+                <a:solidFill>
+                  <a:srgbClr val="8A7C68"/>
+                </a:solidFill>
+                <a:latin typeface="Segoe UI" pitchFamily="34" charset="0"/>
+                <a:ea typeface="Segoe UI" pitchFamily="34" charset="-122"/>
+                <a:cs typeface="Segoe UI" pitchFamily="34" charset="-120"/>
+              </a:rPr>
+              <a:t>Le montant Total HT / TVA / Total TTC enregistré pour chaque devis ne prenait pas en compte les majorations (coordination de chantier, provision aléas, assurance décennale), même si elles étaient listées sur le document. Corrigé à la source (calcul serveur) : le total inclut désormais bien les majorations, partout où il est utilisé (tableau de bord, facturation, signature client, archives).</a:t>
+            </a:r>
+            <a:endParaRPr lang="en-US" sz="1100" dirty="0"/>
+          </a:p>
+        </p:txBody>
+      </p:sp>
+      <p:sp>
+        <p:nvSpPr>
+          <p:cNvPr id="13" name="Shape 11"/>
+          <p:cNvSpPr/>
+          <p:nvPr/>
+        </p:nvSpPr>
+        <p:spPr>
+          <a:xfrm>
+            <a:off x="640080" y="4160520"/>
+            <a:ext cx="10881360" cy="1097280"/>
+          </a:xfrm>
+          <a:prstGeom prst="roundRect">
+            <a:avLst>
+              <a:gd name="adj" fmla="val 5000"/>
+            </a:avLst>
+          </a:prstGeom>
+          <a:solidFill>
+            <a:srgbClr val="FFFFFF"/>
+          </a:solidFill>
+          <a:ln w="12700">
+            <a:solidFill>
+              <a:srgbClr val="E4DCCB"/>
+            </a:solidFill>
+            <a:prstDash val="solid"/>
+          </a:ln>
+        </p:spPr>
+      </p:sp>
+      <p:sp>
+        <p:nvSpPr>
+          <p:cNvPr id="14" name="Shape 12"/>
+          <p:cNvSpPr/>
+          <p:nvPr/>
+        </p:nvSpPr>
+        <p:spPr>
+          <a:xfrm>
+            <a:off x="640080" y="4160520"/>
+            <a:ext cx="54864" cy="1097280"/>
+          </a:xfrm>
+          <a:prstGeom prst="rect">
+            <a:avLst/>
+          </a:prstGeom>
+          <a:solidFill>
+            <a:srgbClr val="9A4C1F"/>
+          </a:solidFill>
+          <a:ln/>
+        </p:spPr>
+      </p:sp>
+      <p:sp>
+        <p:nvSpPr>
+          <p:cNvPr id="15" name="Text 13"/>
+          <p:cNvSpPr/>
+          <p:nvPr/>
+        </p:nvSpPr>
+        <p:spPr>
+          <a:xfrm>
+            <a:off x="914400" y="4270248"/>
+            <a:ext cx="10332720" cy="365760"/>
+          </a:xfrm>
+          <a:prstGeom prst="rect">
+            <a:avLst/>
+          </a:prstGeom>
+          <a:noFill/>
+          <a:ln/>
+        </p:spPr>
+        <p:txBody>
+          <a:bodyPr wrap="square" rtlCol="0" anchor="ctr"/>
+          <a:lstStyle/>
+          <a:p>
+            <a:pPr indent="0" marL="0">
+              <a:buNone/>
+            </a:pPr>
+            <a:r>
+              <a:rPr lang="en-US" sz="1400" b="1" dirty="0">
+                <a:solidFill>
+                  <a:srgbClr val="1B1F3B"/>
+                </a:solidFill>
+                <a:latin typeface="Segoe UI" pitchFamily="34" charset="0"/>
+                <a:ea typeface="Segoe UI" pitchFamily="34" charset="-122"/>
+                <a:cs typeface="Segoe UI" pitchFamily="34" charset="-120"/>
+              </a:rPr>
+              <a:t>Deuxième cause trouvée : le total serveur retombait à 0</a:t>
+            </a:r>
+            <a:endParaRPr lang="en-US" sz="1400" dirty="0"/>
+          </a:p>
+        </p:txBody>
+      </p:sp>
+      <p:sp>
+        <p:nvSpPr>
+          <p:cNvPr id="16" name="Text 14"/>
+          <p:cNvSpPr/>
+          <p:nvPr/>
+        </p:nvSpPr>
+        <p:spPr>
+          <a:xfrm>
+            <a:off x="914400" y="4617720"/>
+            <a:ext cx="10332720" cy="594360"/>
+          </a:xfrm>
+          <a:prstGeom prst="rect">
+            <a:avLst/>
+          </a:prstGeom>
+          <a:noFill/>
+          <a:ln/>
+        </p:spPr>
+        <p:txBody>
+          <a:bodyPr wrap="square" rtlCol="0" anchor="ctr"/>
+          <a:lstStyle/>
+          <a:p>
+            <a:pPr indent="0" marL="0">
+              <a:lnSpc>
+                <a:spcPts val="1400"/>
+              </a:lnSpc>
+              <a:buNone/>
+            </a:pPr>
+            <a:r>
+              <a:rPr lang="en-US" sz="1100" dirty="0">
+                <a:solidFill>
+                  <a:srgbClr val="8A7C68"/>
+                </a:solidFill>
+                <a:latin typeface="Segoe UI" pitchFamily="34" charset="0"/>
+                <a:ea typeface="Segoe UI" pitchFamily="34" charset="-122"/>
+                <a:cs typeface="Segoe UI" pitchFamily="34" charset="-120"/>
+              </a:rPr>
+              <a:t>Le calcul serveur recalculait chaque ligne à partir de zéro au lieu de faire confiance au montant déjà calculé correctement par l'éditeur, et se trompait sur deux points (un champ technique à 0 mal interprété comme 'prix fixe', une liste de fournitures non reconnue), ramenant le total à 0€ à chaque enregistrement. Corrigé : le serveur fait maintenant confiance au montant de chaque ligne tel qu'il apparaît dans l'éditeur.</a:t>
+            </a:r>
+            <a:endParaRPr lang="en-US" sz="1100" dirty="0"/>
+          </a:p>
+        </p:txBody>
+      </p:sp>
+      <p:sp>
+        <p:nvSpPr>
+          <p:cNvPr id="17" name="Shape 15"/>
+          <p:cNvSpPr/>
+          <p:nvPr/>
+        </p:nvSpPr>
+        <p:spPr>
+          <a:xfrm>
+            <a:off x="640080" y="5394960"/>
+            <a:ext cx="10881360" cy="1097280"/>
+          </a:xfrm>
+          <a:prstGeom prst="roundRect">
+            <a:avLst>
+              <a:gd name="adj" fmla="val 5000"/>
+            </a:avLst>
+          </a:prstGeom>
+          <a:solidFill>
+            <a:srgbClr val="FFFFFF"/>
+          </a:solidFill>
+          <a:ln w="12700">
+            <a:solidFill>
+              <a:srgbClr val="E4DCCB"/>
+            </a:solidFill>
+            <a:prstDash val="solid"/>
+          </a:ln>
+        </p:spPr>
+      </p:sp>
+      <p:sp>
+        <p:nvSpPr>
+          <p:cNvPr id="18" name="Shape 16"/>
+          <p:cNvSpPr/>
+          <p:nvPr/>
+        </p:nvSpPr>
+        <p:spPr>
+          <a:xfrm>
+            <a:off x="640080" y="5394960"/>
+            <a:ext cx="54864" cy="1097280"/>
+          </a:xfrm>
+          <a:prstGeom prst="rect">
+            <a:avLst/>
+          </a:prstGeom>
+          <a:solidFill>
+            <a:srgbClr val="9A4C1F"/>
+          </a:solidFill>
+          <a:ln/>
+        </p:spPr>
+      </p:sp>
+      <p:sp>
+        <p:nvSpPr>
+          <p:cNvPr id="19" name="Text 17"/>
+          <p:cNvSpPr/>
+          <p:nvPr/>
+        </p:nvSpPr>
+        <p:spPr>
+          <a:xfrm>
+            <a:off x="914400" y="5504688"/>
+            <a:ext cx="10332720" cy="365760"/>
+          </a:xfrm>
+          <a:prstGeom prst="rect">
+            <a:avLst/>
+          </a:prstGeom>
+          <a:noFill/>
+          <a:ln/>
+        </p:spPr>
+        <p:txBody>
+          <a:bodyPr wrap="square" rtlCol="0" anchor="ctr"/>
+          <a:lstStyle/>
+          <a:p>
+            <a:pPr indent="0" marL="0">
+              <a:buNone/>
+            </a:pPr>
+            <a:r>
+              <a:rPr lang="en-US" sz="1400" b="1" dirty="0">
+                <a:solidFill>
+                  <a:srgbClr val="1B1F3B"/>
+                </a:solidFill>
+                <a:latin typeface="Segoe UI" pitchFamily="34" charset="0"/>
+                <a:ea typeface="Segoe UI" pitchFamily="34" charset="-122"/>
+                <a:cs typeface="Segoe UI" pitchFamily="34" charset="-120"/>
+              </a:rPr>
+              <a:t>Taux de TVA de chaque ligne aligné sur le devis</a:t>
+            </a:r>
+            <a:endParaRPr lang="en-US" sz="1400" dirty="0"/>
+          </a:p>
+        </p:txBody>
+      </p:sp>
+      <p:sp>
+        <p:nvSpPr>
+          <p:cNvPr id="20" name="Text 18"/>
+          <p:cNvSpPr/>
+          <p:nvPr/>
+        </p:nvSpPr>
+        <p:spPr>
+          <a:xfrm>
+            <a:off x="914400" y="5852160"/>
+            <a:ext cx="10332720" cy="594360"/>
+          </a:xfrm>
+          <a:prstGeom prst="rect">
+            <a:avLst/>
+          </a:prstGeom>
+          <a:noFill/>
+          <a:ln/>
+        </p:spPr>
+        <p:txBody>
+          <a:bodyPr wrap="square" rtlCol="0" anchor="ctr"/>
+          <a:lstStyle/>
+          <a:p>
+            <a:pPr indent="0" marL="0">
+              <a:lnSpc>
+                <a:spcPts val="1400"/>
+              </a:lnSpc>
+              <a:buNone/>
+            </a:pPr>
+            <a:r>
+              <a:rPr lang="en-US" sz="1100" dirty="0">
+                <a:solidFill>
+                  <a:srgbClr val="8A7C68"/>
+                </a:solidFill>
+                <a:latin typeface="Segoe UI" pitchFamily="34" charset="0"/>
+                <a:ea typeface="Segoe UI" pitchFamily="34" charset="-122"/>
+                <a:cs typeface="Segoe UI" pitchFamily="34" charset="-120"/>
+              </a:rPr>
+              <a:t>Chaque ligne de devis calculait sa propre TVA à 20% par défaut, sans tenir compte du taux choisi pour le devis (ex. 10%) — corrigé pour utiliser le taux réellement sélectionné.</a:t>
+            </a:r>
+            <a:endParaRPr lang="en-US" sz="1100" dirty="0"/>
+          </a:p>
+        </p:txBody>
+      </p:sp>
+      <p:sp>
+        <p:nvSpPr>
+          <p:cNvPr id="21" name="Text 19"/>
           <p:cNvSpPr/>
           <p:nvPr/>
         </p:nvSpPr>
@@ -12241,7 +12803,7 @@
       </p:sp>
       <p:sp>
         <p:nvSpPr>
-          <p:cNvPr id="10" name="Text 8"/>
+          <p:cNvPr id="22" name="Text 20"/>
           <p:cNvSpPr/>
           <p:nvPr/>
         </p:nvSpPr>
@@ -12404,7 +12966,7 @@
                 <a:ea typeface="Georgia" pitchFamily="34" charset="-122"/>
                 <a:cs typeface="Georgia" pitchFamily="34" charset="-120"/>
               </a:rPr>
-              <a:t>Chantiers</a:t>
+              <a:t>Devis (suite)</a:t>
             </a:r>
             <a:endParaRPr lang="en-US" sz="2400" dirty="0"/>
           </a:p>
@@ -12490,7 +13052,7 @@
                 <a:ea typeface="Segoe UI" pitchFamily="34" charset="-122"/>
                 <a:cs typeface="Segoe UI" pitchFamily="34" charset="-120"/>
               </a:rPr>
-              <a:t>Correction d'un bug bloquant majeur</a:t>
+              <a:t>Protection contre l'effacement accidentel d'une signature</a:t>
             </a:r>
             <a:endParaRPr lang="en-US" sz="1400" dirty="0"/>
           </a:p>
@@ -12532,7 +13094,7 @@
                 <a:ea typeface="Segoe UI" pitchFamily="34" charset="-122"/>
                 <a:cs typeface="Segoe UI" pitchFamily="34" charset="-120"/>
               </a:rPr>
-              <a:t>Un chantier ne pouvait être consulté que si son devis était déjà signé par le client, empêchant toute préparation en amont. Corrigé : la fiche chantier est désormais accessible dès sa création.</a:t>
+              <a:t>Renvoyer l'invitation à signer un devis déjà signé effaçait silencieusement la signature existante (nom, date) pour repartir de zéro. Une confirmation explicite est désormais nécessaire pour rouvrir un devis déjà signé.</a:t>
             </a:r>
             <a:endParaRPr lang="en-US" sz="1100" dirty="0"/>
           </a:p>
@@ -12540,135 +13102,7 @@
       </p:sp>
       <p:sp>
         <p:nvSpPr>
-          <p:cNvPr id="9" name="Shape 7"/>
-          <p:cNvSpPr/>
-          <p:nvPr/>
-        </p:nvSpPr>
-        <p:spPr>
-          <a:xfrm>
-            <a:off x="640080" y="2926080"/>
-            <a:ext cx="10881360" cy="1097280"/>
-          </a:xfrm>
-          <a:prstGeom prst="roundRect">
-            <a:avLst>
-              <a:gd name="adj" fmla="val 5000"/>
-            </a:avLst>
-          </a:prstGeom>
-          <a:solidFill>
-            <a:srgbClr val="FFFFFF"/>
-          </a:solidFill>
-          <a:ln w="12700">
-            <a:solidFill>
-              <a:srgbClr val="E4DCCB"/>
-            </a:solidFill>
-            <a:prstDash val="solid"/>
-          </a:ln>
-        </p:spPr>
-      </p:sp>
-      <p:sp>
-        <p:nvSpPr>
-          <p:cNvPr id="10" name="Shape 8"/>
-          <p:cNvSpPr/>
-          <p:nvPr/>
-        </p:nvSpPr>
-        <p:spPr>
-          <a:xfrm>
-            <a:off x="640080" y="2926080"/>
-            <a:ext cx="54864" cy="1097280"/>
-          </a:xfrm>
-          <a:prstGeom prst="rect">
-            <a:avLst/>
-          </a:prstGeom>
-          <a:solidFill>
-            <a:srgbClr val="9A4C1F"/>
-          </a:solidFill>
-          <a:ln/>
-        </p:spPr>
-      </p:sp>
-      <p:sp>
-        <p:nvSpPr>
-          <p:cNvPr id="11" name="Text 9"/>
-          <p:cNvSpPr/>
-          <p:nvPr/>
-        </p:nvSpPr>
-        <p:spPr>
-          <a:xfrm>
-            <a:off x="914400" y="3035808"/>
-            <a:ext cx="10332720" cy="365760"/>
-          </a:xfrm>
-          <a:prstGeom prst="rect">
-            <a:avLst/>
-          </a:prstGeom>
-          <a:noFill/>
-          <a:ln/>
-        </p:spPr>
-        <p:txBody>
-          <a:bodyPr wrap="square" rtlCol="0" anchor="ctr"/>
-          <a:lstStyle/>
-          <a:p>
-            <a:pPr indent="0" marL="0">
-              <a:buNone/>
-            </a:pPr>
-            <a:r>
-              <a:rPr lang="en-US" sz="1400" b="1" dirty="0">
-                <a:solidFill>
-                  <a:srgbClr val="1B1F3B"/>
-                </a:solidFill>
-                <a:latin typeface="Segoe UI" pitchFamily="34" charset="0"/>
-                <a:ea typeface="Segoe UI" pitchFamily="34" charset="-122"/>
-                <a:cs typeface="Segoe UI" pitchFamily="34" charset="-120"/>
-              </a:rPr>
-              <a:t>Dépenses liées à un ouvrage précis</a:t>
-            </a:r>
-            <a:endParaRPr lang="en-US" sz="1400" dirty="0"/>
-          </a:p>
-        </p:txBody>
-      </p:sp>
-      <p:sp>
-        <p:nvSpPr>
-          <p:cNvPr id="12" name="Text 10"/>
-          <p:cNvSpPr/>
-          <p:nvPr/>
-        </p:nvSpPr>
-        <p:spPr>
-          <a:xfrm>
-            <a:off x="914400" y="3383280"/>
-            <a:ext cx="10332720" cy="594360"/>
-          </a:xfrm>
-          <a:prstGeom prst="rect">
-            <a:avLst/>
-          </a:prstGeom>
-          <a:noFill/>
-          <a:ln/>
-        </p:spPr>
-        <p:txBody>
-          <a:bodyPr wrap="square" rtlCol="0" anchor="ctr"/>
-          <a:lstStyle/>
-          <a:p>
-            <a:pPr indent="0" marL="0">
-              <a:lnSpc>
-                <a:spcPts val="1400"/>
-              </a:lnSpc>
-              <a:buNone/>
-            </a:pPr>
-            <a:r>
-              <a:rPr lang="en-US" sz="1100" dirty="0">
-                <a:solidFill>
-                  <a:srgbClr val="8A7C68"/>
-                </a:solidFill>
-                <a:latin typeface="Segoe UI" pitchFamily="34" charset="0"/>
-                <a:ea typeface="Segoe UI" pitchFamily="34" charset="-122"/>
-                <a:cs typeface="Segoe UI" pitchFamily="34" charset="-120"/>
-              </a:rPr>
-              <a:t>L'API des dépenses accepte désormais un identifiant de tâche (ouvrage) en plus du chantier, pour un suivi financier plus fin.</a:t>
-            </a:r>
-            <a:endParaRPr lang="en-US" sz="1100" dirty="0"/>
-          </a:p>
-        </p:txBody>
-      </p:sp>
-      <p:sp>
-        <p:nvSpPr>
-          <p:cNvPr id="13" name="Text 11"/>
+          <p:cNvPr id="9" name="Text 7"/>
           <p:cNvSpPr/>
           <p:nvPr/>
         </p:nvSpPr>
@@ -12707,7 +13141,7 @@
       </p:sp>
       <p:sp>
         <p:nvSpPr>
-          <p:cNvPr id="14" name="Text 12"/>
+          <p:cNvPr id="10" name="Text 8"/>
           <p:cNvSpPr/>
           <p:nvPr/>
         </p:nvSpPr>
@@ -12870,7 +13304,7 @@
                 <a:ea typeface="Georgia" pitchFamily="34" charset="-122"/>
                 <a:cs typeface="Georgia" pitchFamily="34" charset="-120"/>
               </a:rPr>
-              <a:t>Équipe</a:t>
+              <a:t>Chantiers</a:t>
             </a:r>
             <a:endParaRPr lang="en-US" sz="2400" dirty="0"/>
           </a:p>
@@ -12956,7 +13390,7 @@
                 <a:ea typeface="Segoe UI" pitchFamily="34" charset="-122"/>
                 <a:cs typeface="Segoe UI" pitchFamily="34" charset="-120"/>
               </a:rPr>
-              <a:t>Six types de pointage</a:t>
+              <a:t>Correction d'un bug bloquant majeur</a:t>
             </a:r>
             <a:endParaRPr lang="en-US" sz="1400" dirty="0"/>
           </a:p>
@@ -12998,7 +13432,7 @@
                 <a:ea typeface="Segoe UI" pitchFamily="34" charset="-122"/>
                 <a:cs typeface="Segoe UI" pitchFamily="34" charset="-120"/>
               </a:rPr>
-              <a:t>Heures de travail, jour de travail, forfait, ouvrage, passage, déplacement — chacun avec date et montant ; le montant des heures est calculé automatiquement à partir du taux horaire de l'ouvrier.</a:t>
+              <a:t>Un chantier ne pouvait être consulté que si son devis était déjà signé par le client, empêchant toute préparation en amont. Corrigé : la fiche chantier est désormais accessible dès sa création.</a:t>
             </a:r>
             <a:endParaRPr lang="en-US" sz="1100" dirty="0"/>
           </a:p>
@@ -13084,7 +13518,7 @@
                 <a:ea typeface="Segoe UI" pitchFamily="34" charset="-122"/>
                 <a:cs typeface="Segoe UI" pitchFamily="34" charset="-120"/>
               </a:rPr>
-              <a:t>Alertes automatiques de dépassement / manque d'heures</a:t>
+              <a:t>Dépenses liées à un ouvrage précis</a:t>
             </a:r>
             <a:endParaRPr lang="en-US" sz="1400" dirty="0"/>
           </a:p>
@@ -13126,7 +13560,7 @@
                 <a:ea typeface="Segoe UI" pitchFamily="34" charset="-122"/>
                 <a:cs typeface="Segoe UI" pitchFamily="34" charset="-120"/>
               </a:rPr>
-              <a:t>À la fin de chaque semaine, si le total travaillé diffère du contrat de plus de 15 minutes, une notification est envoyée automatiquement à l'entreprise (une seule fois par semaine et par ouvrier).</a:t>
+              <a:t>L'API des dépenses accepte désormais un identifiant de tâche (ouvrage) en plus du chantier, pour un suivi financier plus fin.</a:t>
             </a:r>
             <a:endParaRPr lang="en-US" sz="1100" dirty="0"/>
           </a:p>
@@ -13134,135 +13568,7 @@
       </p:sp>
       <p:sp>
         <p:nvSpPr>
-          <p:cNvPr id="13" name="Shape 11"/>
-          <p:cNvSpPr/>
-          <p:nvPr/>
-        </p:nvSpPr>
-        <p:spPr>
-          <a:xfrm>
-            <a:off x="640080" y="4160520"/>
-            <a:ext cx="10881360" cy="1097280"/>
-          </a:xfrm>
-          <a:prstGeom prst="roundRect">
-            <a:avLst>
-              <a:gd name="adj" fmla="val 5000"/>
-            </a:avLst>
-          </a:prstGeom>
-          <a:solidFill>
-            <a:srgbClr val="FFFFFF"/>
-          </a:solidFill>
-          <a:ln w="12700">
-            <a:solidFill>
-              <a:srgbClr val="E4DCCB"/>
-            </a:solidFill>
-            <a:prstDash val="solid"/>
-          </a:ln>
-        </p:spPr>
-      </p:sp>
-      <p:sp>
-        <p:nvSpPr>
-          <p:cNvPr id="14" name="Shape 12"/>
-          <p:cNvSpPr/>
-          <p:nvPr/>
-        </p:nvSpPr>
-        <p:spPr>
-          <a:xfrm>
-            <a:off x="640080" y="4160520"/>
-            <a:ext cx="54864" cy="1097280"/>
-          </a:xfrm>
-          <a:prstGeom prst="rect">
-            <a:avLst/>
-          </a:prstGeom>
-          <a:solidFill>
-            <a:srgbClr val="9A4C1F"/>
-          </a:solidFill>
-          <a:ln/>
-        </p:spPr>
-      </p:sp>
-      <p:sp>
-        <p:nvSpPr>
-          <p:cNvPr id="15" name="Text 13"/>
-          <p:cNvSpPr/>
-          <p:nvPr/>
-        </p:nvSpPr>
-        <p:spPr>
-          <a:xfrm>
-            <a:off x="914400" y="4270248"/>
-            <a:ext cx="10332720" cy="365760"/>
-          </a:xfrm>
-          <a:prstGeom prst="rect">
-            <a:avLst/>
-          </a:prstGeom>
-          <a:noFill/>
-          <a:ln/>
-        </p:spPr>
-        <p:txBody>
-          <a:bodyPr wrap="square" rtlCol="0" anchor="ctr"/>
-          <a:lstStyle/>
-          <a:p>
-            <a:pPr indent="0" marL="0">
-              <a:buNone/>
-            </a:pPr>
-            <a:r>
-              <a:rPr lang="en-US" sz="1400" b="1" dirty="0">
-                <a:solidFill>
-                  <a:srgbClr val="1B1F3B"/>
-                </a:solidFill>
-                <a:latin typeface="Segoe UI" pitchFamily="34" charset="0"/>
-                <a:ea typeface="Segoe UI" pitchFamily="34" charset="-122"/>
-                <a:cs typeface="Segoe UI" pitchFamily="34" charset="-120"/>
-              </a:rPr>
-              <a:t>Export PDF du relevé d'heures</a:t>
-            </a:r>
-            <a:endParaRPr lang="en-US" sz="1400" dirty="0"/>
-          </a:p>
-        </p:txBody>
-      </p:sp>
-      <p:sp>
-        <p:nvSpPr>
-          <p:cNvPr id="16" name="Text 14"/>
-          <p:cNvSpPr/>
-          <p:nvPr/>
-        </p:nvSpPr>
-        <p:spPr>
-          <a:xfrm>
-            <a:off x="914400" y="4617720"/>
-            <a:ext cx="10332720" cy="594360"/>
-          </a:xfrm>
-          <a:prstGeom prst="rect">
-            <a:avLst/>
-          </a:prstGeom>
-          <a:noFill/>
-          <a:ln/>
-        </p:spPr>
-        <p:txBody>
-          <a:bodyPr wrap="square" rtlCol="0" anchor="ctr"/>
-          <a:lstStyle/>
-          <a:p>
-            <a:pPr indent="0" marL="0">
-              <a:lnSpc>
-                <a:spcPts val="1400"/>
-              </a:lnSpc>
-              <a:buNone/>
-            </a:pPr>
-            <a:r>
-              <a:rPr lang="en-US" sz="1100" dirty="0">
-                <a:solidFill>
-                  <a:srgbClr val="8A7C68"/>
-                </a:solidFill>
-                <a:latin typeface="Segoe UI" pitchFamily="34" charset="0"/>
-                <a:ea typeface="Segoe UI" pitchFamily="34" charset="-122"/>
-                <a:cs typeface="Segoe UI" pitchFamily="34" charset="-120"/>
-              </a:rPr>
-              <a:t>Génération d'un PDF mensuel par ouvrier : détail par journée/type de pointage, totaux hebdomadaires, total du mois en heures et en montant — pensé pour la comptabilité et la gestion de la paie.</a:t>
-            </a:r>
-            <a:endParaRPr lang="en-US" sz="1100" dirty="0"/>
-          </a:p>
-        </p:txBody>
-      </p:sp>
-      <p:sp>
-        <p:nvSpPr>
-          <p:cNvPr id="17" name="Text 15"/>
+          <p:cNvPr id="13" name="Text 11"/>
           <p:cNvSpPr/>
           <p:nvPr/>
         </p:nvSpPr>
@@ -13301,7 +13607,7 @@
       </p:sp>
       <p:sp>
         <p:nvSpPr>
-          <p:cNvPr id="18" name="Text 16"/>
+          <p:cNvPr id="14" name="Text 12"/>
           <p:cNvSpPr/>
           <p:nvPr/>
         </p:nvSpPr>
@@ -13464,7 +13770,7 @@
                 <a:ea typeface="Georgia" pitchFamily="34" charset="-122"/>
                 <a:cs typeface="Georgia" pitchFamily="34" charset="-120"/>
               </a:rPr>
-              <a:t>Notifications</a:t>
+              <a:t>Équipe</a:t>
             </a:r>
             <a:endParaRPr lang="en-US" sz="2400" dirty="0"/>
           </a:p>
@@ -13550,7 +13856,7 @@
                 <a:ea typeface="Segoe UI" pitchFamily="34" charset="-122"/>
                 <a:cs typeface="Segoe UI" pitchFamily="34" charset="-120"/>
               </a:rPr>
-              <a:t>Envoi d'email réel à la signature du devis</a:t>
+              <a:t>Six types de pointage</a:t>
             </a:r>
             <a:endParaRPr lang="en-US" sz="1400" dirty="0"/>
           </a:p>
@@ -13592,7 +13898,7 @@
                 <a:ea typeface="Segoe UI" pitchFamily="34" charset="-122"/>
                 <a:cs typeface="Segoe UI" pitchFamily="34" charset="-120"/>
               </a:rPr>
-              <a:t>Le premier envoi des identifiants client déclenche désormais un vrai email (SMTP), et plus seulement une file d'attente locale.</a:t>
+              <a:t>Heures de travail, jour de travail, forfait, ouvrage, passage, déplacement — chacun avec date et montant ; le montant des heures est calculé automatiquement à partir du taux horaire de l'ouvrier.</a:t>
             </a:r>
             <a:endParaRPr lang="en-US" sz="1100" dirty="0"/>
           </a:p>
@@ -13600,7 +13906,263 @@
       </p:sp>
       <p:sp>
         <p:nvSpPr>
-          <p:cNvPr id="9" name="Text 7"/>
+          <p:cNvPr id="9" name="Shape 7"/>
+          <p:cNvSpPr/>
+          <p:nvPr/>
+        </p:nvSpPr>
+        <p:spPr>
+          <a:xfrm>
+            <a:off x="640080" y="2926080"/>
+            <a:ext cx="10881360" cy="1097280"/>
+          </a:xfrm>
+          <a:prstGeom prst="roundRect">
+            <a:avLst>
+              <a:gd name="adj" fmla="val 5000"/>
+            </a:avLst>
+          </a:prstGeom>
+          <a:solidFill>
+            <a:srgbClr val="FFFFFF"/>
+          </a:solidFill>
+          <a:ln w="12700">
+            <a:solidFill>
+              <a:srgbClr val="E4DCCB"/>
+            </a:solidFill>
+            <a:prstDash val="solid"/>
+          </a:ln>
+        </p:spPr>
+      </p:sp>
+      <p:sp>
+        <p:nvSpPr>
+          <p:cNvPr id="10" name="Shape 8"/>
+          <p:cNvSpPr/>
+          <p:nvPr/>
+        </p:nvSpPr>
+        <p:spPr>
+          <a:xfrm>
+            <a:off x="640080" y="2926080"/>
+            <a:ext cx="54864" cy="1097280"/>
+          </a:xfrm>
+          <a:prstGeom prst="rect">
+            <a:avLst/>
+          </a:prstGeom>
+          <a:solidFill>
+            <a:srgbClr val="9A4C1F"/>
+          </a:solidFill>
+          <a:ln/>
+        </p:spPr>
+      </p:sp>
+      <p:sp>
+        <p:nvSpPr>
+          <p:cNvPr id="11" name="Text 9"/>
+          <p:cNvSpPr/>
+          <p:nvPr/>
+        </p:nvSpPr>
+        <p:spPr>
+          <a:xfrm>
+            <a:off x="914400" y="3035808"/>
+            <a:ext cx="10332720" cy="365760"/>
+          </a:xfrm>
+          <a:prstGeom prst="rect">
+            <a:avLst/>
+          </a:prstGeom>
+          <a:noFill/>
+          <a:ln/>
+        </p:spPr>
+        <p:txBody>
+          <a:bodyPr wrap="square" rtlCol="0" anchor="ctr"/>
+          <a:lstStyle/>
+          <a:p>
+            <a:pPr indent="0" marL="0">
+              <a:buNone/>
+            </a:pPr>
+            <a:r>
+              <a:rPr lang="en-US" sz="1400" b="1" dirty="0">
+                <a:solidFill>
+                  <a:srgbClr val="1B1F3B"/>
+                </a:solidFill>
+                <a:latin typeface="Segoe UI" pitchFamily="34" charset="0"/>
+                <a:ea typeface="Segoe UI" pitchFamily="34" charset="-122"/>
+                <a:cs typeface="Segoe UI" pitchFamily="34" charset="-120"/>
+              </a:rPr>
+              <a:t>Alertes automatiques de dépassement / manque d'heures</a:t>
+            </a:r>
+            <a:endParaRPr lang="en-US" sz="1400" dirty="0"/>
+          </a:p>
+        </p:txBody>
+      </p:sp>
+      <p:sp>
+        <p:nvSpPr>
+          <p:cNvPr id="12" name="Text 10"/>
+          <p:cNvSpPr/>
+          <p:nvPr/>
+        </p:nvSpPr>
+        <p:spPr>
+          <a:xfrm>
+            <a:off x="914400" y="3383280"/>
+            <a:ext cx="10332720" cy="594360"/>
+          </a:xfrm>
+          <a:prstGeom prst="rect">
+            <a:avLst/>
+          </a:prstGeom>
+          <a:noFill/>
+          <a:ln/>
+        </p:spPr>
+        <p:txBody>
+          <a:bodyPr wrap="square" rtlCol="0" anchor="ctr"/>
+          <a:lstStyle/>
+          <a:p>
+            <a:pPr indent="0" marL="0">
+              <a:lnSpc>
+                <a:spcPts val="1400"/>
+              </a:lnSpc>
+              <a:buNone/>
+            </a:pPr>
+            <a:r>
+              <a:rPr lang="en-US" sz="1100" dirty="0">
+                <a:solidFill>
+                  <a:srgbClr val="8A7C68"/>
+                </a:solidFill>
+                <a:latin typeface="Segoe UI" pitchFamily="34" charset="0"/>
+                <a:ea typeface="Segoe UI" pitchFamily="34" charset="-122"/>
+                <a:cs typeface="Segoe UI" pitchFamily="34" charset="-120"/>
+              </a:rPr>
+              <a:t>À la fin de chaque semaine, si le total travaillé diffère du contrat de plus de 15 minutes, une notification est envoyée automatiquement à l'entreprise (une seule fois par semaine et par ouvrier).</a:t>
+            </a:r>
+            <a:endParaRPr lang="en-US" sz="1100" dirty="0"/>
+          </a:p>
+        </p:txBody>
+      </p:sp>
+      <p:sp>
+        <p:nvSpPr>
+          <p:cNvPr id="13" name="Shape 11"/>
+          <p:cNvSpPr/>
+          <p:nvPr/>
+        </p:nvSpPr>
+        <p:spPr>
+          <a:xfrm>
+            <a:off x="640080" y="4160520"/>
+            <a:ext cx="10881360" cy="1097280"/>
+          </a:xfrm>
+          <a:prstGeom prst="roundRect">
+            <a:avLst>
+              <a:gd name="adj" fmla="val 5000"/>
+            </a:avLst>
+          </a:prstGeom>
+          <a:solidFill>
+            <a:srgbClr val="FFFFFF"/>
+          </a:solidFill>
+          <a:ln w="12700">
+            <a:solidFill>
+              <a:srgbClr val="E4DCCB"/>
+            </a:solidFill>
+            <a:prstDash val="solid"/>
+          </a:ln>
+        </p:spPr>
+      </p:sp>
+      <p:sp>
+        <p:nvSpPr>
+          <p:cNvPr id="14" name="Shape 12"/>
+          <p:cNvSpPr/>
+          <p:nvPr/>
+        </p:nvSpPr>
+        <p:spPr>
+          <a:xfrm>
+            <a:off x="640080" y="4160520"/>
+            <a:ext cx="54864" cy="1097280"/>
+          </a:xfrm>
+          <a:prstGeom prst="rect">
+            <a:avLst/>
+          </a:prstGeom>
+          <a:solidFill>
+            <a:srgbClr val="9A4C1F"/>
+          </a:solidFill>
+          <a:ln/>
+        </p:spPr>
+      </p:sp>
+      <p:sp>
+        <p:nvSpPr>
+          <p:cNvPr id="15" name="Text 13"/>
+          <p:cNvSpPr/>
+          <p:nvPr/>
+        </p:nvSpPr>
+        <p:spPr>
+          <a:xfrm>
+            <a:off x="914400" y="4270248"/>
+            <a:ext cx="10332720" cy="365760"/>
+          </a:xfrm>
+          <a:prstGeom prst="rect">
+            <a:avLst/>
+          </a:prstGeom>
+          <a:noFill/>
+          <a:ln/>
+        </p:spPr>
+        <p:txBody>
+          <a:bodyPr wrap="square" rtlCol="0" anchor="ctr"/>
+          <a:lstStyle/>
+          <a:p>
+            <a:pPr indent="0" marL="0">
+              <a:buNone/>
+            </a:pPr>
+            <a:r>
+              <a:rPr lang="en-US" sz="1400" b="1" dirty="0">
+                <a:solidFill>
+                  <a:srgbClr val="1B1F3B"/>
+                </a:solidFill>
+                <a:latin typeface="Segoe UI" pitchFamily="34" charset="0"/>
+                <a:ea typeface="Segoe UI" pitchFamily="34" charset="-122"/>
+                <a:cs typeface="Segoe UI" pitchFamily="34" charset="-120"/>
+              </a:rPr>
+              <a:t>Export PDF du relevé d'heures</a:t>
+            </a:r>
+            <a:endParaRPr lang="en-US" sz="1400" dirty="0"/>
+          </a:p>
+        </p:txBody>
+      </p:sp>
+      <p:sp>
+        <p:nvSpPr>
+          <p:cNvPr id="16" name="Text 14"/>
+          <p:cNvSpPr/>
+          <p:nvPr/>
+        </p:nvSpPr>
+        <p:spPr>
+          <a:xfrm>
+            <a:off x="914400" y="4617720"/>
+            <a:ext cx="10332720" cy="594360"/>
+          </a:xfrm>
+          <a:prstGeom prst="rect">
+            <a:avLst/>
+          </a:prstGeom>
+          <a:noFill/>
+          <a:ln/>
+        </p:spPr>
+        <p:txBody>
+          <a:bodyPr wrap="square" rtlCol="0" anchor="ctr"/>
+          <a:lstStyle/>
+          <a:p>
+            <a:pPr indent="0" marL="0">
+              <a:lnSpc>
+                <a:spcPts val="1400"/>
+              </a:lnSpc>
+              <a:buNone/>
+            </a:pPr>
+            <a:r>
+              <a:rPr lang="en-US" sz="1100" dirty="0">
+                <a:solidFill>
+                  <a:srgbClr val="8A7C68"/>
+                </a:solidFill>
+                <a:latin typeface="Segoe UI" pitchFamily="34" charset="0"/>
+                <a:ea typeface="Segoe UI" pitchFamily="34" charset="-122"/>
+                <a:cs typeface="Segoe UI" pitchFamily="34" charset="-120"/>
+              </a:rPr>
+              <a:t>Génération d'un PDF mensuel par ouvrier : détail par journée/type de pointage, totaux hebdomadaires, total du mois en heures et en montant — pensé pour la comptabilité et la gestion de la paie.</a:t>
+            </a:r>
+            <a:endParaRPr lang="en-US" sz="1100" dirty="0"/>
+          </a:p>
+        </p:txBody>
+      </p:sp>
+      <p:sp>
+        <p:nvSpPr>
+          <p:cNvPr id="17" name="Text 15"/>
           <p:cNvSpPr/>
           <p:nvPr/>
         </p:nvSpPr>
@@ -13639,7 +14201,7 @@
       </p:sp>
       <p:sp>
         <p:nvSpPr>
-          <p:cNvPr id="10" name="Text 8"/>
+          <p:cNvPr id="18" name="Text 16"/>
           <p:cNvSpPr/>
           <p:nvPr/>
         </p:nvSpPr>
@@ -13802,7 +14364,7 @@
                 <a:ea typeface="Georgia" pitchFamily="34" charset="-122"/>
                 <a:cs typeface="Georgia" pitchFamily="34" charset="-120"/>
               </a:rPr>
-              <a:t>Signature &amp; portails</a:t>
+              <a:t>Notifications</a:t>
             </a:r>
             <a:endParaRPr lang="en-US" sz="2400" dirty="0"/>
           </a:p>
@@ -13888,7 +14450,7 @@
                 <a:ea typeface="Segoe UI" pitchFamily="34" charset="-122"/>
                 <a:cs typeface="Segoe UI" pitchFamily="34" charset="-120"/>
               </a:rPr>
-              <a:t>Signature client branchée sur Supabase</a:t>
+              <a:t>Envoi d'email réel à la signature du devis</a:t>
             </a:r>
             <a:endParaRPr lang="en-US" sz="1400" dirty="0"/>
           </a:p>
@@ -13930,7 +14492,7 @@
                 <a:ea typeface="Segoe UI" pitchFamily="34" charset="-122"/>
                 <a:cs typeface="Segoe UI" pitchFamily="34" charset="-120"/>
               </a:rPr>
-              <a:t>Le client qui signe un devis n'a pas de session Kôji : une clé technique dédiée (service_role) permet de retrouver et mettre à jour son devis directement dans la base partagée.</a:t>
+              <a:t>Le premier envoi des identifiants client déclenche désormais un vrai email (SMTP), et plus seulement une file d'attente locale.</a:t>
             </a:r>
             <a:endParaRPr lang="en-US" sz="1100" dirty="0"/>
           </a:p>
@@ -13938,263 +14500,7 @@
       </p:sp>
       <p:sp>
         <p:nvSpPr>
-          <p:cNvPr id="9" name="Shape 7"/>
-          <p:cNvSpPr/>
-          <p:nvPr/>
-        </p:nvSpPr>
-        <p:spPr>
-          <a:xfrm>
-            <a:off x="640080" y="2926080"/>
-            <a:ext cx="10881360" cy="1097280"/>
-          </a:xfrm>
-          <a:prstGeom prst="roundRect">
-            <a:avLst>
-              <a:gd name="adj" fmla="val 5000"/>
-            </a:avLst>
-          </a:prstGeom>
-          <a:solidFill>
-            <a:srgbClr val="FFFFFF"/>
-          </a:solidFill>
-          <a:ln w="12700">
-            <a:solidFill>
-              <a:srgbClr val="E4DCCB"/>
-            </a:solidFill>
-            <a:prstDash val="solid"/>
-          </a:ln>
-        </p:spPr>
-      </p:sp>
-      <p:sp>
-        <p:nvSpPr>
-          <p:cNvPr id="10" name="Shape 8"/>
-          <p:cNvSpPr/>
-          <p:nvPr/>
-        </p:nvSpPr>
-        <p:spPr>
-          <a:xfrm>
-            <a:off x="640080" y="2926080"/>
-            <a:ext cx="54864" cy="1097280"/>
-          </a:xfrm>
-          <a:prstGeom prst="rect">
-            <a:avLst/>
-          </a:prstGeom>
-          <a:solidFill>
-            <a:srgbClr val="9A4C1F"/>
-          </a:solidFill>
-          <a:ln/>
-        </p:spPr>
-      </p:sp>
-      <p:sp>
-        <p:nvSpPr>
-          <p:cNvPr id="11" name="Text 9"/>
-          <p:cNvSpPr/>
-          <p:nvPr/>
-        </p:nvSpPr>
-        <p:spPr>
-          <a:xfrm>
-            <a:off x="914400" y="3035808"/>
-            <a:ext cx="10332720" cy="365760"/>
-          </a:xfrm>
-          <a:prstGeom prst="rect">
-            <a:avLst/>
-          </a:prstGeom>
-          <a:noFill/>
-          <a:ln/>
-        </p:spPr>
-        <p:txBody>
-          <a:bodyPr wrap="square" rtlCol="0" anchor="ctr"/>
-          <a:lstStyle/>
-          <a:p>
-            <a:pPr indent="0" marL="0">
-              <a:buNone/>
-            </a:pPr>
-            <a:r>
-              <a:rPr lang="en-US" sz="1400" b="1" dirty="0">
-                <a:solidFill>
-                  <a:srgbClr val="1B1F3B"/>
-                </a:solidFill>
-                <a:latin typeface="Segoe UI" pitchFamily="34" charset="0"/>
-                <a:ea typeface="Segoe UI" pitchFamily="34" charset="-122"/>
-                <a:cs typeface="Segoe UI" pitchFamily="34" charset="-120"/>
-              </a:rPr>
-              <a:t>Audit complet du portail client</a:t>
-            </a:r>
-            <a:endParaRPr lang="en-US" sz="1400" dirty="0"/>
-          </a:p>
-        </p:txBody>
-      </p:sp>
-      <p:sp>
-        <p:nvSpPr>
-          <p:cNvPr id="12" name="Text 10"/>
-          <p:cNvSpPr/>
-          <p:nvPr/>
-        </p:nvSpPr>
-        <p:spPr>
-          <a:xfrm>
-            <a:off x="914400" y="3383280"/>
-            <a:ext cx="10332720" cy="594360"/>
-          </a:xfrm>
-          <a:prstGeom prst="rect">
-            <a:avLst/>
-          </a:prstGeom>
-          <a:noFill/>
-          <a:ln/>
-        </p:spPr>
-        <p:txBody>
-          <a:bodyPr wrap="square" rtlCol="0" anchor="ctr"/>
-          <a:lstStyle/>
-          <a:p>
-            <a:pPr indent="0" marL="0">
-              <a:lnSpc>
-                <a:spcPts val="1400"/>
-              </a:lnSpc>
-              <a:buNone/>
-            </a:pPr>
-            <a:r>
-              <a:rPr lang="en-US" sz="1100" dirty="0">
-                <a:solidFill>
-                  <a:srgbClr val="8A7C68"/>
-                </a:solidFill>
-                <a:latin typeface="Segoe UI" pitchFamily="34" charset="0"/>
-                <a:ea typeface="Segoe UI" pitchFamily="34" charset="-122"/>
-                <a:cs typeface="Segoe UI" pitchFamily="34" charset="-120"/>
-              </a:rPr>
-              <a:t>Plusieurs routes (connexion client, devis/tâches/notes du portail, création de factures) lisaient encore l'ancien fichier JSON local et ne trouvaient plus aucune donnée récente depuis la migration Supabase des devis — toutes corrigées.</a:t>
-            </a:r>
-            <a:endParaRPr lang="en-US" sz="1100" dirty="0"/>
-          </a:p>
-        </p:txBody>
-      </p:sp>
-      <p:sp>
-        <p:nvSpPr>
-          <p:cNvPr id="13" name="Shape 11"/>
-          <p:cNvSpPr/>
-          <p:nvPr/>
-        </p:nvSpPr>
-        <p:spPr>
-          <a:xfrm>
-            <a:off x="640080" y="4160520"/>
-            <a:ext cx="10881360" cy="1097280"/>
-          </a:xfrm>
-          <a:prstGeom prst="roundRect">
-            <a:avLst>
-              <a:gd name="adj" fmla="val 5000"/>
-            </a:avLst>
-          </a:prstGeom>
-          <a:solidFill>
-            <a:srgbClr val="FFFFFF"/>
-          </a:solidFill>
-          <a:ln w="12700">
-            <a:solidFill>
-              <a:srgbClr val="E4DCCB"/>
-            </a:solidFill>
-            <a:prstDash val="solid"/>
-          </a:ln>
-        </p:spPr>
-      </p:sp>
-      <p:sp>
-        <p:nvSpPr>
-          <p:cNvPr id="14" name="Shape 12"/>
-          <p:cNvSpPr/>
-          <p:nvPr/>
-        </p:nvSpPr>
-        <p:spPr>
-          <a:xfrm>
-            <a:off x="640080" y="4160520"/>
-            <a:ext cx="54864" cy="1097280"/>
-          </a:xfrm>
-          <a:prstGeom prst="rect">
-            <a:avLst/>
-          </a:prstGeom>
-          <a:solidFill>
-            <a:srgbClr val="9A4C1F"/>
-          </a:solidFill>
-          <a:ln/>
-        </p:spPr>
-      </p:sp>
-      <p:sp>
-        <p:nvSpPr>
-          <p:cNvPr id="15" name="Text 13"/>
-          <p:cNvSpPr/>
-          <p:nvPr/>
-        </p:nvSpPr>
-        <p:spPr>
-          <a:xfrm>
-            <a:off x="914400" y="4270248"/>
-            <a:ext cx="10332720" cy="365760"/>
-          </a:xfrm>
-          <a:prstGeom prst="rect">
-            <a:avLst/>
-          </a:prstGeom>
-          <a:noFill/>
-          <a:ln/>
-        </p:spPr>
-        <p:txBody>
-          <a:bodyPr wrap="square" rtlCol="0" anchor="ctr"/>
-          <a:lstStyle/>
-          <a:p>
-            <a:pPr indent="0" marL="0">
-              <a:buNone/>
-            </a:pPr>
-            <a:r>
-              <a:rPr lang="en-US" sz="1400" b="1" dirty="0">
-                <a:solidFill>
-                  <a:srgbClr val="1B1F3B"/>
-                </a:solidFill>
-                <a:latin typeface="Segoe UI" pitchFamily="34" charset="0"/>
-                <a:ea typeface="Segoe UI" pitchFamily="34" charset="-122"/>
-                <a:cs typeface="Segoe UI" pitchFamily="34" charset="-120"/>
-              </a:rPr>
-              <a:t>Suivi du temps par ouvrage</a:t>
-            </a:r>
-            <a:endParaRPr lang="en-US" sz="1400" dirty="0"/>
-          </a:p>
-        </p:txBody>
-      </p:sp>
-      <p:sp>
-        <p:nvSpPr>
-          <p:cNvPr id="16" name="Text 14"/>
-          <p:cNvSpPr/>
-          <p:nvPr/>
-        </p:nvSpPr>
-        <p:spPr>
-          <a:xfrm>
-            <a:off x="914400" y="4617720"/>
-            <a:ext cx="10332720" cy="594360"/>
-          </a:xfrm>
-          <a:prstGeom prst="rect">
-            <a:avLst/>
-          </a:prstGeom>
-          <a:noFill/>
-          <a:ln/>
-        </p:spPr>
-        <p:txBody>
-          <a:bodyPr wrap="square" rtlCol="0" anchor="ctr"/>
-          <a:lstStyle/>
-          <a:p>
-            <a:pPr indent="0" marL="0">
-              <a:lnSpc>
-                <a:spcPts val="1400"/>
-              </a:lnSpc>
-              <a:buNone/>
-            </a:pPr>
-            <a:r>
-              <a:rPr lang="en-US" sz="1100" dirty="0">
-                <a:solidFill>
-                  <a:srgbClr val="8A7C68"/>
-                </a:solidFill>
-                <a:latin typeface="Segoe UI" pitchFamily="34" charset="0"/>
-                <a:ea typeface="Segoe UI" pitchFamily="34" charset="-122"/>
-                <a:cs typeface="Segoe UI" pitchFamily="34" charset="-120"/>
-              </a:rPr>
-              <a:t>Boutons Démarrer / Pause / Reprendre / Terminer par tâche, avec calcul automatique du temps consommé et alerte en cas de dépassement du temps prévu.</a:t>
-            </a:r>
-            <a:endParaRPr lang="en-US" sz="1100" dirty="0"/>
-          </a:p>
-        </p:txBody>
-      </p:sp>
-      <p:sp>
-        <p:nvSpPr>
-          <p:cNvPr id="17" name="Text 15"/>
+          <p:cNvPr id="9" name="Text 7"/>
           <p:cNvSpPr/>
           <p:nvPr/>
         </p:nvSpPr>
@@ -14233,7 +14539,7 @@
       </p:sp>
       <p:sp>
         <p:nvSpPr>
-          <p:cNvPr id="18" name="Text 16"/>
+          <p:cNvPr id="10" name="Text 8"/>
           <p:cNvSpPr/>
           <p:nvPr/>
         </p:nvSpPr>
@@ -14396,7 +14702,7 @@
                 <a:ea typeface="Georgia" pitchFamily="34" charset="-122"/>
                 <a:cs typeface="Georgia" pitchFamily="34" charset="-120"/>
               </a:rPr>
-              <a:t>Accueil &amp; stabilité</a:t>
+              <a:t>Signature &amp; portails</a:t>
             </a:r>
             <a:endParaRPr lang="en-US" sz="2400" dirty="0"/>
           </a:p>
@@ -14482,7 +14788,7 @@
                 <a:ea typeface="Segoe UI" pitchFamily="34" charset="-122"/>
                 <a:cs typeface="Segoe UI" pitchFamily="34" charset="-120"/>
               </a:rPr>
-              <a:t>Reconnexion automatique de session</a:t>
+              <a:t>Signature client branchée sur Supabase</a:t>
             </a:r>
             <a:endParaRPr lang="en-US" sz="1400" dirty="0"/>
           </a:p>
@@ -14524,7 +14830,7 @@
                 <a:ea typeface="Segoe UI" pitchFamily="34" charset="-122"/>
                 <a:cs typeface="Segoe UI" pitchFamily="34" charset="-120"/>
               </a:rPr>
-              <a:t>Une session expirée (~1h) provoquait des échecs silencieux à l'enregistrement (profil, IBAN, devis) sans reconnexion automatique ; la détection couvre désormais tous les cas d'expiration.</a:t>
+              <a:t>Le client qui signe un devis n'a pas de session Kôji : une clé technique dédiée (service_role) permet de retrouver et mettre à jour son devis directement dans la base partagée.</a:t>
             </a:r>
             <a:endParaRPr lang="en-US" sz="1100" dirty="0"/>
           </a:p>
@@ -14610,7 +14916,7 @@
                 <a:ea typeface="Segoe UI" pitchFamily="34" charset="-122"/>
                 <a:cs typeface="Segoe UI" pitchFamily="34" charset="-120"/>
               </a:rPr>
-              <a:t>Corrections de plantages ponctuels</a:t>
+              <a:t>Audit complet du portail client</a:t>
             </a:r>
             <a:endParaRPr lang="en-US" sz="1400" dirty="0"/>
           </a:p>
@@ -14652,7 +14958,7 @@
                 <a:ea typeface="Segoe UI" pitchFamily="34" charset="-122"/>
                 <a:cs typeface="Segoe UI" pitchFamily="34" charset="-120"/>
               </a:rPr>
-              <a:t>Plusieurs erreurs bloquantes corrigées au fil des tests (références de code manquantes, composants mal placés).</a:t>
+              <a:t>Plusieurs routes (connexion client, devis/tâches/notes du portail, création de factures) lisaient encore l'ancien fichier JSON local et ne trouvaient plus aucune donnée récente depuis la migration Supabase des devis — toutes corrigées.</a:t>
             </a:r>
             <a:endParaRPr lang="en-US" sz="1100" dirty="0"/>
           </a:p>
@@ -14660,7 +14966,135 @@
       </p:sp>
       <p:sp>
         <p:nvSpPr>
-          <p:cNvPr id="13" name="Text 11"/>
+          <p:cNvPr id="13" name="Shape 11"/>
+          <p:cNvSpPr/>
+          <p:nvPr/>
+        </p:nvSpPr>
+        <p:spPr>
+          <a:xfrm>
+            <a:off x="640080" y="4160520"/>
+            <a:ext cx="10881360" cy="1097280"/>
+          </a:xfrm>
+          <a:prstGeom prst="roundRect">
+            <a:avLst>
+              <a:gd name="adj" fmla="val 5000"/>
+            </a:avLst>
+          </a:prstGeom>
+          <a:solidFill>
+            <a:srgbClr val="FFFFFF"/>
+          </a:solidFill>
+          <a:ln w="12700">
+            <a:solidFill>
+              <a:srgbClr val="E4DCCB"/>
+            </a:solidFill>
+            <a:prstDash val="solid"/>
+          </a:ln>
+        </p:spPr>
+      </p:sp>
+      <p:sp>
+        <p:nvSpPr>
+          <p:cNvPr id="14" name="Shape 12"/>
+          <p:cNvSpPr/>
+          <p:nvPr/>
+        </p:nvSpPr>
+        <p:spPr>
+          <a:xfrm>
+            <a:off x="640080" y="4160520"/>
+            <a:ext cx="54864" cy="1097280"/>
+          </a:xfrm>
+          <a:prstGeom prst="rect">
+            <a:avLst/>
+          </a:prstGeom>
+          <a:solidFill>
+            <a:srgbClr val="9A4C1F"/>
+          </a:solidFill>
+          <a:ln/>
+        </p:spPr>
+      </p:sp>
+      <p:sp>
+        <p:nvSpPr>
+          <p:cNvPr id="15" name="Text 13"/>
+          <p:cNvSpPr/>
+          <p:nvPr/>
+        </p:nvSpPr>
+        <p:spPr>
+          <a:xfrm>
+            <a:off x="914400" y="4270248"/>
+            <a:ext cx="10332720" cy="365760"/>
+          </a:xfrm>
+          <a:prstGeom prst="rect">
+            <a:avLst/>
+          </a:prstGeom>
+          <a:noFill/>
+          <a:ln/>
+        </p:spPr>
+        <p:txBody>
+          <a:bodyPr wrap="square" rtlCol="0" anchor="ctr"/>
+          <a:lstStyle/>
+          <a:p>
+            <a:pPr indent="0" marL="0">
+              <a:buNone/>
+            </a:pPr>
+            <a:r>
+              <a:rPr lang="en-US" sz="1400" b="1" dirty="0">
+                <a:solidFill>
+                  <a:srgbClr val="1B1F3B"/>
+                </a:solidFill>
+                <a:latin typeface="Segoe UI" pitchFamily="34" charset="0"/>
+                <a:ea typeface="Segoe UI" pitchFamily="34" charset="-122"/>
+                <a:cs typeface="Segoe UI" pitchFamily="34" charset="-120"/>
+              </a:rPr>
+              <a:t>Suivi du temps par ouvrage</a:t>
+            </a:r>
+            <a:endParaRPr lang="en-US" sz="1400" dirty="0"/>
+          </a:p>
+        </p:txBody>
+      </p:sp>
+      <p:sp>
+        <p:nvSpPr>
+          <p:cNvPr id="16" name="Text 14"/>
+          <p:cNvSpPr/>
+          <p:nvPr/>
+        </p:nvSpPr>
+        <p:spPr>
+          <a:xfrm>
+            <a:off x="914400" y="4617720"/>
+            <a:ext cx="10332720" cy="594360"/>
+          </a:xfrm>
+          <a:prstGeom prst="rect">
+            <a:avLst/>
+          </a:prstGeom>
+          <a:noFill/>
+          <a:ln/>
+        </p:spPr>
+        <p:txBody>
+          <a:bodyPr wrap="square" rtlCol="0" anchor="ctr"/>
+          <a:lstStyle/>
+          <a:p>
+            <a:pPr indent="0" marL="0">
+              <a:lnSpc>
+                <a:spcPts val="1400"/>
+              </a:lnSpc>
+              <a:buNone/>
+            </a:pPr>
+            <a:r>
+              <a:rPr lang="en-US" sz="1100" dirty="0">
+                <a:solidFill>
+                  <a:srgbClr val="8A7C68"/>
+                </a:solidFill>
+                <a:latin typeface="Segoe UI" pitchFamily="34" charset="0"/>
+                <a:ea typeface="Segoe UI" pitchFamily="34" charset="-122"/>
+                <a:cs typeface="Segoe UI" pitchFamily="34" charset="-120"/>
+              </a:rPr>
+              <a:t>Boutons Démarrer / Pause / Reprendre / Terminer par tâche, avec calcul automatique du temps consommé et alerte en cas de dépassement du temps prévu.</a:t>
+            </a:r>
+            <a:endParaRPr lang="en-US" sz="1100" dirty="0"/>
+          </a:p>
+        </p:txBody>
+      </p:sp>
+      <p:sp>
+        <p:nvSpPr>
+          <p:cNvPr id="17" name="Text 15"/>
           <p:cNvSpPr/>
           <p:nvPr/>
         </p:nvSpPr>
@@ -14699,7 +15133,7 @@
       </p:sp>
       <p:sp>
         <p:nvSpPr>
-          <p:cNvPr id="14" name="Text 12"/>
+          <p:cNvPr id="18" name="Text 16"/>
           <p:cNvSpPr/>
           <p:nvPr/>
         </p:nvSpPr>
@@ -14862,7 +15296,7 @@
                 <a:ea typeface="Georgia" pitchFamily="34" charset="-122"/>
                 <a:cs typeface="Georgia" pitchFamily="34" charset="-120"/>
               </a:rPr>
-              <a:t>Rapports d'intervention</a:t>
+              <a:t>Accueil &amp; stabilité</a:t>
             </a:r>
             <a:endParaRPr lang="en-US" sz="2400" dirty="0"/>
           </a:p>
@@ -14948,7 +15382,7 @@
                 <a:ea typeface="Segoe UI" pitchFamily="34" charset="-122"/>
                 <a:cs typeface="Segoe UI" pitchFamily="34" charset="-120"/>
               </a:rPr>
-              <a:t>Nouvelle entité 'interventions'</a:t>
+              <a:t>Reconnexion automatique de session</a:t>
             </a:r>
             <a:endParaRPr lang="en-US" sz="1400" dirty="0"/>
           </a:p>
@@ -14990,7 +15424,7 @@
                 <a:ea typeface="Segoe UI" pitchFamily="34" charset="-122"/>
                 <a:cs typeface="Segoe UI" pitchFamily="34" charset="-120"/>
               </a:rPr>
-              <a:t>API dédiée (creation, consultation, suppression) pour stocker les rapports d'intervention, avec historique des actions comme pour les autres modules.</a:t>
+              <a:t>Une session expirée (~1h) provoquait des échecs silencieux à l'enregistrement (profil, IBAN, devis) sans reconnexion automatique ; la détection couvre désormais tous les cas d'expiration.</a:t>
             </a:r>
             <a:endParaRPr lang="en-US" sz="1100" dirty="0"/>
           </a:p>
@@ -15076,7 +15510,7 @@
                 <a:ea typeface="Segoe UI" pitchFamily="34" charset="-122"/>
                 <a:cs typeface="Segoe UI" pitchFamily="34" charset="-120"/>
               </a:rPr>
-              <a:t>Génération PDF du rapport d'intervention</a:t>
+              <a:t>Corrections de plantages ponctuels</a:t>
             </a:r>
             <a:endParaRPr lang="en-US" sz="1400" dirty="0"/>
           </a:p>
@@ -15118,7 +15552,7 @@
                 <a:ea typeface="Segoe UI" pitchFamily="34" charset="-122"/>
                 <a:cs typeface="Segoe UI" pitchFamily="34" charset="-120"/>
               </a:rPr>
-              <a:t>Chaque rapport peut être téléchargé en PDF avec le logo de l'entreprise en en-tête, dans une mise en page reprenant celle des rapports d'intervention papier existants.</a:t>
+              <a:t>Plusieurs erreurs bloquantes corrigées au fil des tests (références de code manquantes, composants mal placés).</a:t>
             </a:r>
             <a:endParaRPr lang="en-US" sz="1100" dirty="0"/>
           </a:p>
@@ -15126,263 +15560,7 @@
       </p:sp>
       <p:sp>
         <p:nvSpPr>
-          <p:cNvPr id="13" name="Shape 11"/>
-          <p:cNvSpPr/>
-          <p:nvPr/>
-        </p:nvSpPr>
-        <p:spPr>
-          <a:xfrm>
-            <a:off x="640080" y="4160520"/>
-            <a:ext cx="10881360" cy="1097280"/>
-          </a:xfrm>
-          <a:prstGeom prst="roundRect">
-            <a:avLst>
-              <a:gd name="adj" fmla="val 5000"/>
-            </a:avLst>
-          </a:prstGeom>
-          <a:solidFill>
-            <a:srgbClr val="FFFFFF"/>
-          </a:solidFill>
-          <a:ln w="12700">
-            <a:solidFill>
-              <a:srgbClr val="E4DCCB"/>
-            </a:solidFill>
-            <a:prstDash val="solid"/>
-          </a:ln>
-        </p:spPr>
-      </p:sp>
-      <p:sp>
-        <p:nvSpPr>
-          <p:cNvPr id="14" name="Shape 12"/>
-          <p:cNvSpPr/>
-          <p:nvPr/>
-        </p:nvSpPr>
-        <p:spPr>
-          <a:xfrm>
-            <a:off x="640080" y="4160520"/>
-            <a:ext cx="54864" cy="1097280"/>
-          </a:xfrm>
-          <a:prstGeom prst="rect">
-            <a:avLst/>
-          </a:prstGeom>
-          <a:solidFill>
-            <a:srgbClr val="9A4C1F"/>
-          </a:solidFill>
-          <a:ln/>
-        </p:spPr>
-      </p:sp>
-      <p:sp>
-        <p:nvSpPr>
-          <p:cNvPr id="15" name="Text 13"/>
-          <p:cNvSpPr/>
-          <p:nvPr/>
-        </p:nvSpPr>
-        <p:spPr>
-          <a:xfrm>
-            <a:off x="914400" y="4270248"/>
-            <a:ext cx="10332720" cy="365760"/>
-          </a:xfrm>
-          <a:prstGeom prst="rect">
-            <a:avLst/>
-          </a:prstGeom>
-          <a:noFill/>
-          <a:ln/>
-        </p:spPr>
-        <p:txBody>
-          <a:bodyPr wrap="square" rtlCol="0" anchor="ctr"/>
-          <a:lstStyle/>
-          <a:p>
-            <a:pPr indent="0" marL="0">
-              <a:buNone/>
-            </a:pPr>
-            <a:r>
-              <a:rPr lang="en-US" sz="1400" b="1" dirty="0">
-                <a:solidFill>
-                  <a:srgbClr val="1B1F3B"/>
-                </a:solidFill>
-                <a:latin typeface="Segoe UI" pitchFamily="34" charset="0"/>
-                <a:ea typeface="Segoe UI" pitchFamily="34" charset="-122"/>
-                <a:cs typeface="Segoe UI" pitchFamily="34" charset="-120"/>
-              </a:rPr>
-              <a:t>Facturation directe d'une intervention</a:t>
-            </a:r>
-            <a:endParaRPr lang="en-US" sz="1400" dirty="0"/>
-          </a:p>
-        </p:txBody>
-      </p:sp>
-      <p:sp>
-        <p:nvSpPr>
-          <p:cNvPr id="16" name="Text 14"/>
-          <p:cNvSpPr/>
-          <p:nvPr/>
-        </p:nvSpPr>
-        <p:spPr>
-          <a:xfrm>
-            <a:off x="914400" y="4617720"/>
-            <a:ext cx="10332720" cy="594360"/>
-          </a:xfrm>
-          <a:prstGeom prst="rect">
-            <a:avLst/>
-          </a:prstGeom>
-          <a:noFill/>
-          <a:ln/>
-        </p:spPr>
-        <p:txBody>
-          <a:bodyPr wrap="square" rtlCol="0" anchor="ctr"/>
-          <a:lstStyle/>
-          <a:p>
-            <a:pPr indent="0" marL="0">
-              <a:lnSpc>
-                <a:spcPts val="1400"/>
-              </a:lnSpc>
-              <a:buNone/>
-            </a:pPr>
-            <a:r>
-              <a:rPr lang="en-US" sz="1100" dirty="0">
-                <a:solidFill>
-                  <a:srgbClr val="8A7C68"/>
-                </a:solidFill>
-                <a:latin typeface="Segoe UI" pitchFamily="34" charset="0"/>
-                <a:ea typeface="Segoe UI" pitchFamily="34" charset="-122"/>
-                <a:cs typeface="Segoe UI" pitchFamily="34" charset="-120"/>
-              </a:rPr>
-              <a:t>Une facture peut être créée directement à partir d'une intervention (sans passer par un devis signé), avec un montant saisi manuellement ; l'intervention passe alors automatiquement au statut 'Facturée'.</a:t>
-            </a:r>
-            <a:endParaRPr lang="en-US" sz="1100" dirty="0"/>
-          </a:p>
-        </p:txBody>
-      </p:sp>
-      <p:sp>
-        <p:nvSpPr>
-          <p:cNvPr id="17" name="Shape 15"/>
-          <p:cNvSpPr/>
-          <p:nvPr/>
-        </p:nvSpPr>
-        <p:spPr>
-          <a:xfrm>
-            <a:off x="640080" y="5394960"/>
-            <a:ext cx="10881360" cy="1097280"/>
-          </a:xfrm>
-          <a:prstGeom prst="roundRect">
-            <a:avLst>
-              <a:gd name="adj" fmla="val 5000"/>
-            </a:avLst>
-          </a:prstGeom>
-          <a:solidFill>
-            <a:srgbClr val="FFFFFF"/>
-          </a:solidFill>
-          <a:ln w="12700">
-            <a:solidFill>
-              <a:srgbClr val="E4DCCB"/>
-            </a:solidFill>
-            <a:prstDash val="solid"/>
-          </a:ln>
-        </p:spPr>
-      </p:sp>
-      <p:sp>
-        <p:nvSpPr>
-          <p:cNvPr id="18" name="Shape 16"/>
-          <p:cNvSpPr/>
-          <p:nvPr/>
-        </p:nvSpPr>
-        <p:spPr>
-          <a:xfrm>
-            <a:off x="640080" y="5394960"/>
-            <a:ext cx="54864" cy="1097280"/>
-          </a:xfrm>
-          <a:prstGeom prst="rect">
-            <a:avLst/>
-          </a:prstGeom>
-          <a:solidFill>
-            <a:srgbClr val="9A4C1F"/>
-          </a:solidFill>
-          <a:ln/>
-        </p:spPr>
-      </p:sp>
-      <p:sp>
-        <p:nvSpPr>
-          <p:cNvPr id="19" name="Text 17"/>
-          <p:cNvSpPr/>
-          <p:nvPr/>
-        </p:nvSpPr>
-        <p:spPr>
-          <a:xfrm>
-            <a:off x="914400" y="5504688"/>
-            <a:ext cx="10332720" cy="365760"/>
-          </a:xfrm>
-          <a:prstGeom prst="rect">
-            <a:avLst/>
-          </a:prstGeom>
-          <a:noFill/>
-          <a:ln/>
-        </p:spPr>
-        <p:txBody>
-          <a:bodyPr wrap="square" rtlCol="0" anchor="ctr"/>
-          <a:lstStyle/>
-          <a:p>
-            <a:pPr indent="0" marL="0">
-              <a:buNone/>
-            </a:pPr>
-            <a:r>
-              <a:rPr lang="en-US" sz="1400" b="1" dirty="0">
-                <a:solidFill>
-                  <a:srgbClr val="1B1F3B"/>
-                </a:solidFill>
-                <a:latin typeface="Segoe UI" pitchFamily="34" charset="0"/>
-                <a:ea typeface="Segoe UI" pitchFamily="34" charset="-122"/>
-                <a:cs typeface="Segoe UI" pitchFamily="34" charset="-120"/>
-              </a:rPr>
-              <a:t>En-tête d'entreprise propre à chaque rapport</a:t>
-            </a:r>
-            <a:endParaRPr lang="en-US" sz="1400" dirty="0"/>
-          </a:p>
-        </p:txBody>
-      </p:sp>
-      <p:sp>
-        <p:nvSpPr>
-          <p:cNvPr id="20" name="Text 18"/>
-          <p:cNvSpPr/>
-          <p:nvPr/>
-        </p:nvSpPr>
-        <p:spPr>
-          <a:xfrm>
-            <a:off x="914400" y="5852160"/>
-            <a:ext cx="10332720" cy="594360"/>
-          </a:xfrm>
-          <a:prstGeom prst="rect">
-            <a:avLst/>
-          </a:prstGeom>
-          <a:noFill/>
-          <a:ln/>
-        </p:spPr>
-        <p:txBody>
-          <a:bodyPr wrap="square" rtlCol="0" anchor="ctr"/>
-          <a:lstStyle/>
-          <a:p>
-            <a:pPr indent="0" marL="0">
-              <a:lnSpc>
-                <a:spcPts val="1400"/>
-              </a:lnSpc>
-              <a:buNone/>
-            </a:pPr>
-            <a:r>
-              <a:rPr lang="en-US" sz="1100" dirty="0">
-                <a:solidFill>
-                  <a:srgbClr val="8A7C68"/>
-                </a:solidFill>
-                <a:latin typeface="Segoe UI" pitchFamily="34" charset="0"/>
-                <a:ea typeface="Segoe UI" pitchFamily="34" charset="-122"/>
-                <a:cs typeface="Segoe UI" pitchFamily="34" charset="-120"/>
-              </a:rPr>
-              <a:t>Chaque intervention conserve son propre instantané des informations d'entreprise (comme les devis), pour que le PDF reste fidèle même si le profil change ensuite.</a:t>
-            </a:r>
-            <a:endParaRPr lang="en-US" sz="1100" dirty="0"/>
-          </a:p>
-        </p:txBody>
-      </p:sp>
-      <p:sp>
-        <p:nvSpPr>
-          <p:cNvPr id="21" name="Text 19"/>
+          <p:cNvPr id="13" name="Text 11"/>
           <p:cNvSpPr/>
           <p:nvPr/>
         </p:nvSpPr>
@@ -15421,7 +15599,7 @@
       </p:sp>
       <p:sp>
         <p:nvSpPr>
-          <p:cNvPr id="22" name="Text 20"/>
+          <p:cNvPr id="14" name="Text 12"/>
           <p:cNvSpPr/>
           <p:nvPr/>
         </p:nvSpPr>
@@ -15584,7 +15762,7 @@
                 <a:ea typeface="Georgia" pitchFamily="34" charset="-122"/>
                 <a:cs typeface="Georgia" pitchFamily="34" charset="-120"/>
               </a:rPr>
-              <a:t>Rapports d'intervention (suite)</a:t>
+              <a:t>Rapports d'intervention</a:t>
             </a:r>
             <a:endParaRPr lang="en-US" sz="2400" dirty="0"/>
           </a:p>
@@ -15670,7 +15848,7 @@
                 <a:ea typeface="Segoe UI" pitchFamily="34" charset="-122"/>
                 <a:cs typeface="Segoe UI" pitchFamily="34" charset="-120"/>
               </a:rPr>
-              <a:t>Statut de suivi automatique (À faire / En cours / Terminée)</a:t>
+              <a:t>Nouvelle entité 'interventions'</a:t>
             </a:r>
             <a:endParaRPr lang="en-US" sz="1400" dirty="0"/>
           </a:p>
@@ -15712,7 +15890,7 @@
                 <a:ea typeface="Segoe UI" pitchFamily="34" charset="-122"/>
                 <a:cs typeface="Segoe UI" pitchFamily="34" charset="-120"/>
               </a:rPr>
-              <a:t>Le statut d'une intervention évolue automatiquement selon sa date (À faire tant que la date n'est pas arrivée, En cours le jour J), jusqu'à être marquée Terminée manuellement puis, si besoin, archivée.</a:t>
+              <a:t>API dédiée (creation, consultation, suppression) pour stocker les rapports d'intervention, avec historique des actions comme pour les autres modules.</a:t>
             </a:r>
             <a:endParaRPr lang="en-US" sz="1100" dirty="0"/>
           </a:p>
@@ -15798,7 +15976,7 @@
                 <a:ea typeface="Segoe UI" pitchFamily="34" charset="-122"/>
                 <a:cs typeface="Segoe UI" pitchFamily="34" charset="-120"/>
               </a:rPr>
-              <a:t>Numéro de rapport automatique</a:t>
+              <a:t>Génération PDF du rapport d'intervention</a:t>
             </a:r>
             <a:endParaRPr lang="en-US" sz="1400" dirty="0"/>
           </a:p>
@@ -15840,7 +16018,7 @@
                 <a:ea typeface="Segoe UI" pitchFamily="34" charset="-122"/>
                 <a:cs typeface="Segoe UI" pitchFamily="34" charset="-120"/>
               </a:rPr>
-              <a:t>Chaque rapport reçoit un numéro unique généré automatiquement (ex. INT-2026-0003), affiché en en-tête avec la date de création, sur le même principe que la numérotation des devis et factures.</a:t>
+              <a:t>Chaque rapport peut être téléchargé en PDF avec le logo de l'entreprise en en-tête, dans une mise en page reprenant celle des rapports d'intervention papier existants.</a:t>
             </a:r>
             <a:endParaRPr lang="en-US" sz="1100" dirty="0"/>
           </a:p>
@@ -15848,7 +16026,263 @@
       </p:sp>
       <p:sp>
         <p:nvSpPr>
-          <p:cNvPr id="13" name="Text 11"/>
+          <p:cNvPr id="13" name="Shape 11"/>
+          <p:cNvSpPr/>
+          <p:nvPr/>
+        </p:nvSpPr>
+        <p:spPr>
+          <a:xfrm>
+            <a:off x="640080" y="4160520"/>
+            <a:ext cx="10881360" cy="1097280"/>
+          </a:xfrm>
+          <a:prstGeom prst="roundRect">
+            <a:avLst>
+              <a:gd name="adj" fmla="val 5000"/>
+            </a:avLst>
+          </a:prstGeom>
+          <a:solidFill>
+            <a:srgbClr val="FFFFFF"/>
+          </a:solidFill>
+          <a:ln w="12700">
+            <a:solidFill>
+              <a:srgbClr val="E4DCCB"/>
+            </a:solidFill>
+            <a:prstDash val="solid"/>
+          </a:ln>
+        </p:spPr>
+      </p:sp>
+      <p:sp>
+        <p:nvSpPr>
+          <p:cNvPr id="14" name="Shape 12"/>
+          <p:cNvSpPr/>
+          <p:nvPr/>
+        </p:nvSpPr>
+        <p:spPr>
+          <a:xfrm>
+            <a:off x="640080" y="4160520"/>
+            <a:ext cx="54864" cy="1097280"/>
+          </a:xfrm>
+          <a:prstGeom prst="rect">
+            <a:avLst/>
+          </a:prstGeom>
+          <a:solidFill>
+            <a:srgbClr val="9A4C1F"/>
+          </a:solidFill>
+          <a:ln/>
+        </p:spPr>
+      </p:sp>
+      <p:sp>
+        <p:nvSpPr>
+          <p:cNvPr id="15" name="Text 13"/>
+          <p:cNvSpPr/>
+          <p:nvPr/>
+        </p:nvSpPr>
+        <p:spPr>
+          <a:xfrm>
+            <a:off x="914400" y="4270248"/>
+            <a:ext cx="10332720" cy="365760"/>
+          </a:xfrm>
+          <a:prstGeom prst="rect">
+            <a:avLst/>
+          </a:prstGeom>
+          <a:noFill/>
+          <a:ln/>
+        </p:spPr>
+        <p:txBody>
+          <a:bodyPr wrap="square" rtlCol="0" anchor="ctr"/>
+          <a:lstStyle/>
+          <a:p>
+            <a:pPr indent="0" marL="0">
+              <a:buNone/>
+            </a:pPr>
+            <a:r>
+              <a:rPr lang="en-US" sz="1400" b="1" dirty="0">
+                <a:solidFill>
+                  <a:srgbClr val="1B1F3B"/>
+                </a:solidFill>
+                <a:latin typeface="Segoe UI" pitchFamily="34" charset="0"/>
+                <a:ea typeface="Segoe UI" pitchFamily="34" charset="-122"/>
+                <a:cs typeface="Segoe UI" pitchFamily="34" charset="-120"/>
+              </a:rPr>
+              <a:t>Facturation directe d'une intervention</a:t>
+            </a:r>
+            <a:endParaRPr lang="en-US" sz="1400" dirty="0"/>
+          </a:p>
+        </p:txBody>
+      </p:sp>
+      <p:sp>
+        <p:nvSpPr>
+          <p:cNvPr id="16" name="Text 14"/>
+          <p:cNvSpPr/>
+          <p:nvPr/>
+        </p:nvSpPr>
+        <p:spPr>
+          <a:xfrm>
+            <a:off x="914400" y="4617720"/>
+            <a:ext cx="10332720" cy="594360"/>
+          </a:xfrm>
+          <a:prstGeom prst="rect">
+            <a:avLst/>
+          </a:prstGeom>
+          <a:noFill/>
+          <a:ln/>
+        </p:spPr>
+        <p:txBody>
+          <a:bodyPr wrap="square" rtlCol="0" anchor="ctr"/>
+          <a:lstStyle/>
+          <a:p>
+            <a:pPr indent="0" marL="0">
+              <a:lnSpc>
+                <a:spcPts val="1400"/>
+              </a:lnSpc>
+              <a:buNone/>
+            </a:pPr>
+            <a:r>
+              <a:rPr lang="en-US" sz="1100" dirty="0">
+                <a:solidFill>
+                  <a:srgbClr val="8A7C68"/>
+                </a:solidFill>
+                <a:latin typeface="Segoe UI" pitchFamily="34" charset="0"/>
+                <a:ea typeface="Segoe UI" pitchFamily="34" charset="-122"/>
+                <a:cs typeface="Segoe UI" pitchFamily="34" charset="-120"/>
+              </a:rPr>
+              <a:t>Une facture peut être créée directement à partir d'une intervention (sans passer par un devis signé), avec un montant saisi manuellement ; l'intervention passe alors automatiquement au statut 'Facturée'.</a:t>
+            </a:r>
+            <a:endParaRPr lang="en-US" sz="1100" dirty="0"/>
+          </a:p>
+        </p:txBody>
+      </p:sp>
+      <p:sp>
+        <p:nvSpPr>
+          <p:cNvPr id="17" name="Shape 15"/>
+          <p:cNvSpPr/>
+          <p:nvPr/>
+        </p:nvSpPr>
+        <p:spPr>
+          <a:xfrm>
+            <a:off x="640080" y="5394960"/>
+            <a:ext cx="10881360" cy="1097280"/>
+          </a:xfrm>
+          <a:prstGeom prst="roundRect">
+            <a:avLst>
+              <a:gd name="adj" fmla="val 5000"/>
+            </a:avLst>
+          </a:prstGeom>
+          <a:solidFill>
+            <a:srgbClr val="FFFFFF"/>
+          </a:solidFill>
+          <a:ln w="12700">
+            <a:solidFill>
+              <a:srgbClr val="E4DCCB"/>
+            </a:solidFill>
+            <a:prstDash val="solid"/>
+          </a:ln>
+        </p:spPr>
+      </p:sp>
+      <p:sp>
+        <p:nvSpPr>
+          <p:cNvPr id="18" name="Shape 16"/>
+          <p:cNvSpPr/>
+          <p:nvPr/>
+        </p:nvSpPr>
+        <p:spPr>
+          <a:xfrm>
+            <a:off x="640080" y="5394960"/>
+            <a:ext cx="54864" cy="1097280"/>
+          </a:xfrm>
+          <a:prstGeom prst="rect">
+            <a:avLst/>
+          </a:prstGeom>
+          <a:solidFill>
+            <a:srgbClr val="9A4C1F"/>
+          </a:solidFill>
+          <a:ln/>
+        </p:spPr>
+      </p:sp>
+      <p:sp>
+        <p:nvSpPr>
+          <p:cNvPr id="19" name="Text 17"/>
+          <p:cNvSpPr/>
+          <p:nvPr/>
+        </p:nvSpPr>
+        <p:spPr>
+          <a:xfrm>
+            <a:off x="914400" y="5504688"/>
+            <a:ext cx="10332720" cy="365760"/>
+          </a:xfrm>
+          <a:prstGeom prst="rect">
+            <a:avLst/>
+          </a:prstGeom>
+          <a:noFill/>
+          <a:ln/>
+        </p:spPr>
+        <p:txBody>
+          <a:bodyPr wrap="square" rtlCol="0" anchor="ctr"/>
+          <a:lstStyle/>
+          <a:p>
+            <a:pPr indent="0" marL="0">
+              <a:buNone/>
+            </a:pPr>
+            <a:r>
+              <a:rPr lang="en-US" sz="1400" b="1" dirty="0">
+                <a:solidFill>
+                  <a:srgbClr val="1B1F3B"/>
+                </a:solidFill>
+                <a:latin typeface="Segoe UI" pitchFamily="34" charset="0"/>
+                <a:ea typeface="Segoe UI" pitchFamily="34" charset="-122"/>
+                <a:cs typeface="Segoe UI" pitchFamily="34" charset="-120"/>
+              </a:rPr>
+              <a:t>En-tête d'entreprise propre à chaque rapport</a:t>
+            </a:r>
+            <a:endParaRPr lang="en-US" sz="1400" dirty="0"/>
+          </a:p>
+        </p:txBody>
+      </p:sp>
+      <p:sp>
+        <p:nvSpPr>
+          <p:cNvPr id="20" name="Text 18"/>
+          <p:cNvSpPr/>
+          <p:nvPr/>
+        </p:nvSpPr>
+        <p:spPr>
+          <a:xfrm>
+            <a:off x="914400" y="5852160"/>
+            <a:ext cx="10332720" cy="594360"/>
+          </a:xfrm>
+          <a:prstGeom prst="rect">
+            <a:avLst/>
+          </a:prstGeom>
+          <a:noFill/>
+          <a:ln/>
+        </p:spPr>
+        <p:txBody>
+          <a:bodyPr wrap="square" rtlCol="0" anchor="ctr"/>
+          <a:lstStyle/>
+          <a:p>
+            <a:pPr indent="0" marL="0">
+              <a:lnSpc>
+                <a:spcPts val="1400"/>
+              </a:lnSpc>
+              <a:buNone/>
+            </a:pPr>
+            <a:r>
+              <a:rPr lang="en-US" sz="1100" dirty="0">
+                <a:solidFill>
+                  <a:srgbClr val="8A7C68"/>
+                </a:solidFill>
+                <a:latin typeface="Segoe UI" pitchFamily="34" charset="0"/>
+                <a:ea typeface="Segoe UI" pitchFamily="34" charset="-122"/>
+                <a:cs typeface="Segoe UI" pitchFamily="34" charset="-120"/>
+              </a:rPr>
+              <a:t>Chaque intervention conserve son propre instantané des informations d'entreprise (comme les devis), pour que le PDF reste fidèle même si le profil change ensuite.</a:t>
+            </a:r>
+            <a:endParaRPr lang="en-US" sz="1100" dirty="0"/>
+          </a:p>
+        </p:txBody>
+      </p:sp>
+      <p:sp>
+        <p:nvSpPr>
+          <p:cNvPr id="21" name="Text 19"/>
           <p:cNvSpPr/>
           <p:nvPr/>
         </p:nvSpPr>
@@ -15887,7 +16321,7 @@
       </p:sp>
       <p:sp>
         <p:nvSpPr>
-          <p:cNvPr id="14" name="Text 12"/>
+          <p:cNvPr id="22" name="Text 20"/>
           <p:cNvSpPr/>
           <p:nvPr/>
         </p:nvSpPr>
@@ -16087,7 +16521,7 @@
                 <a:ea typeface="Segoe UI" pitchFamily="34" charset="-122"/>
                 <a:cs typeface="Segoe UI" pitchFamily="34" charset="-120"/>
               </a:rPr>
-              <a:t>42 mise(s) à jour</a:t>
+              <a:t>46 mise(s) à jour</a:t>
             </a:r>
             <a:endParaRPr lang="en-US" sz="1200" dirty="0"/>
           </a:p>
@@ -16297,7 +16731,7 @@
                 <a:ea typeface="Georgia" pitchFamily="34" charset="-122"/>
                 <a:cs typeface="Georgia" pitchFamily="34" charset="-120"/>
               </a:rPr>
-              <a:t>Facturation</a:t>
+              <a:t>Rapports d'intervention (suite)</a:t>
             </a:r>
             <a:endParaRPr lang="en-US" sz="2400" dirty="0"/>
           </a:p>
@@ -16383,7 +16817,7 @@
                 <a:ea typeface="Segoe UI" pitchFamily="34" charset="-122"/>
                 <a:cs typeface="Segoe UI" pitchFamily="34" charset="-120"/>
               </a:rPr>
-              <a:t>Export PDF des factures</a:t>
+              <a:t>Statut de suivi automatique (À faire / En cours / Terminée)</a:t>
             </a:r>
             <a:endParaRPr lang="en-US" sz="1400" dirty="0"/>
           </a:p>
@@ -16425,7 +16859,7 @@
                 <a:ea typeface="Segoe UI" pitchFamily="34" charset="-122"/>
                 <a:cs typeface="Segoe UI" pitchFamily="34" charset="-120"/>
               </a:rPr>
-              <a:t>Chaque facture (issue d'un devis signé ou d'une intervention) peut désormais être téléchargée en PDF avec les informations de l'entreprise, du client et du montant — bouton ajouté dans la page Facturation et dans la fiche d'une intervention.</a:t>
+              <a:t>Le statut d'une intervention évolue automatiquement selon sa date (À faire tant que la date n'est pas arrivée, En cours le jour J), jusqu'à être marquée Terminée manuellement puis, si besoin, archivée.</a:t>
             </a:r>
             <a:endParaRPr lang="en-US" sz="1100" dirty="0"/>
           </a:p>
@@ -16433,7 +16867,135 @@
       </p:sp>
       <p:sp>
         <p:nvSpPr>
-          <p:cNvPr id="9" name="Text 7"/>
+          <p:cNvPr id="9" name="Shape 7"/>
+          <p:cNvSpPr/>
+          <p:nvPr/>
+        </p:nvSpPr>
+        <p:spPr>
+          <a:xfrm>
+            <a:off x="640080" y="2926080"/>
+            <a:ext cx="10881360" cy="1097280"/>
+          </a:xfrm>
+          <a:prstGeom prst="roundRect">
+            <a:avLst>
+              <a:gd name="adj" fmla="val 5000"/>
+            </a:avLst>
+          </a:prstGeom>
+          <a:solidFill>
+            <a:srgbClr val="FFFFFF"/>
+          </a:solidFill>
+          <a:ln w="12700">
+            <a:solidFill>
+              <a:srgbClr val="E4DCCB"/>
+            </a:solidFill>
+            <a:prstDash val="solid"/>
+          </a:ln>
+        </p:spPr>
+      </p:sp>
+      <p:sp>
+        <p:nvSpPr>
+          <p:cNvPr id="10" name="Shape 8"/>
+          <p:cNvSpPr/>
+          <p:nvPr/>
+        </p:nvSpPr>
+        <p:spPr>
+          <a:xfrm>
+            <a:off x="640080" y="2926080"/>
+            <a:ext cx="54864" cy="1097280"/>
+          </a:xfrm>
+          <a:prstGeom prst="rect">
+            <a:avLst/>
+          </a:prstGeom>
+          <a:solidFill>
+            <a:srgbClr val="9A4C1F"/>
+          </a:solidFill>
+          <a:ln/>
+        </p:spPr>
+      </p:sp>
+      <p:sp>
+        <p:nvSpPr>
+          <p:cNvPr id="11" name="Text 9"/>
+          <p:cNvSpPr/>
+          <p:nvPr/>
+        </p:nvSpPr>
+        <p:spPr>
+          <a:xfrm>
+            <a:off x="914400" y="3035808"/>
+            <a:ext cx="10332720" cy="365760"/>
+          </a:xfrm>
+          <a:prstGeom prst="rect">
+            <a:avLst/>
+          </a:prstGeom>
+          <a:noFill/>
+          <a:ln/>
+        </p:spPr>
+        <p:txBody>
+          <a:bodyPr wrap="square" rtlCol="0" anchor="ctr"/>
+          <a:lstStyle/>
+          <a:p>
+            <a:pPr indent="0" marL="0">
+              <a:buNone/>
+            </a:pPr>
+            <a:r>
+              <a:rPr lang="en-US" sz="1400" b="1" dirty="0">
+                <a:solidFill>
+                  <a:srgbClr val="1B1F3B"/>
+                </a:solidFill>
+                <a:latin typeface="Segoe UI" pitchFamily="34" charset="0"/>
+                <a:ea typeface="Segoe UI" pitchFamily="34" charset="-122"/>
+                <a:cs typeface="Segoe UI" pitchFamily="34" charset="-120"/>
+              </a:rPr>
+              <a:t>Numéro de rapport automatique</a:t>
+            </a:r>
+            <a:endParaRPr lang="en-US" sz="1400" dirty="0"/>
+          </a:p>
+        </p:txBody>
+      </p:sp>
+      <p:sp>
+        <p:nvSpPr>
+          <p:cNvPr id="12" name="Text 10"/>
+          <p:cNvSpPr/>
+          <p:nvPr/>
+        </p:nvSpPr>
+        <p:spPr>
+          <a:xfrm>
+            <a:off x="914400" y="3383280"/>
+            <a:ext cx="10332720" cy="594360"/>
+          </a:xfrm>
+          <a:prstGeom prst="rect">
+            <a:avLst/>
+          </a:prstGeom>
+          <a:noFill/>
+          <a:ln/>
+        </p:spPr>
+        <p:txBody>
+          <a:bodyPr wrap="square" rtlCol="0" anchor="ctr"/>
+          <a:lstStyle/>
+          <a:p>
+            <a:pPr indent="0" marL="0">
+              <a:lnSpc>
+                <a:spcPts val="1400"/>
+              </a:lnSpc>
+              <a:buNone/>
+            </a:pPr>
+            <a:r>
+              <a:rPr lang="en-US" sz="1100" dirty="0">
+                <a:solidFill>
+                  <a:srgbClr val="8A7C68"/>
+                </a:solidFill>
+                <a:latin typeface="Segoe UI" pitchFamily="34" charset="0"/>
+                <a:ea typeface="Segoe UI" pitchFamily="34" charset="-122"/>
+                <a:cs typeface="Segoe UI" pitchFamily="34" charset="-120"/>
+              </a:rPr>
+              <a:t>Chaque rapport reçoit un numéro unique généré automatiquement (ex. INT-2026-0003), affiché en en-tête avec la date de création, sur le même principe que la numérotation des devis et factures.</a:t>
+            </a:r>
+            <a:endParaRPr lang="en-US" sz="1100" dirty="0"/>
+          </a:p>
+        </p:txBody>
+      </p:sp>
+      <p:sp>
+        <p:nvSpPr>
+          <p:cNvPr id="13" name="Text 11"/>
           <p:cNvSpPr/>
           <p:nvPr/>
         </p:nvSpPr>
@@ -16472,7 +17034,7 @@
       </p:sp>
       <p:sp>
         <p:nvSpPr>
-          <p:cNvPr id="10" name="Text 8"/>
+          <p:cNvPr id="14" name="Text 12"/>
           <p:cNvSpPr/>
           <p:nvPr/>
         </p:nvSpPr>
@@ -16635,7 +17197,7 @@
                 <a:ea typeface="Georgia" pitchFamily="34" charset="-122"/>
                 <a:cs typeface="Georgia" pitchFamily="34" charset="-120"/>
               </a:rPr>
-              <a:t>Sécurité</a:t>
+              <a:t>Facturation</a:t>
             </a:r>
             <a:endParaRPr lang="en-US" sz="2400" dirty="0"/>
           </a:p>
@@ -16721,7 +17283,7 @@
                 <a:ea typeface="Segoe UI" pitchFamily="34" charset="-122"/>
                 <a:cs typeface="Segoe UI" pitchFamily="34" charset="-120"/>
               </a:rPr>
-              <a:t>Audit de sécurité complet et correction des failles trouvées</a:t>
+              <a:t>Export PDF des factures</a:t>
             </a:r>
             <a:endParaRPr lang="en-US" sz="1400" dirty="0"/>
           </a:p>
@@ -16763,7 +17325,7 @@
                 <a:ea typeface="Segoe UI" pitchFamily="34" charset="-122"/>
                 <a:cs typeface="Segoe UI" pitchFamily="34" charset="-120"/>
               </a:rPr>
-              <a:t>Audit approfondi ayant confirmé 6 failles actives : fuite de données entre entreprises, base de données lisible sans connexion, portail client sans authentification, mots de passe en clair, base de données versionnée dans Git, absence de vérification centralisée. Corrigées le jour même (détail ci-dessous).</a:t>
+              <a:t>Chaque facture (issue d'un devis signé ou d'une intervention) peut désormais être téléchargée en PDF avec les informations de l'entreprise, du client et du montant — bouton ajouté dans la page Facturation et dans la fiche d'une intervention.</a:t>
             </a:r>
             <a:endParaRPr lang="en-US" sz="1100" dirty="0"/>
           </a:p>
@@ -16771,391 +17333,7 @@
       </p:sp>
       <p:sp>
         <p:nvSpPr>
-          <p:cNvPr id="9" name="Shape 7"/>
-          <p:cNvSpPr/>
-          <p:nvPr/>
-        </p:nvSpPr>
-        <p:spPr>
-          <a:xfrm>
-            <a:off x="640080" y="2926080"/>
-            <a:ext cx="10881360" cy="1097280"/>
-          </a:xfrm>
-          <a:prstGeom prst="roundRect">
-            <a:avLst>
-              <a:gd name="adj" fmla="val 5000"/>
-            </a:avLst>
-          </a:prstGeom>
-          <a:solidFill>
-            <a:srgbClr val="FFFFFF"/>
-          </a:solidFill>
-          <a:ln w="12700">
-            <a:solidFill>
-              <a:srgbClr val="E4DCCB"/>
-            </a:solidFill>
-            <a:prstDash val="solid"/>
-          </a:ln>
-        </p:spPr>
-      </p:sp>
-      <p:sp>
-        <p:nvSpPr>
-          <p:cNvPr id="10" name="Shape 8"/>
-          <p:cNvSpPr/>
-          <p:nvPr/>
-        </p:nvSpPr>
-        <p:spPr>
-          <a:xfrm>
-            <a:off x="640080" y="2926080"/>
-            <a:ext cx="54864" cy="1097280"/>
-          </a:xfrm>
-          <a:prstGeom prst="rect">
-            <a:avLst/>
-          </a:prstGeom>
-          <a:solidFill>
-            <a:srgbClr val="9A4C1F"/>
-          </a:solidFill>
-          <a:ln/>
-        </p:spPr>
-      </p:sp>
-      <p:sp>
-        <p:nvSpPr>
-          <p:cNvPr id="11" name="Text 9"/>
-          <p:cNvSpPr/>
-          <p:nvPr/>
-        </p:nvSpPr>
-        <p:spPr>
-          <a:xfrm>
-            <a:off x="914400" y="3035808"/>
-            <a:ext cx="10332720" cy="365760"/>
-          </a:xfrm>
-          <a:prstGeom prst="rect">
-            <a:avLst/>
-          </a:prstGeom>
-          <a:noFill/>
-          <a:ln/>
-        </p:spPr>
-        <p:txBody>
-          <a:bodyPr wrap="square" rtlCol="0" anchor="ctr"/>
-          <a:lstStyle/>
-          <a:p>
-            <a:pPr indent="0" marL="0">
-              <a:buNone/>
-            </a:pPr>
-            <a:r>
-              <a:rPr lang="en-US" sz="1400" b="1" dirty="0">
-                <a:solidFill>
-                  <a:srgbClr val="1B1F3B"/>
-                </a:solidFill>
-                <a:latin typeface="Segoe UI" pitchFamily="34" charset="0"/>
-                <a:ea typeface="Segoe UI" pitchFamily="34" charset="-122"/>
-                <a:cs typeface="Segoe UI" pitchFamily="34" charset="-120"/>
-              </a:rPr>
-              <a:t>Fuite de données entre entreprises corrigée</a:t>
-            </a:r>
-            <a:endParaRPr lang="en-US" sz="1400" dirty="0"/>
-          </a:p>
-        </p:txBody>
-      </p:sp>
-      <p:sp>
-        <p:nvSpPr>
-          <p:cNvPr id="12" name="Text 10"/>
-          <p:cNvSpPr/>
-          <p:nvPr/>
-        </p:nvSpPr>
-        <p:spPr>
-          <a:xfrm>
-            <a:off x="914400" y="3383280"/>
-            <a:ext cx="10332720" cy="594360"/>
-          </a:xfrm>
-          <a:prstGeom prst="rect">
-            <a:avLst/>
-          </a:prstGeom>
-          <a:noFill/>
-          <a:ln/>
-        </p:spPr>
-        <p:txBody>
-          <a:bodyPr wrap="square" rtlCol="0" anchor="ctr"/>
-          <a:lstStyle/>
-          <a:p>
-            <a:pPr indent="0" marL="0">
-              <a:lnSpc>
-                <a:spcPts val="1400"/>
-              </a:lnSpc>
-              <a:buNone/>
-            </a:pPr>
-            <a:r>
-              <a:rPr lang="en-US" sz="1100" dirty="0">
-                <a:solidFill>
-                  <a:srgbClr val="8A7C68"/>
-                </a:solidFill>
-                <a:latin typeface="Segoe UI" pitchFamily="34" charset="0"/>
-                <a:ea typeface="Segoe UI" pitchFamily="34" charset="-122"/>
-                <a:cs typeface="Segoe UI" pitchFamily="34" charset="-120"/>
-              </a:rPr>
-              <a:t>Une trentaine de routes (clients, devis, factures, tâches, ouvriers...) faisaient confiance à un identifiant envoyé par le navigateur pour savoir quelles données afficher, sans vérifier qu'il correspondait à la session connectée : n'importe qui pouvait lire ou modifier les données d'une autre entreprise en changeant cet identifiant. Ces routes vérifient désormais la vraie session avant de répondre.</a:t>
-            </a:r>
-            <a:endParaRPr lang="en-US" sz="1100" dirty="0"/>
-          </a:p>
-        </p:txBody>
-      </p:sp>
-      <p:sp>
-        <p:nvSpPr>
-          <p:cNvPr id="13" name="Shape 11"/>
-          <p:cNvSpPr/>
-          <p:nvPr/>
-        </p:nvSpPr>
-        <p:spPr>
-          <a:xfrm>
-            <a:off x="640080" y="4160520"/>
-            <a:ext cx="10881360" cy="1097280"/>
-          </a:xfrm>
-          <a:prstGeom prst="roundRect">
-            <a:avLst>
-              <a:gd name="adj" fmla="val 5000"/>
-            </a:avLst>
-          </a:prstGeom>
-          <a:solidFill>
-            <a:srgbClr val="FFFFFF"/>
-          </a:solidFill>
-          <a:ln w="12700">
-            <a:solidFill>
-              <a:srgbClr val="E4DCCB"/>
-            </a:solidFill>
-            <a:prstDash val="solid"/>
-          </a:ln>
-        </p:spPr>
-      </p:sp>
-      <p:sp>
-        <p:nvSpPr>
-          <p:cNvPr id="14" name="Shape 12"/>
-          <p:cNvSpPr/>
-          <p:nvPr/>
-        </p:nvSpPr>
-        <p:spPr>
-          <a:xfrm>
-            <a:off x="640080" y="4160520"/>
-            <a:ext cx="54864" cy="1097280"/>
-          </a:xfrm>
-          <a:prstGeom prst="rect">
-            <a:avLst/>
-          </a:prstGeom>
-          <a:solidFill>
-            <a:srgbClr val="9A4C1F"/>
-          </a:solidFill>
-          <a:ln/>
-        </p:spPr>
-      </p:sp>
-      <p:sp>
-        <p:nvSpPr>
-          <p:cNvPr id="15" name="Text 13"/>
-          <p:cNvSpPr/>
-          <p:nvPr/>
-        </p:nvSpPr>
-        <p:spPr>
-          <a:xfrm>
-            <a:off x="914400" y="4270248"/>
-            <a:ext cx="10332720" cy="365760"/>
-          </a:xfrm>
-          <a:prstGeom prst="rect">
-            <a:avLst/>
-          </a:prstGeom>
-          <a:noFill/>
-          <a:ln/>
-        </p:spPr>
-        <p:txBody>
-          <a:bodyPr wrap="square" rtlCol="0" anchor="ctr"/>
-          <a:lstStyle/>
-          <a:p>
-            <a:pPr indent="0" marL="0">
-              <a:buNone/>
-            </a:pPr>
-            <a:r>
-              <a:rPr lang="en-US" sz="1400" b="1" dirty="0">
-                <a:solidFill>
-                  <a:srgbClr val="1B1F3B"/>
-                </a:solidFill>
-                <a:latin typeface="Segoe UI" pitchFamily="34" charset="0"/>
-                <a:ea typeface="Segoe UI" pitchFamily="34" charset="-122"/>
-                <a:cs typeface="Segoe UI" pitchFamily="34" charset="-120"/>
-              </a:rPr>
-              <a:t>Portail client équipé d'une vraie session</a:t>
-            </a:r>
-            <a:endParaRPr lang="en-US" sz="1400" dirty="0"/>
-          </a:p>
-        </p:txBody>
-      </p:sp>
-      <p:sp>
-        <p:nvSpPr>
-          <p:cNvPr id="16" name="Text 14"/>
-          <p:cNvSpPr/>
-          <p:nvPr/>
-        </p:nvSpPr>
-        <p:spPr>
-          <a:xfrm>
-            <a:off x="914400" y="4617720"/>
-            <a:ext cx="10332720" cy="594360"/>
-          </a:xfrm>
-          <a:prstGeom prst="rect">
-            <a:avLst/>
-          </a:prstGeom>
-          <a:noFill/>
-          <a:ln/>
-        </p:spPr>
-        <p:txBody>
-          <a:bodyPr wrap="square" rtlCol="0" anchor="ctr"/>
-          <a:lstStyle/>
-          <a:p>
-            <a:pPr indent="0" marL="0">
-              <a:lnSpc>
-                <a:spcPts val="1400"/>
-              </a:lnSpc>
-              <a:buNone/>
-            </a:pPr>
-            <a:r>
-              <a:rPr lang="en-US" sz="1100" dirty="0">
-                <a:solidFill>
-                  <a:srgbClr val="8A7C68"/>
-                </a:solidFill>
-                <a:latin typeface="Segoe UI" pitchFamily="34" charset="0"/>
-                <a:ea typeface="Segoe UI" pitchFamily="34" charset="-122"/>
-                <a:cs typeface="Segoe UI" pitchFamily="34" charset="-120"/>
-              </a:rPr>
-              <a:t>L'espace client particulier n'avait aucune session vérifiable : ses informations (dont le mot de passe de signature) pouvaient être lues à partir du simple email d'un client, sans mot de passe. Un jeton de connexion signé a été ajouté, vérifié sur chaque page du portail client.</a:t>
-            </a:r>
-            <a:endParaRPr lang="en-US" sz="1100" dirty="0"/>
-          </a:p>
-        </p:txBody>
-      </p:sp>
-      <p:sp>
-        <p:nvSpPr>
-          <p:cNvPr id="17" name="Shape 15"/>
-          <p:cNvSpPr/>
-          <p:nvPr/>
-        </p:nvSpPr>
-        <p:spPr>
-          <a:xfrm>
-            <a:off x="640080" y="5394960"/>
-            <a:ext cx="10881360" cy="1097280"/>
-          </a:xfrm>
-          <a:prstGeom prst="roundRect">
-            <a:avLst>
-              <a:gd name="adj" fmla="val 5000"/>
-            </a:avLst>
-          </a:prstGeom>
-          <a:solidFill>
-            <a:srgbClr val="FFFFFF"/>
-          </a:solidFill>
-          <a:ln w="12700">
-            <a:solidFill>
-              <a:srgbClr val="E4DCCB"/>
-            </a:solidFill>
-            <a:prstDash val="solid"/>
-          </a:ln>
-        </p:spPr>
-      </p:sp>
-      <p:sp>
-        <p:nvSpPr>
-          <p:cNvPr id="18" name="Shape 16"/>
-          <p:cNvSpPr/>
-          <p:nvPr/>
-        </p:nvSpPr>
-        <p:spPr>
-          <a:xfrm>
-            <a:off x="640080" y="5394960"/>
-            <a:ext cx="54864" cy="1097280"/>
-          </a:xfrm>
-          <a:prstGeom prst="rect">
-            <a:avLst/>
-          </a:prstGeom>
-          <a:solidFill>
-            <a:srgbClr val="9A4C1F"/>
-          </a:solidFill>
-          <a:ln/>
-        </p:spPr>
-      </p:sp>
-      <p:sp>
-        <p:nvSpPr>
-          <p:cNvPr id="19" name="Text 17"/>
-          <p:cNvSpPr/>
-          <p:nvPr/>
-        </p:nvSpPr>
-        <p:spPr>
-          <a:xfrm>
-            <a:off x="914400" y="5504688"/>
-            <a:ext cx="10332720" cy="365760"/>
-          </a:xfrm>
-          <a:prstGeom prst="rect">
-            <a:avLst/>
-          </a:prstGeom>
-          <a:noFill/>
-          <a:ln/>
-        </p:spPr>
-        <p:txBody>
-          <a:bodyPr wrap="square" rtlCol="0" anchor="ctr"/>
-          <a:lstStyle/>
-          <a:p>
-            <a:pPr indent="0" marL="0">
-              <a:buNone/>
-            </a:pPr>
-            <a:r>
-              <a:rPr lang="en-US" sz="1400" b="1" dirty="0">
-                <a:solidFill>
-                  <a:srgbClr val="1B1F3B"/>
-                </a:solidFill>
-                <a:latin typeface="Segoe UI" pitchFamily="34" charset="0"/>
-                <a:ea typeface="Segoe UI" pitchFamily="34" charset="-122"/>
-                <a:cs typeface="Segoe UI" pitchFamily="34" charset="-120"/>
-              </a:rPr>
-              <a:t>Mots de passe du portail client chiffrés</a:t>
-            </a:r>
-            <a:endParaRPr lang="en-US" sz="1400" dirty="0"/>
-          </a:p>
-        </p:txBody>
-      </p:sp>
-      <p:sp>
-        <p:nvSpPr>
-          <p:cNvPr id="20" name="Text 18"/>
-          <p:cNvSpPr/>
-          <p:nvPr/>
-        </p:nvSpPr>
-        <p:spPr>
-          <a:xfrm>
-            <a:off x="914400" y="5852160"/>
-            <a:ext cx="10332720" cy="594360"/>
-          </a:xfrm>
-          <a:prstGeom prst="rect">
-            <a:avLst/>
-          </a:prstGeom>
-          <a:noFill/>
-          <a:ln/>
-        </p:spPr>
-        <p:txBody>
-          <a:bodyPr wrap="square" rtlCol="0" anchor="ctr"/>
-          <a:lstStyle/>
-          <a:p>
-            <a:pPr indent="0" marL="0">
-              <a:lnSpc>
-                <a:spcPts val="1400"/>
-              </a:lnSpc>
-              <a:buNone/>
-            </a:pPr>
-            <a:r>
-              <a:rPr lang="en-US" sz="1100" dirty="0">
-                <a:solidFill>
-                  <a:srgbClr val="8A7C68"/>
-                </a:solidFill>
-                <a:latin typeface="Segoe UI" pitchFamily="34" charset="0"/>
-                <a:ea typeface="Segoe UI" pitchFamily="34" charset="-122"/>
-                <a:cs typeface="Segoe UI" pitchFamily="34" charset="-120"/>
-              </a:rPr>
-              <a:t>Les mots de passe des comptes client particulier étaient stockés et comparés en texte lisible. Ils sont désormais chiffrés (hachage scrypt), avec migration automatique et transparente des comptes existants à la prochaine connexion.</a:t>
-            </a:r>
-            <a:endParaRPr lang="en-US" sz="1100" dirty="0"/>
-          </a:p>
-        </p:txBody>
-      </p:sp>
-      <p:sp>
-        <p:nvSpPr>
-          <p:cNvPr id="21" name="Text 19"/>
+          <p:cNvPr id="9" name="Text 7"/>
           <p:cNvSpPr/>
           <p:nvPr/>
         </p:nvSpPr>
@@ -17194,7 +17372,7 @@
       </p:sp>
       <p:sp>
         <p:nvSpPr>
-          <p:cNvPr id="22" name="Text 20"/>
+          <p:cNvPr id="10" name="Text 8"/>
           <p:cNvSpPr/>
           <p:nvPr/>
         </p:nvSpPr>
@@ -17357,7 +17535,7 @@
                 <a:ea typeface="Georgia" pitchFamily="34" charset="-122"/>
                 <a:cs typeface="Georgia" pitchFamily="34" charset="-120"/>
               </a:rPr>
-              <a:t>Sécurité (suite)</a:t>
+              <a:t>Sécurité</a:t>
             </a:r>
             <a:endParaRPr lang="en-US" sz="2400" dirty="0"/>
           </a:p>
@@ -17443,7 +17621,7 @@
                 <a:ea typeface="Segoe UI" pitchFamily="34" charset="-122"/>
                 <a:cs typeface="Segoe UI" pitchFamily="34" charset="-120"/>
               </a:rPr>
-              <a:t>Portail ouvrier équipé d'une vraie session</a:t>
+              <a:t>Audit de sécurité complet et correction des failles trouvées</a:t>
             </a:r>
             <a:endParaRPr lang="en-US" sz="1400" dirty="0"/>
           </a:p>
@@ -17485,7 +17663,7 @@
                 <a:ea typeface="Segoe UI" pitchFamily="34" charset="-122"/>
                 <a:cs typeface="Segoe UI" pitchFamily="34" charset="-120"/>
               </a:rPr>
-              <a:t>Comme pour le portail client, l'espace ouvrier n'avait aucune session vérifiable après la connexion : ses tâches, heures et taux horaire étaient accessibles à quiconque connaissait son identifiant. Un jeton de connexion signé a été ajouté.</a:t>
+              <a:t>Audit approfondi ayant confirmé 6 failles actives : fuite de données entre entreprises, base de données lisible sans connexion, portail client sans authentification, mots de passe en clair, base de données versionnée dans Git, absence de vérification centralisée. Corrigées le jour même (détail ci-dessous).</a:t>
             </a:r>
             <a:endParaRPr lang="en-US" sz="1100" dirty="0"/>
           </a:p>
@@ -17571,7 +17749,7 @@
                 <a:ea typeface="Segoe UI" pitchFamily="34" charset="-122"/>
                 <a:cs typeface="Segoe UI" pitchFamily="34" charset="-120"/>
               </a:rPr>
-              <a:t>Fuite de messages et mots de passe provisoires par email/SMS</a:t>
+              <a:t>Fuite de données entre entreprises corrigée</a:t>
             </a:r>
             <a:endParaRPr lang="en-US" sz="1400" dirty="0"/>
           </a:p>
@@ -17613,7 +17791,7 @@
                 <a:ea typeface="Segoe UI" pitchFamily="34" charset="-122"/>
                 <a:cs typeface="Segoe UI" pitchFamily="34" charset="-120"/>
               </a:rPr>
-              <a:t>Une route technique renvoyait tous les emails et SMS envoyés par l'application, tous chantiers et toutes entreprises confondus (dont des mots de passe provisoires en clair), dès qu'elle était appelée sans préciser de chantier. Corrigée : un chantier précis est désormais obligatoire, et seuls l'entreprise concernée ou son client peuvent consulter ses messages.</a:t>
+              <a:t>Une trentaine de routes (clients, devis, factures, tâches, ouvriers...) faisaient confiance à un identifiant envoyé par le navigateur pour savoir quelles données afficher, sans vérifier qu'il correspondait à la session connectée : n'importe qui pouvait lire ou modifier les données d'une autre entreprise en changeant cet identifiant. Ces routes vérifient désormais la vraie session avant de répondre.</a:t>
             </a:r>
             <a:endParaRPr lang="en-US" sz="1100" dirty="0"/>
           </a:p>
@@ -17699,7 +17877,7 @@
                 <a:ea typeface="Segoe UI" pitchFamily="34" charset="-122"/>
                 <a:cs typeface="Segoe UI" pitchFamily="34" charset="-120"/>
               </a:rPr>
-              <a:t>Import de fourniture par lien sécurisé</a:t>
+              <a:t>Portail client équipé d'une vraie session</a:t>
             </a:r>
             <a:endParaRPr lang="en-US" sz="1400" dirty="0"/>
           </a:p>
@@ -17741,7 +17919,7 @@
                 <a:ea typeface="Segoe UI" pitchFamily="34" charset="-122"/>
                 <a:cs typeface="Segoe UI" pitchFamily="34" charset="-120"/>
               </a:rPr>
-              <a:t>L'outil qui récupère automatiquement les informations d'un produit à partir d'un lien pouvait être utilisé par n'importe qui, sans connexion, pour faire aller le serveur chercher n'importe quelle adresse — un risque d'abus classique. Restreint aux utilisateurs connectés et aux liens web valides uniquement.</a:t>
+              <a:t>L'espace client particulier n'avait aucune session vérifiable : ses informations (dont le mot de passe de signature) pouvaient être lues à partir du simple email d'un client, sans mot de passe. Un jeton de connexion signé a été ajouté, vérifié sur chaque page du portail client.</a:t>
             </a:r>
             <a:endParaRPr lang="en-US" sz="1100" dirty="0"/>
           </a:p>
@@ -17827,7 +18005,7 @@
                 <a:ea typeface="Segoe UI" pitchFamily="34" charset="-122"/>
                 <a:cs typeface="Segoe UI" pitchFamily="34" charset="-120"/>
               </a:rPr>
-              <a:t>Les 3 sessions (entreprise, client, ouvrier) déplacées hors de portée du navigateur</a:t>
+              <a:t>Mots de passe du portail client chiffrés</a:t>
             </a:r>
             <a:endParaRPr lang="en-US" sz="1400" dirty="0"/>
           </a:p>
@@ -17869,7 +18047,7 @@
                 <a:ea typeface="Segoe UI" pitchFamily="34" charset="-122"/>
                 <a:cs typeface="Segoe UI" pitchFamily="34" charset="-120"/>
               </a:rPr>
-              <a:t>Les jetons de connexion vivaient dans le stockage local du navigateur, lisible par le moindre script exécuté sur la page (faille XSS, extension malveillante) — une seule faille de ce type ailleurs dans l'appli aurait suffi à voler une session active. Déplacés vers des cookies HttpOnly, invisibles et inaccessibles au code JavaScript de la page, pour les trois types de compte.</a:t>
+              <a:t>Les mots de passe des comptes client particulier étaient stockés et comparés en texte lisible. Ils sont désormais chiffrés (hachage scrypt), avec migration automatique et transparente des comptes existants à la prochaine connexion.</a:t>
             </a:r>
             <a:endParaRPr lang="en-US" sz="1100" dirty="0"/>
           </a:p>
@@ -18165,7 +18343,7 @@
                 <a:ea typeface="Segoe UI" pitchFamily="34" charset="-122"/>
                 <a:cs typeface="Segoe UI" pitchFamily="34" charset="-120"/>
               </a:rPr>
-              <a:t>Mot de passe de connexion signature chiffré</a:t>
+              <a:t>Portail ouvrier équipé d'une vraie session</a:t>
             </a:r>
             <a:endParaRPr lang="en-US" sz="1400" dirty="0"/>
           </a:p>
@@ -18207,7 +18385,7 @@
                 <a:ea typeface="Segoe UI" pitchFamily="34" charset="-122"/>
                 <a:cs typeface="Segoe UI" pitchFamily="34" charset="-120"/>
               </a:rPr>
-              <a:t>Le mot de passe provisoire envoyé au client pour signer son devis était comparé et stocké en texte lisible. Chiffré (hachage scrypt) comme le reste ; le mot de passe en clair n'est plus jamais écrit en base, seulement affiché une fois au moment de l'envoi.</a:t>
+              <a:t>Comme pour le portail client, l'espace ouvrier n'avait aucune session vérifiable après la connexion : ses tâches, heures et taux horaire étaient accessibles à quiconque connaissait son identifiant. Un jeton de connexion signé a été ajouté.</a:t>
             </a:r>
             <a:endParaRPr lang="en-US" sz="1100" dirty="0"/>
           </a:p>
@@ -18215,7 +18393,391 @@
       </p:sp>
       <p:sp>
         <p:nvSpPr>
-          <p:cNvPr id="9" name="Text 7"/>
+          <p:cNvPr id="9" name="Shape 7"/>
+          <p:cNvSpPr/>
+          <p:nvPr/>
+        </p:nvSpPr>
+        <p:spPr>
+          <a:xfrm>
+            <a:off x="640080" y="2926080"/>
+            <a:ext cx="10881360" cy="1097280"/>
+          </a:xfrm>
+          <a:prstGeom prst="roundRect">
+            <a:avLst>
+              <a:gd name="adj" fmla="val 5000"/>
+            </a:avLst>
+          </a:prstGeom>
+          <a:solidFill>
+            <a:srgbClr val="FFFFFF"/>
+          </a:solidFill>
+          <a:ln w="12700">
+            <a:solidFill>
+              <a:srgbClr val="E4DCCB"/>
+            </a:solidFill>
+            <a:prstDash val="solid"/>
+          </a:ln>
+        </p:spPr>
+      </p:sp>
+      <p:sp>
+        <p:nvSpPr>
+          <p:cNvPr id="10" name="Shape 8"/>
+          <p:cNvSpPr/>
+          <p:nvPr/>
+        </p:nvSpPr>
+        <p:spPr>
+          <a:xfrm>
+            <a:off x="640080" y="2926080"/>
+            <a:ext cx="54864" cy="1097280"/>
+          </a:xfrm>
+          <a:prstGeom prst="rect">
+            <a:avLst/>
+          </a:prstGeom>
+          <a:solidFill>
+            <a:srgbClr val="9A4C1F"/>
+          </a:solidFill>
+          <a:ln/>
+        </p:spPr>
+      </p:sp>
+      <p:sp>
+        <p:nvSpPr>
+          <p:cNvPr id="11" name="Text 9"/>
+          <p:cNvSpPr/>
+          <p:nvPr/>
+        </p:nvSpPr>
+        <p:spPr>
+          <a:xfrm>
+            <a:off x="914400" y="3035808"/>
+            <a:ext cx="10332720" cy="365760"/>
+          </a:xfrm>
+          <a:prstGeom prst="rect">
+            <a:avLst/>
+          </a:prstGeom>
+          <a:noFill/>
+          <a:ln/>
+        </p:spPr>
+        <p:txBody>
+          <a:bodyPr wrap="square" rtlCol="0" anchor="ctr"/>
+          <a:lstStyle/>
+          <a:p>
+            <a:pPr indent="0" marL="0">
+              <a:buNone/>
+            </a:pPr>
+            <a:r>
+              <a:rPr lang="en-US" sz="1400" b="1" dirty="0">
+                <a:solidFill>
+                  <a:srgbClr val="1B1F3B"/>
+                </a:solidFill>
+                <a:latin typeface="Segoe UI" pitchFamily="34" charset="0"/>
+                <a:ea typeface="Segoe UI" pitchFamily="34" charset="-122"/>
+                <a:cs typeface="Segoe UI" pitchFamily="34" charset="-120"/>
+              </a:rPr>
+              <a:t>Fuite de messages et mots de passe provisoires par email/SMS</a:t>
+            </a:r>
+            <a:endParaRPr lang="en-US" sz="1400" dirty="0"/>
+          </a:p>
+        </p:txBody>
+      </p:sp>
+      <p:sp>
+        <p:nvSpPr>
+          <p:cNvPr id="12" name="Text 10"/>
+          <p:cNvSpPr/>
+          <p:nvPr/>
+        </p:nvSpPr>
+        <p:spPr>
+          <a:xfrm>
+            <a:off x="914400" y="3383280"/>
+            <a:ext cx="10332720" cy="594360"/>
+          </a:xfrm>
+          <a:prstGeom prst="rect">
+            <a:avLst/>
+          </a:prstGeom>
+          <a:noFill/>
+          <a:ln/>
+        </p:spPr>
+        <p:txBody>
+          <a:bodyPr wrap="square" rtlCol="0" anchor="ctr"/>
+          <a:lstStyle/>
+          <a:p>
+            <a:pPr indent="0" marL="0">
+              <a:lnSpc>
+                <a:spcPts val="1400"/>
+              </a:lnSpc>
+              <a:buNone/>
+            </a:pPr>
+            <a:r>
+              <a:rPr lang="en-US" sz="1100" dirty="0">
+                <a:solidFill>
+                  <a:srgbClr val="8A7C68"/>
+                </a:solidFill>
+                <a:latin typeface="Segoe UI" pitchFamily="34" charset="0"/>
+                <a:ea typeface="Segoe UI" pitchFamily="34" charset="-122"/>
+                <a:cs typeface="Segoe UI" pitchFamily="34" charset="-120"/>
+              </a:rPr>
+              <a:t>Une route technique renvoyait tous les emails et SMS envoyés par l'application, tous chantiers et toutes entreprises confondus (dont des mots de passe provisoires en clair), dès qu'elle était appelée sans préciser de chantier. Corrigée : un chantier précis est désormais obligatoire, et seuls l'entreprise concernée ou son client peuvent consulter ses messages.</a:t>
+            </a:r>
+            <a:endParaRPr lang="en-US" sz="1100" dirty="0"/>
+          </a:p>
+        </p:txBody>
+      </p:sp>
+      <p:sp>
+        <p:nvSpPr>
+          <p:cNvPr id="13" name="Shape 11"/>
+          <p:cNvSpPr/>
+          <p:nvPr/>
+        </p:nvSpPr>
+        <p:spPr>
+          <a:xfrm>
+            <a:off x="640080" y="4160520"/>
+            <a:ext cx="10881360" cy="1097280"/>
+          </a:xfrm>
+          <a:prstGeom prst="roundRect">
+            <a:avLst>
+              <a:gd name="adj" fmla="val 5000"/>
+            </a:avLst>
+          </a:prstGeom>
+          <a:solidFill>
+            <a:srgbClr val="FFFFFF"/>
+          </a:solidFill>
+          <a:ln w="12700">
+            <a:solidFill>
+              <a:srgbClr val="E4DCCB"/>
+            </a:solidFill>
+            <a:prstDash val="solid"/>
+          </a:ln>
+        </p:spPr>
+      </p:sp>
+      <p:sp>
+        <p:nvSpPr>
+          <p:cNvPr id="14" name="Shape 12"/>
+          <p:cNvSpPr/>
+          <p:nvPr/>
+        </p:nvSpPr>
+        <p:spPr>
+          <a:xfrm>
+            <a:off x="640080" y="4160520"/>
+            <a:ext cx="54864" cy="1097280"/>
+          </a:xfrm>
+          <a:prstGeom prst="rect">
+            <a:avLst/>
+          </a:prstGeom>
+          <a:solidFill>
+            <a:srgbClr val="9A4C1F"/>
+          </a:solidFill>
+          <a:ln/>
+        </p:spPr>
+      </p:sp>
+      <p:sp>
+        <p:nvSpPr>
+          <p:cNvPr id="15" name="Text 13"/>
+          <p:cNvSpPr/>
+          <p:nvPr/>
+        </p:nvSpPr>
+        <p:spPr>
+          <a:xfrm>
+            <a:off x="914400" y="4270248"/>
+            <a:ext cx="10332720" cy="365760"/>
+          </a:xfrm>
+          <a:prstGeom prst="rect">
+            <a:avLst/>
+          </a:prstGeom>
+          <a:noFill/>
+          <a:ln/>
+        </p:spPr>
+        <p:txBody>
+          <a:bodyPr wrap="square" rtlCol="0" anchor="ctr"/>
+          <a:lstStyle/>
+          <a:p>
+            <a:pPr indent="0" marL="0">
+              <a:buNone/>
+            </a:pPr>
+            <a:r>
+              <a:rPr lang="en-US" sz="1400" b="1" dirty="0">
+                <a:solidFill>
+                  <a:srgbClr val="1B1F3B"/>
+                </a:solidFill>
+                <a:latin typeface="Segoe UI" pitchFamily="34" charset="0"/>
+                <a:ea typeface="Segoe UI" pitchFamily="34" charset="-122"/>
+                <a:cs typeface="Segoe UI" pitchFamily="34" charset="-120"/>
+              </a:rPr>
+              <a:t>Import de fourniture par lien sécurisé</a:t>
+            </a:r>
+            <a:endParaRPr lang="en-US" sz="1400" dirty="0"/>
+          </a:p>
+        </p:txBody>
+      </p:sp>
+      <p:sp>
+        <p:nvSpPr>
+          <p:cNvPr id="16" name="Text 14"/>
+          <p:cNvSpPr/>
+          <p:nvPr/>
+        </p:nvSpPr>
+        <p:spPr>
+          <a:xfrm>
+            <a:off x="914400" y="4617720"/>
+            <a:ext cx="10332720" cy="594360"/>
+          </a:xfrm>
+          <a:prstGeom prst="rect">
+            <a:avLst/>
+          </a:prstGeom>
+          <a:noFill/>
+          <a:ln/>
+        </p:spPr>
+        <p:txBody>
+          <a:bodyPr wrap="square" rtlCol="0" anchor="ctr"/>
+          <a:lstStyle/>
+          <a:p>
+            <a:pPr indent="0" marL="0">
+              <a:lnSpc>
+                <a:spcPts val="1400"/>
+              </a:lnSpc>
+              <a:buNone/>
+            </a:pPr>
+            <a:r>
+              <a:rPr lang="en-US" sz="1100" dirty="0">
+                <a:solidFill>
+                  <a:srgbClr val="8A7C68"/>
+                </a:solidFill>
+                <a:latin typeface="Segoe UI" pitchFamily="34" charset="0"/>
+                <a:ea typeface="Segoe UI" pitchFamily="34" charset="-122"/>
+                <a:cs typeface="Segoe UI" pitchFamily="34" charset="-120"/>
+              </a:rPr>
+              <a:t>L'outil qui récupère automatiquement les informations d'un produit à partir d'un lien pouvait être utilisé par n'importe qui, sans connexion, pour faire aller le serveur chercher n'importe quelle adresse — un risque d'abus classique. Restreint aux utilisateurs connectés et aux liens web valides uniquement.</a:t>
+            </a:r>
+            <a:endParaRPr lang="en-US" sz="1100" dirty="0"/>
+          </a:p>
+        </p:txBody>
+      </p:sp>
+      <p:sp>
+        <p:nvSpPr>
+          <p:cNvPr id="17" name="Shape 15"/>
+          <p:cNvSpPr/>
+          <p:nvPr/>
+        </p:nvSpPr>
+        <p:spPr>
+          <a:xfrm>
+            <a:off x="640080" y="5394960"/>
+            <a:ext cx="10881360" cy="1097280"/>
+          </a:xfrm>
+          <a:prstGeom prst="roundRect">
+            <a:avLst>
+              <a:gd name="adj" fmla="val 5000"/>
+            </a:avLst>
+          </a:prstGeom>
+          <a:solidFill>
+            <a:srgbClr val="FFFFFF"/>
+          </a:solidFill>
+          <a:ln w="12700">
+            <a:solidFill>
+              <a:srgbClr val="E4DCCB"/>
+            </a:solidFill>
+            <a:prstDash val="solid"/>
+          </a:ln>
+        </p:spPr>
+      </p:sp>
+      <p:sp>
+        <p:nvSpPr>
+          <p:cNvPr id="18" name="Shape 16"/>
+          <p:cNvSpPr/>
+          <p:nvPr/>
+        </p:nvSpPr>
+        <p:spPr>
+          <a:xfrm>
+            <a:off x="640080" y="5394960"/>
+            <a:ext cx="54864" cy="1097280"/>
+          </a:xfrm>
+          <a:prstGeom prst="rect">
+            <a:avLst/>
+          </a:prstGeom>
+          <a:solidFill>
+            <a:srgbClr val="9A4C1F"/>
+          </a:solidFill>
+          <a:ln/>
+        </p:spPr>
+      </p:sp>
+      <p:sp>
+        <p:nvSpPr>
+          <p:cNvPr id="19" name="Text 17"/>
+          <p:cNvSpPr/>
+          <p:nvPr/>
+        </p:nvSpPr>
+        <p:spPr>
+          <a:xfrm>
+            <a:off x="914400" y="5504688"/>
+            <a:ext cx="10332720" cy="365760"/>
+          </a:xfrm>
+          <a:prstGeom prst="rect">
+            <a:avLst/>
+          </a:prstGeom>
+          <a:noFill/>
+          <a:ln/>
+        </p:spPr>
+        <p:txBody>
+          <a:bodyPr wrap="square" rtlCol="0" anchor="ctr"/>
+          <a:lstStyle/>
+          <a:p>
+            <a:pPr indent="0" marL="0">
+              <a:buNone/>
+            </a:pPr>
+            <a:r>
+              <a:rPr lang="en-US" sz="1400" b="1" dirty="0">
+                <a:solidFill>
+                  <a:srgbClr val="1B1F3B"/>
+                </a:solidFill>
+                <a:latin typeface="Segoe UI" pitchFamily="34" charset="0"/>
+                <a:ea typeface="Segoe UI" pitchFamily="34" charset="-122"/>
+                <a:cs typeface="Segoe UI" pitchFamily="34" charset="-120"/>
+              </a:rPr>
+              <a:t>Les 3 sessions (entreprise, client, ouvrier) déplacées hors de portée du navigateur</a:t>
+            </a:r>
+            <a:endParaRPr lang="en-US" sz="1400" dirty="0"/>
+          </a:p>
+        </p:txBody>
+      </p:sp>
+      <p:sp>
+        <p:nvSpPr>
+          <p:cNvPr id="20" name="Text 18"/>
+          <p:cNvSpPr/>
+          <p:nvPr/>
+        </p:nvSpPr>
+        <p:spPr>
+          <a:xfrm>
+            <a:off x="914400" y="5852160"/>
+            <a:ext cx="10332720" cy="594360"/>
+          </a:xfrm>
+          <a:prstGeom prst="rect">
+            <a:avLst/>
+          </a:prstGeom>
+          <a:noFill/>
+          <a:ln/>
+        </p:spPr>
+        <p:txBody>
+          <a:bodyPr wrap="square" rtlCol="0" anchor="ctr"/>
+          <a:lstStyle/>
+          <a:p>
+            <a:pPr indent="0" marL="0">
+              <a:lnSpc>
+                <a:spcPts val="1400"/>
+              </a:lnSpc>
+              <a:buNone/>
+            </a:pPr>
+            <a:r>
+              <a:rPr lang="en-US" sz="1100" dirty="0">
+                <a:solidFill>
+                  <a:srgbClr val="8A7C68"/>
+                </a:solidFill>
+                <a:latin typeface="Segoe UI" pitchFamily="34" charset="0"/>
+                <a:ea typeface="Segoe UI" pitchFamily="34" charset="-122"/>
+                <a:cs typeface="Segoe UI" pitchFamily="34" charset="-120"/>
+              </a:rPr>
+              <a:t>Les jetons de connexion vivaient dans le stockage local du navigateur, lisible par le moindre script exécuté sur la page (faille XSS, extension malveillante) — une seule faille de ce type ailleurs dans l'appli aurait suffi à voler une session active. Déplacés vers des cookies HttpOnly, invisibles et inaccessibles au code JavaScript de la page, pour les trois types de compte.</a:t>
+            </a:r>
+            <a:endParaRPr lang="en-US" sz="1100" dirty="0"/>
+          </a:p>
+        </p:txBody>
+      </p:sp>
+      <p:sp>
+        <p:nvSpPr>
+          <p:cNvPr id="21" name="Text 19"/>
           <p:cNvSpPr/>
           <p:nvPr/>
         </p:nvSpPr>
@@ -18254,7 +18816,7 @@
       </p:sp>
       <p:sp>
         <p:nvSpPr>
-          <p:cNvPr id="10" name="Text 8"/>
+          <p:cNvPr id="22" name="Text 20"/>
           <p:cNvSpPr/>
           <p:nvPr/>
         </p:nvSpPr>
@@ -18305,7 +18867,7 @@
     <p:bg>
       <p:bgPr>
         <a:solidFill>
-          <a:srgbClr val="0B1030"/>
+          <a:srgbClr val="F3EEE3"/>
         </a:solidFill>
       </p:bgPr>
     </p:bg>
@@ -18331,14 +18893,16 @@
         </p:nvSpPr>
         <p:spPr>
           <a:xfrm>
-            <a:off x="0" y="3246120"/>
-            <a:ext cx="12191695" cy="54864"/>
-          </a:xfrm>
-          <a:prstGeom prst="rect">
-            <a:avLst/>
+            <a:off x="640080" y="411480"/>
+            <a:ext cx="2377440" cy="365760"/>
+          </a:xfrm>
+          <a:prstGeom prst="roundRect">
+            <a:avLst>
+              <a:gd name="adj" fmla="val 50000"/>
+            </a:avLst>
           </a:prstGeom>
           <a:solidFill>
-            <a:srgbClr val="386641"/>
+            <a:srgbClr val="F5E6DA"/>
           </a:solidFill>
           <a:ln/>
         </p:spPr>
@@ -18351,118 +18915,207 @@
         </p:nvSpPr>
         <p:spPr>
           <a:xfrm>
-            <a:off x="640080" y="2468880"/>
-            <a:ext cx="10058400" cy="914400"/>
-          </a:xfrm>
-          <a:prstGeom prst="rect">
-            <a:avLst/>
-          </a:prstGeom>
-          <a:noFill/>
-          <a:ln/>
-        </p:spPr>
-        <p:txBody>
-          <a:bodyPr wrap="square" rtlCol="0" anchor="ctr"/>
-          <a:lstStyle/>
-          <a:p>
-            <a:pPr indent="0" marL="0">
-              <a:buNone/>
-            </a:pPr>
-            <a:r>
-              <a:rPr lang="en-US" sz="3800" b="1" dirty="0">
-                <a:solidFill>
-                  <a:srgbClr val="FFFFFF"/>
+            <a:off x="640080" y="411480"/>
+            <a:ext cx="2377440" cy="365760"/>
+          </a:xfrm>
+          <a:prstGeom prst="rect">
+            <a:avLst/>
+          </a:prstGeom>
+          <a:noFill/>
+          <a:ln/>
+        </p:spPr>
+        <p:txBody>
+          <a:bodyPr wrap="square" rtlCol="0" anchor="ctr"/>
+          <a:lstStyle/>
+          <a:p>
+            <a:pPr algn="ctr" indent="0" marL="0">
+              <a:buNone/>
+            </a:pPr>
+            <a:r>
+              <a:rPr lang="en-US" sz="1000" b="1" spc="100" kern="0" dirty="0">
+                <a:solidFill>
+                  <a:srgbClr val="9A4C1F"/>
+                </a:solidFill>
+                <a:latin typeface="Segoe UI" pitchFamily="34" charset="0"/>
+                <a:ea typeface="Segoe UI" pitchFamily="34" charset="-122"/>
+                <a:cs typeface="Segoe UI" pitchFamily="34" charset="-120"/>
+              </a:rPr>
+              <a:t>BACKEND</a:t>
+            </a:r>
+            <a:endParaRPr lang="en-US" sz="1000" dirty="0"/>
+          </a:p>
+        </p:txBody>
+      </p:sp>
+      <p:sp>
+        <p:nvSpPr>
+          <p:cNvPr id="4" name="Text 2"/>
+          <p:cNvSpPr/>
+          <p:nvPr/>
+        </p:nvSpPr>
+        <p:spPr>
+          <a:xfrm>
+            <a:off x="640080" y="868680"/>
+            <a:ext cx="10515600" cy="548640"/>
+          </a:xfrm>
+          <a:prstGeom prst="rect">
+            <a:avLst/>
+          </a:prstGeom>
+          <a:noFill/>
+          <a:ln/>
+        </p:spPr>
+        <p:txBody>
+          <a:bodyPr wrap="square" rtlCol="0" anchor="ctr"/>
+          <a:lstStyle/>
+          <a:p>
+            <a:pPr indent="0" marL="0">
+              <a:buNone/>
+            </a:pPr>
+            <a:r>
+              <a:rPr lang="en-US" sz="2400" b="1" dirty="0">
+                <a:solidFill>
+                  <a:srgbClr val="1B1F3B"/>
                 </a:solidFill>
                 <a:latin typeface="Georgia" pitchFamily="34" charset="0"/>
                 <a:ea typeface="Georgia" pitchFamily="34" charset="-122"/>
                 <a:cs typeface="Georgia" pitchFamily="34" charset="-120"/>
               </a:rPr>
-              <a:t>Base de données</a:t>
-            </a:r>
-            <a:endParaRPr lang="en-US" sz="3800" dirty="0"/>
-          </a:p>
-        </p:txBody>
-      </p:sp>
-      <p:sp>
-        <p:nvSpPr>
-          <p:cNvPr id="4" name="Text 2"/>
-          <p:cNvSpPr/>
-          <p:nvPr/>
-        </p:nvSpPr>
-        <p:spPr>
-          <a:xfrm>
-            <a:off x="640080" y="3429000"/>
-            <a:ext cx="10058400" cy="457200"/>
-          </a:xfrm>
-          <a:prstGeom prst="rect">
-            <a:avLst/>
-          </a:prstGeom>
-          <a:noFill/>
-          <a:ln/>
-        </p:spPr>
-        <p:txBody>
-          <a:bodyPr wrap="square" rtlCol="0" anchor="ctr"/>
-          <a:lstStyle/>
-          <a:p>
-            <a:pPr indent="0" marL="0">
-              <a:buNone/>
-            </a:pPr>
-            <a:r>
-              <a:rPr lang="en-US" sz="1500" dirty="0">
-                <a:solidFill>
-                  <a:srgbClr val="C7C9E0"/>
-                </a:solidFill>
-                <a:latin typeface="Segoe UI" pitchFamily="34" charset="0"/>
-                <a:ea typeface="Segoe UI" pitchFamily="34" charset="-122"/>
-                <a:cs typeface="Segoe UI" pitchFamily="34" charset="-120"/>
-              </a:rPr>
-              <a:t>Modèle de données et infrastructure</a:t>
-            </a:r>
-            <a:endParaRPr lang="en-US" sz="1500" dirty="0"/>
-          </a:p>
-        </p:txBody>
-      </p:sp>
-      <p:sp>
-        <p:nvSpPr>
-          <p:cNvPr id="5" name="Text 3"/>
-          <p:cNvSpPr/>
-          <p:nvPr/>
-        </p:nvSpPr>
-        <p:spPr>
-          <a:xfrm>
-            <a:off x="640080" y="3931920"/>
-            <a:ext cx="5486400" cy="365760"/>
-          </a:xfrm>
-          <a:prstGeom prst="rect">
-            <a:avLst/>
-          </a:prstGeom>
-          <a:noFill/>
-          <a:ln/>
-        </p:spPr>
-        <p:txBody>
-          <a:bodyPr wrap="square" rtlCol="0" anchor="ctr"/>
-          <a:lstStyle/>
-          <a:p>
-            <a:pPr indent="0" marL="0">
-              <a:buNone/>
-            </a:pPr>
-            <a:r>
-              <a:rPr lang="en-US" sz="1200" b="1" dirty="0">
-                <a:solidFill>
-                  <a:srgbClr val="C9A96A"/>
-                </a:solidFill>
-                <a:latin typeface="Segoe UI" pitchFamily="34" charset="0"/>
-                <a:ea typeface="Segoe UI" pitchFamily="34" charset="-122"/>
-                <a:cs typeface="Segoe UI" pitchFamily="34" charset="-120"/>
-              </a:rPr>
-              <a:t>11 mise(s) à jour</a:t>
-            </a:r>
-            <a:endParaRPr lang="en-US" sz="1200" dirty="0"/>
-          </a:p>
-        </p:txBody>
-      </p:sp>
-      <p:sp>
-        <p:nvSpPr>
-          <p:cNvPr id="6" name="Text 4"/>
+              <a:t>Sécurité (suite)</a:t>
+            </a:r>
+            <a:endParaRPr lang="en-US" sz="2400" dirty="0"/>
+          </a:p>
+        </p:txBody>
+      </p:sp>
+      <p:sp>
+        <p:nvSpPr>
+          <p:cNvPr id="5" name="Shape 3"/>
+          <p:cNvSpPr/>
+          <p:nvPr/>
+        </p:nvSpPr>
+        <p:spPr>
+          <a:xfrm>
+            <a:off x="640080" y="1691640"/>
+            <a:ext cx="10881360" cy="1097280"/>
+          </a:xfrm>
+          <a:prstGeom prst="roundRect">
+            <a:avLst>
+              <a:gd name="adj" fmla="val 5000"/>
+            </a:avLst>
+          </a:prstGeom>
+          <a:solidFill>
+            <a:srgbClr val="FFFFFF"/>
+          </a:solidFill>
+          <a:ln w="12700">
+            <a:solidFill>
+              <a:srgbClr val="E4DCCB"/>
+            </a:solidFill>
+            <a:prstDash val="solid"/>
+          </a:ln>
+        </p:spPr>
+      </p:sp>
+      <p:sp>
+        <p:nvSpPr>
+          <p:cNvPr id="6" name="Shape 4"/>
+          <p:cNvSpPr/>
+          <p:nvPr/>
+        </p:nvSpPr>
+        <p:spPr>
+          <a:xfrm>
+            <a:off x="640080" y="1691640"/>
+            <a:ext cx="54864" cy="1097280"/>
+          </a:xfrm>
+          <a:prstGeom prst="rect">
+            <a:avLst/>
+          </a:prstGeom>
+          <a:solidFill>
+            <a:srgbClr val="9A4C1F"/>
+          </a:solidFill>
+          <a:ln/>
+        </p:spPr>
+      </p:sp>
+      <p:sp>
+        <p:nvSpPr>
+          <p:cNvPr id="7" name="Text 5"/>
+          <p:cNvSpPr/>
+          <p:nvPr/>
+        </p:nvSpPr>
+        <p:spPr>
+          <a:xfrm>
+            <a:off x="914400" y="1801368"/>
+            <a:ext cx="10332720" cy="365760"/>
+          </a:xfrm>
+          <a:prstGeom prst="rect">
+            <a:avLst/>
+          </a:prstGeom>
+          <a:noFill/>
+          <a:ln/>
+        </p:spPr>
+        <p:txBody>
+          <a:bodyPr wrap="square" rtlCol="0" anchor="ctr"/>
+          <a:lstStyle/>
+          <a:p>
+            <a:pPr indent="0" marL="0">
+              <a:buNone/>
+            </a:pPr>
+            <a:r>
+              <a:rPr lang="en-US" sz="1400" b="1" dirty="0">
+                <a:solidFill>
+                  <a:srgbClr val="1B1F3B"/>
+                </a:solidFill>
+                <a:latin typeface="Segoe UI" pitchFamily="34" charset="0"/>
+                <a:ea typeface="Segoe UI" pitchFamily="34" charset="-122"/>
+                <a:cs typeface="Segoe UI" pitchFamily="34" charset="-120"/>
+              </a:rPr>
+              <a:t>Mot de passe de connexion signature chiffré</a:t>
+            </a:r>
+            <a:endParaRPr lang="en-US" sz="1400" dirty="0"/>
+          </a:p>
+        </p:txBody>
+      </p:sp>
+      <p:sp>
+        <p:nvSpPr>
+          <p:cNvPr id="8" name="Text 6"/>
+          <p:cNvSpPr/>
+          <p:nvPr/>
+        </p:nvSpPr>
+        <p:spPr>
+          <a:xfrm>
+            <a:off x="914400" y="2148840"/>
+            <a:ext cx="10332720" cy="594360"/>
+          </a:xfrm>
+          <a:prstGeom prst="rect">
+            <a:avLst/>
+          </a:prstGeom>
+          <a:noFill/>
+          <a:ln/>
+        </p:spPr>
+        <p:txBody>
+          <a:bodyPr wrap="square" rtlCol="0" anchor="ctr"/>
+          <a:lstStyle/>
+          <a:p>
+            <a:pPr indent="0" marL="0">
+              <a:lnSpc>
+                <a:spcPts val="1400"/>
+              </a:lnSpc>
+              <a:buNone/>
+            </a:pPr>
+            <a:r>
+              <a:rPr lang="en-US" sz="1100" dirty="0">
+                <a:solidFill>
+                  <a:srgbClr val="8A7C68"/>
+                </a:solidFill>
+                <a:latin typeface="Segoe UI" pitchFamily="34" charset="0"/>
+                <a:ea typeface="Segoe UI" pitchFamily="34" charset="-122"/>
+                <a:cs typeface="Segoe UI" pitchFamily="34" charset="-120"/>
+              </a:rPr>
+              <a:t>Le mot de passe provisoire envoyé au client pour signer son devis était comparé et stocké en texte lisible. Chiffré (hachage scrypt) comme le reste ; le mot de passe en clair n'est plus jamais écrit en base, seulement affiché une fois au moment de l'envoi.</a:t>
+            </a:r>
+            <a:endParaRPr lang="en-US" sz="1100" dirty="0"/>
+          </a:p>
+        </p:txBody>
+      </p:sp>
+      <p:sp>
+        <p:nvSpPr>
+          <p:cNvPr id="9" name="Text 7"/>
           <p:cNvSpPr/>
           <p:nvPr/>
         </p:nvSpPr>
@@ -18501,7 +19154,7 @@
       </p:sp>
       <p:sp>
         <p:nvSpPr>
-          <p:cNvPr id="7" name="Text 5"/>
+          <p:cNvPr id="10" name="Text 8"/>
           <p:cNvSpPr/>
           <p:nvPr/>
         </p:nvSpPr>
@@ -18587,7 +19240,7 @@
             </a:avLst>
           </a:prstGeom>
           <a:solidFill>
-            <a:srgbClr val="E6EFE4"/>
+            <a:srgbClr val="F5E6DA"/>
           </a:solidFill>
           <a:ln/>
         </p:spPr>
@@ -18619,13 +19272,13 @@
             <a:r>
               <a:rPr lang="en-US" sz="1000" b="1" spc="100" kern="0" dirty="0">
                 <a:solidFill>
-                  <a:srgbClr val="386641"/>
-                </a:solidFill>
-                <a:latin typeface="Segoe UI" pitchFamily="34" charset="0"/>
-                <a:ea typeface="Segoe UI" pitchFamily="34" charset="-122"/>
-                <a:cs typeface="Segoe UI" pitchFamily="34" charset="-120"/>
-              </a:rPr>
-              <a:t>BASE DE DONNÉES</a:t>
+                  <a:srgbClr val="9A4C1F"/>
+                </a:solidFill>
+                <a:latin typeface="Segoe UI" pitchFamily="34" charset="0"/>
+                <a:ea typeface="Segoe UI" pitchFamily="34" charset="-122"/>
+                <a:cs typeface="Segoe UI" pitchFamily="34" charset="-120"/>
+              </a:rPr>
+              <a:t>BACKEND</a:t>
             </a:r>
             <a:endParaRPr lang="en-US" sz="1000" dirty="0"/>
           </a:p>
@@ -18664,7 +19317,7 @@
                 <a:ea typeface="Georgia" pitchFamily="34" charset="-122"/>
                 <a:cs typeface="Georgia" pitchFamily="34" charset="-120"/>
               </a:rPr>
-              <a:t>Fondations</a:t>
+              <a:t>Profil</a:t>
             </a:r>
             <a:endParaRPr lang="en-US" sz="2400" dirty="0"/>
           </a:p>
@@ -18712,7 +19365,7 @@
             <a:avLst/>
           </a:prstGeom>
           <a:solidFill>
-            <a:srgbClr val="386641"/>
+            <a:srgbClr val="9A4C1F"/>
           </a:solidFill>
           <a:ln/>
         </p:spPr>
@@ -18750,7 +19403,7 @@
                 <a:ea typeface="Segoe UI" pitchFamily="34" charset="-122"/>
                 <a:cs typeface="Segoe UI" pitchFamily="34" charset="-120"/>
               </a:rPr>
-              <a:t>Connexion Vercel / configuration environnement</a:t>
+              <a:t>Vraie icône téléphone sur la carte de visite</a:t>
             </a:r>
             <a:endParaRPr lang="en-US" sz="1400" dirty="0"/>
           </a:p>
@@ -18792,7 +19445,7 @@
                 <a:ea typeface="Segoe UI" pitchFamily="34" charset="-122"/>
                 <a:cs typeface="Segoe UI" pitchFamily="34" charset="-120"/>
               </a:rPr>
-              <a:t>Correction de la configuration d'authentification et du SMTP sur l'environnement de production Vercel.</a:t>
+              <a:t>Les deux premières tentatives (traits abstraits) ne ressemblaient pas à un téléphone. Le moteur de génération PDF du projet a été étendu pour dessiner de vraies icônes vectorielles (courbes et arcs SVG, pas seulement des rectangles et traits droits) — utilisé pour reproduire l'icône téléphone standard, et réutilisable pour toute icône future de ce type.</a:t>
             </a:r>
             <a:endParaRPr lang="en-US" sz="1100" dirty="0"/>
           </a:p>
@@ -18890,7 +19543,7 @@
     <p:bg>
       <p:bgPr>
         <a:solidFill>
-          <a:srgbClr val="F3EEE3"/>
+          <a:srgbClr val="0B1030"/>
         </a:solidFill>
       </p:bgPr>
     </p:bg>
@@ -18916,16 +19569,14 @@
         </p:nvSpPr>
         <p:spPr>
           <a:xfrm>
-            <a:off x="640080" y="411480"/>
-            <a:ext cx="2377440" cy="365760"/>
-          </a:xfrm>
-          <a:prstGeom prst="roundRect">
-            <a:avLst>
-              <a:gd name="adj" fmla="val 50000"/>
-            </a:avLst>
+            <a:off x="0" y="3246120"/>
+            <a:ext cx="12191695" cy="54864"/>
+          </a:xfrm>
+          <a:prstGeom prst="rect">
+            <a:avLst/>
           </a:prstGeom>
           <a:solidFill>
-            <a:srgbClr val="E6EFE4"/>
+            <a:srgbClr val="386641"/>
           </a:solidFill>
           <a:ln/>
         </p:spPr>
@@ -18938,207 +19589,118 @@
         </p:nvSpPr>
         <p:spPr>
           <a:xfrm>
-            <a:off x="640080" y="411480"/>
-            <a:ext cx="2377440" cy="365760"/>
-          </a:xfrm>
-          <a:prstGeom prst="rect">
-            <a:avLst/>
-          </a:prstGeom>
-          <a:noFill/>
-          <a:ln/>
-        </p:spPr>
-        <p:txBody>
-          <a:bodyPr wrap="square" rtlCol="0" anchor="ctr"/>
-          <a:lstStyle/>
-          <a:p>
-            <a:pPr algn="ctr" indent="0" marL="0">
-              <a:buNone/>
-            </a:pPr>
-            <a:r>
-              <a:rPr lang="en-US" sz="1000" b="1" spc="100" kern="0" dirty="0">
-                <a:solidFill>
-                  <a:srgbClr val="386641"/>
-                </a:solidFill>
-                <a:latin typeface="Segoe UI" pitchFamily="34" charset="0"/>
-                <a:ea typeface="Segoe UI" pitchFamily="34" charset="-122"/>
-                <a:cs typeface="Segoe UI" pitchFamily="34" charset="-120"/>
-              </a:rPr>
-              <a:t>BASE DE DONNÉES</a:t>
-            </a:r>
-            <a:endParaRPr lang="en-US" sz="1000" dirty="0"/>
-          </a:p>
-        </p:txBody>
-      </p:sp>
-      <p:sp>
-        <p:nvSpPr>
-          <p:cNvPr id="4" name="Text 2"/>
-          <p:cNvSpPr/>
-          <p:nvPr/>
-        </p:nvSpPr>
-        <p:spPr>
-          <a:xfrm>
-            <a:off x="640080" y="868680"/>
-            <a:ext cx="10515600" cy="548640"/>
-          </a:xfrm>
-          <a:prstGeom prst="rect">
-            <a:avLst/>
-          </a:prstGeom>
-          <a:noFill/>
-          <a:ln/>
-        </p:spPr>
-        <p:txBody>
-          <a:bodyPr wrap="square" rtlCol="0" anchor="ctr"/>
-          <a:lstStyle/>
-          <a:p>
-            <a:pPr indent="0" marL="0">
-              <a:buNone/>
-            </a:pPr>
-            <a:r>
-              <a:rPr lang="en-US" sz="2400" b="1" dirty="0">
-                <a:solidFill>
-                  <a:srgbClr val="1B1F3B"/>
+            <a:off x="640080" y="2468880"/>
+            <a:ext cx="10058400" cy="914400"/>
+          </a:xfrm>
+          <a:prstGeom prst="rect">
+            <a:avLst/>
+          </a:prstGeom>
+          <a:noFill/>
+          <a:ln/>
+        </p:spPr>
+        <p:txBody>
+          <a:bodyPr wrap="square" rtlCol="0" anchor="ctr"/>
+          <a:lstStyle/>
+          <a:p>
+            <a:pPr indent="0" marL="0">
+              <a:buNone/>
+            </a:pPr>
+            <a:r>
+              <a:rPr lang="en-US" sz="3800" b="1" dirty="0">
+                <a:solidFill>
+                  <a:srgbClr val="FFFFFF"/>
                 </a:solidFill>
                 <a:latin typeface="Georgia" pitchFamily="34" charset="0"/>
                 <a:ea typeface="Georgia" pitchFamily="34" charset="-122"/>
                 <a:cs typeface="Georgia" pitchFamily="34" charset="-120"/>
               </a:rPr>
-              <a:t>Devis</a:t>
-            </a:r>
-            <a:endParaRPr lang="en-US" sz="2400" dirty="0"/>
-          </a:p>
-        </p:txBody>
-      </p:sp>
-      <p:sp>
-        <p:nvSpPr>
-          <p:cNvPr id="5" name="Shape 3"/>
-          <p:cNvSpPr/>
-          <p:nvPr/>
-        </p:nvSpPr>
-        <p:spPr>
-          <a:xfrm>
-            <a:off x="640080" y="1691640"/>
-            <a:ext cx="10881360" cy="1097280"/>
-          </a:xfrm>
-          <a:prstGeom prst="roundRect">
-            <a:avLst>
-              <a:gd name="adj" fmla="val 5000"/>
-            </a:avLst>
-          </a:prstGeom>
-          <a:solidFill>
-            <a:srgbClr val="FFFFFF"/>
-          </a:solidFill>
-          <a:ln w="12700">
-            <a:solidFill>
-              <a:srgbClr val="E4DCCB"/>
-            </a:solidFill>
-            <a:prstDash val="solid"/>
-          </a:ln>
-        </p:spPr>
-      </p:sp>
-      <p:sp>
-        <p:nvSpPr>
-          <p:cNvPr id="6" name="Shape 4"/>
-          <p:cNvSpPr/>
-          <p:nvPr/>
-        </p:nvSpPr>
-        <p:spPr>
-          <a:xfrm>
-            <a:off x="640080" y="1691640"/>
-            <a:ext cx="54864" cy="1097280"/>
-          </a:xfrm>
-          <a:prstGeom prst="rect">
-            <a:avLst/>
-          </a:prstGeom>
-          <a:solidFill>
-            <a:srgbClr val="386641"/>
-          </a:solidFill>
-          <a:ln/>
-        </p:spPr>
-      </p:sp>
-      <p:sp>
-        <p:nvSpPr>
-          <p:cNvPr id="7" name="Text 5"/>
-          <p:cNvSpPr/>
-          <p:nvPr/>
-        </p:nvSpPr>
-        <p:spPr>
-          <a:xfrm>
-            <a:off x="914400" y="1801368"/>
-            <a:ext cx="10332720" cy="365760"/>
-          </a:xfrm>
-          <a:prstGeom prst="rect">
-            <a:avLst/>
-          </a:prstGeom>
-          <a:noFill/>
-          <a:ln/>
-        </p:spPr>
-        <p:txBody>
-          <a:bodyPr wrap="square" rtlCol="0" anchor="ctr"/>
-          <a:lstStyle/>
-          <a:p>
-            <a:pPr indent="0" marL="0">
-              <a:buNone/>
-            </a:pPr>
-            <a:r>
-              <a:rPr lang="en-US" sz="1400" b="1" dirty="0">
-                <a:solidFill>
-                  <a:srgbClr val="1B1F3B"/>
-                </a:solidFill>
-                <a:latin typeface="Segoe UI" pitchFamily="34" charset="0"/>
-                <a:ea typeface="Segoe UI" pitchFamily="34" charset="-122"/>
-                <a:cs typeface="Segoe UI" pitchFamily="34" charset="-120"/>
-              </a:rPr>
-              <a:t>Migration des devis vers Supabase (table partagée)</a:t>
-            </a:r>
-            <a:endParaRPr lang="en-US" sz="1400" dirty="0"/>
-          </a:p>
-        </p:txBody>
-      </p:sp>
-      <p:sp>
-        <p:nvSpPr>
-          <p:cNvPr id="8" name="Text 6"/>
-          <p:cNvSpPr/>
-          <p:nvPr/>
-        </p:nvSpPr>
-        <p:spPr>
-          <a:xfrm>
-            <a:off x="914400" y="2148840"/>
-            <a:ext cx="10332720" cy="594360"/>
-          </a:xfrm>
-          <a:prstGeom prst="rect">
-            <a:avLst/>
-          </a:prstGeom>
-          <a:noFill/>
-          <a:ln/>
-        </p:spPr>
-        <p:txBody>
-          <a:bodyPr wrap="square" rtlCol="0" anchor="ctr"/>
-          <a:lstStyle/>
-          <a:p>
-            <a:pPr indent="0" marL="0">
-              <a:lnSpc>
-                <a:spcPts val="1400"/>
-              </a:lnSpc>
-              <a:buNone/>
-            </a:pPr>
-            <a:r>
-              <a:rPr lang="en-US" sz="1100" dirty="0">
-                <a:solidFill>
-                  <a:srgbClr val="8A7C68"/>
-                </a:solidFill>
-                <a:latin typeface="Segoe UI" pitchFamily="34" charset="0"/>
-                <a:ea typeface="Segoe UI" pitchFamily="34" charset="-122"/>
-                <a:cs typeface="Segoe UI" pitchFamily="34" charset="-120"/>
-              </a:rPr>
-              <a:t>Les devis créés sur le site web et sur l'application mobile (Firas) vivent désormais dans la même table Supabase 'quotes', avec un mapping bidirectionnel dédié (lib/quote-mapping.js).</a:t>
-            </a:r>
-            <a:endParaRPr lang="en-US" sz="1100" dirty="0"/>
-          </a:p>
-        </p:txBody>
-      </p:sp>
-      <p:sp>
-        <p:nvSpPr>
-          <p:cNvPr id="9" name="Text 7"/>
+              <a:t>Base de données</a:t>
+            </a:r>
+            <a:endParaRPr lang="en-US" sz="3800" dirty="0"/>
+          </a:p>
+        </p:txBody>
+      </p:sp>
+      <p:sp>
+        <p:nvSpPr>
+          <p:cNvPr id="4" name="Text 2"/>
+          <p:cNvSpPr/>
+          <p:nvPr/>
+        </p:nvSpPr>
+        <p:spPr>
+          <a:xfrm>
+            <a:off x="640080" y="3429000"/>
+            <a:ext cx="10058400" cy="457200"/>
+          </a:xfrm>
+          <a:prstGeom prst="rect">
+            <a:avLst/>
+          </a:prstGeom>
+          <a:noFill/>
+          <a:ln/>
+        </p:spPr>
+        <p:txBody>
+          <a:bodyPr wrap="square" rtlCol="0" anchor="ctr"/>
+          <a:lstStyle/>
+          <a:p>
+            <a:pPr indent="0" marL="0">
+              <a:buNone/>
+            </a:pPr>
+            <a:r>
+              <a:rPr lang="en-US" sz="1500" dirty="0">
+                <a:solidFill>
+                  <a:srgbClr val="C7C9E0"/>
+                </a:solidFill>
+                <a:latin typeface="Segoe UI" pitchFamily="34" charset="0"/>
+                <a:ea typeface="Segoe UI" pitchFamily="34" charset="-122"/>
+                <a:cs typeface="Segoe UI" pitchFamily="34" charset="-120"/>
+              </a:rPr>
+              <a:t>Modèle de données et infrastructure</a:t>
+            </a:r>
+            <a:endParaRPr lang="en-US" sz="1500" dirty="0"/>
+          </a:p>
+        </p:txBody>
+      </p:sp>
+      <p:sp>
+        <p:nvSpPr>
+          <p:cNvPr id="5" name="Text 3"/>
+          <p:cNvSpPr/>
+          <p:nvPr/>
+        </p:nvSpPr>
+        <p:spPr>
+          <a:xfrm>
+            <a:off x="640080" y="3931920"/>
+            <a:ext cx="5486400" cy="365760"/>
+          </a:xfrm>
+          <a:prstGeom prst="rect">
+            <a:avLst/>
+          </a:prstGeom>
+          <a:noFill/>
+          <a:ln/>
+        </p:spPr>
+        <p:txBody>
+          <a:bodyPr wrap="square" rtlCol="0" anchor="ctr"/>
+          <a:lstStyle/>
+          <a:p>
+            <a:pPr indent="0" marL="0">
+              <a:buNone/>
+            </a:pPr>
+            <a:r>
+              <a:rPr lang="en-US" sz="1200" b="1" dirty="0">
+                <a:solidFill>
+                  <a:srgbClr val="C9A96A"/>
+                </a:solidFill>
+                <a:latin typeface="Segoe UI" pitchFamily="34" charset="0"/>
+                <a:ea typeface="Segoe UI" pitchFamily="34" charset="-122"/>
+                <a:cs typeface="Segoe UI" pitchFamily="34" charset="-120"/>
+              </a:rPr>
+              <a:t>11 mise(s) à jour</a:t>
+            </a:r>
+            <a:endParaRPr lang="en-US" sz="1200" dirty="0"/>
+          </a:p>
+        </p:txBody>
+      </p:sp>
+      <p:sp>
+        <p:nvSpPr>
+          <p:cNvPr id="6" name="Text 4"/>
           <p:cNvSpPr/>
           <p:nvPr/>
         </p:nvSpPr>
@@ -19177,7 +19739,7 @@
       </p:sp>
       <p:sp>
         <p:nvSpPr>
-          <p:cNvPr id="10" name="Text 8"/>
+          <p:cNvPr id="7" name="Text 5"/>
           <p:cNvSpPr/>
           <p:nvPr/>
         </p:nvSpPr>
@@ -19340,7 +19902,7 @@
                 <a:ea typeface="Georgia" pitchFamily="34" charset="-122"/>
                 <a:cs typeface="Georgia" pitchFamily="34" charset="-120"/>
               </a:rPr>
-              <a:t>Chantiers</a:t>
+              <a:t>Fondations</a:t>
             </a:r>
             <a:endParaRPr lang="en-US" sz="2400" dirty="0"/>
           </a:p>
@@ -19426,7 +19988,7 @@
                 <a:ea typeface="Segoe UI" pitchFamily="34" charset="-122"/>
                 <a:cs typeface="Segoe UI" pitchFamily="34" charset="-120"/>
               </a:rPr>
-              <a:t>Connexion Supabase : chantiers, planning, fournitures</a:t>
+              <a:t>Connexion Vercel / configuration environnement</a:t>
             </a:r>
             <a:endParaRPr lang="en-US" sz="1400" dirty="0"/>
           </a:p>
@@ -19468,7 +20030,7 @@
                 <a:ea typeface="Segoe UI" pitchFamily="34" charset="-122"/>
                 <a:cs typeface="Segoe UI" pitchFamily="34" charset="-120"/>
               </a:rPr>
-              <a:t>Ces trois modules sont branchés sur la base partagée avec l'application mobile ; les comptes utilisateurs sont également partagés entre les deux plateformes.</a:t>
+              <a:t>Correction de la configuration d'authentification et du SMTP sur l'environnement de production Vercel.</a:t>
             </a:r>
             <a:endParaRPr lang="en-US" sz="1100" dirty="0"/>
           </a:p>
@@ -19678,7 +20240,7 @@
                 <a:ea typeface="Georgia" pitchFamily="34" charset="-122"/>
                 <a:cs typeface="Georgia" pitchFamily="34" charset="-120"/>
               </a:rPr>
-              <a:t>Équipe</a:t>
+              <a:t>Devis</a:t>
             </a:r>
             <a:endParaRPr lang="en-US" sz="2400" dirty="0"/>
           </a:p>
@@ -19764,7 +20326,7 @@
                 <a:ea typeface="Segoe UI" pitchFamily="34" charset="-122"/>
                 <a:cs typeface="Segoe UI" pitchFamily="34" charset="-120"/>
               </a:rPr>
-              <a:t>Nouvelle donnée : heures contractuelles par ouvrier</a:t>
+              <a:t>Migration des devis vers Supabase (table partagée)</a:t>
             </a:r>
             <a:endParaRPr lang="en-US" sz="1400" dirty="0"/>
           </a:p>
@@ -19806,7 +20368,7 @@
                 <a:ea typeface="Segoe UI" pitchFamily="34" charset="-122"/>
                 <a:cs typeface="Segoe UI" pitchFamily="34" charset="-120"/>
               </a:rPr>
-              <a:t>Ajout d'un paramètre 'heures contractuelles / semaine' (35h par défaut) sur chaque fiche ouvrier, utilisé pour le calcul des écarts.</a:t>
+              <a:t>Les devis créés sur le site web et sur l'application mobile (Firas) vivent désormais dans la même table Supabase 'quotes', avec un mapping bidirectionnel dédié (lib/quote-mapping.js).</a:t>
             </a:r>
             <a:endParaRPr lang="en-US" sz="1100" dirty="0"/>
           </a:p>
@@ -20016,7 +20578,7 @@
                 <a:ea typeface="Georgia" pitchFamily="34" charset="-122"/>
                 <a:cs typeface="Georgia" pitchFamily="34" charset="-120"/>
               </a:rPr>
-              <a:t>Accueil &amp; stabilité</a:t>
+              <a:t>Chantiers</a:t>
             </a:r>
             <a:endParaRPr lang="en-US" sz="2400" dirty="0"/>
           </a:p>
@@ -20102,7 +20664,7 @@
                 <a:ea typeface="Segoe UI" pitchFamily="34" charset="-122"/>
                 <a:cs typeface="Segoe UI" pitchFamily="34" charset="-120"/>
               </a:rPr>
-              <a:t>Nettoyage du backend</a:t>
+              <a:t>Connexion Supabase : chantiers, planning, fournitures</a:t>
             </a:r>
             <a:endParaRPr lang="en-US" sz="1400" dirty="0"/>
           </a:p>
@@ -20144,7 +20706,7 @@
                 <a:ea typeface="Segoe UI" pitchFamily="34" charset="-122"/>
                 <a:cs typeface="Segoe UI" pitchFamily="34" charset="-120"/>
               </a:rPr>
-              <a:t>Audit complet des routes serveur : suppression du code mort (module Marketplace), vérification de la cohérence entre données locales et données Supabase sur l'ensemble de l'application.</a:t>
+              <a:t>Ces trois modules sont branchés sur la base partagée avec l'application mobile ; les comptes utilisateurs sont également partagés entre les deux plateformes.</a:t>
             </a:r>
             <a:endParaRPr lang="en-US" sz="1100" dirty="0"/>
           </a:p>
@@ -21076,7 +21638,7 @@
                 <a:ea typeface="Georgia" pitchFamily="34" charset="-122"/>
                 <a:cs typeface="Georgia" pitchFamily="34" charset="-120"/>
               </a:rPr>
-              <a:t>Maintenance technique</a:t>
+              <a:t>Équipe</a:t>
             </a:r>
             <a:endParaRPr lang="en-US" sz="2400" dirty="0"/>
           </a:p>
@@ -21162,7 +21724,7 @@
                 <a:ea typeface="Segoe UI" pitchFamily="34" charset="-122"/>
                 <a:cs typeface="Segoe UI" pitchFamily="34" charset="-120"/>
               </a:rPr>
-              <a:t>Nettoyage approfondi du code</a:t>
+              <a:t>Nouvelle donnée : heures contractuelles par ouvrier</a:t>
             </a:r>
             <a:endParaRPr lang="en-US" sz="1400" dirty="0"/>
           </a:p>
@@ -21204,7 +21766,7 @@
                 <a:ea typeface="Segoe UI" pitchFamily="34" charset="-122"/>
                 <a:cs typeface="Segoe UI" pitchFamily="34" charset="-120"/>
               </a:rPr>
-              <a:t>Audit complet du projet (pages, routes, fonctions, dépendances) pour repérer tout ce qui n'était plus utilisé ; suppression de 6 pages orphelines (onboarding, welcome, compte, anciennes pages devis en 3 étapes), d'une route de connexion de démonstration, d'un dossier de composants dupliqué obsolète, de plusieurs fonctions inutilisées et d'une dépendance logicielle non utilisée — sans toucher aux fonctionnalités actives.</a:t>
+              <a:t>Ajout d'un paramètre 'heures contractuelles / semaine' (35h par défaut) sur chaque fiche ouvrier, utilisé pour le calcul des écarts.</a:t>
             </a:r>
             <a:endParaRPr lang="en-US" sz="1100" dirty="0"/>
           </a:p>
@@ -21212,263 +21774,7 @@
       </p:sp>
       <p:sp>
         <p:nvSpPr>
-          <p:cNvPr id="9" name="Shape 7"/>
-          <p:cNvSpPr/>
-          <p:nvPr/>
-        </p:nvSpPr>
-        <p:spPr>
-          <a:xfrm>
-            <a:off x="640080" y="2926080"/>
-            <a:ext cx="10881360" cy="1097280"/>
-          </a:xfrm>
-          <a:prstGeom prst="roundRect">
-            <a:avLst>
-              <a:gd name="adj" fmla="val 5000"/>
-            </a:avLst>
-          </a:prstGeom>
-          <a:solidFill>
-            <a:srgbClr val="FFFFFF"/>
-          </a:solidFill>
-          <a:ln w="12700">
-            <a:solidFill>
-              <a:srgbClr val="E4DCCB"/>
-            </a:solidFill>
-            <a:prstDash val="solid"/>
-          </a:ln>
-        </p:spPr>
-      </p:sp>
-      <p:sp>
-        <p:nvSpPr>
-          <p:cNvPr id="10" name="Shape 8"/>
-          <p:cNvSpPr/>
-          <p:nvPr/>
-        </p:nvSpPr>
-        <p:spPr>
-          <a:xfrm>
-            <a:off x="640080" y="2926080"/>
-            <a:ext cx="54864" cy="1097280"/>
-          </a:xfrm>
-          <a:prstGeom prst="rect">
-            <a:avLst/>
-          </a:prstGeom>
-          <a:solidFill>
-            <a:srgbClr val="386641"/>
-          </a:solidFill>
-          <a:ln/>
-        </p:spPr>
-      </p:sp>
-      <p:sp>
-        <p:nvSpPr>
-          <p:cNvPr id="11" name="Text 9"/>
-          <p:cNvSpPr/>
-          <p:nvPr/>
-        </p:nvSpPr>
-        <p:spPr>
-          <a:xfrm>
-            <a:off x="914400" y="3035808"/>
-            <a:ext cx="10332720" cy="365760"/>
-          </a:xfrm>
-          <a:prstGeom prst="rect">
-            <a:avLst/>
-          </a:prstGeom>
-          <a:noFill/>
-          <a:ln/>
-        </p:spPr>
-        <p:txBody>
-          <a:bodyPr wrap="square" rtlCol="0" anchor="ctr"/>
-          <a:lstStyle/>
-          <a:p>
-            <a:pPr indent="0" marL="0">
-              <a:buNone/>
-            </a:pPr>
-            <a:r>
-              <a:rPr lang="en-US" sz="1400" b="1" dirty="0">
-                <a:solidFill>
-                  <a:srgbClr val="1B1F3B"/>
-                </a:solidFill>
-                <a:latin typeface="Segoe UI" pitchFamily="34" charset="0"/>
-                <a:ea typeface="Segoe UI" pitchFamily="34" charset="-122"/>
-                <a:cs typeface="Segoe UI" pitchFamily="34" charset="-120"/>
-              </a:rPr>
-              <a:t>Suppression de code mort dans la génération de devis</a:t>
-            </a:r>
-            <a:endParaRPr lang="en-US" sz="1400" dirty="0"/>
-          </a:p>
-        </p:txBody>
-      </p:sp>
-      <p:sp>
-        <p:nvSpPr>
-          <p:cNvPr id="12" name="Text 10"/>
-          <p:cNvSpPr/>
-          <p:nvPr/>
-        </p:nvSpPr>
-        <p:spPr>
-          <a:xfrm>
-            <a:off x="914400" y="3383280"/>
-            <a:ext cx="10332720" cy="594360"/>
-          </a:xfrm>
-          <a:prstGeom prst="rect">
-            <a:avLst/>
-          </a:prstGeom>
-          <a:noFill/>
-          <a:ln/>
-        </p:spPr>
-        <p:txBody>
-          <a:bodyPr wrap="square" rtlCol="0" anchor="ctr"/>
-          <a:lstStyle/>
-          <a:p>
-            <a:pPr indent="0" marL="0">
-              <a:lnSpc>
-                <a:spcPts val="1400"/>
-              </a:lnSpc>
-              <a:buNone/>
-            </a:pPr>
-            <a:r>
-              <a:rPr lang="en-US" sz="1100" dirty="0">
-                <a:solidFill>
-                  <a:srgbClr val="8A7C68"/>
-                </a:solidFill>
-                <a:latin typeface="Segoe UI" pitchFamily="34" charset="0"/>
-                <a:ea typeface="Segoe UI" pitchFamily="34" charset="-122"/>
-                <a:cs typeface="Segoe UI" pitchFamily="34" charset="-120"/>
-              </a:rPr>
-              <a:t>Un ancien générateur de devis PDF, devenu inaccessible après une précédente refonte (code jamais exécuté), a été retiré du fichier technique de génération de documents.</a:t>
-            </a:r>
-            <a:endParaRPr lang="en-US" sz="1100" dirty="0"/>
-          </a:p>
-        </p:txBody>
-      </p:sp>
-      <p:sp>
-        <p:nvSpPr>
-          <p:cNvPr id="13" name="Shape 11"/>
-          <p:cNvSpPr/>
-          <p:nvPr/>
-        </p:nvSpPr>
-        <p:spPr>
-          <a:xfrm>
-            <a:off x="640080" y="4160520"/>
-            <a:ext cx="10881360" cy="1097280"/>
-          </a:xfrm>
-          <a:prstGeom prst="roundRect">
-            <a:avLst>
-              <a:gd name="adj" fmla="val 5000"/>
-            </a:avLst>
-          </a:prstGeom>
-          <a:solidFill>
-            <a:srgbClr val="FFFFFF"/>
-          </a:solidFill>
-          <a:ln w="12700">
-            <a:solidFill>
-              <a:srgbClr val="E4DCCB"/>
-            </a:solidFill>
-            <a:prstDash val="solid"/>
-          </a:ln>
-        </p:spPr>
-      </p:sp>
-      <p:sp>
-        <p:nvSpPr>
-          <p:cNvPr id="14" name="Shape 12"/>
-          <p:cNvSpPr/>
-          <p:nvPr/>
-        </p:nvSpPr>
-        <p:spPr>
-          <a:xfrm>
-            <a:off x="640080" y="4160520"/>
-            <a:ext cx="54864" cy="1097280"/>
-          </a:xfrm>
-          <a:prstGeom prst="rect">
-            <a:avLst/>
-          </a:prstGeom>
-          <a:solidFill>
-            <a:srgbClr val="386641"/>
-          </a:solidFill>
-          <a:ln/>
-        </p:spPr>
-      </p:sp>
-      <p:sp>
-        <p:nvSpPr>
-          <p:cNvPr id="15" name="Text 13"/>
-          <p:cNvSpPr/>
-          <p:nvPr/>
-        </p:nvSpPr>
-        <p:spPr>
-          <a:xfrm>
-            <a:off x="914400" y="4270248"/>
-            <a:ext cx="10332720" cy="365760"/>
-          </a:xfrm>
-          <a:prstGeom prst="rect">
-            <a:avLst/>
-          </a:prstGeom>
-          <a:noFill/>
-          <a:ln/>
-        </p:spPr>
-        <p:txBody>
-          <a:bodyPr wrap="square" rtlCol="0" anchor="ctr"/>
-          <a:lstStyle/>
-          <a:p>
-            <a:pPr indent="0" marL="0">
-              <a:buNone/>
-            </a:pPr>
-            <a:r>
-              <a:rPr lang="en-US" sz="1400" b="1" dirty="0">
-                <a:solidFill>
-                  <a:srgbClr val="1B1F3B"/>
-                </a:solidFill>
-                <a:latin typeface="Segoe UI" pitchFamily="34" charset="0"/>
-                <a:ea typeface="Segoe UI" pitchFamily="34" charset="-122"/>
-                <a:cs typeface="Segoe UI" pitchFamily="34" charset="-120"/>
-              </a:rPr>
-              <a:t>Suppression de code mort dans l'export Word des devis</a:t>
-            </a:r>
-            <a:endParaRPr lang="en-US" sz="1400" dirty="0"/>
-          </a:p>
-        </p:txBody>
-      </p:sp>
-      <p:sp>
-        <p:nvSpPr>
-          <p:cNvPr id="16" name="Text 14"/>
-          <p:cNvSpPr/>
-          <p:nvPr/>
-        </p:nvSpPr>
-        <p:spPr>
-          <a:xfrm>
-            <a:off x="914400" y="4617720"/>
-            <a:ext cx="10332720" cy="594360"/>
-          </a:xfrm>
-          <a:prstGeom prst="rect">
-            <a:avLst/>
-          </a:prstGeom>
-          <a:noFill/>
-          <a:ln/>
-        </p:spPr>
-        <p:txBody>
-          <a:bodyPr wrap="square" rtlCol="0" anchor="ctr"/>
-          <a:lstStyle/>
-          <a:p>
-            <a:pPr indent="0" marL="0">
-              <a:lnSpc>
-                <a:spcPts val="1400"/>
-              </a:lnSpc>
-              <a:buNone/>
-            </a:pPr>
-            <a:r>
-              <a:rPr lang="en-US" sz="1100" dirty="0">
-                <a:solidFill>
-                  <a:srgbClr val="8A7C68"/>
-                </a:solidFill>
-                <a:latin typeface="Segoe UI" pitchFamily="34" charset="0"/>
-                <a:ea typeface="Segoe UI" pitchFamily="34" charset="-122"/>
-                <a:cs typeface="Segoe UI" pitchFamily="34" charset="-120"/>
-              </a:rPr>
-              <a:t>Un second bloc de génération de document, devenu inaccessible après une précédente refonte (jamais exécuté), a été retiré du fichier technique de génération de documents.</a:t>
-            </a:r>
-            <a:endParaRPr lang="en-US" sz="1100" dirty="0"/>
-          </a:p>
-        </p:txBody>
-      </p:sp>
-      <p:sp>
-        <p:nvSpPr>
-          <p:cNvPr id="17" name="Text 15"/>
+          <p:cNvPr id="9" name="Text 7"/>
           <p:cNvSpPr/>
           <p:nvPr/>
         </p:nvSpPr>
@@ -21507,7 +21813,7 @@
       </p:sp>
       <p:sp>
         <p:nvSpPr>
-          <p:cNvPr id="18" name="Text 16"/>
+          <p:cNvPr id="10" name="Text 8"/>
           <p:cNvSpPr/>
           <p:nvPr/>
         </p:nvSpPr>
@@ -21670,7 +21976,7 @@
                 <a:ea typeface="Georgia" pitchFamily="34" charset="-122"/>
                 <a:cs typeface="Georgia" pitchFamily="34" charset="-120"/>
               </a:rPr>
-              <a:t>Sécurité</a:t>
+              <a:t>Accueil &amp; stabilité</a:t>
             </a:r>
             <a:endParaRPr lang="en-US" sz="2400" dirty="0"/>
           </a:p>
@@ -21756,7 +22062,7 @@
                 <a:ea typeface="Segoe UI" pitchFamily="34" charset="-122"/>
                 <a:cs typeface="Segoe UI" pitchFamily="34" charset="-120"/>
               </a:rPr>
-              <a:t>Base de données partagée verrouillée</a:t>
+              <a:t>Nettoyage du backend</a:t>
             </a:r>
             <a:endParaRPr lang="en-US" sz="1400" dirty="0"/>
           </a:p>
@@ -21798,7 +22104,7 @@
                 <a:ea typeface="Segoe UI" pitchFamily="34" charset="-122"/>
                 <a:cs typeface="Segoe UI" pitchFamily="34" charset="-120"/>
               </a:rPr>
-              <a:t>La table contenant l'essentiel des données de l'application était lisible par n'importe qui sur internet avec la simple clé publique du site, sans connexion. L'application y accède désormais avec une clé privée réservée au serveur, ce qui permet de fermer complètement l'accès public sans rien casser.</a:t>
+              <a:t>Audit complet des routes serveur : suppression du code mort (module Marketplace), vérification de la cohérence entre données locales et données Supabase sur l'ensemble de l'application.</a:t>
             </a:r>
             <a:endParaRPr lang="en-US" sz="1100" dirty="0"/>
           </a:p>
@@ -21806,263 +22112,7 @@
       </p:sp>
       <p:sp>
         <p:nvSpPr>
-          <p:cNvPr id="9" name="Shape 7"/>
-          <p:cNvSpPr/>
-          <p:nvPr/>
-        </p:nvSpPr>
-        <p:spPr>
-          <a:xfrm>
-            <a:off x="640080" y="2926080"/>
-            <a:ext cx="10881360" cy="1097280"/>
-          </a:xfrm>
-          <a:prstGeom prst="roundRect">
-            <a:avLst>
-              <a:gd name="adj" fmla="val 5000"/>
-            </a:avLst>
-          </a:prstGeom>
-          <a:solidFill>
-            <a:srgbClr val="FFFFFF"/>
-          </a:solidFill>
-          <a:ln w="12700">
-            <a:solidFill>
-              <a:srgbClr val="E4DCCB"/>
-            </a:solidFill>
-            <a:prstDash val="solid"/>
-          </a:ln>
-        </p:spPr>
-      </p:sp>
-      <p:sp>
-        <p:nvSpPr>
-          <p:cNvPr id="10" name="Shape 8"/>
-          <p:cNvSpPr/>
-          <p:nvPr/>
-        </p:nvSpPr>
-        <p:spPr>
-          <a:xfrm>
-            <a:off x="640080" y="2926080"/>
-            <a:ext cx="54864" cy="1097280"/>
-          </a:xfrm>
-          <a:prstGeom prst="rect">
-            <a:avLst/>
-          </a:prstGeom>
-          <a:solidFill>
-            <a:srgbClr val="386641"/>
-          </a:solidFill>
-          <a:ln/>
-        </p:spPr>
-      </p:sp>
-      <p:sp>
-        <p:nvSpPr>
-          <p:cNvPr id="11" name="Text 9"/>
-          <p:cNvSpPr/>
-          <p:nvPr/>
-        </p:nvSpPr>
-        <p:spPr>
-          <a:xfrm>
-            <a:off x="914400" y="3035808"/>
-            <a:ext cx="10332720" cy="365760"/>
-          </a:xfrm>
-          <a:prstGeom prst="rect">
-            <a:avLst/>
-          </a:prstGeom>
-          <a:noFill/>
-          <a:ln/>
-        </p:spPr>
-        <p:txBody>
-          <a:bodyPr wrap="square" rtlCol="0" anchor="ctr"/>
-          <a:lstStyle/>
-          <a:p>
-            <a:pPr indent="0" marL="0">
-              <a:buNone/>
-            </a:pPr>
-            <a:r>
-              <a:rPr lang="en-US" sz="1400" b="1" dirty="0">
-                <a:solidFill>
-                  <a:srgbClr val="1B1F3B"/>
-                </a:solidFill>
-                <a:latin typeface="Segoe UI" pitchFamily="34" charset="0"/>
-                <a:ea typeface="Segoe UI" pitchFamily="34" charset="-122"/>
-                <a:cs typeface="Segoe UI" pitchFamily="34" charset="-120"/>
-              </a:rPr>
-              <a:t>Fichier de base de données retiré du dépôt Git</a:t>
-            </a:r>
-            <a:endParaRPr lang="en-US" sz="1400" dirty="0"/>
-          </a:p>
-        </p:txBody>
-      </p:sp>
-      <p:sp>
-        <p:nvSpPr>
-          <p:cNvPr id="12" name="Text 10"/>
-          <p:cNvSpPr/>
-          <p:nvPr/>
-        </p:nvSpPr>
-        <p:spPr>
-          <a:xfrm>
-            <a:off x="914400" y="3383280"/>
-            <a:ext cx="10332720" cy="594360"/>
-          </a:xfrm>
-          <a:prstGeom prst="rect">
-            <a:avLst/>
-          </a:prstGeom>
-          <a:noFill/>
-          <a:ln/>
-        </p:spPr>
-        <p:txBody>
-          <a:bodyPr wrap="square" rtlCol="0" anchor="ctr"/>
-          <a:lstStyle/>
-          <a:p>
-            <a:pPr indent="0" marL="0">
-              <a:lnSpc>
-                <a:spcPts val="1400"/>
-              </a:lnSpc>
-              <a:buNone/>
-            </a:pPr>
-            <a:r>
-              <a:rPr lang="en-US" sz="1100" dirty="0">
-                <a:solidFill>
-                  <a:srgbClr val="8A7C68"/>
-                </a:solidFill>
-                <a:latin typeface="Segoe UI" pitchFamily="34" charset="0"/>
-                <a:ea typeface="Segoe UI" pitchFamily="34" charset="-122"/>
-                <a:cs typeface="Segoe UI" pitchFamily="34" charset="-120"/>
-              </a:rPr>
-              <a:t>Un fichier contenant une copie complète de la base de données de développement, avec des mots de passe réels en clair, était suivi par Git depuis plusieurs mois. Retiré du suivi et exclu définitivement.</a:t>
-            </a:r>
-            <a:endParaRPr lang="en-US" sz="1100" dirty="0"/>
-          </a:p>
-        </p:txBody>
-      </p:sp>
-      <p:sp>
-        <p:nvSpPr>
-          <p:cNvPr id="13" name="Shape 11"/>
-          <p:cNvSpPr/>
-          <p:nvPr/>
-        </p:nvSpPr>
-        <p:spPr>
-          <a:xfrm>
-            <a:off x="640080" y="4160520"/>
-            <a:ext cx="10881360" cy="1097280"/>
-          </a:xfrm>
-          <a:prstGeom prst="roundRect">
-            <a:avLst>
-              <a:gd name="adj" fmla="val 5000"/>
-            </a:avLst>
-          </a:prstGeom>
-          <a:solidFill>
-            <a:srgbClr val="FFFFFF"/>
-          </a:solidFill>
-          <a:ln w="12700">
-            <a:solidFill>
-              <a:srgbClr val="E4DCCB"/>
-            </a:solidFill>
-            <a:prstDash val="solid"/>
-          </a:ln>
-        </p:spPr>
-      </p:sp>
-      <p:sp>
-        <p:nvSpPr>
-          <p:cNvPr id="14" name="Shape 12"/>
-          <p:cNvSpPr/>
-          <p:nvPr/>
-        </p:nvSpPr>
-        <p:spPr>
-          <a:xfrm>
-            <a:off x="640080" y="4160520"/>
-            <a:ext cx="54864" cy="1097280"/>
-          </a:xfrm>
-          <a:prstGeom prst="rect">
-            <a:avLst/>
-          </a:prstGeom>
-          <a:solidFill>
-            <a:srgbClr val="386641"/>
-          </a:solidFill>
-          <a:ln/>
-        </p:spPr>
-      </p:sp>
-      <p:sp>
-        <p:nvSpPr>
-          <p:cNvPr id="15" name="Text 13"/>
-          <p:cNvSpPr/>
-          <p:nvPr/>
-        </p:nvSpPr>
-        <p:spPr>
-          <a:xfrm>
-            <a:off x="914400" y="4270248"/>
-            <a:ext cx="10332720" cy="365760"/>
-          </a:xfrm>
-          <a:prstGeom prst="rect">
-            <a:avLst/>
-          </a:prstGeom>
-          <a:noFill/>
-          <a:ln/>
-        </p:spPr>
-        <p:txBody>
-          <a:bodyPr wrap="square" rtlCol="0" anchor="ctr"/>
-          <a:lstStyle/>
-          <a:p>
-            <a:pPr indent="0" marL="0">
-              <a:buNone/>
-            </a:pPr>
-            <a:r>
-              <a:rPr lang="en-US" sz="1400" b="1" dirty="0">
-                <a:solidFill>
-                  <a:srgbClr val="1B1F3B"/>
-                </a:solidFill>
-                <a:latin typeface="Segoe UI" pitchFamily="34" charset="0"/>
-                <a:ea typeface="Segoe UI" pitchFamily="34" charset="-122"/>
-                <a:cs typeface="Segoe UI" pitchFamily="34" charset="-120"/>
-              </a:rPr>
-              <a:t>Verrouillage de la base partagée écrit dans le script d'installation</a:t>
-            </a:r>
-            <a:endParaRPr lang="en-US" sz="1400" dirty="0"/>
-          </a:p>
-        </p:txBody>
-      </p:sp>
-      <p:sp>
-        <p:nvSpPr>
-          <p:cNvPr id="16" name="Text 14"/>
-          <p:cNvSpPr/>
-          <p:nvPr/>
-        </p:nvSpPr>
-        <p:spPr>
-          <a:xfrm>
-            <a:off x="914400" y="4617720"/>
-            <a:ext cx="10332720" cy="594360"/>
-          </a:xfrm>
-          <a:prstGeom prst="rect">
-            <a:avLst/>
-          </a:prstGeom>
-          <a:noFill/>
-          <a:ln/>
-        </p:spPr>
-        <p:txBody>
-          <a:bodyPr wrap="square" rtlCol="0" anchor="ctr"/>
-          <a:lstStyle/>
-          <a:p>
-            <a:pPr indent="0" marL="0">
-              <a:lnSpc>
-                <a:spcPts val="1400"/>
-              </a:lnSpc>
-              <a:buNone/>
-            </a:pPr>
-            <a:r>
-              <a:rPr lang="en-US" sz="1100" dirty="0">
-                <a:solidFill>
-                  <a:srgbClr val="8A7C68"/>
-                </a:solidFill>
-                <a:latin typeface="Segoe UI" pitchFamily="34" charset="0"/>
-                <a:ea typeface="Segoe UI" pitchFamily="34" charset="-122"/>
-                <a:cs typeface="Segoe UI" pitchFamily="34" charset="-120"/>
-              </a:rPr>
-              <a:t>La commande qui ferme complètement l'accès public à la table de données partagée a été ajoutée au script SQL du projet, prête à être exécutée dans le tableau de bord Supabase.</a:t>
-            </a:r>
-            <a:endParaRPr lang="en-US" sz="1100" dirty="0"/>
-          </a:p>
-        </p:txBody>
-      </p:sp>
-      <p:sp>
-        <p:nvSpPr>
-          <p:cNvPr id="17" name="Text 15"/>
+          <p:cNvPr id="9" name="Text 7"/>
           <p:cNvSpPr/>
           <p:nvPr/>
         </p:nvSpPr>
@@ -22101,7 +22151,7 @@
       </p:sp>
       <p:sp>
         <p:nvSpPr>
-          <p:cNvPr id="18" name="Text 16"/>
+          <p:cNvPr id="10" name="Text 8"/>
           <p:cNvSpPr/>
           <p:nvPr/>
         </p:nvSpPr>
@@ -22149,6 +22199,1194 @@
 <file path=ppt/slides/slide42.xml><?xml version="1.0" encoding="utf-8"?>
 <p:sld xmlns:a="http://schemas.openxmlformats.org/drawingml/2006/main" xmlns:r="http://schemas.openxmlformats.org/officeDocument/2006/relationships" xmlns:p="http://schemas.openxmlformats.org/presentationml/2006/main">
   <p:cSld name="Slide 42">
+    <p:bg>
+      <p:bgPr>
+        <a:solidFill>
+          <a:srgbClr val="F3EEE3"/>
+        </a:solidFill>
+      </p:bgPr>
+    </p:bg>
+    <p:spTree>
+      <p:nvGrpSpPr>
+        <p:cNvPr id="1" name=""/>
+        <p:cNvGrpSpPr/>
+        <p:nvPr/>
+      </p:nvGrpSpPr>
+      <p:grpSpPr>
+        <a:xfrm>
+          <a:off x="0" y="0"/>
+          <a:ext cx="0" cy="0"/>
+          <a:chOff x="0" y="0"/>
+          <a:chExt cx="0" cy="0"/>
+        </a:xfrm>
+      </p:grpSpPr>
+      <p:sp>
+        <p:nvSpPr>
+          <p:cNvPr id="2" name="Shape 0"/>
+          <p:cNvSpPr/>
+          <p:nvPr/>
+        </p:nvSpPr>
+        <p:spPr>
+          <a:xfrm>
+            <a:off x="640080" y="411480"/>
+            <a:ext cx="2377440" cy="365760"/>
+          </a:xfrm>
+          <a:prstGeom prst="roundRect">
+            <a:avLst>
+              <a:gd name="adj" fmla="val 50000"/>
+            </a:avLst>
+          </a:prstGeom>
+          <a:solidFill>
+            <a:srgbClr val="E6EFE4"/>
+          </a:solidFill>
+          <a:ln/>
+        </p:spPr>
+      </p:sp>
+      <p:sp>
+        <p:nvSpPr>
+          <p:cNvPr id="3" name="Text 1"/>
+          <p:cNvSpPr/>
+          <p:nvPr/>
+        </p:nvSpPr>
+        <p:spPr>
+          <a:xfrm>
+            <a:off x="640080" y="411480"/>
+            <a:ext cx="2377440" cy="365760"/>
+          </a:xfrm>
+          <a:prstGeom prst="rect">
+            <a:avLst/>
+          </a:prstGeom>
+          <a:noFill/>
+          <a:ln/>
+        </p:spPr>
+        <p:txBody>
+          <a:bodyPr wrap="square" rtlCol="0" anchor="ctr"/>
+          <a:lstStyle/>
+          <a:p>
+            <a:pPr algn="ctr" indent="0" marL="0">
+              <a:buNone/>
+            </a:pPr>
+            <a:r>
+              <a:rPr lang="en-US" sz="1000" b="1" spc="100" kern="0" dirty="0">
+                <a:solidFill>
+                  <a:srgbClr val="386641"/>
+                </a:solidFill>
+                <a:latin typeface="Segoe UI" pitchFamily="34" charset="0"/>
+                <a:ea typeface="Segoe UI" pitchFamily="34" charset="-122"/>
+                <a:cs typeface="Segoe UI" pitchFamily="34" charset="-120"/>
+              </a:rPr>
+              <a:t>BASE DE DONNÉES</a:t>
+            </a:r>
+            <a:endParaRPr lang="en-US" sz="1000" dirty="0"/>
+          </a:p>
+        </p:txBody>
+      </p:sp>
+      <p:sp>
+        <p:nvSpPr>
+          <p:cNvPr id="4" name="Text 2"/>
+          <p:cNvSpPr/>
+          <p:nvPr/>
+        </p:nvSpPr>
+        <p:spPr>
+          <a:xfrm>
+            <a:off x="640080" y="868680"/>
+            <a:ext cx="10515600" cy="548640"/>
+          </a:xfrm>
+          <a:prstGeom prst="rect">
+            <a:avLst/>
+          </a:prstGeom>
+          <a:noFill/>
+          <a:ln/>
+        </p:spPr>
+        <p:txBody>
+          <a:bodyPr wrap="square" rtlCol="0" anchor="ctr"/>
+          <a:lstStyle/>
+          <a:p>
+            <a:pPr indent="0" marL="0">
+              <a:buNone/>
+            </a:pPr>
+            <a:r>
+              <a:rPr lang="en-US" sz="2400" b="1" dirty="0">
+                <a:solidFill>
+                  <a:srgbClr val="1B1F3B"/>
+                </a:solidFill>
+                <a:latin typeface="Georgia" pitchFamily="34" charset="0"/>
+                <a:ea typeface="Georgia" pitchFamily="34" charset="-122"/>
+                <a:cs typeface="Georgia" pitchFamily="34" charset="-120"/>
+              </a:rPr>
+              <a:t>Maintenance technique</a:t>
+            </a:r>
+            <a:endParaRPr lang="en-US" sz="2400" dirty="0"/>
+          </a:p>
+        </p:txBody>
+      </p:sp>
+      <p:sp>
+        <p:nvSpPr>
+          <p:cNvPr id="5" name="Shape 3"/>
+          <p:cNvSpPr/>
+          <p:nvPr/>
+        </p:nvSpPr>
+        <p:spPr>
+          <a:xfrm>
+            <a:off x="640080" y="1691640"/>
+            <a:ext cx="10881360" cy="1097280"/>
+          </a:xfrm>
+          <a:prstGeom prst="roundRect">
+            <a:avLst>
+              <a:gd name="adj" fmla="val 5000"/>
+            </a:avLst>
+          </a:prstGeom>
+          <a:solidFill>
+            <a:srgbClr val="FFFFFF"/>
+          </a:solidFill>
+          <a:ln w="12700">
+            <a:solidFill>
+              <a:srgbClr val="E4DCCB"/>
+            </a:solidFill>
+            <a:prstDash val="solid"/>
+          </a:ln>
+        </p:spPr>
+      </p:sp>
+      <p:sp>
+        <p:nvSpPr>
+          <p:cNvPr id="6" name="Shape 4"/>
+          <p:cNvSpPr/>
+          <p:nvPr/>
+        </p:nvSpPr>
+        <p:spPr>
+          <a:xfrm>
+            <a:off x="640080" y="1691640"/>
+            <a:ext cx="54864" cy="1097280"/>
+          </a:xfrm>
+          <a:prstGeom prst="rect">
+            <a:avLst/>
+          </a:prstGeom>
+          <a:solidFill>
+            <a:srgbClr val="386641"/>
+          </a:solidFill>
+          <a:ln/>
+        </p:spPr>
+      </p:sp>
+      <p:sp>
+        <p:nvSpPr>
+          <p:cNvPr id="7" name="Text 5"/>
+          <p:cNvSpPr/>
+          <p:nvPr/>
+        </p:nvSpPr>
+        <p:spPr>
+          <a:xfrm>
+            <a:off x="914400" y="1801368"/>
+            <a:ext cx="10332720" cy="365760"/>
+          </a:xfrm>
+          <a:prstGeom prst="rect">
+            <a:avLst/>
+          </a:prstGeom>
+          <a:noFill/>
+          <a:ln/>
+        </p:spPr>
+        <p:txBody>
+          <a:bodyPr wrap="square" rtlCol="0" anchor="ctr"/>
+          <a:lstStyle/>
+          <a:p>
+            <a:pPr indent="0" marL="0">
+              <a:buNone/>
+            </a:pPr>
+            <a:r>
+              <a:rPr lang="en-US" sz="1400" b="1" dirty="0">
+                <a:solidFill>
+                  <a:srgbClr val="1B1F3B"/>
+                </a:solidFill>
+                <a:latin typeface="Segoe UI" pitchFamily="34" charset="0"/>
+                <a:ea typeface="Segoe UI" pitchFamily="34" charset="-122"/>
+                <a:cs typeface="Segoe UI" pitchFamily="34" charset="-120"/>
+              </a:rPr>
+              <a:t>Nettoyage approfondi du code</a:t>
+            </a:r>
+            <a:endParaRPr lang="en-US" sz="1400" dirty="0"/>
+          </a:p>
+        </p:txBody>
+      </p:sp>
+      <p:sp>
+        <p:nvSpPr>
+          <p:cNvPr id="8" name="Text 6"/>
+          <p:cNvSpPr/>
+          <p:nvPr/>
+        </p:nvSpPr>
+        <p:spPr>
+          <a:xfrm>
+            <a:off x="914400" y="2148840"/>
+            <a:ext cx="10332720" cy="594360"/>
+          </a:xfrm>
+          <a:prstGeom prst="rect">
+            <a:avLst/>
+          </a:prstGeom>
+          <a:noFill/>
+          <a:ln/>
+        </p:spPr>
+        <p:txBody>
+          <a:bodyPr wrap="square" rtlCol="0" anchor="ctr"/>
+          <a:lstStyle/>
+          <a:p>
+            <a:pPr indent="0" marL="0">
+              <a:lnSpc>
+                <a:spcPts val="1400"/>
+              </a:lnSpc>
+              <a:buNone/>
+            </a:pPr>
+            <a:r>
+              <a:rPr lang="en-US" sz="1100" dirty="0">
+                <a:solidFill>
+                  <a:srgbClr val="8A7C68"/>
+                </a:solidFill>
+                <a:latin typeface="Segoe UI" pitchFamily="34" charset="0"/>
+                <a:ea typeface="Segoe UI" pitchFamily="34" charset="-122"/>
+                <a:cs typeface="Segoe UI" pitchFamily="34" charset="-120"/>
+              </a:rPr>
+              <a:t>Audit complet du projet (pages, routes, fonctions, dépendances) pour repérer tout ce qui n'était plus utilisé ; suppression de 6 pages orphelines (onboarding, welcome, compte, anciennes pages devis en 3 étapes), d'une route de connexion de démonstration, d'un dossier de composants dupliqué obsolète, de plusieurs fonctions inutilisées et d'une dépendance logicielle non utilisée — sans toucher aux fonctionnalités actives.</a:t>
+            </a:r>
+            <a:endParaRPr lang="en-US" sz="1100" dirty="0"/>
+          </a:p>
+        </p:txBody>
+      </p:sp>
+      <p:sp>
+        <p:nvSpPr>
+          <p:cNvPr id="9" name="Shape 7"/>
+          <p:cNvSpPr/>
+          <p:nvPr/>
+        </p:nvSpPr>
+        <p:spPr>
+          <a:xfrm>
+            <a:off x="640080" y="2926080"/>
+            <a:ext cx="10881360" cy="1097280"/>
+          </a:xfrm>
+          <a:prstGeom prst="roundRect">
+            <a:avLst>
+              <a:gd name="adj" fmla="val 5000"/>
+            </a:avLst>
+          </a:prstGeom>
+          <a:solidFill>
+            <a:srgbClr val="FFFFFF"/>
+          </a:solidFill>
+          <a:ln w="12700">
+            <a:solidFill>
+              <a:srgbClr val="E4DCCB"/>
+            </a:solidFill>
+            <a:prstDash val="solid"/>
+          </a:ln>
+        </p:spPr>
+      </p:sp>
+      <p:sp>
+        <p:nvSpPr>
+          <p:cNvPr id="10" name="Shape 8"/>
+          <p:cNvSpPr/>
+          <p:nvPr/>
+        </p:nvSpPr>
+        <p:spPr>
+          <a:xfrm>
+            <a:off x="640080" y="2926080"/>
+            <a:ext cx="54864" cy="1097280"/>
+          </a:xfrm>
+          <a:prstGeom prst="rect">
+            <a:avLst/>
+          </a:prstGeom>
+          <a:solidFill>
+            <a:srgbClr val="386641"/>
+          </a:solidFill>
+          <a:ln/>
+        </p:spPr>
+      </p:sp>
+      <p:sp>
+        <p:nvSpPr>
+          <p:cNvPr id="11" name="Text 9"/>
+          <p:cNvSpPr/>
+          <p:nvPr/>
+        </p:nvSpPr>
+        <p:spPr>
+          <a:xfrm>
+            <a:off x="914400" y="3035808"/>
+            <a:ext cx="10332720" cy="365760"/>
+          </a:xfrm>
+          <a:prstGeom prst="rect">
+            <a:avLst/>
+          </a:prstGeom>
+          <a:noFill/>
+          <a:ln/>
+        </p:spPr>
+        <p:txBody>
+          <a:bodyPr wrap="square" rtlCol="0" anchor="ctr"/>
+          <a:lstStyle/>
+          <a:p>
+            <a:pPr indent="0" marL="0">
+              <a:buNone/>
+            </a:pPr>
+            <a:r>
+              <a:rPr lang="en-US" sz="1400" b="1" dirty="0">
+                <a:solidFill>
+                  <a:srgbClr val="1B1F3B"/>
+                </a:solidFill>
+                <a:latin typeface="Segoe UI" pitchFamily="34" charset="0"/>
+                <a:ea typeface="Segoe UI" pitchFamily="34" charset="-122"/>
+                <a:cs typeface="Segoe UI" pitchFamily="34" charset="-120"/>
+              </a:rPr>
+              <a:t>Suppression de code mort dans la génération de devis</a:t>
+            </a:r>
+            <a:endParaRPr lang="en-US" sz="1400" dirty="0"/>
+          </a:p>
+        </p:txBody>
+      </p:sp>
+      <p:sp>
+        <p:nvSpPr>
+          <p:cNvPr id="12" name="Text 10"/>
+          <p:cNvSpPr/>
+          <p:nvPr/>
+        </p:nvSpPr>
+        <p:spPr>
+          <a:xfrm>
+            <a:off x="914400" y="3383280"/>
+            <a:ext cx="10332720" cy="594360"/>
+          </a:xfrm>
+          <a:prstGeom prst="rect">
+            <a:avLst/>
+          </a:prstGeom>
+          <a:noFill/>
+          <a:ln/>
+        </p:spPr>
+        <p:txBody>
+          <a:bodyPr wrap="square" rtlCol="0" anchor="ctr"/>
+          <a:lstStyle/>
+          <a:p>
+            <a:pPr indent="0" marL="0">
+              <a:lnSpc>
+                <a:spcPts val="1400"/>
+              </a:lnSpc>
+              <a:buNone/>
+            </a:pPr>
+            <a:r>
+              <a:rPr lang="en-US" sz="1100" dirty="0">
+                <a:solidFill>
+                  <a:srgbClr val="8A7C68"/>
+                </a:solidFill>
+                <a:latin typeface="Segoe UI" pitchFamily="34" charset="0"/>
+                <a:ea typeface="Segoe UI" pitchFamily="34" charset="-122"/>
+                <a:cs typeface="Segoe UI" pitchFamily="34" charset="-120"/>
+              </a:rPr>
+              <a:t>Un ancien générateur de devis PDF, devenu inaccessible après une précédente refonte (code jamais exécuté), a été retiré du fichier technique de génération de documents.</a:t>
+            </a:r>
+            <a:endParaRPr lang="en-US" sz="1100" dirty="0"/>
+          </a:p>
+        </p:txBody>
+      </p:sp>
+      <p:sp>
+        <p:nvSpPr>
+          <p:cNvPr id="13" name="Shape 11"/>
+          <p:cNvSpPr/>
+          <p:nvPr/>
+        </p:nvSpPr>
+        <p:spPr>
+          <a:xfrm>
+            <a:off x="640080" y="4160520"/>
+            <a:ext cx="10881360" cy="1097280"/>
+          </a:xfrm>
+          <a:prstGeom prst="roundRect">
+            <a:avLst>
+              <a:gd name="adj" fmla="val 5000"/>
+            </a:avLst>
+          </a:prstGeom>
+          <a:solidFill>
+            <a:srgbClr val="FFFFFF"/>
+          </a:solidFill>
+          <a:ln w="12700">
+            <a:solidFill>
+              <a:srgbClr val="E4DCCB"/>
+            </a:solidFill>
+            <a:prstDash val="solid"/>
+          </a:ln>
+        </p:spPr>
+      </p:sp>
+      <p:sp>
+        <p:nvSpPr>
+          <p:cNvPr id="14" name="Shape 12"/>
+          <p:cNvSpPr/>
+          <p:nvPr/>
+        </p:nvSpPr>
+        <p:spPr>
+          <a:xfrm>
+            <a:off x="640080" y="4160520"/>
+            <a:ext cx="54864" cy="1097280"/>
+          </a:xfrm>
+          <a:prstGeom prst="rect">
+            <a:avLst/>
+          </a:prstGeom>
+          <a:solidFill>
+            <a:srgbClr val="386641"/>
+          </a:solidFill>
+          <a:ln/>
+        </p:spPr>
+      </p:sp>
+      <p:sp>
+        <p:nvSpPr>
+          <p:cNvPr id="15" name="Text 13"/>
+          <p:cNvSpPr/>
+          <p:nvPr/>
+        </p:nvSpPr>
+        <p:spPr>
+          <a:xfrm>
+            <a:off x="914400" y="4270248"/>
+            <a:ext cx="10332720" cy="365760"/>
+          </a:xfrm>
+          <a:prstGeom prst="rect">
+            <a:avLst/>
+          </a:prstGeom>
+          <a:noFill/>
+          <a:ln/>
+        </p:spPr>
+        <p:txBody>
+          <a:bodyPr wrap="square" rtlCol="0" anchor="ctr"/>
+          <a:lstStyle/>
+          <a:p>
+            <a:pPr indent="0" marL="0">
+              <a:buNone/>
+            </a:pPr>
+            <a:r>
+              <a:rPr lang="en-US" sz="1400" b="1" dirty="0">
+                <a:solidFill>
+                  <a:srgbClr val="1B1F3B"/>
+                </a:solidFill>
+                <a:latin typeface="Segoe UI" pitchFamily="34" charset="0"/>
+                <a:ea typeface="Segoe UI" pitchFamily="34" charset="-122"/>
+                <a:cs typeface="Segoe UI" pitchFamily="34" charset="-120"/>
+              </a:rPr>
+              <a:t>Suppression de code mort dans l'export Word des devis</a:t>
+            </a:r>
+            <a:endParaRPr lang="en-US" sz="1400" dirty="0"/>
+          </a:p>
+        </p:txBody>
+      </p:sp>
+      <p:sp>
+        <p:nvSpPr>
+          <p:cNvPr id="16" name="Text 14"/>
+          <p:cNvSpPr/>
+          <p:nvPr/>
+        </p:nvSpPr>
+        <p:spPr>
+          <a:xfrm>
+            <a:off x="914400" y="4617720"/>
+            <a:ext cx="10332720" cy="594360"/>
+          </a:xfrm>
+          <a:prstGeom prst="rect">
+            <a:avLst/>
+          </a:prstGeom>
+          <a:noFill/>
+          <a:ln/>
+        </p:spPr>
+        <p:txBody>
+          <a:bodyPr wrap="square" rtlCol="0" anchor="ctr"/>
+          <a:lstStyle/>
+          <a:p>
+            <a:pPr indent="0" marL="0">
+              <a:lnSpc>
+                <a:spcPts val="1400"/>
+              </a:lnSpc>
+              <a:buNone/>
+            </a:pPr>
+            <a:r>
+              <a:rPr lang="en-US" sz="1100" dirty="0">
+                <a:solidFill>
+                  <a:srgbClr val="8A7C68"/>
+                </a:solidFill>
+                <a:latin typeface="Segoe UI" pitchFamily="34" charset="0"/>
+                <a:ea typeface="Segoe UI" pitchFamily="34" charset="-122"/>
+                <a:cs typeface="Segoe UI" pitchFamily="34" charset="-120"/>
+              </a:rPr>
+              <a:t>Un second bloc de génération de document, devenu inaccessible après une précédente refonte (jamais exécuté), a été retiré du fichier technique de génération de documents.</a:t>
+            </a:r>
+            <a:endParaRPr lang="en-US" sz="1100" dirty="0"/>
+          </a:p>
+        </p:txBody>
+      </p:sp>
+      <p:sp>
+        <p:nvSpPr>
+          <p:cNvPr id="17" name="Text 15"/>
+          <p:cNvSpPr/>
+          <p:nvPr/>
+        </p:nvSpPr>
+        <p:spPr>
+          <a:xfrm>
+            <a:off x="365760" y="6510528"/>
+            <a:ext cx="5486400" cy="274320"/>
+          </a:xfrm>
+          <a:prstGeom prst="rect">
+            <a:avLst/>
+          </a:prstGeom>
+          <a:noFill/>
+          <a:ln/>
+        </p:spPr>
+        <p:txBody>
+          <a:bodyPr wrap="square" rtlCol="0" anchor="ctr"/>
+          <a:lstStyle/>
+          <a:p>
+            <a:pPr indent="0" marL="0">
+              <a:buNone/>
+            </a:pPr>
+            <a:r>
+              <a:rPr lang="en-US" sz="900" dirty="0">
+                <a:solidFill>
+                  <a:srgbClr val="8A7C68"/>
+                </a:solidFill>
+                <a:latin typeface="Segoe UI" pitchFamily="34" charset="0"/>
+                <a:ea typeface="Segoe UI" pitchFamily="34" charset="-122"/>
+                <a:cs typeface="Segoe UI" pitchFamily="34" charset="-120"/>
+              </a:rPr>
+              <a:t>Kôji Web — Récapitulatif technique</a:t>
+            </a:r>
+            <a:endParaRPr lang="en-US" sz="900" dirty="0"/>
+          </a:p>
+        </p:txBody>
+      </p:sp>
+      <p:sp>
+        <p:nvSpPr>
+          <p:cNvPr id="18" name="Text 16"/>
+          <p:cNvSpPr/>
+          <p:nvPr/>
+        </p:nvSpPr>
+        <p:spPr>
+          <a:xfrm>
+            <a:off x="9601200" y="6510528"/>
+            <a:ext cx="2194560" cy="274320"/>
+          </a:xfrm>
+          <a:prstGeom prst="rect">
+            <a:avLst/>
+          </a:prstGeom>
+          <a:noFill/>
+          <a:ln/>
+        </p:spPr>
+        <p:txBody>
+          <a:bodyPr wrap="square" rtlCol="0" anchor="ctr"/>
+          <a:lstStyle/>
+          <a:p>
+            <a:pPr algn="r" indent="0" marL="0">
+              <a:buNone/>
+            </a:pPr>
+            <a:r>
+              <a:rPr lang="en-US" sz="900" dirty="0">
+                <a:solidFill>
+                  <a:srgbClr val="8A7C68"/>
+                </a:solidFill>
+                <a:latin typeface="Segoe UI" pitchFamily="34" charset="0"/>
+                <a:ea typeface="Segoe UI" pitchFamily="34" charset="-122"/>
+                <a:cs typeface="Segoe UI" pitchFamily="34" charset="-120"/>
+              </a:rPr>
+              <a:t>42</a:t>
+            </a:r>
+            <a:endParaRPr lang="en-US" sz="900" dirty="0"/>
+          </a:p>
+        </p:txBody>
+      </p:sp>
+    </p:spTree>
+  </p:cSld>
+  <p:clrMapOvr>
+    <a:masterClrMapping/>
+  </p:clrMapOvr>
+</p:sld>
+</file>
+
+<file path=ppt/slides/slide43.xml><?xml version="1.0" encoding="utf-8"?>
+<p:sld xmlns:a="http://schemas.openxmlformats.org/drawingml/2006/main" xmlns:r="http://schemas.openxmlformats.org/officeDocument/2006/relationships" xmlns:p="http://schemas.openxmlformats.org/presentationml/2006/main">
+  <p:cSld name="Slide 43">
+    <p:bg>
+      <p:bgPr>
+        <a:solidFill>
+          <a:srgbClr val="F3EEE3"/>
+        </a:solidFill>
+      </p:bgPr>
+    </p:bg>
+    <p:spTree>
+      <p:nvGrpSpPr>
+        <p:cNvPr id="1" name=""/>
+        <p:cNvGrpSpPr/>
+        <p:nvPr/>
+      </p:nvGrpSpPr>
+      <p:grpSpPr>
+        <a:xfrm>
+          <a:off x="0" y="0"/>
+          <a:ext cx="0" cy="0"/>
+          <a:chOff x="0" y="0"/>
+          <a:chExt cx="0" cy="0"/>
+        </a:xfrm>
+      </p:grpSpPr>
+      <p:sp>
+        <p:nvSpPr>
+          <p:cNvPr id="2" name="Shape 0"/>
+          <p:cNvSpPr/>
+          <p:nvPr/>
+        </p:nvSpPr>
+        <p:spPr>
+          <a:xfrm>
+            <a:off x="640080" y="411480"/>
+            <a:ext cx="2377440" cy="365760"/>
+          </a:xfrm>
+          <a:prstGeom prst="roundRect">
+            <a:avLst>
+              <a:gd name="adj" fmla="val 50000"/>
+            </a:avLst>
+          </a:prstGeom>
+          <a:solidFill>
+            <a:srgbClr val="E6EFE4"/>
+          </a:solidFill>
+          <a:ln/>
+        </p:spPr>
+      </p:sp>
+      <p:sp>
+        <p:nvSpPr>
+          <p:cNvPr id="3" name="Text 1"/>
+          <p:cNvSpPr/>
+          <p:nvPr/>
+        </p:nvSpPr>
+        <p:spPr>
+          <a:xfrm>
+            <a:off x="640080" y="411480"/>
+            <a:ext cx="2377440" cy="365760"/>
+          </a:xfrm>
+          <a:prstGeom prst="rect">
+            <a:avLst/>
+          </a:prstGeom>
+          <a:noFill/>
+          <a:ln/>
+        </p:spPr>
+        <p:txBody>
+          <a:bodyPr wrap="square" rtlCol="0" anchor="ctr"/>
+          <a:lstStyle/>
+          <a:p>
+            <a:pPr algn="ctr" indent="0" marL="0">
+              <a:buNone/>
+            </a:pPr>
+            <a:r>
+              <a:rPr lang="en-US" sz="1000" b="1" spc="100" kern="0" dirty="0">
+                <a:solidFill>
+                  <a:srgbClr val="386641"/>
+                </a:solidFill>
+                <a:latin typeface="Segoe UI" pitchFamily="34" charset="0"/>
+                <a:ea typeface="Segoe UI" pitchFamily="34" charset="-122"/>
+                <a:cs typeface="Segoe UI" pitchFamily="34" charset="-120"/>
+              </a:rPr>
+              <a:t>BASE DE DONNÉES</a:t>
+            </a:r>
+            <a:endParaRPr lang="en-US" sz="1000" dirty="0"/>
+          </a:p>
+        </p:txBody>
+      </p:sp>
+      <p:sp>
+        <p:nvSpPr>
+          <p:cNvPr id="4" name="Text 2"/>
+          <p:cNvSpPr/>
+          <p:nvPr/>
+        </p:nvSpPr>
+        <p:spPr>
+          <a:xfrm>
+            <a:off x="640080" y="868680"/>
+            <a:ext cx="10515600" cy="548640"/>
+          </a:xfrm>
+          <a:prstGeom prst="rect">
+            <a:avLst/>
+          </a:prstGeom>
+          <a:noFill/>
+          <a:ln/>
+        </p:spPr>
+        <p:txBody>
+          <a:bodyPr wrap="square" rtlCol="0" anchor="ctr"/>
+          <a:lstStyle/>
+          <a:p>
+            <a:pPr indent="0" marL="0">
+              <a:buNone/>
+            </a:pPr>
+            <a:r>
+              <a:rPr lang="en-US" sz="2400" b="1" dirty="0">
+                <a:solidFill>
+                  <a:srgbClr val="1B1F3B"/>
+                </a:solidFill>
+                <a:latin typeface="Georgia" pitchFamily="34" charset="0"/>
+                <a:ea typeface="Georgia" pitchFamily="34" charset="-122"/>
+                <a:cs typeface="Georgia" pitchFamily="34" charset="-120"/>
+              </a:rPr>
+              <a:t>Sécurité</a:t>
+            </a:r>
+            <a:endParaRPr lang="en-US" sz="2400" dirty="0"/>
+          </a:p>
+        </p:txBody>
+      </p:sp>
+      <p:sp>
+        <p:nvSpPr>
+          <p:cNvPr id="5" name="Shape 3"/>
+          <p:cNvSpPr/>
+          <p:nvPr/>
+        </p:nvSpPr>
+        <p:spPr>
+          <a:xfrm>
+            <a:off x="640080" y="1691640"/>
+            <a:ext cx="10881360" cy="1097280"/>
+          </a:xfrm>
+          <a:prstGeom prst="roundRect">
+            <a:avLst>
+              <a:gd name="adj" fmla="val 5000"/>
+            </a:avLst>
+          </a:prstGeom>
+          <a:solidFill>
+            <a:srgbClr val="FFFFFF"/>
+          </a:solidFill>
+          <a:ln w="12700">
+            <a:solidFill>
+              <a:srgbClr val="E4DCCB"/>
+            </a:solidFill>
+            <a:prstDash val="solid"/>
+          </a:ln>
+        </p:spPr>
+      </p:sp>
+      <p:sp>
+        <p:nvSpPr>
+          <p:cNvPr id="6" name="Shape 4"/>
+          <p:cNvSpPr/>
+          <p:nvPr/>
+        </p:nvSpPr>
+        <p:spPr>
+          <a:xfrm>
+            <a:off x="640080" y="1691640"/>
+            <a:ext cx="54864" cy="1097280"/>
+          </a:xfrm>
+          <a:prstGeom prst="rect">
+            <a:avLst/>
+          </a:prstGeom>
+          <a:solidFill>
+            <a:srgbClr val="386641"/>
+          </a:solidFill>
+          <a:ln/>
+        </p:spPr>
+      </p:sp>
+      <p:sp>
+        <p:nvSpPr>
+          <p:cNvPr id="7" name="Text 5"/>
+          <p:cNvSpPr/>
+          <p:nvPr/>
+        </p:nvSpPr>
+        <p:spPr>
+          <a:xfrm>
+            <a:off x="914400" y="1801368"/>
+            <a:ext cx="10332720" cy="365760"/>
+          </a:xfrm>
+          <a:prstGeom prst="rect">
+            <a:avLst/>
+          </a:prstGeom>
+          <a:noFill/>
+          <a:ln/>
+        </p:spPr>
+        <p:txBody>
+          <a:bodyPr wrap="square" rtlCol="0" anchor="ctr"/>
+          <a:lstStyle/>
+          <a:p>
+            <a:pPr indent="0" marL="0">
+              <a:buNone/>
+            </a:pPr>
+            <a:r>
+              <a:rPr lang="en-US" sz="1400" b="1" dirty="0">
+                <a:solidFill>
+                  <a:srgbClr val="1B1F3B"/>
+                </a:solidFill>
+                <a:latin typeface="Segoe UI" pitchFamily="34" charset="0"/>
+                <a:ea typeface="Segoe UI" pitchFamily="34" charset="-122"/>
+                <a:cs typeface="Segoe UI" pitchFamily="34" charset="-120"/>
+              </a:rPr>
+              <a:t>Base de données partagée verrouillée</a:t>
+            </a:r>
+            <a:endParaRPr lang="en-US" sz="1400" dirty="0"/>
+          </a:p>
+        </p:txBody>
+      </p:sp>
+      <p:sp>
+        <p:nvSpPr>
+          <p:cNvPr id="8" name="Text 6"/>
+          <p:cNvSpPr/>
+          <p:nvPr/>
+        </p:nvSpPr>
+        <p:spPr>
+          <a:xfrm>
+            <a:off x="914400" y="2148840"/>
+            <a:ext cx="10332720" cy="594360"/>
+          </a:xfrm>
+          <a:prstGeom prst="rect">
+            <a:avLst/>
+          </a:prstGeom>
+          <a:noFill/>
+          <a:ln/>
+        </p:spPr>
+        <p:txBody>
+          <a:bodyPr wrap="square" rtlCol="0" anchor="ctr"/>
+          <a:lstStyle/>
+          <a:p>
+            <a:pPr indent="0" marL="0">
+              <a:lnSpc>
+                <a:spcPts val="1400"/>
+              </a:lnSpc>
+              <a:buNone/>
+            </a:pPr>
+            <a:r>
+              <a:rPr lang="en-US" sz="1100" dirty="0">
+                <a:solidFill>
+                  <a:srgbClr val="8A7C68"/>
+                </a:solidFill>
+                <a:latin typeface="Segoe UI" pitchFamily="34" charset="0"/>
+                <a:ea typeface="Segoe UI" pitchFamily="34" charset="-122"/>
+                <a:cs typeface="Segoe UI" pitchFamily="34" charset="-120"/>
+              </a:rPr>
+              <a:t>La table contenant l'essentiel des données de l'application était lisible par n'importe qui sur internet avec la simple clé publique du site, sans connexion. L'application y accède désormais avec une clé privée réservée au serveur, ce qui permet de fermer complètement l'accès public sans rien casser.</a:t>
+            </a:r>
+            <a:endParaRPr lang="en-US" sz="1100" dirty="0"/>
+          </a:p>
+        </p:txBody>
+      </p:sp>
+      <p:sp>
+        <p:nvSpPr>
+          <p:cNvPr id="9" name="Shape 7"/>
+          <p:cNvSpPr/>
+          <p:nvPr/>
+        </p:nvSpPr>
+        <p:spPr>
+          <a:xfrm>
+            <a:off x="640080" y="2926080"/>
+            <a:ext cx="10881360" cy="1097280"/>
+          </a:xfrm>
+          <a:prstGeom prst="roundRect">
+            <a:avLst>
+              <a:gd name="adj" fmla="val 5000"/>
+            </a:avLst>
+          </a:prstGeom>
+          <a:solidFill>
+            <a:srgbClr val="FFFFFF"/>
+          </a:solidFill>
+          <a:ln w="12700">
+            <a:solidFill>
+              <a:srgbClr val="E4DCCB"/>
+            </a:solidFill>
+            <a:prstDash val="solid"/>
+          </a:ln>
+        </p:spPr>
+      </p:sp>
+      <p:sp>
+        <p:nvSpPr>
+          <p:cNvPr id="10" name="Shape 8"/>
+          <p:cNvSpPr/>
+          <p:nvPr/>
+        </p:nvSpPr>
+        <p:spPr>
+          <a:xfrm>
+            <a:off x="640080" y="2926080"/>
+            <a:ext cx="54864" cy="1097280"/>
+          </a:xfrm>
+          <a:prstGeom prst="rect">
+            <a:avLst/>
+          </a:prstGeom>
+          <a:solidFill>
+            <a:srgbClr val="386641"/>
+          </a:solidFill>
+          <a:ln/>
+        </p:spPr>
+      </p:sp>
+      <p:sp>
+        <p:nvSpPr>
+          <p:cNvPr id="11" name="Text 9"/>
+          <p:cNvSpPr/>
+          <p:nvPr/>
+        </p:nvSpPr>
+        <p:spPr>
+          <a:xfrm>
+            <a:off x="914400" y="3035808"/>
+            <a:ext cx="10332720" cy="365760"/>
+          </a:xfrm>
+          <a:prstGeom prst="rect">
+            <a:avLst/>
+          </a:prstGeom>
+          <a:noFill/>
+          <a:ln/>
+        </p:spPr>
+        <p:txBody>
+          <a:bodyPr wrap="square" rtlCol="0" anchor="ctr"/>
+          <a:lstStyle/>
+          <a:p>
+            <a:pPr indent="0" marL="0">
+              <a:buNone/>
+            </a:pPr>
+            <a:r>
+              <a:rPr lang="en-US" sz="1400" b="1" dirty="0">
+                <a:solidFill>
+                  <a:srgbClr val="1B1F3B"/>
+                </a:solidFill>
+                <a:latin typeface="Segoe UI" pitchFamily="34" charset="0"/>
+                <a:ea typeface="Segoe UI" pitchFamily="34" charset="-122"/>
+                <a:cs typeface="Segoe UI" pitchFamily="34" charset="-120"/>
+              </a:rPr>
+              <a:t>Fichier de base de données retiré du dépôt Git</a:t>
+            </a:r>
+            <a:endParaRPr lang="en-US" sz="1400" dirty="0"/>
+          </a:p>
+        </p:txBody>
+      </p:sp>
+      <p:sp>
+        <p:nvSpPr>
+          <p:cNvPr id="12" name="Text 10"/>
+          <p:cNvSpPr/>
+          <p:nvPr/>
+        </p:nvSpPr>
+        <p:spPr>
+          <a:xfrm>
+            <a:off x="914400" y="3383280"/>
+            <a:ext cx="10332720" cy="594360"/>
+          </a:xfrm>
+          <a:prstGeom prst="rect">
+            <a:avLst/>
+          </a:prstGeom>
+          <a:noFill/>
+          <a:ln/>
+        </p:spPr>
+        <p:txBody>
+          <a:bodyPr wrap="square" rtlCol="0" anchor="ctr"/>
+          <a:lstStyle/>
+          <a:p>
+            <a:pPr indent="0" marL="0">
+              <a:lnSpc>
+                <a:spcPts val="1400"/>
+              </a:lnSpc>
+              <a:buNone/>
+            </a:pPr>
+            <a:r>
+              <a:rPr lang="en-US" sz="1100" dirty="0">
+                <a:solidFill>
+                  <a:srgbClr val="8A7C68"/>
+                </a:solidFill>
+                <a:latin typeface="Segoe UI" pitchFamily="34" charset="0"/>
+                <a:ea typeface="Segoe UI" pitchFamily="34" charset="-122"/>
+                <a:cs typeface="Segoe UI" pitchFamily="34" charset="-120"/>
+              </a:rPr>
+              <a:t>Un fichier contenant une copie complète de la base de données de développement, avec des mots de passe réels en clair, était suivi par Git depuis plusieurs mois. Retiré du suivi et exclu définitivement.</a:t>
+            </a:r>
+            <a:endParaRPr lang="en-US" sz="1100" dirty="0"/>
+          </a:p>
+        </p:txBody>
+      </p:sp>
+      <p:sp>
+        <p:nvSpPr>
+          <p:cNvPr id="13" name="Shape 11"/>
+          <p:cNvSpPr/>
+          <p:nvPr/>
+        </p:nvSpPr>
+        <p:spPr>
+          <a:xfrm>
+            <a:off x="640080" y="4160520"/>
+            <a:ext cx="10881360" cy="1097280"/>
+          </a:xfrm>
+          <a:prstGeom prst="roundRect">
+            <a:avLst>
+              <a:gd name="adj" fmla="val 5000"/>
+            </a:avLst>
+          </a:prstGeom>
+          <a:solidFill>
+            <a:srgbClr val="FFFFFF"/>
+          </a:solidFill>
+          <a:ln w="12700">
+            <a:solidFill>
+              <a:srgbClr val="E4DCCB"/>
+            </a:solidFill>
+            <a:prstDash val="solid"/>
+          </a:ln>
+        </p:spPr>
+      </p:sp>
+      <p:sp>
+        <p:nvSpPr>
+          <p:cNvPr id="14" name="Shape 12"/>
+          <p:cNvSpPr/>
+          <p:nvPr/>
+        </p:nvSpPr>
+        <p:spPr>
+          <a:xfrm>
+            <a:off x="640080" y="4160520"/>
+            <a:ext cx="54864" cy="1097280"/>
+          </a:xfrm>
+          <a:prstGeom prst="rect">
+            <a:avLst/>
+          </a:prstGeom>
+          <a:solidFill>
+            <a:srgbClr val="386641"/>
+          </a:solidFill>
+          <a:ln/>
+        </p:spPr>
+      </p:sp>
+      <p:sp>
+        <p:nvSpPr>
+          <p:cNvPr id="15" name="Text 13"/>
+          <p:cNvSpPr/>
+          <p:nvPr/>
+        </p:nvSpPr>
+        <p:spPr>
+          <a:xfrm>
+            <a:off x="914400" y="4270248"/>
+            <a:ext cx="10332720" cy="365760"/>
+          </a:xfrm>
+          <a:prstGeom prst="rect">
+            <a:avLst/>
+          </a:prstGeom>
+          <a:noFill/>
+          <a:ln/>
+        </p:spPr>
+        <p:txBody>
+          <a:bodyPr wrap="square" rtlCol="0" anchor="ctr"/>
+          <a:lstStyle/>
+          <a:p>
+            <a:pPr indent="0" marL="0">
+              <a:buNone/>
+            </a:pPr>
+            <a:r>
+              <a:rPr lang="en-US" sz="1400" b="1" dirty="0">
+                <a:solidFill>
+                  <a:srgbClr val="1B1F3B"/>
+                </a:solidFill>
+                <a:latin typeface="Segoe UI" pitchFamily="34" charset="0"/>
+                <a:ea typeface="Segoe UI" pitchFamily="34" charset="-122"/>
+                <a:cs typeface="Segoe UI" pitchFamily="34" charset="-120"/>
+              </a:rPr>
+              <a:t>Verrouillage de la base partagée écrit dans le script d'installation</a:t>
+            </a:r>
+            <a:endParaRPr lang="en-US" sz="1400" dirty="0"/>
+          </a:p>
+        </p:txBody>
+      </p:sp>
+      <p:sp>
+        <p:nvSpPr>
+          <p:cNvPr id="16" name="Text 14"/>
+          <p:cNvSpPr/>
+          <p:nvPr/>
+        </p:nvSpPr>
+        <p:spPr>
+          <a:xfrm>
+            <a:off x="914400" y="4617720"/>
+            <a:ext cx="10332720" cy="594360"/>
+          </a:xfrm>
+          <a:prstGeom prst="rect">
+            <a:avLst/>
+          </a:prstGeom>
+          <a:noFill/>
+          <a:ln/>
+        </p:spPr>
+        <p:txBody>
+          <a:bodyPr wrap="square" rtlCol="0" anchor="ctr"/>
+          <a:lstStyle/>
+          <a:p>
+            <a:pPr indent="0" marL="0">
+              <a:lnSpc>
+                <a:spcPts val="1400"/>
+              </a:lnSpc>
+              <a:buNone/>
+            </a:pPr>
+            <a:r>
+              <a:rPr lang="en-US" sz="1100" dirty="0">
+                <a:solidFill>
+                  <a:srgbClr val="8A7C68"/>
+                </a:solidFill>
+                <a:latin typeface="Segoe UI" pitchFamily="34" charset="0"/>
+                <a:ea typeface="Segoe UI" pitchFamily="34" charset="-122"/>
+                <a:cs typeface="Segoe UI" pitchFamily="34" charset="-120"/>
+              </a:rPr>
+              <a:t>La commande qui ferme complètement l'accès public à la table de données partagée a été ajoutée au script SQL du projet, prête à être exécutée dans le tableau de bord Supabase.</a:t>
+            </a:r>
+            <a:endParaRPr lang="en-US" sz="1100" dirty="0"/>
+          </a:p>
+        </p:txBody>
+      </p:sp>
+      <p:sp>
+        <p:nvSpPr>
+          <p:cNvPr id="17" name="Text 15"/>
+          <p:cNvSpPr/>
+          <p:nvPr/>
+        </p:nvSpPr>
+        <p:spPr>
+          <a:xfrm>
+            <a:off x="365760" y="6510528"/>
+            <a:ext cx="5486400" cy="274320"/>
+          </a:xfrm>
+          <a:prstGeom prst="rect">
+            <a:avLst/>
+          </a:prstGeom>
+          <a:noFill/>
+          <a:ln/>
+        </p:spPr>
+        <p:txBody>
+          <a:bodyPr wrap="square" rtlCol="0" anchor="ctr"/>
+          <a:lstStyle/>
+          <a:p>
+            <a:pPr indent="0" marL="0">
+              <a:buNone/>
+            </a:pPr>
+            <a:r>
+              <a:rPr lang="en-US" sz="900" dirty="0">
+                <a:solidFill>
+                  <a:srgbClr val="8A7C68"/>
+                </a:solidFill>
+                <a:latin typeface="Segoe UI" pitchFamily="34" charset="0"/>
+                <a:ea typeface="Segoe UI" pitchFamily="34" charset="-122"/>
+                <a:cs typeface="Segoe UI" pitchFamily="34" charset="-120"/>
+              </a:rPr>
+              <a:t>Kôji Web — Récapitulatif technique</a:t>
+            </a:r>
+            <a:endParaRPr lang="en-US" sz="900" dirty="0"/>
+          </a:p>
+        </p:txBody>
+      </p:sp>
+      <p:sp>
+        <p:nvSpPr>
+          <p:cNvPr id="18" name="Text 16"/>
+          <p:cNvSpPr/>
+          <p:nvPr/>
+        </p:nvSpPr>
+        <p:spPr>
+          <a:xfrm>
+            <a:off x="9601200" y="6510528"/>
+            <a:ext cx="2194560" cy="274320"/>
+          </a:xfrm>
+          <a:prstGeom prst="rect">
+            <a:avLst/>
+          </a:prstGeom>
+          <a:noFill/>
+          <a:ln/>
+        </p:spPr>
+        <p:txBody>
+          <a:bodyPr wrap="square" rtlCol="0" anchor="ctr"/>
+          <a:lstStyle/>
+          <a:p>
+            <a:pPr algn="r" indent="0" marL="0">
+              <a:buNone/>
+            </a:pPr>
+            <a:r>
+              <a:rPr lang="en-US" sz="900" dirty="0">
+                <a:solidFill>
+                  <a:srgbClr val="8A7C68"/>
+                </a:solidFill>
+                <a:latin typeface="Segoe UI" pitchFamily="34" charset="0"/>
+                <a:ea typeface="Segoe UI" pitchFamily="34" charset="-122"/>
+                <a:cs typeface="Segoe UI" pitchFamily="34" charset="-120"/>
+              </a:rPr>
+              <a:t>43</a:t>
+            </a:r>
+            <a:endParaRPr lang="en-US" sz="900" dirty="0"/>
+          </a:p>
+        </p:txBody>
+      </p:sp>
+    </p:spTree>
+  </p:cSld>
+  <p:clrMapOvr>
+    <a:masterClrMapping/>
+  </p:clrMapOvr>
+</p:sld>
+</file>
+
+<file path=ppt/slides/slide44.xml><?xml version="1.0" encoding="utf-8"?>
+<p:sld xmlns:a="http://schemas.openxmlformats.org/drawingml/2006/main" xmlns:r="http://schemas.openxmlformats.org/officeDocument/2006/relationships" xmlns:p="http://schemas.openxmlformats.org/presentationml/2006/main">
+  <p:cSld name="Slide 44">
     <p:bg>
       <p:bgPr>
         <a:solidFill>

--- a/docs/manager-recap/Recap-Koji-Manager.pptx
+++ b/docs/manager-recap/Recap-Koji-Manager.pptx
@@ -10081,7 +10081,7 @@
                 <a:ea typeface="Segoe UI" pitchFamily="34" charset="-122"/>
                 <a:cs typeface="Segoe UI" pitchFamily="34" charset="-120"/>
               </a:rPr>
-              <a:t>39 mise(s) à jour</a:t>
+              <a:t>40 mise(s) à jour</a:t>
             </a:r>
             <a:endParaRPr lang="en-US" sz="1200" dirty="0"/>
           </a:p>
@@ -10335,7 +10335,7 @@
                 <a:ea typeface="Georgia" pitchFamily="34" charset="-122"/>
                 <a:cs typeface="Georgia" pitchFamily="34" charset="-120"/>
               </a:rPr>
-              <a:t>96</a:t>
+              <a:t>98</a:t>
             </a:r>
             <a:endParaRPr lang="en-US" sz="3200" dirty="0"/>
           </a:p>
@@ -10440,7 +10440,7 @@
                 <a:ea typeface="Georgia" pitchFamily="34" charset="-122"/>
                 <a:cs typeface="Georgia" pitchFamily="34" charset="-120"/>
               </a:rPr>
-              <a:t>46</a:t>
+              <a:t>47</a:t>
             </a:r>
             <a:endParaRPr lang="en-US" sz="3200" dirty="0"/>
           </a:p>
@@ -10545,7 +10545,7 @@
                 <a:ea typeface="Georgia" pitchFamily="34" charset="-122"/>
                 <a:cs typeface="Georgia" pitchFamily="34" charset="-120"/>
               </a:rPr>
-              <a:t>39</a:t>
+              <a:t>40</a:t>
             </a:r>
             <a:endParaRPr lang="en-US" sz="3200" dirty="0"/>
           </a:p>
@@ -13102,7 +13102,135 @@
       </p:sp>
       <p:sp>
         <p:nvSpPr>
-          <p:cNvPr id="9" name="Text 7"/>
+          <p:cNvPr id="9" name="Shape 7"/>
+          <p:cNvSpPr/>
+          <p:nvPr/>
+        </p:nvSpPr>
+        <p:spPr>
+          <a:xfrm>
+            <a:off x="640080" y="2926080"/>
+            <a:ext cx="10881360" cy="1097280"/>
+          </a:xfrm>
+          <a:prstGeom prst="roundRect">
+            <a:avLst>
+              <a:gd name="adj" fmla="val 5000"/>
+            </a:avLst>
+          </a:prstGeom>
+          <a:solidFill>
+            <a:srgbClr val="FFFFFF"/>
+          </a:solidFill>
+          <a:ln w="12700">
+            <a:solidFill>
+              <a:srgbClr val="E4DCCB"/>
+            </a:solidFill>
+            <a:prstDash val="solid"/>
+          </a:ln>
+        </p:spPr>
+      </p:sp>
+      <p:sp>
+        <p:nvSpPr>
+          <p:cNvPr id="10" name="Shape 8"/>
+          <p:cNvSpPr/>
+          <p:nvPr/>
+        </p:nvSpPr>
+        <p:spPr>
+          <a:xfrm>
+            <a:off x="640080" y="2926080"/>
+            <a:ext cx="54864" cy="1097280"/>
+          </a:xfrm>
+          <a:prstGeom prst="rect">
+            <a:avLst/>
+          </a:prstGeom>
+          <a:solidFill>
+            <a:srgbClr val="9A4C1F"/>
+          </a:solidFill>
+          <a:ln/>
+        </p:spPr>
+      </p:sp>
+      <p:sp>
+        <p:nvSpPr>
+          <p:cNvPr id="11" name="Text 9"/>
+          <p:cNvSpPr/>
+          <p:nvPr/>
+        </p:nvSpPr>
+        <p:spPr>
+          <a:xfrm>
+            <a:off x="914400" y="3035808"/>
+            <a:ext cx="10332720" cy="365760"/>
+          </a:xfrm>
+          <a:prstGeom prst="rect">
+            <a:avLst/>
+          </a:prstGeom>
+          <a:noFill/>
+          <a:ln/>
+        </p:spPr>
+        <p:txBody>
+          <a:bodyPr wrap="square" rtlCol="0" anchor="ctr"/>
+          <a:lstStyle/>
+          <a:p>
+            <a:pPr indent="0" marL="0">
+              <a:buNone/>
+            </a:pPr>
+            <a:r>
+              <a:rPr lang="en-US" sz="1400" b="1" dirty="0">
+                <a:solidFill>
+                  <a:srgbClr val="1B1F3B"/>
+                </a:solidFill>
+                <a:latin typeface="Segoe UI" pitchFamily="34" charset="0"/>
+                <a:ea typeface="Segoe UI" pitchFamily="34" charset="-122"/>
+                <a:cs typeface="Segoe UI" pitchFamily="34" charset="-120"/>
+              </a:rPr>
+              <a:t>Acceptation manuelle d'un devis, sans passer par la signature électronique</a:t>
+            </a:r>
+            <a:endParaRPr lang="en-US" sz="1400" dirty="0"/>
+          </a:p>
+        </p:txBody>
+      </p:sp>
+      <p:sp>
+        <p:nvSpPr>
+          <p:cNvPr id="12" name="Text 10"/>
+          <p:cNvSpPr/>
+          <p:nvPr/>
+        </p:nvSpPr>
+        <p:spPr>
+          <a:xfrm>
+            <a:off x="914400" y="3383280"/>
+            <a:ext cx="10332720" cy="594360"/>
+          </a:xfrm>
+          <a:prstGeom prst="rect">
+            <a:avLst/>
+          </a:prstGeom>
+          <a:noFill/>
+          <a:ln/>
+        </p:spPr>
+        <p:txBody>
+          <a:bodyPr wrap="square" rtlCol="0" anchor="ctr"/>
+          <a:lstStyle/>
+          <a:p>
+            <a:pPr indent="0" marL="0">
+              <a:lnSpc>
+                <a:spcPts val="1400"/>
+              </a:lnSpc>
+              <a:buNone/>
+            </a:pPr>
+            <a:r>
+              <a:rPr lang="en-US" sz="1100" dirty="0">
+                <a:solidFill>
+                  <a:srgbClr val="8A7C68"/>
+                </a:solidFill>
+                <a:latin typeface="Segoe UI" pitchFamily="34" charset="0"/>
+                <a:ea typeface="Segoe UI" pitchFamily="34" charset="-122"/>
+                <a:cs typeface="Segoe UI" pitchFamily="34" charset="-120"/>
+              </a:rPr>
+              <a:t>Nouvelle action pour marquer un devis comme accepté par le client (statut 'Signé') directement depuis l'éditeur, sans passer par Kôji Signature — utile quand l'accord a été donné oralement, par email ou sur papier. Le devis devient alors immédiatement éligible à la facturation et débloque l'accès normal au chantier lié, exactement comme une signature électronique. Un repère '(manuel)' distingue ce cas d'une vraie signature dans la liste des devis.</a:t>
+            </a:r>
+            <a:endParaRPr lang="en-US" sz="1100" dirty="0"/>
+          </a:p>
+        </p:txBody>
+      </p:sp>
+      <p:sp>
+        <p:nvSpPr>
+          <p:cNvPr id="13" name="Text 11"/>
           <p:cNvSpPr/>
           <p:nvPr/>
         </p:nvSpPr>
@@ -13141,7 +13269,7 @@
       </p:sp>
       <p:sp>
         <p:nvSpPr>
-          <p:cNvPr id="10" name="Text 8"/>
+          <p:cNvPr id="14" name="Text 12"/>
           <p:cNvSpPr/>
           <p:nvPr/>
         </p:nvSpPr>
@@ -16521,7 +16649,7 @@
                 <a:ea typeface="Segoe UI" pitchFamily="34" charset="-122"/>
                 <a:cs typeface="Segoe UI" pitchFamily="34" charset="-120"/>
               </a:rPr>
-              <a:t>46 mise(s) à jour</a:t>
+              <a:t>47 mise(s) à jour</a:t>
             </a:r>
             <a:endParaRPr lang="en-US" sz="1200" dirty="0"/>
           </a:p>
@@ -25320,7 +25448,135 @@
       </p:sp>
       <p:sp>
         <p:nvSpPr>
-          <p:cNvPr id="13" name="Text 11"/>
+          <p:cNvPr id="13" name="Shape 11"/>
+          <p:cNvSpPr/>
+          <p:nvPr/>
+        </p:nvSpPr>
+        <p:spPr>
+          <a:xfrm>
+            <a:off x="640080" y="4160520"/>
+            <a:ext cx="10881360" cy="1097280"/>
+          </a:xfrm>
+          <a:prstGeom prst="roundRect">
+            <a:avLst>
+              <a:gd name="adj" fmla="val 5000"/>
+            </a:avLst>
+          </a:prstGeom>
+          <a:solidFill>
+            <a:srgbClr val="FFFFFF"/>
+          </a:solidFill>
+          <a:ln w="12700">
+            <a:solidFill>
+              <a:srgbClr val="E4DCCB"/>
+            </a:solidFill>
+            <a:prstDash val="solid"/>
+          </a:ln>
+        </p:spPr>
+      </p:sp>
+      <p:sp>
+        <p:nvSpPr>
+          <p:cNvPr id="14" name="Shape 12"/>
+          <p:cNvSpPr/>
+          <p:nvPr/>
+        </p:nvSpPr>
+        <p:spPr>
+          <a:xfrm>
+            <a:off x="640080" y="4160520"/>
+            <a:ext cx="54864" cy="1097280"/>
+          </a:xfrm>
+          <a:prstGeom prst="rect">
+            <a:avLst/>
+          </a:prstGeom>
+          <a:solidFill>
+            <a:srgbClr val="1D6FE0"/>
+          </a:solidFill>
+          <a:ln/>
+        </p:spPr>
+      </p:sp>
+      <p:sp>
+        <p:nvSpPr>
+          <p:cNvPr id="15" name="Text 13"/>
+          <p:cNvSpPr/>
+          <p:nvPr/>
+        </p:nvSpPr>
+        <p:spPr>
+          <a:xfrm>
+            <a:off x="914400" y="4270248"/>
+            <a:ext cx="10332720" cy="365760"/>
+          </a:xfrm>
+          <a:prstGeom prst="rect">
+            <a:avLst/>
+          </a:prstGeom>
+          <a:noFill/>
+          <a:ln/>
+        </p:spPr>
+        <p:txBody>
+          <a:bodyPr wrap="square" rtlCol="0" anchor="ctr"/>
+          <a:lstStyle/>
+          <a:p>
+            <a:pPr indent="0" marL="0">
+              <a:buNone/>
+            </a:pPr>
+            <a:r>
+              <a:rPr lang="en-US" sz="1400" b="1" dirty="0">
+                <a:solidFill>
+                  <a:srgbClr val="1B1F3B"/>
+                </a:solidFill>
+                <a:latin typeface="Segoe UI" pitchFamily="34" charset="0"/>
+                <a:ea typeface="Segoe UI" pitchFamily="34" charset="-122"/>
+                <a:cs typeface="Segoe UI" pitchFamily="34" charset="-120"/>
+              </a:rPr>
+              <a:t>Création d'un chantier depuis un devis existant rendue plus visible</a:t>
+            </a:r>
+            <a:endParaRPr lang="en-US" sz="1400" dirty="0"/>
+          </a:p>
+        </p:txBody>
+      </p:sp>
+      <p:sp>
+        <p:nvSpPr>
+          <p:cNvPr id="16" name="Text 14"/>
+          <p:cNvSpPr/>
+          <p:nvPr/>
+        </p:nvSpPr>
+        <p:spPr>
+          <a:xfrm>
+            <a:off x="914400" y="4617720"/>
+            <a:ext cx="10332720" cy="594360"/>
+          </a:xfrm>
+          <a:prstGeom prst="rect">
+            <a:avLst/>
+          </a:prstGeom>
+          <a:noFill/>
+          <a:ln/>
+        </p:spPr>
+        <p:txBody>
+          <a:bodyPr wrap="square" rtlCol="0" anchor="ctr"/>
+          <a:lstStyle/>
+          <a:p>
+            <a:pPr indent="0" marL="0">
+              <a:lnSpc>
+                <a:spcPts val="1400"/>
+              </a:lnSpc>
+              <a:buNone/>
+            </a:pPr>
+            <a:r>
+              <a:rPr lang="en-US" sz="1100" dirty="0">
+                <a:solidFill>
+                  <a:srgbClr val="8A7C68"/>
+                </a:solidFill>
+                <a:latin typeface="Segoe UI" pitchFamily="34" charset="0"/>
+                <a:ea typeface="Segoe UI" pitchFamily="34" charset="-122"/>
+                <a:cs typeface="Segoe UI" pitchFamily="34" charset="-120"/>
+              </a:rPr>
+              <a:t>Un bouton explicite 'Créer un chantier pour ce devis' apparaît désormais quand un devis déjà enregistré n'a pas de chantier lié — possible à tout moment, même si le client n'a pas encore validé le devis.</a:t>
+            </a:r>
+            <a:endParaRPr lang="en-US" sz="1100" dirty="0"/>
+          </a:p>
+        </p:txBody>
+      </p:sp>
+      <p:sp>
+        <p:nvSpPr>
+          <p:cNvPr id="17" name="Text 15"/>
           <p:cNvSpPr/>
           <p:nvPr/>
         </p:nvSpPr>
@@ -25359,7 +25615,7 @@
       </p:sp>
       <p:sp>
         <p:nvSpPr>
-          <p:cNvPr id="14" name="Text 12"/>
+          <p:cNvPr id="18" name="Text 16"/>
           <p:cNvSpPr/>
           <p:nvPr/>
         </p:nvSpPr>

--- a/docs/manager-recap/Recap-Koji-Manager.pptx
+++ b/docs/manager-recap/Recap-Koji-Manager.pptx
@@ -7000,7 +7000,135 @@
       </p:sp>
       <p:sp>
         <p:nvSpPr>
-          <p:cNvPr id="17" name="Text 15"/>
+          <p:cNvPr id="17" name="Shape 15"/>
+          <p:cNvSpPr/>
+          <p:nvPr/>
+        </p:nvSpPr>
+        <p:spPr>
+          <a:xfrm>
+            <a:off x="640080" y="5394960"/>
+            <a:ext cx="10881360" cy="1097280"/>
+          </a:xfrm>
+          <a:prstGeom prst="roundRect">
+            <a:avLst>
+              <a:gd name="adj" fmla="val 5000"/>
+            </a:avLst>
+          </a:prstGeom>
+          <a:solidFill>
+            <a:srgbClr val="FFFFFF"/>
+          </a:solidFill>
+          <a:ln w="12700">
+            <a:solidFill>
+              <a:srgbClr val="E4DCCB"/>
+            </a:solidFill>
+            <a:prstDash val="solid"/>
+          </a:ln>
+        </p:spPr>
+      </p:sp>
+      <p:sp>
+        <p:nvSpPr>
+          <p:cNvPr id="18" name="Shape 16"/>
+          <p:cNvSpPr/>
+          <p:nvPr/>
+        </p:nvSpPr>
+        <p:spPr>
+          <a:xfrm>
+            <a:off x="640080" y="5394960"/>
+            <a:ext cx="54864" cy="1097280"/>
+          </a:xfrm>
+          <a:prstGeom prst="rect">
+            <a:avLst/>
+          </a:prstGeom>
+          <a:solidFill>
+            <a:srgbClr val="1D6FE0"/>
+          </a:solidFill>
+          <a:ln/>
+        </p:spPr>
+      </p:sp>
+      <p:sp>
+        <p:nvSpPr>
+          <p:cNvPr id="19" name="Text 17"/>
+          <p:cNvSpPr/>
+          <p:nvPr/>
+        </p:nvSpPr>
+        <p:spPr>
+          <a:xfrm>
+            <a:off x="914400" y="5504688"/>
+            <a:ext cx="10332720" cy="365760"/>
+          </a:xfrm>
+          <a:prstGeom prst="rect">
+            <a:avLst/>
+          </a:prstGeom>
+          <a:noFill/>
+          <a:ln/>
+        </p:spPr>
+        <p:txBody>
+          <a:bodyPr wrap="square" rtlCol="0" anchor="ctr"/>
+          <a:lstStyle/>
+          <a:p>
+            <a:pPr indent="0" marL="0">
+              <a:buNone/>
+            </a:pPr>
+            <a:r>
+              <a:rPr lang="en-US" sz="1400" b="1" dirty="0">
+                <a:solidFill>
+                  <a:srgbClr val="1B1F3B"/>
+                </a:solidFill>
+                <a:latin typeface="Segoe UI" pitchFamily="34" charset="0"/>
+                <a:ea typeface="Segoe UI" pitchFamily="34" charset="-122"/>
+                <a:cs typeface="Segoe UI" pitchFamily="34" charset="-120"/>
+              </a:rPr>
+              <a:t>Le devis devient le point d'entrée de l'accueil</a:t>
+            </a:r>
+            <a:endParaRPr lang="en-US" sz="1400" dirty="0"/>
+          </a:p>
+        </p:txBody>
+      </p:sp>
+      <p:sp>
+        <p:nvSpPr>
+          <p:cNvPr id="20" name="Text 18"/>
+          <p:cNvSpPr/>
+          <p:nvPr/>
+        </p:nvSpPr>
+        <p:spPr>
+          <a:xfrm>
+            <a:off x="914400" y="5852160"/>
+            <a:ext cx="10332720" cy="594360"/>
+          </a:xfrm>
+          <a:prstGeom prst="rect">
+            <a:avLst/>
+          </a:prstGeom>
+          <a:noFill/>
+          <a:ln/>
+        </p:spPr>
+        <p:txBody>
+          <a:bodyPr wrap="square" rtlCol="0" anchor="ctr"/>
+          <a:lstStyle/>
+          <a:p>
+            <a:pPr indent="0" marL="0">
+              <a:lnSpc>
+                <a:spcPts val="1400"/>
+              </a:lnSpc>
+              <a:buNone/>
+            </a:pPr>
+            <a:r>
+              <a:rPr lang="en-US" sz="1100" dirty="0">
+                <a:solidFill>
+                  <a:srgbClr val="8A7C68"/>
+                </a:solidFill>
+                <a:latin typeface="Segoe UI" pitchFamily="34" charset="0"/>
+                <a:ea typeface="Segoe UI" pitchFamily="34" charset="-122"/>
+                <a:cs typeface="Segoe UI" pitchFamily="34" charset="-120"/>
+              </a:rPr>
+              <a:t>Le gros bouton d'action de la page d'accueil ('+') pointe maintenant vers la création d'un devis au lieu d'un chantier, et l'ordre des sections a été inversé : Devis en cours avant Chantiers, Interventions en dernier.</a:t>
+            </a:r>
+            <a:endParaRPr lang="en-US" sz="1100" dirty="0"/>
+          </a:p>
+        </p:txBody>
+      </p:sp>
+      <p:sp>
+        <p:nvSpPr>
+          <p:cNvPr id="21" name="Text 19"/>
           <p:cNvSpPr/>
           <p:nvPr/>
         </p:nvSpPr>
@@ -7039,7 +7167,7 @@
       </p:sp>
       <p:sp>
         <p:nvSpPr>
-          <p:cNvPr id="18" name="Text 16"/>
+          <p:cNvPr id="22" name="Text 20"/>
           <p:cNvSpPr/>
           <p:nvPr/>
         </p:nvSpPr>
@@ -10335,7 +10463,7 @@
                 <a:ea typeface="Georgia" pitchFamily="34" charset="-122"/>
                 <a:cs typeface="Georgia" pitchFamily="34" charset="-120"/>
               </a:rPr>
-              <a:t>98</a:t>
+              <a:t>99</a:t>
             </a:r>
             <a:endParaRPr lang="en-US" sz="3200" dirty="0"/>
           </a:p>
@@ -10440,7 +10568,7 @@
                 <a:ea typeface="Georgia" pitchFamily="34" charset="-122"/>
                 <a:cs typeface="Georgia" pitchFamily="34" charset="-120"/>
               </a:rPr>
-              <a:t>47</a:t>
+              <a:t>48</a:t>
             </a:r>
             <a:endParaRPr lang="en-US" sz="3200" dirty="0"/>
           </a:p>
@@ -16649,7 +16777,7 @@
                 <a:ea typeface="Segoe UI" pitchFamily="34" charset="-122"/>
                 <a:cs typeface="Segoe UI" pitchFamily="34" charset="-120"/>
               </a:rPr>
-              <a:t>47 mise(s) à jour</a:t>
+              <a:t>48 mise(s) à jour</a:t>
             </a:r>
             <a:endParaRPr lang="en-US" sz="1200" dirty="0"/>
           </a:p>

--- a/docs/manager-recap/Recap-Koji-Manager.pptx
+++ b/docs/manager-recap/Recap-Koji-Manager.pptx
@@ -13350,7 +13350,7 @@
                 <a:ea typeface="Segoe UI" pitchFamily="34" charset="-122"/>
                 <a:cs typeface="Segoe UI" pitchFamily="34" charset="-120"/>
               </a:rPr>
-              <a:t>Nouvelle action pour marquer un devis comme accepté par le client (statut 'Signé') directement depuis l'éditeur, sans passer par Kôji Signature — utile quand l'accord a été donné oralement, par email ou sur papier. Le devis devient alors immédiatement éligible à la facturation et débloque l'accès normal au chantier lié, exactement comme une signature électronique. Un repère '(manuel)' distingue ce cas d'une vraie signature dans la liste des devis.</a:t>
+              <a:t>Nouvelle action pour marquer un devis comme accepté par le client (statut 'Signé') directement depuis l'éditeur, sans passer par Kôji Signature. Une fenêtre demande le motif — acceptation verbale ou acompte versé — avec une précision libre optionnelle (montant, date...). Le devis devient alors immédiatement éligible à la facturation et débloque l'accès normal au chantier lié, exactement comme une signature électronique. Un repère (verbal / acompte) distingue ce cas d'une vraie signature dans la liste des devis.</a:t>
             </a:r>
             <a:endParaRPr lang="en-US" sz="1100" dirty="0"/>
           </a:p>

--- a/docs/manager-recap/Recap-Koji-Manager.pptx
+++ b/docs/manager-recap/Recap-Koji-Manager.pptx
@@ -10209,7 +10209,7 @@
                 <a:ea typeface="Segoe UI" pitchFamily="34" charset="-122"/>
                 <a:cs typeface="Segoe UI" pitchFamily="34" charset="-120"/>
               </a:rPr>
-              <a:t>40 mise(s) à jour</a:t>
+              <a:t>41 mise(s) à jour</a:t>
             </a:r>
             <a:endParaRPr lang="en-US" sz="1200" dirty="0"/>
           </a:p>
@@ -10463,7 +10463,7 @@
                 <a:ea typeface="Georgia" pitchFamily="34" charset="-122"/>
                 <a:cs typeface="Georgia" pitchFamily="34" charset="-120"/>
               </a:rPr>
-              <a:t>99</a:t>
+              <a:t>100</a:t>
             </a:r>
             <a:endParaRPr lang="en-US" sz="3200" dirty="0"/>
           </a:p>
@@ -10673,7 +10673,7 @@
                 <a:ea typeface="Georgia" pitchFamily="34" charset="-122"/>
                 <a:cs typeface="Georgia" pitchFamily="34" charset="-120"/>
               </a:rPr>
-              <a:t>40</a:t>
+              <a:t>41</a:t>
             </a:r>
             <a:endParaRPr lang="en-US" sz="3200" dirty="0"/>
           </a:p>
@@ -13358,7 +13358,135 @@
       </p:sp>
       <p:sp>
         <p:nvSpPr>
-          <p:cNvPr id="13" name="Text 11"/>
+          <p:cNvPr id="13" name="Shape 11"/>
+          <p:cNvSpPr/>
+          <p:nvPr/>
+        </p:nvSpPr>
+        <p:spPr>
+          <a:xfrm>
+            <a:off x="640080" y="4160520"/>
+            <a:ext cx="10881360" cy="1097280"/>
+          </a:xfrm>
+          <a:prstGeom prst="roundRect">
+            <a:avLst>
+              <a:gd name="adj" fmla="val 5000"/>
+            </a:avLst>
+          </a:prstGeom>
+          <a:solidFill>
+            <a:srgbClr val="FFFFFF"/>
+          </a:solidFill>
+          <a:ln w="12700">
+            <a:solidFill>
+              <a:srgbClr val="E4DCCB"/>
+            </a:solidFill>
+            <a:prstDash val="solid"/>
+          </a:ln>
+        </p:spPr>
+      </p:sp>
+      <p:sp>
+        <p:nvSpPr>
+          <p:cNvPr id="14" name="Shape 12"/>
+          <p:cNvSpPr/>
+          <p:nvPr/>
+        </p:nvSpPr>
+        <p:spPr>
+          <a:xfrm>
+            <a:off x="640080" y="4160520"/>
+            <a:ext cx="54864" cy="1097280"/>
+          </a:xfrm>
+          <a:prstGeom prst="rect">
+            <a:avLst/>
+          </a:prstGeom>
+          <a:solidFill>
+            <a:srgbClr val="9A4C1F"/>
+          </a:solidFill>
+          <a:ln/>
+        </p:spPr>
+      </p:sp>
+      <p:sp>
+        <p:nvSpPr>
+          <p:cNvPr id="15" name="Text 13"/>
+          <p:cNvSpPr/>
+          <p:nvPr/>
+        </p:nvSpPr>
+        <p:spPr>
+          <a:xfrm>
+            <a:off x="914400" y="4270248"/>
+            <a:ext cx="10332720" cy="365760"/>
+          </a:xfrm>
+          <a:prstGeom prst="rect">
+            <a:avLst/>
+          </a:prstGeom>
+          <a:noFill/>
+          <a:ln/>
+        </p:spPr>
+        <p:txBody>
+          <a:bodyPr wrap="square" rtlCol="0" anchor="ctr"/>
+          <a:lstStyle/>
+          <a:p>
+            <a:pPr indent="0" marL="0">
+              <a:buNone/>
+            </a:pPr>
+            <a:r>
+              <a:rPr lang="en-US" sz="1400" b="1" dirty="0">
+                <a:solidFill>
+                  <a:srgbClr val="1B1F3B"/>
+                </a:solidFill>
+                <a:latin typeface="Segoe UI" pitchFamily="34" charset="0"/>
+                <a:ea typeface="Segoe UI" pitchFamily="34" charset="-122"/>
+                <a:cs typeface="Segoe UI" pitchFamily="34" charset="-120"/>
+              </a:rPr>
+              <a:t>Base de calcul correcte pour les majorations (coordination, aléas, assurance)</a:t>
+            </a:r>
+            <a:endParaRPr lang="en-US" sz="1400" dirty="0"/>
+          </a:p>
+        </p:txBody>
+      </p:sp>
+      <p:sp>
+        <p:nvSpPr>
+          <p:cNvPr id="16" name="Text 14"/>
+          <p:cNvSpPr/>
+          <p:nvPr/>
+        </p:nvSpPr>
+        <p:spPr>
+          <a:xfrm>
+            <a:off x="914400" y="4617720"/>
+            <a:ext cx="10332720" cy="594360"/>
+          </a:xfrm>
+          <a:prstGeom prst="rect">
+            <a:avLst/>
+          </a:prstGeom>
+          <a:noFill/>
+          <a:ln/>
+        </p:spPr>
+        <p:txBody>
+          <a:bodyPr wrap="square" rtlCol="0" anchor="ctr"/>
+          <a:lstStyle/>
+          <a:p>
+            <a:pPr indent="0" marL="0">
+              <a:lnSpc>
+                <a:spcPts val="1400"/>
+              </a:lnSpc>
+              <a:buNone/>
+            </a:pPr>
+            <a:r>
+              <a:rPr lang="en-US" sz="1100" dirty="0">
+                <a:solidFill>
+                  <a:srgbClr val="8A7C68"/>
+                </a:solidFill>
+                <a:latin typeface="Segoe UI" pitchFamily="34" charset="0"/>
+                <a:ea typeface="Segoe UI" pitchFamily="34" charset="-122"/>
+                <a:cs typeface="Segoe UI" pitchFamily="34" charset="-120"/>
+              </a:rPr>
+              <a:t>La coordination de chantier et la provision pour aléas se calculaient déjà, comme il se doit, uniquement sur le total des lots. L'assurance décennale utilisait à tort la même base, alors qu'elle doit porter sur le chiffrage total de l'affaire HT (lots + coordination + provision aléas + toute ligne précédente). Une case 'Cumulé' sur chaque ligne de majoration permet désormais de choisir sa base de calcul ; cochée par défaut sur l'assurance décennale. Corrigé dans le calcul du devis, le PDF et l'export Word, qui utilisaient chacun leur propre logique.</a:t>
+            </a:r>
+            <a:endParaRPr lang="en-US" sz="1100" dirty="0"/>
+          </a:p>
+        </p:txBody>
+      </p:sp>
+      <p:sp>
+        <p:nvSpPr>
+          <p:cNvPr id="17" name="Text 15"/>
           <p:cNvSpPr/>
           <p:nvPr/>
         </p:nvSpPr>
@@ -13397,7 +13525,7 @@
       </p:sp>
       <p:sp>
         <p:nvSpPr>
-          <p:cNvPr id="14" name="Text 12"/>
+          <p:cNvPr id="18" name="Text 16"/>
           <p:cNvSpPr/>
           <p:nvPr/>
         </p:nvSpPr>

--- a/docs/manager-recap/Recap-Koji-Manager.pptx
+++ b/docs/manager-recap/Recap-Koji-Manager.pptx
@@ -13478,7 +13478,7 @@
                 <a:ea typeface="Segoe UI" pitchFamily="34" charset="-122"/>
                 <a:cs typeface="Segoe UI" pitchFamily="34" charset="-120"/>
               </a:rPr>
-              <a:t>La coordination de chantier et la provision pour aléas se calculaient déjà, comme il se doit, uniquement sur le total des lots. L'assurance décennale utilisait à tort la même base, alors qu'elle doit porter sur le chiffrage total de l'affaire HT (lots + coordination + provision aléas + toute ligne précédente). Une case 'Cumulé' sur chaque ligne de majoration permet désormais de choisir sa base de calcul ; cochée par défaut sur l'assurance décennale. Corrigé dans le calcul du devis, le PDF et l'export Word, qui utilisaient chacun leur propre logique.</a:t>
+              <a:t>La coordination de chantier et la provision pour aléas se calculaient déjà, comme il se doit, uniquement sur le total des lots. L'assurance décennale utilisait à tort la même base, alors qu'elle doit porter sur le chiffrage total de l'affaire HT (lots + coordination + provision aléas + toute ligne précédente). Chaque ligne de majoration a maintenant un menu 'Base' — 'Total des lots' ou 'Chiffrage cumulé' — pour choisir explicitement sa base de calcul, réglé sur cumulé par défaut pour l'assurance décennale ; utile si d'autres lignes cumulatives sont ajoutées plus tard. Corrigé dans le calcul du devis, le PDF et l'export Word, qui utilisaient chacun leur propre logique.</a:t>
             </a:r>
             <a:endParaRPr lang="en-US" sz="1100" dirty="0"/>
           </a:p>

--- a/docs/manager-recap/Recap-Koji-Manager.pptx
+++ b/docs/manager-recap/Recap-Koji-Manager.pptx
@@ -49,9 +49,10 @@
     <p:sldId id="297" r:id="rId43"/>
     <p:sldId id="298" r:id="rId44"/>
     <p:sldId id="299" r:id="rId45"/>
+    <p:sldId id="300" r:id="rId46"/>
   </p:sldIdLst>
   <p:notesMasterIdLst>
-    <p:notesMasterId r:id="rId46"/>
+    <p:notesMasterId r:id="rId47"/>
   </p:notesMasterIdLst>
   <p:sldSz cx="12191695" cy="6858000"/>
   <p:notesSz cx="6858000" cy="12191695"/>
@@ -3913,6 +3914,94 @@
             <a:fld id="{F7021451-1387-4CA6-816F-3879F97B5CBC}" type="slidenum">
               <a:rPr lang="en-US"/>
               <a:t>44</a:t>
+            </a:fld>
+            <a:endParaRPr lang="en-US"/>
+          </a:p>
+        </p:txBody>
+      </p:sp>
+    </p:spTree>
+    <p:extLst>
+      <p:ext uri="{BB962C8B-B14F-4D97-AF65-F5344CB8AC3E}">
+        <p14:creationId xmlns:p14="http://schemas.microsoft.com/office/powerpoint/2010/main" val="1024086991"/>
+      </p:ext>
+    </p:extLst>
+  </p:cSld>
+  <p:clrMapOvr>
+    <a:masterClrMapping/>
+  </p:clrMapOvr>
+</p:notes>
+</file>
+
+<file path=ppt/notesSlides/notesSlide45.xml><?xml version="1.0" encoding="utf-8"?>
+<p:notes xmlns:a="http://schemas.openxmlformats.org/drawingml/2006/main" xmlns:r="http://schemas.openxmlformats.org/officeDocument/2006/relationships" xmlns:p="http://schemas.openxmlformats.org/presentationml/2006/main">
+  <p:cSld>
+    <p:spTree>
+      <p:nvGrpSpPr>
+        <p:cNvPr id="1" name=""/>
+        <p:cNvGrpSpPr/>
+        <p:nvPr/>
+      </p:nvGrpSpPr>
+      <p:grpSpPr>
+        <a:xfrm>
+          <a:off x="0" y="0"/>
+          <a:ext cx="0" cy="0"/>
+          <a:chOff x="0" y="0"/>
+          <a:chExt cx="0" cy="0"/>
+        </a:xfrm>
+      </p:grpSpPr>
+      <p:sp>
+        <p:nvSpPr>
+          <p:cNvPr id="2" name="Slide Image Placeholder 1"/>
+          <p:cNvSpPr>
+            <a:spLocks noGrp="1" noRot="1" noChangeAspect="1"/>
+          </p:cNvSpPr>
+          <p:nvPr>
+            <p:ph type="sldImg"/>
+          </p:nvPr>
+        </p:nvSpPr>
+        <p:spPr/>
+      </p:sp>
+      <p:sp>
+        <p:nvSpPr>
+          <p:cNvPr id="3" name="Notes Placeholder 2"/>
+          <p:cNvSpPr>
+            <a:spLocks noGrp="1"/>
+          </p:cNvSpPr>
+          <p:nvPr>
+            <p:ph type="body" idx="1"/>
+          </p:nvPr>
+        </p:nvSpPr>
+        <p:spPr/>
+        <p:txBody>
+          <a:bodyPr/>
+          <a:lstStyle/>
+          <a:p>
+            <a:r>
+              <a:rPr lang="en-US" dirty="0"/>
+              <a:t/>
+            </a:r>
+            <a:endParaRPr lang="en-US" dirty="0"/>
+          </a:p>
+        </p:txBody>
+      </p:sp>
+      <p:sp>
+        <p:nvSpPr>
+          <p:cNvPr id="4" name="Slide Number Placeholder 3"/>
+          <p:cNvSpPr>
+            <a:spLocks noGrp="1"/>
+          </p:cNvSpPr>
+          <p:nvPr>
+            <p:ph type="sldNum" sz="quarter" idx="10"/>
+          </p:nvPr>
+        </p:nvSpPr>
+        <p:spPr/>
+        <p:txBody>
+          <a:bodyPr/>
+          <a:lstStyle/>
+          <a:p>
+            <a:fld id="{F7021451-1387-4CA6-816F-3879F97B5CBC}" type="slidenum">
+              <a:rPr lang="en-US"/>
+              <a:t>45</a:t>
             </a:fld>
             <a:endParaRPr lang="en-US"/>
           </a:p>
@@ -10209,7 +10298,7 @@
                 <a:ea typeface="Segoe UI" pitchFamily="34" charset="-122"/>
                 <a:cs typeface="Segoe UI" pitchFamily="34" charset="-120"/>
               </a:rPr>
-              <a:t>41 mise(s) à jour</a:t>
+              <a:t>42 mise(s) à jour</a:t>
             </a:r>
             <a:endParaRPr lang="en-US" sz="1200" dirty="0"/>
           </a:p>
@@ -10463,7 +10552,7 @@
                 <a:ea typeface="Georgia" pitchFamily="34" charset="-122"/>
                 <a:cs typeface="Georgia" pitchFamily="34" charset="-120"/>
               </a:rPr>
-              <a:t>100</a:t>
+              <a:t>101</a:t>
             </a:r>
             <a:endParaRPr lang="en-US" sz="3200" dirty="0"/>
           </a:p>
@@ -10673,7 +10762,7 @@
                 <a:ea typeface="Georgia" pitchFamily="34" charset="-122"/>
                 <a:cs typeface="Georgia" pitchFamily="34" charset="-120"/>
               </a:rPr>
-              <a:t>41</a:t>
+              <a:t>42</a:t>
             </a:r>
             <a:endParaRPr lang="en-US" sz="3200" dirty="0"/>
           </a:p>
@@ -19927,6 +20016,344 @@
     <p:bg>
       <p:bgPr>
         <a:solidFill>
+          <a:srgbClr val="F3EEE3"/>
+        </a:solidFill>
+      </p:bgPr>
+    </p:bg>
+    <p:spTree>
+      <p:nvGrpSpPr>
+        <p:cNvPr id="1" name=""/>
+        <p:cNvGrpSpPr/>
+        <p:nvPr/>
+      </p:nvGrpSpPr>
+      <p:grpSpPr>
+        <a:xfrm>
+          <a:off x="0" y="0"/>
+          <a:ext cx="0" cy="0"/>
+          <a:chOff x="0" y="0"/>
+          <a:chExt cx="0" cy="0"/>
+        </a:xfrm>
+      </p:grpSpPr>
+      <p:sp>
+        <p:nvSpPr>
+          <p:cNvPr id="2" name="Shape 0"/>
+          <p:cNvSpPr/>
+          <p:nvPr/>
+        </p:nvSpPr>
+        <p:spPr>
+          <a:xfrm>
+            <a:off x="640080" y="411480"/>
+            <a:ext cx="2377440" cy="365760"/>
+          </a:xfrm>
+          <a:prstGeom prst="roundRect">
+            <a:avLst>
+              <a:gd name="adj" fmla="val 50000"/>
+            </a:avLst>
+          </a:prstGeom>
+          <a:solidFill>
+            <a:srgbClr val="F5E6DA"/>
+          </a:solidFill>
+          <a:ln/>
+        </p:spPr>
+      </p:sp>
+      <p:sp>
+        <p:nvSpPr>
+          <p:cNvPr id="3" name="Text 1"/>
+          <p:cNvSpPr/>
+          <p:nvPr/>
+        </p:nvSpPr>
+        <p:spPr>
+          <a:xfrm>
+            <a:off x="640080" y="411480"/>
+            <a:ext cx="2377440" cy="365760"/>
+          </a:xfrm>
+          <a:prstGeom prst="rect">
+            <a:avLst/>
+          </a:prstGeom>
+          <a:noFill/>
+          <a:ln/>
+        </p:spPr>
+        <p:txBody>
+          <a:bodyPr wrap="square" rtlCol="0" anchor="ctr"/>
+          <a:lstStyle/>
+          <a:p>
+            <a:pPr algn="ctr" indent="0" marL="0">
+              <a:buNone/>
+            </a:pPr>
+            <a:r>
+              <a:rPr lang="en-US" sz="1000" b="1" spc="100" kern="0" dirty="0">
+                <a:solidFill>
+                  <a:srgbClr val="9A4C1F"/>
+                </a:solidFill>
+                <a:latin typeface="Segoe UI" pitchFamily="34" charset="0"/>
+                <a:ea typeface="Segoe UI" pitchFamily="34" charset="-122"/>
+                <a:cs typeface="Segoe UI" pitchFamily="34" charset="-120"/>
+              </a:rPr>
+              <a:t>BACKEND</a:t>
+            </a:r>
+            <a:endParaRPr lang="en-US" sz="1000" dirty="0"/>
+          </a:p>
+        </p:txBody>
+      </p:sp>
+      <p:sp>
+        <p:nvSpPr>
+          <p:cNvPr id="4" name="Text 2"/>
+          <p:cNvSpPr/>
+          <p:nvPr/>
+        </p:nvSpPr>
+        <p:spPr>
+          <a:xfrm>
+            <a:off x="640080" y="868680"/>
+            <a:ext cx="10515600" cy="548640"/>
+          </a:xfrm>
+          <a:prstGeom prst="rect">
+            <a:avLst/>
+          </a:prstGeom>
+          <a:noFill/>
+          <a:ln/>
+        </p:spPr>
+        <p:txBody>
+          <a:bodyPr wrap="square" rtlCol="0" anchor="ctr"/>
+          <a:lstStyle/>
+          <a:p>
+            <a:pPr indent="0" marL="0">
+              <a:buNone/>
+            </a:pPr>
+            <a:r>
+              <a:rPr lang="en-US" sz="2400" b="1" dirty="0">
+                <a:solidFill>
+                  <a:srgbClr val="1B1F3B"/>
+                </a:solidFill>
+                <a:latin typeface="Georgia" pitchFamily="34" charset="0"/>
+                <a:ea typeface="Georgia" pitchFamily="34" charset="-122"/>
+                <a:cs typeface="Georgia" pitchFamily="34" charset="-120"/>
+              </a:rPr>
+              <a:t>Contacts</a:t>
+            </a:r>
+            <a:endParaRPr lang="en-US" sz="2400" dirty="0"/>
+          </a:p>
+        </p:txBody>
+      </p:sp>
+      <p:sp>
+        <p:nvSpPr>
+          <p:cNvPr id="5" name="Shape 3"/>
+          <p:cNvSpPr/>
+          <p:nvPr/>
+        </p:nvSpPr>
+        <p:spPr>
+          <a:xfrm>
+            <a:off x="640080" y="1691640"/>
+            <a:ext cx="10881360" cy="1097280"/>
+          </a:xfrm>
+          <a:prstGeom prst="roundRect">
+            <a:avLst>
+              <a:gd name="adj" fmla="val 5000"/>
+            </a:avLst>
+          </a:prstGeom>
+          <a:solidFill>
+            <a:srgbClr val="FFFFFF"/>
+          </a:solidFill>
+          <a:ln w="12700">
+            <a:solidFill>
+              <a:srgbClr val="E4DCCB"/>
+            </a:solidFill>
+            <a:prstDash val="solid"/>
+          </a:ln>
+        </p:spPr>
+      </p:sp>
+      <p:sp>
+        <p:nvSpPr>
+          <p:cNvPr id="6" name="Shape 4"/>
+          <p:cNvSpPr/>
+          <p:nvPr/>
+        </p:nvSpPr>
+        <p:spPr>
+          <a:xfrm>
+            <a:off x="640080" y="1691640"/>
+            <a:ext cx="54864" cy="1097280"/>
+          </a:xfrm>
+          <a:prstGeom prst="rect">
+            <a:avLst/>
+          </a:prstGeom>
+          <a:solidFill>
+            <a:srgbClr val="9A4C1F"/>
+          </a:solidFill>
+          <a:ln/>
+        </p:spPr>
+      </p:sp>
+      <p:sp>
+        <p:nvSpPr>
+          <p:cNvPr id="7" name="Text 5"/>
+          <p:cNvSpPr/>
+          <p:nvPr/>
+        </p:nvSpPr>
+        <p:spPr>
+          <a:xfrm>
+            <a:off x="914400" y="1801368"/>
+            <a:ext cx="10332720" cy="365760"/>
+          </a:xfrm>
+          <a:prstGeom prst="rect">
+            <a:avLst/>
+          </a:prstGeom>
+          <a:noFill/>
+          <a:ln/>
+        </p:spPr>
+        <p:txBody>
+          <a:bodyPr wrap="square" rtlCol="0" anchor="ctr"/>
+          <a:lstStyle/>
+          <a:p>
+            <a:pPr indent="0" marL="0">
+              <a:buNone/>
+            </a:pPr>
+            <a:r>
+              <a:rPr lang="en-US" sz="1400" b="1" dirty="0">
+                <a:solidFill>
+                  <a:srgbClr val="1B1F3B"/>
+                </a:solidFill>
+                <a:latin typeface="Segoe UI" pitchFamily="34" charset="0"/>
+                <a:ea typeface="Segoe UI" pitchFamily="34" charset="-122"/>
+                <a:cs typeface="Segoe UI" pitchFamily="34" charset="-120"/>
+              </a:rPr>
+              <a:t>Fondations du module Contacts (base de données)</a:t>
+            </a:r>
+            <a:endParaRPr lang="en-US" sz="1400" dirty="0"/>
+          </a:p>
+        </p:txBody>
+      </p:sp>
+      <p:sp>
+        <p:nvSpPr>
+          <p:cNvPr id="8" name="Text 6"/>
+          <p:cNvSpPr/>
+          <p:nvPr/>
+        </p:nvSpPr>
+        <p:spPr>
+          <a:xfrm>
+            <a:off x="914400" y="2148840"/>
+            <a:ext cx="10332720" cy="594360"/>
+          </a:xfrm>
+          <a:prstGeom prst="rect">
+            <a:avLst/>
+          </a:prstGeom>
+          <a:noFill/>
+          <a:ln/>
+        </p:spPr>
+        <p:txBody>
+          <a:bodyPr wrap="square" rtlCol="0" anchor="ctr"/>
+          <a:lstStyle/>
+          <a:p>
+            <a:pPr indent="0" marL="0">
+              <a:lnSpc>
+                <a:spcPts val="1400"/>
+              </a:lnSpc>
+              <a:buNone/>
+            </a:pPr>
+            <a:r>
+              <a:rPr lang="en-US" sz="1100" dirty="0">
+                <a:solidFill>
+                  <a:srgbClr val="8A7C68"/>
+                </a:solidFill>
+                <a:latin typeface="Segoe UI" pitchFamily="34" charset="0"/>
+                <a:ea typeface="Segoe UI" pitchFamily="34" charset="-122"/>
+                <a:cs typeface="Segoe UI" pitchFamily="34" charset="-120"/>
+              </a:rPr>
+              <a:t>Nouvelle entité Contact centrale (particulier ou société, plusieurs rôles cumulables : client, prospect, équipe, sous-traitant, architecte, fournisseur, société donneuse d'ordre, autre), avec une table de liaison pour les intervenants par chantier (rôle propre à chaque chantier, indépendant du rôle général de la fiche). Devis, factures et rapports d'intervention peuvent désormais pointer vers une fiche contact, sans qu'aucune migration de base de données ne soit nécessaire. Les coordonnées déjà copiées sur un devis/facture envoyé restent inchangées même si la fiche contact est modifiée ensuite. Etape technique invisible pour l'instant : l'interface (page Contacts, sélection dans les formulaires) arrive dans la foulée.</a:t>
+            </a:r>
+            <a:endParaRPr lang="en-US" sz="1100" dirty="0"/>
+          </a:p>
+        </p:txBody>
+      </p:sp>
+      <p:sp>
+        <p:nvSpPr>
+          <p:cNvPr id="9" name="Text 7"/>
+          <p:cNvSpPr/>
+          <p:nvPr/>
+        </p:nvSpPr>
+        <p:spPr>
+          <a:xfrm>
+            <a:off x="365760" y="6510528"/>
+            <a:ext cx="5486400" cy="274320"/>
+          </a:xfrm>
+          <a:prstGeom prst="rect">
+            <a:avLst/>
+          </a:prstGeom>
+          <a:noFill/>
+          <a:ln/>
+        </p:spPr>
+        <p:txBody>
+          <a:bodyPr wrap="square" rtlCol="0" anchor="ctr"/>
+          <a:lstStyle/>
+          <a:p>
+            <a:pPr indent="0" marL="0">
+              <a:buNone/>
+            </a:pPr>
+            <a:r>
+              <a:rPr lang="en-US" sz="900" dirty="0">
+                <a:solidFill>
+                  <a:srgbClr val="8A7C68"/>
+                </a:solidFill>
+                <a:latin typeface="Segoe UI" pitchFamily="34" charset="0"/>
+                <a:ea typeface="Segoe UI" pitchFamily="34" charset="-122"/>
+                <a:cs typeface="Segoe UI" pitchFamily="34" charset="-120"/>
+              </a:rPr>
+              <a:t>Kôji Web — Récapitulatif technique</a:t>
+            </a:r>
+            <a:endParaRPr lang="en-US" sz="900" dirty="0"/>
+          </a:p>
+        </p:txBody>
+      </p:sp>
+      <p:sp>
+        <p:nvSpPr>
+          <p:cNvPr id="10" name="Text 8"/>
+          <p:cNvSpPr/>
+          <p:nvPr/>
+        </p:nvSpPr>
+        <p:spPr>
+          <a:xfrm>
+            <a:off x="9601200" y="6510528"/>
+            <a:ext cx="2194560" cy="274320"/>
+          </a:xfrm>
+          <a:prstGeom prst="rect">
+            <a:avLst/>
+          </a:prstGeom>
+          <a:noFill/>
+          <a:ln/>
+        </p:spPr>
+        <p:txBody>
+          <a:bodyPr wrap="square" rtlCol="0" anchor="ctr"/>
+          <a:lstStyle/>
+          <a:p>
+            <a:pPr algn="r" indent="0" marL="0">
+              <a:buNone/>
+            </a:pPr>
+            <a:r>
+              <a:rPr lang="en-US" sz="900" dirty="0">
+                <a:solidFill>
+                  <a:srgbClr val="8A7C68"/>
+                </a:solidFill>
+                <a:latin typeface="Segoe UI" pitchFamily="34" charset="0"/>
+                <a:ea typeface="Segoe UI" pitchFamily="34" charset="-122"/>
+                <a:cs typeface="Segoe UI" pitchFamily="34" charset="-120"/>
+              </a:rPr>
+              <a:t>36</a:t>
+            </a:r>
+            <a:endParaRPr lang="en-US" sz="900" dirty="0"/>
+          </a:p>
+        </p:txBody>
+      </p:sp>
+    </p:spTree>
+  </p:cSld>
+  <p:clrMapOvr>
+    <a:masterClrMapping/>
+  </p:clrMapOvr>
+</p:sld>
+</file>
+
+<file path=ppt/slides/slide37.xml><?xml version="1.0" encoding="utf-8"?>
+<p:sld xmlns:a="http://schemas.openxmlformats.org/drawingml/2006/main" xmlns:r="http://schemas.openxmlformats.org/officeDocument/2006/relationships" xmlns:p="http://schemas.openxmlformats.org/presentationml/2006/main">
+  <p:cSld name="Slide 37">
+    <p:bg>
+      <p:bgPr>
+        <a:solidFill>
           <a:srgbClr val="0B1030"/>
         </a:solidFill>
       </p:bgPr>
@@ -20124,344 +20551,6 @@
       <p:sp>
         <p:nvSpPr>
           <p:cNvPr id="7" name="Text 5"/>
-          <p:cNvSpPr/>
-          <p:nvPr/>
-        </p:nvSpPr>
-        <p:spPr>
-          <a:xfrm>
-            <a:off x="9601200" y="6510528"/>
-            <a:ext cx="2194560" cy="274320"/>
-          </a:xfrm>
-          <a:prstGeom prst="rect">
-            <a:avLst/>
-          </a:prstGeom>
-          <a:noFill/>
-          <a:ln/>
-        </p:spPr>
-        <p:txBody>
-          <a:bodyPr wrap="square" rtlCol="0" anchor="ctr"/>
-          <a:lstStyle/>
-          <a:p>
-            <a:pPr algn="r" indent="0" marL="0">
-              <a:buNone/>
-            </a:pPr>
-            <a:r>
-              <a:rPr lang="en-US" sz="900" dirty="0">
-                <a:solidFill>
-                  <a:srgbClr val="8A7C68"/>
-                </a:solidFill>
-                <a:latin typeface="Segoe UI" pitchFamily="34" charset="0"/>
-                <a:ea typeface="Segoe UI" pitchFamily="34" charset="-122"/>
-                <a:cs typeface="Segoe UI" pitchFamily="34" charset="-120"/>
-              </a:rPr>
-              <a:t>36</a:t>
-            </a:r>
-            <a:endParaRPr lang="en-US" sz="900" dirty="0"/>
-          </a:p>
-        </p:txBody>
-      </p:sp>
-    </p:spTree>
-  </p:cSld>
-  <p:clrMapOvr>
-    <a:masterClrMapping/>
-  </p:clrMapOvr>
-</p:sld>
-</file>
-
-<file path=ppt/slides/slide37.xml><?xml version="1.0" encoding="utf-8"?>
-<p:sld xmlns:a="http://schemas.openxmlformats.org/drawingml/2006/main" xmlns:r="http://schemas.openxmlformats.org/officeDocument/2006/relationships" xmlns:p="http://schemas.openxmlformats.org/presentationml/2006/main">
-  <p:cSld name="Slide 37">
-    <p:bg>
-      <p:bgPr>
-        <a:solidFill>
-          <a:srgbClr val="F3EEE3"/>
-        </a:solidFill>
-      </p:bgPr>
-    </p:bg>
-    <p:spTree>
-      <p:nvGrpSpPr>
-        <p:cNvPr id="1" name=""/>
-        <p:cNvGrpSpPr/>
-        <p:nvPr/>
-      </p:nvGrpSpPr>
-      <p:grpSpPr>
-        <a:xfrm>
-          <a:off x="0" y="0"/>
-          <a:ext cx="0" cy="0"/>
-          <a:chOff x="0" y="0"/>
-          <a:chExt cx="0" cy="0"/>
-        </a:xfrm>
-      </p:grpSpPr>
-      <p:sp>
-        <p:nvSpPr>
-          <p:cNvPr id="2" name="Shape 0"/>
-          <p:cNvSpPr/>
-          <p:nvPr/>
-        </p:nvSpPr>
-        <p:spPr>
-          <a:xfrm>
-            <a:off x="640080" y="411480"/>
-            <a:ext cx="2377440" cy="365760"/>
-          </a:xfrm>
-          <a:prstGeom prst="roundRect">
-            <a:avLst>
-              <a:gd name="adj" fmla="val 50000"/>
-            </a:avLst>
-          </a:prstGeom>
-          <a:solidFill>
-            <a:srgbClr val="E6EFE4"/>
-          </a:solidFill>
-          <a:ln/>
-        </p:spPr>
-      </p:sp>
-      <p:sp>
-        <p:nvSpPr>
-          <p:cNvPr id="3" name="Text 1"/>
-          <p:cNvSpPr/>
-          <p:nvPr/>
-        </p:nvSpPr>
-        <p:spPr>
-          <a:xfrm>
-            <a:off x="640080" y="411480"/>
-            <a:ext cx="2377440" cy="365760"/>
-          </a:xfrm>
-          <a:prstGeom prst="rect">
-            <a:avLst/>
-          </a:prstGeom>
-          <a:noFill/>
-          <a:ln/>
-        </p:spPr>
-        <p:txBody>
-          <a:bodyPr wrap="square" rtlCol="0" anchor="ctr"/>
-          <a:lstStyle/>
-          <a:p>
-            <a:pPr algn="ctr" indent="0" marL="0">
-              <a:buNone/>
-            </a:pPr>
-            <a:r>
-              <a:rPr lang="en-US" sz="1000" b="1" spc="100" kern="0" dirty="0">
-                <a:solidFill>
-                  <a:srgbClr val="386641"/>
-                </a:solidFill>
-                <a:latin typeface="Segoe UI" pitchFamily="34" charset="0"/>
-                <a:ea typeface="Segoe UI" pitchFamily="34" charset="-122"/>
-                <a:cs typeface="Segoe UI" pitchFamily="34" charset="-120"/>
-              </a:rPr>
-              <a:t>BASE DE DONNÉES</a:t>
-            </a:r>
-            <a:endParaRPr lang="en-US" sz="1000" dirty="0"/>
-          </a:p>
-        </p:txBody>
-      </p:sp>
-      <p:sp>
-        <p:nvSpPr>
-          <p:cNvPr id="4" name="Text 2"/>
-          <p:cNvSpPr/>
-          <p:nvPr/>
-        </p:nvSpPr>
-        <p:spPr>
-          <a:xfrm>
-            <a:off x="640080" y="868680"/>
-            <a:ext cx="10515600" cy="548640"/>
-          </a:xfrm>
-          <a:prstGeom prst="rect">
-            <a:avLst/>
-          </a:prstGeom>
-          <a:noFill/>
-          <a:ln/>
-        </p:spPr>
-        <p:txBody>
-          <a:bodyPr wrap="square" rtlCol="0" anchor="ctr"/>
-          <a:lstStyle/>
-          <a:p>
-            <a:pPr indent="0" marL="0">
-              <a:buNone/>
-            </a:pPr>
-            <a:r>
-              <a:rPr lang="en-US" sz="2400" b="1" dirty="0">
-                <a:solidFill>
-                  <a:srgbClr val="1B1F3B"/>
-                </a:solidFill>
-                <a:latin typeface="Georgia" pitchFamily="34" charset="0"/>
-                <a:ea typeface="Georgia" pitchFamily="34" charset="-122"/>
-                <a:cs typeface="Georgia" pitchFamily="34" charset="-120"/>
-              </a:rPr>
-              <a:t>Fondations</a:t>
-            </a:r>
-            <a:endParaRPr lang="en-US" sz="2400" dirty="0"/>
-          </a:p>
-        </p:txBody>
-      </p:sp>
-      <p:sp>
-        <p:nvSpPr>
-          <p:cNvPr id="5" name="Shape 3"/>
-          <p:cNvSpPr/>
-          <p:nvPr/>
-        </p:nvSpPr>
-        <p:spPr>
-          <a:xfrm>
-            <a:off x="640080" y="1691640"/>
-            <a:ext cx="10881360" cy="1097280"/>
-          </a:xfrm>
-          <a:prstGeom prst="roundRect">
-            <a:avLst>
-              <a:gd name="adj" fmla="val 5000"/>
-            </a:avLst>
-          </a:prstGeom>
-          <a:solidFill>
-            <a:srgbClr val="FFFFFF"/>
-          </a:solidFill>
-          <a:ln w="12700">
-            <a:solidFill>
-              <a:srgbClr val="E4DCCB"/>
-            </a:solidFill>
-            <a:prstDash val="solid"/>
-          </a:ln>
-        </p:spPr>
-      </p:sp>
-      <p:sp>
-        <p:nvSpPr>
-          <p:cNvPr id="6" name="Shape 4"/>
-          <p:cNvSpPr/>
-          <p:nvPr/>
-        </p:nvSpPr>
-        <p:spPr>
-          <a:xfrm>
-            <a:off x="640080" y="1691640"/>
-            <a:ext cx="54864" cy="1097280"/>
-          </a:xfrm>
-          <a:prstGeom prst="rect">
-            <a:avLst/>
-          </a:prstGeom>
-          <a:solidFill>
-            <a:srgbClr val="386641"/>
-          </a:solidFill>
-          <a:ln/>
-        </p:spPr>
-      </p:sp>
-      <p:sp>
-        <p:nvSpPr>
-          <p:cNvPr id="7" name="Text 5"/>
-          <p:cNvSpPr/>
-          <p:nvPr/>
-        </p:nvSpPr>
-        <p:spPr>
-          <a:xfrm>
-            <a:off x="914400" y="1801368"/>
-            <a:ext cx="10332720" cy="365760"/>
-          </a:xfrm>
-          <a:prstGeom prst="rect">
-            <a:avLst/>
-          </a:prstGeom>
-          <a:noFill/>
-          <a:ln/>
-        </p:spPr>
-        <p:txBody>
-          <a:bodyPr wrap="square" rtlCol="0" anchor="ctr"/>
-          <a:lstStyle/>
-          <a:p>
-            <a:pPr indent="0" marL="0">
-              <a:buNone/>
-            </a:pPr>
-            <a:r>
-              <a:rPr lang="en-US" sz="1400" b="1" dirty="0">
-                <a:solidFill>
-                  <a:srgbClr val="1B1F3B"/>
-                </a:solidFill>
-                <a:latin typeface="Segoe UI" pitchFamily="34" charset="0"/>
-                <a:ea typeface="Segoe UI" pitchFamily="34" charset="-122"/>
-                <a:cs typeface="Segoe UI" pitchFamily="34" charset="-120"/>
-              </a:rPr>
-              <a:t>Connexion Vercel / configuration environnement</a:t>
-            </a:r>
-            <a:endParaRPr lang="en-US" sz="1400" dirty="0"/>
-          </a:p>
-        </p:txBody>
-      </p:sp>
-      <p:sp>
-        <p:nvSpPr>
-          <p:cNvPr id="8" name="Text 6"/>
-          <p:cNvSpPr/>
-          <p:nvPr/>
-        </p:nvSpPr>
-        <p:spPr>
-          <a:xfrm>
-            <a:off x="914400" y="2148840"/>
-            <a:ext cx="10332720" cy="594360"/>
-          </a:xfrm>
-          <a:prstGeom prst="rect">
-            <a:avLst/>
-          </a:prstGeom>
-          <a:noFill/>
-          <a:ln/>
-        </p:spPr>
-        <p:txBody>
-          <a:bodyPr wrap="square" rtlCol="0" anchor="ctr"/>
-          <a:lstStyle/>
-          <a:p>
-            <a:pPr indent="0" marL="0">
-              <a:lnSpc>
-                <a:spcPts val="1400"/>
-              </a:lnSpc>
-              <a:buNone/>
-            </a:pPr>
-            <a:r>
-              <a:rPr lang="en-US" sz="1100" dirty="0">
-                <a:solidFill>
-                  <a:srgbClr val="8A7C68"/>
-                </a:solidFill>
-                <a:latin typeface="Segoe UI" pitchFamily="34" charset="0"/>
-                <a:ea typeface="Segoe UI" pitchFamily="34" charset="-122"/>
-                <a:cs typeface="Segoe UI" pitchFamily="34" charset="-120"/>
-              </a:rPr>
-              <a:t>Correction de la configuration d'authentification et du SMTP sur l'environnement de production Vercel.</a:t>
-            </a:r>
-            <a:endParaRPr lang="en-US" sz="1100" dirty="0"/>
-          </a:p>
-        </p:txBody>
-      </p:sp>
-      <p:sp>
-        <p:nvSpPr>
-          <p:cNvPr id="9" name="Text 7"/>
-          <p:cNvSpPr/>
-          <p:nvPr/>
-        </p:nvSpPr>
-        <p:spPr>
-          <a:xfrm>
-            <a:off x="365760" y="6510528"/>
-            <a:ext cx="5486400" cy="274320"/>
-          </a:xfrm>
-          <a:prstGeom prst="rect">
-            <a:avLst/>
-          </a:prstGeom>
-          <a:noFill/>
-          <a:ln/>
-        </p:spPr>
-        <p:txBody>
-          <a:bodyPr wrap="square" rtlCol="0" anchor="ctr"/>
-          <a:lstStyle/>
-          <a:p>
-            <a:pPr indent="0" marL="0">
-              <a:buNone/>
-            </a:pPr>
-            <a:r>
-              <a:rPr lang="en-US" sz="900" dirty="0">
-                <a:solidFill>
-                  <a:srgbClr val="8A7C68"/>
-                </a:solidFill>
-                <a:latin typeface="Segoe UI" pitchFamily="34" charset="0"/>
-                <a:ea typeface="Segoe UI" pitchFamily="34" charset="-122"/>
-                <a:cs typeface="Segoe UI" pitchFamily="34" charset="-120"/>
-              </a:rPr>
-              <a:t>Kôji Web — Récapitulatif technique</a:t>
-            </a:r>
-            <a:endParaRPr lang="en-US" sz="900" dirty="0"/>
-          </a:p>
-        </p:txBody>
-      </p:sp>
-      <p:sp>
-        <p:nvSpPr>
-          <p:cNvPr id="10" name="Text 8"/>
           <p:cNvSpPr/>
           <p:nvPr/>
         </p:nvSpPr>
@@ -20624,7 +20713,7 @@
                 <a:ea typeface="Georgia" pitchFamily="34" charset="-122"/>
                 <a:cs typeface="Georgia" pitchFamily="34" charset="-120"/>
               </a:rPr>
-              <a:t>Devis</a:t>
+              <a:t>Fondations</a:t>
             </a:r>
             <a:endParaRPr lang="en-US" sz="2400" dirty="0"/>
           </a:p>
@@ -20710,7 +20799,7 @@
                 <a:ea typeface="Segoe UI" pitchFamily="34" charset="-122"/>
                 <a:cs typeface="Segoe UI" pitchFamily="34" charset="-120"/>
               </a:rPr>
-              <a:t>Migration des devis vers Supabase (table partagée)</a:t>
+              <a:t>Connexion Vercel / configuration environnement</a:t>
             </a:r>
             <a:endParaRPr lang="en-US" sz="1400" dirty="0"/>
           </a:p>
@@ -20752,7 +20841,7 @@
                 <a:ea typeface="Segoe UI" pitchFamily="34" charset="-122"/>
                 <a:cs typeface="Segoe UI" pitchFamily="34" charset="-120"/>
               </a:rPr>
-              <a:t>Les devis créés sur le site web et sur l'application mobile (Firas) vivent désormais dans la même table Supabase 'quotes', avec un mapping bidirectionnel dédié (lib/quote-mapping.js).</a:t>
+              <a:t>Correction de la configuration d'authentification et du SMTP sur l'environnement de production Vercel.</a:t>
             </a:r>
             <a:endParaRPr lang="en-US" sz="1100" dirty="0"/>
           </a:p>
@@ -20962,7 +21051,7 @@
                 <a:ea typeface="Georgia" pitchFamily="34" charset="-122"/>
                 <a:cs typeface="Georgia" pitchFamily="34" charset="-120"/>
               </a:rPr>
-              <a:t>Chantiers</a:t>
+              <a:t>Devis</a:t>
             </a:r>
             <a:endParaRPr lang="en-US" sz="2400" dirty="0"/>
           </a:p>
@@ -21048,7 +21137,7 @@
                 <a:ea typeface="Segoe UI" pitchFamily="34" charset="-122"/>
                 <a:cs typeface="Segoe UI" pitchFamily="34" charset="-120"/>
               </a:rPr>
-              <a:t>Connexion Supabase : chantiers, planning, fournitures</a:t>
+              <a:t>Migration des devis vers Supabase (table partagée)</a:t>
             </a:r>
             <a:endParaRPr lang="en-US" sz="1400" dirty="0"/>
           </a:p>
@@ -21090,7 +21179,7 @@
                 <a:ea typeface="Segoe UI" pitchFamily="34" charset="-122"/>
                 <a:cs typeface="Segoe UI" pitchFamily="34" charset="-120"/>
               </a:rPr>
-              <a:t>Ces trois modules sont branchés sur la base partagée avec l'application mobile ; les comptes utilisateurs sont également partagés entre les deux plateformes.</a:t>
+              <a:t>Les devis créés sur le site web et sur l'application mobile (Firas) vivent désormais dans la même table Supabase 'quotes', avec un mapping bidirectionnel dédié (lib/quote-mapping.js).</a:t>
             </a:r>
             <a:endParaRPr lang="en-US" sz="1100" dirty="0"/>
           </a:p>
@@ -22022,7 +22111,7 @@
                 <a:ea typeface="Georgia" pitchFamily="34" charset="-122"/>
                 <a:cs typeface="Georgia" pitchFamily="34" charset="-120"/>
               </a:rPr>
-              <a:t>Équipe</a:t>
+              <a:t>Chantiers</a:t>
             </a:r>
             <a:endParaRPr lang="en-US" sz="2400" dirty="0"/>
           </a:p>
@@ -22108,7 +22197,7 @@
                 <a:ea typeface="Segoe UI" pitchFamily="34" charset="-122"/>
                 <a:cs typeface="Segoe UI" pitchFamily="34" charset="-120"/>
               </a:rPr>
-              <a:t>Nouvelle donnée : heures contractuelles par ouvrier</a:t>
+              <a:t>Connexion Supabase : chantiers, planning, fournitures</a:t>
             </a:r>
             <a:endParaRPr lang="en-US" sz="1400" dirty="0"/>
           </a:p>
@@ -22150,7 +22239,7 @@
                 <a:ea typeface="Segoe UI" pitchFamily="34" charset="-122"/>
                 <a:cs typeface="Segoe UI" pitchFamily="34" charset="-120"/>
               </a:rPr>
-              <a:t>Ajout d'un paramètre 'heures contractuelles / semaine' (35h par défaut) sur chaque fiche ouvrier, utilisé pour le calcul des écarts.</a:t>
+              <a:t>Ces trois modules sont branchés sur la base partagée avec l'application mobile ; les comptes utilisateurs sont également partagés entre les deux plateformes.</a:t>
             </a:r>
             <a:endParaRPr lang="en-US" sz="1100" dirty="0"/>
           </a:p>
@@ -22360,7 +22449,7 @@
                 <a:ea typeface="Georgia" pitchFamily="34" charset="-122"/>
                 <a:cs typeface="Georgia" pitchFamily="34" charset="-120"/>
               </a:rPr>
-              <a:t>Accueil &amp; stabilité</a:t>
+              <a:t>Équipe</a:t>
             </a:r>
             <a:endParaRPr lang="en-US" sz="2400" dirty="0"/>
           </a:p>
@@ -22446,7 +22535,7 @@
                 <a:ea typeface="Segoe UI" pitchFamily="34" charset="-122"/>
                 <a:cs typeface="Segoe UI" pitchFamily="34" charset="-120"/>
               </a:rPr>
-              <a:t>Nettoyage du backend</a:t>
+              <a:t>Nouvelle donnée : heures contractuelles par ouvrier</a:t>
             </a:r>
             <a:endParaRPr lang="en-US" sz="1400" dirty="0"/>
           </a:p>
@@ -22488,7 +22577,7 @@
                 <a:ea typeface="Segoe UI" pitchFamily="34" charset="-122"/>
                 <a:cs typeface="Segoe UI" pitchFamily="34" charset="-120"/>
               </a:rPr>
-              <a:t>Audit complet des routes serveur : suppression du code mort (module Marketplace), vérification de la cohérence entre données locales et données Supabase sur l'ensemble de l'application.</a:t>
+              <a:t>Ajout d'un paramètre 'heures contractuelles / semaine' (35h par défaut) sur chaque fiche ouvrier, utilisé pour le calcul des écarts.</a:t>
             </a:r>
             <a:endParaRPr lang="en-US" sz="1100" dirty="0"/>
           </a:p>
@@ -22698,7 +22787,7 @@
                 <a:ea typeface="Georgia" pitchFamily="34" charset="-122"/>
                 <a:cs typeface="Georgia" pitchFamily="34" charset="-120"/>
               </a:rPr>
-              <a:t>Maintenance technique</a:t>
+              <a:t>Accueil &amp; stabilité</a:t>
             </a:r>
             <a:endParaRPr lang="en-US" sz="2400" dirty="0"/>
           </a:p>
@@ -22784,7 +22873,7 @@
                 <a:ea typeface="Segoe UI" pitchFamily="34" charset="-122"/>
                 <a:cs typeface="Segoe UI" pitchFamily="34" charset="-120"/>
               </a:rPr>
-              <a:t>Nettoyage approfondi du code</a:t>
+              <a:t>Nettoyage du backend</a:t>
             </a:r>
             <a:endParaRPr lang="en-US" sz="1400" dirty="0"/>
           </a:p>
@@ -22826,7 +22915,7 @@
                 <a:ea typeface="Segoe UI" pitchFamily="34" charset="-122"/>
                 <a:cs typeface="Segoe UI" pitchFamily="34" charset="-120"/>
               </a:rPr>
-              <a:t>Audit complet du projet (pages, routes, fonctions, dépendances) pour repérer tout ce qui n'était plus utilisé ; suppression de 6 pages orphelines (onboarding, welcome, compte, anciennes pages devis en 3 étapes), d'une route de connexion de démonstration, d'un dossier de composants dupliqué obsolète, de plusieurs fonctions inutilisées et d'une dépendance logicielle non utilisée — sans toucher aux fonctionnalités actives.</a:t>
+              <a:t>Audit complet des routes serveur : suppression du code mort (module Marketplace), vérification de la cohérence entre données locales et données Supabase sur l'ensemble de l'application.</a:t>
             </a:r>
             <a:endParaRPr lang="en-US" sz="1100" dirty="0"/>
           </a:p>
@@ -22834,263 +22923,7 @@
       </p:sp>
       <p:sp>
         <p:nvSpPr>
-          <p:cNvPr id="9" name="Shape 7"/>
-          <p:cNvSpPr/>
-          <p:nvPr/>
-        </p:nvSpPr>
-        <p:spPr>
-          <a:xfrm>
-            <a:off x="640080" y="2926080"/>
-            <a:ext cx="10881360" cy="1097280"/>
-          </a:xfrm>
-          <a:prstGeom prst="roundRect">
-            <a:avLst>
-              <a:gd name="adj" fmla="val 5000"/>
-            </a:avLst>
-          </a:prstGeom>
-          <a:solidFill>
-            <a:srgbClr val="FFFFFF"/>
-          </a:solidFill>
-          <a:ln w="12700">
-            <a:solidFill>
-              <a:srgbClr val="E4DCCB"/>
-            </a:solidFill>
-            <a:prstDash val="solid"/>
-          </a:ln>
-        </p:spPr>
-      </p:sp>
-      <p:sp>
-        <p:nvSpPr>
-          <p:cNvPr id="10" name="Shape 8"/>
-          <p:cNvSpPr/>
-          <p:nvPr/>
-        </p:nvSpPr>
-        <p:spPr>
-          <a:xfrm>
-            <a:off x="640080" y="2926080"/>
-            <a:ext cx="54864" cy="1097280"/>
-          </a:xfrm>
-          <a:prstGeom prst="rect">
-            <a:avLst/>
-          </a:prstGeom>
-          <a:solidFill>
-            <a:srgbClr val="386641"/>
-          </a:solidFill>
-          <a:ln/>
-        </p:spPr>
-      </p:sp>
-      <p:sp>
-        <p:nvSpPr>
-          <p:cNvPr id="11" name="Text 9"/>
-          <p:cNvSpPr/>
-          <p:nvPr/>
-        </p:nvSpPr>
-        <p:spPr>
-          <a:xfrm>
-            <a:off x="914400" y="3035808"/>
-            <a:ext cx="10332720" cy="365760"/>
-          </a:xfrm>
-          <a:prstGeom prst="rect">
-            <a:avLst/>
-          </a:prstGeom>
-          <a:noFill/>
-          <a:ln/>
-        </p:spPr>
-        <p:txBody>
-          <a:bodyPr wrap="square" rtlCol="0" anchor="ctr"/>
-          <a:lstStyle/>
-          <a:p>
-            <a:pPr indent="0" marL="0">
-              <a:buNone/>
-            </a:pPr>
-            <a:r>
-              <a:rPr lang="en-US" sz="1400" b="1" dirty="0">
-                <a:solidFill>
-                  <a:srgbClr val="1B1F3B"/>
-                </a:solidFill>
-                <a:latin typeface="Segoe UI" pitchFamily="34" charset="0"/>
-                <a:ea typeface="Segoe UI" pitchFamily="34" charset="-122"/>
-                <a:cs typeface="Segoe UI" pitchFamily="34" charset="-120"/>
-              </a:rPr>
-              <a:t>Suppression de code mort dans la génération de devis</a:t>
-            </a:r>
-            <a:endParaRPr lang="en-US" sz="1400" dirty="0"/>
-          </a:p>
-        </p:txBody>
-      </p:sp>
-      <p:sp>
-        <p:nvSpPr>
-          <p:cNvPr id="12" name="Text 10"/>
-          <p:cNvSpPr/>
-          <p:nvPr/>
-        </p:nvSpPr>
-        <p:spPr>
-          <a:xfrm>
-            <a:off x="914400" y="3383280"/>
-            <a:ext cx="10332720" cy="594360"/>
-          </a:xfrm>
-          <a:prstGeom prst="rect">
-            <a:avLst/>
-          </a:prstGeom>
-          <a:noFill/>
-          <a:ln/>
-        </p:spPr>
-        <p:txBody>
-          <a:bodyPr wrap="square" rtlCol="0" anchor="ctr"/>
-          <a:lstStyle/>
-          <a:p>
-            <a:pPr indent="0" marL="0">
-              <a:lnSpc>
-                <a:spcPts val="1400"/>
-              </a:lnSpc>
-              <a:buNone/>
-            </a:pPr>
-            <a:r>
-              <a:rPr lang="en-US" sz="1100" dirty="0">
-                <a:solidFill>
-                  <a:srgbClr val="8A7C68"/>
-                </a:solidFill>
-                <a:latin typeface="Segoe UI" pitchFamily="34" charset="0"/>
-                <a:ea typeface="Segoe UI" pitchFamily="34" charset="-122"/>
-                <a:cs typeface="Segoe UI" pitchFamily="34" charset="-120"/>
-              </a:rPr>
-              <a:t>Un ancien générateur de devis PDF, devenu inaccessible après une précédente refonte (code jamais exécuté), a été retiré du fichier technique de génération de documents.</a:t>
-            </a:r>
-            <a:endParaRPr lang="en-US" sz="1100" dirty="0"/>
-          </a:p>
-        </p:txBody>
-      </p:sp>
-      <p:sp>
-        <p:nvSpPr>
-          <p:cNvPr id="13" name="Shape 11"/>
-          <p:cNvSpPr/>
-          <p:nvPr/>
-        </p:nvSpPr>
-        <p:spPr>
-          <a:xfrm>
-            <a:off x="640080" y="4160520"/>
-            <a:ext cx="10881360" cy="1097280"/>
-          </a:xfrm>
-          <a:prstGeom prst="roundRect">
-            <a:avLst>
-              <a:gd name="adj" fmla="val 5000"/>
-            </a:avLst>
-          </a:prstGeom>
-          <a:solidFill>
-            <a:srgbClr val="FFFFFF"/>
-          </a:solidFill>
-          <a:ln w="12700">
-            <a:solidFill>
-              <a:srgbClr val="E4DCCB"/>
-            </a:solidFill>
-            <a:prstDash val="solid"/>
-          </a:ln>
-        </p:spPr>
-      </p:sp>
-      <p:sp>
-        <p:nvSpPr>
-          <p:cNvPr id="14" name="Shape 12"/>
-          <p:cNvSpPr/>
-          <p:nvPr/>
-        </p:nvSpPr>
-        <p:spPr>
-          <a:xfrm>
-            <a:off x="640080" y="4160520"/>
-            <a:ext cx="54864" cy="1097280"/>
-          </a:xfrm>
-          <a:prstGeom prst="rect">
-            <a:avLst/>
-          </a:prstGeom>
-          <a:solidFill>
-            <a:srgbClr val="386641"/>
-          </a:solidFill>
-          <a:ln/>
-        </p:spPr>
-      </p:sp>
-      <p:sp>
-        <p:nvSpPr>
-          <p:cNvPr id="15" name="Text 13"/>
-          <p:cNvSpPr/>
-          <p:nvPr/>
-        </p:nvSpPr>
-        <p:spPr>
-          <a:xfrm>
-            <a:off x="914400" y="4270248"/>
-            <a:ext cx="10332720" cy="365760"/>
-          </a:xfrm>
-          <a:prstGeom prst="rect">
-            <a:avLst/>
-          </a:prstGeom>
-          <a:noFill/>
-          <a:ln/>
-        </p:spPr>
-        <p:txBody>
-          <a:bodyPr wrap="square" rtlCol="0" anchor="ctr"/>
-          <a:lstStyle/>
-          <a:p>
-            <a:pPr indent="0" marL="0">
-              <a:buNone/>
-            </a:pPr>
-            <a:r>
-              <a:rPr lang="en-US" sz="1400" b="1" dirty="0">
-                <a:solidFill>
-                  <a:srgbClr val="1B1F3B"/>
-                </a:solidFill>
-                <a:latin typeface="Segoe UI" pitchFamily="34" charset="0"/>
-                <a:ea typeface="Segoe UI" pitchFamily="34" charset="-122"/>
-                <a:cs typeface="Segoe UI" pitchFamily="34" charset="-120"/>
-              </a:rPr>
-              <a:t>Suppression de code mort dans l'export Word des devis</a:t>
-            </a:r>
-            <a:endParaRPr lang="en-US" sz="1400" dirty="0"/>
-          </a:p>
-        </p:txBody>
-      </p:sp>
-      <p:sp>
-        <p:nvSpPr>
-          <p:cNvPr id="16" name="Text 14"/>
-          <p:cNvSpPr/>
-          <p:nvPr/>
-        </p:nvSpPr>
-        <p:spPr>
-          <a:xfrm>
-            <a:off x="914400" y="4617720"/>
-            <a:ext cx="10332720" cy="594360"/>
-          </a:xfrm>
-          <a:prstGeom prst="rect">
-            <a:avLst/>
-          </a:prstGeom>
-          <a:noFill/>
-          <a:ln/>
-        </p:spPr>
-        <p:txBody>
-          <a:bodyPr wrap="square" rtlCol="0" anchor="ctr"/>
-          <a:lstStyle/>
-          <a:p>
-            <a:pPr indent="0" marL="0">
-              <a:lnSpc>
-                <a:spcPts val="1400"/>
-              </a:lnSpc>
-              <a:buNone/>
-            </a:pPr>
-            <a:r>
-              <a:rPr lang="en-US" sz="1100" dirty="0">
-                <a:solidFill>
-                  <a:srgbClr val="8A7C68"/>
-                </a:solidFill>
-                <a:latin typeface="Segoe UI" pitchFamily="34" charset="0"/>
-                <a:ea typeface="Segoe UI" pitchFamily="34" charset="-122"/>
-                <a:cs typeface="Segoe UI" pitchFamily="34" charset="-120"/>
-              </a:rPr>
-              <a:t>Un second bloc de génération de document, devenu inaccessible après une précédente refonte (jamais exécuté), a été retiré du fichier technique de génération de documents.</a:t>
-            </a:r>
-            <a:endParaRPr lang="en-US" sz="1100" dirty="0"/>
-          </a:p>
-        </p:txBody>
-      </p:sp>
-      <p:sp>
-        <p:nvSpPr>
-          <p:cNvPr id="17" name="Text 15"/>
+          <p:cNvPr id="9" name="Text 7"/>
           <p:cNvSpPr/>
           <p:nvPr/>
         </p:nvSpPr>
@@ -23129,7 +22962,7 @@
       </p:sp>
       <p:sp>
         <p:nvSpPr>
-          <p:cNvPr id="18" name="Text 16"/>
+          <p:cNvPr id="10" name="Text 8"/>
           <p:cNvSpPr/>
           <p:nvPr/>
         </p:nvSpPr>
@@ -23292,7 +23125,7 @@
                 <a:ea typeface="Georgia" pitchFamily="34" charset="-122"/>
                 <a:cs typeface="Georgia" pitchFamily="34" charset="-120"/>
               </a:rPr>
-              <a:t>Sécurité</a:t>
+              <a:t>Maintenance technique</a:t>
             </a:r>
             <a:endParaRPr lang="en-US" sz="2400" dirty="0"/>
           </a:p>
@@ -23378,7 +23211,7 @@
                 <a:ea typeface="Segoe UI" pitchFamily="34" charset="-122"/>
                 <a:cs typeface="Segoe UI" pitchFamily="34" charset="-120"/>
               </a:rPr>
-              <a:t>Base de données partagée verrouillée</a:t>
+              <a:t>Nettoyage approfondi du code</a:t>
             </a:r>
             <a:endParaRPr lang="en-US" sz="1400" dirty="0"/>
           </a:p>
@@ -23420,7 +23253,7 @@
                 <a:ea typeface="Segoe UI" pitchFamily="34" charset="-122"/>
                 <a:cs typeface="Segoe UI" pitchFamily="34" charset="-120"/>
               </a:rPr>
-              <a:t>La table contenant l'essentiel des données de l'application était lisible par n'importe qui sur internet avec la simple clé publique du site, sans connexion. L'application y accède désormais avec une clé privée réservée au serveur, ce qui permet de fermer complètement l'accès public sans rien casser.</a:t>
+              <a:t>Audit complet du projet (pages, routes, fonctions, dépendances) pour repérer tout ce qui n'était plus utilisé ; suppression de 6 pages orphelines (onboarding, welcome, compte, anciennes pages devis en 3 étapes), d'une route de connexion de démonstration, d'un dossier de composants dupliqué obsolète, de plusieurs fonctions inutilisées et d'une dépendance logicielle non utilisée — sans toucher aux fonctionnalités actives.</a:t>
             </a:r>
             <a:endParaRPr lang="en-US" sz="1100" dirty="0"/>
           </a:p>
@@ -23506,7 +23339,7 @@
                 <a:ea typeface="Segoe UI" pitchFamily="34" charset="-122"/>
                 <a:cs typeface="Segoe UI" pitchFamily="34" charset="-120"/>
               </a:rPr>
-              <a:t>Fichier de base de données retiré du dépôt Git</a:t>
+              <a:t>Suppression de code mort dans la génération de devis</a:t>
             </a:r>
             <a:endParaRPr lang="en-US" sz="1400" dirty="0"/>
           </a:p>
@@ -23548,7 +23381,7 @@
                 <a:ea typeface="Segoe UI" pitchFamily="34" charset="-122"/>
                 <a:cs typeface="Segoe UI" pitchFamily="34" charset="-120"/>
               </a:rPr>
-              <a:t>Un fichier contenant une copie complète de la base de données de développement, avec des mots de passe réels en clair, était suivi par Git depuis plusieurs mois. Retiré du suivi et exclu définitivement.</a:t>
+              <a:t>Un ancien générateur de devis PDF, devenu inaccessible après une précédente refonte (code jamais exécuté), a été retiré du fichier technique de génération de documents.</a:t>
             </a:r>
             <a:endParaRPr lang="en-US" sz="1100" dirty="0"/>
           </a:p>
@@ -23634,7 +23467,7 @@
                 <a:ea typeface="Segoe UI" pitchFamily="34" charset="-122"/>
                 <a:cs typeface="Segoe UI" pitchFamily="34" charset="-120"/>
               </a:rPr>
-              <a:t>Verrouillage de la base partagée écrit dans le script d'installation</a:t>
+              <a:t>Suppression de code mort dans l'export Word des devis</a:t>
             </a:r>
             <a:endParaRPr lang="en-US" sz="1400" dirty="0"/>
           </a:p>
@@ -23676,7 +23509,7 @@
                 <a:ea typeface="Segoe UI" pitchFamily="34" charset="-122"/>
                 <a:cs typeface="Segoe UI" pitchFamily="34" charset="-120"/>
               </a:rPr>
-              <a:t>La commande qui ferme complètement l'accès public à la table de données partagée a été ajoutée au script SQL du projet, prête à être exécutée dans le tableau de bord Supabase.</a:t>
+              <a:t>Un second bloc de génération de document, devenu inaccessible après une précédente refonte (jamais exécuté), a été retiré du fichier technique de génération de documents.</a:t>
             </a:r>
             <a:endParaRPr lang="en-US" sz="1100" dirty="0"/>
           </a:p>
@@ -23771,6 +23604,600 @@
 <file path=ppt/slides/slide44.xml><?xml version="1.0" encoding="utf-8"?>
 <p:sld xmlns:a="http://schemas.openxmlformats.org/drawingml/2006/main" xmlns:r="http://schemas.openxmlformats.org/officeDocument/2006/relationships" xmlns:p="http://schemas.openxmlformats.org/presentationml/2006/main">
   <p:cSld name="Slide 44">
+    <p:bg>
+      <p:bgPr>
+        <a:solidFill>
+          <a:srgbClr val="F3EEE3"/>
+        </a:solidFill>
+      </p:bgPr>
+    </p:bg>
+    <p:spTree>
+      <p:nvGrpSpPr>
+        <p:cNvPr id="1" name=""/>
+        <p:cNvGrpSpPr/>
+        <p:nvPr/>
+      </p:nvGrpSpPr>
+      <p:grpSpPr>
+        <a:xfrm>
+          <a:off x="0" y="0"/>
+          <a:ext cx="0" cy="0"/>
+          <a:chOff x="0" y="0"/>
+          <a:chExt cx="0" cy="0"/>
+        </a:xfrm>
+      </p:grpSpPr>
+      <p:sp>
+        <p:nvSpPr>
+          <p:cNvPr id="2" name="Shape 0"/>
+          <p:cNvSpPr/>
+          <p:nvPr/>
+        </p:nvSpPr>
+        <p:spPr>
+          <a:xfrm>
+            <a:off x="640080" y="411480"/>
+            <a:ext cx="2377440" cy="365760"/>
+          </a:xfrm>
+          <a:prstGeom prst="roundRect">
+            <a:avLst>
+              <a:gd name="adj" fmla="val 50000"/>
+            </a:avLst>
+          </a:prstGeom>
+          <a:solidFill>
+            <a:srgbClr val="E6EFE4"/>
+          </a:solidFill>
+          <a:ln/>
+        </p:spPr>
+      </p:sp>
+      <p:sp>
+        <p:nvSpPr>
+          <p:cNvPr id="3" name="Text 1"/>
+          <p:cNvSpPr/>
+          <p:nvPr/>
+        </p:nvSpPr>
+        <p:spPr>
+          <a:xfrm>
+            <a:off x="640080" y="411480"/>
+            <a:ext cx="2377440" cy="365760"/>
+          </a:xfrm>
+          <a:prstGeom prst="rect">
+            <a:avLst/>
+          </a:prstGeom>
+          <a:noFill/>
+          <a:ln/>
+        </p:spPr>
+        <p:txBody>
+          <a:bodyPr wrap="square" rtlCol="0" anchor="ctr"/>
+          <a:lstStyle/>
+          <a:p>
+            <a:pPr algn="ctr" indent="0" marL="0">
+              <a:buNone/>
+            </a:pPr>
+            <a:r>
+              <a:rPr lang="en-US" sz="1000" b="1" spc="100" kern="0" dirty="0">
+                <a:solidFill>
+                  <a:srgbClr val="386641"/>
+                </a:solidFill>
+                <a:latin typeface="Segoe UI" pitchFamily="34" charset="0"/>
+                <a:ea typeface="Segoe UI" pitchFamily="34" charset="-122"/>
+                <a:cs typeface="Segoe UI" pitchFamily="34" charset="-120"/>
+              </a:rPr>
+              <a:t>BASE DE DONNÉES</a:t>
+            </a:r>
+            <a:endParaRPr lang="en-US" sz="1000" dirty="0"/>
+          </a:p>
+        </p:txBody>
+      </p:sp>
+      <p:sp>
+        <p:nvSpPr>
+          <p:cNvPr id="4" name="Text 2"/>
+          <p:cNvSpPr/>
+          <p:nvPr/>
+        </p:nvSpPr>
+        <p:spPr>
+          <a:xfrm>
+            <a:off x="640080" y="868680"/>
+            <a:ext cx="10515600" cy="548640"/>
+          </a:xfrm>
+          <a:prstGeom prst="rect">
+            <a:avLst/>
+          </a:prstGeom>
+          <a:noFill/>
+          <a:ln/>
+        </p:spPr>
+        <p:txBody>
+          <a:bodyPr wrap="square" rtlCol="0" anchor="ctr"/>
+          <a:lstStyle/>
+          <a:p>
+            <a:pPr indent="0" marL="0">
+              <a:buNone/>
+            </a:pPr>
+            <a:r>
+              <a:rPr lang="en-US" sz="2400" b="1" dirty="0">
+                <a:solidFill>
+                  <a:srgbClr val="1B1F3B"/>
+                </a:solidFill>
+                <a:latin typeface="Georgia" pitchFamily="34" charset="0"/>
+                <a:ea typeface="Georgia" pitchFamily="34" charset="-122"/>
+                <a:cs typeface="Georgia" pitchFamily="34" charset="-120"/>
+              </a:rPr>
+              <a:t>Sécurité</a:t>
+            </a:r>
+            <a:endParaRPr lang="en-US" sz="2400" dirty="0"/>
+          </a:p>
+        </p:txBody>
+      </p:sp>
+      <p:sp>
+        <p:nvSpPr>
+          <p:cNvPr id="5" name="Shape 3"/>
+          <p:cNvSpPr/>
+          <p:nvPr/>
+        </p:nvSpPr>
+        <p:spPr>
+          <a:xfrm>
+            <a:off x="640080" y="1691640"/>
+            <a:ext cx="10881360" cy="1097280"/>
+          </a:xfrm>
+          <a:prstGeom prst="roundRect">
+            <a:avLst>
+              <a:gd name="adj" fmla="val 5000"/>
+            </a:avLst>
+          </a:prstGeom>
+          <a:solidFill>
+            <a:srgbClr val="FFFFFF"/>
+          </a:solidFill>
+          <a:ln w="12700">
+            <a:solidFill>
+              <a:srgbClr val="E4DCCB"/>
+            </a:solidFill>
+            <a:prstDash val="solid"/>
+          </a:ln>
+        </p:spPr>
+      </p:sp>
+      <p:sp>
+        <p:nvSpPr>
+          <p:cNvPr id="6" name="Shape 4"/>
+          <p:cNvSpPr/>
+          <p:nvPr/>
+        </p:nvSpPr>
+        <p:spPr>
+          <a:xfrm>
+            <a:off x="640080" y="1691640"/>
+            <a:ext cx="54864" cy="1097280"/>
+          </a:xfrm>
+          <a:prstGeom prst="rect">
+            <a:avLst/>
+          </a:prstGeom>
+          <a:solidFill>
+            <a:srgbClr val="386641"/>
+          </a:solidFill>
+          <a:ln/>
+        </p:spPr>
+      </p:sp>
+      <p:sp>
+        <p:nvSpPr>
+          <p:cNvPr id="7" name="Text 5"/>
+          <p:cNvSpPr/>
+          <p:nvPr/>
+        </p:nvSpPr>
+        <p:spPr>
+          <a:xfrm>
+            <a:off x="914400" y="1801368"/>
+            <a:ext cx="10332720" cy="365760"/>
+          </a:xfrm>
+          <a:prstGeom prst="rect">
+            <a:avLst/>
+          </a:prstGeom>
+          <a:noFill/>
+          <a:ln/>
+        </p:spPr>
+        <p:txBody>
+          <a:bodyPr wrap="square" rtlCol="0" anchor="ctr"/>
+          <a:lstStyle/>
+          <a:p>
+            <a:pPr indent="0" marL="0">
+              <a:buNone/>
+            </a:pPr>
+            <a:r>
+              <a:rPr lang="en-US" sz="1400" b="1" dirty="0">
+                <a:solidFill>
+                  <a:srgbClr val="1B1F3B"/>
+                </a:solidFill>
+                <a:latin typeface="Segoe UI" pitchFamily="34" charset="0"/>
+                <a:ea typeface="Segoe UI" pitchFamily="34" charset="-122"/>
+                <a:cs typeface="Segoe UI" pitchFamily="34" charset="-120"/>
+              </a:rPr>
+              <a:t>Base de données partagée verrouillée</a:t>
+            </a:r>
+            <a:endParaRPr lang="en-US" sz="1400" dirty="0"/>
+          </a:p>
+        </p:txBody>
+      </p:sp>
+      <p:sp>
+        <p:nvSpPr>
+          <p:cNvPr id="8" name="Text 6"/>
+          <p:cNvSpPr/>
+          <p:nvPr/>
+        </p:nvSpPr>
+        <p:spPr>
+          <a:xfrm>
+            <a:off x="914400" y="2148840"/>
+            <a:ext cx="10332720" cy="594360"/>
+          </a:xfrm>
+          <a:prstGeom prst="rect">
+            <a:avLst/>
+          </a:prstGeom>
+          <a:noFill/>
+          <a:ln/>
+        </p:spPr>
+        <p:txBody>
+          <a:bodyPr wrap="square" rtlCol="0" anchor="ctr"/>
+          <a:lstStyle/>
+          <a:p>
+            <a:pPr indent="0" marL="0">
+              <a:lnSpc>
+                <a:spcPts val="1400"/>
+              </a:lnSpc>
+              <a:buNone/>
+            </a:pPr>
+            <a:r>
+              <a:rPr lang="en-US" sz="1100" dirty="0">
+                <a:solidFill>
+                  <a:srgbClr val="8A7C68"/>
+                </a:solidFill>
+                <a:latin typeface="Segoe UI" pitchFamily="34" charset="0"/>
+                <a:ea typeface="Segoe UI" pitchFamily="34" charset="-122"/>
+                <a:cs typeface="Segoe UI" pitchFamily="34" charset="-120"/>
+              </a:rPr>
+              <a:t>La table contenant l'essentiel des données de l'application était lisible par n'importe qui sur internet avec la simple clé publique du site, sans connexion. L'application y accède désormais avec une clé privée réservée au serveur, ce qui permet de fermer complètement l'accès public sans rien casser.</a:t>
+            </a:r>
+            <a:endParaRPr lang="en-US" sz="1100" dirty="0"/>
+          </a:p>
+        </p:txBody>
+      </p:sp>
+      <p:sp>
+        <p:nvSpPr>
+          <p:cNvPr id="9" name="Shape 7"/>
+          <p:cNvSpPr/>
+          <p:nvPr/>
+        </p:nvSpPr>
+        <p:spPr>
+          <a:xfrm>
+            <a:off x="640080" y="2926080"/>
+            <a:ext cx="10881360" cy="1097280"/>
+          </a:xfrm>
+          <a:prstGeom prst="roundRect">
+            <a:avLst>
+              <a:gd name="adj" fmla="val 5000"/>
+            </a:avLst>
+          </a:prstGeom>
+          <a:solidFill>
+            <a:srgbClr val="FFFFFF"/>
+          </a:solidFill>
+          <a:ln w="12700">
+            <a:solidFill>
+              <a:srgbClr val="E4DCCB"/>
+            </a:solidFill>
+            <a:prstDash val="solid"/>
+          </a:ln>
+        </p:spPr>
+      </p:sp>
+      <p:sp>
+        <p:nvSpPr>
+          <p:cNvPr id="10" name="Shape 8"/>
+          <p:cNvSpPr/>
+          <p:nvPr/>
+        </p:nvSpPr>
+        <p:spPr>
+          <a:xfrm>
+            <a:off x="640080" y="2926080"/>
+            <a:ext cx="54864" cy="1097280"/>
+          </a:xfrm>
+          <a:prstGeom prst="rect">
+            <a:avLst/>
+          </a:prstGeom>
+          <a:solidFill>
+            <a:srgbClr val="386641"/>
+          </a:solidFill>
+          <a:ln/>
+        </p:spPr>
+      </p:sp>
+      <p:sp>
+        <p:nvSpPr>
+          <p:cNvPr id="11" name="Text 9"/>
+          <p:cNvSpPr/>
+          <p:nvPr/>
+        </p:nvSpPr>
+        <p:spPr>
+          <a:xfrm>
+            <a:off x="914400" y="3035808"/>
+            <a:ext cx="10332720" cy="365760"/>
+          </a:xfrm>
+          <a:prstGeom prst="rect">
+            <a:avLst/>
+          </a:prstGeom>
+          <a:noFill/>
+          <a:ln/>
+        </p:spPr>
+        <p:txBody>
+          <a:bodyPr wrap="square" rtlCol="0" anchor="ctr"/>
+          <a:lstStyle/>
+          <a:p>
+            <a:pPr indent="0" marL="0">
+              <a:buNone/>
+            </a:pPr>
+            <a:r>
+              <a:rPr lang="en-US" sz="1400" b="1" dirty="0">
+                <a:solidFill>
+                  <a:srgbClr val="1B1F3B"/>
+                </a:solidFill>
+                <a:latin typeface="Segoe UI" pitchFamily="34" charset="0"/>
+                <a:ea typeface="Segoe UI" pitchFamily="34" charset="-122"/>
+                <a:cs typeface="Segoe UI" pitchFamily="34" charset="-120"/>
+              </a:rPr>
+              <a:t>Fichier de base de données retiré du dépôt Git</a:t>
+            </a:r>
+            <a:endParaRPr lang="en-US" sz="1400" dirty="0"/>
+          </a:p>
+        </p:txBody>
+      </p:sp>
+      <p:sp>
+        <p:nvSpPr>
+          <p:cNvPr id="12" name="Text 10"/>
+          <p:cNvSpPr/>
+          <p:nvPr/>
+        </p:nvSpPr>
+        <p:spPr>
+          <a:xfrm>
+            <a:off x="914400" y="3383280"/>
+            <a:ext cx="10332720" cy="594360"/>
+          </a:xfrm>
+          <a:prstGeom prst="rect">
+            <a:avLst/>
+          </a:prstGeom>
+          <a:noFill/>
+          <a:ln/>
+        </p:spPr>
+        <p:txBody>
+          <a:bodyPr wrap="square" rtlCol="0" anchor="ctr"/>
+          <a:lstStyle/>
+          <a:p>
+            <a:pPr indent="0" marL="0">
+              <a:lnSpc>
+                <a:spcPts val="1400"/>
+              </a:lnSpc>
+              <a:buNone/>
+            </a:pPr>
+            <a:r>
+              <a:rPr lang="en-US" sz="1100" dirty="0">
+                <a:solidFill>
+                  <a:srgbClr val="8A7C68"/>
+                </a:solidFill>
+                <a:latin typeface="Segoe UI" pitchFamily="34" charset="0"/>
+                <a:ea typeface="Segoe UI" pitchFamily="34" charset="-122"/>
+                <a:cs typeface="Segoe UI" pitchFamily="34" charset="-120"/>
+              </a:rPr>
+              <a:t>Un fichier contenant une copie complète de la base de données de développement, avec des mots de passe réels en clair, était suivi par Git depuis plusieurs mois. Retiré du suivi et exclu définitivement.</a:t>
+            </a:r>
+            <a:endParaRPr lang="en-US" sz="1100" dirty="0"/>
+          </a:p>
+        </p:txBody>
+      </p:sp>
+      <p:sp>
+        <p:nvSpPr>
+          <p:cNvPr id="13" name="Shape 11"/>
+          <p:cNvSpPr/>
+          <p:nvPr/>
+        </p:nvSpPr>
+        <p:spPr>
+          <a:xfrm>
+            <a:off x="640080" y="4160520"/>
+            <a:ext cx="10881360" cy="1097280"/>
+          </a:xfrm>
+          <a:prstGeom prst="roundRect">
+            <a:avLst>
+              <a:gd name="adj" fmla="val 5000"/>
+            </a:avLst>
+          </a:prstGeom>
+          <a:solidFill>
+            <a:srgbClr val="FFFFFF"/>
+          </a:solidFill>
+          <a:ln w="12700">
+            <a:solidFill>
+              <a:srgbClr val="E4DCCB"/>
+            </a:solidFill>
+            <a:prstDash val="solid"/>
+          </a:ln>
+        </p:spPr>
+      </p:sp>
+      <p:sp>
+        <p:nvSpPr>
+          <p:cNvPr id="14" name="Shape 12"/>
+          <p:cNvSpPr/>
+          <p:nvPr/>
+        </p:nvSpPr>
+        <p:spPr>
+          <a:xfrm>
+            <a:off x="640080" y="4160520"/>
+            <a:ext cx="54864" cy="1097280"/>
+          </a:xfrm>
+          <a:prstGeom prst="rect">
+            <a:avLst/>
+          </a:prstGeom>
+          <a:solidFill>
+            <a:srgbClr val="386641"/>
+          </a:solidFill>
+          <a:ln/>
+        </p:spPr>
+      </p:sp>
+      <p:sp>
+        <p:nvSpPr>
+          <p:cNvPr id="15" name="Text 13"/>
+          <p:cNvSpPr/>
+          <p:nvPr/>
+        </p:nvSpPr>
+        <p:spPr>
+          <a:xfrm>
+            <a:off x="914400" y="4270248"/>
+            <a:ext cx="10332720" cy="365760"/>
+          </a:xfrm>
+          <a:prstGeom prst="rect">
+            <a:avLst/>
+          </a:prstGeom>
+          <a:noFill/>
+          <a:ln/>
+        </p:spPr>
+        <p:txBody>
+          <a:bodyPr wrap="square" rtlCol="0" anchor="ctr"/>
+          <a:lstStyle/>
+          <a:p>
+            <a:pPr indent="0" marL="0">
+              <a:buNone/>
+            </a:pPr>
+            <a:r>
+              <a:rPr lang="en-US" sz="1400" b="1" dirty="0">
+                <a:solidFill>
+                  <a:srgbClr val="1B1F3B"/>
+                </a:solidFill>
+                <a:latin typeface="Segoe UI" pitchFamily="34" charset="0"/>
+                <a:ea typeface="Segoe UI" pitchFamily="34" charset="-122"/>
+                <a:cs typeface="Segoe UI" pitchFamily="34" charset="-120"/>
+              </a:rPr>
+              <a:t>Verrouillage de la base partagée écrit dans le script d'installation</a:t>
+            </a:r>
+            <a:endParaRPr lang="en-US" sz="1400" dirty="0"/>
+          </a:p>
+        </p:txBody>
+      </p:sp>
+      <p:sp>
+        <p:nvSpPr>
+          <p:cNvPr id="16" name="Text 14"/>
+          <p:cNvSpPr/>
+          <p:nvPr/>
+        </p:nvSpPr>
+        <p:spPr>
+          <a:xfrm>
+            <a:off x="914400" y="4617720"/>
+            <a:ext cx="10332720" cy="594360"/>
+          </a:xfrm>
+          <a:prstGeom prst="rect">
+            <a:avLst/>
+          </a:prstGeom>
+          <a:noFill/>
+          <a:ln/>
+        </p:spPr>
+        <p:txBody>
+          <a:bodyPr wrap="square" rtlCol="0" anchor="ctr"/>
+          <a:lstStyle/>
+          <a:p>
+            <a:pPr indent="0" marL="0">
+              <a:lnSpc>
+                <a:spcPts val="1400"/>
+              </a:lnSpc>
+              <a:buNone/>
+            </a:pPr>
+            <a:r>
+              <a:rPr lang="en-US" sz="1100" dirty="0">
+                <a:solidFill>
+                  <a:srgbClr val="8A7C68"/>
+                </a:solidFill>
+                <a:latin typeface="Segoe UI" pitchFamily="34" charset="0"/>
+                <a:ea typeface="Segoe UI" pitchFamily="34" charset="-122"/>
+                <a:cs typeface="Segoe UI" pitchFamily="34" charset="-120"/>
+              </a:rPr>
+              <a:t>La commande qui ferme complètement l'accès public à la table de données partagée a été ajoutée au script SQL du projet, prête à être exécutée dans le tableau de bord Supabase.</a:t>
+            </a:r>
+            <a:endParaRPr lang="en-US" sz="1100" dirty="0"/>
+          </a:p>
+        </p:txBody>
+      </p:sp>
+      <p:sp>
+        <p:nvSpPr>
+          <p:cNvPr id="17" name="Text 15"/>
+          <p:cNvSpPr/>
+          <p:nvPr/>
+        </p:nvSpPr>
+        <p:spPr>
+          <a:xfrm>
+            <a:off x="365760" y="6510528"/>
+            <a:ext cx="5486400" cy="274320"/>
+          </a:xfrm>
+          <a:prstGeom prst="rect">
+            <a:avLst/>
+          </a:prstGeom>
+          <a:noFill/>
+          <a:ln/>
+        </p:spPr>
+        <p:txBody>
+          <a:bodyPr wrap="square" rtlCol="0" anchor="ctr"/>
+          <a:lstStyle/>
+          <a:p>
+            <a:pPr indent="0" marL="0">
+              <a:buNone/>
+            </a:pPr>
+            <a:r>
+              <a:rPr lang="en-US" sz="900" dirty="0">
+                <a:solidFill>
+                  <a:srgbClr val="8A7C68"/>
+                </a:solidFill>
+                <a:latin typeface="Segoe UI" pitchFamily="34" charset="0"/>
+                <a:ea typeface="Segoe UI" pitchFamily="34" charset="-122"/>
+                <a:cs typeface="Segoe UI" pitchFamily="34" charset="-120"/>
+              </a:rPr>
+              <a:t>Kôji Web — Récapitulatif technique</a:t>
+            </a:r>
+            <a:endParaRPr lang="en-US" sz="900" dirty="0"/>
+          </a:p>
+        </p:txBody>
+      </p:sp>
+      <p:sp>
+        <p:nvSpPr>
+          <p:cNvPr id="18" name="Text 16"/>
+          <p:cNvSpPr/>
+          <p:nvPr/>
+        </p:nvSpPr>
+        <p:spPr>
+          <a:xfrm>
+            <a:off x="9601200" y="6510528"/>
+            <a:ext cx="2194560" cy="274320"/>
+          </a:xfrm>
+          <a:prstGeom prst="rect">
+            <a:avLst/>
+          </a:prstGeom>
+          <a:noFill/>
+          <a:ln/>
+        </p:spPr>
+        <p:txBody>
+          <a:bodyPr wrap="square" rtlCol="0" anchor="ctr"/>
+          <a:lstStyle/>
+          <a:p>
+            <a:pPr algn="r" indent="0" marL="0">
+              <a:buNone/>
+            </a:pPr>
+            <a:r>
+              <a:rPr lang="en-US" sz="900" dirty="0">
+                <a:solidFill>
+                  <a:srgbClr val="8A7C68"/>
+                </a:solidFill>
+                <a:latin typeface="Segoe UI" pitchFamily="34" charset="0"/>
+                <a:ea typeface="Segoe UI" pitchFamily="34" charset="-122"/>
+                <a:cs typeface="Segoe UI" pitchFamily="34" charset="-120"/>
+              </a:rPr>
+              <a:t>44</a:t>
+            </a:r>
+            <a:endParaRPr lang="en-US" sz="900" dirty="0"/>
+          </a:p>
+        </p:txBody>
+      </p:sp>
+    </p:spTree>
+  </p:cSld>
+  <p:clrMapOvr>
+    <a:masterClrMapping/>
+  </p:clrMapOvr>
+</p:sld>
+</file>
+
+<file path=ppt/slides/slide45.xml><?xml version="1.0" encoding="utf-8"?>
+<p:sld xmlns:a="http://schemas.openxmlformats.org/drawingml/2006/main" xmlns:r="http://schemas.openxmlformats.org/officeDocument/2006/relationships" xmlns:p="http://schemas.openxmlformats.org/presentationml/2006/main">
+  <p:cSld name="Slide 45">
     <p:bg>
       <p:bgPr>
         <a:solidFill>

--- a/docs/manager-recap/Recap-Koji-Manager.pptx
+++ b/docs/manager-recap/Recap-Koji-Manager.pptx
@@ -50,9 +50,10 @@
     <p:sldId id="298" r:id="rId44"/>
     <p:sldId id="299" r:id="rId45"/>
     <p:sldId id="300" r:id="rId46"/>
+    <p:sldId id="301" r:id="rId47"/>
   </p:sldIdLst>
   <p:notesMasterIdLst>
-    <p:notesMasterId r:id="rId47"/>
+    <p:notesMasterId r:id="rId48"/>
   </p:notesMasterIdLst>
   <p:sldSz cx="12191695" cy="6858000"/>
   <p:notesSz cx="6858000" cy="12191695"/>
@@ -4002,6 +4003,94 @@
             <a:fld id="{F7021451-1387-4CA6-816F-3879F97B5CBC}" type="slidenum">
               <a:rPr lang="en-US"/>
               <a:t>45</a:t>
+            </a:fld>
+            <a:endParaRPr lang="en-US"/>
+          </a:p>
+        </p:txBody>
+      </p:sp>
+    </p:spTree>
+    <p:extLst>
+      <p:ext uri="{BB962C8B-B14F-4D97-AF65-F5344CB8AC3E}">
+        <p14:creationId xmlns:p14="http://schemas.microsoft.com/office/powerpoint/2010/main" val="1024086991"/>
+      </p:ext>
+    </p:extLst>
+  </p:cSld>
+  <p:clrMapOvr>
+    <a:masterClrMapping/>
+  </p:clrMapOvr>
+</p:notes>
+</file>
+
+<file path=ppt/notesSlides/notesSlide46.xml><?xml version="1.0" encoding="utf-8"?>
+<p:notes xmlns:a="http://schemas.openxmlformats.org/drawingml/2006/main" xmlns:r="http://schemas.openxmlformats.org/officeDocument/2006/relationships" xmlns:p="http://schemas.openxmlformats.org/presentationml/2006/main">
+  <p:cSld>
+    <p:spTree>
+      <p:nvGrpSpPr>
+        <p:cNvPr id="1" name=""/>
+        <p:cNvGrpSpPr/>
+        <p:nvPr/>
+      </p:nvGrpSpPr>
+      <p:grpSpPr>
+        <a:xfrm>
+          <a:off x="0" y="0"/>
+          <a:ext cx="0" cy="0"/>
+          <a:chOff x="0" y="0"/>
+          <a:chExt cx="0" cy="0"/>
+        </a:xfrm>
+      </p:grpSpPr>
+      <p:sp>
+        <p:nvSpPr>
+          <p:cNvPr id="2" name="Slide Image Placeholder 1"/>
+          <p:cNvSpPr>
+            <a:spLocks noGrp="1" noRot="1" noChangeAspect="1"/>
+          </p:cNvSpPr>
+          <p:nvPr>
+            <p:ph type="sldImg"/>
+          </p:nvPr>
+        </p:nvSpPr>
+        <p:spPr/>
+      </p:sp>
+      <p:sp>
+        <p:nvSpPr>
+          <p:cNvPr id="3" name="Notes Placeholder 2"/>
+          <p:cNvSpPr>
+            <a:spLocks noGrp="1"/>
+          </p:cNvSpPr>
+          <p:nvPr>
+            <p:ph type="body" idx="1"/>
+          </p:nvPr>
+        </p:nvSpPr>
+        <p:spPr/>
+        <p:txBody>
+          <a:bodyPr/>
+          <a:lstStyle/>
+          <a:p>
+            <a:r>
+              <a:rPr lang="en-US" dirty="0"/>
+              <a:t/>
+            </a:r>
+            <a:endParaRPr lang="en-US" dirty="0"/>
+          </a:p>
+        </p:txBody>
+      </p:sp>
+      <p:sp>
+        <p:nvSpPr>
+          <p:cNvPr id="4" name="Slide Number Placeholder 3"/>
+          <p:cNvSpPr>
+            <a:spLocks noGrp="1"/>
+          </p:cNvSpPr>
+          <p:nvPr>
+            <p:ph type="sldNum" sz="quarter" idx="10"/>
+          </p:nvPr>
+        </p:nvSpPr>
+        <p:spPr/>
+        <p:txBody>
+          <a:bodyPr/>
+          <a:lstStyle/>
+          <a:p>
+            <a:fld id="{F7021451-1387-4CA6-816F-3879F97B5CBC}" type="slidenum">
+              <a:rPr lang="en-US"/>
+              <a:t>46</a:t>
             </a:fld>
             <a:endParaRPr lang="en-US"/>
           </a:p>
@@ -10149,7 +10238,7 @@
     <p:bg>
       <p:bgPr>
         <a:solidFill>
-          <a:srgbClr val="0B1030"/>
+          <a:srgbClr val="F3EEE3"/>
         </a:solidFill>
       </p:bgPr>
     </p:bg>
@@ -10175,14 +10264,16 @@
         </p:nvSpPr>
         <p:spPr>
           <a:xfrm>
-            <a:off x="0" y="3246120"/>
-            <a:ext cx="12191695" cy="54864"/>
-          </a:xfrm>
-          <a:prstGeom prst="rect">
-            <a:avLst/>
+            <a:off x="640080" y="411480"/>
+            <a:ext cx="2377440" cy="365760"/>
+          </a:xfrm>
+          <a:prstGeom prst="roundRect">
+            <a:avLst>
+              <a:gd name="adj" fmla="val 50000"/>
+            </a:avLst>
           </a:prstGeom>
           <a:solidFill>
-            <a:srgbClr val="9A4C1F"/>
+            <a:srgbClr val="E5EDFB"/>
           </a:solidFill>
           <a:ln/>
         </p:spPr>
@@ -10195,118 +10286,207 @@
         </p:nvSpPr>
         <p:spPr>
           <a:xfrm>
-            <a:off x="640080" y="2468880"/>
-            <a:ext cx="10058400" cy="914400"/>
-          </a:xfrm>
-          <a:prstGeom prst="rect">
-            <a:avLst/>
-          </a:prstGeom>
-          <a:noFill/>
-          <a:ln/>
-        </p:spPr>
-        <p:txBody>
-          <a:bodyPr wrap="square" rtlCol="0" anchor="ctr"/>
-          <a:lstStyle/>
-          <a:p>
-            <a:pPr indent="0" marL="0">
-              <a:buNone/>
-            </a:pPr>
-            <a:r>
-              <a:rPr lang="en-US" sz="3800" b="1" dirty="0">
-                <a:solidFill>
-                  <a:srgbClr val="FFFFFF"/>
+            <a:off x="640080" y="411480"/>
+            <a:ext cx="2377440" cy="365760"/>
+          </a:xfrm>
+          <a:prstGeom prst="rect">
+            <a:avLst/>
+          </a:prstGeom>
+          <a:noFill/>
+          <a:ln/>
+        </p:spPr>
+        <p:txBody>
+          <a:bodyPr wrap="square" rtlCol="0" anchor="ctr"/>
+          <a:lstStyle/>
+          <a:p>
+            <a:pPr algn="ctr" indent="0" marL="0">
+              <a:buNone/>
+            </a:pPr>
+            <a:r>
+              <a:rPr lang="en-US" sz="1000" b="1" spc="100" kern="0" dirty="0">
+                <a:solidFill>
+                  <a:srgbClr val="1D6FE0"/>
+                </a:solidFill>
+                <a:latin typeface="Segoe UI" pitchFamily="34" charset="0"/>
+                <a:ea typeface="Segoe UI" pitchFamily="34" charset="-122"/>
+                <a:cs typeface="Segoe UI" pitchFamily="34" charset="-120"/>
+              </a:rPr>
+              <a:t>FRONTEND</a:t>
+            </a:r>
+            <a:endParaRPr lang="en-US" sz="1000" dirty="0"/>
+          </a:p>
+        </p:txBody>
+      </p:sp>
+      <p:sp>
+        <p:nvSpPr>
+          <p:cNvPr id="4" name="Text 2"/>
+          <p:cNvSpPr/>
+          <p:nvPr/>
+        </p:nvSpPr>
+        <p:spPr>
+          <a:xfrm>
+            <a:off x="640080" y="868680"/>
+            <a:ext cx="10515600" cy="548640"/>
+          </a:xfrm>
+          <a:prstGeom prst="rect">
+            <a:avLst/>
+          </a:prstGeom>
+          <a:noFill/>
+          <a:ln/>
+        </p:spPr>
+        <p:txBody>
+          <a:bodyPr wrap="square" rtlCol="0" anchor="ctr"/>
+          <a:lstStyle/>
+          <a:p>
+            <a:pPr indent="0" marL="0">
+              <a:buNone/>
+            </a:pPr>
+            <a:r>
+              <a:rPr lang="en-US" sz="2400" b="1" dirty="0">
+                <a:solidFill>
+                  <a:srgbClr val="1B1F3B"/>
                 </a:solidFill>
                 <a:latin typeface="Georgia" pitchFamily="34" charset="0"/>
                 <a:ea typeface="Georgia" pitchFamily="34" charset="-122"/>
                 <a:cs typeface="Georgia" pitchFamily="34" charset="-120"/>
               </a:rPr>
-              <a:t>Backend</a:t>
-            </a:r>
-            <a:endParaRPr lang="en-US" sz="3800" dirty="0"/>
-          </a:p>
-        </p:txBody>
-      </p:sp>
-      <p:sp>
-        <p:nvSpPr>
-          <p:cNvPr id="4" name="Text 2"/>
-          <p:cNvSpPr/>
-          <p:nvPr/>
-        </p:nvSpPr>
-        <p:spPr>
-          <a:xfrm>
-            <a:off x="640080" y="3429000"/>
-            <a:ext cx="10058400" cy="457200"/>
-          </a:xfrm>
-          <a:prstGeom prst="rect">
-            <a:avLst/>
-          </a:prstGeom>
-          <a:noFill/>
-          <a:ln/>
-        </p:spPr>
-        <p:txBody>
-          <a:bodyPr wrap="square" rtlCol="0" anchor="ctr"/>
-          <a:lstStyle/>
-          <a:p>
-            <a:pPr indent="0" marL="0">
-              <a:buNone/>
-            </a:pPr>
-            <a:r>
-              <a:rPr lang="en-US" sz="1500" dirty="0">
-                <a:solidFill>
-                  <a:srgbClr val="C7C9E0"/>
-                </a:solidFill>
-                <a:latin typeface="Segoe UI" pitchFamily="34" charset="0"/>
-                <a:ea typeface="Segoe UI" pitchFamily="34" charset="-122"/>
-                <a:cs typeface="Segoe UI" pitchFamily="34" charset="-120"/>
-              </a:rPr>
-              <a:t>API, logique métier et intégrations</a:t>
-            </a:r>
-            <a:endParaRPr lang="en-US" sz="1500" dirty="0"/>
-          </a:p>
-        </p:txBody>
-      </p:sp>
-      <p:sp>
-        <p:nvSpPr>
-          <p:cNvPr id="5" name="Text 3"/>
-          <p:cNvSpPr/>
-          <p:nvPr/>
-        </p:nvSpPr>
-        <p:spPr>
-          <a:xfrm>
-            <a:off x="640080" y="3931920"/>
-            <a:ext cx="5486400" cy="365760"/>
-          </a:xfrm>
-          <a:prstGeom prst="rect">
-            <a:avLst/>
-          </a:prstGeom>
-          <a:noFill/>
-          <a:ln/>
-        </p:spPr>
-        <p:txBody>
-          <a:bodyPr wrap="square" rtlCol="0" anchor="ctr"/>
-          <a:lstStyle/>
-          <a:p>
-            <a:pPr indent="0" marL="0">
-              <a:buNone/>
-            </a:pPr>
-            <a:r>
-              <a:rPr lang="en-US" sz="1200" b="1" dirty="0">
-                <a:solidFill>
-                  <a:srgbClr val="C9A96A"/>
-                </a:solidFill>
-                <a:latin typeface="Segoe UI" pitchFamily="34" charset="0"/>
-                <a:ea typeface="Segoe UI" pitchFamily="34" charset="-122"/>
-                <a:cs typeface="Segoe UI" pitchFamily="34" charset="-120"/>
-              </a:rPr>
-              <a:t>42 mise(s) à jour</a:t>
-            </a:r>
-            <a:endParaRPr lang="en-US" sz="1200" dirty="0"/>
-          </a:p>
-        </p:txBody>
-      </p:sp>
-      <p:sp>
-        <p:nvSpPr>
-          <p:cNvPr id="6" name="Text 4"/>
+              <a:t>Contacts</a:t>
+            </a:r>
+            <a:endParaRPr lang="en-US" sz="2400" dirty="0"/>
+          </a:p>
+        </p:txBody>
+      </p:sp>
+      <p:sp>
+        <p:nvSpPr>
+          <p:cNvPr id="5" name="Shape 3"/>
+          <p:cNvSpPr/>
+          <p:nvPr/>
+        </p:nvSpPr>
+        <p:spPr>
+          <a:xfrm>
+            <a:off x="640080" y="1691640"/>
+            <a:ext cx="10881360" cy="1097280"/>
+          </a:xfrm>
+          <a:prstGeom prst="roundRect">
+            <a:avLst>
+              <a:gd name="adj" fmla="val 5000"/>
+            </a:avLst>
+          </a:prstGeom>
+          <a:solidFill>
+            <a:srgbClr val="FFFFFF"/>
+          </a:solidFill>
+          <a:ln w="12700">
+            <a:solidFill>
+              <a:srgbClr val="E4DCCB"/>
+            </a:solidFill>
+            <a:prstDash val="solid"/>
+          </a:ln>
+        </p:spPr>
+      </p:sp>
+      <p:sp>
+        <p:nvSpPr>
+          <p:cNvPr id="6" name="Shape 4"/>
+          <p:cNvSpPr/>
+          <p:nvPr/>
+        </p:nvSpPr>
+        <p:spPr>
+          <a:xfrm>
+            <a:off x="640080" y="1691640"/>
+            <a:ext cx="54864" cy="1097280"/>
+          </a:xfrm>
+          <a:prstGeom prst="rect">
+            <a:avLst/>
+          </a:prstGeom>
+          <a:solidFill>
+            <a:srgbClr val="1D6FE0"/>
+          </a:solidFill>
+          <a:ln/>
+        </p:spPr>
+      </p:sp>
+      <p:sp>
+        <p:nvSpPr>
+          <p:cNvPr id="7" name="Text 5"/>
+          <p:cNvSpPr/>
+          <p:nvPr/>
+        </p:nvSpPr>
+        <p:spPr>
+          <a:xfrm>
+            <a:off x="914400" y="1801368"/>
+            <a:ext cx="10332720" cy="365760"/>
+          </a:xfrm>
+          <a:prstGeom prst="rect">
+            <a:avLst/>
+          </a:prstGeom>
+          <a:noFill/>
+          <a:ln/>
+        </p:spPr>
+        <p:txBody>
+          <a:bodyPr wrap="square" rtlCol="0" anchor="ctr"/>
+          <a:lstStyle/>
+          <a:p>
+            <a:pPr indent="0" marL="0">
+              <a:buNone/>
+            </a:pPr>
+            <a:r>
+              <a:rPr lang="en-US" sz="1400" b="1" dirty="0">
+                <a:solidFill>
+                  <a:srgbClr val="1B1F3B"/>
+                </a:solidFill>
+                <a:latin typeface="Segoe UI" pitchFamily="34" charset="0"/>
+                <a:ea typeface="Segoe UI" pitchFamily="34" charset="-122"/>
+                <a:cs typeface="Segoe UI" pitchFamily="34" charset="-120"/>
+              </a:rPr>
+              <a:t>Nouvelle page Contacts (liste, fiche, historique)</a:t>
+            </a:r>
+            <a:endParaRPr lang="en-US" sz="1400" dirty="0"/>
+          </a:p>
+        </p:txBody>
+      </p:sp>
+      <p:sp>
+        <p:nvSpPr>
+          <p:cNvPr id="8" name="Text 6"/>
+          <p:cNvSpPr/>
+          <p:nvPr/>
+        </p:nvSpPr>
+        <p:spPr>
+          <a:xfrm>
+            <a:off x="914400" y="2148840"/>
+            <a:ext cx="10332720" cy="594360"/>
+          </a:xfrm>
+          <a:prstGeom prst="rect">
+            <a:avLst/>
+          </a:prstGeom>
+          <a:noFill/>
+          <a:ln/>
+        </p:spPr>
+        <p:txBody>
+          <a:bodyPr wrap="square" rtlCol="0" anchor="ctr"/>
+          <a:lstStyle/>
+          <a:p>
+            <a:pPr indent="0" marL="0">
+              <a:lnSpc>
+                <a:spcPts val="1400"/>
+              </a:lnSpc>
+              <a:buNone/>
+            </a:pPr>
+            <a:r>
+              <a:rPr lang="en-US" sz="1100" dirty="0">
+                <a:solidFill>
+                  <a:srgbClr val="8A7C68"/>
+                </a:solidFill>
+                <a:latin typeface="Segoe UI" pitchFamily="34" charset="0"/>
+                <a:ea typeface="Segoe UI" pitchFamily="34" charset="-122"/>
+                <a:cs typeface="Segoe UI" pitchFamily="34" charset="-120"/>
+              </a:rPr>
+              <a:t>Nouvel onglet 'Contacts' dans le menu. Recherche par nom/société/téléphone/email/adresse, filtres par rôle (Tous/Clients/Prospects/Équipe/Sous-traitants/Architectes/Fournisseurs). Chaque fiche affiche l'historique complet et cliquable des devis, chantiers, factures et rapports d'intervention liés, avec statut et montant. Avertissement non bloquant si un contact similaire (même email/téléphone/SIRET) existe déjà à la création. Un contact avec des documents liés ne peut pas être supprimé, seulement archivé — il disparaît des listes mais son historique reste intact et consultable.</a:t>
+            </a:r>
+            <a:endParaRPr lang="en-US" sz="1100" dirty="0"/>
+          </a:p>
+        </p:txBody>
+      </p:sp>
+      <p:sp>
+        <p:nvSpPr>
+          <p:cNvPr id="9" name="Text 7"/>
           <p:cNvSpPr/>
           <p:nvPr/>
         </p:nvSpPr>
@@ -10345,7 +10525,7 @@
       </p:sp>
       <p:sp>
         <p:nvSpPr>
-          <p:cNvPr id="7" name="Text 5"/>
+          <p:cNvPr id="10" name="Text 8"/>
           <p:cNvSpPr/>
           <p:nvPr/>
         </p:nvSpPr>
@@ -10552,7 +10732,7 @@
                 <a:ea typeface="Georgia" pitchFamily="34" charset="-122"/>
                 <a:cs typeface="Georgia" pitchFamily="34" charset="-120"/>
               </a:rPr>
-              <a:t>101</a:t>
+              <a:t>102</a:t>
             </a:r>
             <a:endParaRPr lang="en-US" sz="3200" dirty="0"/>
           </a:p>
@@ -10657,7 +10837,7 @@
                 <a:ea typeface="Georgia" pitchFamily="34" charset="-122"/>
                 <a:cs typeface="Georgia" pitchFamily="34" charset="-120"/>
               </a:rPr>
-              <a:t>48</a:t>
+              <a:t>49</a:t>
             </a:r>
             <a:endParaRPr lang="en-US" sz="3200" dirty="0"/>
           </a:p>
@@ -11161,7 +11341,7 @@
     <p:bg>
       <p:bgPr>
         <a:solidFill>
-          <a:srgbClr val="F3EEE3"/>
+          <a:srgbClr val="0B1030"/>
         </a:solidFill>
       </p:bgPr>
     </p:bg>
@@ -11187,16 +11367,14 @@
         </p:nvSpPr>
         <p:spPr>
           <a:xfrm>
-            <a:off x="640080" y="411480"/>
-            <a:ext cx="2377440" cy="365760"/>
-          </a:xfrm>
-          <a:prstGeom prst="roundRect">
-            <a:avLst>
-              <a:gd name="adj" fmla="val 50000"/>
-            </a:avLst>
+            <a:off x="0" y="3246120"/>
+            <a:ext cx="12191695" cy="54864"/>
+          </a:xfrm>
+          <a:prstGeom prst="rect">
+            <a:avLst/>
           </a:prstGeom>
           <a:solidFill>
-            <a:srgbClr val="F5E6DA"/>
+            <a:srgbClr val="9A4C1F"/>
           </a:solidFill>
           <a:ln/>
         </p:spPr>
@@ -11209,335 +11387,118 @@
         </p:nvSpPr>
         <p:spPr>
           <a:xfrm>
-            <a:off x="640080" y="411480"/>
-            <a:ext cx="2377440" cy="365760"/>
-          </a:xfrm>
-          <a:prstGeom prst="rect">
-            <a:avLst/>
-          </a:prstGeom>
-          <a:noFill/>
-          <a:ln/>
-        </p:spPr>
-        <p:txBody>
-          <a:bodyPr wrap="square" rtlCol="0" anchor="ctr"/>
-          <a:lstStyle/>
-          <a:p>
-            <a:pPr algn="ctr" indent="0" marL="0">
-              <a:buNone/>
-            </a:pPr>
-            <a:r>
-              <a:rPr lang="en-US" sz="1000" b="1" spc="100" kern="0" dirty="0">
-                <a:solidFill>
-                  <a:srgbClr val="9A4C1F"/>
-                </a:solidFill>
-                <a:latin typeface="Segoe UI" pitchFamily="34" charset="0"/>
-                <a:ea typeface="Segoe UI" pitchFamily="34" charset="-122"/>
-                <a:cs typeface="Segoe UI" pitchFamily="34" charset="-120"/>
-              </a:rPr>
-              <a:t>BACKEND</a:t>
-            </a:r>
-            <a:endParaRPr lang="en-US" sz="1000" dirty="0"/>
-          </a:p>
-        </p:txBody>
-      </p:sp>
-      <p:sp>
-        <p:nvSpPr>
-          <p:cNvPr id="4" name="Text 2"/>
-          <p:cNvSpPr/>
-          <p:nvPr/>
-        </p:nvSpPr>
-        <p:spPr>
-          <a:xfrm>
-            <a:off x="640080" y="868680"/>
-            <a:ext cx="10515600" cy="548640"/>
-          </a:xfrm>
-          <a:prstGeom prst="rect">
-            <a:avLst/>
-          </a:prstGeom>
-          <a:noFill/>
-          <a:ln/>
-        </p:spPr>
-        <p:txBody>
-          <a:bodyPr wrap="square" rtlCol="0" anchor="ctr"/>
-          <a:lstStyle/>
-          <a:p>
-            <a:pPr indent="0" marL="0">
-              <a:buNone/>
-            </a:pPr>
-            <a:r>
-              <a:rPr lang="en-US" sz="2400" b="1" dirty="0">
-                <a:solidFill>
-                  <a:srgbClr val="1B1F3B"/>
+            <a:off x="640080" y="2468880"/>
+            <a:ext cx="10058400" cy="914400"/>
+          </a:xfrm>
+          <a:prstGeom prst="rect">
+            <a:avLst/>
+          </a:prstGeom>
+          <a:noFill/>
+          <a:ln/>
+        </p:spPr>
+        <p:txBody>
+          <a:bodyPr wrap="square" rtlCol="0" anchor="ctr"/>
+          <a:lstStyle/>
+          <a:p>
+            <a:pPr indent="0" marL="0">
+              <a:buNone/>
+            </a:pPr>
+            <a:r>
+              <a:rPr lang="en-US" sz="3800" b="1" dirty="0">
+                <a:solidFill>
+                  <a:srgbClr val="FFFFFF"/>
                 </a:solidFill>
                 <a:latin typeface="Georgia" pitchFamily="34" charset="0"/>
                 <a:ea typeface="Georgia" pitchFamily="34" charset="-122"/>
                 <a:cs typeface="Georgia" pitchFamily="34" charset="-120"/>
               </a:rPr>
-              <a:t>Fondations</a:t>
-            </a:r>
-            <a:endParaRPr lang="en-US" sz="2400" dirty="0"/>
-          </a:p>
-        </p:txBody>
-      </p:sp>
-      <p:sp>
-        <p:nvSpPr>
-          <p:cNvPr id="5" name="Shape 3"/>
-          <p:cNvSpPr/>
-          <p:nvPr/>
-        </p:nvSpPr>
-        <p:spPr>
-          <a:xfrm>
-            <a:off x="640080" y="1691640"/>
-            <a:ext cx="10881360" cy="1097280"/>
-          </a:xfrm>
-          <a:prstGeom prst="roundRect">
-            <a:avLst>
-              <a:gd name="adj" fmla="val 5000"/>
-            </a:avLst>
-          </a:prstGeom>
-          <a:solidFill>
-            <a:srgbClr val="FFFFFF"/>
-          </a:solidFill>
-          <a:ln w="12700">
-            <a:solidFill>
-              <a:srgbClr val="E4DCCB"/>
-            </a:solidFill>
-            <a:prstDash val="solid"/>
-          </a:ln>
-        </p:spPr>
-      </p:sp>
-      <p:sp>
-        <p:nvSpPr>
-          <p:cNvPr id="6" name="Shape 4"/>
-          <p:cNvSpPr/>
-          <p:nvPr/>
-        </p:nvSpPr>
-        <p:spPr>
-          <a:xfrm>
-            <a:off x="640080" y="1691640"/>
-            <a:ext cx="54864" cy="1097280"/>
-          </a:xfrm>
-          <a:prstGeom prst="rect">
-            <a:avLst/>
-          </a:prstGeom>
-          <a:solidFill>
-            <a:srgbClr val="9A4C1F"/>
-          </a:solidFill>
-          <a:ln/>
-        </p:spPr>
-      </p:sp>
-      <p:sp>
-        <p:nvSpPr>
-          <p:cNvPr id="7" name="Text 5"/>
-          <p:cNvSpPr/>
-          <p:nvPr/>
-        </p:nvSpPr>
-        <p:spPr>
-          <a:xfrm>
-            <a:off x="914400" y="1801368"/>
-            <a:ext cx="10332720" cy="365760"/>
-          </a:xfrm>
-          <a:prstGeom prst="rect">
-            <a:avLst/>
-          </a:prstGeom>
-          <a:noFill/>
-          <a:ln/>
-        </p:spPr>
-        <p:txBody>
-          <a:bodyPr wrap="square" rtlCol="0" anchor="ctr"/>
-          <a:lstStyle/>
-          <a:p>
-            <a:pPr indent="0" marL="0">
-              <a:buNone/>
-            </a:pPr>
-            <a:r>
-              <a:rPr lang="en-US" sz="1400" b="1" dirty="0">
-                <a:solidFill>
-                  <a:srgbClr val="1B1F3B"/>
-                </a:solidFill>
-                <a:latin typeface="Segoe UI" pitchFamily="34" charset="0"/>
-                <a:ea typeface="Segoe UI" pitchFamily="34" charset="-122"/>
-                <a:cs typeface="Segoe UI" pitchFamily="34" charset="-120"/>
-              </a:rPr>
-              <a:t>Mise en place initiale de l'application</a:t>
-            </a:r>
-            <a:endParaRPr lang="en-US" sz="1400" dirty="0"/>
-          </a:p>
-        </p:txBody>
-      </p:sp>
-      <p:sp>
-        <p:nvSpPr>
-          <p:cNvPr id="8" name="Text 6"/>
-          <p:cNvSpPr/>
-          <p:nvPr/>
-        </p:nvSpPr>
-        <p:spPr>
-          <a:xfrm>
-            <a:off x="914400" y="2148840"/>
-            <a:ext cx="10332720" cy="594360"/>
-          </a:xfrm>
-          <a:prstGeom prst="rect">
-            <a:avLst/>
-          </a:prstGeom>
-          <a:noFill/>
-          <a:ln/>
-        </p:spPr>
-        <p:txBody>
-          <a:bodyPr wrap="square" rtlCol="0" anchor="ctr"/>
-          <a:lstStyle/>
-          <a:p>
-            <a:pPr indent="0" marL="0">
-              <a:lnSpc>
-                <a:spcPts val="1400"/>
-              </a:lnSpc>
-              <a:buNone/>
-            </a:pPr>
-            <a:r>
-              <a:rPr lang="en-US" sz="1100" dirty="0">
-                <a:solidFill>
-                  <a:srgbClr val="8A7C68"/>
-                </a:solidFill>
-                <a:latin typeface="Segoe UI" pitchFamily="34" charset="0"/>
-                <a:ea typeface="Segoe UI" pitchFamily="34" charset="-122"/>
-                <a:cs typeface="Segoe UI" pitchFamily="34" charset="-120"/>
-              </a:rPr>
-              <a:t>Structure Next.js App Router, authentification, base de données JSON locale et première version des modules Devis, Chantiers, Équipe, Planning.</a:t>
-            </a:r>
-            <a:endParaRPr lang="en-US" sz="1100" dirty="0"/>
-          </a:p>
-        </p:txBody>
-      </p:sp>
-      <p:sp>
-        <p:nvSpPr>
-          <p:cNvPr id="9" name="Shape 7"/>
-          <p:cNvSpPr/>
-          <p:nvPr/>
-        </p:nvSpPr>
-        <p:spPr>
-          <a:xfrm>
-            <a:off x="640080" y="2926080"/>
-            <a:ext cx="10881360" cy="1097280"/>
-          </a:xfrm>
-          <a:prstGeom prst="roundRect">
-            <a:avLst>
-              <a:gd name="adj" fmla="val 5000"/>
-            </a:avLst>
-          </a:prstGeom>
-          <a:solidFill>
-            <a:srgbClr val="FFFFFF"/>
-          </a:solidFill>
-          <a:ln w="12700">
-            <a:solidFill>
-              <a:srgbClr val="E4DCCB"/>
-            </a:solidFill>
-            <a:prstDash val="solid"/>
-          </a:ln>
-        </p:spPr>
-      </p:sp>
-      <p:sp>
-        <p:nvSpPr>
-          <p:cNvPr id="10" name="Shape 8"/>
-          <p:cNvSpPr/>
-          <p:nvPr/>
-        </p:nvSpPr>
-        <p:spPr>
-          <a:xfrm>
-            <a:off x="640080" y="2926080"/>
-            <a:ext cx="54864" cy="1097280"/>
-          </a:xfrm>
-          <a:prstGeom prst="rect">
-            <a:avLst/>
-          </a:prstGeom>
-          <a:solidFill>
-            <a:srgbClr val="9A4C1F"/>
-          </a:solidFill>
-          <a:ln/>
-        </p:spPr>
-      </p:sp>
-      <p:sp>
-        <p:nvSpPr>
-          <p:cNvPr id="11" name="Text 9"/>
-          <p:cNvSpPr/>
-          <p:nvPr/>
-        </p:nvSpPr>
-        <p:spPr>
-          <a:xfrm>
-            <a:off x="914400" y="3035808"/>
-            <a:ext cx="10332720" cy="365760"/>
-          </a:xfrm>
-          <a:prstGeom prst="rect">
-            <a:avLst/>
-          </a:prstGeom>
-          <a:noFill/>
-          <a:ln/>
-        </p:spPr>
-        <p:txBody>
-          <a:bodyPr wrap="square" rtlCol="0" anchor="ctr"/>
-          <a:lstStyle/>
-          <a:p>
-            <a:pPr indent="0" marL="0">
-              <a:buNone/>
-            </a:pPr>
-            <a:r>
-              <a:rPr lang="en-US" sz="1400" b="1" dirty="0">
-                <a:solidFill>
-                  <a:srgbClr val="1B1F3B"/>
-                </a:solidFill>
-                <a:latin typeface="Segoe UI" pitchFamily="34" charset="0"/>
-                <a:ea typeface="Segoe UI" pitchFamily="34" charset="-122"/>
-                <a:cs typeface="Segoe UI" pitchFamily="34" charset="-120"/>
-              </a:rPr>
-              <a:t>Fiabilisation de l'envoi d'email (SMTP Gmail)</a:t>
-            </a:r>
-            <a:endParaRPr lang="en-US" sz="1400" dirty="0"/>
-          </a:p>
-        </p:txBody>
-      </p:sp>
-      <p:sp>
-        <p:nvSpPr>
-          <p:cNvPr id="12" name="Text 10"/>
-          <p:cNvSpPr/>
-          <p:nvPr/>
-        </p:nvSpPr>
-        <p:spPr>
-          <a:xfrm>
-            <a:off x="914400" y="3383280"/>
-            <a:ext cx="10332720" cy="594360"/>
-          </a:xfrm>
-          <a:prstGeom prst="rect">
-            <a:avLst/>
-          </a:prstGeom>
-          <a:noFill/>
-          <a:ln/>
-        </p:spPr>
-        <p:txBody>
-          <a:bodyPr wrap="square" rtlCol="0" anchor="ctr"/>
-          <a:lstStyle/>
-          <a:p>
-            <a:pPr indent="0" marL="0">
-              <a:lnSpc>
-                <a:spcPts val="1400"/>
-              </a:lnSpc>
-              <a:buNone/>
-            </a:pPr>
-            <a:r>
-              <a:rPr lang="en-US" sz="1100" dirty="0">
-                <a:solidFill>
-                  <a:srgbClr val="8A7C68"/>
-                </a:solidFill>
-                <a:latin typeface="Segoe UI" pitchFamily="34" charset="0"/>
-                <a:ea typeface="Segoe UI" pitchFamily="34" charset="-122"/>
-                <a:cs typeface="Segoe UI" pitchFamily="34" charset="-120"/>
-              </a:rPr>
-              <a:t>Import dynamique de nodemailer compatible Vercel (ES modules), configuration complète (TLS, authentification).</a:t>
-            </a:r>
-            <a:endParaRPr lang="en-US" sz="1100" dirty="0"/>
-          </a:p>
-        </p:txBody>
-      </p:sp>
-      <p:sp>
-        <p:nvSpPr>
-          <p:cNvPr id="13" name="Text 11"/>
+              <a:t>Backend</a:t>
+            </a:r>
+            <a:endParaRPr lang="en-US" sz="3800" dirty="0"/>
+          </a:p>
+        </p:txBody>
+      </p:sp>
+      <p:sp>
+        <p:nvSpPr>
+          <p:cNvPr id="4" name="Text 2"/>
+          <p:cNvSpPr/>
+          <p:nvPr/>
+        </p:nvSpPr>
+        <p:spPr>
+          <a:xfrm>
+            <a:off x="640080" y="3429000"/>
+            <a:ext cx="10058400" cy="457200"/>
+          </a:xfrm>
+          <a:prstGeom prst="rect">
+            <a:avLst/>
+          </a:prstGeom>
+          <a:noFill/>
+          <a:ln/>
+        </p:spPr>
+        <p:txBody>
+          <a:bodyPr wrap="square" rtlCol="0" anchor="ctr"/>
+          <a:lstStyle/>
+          <a:p>
+            <a:pPr indent="0" marL="0">
+              <a:buNone/>
+            </a:pPr>
+            <a:r>
+              <a:rPr lang="en-US" sz="1500" dirty="0">
+                <a:solidFill>
+                  <a:srgbClr val="C7C9E0"/>
+                </a:solidFill>
+                <a:latin typeface="Segoe UI" pitchFamily="34" charset="0"/>
+                <a:ea typeface="Segoe UI" pitchFamily="34" charset="-122"/>
+                <a:cs typeface="Segoe UI" pitchFamily="34" charset="-120"/>
+              </a:rPr>
+              <a:t>API, logique métier et intégrations</a:t>
+            </a:r>
+            <a:endParaRPr lang="en-US" sz="1500" dirty="0"/>
+          </a:p>
+        </p:txBody>
+      </p:sp>
+      <p:sp>
+        <p:nvSpPr>
+          <p:cNvPr id="5" name="Text 3"/>
+          <p:cNvSpPr/>
+          <p:nvPr/>
+        </p:nvSpPr>
+        <p:spPr>
+          <a:xfrm>
+            <a:off x="640080" y="3931920"/>
+            <a:ext cx="5486400" cy="365760"/>
+          </a:xfrm>
+          <a:prstGeom prst="rect">
+            <a:avLst/>
+          </a:prstGeom>
+          <a:noFill/>
+          <a:ln/>
+        </p:spPr>
+        <p:txBody>
+          <a:bodyPr wrap="square" rtlCol="0" anchor="ctr"/>
+          <a:lstStyle/>
+          <a:p>
+            <a:pPr indent="0" marL="0">
+              <a:buNone/>
+            </a:pPr>
+            <a:r>
+              <a:rPr lang="en-US" sz="1200" b="1" dirty="0">
+                <a:solidFill>
+                  <a:srgbClr val="C9A96A"/>
+                </a:solidFill>
+                <a:latin typeface="Segoe UI" pitchFamily="34" charset="0"/>
+                <a:ea typeface="Segoe UI" pitchFamily="34" charset="-122"/>
+                <a:cs typeface="Segoe UI" pitchFamily="34" charset="-120"/>
+              </a:rPr>
+              <a:t>42 mise(s) à jour</a:t>
+            </a:r>
+            <a:endParaRPr lang="en-US" sz="1200" dirty="0"/>
+          </a:p>
+        </p:txBody>
+      </p:sp>
+      <p:sp>
+        <p:nvSpPr>
+          <p:cNvPr id="6" name="Text 4"/>
           <p:cNvSpPr/>
           <p:nvPr/>
         </p:nvSpPr>
@@ -11576,7 +11537,7 @@
       </p:sp>
       <p:sp>
         <p:nvSpPr>
-          <p:cNvPr id="14" name="Text 12"/>
+          <p:cNvPr id="7" name="Text 5"/>
           <p:cNvSpPr/>
           <p:nvPr/>
         </p:nvSpPr>
@@ -11739,7 +11700,7 @@
                 <a:ea typeface="Georgia" pitchFamily="34" charset="-122"/>
                 <a:cs typeface="Georgia" pitchFamily="34" charset="-120"/>
               </a:rPr>
-              <a:t>Devis</a:t>
+              <a:t>Fondations</a:t>
             </a:r>
             <a:endParaRPr lang="en-US" sz="2400" dirty="0"/>
           </a:p>
@@ -11825,7 +11786,7 @@
                 <a:ea typeface="Segoe UI" pitchFamily="34" charset="-122"/>
                 <a:cs typeface="Segoe UI" pitchFamily="34" charset="-120"/>
               </a:rPr>
-              <a:t>Génération PDF des devis réparée</a:t>
+              <a:t>Mise en place initiale de l'application</a:t>
             </a:r>
             <a:endParaRPr lang="en-US" sz="1400" dirty="0"/>
           </a:p>
@@ -11867,7 +11828,7 @@
                 <a:ea typeface="Segoe UI" pitchFamily="34" charset="-122"/>
                 <a:cs typeface="Segoe UI" pitchFamily="34" charset="-120"/>
               </a:rPr>
-              <a:t>La génération/aperçu PDF lisait encore l'ancien fichier JSON local et ne trouvait plus les devis créés depuis la migration Supabase ; corrigée pour lire directement la table partagée.</a:t>
+              <a:t>Structure Next.js App Router, authentification, base de données JSON locale et première version des modules Devis, Chantiers, Équipe, Planning.</a:t>
             </a:r>
             <a:endParaRPr lang="en-US" sz="1100" dirty="0"/>
           </a:p>
@@ -11953,7 +11914,7 @@
                 <a:ea typeface="Segoe UI" pitchFamily="34" charset="-122"/>
                 <a:cs typeface="Segoe UI" pitchFamily="34" charset="-120"/>
               </a:rPr>
-              <a:t>Versioning et sauvegarde complète du devis</a:t>
+              <a:t>Fiabilisation de l'envoi d'email (SMTP Gmail)</a:t>
             </a:r>
             <a:endParaRPr lang="en-US" sz="1400" dirty="0"/>
           </a:p>
@@ -11995,7 +11956,7 @@
                 <a:ea typeface="Segoe UI" pitchFamily="34" charset="-122"/>
                 <a:cs typeface="Segoe UI" pitchFamily="34" charset="-120"/>
               </a:rPr>
-              <a:t>Le numéro de version s'incrémente à chaque enregistrement manuel ; les notes, majorations/minorations et le taux de TVA choisi, qui se perdaient silencieusement, sont désormais bien sauvegardés.</a:t>
+              <a:t>Import dynamique de nodemailer compatible Vercel (ES modules), configuration complète (TLS, authentification).</a:t>
             </a:r>
             <a:endParaRPr lang="en-US" sz="1100" dirty="0"/>
           </a:p>
@@ -12003,263 +11964,7 @@
       </p:sp>
       <p:sp>
         <p:nvSpPr>
-          <p:cNvPr id="13" name="Shape 11"/>
-          <p:cNvSpPr/>
-          <p:nvPr/>
-        </p:nvSpPr>
-        <p:spPr>
-          <a:xfrm>
-            <a:off x="640080" y="4160520"/>
-            <a:ext cx="10881360" cy="1097280"/>
-          </a:xfrm>
-          <a:prstGeom prst="roundRect">
-            <a:avLst>
-              <a:gd name="adj" fmla="val 5000"/>
-            </a:avLst>
-          </a:prstGeom>
-          <a:solidFill>
-            <a:srgbClr val="FFFFFF"/>
-          </a:solidFill>
-          <a:ln w="12700">
-            <a:solidFill>
-              <a:srgbClr val="E4DCCB"/>
-            </a:solidFill>
-            <a:prstDash val="solid"/>
-          </a:ln>
-        </p:spPr>
-      </p:sp>
-      <p:sp>
-        <p:nvSpPr>
-          <p:cNvPr id="14" name="Shape 12"/>
-          <p:cNvSpPr/>
-          <p:nvPr/>
-        </p:nvSpPr>
-        <p:spPr>
-          <a:xfrm>
-            <a:off x="640080" y="4160520"/>
-            <a:ext cx="54864" cy="1097280"/>
-          </a:xfrm>
-          <a:prstGeom prst="rect">
-            <a:avLst/>
-          </a:prstGeom>
-          <a:solidFill>
-            <a:srgbClr val="9A4C1F"/>
-          </a:solidFill>
-          <a:ln/>
-        </p:spPr>
-      </p:sp>
-      <p:sp>
-        <p:nvSpPr>
-          <p:cNvPr id="15" name="Text 13"/>
-          <p:cNvSpPr/>
-          <p:nvPr/>
-        </p:nvSpPr>
-        <p:spPr>
-          <a:xfrm>
-            <a:off x="914400" y="4270248"/>
-            <a:ext cx="10332720" cy="365760"/>
-          </a:xfrm>
-          <a:prstGeom prst="rect">
-            <a:avLst/>
-          </a:prstGeom>
-          <a:noFill/>
-          <a:ln/>
-        </p:spPr>
-        <p:txBody>
-          <a:bodyPr wrap="square" rtlCol="0" anchor="ctr"/>
-          <a:lstStyle/>
-          <a:p>
-            <a:pPr indent="0" marL="0">
-              <a:buNone/>
-            </a:pPr>
-            <a:r>
-              <a:rPr lang="en-US" sz="1400" b="1" dirty="0">
-                <a:solidFill>
-                  <a:srgbClr val="1B1F3B"/>
-                </a:solidFill>
-                <a:latin typeface="Segoe UI" pitchFamily="34" charset="0"/>
-                <a:ea typeface="Segoe UI" pitchFamily="34" charset="-122"/>
-                <a:cs typeface="Segoe UI" pitchFamily="34" charset="-120"/>
-              </a:rPr>
-              <a:t>Taux horaire par défaut sur la bibliothèque</a:t>
-            </a:r>
-            <a:endParaRPr lang="en-US" sz="1400" dirty="0"/>
-          </a:p>
-        </p:txBody>
-      </p:sp>
-      <p:sp>
-        <p:nvSpPr>
-          <p:cNvPr id="16" name="Text 14"/>
-          <p:cNvSpPr/>
-          <p:nvPr/>
-        </p:nvSpPr>
-        <p:spPr>
-          <a:xfrm>
-            <a:off x="914400" y="4617720"/>
-            <a:ext cx="10332720" cy="594360"/>
-          </a:xfrm>
-          <a:prstGeom prst="rect">
-            <a:avLst/>
-          </a:prstGeom>
-          <a:noFill/>
-          <a:ln/>
-        </p:spPr>
-        <p:txBody>
-          <a:bodyPr wrap="square" rtlCol="0" anchor="ctr"/>
-          <a:lstStyle/>
-          <a:p>
-            <a:pPr indent="0" marL="0">
-              <a:lnSpc>
-                <a:spcPts val="1400"/>
-              </a:lnSpc>
-              <a:buNone/>
-            </a:pPr>
-            <a:r>
-              <a:rPr lang="en-US" sz="1100" dirty="0">
-                <a:solidFill>
-                  <a:srgbClr val="8A7C68"/>
-                </a:solidFill>
-                <a:latin typeface="Segoe UI" pitchFamily="34" charset="0"/>
-                <a:ea typeface="Segoe UI" pitchFamily="34" charset="-122"/>
-                <a:cs typeface="Segoe UI" pitchFamily="34" charset="-120"/>
-              </a:rPr>
-              <a:t>Le taux horaire du profil entreprise sert désormais de valeur par défaut pour chaque ouvrage (liste, création, édition, calcul du coût main d'œuvre).</a:t>
-            </a:r>
-            <a:endParaRPr lang="en-US" sz="1100" dirty="0"/>
-          </a:p>
-        </p:txBody>
-      </p:sp>
-      <p:sp>
-        <p:nvSpPr>
-          <p:cNvPr id="17" name="Shape 15"/>
-          <p:cNvSpPr/>
-          <p:nvPr/>
-        </p:nvSpPr>
-        <p:spPr>
-          <a:xfrm>
-            <a:off x="640080" y="5394960"/>
-            <a:ext cx="10881360" cy="1097280"/>
-          </a:xfrm>
-          <a:prstGeom prst="roundRect">
-            <a:avLst>
-              <a:gd name="adj" fmla="val 5000"/>
-            </a:avLst>
-          </a:prstGeom>
-          <a:solidFill>
-            <a:srgbClr val="FFFFFF"/>
-          </a:solidFill>
-          <a:ln w="12700">
-            <a:solidFill>
-              <a:srgbClr val="E4DCCB"/>
-            </a:solidFill>
-            <a:prstDash val="solid"/>
-          </a:ln>
-        </p:spPr>
-      </p:sp>
-      <p:sp>
-        <p:nvSpPr>
-          <p:cNvPr id="18" name="Shape 16"/>
-          <p:cNvSpPr/>
-          <p:nvPr/>
-        </p:nvSpPr>
-        <p:spPr>
-          <a:xfrm>
-            <a:off x="640080" y="5394960"/>
-            <a:ext cx="54864" cy="1097280"/>
-          </a:xfrm>
-          <a:prstGeom prst="rect">
-            <a:avLst/>
-          </a:prstGeom>
-          <a:solidFill>
-            <a:srgbClr val="9A4C1F"/>
-          </a:solidFill>
-          <a:ln/>
-        </p:spPr>
-      </p:sp>
-      <p:sp>
-        <p:nvSpPr>
-          <p:cNvPr id="19" name="Text 17"/>
-          <p:cNvSpPr/>
-          <p:nvPr/>
-        </p:nvSpPr>
-        <p:spPr>
-          <a:xfrm>
-            <a:off x="914400" y="5504688"/>
-            <a:ext cx="10332720" cy="365760"/>
-          </a:xfrm>
-          <a:prstGeom prst="rect">
-            <a:avLst/>
-          </a:prstGeom>
-          <a:noFill/>
-          <a:ln/>
-        </p:spPr>
-        <p:txBody>
-          <a:bodyPr wrap="square" rtlCol="0" anchor="ctr"/>
-          <a:lstStyle/>
-          <a:p>
-            <a:pPr indent="0" marL="0">
-              <a:buNone/>
-            </a:pPr>
-            <a:r>
-              <a:rPr lang="en-US" sz="1400" b="1" dirty="0">
-                <a:solidFill>
-                  <a:srgbClr val="1B1F3B"/>
-                </a:solidFill>
-                <a:latin typeface="Segoe UI" pitchFamily="34" charset="0"/>
-                <a:ea typeface="Segoe UI" pitchFamily="34" charset="-122"/>
-                <a:cs typeface="Segoe UI" pitchFamily="34" charset="-120"/>
-              </a:rPr>
-              <a:t>Restauration de la description des ouvrages de bibliothèque</a:t>
-            </a:r>
-            <a:endParaRPr lang="en-US" sz="1400" dirty="0"/>
-          </a:p>
-        </p:txBody>
-      </p:sp>
-      <p:sp>
-        <p:nvSpPr>
-          <p:cNvPr id="20" name="Text 18"/>
-          <p:cNvSpPr/>
-          <p:nvPr/>
-        </p:nvSpPr>
-        <p:spPr>
-          <a:xfrm>
-            <a:off x="914400" y="5852160"/>
-            <a:ext cx="10332720" cy="594360"/>
-          </a:xfrm>
-          <a:prstGeom prst="rect">
-            <a:avLst/>
-          </a:prstGeom>
-          <a:noFill/>
-          <a:ln/>
-        </p:spPr>
-        <p:txBody>
-          <a:bodyPr wrap="square" rtlCol="0" anchor="ctr"/>
-          <a:lstStyle/>
-          <a:p>
-            <a:pPr indent="0" marL="0">
-              <a:lnSpc>
-                <a:spcPts val="1400"/>
-              </a:lnSpc>
-              <a:buNone/>
-            </a:pPr>
-            <a:r>
-              <a:rPr lang="en-US" sz="1100" dirty="0">
-                <a:solidFill>
-                  <a:srgbClr val="8A7C68"/>
-                </a:solidFill>
-                <a:latin typeface="Segoe UI" pitchFamily="34" charset="0"/>
-                <a:ea typeface="Segoe UI" pitchFamily="34" charset="-122"/>
-                <a:cs typeface="Segoe UI" pitchFamily="34" charset="-120"/>
-              </a:rPr>
-              <a:t>La description déjà saisie dans la Bibliothèque d'ouvrages est désormais reprise automatiquement quand l'ouvrage est ajouté à un devis, au lieu d'être perdue comme auparavant.</a:t>
-            </a:r>
-            <a:endParaRPr lang="en-US" sz="1100" dirty="0"/>
-          </a:p>
-        </p:txBody>
-      </p:sp>
-      <p:sp>
-        <p:nvSpPr>
-          <p:cNvPr id="21" name="Text 19"/>
+          <p:cNvPr id="13" name="Text 11"/>
           <p:cNvSpPr/>
           <p:nvPr/>
         </p:nvSpPr>
@@ -12298,7 +12003,7 @@
       </p:sp>
       <p:sp>
         <p:nvSpPr>
-          <p:cNvPr id="22" name="Text 20"/>
+          <p:cNvPr id="14" name="Text 12"/>
           <p:cNvSpPr/>
           <p:nvPr/>
         </p:nvSpPr>
@@ -12461,7 +12166,7 @@
                 <a:ea typeface="Georgia" pitchFamily="34" charset="-122"/>
                 <a:cs typeface="Georgia" pitchFamily="34" charset="-120"/>
               </a:rPr>
-              <a:t>Devis (suite)</a:t>
+              <a:t>Devis</a:t>
             </a:r>
             <a:endParaRPr lang="en-US" sz="2400" dirty="0"/>
           </a:p>
@@ -12547,7 +12252,7 @@
                 <a:ea typeface="Segoe UI" pitchFamily="34" charset="-122"/>
                 <a:cs typeface="Segoe UI" pitchFamily="34" charset="-120"/>
               </a:rPr>
-              <a:t>Référence client en texte libre</a:t>
+              <a:t>Génération PDF des devis réparée</a:t>
             </a:r>
             <a:endParaRPr lang="en-US" sz="1400" dirty="0"/>
           </a:p>
@@ -12589,7 +12294,7 @@
                 <a:ea typeface="Segoe UI" pitchFamily="34" charset="-122"/>
                 <a:cs typeface="Segoe UI" pitchFamily="34" charset="-120"/>
               </a:rPr>
-              <a:t>La 'Référence client' n'est plus une liste déroulante à choisir (qui pouvait donner l'impression que l'information saisie disparaissait) : c'est maintenant un champ texte simple qui garde exactement ce qui a été écrit.</a:t>
+              <a:t>La génération/aperçu PDF lisait encore l'ancien fichier JSON local et ne trouvait plus les devis créés depuis la migration Supabase ; corrigée pour lire directement la table partagée.</a:t>
             </a:r>
             <a:endParaRPr lang="en-US" sz="1100" dirty="0"/>
           </a:p>
@@ -12675,7 +12380,7 @@
                 <a:ea typeface="Segoe UI" pitchFamily="34" charset="-122"/>
                 <a:cs typeface="Segoe UI" pitchFamily="34" charset="-120"/>
               </a:rPr>
-              <a:t>Correction du calcul du total d'un devis (majorations non comptées)</a:t>
+              <a:t>Versioning et sauvegarde complète du devis</a:t>
             </a:r>
             <a:endParaRPr lang="en-US" sz="1400" dirty="0"/>
           </a:p>
@@ -12717,7 +12422,7 @@
                 <a:ea typeface="Segoe UI" pitchFamily="34" charset="-122"/>
                 <a:cs typeface="Segoe UI" pitchFamily="34" charset="-120"/>
               </a:rPr>
-              <a:t>Le montant Total HT / TVA / Total TTC enregistré pour chaque devis ne prenait pas en compte les majorations (coordination de chantier, provision aléas, assurance décennale), même si elles étaient listées sur le document. Corrigé à la source (calcul serveur) : le total inclut désormais bien les majorations, partout où il est utilisé (tableau de bord, facturation, signature client, archives).</a:t>
+              <a:t>Le numéro de version s'incrémente à chaque enregistrement manuel ; les notes, majorations/minorations et le taux de TVA choisi, qui se perdaient silencieusement, sont désormais bien sauvegardés.</a:t>
             </a:r>
             <a:endParaRPr lang="en-US" sz="1100" dirty="0"/>
           </a:p>
@@ -12803,7 +12508,7 @@
                 <a:ea typeface="Segoe UI" pitchFamily="34" charset="-122"/>
                 <a:cs typeface="Segoe UI" pitchFamily="34" charset="-120"/>
               </a:rPr>
-              <a:t>Deuxième cause trouvée : le total serveur retombait à 0</a:t>
+              <a:t>Taux horaire par défaut sur la bibliothèque</a:t>
             </a:r>
             <a:endParaRPr lang="en-US" sz="1400" dirty="0"/>
           </a:p>
@@ -12845,7 +12550,7 @@
                 <a:ea typeface="Segoe UI" pitchFamily="34" charset="-122"/>
                 <a:cs typeface="Segoe UI" pitchFamily="34" charset="-120"/>
               </a:rPr>
-              <a:t>Le calcul serveur recalculait chaque ligne à partir de zéro au lieu de faire confiance au montant déjà calculé correctement par l'éditeur, et se trompait sur deux points (un champ technique à 0 mal interprété comme 'prix fixe', une liste de fournitures non reconnue), ramenant le total à 0€ à chaque enregistrement. Corrigé : le serveur fait maintenant confiance au montant de chaque ligne tel qu'il apparaît dans l'éditeur.</a:t>
+              <a:t>Le taux horaire du profil entreprise sert désormais de valeur par défaut pour chaque ouvrage (liste, création, édition, calcul du coût main d'œuvre).</a:t>
             </a:r>
             <a:endParaRPr lang="en-US" sz="1100" dirty="0"/>
           </a:p>
@@ -12931,7 +12636,7 @@
                 <a:ea typeface="Segoe UI" pitchFamily="34" charset="-122"/>
                 <a:cs typeface="Segoe UI" pitchFamily="34" charset="-120"/>
               </a:rPr>
-              <a:t>Taux de TVA de chaque ligne aligné sur le devis</a:t>
+              <a:t>Restauration de la description des ouvrages de bibliothèque</a:t>
             </a:r>
             <a:endParaRPr lang="en-US" sz="1400" dirty="0"/>
           </a:p>
@@ -12973,7 +12678,7 @@
                 <a:ea typeface="Segoe UI" pitchFamily="34" charset="-122"/>
                 <a:cs typeface="Segoe UI" pitchFamily="34" charset="-120"/>
               </a:rPr>
-              <a:t>Chaque ligne de devis calculait sa propre TVA à 20% par défaut, sans tenir compte du taux choisi pour le devis (ex. 10%) — corrigé pour utiliser le taux réellement sélectionné.</a:t>
+              <a:t>La description déjà saisie dans la Bibliothèque d'ouvrages est désormais reprise automatiquement quand l'ouvrage est ajouté à un devis, au lieu d'être perdue comme auparavant.</a:t>
             </a:r>
             <a:endParaRPr lang="en-US" sz="1100" dirty="0"/>
           </a:p>
@@ -13269,7 +12974,7 @@
                 <a:ea typeface="Segoe UI" pitchFamily="34" charset="-122"/>
                 <a:cs typeface="Segoe UI" pitchFamily="34" charset="-120"/>
               </a:rPr>
-              <a:t>Protection contre l'effacement accidentel d'une signature</a:t>
+              <a:t>Référence client en texte libre</a:t>
             </a:r>
             <a:endParaRPr lang="en-US" sz="1400" dirty="0"/>
           </a:p>
@@ -13311,7 +13016,7 @@
                 <a:ea typeface="Segoe UI" pitchFamily="34" charset="-122"/>
                 <a:cs typeface="Segoe UI" pitchFamily="34" charset="-120"/>
               </a:rPr>
-              <a:t>Renvoyer l'invitation à signer un devis déjà signé effaçait silencieusement la signature existante (nom, date) pour repartir de zéro. Une confirmation explicite est désormais nécessaire pour rouvrir un devis déjà signé.</a:t>
+              <a:t>La 'Référence client' n'est plus une liste déroulante à choisir (qui pouvait donner l'impression que l'information saisie disparaissait) : c'est maintenant un champ texte simple qui garde exactement ce qui a été écrit.</a:t>
             </a:r>
             <a:endParaRPr lang="en-US" sz="1100" dirty="0"/>
           </a:p>
@@ -13397,7 +13102,7 @@
                 <a:ea typeface="Segoe UI" pitchFamily="34" charset="-122"/>
                 <a:cs typeface="Segoe UI" pitchFamily="34" charset="-120"/>
               </a:rPr>
-              <a:t>Acceptation manuelle d'un devis, sans passer par la signature électronique</a:t>
+              <a:t>Correction du calcul du total d'un devis (majorations non comptées)</a:t>
             </a:r>
             <a:endParaRPr lang="en-US" sz="1400" dirty="0"/>
           </a:p>
@@ -13439,7 +13144,7 @@
                 <a:ea typeface="Segoe UI" pitchFamily="34" charset="-122"/>
                 <a:cs typeface="Segoe UI" pitchFamily="34" charset="-120"/>
               </a:rPr>
-              <a:t>Nouvelle action pour marquer un devis comme accepté par le client (statut 'Signé') directement depuis l'éditeur, sans passer par Kôji Signature. Une fenêtre demande le motif — acceptation verbale ou acompte versé — avec une précision libre optionnelle (montant, date...). Le devis devient alors immédiatement éligible à la facturation et débloque l'accès normal au chantier lié, exactement comme une signature électronique. Un repère (verbal / acompte) distingue ce cas d'une vraie signature dans la liste des devis.</a:t>
+              <a:t>Le montant Total HT / TVA / Total TTC enregistré pour chaque devis ne prenait pas en compte les majorations (coordination de chantier, provision aléas, assurance décennale), même si elles étaient listées sur le document. Corrigé à la source (calcul serveur) : le total inclut désormais bien les majorations, partout où il est utilisé (tableau de bord, facturation, signature client, archives).</a:t>
             </a:r>
             <a:endParaRPr lang="en-US" sz="1100" dirty="0"/>
           </a:p>
@@ -13525,7 +13230,7 @@
                 <a:ea typeface="Segoe UI" pitchFamily="34" charset="-122"/>
                 <a:cs typeface="Segoe UI" pitchFamily="34" charset="-120"/>
               </a:rPr>
-              <a:t>Base de calcul correcte pour les majorations (coordination, aléas, assurance)</a:t>
+              <a:t>Deuxième cause trouvée : le total serveur retombait à 0</a:t>
             </a:r>
             <a:endParaRPr lang="en-US" sz="1400" dirty="0"/>
           </a:p>
@@ -13567,7 +13272,7 @@
                 <a:ea typeface="Segoe UI" pitchFamily="34" charset="-122"/>
                 <a:cs typeface="Segoe UI" pitchFamily="34" charset="-120"/>
               </a:rPr>
-              <a:t>La coordination de chantier et la provision pour aléas se calculaient déjà, comme il se doit, uniquement sur le total des lots. L'assurance décennale utilisait à tort la même base, alors qu'elle doit porter sur le chiffrage total de l'affaire HT (lots + coordination + provision aléas + toute ligne précédente). Chaque ligne de majoration a maintenant un menu 'Base' — 'Total des lots' ou 'Chiffrage cumulé' — pour choisir explicitement sa base de calcul, réglé sur cumulé par défaut pour l'assurance décennale ; utile si d'autres lignes cumulatives sont ajoutées plus tard. Corrigé dans le calcul du devis, le PDF et l'export Word, qui utilisaient chacun leur propre logique.</a:t>
+              <a:t>Le calcul serveur recalculait chaque ligne à partir de zéro au lieu de faire confiance au montant déjà calculé correctement par l'éditeur, et se trompait sur deux points (un champ technique à 0 mal interprété comme 'prix fixe', une liste de fournitures non reconnue), ramenant le total à 0€ à chaque enregistrement. Corrigé : le serveur fait maintenant confiance au montant de chaque ligne tel qu'il apparaît dans l'éditeur.</a:t>
             </a:r>
             <a:endParaRPr lang="en-US" sz="1100" dirty="0"/>
           </a:p>
@@ -13575,7 +13280,135 @@
       </p:sp>
       <p:sp>
         <p:nvSpPr>
-          <p:cNvPr id="17" name="Text 15"/>
+          <p:cNvPr id="17" name="Shape 15"/>
+          <p:cNvSpPr/>
+          <p:nvPr/>
+        </p:nvSpPr>
+        <p:spPr>
+          <a:xfrm>
+            <a:off x="640080" y="5394960"/>
+            <a:ext cx="10881360" cy="1097280"/>
+          </a:xfrm>
+          <a:prstGeom prst="roundRect">
+            <a:avLst>
+              <a:gd name="adj" fmla="val 5000"/>
+            </a:avLst>
+          </a:prstGeom>
+          <a:solidFill>
+            <a:srgbClr val="FFFFFF"/>
+          </a:solidFill>
+          <a:ln w="12700">
+            <a:solidFill>
+              <a:srgbClr val="E4DCCB"/>
+            </a:solidFill>
+            <a:prstDash val="solid"/>
+          </a:ln>
+        </p:spPr>
+      </p:sp>
+      <p:sp>
+        <p:nvSpPr>
+          <p:cNvPr id="18" name="Shape 16"/>
+          <p:cNvSpPr/>
+          <p:nvPr/>
+        </p:nvSpPr>
+        <p:spPr>
+          <a:xfrm>
+            <a:off x="640080" y="5394960"/>
+            <a:ext cx="54864" cy="1097280"/>
+          </a:xfrm>
+          <a:prstGeom prst="rect">
+            <a:avLst/>
+          </a:prstGeom>
+          <a:solidFill>
+            <a:srgbClr val="9A4C1F"/>
+          </a:solidFill>
+          <a:ln/>
+        </p:spPr>
+      </p:sp>
+      <p:sp>
+        <p:nvSpPr>
+          <p:cNvPr id="19" name="Text 17"/>
+          <p:cNvSpPr/>
+          <p:nvPr/>
+        </p:nvSpPr>
+        <p:spPr>
+          <a:xfrm>
+            <a:off x="914400" y="5504688"/>
+            <a:ext cx="10332720" cy="365760"/>
+          </a:xfrm>
+          <a:prstGeom prst="rect">
+            <a:avLst/>
+          </a:prstGeom>
+          <a:noFill/>
+          <a:ln/>
+        </p:spPr>
+        <p:txBody>
+          <a:bodyPr wrap="square" rtlCol="0" anchor="ctr"/>
+          <a:lstStyle/>
+          <a:p>
+            <a:pPr indent="0" marL="0">
+              <a:buNone/>
+            </a:pPr>
+            <a:r>
+              <a:rPr lang="en-US" sz="1400" b="1" dirty="0">
+                <a:solidFill>
+                  <a:srgbClr val="1B1F3B"/>
+                </a:solidFill>
+                <a:latin typeface="Segoe UI" pitchFamily="34" charset="0"/>
+                <a:ea typeface="Segoe UI" pitchFamily="34" charset="-122"/>
+                <a:cs typeface="Segoe UI" pitchFamily="34" charset="-120"/>
+              </a:rPr>
+              <a:t>Taux de TVA de chaque ligne aligné sur le devis</a:t>
+            </a:r>
+            <a:endParaRPr lang="en-US" sz="1400" dirty="0"/>
+          </a:p>
+        </p:txBody>
+      </p:sp>
+      <p:sp>
+        <p:nvSpPr>
+          <p:cNvPr id="20" name="Text 18"/>
+          <p:cNvSpPr/>
+          <p:nvPr/>
+        </p:nvSpPr>
+        <p:spPr>
+          <a:xfrm>
+            <a:off x="914400" y="5852160"/>
+            <a:ext cx="10332720" cy="594360"/>
+          </a:xfrm>
+          <a:prstGeom prst="rect">
+            <a:avLst/>
+          </a:prstGeom>
+          <a:noFill/>
+          <a:ln/>
+        </p:spPr>
+        <p:txBody>
+          <a:bodyPr wrap="square" rtlCol="0" anchor="ctr"/>
+          <a:lstStyle/>
+          <a:p>
+            <a:pPr indent="0" marL="0">
+              <a:lnSpc>
+                <a:spcPts val="1400"/>
+              </a:lnSpc>
+              <a:buNone/>
+            </a:pPr>
+            <a:r>
+              <a:rPr lang="en-US" sz="1100" dirty="0">
+                <a:solidFill>
+                  <a:srgbClr val="8A7C68"/>
+                </a:solidFill>
+                <a:latin typeface="Segoe UI" pitchFamily="34" charset="0"/>
+                <a:ea typeface="Segoe UI" pitchFamily="34" charset="-122"/>
+                <a:cs typeface="Segoe UI" pitchFamily="34" charset="-120"/>
+              </a:rPr>
+              <a:t>Chaque ligne de devis calculait sa propre TVA à 20% par défaut, sans tenir compte du taux choisi pour le devis (ex. 10%) — corrigé pour utiliser le taux réellement sélectionné.</a:t>
+            </a:r>
+            <a:endParaRPr lang="en-US" sz="1100" dirty="0"/>
+          </a:p>
+        </p:txBody>
+      </p:sp>
+      <p:sp>
+        <p:nvSpPr>
+          <p:cNvPr id="21" name="Text 19"/>
           <p:cNvSpPr/>
           <p:nvPr/>
         </p:nvSpPr>
@@ -13614,7 +13447,7 @@
       </p:sp>
       <p:sp>
         <p:nvSpPr>
-          <p:cNvPr id="18" name="Text 16"/>
+          <p:cNvPr id="22" name="Text 20"/>
           <p:cNvSpPr/>
           <p:nvPr/>
         </p:nvSpPr>
@@ -13777,7 +13610,7 @@
                 <a:ea typeface="Georgia" pitchFamily="34" charset="-122"/>
                 <a:cs typeface="Georgia" pitchFamily="34" charset="-120"/>
               </a:rPr>
-              <a:t>Chantiers</a:t>
+              <a:t>Devis (suite)</a:t>
             </a:r>
             <a:endParaRPr lang="en-US" sz="2400" dirty="0"/>
           </a:p>
@@ -13863,7 +13696,7 @@
                 <a:ea typeface="Segoe UI" pitchFamily="34" charset="-122"/>
                 <a:cs typeface="Segoe UI" pitchFamily="34" charset="-120"/>
               </a:rPr>
-              <a:t>Correction d'un bug bloquant majeur</a:t>
+              <a:t>Protection contre l'effacement accidentel d'une signature</a:t>
             </a:r>
             <a:endParaRPr lang="en-US" sz="1400" dirty="0"/>
           </a:p>
@@ -13905,7 +13738,7 @@
                 <a:ea typeface="Segoe UI" pitchFamily="34" charset="-122"/>
                 <a:cs typeface="Segoe UI" pitchFamily="34" charset="-120"/>
               </a:rPr>
-              <a:t>Un chantier ne pouvait être consulté que si son devis était déjà signé par le client, empêchant toute préparation en amont. Corrigé : la fiche chantier est désormais accessible dès sa création.</a:t>
+              <a:t>Renvoyer l'invitation à signer un devis déjà signé effaçait silencieusement la signature existante (nom, date) pour repartir de zéro. Une confirmation explicite est désormais nécessaire pour rouvrir un devis déjà signé.</a:t>
             </a:r>
             <a:endParaRPr lang="en-US" sz="1100" dirty="0"/>
           </a:p>
@@ -13991,7 +13824,7 @@
                 <a:ea typeface="Segoe UI" pitchFamily="34" charset="-122"/>
                 <a:cs typeface="Segoe UI" pitchFamily="34" charset="-120"/>
               </a:rPr>
-              <a:t>Dépenses liées à un ouvrage précis</a:t>
+              <a:t>Acceptation manuelle d'un devis, sans passer par la signature électronique</a:t>
             </a:r>
             <a:endParaRPr lang="en-US" sz="1400" dirty="0"/>
           </a:p>
@@ -14033,7 +13866,7 @@
                 <a:ea typeface="Segoe UI" pitchFamily="34" charset="-122"/>
                 <a:cs typeface="Segoe UI" pitchFamily="34" charset="-120"/>
               </a:rPr>
-              <a:t>L'API des dépenses accepte désormais un identifiant de tâche (ouvrage) en plus du chantier, pour un suivi financier plus fin.</a:t>
+              <a:t>Nouvelle action pour marquer un devis comme accepté par le client (statut 'Signé') directement depuis l'éditeur, sans passer par Kôji Signature. Une fenêtre demande le motif — acceptation verbale ou acompte versé — avec une précision libre optionnelle (montant, date...). Le devis devient alors immédiatement éligible à la facturation et débloque l'accès normal au chantier lié, exactement comme une signature électronique. Un repère (verbal / acompte) distingue ce cas d'une vraie signature dans la liste des devis.</a:t>
             </a:r>
             <a:endParaRPr lang="en-US" sz="1100" dirty="0"/>
           </a:p>
@@ -14041,7 +13874,135 @@
       </p:sp>
       <p:sp>
         <p:nvSpPr>
-          <p:cNvPr id="13" name="Text 11"/>
+          <p:cNvPr id="13" name="Shape 11"/>
+          <p:cNvSpPr/>
+          <p:nvPr/>
+        </p:nvSpPr>
+        <p:spPr>
+          <a:xfrm>
+            <a:off x="640080" y="4160520"/>
+            <a:ext cx="10881360" cy="1097280"/>
+          </a:xfrm>
+          <a:prstGeom prst="roundRect">
+            <a:avLst>
+              <a:gd name="adj" fmla="val 5000"/>
+            </a:avLst>
+          </a:prstGeom>
+          <a:solidFill>
+            <a:srgbClr val="FFFFFF"/>
+          </a:solidFill>
+          <a:ln w="12700">
+            <a:solidFill>
+              <a:srgbClr val="E4DCCB"/>
+            </a:solidFill>
+            <a:prstDash val="solid"/>
+          </a:ln>
+        </p:spPr>
+      </p:sp>
+      <p:sp>
+        <p:nvSpPr>
+          <p:cNvPr id="14" name="Shape 12"/>
+          <p:cNvSpPr/>
+          <p:nvPr/>
+        </p:nvSpPr>
+        <p:spPr>
+          <a:xfrm>
+            <a:off x="640080" y="4160520"/>
+            <a:ext cx="54864" cy="1097280"/>
+          </a:xfrm>
+          <a:prstGeom prst="rect">
+            <a:avLst/>
+          </a:prstGeom>
+          <a:solidFill>
+            <a:srgbClr val="9A4C1F"/>
+          </a:solidFill>
+          <a:ln/>
+        </p:spPr>
+      </p:sp>
+      <p:sp>
+        <p:nvSpPr>
+          <p:cNvPr id="15" name="Text 13"/>
+          <p:cNvSpPr/>
+          <p:nvPr/>
+        </p:nvSpPr>
+        <p:spPr>
+          <a:xfrm>
+            <a:off x="914400" y="4270248"/>
+            <a:ext cx="10332720" cy="365760"/>
+          </a:xfrm>
+          <a:prstGeom prst="rect">
+            <a:avLst/>
+          </a:prstGeom>
+          <a:noFill/>
+          <a:ln/>
+        </p:spPr>
+        <p:txBody>
+          <a:bodyPr wrap="square" rtlCol="0" anchor="ctr"/>
+          <a:lstStyle/>
+          <a:p>
+            <a:pPr indent="0" marL="0">
+              <a:buNone/>
+            </a:pPr>
+            <a:r>
+              <a:rPr lang="en-US" sz="1400" b="1" dirty="0">
+                <a:solidFill>
+                  <a:srgbClr val="1B1F3B"/>
+                </a:solidFill>
+                <a:latin typeface="Segoe UI" pitchFamily="34" charset="0"/>
+                <a:ea typeface="Segoe UI" pitchFamily="34" charset="-122"/>
+                <a:cs typeface="Segoe UI" pitchFamily="34" charset="-120"/>
+              </a:rPr>
+              <a:t>Base de calcul correcte pour les majorations (coordination, aléas, assurance)</a:t>
+            </a:r>
+            <a:endParaRPr lang="en-US" sz="1400" dirty="0"/>
+          </a:p>
+        </p:txBody>
+      </p:sp>
+      <p:sp>
+        <p:nvSpPr>
+          <p:cNvPr id="16" name="Text 14"/>
+          <p:cNvSpPr/>
+          <p:nvPr/>
+        </p:nvSpPr>
+        <p:spPr>
+          <a:xfrm>
+            <a:off x="914400" y="4617720"/>
+            <a:ext cx="10332720" cy="594360"/>
+          </a:xfrm>
+          <a:prstGeom prst="rect">
+            <a:avLst/>
+          </a:prstGeom>
+          <a:noFill/>
+          <a:ln/>
+        </p:spPr>
+        <p:txBody>
+          <a:bodyPr wrap="square" rtlCol="0" anchor="ctr"/>
+          <a:lstStyle/>
+          <a:p>
+            <a:pPr indent="0" marL="0">
+              <a:lnSpc>
+                <a:spcPts val="1400"/>
+              </a:lnSpc>
+              <a:buNone/>
+            </a:pPr>
+            <a:r>
+              <a:rPr lang="en-US" sz="1100" dirty="0">
+                <a:solidFill>
+                  <a:srgbClr val="8A7C68"/>
+                </a:solidFill>
+                <a:latin typeface="Segoe UI" pitchFamily="34" charset="0"/>
+                <a:ea typeface="Segoe UI" pitchFamily="34" charset="-122"/>
+                <a:cs typeface="Segoe UI" pitchFamily="34" charset="-120"/>
+              </a:rPr>
+              <a:t>La coordination de chantier et la provision pour aléas se calculaient déjà, comme il se doit, uniquement sur le total des lots. L'assurance décennale utilisait à tort la même base, alors qu'elle doit porter sur le chiffrage total de l'affaire HT (lots + coordination + provision aléas + toute ligne précédente). Chaque ligne de majoration a maintenant un menu 'Base' — 'Total des lots' ou 'Chiffrage cumulé' — pour choisir explicitement sa base de calcul, réglé sur cumulé par défaut pour l'assurance décennale ; utile si d'autres lignes cumulatives sont ajoutées plus tard. Corrigé dans le calcul du devis, le PDF et l'export Word, qui utilisaient chacun leur propre logique.</a:t>
+            </a:r>
+            <a:endParaRPr lang="en-US" sz="1100" dirty="0"/>
+          </a:p>
+        </p:txBody>
+      </p:sp>
+      <p:sp>
+        <p:nvSpPr>
+          <p:cNvPr id="17" name="Text 15"/>
           <p:cNvSpPr/>
           <p:nvPr/>
         </p:nvSpPr>
@@ -14080,7 +14041,7 @@
       </p:sp>
       <p:sp>
         <p:nvSpPr>
-          <p:cNvPr id="14" name="Text 12"/>
+          <p:cNvPr id="18" name="Text 16"/>
           <p:cNvSpPr/>
           <p:nvPr/>
         </p:nvSpPr>
@@ -14243,7 +14204,7 @@
                 <a:ea typeface="Georgia" pitchFamily="34" charset="-122"/>
                 <a:cs typeface="Georgia" pitchFamily="34" charset="-120"/>
               </a:rPr>
-              <a:t>Équipe</a:t>
+              <a:t>Chantiers</a:t>
             </a:r>
             <a:endParaRPr lang="en-US" sz="2400" dirty="0"/>
           </a:p>
@@ -14329,7 +14290,7 @@
                 <a:ea typeface="Segoe UI" pitchFamily="34" charset="-122"/>
                 <a:cs typeface="Segoe UI" pitchFamily="34" charset="-120"/>
               </a:rPr>
-              <a:t>Six types de pointage</a:t>
+              <a:t>Correction d'un bug bloquant majeur</a:t>
             </a:r>
             <a:endParaRPr lang="en-US" sz="1400" dirty="0"/>
           </a:p>
@@ -14371,7 +14332,7 @@
                 <a:ea typeface="Segoe UI" pitchFamily="34" charset="-122"/>
                 <a:cs typeface="Segoe UI" pitchFamily="34" charset="-120"/>
               </a:rPr>
-              <a:t>Heures de travail, jour de travail, forfait, ouvrage, passage, déplacement — chacun avec date et montant ; le montant des heures est calculé automatiquement à partir du taux horaire de l'ouvrier.</a:t>
+              <a:t>Un chantier ne pouvait être consulté que si son devis était déjà signé par le client, empêchant toute préparation en amont. Corrigé : la fiche chantier est désormais accessible dès sa création.</a:t>
             </a:r>
             <a:endParaRPr lang="en-US" sz="1100" dirty="0"/>
           </a:p>
@@ -14457,7 +14418,7 @@
                 <a:ea typeface="Segoe UI" pitchFamily="34" charset="-122"/>
                 <a:cs typeface="Segoe UI" pitchFamily="34" charset="-120"/>
               </a:rPr>
-              <a:t>Alertes automatiques de dépassement / manque d'heures</a:t>
+              <a:t>Dépenses liées à un ouvrage précis</a:t>
             </a:r>
             <a:endParaRPr lang="en-US" sz="1400" dirty="0"/>
           </a:p>
@@ -14499,7 +14460,7 @@
                 <a:ea typeface="Segoe UI" pitchFamily="34" charset="-122"/>
                 <a:cs typeface="Segoe UI" pitchFamily="34" charset="-120"/>
               </a:rPr>
-              <a:t>À la fin de chaque semaine, si le total travaillé diffère du contrat de plus de 15 minutes, une notification est envoyée automatiquement à l'entreprise (une seule fois par semaine et par ouvrier).</a:t>
+              <a:t>L'API des dépenses accepte désormais un identifiant de tâche (ouvrage) en plus du chantier, pour un suivi financier plus fin.</a:t>
             </a:r>
             <a:endParaRPr lang="en-US" sz="1100" dirty="0"/>
           </a:p>
@@ -14507,135 +14468,7 @@
       </p:sp>
       <p:sp>
         <p:nvSpPr>
-          <p:cNvPr id="13" name="Shape 11"/>
-          <p:cNvSpPr/>
-          <p:nvPr/>
-        </p:nvSpPr>
-        <p:spPr>
-          <a:xfrm>
-            <a:off x="640080" y="4160520"/>
-            <a:ext cx="10881360" cy="1097280"/>
-          </a:xfrm>
-          <a:prstGeom prst="roundRect">
-            <a:avLst>
-              <a:gd name="adj" fmla="val 5000"/>
-            </a:avLst>
-          </a:prstGeom>
-          <a:solidFill>
-            <a:srgbClr val="FFFFFF"/>
-          </a:solidFill>
-          <a:ln w="12700">
-            <a:solidFill>
-              <a:srgbClr val="E4DCCB"/>
-            </a:solidFill>
-            <a:prstDash val="solid"/>
-          </a:ln>
-        </p:spPr>
-      </p:sp>
-      <p:sp>
-        <p:nvSpPr>
-          <p:cNvPr id="14" name="Shape 12"/>
-          <p:cNvSpPr/>
-          <p:nvPr/>
-        </p:nvSpPr>
-        <p:spPr>
-          <a:xfrm>
-            <a:off x="640080" y="4160520"/>
-            <a:ext cx="54864" cy="1097280"/>
-          </a:xfrm>
-          <a:prstGeom prst="rect">
-            <a:avLst/>
-          </a:prstGeom>
-          <a:solidFill>
-            <a:srgbClr val="9A4C1F"/>
-          </a:solidFill>
-          <a:ln/>
-        </p:spPr>
-      </p:sp>
-      <p:sp>
-        <p:nvSpPr>
-          <p:cNvPr id="15" name="Text 13"/>
-          <p:cNvSpPr/>
-          <p:nvPr/>
-        </p:nvSpPr>
-        <p:spPr>
-          <a:xfrm>
-            <a:off x="914400" y="4270248"/>
-            <a:ext cx="10332720" cy="365760"/>
-          </a:xfrm>
-          <a:prstGeom prst="rect">
-            <a:avLst/>
-          </a:prstGeom>
-          <a:noFill/>
-          <a:ln/>
-        </p:spPr>
-        <p:txBody>
-          <a:bodyPr wrap="square" rtlCol="0" anchor="ctr"/>
-          <a:lstStyle/>
-          <a:p>
-            <a:pPr indent="0" marL="0">
-              <a:buNone/>
-            </a:pPr>
-            <a:r>
-              <a:rPr lang="en-US" sz="1400" b="1" dirty="0">
-                <a:solidFill>
-                  <a:srgbClr val="1B1F3B"/>
-                </a:solidFill>
-                <a:latin typeface="Segoe UI" pitchFamily="34" charset="0"/>
-                <a:ea typeface="Segoe UI" pitchFamily="34" charset="-122"/>
-                <a:cs typeface="Segoe UI" pitchFamily="34" charset="-120"/>
-              </a:rPr>
-              <a:t>Export PDF du relevé d'heures</a:t>
-            </a:r>
-            <a:endParaRPr lang="en-US" sz="1400" dirty="0"/>
-          </a:p>
-        </p:txBody>
-      </p:sp>
-      <p:sp>
-        <p:nvSpPr>
-          <p:cNvPr id="16" name="Text 14"/>
-          <p:cNvSpPr/>
-          <p:nvPr/>
-        </p:nvSpPr>
-        <p:spPr>
-          <a:xfrm>
-            <a:off x="914400" y="4617720"/>
-            <a:ext cx="10332720" cy="594360"/>
-          </a:xfrm>
-          <a:prstGeom prst="rect">
-            <a:avLst/>
-          </a:prstGeom>
-          <a:noFill/>
-          <a:ln/>
-        </p:spPr>
-        <p:txBody>
-          <a:bodyPr wrap="square" rtlCol="0" anchor="ctr"/>
-          <a:lstStyle/>
-          <a:p>
-            <a:pPr indent="0" marL="0">
-              <a:lnSpc>
-                <a:spcPts val="1400"/>
-              </a:lnSpc>
-              <a:buNone/>
-            </a:pPr>
-            <a:r>
-              <a:rPr lang="en-US" sz="1100" dirty="0">
-                <a:solidFill>
-                  <a:srgbClr val="8A7C68"/>
-                </a:solidFill>
-                <a:latin typeface="Segoe UI" pitchFamily="34" charset="0"/>
-                <a:ea typeface="Segoe UI" pitchFamily="34" charset="-122"/>
-                <a:cs typeface="Segoe UI" pitchFamily="34" charset="-120"/>
-              </a:rPr>
-              <a:t>Génération d'un PDF mensuel par ouvrier : détail par journée/type de pointage, totaux hebdomadaires, total du mois en heures et en montant — pensé pour la comptabilité et la gestion de la paie.</a:t>
-            </a:r>
-            <a:endParaRPr lang="en-US" sz="1100" dirty="0"/>
-          </a:p>
-        </p:txBody>
-      </p:sp>
-      <p:sp>
-        <p:nvSpPr>
-          <p:cNvPr id="17" name="Text 15"/>
+          <p:cNvPr id="13" name="Text 11"/>
           <p:cNvSpPr/>
           <p:nvPr/>
         </p:nvSpPr>
@@ -14674,7 +14507,7 @@
       </p:sp>
       <p:sp>
         <p:nvSpPr>
-          <p:cNvPr id="18" name="Text 16"/>
+          <p:cNvPr id="14" name="Text 12"/>
           <p:cNvSpPr/>
           <p:nvPr/>
         </p:nvSpPr>
@@ -14837,7 +14670,7 @@
                 <a:ea typeface="Georgia" pitchFamily="34" charset="-122"/>
                 <a:cs typeface="Georgia" pitchFamily="34" charset="-120"/>
               </a:rPr>
-              <a:t>Notifications</a:t>
+              <a:t>Équipe</a:t>
             </a:r>
             <a:endParaRPr lang="en-US" sz="2400" dirty="0"/>
           </a:p>
@@ -14923,7 +14756,7 @@
                 <a:ea typeface="Segoe UI" pitchFamily="34" charset="-122"/>
                 <a:cs typeface="Segoe UI" pitchFamily="34" charset="-120"/>
               </a:rPr>
-              <a:t>Envoi d'email réel à la signature du devis</a:t>
+              <a:t>Six types de pointage</a:t>
             </a:r>
             <a:endParaRPr lang="en-US" sz="1400" dirty="0"/>
           </a:p>
@@ -14965,7 +14798,7 @@
                 <a:ea typeface="Segoe UI" pitchFamily="34" charset="-122"/>
                 <a:cs typeface="Segoe UI" pitchFamily="34" charset="-120"/>
               </a:rPr>
-              <a:t>Le premier envoi des identifiants client déclenche désormais un vrai email (SMTP), et plus seulement une file d'attente locale.</a:t>
+              <a:t>Heures de travail, jour de travail, forfait, ouvrage, passage, déplacement — chacun avec date et montant ; le montant des heures est calculé automatiquement à partir du taux horaire de l'ouvrier.</a:t>
             </a:r>
             <a:endParaRPr lang="en-US" sz="1100" dirty="0"/>
           </a:p>
@@ -14973,7 +14806,263 @@
       </p:sp>
       <p:sp>
         <p:nvSpPr>
-          <p:cNvPr id="9" name="Text 7"/>
+          <p:cNvPr id="9" name="Shape 7"/>
+          <p:cNvSpPr/>
+          <p:nvPr/>
+        </p:nvSpPr>
+        <p:spPr>
+          <a:xfrm>
+            <a:off x="640080" y="2926080"/>
+            <a:ext cx="10881360" cy="1097280"/>
+          </a:xfrm>
+          <a:prstGeom prst="roundRect">
+            <a:avLst>
+              <a:gd name="adj" fmla="val 5000"/>
+            </a:avLst>
+          </a:prstGeom>
+          <a:solidFill>
+            <a:srgbClr val="FFFFFF"/>
+          </a:solidFill>
+          <a:ln w="12700">
+            <a:solidFill>
+              <a:srgbClr val="E4DCCB"/>
+            </a:solidFill>
+            <a:prstDash val="solid"/>
+          </a:ln>
+        </p:spPr>
+      </p:sp>
+      <p:sp>
+        <p:nvSpPr>
+          <p:cNvPr id="10" name="Shape 8"/>
+          <p:cNvSpPr/>
+          <p:nvPr/>
+        </p:nvSpPr>
+        <p:spPr>
+          <a:xfrm>
+            <a:off x="640080" y="2926080"/>
+            <a:ext cx="54864" cy="1097280"/>
+          </a:xfrm>
+          <a:prstGeom prst="rect">
+            <a:avLst/>
+          </a:prstGeom>
+          <a:solidFill>
+            <a:srgbClr val="9A4C1F"/>
+          </a:solidFill>
+          <a:ln/>
+        </p:spPr>
+      </p:sp>
+      <p:sp>
+        <p:nvSpPr>
+          <p:cNvPr id="11" name="Text 9"/>
+          <p:cNvSpPr/>
+          <p:nvPr/>
+        </p:nvSpPr>
+        <p:spPr>
+          <a:xfrm>
+            <a:off x="914400" y="3035808"/>
+            <a:ext cx="10332720" cy="365760"/>
+          </a:xfrm>
+          <a:prstGeom prst="rect">
+            <a:avLst/>
+          </a:prstGeom>
+          <a:noFill/>
+          <a:ln/>
+        </p:spPr>
+        <p:txBody>
+          <a:bodyPr wrap="square" rtlCol="0" anchor="ctr"/>
+          <a:lstStyle/>
+          <a:p>
+            <a:pPr indent="0" marL="0">
+              <a:buNone/>
+            </a:pPr>
+            <a:r>
+              <a:rPr lang="en-US" sz="1400" b="1" dirty="0">
+                <a:solidFill>
+                  <a:srgbClr val="1B1F3B"/>
+                </a:solidFill>
+                <a:latin typeface="Segoe UI" pitchFamily="34" charset="0"/>
+                <a:ea typeface="Segoe UI" pitchFamily="34" charset="-122"/>
+                <a:cs typeface="Segoe UI" pitchFamily="34" charset="-120"/>
+              </a:rPr>
+              <a:t>Alertes automatiques de dépassement / manque d'heures</a:t>
+            </a:r>
+            <a:endParaRPr lang="en-US" sz="1400" dirty="0"/>
+          </a:p>
+        </p:txBody>
+      </p:sp>
+      <p:sp>
+        <p:nvSpPr>
+          <p:cNvPr id="12" name="Text 10"/>
+          <p:cNvSpPr/>
+          <p:nvPr/>
+        </p:nvSpPr>
+        <p:spPr>
+          <a:xfrm>
+            <a:off x="914400" y="3383280"/>
+            <a:ext cx="10332720" cy="594360"/>
+          </a:xfrm>
+          <a:prstGeom prst="rect">
+            <a:avLst/>
+          </a:prstGeom>
+          <a:noFill/>
+          <a:ln/>
+        </p:spPr>
+        <p:txBody>
+          <a:bodyPr wrap="square" rtlCol="0" anchor="ctr"/>
+          <a:lstStyle/>
+          <a:p>
+            <a:pPr indent="0" marL="0">
+              <a:lnSpc>
+                <a:spcPts val="1400"/>
+              </a:lnSpc>
+              <a:buNone/>
+            </a:pPr>
+            <a:r>
+              <a:rPr lang="en-US" sz="1100" dirty="0">
+                <a:solidFill>
+                  <a:srgbClr val="8A7C68"/>
+                </a:solidFill>
+                <a:latin typeface="Segoe UI" pitchFamily="34" charset="0"/>
+                <a:ea typeface="Segoe UI" pitchFamily="34" charset="-122"/>
+                <a:cs typeface="Segoe UI" pitchFamily="34" charset="-120"/>
+              </a:rPr>
+              <a:t>À la fin de chaque semaine, si le total travaillé diffère du contrat de plus de 15 minutes, une notification est envoyée automatiquement à l'entreprise (une seule fois par semaine et par ouvrier).</a:t>
+            </a:r>
+            <a:endParaRPr lang="en-US" sz="1100" dirty="0"/>
+          </a:p>
+        </p:txBody>
+      </p:sp>
+      <p:sp>
+        <p:nvSpPr>
+          <p:cNvPr id="13" name="Shape 11"/>
+          <p:cNvSpPr/>
+          <p:nvPr/>
+        </p:nvSpPr>
+        <p:spPr>
+          <a:xfrm>
+            <a:off x="640080" y="4160520"/>
+            <a:ext cx="10881360" cy="1097280"/>
+          </a:xfrm>
+          <a:prstGeom prst="roundRect">
+            <a:avLst>
+              <a:gd name="adj" fmla="val 5000"/>
+            </a:avLst>
+          </a:prstGeom>
+          <a:solidFill>
+            <a:srgbClr val="FFFFFF"/>
+          </a:solidFill>
+          <a:ln w="12700">
+            <a:solidFill>
+              <a:srgbClr val="E4DCCB"/>
+            </a:solidFill>
+            <a:prstDash val="solid"/>
+          </a:ln>
+        </p:spPr>
+      </p:sp>
+      <p:sp>
+        <p:nvSpPr>
+          <p:cNvPr id="14" name="Shape 12"/>
+          <p:cNvSpPr/>
+          <p:nvPr/>
+        </p:nvSpPr>
+        <p:spPr>
+          <a:xfrm>
+            <a:off x="640080" y="4160520"/>
+            <a:ext cx="54864" cy="1097280"/>
+          </a:xfrm>
+          <a:prstGeom prst="rect">
+            <a:avLst/>
+          </a:prstGeom>
+          <a:solidFill>
+            <a:srgbClr val="9A4C1F"/>
+          </a:solidFill>
+          <a:ln/>
+        </p:spPr>
+      </p:sp>
+      <p:sp>
+        <p:nvSpPr>
+          <p:cNvPr id="15" name="Text 13"/>
+          <p:cNvSpPr/>
+          <p:nvPr/>
+        </p:nvSpPr>
+        <p:spPr>
+          <a:xfrm>
+            <a:off x="914400" y="4270248"/>
+            <a:ext cx="10332720" cy="365760"/>
+          </a:xfrm>
+          <a:prstGeom prst="rect">
+            <a:avLst/>
+          </a:prstGeom>
+          <a:noFill/>
+          <a:ln/>
+        </p:spPr>
+        <p:txBody>
+          <a:bodyPr wrap="square" rtlCol="0" anchor="ctr"/>
+          <a:lstStyle/>
+          <a:p>
+            <a:pPr indent="0" marL="0">
+              <a:buNone/>
+            </a:pPr>
+            <a:r>
+              <a:rPr lang="en-US" sz="1400" b="1" dirty="0">
+                <a:solidFill>
+                  <a:srgbClr val="1B1F3B"/>
+                </a:solidFill>
+                <a:latin typeface="Segoe UI" pitchFamily="34" charset="0"/>
+                <a:ea typeface="Segoe UI" pitchFamily="34" charset="-122"/>
+                <a:cs typeface="Segoe UI" pitchFamily="34" charset="-120"/>
+              </a:rPr>
+              <a:t>Export PDF du relevé d'heures</a:t>
+            </a:r>
+            <a:endParaRPr lang="en-US" sz="1400" dirty="0"/>
+          </a:p>
+        </p:txBody>
+      </p:sp>
+      <p:sp>
+        <p:nvSpPr>
+          <p:cNvPr id="16" name="Text 14"/>
+          <p:cNvSpPr/>
+          <p:nvPr/>
+        </p:nvSpPr>
+        <p:spPr>
+          <a:xfrm>
+            <a:off x="914400" y="4617720"/>
+            <a:ext cx="10332720" cy="594360"/>
+          </a:xfrm>
+          <a:prstGeom prst="rect">
+            <a:avLst/>
+          </a:prstGeom>
+          <a:noFill/>
+          <a:ln/>
+        </p:spPr>
+        <p:txBody>
+          <a:bodyPr wrap="square" rtlCol="0" anchor="ctr"/>
+          <a:lstStyle/>
+          <a:p>
+            <a:pPr indent="0" marL="0">
+              <a:lnSpc>
+                <a:spcPts val="1400"/>
+              </a:lnSpc>
+              <a:buNone/>
+            </a:pPr>
+            <a:r>
+              <a:rPr lang="en-US" sz="1100" dirty="0">
+                <a:solidFill>
+                  <a:srgbClr val="8A7C68"/>
+                </a:solidFill>
+                <a:latin typeface="Segoe UI" pitchFamily="34" charset="0"/>
+                <a:ea typeface="Segoe UI" pitchFamily="34" charset="-122"/>
+                <a:cs typeface="Segoe UI" pitchFamily="34" charset="-120"/>
+              </a:rPr>
+              <a:t>Génération d'un PDF mensuel par ouvrier : détail par journée/type de pointage, totaux hebdomadaires, total du mois en heures et en montant — pensé pour la comptabilité et la gestion de la paie.</a:t>
+            </a:r>
+            <a:endParaRPr lang="en-US" sz="1100" dirty="0"/>
+          </a:p>
+        </p:txBody>
+      </p:sp>
+      <p:sp>
+        <p:nvSpPr>
+          <p:cNvPr id="17" name="Text 15"/>
           <p:cNvSpPr/>
           <p:nvPr/>
         </p:nvSpPr>
@@ -15012,7 +15101,7 @@
       </p:sp>
       <p:sp>
         <p:nvSpPr>
-          <p:cNvPr id="10" name="Text 8"/>
+          <p:cNvPr id="18" name="Text 16"/>
           <p:cNvSpPr/>
           <p:nvPr/>
         </p:nvSpPr>
@@ -15175,7 +15264,7 @@
                 <a:ea typeface="Georgia" pitchFamily="34" charset="-122"/>
                 <a:cs typeface="Georgia" pitchFamily="34" charset="-120"/>
               </a:rPr>
-              <a:t>Signature &amp; portails</a:t>
+              <a:t>Notifications</a:t>
             </a:r>
             <a:endParaRPr lang="en-US" sz="2400" dirty="0"/>
           </a:p>
@@ -15261,7 +15350,7 @@
                 <a:ea typeface="Segoe UI" pitchFamily="34" charset="-122"/>
                 <a:cs typeface="Segoe UI" pitchFamily="34" charset="-120"/>
               </a:rPr>
-              <a:t>Signature client branchée sur Supabase</a:t>
+              <a:t>Envoi d'email réel à la signature du devis</a:t>
             </a:r>
             <a:endParaRPr lang="en-US" sz="1400" dirty="0"/>
           </a:p>
@@ -15303,7 +15392,7 @@
                 <a:ea typeface="Segoe UI" pitchFamily="34" charset="-122"/>
                 <a:cs typeface="Segoe UI" pitchFamily="34" charset="-120"/>
               </a:rPr>
-              <a:t>Le client qui signe un devis n'a pas de session Kôji : une clé technique dédiée (service_role) permet de retrouver et mettre à jour son devis directement dans la base partagée.</a:t>
+              <a:t>Le premier envoi des identifiants client déclenche désormais un vrai email (SMTP), et plus seulement une file d'attente locale.</a:t>
             </a:r>
             <a:endParaRPr lang="en-US" sz="1100" dirty="0"/>
           </a:p>
@@ -15311,263 +15400,7 @@
       </p:sp>
       <p:sp>
         <p:nvSpPr>
-          <p:cNvPr id="9" name="Shape 7"/>
-          <p:cNvSpPr/>
-          <p:nvPr/>
-        </p:nvSpPr>
-        <p:spPr>
-          <a:xfrm>
-            <a:off x="640080" y="2926080"/>
-            <a:ext cx="10881360" cy="1097280"/>
-          </a:xfrm>
-          <a:prstGeom prst="roundRect">
-            <a:avLst>
-              <a:gd name="adj" fmla="val 5000"/>
-            </a:avLst>
-          </a:prstGeom>
-          <a:solidFill>
-            <a:srgbClr val="FFFFFF"/>
-          </a:solidFill>
-          <a:ln w="12700">
-            <a:solidFill>
-              <a:srgbClr val="E4DCCB"/>
-            </a:solidFill>
-            <a:prstDash val="solid"/>
-          </a:ln>
-        </p:spPr>
-      </p:sp>
-      <p:sp>
-        <p:nvSpPr>
-          <p:cNvPr id="10" name="Shape 8"/>
-          <p:cNvSpPr/>
-          <p:nvPr/>
-        </p:nvSpPr>
-        <p:spPr>
-          <a:xfrm>
-            <a:off x="640080" y="2926080"/>
-            <a:ext cx="54864" cy="1097280"/>
-          </a:xfrm>
-          <a:prstGeom prst="rect">
-            <a:avLst/>
-          </a:prstGeom>
-          <a:solidFill>
-            <a:srgbClr val="9A4C1F"/>
-          </a:solidFill>
-          <a:ln/>
-        </p:spPr>
-      </p:sp>
-      <p:sp>
-        <p:nvSpPr>
-          <p:cNvPr id="11" name="Text 9"/>
-          <p:cNvSpPr/>
-          <p:nvPr/>
-        </p:nvSpPr>
-        <p:spPr>
-          <a:xfrm>
-            <a:off x="914400" y="3035808"/>
-            <a:ext cx="10332720" cy="365760"/>
-          </a:xfrm>
-          <a:prstGeom prst="rect">
-            <a:avLst/>
-          </a:prstGeom>
-          <a:noFill/>
-          <a:ln/>
-        </p:spPr>
-        <p:txBody>
-          <a:bodyPr wrap="square" rtlCol="0" anchor="ctr"/>
-          <a:lstStyle/>
-          <a:p>
-            <a:pPr indent="0" marL="0">
-              <a:buNone/>
-            </a:pPr>
-            <a:r>
-              <a:rPr lang="en-US" sz="1400" b="1" dirty="0">
-                <a:solidFill>
-                  <a:srgbClr val="1B1F3B"/>
-                </a:solidFill>
-                <a:latin typeface="Segoe UI" pitchFamily="34" charset="0"/>
-                <a:ea typeface="Segoe UI" pitchFamily="34" charset="-122"/>
-                <a:cs typeface="Segoe UI" pitchFamily="34" charset="-120"/>
-              </a:rPr>
-              <a:t>Audit complet du portail client</a:t>
-            </a:r>
-            <a:endParaRPr lang="en-US" sz="1400" dirty="0"/>
-          </a:p>
-        </p:txBody>
-      </p:sp>
-      <p:sp>
-        <p:nvSpPr>
-          <p:cNvPr id="12" name="Text 10"/>
-          <p:cNvSpPr/>
-          <p:nvPr/>
-        </p:nvSpPr>
-        <p:spPr>
-          <a:xfrm>
-            <a:off x="914400" y="3383280"/>
-            <a:ext cx="10332720" cy="594360"/>
-          </a:xfrm>
-          <a:prstGeom prst="rect">
-            <a:avLst/>
-          </a:prstGeom>
-          <a:noFill/>
-          <a:ln/>
-        </p:spPr>
-        <p:txBody>
-          <a:bodyPr wrap="square" rtlCol="0" anchor="ctr"/>
-          <a:lstStyle/>
-          <a:p>
-            <a:pPr indent="0" marL="0">
-              <a:lnSpc>
-                <a:spcPts val="1400"/>
-              </a:lnSpc>
-              <a:buNone/>
-            </a:pPr>
-            <a:r>
-              <a:rPr lang="en-US" sz="1100" dirty="0">
-                <a:solidFill>
-                  <a:srgbClr val="8A7C68"/>
-                </a:solidFill>
-                <a:latin typeface="Segoe UI" pitchFamily="34" charset="0"/>
-                <a:ea typeface="Segoe UI" pitchFamily="34" charset="-122"/>
-                <a:cs typeface="Segoe UI" pitchFamily="34" charset="-120"/>
-              </a:rPr>
-              <a:t>Plusieurs routes (connexion client, devis/tâches/notes du portail, création de factures) lisaient encore l'ancien fichier JSON local et ne trouvaient plus aucune donnée récente depuis la migration Supabase des devis — toutes corrigées.</a:t>
-            </a:r>
-            <a:endParaRPr lang="en-US" sz="1100" dirty="0"/>
-          </a:p>
-        </p:txBody>
-      </p:sp>
-      <p:sp>
-        <p:nvSpPr>
-          <p:cNvPr id="13" name="Shape 11"/>
-          <p:cNvSpPr/>
-          <p:nvPr/>
-        </p:nvSpPr>
-        <p:spPr>
-          <a:xfrm>
-            <a:off x="640080" y="4160520"/>
-            <a:ext cx="10881360" cy="1097280"/>
-          </a:xfrm>
-          <a:prstGeom prst="roundRect">
-            <a:avLst>
-              <a:gd name="adj" fmla="val 5000"/>
-            </a:avLst>
-          </a:prstGeom>
-          <a:solidFill>
-            <a:srgbClr val="FFFFFF"/>
-          </a:solidFill>
-          <a:ln w="12700">
-            <a:solidFill>
-              <a:srgbClr val="E4DCCB"/>
-            </a:solidFill>
-            <a:prstDash val="solid"/>
-          </a:ln>
-        </p:spPr>
-      </p:sp>
-      <p:sp>
-        <p:nvSpPr>
-          <p:cNvPr id="14" name="Shape 12"/>
-          <p:cNvSpPr/>
-          <p:nvPr/>
-        </p:nvSpPr>
-        <p:spPr>
-          <a:xfrm>
-            <a:off x="640080" y="4160520"/>
-            <a:ext cx="54864" cy="1097280"/>
-          </a:xfrm>
-          <a:prstGeom prst="rect">
-            <a:avLst/>
-          </a:prstGeom>
-          <a:solidFill>
-            <a:srgbClr val="9A4C1F"/>
-          </a:solidFill>
-          <a:ln/>
-        </p:spPr>
-      </p:sp>
-      <p:sp>
-        <p:nvSpPr>
-          <p:cNvPr id="15" name="Text 13"/>
-          <p:cNvSpPr/>
-          <p:nvPr/>
-        </p:nvSpPr>
-        <p:spPr>
-          <a:xfrm>
-            <a:off x="914400" y="4270248"/>
-            <a:ext cx="10332720" cy="365760"/>
-          </a:xfrm>
-          <a:prstGeom prst="rect">
-            <a:avLst/>
-          </a:prstGeom>
-          <a:noFill/>
-          <a:ln/>
-        </p:spPr>
-        <p:txBody>
-          <a:bodyPr wrap="square" rtlCol="0" anchor="ctr"/>
-          <a:lstStyle/>
-          <a:p>
-            <a:pPr indent="0" marL="0">
-              <a:buNone/>
-            </a:pPr>
-            <a:r>
-              <a:rPr lang="en-US" sz="1400" b="1" dirty="0">
-                <a:solidFill>
-                  <a:srgbClr val="1B1F3B"/>
-                </a:solidFill>
-                <a:latin typeface="Segoe UI" pitchFamily="34" charset="0"/>
-                <a:ea typeface="Segoe UI" pitchFamily="34" charset="-122"/>
-                <a:cs typeface="Segoe UI" pitchFamily="34" charset="-120"/>
-              </a:rPr>
-              <a:t>Suivi du temps par ouvrage</a:t>
-            </a:r>
-            <a:endParaRPr lang="en-US" sz="1400" dirty="0"/>
-          </a:p>
-        </p:txBody>
-      </p:sp>
-      <p:sp>
-        <p:nvSpPr>
-          <p:cNvPr id="16" name="Text 14"/>
-          <p:cNvSpPr/>
-          <p:nvPr/>
-        </p:nvSpPr>
-        <p:spPr>
-          <a:xfrm>
-            <a:off x="914400" y="4617720"/>
-            <a:ext cx="10332720" cy="594360"/>
-          </a:xfrm>
-          <a:prstGeom prst="rect">
-            <a:avLst/>
-          </a:prstGeom>
-          <a:noFill/>
-          <a:ln/>
-        </p:spPr>
-        <p:txBody>
-          <a:bodyPr wrap="square" rtlCol="0" anchor="ctr"/>
-          <a:lstStyle/>
-          <a:p>
-            <a:pPr indent="0" marL="0">
-              <a:lnSpc>
-                <a:spcPts val="1400"/>
-              </a:lnSpc>
-              <a:buNone/>
-            </a:pPr>
-            <a:r>
-              <a:rPr lang="en-US" sz="1100" dirty="0">
-                <a:solidFill>
-                  <a:srgbClr val="8A7C68"/>
-                </a:solidFill>
-                <a:latin typeface="Segoe UI" pitchFamily="34" charset="0"/>
-                <a:ea typeface="Segoe UI" pitchFamily="34" charset="-122"/>
-                <a:cs typeface="Segoe UI" pitchFamily="34" charset="-120"/>
-              </a:rPr>
-              <a:t>Boutons Démarrer / Pause / Reprendre / Terminer par tâche, avec calcul automatique du temps consommé et alerte en cas de dépassement du temps prévu.</a:t>
-            </a:r>
-            <a:endParaRPr lang="en-US" sz="1100" dirty="0"/>
-          </a:p>
-        </p:txBody>
-      </p:sp>
-      <p:sp>
-        <p:nvSpPr>
-          <p:cNvPr id="17" name="Text 15"/>
+          <p:cNvPr id="9" name="Text 7"/>
           <p:cNvSpPr/>
           <p:nvPr/>
         </p:nvSpPr>
@@ -15606,7 +15439,7 @@
       </p:sp>
       <p:sp>
         <p:nvSpPr>
-          <p:cNvPr id="18" name="Text 16"/>
+          <p:cNvPr id="10" name="Text 8"/>
           <p:cNvSpPr/>
           <p:nvPr/>
         </p:nvSpPr>
@@ -15769,7 +15602,7 @@
                 <a:ea typeface="Georgia" pitchFamily="34" charset="-122"/>
                 <a:cs typeface="Georgia" pitchFamily="34" charset="-120"/>
               </a:rPr>
-              <a:t>Accueil &amp; stabilité</a:t>
+              <a:t>Signature &amp; portails</a:t>
             </a:r>
             <a:endParaRPr lang="en-US" sz="2400" dirty="0"/>
           </a:p>
@@ -15855,7 +15688,7 @@
                 <a:ea typeface="Segoe UI" pitchFamily="34" charset="-122"/>
                 <a:cs typeface="Segoe UI" pitchFamily="34" charset="-120"/>
               </a:rPr>
-              <a:t>Reconnexion automatique de session</a:t>
+              <a:t>Signature client branchée sur Supabase</a:t>
             </a:r>
             <a:endParaRPr lang="en-US" sz="1400" dirty="0"/>
           </a:p>
@@ -15897,7 +15730,7 @@
                 <a:ea typeface="Segoe UI" pitchFamily="34" charset="-122"/>
                 <a:cs typeface="Segoe UI" pitchFamily="34" charset="-120"/>
               </a:rPr>
-              <a:t>Une session expirée (~1h) provoquait des échecs silencieux à l'enregistrement (profil, IBAN, devis) sans reconnexion automatique ; la détection couvre désormais tous les cas d'expiration.</a:t>
+              <a:t>Le client qui signe un devis n'a pas de session Kôji : une clé technique dédiée (service_role) permet de retrouver et mettre à jour son devis directement dans la base partagée.</a:t>
             </a:r>
             <a:endParaRPr lang="en-US" sz="1100" dirty="0"/>
           </a:p>
@@ -15983,7 +15816,7 @@
                 <a:ea typeface="Segoe UI" pitchFamily="34" charset="-122"/>
                 <a:cs typeface="Segoe UI" pitchFamily="34" charset="-120"/>
               </a:rPr>
-              <a:t>Corrections de plantages ponctuels</a:t>
+              <a:t>Audit complet du portail client</a:t>
             </a:r>
             <a:endParaRPr lang="en-US" sz="1400" dirty="0"/>
           </a:p>
@@ -16025,7 +15858,7 @@
                 <a:ea typeface="Segoe UI" pitchFamily="34" charset="-122"/>
                 <a:cs typeface="Segoe UI" pitchFamily="34" charset="-120"/>
               </a:rPr>
-              <a:t>Plusieurs erreurs bloquantes corrigées au fil des tests (références de code manquantes, composants mal placés).</a:t>
+              <a:t>Plusieurs routes (connexion client, devis/tâches/notes du portail, création de factures) lisaient encore l'ancien fichier JSON local et ne trouvaient plus aucune donnée récente depuis la migration Supabase des devis — toutes corrigées.</a:t>
             </a:r>
             <a:endParaRPr lang="en-US" sz="1100" dirty="0"/>
           </a:p>
@@ -16033,7 +15866,135 @@
       </p:sp>
       <p:sp>
         <p:nvSpPr>
-          <p:cNvPr id="13" name="Text 11"/>
+          <p:cNvPr id="13" name="Shape 11"/>
+          <p:cNvSpPr/>
+          <p:nvPr/>
+        </p:nvSpPr>
+        <p:spPr>
+          <a:xfrm>
+            <a:off x="640080" y="4160520"/>
+            <a:ext cx="10881360" cy="1097280"/>
+          </a:xfrm>
+          <a:prstGeom prst="roundRect">
+            <a:avLst>
+              <a:gd name="adj" fmla="val 5000"/>
+            </a:avLst>
+          </a:prstGeom>
+          <a:solidFill>
+            <a:srgbClr val="FFFFFF"/>
+          </a:solidFill>
+          <a:ln w="12700">
+            <a:solidFill>
+              <a:srgbClr val="E4DCCB"/>
+            </a:solidFill>
+            <a:prstDash val="solid"/>
+          </a:ln>
+        </p:spPr>
+      </p:sp>
+      <p:sp>
+        <p:nvSpPr>
+          <p:cNvPr id="14" name="Shape 12"/>
+          <p:cNvSpPr/>
+          <p:nvPr/>
+        </p:nvSpPr>
+        <p:spPr>
+          <a:xfrm>
+            <a:off x="640080" y="4160520"/>
+            <a:ext cx="54864" cy="1097280"/>
+          </a:xfrm>
+          <a:prstGeom prst="rect">
+            <a:avLst/>
+          </a:prstGeom>
+          <a:solidFill>
+            <a:srgbClr val="9A4C1F"/>
+          </a:solidFill>
+          <a:ln/>
+        </p:spPr>
+      </p:sp>
+      <p:sp>
+        <p:nvSpPr>
+          <p:cNvPr id="15" name="Text 13"/>
+          <p:cNvSpPr/>
+          <p:nvPr/>
+        </p:nvSpPr>
+        <p:spPr>
+          <a:xfrm>
+            <a:off x="914400" y="4270248"/>
+            <a:ext cx="10332720" cy="365760"/>
+          </a:xfrm>
+          <a:prstGeom prst="rect">
+            <a:avLst/>
+          </a:prstGeom>
+          <a:noFill/>
+          <a:ln/>
+        </p:spPr>
+        <p:txBody>
+          <a:bodyPr wrap="square" rtlCol="0" anchor="ctr"/>
+          <a:lstStyle/>
+          <a:p>
+            <a:pPr indent="0" marL="0">
+              <a:buNone/>
+            </a:pPr>
+            <a:r>
+              <a:rPr lang="en-US" sz="1400" b="1" dirty="0">
+                <a:solidFill>
+                  <a:srgbClr val="1B1F3B"/>
+                </a:solidFill>
+                <a:latin typeface="Segoe UI" pitchFamily="34" charset="0"/>
+                <a:ea typeface="Segoe UI" pitchFamily="34" charset="-122"/>
+                <a:cs typeface="Segoe UI" pitchFamily="34" charset="-120"/>
+              </a:rPr>
+              <a:t>Suivi du temps par ouvrage</a:t>
+            </a:r>
+            <a:endParaRPr lang="en-US" sz="1400" dirty="0"/>
+          </a:p>
+        </p:txBody>
+      </p:sp>
+      <p:sp>
+        <p:nvSpPr>
+          <p:cNvPr id="16" name="Text 14"/>
+          <p:cNvSpPr/>
+          <p:nvPr/>
+        </p:nvSpPr>
+        <p:spPr>
+          <a:xfrm>
+            <a:off x="914400" y="4617720"/>
+            <a:ext cx="10332720" cy="594360"/>
+          </a:xfrm>
+          <a:prstGeom prst="rect">
+            <a:avLst/>
+          </a:prstGeom>
+          <a:noFill/>
+          <a:ln/>
+        </p:spPr>
+        <p:txBody>
+          <a:bodyPr wrap="square" rtlCol="0" anchor="ctr"/>
+          <a:lstStyle/>
+          <a:p>
+            <a:pPr indent="0" marL="0">
+              <a:lnSpc>
+                <a:spcPts val="1400"/>
+              </a:lnSpc>
+              <a:buNone/>
+            </a:pPr>
+            <a:r>
+              <a:rPr lang="en-US" sz="1100" dirty="0">
+                <a:solidFill>
+                  <a:srgbClr val="8A7C68"/>
+                </a:solidFill>
+                <a:latin typeface="Segoe UI" pitchFamily="34" charset="0"/>
+                <a:ea typeface="Segoe UI" pitchFamily="34" charset="-122"/>
+                <a:cs typeface="Segoe UI" pitchFamily="34" charset="-120"/>
+              </a:rPr>
+              <a:t>Boutons Démarrer / Pause / Reprendre / Terminer par tâche, avec calcul automatique du temps consommé et alerte en cas de dépassement du temps prévu.</a:t>
+            </a:r>
+            <a:endParaRPr lang="en-US" sz="1100" dirty="0"/>
+          </a:p>
+        </p:txBody>
+      </p:sp>
+      <p:sp>
+        <p:nvSpPr>
+          <p:cNvPr id="17" name="Text 15"/>
           <p:cNvSpPr/>
           <p:nvPr/>
         </p:nvSpPr>
@@ -16072,7 +16033,7 @@
       </p:sp>
       <p:sp>
         <p:nvSpPr>
-          <p:cNvPr id="14" name="Text 12"/>
+          <p:cNvPr id="18" name="Text 16"/>
           <p:cNvSpPr/>
           <p:nvPr/>
         </p:nvSpPr>
@@ -16235,7 +16196,7 @@
                 <a:ea typeface="Georgia" pitchFamily="34" charset="-122"/>
                 <a:cs typeface="Georgia" pitchFamily="34" charset="-120"/>
               </a:rPr>
-              <a:t>Rapports d'intervention</a:t>
+              <a:t>Accueil &amp; stabilité</a:t>
             </a:r>
             <a:endParaRPr lang="en-US" sz="2400" dirty="0"/>
           </a:p>
@@ -16321,7 +16282,7 @@
                 <a:ea typeface="Segoe UI" pitchFamily="34" charset="-122"/>
                 <a:cs typeface="Segoe UI" pitchFamily="34" charset="-120"/>
               </a:rPr>
-              <a:t>Nouvelle entité 'interventions'</a:t>
+              <a:t>Reconnexion automatique de session</a:t>
             </a:r>
             <a:endParaRPr lang="en-US" sz="1400" dirty="0"/>
           </a:p>
@@ -16363,7 +16324,7 @@
                 <a:ea typeface="Segoe UI" pitchFamily="34" charset="-122"/>
                 <a:cs typeface="Segoe UI" pitchFamily="34" charset="-120"/>
               </a:rPr>
-              <a:t>API dédiée (creation, consultation, suppression) pour stocker les rapports d'intervention, avec historique des actions comme pour les autres modules.</a:t>
+              <a:t>Une session expirée (~1h) provoquait des échecs silencieux à l'enregistrement (profil, IBAN, devis) sans reconnexion automatique ; la détection couvre désormais tous les cas d'expiration.</a:t>
             </a:r>
             <a:endParaRPr lang="en-US" sz="1100" dirty="0"/>
           </a:p>
@@ -16449,7 +16410,7 @@
                 <a:ea typeface="Segoe UI" pitchFamily="34" charset="-122"/>
                 <a:cs typeface="Segoe UI" pitchFamily="34" charset="-120"/>
               </a:rPr>
-              <a:t>Génération PDF du rapport d'intervention</a:t>
+              <a:t>Corrections de plantages ponctuels</a:t>
             </a:r>
             <a:endParaRPr lang="en-US" sz="1400" dirty="0"/>
           </a:p>
@@ -16491,7 +16452,7 @@
                 <a:ea typeface="Segoe UI" pitchFamily="34" charset="-122"/>
                 <a:cs typeface="Segoe UI" pitchFamily="34" charset="-120"/>
               </a:rPr>
-              <a:t>Chaque rapport peut être téléchargé en PDF avec le logo de l'entreprise en en-tête, dans une mise en page reprenant celle des rapports d'intervention papier existants.</a:t>
+              <a:t>Plusieurs erreurs bloquantes corrigées au fil des tests (références de code manquantes, composants mal placés).</a:t>
             </a:r>
             <a:endParaRPr lang="en-US" sz="1100" dirty="0"/>
           </a:p>
@@ -16499,263 +16460,7 @@
       </p:sp>
       <p:sp>
         <p:nvSpPr>
-          <p:cNvPr id="13" name="Shape 11"/>
-          <p:cNvSpPr/>
-          <p:nvPr/>
-        </p:nvSpPr>
-        <p:spPr>
-          <a:xfrm>
-            <a:off x="640080" y="4160520"/>
-            <a:ext cx="10881360" cy="1097280"/>
-          </a:xfrm>
-          <a:prstGeom prst="roundRect">
-            <a:avLst>
-              <a:gd name="adj" fmla="val 5000"/>
-            </a:avLst>
-          </a:prstGeom>
-          <a:solidFill>
-            <a:srgbClr val="FFFFFF"/>
-          </a:solidFill>
-          <a:ln w="12700">
-            <a:solidFill>
-              <a:srgbClr val="E4DCCB"/>
-            </a:solidFill>
-            <a:prstDash val="solid"/>
-          </a:ln>
-        </p:spPr>
-      </p:sp>
-      <p:sp>
-        <p:nvSpPr>
-          <p:cNvPr id="14" name="Shape 12"/>
-          <p:cNvSpPr/>
-          <p:nvPr/>
-        </p:nvSpPr>
-        <p:spPr>
-          <a:xfrm>
-            <a:off x="640080" y="4160520"/>
-            <a:ext cx="54864" cy="1097280"/>
-          </a:xfrm>
-          <a:prstGeom prst="rect">
-            <a:avLst/>
-          </a:prstGeom>
-          <a:solidFill>
-            <a:srgbClr val="9A4C1F"/>
-          </a:solidFill>
-          <a:ln/>
-        </p:spPr>
-      </p:sp>
-      <p:sp>
-        <p:nvSpPr>
-          <p:cNvPr id="15" name="Text 13"/>
-          <p:cNvSpPr/>
-          <p:nvPr/>
-        </p:nvSpPr>
-        <p:spPr>
-          <a:xfrm>
-            <a:off x="914400" y="4270248"/>
-            <a:ext cx="10332720" cy="365760"/>
-          </a:xfrm>
-          <a:prstGeom prst="rect">
-            <a:avLst/>
-          </a:prstGeom>
-          <a:noFill/>
-          <a:ln/>
-        </p:spPr>
-        <p:txBody>
-          <a:bodyPr wrap="square" rtlCol="0" anchor="ctr"/>
-          <a:lstStyle/>
-          <a:p>
-            <a:pPr indent="0" marL="0">
-              <a:buNone/>
-            </a:pPr>
-            <a:r>
-              <a:rPr lang="en-US" sz="1400" b="1" dirty="0">
-                <a:solidFill>
-                  <a:srgbClr val="1B1F3B"/>
-                </a:solidFill>
-                <a:latin typeface="Segoe UI" pitchFamily="34" charset="0"/>
-                <a:ea typeface="Segoe UI" pitchFamily="34" charset="-122"/>
-                <a:cs typeface="Segoe UI" pitchFamily="34" charset="-120"/>
-              </a:rPr>
-              <a:t>Facturation directe d'une intervention</a:t>
-            </a:r>
-            <a:endParaRPr lang="en-US" sz="1400" dirty="0"/>
-          </a:p>
-        </p:txBody>
-      </p:sp>
-      <p:sp>
-        <p:nvSpPr>
-          <p:cNvPr id="16" name="Text 14"/>
-          <p:cNvSpPr/>
-          <p:nvPr/>
-        </p:nvSpPr>
-        <p:spPr>
-          <a:xfrm>
-            <a:off x="914400" y="4617720"/>
-            <a:ext cx="10332720" cy="594360"/>
-          </a:xfrm>
-          <a:prstGeom prst="rect">
-            <a:avLst/>
-          </a:prstGeom>
-          <a:noFill/>
-          <a:ln/>
-        </p:spPr>
-        <p:txBody>
-          <a:bodyPr wrap="square" rtlCol="0" anchor="ctr"/>
-          <a:lstStyle/>
-          <a:p>
-            <a:pPr indent="0" marL="0">
-              <a:lnSpc>
-                <a:spcPts val="1400"/>
-              </a:lnSpc>
-              <a:buNone/>
-            </a:pPr>
-            <a:r>
-              <a:rPr lang="en-US" sz="1100" dirty="0">
-                <a:solidFill>
-                  <a:srgbClr val="8A7C68"/>
-                </a:solidFill>
-                <a:latin typeface="Segoe UI" pitchFamily="34" charset="0"/>
-                <a:ea typeface="Segoe UI" pitchFamily="34" charset="-122"/>
-                <a:cs typeface="Segoe UI" pitchFamily="34" charset="-120"/>
-              </a:rPr>
-              <a:t>Une facture peut être créée directement à partir d'une intervention (sans passer par un devis signé), avec un montant saisi manuellement ; l'intervention passe alors automatiquement au statut 'Facturée'.</a:t>
-            </a:r>
-            <a:endParaRPr lang="en-US" sz="1100" dirty="0"/>
-          </a:p>
-        </p:txBody>
-      </p:sp>
-      <p:sp>
-        <p:nvSpPr>
-          <p:cNvPr id="17" name="Shape 15"/>
-          <p:cNvSpPr/>
-          <p:nvPr/>
-        </p:nvSpPr>
-        <p:spPr>
-          <a:xfrm>
-            <a:off x="640080" y="5394960"/>
-            <a:ext cx="10881360" cy="1097280"/>
-          </a:xfrm>
-          <a:prstGeom prst="roundRect">
-            <a:avLst>
-              <a:gd name="adj" fmla="val 5000"/>
-            </a:avLst>
-          </a:prstGeom>
-          <a:solidFill>
-            <a:srgbClr val="FFFFFF"/>
-          </a:solidFill>
-          <a:ln w="12700">
-            <a:solidFill>
-              <a:srgbClr val="E4DCCB"/>
-            </a:solidFill>
-            <a:prstDash val="solid"/>
-          </a:ln>
-        </p:spPr>
-      </p:sp>
-      <p:sp>
-        <p:nvSpPr>
-          <p:cNvPr id="18" name="Shape 16"/>
-          <p:cNvSpPr/>
-          <p:nvPr/>
-        </p:nvSpPr>
-        <p:spPr>
-          <a:xfrm>
-            <a:off x="640080" y="5394960"/>
-            <a:ext cx="54864" cy="1097280"/>
-          </a:xfrm>
-          <a:prstGeom prst="rect">
-            <a:avLst/>
-          </a:prstGeom>
-          <a:solidFill>
-            <a:srgbClr val="9A4C1F"/>
-          </a:solidFill>
-          <a:ln/>
-        </p:spPr>
-      </p:sp>
-      <p:sp>
-        <p:nvSpPr>
-          <p:cNvPr id="19" name="Text 17"/>
-          <p:cNvSpPr/>
-          <p:nvPr/>
-        </p:nvSpPr>
-        <p:spPr>
-          <a:xfrm>
-            <a:off x="914400" y="5504688"/>
-            <a:ext cx="10332720" cy="365760"/>
-          </a:xfrm>
-          <a:prstGeom prst="rect">
-            <a:avLst/>
-          </a:prstGeom>
-          <a:noFill/>
-          <a:ln/>
-        </p:spPr>
-        <p:txBody>
-          <a:bodyPr wrap="square" rtlCol="0" anchor="ctr"/>
-          <a:lstStyle/>
-          <a:p>
-            <a:pPr indent="0" marL="0">
-              <a:buNone/>
-            </a:pPr>
-            <a:r>
-              <a:rPr lang="en-US" sz="1400" b="1" dirty="0">
-                <a:solidFill>
-                  <a:srgbClr val="1B1F3B"/>
-                </a:solidFill>
-                <a:latin typeface="Segoe UI" pitchFamily="34" charset="0"/>
-                <a:ea typeface="Segoe UI" pitchFamily="34" charset="-122"/>
-                <a:cs typeface="Segoe UI" pitchFamily="34" charset="-120"/>
-              </a:rPr>
-              <a:t>En-tête d'entreprise propre à chaque rapport</a:t>
-            </a:r>
-            <a:endParaRPr lang="en-US" sz="1400" dirty="0"/>
-          </a:p>
-        </p:txBody>
-      </p:sp>
-      <p:sp>
-        <p:nvSpPr>
-          <p:cNvPr id="20" name="Text 18"/>
-          <p:cNvSpPr/>
-          <p:nvPr/>
-        </p:nvSpPr>
-        <p:spPr>
-          <a:xfrm>
-            <a:off x="914400" y="5852160"/>
-            <a:ext cx="10332720" cy="594360"/>
-          </a:xfrm>
-          <a:prstGeom prst="rect">
-            <a:avLst/>
-          </a:prstGeom>
-          <a:noFill/>
-          <a:ln/>
-        </p:spPr>
-        <p:txBody>
-          <a:bodyPr wrap="square" rtlCol="0" anchor="ctr"/>
-          <a:lstStyle/>
-          <a:p>
-            <a:pPr indent="0" marL="0">
-              <a:lnSpc>
-                <a:spcPts val="1400"/>
-              </a:lnSpc>
-              <a:buNone/>
-            </a:pPr>
-            <a:r>
-              <a:rPr lang="en-US" sz="1100" dirty="0">
-                <a:solidFill>
-                  <a:srgbClr val="8A7C68"/>
-                </a:solidFill>
-                <a:latin typeface="Segoe UI" pitchFamily="34" charset="0"/>
-                <a:ea typeface="Segoe UI" pitchFamily="34" charset="-122"/>
-                <a:cs typeface="Segoe UI" pitchFamily="34" charset="-120"/>
-              </a:rPr>
-              <a:t>Chaque intervention conserve son propre instantané des informations d'entreprise (comme les devis), pour que le PDF reste fidèle même si le profil change ensuite.</a:t>
-            </a:r>
-            <a:endParaRPr lang="en-US" sz="1100" dirty="0"/>
-          </a:p>
-        </p:txBody>
-      </p:sp>
-      <p:sp>
-        <p:nvSpPr>
-          <p:cNvPr id="21" name="Text 19"/>
+          <p:cNvPr id="13" name="Text 11"/>
           <p:cNvSpPr/>
           <p:nvPr/>
         </p:nvSpPr>
@@ -16794,7 +16499,7 @@
       </p:sp>
       <p:sp>
         <p:nvSpPr>
-          <p:cNvPr id="22" name="Text 20"/>
+          <p:cNvPr id="14" name="Text 12"/>
           <p:cNvSpPr/>
           <p:nvPr/>
         </p:nvSpPr>
@@ -16994,7 +16699,7 @@
                 <a:ea typeface="Segoe UI" pitchFamily="34" charset="-122"/>
                 <a:cs typeface="Segoe UI" pitchFamily="34" charset="-120"/>
               </a:rPr>
-              <a:t>48 mise(s) à jour</a:t>
+              <a:t>49 mise(s) à jour</a:t>
             </a:r>
             <a:endParaRPr lang="en-US" sz="1200" dirty="0"/>
           </a:p>
@@ -17204,7 +16909,7 @@
                 <a:ea typeface="Georgia" pitchFamily="34" charset="-122"/>
                 <a:cs typeface="Georgia" pitchFamily="34" charset="-120"/>
               </a:rPr>
-              <a:t>Rapports d'intervention (suite)</a:t>
+              <a:t>Rapports d'intervention</a:t>
             </a:r>
             <a:endParaRPr lang="en-US" sz="2400" dirty="0"/>
           </a:p>
@@ -17290,7 +16995,7 @@
                 <a:ea typeface="Segoe UI" pitchFamily="34" charset="-122"/>
                 <a:cs typeface="Segoe UI" pitchFamily="34" charset="-120"/>
               </a:rPr>
-              <a:t>Statut de suivi automatique (À faire / En cours / Terminée)</a:t>
+              <a:t>Nouvelle entité 'interventions'</a:t>
             </a:r>
             <a:endParaRPr lang="en-US" sz="1400" dirty="0"/>
           </a:p>
@@ -17332,7 +17037,7 @@
                 <a:ea typeface="Segoe UI" pitchFamily="34" charset="-122"/>
                 <a:cs typeface="Segoe UI" pitchFamily="34" charset="-120"/>
               </a:rPr>
-              <a:t>Le statut d'une intervention évolue automatiquement selon sa date (À faire tant que la date n'est pas arrivée, En cours le jour J), jusqu'à être marquée Terminée manuellement puis, si besoin, archivée.</a:t>
+              <a:t>API dédiée (creation, consultation, suppression) pour stocker les rapports d'intervention, avec historique des actions comme pour les autres modules.</a:t>
             </a:r>
             <a:endParaRPr lang="en-US" sz="1100" dirty="0"/>
           </a:p>
@@ -17418,7 +17123,7 @@
                 <a:ea typeface="Segoe UI" pitchFamily="34" charset="-122"/>
                 <a:cs typeface="Segoe UI" pitchFamily="34" charset="-120"/>
               </a:rPr>
-              <a:t>Numéro de rapport automatique</a:t>
+              <a:t>Génération PDF du rapport d'intervention</a:t>
             </a:r>
             <a:endParaRPr lang="en-US" sz="1400" dirty="0"/>
           </a:p>
@@ -17460,7 +17165,7 @@
                 <a:ea typeface="Segoe UI" pitchFamily="34" charset="-122"/>
                 <a:cs typeface="Segoe UI" pitchFamily="34" charset="-120"/>
               </a:rPr>
-              <a:t>Chaque rapport reçoit un numéro unique généré automatiquement (ex. INT-2026-0003), affiché en en-tête avec la date de création, sur le même principe que la numérotation des devis et factures.</a:t>
+              <a:t>Chaque rapport peut être téléchargé en PDF avec le logo de l'entreprise en en-tête, dans une mise en page reprenant celle des rapports d'intervention papier existants.</a:t>
             </a:r>
             <a:endParaRPr lang="en-US" sz="1100" dirty="0"/>
           </a:p>
@@ -17468,7 +17173,263 @@
       </p:sp>
       <p:sp>
         <p:nvSpPr>
-          <p:cNvPr id="13" name="Text 11"/>
+          <p:cNvPr id="13" name="Shape 11"/>
+          <p:cNvSpPr/>
+          <p:nvPr/>
+        </p:nvSpPr>
+        <p:spPr>
+          <a:xfrm>
+            <a:off x="640080" y="4160520"/>
+            <a:ext cx="10881360" cy="1097280"/>
+          </a:xfrm>
+          <a:prstGeom prst="roundRect">
+            <a:avLst>
+              <a:gd name="adj" fmla="val 5000"/>
+            </a:avLst>
+          </a:prstGeom>
+          <a:solidFill>
+            <a:srgbClr val="FFFFFF"/>
+          </a:solidFill>
+          <a:ln w="12700">
+            <a:solidFill>
+              <a:srgbClr val="E4DCCB"/>
+            </a:solidFill>
+            <a:prstDash val="solid"/>
+          </a:ln>
+        </p:spPr>
+      </p:sp>
+      <p:sp>
+        <p:nvSpPr>
+          <p:cNvPr id="14" name="Shape 12"/>
+          <p:cNvSpPr/>
+          <p:nvPr/>
+        </p:nvSpPr>
+        <p:spPr>
+          <a:xfrm>
+            <a:off x="640080" y="4160520"/>
+            <a:ext cx="54864" cy="1097280"/>
+          </a:xfrm>
+          <a:prstGeom prst="rect">
+            <a:avLst/>
+          </a:prstGeom>
+          <a:solidFill>
+            <a:srgbClr val="9A4C1F"/>
+          </a:solidFill>
+          <a:ln/>
+        </p:spPr>
+      </p:sp>
+      <p:sp>
+        <p:nvSpPr>
+          <p:cNvPr id="15" name="Text 13"/>
+          <p:cNvSpPr/>
+          <p:nvPr/>
+        </p:nvSpPr>
+        <p:spPr>
+          <a:xfrm>
+            <a:off x="914400" y="4270248"/>
+            <a:ext cx="10332720" cy="365760"/>
+          </a:xfrm>
+          <a:prstGeom prst="rect">
+            <a:avLst/>
+          </a:prstGeom>
+          <a:noFill/>
+          <a:ln/>
+        </p:spPr>
+        <p:txBody>
+          <a:bodyPr wrap="square" rtlCol="0" anchor="ctr"/>
+          <a:lstStyle/>
+          <a:p>
+            <a:pPr indent="0" marL="0">
+              <a:buNone/>
+            </a:pPr>
+            <a:r>
+              <a:rPr lang="en-US" sz="1400" b="1" dirty="0">
+                <a:solidFill>
+                  <a:srgbClr val="1B1F3B"/>
+                </a:solidFill>
+                <a:latin typeface="Segoe UI" pitchFamily="34" charset="0"/>
+                <a:ea typeface="Segoe UI" pitchFamily="34" charset="-122"/>
+                <a:cs typeface="Segoe UI" pitchFamily="34" charset="-120"/>
+              </a:rPr>
+              <a:t>Facturation directe d'une intervention</a:t>
+            </a:r>
+            <a:endParaRPr lang="en-US" sz="1400" dirty="0"/>
+          </a:p>
+        </p:txBody>
+      </p:sp>
+      <p:sp>
+        <p:nvSpPr>
+          <p:cNvPr id="16" name="Text 14"/>
+          <p:cNvSpPr/>
+          <p:nvPr/>
+        </p:nvSpPr>
+        <p:spPr>
+          <a:xfrm>
+            <a:off x="914400" y="4617720"/>
+            <a:ext cx="10332720" cy="594360"/>
+          </a:xfrm>
+          <a:prstGeom prst="rect">
+            <a:avLst/>
+          </a:prstGeom>
+          <a:noFill/>
+          <a:ln/>
+        </p:spPr>
+        <p:txBody>
+          <a:bodyPr wrap="square" rtlCol="0" anchor="ctr"/>
+          <a:lstStyle/>
+          <a:p>
+            <a:pPr indent="0" marL="0">
+              <a:lnSpc>
+                <a:spcPts val="1400"/>
+              </a:lnSpc>
+              <a:buNone/>
+            </a:pPr>
+            <a:r>
+              <a:rPr lang="en-US" sz="1100" dirty="0">
+                <a:solidFill>
+                  <a:srgbClr val="8A7C68"/>
+                </a:solidFill>
+                <a:latin typeface="Segoe UI" pitchFamily="34" charset="0"/>
+                <a:ea typeface="Segoe UI" pitchFamily="34" charset="-122"/>
+                <a:cs typeface="Segoe UI" pitchFamily="34" charset="-120"/>
+              </a:rPr>
+              <a:t>Une facture peut être créée directement à partir d'une intervention (sans passer par un devis signé), avec un montant saisi manuellement ; l'intervention passe alors automatiquement au statut 'Facturée'.</a:t>
+            </a:r>
+            <a:endParaRPr lang="en-US" sz="1100" dirty="0"/>
+          </a:p>
+        </p:txBody>
+      </p:sp>
+      <p:sp>
+        <p:nvSpPr>
+          <p:cNvPr id="17" name="Shape 15"/>
+          <p:cNvSpPr/>
+          <p:nvPr/>
+        </p:nvSpPr>
+        <p:spPr>
+          <a:xfrm>
+            <a:off x="640080" y="5394960"/>
+            <a:ext cx="10881360" cy="1097280"/>
+          </a:xfrm>
+          <a:prstGeom prst="roundRect">
+            <a:avLst>
+              <a:gd name="adj" fmla="val 5000"/>
+            </a:avLst>
+          </a:prstGeom>
+          <a:solidFill>
+            <a:srgbClr val="FFFFFF"/>
+          </a:solidFill>
+          <a:ln w="12700">
+            <a:solidFill>
+              <a:srgbClr val="E4DCCB"/>
+            </a:solidFill>
+            <a:prstDash val="solid"/>
+          </a:ln>
+        </p:spPr>
+      </p:sp>
+      <p:sp>
+        <p:nvSpPr>
+          <p:cNvPr id="18" name="Shape 16"/>
+          <p:cNvSpPr/>
+          <p:nvPr/>
+        </p:nvSpPr>
+        <p:spPr>
+          <a:xfrm>
+            <a:off x="640080" y="5394960"/>
+            <a:ext cx="54864" cy="1097280"/>
+          </a:xfrm>
+          <a:prstGeom prst="rect">
+            <a:avLst/>
+          </a:prstGeom>
+          <a:solidFill>
+            <a:srgbClr val="9A4C1F"/>
+          </a:solidFill>
+          <a:ln/>
+        </p:spPr>
+      </p:sp>
+      <p:sp>
+        <p:nvSpPr>
+          <p:cNvPr id="19" name="Text 17"/>
+          <p:cNvSpPr/>
+          <p:nvPr/>
+        </p:nvSpPr>
+        <p:spPr>
+          <a:xfrm>
+            <a:off x="914400" y="5504688"/>
+            <a:ext cx="10332720" cy="365760"/>
+          </a:xfrm>
+          <a:prstGeom prst="rect">
+            <a:avLst/>
+          </a:prstGeom>
+          <a:noFill/>
+          <a:ln/>
+        </p:spPr>
+        <p:txBody>
+          <a:bodyPr wrap="square" rtlCol="0" anchor="ctr"/>
+          <a:lstStyle/>
+          <a:p>
+            <a:pPr indent="0" marL="0">
+              <a:buNone/>
+            </a:pPr>
+            <a:r>
+              <a:rPr lang="en-US" sz="1400" b="1" dirty="0">
+                <a:solidFill>
+                  <a:srgbClr val="1B1F3B"/>
+                </a:solidFill>
+                <a:latin typeface="Segoe UI" pitchFamily="34" charset="0"/>
+                <a:ea typeface="Segoe UI" pitchFamily="34" charset="-122"/>
+                <a:cs typeface="Segoe UI" pitchFamily="34" charset="-120"/>
+              </a:rPr>
+              <a:t>En-tête d'entreprise propre à chaque rapport</a:t>
+            </a:r>
+            <a:endParaRPr lang="en-US" sz="1400" dirty="0"/>
+          </a:p>
+        </p:txBody>
+      </p:sp>
+      <p:sp>
+        <p:nvSpPr>
+          <p:cNvPr id="20" name="Text 18"/>
+          <p:cNvSpPr/>
+          <p:nvPr/>
+        </p:nvSpPr>
+        <p:spPr>
+          <a:xfrm>
+            <a:off x="914400" y="5852160"/>
+            <a:ext cx="10332720" cy="594360"/>
+          </a:xfrm>
+          <a:prstGeom prst="rect">
+            <a:avLst/>
+          </a:prstGeom>
+          <a:noFill/>
+          <a:ln/>
+        </p:spPr>
+        <p:txBody>
+          <a:bodyPr wrap="square" rtlCol="0" anchor="ctr"/>
+          <a:lstStyle/>
+          <a:p>
+            <a:pPr indent="0" marL="0">
+              <a:lnSpc>
+                <a:spcPts val="1400"/>
+              </a:lnSpc>
+              <a:buNone/>
+            </a:pPr>
+            <a:r>
+              <a:rPr lang="en-US" sz="1100" dirty="0">
+                <a:solidFill>
+                  <a:srgbClr val="8A7C68"/>
+                </a:solidFill>
+                <a:latin typeface="Segoe UI" pitchFamily="34" charset="0"/>
+                <a:ea typeface="Segoe UI" pitchFamily="34" charset="-122"/>
+                <a:cs typeface="Segoe UI" pitchFamily="34" charset="-120"/>
+              </a:rPr>
+              <a:t>Chaque intervention conserve son propre instantané des informations d'entreprise (comme les devis), pour que le PDF reste fidèle même si le profil change ensuite.</a:t>
+            </a:r>
+            <a:endParaRPr lang="en-US" sz="1100" dirty="0"/>
+          </a:p>
+        </p:txBody>
+      </p:sp>
+      <p:sp>
+        <p:nvSpPr>
+          <p:cNvPr id="21" name="Text 19"/>
           <p:cNvSpPr/>
           <p:nvPr/>
         </p:nvSpPr>
@@ -17507,7 +17468,7 @@
       </p:sp>
       <p:sp>
         <p:nvSpPr>
-          <p:cNvPr id="14" name="Text 12"/>
+          <p:cNvPr id="22" name="Text 20"/>
           <p:cNvSpPr/>
           <p:nvPr/>
         </p:nvSpPr>
@@ -17670,7 +17631,7 @@
                 <a:ea typeface="Georgia" pitchFamily="34" charset="-122"/>
                 <a:cs typeface="Georgia" pitchFamily="34" charset="-120"/>
               </a:rPr>
-              <a:t>Facturation</a:t>
+              <a:t>Rapports d'intervention (suite)</a:t>
             </a:r>
             <a:endParaRPr lang="en-US" sz="2400" dirty="0"/>
           </a:p>
@@ -17756,7 +17717,7 @@
                 <a:ea typeface="Segoe UI" pitchFamily="34" charset="-122"/>
                 <a:cs typeface="Segoe UI" pitchFamily="34" charset="-120"/>
               </a:rPr>
-              <a:t>Export PDF des factures</a:t>
+              <a:t>Statut de suivi automatique (À faire / En cours / Terminée)</a:t>
             </a:r>
             <a:endParaRPr lang="en-US" sz="1400" dirty="0"/>
           </a:p>
@@ -17798,7 +17759,7 @@
                 <a:ea typeface="Segoe UI" pitchFamily="34" charset="-122"/>
                 <a:cs typeface="Segoe UI" pitchFamily="34" charset="-120"/>
               </a:rPr>
-              <a:t>Chaque facture (issue d'un devis signé ou d'une intervention) peut désormais être téléchargée en PDF avec les informations de l'entreprise, du client et du montant — bouton ajouté dans la page Facturation et dans la fiche d'une intervention.</a:t>
+              <a:t>Le statut d'une intervention évolue automatiquement selon sa date (À faire tant que la date n'est pas arrivée, En cours le jour J), jusqu'à être marquée Terminée manuellement puis, si besoin, archivée.</a:t>
             </a:r>
             <a:endParaRPr lang="en-US" sz="1100" dirty="0"/>
           </a:p>
@@ -17806,7 +17767,135 @@
       </p:sp>
       <p:sp>
         <p:nvSpPr>
-          <p:cNvPr id="9" name="Text 7"/>
+          <p:cNvPr id="9" name="Shape 7"/>
+          <p:cNvSpPr/>
+          <p:nvPr/>
+        </p:nvSpPr>
+        <p:spPr>
+          <a:xfrm>
+            <a:off x="640080" y="2926080"/>
+            <a:ext cx="10881360" cy="1097280"/>
+          </a:xfrm>
+          <a:prstGeom prst="roundRect">
+            <a:avLst>
+              <a:gd name="adj" fmla="val 5000"/>
+            </a:avLst>
+          </a:prstGeom>
+          <a:solidFill>
+            <a:srgbClr val="FFFFFF"/>
+          </a:solidFill>
+          <a:ln w="12700">
+            <a:solidFill>
+              <a:srgbClr val="E4DCCB"/>
+            </a:solidFill>
+            <a:prstDash val="solid"/>
+          </a:ln>
+        </p:spPr>
+      </p:sp>
+      <p:sp>
+        <p:nvSpPr>
+          <p:cNvPr id="10" name="Shape 8"/>
+          <p:cNvSpPr/>
+          <p:nvPr/>
+        </p:nvSpPr>
+        <p:spPr>
+          <a:xfrm>
+            <a:off x="640080" y="2926080"/>
+            <a:ext cx="54864" cy="1097280"/>
+          </a:xfrm>
+          <a:prstGeom prst="rect">
+            <a:avLst/>
+          </a:prstGeom>
+          <a:solidFill>
+            <a:srgbClr val="9A4C1F"/>
+          </a:solidFill>
+          <a:ln/>
+        </p:spPr>
+      </p:sp>
+      <p:sp>
+        <p:nvSpPr>
+          <p:cNvPr id="11" name="Text 9"/>
+          <p:cNvSpPr/>
+          <p:nvPr/>
+        </p:nvSpPr>
+        <p:spPr>
+          <a:xfrm>
+            <a:off x="914400" y="3035808"/>
+            <a:ext cx="10332720" cy="365760"/>
+          </a:xfrm>
+          <a:prstGeom prst="rect">
+            <a:avLst/>
+          </a:prstGeom>
+          <a:noFill/>
+          <a:ln/>
+        </p:spPr>
+        <p:txBody>
+          <a:bodyPr wrap="square" rtlCol="0" anchor="ctr"/>
+          <a:lstStyle/>
+          <a:p>
+            <a:pPr indent="0" marL="0">
+              <a:buNone/>
+            </a:pPr>
+            <a:r>
+              <a:rPr lang="en-US" sz="1400" b="1" dirty="0">
+                <a:solidFill>
+                  <a:srgbClr val="1B1F3B"/>
+                </a:solidFill>
+                <a:latin typeface="Segoe UI" pitchFamily="34" charset="0"/>
+                <a:ea typeface="Segoe UI" pitchFamily="34" charset="-122"/>
+                <a:cs typeface="Segoe UI" pitchFamily="34" charset="-120"/>
+              </a:rPr>
+              <a:t>Numéro de rapport automatique</a:t>
+            </a:r>
+            <a:endParaRPr lang="en-US" sz="1400" dirty="0"/>
+          </a:p>
+        </p:txBody>
+      </p:sp>
+      <p:sp>
+        <p:nvSpPr>
+          <p:cNvPr id="12" name="Text 10"/>
+          <p:cNvSpPr/>
+          <p:nvPr/>
+        </p:nvSpPr>
+        <p:spPr>
+          <a:xfrm>
+            <a:off x="914400" y="3383280"/>
+            <a:ext cx="10332720" cy="594360"/>
+          </a:xfrm>
+          <a:prstGeom prst="rect">
+            <a:avLst/>
+          </a:prstGeom>
+          <a:noFill/>
+          <a:ln/>
+        </p:spPr>
+        <p:txBody>
+          <a:bodyPr wrap="square" rtlCol="0" anchor="ctr"/>
+          <a:lstStyle/>
+          <a:p>
+            <a:pPr indent="0" marL="0">
+              <a:lnSpc>
+                <a:spcPts val="1400"/>
+              </a:lnSpc>
+              <a:buNone/>
+            </a:pPr>
+            <a:r>
+              <a:rPr lang="en-US" sz="1100" dirty="0">
+                <a:solidFill>
+                  <a:srgbClr val="8A7C68"/>
+                </a:solidFill>
+                <a:latin typeface="Segoe UI" pitchFamily="34" charset="0"/>
+                <a:ea typeface="Segoe UI" pitchFamily="34" charset="-122"/>
+                <a:cs typeface="Segoe UI" pitchFamily="34" charset="-120"/>
+              </a:rPr>
+              <a:t>Chaque rapport reçoit un numéro unique généré automatiquement (ex. INT-2026-0003), affiché en en-tête avec la date de création, sur le même principe que la numérotation des devis et factures.</a:t>
+            </a:r>
+            <a:endParaRPr lang="en-US" sz="1100" dirty="0"/>
+          </a:p>
+        </p:txBody>
+      </p:sp>
+      <p:sp>
+        <p:nvSpPr>
+          <p:cNvPr id="13" name="Text 11"/>
           <p:cNvSpPr/>
           <p:nvPr/>
         </p:nvSpPr>
@@ -17845,7 +17934,7 @@
       </p:sp>
       <p:sp>
         <p:nvSpPr>
-          <p:cNvPr id="10" name="Text 8"/>
+          <p:cNvPr id="14" name="Text 12"/>
           <p:cNvSpPr/>
           <p:nvPr/>
         </p:nvSpPr>
@@ -18008,7 +18097,7 @@
                 <a:ea typeface="Georgia" pitchFamily="34" charset="-122"/>
                 <a:cs typeface="Georgia" pitchFamily="34" charset="-120"/>
               </a:rPr>
-              <a:t>Sécurité</a:t>
+              <a:t>Facturation</a:t>
             </a:r>
             <a:endParaRPr lang="en-US" sz="2400" dirty="0"/>
           </a:p>
@@ -18094,7 +18183,7 @@
                 <a:ea typeface="Segoe UI" pitchFamily="34" charset="-122"/>
                 <a:cs typeface="Segoe UI" pitchFamily="34" charset="-120"/>
               </a:rPr>
-              <a:t>Audit de sécurité complet et correction des failles trouvées</a:t>
+              <a:t>Export PDF des factures</a:t>
             </a:r>
             <a:endParaRPr lang="en-US" sz="1400" dirty="0"/>
           </a:p>
@@ -18136,7 +18225,7 @@
                 <a:ea typeface="Segoe UI" pitchFamily="34" charset="-122"/>
                 <a:cs typeface="Segoe UI" pitchFamily="34" charset="-120"/>
               </a:rPr>
-              <a:t>Audit approfondi ayant confirmé 6 failles actives : fuite de données entre entreprises, base de données lisible sans connexion, portail client sans authentification, mots de passe en clair, base de données versionnée dans Git, absence de vérification centralisée. Corrigées le jour même (détail ci-dessous).</a:t>
+              <a:t>Chaque facture (issue d'un devis signé ou d'une intervention) peut désormais être téléchargée en PDF avec les informations de l'entreprise, du client et du montant — bouton ajouté dans la page Facturation et dans la fiche d'une intervention.</a:t>
             </a:r>
             <a:endParaRPr lang="en-US" sz="1100" dirty="0"/>
           </a:p>
@@ -18144,391 +18233,7 @@
       </p:sp>
       <p:sp>
         <p:nvSpPr>
-          <p:cNvPr id="9" name="Shape 7"/>
-          <p:cNvSpPr/>
-          <p:nvPr/>
-        </p:nvSpPr>
-        <p:spPr>
-          <a:xfrm>
-            <a:off x="640080" y="2926080"/>
-            <a:ext cx="10881360" cy="1097280"/>
-          </a:xfrm>
-          <a:prstGeom prst="roundRect">
-            <a:avLst>
-              <a:gd name="adj" fmla="val 5000"/>
-            </a:avLst>
-          </a:prstGeom>
-          <a:solidFill>
-            <a:srgbClr val="FFFFFF"/>
-          </a:solidFill>
-          <a:ln w="12700">
-            <a:solidFill>
-              <a:srgbClr val="E4DCCB"/>
-            </a:solidFill>
-            <a:prstDash val="solid"/>
-          </a:ln>
-        </p:spPr>
-      </p:sp>
-      <p:sp>
-        <p:nvSpPr>
-          <p:cNvPr id="10" name="Shape 8"/>
-          <p:cNvSpPr/>
-          <p:nvPr/>
-        </p:nvSpPr>
-        <p:spPr>
-          <a:xfrm>
-            <a:off x="640080" y="2926080"/>
-            <a:ext cx="54864" cy="1097280"/>
-          </a:xfrm>
-          <a:prstGeom prst="rect">
-            <a:avLst/>
-          </a:prstGeom>
-          <a:solidFill>
-            <a:srgbClr val="9A4C1F"/>
-          </a:solidFill>
-          <a:ln/>
-        </p:spPr>
-      </p:sp>
-      <p:sp>
-        <p:nvSpPr>
-          <p:cNvPr id="11" name="Text 9"/>
-          <p:cNvSpPr/>
-          <p:nvPr/>
-        </p:nvSpPr>
-        <p:spPr>
-          <a:xfrm>
-            <a:off x="914400" y="3035808"/>
-            <a:ext cx="10332720" cy="365760"/>
-          </a:xfrm>
-          <a:prstGeom prst="rect">
-            <a:avLst/>
-          </a:prstGeom>
-          <a:noFill/>
-          <a:ln/>
-        </p:spPr>
-        <p:txBody>
-          <a:bodyPr wrap="square" rtlCol="0" anchor="ctr"/>
-          <a:lstStyle/>
-          <a:p>
-            <a:pPr indent="0" marL="0">
-              <a:buNone/>
-            </a:pPr>
-            <a:r>
-              <a:rPr lang="en-US" sz="1400" b="1" dirty="0">
-                <a:solidFill>
-                  <a:srgbClr val="1B1F3B"/>
-                </a:solidFill>
-                <a:latin typeface="Segoe UI" pitchFamily="34" charset="0"/>
-                <a:ea typeface="Segoe UI" pitchFamily="34" charset="-122"/>
-                <a:cs typeface="Segoe UI" pitchFamily="34" charset="-120"/>
-              </a:rPr>
-              <a:t>Fuite de données entre entreprises corrigée</a:t>
-            </a:r>
-            <a:endParaRPr lang="en-US" sz="1400" dirty="0"/>
-          </a:p>
-        </p:txBody>
-      </p:sp>
-      <p:sp>
-        <p:nvSpPr>
-          <p:cNvPr id="12" name="Text 10"/>
-          <p:cNvSpPr/>
-          <p:nvPr/>
-        </p:nvSpPr>
-        <p:spPr>
-          <a:xfrm>
-            <a:off x="914400" y="3383280"/>
-            <a:ext cx="10332720" cy="594360"/>
-          </a:xfrm>
-          <a:prstGeom prst="rect">
-            <a:avLst/>
-          </a:prstGeom>
-          <a:noFill/>
-          <a:ln/>
-        </p:spPr>
-        <p:txBody>
-          <a:bodyPr wrap="square" rtlCol="0" anchor="ctr"/>
-          <a:lstStyle/>
-          <a:p>
-            <a:pPr indent="0" marL="0">
-              <a:lnSpc>
-                <a:spcPts val="1400"/>
-              </a:lnSpc>
-              <a:buNone/>
-            </a:pPr>
-            <a:r>
-              <a:rPr lang="en-US" sz="1100" dirty="0">
-                <a:solidFill>
-                  <a:srgbClr val="8A7C68"/>
-                </a:solidFill>
-                <a:latin typeface="Segoe UI" pitchFamily="34" charset="0"/>
-                <a:ea typeface="Segoe UI" pitchFamily="34" charset="-122"/>
-                <a:cs typeface="Segoe UI" pitchFamily="34" charset="-120"/>
-              </a:rPr>
-              <a:t>Une trentaine de routes (clients, devis, factures, tâches, ouvriers...) faisaient confiance à un identifiant envoyé par le navigateur pour savoir quelles données afficher, sans vérifier qu'il correspondait à la session connectée : n'importe qui pouvait lire ou modifier les données d'une autre entreprise en changeant cet identifiant. Ces routes vérifient désormais la vraie session avant de répondre.</a:t>
-            </a:r>
-            <a:endParaRPr lang="en-US" sz="1100" dirty="0"/>
-          </a:p>
-        </p:txBody>
-      </p:sp>
-      <p:sp>
-        <p:nvSpPr>
-          <p:cNvPr id="13" name="Shape 11"/>
-          <p:cNvSpPr/>
-          <p:nvPr/>
-        </p:nvSpPr>
-        <p:spPr>
-          <a:xfrm>
-            <a:off x="640080" y="4160520"/>
-            <a:ext cx="10881360" cy="1097280"/>
-          </a:xfrm>
-          <a:prstGeom prst="roundRect">
-            <a:avLst>
-              <a:gd name="adj" fmla="val 5000"/>
-            </a:avLst>
-          </a:prstGeom>
-          <a:solidFill>
-            <a:srgbClr val="FFFFFF"/>
-          </a:solidFill>
-          <a:ln w="12700">
-            <a:solidFill>
-              <a:srgbClr val="E4DCCB"/>
-            </a:solidFill>
-            <a:prstDash val="solid"/>
-          </a:ln>
-        </p:spPr>
-      </p:sp>
-      <p:sp>
-        <p:nvSpPr>
-          <p:cNvPr id="14" name="Shape 12"/>
-          <p:cNvSpPr/>
-          <p:nvPr/>
-        </p:nvSpPr>
-        <p:spPr>
-          <a:xfrm>
-            <a:off x="640080" y="4160520"/>
-            <a:ext cx="54864" cy="1097280"/>
-          </a:xfrm>
-          <a:prstGeom prst="rect">
-            <a:avLst/>
-          </a:prstGeom>
-          <a:solidFill>
-            <a:srgbClr val="9A4C1F"/>
-          </a:solidFill>
-          <a:ln/>
-        </p:spPr>
-      </p:sp>
-      <p:sp>
-        <p:nvSpPr>
-          <p:cNvPr id="15" name="Text 13"/>
-          <p:cNvSpPr/>
-          <p:nvPr/>
-        </p:nvSpPr>
-        <p:spPr>
-          <a:xfrm>
-            <a:off x="914400" y="4270248"/>
-            <a:ext cx="10332720" cy="365760"/>
-          </a:xfrm>
-          <a:prstGeom prst="rect">
-            <a:avLst/>
-          </a:prstGeom>
-          <a:noFill/>
-          <a:ln/>
-        </p:spPr>
-        <p:txBody>
-          <a:bodyPr wrap="square" rtlCol="0" anchor="ctr"/>
-          <a:lstStyle/>
-          <a:p>
-            <a:pPr indent="0" marL="0">
-              <a:buNone/>
-            </a:pPr>
-            <a:r>
-              <a:rPr lang="en-US" sz="1400" b="1" dirty="0">
-                <a:solidFill>
-                  <a:srgbClr val="1B1F3B"/>
-                </a:solidFill>
-                <a:latin typeface="Segoe UI" pitchFamily="34" charset="0"/>
-                <a:ea typeface="Segoe UI" pitchFamily="34" charset="-122"/>
-                <a:cs typeface="Segoe UI" pitchFamily="34" charset="-120"/>
-              </a:rPr>
-              <a:t>Portail client équipé d'une vraie session</a:t>
-            </a:r>
-            <a:endParaRPr lang="en-US" sz="1400" dirty="0"/>
-          </a:p>
-        </p:txBody>
-      </p:sp>
-      <p:sp>
-        <p:nvSpPr>
-          <p:cNvPr id="16" name="Text 14"/>
-          <p:cNvSpPr/>
-          <p:nvPr/>
-        </p:nvSpPr>
-        <p:spPr>
-          <a:xfrm>
-            <a:off x="914400" y="4617720"/>
-            <a:ext cx="10332720" cy="594360"/>
-          </a:xfrm>
-          <a:prstGeom prst="rect">
-            <a:avLst/>
-          </a:prstGeom>
-          <a:noFill/>
-          <a:ln/>
-        </p:spPr>
-        <p:txBody>
-          <a:bodyPr wrap="square" rtlCol="0" anchor="ctr"/>
-          <a:lstStyle/>
-          <a:p>
-            <a:pPr indent="0" marL="0">
-              <a:lnSpc>
-                <a:spcPts val="1400"/>
-              </a:lnSpc>
-              <a:buNone/>
-            </a:pPr>
-            <a:r>
-              <a:rPr lang="en-US" sz="1100" dirty="0">
-                <a:solidFill>
-                  <a:srgbClr val="8A7C68"/>
-                </a:solidFill>
-                <a:latin typeface="Segoe UI" pitchFamily="34" charset="0"/>
-                <a:ea typeface="Segoe UI" pitchFamily="34" charset="-122"/>
-                <a:cs typeface="Segoe UI" pitchFamily="34" charset="-120"/>
-              </a:rPr>
-              <a:t>L'espace client particulier n'avait aucune session vérifiable : ses informations (dont le mot de passe de signature) pouvaient être lues à partir du simple email d'un client, sans mot de passe. Un jeton de connexion signé a été ajouté, vérifié sur chaque page du portail client.</a:t>
-            </a:r>
-            <a:endParaRPr lang="en-US" sz="1100" dirty="0"/>
-          </a:p>
-        </p:txBody>
-      </p:sp>
-      <p:sp>
-        <p:nvSpPr>
-          <p:cNvPr id="17" name="Shape 15"/>
-          <p:cNvSpPr/>
-          <p:nvPr/>
-        </p:nvSpPr>
-        <p:spPr>
-          <a:xfrm>
-            <a:off x="640080" y="5394960"/>
-            <a:ext cx="10881360" cy="1097280"/>
-          </a:xfrm>
-          <a:prstGeom prst="roundRect">
-            <a:avLst>
-              <a:gd name="adj" fmla="val 5000"/>
-            </a:avLst>
-          </a:prstGeom>
-          <a:solidFill>
-            <a:srgbClr val="FFFFFF"/>
-          </a:solidFill>
-          <a:ln w="12700">
-            <a:solidFill>
-              <a:srgbClr val="E4DCCB"/>
-            </a:solidFill>
-            <a:prstDash val="solid"/>
-          </a:ln>
-        </p:spPr>
-      </p:sp>
-      <p:sp>
-        <p:nvSpPr>
-          <p:cNvPr id="18" name="Shape 16"/>
-          <p:cNvSpPr/>
-          <p:nvPr/>
-        </p:nvSpPr>
-        <p:spPr>
-          <a:xfrm>
-            <a:off x="640080" y="5394960"/>
-            <a:ext cx="54864" cy="1097280"/>
-          </a:xfrm>
-          <a:prstGeom prst="rect">
-            <a:avLst/>
-          </a:prstGeom>
-          <a:solidFill>
-            <a:srgbClr val="9A4C1F"/>
-          </a:solidFill>
-          <a:ln/>
-        </p:spPr>
-      </p:sp>
-      <p:sp>
-        <p:nvSpPr>
-          <p:cNvPr id="19" name="Text 17"/>
-          <p:cNvSpPr/>
-          <p:nvPr/>
-        </p:nvSpPr>
-        <p:spPr>
-          <a:xfrm>
-            <a:off x="914400" y="5504688"/>
-            <a:ext cx="10332720" cy="365760"/>
-          </a:xfrm>
-          <a:prstGeom prst="rect">
-            <a:avLst/>
-          </a:prstGeom>
-          <a:noFill/>
-          <a:ln/>
-        </p:spPr>
-        <p:txBody>
-          <a:bodyPr wrap="square" rtlCol="0" anchor="ctr"/>
-          <a:lstStyle/>
-          <a:p>
-            <a:pPr indent="0" marL="0">
-              <a:buNone/>
-            </a:pPr>
-            <a:r>
-              <a:rPr lang="en-US" sz="1400" b="1" dirty="0">
-                <a:solidFill>
-                  <a:srgbClr val="1B1F3B"/>
-                </a:solidFill>
-                <a:latin typeface="Segoe UI" pitchFamily="34" charset="0"/>
-                <a:ea typeface="Segoe UI" pitchFamily="34" charset="-122"/>
-                <a:cs typeface="Segoe UI" pitchFamily="34" charset="-120"/>
-              </a:rPr>
-              <a:t>Mots de passe du portail client chiffrés</a:t>
-            </a:r>
-            <a:endParaRPr lang="en-US" sz="1400" dirty="0"/>
-          </a:p>
-        </p:txBody>
-      </p:sp>
-      <p:sp>
-        <p:nvSpPr>
-          <p:cNvPr id="20" name="Text 18"/>
-          <p:cNvSpPr/>
-          <p:nvPr/>
-        </p:nvSpPr>
-        <p:spPr>
-          <a:xfrm>
-            <a:off x="914400" y="5852160"/>
-            <a:ext cx="10332720" cy="594360"/>
-          </a:xfrm>
-          <a:prstGeom prst="rect">
-            <a:avLst/>
-          </a:prstGeom>
-          <a:noFill/>
-          <a:ln/>
-        </p:spPr>
-        <p:txBody>
-          <a:bodyPr wrap="square" rtlCol="0" anchor="ctr"/>
-          <a:lstStyle/>
-          <a:p>
-            <a:pPr indent="0" marL="0">
-              <a:lnSpc>
-                <a:spcPts val="1400"/>
-              </a:lnSpc>
-              <a:buNone/>
-            </a:pPr>
-            <a:r>
-              <a:rPr lang="en-US" sz="1100" dirty="0">
-                <a:solidFill>
-                  <a:srgbClr val="8A7C68"/>
-                </a:solidFill>
-                <a:latin typeface="Segoe UI" pitchFamily="34" charset="0"/>
-                <a:ea typeface="Segoe UI" pitchFamily="34" charset="-122"/>
-                <a:cs typeface="Segoe UI" pitchFamily="34" charset="-120"/>
-              </a:rPr>
-              <a:t>Les mots de passe des comptes client particulier étaient stockés et comparés en texte lisible. Ils sont désormais chiffrés (hachage scrypt), avec migration automatique et transparente des comptes existants à la prochaine connexion.</a:t>
-            </a:r>
-            <a:endParaRPr lang="en-US" sz="1100" dirty="0"/>
-          </a:p>
-        </p:txBody>
-      </p:sp>
-      <p:sp>
-        <p:nvSpPr>
-          <p:cNvPr id="21" name="Text 19"/>
+          <p:cNvPr id="9" name="Text 7"/>
           <p:cNvSpPr/>
           <p:nvPr/>
         </p:nvSpPr>
@@ -18567,7 +18272,7 @@
       </p:sp>
       <p:sp>
         <p:nvSpPr>
-          <p:cNvPr id="22" name="Text 20"/>
+          <p:cNvPr id="10" name="Text 8"/>
           <p:cNvSpPr/>
           <p:nvPr/>
         </p:nvSpPr>
@@ -18730,7 +18435,7 @@
                 <a:ea typeface="Georgia" pitchFamily="34" charset="-122"/>
                 <a:cs typeface="Georgia" pitchFamily="34" charset="-120"/>
               </a:rPr>
-              <a:t>Sécurité (suite)</a:t>
+              <a:t>Sécurité</a:t>
             </a:r>
             <a:endParaRPr lang="en-US" sz="2400" dirty="0"/>
           </a:p>
@@ -18816,7 +18521,7 @@
                 <a:ea typeface="Segoe UI" pitchFamily="34" charset="-122"/>
                 <a:cs typeface="Segoe UI" pitchFamily="34" charset="-120"/>
               </a:rPr>
-              <a:t>Portail ouvrier équipé d'une vraie session</a:t>
+              <a:t>Audit de sécurité complet et correction des failles trouvées</a:t>
             </a:r>
             <a:endParaRPr lang="en-US" sz="1400" dirty="0"/>
           </a:p>
@@ -18858,7 +18563,7 @@
                 <a:ea typeface="Segoe UI" pitchFamily="34" charset="-122"/>
                 <a:cs typeface="Segoe UI" pitchFamily="34" charset="-120"/>
               </a:rPr>
-              <a:t>Comme pour le portail client, l'espace ouvrier n'avait aucune session vérifiable après la connexion : ses tâches, heures et taux horaire étaient accessibles à quiconque connaissait son identifiant. Un jeton de connexion signé a été ajouté.</a:t>
+              <a:t>Audit approfondi ayant confirmé 6 failles actives : fuite de données entre entreprises, base de données lisible sans connexion, portail client sans authentification, mots de passe en clair, base de données versionnée dans Git, absence de vérification centralisée. Corrigées le jour même (détail ci-dessous).</a:t>
             </a:r>
             <a:endParaRPr lang="en-US" sz="1100" dirty="0"/>
           </a:p>
@@ -18944,7 +18649,7 @@
                 <a:ea typeface="Segoe UI" pitchFamily="34" charset="-122"/>
                 <a:cs typeface="Segoe UI" pitchFamily="34" charset="-120"/>
               </a:rPr>
-              <a:t>Fuite de messages et mots de passe provisoires par email/SMS</a:t>
+              <a:t>Fuite de données entre entreprises corrigée</a:t>
             </a:r>
             <a:endParaRPr lang="en-US" sz="1400" dirty="0"/>
           </a:p>
@@ -18986,7 +18691,7 @@
                 <a:ea typeface="Segoe UI" pitchFamily="34" charset="-122"/>
                 <a:cs typeface="Segoe UI" pitchFamily="34" charset="-120"/>
               </a:rPr>
-              <a:t>Une route technique renvoyait tous les emails et SMS envoyés par l'application, tous chantiers et toutes entreprises confondus (dont des mots de passe provisoires en clair), dès qu'elle était appelée sans préciser de chantier. Corrigée : un chantier précis est désormais obligatoire, et seuls l'entreprise concernée ou son client peuvent consulter ses messages.</a:t>
+              <a:t>Une trentaine de routes (clients, devis, factures, tâches, ouvriers...) faisaient confiance à un identifiant envoyé par le navigateur pour savoir quelles données afficher, sans vérifier qu'il correspondait à la session connectée : n'importe qui pouvait lire ou modifier les données d'une autre entreprise en changeant cet identifiant. Ces routes vérifient désormais la vraie session avant de répondre.</a:t>
             </a:r>
             <a:endParaRPr lang="en-US" sz="1100" dirty="0"/>
           </a:p>
@@ -19072,7 +18777,7 @@
                 <a:ea typeface="Segoe UI" pitchFamily="34" charset="-122"/>
                 <a:cs typeface="Segoe UI" pitchFamily="34" charset="-120"/>
               </a:rPr>
-              <a:t>Import de fourniture par lien sécurisé</a:t>
+              <a:t>Portail client équipé d'une vraie session</a:t>
             </a:r>
             <a:endParaRPr lang="en-US" sz="1400" dirty="0"/>
           </a:p>
@@ -19114,7 +18819,7 @@
                 <a:ea typeface="Segoe UI" pitchFamily="34" charset="-122"/>
                 <a:cs typeface="Segoe UI" pitchFamily="34" charset="-120"/>
               </a:rPr>
-              <a:t>L'outil qui récupère automatiquement les informations d'un produit à partir d'un lien pouvait être utilisé par n'importe qui, sans connexion, pour faire aller le serveur chercher n'importe quelle adresse — un risque d'abus classique. Restreint aux utilisateurs connectés et aux liens web valides uniquement.</a:t>
+              <a:t>L'espace client particulier n'avait aucune session vérifiable : ses informations (dont le mot de passe de signature) pouvaient être lues à partir du simple email d'un client, sans mot de passe. Un jeton de connexion signé a été ajouté, vérifié sur chaque page du portail client.</a:t>
             </a:r>
             <a:endParaRPr lang="en-US" sz="1100" dirty="0"/>
           </a:p>
@@ -19200,7 +18905,7 @@
                 <a:ea typeface="Segoe UI" pitchFamily="34" charset="-122"/>
                 <a:cs typeface="Segoe UI" pitchFamily="34" charset="-120"/>
               </a:rPr>
-              <a:t>Les 3 sessions (entreprise, client, ouvrier) déplacées hors de portée du navigateur</a:t>
+              <a:t>Mots de passe du portail client chiffrés</a:t>
             </a:r>
             <a:endParaRPr lang="en-US" sz="1400" dirty="0"/>
           </a:p>
@@ -19242,7 +18947,7 @@
                 <a:ea typeface="Segoe UI" pitchFamily="34" charset="-122"/>
                 <a:cs typeface="Segoe UI" pitchFamily="34" charset="-120"/>
               </a:rPr>
-              <a:t>Les jetons de connexion vivaient dans le stockage local du navigateur, lisible par le moindre script exécuté sur la page (faille XSS, extension malveillante) — une seule faille de ce type ailleurs dans l'appli aurait suffi à voler une session active. Déplacés vers des cookies HttpOnly, invisibles et inaccessibles au code JavaScript de la page, pour les trois types de compte.</a:t>
+              <a:t>Les mots de passe des comptes client particulier étaient stockés et comparés en texte lisible. Ils sont désormais chiffrés (hachage scrypt), avec migration automatique et transparente des comptes existants à la prochaine connexion.</a:t>
             </a:r>
             <a:endParaRPr lang="en-US" sz="1100" dirty="0"/>
           </a:p>
@@ -19538,7 +19243,7 @@
                 <a:ea typeface="Segoe UI" pitchFamily="34" charset="-122"/>
                 <a:cs typeface="Segoe UI" pitchFamily="34" charset="-120"/>
               </a:rPr>
-              <a:t>Mot de passe de connexion signature chiffré</a:t>
+              <a:t>Portail ouvrier équipé d'une vraie session</a:t>
             </a:r>
             <a:endParaRPr lang="en-US" sz="1400" dirty="0"/>
           </a:p>
@@ -19580,7 +19285,7 @@
                 <a:ea typeface="Segoe UI" pitchFamily="34" charset="-122"/>
                 <a:cs typeface="Segoe UI" pitchFamily="34" charset="-120"/>
               </a:rPr>
-              <a:t>Le mot de passe provisoire envoyé au client pour signer son devis était comparé et stocké en texte lisible. Chiffré (hachage scrypt) comme le reste ; le mot de passe en clair n'est plus jamais écrit en base, seulement affiché une fois au moment de l'envoi.</a:t>
+              <a:t>Comme pour le portail client, l'espace ouvrier n'avait aucune session vérifiable après la connexion : ses tâches, heures et taux horaire étaient accessibles à quiconque connaissait son identifiant. Un jeton de connexion signé a été ajouté.</a:t>
             </a:r>
             <a:endParaRPr lang="en-US" sz="1100" dirty="0"/>
           </a:p>
@@ -19588,7 +19293,391 @@
       </p:sp>
       <p:sp>
         <p:nvSpPr>
-          <p:cNvPr id="9" name="Text 7"/>
+          <p:cNvPr id="9" name="Shape 7"/>
+          <p:cNvSpPr/>
+          <p:nvPr/>
+        </p:nvSpPr>
+        <p:spPr>
+          <a:xfrm>
+            <a:off x="640080" y="2926080"/>
+            <a:ext cx="10881360" cy="1097280"/>
+          </a:xfrm>
+          <a:prstGeom prst="roundRect">
+            <a:avLst>
+              <a:gd name="adj" fmla="val 5000"/>
+            </a:avLst>
+          </a:prstGeom>
+          <a:solidFill>
+            <a:srgbClr val="FFFFFF"/>
+          </a:solidFill>
+          <a:ln w="12700">
+            <a:solidFill>
+              <a:srgbClr val="E4DCCB"/>
+            </a:solidFill>
+            <a:prstDash val="solid"/>
+          </a:ln>
+        </p:spPr>
+      </p:sp>
+      <p:sp>
+        <p:nvSpPr>
+          <p:cNvPr id="10" name="Shape 8"/>
+          <p:cNvSpPr/>
+          <p:nvPr/>
+        </p:nvSpPr>
+        <p:spPr>
+          <a:xfrm>
+            <a:off x="640080" y="2926080"/>
+            <a:ext cx="54864" cy="1097280"/>
+          </a:xfrm>
+          <a:prstGeom prst="rect">
+            <a:avLst/>
+          </a:prstGeom>
+          <a:solidFill>
+            <a:srgbClr val="9A4C1F"/>
+          </a:solidFill>
+          <a:ln/>
+        </p:spPr>
+      </p:sp>
+      <p:sp>
+        <p:nvSpPr>
+          <p:cNvPr id="11" name="Text 9"/>
+          <p:cNvSpPr/>
+          <p:nvPr/>
+        </p:nvSpPr>
+        <p:spPr>
+          <a:xfrm>
+            <a:off x="914400" y="3035808"/>
+            <a:ext cx="10332720" cy="365760"/>
+          </a:xfrm>
+          <a:prstGeom prst="rect">
+            <a:avLst/>
+          </a:prstGeom>
+          <a:noFill/>
+          <a:ln/>
+        </p:spPr>
+        <p:txBody>
+          <a:bodyPr wrap="square" rtlCol="0" anchor="ctr"/>
+          <a:lstStyle/>
+          <a:p>
+            <a:pPr indent="0" marL="0">
+              <a:buNone/>
+            </a:pPr>
+            <a:r>
+              <a:rPr lang="en-US" sz="1400" b="1" dirty="0">
+                <a:solidFill>
+                  <a:srgbClr val="1B1F3B"/>
+                </a:solidFill>
+                <a:latin typeface="Segoe UI" pitchFamily="34" charset="0"/>
+                <a:ea typeface="Segoe UI" pitchFamily="34" charset="-122"/>
+                <a:cs typeface="Segoe UI" pitchFamily="34" charset="-120"/>
+              </a:rPr>
+              <a:t>Fuite de messages et mots de passe provisoires par email/SMS</a:t>
+            </a:r>
+            <a:endParaRPr lang="en-US" sz="1400" dirty="0"/>
+          </a:p>
+        </p:txBody>
+      </p:sp>
+      <p:sp>
+        <p:nvSpPr>
+          <p:cNvPr id="12" name="Text 10"/>
+          <p:cNvSpPr/>
+          <p:nvPr/>
+        </p:nvSpPr>
+        <p:spPr>
+          <a:xfrm>
+            <a:off x="914400" y="3383280"/>
+            <a:ext cx="10332720" cy="594360"/>
+          </a:xfrm>
+          <a:prstGeom prst="rect">
+            <a:avLst/>
+          </a:prstGeom>
+          <a:noFill/>
+          <a:ln/>
+        </p:spPr>
+        <p:txBody>
+          <a:bodyPr wrap="square" rtlCol="0" anchor="ctr"/>
+          <a:lstStyle/>
+          <a:p>
+            <a:pPr indent="0" marL="0">
+              <a:lnSpc>
+                <a:spcPts val="1400"/>
+              </a:lnSpc>
+              <a:buNone/>
+            </a:pPr>
+            <a:r>
+              <a:rPr lang="en-US" sz="1100" dirty="0">
+                <a:solidFill>
+                  <a:srgbClr val="8A7C68"/>
+                </a:solidFill>
+                <a:latin typeface="Segoe UI" pitchFamily="34" charset="0"/>
+                <a:ea typeface="Segoe UI" pitchFamily="34" charset="-122"/>
+                <a:cs typeface="Segoe UI" pitchFamily="34" charset="-120"/>
+              </a:rPr>
+              <a:t>Une route technique renvoyait tous les emails et SMS envoyés par l'application, tous chantiers et toutes entreprises confondus (dont des mots de passe provisoires en clair), dès qu'elle était appelée sans préciser de chantier. Corrigée : un chantier précis est désormais obligatoire, et seuls l'entreprise concernée ou son client peuvent consulter ses messages.</a:t>
+            </a:r>
+            <a:endParaRPr lang="en-US" sz="1100" dirty="0"/>
+          </a:p>
+        </p:txBody>
+      </p:sp>
+      <p:sp>
+        <p:nvSpPr>
+          <p:cNvPr id="13" name="Shape 11"/>
+          <p:cNvSpPr/>
+          <p:nvPr/>
+        </p:nvSpPr>
+        <p:spPr>
+          <a:xfrm>
+            <a:off x="640080" y="4160520"/>
+            <a:ext cx="10881360" cy="1097280"/>
+          </a:xfrm>
+          <a:prstGeom prst="roundRect">
+            <a:avLst>
+              <a:gd name="adj" fmla="val 5000"/>
+            </a:avLst>
+          </a:prstGeom>
+          <a:solidFill>
+            <a:srgbClr val="FFFFFF"/>
+          </a:solidFill>
+          <a:ln w="12700">
+            <a:solidFill>
+              <a:srgbClr val="E4DCCB"/>
+            </a:solidFill>
+            <a:prstDash val="solid"/>
+          </a:ln>
+        </p:spPr>
+      </p:sp>
+      <p:sp>
+        <p:nvSpPr>
+          <p:cNvPr id="14" name="Shape 12"/>
+          <p:cNvSpPr/>
+          <p:nvPr/>
+        </p:nvSpPr>
+        <p:spPr>
+          <a:xfrm>
+            <a:off x="640080" y="4160520"/>
+            <a:ext cx="54864" cy="1097280"/>
+          </a:xfrm>
+          <a:prstGeom prst="rect">
+            <a:avLst/>
+          </a:prstGeom>
+          <a:solidFill>
+            <a:srgbClr val="9A4C1F"/>
+          </a:solidFill>
+          <a:ln/>
+        </p:spPr>
+      </p:sp>
+      <p:sp>
+        <p:nvSpPr>
+          <p:cNvPr id="15" name="Text 13"/>
+          <p:cNvSpPr/>
+          <p:nvPr/>
+        </p:nvSpPr>
+        <p:spPr>
+          <a:xfrm>
+            <a:off x="914400" y="4270248"/>
+            <a:ext cx="10332720" cy="365760"/>
+          </a:xfrm>
+          <a:prstGeom prst="rect">
+            <a:avLst/>
+          </a:prstGeom>
+          <a:noFill/>
+          <a:ln/>
+        </p:spPr>
+        <p:txBody>
+          <a:bodyPr wrap="square" rtlCol="0" anchor="ctr"/>
+          <a:lstStyle/>
+          <a:p>
+            <a:pPr indent="0" marL="0">
+              <a:buNone/>
+            </a:pPr>
+            <a:r>
+              <a:rPr lang="en-US" sz="1400" b="1" dirty="0">
+                <a:solidFill>
+                  <a:srgbClr val="1B1F3B"/>
+                </a:solidFill>
+                <a:latin typeface="Segoe UI" pitchFamily="34" charset="0"/>
+                <a:ea typeface="Segoe UI" pitchFamily="34" charset="-122"/>
+                <a:cs typeface="Segoe UI" pitchFamily="34" charset="-120"/>
+              </a:rPr>
+              <a:t>Import de fourniture par lien sécurisé</a:t>
+            </a:r>
+            <a:endParaRPr lang="en-US" sz="1400" dirty="0"/>
+          </a:p>
+        </p:txBody>
+      </p:sp>
+      <p:sp>
+        <p:nvSpPr>
+          <p:cNvPr id="16" name="Text 14"/>
+          <p:cNvSpPr/>
+          <p:nvPr/>
+        </p:nvSpPr>
+        <p:spPr>
+          <a:xfrm>
+            <a:off x="914400" y="4617720"/>
+            <a:ext cx="10332720" cy="594360"/>
+          </a:xfrm>
+          <a:prstGeom prst="rect">
+            <a:avLst/>
+          </a:prstGeom>
+          <a:noFill/>
+          <a:ln/>
+        </p:spPr>
+        <p:txBody>
+          <a:bodyPr wrap="square" rtlCol="0" anchor="ctr"/>
+          <a:lstStyle/>
+          <a:p>
+            <a:pPr indent="0" marL="0">
+              <a:lnSpc>
+                <a:spcPts val="1400"/>
+              </a:lnSpc>
+              <a:buNone/>
+            </a:pPr>
+            <a:r>
+              <a:rPr lang="en-US" sz="1100" dirty="0">
+                <a:solidFill>
+                  <a:srgbClr val="8A7C68"/>
+                </a:solidFill>
+                <a:latin typeface="Segoe UI" pitchFamily="34" charset="0"/>
+                <a:ea typeface="Segoe UI" pitchFamily="34" charset="-122"/>
+                <a:cs typeface="Segoe UI" pitchFamily="34" charset="-120"/>
+              </a:rPr>
+              <a:t>L'outil qui récupère automatiquement les informations d'un produit à partir d'un lien pouvait être utilisé par n'importe qui, sans connexion, pour faire aller le serveur chercher n'importe quelle adresse — un risque d'abus classique. Restreint aux utilisateurs connectés et aux liens web valides uniquement.</a:t>
+            </a:r>
+            <a:endParaRPr lang="en-US" sz="1100" dirty="0"/>
+          </a:p>
+        </p:txBody>
+      </p:sp>
+      <p:sp>
+        <p:nvSpPr>
+          <p:cNvPr id="17" name="Shape 15"/>
+          <p:cNvSpPr/>
+          <p:nvPr/>
+        </p:nvSpPr>
+        <p:spPr>
+          <a:xfrm>
+            <a:off x="640080" y="5394960"/>
+            <a:ext cx="10881360" cy="1097280"/>
+          </a:xfrm>
+          <a:prstGeom prst="roundRect">
+            <a:avLst>
+              <a:gd name="adj" fmla="val 5000"/>
+            </a:avLst>
+          </a:prstGeom>
+          <a:solidFill>
+            <a:srgbClr val="FFFFFF"/>
+          </a:solidFill>
+          <a:ln w="12700">
+            <a:solidFill>
+              <a:srgbClr val="E4DCCB"/>
+            </a:solidFill>
+            <a:prstDash val="solid"/>
+          </a:ln>
+        </p:spPr>
+      </p:sp>
+      <p:sp>
+        <p:nvSpPr>
+          <p:cNvPr id="18" name="Shape 16"/>
+          <p:cNvSpPr/>
+          <p:nvPr/>
+        </p:nvSpPr>
+        <p:spPr>
+          <a:xfrm>
+            <a:off x="640080" y="5394960"/>
+            <a:ext cx="54864" cy="1097280"/>
+          </a:xfrm>
+          <a:prstGeom prst="rect">
+            <a:avLst/>
+          </a:prstGeom>
+          <a:solidFill>
+            <a:srgbClr val="9A4C1F"/>
+          </a:solidFill>
+          <a:ln/>
+        </p:spPr>
+      </p:sp>
+      <p:sp>
+        <p:nvSpPr>
+          <p:cNvPr id="19" name="Text 17"/>
+          <p:cNvSpPr/>
+          <p:nvPr/>
+        </p:nvSpPr>
+        <p:spPr>
+          <a:xfrm>
+            <a:off x="914400" y="5504688"/>
+            <a:ext cx="10332720" cy="365760"/>
+          </a:xfrm>
+          <a:prstGeom prst="rect">
+            <a:avLst/>
+          </a:prstGeom>
+          <a:noFill/>
+          <a:ln/>
+        </p:spPr>
+        <p:txBody>
+          <a:bodyPr wrap="square" rtlCol="0" anchor="ctr"/>
+          <a:lstStyle/>
+          <a:p>
+            <a:pPr indent="0" marL="0">
+              <a:buNone/>
+            </a:pPr>
+            <a:r>
+              <a:rPr lang="en-US" sz="1400" b="1" dirty="0">
+                <a:solidFill>
+                  <a:srgbClr val="1B1F3B"/>
+                </a:solidFill>
+                <a:latin typeface="Segoe UI" pitchFamily="34" charset="0"/>
+                <a:ea typeface="Segoe UI" pitchFamily="34" charset="-122"/>
+                <a:cs typeface="Segoe UI" pitchFamily="34" charset="-120"/>
+              </a:rPr>
+              <a:t>Les 3 sessions (entreprise, client, ouvrier) déplacées hors de portée du navigateur</a:t>
+            </a:r>
+            <a:endParaRPr lang="en-US" sz="1400" dirty="0"/>
+          </a:p>
+        </p:txBody>
+      </p:sp>
+      <p:sp>
+        <p:nvSpPr>
+          <p:cNvPr id="20" name="Text 18"/>
+          <p:cNvSpPr/>
+          <p:nvPr/>
+        </p:nvSpPr>
+        <p:spPr>
+          <a:xfrm>
+            <a:off x="914400" y="5852160"/>
+            <a:ext cx="10332720" cy="594360"/>
+          </a:xfrm>
+          <a:prstGeom prst="rect">
+            <a:avLst/>
+          </a:prstGeom>
+          <a:noFill/>
+          <a:ln/>
+        </p:spPr>
+        <p:txBody>
+          <a:bodyPr wrap="square" rtlCol="0" anchor="ctr"/>
+          <a:lstStyle/>
+          <a:p>
+            <a:pPr indent="0" marL="0">
+              <a:lnSpc>
+                <a:spcPts val="1400"/>
+              </a:lnSpc>
+              <a:buNone/>
+            </a:pPr>
+            <a:r>
+              <a:rPr lang="en-US" sz="1100" dirty="0">
+                <a:solidFill>
+                  <a:srgbClr val="8A7C68"/>
+                </a:solidFill>
+                <a:latin typeface="Segoe UI" pitchFamily="34" charset="0"/>
+                <a:ea typeface="Segoe UI" pitchFamily="34" charset="-122"/>
+                <a:cs typeface="Segoe UI" pitchFamily="34" charset="-120"/>
+              </a:rPr>
+              <a:t>Les jetons de connexion vivaient dans le stockage local du navigateur, lisible par le moindre script exécuté sur la page (faille XSS, extension malveillante) — une seule faille de ce type ailleurs dans l'appli aurait suffi à voler une session active. Déplacés vers des cookies HttpOnly, invisibles et inaccessibles au code JavaScript de la page, pour les trois types de compte.</a:t>
+            </a:r>
+            <a:endParaRPr lang="en-US" sz="1100" dirty="0"/>
+          </a:p>
+        </p:txBody>
+      </p:sp>
+      <p:sp>
+        <p:nvSpPr>
+          <p:cNvPr id="21" name="Text 19"/>
           <p:cNvSpPr/>
           <p:nvPr/>
         </p:nvSpPr>
@@ -19627,7 +19716,7 @@
       </p:sp>
       <p:sp>
         <p:nvSpPr>
-          <p:cNvPr id="10" name="Text 8"/>
+          <p:cNvPr id="22" name="Text 20"/>
           <p:cNvSpPr/>
           <p:nvPr/>
         </p:nvSpPr>
@@ -19790,7 +19879,7 @@
                 <a:ea typeface="Georgia" pitchFamily="34" charset="-122"/>
                 <a:cs typeface="Georgia" pitchFamily="34" charset="-120"/>
               </a:rPr>
-              <a:t>Profil</a:t>
+              <a:t>Sécurité (suite)</a:t>
             </a:r>
             <a:endParaRPr lang="en-US" sz="2400" dirty="0"/>
           </a:p>
@@ -19876,7 +19965,7 @@
                 <a:ea typeface="Segoe UI" pitchFamily="34" charset="-122"/>
                 <a:cs typeface="Segoe UI" pitchFamily="34" charset="-120"/>
               </a:rPr>
-              <a:t>Vraie icône téléphone sur la carte de visite</a:t>
+              <a:t>Mot de passe de connexion signature chiffré</a:t>
             </a:r>
             <a:endParaRPr lang="en-US" sz="1400" dirty="0"/>
           </a:p>
@@ -19918,7 +20007,7 @@
                 <a:ea typeface="Segoe UI" pitchFamily="34" charset="-122"/>
                 <a:cs typeface="Segoe UI" pitchFamily="34" charset="-120"/>
               </a:rPr>
-              <a:t>Les deux premières tentatives (traits abstraits) ne ressemblaient pas à un téléphone. Le moteur de génération PDF du projet a été étendu pour dessiner de vraies icônes vectorielles (courbes et arcs SVG, pas seulement des rectangles et traits droits) — utilisé pour reproduire l'icône téléphone standard, et réutilisable pour toute icône future de ce type.</a:t>
+              <a:t>Le mot de passe provisoire envoyé au client pour signer son devis était comparé et stocké en texte lisible. Chiffré (hachage scrypt) comme le reste ; le mot de passe en clair n'est plus jamais écrit en base, seulement affiché une fois au moment de l'envoi.</a:t>
             </a:r>
             <a:endParaRPr lang="en-US" sz="1100" dirty="0"/>
           </a:p>
@@ -20128,7 +20217,7 @@
                 <a:ea typeface="Georgia" pitchFamily="34" charset="-122"/>
                 <a:cs typeface="Georgia" pitchFamily="34" charset="-120"/>
               </a:rPr>
-              <a:t>Contacts</a:t>
+              <a:t>Profil</a:t>
             </a:r>
             <a:endParaRPr lang="en-US" sz="2400" dirty="0"/>
           </a:p>
@@ -20214,7 +20303,7 @@
                 <a:ea typeface="Segoe UI" pitchFamily="34" charset="-122"/>
                 <a:cs typeface="Segoe UI" pitchFamily="34" charset="-120"/>
               </a:rPr>
-              <a:t>Fondations du module Contacts (base de données)</a:t>
+              <a:t>Vraie icône téléphone sur la carte de visite</a:t>
             </a:r>
             <a:endParaRPr lang="en-US" sz="1400" dirty="0"/>
           </a:p>
@@ -20256,7 +20345,7 @@
                 <a:ea typeface="Segoe UI" pitchFamily="34" charset="-122"/>
                 <a:cs typeface="Segoe UI" pitchFamily="34" charset="-120"/>
               </a:rPr>
-              <a:t>Nouvelle entité Contact centrale (particulier ou société, plusieurs rôles cumulables : client, prospect, équipe, sous-traitant, architecte, fournisseur, société donneuse d'ordre, autre), avec une table de liaison pour les intervenants par chantier (rôle propre à chaque chantier, indépendant du rôle général de la fiche). Devis, factures et rapports d'intervention peuvent désormais pointer vers une fiche contact, sans qu'aucune migration de base de données ne soit nécessaire. Les coordonnées déjà copiées sur un devis/facture envoyé restent inchangées même si la fiche contact est modifiée ensuite. Etape technique invisible pour l'instant : l'interface (page Contacts, sélection dans les formulaires) arrive dans la foulée.</a:t>
+              <a:t>Les deux premières tentatives (traits abstraits) ne ressemblaient pas à un téléphone. Le moteur de génération PDF du projet a été étendu pour dessiner de vraies icônes vectorielles (courbes et arcs SVG, pas seulement des rectangles et traits droits) — utilisé pour reproduire l'icône téléphone standard, et réutilisable pour toute icône future de ce type.</a:t>
             </a:r>
             <a:endParaRPr lang="en-US" sz="1100" dirty="0"/>
           </a:p>
@@ -20351,6 +20440,344 @@
 <file path=ppt/slides/slide37.xml><?xml version="1.0" encoding="utf-8"?>
 <p:sld xmlns:a="http://schemas.openxmlformats.org/drawingml/2006/main" xmlns:r="http://schemas.openxmlformats.org/officeDocument/2006/relationships" xmlns:p="http://schemas.openxmlformats.org/presentationml/2006/main">
   <p:cSld name="Slide 37">
+    <p:bg>
+      <p:bgPr>
+        <a:solidFill>
+          <a:srgbClr val="F3EEE3"/>
+        </a:solidFill>
+      </p:bgPr>
+    </p:bg>
+    <p:spTree>
+      <p:nvGrpSpPr>
+        <p:cNvPr id="1" name=""/>
+        <p:cNvGrpSpPr/>
+        <p:nvPr/>
+      </p:nvGrpSpPr>
+      <p:grpSpPr>
+        <a:xfrm>
+          <a:off x="0" y="0"/>
+          <a:ext cx="0" cy="0"/>
+          <a:chOff x="0" y="0"/>
+          <a:chExt cx="0" cy="0"/>
+        </a:xfrm>
+      </p:grpSpPr>
+      <p:sp>
+        <p:nvSpPr>
+          <p:cNvPr id="2" name="Shape 0"/>
+          <p:cNvSpPr/>
+          <p:nvPr/>
+        </p:nvSpPr>
+        <p:spPr>
+          <a:xfrm>
+            <a:off x="640080" y="411480"/>
+            <a:ext cx="2377440" cy="365760"/>
+          </a:xfrm>
+          <a:prstGeom prst="roundRect">
+            <a:avLst>
+              <a:gd name="adj" fmla="val 50000"/>
+            </a:avLst>
+          </a:prstGeom>
+          <a:solidFill>
+            <a:srgbClr val="F5E6DA"/>
+          </a:solidFill>
+          <a:ln/>
+        </p:spPr>
+      </p:sp>
+      <p:sp>
+        <p:nvSpPr>
+          <p:cNvPr id="3" name="Text 1"/>
+          <p:cNvSpPr/>
+          <p:nvPr/>
+        </p:nvSpPr>
+        <p:spPr>
+          <a:xfrm>
+            <a:off x="640080" y="411480"/>
+            <a:ext cx="2377440" cy="365760"/>
+          </a:xfrm>
+          <a:prstGeom prst="rect">
+            <a:avLst/>
+          </a:prstGeom>
+          <a:noFill/>
+          <a:ln/>
+        </p:spPr>
+        <p:txBody>
+          <a:bodyPr wrap="square" rtlCol="0" anchor="ctr"/>
+          <a:lstStyle/>
+          <a:p>
+            <a:pPr algn="ctr" indent="0" marL="0">
+              <a:buNone/>
+            </a:pPr>
+            <a:r>
+              <a:rPr lang="en-US" sz="1000" b="1" spc="100" kern="0" dirty="0">
+                <a:solidFill>
+                  <a:srgbClr val="9A4C1F"/>
+                </a:solidFill>
+                <a:latin typeface="Segoe UI" pitchFamily="34" charset="0"/>
+                <a:ea typeface="Segoe UI" pitchFamily="34" charset="-122"/>
+                <a:cs typeface="Segoe UI" pitchFamily="34" charset="-120"/>
+              </a:rPr>
+              <a:t>BACKEND</a:t>
+            </a:r>
+            <a:endParaRPr lang="en-US" sz="1000" dirty="0"/>
+          </a:p>
+        </p:txBody>
+      </p:sp>
+      <p:sp>
+        <p:nvSpPr>
+          <p:cNvPr id="4" name="Text 2"/>
+          <p:cNvSpPr/>
+          <p:nvPr/>
+        </p:nvSpPr>
+        <p:spPr>
+          <a:xfrm>
+            <a:off x="640080" y="868680"/>
+            <a:ext cx="10515600" cy="548640"/>
+          </a:xfrm>
+          <a:prstGeom prst="rect">
+            <a:avLst/>
+          </a:prstGeom>
+          <a:noFill/>
+          <a:ln/>
+        </p:spPr>
+        <p:txBody>
+          <a:bodyPr wrap="square" rtlCol="0" anchor="ctr"/>
+          <a:lstStyle/>
+          <a:p>
+            <a:pPr indent="0" marL="0">
+              <a:buNone/>
+            </a:pPr>
+            <a:r>
+              <a:rPr lang="en-US" sz="2400" b="1" dirty="0">
+                <a:solidFill>
+                  <a:srgbClr val="1B1F3B"/>
+                </a:solidFill>
+                <a:latin typeface="Georgia" pitchFamily="34" charset="0"/>
+                <a:ea typeface="Georgia" pitchFamily="34" charset="-122"/>
+                <a:cs typeface="Georgia" pitchFamily="34" charset="-120"/>
+              </a:rPr>
+              <a:t>Contacts</a:t>
+            </a:r>
+            <a:endParaRPr lang="en-US" sz="2400" dirty="0"/>
+          </a:p>
+        </p:txBody>
+      </p:sp>
+      <p:sp>
+        <p:nvSpPr>
+          <p:cNvPr id="5" name="Shape 3"/>
+          <p:cNvSpPr/>
+          <p:nvPr/>
+        </p:nvSpPr>
+        <p:spPr>
+          <a:xfrm>
+            <a:off x="640080" y="1691640"/>
+            <a:ext cx="10881360" cy="1097280"/>
+          </a:xfrm>
+          <a:prstGeom prst="roundRect">
+            <a:avLst>
+              <a:gd name="adj" fmla="val 5000"/>
+            </a:avLst>
+          </a:prstGeom>
+          <a:solidFill>
+            <a:srgbClr val="FFFFFF"/>
+          </a:solidFill>
+          <a:ln w="12700">
+            <a:solidFill>
+              <a:srgbClr val="E4DCCB"/>
+            </a:solidFill>
+            <a:prstDash val="solid"/>
+          </a:ln>
+        </p:spPr>
+      </p:sp>
+      <p:sp>
+        <p:nvSpPr>
+          <p:cNvPr id="6" name="Shape 4"/>
+          <p:cNvSpPr/>
+          <p:nvPr/>
+        </p:nvSpPr>
+        <p:spPr>
+          <a:xfrm>
+            <a:off x="640080" y="1691640"/>
+            <a:ext cx="54864" cy="1097280"/>
+          </a:xfrm>
+          <a:prstGeom prst="rect">
+            <a:avLst/>
+          </a:prstGeom>
+          <a:solidFill>
+            <a:srgbClr val="9A4C1F"/>
+          </a:solidFill>
+          <a:ln/>
+        </p:spPr>
+      </p:sp>
+      <p:sp>
+        <p:nvSpPr>
+          <p:cNvPr id="7" name="Text 5"/>
+          <p:cNvSpPr/>
+          <p:nvPr/>
+        </p:nvSpPr>
+        <p:spPr>
+          <a:xfrm>
+            <a:off x="914400" y="1801368"/>
+            <a:ext cx="10332720" cy="365760"/>
+          </a:xfrm>
+          <a:prstGeom prst="rect">
+            <a:avLst/>
+          </a:prstGeom>
+          <a:noFill/>
+          <a:ln/>
+        </p:spPr>
+        <p:txBody>
+          <a:bodyPr wrap="square" rtlCol="0" anchor="ctr"/>
+          <a:lstStyle/>
+          <a:p>
+            <a:pPr indent="0" marL="0">
+              <a:buNone/>
+            </a:pPr>
+            <a:r>
+              <a:rPr lang="en-US" sz="1400" b="1" dirty="0">
+                <a:solidFill>
+                  <a:srgbClr val="1B1F3B"/>
+                </a:solidFill>
+                <a:latin typeface="Segoe UI" pitchFamily="34" charset="0"/>
+                <a:ea typeface="Segoe UI" pitchFamily="34" charset="-122"/>
+                <a:cs typeface="Segoe UI" pitchFamily="34" charset="-120"/>
+              </a:rPr>
+              <a:t>Fondations du module Contacts (base de données)</a:t>
+            </a:r>
+            <a:endParaRPr lang="en-US" sz="1400" dirty="0"/>
+          </a:p>
+        </p:txBody>
+      </p:sp>
+      <p:sp>
+        <p:nvSpPr>
+          <p:cNvPr id="8" name="Text 6"/>
+          <p:cNvSpPr/>
+          <p:nvPr/>
+        </p:nvSpPr>
+        <p:spPr>
+          <a:xfrm>
+            <a:off x="914400" y="2148840"/>
+            <a:ext cx="10332720" cy="594360"/>
+          </a:xfrm>
+          <a:prstGeom prst="rect">
+            <a:avLst/>
+          </a:prstGeom>
+          <a:noFill/>
+          <a:ln/>
+        </p:spPr>
+        <p:txBody>
+          <a:bodyPr wrap="square" rtlCol="0" anchor="ctr"/>
+          <a:lstStyle/>
+          <a:p>
+            <a:pPr indent="0" marL="0">
+              <a:lnSpc>
+                <a:spcPts val="1400"/>
+              </a:lnSpc>
+              <a:buNone/>
+            </a:pPr>
+            <a:r>
+              <a:rPr lang="en-US" sz="1100" dirty="0">
+                <a:solidFill>
+                  <a:srgbClr val="8A7C68"/>
+                </a:solidFill>
+                <a:latin typeface="Segoe UI" pitchFamily="34" charset="0"/>
+                <a:ea typeface="Segoe UI" pitchFamily="34" charset="-122"/>
+                <a:cs typeface="Segoe UI" pitchFamily="34" charset="-120"/>
+              </a:rPr>
+              <a:t>Nouvelle entité Contact centrale (particulier ou société, plusieurs rôles cumulables : client, prospect, équipe, sous-traitant, architecte, fournisseur, société donneuse d'ordre, autre), avec une table de liaison pour les intervenants par chantier (rôle propre à chaque chantier, indépendant du rôle général de la fiche). Devis, factures et rapports d'intervention peuvent désormais pointer vers une fiche contact, sans qu'aucune migration de base de données ne soit nécessaire. Les coordonnées déjà copiées sur un devis/facture envoyé restent inchangées même si la fiche contact est modifiée ensuite. Etape technique invisible pour l'instant : l'interface (page Contacts, sélection dans les formulaires) arrive dans la foulée.</a:t>
+            </a:r>
+            <a:endParaRPr lang="en-US" sz="1100" dirty="0"/>
+          </a:p>
+        </p:txBody>
+      </p:sp>
+      <p:sp>
+        <p:nvSpPr>
+          <p:cNvPr id="9" name="Text 7"/>
+          <p:cNvSpPr/>
+          <p:nvPr/>
+        </p:nvSpPr>
+        <p:spPr>
+          <a:xfrm>
+            <a:off x="365760" y="6510528"/>
+            <a:ext cx="5486400" cy="274320"/>
+          </a:xfrm>
+          <a:prstGeom prst="rect">
+            <a:avLst/>
+          </a:prstGeom>
+          <a:noFill/>
+          <a:ln/>
+        </p:spPr>
+        <p:txBody>
+          <a:bodyPr wrap="square" rtlCol="0" anchor="ctr"/>
+          <a:lstStyle/>
+          <a:p>
+            <a:pPr indent="0" marL="0">
+              <a:buNone/>
+            </a:pPr>
+            <a:r>
+              <a:rPr lang="en-US" sz="900" dirty="0">
+                <a:solidFill>
+                  <a:srgbClr val="8A7C68"/>
+                </a:solidFill>
+                <a:latin typeface="Segoe UI" pitchFamily="34" charset="0"/>
+                <a:ea typeface="Segoe UI" pitchFamily="34" charset="-122"/>
+                <a:cs typeface="Segoe UI" pitchFamily="34" charset="-120"/>
+              </a:rPr>
+              <a:t>Kôji Web — Récapitulatif technique</a:t>
+            </a:r>
+            <a:endParaRPr lang="en-US" sz="900" dirty="0"/>
+          </a:p>
+        </p:txBody>
+      </p:sp>
+      <p:sp>
+        <p:nvSpPr>
+          <p:cNvPr id="10" name="Text 8"/>
+          <p:cNvSpPr/>
+          <p:nvPr/>
+        </p:nvSpPr>
+        <p:spPr>
+          <a:xfrm>
+            <a:off x="9601200" y="6510528"/>
+            <a:ext cx="2194560" cy="274320"/>
+          </a:xfrm>
+          <a:prstGeom prst="rect">
+            <a:avLst/>
+          </a:prstGeom>
+          <a:noFill/>
+          <a:ln/>
+        </p:spPr>
+        <p:txBody>
+          <a:bodyPr wrap="square" rtlCol="0" anchor="ctr"/>
+          <a:lstStyle/>
+          <a:p>
+            <a:pPr algn="r" indent="0" marL="0">
+              <a:buNone/>
+            </a:pPr>
+            <a:r>
+              <a:rPr lang="en-US" sz="900" dirty="0">
+                <a:solidFill>
+                  <a:srgbClr val="8A7C68"/>
+                </a:solidFill>
+                <a:latin typeface="Segoe UI" pitchFamily="34" charset="0"/>
+                <a:ea typeface="Segoe UI" pitchFamily="34" charset="-122"/>
+                <a:cs typeface="Segoe UI" pitchFamily="34" charset="-120"/>
+              </a:rPr>
+              <a:t>37</a:t>
+            </a:r>
+            <a:endParaRPr lang="en-US" sz="900" dirty="0"/>
+          </a:p>
+        </p:txBody>
+      </p:sp>
+    </p:spTree>
+  </p:cSld>
+  <p:clrMapOvr>
+    <a:masterClrMapping/>
+  </p:clrMapOvr>
+</p:sld>
+</file>
+
+<file path=ppt/slides/slide38.xml><?xml version="1.0" encoding="utf-8"?>
+<p:sld xmlns:a="http://schemas.openxmlformats.org/drawingml/2006/main" xmlns:r="http://schemas.openxmlformats.org/officeDocument/2006/relationships" xmlns:p="http://schemas.openxmlformats.org/presentationml/2006/main">
+  <p:cSld name="Slide 38">
     <p:bg>
       <p:bgPr>
         <a:solidFill>
@@ -20551,344 +20978,6 @@
       <p:sp>
         <p:nvSpPr>
           <p:cNvPr id="7" name="Text 5"/>
-          <p:cNvSpPr/>
-          <p:nvPr/>
-        </p:nvSpPr>
-        <p:spPr>
-          <a:xfrm>
-            <a:off x="9601200" y="6510528"/>
-            <a:ext cx="2194560" cy="274320"/>
-          </a:xfrm>
-          <a:prstGeom prst="rect">
-            <a:avLst/>
-          </a:prstGeom>
-          <a:noFill/>
-          <a:ln/>
-        </p:spPr>
-        <p:txBody>
-          <a:bodyPr wrap="square" rtlCol="0" anchor="ctr"/>
-          <a:lstStyle/>
-          <a:p>
-            <a:pPr algn="r" indent="0" marL="0">
-              <a:buNone/>
-            </a:pPr>
-            <a:r>
-              <a:rPr lang="en-US" sz="900" dirty="0">
-                <a:solidFill>
-                  <a:srgbClr val="8A7C68"/>
-                </a:solidFill>
-                <a:latin typeface="Segoe UI" pitchFamily="34" charset="0"/>
-                <a:ea typeface="Segoe UI" pitchFamily="34" charset="-122"/>
-                <a:cs typeface="Segoe UI" pitchFamily="34" charset="-120"/>
-              </a:rPr>
-              <a:t>37</a:t>
-            </a:r>
-            <a:endParaRPr lang="en-US" sz="900" dirty="0"/>
-          </a:p>
-        </p:txBody>
-      </p:sp>
-    </p:spTree>
-  </p:cSld>
-  <p:clrMapOvr>
-    <a:masterClrMapping/>
-  </p:clrMapOvr>
-</p:sld>
-</file>
-
-<file path=ppt/slides/slide38.xml><?xml version="1.0" encoding="utf-8"?>
-<p:sld xmlns:a="http://schemas.openxmlformats.org/drawingml/2006/main" xmlns:r="http://schemas.openxmlformats.org/officeDocument/2006/relationships" xmlns:p="http://schemas.openxmlformats.org/presentationml/2006/main">
-  <p:cSld name="Slide 38">
-    <p:bg>
-      <p:bgPr>
-        <a:solidFill>
-          <a:srgbClr val="F3EEE3"/>
-        </a:solidFill>
-      </p:bgPr>
-    </p:bg>
-    <p:spTree>
-      <p:nvGrpSpPr>
-        <p:cNvPr id="1" name=""/>
-        <p:cNvGrpSpPr/>
-        <p:nvPr/>
-      </p:nvGrpSpPr>
-      <p:grpSpPr>
-        <a:xfrm>
-          <a:off x="0" y="0"/>
-          <a:ext cx="0" cy="0"/>
-          <a:chOff x="0" y="0"/>
-          <a:chExt cx="0" cy="0"/>
-        </a:xfrm>
-      </p:grpSpPr>
-      <p:sp>
-        <p:nvSpPr>
-          <p:cNvPr id="2" name="Shape 0"/>
-          <p:cNvSpPr/>
-          <p:nvPr/>
-        </p:nvSpPr>
-        <p:spPr>
-          <a:xfrm>
-            <a:off x="640080" y="411480"/>
-            <a:ext cx="2377440" cy="365760"/>
-          </a:xfrm>
-          <a:prstGeom prst="roundRect">
-            <a:avLst>
-              <a:gd name="adj" fmla="val 50000"/>
-            </a:avLst>
-          </a:prstGeom>
-          <a:solidFill>
-            <a:srgbClr val="E6EFE4"/>
-          </a:solidFill>
-          <a:ln/>
-        </p:spPr>
-      </p:sp>
-      <p:sp>
-        <p:nvSpPr>
-          <p:cNvPr id="3" name="Text 1"/>
-          <p:cNvSpPr/>
-          <p:nvPr/>
-        </p:nvSpPr>
-        <p:spPr>
-          <a:xfrm>
-            <a:off x="640080" y="411480"/>
-            <a:ext cx="2377440" cy="365760"/>
-          </a:xfrm>
-          <a:prstGeom prst="rect">
-            <a:avLst/>
-          </a:prstGeom>
-          <a:noFill/>
-          <a:ln/>
-        </p:spPr>
-        <p:txBody>
-          <a:bodyPr wrap="square" rtlCol="0" anchor="ctr"/>
-          <a:lstStyle/>
-          <a:p>
-            <a:pPr algn="ctr" indent="0" marL="0">
-              <a:buNone/>
-            </a:pPr>
-            <a:r>
-              <a:rPr lang="en-US" sz="1000" b="1" spc="100" kern="0" dirty="0">
-                <a:solidFill>
-                  <a:srgbClr val="386641"/>
-                </a:solidFill>
-                <a:latin typeface="Segoe UI" pitchFamily="34" charset="0"/>
-                <a:ea typeface="Segoe UI" pitchFamily="34" charset="-122"/>
-                <a:cs typeface="Segoe UI" pitchFamily="34" charset="-120"/>
-              </a:rPr>
-              <a:t>BASE DE DONNÉES</a:t>
-            </a:r>
-            <a:endParaRPr lang="en-US" sz="1000" dirty="0"/>
-          </a:p>
-        </p:txBody>
-      </p:sp>
-      <p:sp>
-        <p:nvSpPr>
-          <p:cNvPr id="4" name="Text 2"/>
-          <p:cNvSpPr/>
-          <p:nvPr/>
-        </p:nvSpPr>
-        <p:spPr>
-          <a:xfrm>
-            <a:off x="640080" y="868680"/>
-            <a:ext cx="10515600" cy="548640"/>
-          </a:xfrm>
-          <a:prstGeom prst="rect">
-            <a:avLst/>
-          </a:prstGeom>
-          <a:noFill/>
-          <a:ln/>
-        </p:spPr>
-        <p:txBody>
-          <a:bodyPr wrap="square" rtlCol="0" anchor="ctr"/>
-          <a:lstStyle/>
-          <a:p>
-            <a:pPr indent="0" marL="0">
-              <a:buNone/>
-            </a:pPr>
-            <a:r>
-              <a:rPr lang="en-US" sz="2400" b="1" dirty="0">
-                <a:solidFill>
-                  <a:srgbClr val="1B1F3B"/>
-                </a:solidFill>
-                <a:latin typeface="Georgia" pitchFamily="34" charset="0"/>
-                <a:ea typeface="Georgia" pitchFamily="34" charset="-122"/>
-                <a:cs typeface="Georgia" pitchFamily="34" charset="-120"/>
-              </a:rPr>
-              <a:t>Fondations</a:t>
-            </a:r>
-            <a:endParaRPr lang="en-US" sz="2400" dirty="0"/>
-          </a:p>
-        </p:txBody>
-      </p:sp>
-      <p:sp>
-        <p:nvSpPr>
-          <p:cNvPr id="5" name="Shape 3"/>
-          <p:cNvSpPr/>
-          <p:nvPr/>
-        </p:nvSpPr>
-        <p:spPr>
-          <a:xfrm>
-            <a:off x="640080" y="1691640"/>
-            <a:ext cx="10881360" cy="1097280"/>
-          </a:xfrm>
-          <a:prstGeom prst="roundRect">
-            <a:avLst>
-              <a:gd name="adj" fmla="val 5000"/>
-            </a:avLst>
-          </a:prstGeom>
-          <a:solidFill>
-            <a:srgbClr val="FFFFFF"/>
-          </a:solidFill>
-          <a:ln w="12700">
-            <a:solidFill>
-              <a:srgbClr val="E4DCCB"/>
-            </a:solidFill>
-            <a:prstDash val="solid"/>
-          </a:ln>
-        </p:spPr>
-      </p:sp>
-      <p:sp>
-        <p:nvSpPr>
-          <p:cNvPr id="6" name="Shape 4"/>
-          <p:cNvSpPr/>
-          <p:nvPr/>
-        </p:nvSpPr>
-        <p:spPr>
-          <a:xfrm>
-            <a:off x="640080" y="1691640"/>
-            <a:ext cx="54864" cy="1097280"/>
-          </a:xfrm>
-          <a:prstGeom prst="rect">
-            <a:avLst/>
-          </a:prstGeom>
-          <a:solidFill>
-            <a:srgbClr val="386641"/>
-          </a:solidFill>
-          <a:ln/>
-        </p:spPr>
-      </p:sp>
-      <p:sp>
-        <p:nvSpPr>
-          <p:cNvPr id="7" name="Text 5"/>
-          <p:cNvSpPr/>
-          <p:nvPr/>
-        </p:nvSpPr>
-        <p:spPr>
-          <a:xfrm>
-            <a:off x="914400" y="1801368"/>
-            <a:ext cx="10332720" cy="365760"/>
-          </a:xfrm>
-          <a:prstGeom prst="rect">
-            <a:avLst/>
-          </a:prstGeom>
-          <a:noFill/>
-          <a:ln/>
-        </p:spPr>
-        <p:txBody>
-          <a:bodyPr wrap="square" rtlCol="0" anchor="ctr"/>
-          <a:lstStyle/>
-          <a:p>
-            <a:pPr indent="0" marL="0">
-              <a:buNone/>
-            </a:pPr>
-            <a:r>
-              <a:rPr lang="en-US" sz="1400" b="1" dirty="0">
-                <a:solidFill>
-                  <a:srgbClr val="1B1F3B"/>
-                </a:solidFill>
-                <a:latin typeface="Segoe UI" pitchFamily="34" charset="0"/>
-                <a:ea typeface="Segoe UI" pitchFamily="34" charset="-122"/>
-                <a:cs typeface="Segoe UI" pitchFamily="34" charset="-120"/>
-              </a:rPr>
-              <a:t>Connexion Vercel / configuration environnement</a:t>
-            </a:r>
-            <a:endParaRPr lang="en-US" sz="1400" dirty="0"/>
-          </a:p>
-        </p:txBody>
-      </p:sp>
-      <p:sp>
-        <p:nvSpPr>
-          <p:cNvPr id="8" name="Text 6"/>
-          <p:cNvSpPr/>
-          <p:nvPr/>
-        </p:nvSpPr>
-        <p:spPr>
-          <a:xfrm>
-            <a:off x="914400" y="2148840"/>
-            <a:ext cx="10332720" cy="594360"/>
-          </a:xfrm>
-          <a:prstGeom prst="rect">
-            <a:avLst/>
-          </a:prstGeom>
-          <a:noFill/>
-          <a:ln/>
-        </p:spPr>
-        <p:txBody>
-          <a:bodyPr wrap="square" rtlCol="0" anchor="ctr"/>
-          <a:lstStyle/>
-          <a:p>
-            <a:pPr indent="0" marL="0">
-              <a:lnSpc>
-                <a:spcPts val="1400"/>
-              </a:lnSpc>
-              <a:buNone/>
-            </a:pPr>
-            <a:r>
-              <a:rPr lang="en-US" sz="1100" dirty="0">
-                <a:solidFill>
-                  <a:srgbClr val="8A7C68"/>
-                </a:solidFill>
-                <a:latin typeface="Segoe UI" pitchFamily="34" charset="0"/>
-                <a:ea typeface="Segoe UI" pitchFamily="34" charset="-122"/>
-                <a:cs typeface="Segoe UI" pitchFamily="34" charset="-120"/>
-              </a:rPr>
-              <a:t>Correction de la configuration d'authentification et du SMTP sur l'environnement de production Vercel.</a:t>
-            </a:r>
-            <a:endParaRPr lang="en-US" sz="1100" dirty="0"/>
-          </a:p>
-        </p:txBody>
-      </p:sp>
-      <p:sp>
-        <p:nvSpPr>
-          <p:cNvPr id="9" name="Text 7"/>
-          <p:cNvSpPr/>
-          <p:nvPr/>
-        </p:nvSpPr>
-        <p:spPr>
-          <a:xfrm>
-            <a:off x="365760" y="6510528"/>
-            <a:ext cx="5486400" cy="274320"/>
-          </a:xfrm>
-          <a:prstGeom prst="rect">
-            <a:avLst/>
-          </a:prstGeom>
-          <a:noFill/>
-          <a:ln/>
-        </p:spPr>
-        <p:txBody>
-          <a:bodyPr wrap="square" rtlCol="0" anchor="ctr"/>
-          <a:lstStyle/>
-          <a:p>
-            <a:pPr indent="0" marL="0">
-              <a:buNone/>
-            </a:pPr>
-            <a:r>
-              <a:rPr lang="en-US" sz="900" dirty="0">
-                <a:solidFill>
-                  <a:srgbClr val="8A7C68"/>
-                </a:solidFill>
-                <a:latin typeface="Segoe UI" pitchFamily="34" charset="0"/>
-                <a:ea typeface="Segoe UI" pitchFamily="34" charset="-122"/>
-                <a:cs typeface="Segoe UI" pitchFamily="34" charset="-120"/>
-              </a:rPr>
-              <a:t>Kôji Web — Récapitulatif technique</a:t>
-            </a:r>
-            <a:endParaRPr lang="en-US" sz="900" dirty="0"/>
-          </a:p>
-        </p:txBody>
-      </p:sp>
-      <p:sp>
-        <p:nvSpPr>
-          <p:cNvPr id="10" name="Text 8"/>
           <p:cNvSpPr/>
           <p:nvPr/>
         </p:nvSpPr>
@@ -21051,7 +21140,7 @@
                 <a:ea typeface="Georgia" pitchFamily="34" charset="-122"/>
                 <a:cs typeface="Georgia" pitchFamily="34" charset="-120"/>
               </a:rPr>
-              <a:t>Devis</a:t>
+              <a:t>Fondations</a:t>
             </a:r>
             <a:endParaRPr lang="en-US" sz="2400" dirty="0"/>
           </a:p>
@@ -21137,7 +21226,7 @@
                 <a:ea typeface="Segoe UI" pitchFamily="34" charset="-122"/>
                 <a:cs typeface="Segoe UI" pitchFamily="34" charset="-120"/>
               </a:rPr>
-              <a:t>Migration des devis vers Supabase (table partagée)</a:t>
+              <a:t>Connexion Vercel / configuration environnement</a:t>
             </a:r>
             <a:endParaRPr lang="en-US" sz="1400" dirty="0"/>
           </a:p>
@@ -21179,7 +21268,7 @@
                 <a:ea typeface="Segoe UI" pitchFamily="34" charset="-122"/>
                 <a:cs typeface="Segoe UI" pitchFamily="34" charset="-120"/>
               </a:rPr>
-              <a:t>Les devis créés sur le site web et sur l'application mobile (Firas) vivent désormais dans la même table Supabase 'quotes', avec un mapping bidirectionnel dédié (lib/quote-mapping.js).</a:t>
+              <a:t>Correction de la configuration d'authentification et du SMTP sur l'environnement de production Vercel.</a:t>
             </a:r>
             <a:endParaRPr lang="en-US" sz="1100" dirty="0"/>
           </a:p>
@@ -22111,7 +22200,7 @@
                 <a:ea typeface="Georgia" pitchFamily="34" charset="-122"/>
                 <a:cs typeface="Georgia" pitchFamily="34" charset="-120"/>
               </a:rPr>
-              <a:t>Chantiers</a:t>
+              <a:t>Devis</a:t>
             </a:r>
             <a:endParaRPr lang="en-US" sz="2400" dirty="0"/>
           </a:p>
@@ -22197,7 +22286,7 @@
                 <a:ea typeface="Segoe UI" pitchFamily="34" charset="-122"/>
                 <a:cs typeface="Segoe UI" pitchFamily="34" charset="-120"/>
               </a:rPr>
-              <a:t>Connexion Supabase : chantiers, planning, fournitures</a:t>
+              <a:t>Migration des devis vers Supabase (table partagée)</a:t>
             </a:r>
             <a:endParaRPr lang="en-US" sz="1400" dirty="0"/>
           </a:p>
@@ -22239,7 +22328,7 @@
                 <a:ea typeface="Segoe UI" pitchFamily="34" charset="-122"/>
                 <a:cs typeface="Segoe UI" pitchFamily="34" charset="-120"/>
               </a:rPr>
-              <a:t>Ces trois modules sont branchés sur la base partagée avec l'application mobile ; les comptes utilisateurs sont également partagés entre les deux plateformes.</a:t>
+              <a:t>Les devis créés sur le site web et sur l'application mobile (Firas) vivent désormais dans la même table Supabase 'quotes', avec un mapping bidirectionnel dédié (lib/quote-mapping.js).</a:t>
             </a:r>
             <a:endParaRPr lang="en-US" sz="1100" dirty="0"/>
           </a:p>
@@ -22449,7 +22538,7 @@
                 <a:ea typeface="Georgia" pitchFamily="34" charset="-122"/>
                 <a:cs typeface="Georgia" pitchFamily="34" charset="-120"/>
               </a:rPr>
-              <a:t>Équipe</a:t>
+              <a:t>Chantiers</a:t>
             </a:r>
             <a:endParaRPr lang="en-US" sz="2400" dirty="0"/>
           </a:p>
@@ -22535,7 +22624,7 @@
                 <a:ea typeface="Segoe UI" pitchFamily="34" charset="-122"/>
                 <a:cs typeface="Segoe UI" pitchFamily="34" charset="-120"/>
               </a:rPr>
-              <a:t>Nouvelle donnée : heures contractuelles par ouvrier</a:t>
+              <a:t>Connexion Supabase : chantiers, planning, fournitures</a:t>
             </a:r>
             <a:endParaRPr lang="en-US" sz="1400" dirty="0"/>
           </a:p>
@@ -22577,7 +22666,7 @@
                 <a:ea typeface="Segoe UI" pitchFamily="34" charset="-122"/>
                 <a:cs typeface="Segoe UI" pitchFamily="34" charset="-120"/>
               </a:rPr>
-              <a:t>Ajout d'un paramètre 'heures contractuelles / semaine' (35h par défaut) sur chaque fiche ouvrier, utilisé pour le calcul des écarts.</a:t>
+              <a:t>Ces trois modules sont branchés sur la base partagée avec l'application mobile ; les comptes utilisateurs sont également partagés entre les deux plateformes.</a:t>
             </a:r>
             <a:endParaRPr lang="en-US" sz="1100" dirty="0"/>
           </a:p>
@@ -22787,7 +22876,7 @@
                 <a:ea typeface="Georgia" pitchFamily="34" charset="-122"/>
                 <a:cs typeface="Georgia" pitchFamily="34" charset="-120"/>
               </a:rPr>
-              <a:t>Accueil &amp; stabilité</a:t>
+              <a:t>Équipe</a:t>
             </a:r>
             <a:endParaRPr lang="en-US" sz="2400" dirty="0"/>
           </a:p>
@@ -22873,7 +22962,7 @@
                 <a:ea typeface="Segoe UI" pitchFamily="34" charset="-122"/>
                 <a:cs typeface="Segoe UI" pitchFamily="34" charset="-120"/>
               </a:rPr>
-              <a:t>Nettoyage du backend</a:t>
+              <a:t>Nouvelle donnée : heures contractuelles par ouvrier</a:t>
             </a:r>
             <a:endParaRPr lang="en-US" sz="1400" dirty="0"/>
           </a:p>
@@ -22915,7 +23004,7 @@
                 <a:ea typeface="Segoe UI" pitchFamily="34" charset="-122"/>
                 <a:cs typeface="Segoe UI" pitchFamily="34" charset="-120"/>
               </a:rPr>
-              <a:t>Audit complet des routes serveur : suppression du code mort (module Marketplace), vérification de la cohérence entre données locales et données Supabase sur l'ensemble de l'application.</a:t>
+              <a:t>Ajout d'un paramètre 'heures contractuelles / semaine' (35h par défaut) sur chaque fiche ouvrier, utilisé pour le calcul des écarts.</a:t>
             </a:r>
             <a:endParaRPr lang="en-US" sz="1100" dirty="0"/>
           </a:p>
@@ -23125,7 +23214,7 @@
                 <a:ea typeface="Georgia" pitchFamily="34" charset="-122"/>
                 <a:cs typeface="Georgia" pitchFamily="34" charset="-120"/>
               </a:rPr>
-              <a:t>Maintenance technique</a:t>
+              <a:t>Accueil &amp; stabilité</a:t>
             </a:r>
             <a:endParaRPr lang="en-US" sz="2400" dirty="0"/>
           </a:p>
@@ -23211,7 +23300,7 @@
                 <a:ea typeface="Segoe UI" pitchFamily="34" charset="-122"/>
                 <a:cs typeface="Segoe UI" pitchFamily="34" charset="-120"/>
               </a:rPr>
-              <a:t>Nettoyage approfondi du code</a:t>
+              <a:t>Nettoyage du backend</a:t>
             </a:r>
             <a:endParaRPr lang="en-US" sz="1400" dirty="0"/>
           </a:p>
@@ -23253,7 +23342,7 @@
                 <a:ea typeface="Segoe UI" pitchFamily="34" charset="-122"/>
                 <a:cs typeface="Segoe UI" pitchFamily="34" charset="-120"/>
               </a:rPr>
-              <a:t>Audit complet du projet (pages, routes, fonctions, dépendances) pour repérer tout ce qui n'était plus utilisé ; suppression de 6 pages orphelines (onboarding, welcome, compte, anciennes pages devis en 3 étapes), d'une route de connexion de démonstration, d'un dossier de composants dupliqué obsolète, de plusieurs fonctions inutilisées et d'une dépendance logicielle non utilisée — sans toucher aux fonctionnalités actives.</a:t>
+              <a:t>Audit complet des routes serveur : suppression du code mort (module Marketplace), vérification de la cohérence entre données locales et données Supabase sur l'ensemble de l'application.</a:t>
             </a:r>
             <a:endParaRPr lang="en-US" sz="1100" dirty="0"/>
           </a:p>
@@ -23261,263 +23350,7 @@
       </p:sp>
       <p:sp>
         <p:nvSpPr>
-          <p:cNvPr id="9" name="Shape 7"/>
-          <p:cNvSpPr/>
-          <p:nvPr/>
-        </p:nvSpPr>
-        <p:spPr>
-          <a:xfrm>
-            <a:off x="640080" y="2926080"/>
-            <a:ext cx="10881360" cy="1097280"/>
-          </a:xfrm>
-          <a:prstGeom prst="roundRect">
-            <a:avLst>
-              <a:gd name="adj" fmla="val 5000"/>
-            </a:avLst>
-          </a:prstGeom>
-          <a:solidFill>
-            <a:srgbClr val="FFFFFF"/>
-          </a:solidFill>
-          <a:ln w="12700">
-            <a:solidFill>
-              <a:srgbClr val="E4DCCB"/>
-            </a:solidFill>
-            <a:prstDash val="solid"/>
-          </a:ln>
-        </p:spPr>
-      </p:sp>
-      <p:sp>
-        <p:nvSpPr>
-          <p:cNvPr id="10" name="Shape 8"/>
-          <p:cNvSpPr/>
-          <p:nvPr/>
-        </p:nvSpPr>
-        <p:spPr>
-          <a:xfrm>
-            <a:off x="640080" y="2926080"/>
-            <a:ext cx="54864" cy="1097280"/>
-          </a:xfrm>
-          <a:prstGeom prst="rect">
-            <a:avLst/>
-          </a:prstGeom>
-          <a:solidFill>
-            <a:srgbClr val="386641"/>
-          </a:solidFill>
-          <a:ln/>
-        </p:spPr>
-      </p:sp>
-      <p:sp>
-        <p:nvSpPr>
-          <p:cNvPr id="11" name="Text 9"/>
-          <p:cNvSpPr/>
-          <p:nvPr/>
-        </p:nvSpPr>
-        <p:spPr>
-          <a:xfrm>
-            <a:off x="914400" y="3035808"/>
-            <a:ext cx="10332720" cy="365760"/>
-          </a:xfrm>
-          <a:prstGeom prst="rect">
-            <a:avLst/>
-          </a:prstGeom>
-          <a:noFill/>
-          <a:ln/>
-        </p:spPr>
-        <p:txBody>
-          <a:bodyPr wrap="square" rtlCol="0" anchor="ctr"/>
-          <a:lstStyle/>
-          <a:p>
-            <a:pPr indent="0" marL="0">
-              <a:buNone/>
-            </a:pPr>
-            <a:r>
-              <a:rPr lang="en-US" sz="1400" b="1" dirty="0">
-                <a:solidFill>
-                  <a:srgbClr val="1B1F3B"/>
-                </a:solidFill>
-                <a:latin typeface="Segoe UI" pitchFamily="34" charset="0"/>
-                <a:ea typeface="Segoe UI" pitchFamily="34" charset="-122"/>
-                <a:cs typeface="Segoe UI" pitchFamily="34" charset="-120"/>
-              </a:rPr>
-              <a:t>Suppression de code mort dans la génération de devis</a:t>
-            </a:r>
-            <a:endParaRPr lang="en-US" sz="1400" dirty="0"/>
-          </a:p>
-        </p:txBody>
-      </p:sp>
-      <p:sp>
-        <p:nvSpPr>
-          <p:cNvPr id="12" name="Text 10"/>
-          <p:cNvSpPr/>
-          <p:nvPr/>
-        </p:nvSpPr>
-        <p:spPr>
-          <a:xfrm>
-            <a:off x="914400" y="3383280"/>
-            <a:ext cx="10332720" cy="594360"/>
-          </a:xfrm>
-          <a:prstGeom prst="rect">
-            <a:avLst/>
-          </a:prstGeom>
-          <a:noFill/>
-          <a:ln/>
-        </p:spPr>
-        <p:txBody>
-          <a:bodyPr wrap="square" rtlCol="0" anchor="ctr"/>
-          <a:lstStyle/>
-          <a:p>
-            <a:pPr indent="0" marL="0">
-              <a:lnSpc>
-                <a:spcPts val="1400"/>
-              </a:lnSpc>
-              <a:buNone/>
-            </a:pPr>
-            <a:r>
-              <a:rPr lang="en-US" sz="1100" dirty="0">
-                <a:solidFill>
-                  <a:srgbClr val="8A7C68"/>
-                </a:solidFill>
-                <a:latin typeface="Segoe UI" pitchFamily="34" charset="0"/>
-                <a:ea typeface="Segoe UI" pitchFamily="34" charset="-122"/>
-                <a:cs typeface="Segoe UI" pitchFamily="34" charset="-120"/>
-              </a:rPr>
-              <a:t>Un ancien générateur de devis PDF, devenu inaccessible après une précédente refonte (code jamais exécuté), a été retiré du fichier technique de génération de documents.</a:t>
-            </a:r>
-            <a:endParaRPr lang="en-US" sz="1100" dirty="0"/>
-          </a:p>
-        </p:txBody>
-      </p:sp>
-      <p:sp>
-        <p:nvSpPr>
-          <p:cNvPr id="13" name="Shape 11"/>
-          <p:cNvSpPr/>
-          <p:nvPr/>
-        </p:nvSpPr>
-        <p:spPr>
-          <a:xfrm>
-            <a:off x="640080" y="4160520"/>
-            <a:ext cx="10881360" cy="1097280"/>
-          </a:xfrm>
-          <a:prstGeom prst="roundRect">
-            <a:avLst>
-              <a:gd name="adj" fmla="val 5000"/>
-            </a:avLst>
-          </a:prstGeom>
-          <a:solidFill>
-            <a:srgbClr val="FFFFFF"/>
-          </a:solidFill>
-          <a:ln w="12700">
-            <a:solidFill>
-              <a:srgbClr val="E4DCCB"/>
-            </a:solidFill>
-            <a:prstDash val="solid"/>
-          </a:ln>
-        </p:spPr>
-      </p:sp>
-      <p:sp>
-        <p:nvSpPr>
-          <p:cNvPr id="14" name="Shape 12"/>
-          <p:cNvSpPr/>
-          <p:nvPr/>
-        </p:nvSpPr>
-        <p:spPr>
-          <a:xfrm>
-            <a:off x="640080" y="4160520"/>
-            <a:ext cx="54864" cy="1097280"/>
-          </a:xfrm>
-          <a:prstGeom prst="rect">
-            <a:avLst/>
-          </a:prstGeom>
-          <a:solidFill>
-            <a:srgbClr val="386641"/>
-          </a:solidFill>
-          <a:ln/>
-        </p:spPr>
-      </p:sp>
-      <p:sp>
-        <p:nvSpPr>
-          <p:cNvPr id="15" name="Text 13"/>
-          <p:cNvSpPr/>
-          <p:nvPr/>
-        </p:nvSpPr>
-        <p:spPr>
-          <a:xfrm>
-            <a:off x="914400" y="4270248"/>
-            <a:ext cx="10332720" cy="365760"/>
-          </a:xfrm>
-          <a:prstGeom prst="rect">
-            <a:avLst/>
-          </a:prstGeom>
-          <a:noFill/>
-          <a:ln/>
-        </p:spPr>
-        <p:txBody>
-          <a:bodyPr wrap="square" rtlCol="0" anchor="ctr"/>
-          <a:lstStyle/>
-          <a:p>
-            <a:pPr indent="0" marL="0">
-              <a:buNone/>
-            </a:pPr>
-            <a:r>
-              <a:rPr lang="en-US" sz="1400" b="1" dirty="0">
-                <a:solidFill>
-                  <a:srgbClr val="1B1F3B"/>
-                </a:solidFill>
-                <a:latin typeface="Segoe UI" pitchFamily="34" charset="0"/>
-                <a:ea typeface="Segoe UI" pitchFamily="34" charset="-122"/>
-                <a:cs typeface="Segoe UI" pitchFamily="34" charset="-120"/>
-              </a:rPr>
-              <a:t>Suppression de code mort dans l'export Word des devis</a:t>
-            </a:r>
-            <a:endParaRPr lang="en-US" sz="1400" dirty="0"/>
-          </a:p>
-        </p:txBody>
-      </p:sp>
-      <p:sp>
-        <p:nvSpPr>
-          <p:cNvPr id="16" name="Text 14"/>
-          <p:cNvSpPr/>
-          <p:nvPr/>
-        </p:nvSpPr>
-        <p:spPr>
-          <a:xfrm>
-            <a:off x="914400" y="4617720"/>
-            <a:ext cx="10332720" cy="594360"/>
-          </a:xfrm>
-          <a:prstGeom prst="rect">
-            <a:avLst/>
-          </a:prstGeom>
-          <a:noFill/>
-          <a:ln/>
-        </p:spPr>
-        <p:txBody>
-          <a:bodyPr wrap="square" rtlCol="0" anchor="ctr"/>
-          <a:lstStyle/>
-          <a:p>
-            <a:pPr indent="0" marL="0">
-              <a:lnSpc>
-                <a:spcPts val="1400"/>
-              </a:lnSpc>
-              <a:buNone/>
-            </a:pPr>
-            <a:r>
-              <a:rPr lang="en-US" sz="1100" dirty="0">
-                <a:solidFill>
-                  <a:srgbClr val="8A7C68"/>
-                </a:solidFill>
-                <a:latin typeface="Segoe UI" pitchFamily="34" charset="0"/>
-                <a:ea typeface="Segoe UI" pitchFamily="34" charset="-122"/>
-                <a:cs typeface="Segoe UI" pitchFamily="34" charset="-120"/>
-              </a:rPr>
-              <a:t>Un second bloc de génération de document, devenu inaccessible après une précédente refonte (jamais exécuté), a été retiré du fichier technique de génération de documents.</a:t>
-            </a:r>
-            <a:endParaRPr lang="en-US" sz="1100" dirty="0"/>
-          </a:p>
-        </p:txBody>
-      </p:sp>
-      <p:sp>
-        <p:nvSpPr>
-          <p:cNvPr id="17" name="Text 15"/>
+          <p:cNvPr id="9" name="Text 7"/>
           <p:cNvSpPr/>
           <p:nvPr/>
         </p:nvSpPr>
@@ -23556,7 +23389,7 @@
       </p:sp>
       <p:sp>
         <p:nvSpPr>
-          <p:cNvPr id="18" name="Text 16"/>
+          <p:cNvPr id="10" name="Text 8"/>
           <p:cNvSpPr/>
           <p:nvPr/>
         </p:nvSpPr>
@@ -23719,7 +23552,7 @@
                 <a:ea typeface="Georgia" pitchFamily="34" charset="-122"/>
                 <a:cs typeface="Georgia" pitchFamily="34" charset="-120"/>
               </a:rPr>
-              <a:t>Sécurité</a:t>
+              <a:t>Maintenance technique</a:t>
             </a:r>
             <a:endParaRPr lang="en-US" sz="2400" dirty="0"/>
           </a:p>
@@ -23805,7 +23638,7 @@
                 <a:ea typeface="Segoe UI" pitchFamily="34" charset="-122"/>
                 <a:cs typeface="Segoe UI" pitchFamily="34" charset="-120"/>
               </a:rPr>
-              <a:t>Base de données partagée verrouillée</a:t>
+              <a:t>Nettoyage approfondi du code</a:t>
             </a:r>
             <a:endParaRPr lang="en-US" sz="1400" dirty="0"/>
           </a:p>
@@ -23847,7 +23680,7 @@
                 <a:ea typeface="Segoe UI" pitchFamily="34" charset="-122"/>
                 <a:cs typeface="Segoe UI" pitchFamily="34" charset="-120"/>
               </a:rPr>
-              <a:t>La table contenant l'essentiel des données de l'application était lisible par n'importe qui sur internet avec la simple clé publique du site, sans connexion. L'application y accède désormais avec une clé privée réservée au serveur, ce qui permet de fermer complètement l'accès public sans rien casser.</a:t>
+              <a:t>Audit complet du projet (pages, routes, fonctions, dépendances) pour repérer tout ce qui n'était plus utilisé ; suppression de 6 pages orphelines (onboarding, welcome, compte, anciennes pages devis en 3 étapes), d'une route de connexion de démonstration, d'un dossier de composants dupliqué obsolète, de plusieurs fonctions inutilisées et d'une dépendance logicielle non utilisée — sans toucher aux fonctionnalités actives.</a:t>
             </a:r>
             <a:endParaRPr lang="en-US" sz="1100" dirty="0"/>
           </a:p>
@@ -23933,7 +23766,7 @@
                 <a:ea typeface="Segoe UI" pitchFamily="34" charset="-122"/>
                 <a:cs typeface="Segoe UI" pitchFamily="34" charset="-120"/>
               </a:rPr>
-              <a:t>Fichier de base de données retiré du dépôt Git</a:t>
+              <a:t>Suppression de code mort dans la génération de devis</a:t>
             </a:r>
             <a:endParaRPr lang="en-US" sz="1400" dirty="0"/>
           </a:p>
@@ -23975,7 +23808,7 @@
                 <a:ea typeface="Segoe UI" pitchFamily="34" charset="-122"/>
                 <a:cs typeface="Segoe UI" pitchFamily="34" charset="-120"/>
               </a:rPr>
-              <a:t>Un fichier contenant une copie complète de la base de données de développement, avec des mots de passe réels en clair, était suivi par Git depuis plusieurs mois. Retiré du suivi et exclu définitivement.</a:t>
+              <a:t>Un ancien générateur de devis PDF, devenu inaccessible après une précédente refonte (code jamais exécuté), a été retiré du fichier technique de génération de documents.</a:t>
             </a:r>
             <a:endParaRPr lang="en-US" sz="1100" dirty="0"/>
           </a:p>
@@ -24061,7 +23894,7 @@
                 <a:ea typeface="Segoe UI" pitchFamily="34" charset="-122"/>
                 <a:cs typeface="Segoe UI" pitchFamily="34" charset="-120"/>
               </a:rPr>
-              <a:t>Verrouillage de la base partagée écrit dans le script d'installation</a:t>
+              <a:t>Suppression de code mort dans l'export Word des devis</a:t>
             </a:r>
             <a:endParaRPr lang="en-US" sz="1400" dirty="0"/>
           </a:p>
@@ -24103,7 +23936,7 @@
                 <a:ea typeface="Segoe UI" pitchFamily="34" charset="-122"/>
                 <a:cs typeface="Segoe UI" pitchFamily="34" charset="-120"/>
               </a:rPr>
-              <a:t>La commande qui ferme complètement l'accès public à la table de données partagée a été ajoutée au script SQL du projet, prête à être exécutée dans le tableau de bord Supabase.</a:t>
+              <a:t>Un second bloc de génération de document, devenu inaccessible après une précédente refonte (jamais exécuté), a été retiré du fichier technique de génération de documents.</a:t>
             </a:r>
             <a:endParaRPr lang="en-US" sz="1100" dirty="0"/>
           </a:p>
@@ -24198,6 +24031,600 @@
 <file path=ppt/slides/slide45.xml><?xml version="1.0" encoding="utf-8"?>
 <p:sld xmlns:a="http://schemas.openxmlformats.org/drawingml/2006/main" xmlns:r="http://schemas.openxmlformats.org/officeDocument/2006/relationships" xmlns:p="http://schemas.openxmlformats.org/presentationml/2006/main">
   <p:cSld name="Slide 45">
+    <p:bg>
+      <p:bgPr>
+        <a:solidFill>
+          <a:srgbClr val="F3EEE3"/>
+        </a:solidFill>
+      </p:bgPr>
+    </p:bg>
+    <p:spTree>
+      <p:nvGrpSpPr>
+        <p:cNvPr id="1" name=""/>
+        <p:cNvGrpSpPr/>
+        <p:nvPr/>
+      </p:nvGrpSpPr>
+      <p:grpSpPr>
+        <a:xfrm>
+          <a:off x="0" y="0"/>
+          <a:ext cx="0" cy="0"/>
+          <a:chOff x="0" y="0"/>
+          <a:chExt cx="0" cy="0"/>
+        </a:xfrm>
+      </p:grpSpPr>
+      <p:sp>
+        <p:nvSpPr>
+          <p:cNvPr id="2" name="Shape 0"/>
+          <p:cNvSpPr/>
+          <p:nvPr/>
+        </p:nvSpPr>
+        <p:spPr>
+          <a:xfrm>
+            <a:off x="640080" y="411480"/>
+            <a:ext cx="2377440" cy="365760"/>
+          </a:xfrm>
+          <a:prstGeom prst="roundRect">
+            <a:avLst>
+              <a:gd name="adj" fmla="val 50000"/>
+            </a:avLst>
+          </a:prstGeom>
+          <a:solidFill>
+            <a:srgbClr val="E6EFE4"/>
+          </a:solidFill>
+          <a:ln/>
+        </p:spPr>
+      </p:sp>
+      <p:sp>
+        <p:nvSpPr>
+          <p:cNvPr id="3" name="Text 1"/>
+          <p:cNvSpPr/>
+          <p:nvPr/>
+        </p:nvSpPr>
+        <p:spPr>
+          <a:xfrm>
+            <a:off x="640080" y="411480"/>
+            <a:ext cx="2377440" cy="365760"/>
+          </a:xfrm>
+          <a:prstGeom prst="rect">
+            <a:avLst/>
+          </a:prstGeom>
+          <a:noFill/>
+          <a:ln/>
+        </p:spPr>
+        <p:txBody>
+          <a:bodyPr wrap="square" rtlCol="0" anchor="ctr"/>
+          <a:lstStyle/>
+          <a:p>
+            <a:pPr algn="ctr" indent="0" marL="0">
+              <a:buNone/>
+            </a:pPr>
+            <a:r>
+              <a:rPr lang="en-US" sz="1000" b="1" spc="100" kern="0" dirty="0">
+                <a:solidFill>
+                  <a:srgbClr val="386641"/>
+                </a:solidFill>
+                <a:latin typeface="Segoe UI" pitchFamily="34" charset="0"/>
+                <a:ea typeface="Segoe UI" pitchFamily="34" charset="-122"/>
+                <a:cs typeface="Segoe UI" pitchFamily="34" charset="-120"/>
+              </a:rPr>
+              <a:t>BASE DE DONNÉES</a:t>
+            </a:r>
+            <a:endParaRPr lang="en-US" sz="1000" dirty="0"/>
+          </a:p>
+        </p:txBody>
+      </p:sp>
+      <p:sp>
+        <p:nvSpPr>
+          <p:cNvPr id="4" name="Text 2"/>
+          <p:cNvSpPr/>
+          <p:nvPr/>
+        </p:nvSpPr>
+        <p:spPr>
+          <a:xfrm>
+            <a:off x="640080" y="868680"/>
+            <a:ext cx="10515600" cy="548640"/>
+          </a:xfrm>
+          <a:prstGeom prst="rect">
+            <a:avLst/>
+          </a:prstGeom>
+          <a:noFill/>
+          <a:ln/>
+        </p:spPr>
+        <p:txBody>
+          <a:bodyPr wrap="square" rtlCol="0" anchor="ctr"/>
+          <a:lstStyle/>
+          <a:p>
+            <a:pPr indent="0" marL="0">
+              <a:buNone/>
+            </a:pPr>
+            <a:r>
+              <a:rPr lang="en-US" sz="2400" b="1" dirty="0">
+                <a:solidFill>
+                  <a:srgbClr val="1B1F3B"/>
+                </a:solidFill>
+                <a:latin typeface="Georgia" pitchFamily="34" charset="0"/>
+                <a:ea typeface="Georgia" pitchFamily="34" charset="-122"/>
+                <a:cs typeface="Georgia" pitchFamily="34" charset="-120"/>
+              </a:rPr>
+              <a:t>Sécurité</a:t>
+            </a:r>
+            <a:endParaRPr lang="en-US" sz="2400" dirty="0"/>
+          </a:p>
+        </p:txBody>
+      </p:sp>
+      <p:sp>
+        <p:nvSpPr>
+          <p:cNvPr id="5" name="Shape 3"/>
+          <p:cNvSpPr/>
+          <p:nvPr/>
+        </p:nvSpPr>
+        <p:spPr>
+          <a:xfrm>
+            <a:off x="640080" y="1691640"/>
+            <a:ext cx="10881360" cy="1097280"/>
+          </a:xfrm>
+          <a:prstGeom prst="roundRect">
+            <a:avLst>
+              <a:gd name="adj" fmla="val 5000"/>
+            </a:avLst>
+          </a:prstGeom>
+          <a:solidFill>
+            <a:srgbClr val="FFFFFF"/>
+          </a:solidFill>
+          <a:ln w="12700">
+            <a:solidFill>
+              <a:srgbClr val="E4DCCB"/>
+            </a:solidFill>
+            <a:prstDash val="solid"/>
+          </a:ln>
+        </p:spPr>
+      </p:sp>
+      <p:sp>
+        <p:nvSpPr>
+          <p:cNvPr id="6" name="Shape 4"/>
+          <p:cNvSpPr/>
+          <p:nvPr/>
+        </p:nvSpPr>
+        <p:spPr>
+          <a:xfrm>
+            <a:off x="640080" y="1691640"/>
+            <a:ext cx="54864" cy="1097280"/>
+          </a:xfrm>
+          <a:prstGeom prst="rect">
+            <a:avLst/>
+          </a:prstGeom>
+          <a:solidFill>
+            <a:srgbClr val="386641"/>
+          </a:solidFill>
+          <a:ln/>
+        </p:spPr>
+      </p:sp>
+      <p:sp>
+        <p:nvSpPr>
+          <p:cNvPr id="7" name="Text 5"/>
+          <p:cNvSpPr/>
+          <p:nvPr/>
+        </p:nvSpPr>
+        <p:spPr>
+          <a:xfrm>
+            <a:off x="914400" y="1801368"/>
+            <a:ext cx="10332720" cy="365760"/>
+          </a:xfrm>
+          <a:prstGeom prst="rect">
+            <a:avLst/>
+          </a:prstGeom>
+          <a:noFill/>
+          <a:ln/>
+        </p:spPr>
+        <p:txBody>
+          <a:bodyPr wrap="square" rtlCol="0" anchor="ctr"/>
+          <a:lstStyle/>
+          <a:p>
+            <a:pPr indent="0" marL="0">
+              <a:buNone/>
+            </a:pPr>
+            <a:r>
+              <a:rPr lang="en-US" sz="1400" b="1" dirty="0">
+                <a:solidFill>
+                  <a:srgbClr val="1B1F3B"/>
+                </a:solidFill>
+                <a:latin typeface="Segoe UI" pitchFamily="34" charset="0"/>
+                <a:ea typeface="Segoe UI" pitchFamily="34" charset="-122"/>
+                <a:cs typeface="Segoe UI" pitchFamily="34" charset="-120"/>
+              </a:rPr>
+              <a:t>Base de données partagée verrouillée</a:t>
+            </a:r>
+            <a:endParaRPr lang="en-US" sz="1400" dirty="0"/>
+          </a:p>
+        </p:txBody>
+      </p:sp>
+      <p:sp>
+        <p:nvSpPr>
+          <p:cNvPr id="8" name="Text 6"/>
+          <p:cNvSpPr/>
+          <p:nvPr/>
+        </p:nvSpPr>
+        <p:spPr>
+          <a:xfrm>
+            <a:off x="914400" y="2148840"/>
+            <a:ext cx="10332720" cy="594360"/>
+          </a:xfrm>
+          <a:prstGeom prst="rect">
+            <a:avLst/>
+          </a:prstGeom>
+          <a:noFill/>
+          <a:ln/>
+        </p:spPr>
+        <p:txBody>
+          <a:bodyPr wrap="square" rtlCol="0" anchor="ctr"/>
+          <a:lstStyle/>
+          <a:p>
+            <a:pPr indent="0" marL="0">
+              <a:lnSpc>
+                <a:spcPts val="1400"/>
+              </a:lnSpc>
+              <a:buNone/>
+            </a:pPr>
+            <a:r>
+              <a:rPr lang="en-US" sz="1100" dirty="0">
+                <a:solidFill>
+                  <a:srgbClr val="8A7C68"/>
+                </a:solidFill>
+                <a:latin typeface="Segoe UI" pitchFamily="34" charset="0"/>
+                <a:ea typeface="Segoe UI" pitchFamily="34" charset="-122"/>
+                <a:cs typeface="Segoe UI" pitchFamily="34" charset="-120"/>
+              </a:rPr>
+              <a:t>La table contenant l'essentiel des données de l'application était lisible par n'importe qui sur internet avec la simple clé publique du site, sans connexion. L'application y accède désormais avec une clé privée réservée au serveur, ce qui permet de fermer complètement l'accès public sans rien casser.</a:t>
+            </a:r>
+            <a:endParaRPr lang="en-US" sz="1100" dirty="0"/>
+          </a:p>
+        </p:txBody>
+      </p:sp>
+      <p:sp>
+        <p:nvSpPr>
+          <p:cNvPr id="9" name="Shape 7"/>
+          <p:cNvSpPr/>
+          <p:nvPr/>
+        </p:nvSpPr>
+        <p:spPr>
+          <a:xfrm>
+            <a:off x="640080" y="2926080"/>
+            <a:ext cx="10881360" cy="1097280"/>
+          </a:xfrm>
+          <a:prstGeom prst="roundRect">
+            <a:avLst>
+              <a:gd name="adj" fmla="val 5000"/>
+            </a:avLst>
+          </a:prstGeom>
+          <a:solidFill>
+            <a:srgbClr val="FFFFFF"/>
+          </a:solidFill>
+          <a:ln w="12700">
+            <a:solidFill>
+              <a:srgbClr val="E4DCCB"/>
+            </a:solidFill>
+            <a:prstDash val="solid"/>
+          </a:ln>
+        </p:spPr>
+      </p:sp>
+      <p:sp>
+        <p:nvSpPr>
+          <p:cNvPr id="10" name="Shape 8"/>
+          <p:cNvSpPr/>
+          <p:nvPr/>
+        </p:nvSpPr>
+        <p:spPr>
+          <a:xfrm>
+            <a:off x="640080" y="2926080"/>
+            <a:ext cx="54864" cy="1097280"/>
+          </a:xfrm>
+          <a:prstGeom prst="rect">
+            <a:avLst/>
+          </a:prstGeom>
+          <a:solidFill>
+            <a:srgbClr val="386641"/>
+          </a:solidFill>
+          <a:ln/>
+        </p:spPr>
+      </p:sp>
+      <p:sp>
+        <p:nvSpPr>
+          <p:cNvPr id="11" name="Text 9"/>
+          <p:cNvSpPr/>
+          <p:nvPr/>
+        </p:nvSpPr>
+        <p:spPr>
+          <a:xfrm>
+            <a:off x="914400" y="3035808"/>
+            <a:ext cx="10332720" cy="365760"/>
+          </a:xfrm>
+          <a:prstGeom prst="rect">
+            <a:avLst/>
+          </a:prstGeom>
+          <a:noFill/>
+          <a:ln/>
+        </p:spPr>
+        <p:txBody>
+          <a:bodyPr wrap="square" rtlCol="0" anchor="ctr"/>
+          <a:lstStyle/>
+          <a:p>
+            <a:pPr indent="0" marL="0">
+              <a:buNone/>
+            </a:pPr>
+            <a:r>
+              <a:rPr lang="en-US" sz="1400" b="1" dirty="0">
+                <a:solidFill>
+                  <a:srgbClr val="1B1F3B"/>
+                </a:solidFill>
+                <a:latin typeface="Segoe UI" pitchFamily="34" charset="0"/>
+                <a:ea typeface="Segoe UI" pitchFamily="34" charset="-122"/>
+                <a:cs typeface="Segoe UI" pitchFamily="34" charset="-120"/>
+              </a:rPr>
+              <a:t>Fichier de base de données retiré du dépôt Git</a:t>
+            </a:r>
+            <a:endParaRPr lang="en-US" sz="1400" dirty="0"/>
+          </a:p>
+        </p:txBody>
+      </p:sp>
+      <p:sp>
+        <p:nvSpPr>
+          <p:cNvPr id="12" name="Text 10"/>
+          <p:cNvSpPr/>
+          <p:nvPr/>
+        </p:nvSpPr>
+        <p:spPr>
+          <a:xfrm>
+            <a:off x="914400" y="3383280"/>
+            <a:ext cx="10332720" cy="594360"/>
+          </a:xfrm>
+          <a:prstGeom prst="rect">
+            <a:avLst/>
+          </a:prstGeom>
+          <a:noFill/>
+          <a:ln/>
+        </p:spPr>
+        <p:txBody>
+          <a:bodyPr wrap="square" rtlCol="0" anchor="ctr"/>
+          <a:lstStyle/>
+          <a:p>
+            <a:pPr indent="0" marL="0">
+              <a:lnSpc>
+                <a:spcPts val="1400"/>
+              </a:lnSpc>
+              <a:buNone/>
+            </a:pPr>
+            <a:r>
+              <a:rPr lang="en-US" sz="1100" dirty="0">
+                <a:solidFill>
+                  <a:srgbClr val="8A7C68"/>
+                </a:solidFill>
+                <a:latin typeface="Segoe UI" pitchFamily="34" charset="0"/>
+                <a:ea typeface="Segoe UI" pitchFamily="34" charset="-122"/>
+                <a:cs typeface="Segoe UI" pitchFamily="34" charset="-120"/>
+              </a:rPr>
+              <a:t>Un fichier contenant une copie complète de la base de données de développement, avec des mots de passe réels en clair, était suivi par Git depuis plusieurs mois. Retiré du suivi et exclu définitivement.</a:t>
+            </a:r>
+            <a:endParaRPr lang="en-US" sz="1100" dirty="0"/>
+          </a:p>
+        </p:txBody>
+      </p:sp>
+      <p:sp>
+        <p:nvSpPr>
+          <p:cNvPr id="13" name="Shape 11"/>
+          <p:cNvSpPr/>
+          <p:nvPr/>
+        </p:nvSpPr>
+        <p:spPr>
+          <a:xfrm>
+            <a:off x="640080" y="4160520"/>
+            <a:ext cx="10881360" cy="1097280"/>
+          </a:xfrm>
+          <a:prstGeom prst="roundRect">
+            <a:avLst>
+              <a:gd name="adj" fmla="val 5000"/>
+            </a:avLst>
+          </a:prstGeom>
+          <a:solidFill>
+            <a:srgbClr val="FFFFFF"/>
+          </a:solidFill>
+          <a:ln w="12700">
+            <a:solidFill>
+              <a:srgbClr val="E4DCCB"/>
+            </a:solidFill>
+            <a:prstDash val="solid"/>
+          </a:ln>
+        </p:spPr>
+      </p:sp>
+      <p:sp>
+        <p:nvSpPr>
+          <p:cNvPr id="14" name="Shape 12"/>
+          <p:cNvSpPr/>
+          <p:nvPr/>
+        </p:nvSpPr>
+        <p:spPr>
+          <a:xfrm>
+            <a:off x="640080" y="4160520"/>
+            <a:ext cx="54864" cy="1097280"/>
+          </a:xfrm>
+          <a:prstGeom prst="rect">
+            <a:avLst/>
+          </a:prstGeom>
+          <a:solidFill>
+            <a:srgbClr val="386641"/>
+          </a:solidFill>
+          <a:ln/>
+        </p:spPr>
+      </p:sp>
+      <p:sp>
+        <p:nvSpPr>
+          <p:cNvPr id="15" name="Text 13"/>
+          <p:cNvSpPr/>
+          <p:nvPr/>
+        </p:nvSpPr>
+        <p:spPr>
+          <a:xfrm>
+            <a:off x="914400" y="4270248"/>
+            <a:ext cx="10332720" cy="365760"/>
+          </a:xfrm>
+          <a:prstGeom prst="rect">
+            <a:avLst/>
+          </a:prstGeom>
+          <a:noFill/>
+          <a:ln/>
+        </p:spPr>
+        <p:txBody>
+          <a:bodyPr wrap="square" rtlCol="0" anchor="ctr"/>
+          <a:lstStyle/>
+          <a:p>
+            <a:pPr indent="0" marL="0">
+              <a:buNone/>
+            </a:pPr>
+            <a:r>
+              <a:rPr lang="en-US" sz="1400" b="1" dirty="0">
+                <a:solidFill>
+                  <a:srgbClr val="1B1F3B"/>
+                </a:solidFill>
+                <a:latin typeface="Segoe UI" pitchFamily="34" charset="0"/>
+                <a:ea typeface="Segoe UI" pitchFamily="34" charset="-122"/>
+                <a:cs typeface="Segoe UI" pitchFamily="34" charset="-120"/>
+              </a:rPr>
+              <a:t>Verrouillage de la base partagée écrit dans le script d'installation</a:t>
+            </a:r>
+            <a:endParaRPr lang="en-US" sz="1400" dirty="0"/>
+          </a:p>
+        </p:txBody>
+      </p:sp>
+      <p:sp>
+        <p:nvSpPr>
+          <p:cNvPr id="16" name="Text 14"/>
+          <p:cNvSpPr/>
+          <p:nvPr/>
+        </p:nvSpPr>
+        <p:spPr>
+          <a:xfrm>
+            <a:off x="914400" y="4617720"/>
+            <a:ext cx="10332720" cy="594360"/>
+          </a:xfrm>
+          <a:prstGeom prst="rect">
+            <a:avLst/>
+          </a:prstGeom>
+          <a:noFill/>
+          <a:ln/>
+        </p:spPr>
+        <p:txBody>
+          <a:bodyPr wrap="square" rtlCol="0" anchor="ctr"/>
+          <a:lstStyle/>
+          <a:p>
+            <a:pPr indent="0" marL="0">
+              <a:lnSpc>
+                <a:spcPts val="1400"/>
+              </a:lnSpc>
+              <a:buNone/>
+            </a:pPr>
+            <a:r>
+              <a:rPr lang="en-US" sz="1100" dirty="0">
+                <a:solidFill>
+                  <a:srgbClr val="8A7C68"/>
+                </a:solidFill>
+                <a:latin typeface="Segoe UI" pitchFamily="34" charset="0"/>
+                <a:ea typeface="Segoe UI" pitchFamily="34" charset="-122"/>
+                <a:cs typeface="Segoe UI" pitchFamily="34" charset="-120"/>
+              </a:rPr>
+              <a:t>La commande qui ferme complètement l'accès public à la table de données partagée a été ajoutée au script SQL du projet, prête à être exécutée dans le tableau de bord Supabase.</a:t>
+            </a:r>
+            <a:endParaRPr lang="en-US" sz="1100" dirty="0"/>
+          </a:p>
+        </p:txBody>
+      </p:sp>
+      <p:sp>
+        <p:nvSpPr>
+          <p:cNvPr id="17" name="Text 15"/>
+          <p:cNvSpPr/>
+          <p:nvPr/>
+        </p:nvSpPr>
+        <p:spPr>
+          <a:xfrm>
+            <a:off x="365760" y="6510528"/>
+            <a:ext cx="5486400" cy="274320"/>
+          </a:xfrm>
+          <a:prstGeom prst="rect">
+            <a:avLst/>
+          </a:prstGeom>
+          <a:noFill/>
+          <a:ln/>
+        </p:spPr>
+        <p:txBody>
+          <a:bodyPr wrap="square" rtlCol="0" anchor="ctr"/>
+          <a:lstStyle/>
+          <a:p>
+            <a:pPr indent="0" marL="0">
+              <a:buNone/>
+            </a:pPr>
+            <a:r>
+              <a:rPr lang="en-US" sz="900" dirty="0">
+                <a:solidFill>
+                  <a:srgbClr val="8A7C68"/>
+                </a:solidFill>
+                <a:latin typeface="Segoe UI" pitchFamily="34" charset="0"/>
+                <a:ea typeface="Segoe UI" pitchFamily="34" charset="-122"/>
+                <a:cs typeface="Segoe UI" pitchFamily="34" charset="-120"/>
+              </a:rPr>
+              <a:t>Kôji Web — Récapitulatif technique</a:t>
+            </a:r>
+            <a:endParaRPr lang="en-US" sz="900" dirty="0"/>
+          </a:p>
+        </p:txBody>
+      </p:sp>
+      <p:sp>
+        <p:nvSpPr>
+          <p:cNvPr id="18" name="Text 16"/>
+          <p:cNvSpPr/>
+          <p:nvPr/>
+        </p:nvSpPr>
+        <p:spPr>
+          <a:xfrm>
+            <a:off x="9601200" y="6510528"/>
+            <a:ext cx="2194560" cy="274320"/>
+          </a:xfrm>
+          <a:prstGeom prst="rect">
+            <a:avLst/>
+          </a:prstGeom>
+          <a:noFill/>
+          <a:ln/>
+        </p:spPr>
+        <p:txBody>
+          <a:bodyPr wrap="square" rtlCol="0" anchor="ctr"/>
+          <a:lstStyle/>
+          <a:p>
+            <a:pPr algn="r" indent="0" marL="0">
+              <a:buNone/>
+            </a:pPr>
+            <a:r>
+              <a:rPr lang="en-US" sz="900" dirty="0">
+                <a:solidFill>
+                  <a:srgbClr val="8A7C68"/>
+                </a:solidFill>
+                <a:latin typeface="Segoe UI" pitchFamily="34" charset="0"/>
+                <a:ea typeface="Segoe UI" pitchFamily="34" charset="-122"/>
+                <a:cs typeface="Segoe UI" pitchFamily="34" charset="-120"/>
+              </a:rPr>
+              <a:t>45</a:t>
+            </a:r>
+            <a:endParaRPr lang="en-US" sz="900" dirty="0"/>
+          </a:p>
+        </p:txBody>
+      </p:sp>
+    </p:spTree>
+  </p:cSld>
+  <p:clrMapOvr>
+    <a:masterClrMapping/>
+  </p:clrMapOvr>
+</p:sld>
+</file>
+
+<file path=ppt/slides/slide46.xml><?xml version="1.0" encoding="utf-8"?>
+<p:sld xmlns:a="http://schemas.openxmlformats.org/drawingml/2006/main" xmlns:r="http://schemas.openxmlformats.org/officeDocument/2006/relationships" xmlns:p="http://schemas.openxmlformats.org/presentationml/2006/main">
+  <p:cSld name="Slide 46">
     <p:bg>
       <p:bgPr>
         <a:solidFill>

--- a/docs/manager-recap/Recap-Koji-Manager.pptx
+++ b/docs/manager-recap/Recap-Koji-Manager.pptx
@@ -9426,7 +9426,135 @@
       </p:sp>
       <p:sp>
         <p:nvSpPr>
-          <p:cNvPr id="9" name="Text 7"/>
+          <p:cNvPr id="9" name="Shape 7"/>
+          <p:cNvSpPr/>
+          <p:nvPr/>
+        </p:nvSpPr>
+        <p:spPr>
+          <a:xfrm>
+            <a:off x="640080" y="2926080"/>
+            <a:ext cx="10881360" cy="1097280"/>
+          </a:xfrm>
+          <a:prstGeom prst="roundRect">
+            <a:avLst>
+              <a:gd name="adj" fmla="val 5000"/>
+            </a:avLst>
+          </a:prstGeom>
+          <a:solidFill>
+            <a:srgbClr val="FFFFFF"/>
+          </a:solidFill>
+          <a:ln w="12700">
+            <a:solidFill>
+              <a:srgbClr val="E4DCCB"/>
+            </a:solidFill>
+            <a:prstDash val="solid"/>
+          </a:ln>
+        </p:spPr>
+      </p:sp>
+      <p:sp>
+        <p:nvSpPr>
+          <p:cNvPr id="10" name="Shape 8"/>
+          <p:cNvSpPr/>
+          <p:nvPr/>
+        </p:nvSpPr>
+        <p:spPr>
+          <a:xfrm>
+            <a:off x="640080" y="2926080"/>
+            <a:ext cx="54864" cy="1097280"/>
+          </a:xfrm>
+          <a:prstGeom prst="rect">
+            <a:avLst/>
+          </a:prstGeom>
+          <a:solidFill>
+            <a:srgbClr val="1D6FE0"/>
+          </a:solidFill>
+          <a:ln/>
+        </p:spPr>
+      </p:sp>
+      <p:sp>
+        <p:nvSpPr>
+          <p:cNvPr id="11" name="Text 9"/>
+          <p:cNvSpPr/>
+          <p:nvPr/>
+        </p:nvSpPr>
+        <p:spPr>
+          <a:xfrm>
+            <a:off x="914400" y="3035808"/>
+            <a:ext cx="10332720" cy="365760"/>
+          </a:xfrm>
+          <a:prstGeom prst="rect">
+            <a:avLst/>
+          </a:prstGeom>
+          <a:noFill/>
+          <a:ln/>
+        </p:spPr>
+        <p:txBody>
+          <a:bodyPr wrap="square" rtlCol="0" anchor="ctr"/>
+          <a:lstStyle/>
+          <a:p>
+            <a:pPr indent="0" marL="0">
+              <a:buNone/>
+            </a:pPr>
+            <a:r>
+              <a:rPr lang="en-US" sz="1400" b="1" dirty="0">
+                <a:solidFill>
+                  <a:srgbClr val="1B1F3B"/>
+                </a:solidFill>
+                <a:latin typeface="Segoe UI" pitchFamily="34" charset="0"/>
+                <a:ea typeface="Segoe UI" pitchFamily="34" charset="-122"/>
+                <a:cs typeface="Segoe UI" pitchFamily="34" charset="-120"/>
+              </a:rPr>
+              <a:t>Retour vers Factures apres transformation d'un devis</a:t>
+            </a:r>
+            <a:endParaRPr lang="en-US" sz="1400" dirty="0"/>
+          </a:p>
+        </p:txBody>
+      </p:sp>
+      <p:sp>
+        <p:nvSpPr>
+          <p:cNvPr id="12" name="Text 10"/>
+          <p:cNvSpPr/>
+          <p:nvPr/>
+        </p:nvSpPr>
+        <p:spPr>
+          <a:xfrm>
+            <a:off x="914400" y="3383280"/>
+            <a:ext cx="10332720" cy="594360"/>
+          </a:xfrm>
+          <a:prstGeom prst="rect">
+            <a:avLst/>
+          </a:prstGeom>
+          <a:noFill/>
+          <a:ln/>
+        </p:spPr>
+        <p:txBody>
+          <a:bodyPr wrap="square" rtlCol="0" anchor="ctr"/>
+          <a:lstStyle/>
+          <a:p>
+            <a:pPr indent="0" marL="0">
+              <a:lnSpc>
+                <a:spcPts val="1400"/>
+              </a:lnSpc>
+              <a:buNone/>
+            </a:pPr>
+            <a:r>
+              <a:rPr lang="en-US" sz="1100" dirty="0">
+                <a:solidFill>
+                  <a:srgbClr val="8A7C68"/>
+                </a:solidFill>
+                <a:latin typeface="Segoe UI" pitchFamily="34" charset="0"/>
+                <a:ea typeface="Segoe UI" pitchFamily="34" charset="-122"/>
+                <a:cs typeface="Segoe UI" pitchFamily="34" charset="-120"/>
+              </a:rPr>
+              <a:t>Le bouton 'Transformer ce devis en facture' ouvrait directement le PDF dans un nouvel onglet. Il renvoie maintenant vers la page Factures, avec la facture nouvellement créée déjà sélectionnée, pour la télécharger ou l'envoyer depuis cette page plutôt que depuis un PDF isolé.</a:t>
+            </a:r>
+            <a:endParaRPr lang="en-US" sz="1100" dirty="0"/>
+          </a:p>
+        </p:txBody>
+      </p:sp>
+      <p:sp>
+        <p:nvSpPr>
+          <p:cNvPr id="13" name="Text 11"/>
           <p:cNvSpPr/>
           <p:nvPr/>
         </p:nvSpPr>
@@ -9465,7 +9593,7 @@
       </p:sp>
       <p:sp>
         <p:nvSpPr>
-          <p:cNvPr id="10" name="Text 8"/>
+          <p:cNvPr id="14" name="Text 12"/>
           <p:cNvSpPr/>
           <p:nvPr/>
         </p:nvSpPr>
@@ -10732,7 +10860,7 @@
                 <a:ea typeface="Georgia" pitchFamily="34" charset="-122"/>
                 <a:cs typeface="Georgia" pitchFamily="34" charset="-120"/>
               </a:rPr>
-              <a:t>102</a:t>
+              <a:t>103</a:t>
             </a:r>
             <a:endParaRPr lang="en-US" sz="3200" dirty="0"/>
           </a:p>
@@ -10837,7 +10965,7 @@
                 <a:ea typeface="Georgia" pitchFamily="34" charset="-122"/>
                 <a:cs typeface="Georgia" pitchFamily="34" charset="-120"/>
               </a:rPr>
-              <a:t>49</a:t>
+              <a:t>50</a:t>
             </a:r>
             <a:endParaRPr lang="en-US" sz="3200" dirty="0"/>
           </a:p>
@@ -16699,7 +16827,7 @@
                 <a:ea typeface="Segoe UI" pitchFamily="34" charset="-122"/>
                 <a:cs typeface="Segoe UI" pitchFamily="34" charset="-120"/>
               </a:rPr>
-              <a:t>49 mise(s) à jour</a:t>
+              <a:t>50 mise(s) à jour</a:t>
             </a:r>
             <a:endParaRPr lang="en-US" sz="1200" dirty="0"/>
           </a:p>

--- a/docs/manager-recap/Recap-Koji-Manager.pptx
+++ b/docs/manager-recap/Recap-Koji-Manager.pptx
@@ -51,9 +51,10 @@
     <p:sldId id="299" r:id="rId45"/>
     <p:sldId id="300" r:id="rId46"/>
     <p:sldId id="301" r:id="rId47"/>
+    <p:sldId id="302" r:id="rId48"/>
   </p:sldIdLst>
   <p:notesMasterIdLst>
-    <p:notesMasterId r:id="rId48"/>
+    <p:notesMasterId r:id="rId49"/>
   </p:notesMasterIdLst>
   <p:sldSz cx="12191695" cy="6858000"/>
   <p:notesSz cx="6858000" cy="12191695"/>
@@ -4091,6 +4092,94 @@
             <a:fld id="{F7021451-1387-4CA6-816F-3879F97B5CBC}" type="slidenum">
               <a:rPr lang="en-US"/>
               <a:t>46</a:t>
+            </a:fld>
+            <a:endParaRPr lang="en-US"/>
+          </a:p>
+        </p:txBody>
+      </p:sp>
+    </p:spTree>
+    <p:extLst>
+      <p:ext uri="{BB962C8B-B14F-4D97-AF65-F5344CB8AC3E}">
+        <p14:creationId xmlns:p14="http://schemas.microsoft.com/office/powerpoint/2010/main" val="1024086991"/>
+      </p:ext>
+    </p:extLst>
+  </p:cSld>
+  <p:clrMapOvr>
+    <a:masterClrMapping/>
+  </p:clrMapOvr>
+</p:notes>
+</file>
+
+<file path=ppt/notesSlides/notesSlide47.xml><?xml version="1.0" encoding="utf-8"?>
+<p:notes xmlns:a="http://schemas.openxmlformats.org/drawingml/2006/main" xmlns:r="http://schemas.openxmlformats.org/officeDocument/2006/relationships" xmlns:p="http://schemas.openxmlformats.org/presentationml/2006/main">
+  <p:cSld>
+    <p:spTree>
+      <p:nvGrpSpPr>
+        <p:cNvPr id="1" name=""/>
+        <p:cNvGrpSpPr/>
+        <p:nvPr/>
+      </p:nvGrpSpPr>
+      <p:grpSpPr>
+        <a:xfrm>
+          <a:off x="0" y="0"/>
+          <a:ext cx="0" cy="0"/>
+          <a:chOff x="0" y="0"/>
+          <a:chExt cx="0" cy="0"/>
+        </a:xfrm>
+      </p:grpSpPr>
+      <p:sp>
+        <p:nvSpPr>
+          <p:cNvPr id="2" name="Slide Image Placeholder 1"/>
+          <p:cNvSpPr>
+            <a:spLocks noGrp="1" noRot="1" noChangeAspect="1"/>
+          </p:cNvSpPr>
+          <p:nvPr>
+            <p:ph type="sldImg"/>
+          </p:nvPr>
+        </p:nvSpPr>
+        <p:spPr/>
+      </p:sp>
+      <p:sp>
+        <p:nvSpPr>
+          <p:cNvPr id="3" name="Notes Placeholder 2"/>
+          <p:cNvSpPr>
+            <a:spLocks noGrp="1"/>
+          </p:cNvSpPr>
+          <p:nvPr>
+            <p:ph type="body" idx="1"/>
+          </p:nvPr>
+        </p:nvSpPr>
+        <p:spPr/>
+        <p:txBody>
+          <a:bodyPr/>
+          <a:lstStyle/>
+          <a:p>
+            <a:r>
+              <a:rPr lang="en-US" dirty="0"/>
+              <a:t/>
+            </a:r>
+            <a:endParaRPr lang="en-US" dirty="0"/>
+          </a:p>
+        </p:txBody>
+      </p:sp>
+      <p:sp>
+        <p:nvSpPr>
+          <p:cNvPr id="4" name="Slide Number Placeholder 3"/>
+          <p:cNvSpPr>
+            <a:spLocks noGrp="1"/>
+          </p:cNvSpPr>
+          <p:nvPr>
+            <p:ph type="sldNum" sz="quarter" idx="10"/>
+          </p:nvPr>
+        </p:nvSpPr>
+        <p:spPr/>
+        <p:txBody>
+          <a:bodyPr/>
+          <a:lstStyle/>
+          <a:p>
+            <a:fld id="{F7021451-1387-4CA6-816F-3879F97B5CBC}" type="slidenum">
+              <a:rPr lang="en-US"/>
+              <a:t>47</a:t>
             </a:fld>
             <a:endParaRPr lang="en-US"/>
           </a:p>
@@ -9554,7 +9643,135 @@
       </p:sp>
       <p:sp>
         <p:nvSpPr>
-          <p:cNvPr id="13" name="Text 11"/>
+          <p:cNvPr id="13" name="Shape 11"/>
+          <p:cNvSpPr/>
+          <p:nvPr/>
+        </p:nvSpPr>
+        <p:spPr>
+          <a:xfrm>
+            <a:off x="640080" y="4160520"/>
+            <a:ext cx="10881360" cy="1097280"/>
+          </a:xfrm>
+          <a:prstGeom prst="roundRect">
+            <a:avLst>
+              <a:gd name="adj" fmla="val 5000"/>
+            </a:avLst>
+          </a:prstGeom>
+          <a:solidFill>
+            <a:srgbClr val="FFFFFF"/>
+          </a:solidFill>
+          <a:ln w="12700">
+            <a:solidFill>
+              <a:srgbClr val="E4DCCB"/>
+            </a:solidFill>
+            <a:prstDash val="solid"/>
+          </a:ln>
+        </p:spPr>
+      </p:sp>
+      <p:sp>
+        <p:nvSpPr>
+          <p:cNvPr id="14" name="Shape 12"/>
+          <p:cNvSpPr/>
+          <p:nvPr/>
+        </p:nvSpPr>
+        <p:spPr>
+          <a:xfrm>
+            <a:off x="640080" y="4160520"/>
+            <a:ext cx="54864" cy="1097280"/>
+          </a:xfrm>
+          <a:prstGeom prst="rect">
+            <a:avLst/>
+          </a:prstGeom>
+          <a:solidFill>
+            <a:srgbClr val="1D6FE0"/>
+          </a:solidFill>
+          <a:ln/>
+        </p:spPr>
+      </p:sp>
+      <p:sp>
+        <p:nvSpPr>
+          <p:cNvPr id="15" name="Text 13"/>
+          <p:cNvSpPr/>
+          <p:nvPr/>
+        </p:nvSpPr>
+        <p:spPr>
+          <a:xfrm>
+            <a:off x="914400" y="4270248"/>
+            <a:ext cx="10332720" cy="365760"/>
+          </a:xfrm>
+          <a:prstGeom prst="rect">
+            <a:avLst/>
+          </a:prstGeom>
+          <a:noFill/>
+          <a:ln/>
+        </p:spPr>
+        <p:txBody>
+          <a:bodyPr wrap="square" rtlCol="0" anchor="ctr"/>
+          <a:lstStyle/>
+          <a:p>
+            <a:pPr indent="0" marL="0">
+              <a:buNone/>
+            </a:pPr>
+            <a:r>
+              <a:rPr lang="en-US" sz="1400" b="1" dirty="0">
+                <a:solidFill>
+                  <a:srgbClr val="1B1F3B"/>
+                </a:solidFill>
+                <a:latin typeface="Segoe UI" pitchFamily="34" charset="0"/>
+                <a:ea typeface="Segoe UI" pitchFamily="34" charset="-122"/>
+                <a:cs typeface="Segoe UI" pitchFamily="34" charset="-120"/>
+              </a:rPr>
+              <a:t>'Devis signés' devient 'Mes factures'</a:t>
+            </a:r>
+            <a:endParaRPr lang="en-US" sz="1400" dirty="0"/>
+          </a:p>
+        </p:txBody>
+      </p:sp>
+      <p:sp>
+        <p:nvSpPr>
+          <p:cNvPr id="16" name="Text 14"/>
+          <p:cNvSpPr/>
+          <p:nvPr/>
+        </p:nvSpPr>
+        <p:spPr>
+          <a:xfrm>
+            <a:off x="914400" y="4617720"/>
+            <a:ext cx="10332720" cy="594360"/>
+          </a:xfrm>
+          <a:prstGeom prst="rect">
+            <a:avLst/>
+          </a:prstGeom>
+          <a:noFill/>
+          <a:ln/>
+        </p:spPr>
+        <p:txBody>
+          <a:bodyPr wrap="square" rtlCol="0" anchor="ctr"/>
+          <a:lstStyle/>
+          <a:p>
+            <a:pPr indent="0" marL="0">
+              <a:lnSpc>
+                <a:spcPts val="1400"/>
+              </a:lnSpc>
+              <a:buNone/>
+            </a:pPr>
+            <a:r>
+              <a:rPr lang="en-US" sz="1100" dirty="0">
+                <a:solidFill>
+                  <a:srgbClr val="8A7C68"/>
+                </a:solidFill>
+                <a:latin typeface="Segoe UI" pitchFamily="34" charset="0"/>
+                <a:ea typeface="Segoe UI" pitchFamily="34" charset="-122"/>
+                <a:cs typeface="Segoe UI" pitchFamily="34" charset="-120"/>
+              </a:rPr>
+              <a:t>Renommage du titre de section et du message d'état vide sur la page Factures pour parler de factures plutôt que de devis.</a:t>
+            </a:r>
+            <a:endParaRPr lang="en-US" sz="1100" dirty="0"/>
+          </a:p>
+        </p:txBody>
+      </p:sp>
+      <p:sp>
+        <p:nvSpPr>
+          <p:cNvPr id="17" name="Text 15"/>
           <p:cNvSpPr/>
           <p:nvPr/>
         </p:nvSpPr>
@@ -9593,7 +9810,7 @@
       </p:sp>
       <p:sp>
         <p:nvSpPr>
-          <p:cNvPr id="14" name="Text 12"/>
+          <p:cNvPr id="18" name="Text 16"/>
           <p:cNvSpPr/>
           <p:nvPr/>
         </p:nvSpPr>
@@ -10860,7 +11077,7 @@
                 <a:ea typeface="Georgia" pitchFamily="34" charset="-122"/>
                 <a:cs typeface="Georgia" pitchFamily="34" charset="-120"/>
               </a:rPr>
-              <a:t>103</a:t>
+              <a:t>106</a:t>
             </a:r>
             <a:endParaRPr lang="en-US" sz="3200" dirty="0"/>
           </a:p>
@@ -10965,7 +11182,7 @@
                 <a:ea typeface="Georgia" pitchFamily="34" charset="-122"/>
                 <a:cs typeface="Georgia" pitchFamily="34" charset="-120"/>
               </a:rPr>
-              <a:t>50</a:t>
+              <a:t>51</a:t>
             </a:r>
             <a:endParaRPr lang="en-US" sz="3200" dirty="0"/>
           </a:p>
@@ -11070,7 +11287,7 @@
                 <a:ea typeface="Georgia" pitchFamily="34" charset="-122"/>
                 <a:cs typeface="Georgia" pitchFamily="34" charset="-120"/>
               </a:rPr>
-              <a:t>42</a:t>
+              <a:t>44</a:t>
             </a:r>
             <a:endParaRPr lang="en-US" sz="3200" dirty="0"/>
           </a:p>
@@ -11618,7 +11835,7 @@
                 <a:ea typeface="Segoe UI" pitchFamily="34" charset="-122"/>
                 <a:cs typeface="Segoe UI" pitchFamily="34" charset="-120"/>
               </a:rPr>
-              <a:t>42 mise(s) à jour</a:t>
+              <a:t>44 mise(s) à jour</a:t>
             </a:r>
             <a:endParaRPr lang="en-US" sz="1200" dirty="0"/>
           </a:p>
@@ -16827,7 +17044,7 @@
                 <a:ea typeface="Segoe UI" pitchFamily="34" charset="-122"/>
                 <a:cs typeface="Segoe UI" pitchFamily="34" charset="-120"/>
               </a:rPr>
-              <a:t>50 mise(s) à jour</a:t>
+              <a:t>51 mise(s) à jour</a:t>
             </a:r>
             <a:endParaRPr lang="en-US" sz="1200" dirty="0"/>
           </a:p>
@@ -20143,7 +20360,135 @@
       </p:sp>
       <p:sp>
         <p:nvSpPr>
-          <p:cNvPr id="9" name="Text 7"/>
+          <p:cNvPr id="9" name="Shape 7"/>
+          <p:cNvSpPr/>
+          <p:nvPr/>
+        </p:nvSpPr>
+        <p:spPr>
+          <a:xfrm>
+            <a:off x="640080" y="2926080"/>
+            <a:ext cx="10881360" cy="1097280"/>
+          </a:xfrm>
+          <a:prstGeom prst="roundRect">
+            <a:avLst>
+              <a:gd name="adj" fmla="val 5000"/>
+            </a:avLst>
+          </a:prstGeom>
+          <a:solidFill>
+            <a:srgbClr val="FFFFFF"/>
+          </a:solidFill>
+          <a:ln w="12700">
+            <a:solidFill>
+              <a:srgbClr val="E4DCCB"/>
+            </a:solidFill>
+            <a:prstDash val="solid"/>
+          </a:ln>
+        </p:spPr>
+      </p:sp>
+      <p:sp>
+        <p:nvSpPr>
+          <p:cNvPr id="10" name="Shape 8"/>
+          <p:cNvSpPr/>
+          <p:nvPr/>
+        </p:nvSpPr>
+        <p:spPr>
+          <a:xfrm>
+            <a:off x="640080" y="2926080"/>
+            <a:ext cx="54864" cy="1097280"/>
+          </a:xfrm>
+          <a:prstGeom prst="rect">
+            <a:avLst/>
+          </a:prstGeom>
+          <a:solidFill>
+            <a:srgbClr val="9A4C1F"/>
+          </a:solidFill>
+          <a:ln/>
+        </p:spPr>
+      </p:sp>
+      <p:sp>
+        <p:nvSpPr>
+          <p:cNvPr id="11" name="Text 9"/>
+          <p:cNvSpPr/>
+          <p:nvPr/>
+        </p:nvSpPr>
+        <p:spPr>
+          <a:xfrm>
+            <a:off x="914400" y="3035808"/>
+            <a:ext cx="10332720" cy="365760"/>
+          </a:xfrm>
+          <a:prstGeom prst="rect">
+            <a:avLst/>
+          </a:prstGeom>
+          <a:noFill/>
+          <a:ln/>
+        </p:spPr>
+        <p:txBody>
+          <a:bodyPr wrap="square" rtlCol="0" anchor="ctr"/>
+          <a:lstStyle/>
+          <a:p>
+            <a:pPr indent="0" marL="0">
+              <a:buNone/>
+            </a:pPr>
+            <a:r>
+              <a:rPr lang="en-US" sz="1400" b="1" dirty="0">
+                <a:solidFill>
+                  <a:srgbClr val="1B1F3B"/>
+                </a:solidFill>
+                <a:latin typeface="Segoe UI" pitchFamily="34" charset="0"/>
+                <a:ea typeface="Segoe UI" pitchFamily="34" charset="-122"/>
+                <a:cs typeface="Segoe UI" pitchFamily="34" charset="-120"/>
+              </a:rPr>
+              <a:t>Fusion des connexions Client et Ouvrier en un seul onglet 'Particulier'</a:t>
+            </a:r>
+            <a:endParaRPr lang="en-US" sz="1400" dirty="0"/>
+          </a:p>
+        </p:txBody>
+      </p:sp>
+      <p:sp>
+        <p:nvSpPr>
+          <p:cNvPr id="12" name="Text 10"/>
+          <p:cNvSpPr/>
+          <p:nvPr/>
+        </p:nvSpPr>
+        <p:spPr>
+          <a:xfrm>
+            <a:off x="914400" y="3383280"/>
+            <a:ext cx="10332720" cy="594360"/>
+          </a:xfrm>
+          <a:prstGeom prst="rect">
+            <a:avLst/>
+          </a:prstGeom>
+          <a:noFill/>
+          <a:ln/>
+        </p:spPr>
+        <p:txBody>
+          <a:bodyPr wrap="square" rtlCol="0" anchor="ctr"/>
+          <a:lstStyle/>
+          <a:p>
+            <a:pPr indent="0" marL="0">
+              <a:lnSpc>
+                <a:spcPts val="1400"/>
+              </a:lnSpc>
+              <a:buNone/>
+            </a:pPr>
+            <a:r>
+              <a:rPr lang="en-US" sz="1100" dirty="0">
+                <a:solidFill>
+                  <a:srgbClr val="8A7C68"/>
+                </a:solidFill>
+                <a:latin typeface="Segoe UI" pitchFamily="34" charset="0"/>
+                <a:ea typeface="Segoe UI" pitchFamily="34" charset="-122"/>
+                <a:cs typeface="Segoe UI" pitchFamily="34" charset="-120"/>
+              </a:rPr>
+              <a:t>La page de connexion avait 3 onglets (Entreprise / Client / Ouvrier). Client et Ouvrier sont désormais réunis dans un seul onglet 'Particulier' : la personne saisit son identifiant une seule fois, et l'application détecte automatiquement s'il s'agit d'un compte client ou d'un compte ouvrier pour l'envoyer vers le bon espace. Les deux vérifications de mot de passe (avec leur limitation anti-force-brute respective) restent distinctes en coulisses, seul le point d'entrée est unifié.</a:t>
+            </a:r>
+            <a:endParaRPr lang="en-US" sz="1100" dirty="0"/>
+          </a:p>
+        </p:txBody>
+      </p:sp>
+      <p:sp>
+        <p:nvSpPr>
+          <p:cNvPr id="13" name="Text 11"/>
           <p:cNvSpPr/>
           <p:nvPr/>
         </p:nvSpPr>
@@ -20182,7 +20527,7 @@
       </p:sp>
       <p:sp>
         <p:nvSpPr>
-          <p:cNvPr id="10" name="Text 8"/>
+          <p:cNvPr id="14" name="Text 12"/>
           <p:cNvSpPr/>
           <p:nvPr/>
         </p:nvSpPr>
@@ -20909,6 +21254,344 @@
     <p:bg>
       <p:bgPr>
         <a:solidFill>
+          <a:srgbClr val="F3EEE3"/>
+        </a:solidFill>
+      </p:bgPr>
+    </p:bg>
+    <p:spTree>
+      <p:nvGrpSpPr>
+        <p:cNvPr id="1" name=""/>
+        <p:cNvGrpSpPr/>
+        <p:nvPr/>
+      </p:nvGrpSpPr>
+      <p:grpSpPr>
+        <a:xfrm>
+          <a:off x="0" y="0"/>
+          <a:ext cx="0" cy="0"/>
+          <a:chOff x="0" y="0"/>
+          <a:chExt cx="0" cy="0"/>
+        </a:xfrm>
+      </p:grpSpPr>
+      <p:sp>
+        <p:nvSpPr>
+          <p:cNvPr id="2" name="Shape 0"/>
+          <p:cNvSpPr/>
+          <p:nvPr/>
+        </p:nvSpPr>
+        <p:spPr>
+          <a:xfrm>
+            <a:off x="640080" y="411480"/>
+            <a:ext cx="2377440" cy="365760"/>
+          </a:xfrm>
+          <a:prstGeom prst="roundRect">
+            <a:avLst>
+              <a:gd name="adj" fmla="val 50000"/>
+            </a:avLst>
+          </a:prstGeom>
+          <a:solidFill>
+            <a:srgbClr val="F5E6DA"/>
+          </a:solidFill>
+          <a:ln/>
+        </p:spPr>
+      </p:sp>
+      <p:sp>
+        <p:nvSpPr>
+          <p:cNvPr id="3" name="Text 1"/>
+          <p:cNvSpPr/>
+          <p:nvPr/>
+        </p:nvSpPr>
+        <p:spPr>
+          <a:xfrm>
+            <a:off x="640080" y="411480"/>
+            <a:ext cx="2377440" cy="365760"/>
+          </a:xfrm>
+          <a:prstGeom prst="rect">
+            <a:avLst/>
+          </a:prstGeom>
+          <a:noFill/>
+          <a:ln/>
+        </p:spPr>
+        <p:txBody>
+          <a:bodyPr wrap="square" rtlCol="0" anchor="ctr"/>
+          <a:lstStyle/>
+          <a:p>
+            <a:pPr algn="ctr" indent="0" marL="0">
+              <a:buNone/>
+            </a:pPr>
+            <a:r>
+              <a:rPr lang="en-US" sz="1000" b="1" spc="100" kern="0" dirty="0">
+                <a:solidFill>
+                  <a:srgbClr val="9A4C1F"/>
+                </a:solidFill>
+                <a:latin typeface="Segoe UI" pitchFamily="34" charset="0"/>
+                <a:ea typeface="Segoe UI" pitchFamily="34" charset="-122"/>
+                <a:cs typeface="Segoe UI" pitchFamily="34" charset="-120"/>
+              </a:rPr>
+              <a:t>BACKEND</a:t>
+            </a:r>
+            <a:endParaRPr lang="en-US" sz="1000" dirty="0"/>
+          </a:p>
+        </p:txBody>
+      </p:sp>
+      <p:sp>
+        <p:nvSpPr>
+          <p:cNvPr id="4" name="Text 2"/>
+          <p:cNvSpPr/>
+          <p:nvPr/>
+        </p:nvSpPr>
+        <p:spPr>
+          <a:xfrm>
+            <a:off x="640080" y="868680"/>
+            <a:ext cx="10515600" cy="548640"/>
+          </a:xfrm>
+          <a:prstGeom prst="rect">
+            <a:avLst/>
+          </a:prstGeom>
+          <a:noFill/>
+          <a:ln/>
+        </p:spPr>
+        <p:txBody>
+          <a:bodyPr wrap="square" rtlCol="0" anchor="ctr"/>
+          <a:lstStyle/>
+          <a:p>
+            <a:pPr indent="0" marL="0">
+              <a:buNone/>
+            </a:pPr>
+            <a:r>
+              <a:rPr lang="en-US" sz="2400" b="1" dirty="0">
+                <a:solidFill>
+                  <a:srgbClr val="1B1F3B"/>
+                </a:solidFill>
+                <a:latin typeface="Georgia" pitchFamily="34" charset="0"/>
+                <a:ea typeface="Georgia" pitchFamily="34" charset="-122"/>
+                <a:cs typeface="Georgia" pitchFamily="34" charset="-120"/>
+              </a:rPr>
+              <a:t>Maintenance technique</a:t>
+            </a:r>
+            <a:endParaRPr lang="en-US" sz="2400" dirty="0"/>
+          </a:p>
+        </p:txBody>
+      </p:sp>
+      <p:sp>
+        <p:nvSpPr>
+          <p:cNvPr id="5" name="Shape 3"/>
+          <p:cNvSpPr/>
+          <p:nvPr/>
+        </p:nvSpPr>
+        <p:spPr>
+          <a:xfrm>
+            <a:off x="640080" y="1691640"/>
+            <a:ext cx="10881360" cy="1097280"/>
+          </a:xfrm>
+          <a:prstGeom prst="roundRect">
+            <a:avLst>
+              <a:gd name="adj" fmla="val 5000"/>
+            </a:avLst>
+          </a:prstGeom>
+          <a:solidFill>
+            <a:srgbClr val="FFFFFF"/>
+          </a:solidFill>
+          <a:ln w="12700">
+            <a:solidFill>
+              <a:srgbClr val="E4DCCB"/>
+            </a:solidFill>
+            <a:prstDash val="solid"/>
+          </a:ln>
+        </p:spPr>
+      </p:sp>
+      <p:sp>
+        <p:nvSpPr>
+          <p:cNvPr id="6" name="Shape 4"/>
+          <p:cNvSpPr/>
+          <p:nvPr/>
+        </p:nvSpPr>
+        <p:spPr>
+          <a:xfrm>
+            <a:off x="640080" y="1691640"/>
+            <a:ext cx="54864" cy="1097280"/>
+          </a:xfrm>
+          <a:prstGeom prst="rect">
+            <a:avLst/>
+          </a:prstGeom>
+          <a:solidFill>
+            <a:srgbClr val="9A4C1F"/>
+          </a:solidFill>
+          <a:ln/>
+        </p:spPr>
+      </p:sp>
+      <p:sp>
+        <p:nvSpPr>
+          <p:cNvPr id="7" name="Text 5"/>
+          <p:cNvSpPr/>
+          <p:nvPr/>
+        </p:nvSpPr>
+        <p:spPr>
+          <a:xfrm>
+            <a:off x="914400" y="1801368"/>
+            <a:ext cx="10332720" cy="365760"/>
+          </a:xfrm>
+          <a:prstGeom prst="rect">
+            <a:avLst/>
+          </a:prstGeom>
+          <a:noFill/>
+          <a:ln/>
+        </p:spPr>
+        <p:txBody>
+          <a:bodyPr wrap="square" rtlCol="0" anchor="ctr"/>
+          <a:lstStyle/>
+          <a:p>
+            <a:pPr indent="0" marL="0">
+              <a:buNone/>
+            </a:pPr>
+            <a:r>
+              <a:rPr lang="en-US" sz="1400" b="1" dirty="0">
+                <a:solidFill>
+                  <a:srgbClr val="1B1F3B"/>
+                </a:solidFill>
+                <a:latin typeface="Segoe UI" pitchFamily="34" charset="0"/>
+                <a:ea typeface="Segoe UI" pitchFamily="34" charset="-122"/>
+                <a:cs typeface="Segoe UI" pitchFamily="34" charset="-120"/>
+              </a:rPr>
+              <a:t>Correction d'une erreur console en développement</a:t>
+            </a:r>
+            <a:endParaRPr lang="en-US" sz="1400" dirty="0"/>
+          </a:p>
+        </p:txBody>
+      </p:sp>
+      <p:sp>
+        <p:nvSpPr>
+          <p:cNvPr id="8" name="Text 6"/>
+          <p:cNvSpPr/>
+          <p:nvPr/>
+        </p:nvSpPr>
+        <p:spPr>
+          <a:xfrm>
+            <a:off x="914400" y="2148840"/>
+            <a:ext cx="10332720" cy="594360"/>
+          </a:xfrm>
+          <a:prstGeom prst="rect">
+            <a:avLst/>
+          </a:prstGeom>
+          <a:noFill/>
+          <a:ln/>
+        </p:spPr>
+        <p:txBody>
+          <a:bodyPr wrap="square" rtlCol="0" anchor="ctr"/>
+          <a:lstStyle/>
+          <a:p>
+            <a:pPr indent="0" marL="0">
+              <a:lnSpc>
+                <a:spcPts val="1400"/>
+              </a:lnSpc>
+              <a:buNone/>
+            </a:pPr>
+            <a:r>
+              <a:rPr lang="en-US" sz="1100" dirty="0">
+                <a:solidFill>
+                  <a:srgbClr val="8A7C68"/>
+                </a:solidFill>
+                <a:latin typeface="Segoe UI" pitchFamily="34" charset="0"/>
+                <a:ea typeface="Segoe UI" pitchFamily="34" charset="-122"/>
+                <a:cs typeface="Segoe UI" pitchFamily="34" charset="-120"/>
+              </a:rPr>
+              <a:t>Le serveur de développement (Turbopack) affichait une erreur liée a la politique de sécurité du contenu (CSP) durcie lors de l'audit sécurité — celle-ci bloquait une fonctionnalité de débogage propre au mode développement. Corrigé sans rien changer à la sécurité de la version en production.</a:t>
+            </a:r>
+            <a:endParaRPr lang="en-US" sz="1100" dirty="0"/>
+          </a:p>
+        </p:txBody>
+      </p:sp>
+      <p:sp>
+        <p:nvSpPr>
+          <p:cNvPr id="9" name="Text 7"/>
+          <p:cNvSpPr/>
+          <p:nvPr/>
+        </p:nvSpPr>
+        <p:spPr>
+          <a:xfrm>
+            <a:off x="365760" y="6510528"/>
+            <a:ext cx="5486400" cy="274320"/>
+          </a:xfrm>
+          <a:prstGeom prst="rect">
+            <a:avLst/>
+          </a:prstGeom>
+          <a:noFill/>
+          <a:ln/>
+        </p:spPr>
+        <p:txBody>
+          <a:bodyPr wrap="square" rtlCol="0" anchor="ctr"/>
+          <a:lstStyle/>
+          <a:p>
+            <a:pPr indent="0" marL="0">
+              <a:buNone/>
+            </a:pPr>
+            <a:r>
+              <a:rPr lang="en-US" sz="900" dirty="0">
+                <a:solidFill>
+                  <a:srgbClr val="8A7C68"/>
+                </a:solidFill>
+                <a:latin typeface="Segoe UI" pitchFamily="34" charset="0"/>
+                <a:ea typeface="Segoe UI" pitchFamily="34" charset="-122"/>
+                <a:cs typeface="Segoe UI" pitchFamily="34" charset="-120"/>
+              </a:rPr>
+              <a:t>Kôji Web — Récapitulatif technique</a:t>
+            </a:r>
+            <a:endParaRPr lang="en-US" sz="900" dirty="0"/>
+          </a:p>
+        </p:txBody>
+      </p:sp>
+      <p:sp>
+        <p:nvSpPr>
+          <p:cNvPr id="10" name="Text 8"/>
+          <p:cNvSpPr/>
+          <p:nvPr/>
+        </p:nvSpPr>
+        <p:spPr>
+          <a:xfrm>
+            <a:off x="9601200" y="6510528"/>
+            <a:ext cx="2194560" cy="274320"/>
+          </a:xfrm>
+          <a:prstGeom prst="rect">
+            <a:avLst/>
+          </a:prstGeom>
+          <a:noFill/>
+          <a:ln/>
+        </p:spPr>
+        <p:txBody>
+          <a:bodyPr wrap="square" rtlCol="0" anchor="ctr"/>
+          <a:lstStyle/>
+          <a:p>
+            <a:pPr algn="r" indent="0" marL="0">
+              <a:buNone/>
+            </a:pPr>
+            <a:r>
+              <a:rPr lang="en-US" sz="900" dirty="0">
+                <a:solidFill>
+                  <a:srgbClr val="8A7C68"/>
+                </a:solidFill>
+                <a:latin typeface="Segoe UI" pitchFamily="34" charset="0"/>
+                <a:ea typeface="Segoe UI" pitchFamily="34" charset="-122"/>
+                <a:cs typeface="Segoe UI" pitchFamily="34" charset="-120"/>
+              </a:rPr>
+              <a:t>38</a:t>
+            </a:r>
+            <a:endParaRPr lang="en-US" sz="900" dirty="0"/>
+          </a:p>
+        </p:txBody>
+      </p:sp>
+    </p:spTree>
+  </p:cSld>
+  <p:clrMapOvr>
+    <a:masterClrMapping/>
+  </p:clrMapOvr>
+</p:sld>
+</file>
+
+<file path=ppt/slides/slide39.xml><?xml version="1.0" encoding="utf-8"?>
+<p:sld xmlns:a="http://schemas.openxmlformats.org/drawingml/2006/main" xmlns:r="http://schemas.openxmlformats.org/officeDocument/2006/relationships" xmlns:p="http://schemas.openxmlformats.org/presentationml/2006/main">
+  <p:cSld name="Slide 39">
+    <p:bg>
+      <p:bgPr>
+        <a:solidFill>
           <a:srgbClr val="0B1030"/>
         </a:solidFill>
       </p:bgPr>
@@ -21106,344 +21789,6 @@
       <p:sp>
         <p:nvSpPr>
           <p:cNvPr id="7" name="Text 5"/>
-          <p:cNvSpPr/>
-          <p:nvPr/>
-        </p:nvSpPr>
-        <p:spPr>
-          <a:xfrm>
-            <a:off x="9601200" y="6510528"/>
-            <a:ext cx="2194560" cy="274320"/>
-          </a:xfrm>
-          <a:prstGeom prst="rect">
-            <a:avLst/>
-          </a:prstGeom>
-          <a:noFill/>
-          <a:ln/>
-        </p:spPr>
-        <p:txBody>
-          <a:bodyPr wrap="square" rtlCol="0" anchor="ctr"/>
-          <a:lstStyle/>
-          <a:p>
-            <a:pPr algn="r" indent="0" marL="0">
-              <a:buNone/>
-            </a:pPr>
-            <a:r>
-              <a:rPr lang="en-US" sz="900" dirty="0">
-                <a:solidFill>
-                  <a:srgbClr val="8A7C68"/>
-                </a:solidFill>
-                <a:latin typeface="Segoe UI" pitchFamily="34" charset="0"/>
-                <a:ea typeface="Segoe UI" pitchFamily="34" charset="-122"/>
-                <a:cs typeface="Segoe UI" pitchFamily="34" charset="-120"/>
-              </a:rPr>
-              <a:t>38</a:t>
-            </a:r>
-            <a:endParaRPr lang="en-US" sz="900" dirty="0"/>
-          </a:p>
-        </p:txBody>
-      </p:sp>
-    </p:spTree>
-  </p:cSld>
-  <p:clrMapOvr>
-    <a:masterClrMapping/>
-  </p:clrMapOvr>
-</p:sld>
-</file>
-
-<file path=ppt/slides/slide39.xml><?xml version="1.0" encoding="utf-8"?>
-<p:sld xmlns:a="http://schemas.openxmlformats.org/drawingml/2006/main" xmlns:r="http://schemas.openxmlformats.org/officeDocument/2006/relationships" xmlns:p="http://schemas.openxmlformats.org/presentationml/2006/main">
-  <p:cSld name="Slide 39">
-    <p:bg>
-      <p:bgPr>
-        <a:solidFill>
-          <a:srgbClr val="F3EEE3"/>
-        </a:solidFill>
-      </p:bgPr>
-    </p:bg>
-    <p:spTree>
-      <p:nvGrpSpPr>
-        <p:cNvPr id="1" name=""/>
-        <p:cNvGrpSpPr/>
-        <p:nvPr/>
-      </p:nvGrpSpPr>
-      <p:grpSpPr>
-        <a:xfrm>
-          <a:off x="0" y="0"/>
-          <a:ext cx="0" cy="0"/>
-          <a:chOff x="0" y="0"/>
-          <a:chExt cx="0" cy="0"/>
-        </a:xfrm>
-      </p:grpSpPr>
-      <p:sp>
-        <p:nvSpPr>
-          <p:cNvPr id="2" name="Shape 0"/>
-          <p:cNvSpPr/>
-          <p:nvPr/>
-        </p:nvSpPr>
-        <p:spPr>
-          <a:xfrm>
-            <a:off x="640080" y="411480"/>
-            <a:ext cx="2377440" cy="365760"/>
-          </a:xfrm>
-          <a:prstGeom prst="roundRect">
-            <a:avLst>
-              <a:gd name="adj" fmla="val 50000"/>
-            </a:avLst>
-          </a:prstGeom>
-          <a:solidFill>
-            <a:srgbClr val="E6EFE4"/>
-          </a:solidFill>
-          <a:ln/>
-        </p:spPr>
-      </p:sp>
-      <p:sp>
-        <p:nvSpPr>
-          <p:cNvPr id="3" name="Text 1"/>
-          <p:cNvSpPr/>
-          <p:nvPr/>
-        </p:nvSpPr>
-        <p:spPr>
-          <a:xfrm>
-            <a:off x="640080" y="411480"/>
-            <a:ext cx="2377440" cy="365760"/>
-          </a:xfrm>
-          <a:prstGeom prst="rect">
-            <a:avLst/>
-          </a:prstGeom>
-          <a:noFill/>
-          <a:ln/>
-        </p:spPr>
-        <p:txBody>
-          <a:bodyPr wrap="square" rtlCol="0" anchor="ctr"/>
-          <a:lstStyle/>
-          <a:p>
-            <a:pPr algn="ctr" indent="0" marL="0">
-              <a:buNone/>
-            </a:pPr>
-            <a:r>
-              <a:rPr lang="en-US" sz="1000" b="1" spc="100" kern="0" dirty="0">
-                <a:solidFill>
-                  <a:srgbClr val="386641"/>
-                </a:solidFill>
-                <a:latin typeface="Segoe UI" pitchFamily="34" charset="0"/>
-                <a:ea typeface="Segoe UI" pitchFamily="34" charset="-122"/>
-                <a:cs typeface="Segoe UI" pitchFamily="34" charset="-120"/>
-              </a:rPr>
-              <a:t>BASE DE DONNÉES</a:t>
-            </a:r>
-            <a:endParaRPr lang="en-US" sz="1000" dirty="0"/>
-          </a:p>
-        </p:txBody>
-      </p:sp>
-      <p:sp>
-        <p:nvSpPr>
-          <p:cNvPr id="4" name="Text 2"/>
-          <p:cNvSpPr/>
-          <p:nvPr/>
-        </p:nvSpPr>
-        <p:spPr>
-          <a:xfrm>
-            <a:off x="640080" y="868680"/>
-            <a:ext cx="10515600" cy="548640"/>
-          </a:xfrm>
-          <a:prstGeom prst="rect">
-            <a:avLst/>
-          </a:prstGeom>
-          <a:noFill/>
-          <a:ln/>
-        </p:spPr>
-        <p:txBody>
-          <a:bodyPr wrap="square" rtlCol="0" anchor="ctr"/>
-          <a:lstStyle/>
-          <a:p>
-            <a:pPr indent="0" marL="0">
-              <a:buNone/>
-            </a:pPr>
-            <a:r>
-              <a:rPr lang="en-US" sz="2400" b="1" dirty="0">
-                <a:solidFill>
-                  <a:srgbClr val="1B1F3B"/>
-                </a:solidFill>
-                <a:latin typeface="Georgia" pitchFamily="34" charset="0"/>
-                <a:ea typeface="Georgia" pitchFamily="34" charset="-122"/>
-                <a:cs typeface="Georgia" pitchFamily="34" charset="-120"/>
-              </a:rPr>
-              <a:t>Fondations</a:t>
-            </a:r>
-            <a:endParaRPr lang="en-US" sz="2400" dirty="0"/>
-          </a:p>
-        </p:txBody>
-      </p:sp>
-      <p:sp>
-        <p:nvSpPr>
-          <p:cNvPr id="5" name="Shape 3"/>
-          <p:cNvSpPr/>
-          <p:nvPr/>
-        </p:nvSpPr>
-        <p:spPr>
-          <a:xfrm>
-            <a:off x="640080" y="1691640"/>
-            <a:ext cx="10881360" cy="1097280"/>
-          </a:xfrm>
-          <a:prstGeom prst="roundRect">
-            <a:avLst>
-              <a:gd name="adj" fmla="val 5000"/>
-            </a:avLst>
-          </a:prstGeom>
-          <a:solidFill>
-            <a:srgbClr val="FFFFFF"/>
-          </a:solidFill>
-          <a:ln w="12700">
-            <a:solidFill>
-              <a:srgbClr val="E4DCCB"/>
-            </a:solidFill>
-            <a:prstDash val="solid"/>
-          </a:ln>
-        </p:spPr>
-      </p:sp>
-      <p:sp>
-        <p:nvSpPr>
-          <p:cNvPr id="6" name="Shape 4"/>
-          <p:cNvSpPr/>
-          <p:nvPr/>
-        </p:nvSpPr>
-        <p:spPr>
-          <a:xfrm>
-            <a:off x="640080" y="1691640"/>
-            <a:ext cx="54864" cy="1097280"/>
-          </a:xfrm>
-          <a:prstGeom prst="rect">
-            <a:avLst/>
-          </a:prstGeom>
-          <a:solidFill>
-            <a:srgbClr val="386641"/>
-          </a:solidFill>
-          <a:ln/>
-        </p:spPr>
-      </p:sp>
-      <p:sp>
-        <p:nvSpPr>
-          <p:cNvPr id="7" name="Text 5"/>
-          <p:cNvSpPr/>
-          <p:nvPr/>
-        </p:nvSpPr>
-        <p:spPr>
-          <a:xfrm>
-            <a:off x="914400" y="1801368"/>
-            <a:ext cx="10332720" cy="365760"/>
-          </a:xfrm>
-          <a:prstGeom prst="rect">
-            <a:avLst/>
-          </a:prstGeom>
-          <a:noFill/>
-          <a:ln/>
-        </p:spPr>
-        <p:txBody>
-          <a:bodyPr wrap="square" rtlCol="0" anchor="ctr"/>
-          <a:lstStyle/>
-          <a:p>
-            <a:pPr indent="0" marL="0">
-              <a:buNone/>
-            </a:pPr>
-            <a:r>
-              <a:rPr lang="en-US" sz="1400" b="1" dirty="0">
-                <a:solidFill>
-                  <a:srgbClr val="1B1F3B"/>
-                </a:solidFill>
-                <a:latin typeface="Segoe UI" pitchFamily="34" charset="0"/>
-                <a:ea typeface="Segoe UI" pitchFamily="34" charset="-122"/>
-                <a:cs typeface="Segoe UI" pitchFamily="34" charset="-120"/>
-              </a:rPr>
-              <a:t>Connexion Vercel / configuration environnement</a:t>
-            </a:r>
-            <a:endParaRPr lang="en-US" sz="1400" dirty="0"/>
-          </a:p>
-        </p:txBody>
-      </p:sp>
-      <p:sp>
-        <p:nvSpPr>
-          <p:cNvPr id="8" name="Text 6"/>
-          <p:cNvSpPr/>
-          <p:nvPr/>
-        </p:nvSpPr>
-        <p:spPr>
-          <a:xfrm>
-            <a:off x="914400" y="2148840"/>
-            <a:ext cx="10332720" cy="594360"/>
-          </a:xfrm>
-          <a:prstGeom prst="rect">
-            <a:avLst/>
-          </a:prstGeom>
-          <a:noFill/>
-          <a:ln/>
-        </p:spPr>
-        <p:txBody>
-          <a:bodyPr wrap="square" rtlCol="0" anchor="ctr"/>
-          <a:lstStyle/>
-          <a:p>
-            <a:pPr indent="0" marL="0">
-              <a:lnSpc>
-                <a:spcPts val="1400"/>
-              </a:lnSpc>
-              <a:buNone/>
-            </a:pPr>
-            <a:r>
-              <a:rPr lang="en-US" sz="1100" dirty="0">
-                <a:solidFill>
-                  <a:srgbClr val="8A7C68"/>
-                </a:solidFill>
-                <a:latin typeface="Segoe UI" pitchFamily="34" charset="0"/>
-                <a:ea typeface="Segoe UI" pitchFamily="34" charset="-122"/>
-                <a:cs typeface="Segoe UI" pitchFamily="34" charset="-120"/>
-              </a:rPr>
-              <a:t>Correction de la configuration d'authentification et du SMTP sur l'environnement de production Vercel.</a:t>
-            </a:r>
-            <a:endParaRPr lang="en-US" sz="1100" dirty="0"/>
-          </a:p>
-        </p:txBody>
-      </p:sp>
-      <p:sp>
-        <p:nvSpPr>
-          <p:cNvPr id="9" name="Text 7"/>
-          <p:cNvSpPr/>
-          <p:nvPr/>
-        </p:nvSpPr>
-        <p:spPr>
-          <a:xfrm>
-            <a:off x="365760" y="6510528"/>
-            <a:ext cx="5486400" cy="274320"/>
-          </a:xfrm>
-          <a:prstGeom prst="rect">
-            <a:avLst/>
-          </a:prstGeom>
-          <a:noFill/>
-          <a:ln/>
-        </p:spPr>
-        <p:txBody>
-          <a:bodyPr wrap="square" rtlCol="0" anchor="ctr"/>
-          <a:lstStyle/>
-          <a:p>
-            <a:pPr indent="0" marL="0">
-              <a:buNone/>
-            </a:pPr>
-            <a:r>
-              <a:rPr lang="en-US" sz="900" dirty="0">
-                <a:solidFill>
-                  <a:srgbClr val="8A7C68"/>
-                </a:solidFill>
-                <a:latin typeface="Segoe UI" pitchFamily="34" charset="0"/>
-                <a:ea typeface="Segoe UI" pitchFamily="34" charset="-122"/>
-                <a:cs typeface="Segoe UI" pitchFamily="34" charset="-120"/>
-              </a:rPr>
-              <a:t>Kôji Web — Récapitulatif technique</a:t>
-            </a:r>
-            <a:endParaRPr lang="en-US" sz="900" dirty="0"/>
-          </a:p>
-        </p:txBody>
-      </p:sp>
-      <p:sp>
-        <p:nvSpPr>
-          <p:cNvPr id="10" name="Text 8"/>
           <p:cNvSpPr/>
           <p:nvPr/>
         </p:nvSpPr>
@@ -22328,7 +22673,7 @@
                 <a:ea typeface="Georgia" pitchFamily="34" charset="-122"/>
                 <a:cs typeface="Georgia" pitchFamily="34" charset="-120"/>
               </a:rPr>
-              <a:t>Devis</a:t>
+              <a:t>Fondations</a:t>
             </a:r>
             <a:endParaRPr lang="en-US" sz="2400" dirty="0"/>
           </a:p>
@@ -22414,7 +22759,7 @@
                 <a:ea typeface="Segoe UI" pitchFamily="34" charset="-122"/>
                 <a:cs typeface="Segoe UI" pitchFamily="34" charset="-120"/>
               </a:rPr>
-              <a:t>Migration des devis vers Supabase (table partagée)</a:t>
+              <a:t>Connexion Vercel / configuration environnement</a:t>
             </a:r>
             <a:endParaRPr lang="en-US" sz="1400" dirty="0"/>
           </a:p>
@@ -22456,7 +22801,7 @@
                 <a:ea typeface="Segoe UI" pitchFamily="34" charset="-122"/>
                 <a:cs typeface="Segoe UI" pitchFamily="34" charset="-120"/>
               </a:rPr>
-              <a:t>Les devis créés sur le site web et sur l'application mobile (Firas) vivent désormais dans la même table Supabase 'quotes', avec un mapping bidirectionnel dédié (lib/quote-mapping.js).</a:t>
+              <a:t>Correction de la configuration d'authentification et du SMTP sur l'environnement de production Vercel.</a:t>
             </a:r>
             <a:endParaRPr lang="en-US" sz="1100" dirty="0"/>
           </a:p>
@@ -22666,7 +23011,7 @@
                 <a:ea typeface="Georgia" pitchFamily="34" charset="-122"/>
                 <a:cs typeface="Georgia" pitchFamily="34" charset="-120"/>
               </a:rPr>
-              <a:t>Chantiers</a:t>
+              <a:t>Devis</a:t>
             </a:r>
             <a:endParaRPr lang="en-US" sz="2400" dirty="0"/>
           </a:p>
@@ -22752,7 +23097,7 @@
                 <a:ea typeface="Segoe UI" pitchFamily="34" charset="-122"/>
                 <a:cs typeface="Segoe UI" pitchFamily="34" charset="-120"/>
               </a:rPr>
-              <a:t>Connexion Supabase : chantiers, planning, fournitures</a:t>
+              <a:t>Migration des devis vers Supabase (table partagée)</a:t>
             </a:r>
             <a:endParaRPr lang="en-US" sz="1400" dirty="0"/>
           </a:p>
@@ -22794,7 +23139,7 @@
                 <a:ea typeface="Segoe UI" pitchFamily="34" charset="-122"/>
                 <a:cs typeface="Segoe UI" pitchFamily="34" charset="-120"/>
               </a:rPr>
-              <a:t>Ces trois modules sont branchés sur la base partagée avec l'application mobile ; les comptes utilisateurs sont également partagés entre les deux plateformes.</a:t>
+              <a:t>Les devis créés sur le site web et sur l'application mobile (Firas) vivent désormais dans la même table Supabase 'quotes', avec un mapping bidirectionnel dédié (lib/quote-mapping.js).</a:t>
             </a:r>
             <a:endParaRPr lang="en-US" sz="1100" dirty="0"/>
           </a:p>
@@ -23004,7 +23349,7 @@
                 <a:ea typeface="Georgia" pitchFamily="34" charset="-122"/>
                 <a:cs typeface="Georgia" pitchFamily="34" charset="-120"/>
               </a:rPr>
-              <a:t>Équipe</a:t>
+              <a:t>Chantiers</a:t>
             </a:r>
             <a:endParaRPr lang="en-US" sz="2400" dirty="0"/>
           </a:p>
@@ -23090,7 +23435,7 @@
                 <a:ea typeface="Segoe UI" pitchFamily="34" charset="-122"/>
                 <a:cs typeface="Segoe UI" pitchFamily="34" charset="-120"/>
               </a:rPr>
-              <a:t>Nouvelle donnée : heures contractuelles par ouvrier</a:t>
+              <a:t>Connexion Supabase : chantiers, planning, fournitures</a:t>
             </a:r>
             <a:endParaRPr lang="en-US" sz="1400" dirty="0"/>
           </a:p>
@@ -23132,7 +23477,7 @@
                 <a:ea typeface="Segoe UI" pitchFamily="34" charset="-122"/>
                 <a:cs typeface="Segoe UI" pitchFamily="34" charset="-120"/>
               </a:rPr>
-              <a:t>Ajout d'un paramètre 'heures contractuelles / semaine' (35h par défaut) sur chaque fiche ouvrier, utilisé pour le calcul des écarts.</a:t>
+              <a:t>Ces trois modules sont branchés sur la base partagée avec l'application mobile ; les comptes utilisateurs sont également partagés entre les deux plateformes.</a:t>
             </a:r>
             <a:endParaRPr lang="en-US" sz="1100" dirty="0"/>
           </a:p>
@@ -23342,7 +23687,7 @@
                 <a:ea typeface="Georgia" pitchFamily="34" charset="-122"/>
                 <a:cs typeface="Georgia" pitchFamily="34" charset="-120"/>
               </a:rPr>
-              <a:t>Accueil &amp; stabilité</a:t>
+              <a:t>Équipe</a:t>
             </a:r>
             <a:endParaRPr lang="en-US" sz="2400" dirty="0"/>
           </a:p>
@@ -23428,7 +23773,7 @@
                 <a:ea typeface="Segoe UI" pitchFamily="34" charset="-122"/>
                 <a:cs typeface="Segoe UI" pitchFamily="34" charset="-120"/>
               </a:rPr>
-              <a:t>Nettoyage du backend</a:t>
+              <a:t>Nouvelle donnée : heures contractuelles par ouvrier</a:t>
             </a:r>
             <a:endParaRPr lang="en-US" sz="1400" dirty="0"/>
           </a:p>
@@ -23470,7 +23815,7 @@
                 <a:ea typeface="Segoe UI" pitchFamily="34" charset="-122"/>
                 <a:cs typeface="Segoe UI" pitchFamily="34" charset="-120"/>
               </a:rPr>
-              <a:t>Audit complet des routes serveur : suppression du code mort (module Marketplace), vérification de la cohérence entre données locales et données Supabase sur l'ensemble de l'application.</a:t>
+              <a:t>Ajout d'un paramètre 'heures contractuelles / semaine' (35h par défaut) sur chaque fiche ouvrier, utilisé pour le calcul des écarts.</a:t>
             </a:r>
             <a:endParaRPr lang="en-US" sz="1100" dirty="0"/>
           </a:p>
@@ -23680,7 +24025,7 @@
                 <a:ea typeface="Georgia" pitchFamily="34" charset="-122"/>
                 <a:cs typeface="Georgia" pitchFamily="34" charset="-120"/>
               </a:rPr>
-              <a:t>Maintenance technique</a:t>
+              <a:t>Accueil &amp; stabilité</a:t>
             </a:r>
             <a:endParaRPr lang="en-US" sz="2400" dirty="0"/>
           </a:p>
@@ -23766,7 +24111,7 @@
                 <a:ea typeface="Segoe UI" pitchFamily="34" charset="-122"/>
                 <a:cs typeface="Segoe UI" pitchFamily="34" charset="-120"/>
               </a:rPr>
-              <a:t>Nettoyage approfondi du code</a:t>
+              <a:t>Nettoyage du backend</a:t>
             </a:r>
             <a:endParaRPr lang="en-US" sz="1400" dirty="0"/>
           </a:p>
@@ -23808,7 +24153,7 @@
                 <a:ea typeface="Segoe UI" pitchFamily="34" charset="-122"/>
                 <a:cs typeface="Segoe UI" pitchFamily="34" charset="-120"/>
               </a:rPr>
-              <a:t>Audit complet du projet (pages, routes, fonctions, dépendances) pour repérer tout ce qui n'était plus utilisé ; suppression de 6 pages orphelines (onboarding, welcome, compte, anciennes pages devis en 3 étapes), d'une route de connexion de démonstration, d'un dossier de composants dupliqué obsolète, de plusieurs fonctions inutilisées et d'une dépendance logicielle non utilisée — sans toucher aux fonctionnalités actives.</a:t>
+              <a:t>Audit complet des routes serveur : suppression du code mort (module Marketplace), vérification de la cohérence entre données locales et données Supabase sur l'ensemble de l'application.</a:t>
             </a:r>
             <a:endParaRPr lang="en-US" sz="1100" dirty="0"/>
           </a:p>
@@ -23816,263 +24161,7 @@
       </p:sp>
       <p:sp>
         <p:nvSpPr>
-          <p:cNvPr id="9" name="Shape 7"/>
-          <p:cNvSpPr/>
-          <p:nvPr/>
-        </p:nvSpPr>
-        <p:spPr>
-          <a:xfrm>
-            <a:off x="640080" y="2926080"/>
-            <a:ext cx="10881360" cy="1097280"/>
-          </a:xfrm>
-          <a:prstGeom prst="roundRect">
-            <a:avLst>
-              <a:gd name="adj" fmla="val 5000"/>
-            </a:avLst>
-          </a:prstGeom>
-          <a:solidFill>
-            <a:srgbClr val="FFFFFF"/>
-          </a:solidFill>
-          <a:ln w="12700">
-            <a:solidFill>
-              <a:srgbClr val="E4DCCB"/>
-            </a:solidFill>
-            <a:prstDash val="solid"/>
-          </a:ln>
-        </p:spPr>
-      </p:sp>
-      <p:sp>
-        <p:nvSpPr>
-          <p:cNvPr id="10" name="Shape 8"/>
-          <p:cNvSpPr/>
-          <p:nvPr/>
-        </p:nvSpPr>
-        <p:spPr>
-          <a:xfrm>
-            <a:off x="640080" y="2926080"/>
-            <a:ext cx="54864" cy="1097280"/>
-          </a:xfrm>
-          <a:prstGeom prst="rect">
-            <a:avLst/>
-          </a:prstGeom>
-          <a:solidFill>
-            <a:srgbClr val="386641"/>
-          </a:solidFill>
-          <a:ln/>
-        </p:spPr>
-      </p:sp>
-      <p:sp>
-        <p:nvSpPr>
-          <p:cNvPr id="11" name="Text 9"/>
-          <p:cNvSpPr/>
-          <p:nvPr/>
-        </p:nvSpPr>
-        <p:spPr>
-          <a:xfrm>
-            <a:off x="914400" y="3035808"/>
-            <a:ext cx="10332720" cy="365760"/>
-          </a:xfrm>
-          <a:prstGeom prst="rect">
-            <a:avLst/>
-          </a:prstGeom>
-          <a:noFill/>
-          <a:ln/>
-        </p:spPr>
-        <p:txBody>
-          <a:bodyPr wrap="square" rtlCol="0" anchor="ctr"/>
-          <a:lstStyle/>
-          <a:p>
-            <a:pPr indent="0" marL="0">
-              <a:buNone/>
-            </a:pPr>
-            <a:r>
-              <a:rPr lang="en-US" sz="1400" b="1" dirty="0">
-                <a:solidFill>
-                  <a:srgbClr val="1B1F3B"/>
-                </a:solidFill>
-                <a:latin typeface="Segoe UI" pitchFamily="34" charset="0"/>
-                <a:ea typeface="Segoe UI" pitchFamily="34" charset="-122"/>
-                <a:cs typeface="Segoe UI" pitchFamily="34" charset="-120"/>
-              </a:rPr>
-              <a:t>Suppression de code mort dans la génération de devis</a:t>
-            </a:r>
-            <a:endParaRPr lang="en-US" sz="1400" dirty="0"/>
-          </a:p>
-        </p:txBody>
-      </p:sp>
-      <p:sp>
-        <p:nvSpPr>
-          <p:cNvPr id="12" name="Text 10"/>
-          <p:cNvSpPr/>
-          <p:nvPr/>
-        </p:nvSpPr>
-        <p:spPr>
-          <a:xfrm>
-            <a:off x="914400" y="3383280"/>
-            <a:ext cx="10332720" cy="594360"/>
-          </a:xfrm>
-          <a:prstGeom prst="rect">
-            <a:avLst/>
-          </a:prstGeom>
-          <a:noFill/>
-          <a:ln/>
-        </p:spPr>
-        <p:txBody>
-          <a:bodyPr wrap="square" rtlCol="0" anchor="ctr"/>
-          <a:lstStyle/>
-          <a:p>
-            <a:pPr indent="0" marL="0">
-              <a:lnSpc>
-                <a:spcPts val="1400"/>
-              </a:lnSpc>
-              <a:buNone/>
-            </a:pPr>
-            <a:r>
-              <a:rPr lang="en-US" sz="1100" dirty="0">
-                <a:solidFill>
-                  <a:srgbClr val="8A7C68"/>
-                </a:solidFill>
-                <a:latin typeface="Segoe UI" pitchFamily="34" charset="0"/>
-                <a:ea typeface="Segoe UI" pitchFamily="34" charset="-122"/>
-                <a:cs typeface="Segoe UI" pitchFamily="34" charset="-120"/>
-              </a:rPr>
-              <a:t>Un ancien générateur de devis PDF, devenu inaccessible après une précédente refonte (code jamais exécuté), a été retiré du fichier technique de génération de documents.</a:t>
-            </a:r>
-            <a:endParaRPr lang="en-US" sz="1100" dirty="0"/>
-          </a:p>
-        </p:txBody>
-      </p:sp>
-      <p:sp>
-        <p:nvSpPr>
-          <p:cNvPr id="13" name="Shape 11"/>
-          <p:cNvSpPr/>
-          <p:nvPr/>
-        </p:nvSpPr>
-        <p:spPr>
-          <a:xfrm>
-            <a:off x="640080" y="4160520"/>
-            <a:ext cx="10881360" cy="1097280"/>
-          </a:xfrm>
-          <a:prstGeom prst="roundRect">
-            <a:avLst>
-              <a:gd name="adj" fmla="val 5000"/>
-            </a:avLst>
-          </a:prstGeom>
-          <a:solidFill>
-            <a:srgbClr val="FFFFFF"/>
-          </a:solidFill>
-          <a:ln w="12700">
-            <a:solidFill>
-              <a:srgbClr val="E4DCCB"/>
-            </a:solidFill>
-            <a:prstDash val="solid"/>
-          </a:ln>
-        </p:spPr>
-      </p:sp>
-      <p:sp>
-        <p:nvSpPr>
-          <p:cNvPr id="14" name="Shape 12"/>
-          <p:cNvSpPr/>
-          <p:nvPr/>
-        </p:nvSpPr>
-        <p:spPr>
-          <a:xfrm>
-            <a:off x="640080" y="4160520"/>
-            <a:ext cx="54864" cy="1097280"/>
-          </a:xfrm>
-          <a:prstGeom prst="rect">
-            <a:avLst/>
-          </a:prstGeom>
-          <a:solidFill>
-            <a:srgbClr val="386641"/>
-          </a:solidFill>
-          <a:ln/>
-        </p:spPr>
-      </p:sp>
-      <p:sp>
-        <p:nvSpPr>
-          <p:cNvPr id="15" name="Text 13"/>
-          <p:cNvSpPr/>
-          <p:nvPr/>
-        </p:nvSpPr>
-        <p:spPr>
-          <a:xfrm>
-            <a:off x="914400" y="4270248"/>
-            <a:ext cx="10332720" cy="365760"/>
-          </a:xfrm>
-          <a:prstGeom prst="rect">
-            <a:avLst/>
-          </a:prstGeom>
-          <a:noFill/>
-          <a:ln/>
-        </p:spPr>
-        <p:txBody>
-          <a:bodyPr wrap="square" rtlCol="0" anchor="ctr"/>
-          <a:lstStyle/>
-          <a:p>
-            <a:pPr indent="0" marL="0">
-              <a:buNone/>
-            </a:pPr>
-            <a:r>
-              <a:rPr lang="en-US" sz="1400" b="1" dirty="0">
-                <a:solidFill>
-                  <a:srgbClr val="1B1F3B"/>
-                </a:solidFill>
-                <a:latin typeface="Segoe UI" pitchFamily="34" charset="0"/>
-                <a:ea typeface="Segoe UI" pitchFamily="34" charset="-122"/>
-                <a:cs typeface="Segoe UI" pitchFamily="34" charset="-120"/>
-              </a:rPr>
-              <a:t>Suppression de code mort dans l'export Word des devis</a:t>
-            </a:r>
-            <a:endParaRPr lang="en-US" sz="1400" dirty="0"/>
-          </a:p>
-        </p:txBody>
-      </p:sp>
-      <p:sp>
-        <p:nvSpPr>
-          <p:cNvPr id="16" name="Text 14"/>
-          <p:cNvSpPr/>
-          <p:nvPr/>
-        </p:nvSpPr>
-        <p:spPr>
-          <a:xfrm>
-            <a:off x="914400" y="4617720"/>
-            <a:ext cx="10332720" cy="594360"/>
-          </a:xfrm>
-          <a:prstGeom prst="rect">
-            <a:avLst/>
-          </a:prstGeom>
-          <a:noFill/>
-          <a:ln/>
-        </p:spPr>
-        <p:txBody>
-          <a:bodyPr wrap="square" rtlCol="0" anchor="ctr"/>
-          <a:lstStyle/>
-          <a:p>
-            <a:pPr indent="0" marL="0">
-              <a:lnSpc>
-                <a:spcPts val="1400"/>
-              </a:lnSpc>
-              <a:buNone/>
-            </a:pPr>
-            <a:r>
-              <a:rPr lang="en-US" sz="1100" dirty="0">
-                <a:solidFill>
-                  <a:srgbClr val="8A7C68"/>
-                </a:solidFill>
-                <a:latin typeface="Segoe UI" pitchFamily="34" charset="0"/>
-                <a:ea typeface="Segoe UI" pitchFamily="34" charset="-122"/>
-                <a:cs typeface="Segoe UI" pitchFamily="34" charset="-120"/>
-              </a:rPr>
-              <a:t>Un second bloc de génération de document, devenu inaccessible après une précédente refonte (jamais exécuté), a été retiré du fichier technique de génération de documents.</a:t>
-            </a:r>
-            <a:endParaRPr lang="en-US" sz="1100" dirty="0"/>
-          </a:p>
-        </p:txBody>
-      </p:sp>
-      <p:sp>
-        <p:nvSpPr>
-          <p:cNvPr id="17" name="Text 15"/>
+          <p:cNvPr id="9" name="Text 7"/>
           <p:cNvSpPr/>
           <p:nvPr/>
         </p:nvSpPr>
@@ -24111,7 +24200,7 @@
       </p:sp>
       <p:sp>
         <p:nvSpPr>
-          <p:cNvPr id="18" name="Text 16"/>
+          <p:cNvPr id="10" name="Text 8"/>
           <p:cNvSpPr/>
           <p:nvPr/>
         </p:nvSpPr>
@@ -24274,7 +24363,7 @@
                 <a:ea typeface="Georgia" pitchFamily="34" charset="-122"/>
                 <a:cs typeface="Georgia" pitchFamily="34" charset="-120"/>
               </a:rPr>
-              <a:t>Sécurité</a:t>
+              <a:t>Maintenance technique</a:t>
             </a:r>
             <a:endParaRPr lang="en-US" sz="2400" dirty="0"/>
           </a:p>
@@ -24360,7 +24449,7 @@
                 <a:ea typeface="Segoe UI" pitchFamily="34" charset="-122"/>
                 <a:cs typeface="Segoe UI" pitchFamily="34" charset="-120"/>
               </a:rPr>
-              <a:t>Base de données partagée verrouillée</a:t>
+              <a:t>Nettoyage approfondi du code</a:t>
             </a:r>
             <a:endParaRPr lang="en-US" sz="1400" dirty="0"/>
           </a:p>
@@ -24402,7 +24491,7 @@
                 <a:ea typeface="Segoe UI" pitchFamily="34" charset="-122"/>
                 <a:cs typeface="Segoe UI" pitchFamily="34" charset="-120"/>
               </a:rPr>
-              <a:t>La table contenant l'essentiel des données de l'application était lisible par n'importe qui sur internet avec la simple clé publique du site, sans connexion. L'application y accède désormais avec une clé privée réservée au serveur, ce qui permet de fermer complètement l'accès public sans rien casser.</a:t>
+              <a:t>Audit complet du projet (pages, routes, fonctions, dépendances) pour repérer tout ce qui n'était plus utilisé ; suppression de 6 pages orphelines (onboarding, welcome, compte, anciennes pages devis en 3 étapes), d'une route de connexion de démonstration, d'un dossier de composants dupliqué obsolète, de plusieurs fonctions inutilisées et d'une dépendance logicielle non utilisée — sans toucher aux fonctionnalités actives.</a:t>
             </a:r>
             <a:endParaRPr lang="en-US" sz="1100" dirty="0"/>
           </a:p>
@@ -24488,7 +24577,7 @@
                 <a:ea typeface="Segoe UI" pitchFamily="34" charset="-122"/>
                 <a:cs typeface="Segoe UI" pitchFamily="34" charset="-120"/>
               </a:rPr>
-              <a:t>Fichier de base de données retiré du dépôt Git</a:t>
+              <a:t>Suppression de code mort dans la génération de devis</a:t>
             </a:r>
             <a:endParaRPr lang="en-US" sz="1400" dirty="0"/>
           </a:p>
@@ -24530,7 +24619,7 @@
                 <a:ea typeface="Segoe UI" pitchFamily="34" charset="-122"/>
                 <a:cs typeface="Segoe UI" pitchFamily="34" charset="-120"/>
               </a:rPr>
-              <a:t>Un fichier contenant une copie complète de la base de données de développement, avec des mots de passe réels en clair, était suivi par Git depuis plusieurs mois. Retiré du suivi et exclu définitivement.</a:t>
+              <a:t>Un ancien générateur de devis PDF, devenu inaccessible après une précédente refonte (code jamais exécuté), a été retiré du fichier technique de génération de documents.</a:t>
             </a:r>
             <a:endParaRPr lang="en-US" sz="1100" dirty="0"/>
           </a:p>
@@ -24616,7 +24705,7 @@
                 <a:ea typeface="Segoe UI" pitchFamily="34" charset="-122"/>
                 <a:cs typeface="Segoe UI" pitchFamily="34" charset="-120"/>
               </a:rPr>
-              <a:t>Verrouillage de la base partagée écrit dans le script d'installation</a:t>
+              <a:t>Suppression de code mort dans l'export Word des devis</a:t>
             </a:r>
             <a:endParaRPr lang="en-US" sz="1400" dirty="0"/>
           </a:p>
@@ -24658,7 +24747,7 @@
                 <a:ea typeface="Segoe UI" pitchFamily="34" charset="-122"/>
                 <a:cs typeface="Segoe UI" pitchFamily="34" charset="-120"/>
               </a:rPr>
-              <a:t>La commande qui ferme complètement l'accès public à la table de données partagée a été ajoutée au script SQL du projet, prête à être exécutée dans le tableau de bord Supabase.</a:t>
+              <a:t>Un second bloc de génération de document, devenu inaccessible après une précédente refonte (jamais exécuté), a été retiré du fichier technique de génération de documents.</a:t>
             </a:r>
             <a:endParaRPr lang="en-US" sz="1100" dirty="0"/>
           </a:p>
@@ -24753,6 +24842,600 @@
 <file path=ppt/slides/slide46.xml><?xml version="1.0" encoding="utf-8"?>
 <p:sld xmlns:a="http://schemas.openxmlformats.org/drawingml/2006/main" xmlns:r="http://schemas.openxmlformats.org/officeDocument/2006/relationships" xmlns:p="http://schemas.openxmlformats.org/presentationml/2006/main">
   <p:cSld name="Slide 46">
+    <p:bg>
+      <p:bgPr>
+        <a:solidFill>
+          <a:srgbClr val="F3EEE3"/>
+        </a:solidFill>
+      </p:bgPr>
+    </p:bg>
+    <p:spTree>
+      <p:nvGrpSpPr>
+        <p:cNvPr id="1" name=""/>
+        <p:cNvGrpSpPr/>
+        <p:nvPr/>
+      </p:nvGrpSpPr>
+      <p:grpSpPr>
+        <a:xfrm>
+          <a:off x="0" y="0"/>
+          <a:ext cx="0" cy="0"/>
+          <a:chOff x="0" y="0"/>
+          <a:chExt cx="0" cy="0"/>
+        </a:xfrm>
+      </p:grpSpPr>
+      <p:sp>
+        <p:nvSpPr>
+          <p:cNvPr id="2" name="Shape 0"/>
+          <p:cNvSpPr/>
+          <p:nvPr/>
+        </p:nvSpPr>
+        <p:spPr>
+          <a:xfrm>
+            <a:off x="640080" y="411480"/>
+            <a:ext cx="2377440" cy="365760"/>
+          </a:xfrm>
+          <a:prstGeom prst="roundRect">
+            <a:avLst>
+              <a:gd name="adj" fmla="val 50000"/>
+            </a:avLst>
+          </a:prstGeom>
+          <a:solidFill>
+            <a:srgbClr val="E6EFE4"/>
+          </a:solidFill>
+          <a:ln/>
+        </p:spPr>
+      </p:sp>
+      <p:sp>
+        <p:nvSpPr>
+          <p:cNvPr id="3" name="Text 1"/>
+          <p:cNvSpPr/>
+          <p:nvPr/>
+        </p:nvSpPr>
+        <p:spPr>
+          <a:xfrm>
+            <a:off x="640080" y="411480"/>
+            <a:ext cx="2377440" cy="365760"/>
+          </a:xfrm>
+          <a:prstGeom prst="rect">
+            <a:avLst/>
+          </a:prstGeom>
+          <a:noFill/>
+          <a:ln/>
+        </p:spPr>
+        <p:txBody>
+          <a:bodyPr wrap="square" rtlCol="0" anchor="ctr"/>
+          <a:lstStyle/>
+          <a:p>
+            <a:pPr algn="ctr" indent="0" marL="0">
+              <a:buNone/>
+            </a:pPr>
+            <a:r>
+              <a:rPr lang="en-US" sz="1000" b="1" spc="100" kern="0" dirty="0">
+                <a:solidFill>
+                  <a:srgbClr val="386641"/>
+                </a:solidFill>
+                <a:latin typeface="Segoe UI" pitchFamily="34" charset="0"/>
+                <a:ea typeface="Segoe UI" pitchFamily="34" charset="-122"/>
+                <a:cs typeface="Segoe UI" pitchFamily="34" charset="-120"/>
+              </a:rPr>
+              <a:t>BASE DE DONNÉES</a:t>
+            </a:r>
+            <a:endParaRPr lang="en-US" sz="1000" dirty="0"/>
+          </a:p>
+        </p:txBody>
+      </p:sp>
+      <p:sp>
+        <p:nvSpPr>
+          <p:cNvPr id="4" name="Text 2"/>
+          <p:cNvSpPr/>
+          <p:nvPr/>
+        </p:nvSpPr>
+        <p:spPr>
+          <a:xfrm>
+            <a:off x="640080" y="868680"/>
+            <a:ext cx="10515600" cy="548640"/>
+          </a:xfrm>
+          <a:prstGeom prst="rect">
+            <a:avLst/>
+          </a:prstGeom>
+          <a:noFill/>
+          <a:ln/>
+        </p:spPr>
+        <p:txBody>
+          <a:bodyPr wrap="square" rtlCol="0" anchor="ctr"/>
+          <a:lstStyle/>
+          <a:p>
+            <a:pPr indent="0" marL="0">
+              <a:buNone/>
+            </a:pPr>
+            <a:r>
+              <a:rPr lang="en-US" sz="2400" b="1" dirty="0">
+                <a:solidFill>
+                  <a:srgbClr val="1B1F3B"/>
+                </a:solidFill>
+                <a:latin typeface="Georgia" pitchFamily="34" charset="0"/>
+                <a:ea typeface="Georgia" pitchFamily="34" charset="-122"/>
+                <a:cs typeface="Georgia" pitchFamily="34" charset="-120"/>
+              </a:rPr>
+              <a:t>Sécurité</a:t>
+            </a:r>
+            <a:endParaRPr lang="en-US" sz="2400" dirty="0"/>
+          </a:p>
+        </p:txBody>
+      </p:sp>
+      <p:sp>
+        <p:nvSpPr>
+          <p:cNvPr id="5" name="Shape 3"/>
+          <p:cNvSpPr/>
+          <p:nvPr/>
+        </p:nvSpPr>
+        <p:spPr>
+          <a:xfrm>
+            <a:off x="640080" y="1691640"/>
+            <a:ext cx="10881360" cy="1097280"/>
+          </a:xfrm>
+          <a:prstGeom prst="roundRect">
+            <a:avLst>
+              <a:gd name="adj" fmla="val 5000"/>
+            </a:avLst>
+          </a:prstGeom>
+          <a:solidFill>
+            <a:srgbClr val="FFFFFF"/>
+          </a:solidFill>
+          <a:ln w="12700">
+            <a:solidFill>
+              <a:srgbClr val="E4DCCB"/>
+            </a:solidFill>
+            <a:prstDash val="solid"/>
+          </a:ln>
+        </p:spPr>
+      </p:sp>
+      <p:sp>
+        <p:nvSpPr>
+          <p:cNvPr id="6" name="Shape 4"/>
+          <p:cNvSpPr/>
+          <p:nvPr/>
+        </p:nvSpPr>
+        <p:spPr>
+          <a:xfrm>
+            <a:off x="640080" y="1691640"/>
+            <a:ext cx="54864" cy="1097280"/>
+          </a:xfrm>
+          <a:prstGeom prst="rect">
+            <a:avLst/>
+          </a:prstGeom>
+          <a:solidFill>
+            <a:srgbClr val="386641"/>
+          </a:solidFill>
+          <a:ln/>
+        </p:spPr>
+      </p:sp>
+      <p:sp>
+        <p:nvSpPr>
+          <p:cNvPr id="7" name="Text 5"/>
+          <p:cNvSpPr/>
+          <p:nvPr/>
+        </p:nvSpPr>
+        <p:spPr>
+          <a:xfrm>
+            <a:off x="914400" y="1801368"/>
+            <a:ext cx="10332720" cy="365760"/>
+          </a:xfrm>
+          <a:prstGeom prst="rect">
+            <a:avLst/>
+          </a:prstGeom>
+          <a:noFill/>
+          <a:ln/>
+        </p:spPr>
+        <p:txBody>
+          <a:bodyPr wrap="square" rtlCol="0" anchor="ctr"/>
+          <a:lstStyle/>
+          <a:p>
+            <a:pPr indent="0" marL="0">
+              <a:buNone/>
+            </a:pPr>
+            <a:r>
+              <a:rPr lang="en-US" sz="1400" b="1" dirty="0">
+                <a:solidFill>
+                  <a:srgbClr val="1B1F3B"/>
+                </a:solidFill>
+                <a:latin typeface="Segoe UI" pitchFamily="34" charset="0"/>
+                <a:ea typeface="Segoe UI" pitchFamily="34" charset="-122"/>
+                <a:cs typeface="Segoe UI" pitchFamily="34" charset="-120"/>
+              </a:rPr>
+              <a:t>Base de données partagée verrouillée</a:t>
+            </a:r>
+            <a:endParaRPr lang="en-US" sz="1400" dirty="0"/>
+          </a:p>
+        </p:txBody>
+      </p:sp>
+      <p:sp>
+        <p:nvSpPr>
+          <p:cNvPr id="8" name="Text 6"/>
+          <p:cNvSpPr/>
+          <p:nvPr/>
+        </p:nvSpPr>
+        <p:spPr>
+          <a:xfrm>
+            <a:off x="914400" y="2148840"/>
+            <a:ext cx="10332720" cy="594360"/>
+          </a:xfrm>
+          <a:prstGeom prst="rect">
+            <a:avLst/>
+          </a:prstGeom>
+          <a:noFill/>
+          <a:ln/>
+        </p:spPr>
+        <p:txBody>
+          <a:bodyPr wrap="square" rtlCol="0" anchor="ctr"/>
+          <a:lstStyle/>
+          <a:p>
+            <a:pPr indent="0" marL="0">
+              <a:lnSpc>
+                <a:spcPts val="1400"/>
+              </a:lnSpc>
+              <a:buNone/>
+            </a:pPr>
+            <a:r>
+              <a:rPr lang="en-US" sz="1100" dirty="0">
+                <a:solidFill>
+                  <a:srgbClr val="8A7C68"/>
+                </a:solidFill>
+                <a:latin typeface="Segoe UI" pitchFamily="34" charset="0"/>
+                <a:ea typeface="Segoe UI" pitchFamily="34" charset="-122"/>
+                <a:cs typeface="Segoe UI" pitchFamily="34" charset="-120"/>
+              </a:rPr>
+              <a:t>La table contenant l'essentiel des données de l'application était lisible par n'importe qui sur internet avec la simple clé publique du site, sans connexion. L'application y accède désormais avec une clé privée réservée au serveur, ce qui permet de fermer complètement l'accès public sans rien casser.</a:t>
+            </a:r>
+            <a:endParaRPr lang="en-US" sz="1100" dirty="0"/>
+          </a:p>
+        </p:txBody>
+      </p:sp>
+      <p:sp>
+        <p:nvSpPr>
+          <p:cNvPr id="9" name="Shape 7"/>
+          <p:cNvSpPr/>
+          <p:nvPr/>
+        </p:nvSpPr>
+        <p:spPr>
+          <a:xfrm>
+            <a:off x="640080" y="2926080"/>
+            <a:ext cx="10881360" cy="1097280"/>
+          </a:xfrm>
+          <a:prstGeom prst="roundRect">
+            <a:avLst>
+              <a:gd name="adj" fmla="val 5000"/>
+            </a:avLst>
+          </a:prstGeom>
+          <a:solidFill>
+            <a:srgbClr val="FFFFFF"/>
+          </a:solidFill>
+          <a:ln w="12700">
+            <a:solidFill>
+              <a:srgbClr val="E4DCCB"/>
+            </a:solidFill>
+            <a:prstDash val="solid"/>
+          </a:ln>
+        </p:spPr>
+      </p:sp>
+      <p:sp>
+        <p:nvSpPr>
+          <p:cNvPr id="10" name="Shape 8"/>
+          <p:cNvSpPr/>
+          <p:nvPr/>
+        </p:nvSpPr>
+        <p:spPr>
+          <a:xfrm>
+            <a:off x="640080" y="2926080"/>
+            <a:ext cx="54864" cy="1097280"/>
+          </a:xfrm>
+          <a:prstGeom prst="rect">
+            <a:avLst/>
+          </a:prstGeom>
+          <a:solidFill>
+            <a:srgbClr val="386641"/>
+          </a:solidFill>
+          <a:ln/>
+        </p:spPr>
+      </p:sp>
+      <p:sp>
+        <p:nvSpPr>
+          <p:cNvPr id="11" name="Text 9"/>
+          <p:cNvSpPr/>
+          <p:nvPr/>
+        </p:nvSpPr>
+        <p:spPr>
+          <a:xfrm>
+            <a:off x="914400" y="3035808"/>
+            <a:ext cx="10332720" cy="365760"/>
+          </a:xfrm>
+          <a:prstGeom prst="rect">
+            <a:avLst/>
+          </a:prstGeom>
+          <a:noFill/>
+          <a:ln/>
+        </p:spPr>
+        <p:txBody>
+          <a:bodyPr wrap="square" rtlCol="0" anchor="ctr"/>
+          <a:lstStyle/>
+          <a:p>
+            <a:pPr indent="0" marL="0">
+              <a:buNone/>
+            </a:pPr>
+            <a:r>
+              <a:rPr lang="en-US" sz="1400" b="1" dirty="0">
+                <a:solidFill>
+                  <a:srgbClr val="1B1F3B"/>
+                </a:solidFill>
+                <a:latin typeface="Segoe UI" pitchFamily="34" charset="0"/>
+                <a:ea typeface="Segoe UI" pitchFamily="34" charset="-122"/>
+                <a:cs typeface="Segoe UI" pitchFamily="34" charset="-120"/>
+              </a:rPr>
+              <a:t>Fichier de base de données retiré du dépôt Git</a:t>
+            </a:r>
+            <a:endParaRPr lang="en-US" sz="1400" dirty="0"/>
+          </a:p>
+        </p:txBody>
+      </p:sp>
+      <p:sp>
+        <p:nvSpPr>
+          <p:cNvPr id="12" name="Text 10"/>
+          <p:cNvSpPr/>
+          <p:nvPr/>
+        </p:nvSpPr>
+        <p:spPr>
+          <a:xfrm>
+            <a:off x="914400" y="3383280"/>
+            <a:ext cx="10332720" cy="594360"/>
+          </a:xfrm>
+          <a:prstGeom prst="rect">
+            <a:avLst/>
+          </a:prstGeom>
+          <a:noFill/>
+          <a:ln/>
+        </p:spPr>
+        <p:txBody>
+          <a:bodyPr wrap="square" rtlCol="0" anchor="ctr"/>
+          <a:lstStyle/>
+          <a:p>
+            <a:pPr indent="0" marL="0">
+              <a:lnSpc>
+                <a:spcPts val="1400"/>
+              </a:lnSpc>
+              <a:buNone/>
+            </a:pPr>
+            <a:r>
+              <a:rPr lang="en-US" sz="1100" dirty="0">
+                <a:solidFill>
+                  <a:srgbClr val="8A7C68"/>
+                </a:solidFill>
+                <a:latin typeface="Segoe UI" pitchFamily="34" charset="0"/>
+                <a:ea typeface="Segoe UI" pitchFamily="34" charset="-122"/>
+                <a:cs typeface="Segoe UI" pitchFamily="34" charset="-120"/>
+              </a:rPr>
+              <a:t>Un fichier contenant une copie complète de la base de données de développement, avec des mots de passe réels en clair, était suivi par Git depuis plusieurs mois. Retiré du suivi et exclu définitivement.</a:t>
+            </a:r>
+            <a:endParaRPr lang="en-US" sz="1100" dirty="0"/>
+          </a:p>
+        </p:txBody>
+      </p:sp>
+      <p:sp>
+        <p:nvSpPr>
+          <p:cNvPr id="13" name="Shape 11"/>
+          <p:cNvSpPr/>
+          <p:nvPr/>
+        </p:nvSpPr>
+        <p:spPr>
+          <a:xfrm>
+            <a:off x="640080" y="4160520"/>
+            <a:ext cx="10881360" cy="1097280"/>
+          </a:xfrm>
+          <a:prstGeom prst="roundRect">
+            <a:avLst>
+              <a:gd name="adj" fmla="val 5000"/>
+            </a:avLst>
+          </a:prstGeom>
+          <a:solidFill>
+            <a:srgbClr val="FFFFFF"/>
+          </a:solidFill>
+          <a:ln w="12700">
+            <a:solidFill>
+              <a:srgbClr val="E4DCCB"/>
+            </a:solidFill>
+            <a:prstDash val="solid"/>
+          </a:ln>
+        </p:spPr>
+      </p:sp>
+      <p:sp>
+        <p:nvSpPr>
+          <p:cNvPr id="14" name="Shape 12"/>
+          <p:cNvSpPr/>
+          <p:nvPr/>
+        </p:nvSpPr>
+        <p:spPr>
+          <a:xfrm>
+            <a:off x="640080" y="4160520"/>
+            <a:ext cx="54864" cy="1097280"/>
+          </a:xfrm>
+          <a:prstGeom prst="rect">
+            <a:avLst/>
+          </a:prstGeom>
+          <a:solidFill>
+            <a:srgbClr val="386641"/>
+          </a:solidFill>
+          <a:ln/>
+        </p:spPr>
+      </p:sp>
+      <p:sp>
+        <p:nvSpPr>
+          <p:cNvPr id="15" name="Text 13"/>
+          <p:cNvSpPr/>
+          <p:nvPr/>
+        </p:nvSpPr>
+        <p:spPr>
+          <a:xfrm>
+            <a:off x="914400" y="4270248"/>
+            <a:ext cx="10332720" cy="365760"/>
+          </a:xfrm>
+          <a:prstGeom prst="rect">
+            <a:avLst/>
+          </a:prstGeom>
+          <a:noFill/>
+          <a:ln/>
+        </p:spPr>
+        <p:txBody>
+          <a:bodyPr wrap="square" rtlCol="0" anchor="ctr"/>
+          <a:lstStyle/>
+          <a:p>
+            <a:pPr indent="0" marL="0">
+              <a:buNone/>
+            </a:pPr>
+            <a:r>
+              <a:rPr lang="en-US" sz="1400" b="1" dirty="0">
+                <a:solidFill>
+                  <a:srgbClr val="1B1F3B"/>
+                </a:solidFill>
+                <a:latin typeface="Segoe UI" pitchFamily="34" charset="0"/>
+                <a:ea typeface="Segoe UI" pitchFamily="34" charset="-122"/>
+                <a:cs typeface="Segoe UI" pitchFamily="34" charset="-120"/>
+              </a:rPr>
+              <a:t>Verrouillage de la base partagée écrit dans le script d'installation</a:t>
+            </a:r>
+            <a:endParaRPr lang="en-US" sz="1400" dirty="0"/>
+          </a:p>
+        </p:txBody>
+      </p:sp>
+      <p:sp>
+        <p:nvSpPr>
+          <p:cNvPr id="16" name="Text 14"/>
+          <p:cNvSpPr/>
+          <p:nvPr/>
+        </p:nvSpPr>
+        <p:spPr>
+          <a:xfrm>
+            <a:off x="914400" y="4617720"/>
+            <a:ext cx="10332720" cy="594360"/>
+          </a:xfrm>
+          <a:prstGeom prst="rect">
+            <a:avLst/>
+          </a:prstGeom>
+          <a:noFill/>
+          <a:ln/>
+        </p:spPr>
+        <p:txBody>
+          <a:bodyPr wrap="square" rtlCol="0" anchor="ctr"/>
+          <a:lstStyle/>
+          <a:p>
+            <a:pPr indent="0" marL="0">
+              <a:lnSpc>
+                <a:spcPts val="1400"/>
+              </a:lnSpc>
+              <a:buNone/>
+            </a:pPr>
+            <a:r>
+              <a:rPr lang="en-US" sz="1100" dirty="0">
+                <a:solidFill>
+                  <a:srgbClr val="8A7C68"/>
+                </a:solidFill>
+                <a:latin typeface="Segoe UI" pitchFamily="34" charset="0"/>
+                <a:ea typeface="Segoe UI" pitchFamily="34" charset="-122"/>
+                <a:cs typeface="Segoe UI" pitchFamily="34" charset="-120"/>
+              </a:rPr>
+              <a:t>La commande qui ferme complètement l'accès public à la table de données partagée a été ajoutée au script SQL du projet, prête à être exécutée dans le tableau de bord Supabase.</a:t>
+            </a:r>
+            <a:endParaRPr lang="en-US" sz="1100" dirty="0"/>
+          </a:p>
+        </p:txBody>
+      </p:sp>
+      <p:sp>
+        <p:nvSpPr>
+          <p:cNvPr id="17" name="Text 15"/>
+          <p:cNvSpPr/>
+          <p:nvPr/>
+        </p:nvSpPr>
+        <p:spPr>
+          <a:xfrm>
+            <a:off x="365760" y="6510528"/>
+            <a:ext cx="5486400" cy="274320"/>
+          </a:xfrm>
+          <a:prstGeom prst="rect">
+            <a:avLst/>
+          </a:prstGeom>
+          <a:noFill/>
+          <a:ln/>
+        </p:spPr>
+        <p:txBody>
+          <a:bodyPr wrap="square" rtlCol="0" anchor="ctr"/>
+          <a:lstStyle/>
+          <a:p>
+            <a:pPr indent="0" marL="0">
+              <a:buNone/>
+            </a:pPr>
+            <a:r>
+              <a:rPr lang="en-US" sz="900" dirty="0">
+                <a:solidFill>
+                  <a:srgbClr val="8A7C68"/>
+                </a:solidFill>
+                <a:latin typeface="Segoe UI" pitchFamily="34" charset="0"/>
+                <a:ea typeface="Segoe UI" pitchFamily="34" charset="-122"/>
+                <a:cs typeface="Segoe UI" pitchFamily="34" charset="-120"/>
+              </a:rPr>
+              <a:t>Kôji Web — Récapitulatif technique</a:t>
+            </a:r>
+            <a:endParaRPr lang="en-US" sz="900" dirty="0"/>
+          </a:p>
+        </p:txBody>
+      </p:sp>
+      <p:sp>
+        <p:nvSpPr>
+          <p:cNvPr id="18" name="Text 16"/>
+          <p:cNvSpPr/>
+          <p:nvPr/>
+        </p:nvSpPr>
+        <p:spPr>
+          <a:xfrm>
+            <a:off x="9601200" y="6510528"/>
+            <a:ext cx="2194560" cy="274320"/>
+          </a:xfrm>
+          <a:prstGeom prst="rect">
+            <a:avLst/>
+          </a:prstGeom>
+          <a:noFill/>
+          <a:ln/>
+        </p:spPr>
+        <p:txBody>
+          <a:bodyPr wrap="square" rtlCol="0" anchor="ctr"/>
+          <a:lstStyle/>
+          <a:p>
+            <a:pPr algn="r" indent="0" marL="0">
+              <a:buNone/>
+            </a:pPr>
+            <a:r>
+              <a:rPr lang="en-US" sz="900" dirty="0">
+                <a:solidFill>
+                  <a:srgbClr val="8A7C68"/>
+                </a:solidFill>
+                <a:latin typeface="Segoe UI" pitchFamily="34" charset="0"/>
+                <a:ea typeface="Segoe UI" pitchFamily="34" charset="-122"/>
+                <a:cs typeface="Segoe UI" pitchFamily="34" charset="-120"/>
+              </a:rPr>
+              <a:t>46</a:t>
+            </a:r>
+            <a:endParaRPr lang="en-US" sz="900" dirty="0"/>
+          </a:p>
+        </p:txBody>
+      </p:sp>
+    </p:spTree>
+  </p:cSld>
+  <p:clrMapOvr>
+    <a:masterClrMapping/>
+  </p:clrMapOvr>
+</p:sld>
+</file>
+
+<file path=ppt/slides/slide47.xml><?xml version="1.0" encoding="utf-8"?>
+<p:sld xmlns:a="http://schemas.openxmlformats.org/drawingml/2006/main" xmlns:r="http://schemas.openxmlformats.org/officeDocument/2006/relationships" xmlns:p="http://schemas.openxmlformats.org/presentationml/2006/main">
+  <p:cSld name="Slide 47">
     <p:bg>
       <p:bgPr>
         <a:solidFill>

--- a/docs/manager-recap/Recap-Koji-Manager.pptx
+++ b/docs/manager-recap/Recap-Koji-Manager.pptx
@@ -5022,7 +5022,7 @@
                 <a:ea typeface="Georgia" pitchFamily="34" charset="-122"/>
                 <a:cs typeface="Georgia" pitchFamily="34" charset="-120"/>
               </a:rPr>
-              <a:t>KÔJI</a:t>
+              <a:t>KOJI</a:t>
             </a:r>
             <a:endParaRPr lang="en-US" sz="2000" dirty="0"/>
           </a:p>
@@ -5061,7 +5061,7 @@
                 <a:ea typeface="Georgia" pitchFamily="34" charset="-122"/>
                 <a:cs typeface="Georgia" pitchFamily="34" charset="-120"/>
               </a:rPr>
-              <a:t>Kôji Web — Récapitulatif technique</a:t>
+              <a:t>Koji Web — Récapitulatif technique</a:t>
             </a:r>
             <a:endParaRPr lang="en-US" sz="4000" dirty="0"/>
           </a:p>
@@ -5217,7 +5217,7 @@
                 <a:ea typeface="Segoe UI" pitchFamily="34" charset="-122"/>
                 <a:cs typeface="Segoe UI" pitchFamily="34" charset="-120"/>
               </a:rPr>
-              <a:t>Préparé par : Équipe développement Kôji Web</a:t>
+              <a:t>Préparé par : Équipe développement Koji Web</a:t>
             </a:r>
             <a:endParaRPr lang="en-US" sz="1100" dirty="0"/>
           </a:p>
@@ -5516,7 +5516,7 @@
                 <a:ea typeface="Segoe UI" pitchFamily="34" charset="-122"/>
                 <a:cs typeface="Segoe UI" pitchFamily="34" charset="-120"/>
               </a:rPr>
-              <a:t>Kôji Web — Récapitulatif technique</a:t>
+              <a:t>Koji Web — Récapitulatif technique</a:t>
             </a:r>
             <a:endParaRPr lang="en-US" sz="900" dirty="0"/>
           </a:p>
@@ -6238,7 +6238,7 @@
                 <a:ea typeface="Segoe UI" pitchFamily="34" charset="-122"/>
                 <a:cs typeface="Segoe UI" pitchFamily="34" charset="-120"/>
               </a:rPr>
-              <a:t>Kôji Web — Récapitulatif technique</a:t>
+              <a:t>Koji Web — Récapitulatif technique</a:t>
             </a:r>
             <a:endParaRPr lang="en-US" sz="900" dirty="0"/>
           </a:p>
@@ -6704,7 +6704,7 @@
                 <a:ea typeface="Segoe UI" pitchFamily="34" charset="-122"/>
                 <a:cs typeface="Segoe UI" pitchFamily="34" charset="-120"/>
               </a:rPr>
-              <a:t>Kôji Web — Récapitulatif technique</a:t>
+              <a:t>Koji Web — Récapitulatif technique</a:t>
             </a:r>
             <a:endParaRPr lang="en-US" sz="900" dirty="0"/>
           </a:p>
@@ -7426,7 +7426,7 @@
                 <a:ea typeface="Segoe UI" pitchFamily="34" charset="-122"/>
                 <a:cs typeface="Segoe UI" pitchFamily="34" charset="-120"/>
               </a:rPr>
-              <a:t>Kôji Web — Récapitulatif technique</a:t>
+              <a:t>Koji Web — Récapitulatif technique</a:t>
             </a:r>
             <a:endParaRPr lang="en-US" sz="900" dirty="0"/>
           </a:p>
@@ -8148,7 +8148,7 @@
                 <a:ea typeface="Segoe UI" pitchFamily="34" charset="-122"/>
                 <a:cs typeface="Segoe UI" pitchFamily="34" charset="-120"/>
               </a:rPr>
-              <a:t>Kôji Web — Récapitulatif technique</a:t>
+              <a:t>Koji Web — Récapitulatif technique</a:t>
             </a:r>
             <a:endParaRPr lang="en-US" sz="900" dirty="0"/>
           </a:p>
@@ -8870,7 +8870,7 @@
                 <a:ea typeface="Segoe UI" pitchFamily="34" charset="-122"/>
                 <a:cs typeface="Segoe UI" pitchFamily="34" charset="-120"/>
               </a:rPr>
-              <a:t>Kôji Web — Récapitulatif technique</a:t>
+              <a:t>Koji Web — Récapitulatif technique</a:t>
             </a:r>
             <a:endParaRPr lang="en-US" sz="900" dirty="0"/>
           </a:p>
@@ -9208,7 +9208,7 @@
                 <a:ea typeface="Segoe UI" pitchFamily="34" charset="-122"/>
                 <a:cs typeface="Segoe UI" pitchFamily="34" charset="-120"/>
               </a:rPr>
-              <a:t>Kôji Web — Récapitulatif technique</a:t>
+              <a:t>Koji Web — Récapitulatif technique</a:t>
             </a:r>
             <a:endParaRPr lang="en-US" sz="900" dirty="0"/>
           </a:p>
@@ -9802,7 +9802,7 @@
                 <a:ea typeface="Segoe UI" pitchFamily="34" charset="-122"/>
                 <a:cs typeface="Segoe UI" pitchFamily="34" charset="-120"/>
               </a:rPr>
-              <a:t>Kôji Web — Récapitulatif technique</a:t>
+              <a:t>Koji Web — Récapitulatif technique</a:t>
             </a:r>
             <a:endParaRPr lang="en-US" sz="900" dirty="0"/>
           </a:p>
@@ -10524,7 +10524,7 @@
                 <a:ea typeface="Segoe UI" pitchFamily="34" charset="-122"/>
                 <a:cs typeface="Segoe UI" pitchFamily="34" charset="-120"/>
               </a:rPr>
-              <a:t>Kôji Web — Récapitulatif technique</a:t>
+              <a:t>Koji Web — Récapitulatif technique</a:t>
             </a:r>
             <a:endParaRPr lang="en-US" sz="900" dirty="0"/>
           </a:p>
@@ -10862,7 +10862,7 @@
                 <a:ea typeface="Segoe UI" pitchFamily="34" charset="-122"/>
                 <a:cs typeface="Segoe UI" pitchFamily="34" charset="-120"/>
               </a:rPr>
-              <a:t>Kôji Web — Récapitulatif technique</a:t>
+              <a:t>Koji Web — Récapitulatif technique</a:t>
             </a:r>
             <a:endParaRPr lang="en-US" sz="900" dirty="0"/>
           </a:p>
@@ -11627,7 +11627,7 @@
                 <a:ea typeface="Segoe UI" pitchFamily="34" charset="-122"/>
                 <a:cs typeface="Segoe UI" pitchFamily="34" charset="-120"/>
               </a:rPr>
-              <a:t>Kôji Web — Récapitulatif technique</a:t>
+              <a:t>Koji Web — Récapitulatif technique</a:t>
             </a:r>
             <a:endParaRPr lang="en-US" sz="900" dirty="0"/>
           </a:p>
@@ -11874,7 +11874,7 @@
                 <a:ea typeface="Segoe UI" pitchFamily="34" charset="-122"/>
                 <a:cs typeface="Segoe UI" pitchFamily="34" charset="-120"/>
               </a:rPr>
-              <a:t>Kôji Web — Récapitulatif technique</a:t>
+              <a:t>Koji Web — Récapitulatif technique</a:t>
             </a:r>
             <a:endParaRPr lang="en-US" sz="900" dirty="0"/>
           </a:p>
@@ -12340,7 +12340,7 @@
                 <a:ea typeface="Segoe UI" pitchFamily="34" charset="-122"/>
                 <a:cs typeface="Segoe UI" pitchFamily="34" charset="-120"/>
               </a:rPr>
-              <a:t>Kôji Web — Récapitulatif technique</a:t>
+              <a:t>Koji Web — Récapitulatif technique</a:t>
             </a:r>
             <a:endParaRPr lang="en-US" sz="900" dirty="0"/>
           </a:p>
@@ -13062,7 +13062,7 @@
                 <a:ea typeface="Segoe UI" pitchFamily="34" charset="-122"/>
                 <a:cs typeface="Segoe UI" pitchFamily="34" charset="-120"/>
               </a:rPr>
-              <a:t>Kôji Web — Récapitulatif technique</a:t>
+              <a:t>Koji Web — Récapitulatif technique</a:t>
             </a:r>
             <a:endParaRPr lang="en-US" sz="900" dirty="0"/>
           </a:p>
@@ -13784,7 +13784,7 @@
                 <a:ea typeface="Segoe UI" pitchFamily="34" charset="-122"/>
                 <a:cs typeface="Segoe UI" pitchFamily="34" charset="-120"/>
               </a:rPr>
-              <a:t>Kôji Web — Récapitulatif technique</a:t>
+              <a:t>Koji Web — Récapitulatif technique</a:t>
             </a:r>
             <a:endParaRPr lang="en-US" sz="900" dirty="0"/>
           </a:p>
@@ -14211,7 +14211,7 @@
                 <a:ea typeface="Segoe UI" pitchFamily="34" charset="-122"/>
                 <a:cs typeface="Segoe UI" pitchFamily="34" charset="-120"/>
               </a:rPr>
-              <a:t>Nouvelle action pour marquer un devis comme accepté par le client (statut 'Signé') directement depuis l'éditeur, sans passer par Kôji Signature. Une fenêtre demande le motif — acceptation verbale ou acompte versé — avec une précision libre optionnelle (montant, date...). Le devis devient alors immédiatement éligible à la facturation et débloque l'accès normal au chantier lié, exactement comme une signature électronique. Un repère (verbal / acompte) distingue ce cas d'une vraie signature dans la liste des devis.</a:t>
+              <a:t>Nouvelle action pour marquer un devis comme accepté par le client (statut 'Signé') directement depuis l'éditeur, sans passer par Koji Signature. Une fenêtre demande le motif — acceptation verbale ou acompte versé — avec une précision libre optionnelle (montant, date...). Le devis devient alors immédiatement éligible à la facturation et débloque l'accès normal au chantier lié, exactement comme une signature électronique. Un repère (verbal / acompte) distingue ce cas d'une vraie signature dans la liste des devis.</a:t>
             </a:r>
             <a:endParaRPr lang="en-US" sz="1100" dirty="0"/>
           </a:p>
@@ -14378,7 +14378,7 @@
                 <a:ea typeface="Segoe UI" pitchFamily="34" charset="-122"/>
                 <a:cs typeface="Segoe UI" pitchFamily="34" charset="-120"/>
               </a:rPr>
-              <a:t>Kôji Web — Récapitulatif technique</a:t>
+              <a:t>Koji Web — Récapitulatif technique</a:t>
             </a:r>
             <a:endParaRPr lang="en-US" sz="900" dirty="0"/>
           </a:p>
@@ -14844,7 +14844,7 @@
                 <a:ea typeface="Segoe UI" pitchFamily="34" charset="-122"/>
                 <a:cs typeface="Segoe UI" pitchFamily="34" charset="-120"/>
               </a:rPr>
-              <a:t>Kôji Web — Récapitulatif technique</a:t>
+              <a:t>Koji Web — Récapitulatif technique</a:t>
             </a:r>
             <a:endParaRPr lang="en-US" sz="900" dirty="0"/>
           </a:p>
@@ -15438,7 +15438,7 @@
                 <a:ea typeface="Segoe UI" pitchFamily="34" charset="-122"/>
                 <a:cs typeface="Segoe UI" pitchFamily="34" charset="-120"/>
               </a:rPr>
-              <a:t>Kôji Web — Récapitulatif technique</a:t>
+              <a:t>Koji Web — Récapitulatif technique</a:t>
             </a:r>
             <a:endParaRPr lang="en-US" sz="900" dirty="0"/>
           </a:p>
@@ -15776,7 +15776,7 @@
                 <a:ea typeface="Segoe UI" pitchFamily="34" charset="-122"/>
                 <a:cs typeface="Segoe UI" pitchFamily="34" charset="-120"/>
               </a:rPr>
-              <a:t>Kôji Web — Récapitulatif technique</a:t>
+              <a:t>Koji Web — Récapitulatif technique</a:t>
             </a:r>
             <a:endParaRPr lang="en-US" sz="900" dirty="0"/>
           </a:p>
@@ -16075,7 +16075,7 @@
                 <a:ea typeface="Segoe UI" pitchFamily="34" charset="-122"/>
                 <a:cs typeface="Segoe UI" pitchFamily="34" charset="-120"/>
               </a:rPr>
-              <a:t>Le client qui signe un devis n'a pas de session Kôji : une clé technique dédiée (service_role) permet de retrouver et mettre à jour son devis directement dans la base partagée.</a:t>
+              <a:t>Le client qui signe un devis n'a pas de session Koji : une clé technique dédiée (service_role) permet de retrouver et mettre à jour son devis directement dans la base partagée.</a:t>
             </a:r>
             <a:endParaRPr lang="en-US" sz="1100" dirty="0"/>
           </a:p>
@@ -16370,7 +16370,7 @@
                 <a:ea typeface="Segoe UI" pitchFamily="34" charset="-122"/>
                 <a:cs typeface="Segoe UI" pitchFamily="34" charset="-120"/>
               </a:rPr>
-              <a:t>Kôji Web — Récapitulatif technique</a:t>
+              <a:t>Koji Web — Récapitulatif technique</a:t>
             </a:r>
             <a:endParaRPr lang="en-US" sz="900" dirty="0"/>
           </a:p>
@@ -16836,7 +16836,7 @@
                 <a:ea typeface="Segoe UI" pitchFamily="34" charset="-122"/>
                 <a:cs typeface="Segoe UI" pitchFamily="34" charset="-120"/>
               </a:rPr>
-              <a:t>Kôji Web — Récapitulatif technique</a:t>
+              <a:t>Koji Web — Récapitulatif technique</a:t>
             </a:r>
             <a:endParaRPr lang="en-US" sz="900" dirty="0"/>
           </a:p>
@@ -17083,7 +17083,7 @@
                 <a:ea typeface="Segoe UI" pitchFamily="34" charset="-122"/>
                 <a:cs typeface="Segoe UI" pitchFamily="34" charset="-120"/>
               </a:rPr>
-              <a:t>Kôji Web — Récapitulatif technique</a:t>
+              <a:t>Koji Web — Récapitulatif technique</a:t>
             </a:r>
             <a:endParaRPr lang="en-US" sz="900" dirty="0"/>
           </a:p>
@@ -17805,7 +17805,7 @@
                 <a:ea typeface="Segoe UI" pitchFamily="34" charset="-122"/>
                 <a:cs typeface="Segoe UI" pitchFamily="34" charset="-120"/>
               </a:rPr>
-              <a:t>Kôji Web — Récapitulatif technique</a:t>
+              <a:t>Koji Web — Récapitulatif technique</a:t>
             </a:r>
             <a:endParaRPr lang="en-US" sz="900" dirty="0"/>
           </a:p>
@@ -18271,7 +18271,7 @@
                 <a:ea typeface="Segoe UI" pitchFamily="34" charset="-122"/>
                 <a:cs typeface="Segoe UI" pitchFamily="34" charset="-120"/>
               </a:rPr>
-              <a:t>Kôji Web — Récapitulatif technique</a:t>
+              <a:t>Koji Web — Récapitulatif technique</a:t>
             </a:r>
             <a:endParaRPr lang="en-US" sz="900" dirty="0"/>
           </a:p>
@@ -18609,7 +18609,7 @@
                 <a:ea typeface="Segoe UI" pitchFamily="34" charset="-122"/>
                 <a:cs typeface="Segoe UI" pitchFamily="34" charset="-120"/>
               </a:rPr>
-              <a:t>Kôji Web — Récapitulatif technique</a:t>
+              <a:t>Koji Web — Récapitulatif technique</a:t>
             </a:r>
             <a:endParaRPr lang="en-US" sz="900" dirty="0"/>
           </a:p>
@@ -19331,7 +19331,7 @@
                 <a:ea typeface="Segoe UI" pitchFamily="34" charset="-122"/>
                 <a:cs typeface="Segoe UI" pitchFamily="34" charset="-120"/>
               </a:rPr>
-              <a:t>Kôji Web — Récapitulatif technique</a:t>
+              <a:t>Koji Web — Récapitulatif technique</a:t>
             </a:r>
             <a:endParaRPr lang="en-US" sz="900" dirty="0"/>
           </a:p>
@@ -20053,7 +20053,7 @@
                 <a:ea typeface="Segoe UI" pitchFamily="34" charset="-122"/>
                 <a:cs typeface="Segoe UI" pitchFamily="34" charset="-120"/>
               </a:rPr>
-              <a:t>Kôji Web — Récapitulatif technique</a:t>
+              <a:t>Koji Web — Récapitulatif technique</a:t>
             </a:r>
             <a:endParaRPr lang="en-US" sz="900" dirty="0"/>
           </a:p>
@@ -20519,7 +20519,7 @@
                 <a:ea typeface="Segoe UI" pitchFamily="34" charset="-122"/>
                 <a:cs typeface="Segoe UI" pitchFamily="34" charset="-120"/>
               </a:rPr>
-              <a:t>Kôji Web — Récapitulatif technique</a:t>
+              <a:t>Koji Web — Récapitulatif technique</a:t>
             </a:r>
             <a:endParaRPr lang="en-US" sz="900" dirty="0"/>
           </a:p>
@@ -20857,7 +20857,7 @@
                 <a:ea typeface="Segoe UI" pitchFamily="34" charset="-122"/>
                 <a:cs typeface="Segoe UI" pitchFamily="34" charset="-120"/>
               </a:rPr>
-              <a:t>Kôji Web — Récapitulatif technique</a:t>
+              <a:t>Koji Web — Récapitulatif technique</a:t>
             </a:r>
             <a:endParaRPr lang="en-US" sz="900" dirty="0"/>
           </a:p>
@@ -21195,7 +21195,7 @@
                 <a:ea typeface="Segoe UI" pitchFamily="34" charset="-122"/>
                 <a:cs typeface="Segoe UI" pitchFamily="34" charset="-120"/>
               </a:rPr>
-              <a:t>Kôji Web — Récapitulatif technique</a:t>
+              <a:t>Koji Web — Récapitulatif technique</a:t>
             </a:r>
             <a:endParaRPr lang="en-US" sz="900" dirty="0"/>
           </a:p>
@@ -21533,7 +21533,7 @@
                 <a:ea typeface="Segoe UI" pitchFamily="34" charset="-122"/>
                 <a:cs typeface="Segoe UI" pitchFamily="34" charset="-120"/>
               </a:rPr>
-              <a:t>Kôji Web — Récapitulatif technique</a:t>
+              <a:t>Koji Web — Récapitulatif technique</a:t>
             </a:r>
             <a:endParaRPr lang="en-US" sz="900" dirty="0"/>
           </a:p>
@@ -21780,7 +21780,7 @@
                 <a:ea typeface="Segoe UI" pitchFamily="34" charset="-122"/>
                 <a:cs typeface="Segoe UI" pitchFamily="34" charset="